--- a/Slides/FPforScientist.pptx
+++ b/Slides/FPforScientist.pptx
@@ -6,7 +6,9 @@
   </p:sldMasterIdLst>
   <p:sldIdLst>
     <p:sldId id="257" r:id="rId2"/>
-    <p:sldId id="256" r:id="rId3"/>
+    <p:sldId id="258" r:id="rId3"/>
+    <p:sldId id="259" r:id="rId4"/>
+    <p:sldId id="256" r:id="rId5"/>
   </p:sldIdLst>
   <p:sldSz cx="12192000" cy="6858000"/>
   <p:notesSz cx="6858000" cy="9144000"/>
@@ -3737,10 +3739,184 @@
       </p:grpSpPr>
       <p:sp>
         <p:nvSpPr>
-          <p:cNvPr id="4" name="Title 3">
-            <a:extLst>
-              <a:ext uri="{FF2B5EF4-FFF2-40B4-BE49-F238E27FC236}">
-                <a16:creationId xmlns:a16="http://schemas.microsoft.com/office/drawing/2014/main" id="{F5A3A9D8-867E-6417-96D4-7E682A564981}"/>
+          <p:cNvPr id="2" name="Title 1">
+            <a:extLst>
+              <a:ext uri="{FF2B5EF4-FFF2-40B4-BE49-F238E27FC236}">
+                <a16:creationId xmlns:a16="http://schemas.microsoft.com/office/drawing/2014/main" id="{217268F8-85E7-DA38-B02A-4ADDB868CDCA}"/>
+              </a:ext>
+            </a:extLst>
+          </p:cNvPr>
+          <p:cNvSpPr>
+            <a:spLocks noGrp="1"/>
+          </p:cNvSpPr>
+          <p:nvPr>
+            <p:ph type="title"/>
+          </p:nvPr>
+        </p:nvSpPr>
+        <p:spPr/>
+        <p:txBody>
+          <a:bodyPr>
+            <a:normAutofit/>
+          </a:bodyPr>
+          <a:lstStyle/>
+          <a:p>
+            <a:r>
+              <a:rPr lang="en-US" dirty="0"/>
+              <a:t>What’s a Floating Point?</a:t>
+            </a:r>
+            <a:br>
+              <a:rPr lang="en-US" dirty="0"/>
+            </a:br>
+            <a:r>
+              <a:rPr lang="en-US" sz="1600" dirty="0">
+                <a:hlinkClick r:id="rId2"/>
+              </a:rPr>
+              <a:t>https://en.wikipedia.org/wiki/Floating-point_arithmetic</a:t>
+            </a:r>
+            <a:endParaRPr lang="en-US" dirty="0"/>
+          </a:p>
+        </p:txBody>
+      </p:sp>
+      <p:sp>
+        <p:nvSpPr>
+          <p:cNvPr id="3" name="Content Placeholder 2">
+            <a:extLst>
+              <a:ext uri="{FF2B5EF4-FFF2-40B4-BE49-F238E27FC236}">
+                <a16:creationId xmlns:a16="http://schemas.microsoft.com/office/drawing/2014/main" id="{72FFB85D-0262-522C-7650-5A4514746147}"/>
+              </a:ext>
+            </a:extLst>
+          </p:cNvPr>
+          <p:cNvSpPr>
+            <a:spLocks noGrp="1"/>
+          </p:cNvSpPr>
+          <p:nvPr>
+            <p:ph idx="1"/>
+          </p:nvPr>
+        </p:nvSpPr>
+        <p:spPr/>
+        <p:txBody>
+          <a:bodyPr/>
+          <a:lstStyle/>
+          <a:p>
+            <a:r>
+              <a:rPr lang="en-US" dirty="0"/>
+              <a:t>Science is based on Measurements</a:t>
+            </a:r>
+          </a:p>
+          <a:p>
+            <a:r>
+              <a:rPr lang="en-US" dirty="0"/>
+              <a:t>The result of a Measurement is a Rational Number</a:t>
+            </a:r>
+          </a:p>
+          <a:p>
+            <a:r>
+              <a:rPr lang="en-US" dirty="0"/>
+              <a:t>“Floating Point” is a way to represent Rational Numbers by a fixed number of digits (precision) multiplied by a “base” with an exponent</a:t>
+            </a:r>
+          </a:p>
+          <a:p>
+            <a:pPr lvl="1"/>
+            <a:r>
+              <a:rPr lang="en-US" dirty="0"/>
+              <a:t>A form of “Scientific Notation”</a:t>
+            </a:r>
+          </a:p>
+          <a:p>
+            <a:pPr marL="0" indent="0">
+              <a:buNone/>
+            </a:pPr>
+            <a:endParaRPr lang="en-US" dirty="0"/>
+          </a:p>
+          <a:p>
+            <a:pPr marL="0" indent="0">
+              <a:buNone/>
+            </a:pPr>
+            <a:r>
+              <a:rPr lang="en-US" dirty="0"/>
+              <a:t>31ᐧ10</a:t>
+            </a:r>
+            <a:r>
+              <a:rPr lang="en-US" baseline="30000" dirty="0"/>
+              <a:t>-1</a:t>
+            </a:r>
+            <a:r>
+              <a:rPr lang="en-US" dirty="0"/>
+              <a:t> is a FP in base 10 with “precision” 2   (printed in decimal)</a:t>
+            </a:r>
+          </a:p>
+          <a:p>
+            <a:pPr marL="0" indent="0">
+              <a:buNone/>
+            </a:pPr>
+            <a:r>
+              <a:rPr lang="cs-CZ" altLang="x-none" dirty="0"/>
+              <a:t>1.921fb6</a:t>
+            </a:r>
+            <a:r>
+              <a:rPr lang="en-US" dirty="0" err="1"/>
+              <a:t>ᐧ</a:t>
+            </a:r>
+            <a:r>
+              <a:rPr lang="cs-CZ" altLang="x-none" dirty="0"/>
+              <a:t>2</a:t>
+            </a:r>
+            <a:r>
+              <a:rPr lang="cs-CZ" altLang="x-none" baseline="30000" dirty="0"/>
+              <a:t>+1 </a:t>
+            </a:r>
+            <a:r>
+              <a:rPr lang="en-US" dirty="0"/>
+              <a:t>is a FP in base 2 with precision 24   (printed in </a:t>
+            </a:r>
+            <a:r>
+              <a:rPr lang="en-US" dirty="0" err="1"/>
+              <a:t>exadecimal</a:t>
+            </a:r>
+            <a:r>
+              <a:rPr lang="en-US" dirty="0"/>
+              <a:t>)</a:t>
+            </a:r>
+            <a:endParaRPr lang="en-US" baseline="30000" dirty="0"/>
+          </a:p>
+        </p:txBody>
+      </p:sp>
+    </p:spTree>
+    <p:extLst>
+      <p:ext uri="{BB962C8B-B14F-4D97-AF65-F5344CB8AC3E}">
+        <p14:creationId xmlns:p14="http://schemas.microsoft.com/office/powerpoint/2010/main" val="3635151351"/>
+      </p:ext>
+    </p:extLst>
+  </p:cSld>
+  <p:clrMapOvr>
+    <a:masterClrMapping/>
+  </p:clrMapOvr>
+</p:sld>
+</file>
+
+<file path=ppt/slides/slide3.xml><?xml version="1.0" encoding="utf-8"?>
+<p:sld xmlns:a="http://schemas.openxmlformats.org/drawingml/2006/main" xmlns:r="http://schemas.openxmlformats.org/officeDocument/2006/relationships" xmlns:p="http://schemas.openxmlformats.org/presentationml/2006/main">
+  <p:cSld>
+    <p:spTree>
+      <p:nvGrpSpPr>
+        <p:cNvPr id="1" name=""/>
+        <p:cNvGrpSpPr/>
+        <p:nvPr/>
+      </p:nvGrpSpPr>
+      <p:grpSpPr>
+        <a:xfrm>
+          <a:off x="0" y="0"/>
+          <a:ext cx="0" cy="0"/>
+          <a:chOff x="0" y="0"/>
+          <a:chExt cx="0" cy="0"/>
+        </a:xfrm>
+      </p:grpSpPr>
+      <p:sp>
+        <p:nvSpPr>
+          <p:cNvPr id="2" name="Title 1">
+            <a:extLst>
+              <a:ext uri="{FF2B5EF4-FFF2-40B4-BE49-F238E27FC236}">
+                <a16:creationId xmlns:a16="http://schemas.microsoft.com/office/drawing/2014/main" id="{AD30F8CC-3C21-4921-6714-6705D02DF9EA}"/>
               </a:ext>
             </a:extLst>
           </p:cNvPr>
@@ -3756,16 +3932,27 @@
           <a:bodyPr/>
           <a:lstStyle/>
           <a:p>
-            <a:endParaRPr lang="en-US"/>
+            <a:r>
+              <a:rPr lang="en-US" dirty="0"/>
+              <a:t>Some Trivial </a:t>
+            </a:r>
+            <a:r>
+              <a:rPr lang="en-US" dirty="0" err="1"/>
+              <a:t>proprerties</a:t>
+            </a:r>
+            <a:r>
+              <a:rPr lang="en-US" dirty="0"/>
+              <a:t> of FP</a:t>
+            </a:r>
           </a:p>
         </p:txBody>
       </p:sp>
       <p:sp>
         <p:nvSpPr>
-          <p:cNvPr id="5" name="Content Placeholder 4">
-            <a:extLst>
-              <a:ext uri="{FF2B5EF4-FFF2-40B4-BE49-F238E27FC236}">
-                <a16:creationId xmlns:a16="http://schemas.microsoft.com/office/drawing/2014/main" id="{5A207A04-A816-749B-D772-9ADF868CFE39}"/>
+          <p:cNvPr id="3" name="Content Placeholder 2">
+            <a:extLst>
+              <a:ext uri="{FF2B5EF4-FFF2-40B4-BE49-F238E27FC236}">
+                <a16:creationId xmlns:a16="http://schemas.microsoft.com/office/drawing/2014/main" id="{B8EFCA01-9C0D-C660-E004-78866BE1C22E}"/>
               </a:ext>
             </a:extLst>
           </p:cNvPr>
@@ -3781,7 +3968,2912 @@
           <a:bodyPr/>
           <a:lstStyle/>
           <a:p>
-            <a:endParaRPr lang="en-US"/>
+            <a:r>
+              <a:rPr lang="en-US" dirty="0"/>
+              <a:t>Each FP has a previous and a next</a:t>
+            </a:r>
+          </a:p>
+          <a:p>
+            <a:pPr lvl="1"/>
+            <a:r>
+              <a:rPr lang="en-US" dirty="0"/>
+              <a:t>Previous of 31ᐧ10</a:t>
+            </a:r>
+            <a:r>
+              <a:rPr lang="en-US" baseline="30000" dirty="0"/>
+              <a:t>-1 </a:t>
+            </a:r>
+            <a:r>
+              <a:rPr lang="en-US" dirty="0"/>
+              <a:t>is</a:t>
+            </a:r>
+            <a:r>
+              <a:rPr lang="en-US" baseline="30000" dirty="0"/>
+              <a:t> </a:t>
+            </a:r>
+            <a:r>
+              <a:rPr lang="en-US" dirty="0"/>
+              <a:t>30ᐧ10</a:t>
+            </a:r>
+            <a:r>
+              <a:rPr lang="en-US" baseline="30000" dirty="0"/>
+              <a:t>-1</a:t>
+            </a:r>
+            <a:r>
+              <a:rPr lang="en-US" dirty="0"/>
+              <a:t>, next is 32ᐧ10</a:t>
+            </a:r>
+            <a:r>
+              <a:rPr lang="en-US" baseline="30000" dirty="0"/>
+              <a:t>-1</a:t>
+            </a:r>
+          </a:p>
+          <a:p>
+            <a:pPr lvl="1"/>
+            <a:r>
+              <a:rPr lang="en-US" dirty="0"/>
+              <a:t>Previous of </a:t>
+            </a:r>
+            <a:r>
+              <a:rPr lang="cs-CZ" altLang="x-none" dirty="0"/>
+              <a:t>1.921fb6</a:t>
+            </a:r>
+            <a:r>
+              <a:rPr lang="en-US" dirty="0" err="1"/>
+              <a:t>ᐧ</a:t>
+            </a:r>
+            <a:r>
+              <a:rPr lang="cs-CZ" altLang="x-none" dirty="0"/>
+              <a:t>2</a:t>
+            </a:r>
+            <a:r>
+              <a:rPr lang="cs-CZ" altLang="x-none" baseline="30000" dirty="0"/>
+              <a:t>+1  </a:t>
+            </a:r>
+            <a:r>
+              <a:rPr lang="cs-CZ" altLang="x-none" dirty="0" err="1"/>
+              <a:t>is</a:t>
+            </a:r>
+            <a:r>
+              <a:rPr lang="cs-CZ" altLang="x-none" dirty="0"/>
+              <a:t> 1.921fb4</a:t>
+            </a:r>
+            <a:r>
+              <a:rPr lang="en-US" dirty="0" err="1"/>
+              <a:t>ᐧ</a:t>
+            </a:r>
+            <a:r>
+              <a:rPr lang="cs-CZ" altLang="x-none" dirty="0"/>
+              <a:t>2</a:t>
+            </a:r>
+            <a:r>
+              <a:rPr lang="cs-CZ" altLang="x-none" baseline="30000" dirty="0"/>
+              <a:t>+1</a:t>
+            </a:r>
+            <a:r>
+              <a:rPr lang="cs-CZ" altLang="x-none" dirty="0"/>
+              <a:t>, </a:t>
+            </a:r>
+            <a:r>
+              <a:rPr lang="cs-CZ" altLang="x-none" dirty="0" err="1"/>
+              <a:t>next</a:t>
+            </a:r>
+            <a:r>
+              <a:rPr lang="cs-CZ" altLang="x-none" dirty="0"/>
+              <a:t> </a:t>
+            </a:r>
+            <a:r>
+              <a:rPr lang="cs-CZ" altLang="x-none" dirty="0" err="1"/>
+              <a:t>is</a:t>
+            </a:r>
+            <a:r>
+              <a:rPr lang="cs-CZ" altLang="x-none" dirty="0"/>
+              <a:t> 1.921fb8</a:t>
+            </a:r>
+            <a:r>
+              <a:rPr lang="en-US" dirty="0" err="1"/>
+              <a:t>ᐧ</a:t>
+            </a:r>
+            <a:r>
+              <a:rPr lang="cs-CZ" altLang="x-none" dirty="0"/>
+              <a:t>2</a:t>
+            </a:r>
+            <a:r>
+              <a:rPr lang="cs-CZ" altLang="x-none" baseline="30000" dirty="0"/>
+              <a:t>+1</a:t>
+            </a:r>
+            <a:r>
+              <a:rPr lang="cs-CZ" altLang="x-none" dirty="0"/>
+              <a:t> </a:t>
+            </a:r>
+          </a:p>
+          <a:p>
+            <a:pPr lvl="1"/>
+            <a:r>
+              <a:rPr lang="cs-CZ" altLang="x-none" dirty="0" err="1"/>
+              <a:t>The</a:t>
+            </a:r>
+            <a:r>
+              <a:rPr lang="cs-CZ" altLang="x-none" dirty="0"/>
+              <a:t> </a:t>
+            </a:r>
+            <a:r>
+              <a:rPr lang="cs-CZ" altLang="x-none" dirty="0" err="1"/>
+              <a:t>difference</a:t>
+            </a:r>
+            <a:r>
+              <a:rPr lang="cs-CZ" altLang="x-none" dirty="0"/>
+              <a:t> </a:t>
+            </a:r>
+            <a:r>
+              <a:rPr lang="cs-CZ" altLang="x-none" dirty="0" err="1"/>
+              <a:t>between</a:t>
+            </a:r>
+            <a:r>
+              <a:rPr lang="cs-CZ" altLang="x-none" dirty="0"/>
+              <a:t> </a:t>
+            </a:r>
+            <a:r>
+              <a:rPr lang="cs-CZ" altLang="x-none" dirty="0" err="1"/>
+              <a:t>two</a:t>
+            </a:r>
+            <a:r>
+              <a:rPr lang="cs-CZ" altLang="x-none" dirty="0"/>
+              <a:t> </a:t>
+            </a:r>
+            <a:r>
+              <a:rPr lang="cs-CZ" altLang="x-none" dirty="0" err="1"/>
+              <a:t>consecutive</a:t>
+            </a:r>
+            <a:r>
+              <a:rPr lang="cs-CZ" altLang="x-none" dirty="0"/>
+              <a:t> FP </a:t>
+            </a:r>
+            <a:r>
+              <a:rPr lang="cs-CZ" altLang="x-none" dirty="0" err="1"/>
+              <a:t>is</a:t>
+            </a:r>
+            <a:r>
+              <a:rPr lang="cs-CZ" altLang="x-none" dirty="0"/>
+              <a:t> </a:t>
+            </a:r>
+            <a:r>
+              <a:rPr lang="cs-CZ" altLang="x-none" dirty="0" err="1"/>
+              <a:t>called</a:t>
+            </a:r>
+            <a:r>
+              <a:rPr lang="cs-CZ" altLang="x-none" dirty="0"/>
+              <a:t> ULP (unit in last place)</a:t>
+            </a:r>
+          </a:p>
+          <a:p>
+            <a:r>
+              <a:rPr lang="cs-CZ" altLang="x-none" dirty="0" err="1"/>
+              <a:t>For</a:t>
+            </a:r>
+            <a:r>
+              <a:rPr lang="cs-CZ" altLang="x-none" dirty="0"/>
+              <a:t> </a:t>
+            </a:r>
+            <a:r>
+              <a:rPr lang="cs-CZ" altLang="x-none" dirty="0" err="1"/>
+              <a:t>each</a:t>
+            </a:r>
+            <a:r>
+              <a:rPr lang="cs-CZ" altLang="x-none" dirty="0"/>
+              <a:t> </a:t>
+            </a:r>
+            <a:r>
+              <a:rPr lang="cs-CZ" altLang="x-none" dirty="0" err="1"/>
+              <a:t>value</a:t>
+            </a:r>
+            <a:r>
+              <a:rPr lang="cs-CZ" altLang="x-none" dirty="0"/>
+              <a:t> </a:t>
+            </a:r>
+            <a:r>
+              <a:rPr lang="cs-CZ" altLang="x-none" dirty="0" err="1"/>
+              <a:t>of</a:t>
+            </a:r>
+            <a:r>
+              <a:rPr lang="cs-CZ" altLang="x-none" dirty="0"/>
+              <a:t> </a:t>
+            </a:r>
+            <a:r>
+              <a:rPr lang="cs-CZ" altLang="x-none" dirty="0" err="1"/>
+              <a:t>the</a:t>
+            </a:r>
+            <a:r>
+              <a:rPr lang="cs-CZ" altLang="x-none" dirty="0"/>
+              <a:t> exponent </a:t>
+            </a:r>
+            <a:r>
+              <a:rPr lang="cs-CZ" altLang="x-none" dirty="0" err="1"/>
+              <a:t>there</a:t>
+            </a:r>
+            <a:r>
+              <a:rPr lang="cs-CZ" altLang="x-none" dirty="0"/>
+              <a:t> </a:t>
+            </a:r>
+            <a:r>
+              <a:rPr lang="cs-CZ" altLang="x-none" dirty="0" err="1"/>
+              <a:t>is</a:t>
+            </a:r>
+            <a:r>
+              <a:rPr lang="cs-CZ" altLang="x-none" dirty="0"/>
+              <a:t> a </a:t>
+            </a:r>
+            <a:r>
+              <a:rPr lang="cs-CZ" altLang="x-none" dirty="0" err="1"/>
+              <a:t>finite</a:t>
+            </a:r>
+            <a:r>
+              <a:rPr lang="cs-CZ" altLang="x-none" dirty="0"/>
+              <a:t> </a:t>
+            </a:r>
+            <a:r>
+              <a:rPr lang="cs-CZ" altLang="x-none" dirty="0" err="1"/>
+              <a:t>number</a:t>
+            </a:r>
+            <a:r>
+              <a:rPr lang="cs-CZ" altLang="x-none" dirty="0"/>
+              <a:t> </a:t>
+            </a:r>
+            <a:r>
+              <a:rPr lang="cs-CZ" altLang="x-none" dirty="0" err="1"/>
+              <a:t>of</a:t>
+            </a:r>
+            <a:r>
+              <a:rPr lang="cs-CZ" altLang="x-none" dirty="0"/>
+              <a:t> FP</a:t>
+            </a:r>
+          </a:p>
+          <a:p>
+            <a:pPr lvl="1"/>
+            <a:r>
+              <a:rPr lang="cs-CZ" altLang="x-none" dirty="0"/>
+              <a:t> 10</a:t>
+            </a:r>
+            <a:r>
+              <a:rPr lang="cs-CZ" altLang="x-none" baseline="30000" dirty="0"/>
+              <a:t> </a:t>
+            </a:r>
+            <a:r>
+              <a:rPr lang="en-US" dirty="0"/>
+              <a:t>ᐧ10</a:t>
+            </a:r>
+            <a:r>
+              <a:rPr lang="en-US" baseline="30000" dirty="0"/>
+              <a:t>e</a:t>
+            </a:r>
+            <a:r>
+              <a:rPr lang="en-US" dirty="0"/>
+              <a:t> - </a:t>
+            </a:r>
+            <a:r>
+              <a:rPr lang="cs-CZ" dirty="0"/>
+              <a:t>99</a:t>
+            </a:r>
+            <a:r>
+              <a:rPr lang="cs-CZ" altLang="x-none" baseline="30000" dirty="0"/>
+              <a:t> </a:t>
+            </a:r>
+            <a:r>
+              <a:rPr lang="en-US" dirty="0"/>
+              <a:t>ᐧ10</a:t>
+            </a:r>
+            <a:r>
+              <a:rPr lang="en-US" baseline="30000" dirty="0"/>
+              <a:t>e</a:t>
+            </a:r>
+            <a:r>
+              <a:rPr lang="en-US" dirty="0"/>
+              <a:t> </a:t>
+            </a:r>
+          </a:p>
+          <a:p>
+            <a:pPr lvl="1"/>
+            <a:r>
+              <a:rPr lang="en-US" dirty="0"/>
+              <a:t>1.000000ᐧ</a:t>
+            </a:r>
+            <a:r>
+              <a:rPr lang="cs-CZ" altLang="x-none" dirty="0"/>
+              <a:t>2</a:t>
+            </a:r>
+            <a:r>
+              <a:rPr lang="en-US" baseline="30000" dirty="0"/>
+              <a:t>e </a:t>
+            </a:r>
+            <a:r>
+              <a:rPr lang="en-US" dirty="0"/>
+              <a:t>- 1.ffffffᐧ</a:t>
+            </a:r>
+            <a:r>
+              <a:rPr lang="cs-CZ" altLang="x-none" dirty="0"/>
+              <a:t>2</a:t>
+            </a:r>
+            <a:r>
+              <a:rPr lang="en-US" baseline="30000" dirty="0"/>
+              <a:t>e </a:t>
+            </a:r>
+            <a:r>
+              <a:rPr lang="en-US" dirty="0"/>
+              <a:t> </a:t>
+            </a:r>
+          </a:p>
+          <a:p>
+            <a:pPr lvl="1"/>
+            <a:r>
+              <a:rPr lang="en-US" dirty="0"/>
+              <a:t>(called “</a:t>
+            </a:r>
+            <a:r>
+              <a:rPr lang="en-US" dirty="0" err="1"/>
+              <a:t>binade</a:t>
+            </a:r>
+            <a:r>
+              <a:rPr lang="en-US" dirty="0"/>
+              <a:t>”)</a:t>
+            </a:r>
+          </a:p>
+        </p:txBody>
+      </p:sp>
+    </p:spTree>
+    <p:extLst>
+      <p:ext uri="{BB962C8B-B14F-4D97-AF65-F5344CB8AC3E}">
+        <p14:creationId xmlns:p14="http://schemas.microsoft.com/office/powerpoint/2010/main" val="4071479380"/>
+      </p:ext>
+    </p:extLst>
+  </p:cSld>
+  <p:clrMapOvr>
+    <a:masterClrMapping/>
+  </p:clrMapOvr>
+</p:sld>
+</file>
+
+<file path=ppt/slides/slide4.xml><?xml version="1.0" encoding="utf-8"?>
+<p:sld xmlns:a="http://schemas.openxmlformats.org/drawingml/2006/main" xmlns:r="http://schemas.openxmlformats.org/officeDocument/2006/relationships" xmlns:p="http://schemas.openxmlformats.org/presentationml/2006/main">
+  <p:cSld>
+    <p:spTree>
+      <p:nvGrpSpPr>
+        <p:cNvPr id="1" name=""/>
+        <p:cNvGrpSpPr/>
+        <p:nvPr/>
+      </p:nvGrpSpPr>
+      <p:grpSpPr>
+        <a:xfrm>
+          <a:off x="0" y="0"/>
+          <a:ext cx="0" cy="0"/>
+          <a:chOff x="0" y="0"/>
+          <a:chExt cx="0" cy="0"/>
+        </a:xfrm>
+      </p:grpSpPr>
+      <p:sp>
+        <p:nvSpPr>
+          <p:cNvPr id="4" name="Title 3">
+            <a:extLst>
+              <a:ext uri="{FF2B5EF4-FFF2-40B4-BE49-F238E27FC236}">
+                <a16:creationId xmlns:a16="http://schemas.microsoft.com/office/drawing/2014/main" id="{F5A3A9D8-867E-6417-96D4-7E682A564981}"/>
+              </a:ext>
+            </a:extLst>
+          </p:cNvPr>
+          <p:cNvSpPr>
+            <a:spLocks noGrp="1"/>
+          </p:cNvSpPr>
+          <p:nvPr>
+            <p:ph type="title"/>
+          </p:nvPr>
+        </p:nvSpPr>
+        <p:spPr>
+          <a:xfrm>
+            <a:off x="838200" y="16968"/>
+            <a:ext cx="10515600" cy="1304924"/>
+          </a:xfrm>
+        </p:spPr>
+        <p:txBody>
+          <a:bodyPr/>
+          <a:lstStyle/>
+          <a:p>
+            <a:r>
+              <a:rPr lang="en-US" dirty="0"/>
+              <a:t>Precision and Rounding</a:t>
+            </a:r>
+          </a:p>
+        </p:txBody>
+      </p:sp>
+      <p:sp>
+        <p:nvSpPr>
+          <p:cNvPr id="5" name="Content Placeholder 4">
+            <a:extLst>
+              <a:ext uri="{FF2B5EF4-FFF2-40B4-BE49-F238E27FC236}">
+                <a16:creationId xmlns:a16="http://schemas.microsoft.com/office/drawing/2014/main" id="{5A207A04-A816-749B-D772-9ADF868CFE39}"/>
+              </a:ext>
+            </a:extLst>
+          </p:cNvPr>
+          <p:cNvSpPr>
+            <a:spLocks noGrp="1"/>
+          </p:cNvSpPr>
+          <p:nvPr>
+            <p:ph idx="1"/>
+          </p:nvPr>
+        </p:nvSpPr>
+        <p:spPr>
+          <a:xfrm>
+            <a:off x="349804" y="1106109"/>
+            <a:ext cx="11003996" cy="3840619"/>
+          </a:xfrm>
+        </p:spPr>
+        <p:txBody>
+          <a:bodyPr>
+            <a:normAutofit fontScale="85000" lnSpcReduction="20000"/>
+          </a:bodyPr>
+          <a:lstStyle/>
+          <a:p>
+            <a:pPr marL="0" indent="0">
+              <a:buNone/>
+            </a:pPr>
+            <a:r>
+              <a:rPr lang="en-US" dirty="0"/>
+              <a:t>The result of a measurement is 3.1415 and its accuracy is 0.1</a:t>
+            </a:r>
+          </a:p>
+          <a:p>
+            <a:pPr marL="0" indent="0">
+              <a:buNone/>
+            </a:pPr>
+            <a:r>
+              <a:rPr lang="en-US" dirty="0"/>
+              <a:t>this result need to be rounded. Default is to round to “nearest”</a:t>
+            </a:r>
+          </a:p>
+          <a:p>
+            <a:pPr marL="0" indent="0">
+              <a:buNone/>
+            </a:pPr>
+            <a:r>
+              <a:rPr lang="en-US" dirty="0"/>
+              <a:t>3.1415 -&gt; 3.1  (3.1515 -&gt; 3.2)</a:t>
+            </a:r>
+          </a:p>
+          <a:p>
+            <a:pPr marL="0" indent="0">
+              <a:buNone/>
+            </a:pPr>
+            <a:endParaRPr lang="en-US" dirty="0"/>
+          </a:p>
+          <a:p>
+            <a:pPr marL="0" indent="0">
+              <a:buNone/>
+            </a:pPr>
+            <a:r>
+              <a:rPr lang="en-US" dirty="0"/>
+              <a:t>31ᐧ10</a:t>
+            </a:r>
+            <a:r>
+              <a:rPr lang="en-US" baseline="30000" dirty="0"/>
+              <a:t>-1</a:t>
+            </a:r>
+            <a:r>
+              <a:rPr lang="en-US" dirty="0"/>
+              <a:t> represents all numbers in the interval [30.5ᐧ10</a:t>
+            </a:r>
+            <a:r>
+              <a:rPr lang="en-US" baseline="30000" dirty="0"/>
+              <a:t>-1</a:t>
+            </a:r>
+            <a:r>
+              <a:rPr lang="en-US" dirty="0"/>
+              <a:t>, 31.5ᐧ10</a:t>
+            </a:r>
+            <a:r>
+              <a:rPr lang="en-US" baseline="30000" dirty="0"/>
+              <a:t>-1</a:t>
+            </a:r>
+            <a:r>
+              <a:rPr lang="en-US" dirty="0"/>
+              <a:t>]</a:t>
+            </a:r>
+          </a:p>
+          <a:p>
+            <a:pPr marL="0" indent="0">
+              <a:buNone/>
+            </a:pPr>
+            <a:r>
+              <a:rPr lang="cs-CZ" altLang="x-none" dirty="0"/>
+              <a:t>1.921fb6</a:t>
+            </a:r>
+            <a:r>
+              <a:rPr lang="en-US" dirty="0" err="1"/>
+              <a:t>ᐧ</a:t>
+            </a:r>
+            <a:r>
+              <a:rPr lang="cs-CZ" altLang="x-none" dirty="0"/>
+              <a:t>2</a:t>
+            </a:r>
+            <a:r>
+              <a:rPr lang="cs-CZ" altLang="x-none" baseline="30000" dirty="0"/>
+              <a:t>+1 </a:t>
+            </a:r>
+            <a:r>
+              <a:rPr lang="en-US" dirty="0"/>
+              <a:t>represents all numbers in the interval [</a:t>
+            </a:r>
+            <a:r>
+              <a:rPr lang="cs-CZ" altLang="x-none" dirty="0"/>
+              <a:t>1.921fb5</a:t>
+            </a:r>
+            <a:r>
+              <a:rPr lang="en-US" dirty="0" err="1"/>
+              <a:t>ᐧ</a:t>
+            </a:r>
+            <a:r>
+              <a:rPr lang="cs-CZ" altLang="x-none" dirty="0"/>
+              <a:t>2</a:t>
+            </a:r>
+            <a:r>
+              <a:rPr lang="cs-CZ" altLang="x-none" baseline="30000" dirty="0"/>
+              <a:t>+1</a:t>
+            </a:r>
+            <a:r>
+              <a:rPr lang="cs-CZ" altLang="x-none" dirty="0"/>
+              <a:t>,1.921fb7</a:t>
+            </a:r>
+            <a:r>
+              <a:rPr lang="en-US" dirty="0" err="1"/>
+              <a:t>ᐧ</a:t>
+            </a:r>
+            <a:r>
+              <a:rPr lang="cs-CZ" altLang="x-none" dirty="0"/>
+              <a:t>2</a:t>
+            </a:r>
+            <a:r>
+              <a:rPr lang="cs-CZ" altLang="x-none" baseline="30000" dirty="0"/>
+              <a:t>+1</a:t>
+            </a:r>
+            <a:r>
+              <a:rPr lang="cs-CZ" altLang="x-none" dirty="0"/>
+              <a:t>]</a:t>
+            </a:r>
+            <a:endParaRPr lang="en-US" dirty="0"/>
+          </a:p>
+          <a:p>
+            <a:pPr marL="0" indent="0">
+              <a:buNone/>
+            </a:pPr>
+            <a:endParaRPr lang="en-US" dirty="0"/>
+          </a:p>
+          <a:p>
+            <a:pPr marL="0" indent="0">
+              <a:buNone/>
+            </a:pPr>
+            <a:endParaRPr lang="en-US" dirty="0"/>
+          </a:p>
+          <a:p>
+            <a:pPr marL="0" indent="0">
+              <a:buNone/>
+            </a:pPr>
+            <a:endParaRPr lang="en-US" dirty="0"/>
+          </a:p>
+          <a:p>
+            <a:pPr marL="0" indent="0">
+              <a:buNone/>
+            </a:pPr>
+            <a:r>
+              <a:rPr lang="en-US" dirty="0"/>
+              <a:t> </a:t>
+            </a:r>
+          </a:p>
+        </p:txBody>
+      </p:sp>
+      <p:grpSp>
+        <p:nvGrpSpPr>
+          <p:cNvPr id="2" name="Group 29">
+            <a:extLst>
+              <a:ext uri="{FF2B5EF4-FFF2-40B4-BE49-F238E27FC236}">
+                <a16:creationId xmlns:a16="http://schemas.microsoft.com/office/drawing/2014/main" id="{13824B21-6E52-B544-EBED-01ED8CAFB180}"/>
+              </a:ext>
+            </a:extLst>
+          </p:cNvPr>
+          <p:cNvGrpSpPr>
+            <a:grpSpLocks/>
+          </p:cNvGrpSpPr>
+          <p:nvPr/>
+        </p:nvGrpSpPr>
+        <p:grpSpPr bwMode="auto">
+          <a:xfrm>
+            <a:off x="1875392" y="3542505"/>
+            <a:ext cx="7632700" cy="3249613"/>
+            <a:chOff x="899592" y="764704"/>
+            <a:chExt cx="7632848" cy="3249652"/>
+          </a:xfrm>
+        </p:grpSpPr>
+        <p:cxnSp>
+          <p:nvCxnSpPr>
+            <p:cNvPr id="3" name="Straight Arrow Connector 2">
+              <a:extLst>
+                <a:ext uri="{FF2B5EF4-FFF2-40B4-BE49-F238E27FC236}">
+                  <a16:creationId xmlns:a16="http://schemas.microsoft.com/office/drawing/2014/main" id="{D0E227D9-2D4A-B22E-F248-369A9CF5EB0C}"/>
+                </a:ext>
+              </a:extLst>
+            </p:cNvPr>
+            <p:cNvCxnSpPr>
+              <a:cxnSpLocks noChangeShapeType="1"/>
+            </p:cNvCxnSpPr>
+            <p:nvPr/>
+          </p:nvCxnSpPr>
+          <p:spPr bwMode="auto">
+            <a:xfrm>
+              <a:off x="899592" y="2709415"/>
+              <a:ext cx="7632848" cy="0"/>
+            </a:xfrm>
+            <a:prstGeom prst="straightConnector1">
+              <a:avLst/>
+            </a:prstGeom>
+            <a:noFill/>
+            <a:ln w="57150">
+              <a:solidFill>
+                <a:srgbClr val="FF0000"/>
+              </a:solidFill>
+              <a:round/>
+              <a:headEnd/>
+              <a:tailEnd type="arrow" w="med" len="med"/>
+            </a:ln>
+            <a:effectLst>
+              <a:outerShdw blurRad="40000" dist="20000" dir="5400000" rotWithShape="0">
+                <a:srgbClr val="000000">
+                  <a:alpha val="37999"/>
+                </a:srgbClr>
+              </a:outerShdw>
+            </a:effectLst>
+            <a:extLst>
+              <a:ext uri="{909E8E84-426E-40DD-AFC4-6F175D3DCCD1}">
+                <a14:hiddenFill xmlns:a14="http://schemas.microsoft.com/office/drawing/2010/main">
+                  <a:noFill/>
+                </a14:hiddenFill>
+              </a:ext>
+            </a:extLst>
+          </p:spPr>
+        </p:cxnSp>
+        <p:cxnSp>
+          <p:nvCxnSpPr>
+            <p:cNvPr id="6" name="Straight Arrow Connector 5">
+              <a:extLst>
+                <a:ext uri="{FF2B5EF4-FFF2-40B4-BE49-F238E27FC236}">
+                  <a16:creationId xmlns:a16="http://schemas.microsoft.com/office/drawing/2014/main" id="{7BF4DE9F-4E1C-AFB4-1588-025BA0A49848}"/>
+                </a:ext>
+              </a:extLst>
+            </p:cNvPr>
+            <p:cNvCxnSpPr>
+              <a:cxnSpLocks noChangeShapeType="1"/>
+            </p:cNvCxnSpPr>
+            <p:nvPr/>
+          </p:nvCxnSpPr>
+          <p:spPr bwMode="auto">
+            <a:xfrm>
+              <a:off x="4355646" y="2060120"/>
+              <a:ext cx="0" cy="576270"/>
+            </a:xfrm>
+            <a:prstGeom prst="straightConnector1">
+              <a:avLst/>
+            </a:prstGeom>
+            <a:noFill/>
+            <a:ln w="25400">
+              <a:solidFill>
+                <a:schemeClr val="tx1"/>
+              </a:solidFill>
+              <a:round/>
+              <a:headEnd/>
+              <a:tailEnd type="arrow" w="med" len="med"/>
+            </a:ln>
+            <a:effectLst>
+              <a:outerShdw blurRad="40000" dist="20000" dir="5400000" rotWithShape="0">
+                <a:srgbClr val="000000">
+                  <a:alpha val="37999"/>
+                </a:srgbClr>
+              </a:outerShdw>
+            </a:effectLst>
+            <a:extLst>
+              <a:ext uri="{909E8E84-426E-40DD-AFC4-6F175D3DCCD1}">
+                <a14:hiddenFill xmlns:a14="http://schemas.microsoft.com/office/drawing/2010/main">
+                  <a:noFill/>
+                </a14:hiddenFill>
+              </a:ext>
+            </a:extLst>
+          </p:spPr>
+        </p:cxnSp>
+        <p:cxnSp>
+          <p:nvCxnSpPr>
+            <p:cNvPr id="7" name="Straight Arrow Connector 6">
+              <a:extLst>
+                <a:ext uri="{FF2B5EF4-FFF2-40B4-BE49-F238E27FC236}">
+                  <a16:creationId xmlns:a16="http://schemas.microsoft.com/office/drawing/2014/main" id="{E00BA996-B837-CAE1-0EAE-928976C6F1D0}"/>
+                </a:ext>
+              </a:extLst>
+            </p:cNvPr>
+            <p:cNvCxnSpPr>
+              <a:cxnSpLocks noChangeShapeType="1"/>
+            </p:cNvCxnSpPr>
+            <p:nvPr/>
+          </p:nvCxnSpPr>
+          <p:spPr bwMode="auto">
+            <a:xfrm>
+              <a:off x="7237015" y="2060120"/>
+              <a:ext cx="0" cy="576270"/>
+            </a:xfrm>
+            <a:prstGeom prst="straightConnector1">
+              <a:avLst/>
+            </a:prstGeom>
+            <a:noFill/>
+            <a:ln w="25400">
+              <a:solidFill>
+                <a:schemeClr val="tx1"/>
+              </a:solidFill>
+              <a:round/>
+              <a:headEnd/>
+              <a:tailEnd type="arrow" w="med" len="med"/>
+            </a:ln>
+            <a:effectLst>
+              <a:outerShdw blurRad="40000" dist="20000" dir="5400000" rotWithShape="0">
+                <a:srgbClr val="000000">
+                  <a:alpha val="37999"/>
+                </a:srgbClr>
+              </a:outerShdw>
+            </a:effectLst>
+            <a:extLst>
+              <a:ext uri="{909E8E84-426E-40DD-AFC4-6F175D3DCCD1}">
+                <a14:hiddenFill xmlns:a14="http://schemas.microsoft.com/office/drawing/2010/main">
+                  <a:noFill/>
+                </a14:hiddenFill>
+              </a:ext>
+            </a:extLst>
+          </p:spPr>
+        </p:cxnSp>
+        <p:cxnSp>
+          <p:nvCxnSpPr>
+            <p:cNvPr id="8" name="Straight Arrow Connector 7">
+              <a:extLst>
+                <a:ext uri="{FF2B5EF4-FFF2-40B4-BE49-F238E27FC236}">
+                  <a16:creationId xmlns:a16="http://schemas.microsoft.com/office/drawing/2014/main" id="{5E087550-CD3F-C920-D935-DFB4E4DF546C}"/>
+                </a:ext>
+              </a:extLst>
+            </p:cNvPr>
+            <p:cNvCxnSpPr>
+              <a:cxnSpLocks noChangeShapeType="1"/>
+            </p:cNvCxnSpPr>
+            <p:nvPr/>
+          </p:nvCxnSpPr>
+          <p:spPr bwMode="auto">
+            <a:xfrm>
+              <a:off x="1620331" y="1988682"/>
+              <a:ext cx="0" cy="576269"/>
+            </a:xfrm>
+            <a:prstGeom prst="straightConnector1">
+              <a:avLst/>
+            </a:prstGeom>
+            <a:noFill/>
+            <a:ln w="25400">
+              <a:solidFill>
+                <a:schemeClr val="tx1"/>
+              </a:solidFill>
+              <a:round/>
+              <a:headEnd/>
+              <a:tailEnd type="arrow" w="med" len="med"/>
+            </a:ln>
+            <a:effectLst>
+              <a:outerShdw blurRad="40000" dist="20000" dir="5400000" rotWithShape="0">
+                <a:srgbClr val="000000">
+                  <a:alpha val="37999"/>
+                </a:srgbClr>
+              </a:outerShdw>
+            </a:effectLst>
+            <a:extLst>
+              <a:ext uri="{909E8E84-426E-40DD-AFC4-6F175D3DCCD1}">
+                <a14:hiddenFill xmlns:a14="http://schemas.microsoft.com/office/drawing/2010/main">
+                  <a:noFill/>
+                </a14:hiddenFill>
+              </a:ext>
+            </a:extLst>
+          </p:spPr>
+        </p:cxnSp>
+        <p:sp>
+          <p:nvSpPr>
+            <p:cNvPr id="9" name="TextBox 12">
+              <a:extLst>
+                <a:ext uri="{FF2B5EF4-FFF2-40B4-BE49-F238E27FC236}">
+                  <a16:creationId xmlns:a16="http://schemas.microsoft.com/office/drawing/2014/main" id="{B2E9F211-B946-FFC4-BB41-DEB9D86792AD}"/>
+                </a:ext>
+              </a:extLst>
+            </p:cNvPr>
+            <p:cNvSpPr txBox="1">
+              <a:spLocks noChangeArrowheads="1"/>
+            </p:cNvSpPr>
+            <p:nvPr/>
+          </p:nvSpPr>
+          <p:spPr bwMode="auto">
+            <a:xfrm>
+              <a:off x="3635896" y="1700808"/>
+              <a:ext cx="1404201" cy="369332"/>
+            </a:xfrm>
+            <a:prstGeom prst="rect">
+              <a:avLst/>
+            </a:prstGeom>
+            <a:noFill/>
+            <a:ln>
+              <a:noFill/>
+            </a:ln>
+            <a:extLst>
+              <a:ext uri="{909E8E84-426E-40DD-AFC4-6F175D3DCCD1}">
+                <a14:hiddenFill xmlns:a14="http://schemas.microsoft.com/office/drawing/2010/main">
+                  <a:solidFill>
+                    <a:srgbClr val="FFFFFF"/>
+                  </a:solidFill>
+                </a14:hiddenFill>
+              </a:ext>
+              <a:ext uri="{91240B29-F687-4F45-9708-019B960494DF}">
+                <a14:hiddenLine xmlns:a14="http://schemas.microsoft.com/office/drawing/2010/main" w="9525">
+                  <a:solidFill>
+                    <a:srgbClr val="000000"/>
+                  </a:solidFill>
+                  <a:miter lim="800000"/>
+                  <a:headEnd/>
+                  <a:tailEnd/>
+                </a14:hiddenLine>
+              </a:ext>
+            </a:extLst>
+          </p:spPr>
+          <p:txBody>
+            <a:bodyPr wrap="none">
+              <a:spAutoFit/>
+            </a:bodyPr>
+            <a:lstStyle>
+              <a:lvl1pPr eaLnBrk="0" hangingPunct="0">
+                <a:defRPr sz="2400">
+                  <a:solidFill>
+                    <a:schemeClr val="tx1"/>
+                  </a:solidFill>
+                  <a:latin typeface="Arial" charset="0"/>
+                  <a:ea typeface="ＭＳ Ｐゴシック" charset="-128"/>
+                </a:defRPr>
+              </a:lvl1pPr>
+              <a:lvl2pPr marL="742950" indent="-285750" eaLnBrk="0" hangingPunct="0">
+                <a:defRPr sz="2400">
+                  <a:solidFill>
+                    <a:schemeClr val="tx1"/>
+                  </a:solidFill>
+                  <a:latin typeface="Arial" charset="0"/>
+                  <a:ea typeface="ＭＳ Ｐゴシック" charset="-128"/>
+                </a:defRPr>
+              </a:lvl2pPr>
+              <a:lvl3pPr marL="1143000" indent="-228600" eaLnBrk="0" hangingPunct="0">
+                <a:defRPr sz="2400">
+                  <a:solidFill>
+                    <a:schemeClr val="tx1"/>
+                  </a:solidFill>
+                  <a:latin typeface="Arial" charset="0"/>
+                  <a:ea typeface="ＭＳ Ｐゴシック" charset="-128"/>
+                </a:defRPr>
+              </a:lvl3pPr>
+              <a:lvl4pPr marL="1600200" indent="-228600" eaLnBrk="0" hangingPunct="0">
+                <a:defRPr sz="2400">
+                  <a:solidFill>
+                    <a:schemeClr val="tx1"/>
+                  </a:solidFill>
+                  <a:latin typeface="Arial" charset="0"/>
+                  <a:ea typeface="ＭＳ Ｐゴシック" charset="-128"/>
+                </a:defRPr>
+              </a:lvl4pPr>
+              <a:lvl5pPr marL="2057400" indent="-228600" eaLnBrk="0" hangingPunct="0">
+                <a:defRPr sz="2400">
+                  <a:solidFill>
+                    <a:schemeClr val="tx1"/>
+                  </a:solidFill>
+                  <a:latin typeface="Arial" charset="0"/>
+                  <a:ea typeface="ＭＳ Ｐゴシック" charset="-128"/>
+                </a:defRPr>
+              </a:lvl5pPr>
+              <a:lvl6pPr marL="2514600" indent="-228600" eaLnBrk="0" fontAlgn="base" hangingPunct="0">
+                <a:spcBef>
+                  <a:spcPct val="0"/>
+                </a:spcBef>
+                <a:spcAft>
+                  <a:spcPct val="0"/>
+                </a:spcAft>
+                <a:defRPr sz="2400">
+                  <a:solidFill>
+                    <a:schemeClr val="tx1"/>
+                  </a:solidFill>
+                  <a:latin typeface="Arial" charset="0"/>
+                  <a:ea typeface="ＭＳ Ｐゴシック" charset="-128"/>
+                </a:defRPr>
+              </a:lvl6pPr>
+              <a:lvl7pPr marL="2971800" indent="-228600" eaLnBrk="0" fontAlgn="base" hangingPunct="0">
+                <a:spcBef>
+                  <a:spcPct val="0"/>
+                </a:spcBef>
+                <a:spcAft>
+                  <a:spcPct val="0"/>
+                </a:spcAft>
+                <a:defRPr sz="2400">
+                  <a:solidFill>
+                    <a:schemeClr val="tx1"/>
+                  </a:solidFill>
+                  <a:latin typeface="Arial" charset="0"/>
+                  <a:ea typeface="ＭＳ Ｐゴシック" charset="-128"/>
+                </a:defRPr>
+              </a:lvl7pPr>
+              <a:lvl8pPr marL="3429000" indent="-228600" eaLnBrk="0" fontAlgn="base" hangingPunct="0">
+                <a:spcBef>
+                  <a:spcPct val="0"/>
+                </a:spcBef>
+                <a:spcAft>
+                  <a:spcPct val="0"/>
+                </a:spcAft>
+                <a:defRPr sz="2400">
+                  <a:solidFill>
+                    <a:schemeClr val="tx1"/>
+                  </a:solidFill>
+                  <a:latin typeface="Arial" charset="0"/>
+                  <a:ea typeface="ＭＳ Ｐゴシック" charset="-128"/>
+                </a:defRPr>
+              </a:lvl8pPr>
+              <a:lvl9pPr marL="3886200" indent="-228600" eaLnBrk="0" fontAlgn="base" hangingPunct="0">
+                <a:spcBef>
+                  <a:spcPct val="0"/>
+                </a:spcBef>
+                <a:spcAft>
+                  <a:spcPct val="0"/>
+                </a:spcAft>
+                <a:defRPr sz="2400">
+                  <a:solidFill>
+                    <a:schemeClr val="tx1"/>
+                  </a:solidFill>
+                  <a:latin typeface="Arial" charset="0"/>
+                  <a:ea typeface="ＭＳ Ｐゴシック" charset="-128"/>
+                </a:defRPr>
+              </a:lvl9pPr>
+            </a:lstStyle>
+            <a:p>
+              <a:pPr eaLnBrk="1" hangingPunct="1"/>
+              <a:r>
+                <a:rPr lang="en-US" altLang="x-none" sz="1800" b="1">
+                  <a:solidFill>
+                    <a:srgbClr val="3366FF"/>
+                  </a:solidFill>
+                </a:rPr>
+                <a:t>3.14159274</a:t>
+              </a:r>
+            </a:p>
+          </p:txBody>
+        </p:sp>
+        <p:sp>
+          <p:nvSpPr>
+            <p:cNvPr id="10" name="Curved Down Arrow 9">
+              <a:extLst>
+                <a:ext uri="{FF2B5EF4-FFF2-40B4-BE49-F238E27FC236}">
+                  <a16:creationId xmlns:a16="http://schemas.microsoft.com/office/drawing/2014/main" id="{7947E535-3DC8-82A8-F99A-E0F78527E727}"/>
+                </a:ext>
+              </a:extLst>
+            </p:cNvPr>
+            <p:cNvSpPr>
+              <a:spLocks noChangeArrowheads="1"/>
+            </p:cNvSpPr>
+            <p:nvPr/>
+          </p:nvSpPr>
+          <p:spPr bwMode="auto">
+            <a:xfrm flipH="1">
+              <a:off x="1404427" y="1052045"/>
+              <a:ext cx="2879781" cy="649295"/>
+            </a:xfrm>
+            <a:prstGeom prst="curvedDownArrow">
+              <a:avLst>
+                <a:gd name="adj1" fmla="val 24989"/>
+                <a:gd name="adj2" fmla="val 49999"/>
+                <a:gd name="adj3" fmla="val 29394"/>
+              </a:avLst>
+            </a:prstGeom>
+            <a:gradFill rotWithShape="1">
+              <a:gsLst>
+                <a:gs pos="0">
+                  <a:srgbClr val="9DF3F3"/>
+                </a:gs>
+                <a:gs pos="100000">
+                  <a:srgbClr val="00B0B0"/>
+                </a:gs>
+              </a:gsLst>
+              <a:lin ang="5400000"/>
+            </a:gradFill>
+            <a:ln w="9525">
+              <a:solidFill>
+                <a:srgbClr val="009999"/>
+              </a:solidFill>
+              <a:miter lim="800000"/>
+              <a:headEnd/>
+              <a:tailEnd/>
+            </a:ln>
+            <a:effectLst>
+              <a:outerShdw blurRad="40000" dist="23000" dir="5400000" rotWithShape="0">
+                <a:srgbClr val="000000">
+                  <a:alpha val="34999"/>
+                </a:srgbClr>
+              </a:outerShdw>
+            </a:effectLst>
+          </p:spPr>
+          <p:txBody>
+            <a:bodyPr anchor="ctr"/>
+            <a:lstStyle>
+              <a:lvl1pPr eaLnBrk="0" hangingPunct="0">
+                <a:defRPr sz="2400">
+                  <a:solidFill>
+                    <a:schemeClr val="tx1"/>
+                  </a:solidFill>
+                  <a:latin typeface="Arial" charset="0"/>
+                  <a:ea typeface="ＭＳ Ｐゴシック" charset="-128"/>
+                </a:defRPr>
+              </a:lvl1pPr>
+              <a:lvl2pPr marL="742950" indent="-285750" eaLnBrk="0" hangingPunct="0">
+                <a:defRPr sz="2400">
+                  <a:solidFill>
+                    <a:schemeClr val="tx1"/>
+                  </a:solidFill>
+                  <a:latin typeface="Arial" charset="0"/>
+                  <a:ea typeface="ＭＳ Ｐゴシック" charset="-128"/>
+                </a:defRPr>
+              </a:lvl2pPr>
+              <a:lvl3pPr marL="1143000" indent="-228600" eaLnBrk="0" hangingPunct="0">
+                <a:defRPr sz="2400">
+                  <a:solidFill>
+                    <a:schemeClr val="tx1"/>
+                  </a:solidFill>
+                  <a:latin typeface="Arial" charset="0"/>
+                  <a:ea typeface="ＭＳ Ｐゴシック" charset="-128"/>
+                </a:defRPr>
+              </a:lvl3pPr>
+              <a:lvl4pPr marL="1600200" indent="-228600" eaLnBrk="0" hangingPunct="0">
+                <a:defRPr sz="2400">
+                  <a:solidFill>
+                    <a:schemeClr val="tx1"/>
+                  </a:solidFill>
+                  <a:latin typeface="Arial" charset="0"/>
+                  <a:ea typeface="ＭＳ Ｐゴシック" charset="-128"/>
+                </a:defRPr>
+              </a:lvl4pPr>
+              <a:lvl5pPr marL="2057400" indent="-228600" eaLnBrk="0" hangingPunct="0">
+                <a:defRPr sz="2400">
+                  <a:solidFill>
+                    <a:schemeClr val="tx1"/>
+                  </a:solidFill>
+                  <a:latin typeface="Arial" charset="0"/>
+                  <a:ea typeface="ＭＳ Ｐゴシック" charset="-128"/>
+                </a:defRPr>
+              </a:lvl5pPr>
+              <a:lvl6pPr marL="2514600" indent="-228600" eaLnBrk="0" fontAlgn="base" hangingPunct="0">
+                <a:spcBef>
+                  <a:spcPct val="0"/>
+                </a:spcBef>
+                <a:spcAft>
+                  <a:spcPct val="0"/>
+                </a:spcAft>
+                <a:defRPr sz="2400">
+                  <a:solidFill>
+                    <a:schemeClr val="tx1"/>
+                  </a:solidFill>
+                  <a:latin typeface="Arial" charset="0"/>
+                  <a:ea typeface="ＭＳ Ｐゴシック" charset="-128"/>
+                </a:defRPr>
+              </a:lvl6pPr>
+              <a:lvl7pPr marL="2971800" indent="-228600" eaLnBrk="0" fontAlgn="base" hangingPunct="0">
+                <a:spcBef>
+                  <a:spcPct val="0"/>
+                </a:spcBef>
+                <a:spcAft>
+                  <a:spcPct val="0"/>
+                </a:spcAft>
+                <a:defRPr sz="2400">
+                  <a:solidFill>
+                    <a:schemeClr val="tx1"/>
+                  </a:solidFill>
+                  <a:latin typeface="Arial" charset="0"/>
+                  <a:ea typeface="ＭＳ Ｐゴシック" charset="-128"/>
+                </a:defRPr>
+              </a:lvl7pPr>
+              <a:lvl8pPr marL="3429000" indent="-228600" eaLnBrk="0" fontAlgn="base" hangingPunct="0">
+                <a:spcBef>
+                  <a:spcPct val="0"/>
+                </a:spcBef>
+                <a:spcAft>
+                  <a:spcPct val="0"/>
+                </a:spcAft>
+                <a:defRPr sz="2400">
+                  <a:solidFill>
+                    <a:schemeClr val="tx1"/>
+                  </a:solidFill>
+                  <a:latin typeface="Arial" charset="0"/>
+                  <a:ea typeface="ＭＳ Ｐゴシック" charset="-128"/>
+                </a:defRPr>
+              </a:lvl8pPr>
+              <a:lvl9pPr marL="3886200" indent="-228600" eaLnBrk="0" fontAlgn="base" hangingPunct="0">
+                <a:spcBef>
+                  <a:spcPct val="0"/>
+                </a:spcBef>
+                <a:spcAft>
+                  <a:spcPct val="0"/>
+                </a:spcAft>
+                <a:defRPr sz="2400">
+                  <a:solidFill>
+                    <a:schemeClr val="tx1"/>
+                  </a:solidFill>
+                  <a:latin typeface="Arial" charset="0"/>
+                  <a:ea typeface="ＭＳ Ｐゴシック" charset="-128"/>
+                </a:defRPr>
+              </a:lvl9pPr>
+            </a:lstStyle>
+            <a:p>
+              <a:pPr algn="ctr" eaLnBrk="1" hangingPunct="1"/>
+              <a:endParaRPr lang="en-US" altLang="x-none" sz="1800"/>
+            </a:p>
+          </p:txBody>
+        </p:sp>
+        <p:sp>
+          <p:nvSpPr>
+            <p:cNvPr id="11" name="TextBox 14">
+              <a:extLst>
+                <a:ext uri="{FF2B5EF4-FFF2-40B4-BE49-F238E27FC236}">
+                  <a16:creationId xmlns:a16="http://schemas.microsoft.com/office/drawing/2014/main" id="{5F4F21E6-F4C7-085F-C4FB-C28DEBF1C6A8}"/>
+                </a:ext>
+              </a:extLst>
+            </p:cNvPr>
+            <p:cNvSpPr txBox="1">
+              <a:spLocks noChangeArrowheads="1"/>
+            </p:cNvSpPr>
+            <p:nvPr/>
+          </p:nvSpPr>
+          <p:spPr bwMode="auto">
+            <a:xfrm>
+              <a:off x="5292080" y="764704"/>
+              <a:ext cx="1872208" cy="369332"/>
+            </a:xfrm>
+            <a:prstGeom prst="rect">
+              <a:avLst/>
+            </a:prstGeom>
+            <a:noFill/>
+            <a:ln>
+              <a:noFill/>
+            </a:ln>
+            <a:extLst>
+              <a:ext uri="{909E8E84-426E-40DD-AFC4-6F175D3DCCD1}">
+                <a14:hiddenFill xmlns:a14="http://schemas.microsoft.com/office/drawing/2010/main">
+                  <a:solidFill>
+                    <a:srgbClr val="FFFFFF"/>
+                  </a:solidFill>
+                </a14:hiddenFill>
+              </a:ext>
+              <a:ext uri="{91240B29-F687-4F45-9708-019B960494DF}">
+                <a14:hiddenLine xmlns:a14="http://schemas.microsoft.com/office/drawing/2010/main" w="9525">
+                  <a:solidFill>
+                    <a:srgbClr val="000000"/>
+                  </a:solidFill>
+                  <a:miter lim="800000"/>
+                  <a:headEnd/>
+                  <a:tailEnd/>
+                </a14:hiddenLine>
+              </a:ext>
+            </a:extLst>
+          </p:spPr>
+          <p:txBody>
+            <a:bodyPr>
+              <a:spAutoFit/>
+            </a:bodyPr>
+            <a:lstStyle>
+              <a:lvl1pPr eaLnBrk="0" hangingPunct="0">
+                <a:defRPr sz="2400">
+                  <a:solidFill>
+                    <a:schemeClr val="tx1"/>
+                  </a:solidFill>
+                  <a:latin typeface="Arial" charset="0"/>
+                  <a:ea typeface="ＭＳ Ｐゴシック" charset="-128"/>
+                </a:defRPr>
+              </a:lvl1pPr>
+              <a:lvl2pPr marL="742950" indent="-285750" eaLnBrk="0" hangingPunct="0">
+                <a:defRPr sz="2400">
+                  <a:solidFill>
+                    <a:schemeClr val="tx1"/>
+                  </a:solidFill>
+                  <a:latin typeface="Arial" charset="0"/>
+                  <a:ea typeface="ＭＳ Ｐゴシック" charset="-128"/>
+                </a:defRPr>
+              </a:lvl2pPr>
+              <a:lvl3pPr marL="1143000" indent="-228600" eaLnBrk="0" hangingPunct="0">
+                <a:defRPr sz="2400">
+                  <a:solidFill>
+                    <a:schemeClr val="tx1"/>
+                  </a:solidFill>
+                  <a:latin typeface="Arial" charset="0"/>
+                  <a:ea typeface="ＭＳ Ｐゴシック" charset="-128"/>
+                </a:defRPr>
+              </a:lvl3pPr>
+              <a:lvl4pPr marL="1600200" indent="-228600" eaLnBrk="0" hangingPunct="0">
+                <a:defRPr sz="2400">
+                  <a:solidFill>
+                    <a:schemeClr val="tx1"/>
+                  </a:solidFill>
+                  <a:latin typeface="Arial" charset="0"/>
+                  <a:ea typeface="ＭＳ Ｐゴシック" charset="-128"/>
+                </a:defRPr>
+              </a:lvl4pPr>
+              <a:lvl5pPr marL="2057400" indent="-228600" eaLnBrk="0" hangingPunct="0">
+                <a:defRPr sz="2400">
+                  <a:solidFill>
+                    <a:schemeClr val="tx1"/>
+                  </a:solidFill>
+                  <a:latin typeface="Arial" charset="0"/>
+                  <a:ea typeface="ＭＳ Ｐゴシック" charset="-128"/>
+                </a:defRPr>
+              </a:lvl5pPr>
+              <a:lvl6pPr marL="2514600" indent="-228600" eaLnBrk="0" fontAlgn="base" hangingPunct="0">
+                <a:spcBef>
+                  <a:spcPct val="0"/>
+                </a:spcBef>
+                <a:spcAft>
+                  <a:spcPct val="0"/>
+                </a:spcAft>
+                <a:defRPr sz="2400">
+                  <a:solidFill>
+                    <a:schemeClr val="tx1"/>
+                  </a:solidFill>
+                  <a:latin typeface="Arial" charset="0"/>
+                  <a:ea typeface="ＭＳ Ｐゴシック" charset="-128"/>
+                </a:defRPr>
+              </a:lvl6pPr>
+              <a:lvl7pPr marL="2971800" indent="-228600" eaLnBrk="0" fontAlgn="base" hangingPunct="0">
+                <a:spcBef>
+                  <a:spcPct val="0"/>
+                </a:spcBef>
+                <a:spcAft>
+                  <a:spcPct val="0"/>
+                </a:spcAft>
+                <a:defRPr sz="2400">
+                  <a:solidFill>
+                    <a:schemeClr val="tx1"/>
+                  </a:solidFill>
+                  <a:latin typeface="Arial" charset="0"/>
+                  <a:ea typeface="ＭＳ Ｐゴシック" charset="-128"/>
+                </a:defRPr>
+              </a:lvl7pPr>
+              <a:lvl8pPr marL="3429000" indent="-228600" eaLnBrk="0" fontAlgn="base" hangingPunct="0">
+                <a:spcBef>
+                  <a:spcPct val="0"/>
+                </a:spcBef>
+                <a:spcAft>
+                  <a:spcPct val="0"/>
+                </a:spcAft>
+                <a:defRPr sz="2400">
+                  <a:solidFill>
+                    <a:schemeClr val="tx1"/>
+                  </a:solidFill>
+                  <a:latin typeface="Arial" charset="0"/>
+                  <a:ea typeface="ＭＳ Ｐゴシック" charset="-128"/>
+                </a:defRPr>
+              </a:lvl8pPr>
+              <a:lvl9pPr marL="3886200" indent="-228600" eaLnBrk="0" fontAlgn="base" hangingPunct="0">
+                <a:spcBef>
+                  <a:spcPct val="0"/>
+                </a:spcBef>
+                <a:spcAft>
+                  <a:spcPct val="0"/>
+                </a:spcAft>
+                <a:defRPr sz="2400">
+                  <a:solidFill>
+                    <a:schemeClr val="tx1"/>
+                  </a:solidFill>
+                  <a:latin typeface="Arial" charset="0"/>
+                  <a:ea typeface="ＭＳ Ｐゴシック" charset="-128"/>
+                </a:defRPr>
+              </a:lvl9pPr>
+            </a:lstStyle>
+            <a:p>
+              <a:pPr eaLnBrk="1" hangingPunct="1"/>
+              <a:r>
+                <a:rPr lang="en-US" altLang="x-none" sz="1800"/>
+                <a:t>nextafter(pi,inf)</a:t>
+              </a:r>
+            </a:p>
+          </p:txBody>
+        </p:sp>
+        <p:sp>
+          <p:nvSpPr>
+            <p:cNvPr id="12" name="Curved Down Arrow 11">
+              <a:extLst>
+                <a:ext uri="{FF2B5EF4-FFF2-40B4-BE49-F238E27FC236}">
+                  <a16:creationId xmlns:a16="http://schemas.microsoft.com/office/drawing/2014/main" id="{2D42BAC7-78D8-F5C2-F179-F55CE5337905}"/>
+                </a:ext>
+              </a:extLst>
+            </p:cNvPr>
+            <p:cNvSpPr>
+              <a:spLocks noChangeArrowheads="1"/>
+            </p:cNvSpPr>
+            <p:nvPr/>
+          </p:nvSpPr>
+          <p:spPr bwMode="auto">
+            <a:xfrm>
+              <a:off x="4571550" y="1052045"/>
+              <a:ext cx="2665465" cy="649295"/>
+            </a:xfrm>
+            <a:prstGeom prst="curvedDownArrow">
+              <a:avLst>
+                <a:gd name="adj1" fmla="val 24992"/>
+                <a:gd name="adj2" fmla="val 50003"/>
+                <a:gd name="adj3" fmla="val 29394"/>
+              </a:avLst>
+            </a:prstGeom>
+            <a:gradFill rotWithShape="1">
+              <a:gsLst>
+                <a:gs pos="0">
+                  <a:srgbClr val="9DF3F3"/>
+                </a:gs>
+                <a:gs pos="100000">
+                  <a:srgbClr val="00B0B0"/>
+                </a:gs>
+              </a:gsLst>
+              <a:lin ang="5400000"/>
+            </a:gradFill>
+            <a:ln w="9525">
+              <a:solidFill>
+                <a:srgbClr val="009999"/>
+              </a:solidFill>
+              <a:miter lim="800000"/>
+              <a:headEnd/>
+              <a:tailEnd/>
+            </a:ln>
+            <a:effectLst>
+              <a:outerShdw blurRad="40000" dist="23000" dir="5400000" rotWithShape="0">
+                <a:srgbClr val="000000">
+                  <a:alpha val="34999"/>
+                </a:srgbClr>
+              </a:outerShdw>
+            </a:effectLst>
+          </p:spPr>
+          <p:txBody>
+            <a:bodyPr anchor="ctr"/>
+            <a:lstStyle>
+              <a:lvl1pPr eaLnBrk="0" hangingPunct="0">
+                <a:defRPr sz="2400">
+                  <a:solidFill>
+                    <a:schemeClr val="tx1"/>
+                  </a:solidFill>
+                  <a:latin typeface="Arial" charset="0"/>
+                  <a:ea typeface="ＭＳ Ｐゴシック" charset="-128"/>
+                </a:defRPr>
+              </a:lvl1pPr>
+              <a:lvl2pPr marL="742950" indent="-285750" eaLnBrk="0" hangingPunct="0">
+                <a:defRPr sz="2400">
+                  <a:solidFill>
+                    <a:schemeClr val="tx1"/>
+                  </a:solidFill>
+                  <a:latin typeface="Arial" charset="0"/>
+                  <a:ea typeface="ＭＳ Ｐゴシック" charset="-128"/>
+                </a:defRPr>
+              </a:lvl2pPr>
+              <a:lvl3pPr marL="1143000" indent="-228600" eaLnBrk="0" hangingPunct="0">
+                <a:defRPr sz="2400">
+                  <a:solidFill>
+                    <a:schemeClr val="tx1"/>
+                  </a:solidFill>
+                  <a:latin typeface="Arial" charset="0"/>
+                  <a:ea typeface="ＭＳ Ｐゴシック" charset="-128"/>
+                </a:defRPr>
+              </a:lvl3pPr>
+              <a:lvl4pPr marL="1600200" indent="-228600" eaLnBrk="0" hangingPunct="0">
+                <a:defRPr sz="2400">
+                  <a:solidFill>
+                    <a:schemeClr val="tx1"/>
+                  </a:solidFill>
+                  <a:latin typeface="Arial" charset="0"/>
+                  <a:ea typeface="ＭＳ Ｐゴシック" charset="-128"/>
+                </a:defRPr>
+              </a:lvl4pPr>
+              <a:lvl5pPr marL="2057400" indent="-228600" eaLnBrk="0" hangingPunct="0">
+                <a:defRPr sz="2400">
+                  <a:solidFill>
+                    <a:schemeClr val="tx1"/>
+                  </a:solidFill>
+                  <a:latin typeface="Arial" charset="0"/>
+                  <a:ea typeface="ＭＳ Ｐゴシック" charset="-128"/>
+                </a:defRPr>
+              </a:lvl5pPr>
+              <a:lvl6pPr marL="2514600" indent="-228600" eaLnBrk="0" fontAlgn="base" hangingPunct="0">
+                <a:spcBef>
+                  <a:spcPct val="0"/>
+                </a:spcBef>
+                <a:spcAft>
+                  <a:spcPct val="0"/>
+                </a:spcAft>
+                <a:defRPr sz="2400">
+                  <a:solidFill>
+                    <a:schemeClr val="tx1"/>
+                  </a:solidFill>
+                  <a:latin typeface="Arial" charset="0"/>
+                  <a:ea typeface="ＭＳ Ｐゴシック" charset="-128"/>
+                </a:defRPr>
+              </a:lvl6pPr>
+              <a:lvl7pPr marL="2971800" indent="-228600" eaLnBrk="0" fontAlgn="base" hangingPunct="0">
+                <a:spcBef>
+                  <a:spcPct val="0"/>
+                </a:spcBef>
+                <a:spcAft>
+                  <a:spcPct val="0"/>
+                </a:spcAft>
+                <a:defRPr sz="2400">
+                  <a:solidFill>
+                    <a:schemeClr val="tx1"/>
+                  </a:solidFill>
+                  <a:latin typeface="Arial" charset="0"/>
+                  <a:ea typeface="ＭＳ Ｐゴシック" charset="-128"/>
+                </a:defRPr>
+              </a:lvl7pPr>
+              <a:lvl8pPr marL="3429000" indent="-228600" eaLnBrk="0" fontAlgn="base" hangingPunct="0">
+                <a:spcBef>
+                  <a:spcPct val="0"/>
+                </a:spcBef>
+                <a:spcAft>
+                  <a:spcPct val="0"/>
+                </a:spcAft>
+                <a:defRPr sz="2400">
+                  <a:solidFill>
+                    <a:schemeClr val="tx1"/>
+                  </a:solidFill>
+                  <a:latin typeface="Arial" charset="0"/>
+                  <a:ea typeface="ＭＳ Ｐゴシック" charset="-128"/>
+                </a:defRPr>
+              </a:lvl8pPr>
+              <a:lvl9pPr marL="3886200" indent="-228600" eaLnBrk="0" fontAlgn="base" hangingPunct="0">
+                <a:spcBef>
+                  <a:spcPct val="0"/>
+                </a:spcBef>
+                <a:spcAft>
+                  <a:spcPct val="0"/>
+                </a:spcAft>
+                <a:defRPr sz="2400">
+                  <a:solidFill>
+                    <a:schemeClr val="tx1"/>
+                  </a:solidFill>
+                  <a:latin typeface="Arial" charset="0"/>
+                  <a:ea typeface="ＭＳ Ｐゴシック" charset="-128"/>
+                </a:defRPr>
+              </a:lvl9pPr>
+            </a:lstStyle>
+            <a:p>
+              <a:pPr algn="ctr" eaLnBrk="1" hangingPunct="1"/>
+              <a:endParaRPr lang="en-US" altLang="x-none" sz="1800"/>
+            </a:p>
+          </p:txBody>
+        </p:sp>
+        <p:sp>
+          <p:nvSpPr>
+            <p:cNvPr id="13" name="TextBox 19">
+              <a:extLst>
+                <a:ext uri="{FF2B5EF4-FFF2-40B4-BE49-F238E27FC236}">
+                  <a16:creationId xmlns:a16="http://schemas.microsoft.com/office/drawing/2014/main" id="{21D7C7E1-2617-4291-642B-25776DBCD714}"/>
+                </a:ext>
+              </a:extLst>
+            </p:cNvPr>
+            <p:cNvSpPr txBox="1">
+              <a:spLocks noChangeArrowheads="1"/>
+            </p:cNvSpPr>
+            <p:nvPr/>
+          </p:nvSpPr>
+          <p:spPr bwMode="auto">
+            <a:xfrm>
+              <a:off x="1763688" y="764704"/>
+              <a:ext cx="1872208" cy="369332"/>
+            </a:xfrm>
+            <a:prstGeom prst="rect">
+              <a:avLst/>
+            </a:prstGeom>
+            <a:noFill/>
+            <a:ln>
+              <a:noFill/>
+            </a:ln>
+            <a:extLst>
+              <a:ext uri="{909E8E84-426E-40DD-AFC4-6F175D3DCCD1}">
+                <a14:hiddenFill xmlns:a14="http://schemas.microsoft.com/office/drawing/2010/main">
+                  <a:solidFill>
+                    <a:srgbClr val="FFFFFF"/>
+                  </a:solidFill>
+                </a14:hiddenFill>
+              </a:ext>
+              <a:ext uri="{91240B29-F687-4F45-9708-019B960494DF}">
+                <a14:hiddenLine xmlns:a14="http://schemas.microsoft.com/office/drawing/2010/main" w="9525">
+                  <a:solidFill>
+                    <a:srgbClr val="000000"/>
+                  </a:solidFill>
+                  <a:miter lim="800000"/>
+                  <a:headEnd/>
+                  <a:tailEnd/>
+                </a14:hiddenLine>
+              </a:ext>
+            </a:extLst>
+          </p:spPr>
+          <p:txBody>
+            <a:bodyPr>
+              <a:spAutoFit/>
+            </a:bodyPr>
+            <a:lstStyle>
+              <a:lvl1pPr eaLnBrk="0" hangingPunct="0">
+                <a:defRPr sz="2400">
+                  <a:solidFill>
+                    <a:schemeClr val="tx1"/>
+                  </a:solidFill>
+                  <a:latin typeface="Arial" charset="0"/>
+                  <a:ea typeface="ＭＳ Ｐゴシック" charset="-128"/>
+                </a:defRPr>
+              </a:lvl1pPr>
+              <a:lvl2pPr marL="742950" indent="-285750" eaLnBrk="0" hangingPunct="0">
+                <a:defRPr sz="2400">
+                  <a:solidFill>
+                    <a:schemeClr val="tx1"/>
+                  </a:solidFill>
+                  <a:latin typeface="Arial" charset="0"/>
+                  <a:ea typeface="ＭＳ Ｐゴシック" charset="-128"/>
+                </a:defRPr>
+              </a:lvl2pPr>
+              <a:lvl3pPr marL="1143000" indent="-228600" eaLnBrk="0" hangingPunct="0">
+                <a:defRPr sz="2400">
+                  <a:solidFill>
+                    <a:schemeClr val="tx1"/>
+                  </a:solidFill>
+                  <a:latin typeface="Arial" charset="0"/>
+                  <a:ea typeface="ＭＳ Ｐゴシック" charset="-128"/>
+                </a:defRPr>
+              </a:lvl3pPr>
+              <a:lvl4pPr marL="1600200" indent="-228600" eaLnBrk="0" hangingPunct="0">
+                <a:defRPr sz="2400">
+                  <a:solidFill>
+                    <a:schemeClr val="tx1"/>
+                  </a:solidFill>
+                  <a:latin typeface="Arial" charset="0"/>
+                  <a:ea typeface="ＭＳ Ｐゴシック" charset="-128"/>
+                </a:defRPr>
+              </a:lvl4pPr>
+              <a:lvl5pPr marL="2057400" indent="-228600" eaLnBrk="0" hangingPunct="0">
+                <a:defRPr sz="2400">
+                  <a:solidFill>
+                    <a:schemeClr val="tx1"/>
+                  </a:solidFill>
+                  <a:latin typeface="Arial" charset="0"/>
+                  <a:ea typeface="ＭＳ Ｐゴシック" charset="-128"/>
+                </a:defRPr>
+              </a:lvl5pPr>
+              <a:lvl6pPr marL="2514600" indent="-228600" eaLnBrk="0" fontAlgn="base" hangingPunct="0">
+                <a:spcBef>
+                  <a:spcPct val="0"/>
+                </a:spcBef>
+                <a:spcAft>
+                  <a:spcPct val="0"/>
+                </a:spcAft>
+                <a:defRPr sz="2400">
+                  <a:solidFill>
+                    <a:schemeClr val="tx1"/>
+                  </a:solidFill>
+                  <a:latin typeface="Arial" charset="0"/>
+                  <a:ea typeface="ＭＳ Ｐゴシック" charset="-128"/>
+                </a:defRPr>
+              </a:lvl6pPr>
+              <a:lvl7pPr marL="2971800" indent="-228600" eaLnBrk="0" fontAlgn="base" hangingPunct="0">
+                <a:spcBef>
+                  <a:spcPct val="0"/>
+                </a:spcBef>
+                <a:spcAft>
+                  <a:spcPct val="0"/>
+                </a:spcAft>
+                <a:defRPr sz="2400">
+                  <a:solidFill>
+                    <a:schemeClr val="tx1"/>
+                  </a:solidFill>
+                  <a:latin typeface="Arial" charset="0"/>
+                  <a:ea typeface="ＭＳ Ｐゴシック" charset="-128"/>
+                </a:defRPr>
+              </a:lvl7pPr>
+              <a:lvl8pPr marL="3429000" indent="-228600" eaLnBrk="0" fontAlgn="base" hangingPunct="0">
+                <a:spcBef>
+                  <a:spcPct val="0"/>
+                </a:spcBef>
+                <a:spcAft>
+                  <a:spcPct val="0"/>
+                </a:spcAft>
+                <a:defRPr sz="2400">
+                  <a:solidFill>
+                    <a:schemeClr val="tx1"/>
+                  </a:solidFill>
+                  <a:latin typeface="Arial" charset="0"/>
+                  <a:ea typeface="ＭＳ Ｐゴシック" charset="-128"/>
+                </a:defRPr>
+              </a:lvl8pPr>
+              <a:lvl9pPr marL="3886200" indent="-228600" eaLnBrk="0" fontAlgn="base" hangingPunct="0">
+                <a:spcBef>
+                  <a:spcPct val="0"/>
+                </a:spcBef>
+                <a:spcAft>
+                  <a:spcPct val="0"/>
+                </a:spcAft>
+                <a:defRPr sz="2400">
+                  <a:solidFill>
+                    <a:schemeClr val="tx1"/>
+                  </a:solidFill>
+                  <a:latin typeface="Arial" charset="0"/>
+                  <a:ea typeface="ＭＳ Ｐゴシック" charset="-128"/>
+                </a:defRPr>
+              </a:lvl9pPr>
+            </a:lstStyle>
+            <a:p>
+              <a:pPr eaLnBrk="1" hangingPunct="1"/>
+              <a:r>
+                <a:rPr lang="en-US" altLang="x-none" sz="1800"/>
+                <a:t>nextafter(pi,-inf)</a:t>
+              </a:r>
+            </a:p>
+          </p:txBody>
+        </p:sp>
+        <p:sp>
+          <p:nvSpPr>
+            <p:cNvPr id="14" name="TextBox 20">
+              <a:extLst>
+                <a:ext uri="{FF2B5EF4-FFF2-40B4-BE49-F238E27FC236}">
+                  <a16:creationId xmlns:a16="http://schemas.microsoft.com/office/drawing/2014/main" id="{6A59F1EF-62D0-1053-52F9-22FA24E7D238}"/>
+                </a:ext>
+              </a:extLst>
+            </p:cNvPr>
+            <p:cNvSpPr txBox="1">
+              <a:spLocks noChangeArrowheads="1"/>
+            </p:cNvSpPr>
+            <p:nvPr/>
+          </p:nvSpPr>
+          <p:spPr bwMode="auto">
+            <a:xfrm>
+              <a:off x="6588224" y="1772816"/>
+              <a:ext cx="1404201" cy="369332"/>
+            </a:xfrm>
+            <a:prstGeom prst="rect">
+              <a:avLst/>
+            </a:prstGeom>
+            <a:noFill/>
+            <a:ln>
+              <a:noFill/>
+            </a:ln>
+            <a:extLst>
+              <a:ext uri="{909E8E84-426E-40DD-AFC4-6F175D3DCCD1}">
+                <a14:hiddenFill xmlns:a14="http://schemas.microsoft.com/office/drawing/2010/main">
+                  <a:solidFill>
+                    <a:srgbClr val="FFFFFF"/>
+                  </a:solidFill>
+                </a14:hiddenFill>
+              </a:ext>
+              <a:ext uri="{91240B29-F687-4F45-9708-019B960494DF}">
+                <a14:hiddenLine xmlns:a14="http://schemas.microsoft.com/office/drawing/2010/main" w="9525">
+                  <a:solidFill>
+                    <a:srgbClr val="000000"/>
+                  </a:solidFill>
+                  <a:miter lim="800000"/>
+                  <a:headEnd/>
+                  <a:tailEnd/>
+                </a14:hiddenLine>
+              </a:ext>
+            </a:extLst>
+          </p:spPr>
+          <p:txBody>
+            <a:bodyPr wrap="none">
+              <a:spAutoFit/>
+            </a:bodyPr>
+            <a:lstStyle>
+              <a:lvl1pPr eaLnBrk="0" hangingPunct="0">
+                <a:defRPr sz="2400">
+                  <a:solidFill>
+                    <a:schemeClr val="tx1"/>
+                  </a:solidFill>
+                  <a:latin typeface="Arial" charset="0"/>
+                  <a:ea typeface="ＭＳ Ｐゴシック" charset="-128"/>
+                </a:defRPr>
+              </a:lvl1pPr>
+              <a:lvl2pPr marL="742950" indent="-285750" eaLnBrk="0" hangingPunct="0">
+                <a:defRPr sz="2400">
+                  <a:solidFill>
+                    <a:schemeClr val="tx1"/>
+                  </a:solidFill>
+                  <a:latin typeface="Arial" charset="0"/>
+                  <a:ea typeface="ＭＳ Ｐゴシック" charset="-128"/>
+                </a:defRPr>
+              </a:lvl2pPr>
+              <a:lvl3pPr marL="1143000" indent="-228600" eaLnBrk="0" hangingPunct="0">
+                <a:defRPr sz="2400">
+                  <a:solidFill>
+                    <a:schemeClr val="tx1"/>
+                  </a:solidFill>
+                  <a:latin typeface="Arial" charset="0"/>
+                  <a:ea typeface="ＭＳ Ｐゴシック" charset="-128"/>
+                </a:defRPr>
+              </a:lvl3pPr>
+              <a:lvl4pPr marL="1600200" indent="-228600" eaLnBrk="0" hangingPunct="0">
+                <a:defRPr sz="2400">
+                  <a:solidFill>
+                    <a:schemeClr val="tx1"/>
+                  </a:solidFill>
+                  <a:latin typeface="Arial" charset="0"/>
+                  <a:ea typeface="ＭＳ Ｐゴシック" charset="-128"/>
+                </a:defRPr>
+              </a:lvl4pPr>
+              <a:lvl5pPr marL="2057400" indent="-228600" eaLnBrk="0" hangingPunct="0">
+                <a:defRPr sz="2400">
+                  <a:solidFill>
+                    <a:schemeClr val="tx1"/>
+                  </a:solidFill>
+                  <a:latin typeface="Arial" charset="0"/>
+                  <a:ea typeface="ＭＳ Ｐゴシック" charset="-128"/>
+                </a:defRPr>
+              </a:lvl5pPr>
+              <a:lvl6pPr marL="2514600" indent="-228600" eaLnBrk="0" fontAlgn="base" hangingPunct="0">
+                <a:spcBef>
+                  <a:spcPct val="0"/>
+                </a:spcBef>
+                <a:spcAft>
+                  <a:spcPct val="0"/>
+                </a:spcAft>
+                <a:defRPr sz="2400">
+                  <a:solidFill>
+                    <a:schemeClr val="tx1"/>
+                  </a:solidFill>
+                  <a:latin typeface="Arial" charset="0"/>
+                  <a:ea typeface="ＭＳ Ｐゴシック" charset="-128"/>
+                </a:defRPr>
+              </a:lvl6pPr>
+              <a:lvl7pPr marL="2971800" indent="-228600" eaLnBrk="0" fontAlgn="base" hangingPunct="0">
+                <a:spcBef>
+                  <a:spcPct val="0"/>
+                </a:spcBef>
+                <a:spcAft>
+                  <a:spcPct val="0"/>
+                </a:spcAft>
+                <a:defRPr sz="2400">
+                  <a:solidFill>
+                    <a:schemeClr val="tx1"/>
+                  </a:solidFill>
+                  <a:latin typeface="Arial" charset="0"/>
+                  <a:ea typeface="ＭＳ Ｐゴシック" charset="-128"/>
+                </a:defRPr>
+              </a:lvl7pPr>
+              <a:lvl8pPr marL="3429000" indent="-228600" eaLnBrk="0" fontAlgn="base" hangingPunct="0">
+                <a:spcBef>
+                  <a:spcPct val="0"/>
+                </a:spcBef>
+                <a:spcAft>
+                  <a:spcPct val="0"/>
+                </a:spcAft>
+                <a:defRPr sz="2400">
+                  <a:solidFill>
+                    <a:schemeClr val="tx1"/>
+                  </a:solidFill>
+                  <a:latin typeface="Arial" charset="0"/>
+                  <a:ea typeface="ＭＳ Ｐゴシック" charset="-128"/>
+                </a:defRPr>
+              </a:lvl8pPr>
+              <a:lvl9pPr marL="3886200" indent="-228600" eaLnBrk="0" fontAlgn="base" hangingPunct="0">
+                <a:spcBef>
+                  <a:spcPct val="0"/>
+                </a:spcBef>
+                <a:spcAft>
+                  <a:spcPct val="0"/>
+                </a:spcAft>
+                <a:defRPr sz="2400">
+                  <a:solidFill>
+                    <a:schemeClr val="tx1"/>
+                  </a:solidFill>
+                  <a:latin typeface="Arial" charset="0"/>
+                  <a:ea typeface="ＭＳ Ｐゴシック" charset="-128"/>
+                </a:defRPr>
+              </a:lvl9pPr>
+            </a:lstStyle>
+            <a:p>
+              <a:pPr eaLnBrk="1" hangingPunct="1"/>
+              <a:r>
+                <a:rPr lang="en-US" altLang="x-none" sz="1800"/>
+                <a:t>3.14159298</a:t>
+              </a:r>
+            </a:p>
+          </p:txBody>
+        </p:sp>
+        <p:sp>
+          <p:nvSpPr>
+            <p:cNvPr id="15" name="TextBox 21">
+              <a:extLst>
+                <a:ext uri="{FF2B5EF4-FFF2-40B4-BE49-F238E27FC236}">
+                  <a16:creationId xmlns:a16="http://schemas.microsoft.com/office/drawing/2014/main" id="{89CA3602-C364-0B21-51F3-DFBBCFDCFB80}"/>
+                </a:ext>
+              </a:extLst>
+            </p:cNvPr>
+            <p:cNvSpPr txBox="1">
+              <a:spLocks noChangeArrowheads="1"/>
+            </p:cNvSpPr>
+            <p:nvPr/>
+          </p:nvSpPr>
+          <p:spPr bwMode="auto">
+            <a:xfrm>
+              <a:off x="971600" y="1700808"/>
+              <a:ext cx="1404201" cy="369332"/>
+            </a:xfrm>
+            <a:prstGeom prst="rect">
+              <a:avLst/>
+            </a:prstGeom>
+            <a:noFill/>
+            <a:ln>
+              <a:noFill/>
+            </a:ln>
+            <a:extLst>
+              <a:ext uri="{909E8E84-426E-40DD-AFC4-6F175D3DCCD1}">
+                <a14:hiddenFill xmlns:a14="http://schemas.microsoft.com/office/drawing/2010/main">
+                  <a:solidFill>
+                    <a:srgbClr val="FFFFFF"/>
+                  </a:solidFill>
+                </a14:hiddenFill>
+              </a:ext>
+              <a:ext uri="{91240B29-F687-4F45-9708-019B960494DF}">
+                <a14:hiddenLine xmlns:a14="http://schemas.microsoft.com/office/drawing/2010/main" w="9525">
+                  <a:solidFill>
+                    <a:srgbClr val="000000"/>
+                  </a:solidFill>
+                  <a:miter lim="800000"/>
+                  <a:headEnd/>
+                  <a:tailEnd/>
+                </a14:hiddenLine>
+              </a:ext>
+            </a:extLst>
+          </p:spPr>
+          <p:txBody>
+            <a:bodyPr wrap="none">
+              <a:spAutoFit/>
+            </a:bodyPr>
+            <a:lstStyle>
+              <a:lvl1pPr eaLnBrk="0" hangingPunct="0">
+                <a:defRPr sz="2400">
+                  <a:solidFill>
+                    <a:schemeClr val="tx1"/>
+                  </a:solidFill>
+                  <a:latin typeface="Arial" charset="0"/>
+                  <a:ea typeface="ＭＳ Ｐゴシック" charset="-128"/>
+                </a:defRPr>
+              </a:lvl1pPr>
+              <a:lvl2pPr marL="742950" indent="-285750" eaLnBrk="0" hangingPunct="0">
+                <a:defRPr sz="2400">
+                  <a:solidFill>
+                    <a:schemeClr val="tx1"/>
+                  </a:solidFill>
+                  <a:latin typeface="Arial" charset="0"/>
+                  <a:ea typeface="ＭＳ Ｐゴシック" charset="-128"/>
+                </a:defRPr>
+              </a:lvl2pPr>
+              <a:lvl3pPr marL="1143000" indent="-228600" eaLnBrk="0" hangingPunct="0">
+                <a:defRPr sz="2400">
+                  <a:solidFill>
+                    <a:schemeClr val="tx1"/>
+                  </a:solidFill>
+                  <a:latin typeface="Arial" charset="0"/>
+                  <a:ea typeface="ＭＳ Ｐゴシック" charset="-128"/>
+                </a:defRPr>
+              </a:lvl3pPr>
+              <a:lvl4pPr marL="1600200" indent="-228600" eaLnBrk="0" hangingPunct="0">
+                <a:defRPr sz="2400">
+                  <a:solidFill>
+                    <a:schemeClr val="tx1"/>
+                  </a:solidFill>
+                  <a:latin typeface="Arial" charset="0"/>
+                  <a:ea typeface="ＭＳ Ｐゴシック" charset="-128"/>
+                </a:defRPr>
+              </a:lvl4pPr>
+              <a:lvl5pPr marL="2057400" indent="-228600" eaLnBrk="0" hangingPunct="0">
+                <a:defRPr sz="2400">
+                  <a:solidFill>
+                    <a:schemeClr val="tx1"/>
+                  </a:solidFill>
+                  <a:latin typeface="Arial" charset="0"/>
+                  <a:ea typeface="ＭＳ Ｐゴシック" charset="-128"/>
+                </a:defRPr>
+              </a:lvl5pPr>
+              <a:lvl6pPr marL="2514600" indent="-228600" eaLnBrk="0" fontAlgn="base" hangingPunct="0">
+                <a:spcBef>
+                  <a:spcPct val="0"/>
+                </a:spcBef>
+                <a:spcAft>
+                  <a:spcPct val="0"/>
+                </a:spcAft>
+                <a:defRPr sz="2400">
+                  <a:solidFill>
+                    <a:schemeClr val="tx1"/>
+                  </a:solidFill>
+                  <a:latin typeface="Arial" charset="0"/>
+                  <a:ea typeface="ＭＳ Ｐゴシック" charset="-128"/>
+                </a:defRPr>
+              </a:lvl6pPr>
+              <a:lvl7pPr marL="2971800" indent="-228600" eaLnBrk="0" fontAlgn="base" hangingPunct="0">
+                <a:spcBef>
+                  <a:spcPct val="0"/>
+                </a:spcBef>
+                <a:spcAft>
+                  <a:spcPct val="0"/>
+                </a:spcAft>
+                <a:defRPr sz="2400">
+                  <a:solidFill>
+                    <a:schemeClr val="tx1"/>
+                  </a:solidFill>
+                  <a:latin typeface="Arial" charset="0"/>
+                  <a:ea typeface="ＭＳ Ｐゴシック" charset="-128"/>
+                </a:defRPr>
+              </a:lvl7pPr>
+              <a:lvl8pPr marL="3429000" indent="-228600" eaLnBrk="0" fontAlgn="base" hangingPunct="0">
+                <a:spcBef>
+                  <a:spcPct val="0"/>
+                </a:spcBef>
+                <a:spcAft>
+                  <a:spcPct val="0"/>
+                </a:spcAft>
+                <a:defRPr sz="2400">
+                  <a:solidFill>
+                    <a:schemeClr val="tx1"/>
+                  </a:solidFill>
+                  <a:latin typeface="Arial" charset="0"/>
+                  <a:ea typeface="ＭＳ Ｐゴシック" charset="-128"/>
+                </a:defRPr>
+              </a:lvl8pPr>
+              <a:lvl9pPr marL="3886200" indent="-228600" eaLnBrk="0" fontAlgn="base" hangingPunct="0">
+                <a:spcBef>
+                  <a:spcPct val="0"/>
+                </a:spcBef>
+                <a:spcAft>
+                  <a:spcPct val="0"/>
+                </a:spcAft>
+                <a:defRPr sz="2400">
+                  <a:solidFill>
+                    <a:schemeClr val="tx1"/>
+                  </a:solidFill>
+                  <a:latin typeface="Arial" charset="0"/>
+                  <a:ea typeface="ＭＳ Ｐゴシック" charset="-128"/>
+                </a:defRPr>
+              </a:lvl9pPr>
+            </a:lstStyle>
+            <a:p>
+              <a:pPr eaLnBrk="1" hangingPunct="1"/>
+              <a:r>
+                <a:rPr lang="en-US" altLang="x-none" sz="1800"/>
+                <a:t>3.14159250</a:t>
+              </a:r>
+            </a:p>
+          </p:txBody>
+        </p:sp>
+        <p:cxnSp>
+          <p:nvCxnSpPr>
+            <p:cNvPr id="16" name="Straight Arrow Connector 15">
+              <a:extLst>
+                <a:ext uri="{FF2B5EF4-FFF2-40B4-BE49-F238E27FC236}">
+                  <a16:creationId xmlns:a16="http://schemas.microsoft.com/office/drawing/2014/main" id="{55A41708-3507-93FE-41AC-24C6F319E7D6}"/>
+                </a:ext>
+              </a:extLst>
+            </p:cNvPr>
+            <p:cNvCxnSpPr>
+              <a:cxnSpLocks noChangeShapeType="1"/>
+            </p:cNvCxnSpPr>
+            <p:nvPr/>
+          </p:nvCxnSpPr>
+          <p:spPr bwMode="auto">
+            <a:xfrm>
+              <a:off x="2844317" y="2349048"/>
+              <a:ext cx="0" cy="360367"/>
+            </a:xfrm>
+            <a:prstGeom prst="straightConnector1">
+              <a:avLst/>
+            </a:prstGeom>
+            <a:noFill/>
+            <a:ln w="25400">
+              <a:solidFill>
+                <a:schemeClr val="tx1"/>
+              </a:solidFill>
+              <a:round/>
+              <a:headEnd/>
+              <a:tailEnd type="arrow" w="med" len="med"/>
+            </a:ln>
+            <a:effectLst>
+              <a:outerShdw blurRad="40000" dist="20000" dir="5400000" rotWithShape="0">
+                <a:srgbClr val="000000">
+                  <a:alpha val="37999"/>
+                </a:srgbClr>
+              </a:outerShdw>
+            </a:effectLst>
+            <a:extLst>
+              <a:ext uri="{909E8E84-426E-40DD-AFC4-6F175D3DCCD1}">
+                <a14:hiddenFill xmlns:a14="http://schemas.microsoft.com/office/drawing/2010/main">
+                  <a:noFill/>
+                </a14:hiddenFill>
+              </a:ext>
+            </a:extLst>
+          </p:spPr>
+        </p:cxnSp>
+        <p:cxnSp>
+          <p:nvCxnSpPr>
+            <p:cNvPr id="17" name="Straight Arrow Connector 16">
+              <a:extLst>
+                <a:ext uri="{FF2B5EF4-FFF2-40B4-BE49-F238E27FC236}">
+                  <a16:creationId xmlns:a16="http://schemas.microsoft.com/office/drawing/2014/main" id="{1F99F614-BCCC-24BA-A1BC-5FA4B09093BF}"/>
+                </a:ext>
+              </a:extLst>
+            </p:cNvPr>
+            <p:cNvCxnSpPr>
+              <a:cxnSpLocks noChangeShapeType="1"/>
+            </p:cNvCxnSpPr>
+            <p:nvPr/>
+          </p:nvCxnSpPr>
+          <p:spPr bwMode="auto">
+            <a:xfrm>
+              <a:off x="5868563" y="2349048"/>
+              <a:ext cx="0" cy="360367"/>
+            </a:xfrm>
+            <a:prstGeom prst="straightConnector1">
+              <a:avLst/>
+            </a:prstGeom>
+            <a:noFill/>
+            <a:ln w="25400">
+              <a:solidFill>
+                <a:schemeClr val="tx1"/>
+              </a:solidFill>
+              <a:round/>
+              <a:headEnd/>
+              <a:tailEnd type="arrow" w="med" len="med"/>
+            </a:ln>
+            <a:effectLst>
+              <a:outerShdw blurRad="40000" dist="20000" dir="5400000" rotWithShape="0">
+                <a:srgbClr val="000000">
+                  <a:alpha val="37999"/>
+                </a:srgbClr>
+              </a:outerShdw>
+            </a:effectLst>
+            <a:extLst>
+              <a:ext uri="{909E8E84-426E-40DD-AFC4-6F175D3DCCD1}">
+                <a14:hiddenFill xmlns:a14="http://schemas.microsoft.com/office/drawing/2010/main">
+                  <a:noFill/>
+                </a14:hiddenFill>
+              </a:ext>
+            </a:extLst>
+          </p:spPr>
+        </p:cxnSp>
+        <p:sp>
+          <p:nvSpPr>
+            <p:cNvPr id="18" name="TextBox 25">
+              <a:extLst>
+                <a:ext uri="{FF2B5EF4-FFF2-40B4-BE49-F238E27FC236}">
+                  <a16:creationId xmlns:a16="http://schemas.microsoft.com/office/drawing/2014/main" id="{044DDC94-42F7-90DF-A4B0-9D41FA23C55C}"/>
+                </a:ext>
+              </a:extLst>
+            </p:cNvPr>
+            <p:cNvSpPr txBox="1">
+              <a:spLocks noChangeArrowheads="1"/>
+            </p:cNvSpPr>
+            <p:nvPr/>
+          </p:nvSpPr>
+          <p:spPr bwMode="auto">
+            <a:xfrm>
+              <a:off x="2195736" y="1988840"/>
+              <a:ext cx="1660957" cy="369332"/>
+            </a:xfrm>
+            <a:prstGeom prst="rect">
+              <a:avLst/>
+            </a:prstGeom>
+            <a:noFill/>
+            <a:ln>
+              <a:noFill/>
+            </a:ln>
+            <a:extLst>
+              <a:ext uri="{909E8E84-426E-40DD-AFC4-6F175D3DCCD1}">
+                <a14:hiddenFill xmlns:a14="http://schemas.microsoft.com/office/drawing/2010/main">
+                  <a:solidFill>
+                    <a:srgbClr val="FFFFFF"/>
+                  </a:solidFill>
+                </a14:hiddenFill>
+              </a:ext>
+              <a:ext uri="{91240B29-F687-4F45-9708-019B960494DF}">
+                <a14:hiddenLine xmlns:a14="http://schemas.microsoft.com/office/drawing/2010/main" w="9525">
+                  <a:solidFill>
+                    <a:srgbClr val="000000"/>
+                  </a:solidFill>
+                  <a:miter lim="800000"/>
+                  <a:headEnd/>
+                  <a:tailEnd/>
+                </a14:hiddenLine>
+              </a:ext>
+            </a:extLst>
+          </p:spPr>
+          <p:txBody>
+            <a:bodyPr wrap="none">
+              <a:spAutoFit/>
+            </a:bodyPr>
+            <a:lstStyle>
+              <a:lvl1pPr eaLnBrk="0" hangingPunct="0">
+                <a:defRPr sz="2400">
+                  <a:solidFill>
+                    <a:schemeClr val="tx1"/>
+                  </a:solidFill>
+                  <a:latin typeface="Arial" charset="0"/>
+                  <a:ea typeface="ＭＳ Ｐゴシック" charset="-128"/>
+                </a:defRPr>
+              </a:lvl1pPr>
+              <a:lvl2pPr marL="742950" indent="-285750" eaLnBrk="0" hangingPunct="0">
+                <a:defRPr sz="2400">
+                  <a:solidFill>
+                    <a:schemeClr val="tx1"/>
+                  </a:solidFill>
+                  <a:latin typeface="Arial" charset="0"/>
+                  <a:ea typeface="ＭＳ Ｐゴシック" charset="-128"/>
+                </a:defRPr>
+              </a:lvl2pPr>
+              <a:lvl3pPr marL="1143000" indent="-228600" eaLnBrk="0" hangingPunct="0">
+                <a:defRPr sz="2400">
+                  <a:solidFill>
+                    <a:schemeClr val="tx1"/>
+                  </a:solidFill>
+                  <a:latin typeface="Arial" charset="0"/>
+                  <a:ea typeface="ＭＳ Ｐゴシック" charset="-128"/>
+                </a:defRPr>
+              </a:lvl3pPr>
+              <a:lvl4pPr marL="1600200" indent="-228600" eaLnBrk="0" hangingPunct="0">
+                <a:defRPr sz="2400">
+                  <a:solidFill>
+                    <a:schemeClr val="tx1"/>
+                  </a:solidFill>
+                  <a:latin typeface="Arial" charset="0"/>
+                  <a:ea typeface="ＭＳ Ｐゴシック" charset="-128"/>
+                </a:defRPr>
+              </a:lvl4pPr>
+              <a:lvl5pPr marL="2057400" indent="-228600" eaLnBrk="0" hangingPunct="0">
+                <a:defRPr sz="2400">
+                  <a:solidFill>
+                    <a:schemeClr val="tx1"/>
+                  </a:solidFill>
+                  <a:latin typeface="Arial" charset="0"/>
+                  <a:ea typeface="ＭＳ Ｐゴシック" charset="-128"/>
+                </a:defRPr>
+              </a:lvl5pPr>
+              <a:lvl6pPr marL="2514600" indent="-228600" eaLnBrk="0" fontAlgn="base" hangingPunct="0">
+                <a:spcBef>
+                  <a:spcPct val="0"/>
+                </a:spcBef>
+                <a:spcAft>
+                  <a:spcPct val="0"/>
+                </a:spcAft>
+                <a:defRPr sz="2400">
+                  <a:solidFill>
+                    <a:schemeClr val="tx1"/>
+                  </a:solidFill>
+                  <a:latin typeface="Arial" charset="0"/>
+                  <a:ea typeface="ＭＳ Ｐゴシック" charset="-128"/>
+                </a:defRPr>
+              </a:lvl6pPr>
+              <a:lvl7pPr marL="2971800" indent="-228600" eaLnBrk="0" fontAlgn="base" hangingPunct="0">
+                <a:spcBef>
+                  <a:spcPct val="0"/>
+                </a:spcBef>
+                <a:spcAft>
+                  <a:spcPct val="0"/>
+                </a:spcAft>
+                <a:defRPr sz="2400">
+                  <a:solidFill>
+                    <a:schemeClr val="tx1"/>
+                  </a:solidFill>
+                  <a:latin typeface="Arial" charset="0"/>
+                  <a:ea typeface="ＭＳ Ｐゴシック" charset="-128"/>
+                </a:defRPr>
+              </a:lvl7pPr>
+              <a:lvl8pPr marL="3429000" indent="-228600" eaLnBrk="0" fontAlgn="base" hangingPunct="0">
+                <a:spcBef>
+                  <a:spcPct val="0"/>
+                </a:spcBef>
+                <a:spcAft>
+                  <a:spcPct val="0"/>
+                </a:spcAft>
+                <a:defRPr sz="2400">
+                  <a:solidFill>
+                    <a:schemeClr val="tx1"/>
+                  </a:solidFill>
+                  <a:latin typeface="Arial" charset="0"/>
+                  <a:ea typeface="ＭＳ Ｐゴシック" charset="-128"/>
+                </a:defRPr>
+              </a:lvl8pPr>
+              <a:lvl9pPr marL="3886200" indent="-228600" eaLnBrk="0" fontAlgn="base" hangingPunct="0">
+                <a:spcBef>
+                  <a:spcPct val="0"/>
+                </a:spcBef>
+                <a:spcAft>
+                  <a:spcPct val="0"/>
+                </a:spcAft>
+                <a:defRPr sz="2400">
+                  <a:solidFill>
+                    <a:schemeClr val="tx1"/>
+                  </a:solidFill>
+                  <a:latin typeface="Arial" charset="0"/>
+                  <a:ea typeface="ＭＳ Ｐゴシック" charset="-128"/>
+                </a:defRPr>
+              </a:lvl9pPr>
+            </a:lstStyle>
+            <a:p>
+              <a:pPr eaLnBrk="1" hangingPunct="1"/>
+              <a:r>
+                <a:rPr lang="en-US" altLang="x-none" sz="1800"/>
+                <a:t>3.1415926218</a:t>
+              </a:r>
+            </a:p>
+          </p:txBody>
+        </p:sp>
+        <p:sp>
+          <p:nvSpPr>
+            <p:cNvPr id="19" name="TextBox 26">
+              <a:extLst>
+                <a:ext uri="{FF2B5EF4-FFF2-40B4-BE49-F238E27FC236}">
+                  <a16:creationId xmlns:a16="http://schemas.microsoft.com/office/drawing/2014/main" id="{854015D3-9213-39E0-47F6-20ADF760D69D}"/>
+                </a:ext>
+              </a:extLst>
+            </p:cNvPr>
+            <p:cNvSpPr txBox="1">
+              <a:spLocks noChangeArrowheads="1"/>
+            </p:cNvSpPr>
+            <p:nvPr/>
+          </p:nvSpPr>
+          <p:spPr bwMode="auto">
+            <a:xfrm>
+              <a:off x="5076056" y="1988840"/>
+              <a:ext cx="1789334" cy="369332"/>
+            </a:xfrm>
+            <a:prstGeom prst="rect">
+              <a:avLst/>
+            </a:prstGeom>
+            <a:noFill/>
+            <a:ln>
+              <a:noFill/>
+            </a:ln>
+            <a:extLst>
+              <a:ext uri="{909E8E84-426E-40DD-AFC4-6F175D3DCCD1}">
+                <a14:hiddenFill xmlns:a14="http://schemas.microsoft.com/office/drawing/2010/main">
+                  <a:solidFill>
+                    <a:srgbClr val="FFFFFF"/>
+                  </a:solidFill>
+                </a14:hiddenFill>
+              </a:ext>
+              <a:ext uri="{91240B29-F687-4F45-9708-019B960494DF}">
+                <a14:hiddenLine xmlns:a14="http://schemas.microsoft.com/office/drawing/2010/main" w="9525">
+                  <a:solidFill>
+                    <a:srgbClr val="000000"/>
+                  </a:solidFill>
+                  <a:miter lim="800000"/>
+                  <a:headEnd/>
+                  <a:tailEnd/>
+                </a14:hiddenLine>
+              </a:ext>
+            </a:extLst>
+          </p:spPr>
+          <p:txBody>
+            <a:bodyPr wrap="none">
+              <a:spAutoFit/>
+            </a:bodyPr>
+            <a:lstStyle>
+              <a:lvl1pPr eaLnBrk="0" hangingPunct="0">
+                <a:defRPr sz="2400">
+                  <a:solidFill>
+                    <a:schemeClr val="tx1"/>
+                  </a:solidFill>
+                  <a:latin typeface="Arial" charset="0"/>
+                  <a:ea typeface="ＭＳ Ｐゴシック" charset="-128"/>
+                </a:defRPr>
+              </a:lvl1pPr>
+              <a:lvl2pPr marL="742950" indent="-285750" eaLnBrk="0" hangingPunct="0">
+                <a:defRPr sz="2400">
+                  <a:solidFill>
+                    <a:schemeClr val="tx1"/>
+                  </a:solidFill>
+                  <a:latin typeface="Arial" charset="0"/>
+                  <a:ea typeface="ＭＳ Ｐゴシック" charset="-128"/>
+                </a:defRPr>
+              </a:lvl2pPr>
+              <a:lvl3pPr marL="1143000" indent="-228600" eaLnBrk="0" hangingPunct="0">
+                <a:defRPr sz="2400">
+                  <a:solidFill>
+                    <a:schemeClr val="tx1"/>
+                  </a:solidFill>
+                  <a:latin typeface="Arial" charset="0"/>
+                  <a:ea typeface="ＭＳ Ｐゴシック" charset="-128"/>
+                </a:defRPr>
+              </a:lvl3pPr>
+              <a:lvl4pPr marL="1600200" indent="-228600" eaLnBrk="0" hangingPunct="0">
+                <a:defRPr sz="2400">
+                  <a:solidFill>
+                    <a:schemeClr val="tx1"/>
+                  </a:solidFill>
+                  <a:latin typeface="Arial" charset="0"/>
+                  <a:ea typeface="ＭＳ Ｐゴシック" charset="-128"/>
+                </a:defRPr>
+              </a:lvl4pPr>
+              <a:lvl5pPr marL="2057400" indent="-228600" eaLnBrk="0" hangingPunct="0">
+                <a:defRPr sz="2400">
+                  <a:solidFill>
+                    <a:schemeClr val="tx1"/>
+                  </a:solidFill>
+                  <a:latin typeface="Arial" charset="0"/>
+                  <a:ea typeface="ＭＳ Ｐゴシック" charset="-128"/>
+                </a:defRPr>
+              </a:lvl5pPr>
+              <a:lvl6pPr marL="2514600" indent="-228600" eaLnBrk="0" fontAlgn="base" hangingPunct="0">
+                <a:spcBef>
+                  <a:spcPct val="0"/>
+                </a:spcBef>
+                <a:spcAft>
+                  <a:spcPct val="0"/>
+                </a:spcAft>
+                <a:defRPr sz="2400">
+                  <a:solidFill>
+                    <a:schemeClr val="tx1"/>
+                  </a:solidFill>
+                  <a:latin typeface="Arial" charset="0"/>
+                  <a:ea typeface="ＭＳ Ｐゴシック" charset="-128"/>
+                </a:defRPr>
+              </a:lvl6pPr>
+              <a:lvl7pPr marL="2971800" indent="-228600" eaLnBrk="0" fontAlgn="base" hangingPunct="0">
+                <a:spcBef>
+                  <a:spcPct val="0"/>
+                </a:spcBef>
+                <a:spcAft>
+                  <a:spcPct val="0"/>
+                </a:spcAft>
+                <a:defRPr sz="2400">
+                  <a:solidFill>
+                    <a:schemeClr val="tx1"/>
+                  </a:solidFill>
+                  <a:latin typeface="Arial" charset="0"/>
+                  <a:ea typeface="ＭＳ Ｐゴシック" charset="-128"/>
+                </a:defRPr>
+              </a:lvl7pPr>
+              <a:lvl8pPr marL="3429000" indent="-228600" eaLnBrk="0" fontAlgn="base" hangingPunct="0">
+                <a:spcBef>
+                  <a:spcPct val="0"/>
+                </a:spcBef>
+                <a:spcAft>
+                  <a:spcPct val="0"/>
+                </a:spcAft>
+                <a:defRPr sz="2400">
+                  <a:solidFill>
+                    <a:schemeClr val="tx1"/>
+                  </a:solidFill>
+                  <a:latin typeface="Arial" charset="0"/>
+                  <a:ea typeface="ＭＳ Ｐゴシック" charset="-128"/>
+                </a:defRPr>
+              </a:lvl8pPr>
+              <a:lvl9pPr marL="3886200" indent="-228600" eaLnBrk="0" fontAlgn="base" hangingPunct="0">
+                <a:spcBef>
+                  <a:spcPct val="0"/>
+                </a:spcBef>
+                <a:spcAft>
+                  <a:spcPct val="0"/>
+                </a:spcAft>
+                <a:defRPr sz="2400">
+                  <a:solidFill>
+                    <a:schemeClr val="tx1"/>
+                  </a:solidFill>
+                  <a:latin typeface="Arial" charset="0"/>
+                  <a:ea typeface="ＭＳ Ｐゴシック" charset="-128"/>
+                </a:defRPr>
+              </a:lvl9pPr>
+            </a:lstStyle>
+            <a:p>
+              <a:pPr eaLnBrk="1" hangingPunct="1"/>
+              <a:r>
+                <a:rPr lang="en-US" altLang="x-none" sz="1800"/>
+                <a:t>3.14159286022</a:t>
+              </a:r>
+            </a:p>
+          </p:txBody>
+        </p:sp>
+        <p:sp>
+          <p:nvSpPr>
+            <p:cNvPr id="20" name="Right Brace 19">
+              <a:extLst>
+                <a:ext uri="{FF2B5EF4-FFF2-40B4-BE49-F238E27FC236}">
+                  <a16:creationId xmlns:a16="http://schemas.microsoft.com/office/drawing/2014/main" id="{325B6550-875B-B4DB-809F-413D0C9C7493}"/>
+                </a:ext>
+              </a:extLst>
+            </p:cNvPr>
+            <p:cNvSpPr>
+              <a:spLocks/>
+            </p:cNvSpPr>
+            <p:nvPr/>
+          </p:nvSpPr>
+          <p:spPr bwMode="auto">
+            <a:xfrm rot="5400000" flipV="1">
+              <a:off x="3959560" y="1664022"/>
+              <a:ext cx="792172" cy="3168711"/>
+            </a:xfrm>
+            <a:prstGeom prst="rightBrace">
+              <a:avLst>
+                <a:gd name="adj1" fmla="val 8333"/>
+                <a:gd name="adj2" fmla="val 50000"/>
+              </a:avLst>
+            </a:prstGeom>
+            <a:noFill/>
+            <a:ln w="25400">
+              <a:solidFill>
+                <a:schemeClr val="accent1"/>
+              </a:solidFill>
+              <a:round/>
+              <a:headEnd/>
+              <a:tailEnd/>
+            </a:ln>
+            <a:effectLst>
+              <a:outerShdw blurRad="40000" dist="20000" dir="5400000" rotWithShape="0">
+                <a:srgbClr val="000000">
+                  <a:alpha val="37999"/>
+                </a:srgbClr>
+              </a:outerShdw>
+            </a:effectLst>
+            <a:extLst>
+              <a:ext uri="{909E8E84-426E-40DD-AFC4-6F175D3DCCD1}">
+                <a14:hiddenFill xmlns:a14="http://schemas.microsoft.com/office/drawing/2010/main">
+                  <a:solidFill>
+                    <a:srgbClr val="FFFFFF"/>
+                  </a:solidFill>
+                </a14:hiddenFill>
+              </a:ext>
+            </a:extLst>
+          </p:spPr>
+          <p:txBody>
+            <a:bodyPr anchor="ctr"/>
+            <a:lstStyle>
+              <a:lvl1pPr eaLnBrk="0" hangingPunct="0">
+                <a:defRPr sz="2400">
+                  <a:solidFill>
+                    <a:schemeClr val="tx1"/>
+                  </a:solidFill>
+                  <a:latin typeface="Arial" charset="0"/>
+                  <a:ea typeface="ＭＳ Ｐゴシック" charset="-128"/>
+                </a:defRPr>
+              </a:lvl1pPr>
+              <a:lvl2pPr marL="742950" indent="-285750" eaLnBrk="0" hangingPunct="0">
+                <a:defRPr sz="2400">
+                  <a:solidFill>
+                    <a:schemeClr val="tx1"/>
+                  </a:solidFill>
+                  <a:latin typeface="Arial" charset="0"/>
+                  <a:ea typeface="ＭＳ Ｐゴシック" charset="-128"/>
+                </a:defRPr>
+              </a:lvl2pPr>
+              <a:lvl3pPr marL="1143000" indent="-228600" eaLnBrk="0" hangingPunct="0">
+                <a:defRPr sz="2400">
+                  <a:solidFill>
+                    <a:schemeClr val="tx1"/>
+                  </a:solidFill>
+                  <a:latin typeface="Arial" charset="0"/>
+                  <a:ea typeface="ＭＳ Ｐゴシック" charset="-128"/>
+                </a:defRPr>
+              </a:lvl3pPr>
+              <a:lvl4pPr marL="1600200" indent="-228600" eaLnBrk="0" hangingPunct="0">
+                <a:defRPr sz="2400">
+                  <a:solidFill>
+                    <a:schemeClr val="tx1"/>
+                  </a:solidFill>
+                  <a:latin typeface="Arial" charset="0"/>
+                  <a:ea typeface="ＭＳ Ｐゴシック" charset="-128"/>
+                </a:defRPr>
+              </a:lvl4pPr>
+              <a:lvl5pPr marL="2057400" indent="-228600" eaLnBrk="0" hangingPunct="0">
+                <a:defRPr sz="2400">
+                  <a:solidFill>
+                    <a:schemeClr val="tx1"/>
+                  </a:solidFill>
+                  <a:latin typeface="Arial" charset="0"/>
+                  <a:ea typeface="ＭＳ Ｐゴシック" charset="-128"/>
+                </a:defRPr>
+              </a:lvl5pPr>
+              <a:lvl6pPr marL="2514600" indent="-228600" eaLnBrk="0" fontAlgn="base" hangingPunct="0">
+                <a:spcBef>
+                  <a:spcPct val="0"/>
+                </a:spcBef>
+                <a:spcAft>
+                  <a:spcPct val="0"/>
+                </a:spcAft>
+                <a:defRPr sz="2400">
+                  <a:solidFill>
+                    <a:schemeClr val="tx1"/>
+                  </a:solidFill>
+                  <a:latin typeface="Arial" charset="0"/>
+                  <a:ea typeface="ＭＳ Ｐゴシック" charset="-128"/>
+                </a:defRPr>
+              </a:lvl6pPr>
+              <a:lvl7pPr marL="2971800" indent="-228600" eaLnBrk="0" fontAlgn="base" hangingPunct="0">
+                <a:spcBef>
+                  <a:spcPct val="0"/>
+                </a:spcBef>
+                <a:spcAft>
+                  <a:spcPct val="0"/>
+                </a:spcAft>
+                <a:defRPr sz="2400">
+                  <a:solidFill>
+                    <a:schemeClr val="tx1"/>
+                  </a:solidFill>
+                  <a:latin typeface="Arial" charset="0"/>
+                  <a:ea typeface="ＭＳ Ｐゴシック" charset="-128"/>
+                </a:defRPr>
+              </a:lvl7pPr>
+              <a:lvl8pPr marL="3429000" indent="-228600" eaLnBrk="0" fontAlgn="base" hangingPunct="0">
+                <a:spcBef>
+                  <a:spcPct val="0"/>
+                </a:spcBef>
+                <a:spcAft>
+                  <a:spcPct val="0"/>
+                </a:spcAft>
+                <a:defRPr sz="2400">
+                  <a:solidFill>
+                    <a:schemeClr val="tx1"/>
+                  </a:solidFill>
+                  <a:latin typeface="Arial" charset="0"/>
+                  <a:ea typeface="ＭＳ Ｐゴシック" charset="-128"/>
+                </a:defRPr>
+              </a:lvl8pPr>
+              <a:lvl9pPr marL="3886200" indent="-228600" eaLnBrk="0" fontAlgn="base" hangingPunct="0">
+                <a:spcBef>
+                  <a:spcPct val="0"/>
+                </a:spcBef>
+                <a:spcAft>
+                  <a:spcPct val="0"/>
+                </a:spcAft>
+                <a:defRPr sz="2400">
+                  <a:solidFill>
+                    <a:schemeClr val="tx1"/>
+                  </a:solidFill>
+                  <a:latin typeface="Arial" charset="0"/>
+                  <a:ea typeface="ＭＳ Ｐゴシック" charset="-128"/>
+                </a:defRPr>
+              </a:lvl9pPr>
+            </a:lstStyle>
+            <a:p>
+              <a:pPr algn="ctr" eaLnBrk="1" hangingPunct="1"/>
+              <a:endParaRPr lang="en-US" altLang="x-none" sz="1800"/>
+            </a:p>
+          </p:txBody>
+        </p:sp>
+        <p:sp>
+          <p:nvSpPr>
+            <p:cNvPr id="21" name="TextBox 28">
+              <a:extLst>
+                <a:ext uri="{FF2B5EF4-FFF2-40B4-BE49-F238E27FC236}">
+                  <a16:creationId xmlns:a16="http://schemas.microsoft.com/office/drawing/2014/main" id="{68E838FC-A75C-B2F1-36C7-9C117998FF8B}"/>
+                </a:ext>
+              </a:extLst>
+            </p:cNvPr>
+            <p:cNvSpPr txBox="1">
+              <a:spLocks noChangeArrowheads="1"/>
+            </p:cNvSpPr>
+            <p:nvPr/>
+          </p:nvSpPr>
+          <p:spPr bwMode="auto">
+            <a:xfrm>
+              <a:off x="3491880" y="3645024"/>
+              <a:ext cx="1769497" cy="369332"/>
+            </a:xfrm>
+            <a:prstGeom prst="rect">
+              <a:avLst/>
+            </a:prstGeom>
+            <a:noFill/>
+            <a:ln>
+              <a:noFill/>
+            </a:ln>
+            <a:extLst>
+              <a:ext uri="{909E8E84-426E-40DD-AFC4-6F175D3DCCD1}">
+                <a14:hiddenFill xmlns:a14="http://schemas.microsoft.com/office/drawing/2010/main">
+                  <a:solidFill>
+                    <a:srgbClr val="FFFFFF"/>
+                  </a:solidFill>
+                </a14:hiddenFill>
+              </a:ext>
+              <a:ext uri="{91240B29-F687-4F45-9708-019B960494DF}">
+                <a14:hiddenLine xmlns:a14="http://schemas.microsoft.com/office/drawing/2010/main" w="9525">
+                  <a:solidFill>
+                    <a:srgbClr val="000000"/>
+                  </a:solidFill>
+                  <a:miter lim="800000"/>
+                  <a:headEnd/>
+                  <a:tailEnd/>
+                </a14:hiddenLine>
+              </a:ext>
+            </a:extLst>
+          </p:spPr>
+          <p:txBody>
+            <a:bodyPr wrap="none">
+              <a:spAutoFit/>
+            </a:bodyPr>
+            <a:lstStyle>
+              <a:lvl1pPr eaLnBrk="0" hangingPunct="0">
+                <a:defRPr sz="2400">
+                  <a:solidFill>
+                    <a:schemeClr val="tx1"/>
+                  </a:solidFill>
+                  <a:latin typeface="Arial" charset="0"/>
+                  <a:ea typeface="ＭＳ Ｐゴシック" charset="-128"/>
+                </a:defRPr>
+              </a:lvl1pPr>
+              <a:lvl2pPr marL="742950" indent="-285750" eaLnBrk="0" hangingPunct="0">
+                <a:defRPr sz="2400">
+                  <a:solidFill>
+                    <a:schemeClr val="tx1"/>
+                  </a:solidFill>
+                  <a:latin typeface="Arial" charset="0"/>
+                  <a:ea typeface="ＭＳ Ｐゴシック" charset="-128"/>
+                </a:defRPr>
+              </a:lvl2pPr>
+              <a:lvl3pPr marL="1143000" indent="-228600" eaLnBrk="0" hangingPunct="0">
+                <a:defRPr sz="2400">
+                  <a:solidFill>
+                    <a:schemeClr val="tx1"/>
+                  </a:solidFill>
+                  <a:latin typeface="Arial" charset="0"/>
+                  <a:ea typeface="ＭＳ Ｐゴシック" charset="-128"/>
+                </a:defRPr>
+              </a:lvl3pPr>
+              <a:lvl4pPr marL="1600200" indent="-228600" eaLnBrk="0" hangingPunct="0">
+                <a:defRPr sz="2400">
+                  <a:solidFill>
+                    <a:schemeClr val="tx1"/>
+                  </a:solidFill>
+                  <a:latin typeface="Arial" charset="0"/>
+                  <a:ea typeface="ＭＳ Ｐゴシック" charset="-128"/>
+                </a:defRPr>
+              </a:lvl4pPr>
+              <a:lvl5pPr marL="2057400" indent="-228600" eaLnBrk="0" hangingPunct="0">
+                <a:defRPr sz="2400">
+                  <a:solidFill>
+                    <a:schemeClr val="tx1"/>
+                  </a:solidFill>
+                  <a:latin typeface="Arial" charset="0"/>
+                  <a:ea typeface="ＭＳ Ｐゴシック" charset="-128"/>
+                </a:defRPr>
+              </a:lvl5pPr>
+              <a:lvl6pPr marL="2514600" indent="-228600" eaLnBrk="0" fontAlgn="base" hangingPunct="0">
+                <a:spcBef>
+                  <a:spcPct val="0"/>
+                </a:spcBef>
+                <a:spcAft>
+                  <a:spcPct val="0"/>
+                </a:spcAft>
+                <a:defRPr sz="2400">
+                  <a:solidFill>
+                    <a:schemeClr val="tx1"/>
+                  </a:solidFill>
+                  <a:latin typeface="Arial" charset="0"/>
+                  <a:ea typeface="ＭＳ Ｐゴシック" charset="-128"/>
+                </a:defRPr>
+              </a:lvl6pPr>
+              <a:lvl7pPr marL="2971800" indent="-228600" eaLnBrk="0" fontAlgn="base" hangingPunct="0">
+                <a:spcBef>
+                  <a:spcPct val="0"/>
+                </a:spcBef>
+                <a:spcAft>
+                  <a:spcPct val="0"/>
+                </a:spcAft>
+                <a:defRPr sz="2400">
+                  <a:solidFill>
+                    <a:schemeClr val="tx1"/>
+                  </a:solidFill>
+                  <a:latin typeface="Arial" charset="0"/>
+                  <a:ea typeface="ＭＳ Ｐゴシック" charset="-128"/>
+                </a:defRPr>
+              </a:lvl7pPr>
+              <a:lvl8pPr marL="3429000" indent="-228600" eaLnBrk="0" fontAlgn="base" hangingPunct="0">
+                <a:spcBef>
+                  <a:spcPct val="0"/>
+                </a:spcBef>
+                <a:spcAft>
+                  <a:spcPct val="0"/>
+                </a:spcAft>
+                <a:defRPr sz="2400">
+                  <a:solidFill>
+                    <a:schemeClr val="tx1"/>
+                  </a:solidFill>
+                  <a:latin typeface="Arial" charset="0"/>
+                  <a:ea typeface="ＭＳ Ｐゴシック" charset="-128"/>
+                </a:defRPr>
+              </a:lvl8pPr>
+              <a:lvl9pPr marL="3886200" indent="-228600" eaLnBrk="0" fontAlgn="base" hangingPunct="0">
+                <a:spcBef>
+                  <a:spcPct val="0"/>
+                </a:spcBef>
+                <a:spcAft>
+                  <a:spcPct val="0"/>
+                </a:spcAft>
+                <a:defRPr sz="2400">
+                  <a:solidFill>
+                    <a:schemeClr val="tx1"/>
+                  </a:solidFill>
+                  <a:latin typeface="Arial" charset="0"/>
+                  <a:ea typeface="ＭＳ Ｐゴシック" charset="-128"/>
+                </a:defRPr>
+              </a:lvl9pPr>
+            </a:lstStyle>
+            <a:p>
+              <a:pPr eaLnBrk="1" hangingPunct="1"/>
+              <a:r>
+                <a:rPr lang="en-US" altLang="x-none" sz="1800" b="1">
+                  <a:solidFill>
+                    <a:srgbClr val="3366FF"/>
+                  </a:solidFill>
+                </a:rPr>
+                <a:t>0x1.921fb6p+1</a:t>
+              </a:r>
+            </a:p>
+          </p:txBody>
+        </p:sp>
+      </p:grpSp>
+      <p:cxnSp>
+        <p:nvCxnSpPr>
+          <p:cNvPr id="22" name="Straight Arrow Connector 21">
+            <a:extLst>
+              <a:ext uri="{FF2B5EF4-FFF2-40B4-BE49-F238E27FC236}">
+                <a16:creationId xmlns:a16="http://schemas.microsoft.com/office/drawing/2014/main" id="{83E1C98D-09CA-4D8C-DE4E-8F86C76056E6}"/>
+              </a:ext>
+            </a:extLst>
+          </p:cNvPr>
+          <p:cNvCxnSpPr>
+            <a:cxnSpLocks noChangeShapeType="1"/>
+          </p:cNvCxnSpPr>
+          <p:nvPr/>
+        </p:nvCxnSpPr>
+        <p:spPr bwMode="auto">
+          <a:xfrm>
+            <a:off x="4368558" y="4325674"/>
+            <a:ext cx="431800" cy="0"/>
+          </a:xfrm>
+          <a:prstGeom prst="straightConnector1">
+            <a:avLst/>
+          </a:prstGeom>
+          <a:noFill/>
+          <a:ln w="25400">
+            <a:solidFill>
+              <a:schemeClr val="accent1"/>
+            </a:solidFill>
+            <a:round/>
+            <a:headEnd/>
+            <a:tailEnd type="arrow" w="med" len="med"/>
+          </a:ln>
+          <a:effectLst>
+            <a:outerShdw blurRad="40000" dist="20000" dir="5400000" rotWithShape="0">
+              <a:srgbClr val="000000">
+                <a:alpha val="37999"/>
+              </a:srgbClr>
+            </a:outerShdw>
+          </a:effectLst>
+          <a:extLst>
+            <a:ext uri="{909E8E84-426E-40DD-AFC4-6F175D3DCCD1}">
+              <a14:hiddenFill xmlns:a14="http://schemas.microsoft.com/office/drawing/2010/main">
+                <a:noFill/>
+              </a14:hiddenFill>
+            </a:ext>
+          </a:extLst>
+        </p:spPr>
+      </p:cxnSp>
+      <p:cxnSp>
+        <p:nvCxnSpPr>
+          <p:cNvPr id="23" name="Straight Arrow Connector 22">
+            <a:extLst>
+              <a:ext uri="{FF2B5EF4-FFF2-40B4-BE49-F238E27FC236}">
+                <a16:creationId xmlns:a16="http://schemas.microsoft.com/office/drawing/2014/main" id="{7CA9C9EA-1988-CAF2-C977-231B3CF91DCB}"/>
+              </a:ext>
+            </a:extLst>
+          </p:cNvPr>
+          <p:cNvCxnSpPr>
+            <a:cxnSpLocks noChangeShapeType="1"/>
+          </p:cNvCxnSpPr>
+          <p:nvPr/>
+        </p:nvCxnSpPr>
+        <p:spPr bwMode="auto">
+          <a:xfrm flipH="1" flipV="1">
+            <a:off x="2857258" y="4325674"/>
+            <a:ext cx="431800" cy="0"/>
+          </a:xfrm>
+          <a:prstGeom prst="straightConnector1">
+            <a:avLst/>
+          </a:prstGeom>
+          <a:noFill/>
+          <a:ln w="25400">
+            <a:solidFill>
+              <a:schemeClr val="accent1"/>
+            </a:solidFill>
+            <a:round/>
+            <a:headEnd/>
+            <a:tailEnd type="arrow" w="med" len="med"/>
+          </a:ln>
+          <a:effectLst>
+            <a:outerShdw blurRad="40000" dist="20000" dir="5400000" rotWithShape="0">
+              <a:srgbClr val="000000">
+                <a:alpha val="37999"/>
+              </a:srgbClr>
+            </a:outerShdw>
+          </a:effectLst>
+          <a:extLst>
+            <a:ext uri="{909E8E84-426E-40DD-AFC4-6F175D3DCCD1}">
+              <a14:hiddenFill xmlns:a14="http://schemas.microsoft.com/office/drawing/2010/main">
+                <a:noFill/>
+              </a14:hiddenFill>
+            </a:ext>
+          </a:extLst>
+        </p:spPr>
+      </p:cxnSp>
+      <p:sp>
+        <p:nvSpPr>
+          <p:cNvPr id="24" name="TextBox 23">
+            <a:extLst>
+              <a:ext uri="{FF2B5EF4-FFF2-40B4-BE49-F238E27FC236}">
+                <a16:creationId xmlns:a16="http://schemas.microsoft.com/office/drawing/2014/main" id="{41EE3197-2DFE-ECFA-751E-8054D5C4A238}"/>
+              </a:ext>
+            </a:extLst>
+          </p:cNvPr>
+          <p:cNvSpPr txBox="1"/>
+          <p:nvPr/>
+        </p:nvSpPr>
+        <p:spPr>
+          <a:xfrm>
+            <a:off x="3504735" y="4109799"/>
+            <a:ext cx="642160" cy="369332"/>
+          </a:xfrm>
+          <a:prstGeom prst="rect">
+            <a:avLst/>
+          </a:prstGeom>
+          <a:noFill/>
+        </p:spPr>
+        <p:txBody>
+          <a:bodyPr wrap="none">
+            <a:spAutoFit/>
+          </a:bodyPr>
+          <a:lstStyle/>
+          <a:p>
+            <a:pPr>
+              <a:defRPr/>
+            </a:pPr>
+            <a:r>
+              <a:rPr lang="en-US" b="1" dirty="0">
+                <a:ln w="17780" cmpd="sng">
+                  <a:solidFill>
+                    <a:schemeClr val="accent1">
+                      <a:tint val="3000"/>
+                    </a:schemeClr>
+                  </a:solidFill>
+                  <a:prstDash val="solid"/>
+                  <a:miter lim="800000"/>
+                </a:ln>
+                <a:gradFill>
+                  <a:gsLst>
+                    <a:gs pos="10000">
+                      <a:schemeClr val="accent1">
+                        <a:tint val="63000"/>
+                        <a:sat val="105000"/>
+                      </a:schemeClr>
+                    </a:gs>
+                    <a:gs pos="90000">
+                      <a:schemeClr val="accent1">
+                        <a:shade val="50000"/>
+                        <a:satMod val="100000"/>
+                      </a:schemeClr>
+                    </a:gs>
+                  </a:gsLst>
+                  <a:lin ang="5400000"/>
+                </a:gradFill>
+                <a:effectLst>
+                  <a:outerShdw blurRad="55000" dist="50800" dir="5400000" algn="tl">
+                    <a:srgbClr val="000000">
+                      <a:alpha val="33000"/>
+                    </a:srgbClr>
+                  </a:outerShdw>
+                </a:effectLst>
+                <a:ea typeface="ＭＳ Ｐゴシック" charset="0"/>
+                <a:cs typeface="ＭＳ Ｐゴシック" charset="0"/>
+              </a:rPr>
+              <a:t>ULP</a:t>
+            </a:r>
           </a:p>
         </p:txBody>
       </p:sp>

--- a/Slides/FPforScientist.pptx
+++ b/Slides/FPforScientist.pptx
@@ -7,8 +7,9 @@
   <p:sldIdLst>
     <p:sldId id="257" r:id="rId2"/>
     <p:sldId id="258" r:id="rId3"/>
-    <p:sldId id="259" r:id="rId4"/>
-    <p:sldId id="256" r:id="rId5"/>
+    <p:sldId id="260" r:id="rId4"/>
+    <p:sldId id="259" r:id="rId5"/>
+    <p:sldId id="256" r:id="rId6"/>
   </p:sldIdLst>
   <p:sldSz cx="12192000" cy="6858000"/>
   <p:notesSz cx="6858000" cy="9144000"/>
@@ -3916,6 +3917,149 @@
           <p:cNvPr id="2" name="Title 1">
             <a:extLst>
               <a:ext uri="{FF2B5EF4-FFF2-40B4-BE49-F238E27FC236}">
+                <a16:creationId xmlns:a16="http://schemas.microsoft.com/office/drawing/2014/main" id="{7EE007A8-7189-021D-6B56-2AD6C8687A8B}"/>
+              </a:ext>
+            </a:extLst>
+          </p:cNvPr>
+          <p:cNvSpPr>
+            <a:spLocks noGrp="1"/>
+          </p:cNvSpPr>
+          <p:nvPr>
+            <p:ph type="title"/>
+          </p:nvPr>
+        </p:nvSpPr>
+        <p:spPr>
+          <a:xfrm>
+            <a:off x="838200" y="365126"/>
+            <a:ext cx="10515600" cy="858194"/>
+          </a:xfrm>
+        </p:spPr>
+        <p:txBody>
+          <a:bodyPr/>
+          <a:lstStyle/>
+          <a:p>
+            <a:r>
+              <a:rPr lang="en-US" dirty="0"/>
+              <a:t>FP on a Computer</a:t>
+            </a:r>
+          </a:p>
+        </p:txBody>
+      </p:sp>
+      <p:sp>
+        <p:nvSpPr>
+          <p:cNvPr id="3" name="Content Placeholder 2">
+            <a:extLst>
+              <a:ext uri="{FF2B5EF4-FFF2-40B4-BE49-F238E27FC236}">
+                <a16:creationId xmlns:a16="http://schemas.microsoft.com/office/drawing/2014/main" id="{A75F42EC-D4A4-BB1D-42E2-CC05E4E975AD}"/>
+              </a:ext>
+            </a:extLst>
+          </p:cNvPr>
+          <p:cNvSpPr>
+            <a:spLocks noGrp="1"/>
+          </p:cNvSpPr>
+          <p:nvPr>
+            <p:ph idx="1"/>
+          </p:nvPr>
+        </p:nvSpPr>
+        <p:spPr>
+          <a:xfrm>
+            <a:off x="838200" y="1223320"/>
+            <a:ext cx="10515600" cy="1523055"/>
+          </a:xfrm>
+        </p:spPr>
+        <p:txBody>
+          <a:bodyPr/>
+          <a:lstStyle/>
+          <a:p>
+            <a:r>
+              <a:rPr lang="en-US" dirty="0"/>
+              <a:t>FP are well suited to perform arithmetic on a computer</a:t>
+            </a:r>
+          </a:p>
+          <a:p>
+            <a:pPr lvl="1"/>
+            <a:r>
+              <a:rPr lang="en-US" dirty="0"/>
+              <a:t>Since 1985 FP representations and operations are standardized in IEEE754  (</a:t>
+            </a:r>
+            <a:r>
+              <a:rPr lang="en-US" dirty="0">
+                <a:hlinkClick r:id="rId2"/>
+              </a:rPr>
+              <a:t>https://en.wikipedia.org/wiki/IEEE_754</a:t>
+            </a:r>
+            <a:r>
+              <a:rPr lang="en-US" dirty="0"/>
+              <a:t>)</a:t>
+            </a:r>
+          </a:p>
+        </p:txBody>
+      </p:sp>
+      <p:pic>
+        <p:nvPicPr>
+          <p:cNvPr id="4" name="Picture 3">
+            <a:extLst>
+              <a:ext uri="{FF2B5EF4-FFF2-40B4-BE49-F238E27FC236}">
+                <a16:creationId xmlns:a16="http://schemas.microsoft.com/office/drawing/2014/main" id="{EDE99ED7-3831-8E78-7501-C819F3AA64D0}"/>
+              </a:ext>
+            </a:extLst>
+          </p:cNvPr>
+          <p:cNvPicPr>
+            <a:picLocks noChangeAspect="1"/>
+          </p:cNvPicPr>
+          <p:nvPr/>
+        </p:nvPicPr>
+        <p:blipFill>
+          <a:blip r:embed="rId3"/>
+          <a:stretch>
+            <a:fillRect/>
+          </a:stretch>
+        </p:blipFill>
+        <p:spPr>
+          <a:xfrm>
+            <a:off x="1587209" y="2482846"/>
+            <a:ext cx="7772400" cy="4226873"/>
+          </a:xfrm>
+          <a:prstGeom prst="rect">
+            <a:avLst/>
+          </a:prstGeom>
+        </p:spPr>
+      </p:pic>
+    </p:spTree>
+    <p:extLst>
+      <p:ext uri="{BB962C8B-B14F-4D97-AF65-F5344CB8AC3E}">
+        <p14:creationId xmlns:p14="http://schemas.microsoft.com/office/powerpoint/2010/main" val="3168482662"/>
+      </p:ext>
+    </p:extLst>
+  </p:cSld>
+  <p:clrMapOvr>
+    <a:masterClrMapping/>
+  </p:clrMapOvr>
+</p:sld>
+</file>
+
+<file path=ppt/slides/slide4.xml><?xml version="1.0" encoding="utf-8"?>
+<p:sld xmlns:a="http://schemas.openxmlformats.org/drawingml/2006/main" xmlns:r="http://schemas.openxmlformats.org/officeDocument/2006/relationships" xmlns:p="http://schemas.openxmlformats.org/presentationml/2006/main">
+  <p:cSld>
+    <p:spTree>
+      <p:nvGrpSpPr>
+        <p:cNvPr id="1" name=""/>
+        <p:cNvGrpSpPr/>
+        <p:nvPr/>
+      </p:nvGrpSpPr>
+      <p:grpSpPr>
+        <a:xfrm>
+          <a:off x="0" y="0"/>
+          <a:ext cx="0" cy="0"/>
+          <a:chOff x="0" y="0"/>
+          <a:chExt cx="0" cy="0"/>
+        </a:xfrm>
+      </p:grpSpPr>
+      <p:sp>
+        <p:nvSpPr>
+          <p:cNvPr id="2" name="Title 1">
+            <a:extLst>
+              <a:ext uri="{FF2B5EF4-FFF2-40B4-BE49-F238E27FC236}">
                 <a16:creationId xmlns:a16="http://schemas.microsoft.com/office/drawing/2014/main" id="{AD30F8CC-3C21-4921-6714-6705D02DF9EA}"/>
               </a:ext>
             </a:extLst>
@@ -3934,15 +4078,7 @@
           <a:p>
             <a:r>
               <a:rPr lang="en-US" dirty="0"/>
-              <a:t>Some Trivial </a:t>
-            </a:r>
-            <a:r>
-              <a:rPr lang="en-US" dirty="0" err="1"/>
-              <a:t>proprerties</a:t>
-            </a:r>
-            <a:r>
-              <a:rPr lang="en-US" dirty="0"/>
-              <a:t> of FP</a:t>
+              <a:t>Some Trivial properties of FP</a:t>
             </a:r>
           </a:p>
         </p:txBody>
@@ -4332,7 +4468,7 @@
 </p:sld>
 </file>
 
-<file path=ppt/slides/slide4.xml><?xml version="1.0" encoding="utf-8"?>
+<file path=ppt/slides/slide5.xml><?xml version="1.0" encoding="utf-8"?>
 <p:sld xmlns:a="http://schemas.openxmlformats.org/drawingml/2006/main" xmlns:r="http://schemas.openxmlformats.org/officeDocument/2006/relationships" xmlns:p="http://schemas.openxmlformats.org/presentationml/2006/main">
   <p:cSld>
     <p:spTree>

--- a/Slides/FPforScientist.pptx
+++ b/Slides/FPforScientist.pptx
@@ -7,9 +7,15 @@
   <p:sldIdLst>
     <p:sldId id="257" r:id="rId2"/>
     <p:sldId id="258" r:id="rId3"/>
-    <p:sldId id="260" r:id="rId4"/>
-    <p:sldId id="259" r:id="rId5"/>
-    <p:sldId id="256" r:id="rId6"/>
+    <p:sldId id="259" r:id="rId4"/>
+    <p:sldId id="256" r:id="rId5"/>
+    <p:sldId id="260" r:id="rId6"/>
+    <p:sldId id="261" r:id="rId7"/>
+    <p:sldId id="455" r:id="rId8"/>
+    <p:sldId id="439" r:id="rId9"/>
+    <p:sldId id="394" r:id="rId10"/>
+    <p:sldId id="262" r:id="rId11"/>
+    <p:sldId id="456" r:id="rId12"/>
   </p:sldIdLst>
   <p:sldSz cx="12192000" cy="6858000"/>
   <p:notesSz cx="6858000" cy="9144000"/>
@@ -3721,6 +3727,267 @@
 </p:sld>
 </file>
 
+<file path=ppt/slides/slide10.xml><?xml version="1.0" encoding="utf-8"?>
+<p:sld xmlns:a="http://schemas.openxmlformats.org/drawingml/2006/main" xmlns:r="http://schemas.openxmlformats.org/officeDocument/2006/relationships" xmlns:p="http://schemas.openxmlformats.org/presentationml/2006/main">
+  <p:cSld>
+    <p:spTree>
+      <p:nvGrpSpPr>
+        <p:cNvPr id="1" name=""/>
+        <p:cNvGrpSpPr/>
+        <p:nvPr/>
+      </p:nvGrpSpPr>
+      <p:grpSpPr>
+        <a:xfrm>
+          <a:off x="0" y="0"/>
+          <a:ext cx="0" cy="0"/>
+          <a:chOff x="0" y="0"/>
+          <a:chExt cx="0" cy="0"/>
+        </a:xfrm>
+      </p:grpSpPr>
+      <p:sp>
+        <p:nvSpPr>
+          <p:cNvPr id="2" name="Title 1">
+            <a:extLst>
+              <a:ext uri="{FF2B5EF4-FFF2-40B4-BE49-F238E27FC236}">
+                <a16:creationId xmlns:a16="http://schemas.microsoft.com/office/drawing/2014/main" id="{923E6E17-2320-B4E8-C34D-A4003CB03E70}"/>
+              </a:ext>
+            </a:extLst>
+          </p:cNvPr>
+          <p:cNvSpPr>
+            <a:spLocks noGrp="1"/>
+          </p:cNvSpPr>
+          <p:nvPr>
+            <p:ph type="title"/>
+          </p:nvPr>
+        </p:nvSpPr>
+        <p:spPr/>
+        <p:txBody>
+          <a:bodyPr>
+            <a:normAutofit/>
+          </a:bodyPr>
+          <a:lstStyle/>
+          <a:p>
+            <a:r>
+              <a:rPr lang="en-US" dirty="0"/>
+              <a:t>Fixed width floating-point types (since C++23)</a:t>
+            </a:r>
+            <a:br>
+              <a:rPr lang="en-US" dirty="0"/>
+            </a:br>
+            <a:r>
+              <a:rPr lang="en-US" sz="2800" dirty="0">
+                <a:hlinkClick r:id="rId2"/>
+              </a:rPr>
+              <a:t>https://en.cppreference.com/w/cpp/types/floating-point.html</a:t>
+            </a:r>
+            <a:endParaRPr lang="en-US" dirty="0"/>
+          </a:p>
+        </p:txBody>
+      </p:sp>
+      <p:pic>
+        <p:nvPicPr>
+          <p:cNvPr id="3" name="Picture 2">
+            <a:extLst>
+              <a:ext uri="{FF2B5EF4-FFF2-40B4-BE49-F238E27FC236}">
+                <a16:creationId xmlns:a16="http://schemas.microsoft.com/office/drawing/2014/main" id="{F578096F-C156-5E7E-33C3-8A1ECDE36552}"/>
+              </a:ext>
+            </a:extLst>
+          </p:cNvPr>
+          <p:cNvPicPr>
+            <a:picLocks noChangeAspect="1"/>
+          </p:cNvPicPr>
+          <p:nvPr/>
+        </p:nvPicPr>
+        <p:blipFill>
+          <a:blip r:embed="rId3"/>
+          <a:stretch>
+            <a:fillRect/>
+          </a:stretch>
+        </p:blipFill>
+        <p:spPr>
+          <a:xfrm>
+            <a:off x="48769" y="1824630"/>
+            <a:ext cx="12094461" cy="2912178"/>
+          </a:xfrm>
+          <a:prstGeom prst="rect">
+            <a:avLst/>
+          </a:prstGeom>
+        </p:spPr>
+      </p:pic>
+    </p:spTree>
+    <p:extLst>
+      <p:ext uri="{BB962C8B-B14F-4D97-AF65-F5344CB8AC3E}">
+        <p14:creationId xmlns:p14="http://schemas.microsoft.com/office/powerpoint/2010/main" val="341417512"/>
+      </p:ext>
+    </p:extLst>
+  </p:cSld>
+  <p:clrMapOvr>
+    <a:masterClrMapping/>
+  </p:clrMapOvr>
+</p:sld>
+</file>
+
+<file path=ppt/slides/slide11.xml><?xml version="1.0" encoding="utf-8"?>
+<p:sld xmlns:a="http://schemas.openxmlformats.org/drawingml/2006/main" xmlns:r="http://schemas.openxmlformats.org/officeDocument/2006/relationships" xmlns:p="http://schemas.openxmlformats.org/presentationml/2006/main">
+  <p:cSld>
+    <p:spTree>
+      <p:nvGrpSpPr>
+        <p:cNvPr id="1" name=""/>
+        <p:cNvGrpSpPr/>
+        <p:nvPr/>
+      </p:nvGrpSpPr>
+      <p:grpSpPr>
+        <a:xfrm>
+          <a:off x="0" y="0"/>
+          <a:ext cx="0" cy="0"/>
+          <a:chOff x="0" y="0"/>
+          <a:chExt cx="0" cy="0"/>
+        </a:xfrm>
+      </p:grpSpPr>
+      <p:sp>
+        <p:nvSpPr>
+          <p:cNvPr id="2" name="Title 1">
+            <a:extLst>
+              <a:ext uri="{FF2B5EF4-FFF2-40B4-BE49-F238E27FC236}">
+                <a16:creationId xmlns:a16="http://schemas.microsoft.com/office/drawing/2014/main" id="{5FDB25DD-862D-7A79-453B-2A77FA25C26C}"/>
+              </a:ext>
+            </a:extLst>
+          </p:cNvPr>
+          <p:cNvSpPr>
+            <a:spLocks noGrp="1"/>
+          </p:cNvSpPr>
+          <p:nvPr>
+            <p:ph type="title"/>
+          </p:nvPr>
+        </p:nvSpPr>
+        <p:spPr/>
+        <p:txBody>
+          <a:bodyPr/>
+          <a:lstStyle/>
+          <a:p>
+            <a:r>
+              <a:rPr lang="en-US" dirty="0"/>
+              <a:t>Python interlude</a:t>
+            </a:r>
+          </a:p>
+        </p:txBody>
+      </p:sp>
+      <p:sp>
+        <p:nvSpPr>
+          <p:cNvPr id="3" name="Content Placeholder 2">
+            <a:extLst>
+              <a:ext uri="{FF2B5EF4-FFF2-40B4-BE49-F238E27FC236}">
+                <a16:creationId xmlns:a16="http://schemas.microsoft.com/office/drawing/2014/main" id="{F0B6797E-987F-A023-3746-9B0EAF6BF4C6}"/>
+              </a:ext>
+            </a:extLst>
+          </p:cNvPr>
+          <p:cNvSpPr>
+            <a:spLocks noGrp="1"/>
+          </p:cNvSpPr>
+          <p:nvPr>
+            <p:ph idx="1"/>
+          </p:nvPr>
+        </p:nvSpPr>
+        <p:spPr/>
+        <p:txBody>
+          <a:bodyPr/>
+          <a:lstStyle/>
+          <a:p>
+            <a:r>
+              <a:rPr lang="en-US" dirty="0"/>
+              <a:t>Python intrinsic “float” is actually double precision</a:t>
+            </a:r>
+          </a:p>
+          <a:p>
+            <a:pPr lvl="1"/>
+            <a:r>
+              <a:rPr lang="en-US" dirty="0" err="1"/>
+              <a:t>float.hex</a:t>
+            </a:r>
+            <a:r>
+              <a:rPr lang="en-US" dirty="0"/>
+              <a:t>() and </a:t>
+            </a:r>
+            <a:r>
+              <a:rPr lang="en-US" dirty="0" err="1"/>
+              <a:t>float.fromhex</a:t>
+            </a:r>
+            <a:r>
+              <a:rPr lang="en-US" dirty="0"/>
+              <a:t>() allows </a:t>
+            </a:r>
+            <a:r>
+              <a:rPr lang="en-US"/>
+              <a:t>to convert </a:t>
+            </a:r>
+            <a:r>
+              <a:rPr lang="en-US" dirty="0"/>
+              <a:t>to/from </a:t>
+            </a:r>
+            <a:r>
+              <a:rPr lang="en-US" dirty="0" err="1"/>
+              <a:t>exadecimal</a:t>
+            </a:r>
+            <a:r>
+              <a:rPr lang="en-US" dirty="0"/>
+              <a:t> string</a:t>
+            </a:r>
+          </a:p>
+          <a:p>
+            <a:r>
+              <a:rPr lang="en-US" b="1" dirty="0" err="1"/>
+              <a:t>numpy</a:t>
+            </a:r>
+            <a:r>
+              <a:rPr lang="en-US" dirty="0"/>
+              <a:t> defines float16, float32, float64 (and float128 on x86_64)</a:t>
+            </a:r>
+          </a:p>
+          <a:p>
+            <a:pPr lvl="1"/>
+            <a:r>
+              <a:rPr lang="en-US" dirty="0">
+                <a:hlinkClick r:id="rId2"/>
+              </a:rPr>
+              <a:t>https://numpy.org/doc/2.3/reference/arrays.scalars.html - floating-point-types</a:t>
+            </a:r>
+            <a:endParaRPr lang="en-US" dirty="0"/>
+          </a:p>
+          <a:p>
+            <a:r>
+              <a:rPr lang="en-US" b="1" dirty="0"/>
+              <a:t>decimal</a:t>
+            </a:r>
+            <a:r>
+              <a:rPr lang="en-US" dirty="0"/>
+              <a:t> is a module providing FP in base 10</a:t>
+            </a:r>
+          </a:p>
+          <a:p>
+            <a:pPr lvl="1"/>
+            <a:r>
+              <a:rPr lang="en-US" dirty="0">
+                <a:hlinkClick r:id="rId3"/>
+              </a:rPr>
+              <a:t>https://docs.python.org/3/library/decimal.html</a:t>
+            </a:r>
+            <a:endParaRPr lang="en-US" dirty="0"/>
+          </a:p>
+        </p:txBody>
+      </p:sp>
+    </p:spTree>
+    <p:extLst>
+      <p:ext uri="{BB962C8B-B14F-4D97-AF65-F5344CB8AC3E}">
+        <p14:creationId xmlns:p14="http://schemas.microsoft.com/office/powerpoint/2010/main" val="4164329877"/>
+      </p:ext>
+    </p:extLst>
+  </p:cSld>
+  <p:clrMapOvr>
+    <a:masterClrMapping/>
+  </p:clrMapOvr>
+</p:sld>
+</file>
+
 <file path=ppt/slides/slide2.xml><?xml version="1.0" encoding="utf-8"?>
 <p:sld xmlns:a="http://schemas.openxmlformats.org/drawingml/2006/main" xmlns:r="http://schemas.openxmlformats.org/officeDocument/2006/relationships" xmlns:p="http://schemas.openxmlformats.org/presentationml/2006/main">
   <p:cSld>
@@ -3917,7 +4184,7 @@
           <p:cNvPr id="2" name="Title 1">
             <a:extLst>
               <a:ext uri="{FF2B5EF4-FFF2-40B4-BE49-F238E27FC236}">
-                <a16:creationId xmlns:a16="http://schemas.microsoft.com/office/drawing/2014/main" id="{7EE007A8-7189-021D-6B56-2AD6C8687A8B}"/>
+                <a16:creationId xmlns:a16="http://schemas.microsoft.com/office/drawing/2014/main" id="{AD30F8CC-3C21-4921-6714-6705D02DF9EA}"/>
               </a:ext>
             </a:extLst>
           </p:cNvPr>
@@ -3928,19 +4195,14 @@
             <p:ph type="title"/>
           </p:nvPr>
         </p:nvSpPr>
-        <p:spPr>
-          <a:xfrm>
-            <a:off x="838200" y="365126"/>
-            <a:ext cx="10515600" cy="858194"/>
-          </a:xfrm>
-        </p:spPr>
+        <p:spPr/>
         <p:txBody>
           <a:bodyPr/>
           <a:lstStyle/>
           <a:p>
             <a:r>
               <a:rPr lang="en-US" dirty="0"/>
-              <a:t>FP on a Computer</a:t>
+              <a:t>Some Trivial properties of FP</a:t>
             </a:r>
           </a:p>
         </p:txBody>
@@ -3950,7 +4212,7 @@
           <p:cNvPr id="3" name="Content Placeholder 2">
             <a:extLst>
               <a:ext uri="{FF2B5EF4-FFF2-40B4-BE49-F238E27FC236}">
-                <a16:creationId xmlns:a16="http://schemas.microsoft.com/office/drawing/2014/main" id="{A75F42EC-D4A4-BB1D-42E2-CC05E4E975AD}"/>
+                <a16:creationId xmlns:a16="http://schemas.microsoft.com/office/drawing/2014/main" id="{B8EFCA01-9C0D-C660-E004-78866BE1C22E}"/>
               </a:ext>
             </a:extLst>
           </p:cNvPr>
@@ -3961,74 +4223,366 @@
             <p:ph idx="1"/>
           </p:nvPr>
         </p:nvSpPr>
-        <p:spPr>
-          <a:xfrm>
-            <a:off x="838200" y="1223320"/>
-            <a:ext cx="10515600" cy="1523055"/>
-          </a:xfrm>
-        </p:spPr>
+        <p:spPr/>
         <p:txBody>
           <a:bodyPr/>
           <a:lstStyle/>
           <a:p>
             <a:r>
               <a:rPr lang="en-US" dirty="0"/>
-              <a:t>FP are well suited to perform arithmetic on a computer</a:t>
+              <a:t>Each FP has a previous and a next</a:t>
             </a:r>
           </a:p>
           <a:p>
             <a:pPr lvl="1"/>
             <a:r>
               <a:rPr lang="en-US" dirty="0"/>
-              <a:t>Since 1985 FP representations and operations are standardized in IEEE754  (</a:t>
-            </a:r>
-            <a:r>
-              <a:rPr lang="en-US" dirty="0">
-                <a:hlinkClick r:id="rId2"/>
-              </a:rPr>
-              <a:t>https://en.wikipedia.org/wiki/IEEE_754</a:t>
+              <a:t>Previous of 31ᐧ10</a:t>
+            </a:r>
+            <a:r>
+              <a:rPr lang="en-US" baseline="30000" dirty="0"/>
+              <a:t>-1 </a:t>
             </a:r>
             <a:r>
               <a:rPr lang="en-US" dirty="0"/>
-              <a:t>)</a:t>
+              <a:t>is</a:t>
+            </a:r>
+            <a:r>
+              <a:rPr lang="en-US" baseline="30000" dirty="0"/>
+              <a:t> </a:t>
+            </a:r>
+            <a:r>
+              <a:rPr lang="en-US" dirty="0"/>
+              <a:t>30ᐧ10</a:t>
+            </a:r>
+            <a:r>
+              <a:rPr lang="en-US" baseline="30000" dirty="0"/>
+              <a:t>-1</a:t>
+            </a:r>
+            <a:r>
+              <a:rPr lang="en-US" dirty="0"/>
+              <a:t>, next is 32ᐧ10</a:t>
+            </a:r>
+            <a:r>
+              <a:rPr lang="en-US" baseline="30000" dirty="0"/>
+              <a:t>-1</a:t>
+            </a:r>
+          </a:p>
+          <a:p>
+            <a:pPr lvl="1"/>
+            <a:r>
+              <a:rPr lang="en-US" dirty="0"/>
+              <a:t>Previous of </a:t>
+            </a:r>
+            <a:r>
+              <a:rPr lang="cs-CZ" altLang="x-none" dirty="0"/>
+              <a:t>1.921fb6</a:t>
+            </a:r>
+            <a:r>
+              <a:rPr lang="en-US" dirty="0" err="1"/>
+              <a:t>ᐧ</a:t>
+            </a:r>
+            <a:r>
+              <a:rPr lang="cs-CZ" altLang="x-none" dirty="0"/>
+              <a:t>2</a:t>
+            </a:r>
+            <a:r>
+              <a:rPr lang="cs-CZ" altLang="x-none" baseline="30000" dirty="0"/>
+              <a:t>+1  </a:t>
+            </a:r>
+            <a:r>
+              <a:rPr lang="cs-CZ" altLang="x-none" dirty="0" err="1"/>
+              <a:t>is</a:t>
+            </a:r>
+            <a:r>
+              <a:rPr lang="cs-CZ" altLang="x-none" dirty="0"/>
+              <a:t> 1.921fb4</a:t>
+            </a:r>
+            <a:r>
+              <a:rPr lang="en-US" dirty="0" err="1"/>
+              <a:t>ᐧ</a:t>
+            </a:r>
+            <a:r>
+              <a:rPr lang="cs-CZ" altLang="x-none" dirty="0"/>
+              <a:t>2</a:t>
+            </a:r>
+            <a:r>
+              <a:rPr lang="cs-CZ" altLang="x-none" baseline="30000" dirty="0"/>
+              <a:t>+1</a:t>
+            </a:r>
+            <a:r>
+              <a:rPr lang="cs-CZ" altLang="x-none" dirty="0"/>
+              <a:t>, </a:t>
+            </a:r>
+            <a:r>
+              <a:rPr lang="cs-CZ" altLang="x-none" dirty="0" err="1"/>
+              <a:t>next</a:t>
+            </a:r>
+            <a:r>
+              <a:rPr lang="cs-CZ" altLang="x-none" dirty="0"/>
+              <a:t> </a:t>
+            </a:r>
+            <a:r>
+              <a:rPr lang="cs-CZ" altLang="x-none" dirty="0" err="1"/>
+              <a:t>is</a:t>
+            </a:r>
+            <a:r>
+              <a:rPr lang="cs-CZ" altLang="x-none" dirty="0"/>
+              <a:t> 1.921fb8</a:t>
+            </a:r>
+            <a:r>
+              <a:rPr lang="en-US" dirty="0" err="1"/>
+              <a:t>ᐧ</a:t>
+            </a:r>
+            <a:r>
+              <a:rPr lang="cs-CZ" altLang="x-none" dirty="0"/>
+              <a:t>2</a:t>
+            </a:r>
+            <a:r>
+              <a:rPr lang="cs-CZ" altLang="x-none" baseline="30000" dirty="0"/>
+              <a:t>+1</a:t>
+            </a:r>
+            <a:r>
+              <a:rPr lang="cs-CZ" altLang="x-none" dirty="0"/>
+              <a:t> </a:t>
+            </a:r>
+          </a:p>
+          <a:p>
+            <a:pPr lvl="1"/>
+            <a:r>
+              <a:rPr lang="cs-CZ" altLang="x-none" dirty="0" err="1"/>
+              <a:t>The</a:t>
+            </a:r>
+            <a:r>
+              <a:rPr lang="cs-CZ" altLang="x-none" dirty="0"/>
+              <a:t> </a:t>
+            </a:r>
+            <a:r>
+              <a:rPr lang="cs-CZ" altLang="x-none" dirty="0" err="1"/>
+              <a:t>difference</a:t>
+            </a:r>
+            <a:r>
+              <a:rPr lang="cs-CZ" altLang="x-none" dirty="0"/>
+              <a:t> </a:t>
+            </a:r>
+            <a:r>
+              <a:rPr lang="cs-CZ" altLang="x-none" dirty="0" err="1"/>
+              <a:t>between</a:t>
+            </a:r>
+            <a:r>
+              <a:rPr lang="cs-CZ" altLang="x-none" dirty="0"/>
+              <a:t> </a:t>
+            </a:r>
+            <a:r>
+              <a:rPr lang="cs-CZ" altLang="x-none" dirty="0" err="1"/>
+              <a:t>two</a:t>
+            </a:r>
+            <a:r>
+              <a:rPr lang="cs-CZ" altLang="x-none" dirty="0"/>
+              <a:t> </a:t>
+            </a:r>
+            <a:r>
+              <a:rPr lang="cs-CZ" altLang="x-none" dirty="0" err="1"/>
+              <a:t>consecutive</a:t>
+            </a:r>
+            <a:r>
+              <a:rPr lang="cs-CZ" altLang="x-none" dirty="0"/>
+              <a:t> FP </a:t>
+            </a:r>
+            <a:r>
+              <a:rPr lang="cs-CZ" altLang="x-none" dirty="0" err="1"/>
+              <a:t>is</a:t>
+            </a:r>
+            <a:r>
+              <a:rPr lang="cs-CZ" altLang="x-none" dirty="0"/>
+              <a:t> </a:t>
+            </a:r>
+            <a:r>
+              <a:rPr lang="cs-CZ" altLang="x-none" dirty="0" err="1"/>
+              <a:t>called</a:t>
+            </a:r>
+            <a:r>
+              <a:rPr lang="cs-CZ" altLang="x-none" dirty="0"/>
+              <a:t> ULP (unit in last place)</a:t>
+            </a:r>
+          </a:p>
+          <a:p>
+            <a:r>
+              <a:rPr lang="cs-CZ" altLang="x-none" dirty="0" err="1"/>
+              <a:t>For</a:t>
+            </a:r>
+            <a:r>
+              <a:rPr lang="cs-CZ" altLang="x-none" dirty="0"/>
+              <a:t> </a:t>
+            </a:r>
+            <a:r>
+              <a:rPr lang="cs-CZ" altLang="x-none" dirty="0" err="1"/>
+              <a:t>each</a:t>
+            </a:r>
+            <a:r>
+              <a:rPr lang="cs-CZ" altLang="x-none" dirty="0"/>
+              <a:t> </a:t>
+            </a:r>
+            <a:r>
+              <a:rPr lang="cs-CZ" altLang="x-none" dirty="0" err="1"/>
+              <a:t>value</a:t>
+            </a:r>
+            <a:r>
+              <a:rPr lang="cs-CZ" altLang="x-none" dirty="0"/>
+              <a:t> </a:t>
+            </a:r>
+            <a:r>
+              <a:rPr lang="cs-CZ" altLang="x-none" dirty="0" err="1"/>
+              <a:t>of</a:t>
+            </a:r>
+            <a:r>
+              <a:rPr lang="cs-CZ" altLang="x-none" dirty="0"/>
+              <a:t> </a:t>
+            </a:r>
+            <a:r>
+              <a:rPr lang="cs-CZ" altLang="x-none" dirty="0" err="1"/>
+              <a:t>the</a:t>
+            </a:r>
+            <a:r>
+              <a:rPr lang="cs-CZ" altLang="x-none" dirty="0"/>
+              <a:t> exponent </a:t>
+            </a:r>
+            <a:r>
+              <a:rPr lang="cs-CZ" altLang="x-none" dirty="0" err="1"/>
+              <a:t>there</a:t>
+            </a:r>
+            <a:r>
+              <a:rPr lang="cs-CZ" altLang="x-none" dirty="0"/>
+              <a:t> </a:t>
+            </a:r>
+            <a:r>
+              <a:rPr lang="cs-CZ" altLang="x-none" dirty="0" err="1"/>
+              <a:t>is</a:t>
+            </a:r>
+            <a:r>
+              <a:rPr lang="cs-CZ" altLang="x-none" dirty="0"/>
+              <a:t> a </a:t>
+            </a:r>
+            <a:r>
+              <a:rPr lang="cs-CZ" altLang="x-none" dirty="0" err="1"/>
+              <a:t>finite</a:t>
+            </a:r>
+            <a:r>
+              <a:rPr lang="cs-CZ" altLang="x-none" dirty="0"/>
+              <a:t> </a:t>
+            </a:r>
+            <a:r>
+              <a:rPr lang="cs-CZ" altLang="x-none" dirty="0" err="1"/>
+              <a:t>number</a:t>
+            </a:r>
+            <a:r>
+              <a:rPr lang="cs-CZ" altLang="x-none" dirty="0"/>
+              <a:t> </a:t>
+            </a:r>
+            <a:r>
+              <a:rPr lang="cs-CZ" altLang="x-none" dirty="0" err="1"/>
+              <a:t>of</a:t>
+            </a:r>
+            <a:r>
+              <a:rPr lang="cs-CZ" altLang="x-none" dirty="0"/>
+              <a:t> FP</a:t>
+            </a:r>
+          </a:p>
+          <a:p>
+            <a:pPr lvl="1"/>
+            <a:r>
+              <a:rPr lang="cs-CZ" altLang="x-none" dirty="0"/>
+              <a:t> 10</a:t>
+            </a:r>
+            <a:r>
+              <a:rPr lang="cs-CZ" altLang="x-none" baseline="30000" dirty="0"/>
+              <a:t> </a:t>
+            </a:r>
+            <a:r>
+              <a:rPr lang="en-US" dirty="0"/>
+              <a:t>ᐧ10</a:t>
+            </a:r>
+            <a:r>
+              <a:rPr lang="en-US" baseline="30000" dirty="0"/>
+              <a:t>e</a:t>
+            </a:r>
+            <a:r>
+              <a:rPr lang="en-US" dirty="0"/>
+              <a:t> - </a:t>
+            </a:r>
+            <a:r>
+              <a:rPr lang="cs-CZ" dirty="0"/>
+              <a:t>99</a:t>
+            </a:r>
+            <a:r>
+              <a:rPr lang="cs-CZ" altLang="x-none" baseline="30000" dirty="0"/>
+              <a:t> </a:t>
+            </a:r>
+            <a:r>
+              <a:rPr lang="en-US" dirty="0"/>
+              <a:t>ᐧ10</a:t>
+            </a:r>
+            <a:r>
+              <a:rPr lang="en-US" baseline="30000" dirty="0"/>
+              <a:t>e</a:t>
+            </a:r>
+            <a:r>
+              <a:rPr lang="en-US" dirty="0"/>
+              <a:t> </a:t>
+            </a:r>
+          </a:p>
+          <a:p>
+            <a:pPr lvl="1"/>
+            <a:r>
+              <a:rPr lang="en-US" dirty="0"/>
+              <a:t>1.000000ᐧ</a:t>
+            </a:r>
+            <a:r>
+              <a:rPr lang="cs-CZ" altLang="x-none" dirty="0"/>
+              <a:t>2</a:t>
+            </a:r>
+            <a:r>
+              <a:rPr lang="en-US" baseline="30000" dirty="0"/>
+              <a:t>e </a:t>
+            </a:r>
+            <a:r>
+              <a:rPr lang="en-US" dirty="0"/>
+              <a:t>- 1.ffffffᐧ</a:t>
+            </a:r>
+            <a:r>
+              <a:rPr lang="cs-CZ" altLang="x-none" dirty="0"/>
+              <a:t>2</a:t>
+            </a:r>
+            <a:r>
+              <a:rPr lang="en-US" baseline="30000" dirty="0"/>
+              <a:t>e </a:t>
+            </a:r>
+            <a:r>
+              <a:rPr lang="en-US" dirty="0"/>
+              <a:t> </a:t>
+            </a:r>
+          </a:p>
+          <a:p>
+            <a:pPr lvl="1"/>
+            <a:r>
+              <a:rPr lang="en-US" dirty="0"/>
+              <a:t>(called “</a:t>
+            </a:r>
+            <a:r>
+              <a:rPr lang="en-US" dirty="0" err="1"/>
+              <a:t>binade</a:t>
+            </a:r>
+            <a:r>
+              <a:rPr lang="en-US" dirty="0"/>
+              <a:t>”)</a:t>
             </a:r>
           </a:p>
         </p:txBody>
       </p:sp>
-      <p:pic>
-        <p:nvPicPr>
-          <p:cNvPr id="4" name="Picture 3">
-            <a:extLst>
-              <a:ext uri="{FF2B5EF4-FFF2-40B4-BE49-F238E27FC236}">
-                <a16:creationId xmlns:a16="http://schemas.microsoft.com/office/drawing/2014/main" id="{EDE99ED7-3831-8E78-7501-C819F3AA64D0}"/>
-              </a:ext>
-            </a:extLst>
-          </p:cNvPr>
-          <p:cNvPicPr>
-            <a:picLocks noChangeAspect="1"/>
-          </p:cNvPicPr>
-          <p:nvPr/>
-        </p:nvPicPr>
-        <p:blipFill>
-          <a:blip r:embed="rId3"/>
-          <a:stretch>
-            <a:fillRect/>
-          </a:stretch>
-        </p:blipFill>
-        <p:spPr>
-          <a:xfrm>
-            <a:off x="1587209" y="2482846"/>
-            <a:ext cx="7772400" cy="4226873"/>
-          </a:xfrm>
-          <a:prstGeom prst="rect">
-            <a:avLst/>
-          </a:prstGeom>
-        </p:spPr>
-      </p:pic>
     </p:spTree>
     <p:extLst>
       <p:ext uri="{BB962C8B-B14F-4D97-AF65-F5344CB8AC3E}">
-        <p14:creationId xmlns:p14="http://schemas.microsoft.com/office/powerpoint/2010/main" val="3168482662"/>
+        <p14:creationId xmlns:p14="http://schemas.microsoft.com/office/powerpoint/2010/main" val="4071479380"/>
       </p:ext>
     </p:extLst>
   </p:cSld>
@@ -4057,436 +4611,6 @@
       </p:grpSpPr>
       <p:sp>
         <p:nvSpPr>
-          <p:cNvPr id="2" name="Title 1">
-            <a:extLst>
-              <a:ext uri="{FF2B5EF4-FFF2-40B4-BE49-F238E27FC236}">
-                <a16:creationId xmlns:a16="http://schemas.microsoft.com/office/drawing/2014/main" id="{AD30F8CC-3C21-4921-6714-6705D02DF9EA}"/>
-              </a:ext>
-            </a:extLst>
-          </p:cNvPr>
-          <p:cNvSpPr>
-            <a:spLocks noGrp="1"/>
-          </p:cNvSpPr>
-          <p:nvPr>
-            <p:ph type="title"/>
-          </p:nvPr>
-        </p:nvSpPr>
-        <p:spPr/>
-        <p:txBody>
-          <a:bodyPr/>
-          <a:lstStyle/>
-          <a:p>
-            <a:r>
-              <a:rPr lang="en-US" dirty="0"/>
-              <a:t>Some Trivial properties of FP</a:t>
-            </a:r>
-          </a:p>
-        </p:txBody>
-      </p:sp>
-      <p:sp>
-        <p:nvSpPr>
-          <p:cNvPr id="3" name="Content Placeholder 2">
-            <a:extLst>
-              <a:ext uri="{FF2B5EF4-FFF2-40B4-BE49-F238E27FC236}">
-                <a16:creationId xmlns:a16="http://schemas.microsoft.com/office/drawing/2014/main" id="{B8EFCA01-9C0D-C660-E004-78866BE1C22E}"/>
-              </a:ext>
-            </a:extLst>
-          </p:cNvPr>
-          <p:cNvSpPr>
-            <a:spLocks noGrp="1"/>
-          </p:cNvSpPr>
-          <p:nvPr>
-            <p:ph idx="1"/>
-          </p:nvPr>
-        </p:nvSpPr>
-        <p:spPr/>
-        <p:txBody>
-          <a:bodyPr/>
-          <a:lstStyle/>
-          <a:p>
-            <a:r>
-              <a:rPr lang="en-US" dirty="0"/>
-              <a:t>Each FP has a previous and a next</a:t>
-            </a:r>
-          </a:p>
-          <a:p>
-            <a:pPr lvl="1"/>
-            <a:r>
-              <a:rPr lang="en-US" dirty="0"/>
-              <a:t>Previous of 31ᐧ10</a:t>
-            </a:r>
-            <a:r>
-              <a:rPr lang="en-US" baseline="30000" dirty="0"/>
-              <a:t>-1 </a:t>
-            </a:r>
-            <a:r>
-              <a:rPr lang="en-US" dirty="0"/>
-              <a:t>is</a:t>
-            </a:r>
-            <a:r>
-              <a:rPr lang="en-US" baseline="30000" dirty="0"/>
-              <a:t> </a:t>
-            </a:r>
-            <a:r>
-              <a:rPr lang="en-US" dirty="0"/>
-              <a:t>30ᐧ10</a:t>
-            </a:r>
-            <a:r>
-              <a:rPr lang="en-US" baseline="30000" dirty="0"/>
-              <a:t>-1</a:t>
-            </a:r>
-            <a:r>
-              <a:rPr lang="en-US" dirty="0"/>
-              <a:t>, next is 32ᐧ10</a:t>
-            </a:r>
-            <a:r>
-              <a:rPr lang="en-US" baseline="30000" dirty="0"/>
-              <a:t>-1</a:t>
-            </a:r>
-          </a:p>
-          <a:p>
-            <a:pPr lvl="1"/>
-            <a:r>
-              <a:rPr lang="en-US" dirty="0"/>
-              <a:t>Previous of </a:t>
-            </a:r>
-            <a:r>
-              <a:rPr lang="cs-CZ" altLang="x-none" dirty="0"/>
-              <a:t>1.921fb6</a:t>
-            </a:r>
-            <a:r>
-              <a:rPr lang="en-US" dirty="0" err="1"/>
-              <a:t>ᐧ</a:t>
-            </a:r>
-            <a:r>
-              <a:rPr lang="cs-CZ" altLang="x-none" dirty="0"/>
-              <a:t>2</a:t>
-            </a:r>
-            <a:r>
-              <a:rPr lang="cs-CZ" altLang="x-none" baseline="30000" dirty="0"/>
-              <a:t>+1  </a:t>
-            </a:r>
-            <a:r>
-              <a:rPr lang="cs-CZ" altLang="x-none" dirty="0" err="1"/>
-              <a:t>is</a:t>
-            </a:r>
-            <a:r>
-              <a:rPr lang="cs-CZ" altLang="x-none" dirty="0"/>
-              <a:t> 1.921fb4</a:t>
-            </a:r>
-            <a:r>
-              <a:rPr lang="en-US" dirty="0" err="1"/>
-              <a:t>ᐧ</a:t>
-            </a:r>
-            <a:r>
-              <a:rPr lang="cs-CZ" altLang="x-none" dirty="0"/>
-              <a:t>2</a:t>
-            </a:r>
-            <a:r>
-              <a:rPr lang="cs-CZ" altLang="x-none" baseline="30000" dirty="0"/>
-              <a:t>+1</a:t>
-            </a:r>
-            <a:r>
-              <a:rPr lang="cs-CZ" altLang="x-none" dirty="0"/>
-              <a:t>, </a:t>
-            </a:r>
-            <a:r>
-              <a:rPr lang="cs-CZ" altLang="x-none" dirty="0" err="1"/>
-              <a:t>next</a:t>
-            </a:r>
-            <a:r>
-              <a:rPr lang="cs-CZ" altLang="x-none" dirty="0"/>
-              <a:t> </a:t>
-            </a:r>
-            <a:r>
-              <a:rPr lang="cs-CZ" altLang="x-none" dirty="0" err="1"/>
-              <a:t>is</a:t>
-            </a:r>
-            <a:r>
-              <a:rPr lang="cs-CZ" altLang="x-none" dirty="0"/>
-              <a:t> 1.921fb8</a:t>
-            </a:r>
-            <a:r>
-              <a:rPr lang="en-US" dirty="0" err="1"/>
-              <a:t>ᐧ</a:t>
-            </a:r>
-            <a:r>
-              <a:rPr lang="cs-CZ" altLang="x-none" dirty="0"/>
-              <a:t>2</a:t>
-            </a:r>
-            <a:r>
-              <a:rPr lang="cs-CZ" altLang="x-none" baseline="30000" dirty="0"/>
-              <a:t>+1</a:t>
-            </a:r>
-            <a:r>
-              <a:rPr lang="cs-CZ" altLang="x-none" dirty="0"/>
-              <a:t> </a:t>
-            </a:r>
-          </a:p>
-          <a:p>
-            <a:pPr lvl="1"/>
-            <a:r>
-              <a:rPr lang="cs-CZ" altLang="x-none" dirty="0" err="1"/>
-              <a:t>The</a:t>
-            </a:r>
-            <a:r>
-              <a:rPr lang="cs-CZ" altLang="x-none" dirty="0"/>
-              <a:t> </a:t>
-            </a:r>
-            <a:r>
-              <a:rPr lang="cs-CZ" altLang="x-none" dirty="0" err="1"/>
-              <a:t>difference</a:t>
-            </a:r>
-            <a:r>
-              <a:rPr lang="cs-CZ" altLang="x-none" dirty="0"/>
-              <a:t> </a:t>
-            </a:r>
-            <a:r>
-              <a:rPr lang="cs-CZ" altLang="x-none" dirty="0" err="1"/>
-              <a:t>between</a:t>
-            </a:r>
-            <a:r>
-              <a:rPr lang="cs-CZ" altLang="x-none" dirty="0"/>
-              <a:t> </a:t>
-            </a:r>
-            <a:r>
-              <a:rPr lang="cs-CZ" altLang="x-none" dirty="0" err="1"/>
-              <a:t>two</a:t>
-            </a:r>
-            <a:r>
-              <a:rPr lang="cs-CZ" altLang="x-none" dirty="0"/>
-              <a:t> </a:t>
-            </a:r>
-            <a:r>
-              <a:rPr lang="cs-CZ" altLang="x-none" dirty="0" err="1"/>
-              <a:t>consecutive</a:t>
-            </a:r>
-            <a:r>
-              <a:rPr lang="cs-CZ" altLang="x-none" dirty="0"/>
-              <a:t> FP </a:t>
-            </a:r>
-            <a:r>
-              <a:rPr lang="cs-CZ" altLang="x-none" dirty="0" err="1"/>
-              <a:t>is</a:t>
-            </a:r>
-            <a:r>
-              <a:rPr lang="cs-CZ" altLang="x-none" dirty="0"/>
-              <a:t> </a:t>
-            </a:r>
-            <a:r>
-              <a:rPr lang="cs-CZ" altLang="x-none" dirty="0" err="1"/>
-              <a:t>called</a:t>
-            </a:r>
-            <a:r>
-              <a:rPr lang="cs-CZ" altLang="x-none" dirty="0"/>
-              <a:t> ULP (unit in last place)</a:t>
-            </a:r>
-          </a:p>
-          <a:p>
-            <a:r>
-              <a:rPr lang="cs-CZ" altLang="x-none" dirty="0" err="1"/>
-              <a:t>For</a:t>
-            </a:r>
-            <a:r>
-              <a:rPr lang="cs-CZ" altLang="x-none" dirty="0"/>
-              <a:t> </a:t>
-            </a:r>
-            <a:r>
-              <a:rPr lang="cs-CZ" altLang="x-none" dirty="0" err="1"/>
-              <a:t>each</a:t>
-            </a:r>
-            <a:r>
-              <a:rPr lang="cs-CZ" altLang="x-none" dirty="0"/>
-              <a:t> </a:t>
-            </a:r>
-            <a:r>
-              <a:rPr lang="cs-CZ" altLang="x-none" dirty="0" err="1"/>
-              <a:t>value</a:t>
-            </a:r>
-            <a:r>
-              <a:rPr lang="cs-CZ" altLang="x-none" dirty="0"/>
-              <a:t> </a:t>
-            </a:r>
-            <a:r>
-              <a:rPr lang="cs-CZ" altLang="x-none" dirty="0" err="1"/>
-              <a:t>of</a:t>
-            </a:r>
-            <a:r>
-              <a:rPr lang="cs-CZ" altLang="x-none" dirty="0"/>
-              <a:t> </a:t>
-            </a:r>
-            <a:r>
-              <a:rPr lang="cs-CZ" altLang="x-none" dirty="0" err="1"/>
-              <a:t>the</a:t>
-            </a:r>
-            <a:r>
-              <a:rPr lang="cs-CZ" altLang="x-none" dirty="0"/>
-              <a:t> exponent </a:t>
-            </a:r>
-            <a:r>
-              <a:rPr lang="cs-CZ" altLang="x-none" dirty="0" err="1"/>
-              <a:t>there</a:t>
-            </a:r>
-            <a:r>
-              <a:rPr lang="cs-CZ" altLang="x-none" dirty="0"/>
-              <a:t> </a:t>
-            </a:r>
-            <a:r>
-              <a:rPr lang="cs-CZ" altLang="x-none" dirty="0" err="1"/>
-              <a:t>is</a:t>
-            </a:r>
-            <a:r>
-              <a:rPr lang="cs-CZ" altLang="x-none" dirty="0"/>
-              <a:t> a </a:t>
-            </a:r>
-            <a:r>
-              <a:rPr lang="cs-CZ" altLang="x-none" dirty="0" err="1"/>
-              <a:t>finite</a:t>
-            </a:r>
-            <a:r>
-              <a:rPr lang="cs-CZ" altLang="x-none" dirty="0"/>
-              <a:t> </a:t>
-            </a:r>
-            <a:r>
-              <a:rPr lang="cs-CZ" altLang="x-none" dirty="0" err="1"/>
-              <a:t>number</a:t>
-            </a:r>
-            <a:r>
-              <a:rPr lang="cs-CZ" altLang="x-none" dirty="0"/>
-              <a:t> </a:t>
-            </a:r>
-            <a:r>
-              <a:rPr lang="cs-CZ" altLang="x-none" dirty="0" err="1"/>
-              <a:t>of</a:t>
-            </a:r>
-            <a:r>
-              <a:rPr lang="cs-CZ" altLang="x-none" dirty="0"/>
-              <a:t> FP</a:t>
-            </a:r>
-          </a:p>
-          <a:p>
-            <a:pPr lvl="1"/>
-            <a:r>
-              <a:rPr lang="cs-CZ" altLang="x-none" dirty="0"/>
-              <a:t> 10</a:t>
-            </a:r>
-            <a:r>
-              <a:rPr lang="cs-CZ" altLang="x-none" baseline="30000" dirty="0"/>
-              <a:t> </a:t>
-            </a:r>
-            <a:r>
-              <a:rPr lang="en-US" dirty="0"/>
-              <a:t>ᐧ10</a:t>
-            </a:r>
-            <a:r>
-              <a:rPr lang="en-US" baseline="30000" dirty="0"/>
-              <a:t>e</a:t>
-            </a:r>
-            <a:r>
-              <a:rPr lang="en-US" dirty="0"/>
-              <a:t> - </a:t>
-            </a:r>
-            <a:r>
-              <a:rPr lang="cs-CZ" dirty="0"/>
-              <a:t>99</a:t>
-            </a:r>
-            <a:r>
-              <a:rPr lang="cs-CZ" altLang="x-none" baseline="30000" dirty="0"/>
-              <a:t> </a:t>
-            </a:r>
-            <a:r>
-              <a:rPr lang="en-US" dirty="0"/>
-              <a:t>ᐧ10</a:t>
-            </a:r>
-            <a:r>
-              <a:rPr lang="en-US" baseline="30000" dirty="0"/>
-              <a:t>e</a:t>
-            </a:r>
-            <a:r>
-              <a:rPr lang="en-US" dirty="0"/>
-              <a:t> </a:t>
-            </a:r>
-          </a:p>
-          <a:p>
-            <a:pPr lvl="1"/>
-            <a:r>
-              <a:rPr lang="en-US" dirty="0"/>
-              <a:t>1.000000ᐧ</a:t>
-            </a:r>
-            <a:r>
-              <a:rPr lang="cs-CZ" altLang="x-none" dirty="0"/>
-              <a:t>2</a:t>
-            </a:r>
-            <a:r>
-              <a:rPr lang="en-US" baseline="30000" dirty="0"/>
-              <a:t>e </a:t>
-            </a:r>
-            <a:r>
-              <a:rPr lang="en-US" dirty="0"/>
-              <a:t>- 1.ffffffᐧ</a:t>
-            </a:r>
-            <a:r>
-              <a:rPr lang="cs-CZ" altLang="x-none" dirty="0"/>
-              <a:t>2</a:t>
-            </a:r>
-            <a:r>
-              <a:rPr lang="en-US" baseline="30000" dirty="0"/>
-              <a:t>e </a:t>
-            </a:r>
-            <a:r>
-              <a:rPr lang="en-US" dirty="0"/>
-              <a:t> </a:t>
-            </a:r>
-          </a:p>
-          <a:p>
-            <a:pPr lvl="1"/>
-            <a:r>
-              <a:rPr lang="en-US" dirty="0"/>
-              <a:t>(called “</a:t>
-            </a:r>
-            <a:r>
-              <a:rPr lang="en-US" dirty="0" err="1"/>
-              <a:t>binade</a:t>
-            </a:r>
-            <a:r>
-              <a:rPr lang="en-US" dirty="0"/>
-              <a:t>”)</a:t>
-            </a:r>
-          </a:p>
-        </p:txBody>
-      </p:sp>
-    </p:spTree>
-    <p:extLst>
-      <p:ext uri="{BB962C8B-B14F-4D97-AF65-F5344CB8AC3E}">
-        <p14:creationId xmlns:p14="http://schemas.microsoft.com/office/powerpoint/2010/main" val="4071479380"/>
-      </p:ext>
-    </p:extLst>
-  </p:cSld>
-  <p:clrMapOvr>
-    <a:masterClrMapping/>
-  </p:clrMapOvr>
-</p:sld>
-</file>
-
-<file path=ppt/slides/slide5.xml><?xml version="1.0" encoding="utf-8"?>
-<p:sld xmlns:a="http://schemas.openxmlformats.org/drawingml/2006/main" xmlns:r="http://schemas.openxmlformats.org/officeDocument/2006/relationships" xmlns:p="http://schemas.openxmlformats.org/presentationml/2006/main">
-  <p:cSld>
-    <p:spTree>
-      <p:nvGrpSpPr>
-        <p:cNvPr id="1" name=""/>
-        <p:cNvGrpSpPr/>
-        <p:nvPr/>
-      </p:nvGrpSpPr>
-      <p:grpSpPr>
-        <a:xfrm>
-          <a:off x="0" y="0"/>
-          <a:ext cx="0" cy="0"/>
-          <a:chOff x="0" y="0"/>
-          <a:chExt cx="0" cy="0"/>
-        </a:xfrm>
-      </p:grpSpPr>
-      <p:sp>
-        <p:nvSpPr>
           <p:cNvPr id="4" name="Title 3">
             <a:extLst>
               <a:ext uri="{FF2B5EF4-FFF2-40B4-BE49-F238E27FC236}">
@@ -4550,8 +4674,12 @@
               <a:buNone/>
             </a:pPr>
             <a:r>
+              <a:rPr lang="en-US" dirty="0" err="1"/>
+              <a:t>Le’ts</a:t>
+            </a:r>
+            <a:r>
               <a:rPr lang="en-US" dirty="0"/>
-              <a:t>The result of a measurement is 3.1415 and its accuracy is 0.1</a:t>
+              <a:t> be the result of a measurement  3.1415 and its accuracy, say, 0.1.</a:t>
             </a:r>
           </a:p>
           <a:p>
@@ -4560,7 +4688,7 @@
             </a:pPr>
             <a:r>
               <a:rPr lang="en-US" dirty="0"/>
-              <a:t>this result need to be rounded. Default is to round to “nearest”</a:t>
+              <a:t>This result needs to be rounded. Default is to round to “nearest”</a:t>
             </a:r>
           </a:p>
           <a:p>
@@ -4719,9 +4847,9 @@
         <p:grpSpPr bwMode="auto">
           <a:xfrm>
             <a:off x="1875392" y="3542505"/>
-            <a:ext cx="7632700" cy="3249613"/>
+            <a:ext cx="7632700" cy="3249617"/>
             <a:chOff x="899592" y="764704"/>
-            <a:chExt cx="7632848" cy="3249652"/>
+            <a:chExt cx="7632848" cy="3249656"/>
           </a:xfrm>
         </p:grpSpPr>
         <p:cxnSp>
@@ -5767,7 +5895,7 @@
           <p:spPr bwMode="auto">
             <a:xfrm>
               <a:off x="6588224" y="1772816"/>
-              <a:ext cx="1404201" cy="369332"/>
+              <a:ext cx="1433434" cy="369336"/>
             </a:xfrm>
             <a:prstGeom prst="rect">
               <a:avLst/>
@@ -5910,9 +6038,22 @@
             <a:p>
               <a:pPr eaLnBrk="1" hangingPunct="1"/>
               <a:r>
-                <a:rPr lang="en-US" altLang="x-none" sz="1800"/>
-                <a:t>3.14159298</a:t>
+                <a:rPr lang="cs-CZ" altLang="x-none" sz="1800" dirty="0"/>
+                <a:t>1.921fb8</a:t>
               </a:r>
+              <a:r>
+                <a:rPr lang="en-US" sz="1800" dirty="0" err="1"/>
+                <a:t>ᐧ</a:t>
+              </a:r>
+              <a:r>
+                <a:rPr lang="cs-CZ" altLang="x-none" sz="1800" dirty="0"/>
+                <a:t>2</a:t>
+              </a:r>
+              <a:r>
+                <a:rPr lang="cs-CZ" altLang="x-none" sz="1800" baseline="30000" dirty="0"/>
+                <a:t>+1</a:t>
+              </a:r>
+              <a:endParaRPr lang="en-US" altLang="x-none" sz="1800" dirty="0"/>
             </a:p>
           </p:txBody>
         </p:sp>
@@ -5933,7 +6074,7 @@
           <p:spPr bwMode="auto">
             <a:xfrm>
               <a:off x="971600" y="1700808"/>
-              <a:ext cx="1404201" cy="369332"/>
+              <a:ext cx="1433434" cy="369336"/>
             </a:xfrm>
             <a:prstGeom prst="rect">
               <a:avLst/>
@@ -6076,9 +6217,22 @@
             <a:p>
               <a:pPr eaLnBrk="1" hangingPunct="1"/>
               <a:r>
-                <a:rPr lang="en-US" altLang="x-none" sz="1800"/>
-                <a:t>3.14159250</a:t>
+                <a:rPr lang="cs-CZ" altLang="x-none" sz="1800" dirty="0"/>
+                <a:t>1.921fb4</a:t>
               </a:r>
+              <a:r>
+                <a:rPr lang="en-US" sz="1800" dirty="0" err="1"/>
+                <a:t>ᐧ</a:t>
+              </a:r>
+              <a:r>
+                <a:rPr lang="cs-CZ" altLang="x-none" sz="1800" dirty="0"/>
+                <a:t>2</a:t>
+              </a:r>
+              <a:r>
+                <a:rPr lang="cs-CZ" altLang="x-none" sz="1800" baseline="30000" dirty="0"/>
+                <a:t>+1</a:t>
+              </a:r>
+              <a:endParaRPr lang="en-US" altLang="x-none" sz="1800" dirty="0"/>
             </a:p>
           </p:txBody>
         </p:sp>
@@ -6193,7 +6347,7 @@
           <p:spPr bwMode="auto">
             <a:xfrm>
               <a:off x="2195736" y="1988840"/>
-              <a:ext cx="1660957" cy="369332"/>
+              <a:ext cx="1433434" cy="369336"/>
             </a:xfrm>
             <a:prstGeom prst="rect">
               <a:avLst/>
@@ -6336,9 +6490,22 @@
             <a:p>
               <a:pPr eaLnBrk="1" hangingPunct="1"/>
               <a:r>
-                <a:rPr lang="en-US" altLang="x-none" sz="1800"/>
-                <a:t>3.1415926218</a:t>
+                <a:rPr lang="cs-CZ" altLang="x-none" sz="1800" dirty="0"/>
+                <a:t>1.921fb5</a:t>
               </a:r>
+              <a:r>
+                <a:rPr lang="en-US" sz="1800" dirty="0" err="1"/>
+                <a:t>ᐧ</a:t>
+              </a:r>
+              <a:r>
+                <a:rPr lang="cs-CZ" altLang="x-none" sz="1800" dirty="0"/>
+                <a:t>2</a:t>
+              </a:r>
+              <a:r>
+                <a:rPr lang="cs-CZ" altLang="x-none" sz="1800" baseline="30000" dirty="0"/>
+                <a:t>+1</a:t>
+              </a:r>
+              <a:endParaRPr lang="en-US" altLang="x-none" sz="1800" dirty="0"/>
             </a:p>
           </p:txBody>
         </p:sp>
@@ -6359,7 +6526,7 @@
           <p:spPr bwMode="auto">
             <a:xfrm>
               <a:off x="5076056" y="1988840"/>
-              <a:ext cx="1789334" cy="369332"/>
+              <a:ext cx="1433434" cy="646339"/>
             </a:xfrm>
             <a:prstGeom prst="rect">
               <a:avLst/>
@@ -6502,9 +6669,26 @@
             <a:p>
               <a:pPr eaLnBrk="1" hangingPunct="1"/>
               <a:r>
-                <a:rPr lang="en-US" altLang="x-none" sz="1800"/>
-                <a:t>3.14159286022</a:t>
+                <a:rPr lang="cs-CZ" altLang="x-none" sz="1800" dirty="0"/>
+                <a:t>1.921fb7</a:t>
               </a:r>
+              <a:r>
+                <a:rPr lang="en-US" sz="1800" dirty="0" err="1"/>
+                <a:t>ᐧ</a:t>
+              </a:r>
+              <a:r>
+                <a:rPr lang="cs-CZ" altLang="x-none" sz="1800" dirty="0"/>
+                <a:t>2</a:t>
+              </a:r>
+              <a:r>
+                <a:rPr lang="cs-CZ" altLang="x-none" sz="1800" baseline="30000" dirty="0"/>
+                <a:t>+1</a:t>
+              </a:r>
+              <a:endParaRPr lang="en-US" altLang="x-none" sz="1800" dirty="0"/>
+            </a:p>
+            <a:p>
+              <a:pPr eaLnBrk="1" hangingPunct="1"/>
+              <a:endParaRPr lang="en-US" altLang="x-none" sz="1800" dirty="0"/>
             </a:p>
           </p:txBody>
         </p:sp>
@@ -6690,8 +6874,8 @@
           </p:nvSpPr>
           <p:spPr bwMode="auto">
             <a:xfrm>
-              <a:off x="3491880" y="3645024"/>
-              <a:ext cx="1769497" cy="369332"/>
+              <a:off x="3491879" y="3645024"/>
+              <a:ext cx="3490189" cy="369336"/>
             </a:xfrm>
             <a:prstGeom prst="rect">
               <a:avLst/>
@@ -6721,7 +6905,7 @@
             </a:extLst>
           </p:spPr>
           <p:txBody>
-            <a:bodyPr wrap="none">
+            <a:bodyPr wrap="square">
               <a:spAutoFit/>
             </a:bodyPr>
             <a:lstStyle>
@@ -6834,12 +7018,52 @@
             <a:p>
               <a:pPr eaLnBrk="1" hangingPunct="1"/>
               <a:r>
-                <a:rPr lang="en-US" altLang="x-none" sz="1800" b="1">
+                <a:rPr lang="cs-CZ" altLang="x-none" sz="1800" b="1" dirty="0">
+                  <a:solidFill>
+                    <a:srgbClr val="0070C0"/>
+                  </a:solidFill>
+                </a:rPr>
+                <a:t>1.921fb6</a:t>
+              </a:r>
+              <a:r>
+                <a:rPr lang="en-US" sz="1800" b="1" dirty="0" err="1">
+                  <a:solidFill>
+                    <a:srgbClr val="0070C0"/>
+                  </a:solidFill>
+                </a:rPr>
+                <a:t>ᐧ</a:t>
+              </a:r>
+              <a:r>
+                <a:rPr lang="cs-CZ" altLang="x-none" sz="1800" b="1" dirty="0">
+                  <a:solidFill>
+                    <a:srgbClr val="0070C0"/>
+                  </a:solidFill>
+                </a:rPr>
+                <a:t>2</a:t>
+              </a:r>
+              <a:r>
+                <a:rPr lang="cs-CZ" altLang="x-none" sz="1800" b="1" baseline="30000" dirty="0">
+                  <a:solidFill>
+                    <a:srgbClr val="0070C0"/>
+                  </a:solidFill>
+                </a:rPr>
+                <a:t>+1  (</a:t>
+              </a:r>
+              <a:r>
+                <a:rPr lang="en-US" altLang="x-none" sz="1800" b="1" dirty="0">
                   <a:solidFill>
                     <a:srgbClr val="3366FF"/>
                   </a:solidFill>
                 </a:rPr>
                 <a:t>0x1.921fb6p+1</a:t>
+              </a:r>
+              <a:r>
+                <a:rPr lang="en-US" altLang="x-none" sz="1800" b="1" dirty="0">
+                  <a:solidFill>
+                    <a:srgbClr val="0070C0"/>
+                  </a:solidFill>
+                </a:rPr>
+                <a:t>)</a:t>
               </a:r>
             </a:p>
           </p:txBody>
@@ -7013,12 +7237,4121 @@
           </a:p>
         </p:txBody>
       </p:sp>
+      <p:sp>
+        <p:nvSpPr>
+          <p:cNvPr id="25" name="TextBox 7">
+            <a:extLst>
+              <a:ext uri="{FF2B5EF4-FFF2-40B4-BE49-F238E27FC236}">
+                <a16:creationId xmlns:a16="http://schemas.microsoft.com/office/drawing/2014/main" id="{EE49D4AA-A8CD-BC51-9761-7E2946100E5C}"/>
+              </a:ext>
+            </a:extLst>
+          </p:cNvPr>
+          <p:cNvSpPr txBox="1">
+            <a:spLocks noChangeArrowheads="1"/>
+          </p:cNvSpPr>
+          <p:nvPr/>
+        </p:nvSpPr>
+        <p:spPr bwMode="auto">
+          <a:xfrm>
+            <a:off x="4237195" y="4154247"/>
+            <a:ext cx="528637" cy="522287"/>
+          </a:xfrm>
+          <a:prstGeom prst="rect">
+            <a:avLst/>
+          </a:prstGeom>
+          <a:noFill/>
+          <a:ln>
+            <a:noFill/>
+          </a:ln>
+          <a:extLst>
+            <a:ext uri="{909E8E84-426E-40DD-AFC4-6F175D3DCCD1}">
+              <a14:hiddenFill xmlns:a14="http://schemas.microsoft.com/office/drawing/2010/main">
+                <a:solidFill>
+                  <a:srgbClr val="FFFFFF"/>
+                </a:solidFill>
+              </a14:hiddenFill>
+            </a:ext>
+            <a:ext uri="{91240B29-F687-4F45-9708-019B960494DF}">
+              <a14:hiddenLine xmlns:a14="http://schemas.microsoft.com/office/drawing/2010/main" w="9525">
+                <a:solidFill>
+                  <a:srgbClr val="000000"/>
+                </a:solidFill>
+                <a:miter lim="800000"/>
+                <a:headEnd/>
+                <a:tailEnd/>
+              </a14:hiddenLine>
+            </a:ext>
+          </a:extLst>
+        </p:spPr>
+        <p:txBody>
+          <a:bodyPr wrap="none">
+            <a:spAutoFit/>
+          </a:bodyPr>
+          <a:lstStyle>
+            <a:lvl1pPr eaLnBrk="0" hangingPunct="0">
+              <a:defRPr sz="2400">
+                <a:solidFill>
+                  <a:schemeClr val="tx1"/>
+                </a:solidFill>
+                <a:latin typeface="Arial" charset="0"/>
+                <a:ea typeface="ＭＳ Ｐゴシック" charset="-128"/>
+              </a:defRPr>
+            </a:lvl1pPr>
+            <a:lvl2pPr marL="742950" indent="-285750" eaLnBrk="0" hangingPunct="0">
+              <a:defRPr sz="2400">
+                <a:solidFill>
+                  <a:schemeClr val="tx1"/>
+                </a:solidFill>
+                <a:latin typeface="Arial" charset="0"/>
+                <a:ea typeface="ＭＳ Ｐゴシック" charset="-128"/>
+              </a:defRPr>
+            </a:lvl2pPr>
+            <a:lvl3pPr marL="1143000" indent="-228600" eaLnBrk="0" hangingPunct="0">
+              <a:defRPr sz="2400">
+                <a:solidFill>
+                  <a:schemeClr val="tx1"/>
+                </a:solidFill>
+                <a:latin typeface="Arial" charset="0"/>
+                <a:ea typeface="ＭＳ Ｐゴシック" charset="-128"/>
+              </a:defRPr>
+            </a:lvl3pPr>
+            <a:lvl4pPr marL="1600200" indent="-228600" eaLnBrk="0" hangingPunct="0">
+              <a:defRPr sz="2400">
+                <a:solidFill>
+                  <a:schemeClr val="tx1"/>
+                </a:solidFill>
+                <a:latin typeface="Arial" charset="0"/>
+                <a:ea typeface="ＭＳ Ｐゴシック" charset="-128"/>
+              </a:defRPr>
+            </a:lvl4pPr>
+            <a:lvl5pPr marL="2057400" indent="-228600" eaLnBrk="0" hangingPunct="0">
+              <a:defRPr sz="2400">
+                <a:solidFill>
+                  <a:schemeClr val="tx1"/>
+                </a:solidFill>
+                <a:latin typeface="Arial" charset="0"/>
+                <a:ea typeface="ＭＳ Ｐゴシック" charset="-128"/>
+              </a:defRPr>
+            </a:lvl5pPr>
+            <a:lvl6pPr marL="2514600" indent="-228600" eaLnBrk="0" fontAlgn="base" hangingPunct="0">
+              <a:spcBef>
+                <a:spcPct val="0"/>
+              </a:spcBef>
+              <a:spcAft>
+                <a:spcPct val="0"/>
+              </a:spcAft>
+              <a:defRPr sz="2400">
+                <a:solidFill>
+                  <a:schemeClr val="tx1"/>
+                </a:solidFill>
+                <a:latin typeface="Arial" charset="0"/>
+                <a:ea typeface="ＭＳ Ｐゴシック" charset="-128"/>
+              </a:defRPr>
+            </a:lvl6pPr>
+            <a:lvl7pPr marL="2971800" indent="-228600" eaLnBrk="0" fontAlgn="base" hangingPunct="0">
+              <a:spcBef>
+                <a:spcPct val="0"/>
+              </a:spcBef>
+              <a:spcAft>
+                <a:spcPct val="0"/>
+              </a:spcAft>
+              <a:defRPr sz="2400">
+                <a:solidFill>
+                  <a:schemeClr val="tx1"/>
+                </a:solidFill>
+                <a:latin typeface="Arial" charset="0"/>
+                <a:ea typeface="ＭＳ Ｐゴシック" charset="-128"/>
+              </a:defRPr>
+            </a:lvl7pPr>
+            <a:lvl8pPr marL="3429000" indent="-228600" eaLnBrk="0" fontAlgn="base" hangingPunct="0">
+              <a:spcBef>
+                <a:spcPct val="0"/>
+              </a:spcBef>
+              <a:spcAft>
+                <a:spcPct val="0"/>
+              </a:spcAft>
+              <a:defRPr sz="2400">
+                <a:solidFill>
+                  <a:schemeClr val="tx1"/>
+                </a:solidFill>
+                <a:latin typeface="Arial" charset="0"/>
+                <a:ea typeface="ＭＳ Ｐゴシック" charset="-128"/>
+              </a:defRPr>
+            </a:lvl8pPr>
+            <a:lvl9pPr marL="3886200" indent="-228600" eaLnBrk="0" fontAlgn="base" hangingPunct="0">
+              <a:spcBef>
+                <a:spcPct val="0"/>
+              </a:spcBef>
+              <a:spcAft>
+                <a:spcPct val="0"/>
+              </a:spcAft>
+              <a:defRPr sz="2400">
+                <a:solidFill>
+                  <a:schemeClr val="tx1"/>
+                </a:solidFill>
+                <a:latin typeface="Arial" charset="0"/>
+                <a:ea typeface="ＭＳ Ｐゴシック" charset="-128"/>
+              </a:defRPr>
+            </a:lvl9pPr>
+          </a:lstStyle>
+          <a:p>
+            <a:pPr eaLnBrk="1" hangingPunct="1"/>
+            <a:r>
+              <a:rPr lang="en-US" altLang="x-none" sz="2800" b="1" i="1">
+                <a:solidFill>
+                  <a:srgbClr val="FF0000"/>
+                </a:solidFill>
+              </a:rPr>
+              <a:t>π</a:t>
+            </a:r>
+          </a:p>
+        </p:txBody>
+      </p:sp>
+      <p:cxnSp>
+        <p:nvCxnSpPr>
+          <p:cNvPr id="26" name="Straight Arrow Connector 25">
+            <a:extLst>
+              <a:ext uri="{FF2B5EF4-FFF2-40B4-BE49-F238E27FC236}">
+                <a16:creationId xmlns:a16="http://schemas.microsoft.com/office/drawing/2014/main" id="{6046D4B4-6DE4-6554-459F-4BDCFB109E55}"/>
+              </a:ext>
+            </a:extLst>
+          </p:cNvPr>
+          <p:cNvCxnSpPr>
+            <a:cxnSpLocks noChangeShapeType="1"/>
+          </p:cNvCxnSpPr>
+          <p:nvPr/>
+        </p:nvCxnSpPr>
+        <p:spPr bwMode="auto">
+          <a:xfrm>
+            <a:off x="4453095" y="4657484"/>
+            <a:ext cx="0" cy="792163"/>
+          </a:xfrm>
+          <a:prstGeom prst="straightConnector1">
+            <a:avLst/>
+          </a:prstGeom>
+          <a:noFill/>
+          <a:ln w="25400">
+            <a:solidFill>
+              <a:srgbClr val="FF0000"/>
+            </a:solidFill>
+            <a:round/>
+            <a:headEnd/>
+            <a:tailEnd type="arrow" w="med" len="med"/>
+          </a:ln>
+          <a:effectLst>
+            <a:outerShdw blurRad="40000" dist="20000" dir="5400000" rotWithShape="0">
+              <a:srgbClr val="000000">
+                <a:alpha val="37999"/>
+              </a:srgbClr>
+            </a:outerShdw>
+          </a:effectLst>
+          <a:extLst>
+            <a:ext uri="{909E8E84-426E-40DD-AFC4-6F175D3DCCD1}">
+              <a14:hiddenFill xmlns:a14="http://schemas.microsoft.com/office/drawing/2010/main">
+                <a:noFill/>
+              </a14:hiddenFill>
+            </a:ext>
+          </a:extLst>
+        </p:spPr>
+      </p:cxnSp>
     </p:spTree>
     <p:extLst>
       <p:ext uri="{BB962C8B-B14F-4D97-AF65-F5344CB8AC3E}">
         <p14:creationId xmlns:p14="http://schemas.microsoft.com/office/powerpoint/2010/main" val="626892952"/>
       </p:ext>
     </p:extLst>
+  </p:cSld>
+  <p:clrMapOvr>
+    <a:masterClrMapping/>
+  </p:clrMapOvr>
+</p:sld>
+</file>
+
+<file path=ppt/slides/slide5.xml><?xml version="1.0" encoding="utf-8"?>
+<p:sld xmlns:a="http://schemas.openxmlformats.org/drawingml/2006/main" xmlns:r="http://schemas.openxmlformats.org/officeDocument/2006/relationships" xmlns:p="http://schemas.openxmlformats.org/presentationml/2006/main">
+  <p:cSld>
+    <p:spTree>
+      <p:nvGrpSpPr>
+        <p:cNvPr id="1" name=""/>
+        <p:cNvGrpSpPr/>
+        <p:nvPr/>
+      </p:nvGrpSpPr>
+      <p:grpSpPr>
+        <a:xfrm>
+          <a:off x="0" y="0"/>
+          <a:ext cx="0" cy="0"/>
+          <a:chOff x="0" y="0"/>
+          <a:chExt cx="0" cy="0"/>
+        </a:xfrm>
+      </p:grpSpPr>
+      <p:sp>
+        <p:nvSpPr>
+          <p:cNvPr id="2" name="Title 1">
+            <a:extLst>
+              <a:ext uri="{FF2B5EF4-FFF2-40B4-BE49-F238E27FC236}">
+                <a16:creationId xmlns:a16="http://schemas.microsoft.com/office/drawing/2014/main" id="{7EE007A8-7189-021D-6B56-2AD6C8687A8B}"/>
+              </a:ext>
+            </a:extLst>
+          </p:cNvPr>
+          <p:cNvSpPr>
+            <a:spLocks noGrp="1"/>
+          </p:cNvSpPr>
+          <p:nvPr>
+            <p:ph type="title"/>
+          </p:nvPr>
+        </p:nvSpPr>
+        <p:spPr>
+          <a:xfrm>
+            <a:off x="838200" y="365126"/>
+            <a:ext cx="10515600" cy="858194"/>
+          </a:xfrm>
+        </p:spPr>
+        <p:txBody>
+          <a:bodyPr/>
+          <a:lstStyle/>
+          <a:p>
+            <a:r>
+              <a:rPr lang="en-US" dirty="0"/>
+              <a:t>FP on a Computer</a:t>
+            </a:r>
+          </a:p>
+        </p:txBody>
+      </p:sp>
+      <p:sp>
+        <p:nvSpPr>
+          <p:cNvPr id="3" name="Content Placeholder 2">
+            <a:extLst>
+              <a:ext uri="{FF2B5EF4-FFF2-40B4-BE49-F238E27FC236}">
+                <a16:creationId xmlns:a16="http://schemas.microsoft.com/office/drawing/2014/main" id="{A75F42EC-D4A4-BB1D-42E2-CC05E4E975AD}"/>
+              </a:ext>
+            </a:extLst>
+          </p:cNvPr>
+          <p:cNvSpPr>
+            <a:spLocks noGrp="1"/>
+          </p:cNvSpPr>
+          <p:nvPr>
+            <p:ph idx="1"/>
+          </p:nvPr>
+        </p:nvSpPr>
+        <p:spPr>
+          <a:xfrm>
+            <a:off x="838200" y="1223320"/>
+            <a:ext cx="10515600" cy="1523055"/>
+          </a:xfrm>
+        </p:spPr>
+        <p:txBody>
+          <a:bodyPr/>
+          <a:lstStyle/>
+          <a:p>
+            <a:r>
+              <a:rPr lang="en-US" dirty="0"/>
+              <a:t>FP are well suited to perform arithmetic on a computer</a:t>
+            </a:r>
+          </a:p>
+          <a:p>
+            <a:pPr lvl="1"/>
+            <a:r>
+              <a:rPr lang="en-US" dirty="0"/>
+              <a:t>Since 1985 FP representations and operations are standardized in IEEE754  (</a:t>
+            </a:r>
+            <a:r>
+              <a:rPr lang="en-US" dirty="0">
+                <a:hlinkClick r:id="rId2"/>
+              </a:rPr>
+              <a:t>https://en.wikipedia.org/wiki/IEEE_754</a:t>
+            </a:r>
+            <a:r>
+              <a:rPr lang="en-US" dirty="0"/>
+              <a:t>)</a:t>
+            </a:r>
+          </a:p>
+        </p:txBody>
+      </p:sp>
+      <p:pic>
+        <p:nvPicPr>
+          <p:cNvPr id="4" name="Picture 3">
+            <a:extLst>
+              <a:ext uri="{FF2B5EF4-FFF2-40B4-BE49-F238E27FC236}">
+                <a16:creationId xmlns:a16="http://schemas.microsoft.com/office/drawing/2014/main" id="{EDE99ED7-3831-8E78-7501-C819F3AA64D0}"/>
+              </a:ext>
+            </a:extLst>
+          </p:cNvPr>
+          <p:cNvPicPr>
+            <a:picLocks noChangeAspect="1"/>
+          </p:cNvPicPr>
+          <p:nvPr/>
+        </p:nvPicPr>
+        <p:blipFill>
+          <a:blip r:embed="rId3"/>
+          <a:stretch>
+            <a:fillRect/>
+          </a:stretch>
+        </p:blipFill>
+        <p:spPr>
+          <a:xfrm>
+            <a:off x="1587209" y="2482846"/>
+            <a:ext cx="7772400" cy="4226873"/>
+          </a:xfrm>
+          <a:prstGeom prst="rect">
+            <a:avLst/>
+          </a:prstGeom>
+        </p:spPr>
+      </p:pic>
+    </p:spTree>
+    <p:extLst>
+      <p:ext uri="{BB962C8B-B14F-4D97-AF65-F5344CB8AC3E}">
+        <p14:creationId xmlns:p14="http://schemas.microsoft.com/office/powerpoint/2010/main" val="3168482662"/>
+      </p:ext>
+    </p:extLst>
+  </p:cSld>
+  <p:clrMapOvr>
+    <a:masterClrMapping/>
+  </p:clrMapOvr>
+</p:sld>
+</file>
+
+<file path=ppt/slides/slide6.xml><?xml version="1.0" encoding="utf-8"?>
+<p:sld xmlns:a="http://schemas.openxmlformats.org/drawingml/2006/main" xmlns:r="http://schemas.openxmlformats.org/officeDocument/2006/relationships" xmlns:p="http://schemas.openxmlformats.org/presentationml/2006/main">
+  <p:cSld>
+    <p:spTree>
+      <p:nvGrpSpPr>
+        <p:cNvPr id="1" name=""/>
+        <p:cNvGrpSpPr/>
+        <p:nvPr/>
+      </p:nvGrpSpPr>
+      <p:grpSpPr>
+        <a:xfrm>
+          <a:off x="0" y="0"/>
+          <a:ext cx="0" cy="0"/>
+          <a:chOff x="0" y="0"/>
+          <a:chExt cx="0" cy="0"/>
+        </a:xfrm>
+      </p:grpSpPr>
+      <p:sp>
+        <p:nvSpPr>
+          <p:cNvPr id="4" name="Title 3">
+            <a:extLst>
+              <a:ext uri="{FF2B5EF4-FFF2-40B4-BE49-F238E27FC236}">
+                <a16:creationId xmlns:a16="http://schemas.microsoft.com/office/drawing/2014/main" id="{1E54F6A7-30BA-FD40-3C85-7621FFDBA801}"/>
+              </a:ext>
+            </a:extLst>
+          </p:cNvPr>
+          <p:cNvSpPr>
+            <a:spLocks noGrp="1"/>
+          </p:cNvSpPr>
+          <p:nvPr>
+            <p:ph type="title"/>
+          </p:nvPr>
+        </p:nvSpPr>
+        <p:spPr/>
+        <p:txBody>
+          <a:bodyPr/>
+          <a:lstStyle/>
+          <a:p>
+            <a:r>
+              <a:rPr lang="en-US" dirty="0"/>
+              <a:t>FP binary representations in IEEE754</a:t>
+            </a:r>
+          </a:p>
+        </p:txBody>
+      </p:sp>
+      <p:pic>
+        <p:nvPicPr>
+          <p:cNvPr id="5" name="Picture 4">
+            <a:extLst>
+              <a:ext uri="{FF2B5EF4-FFF2-40B4-BE49-F238E27FC236}">
+                <a16:creationId xmlns:a16="http://schemas.microsoft.com/office/drawing/2014/main" id="{E894316B-6BD7-88F6-1EEA-1C3225F024A5}"/>
+              </a:ext>
+            </a:extLst>
+          </p:cNvPr>
+          <p:cNvPicPr>
+            <a:picLocks noChangeAspect="1"/>
+          </p:cNvPicPr>
+          <p:nvPr/>
+        </p:nvPicPr>
+        <p:blipFill>
+          <a:blip r:embed="rId2"/>
+          <a:stretch>
+            <a:fillRect/>
+          </a:stretch>
+        </p:blipFill>
+        <p:spPr>
+          <a:xfrm>
+            <a:off x="640491" y="1353561"/>
+            <a:ext cx="9213326" cy="3323214"/>
+          </a:xfrm>
+          <a:prstGeom prst="rect">
+            <a:avLst/>
+          </a:prstGeom>
+        </p:spPr>
+      </p:pic>
+      <p:pic>
+        <p:nvPicPr>
+          <p:cNvPr id="9" name="Picture 6">
+            <a:extLst>
+              <a:ext uri="{FF2B5EF4-FFF2-40B4-BE49-F238E27FC236}">
+                <a16:creationId xmlns:a16="http://schemas.microsoft.com/office/drawing/2014/main" id="{9920FC59-424C-4E9A-94E8-0D3C2A0830DC}"/>
+              </a:ext>
+            </a:extLst>
+          </p:cNvPr>
+          <p:cNvPicPr>
+            <a:picLocks noChangeAspect="1"/>
+          </p:cNvPicPr>
+          <p:nvPr/>
+        </p:nvPicPr>
+        <p:blipFill>
+          <a:blip r:embed="rId3">
+            <a:extLst>
+              <a:ext uri="{28A0092B-C50C-407E-A947-70E740481C1C}">
+                <a14:useLocalDpi xmlns:a14="http://schemas.microsoft.com/office/drawing/2010/main" val="0"/>
+              </a:ext>
+            </a:extLst>
+          </a:blip>
+          <a:srcRect/>
+          <a:stretch>
+            <a:fillRect/>
+          </a:stretch>
+        </p:blipFill>
+        <p:spPr bwMode="auto">
+          <a:xfrm>
+            <a:off x="1357183" y="5057775"/>
+            <a:ext cx="7493000" cy="977900"/>
+          </a:xfrm>
+          <a:prstGeom prst="rect">
+            <a:avLst/>
+          </a:prstGeom>
+          <a:noFill/>
+          <a:ln>
+            <a:noFill/>
+          </a:ln>
+          <a:extLst>
+            <a:ext uri="{909E8E84-426E-40DD-AFC4-6F175D3DCCD1}">
+              <a14:hiddenFill xmlns:a14="http://schemas.microsoft.com/office/drawing/2010/main">
+                <a:solidFill>
+                  <a:srgbClr val="FFFFFF"/>
+                </a:solidFill>
+              </a14:hiddenFill>
+            </a:ext>
+            <a:ext uri="{91240B29-F687-4F45-9708-019B960494DF}">
+              <a14:hiddenLine xmlns:a14="http://schemas.microsoft.com/office/drawing/2010/main" w="9525">
+                <a:solidFill>
+                  <a:srgbClr val="000000"/>
+                </a:solidFill>
+                <a:miter lim="800000"/>
+                <a:headEnd/>
+                <a:tailEnd/>
+              </a14:hiddenLine>
+            </a:ext>
+          </a:extLst>
+        </p:spPr>
+      </p:pic>
+      <p:pic>
+        <p:nvPicPr>
+          <p:cNvPr id="10" name="Picture 7">
+            <a:extLst>
+              <a:ext uri="{FF2B5EF4-FFF2-40B4-BE49-F238E27FC236}">
+                <a16:creationId xmlns:a16="http://schemas.microsoft.com/office/drawing/2014/main" id="{AE825F26-D7F3-F3C2-FCBA-6C6B27EB8F96}"/>
+              </a:ext>
+            </a:extLst>
+          </p:cNvPr>
+          <p:cNvPicPr>
+            <a:picLocks noChangeAspect="1"/>
+          </p:cNvPicPr>
+          <p:nvPr/>
+        </p:nvPicPr>
+        <p:blipFill>
+          <a:blip r:embed="rId4">
+            <a:extLst>
+              <a:ext uri="{28A0092B-C50C-407E-A947-70E740481C1C}">
+                <a14:useLocalDpi xmlns:a14="http://schemas.microsoft.com/office/drawing/2010/main" val="0"/>
+              </a:ext>
+            </a:extLst>
+          </a:blip>
+          <a:srcRect/>
+          <a:stretch>
+            <a:fillRect/>
+          </a:stretch>
+        </p:blipFill>
+        <p:spPr bwMode="auto">
+          <a:xfrm>
+            <a:off x="1814383" y="6200775"/>
+            <a:ext cx="3200400" cy="292100"/>
+          </a:xfrm>
+          <a:prstGeom prst="rect">
+            <a:avLst/>
+          </a:prstGeom>
+          <a:noFill/>
+          <a:ln>
+            <a:noFill/>
+          </a:ln>
+          <a:extLst>
+            <a:ext uri="{909E8E84-426E-40DD-AFC4-6F175D3DCCD1}">
+              <a14:hiddenFill xmlns:a14="http://schemas.microsoft.com/office/drawing/2010/main">
+                <a:solidFill>
+                  <a:srgbClr val="FFFFFF"/>
+                </a:solidFill>
+              </a14:hiddenFill>
+            </a:ext>
+            <a:ext uri="{91240B29-F687-4F45-9708-019B960494DF}">
+              <a14:hiddenLine xmlns:a14="http://schemas.microsoft.com/office/drawing/2010/main" w="9525">
+                <a:solidFill>
+                  <a:srgbClr val="000000"/>
+                </a:solidFill>
+                <a:miter lim="800000"/>
+                <a:headEnd/>
+                <a:tailEnd/>
+              </a14:hiddenLine>
+            </a:ext>
+          </a:extLst>
+        </p:spPr>
+      </p:pic>
+      <p:sp>
+        <p:nvSpPr>
+          <p:cNvPr id="11" name="Bent-Up Arrow 10">
+            <a:extLst>
+              <a:ext uri="{FF2B5EF4-FFF2-40B4-BE49-F238E27FC236}">
+                <a16:creationId xmlns:a16="http://schemas.microsoft.com/office/drawing/2014/main" id="{41FDC136-B6F7-971D-D527-578ED6F93762}"/>
+              </a:ext>
+            </a:extLst>
+          </p:cNvPr>
+          <p:cNvSpPr>
+            <a:spLocks/>
+          </p:cNvSpPr>
+          <p:nvPr/>
+        </p:nvSpPr>
+        <p:spPr bwMode="auto">
+          <a:xfrm flipH="1" flipV="1">
+            <a:off x="3109783" y="4676775"/>
+            <a:ext cx="4038600" cy="533400"/>
+          </a:xfrm>
+          <a:custGeom>
+            <a:avLst/>
+            <a:gdLst>
+              <a:gd name="T0" fmla="*/ 0 w 4038600"/>
+              <a:gd name="T1" fmla="*/ 400050 h 533400"/>
+              <a:gd name="T2" fmla="*/ 3838575 w 4038600"/>
+              <a:gd name="T3" fmla="*/ 400050 h 533400"/>
+              <a:gd name="T4" fmla="*/ 3838575 w 4038600"/>
+              <a:gd name="T5" fmla="*/ 133350 h 533400"/>
+              <a:gd name="T6" fmla="*/ 3771900 w 4038600"/>
+              <a:gd name="T7" fmla="*/ 133350 h 533400"/>
+              <a:gd name="T8" fmla="*/ 3905250 w 4038600"/>
+              <a:gd name="T9" fmla="*/ 0 h 533400"/>
+              <a:gd name="T10" fmla="*/ 4038600 w 4038600"/>
+              <a:gd name="T11" fmla="*/ 133350 h 533400"/>
+              <a:gd name="T12" fmla="*/ 3971925 w 4038600"/>
+              <a:gd name="T13" fmla="*/ 133350 h 533400"/>
+              <a:gd name="T14" fmla="*/ 3971925 w 4038600"/>
+              <a:gd name="T15" fmla="*/ 533400 h 533400"/>
+              <a:gd name="T16" fmla="*/ 0 w 4038600"/>
+              <a:gd name="T17" fmla="*/ 533400 h 533400"/>
+              <a:gd name="T18" fmla="*/ 0 w 4038600"/>
+              <a:gd name="T19" fmla="*/ 400050 h 533400"/>
+              <a:gd name="T20" fmla="*/ 0 60000 65536"/>
+              <a:gd name="T21" fmla="*/ 0 60000 65536"/>
+              <a:gd name="T22" fmla="*/ 0 60000 65536"/>
+              <a:gd name="T23" fmla="*/ 0 60000 65536"/>
+              <a:gd name="T24" fmla="*/ 0 60000 65536"/>
+              <a:gd name="T25" fmla="*/ 0 60000 65536"/>
+              <a:gd name="T26" fmla="*/ 0 60000 65536"/>
+              <a:gd name="T27" fmla="*/ 0 60000 65536"/>
+              <a:gd name="T28" fmla="*/ 0 60000 65536"/>
+              <a:gd name="T29" fmla="*/ 0 60000 65536"/>
+            </a:gdLst>
+            <a:ahLst/>
+            <a:cxnLst>
+              <a:cxn ang="T20">
+                <a:pos x="T0" y="T1"/>
+              </a:cxn>
+              <a:cxn ang="T21">
+                <a:pos x="T2" y="T3"/>
+              </a:cxn>
+              <a:cxn ang="T22">
+                <a:pos x="T4" y="T5"/>
+              </a:cxn>
+              <a:cxn ang="T23">
+                <a:pos x="T6" y="T7"/>
+              </a:cxn>
+              <a:cxn ang="T24">
+                <a:pos x="T8" y="T9"/>
+              </a:cxn>
+              <a:cxn ang="T25">
+                <a:pos x="T10" y="T11"/>
+              </a:cxn>
+              <a:cxn ang="T26">
+                <a:pos x="T12" y="T13"/>
+              </a:cxn>
+              <a:cxn ang="T27">
+                <a:pos x="T14" y="T15"/>
+              </a:cxn>
+              <a:cxn ang="T28">
+                <a:pos x="T16" y="T17"/>
+              </a:cxn>
+              <a:cxn ang="T29">
+                <a:pos x="T18" y="T19"/>
+              </a:cxn>
+            </a:cxnLst>
+            <a:rect l="0" t="0" r="r" b="b"/>
+            <a:pathLst>
+              <a:path w="4038600" h="533400">
+                <a:moveTo>
+                  <a:pt x="0" y="400050"/>
+                </a:moveTo>
+                <a:lnTo>
+                  <a:pt x="3838575" y="400050"/>
+                </a:lnTo>
+                <a:lnTo>
+                  <a:pt x="3838575" y="133350"/>
+                </a:lnTo>
+                <a:lnTo>
+                  <a:pt x="3771900" y="133350"/>
+                </a:lnTo>
+                <a:lnTo>
+                  <a:pt x="3905250" y="0"/>
+                </a:lnTo>
+                <a:lnTo>
+                  <a:pt x="4038600" y="133350"/>
+                </a:lnTo>
+                <a:lnTo>
+                  <a:pt x="3971925" y="133350"/>
+                </a:lnTo>
+                <a:lnTo>
+                  <a:pt x="3971925" y="533400"/>
+                </a:lnTo>
+                <a:lnTo>
+                  <a:pt x="0" y="533400"/>
+                </a:lnTo>
+                <a:lnTo>
+                  <a:pt x="0" y="400050"/>
+                </a:lnTo>
+                <a:close/>
+              </a:path>
+            </a:pathLst>
+          </a:custGeom>
+          <a:gradFill rotWithShape="1">
+            <a:gsLst>
+              <a:gs pos="0">
+                <a:srgbClr val="9DF3F3"/>
+              </a:gs>
+              <a:gs pos="100000">
+                <a:srgbClr val="00B0B0"/>
+              </a:gs>
+            </a:gsLst>
+            <a:lin ang="5400000"/>
+          </a:gradFill>
+          <a:ln w="9525" cap="flat" cmpd="sng">
+            <a:solidFill>
+              <a:srgbClr val="009999"/>
+            </a:solidFill>
+            <a:prstDash val="solid"/>
+            <a:round/>
+            <a:headEnd/>
+            <a:tailEnd/>
+          </a:ln>
+          <a:effectLst>
+            <a:outerShdw blurRad="40000" dist="23000" dir="5400000" rotWithShape="0">
+              <a:srgbClr val="000000">
+                <a:alpha val="34999"/>
+              </a:srgbClr>
+            </a:outerShdw>
+          </a:effectLst>
+        </p:spPr>
+        <p:txBody>
+          <a:bodyPr anchor="ctr"/>
+          <a:lstStyle/>
+          <a:p>
+            <a:endParaRPr lang="en-US"/>
+          </a:p>
+        </p:txBody>
+      </p:sp>
+      <p:sp>
+        <p:nvSpPr>
+          <p:cNvPr id="12" name="TextBox 11">
+            <a:extLst>
+              <a:ext uri="{FF2B5EF4-FFF2-40B4-BE49-F238E27FC236}">
+                <a16:creationId xmlns:a16="http://schemas.microsoft.com/office/drawing/2014/main" id="{0846F693-DF46-E92A-EF7C-AF3BDF4A2389}"/>
+              </a:ext>
+            </a:extLst>
+          </p:cNvPr>
+          <p:cNvSpPr txBox="1">
+            <a:spLocks noChangeArrowheads="1"/>
+          </p:cNvSpPr>
+          <p:nvPr/>
+        </p:nvSpPr>
+        <p:spPr bwMode="auto">
+          <a:xfrm>
+            <a:off x="7148383" y="4524375"/>
+            <a:ext cx="1095375" cy="369888"/>
+          </a:xfrm>
+          <a:prstGeom prst="rect">
+            <a:avLst/>
+          </a:prstGeom>
+          <a:noFill/>
+          <a:ln>
+            <a:noFill/>
+          </a:ln>
+          <a:extLst>
+            <a:ext uri="{909E8E84-426E-40DD-AFC4-6F175D3DCCD1}">
+              <a14:hiddenFill xmlns:a14="http://schemas.microsoft.com/office/drawing/2010/main">
+                <a:solidFill>
+                  <a:srgbClr val="FFFFFF"/>
+                </a:solidFill>
+              </a14:hiddenFill>
+            </a:ext>
+            <a:ext uri="{91240B29-F687-4F45-9708-019B960494DF}">
+              <a14:hiddenLine xmlns:a14="http://schemas.microsoft.com/office/drawing/2010/main" w="9525">
+                <a:solidFill>
+                  <a:srgbClr val="000000"/>
+                </a:solidFill>
+                <a:miter lim="800000"/>
+                <a:headEnd/>
+                <a:tailEnd/>
+              </a14:hiddenLine>
+            </a:ext>
+          </a:extLst>
+        </p:spPr>
+        <p:txBody>
+          <a:bodyPr wrap="none">
+            <a:spAutoFit/>
+          </a:bodyPr>
+          <a:lstStyle>
+            <a:lvl1pPr eaLnBrk="0" hangingPunct="0">
+              <a:defRPr sz="2400">
+                <a:solidFill>
+                  <a:schemeClr val="tx1"/>
+                </a:solidFill>
+                <a:latin typeface="Arial" charset="0"/>
+                <a:ea typeface="ＭＳ Ｐゴシック" charset="-128"/>
+              </a:defRPr>
+            </a:lvl1pPr>
+            <a:lvl2pPr marL="742950" indent="-285750" eaLnBrk="0" hangingPunct="0">
+              <a:defRPr sz="2400">
+                <a:solidFill>
+                  <a:schemeClr val="tx1"/>
+                </a:solidFill>
+                <a:latin typeface="Arial" charset="0"/>
+                <a:ea typeface="ＭＳ Ｐゴシック" charset="-128"/>
+              </a:defRPr>
+            </a:lvl2pPr>
+            <a:lvl3pPr marL="1143000" indent="-228600" eaLnBrk="0" hangingPunct="0">
+              <a:defRPr sz="2400">
+                <a:solidFill>
+                  <a:schemeClr val="tx1"/>
+                </a:solidFill>
+                <a:latin typeface="Arial" charset="0"/>
+                <a:ea typeface="ＭＳ Ｐゴシック" charset="-128"/>
+              </a:defRPr>
+            </a:lvl3pPr>
+            <a:lvl4pPr marL="1600200" indent="-228600" eaLnBrk="0" hangingPunct="0">
+              <a:defRPr sz="2400">
+                <a:solidFill>
+                  <a:schemeClr val="tx1"/>
+                </a:solidFill>
+                <a:latin typeface="Arial" charset="0"/>
+                <a:ea typeface="ＭＳ Ｐゴシック" charset="-128"/>
+              </a:defRPr>
+            </a:lvl4pPr>
+            <a:lvl5pPr marL="2057400" indent="-228600" eaLnBrk="0" hangingPunct="0">
+              <a:defRPr sz="2400">
+                <a:solidFill>
+                  <a:schemeClr val="tx1"/>
+                </a:solidFill>
+                <a:latin typeface="Arial" charset="0"/>
+                <a:ea typeface="ＭＳ Ｐゴシック" charset="-128"/>
+              </a:defRPr>
+            </a:lvl5pPr>
+            <a:lvl6pPr marL="2514600" indent="-228600" eaLnBrk="0" fontAlgn="base" hangingPunct="0">
+              <a:spcBef>
+                <a:spcPct val="0"/>
+              </a:spcBef>
+              <a:spcAft>
+                <a:spcPct val="0"/>
+              </a:spcAft>
+              <a:defRPr sz="2400">
+                <a:solidFill>
+                  <a:schemeClr val="tx1"/>
+                </a:solidFill>
+                <a:latin typeface="Arial" charset="0"/>
+                <a:ea typeface="ＭＳ Ｐゴシック" charset="-128"/>
+              </a:defRPr>
+            </a:lvl6pPr>
+            <a:lvl7pPr marL="2971800" indent="-228600" eaLnBrk="0" fontAlgn="base" hangingPunct="0">
+              <a:spcBef>
+                <a:spcPct val="0"/>
+              </a:spcBef>
+              <a:spcAft>
+                <a:spcPct val="0"/>
+              </a:spcAft>
+              <a:defRPr sz="2400">
+                <a:solidFill>
+                  <a:schemeClr val="tx1"/>
+                </a:solidFill>
+                <a:latin typeface="Arial" charset="0"/>
+                <a:ea typeface="ＭＳ Ｐゴシック" charset="-128"/>
+              </a:defRPr>
+            </a:lvl7pPr>
+            <a:lvl8pPr marL="3429000" indent="-228600" eaLnBrk="0" fontAlgn="base" hangingPunct="0">
+              <a:spcBef>
+                <a:spcPct val="0"/>
+              </a:spcBef>
+              <a:spcAft>
+                <a:spcPct val="0"/>
+              </a:spcAft>
+              <a:defRPr sz="2400">
+                <a:solidFill>
+                  <a:schemeClr val="tx1"/>
+                </a:solidFill>
+                <a:latin typeface="Arial" charset="0"/>
+                <a:ea typeface="ＭＳ Ｐゴシック" charset="-128"/>
+              </a:defRPr>
+            </a:lvl8pPr>
+            <a:lvl9pPr marL="3886200" indent="-228600" eaLnBrk="0" fontAlgn="base" hangingPunct="0">
+              <a:spcBef>
+                <a:spcPct val="0"/>
+              </a:spcBef>
+              <a:spcAft>
+                <a:spcPct val="0"/>
+              </a:spcAft>
+              <a:defRPr sz="2400">
+                <a:solidFill>
+                  <a:schemeClr val="tx1"/>
+                </a:solidFill>
+                <a:latin typeface="Arial" charset="0"/>
+                <a:ea typeface="ＭＳ Ｐゴシック" charset="-128"/>
+              </a:defRPr>
+            </a:lvl9pPr>
+          </a:lstStyle>
+          <a:p>
+            <a:pPr eaLnBrk="1" hangingPunct="1"/>
+            <a:r>
+              <a:rPr lang="en-US" altLang="x-none" sz="1800"/>
+              <a:t>Implicit 1</a:t>
+            </a:r>
+          </a:p>
+        </p:txBody>
+      </p:sp>
+    </p:spTree>
+    <p:extLst>
+      <p:ext uri="{BB962C8B-B14F-4D97-AF65-F5344CB8AC3E}">
+        <p14:creationId xmlns:p14="http://schemas.microsoft.com/office/powerpoint/2010/main" val="847941965"/>
+      </p:ext>
+    </p:extLst>
+  </p:cSld>
+  <p:clrMapOvr>
+    <a:masterClrMapping/>
+  </p:clrMapOvr>
+</p:sld>
+</file>
+
+<file path=ppt/slides/slide7.xml><?xml version="1.0" encoding="utf-8"?>
+<p:sld xmlns:a="http://schemas.openxmlformats.org/drawingml/2006/main" xmlns:r="http://schemas.openxmlformats.org/officeDocument/2006/relationships" xmlns:p="http://schemas.openxmlformats.org/presentationml/2006/main">
+  <p:cSld>
+    <p:spTree>
+      <p:nvGrpSpPr>
+        <p:cNvPr id="1" name=""/>
+        <p:cNvGrpSpPr/>
+        <p:nvPr/>
+      </p:nvGrpSpPr>
+      <p:grpSpPr>
+        <a:xfrm>
+          <a:off x="0" y="0"/>
+          <a:ext cx="0" cy="0"/>
+          <a:chOff x="0" y="0"/>
+          <a:chExt cx="0" cy="0"/>
+        </a:xfrm>
+      </p:grpSpPr>
+      <p:sp>
+        <p:nvSpPr>
+          <p:cNvPr id="27649" name="Title 1"/>
+          <p:cNvSpPr>
+            <a:spLocks noGrp="1"/>
+          </p:cNvSpPr>
+          <p:nvPr>
+            <p:ph type="title"/>
+          </p:nvPr>
+        </p:nvSpPr>
+        <p:spPr>
+          <a:xfrm>
+            <a:off x="1847850" y="260351"/>
+            <a:ext cx="8229600" cy="1139825"/>
+          </a:xfrm>
+        </p:spPr>
+        <p:txBody>
+          <a:bodyPr/>
+          <a:lstStyle/>
+          <a:p>
+            <a:r>
+              <a:rPr lang="en-US" altLang="x-none"/>
+              <a:t>examples</a:t>
+            </a:r>
+          </a:p>
+        </p:txBody>
+      </p:sp>
+      <p:sp>
+        <p:nvSpPr>
+          <p:cNvPr id="27650" name="Date Placeholder 3"/>
+          <p:cNvSpPr>
+            <a:spLocks noGrp="1"/>
+          </p:cNvSpPr>
+          <p:nvPr>
+            <p:ph type="dt" sz="quarter" idx="10"/>
+          </p:nvPr>
+        </p:nvSpPr>
+        <p:spPr>
+          <a:noFill/>
+          <a:ln/>
+          <a:extLst>
+            <a:ext uri="{909E8E84-426E-40DD-AFC4-6F175D3DCCD1}">
+              <a14:hiddenFill xmlns:a14="http://schemas.microsoft.com/office/drawing/2010/main">
+                <a:solidFill>
+                  <a:srgbClr val="FFFFFF"/>
+                </a:solidFill>
+              </a14:hiddenFill>
+            </a:ext>
+            <a:ext uri="{91240B29-F687-4F45-9708-019B960494DF}">
+              <a14:hiddenLine xmlns:a14="http://schemas.microsoft.com/office/drawing/2010/main" w="9525">
+                <a:solidFill>
+                  <a:srgbClr val="000000"/>
+                </a:solidFill>
+                <a:miter lim="800000"/>
+                <a:headEnd/>
+                <a:tailEnd/>
+              </a14:hiddenLine>
+            </a:ext>
+          </a:extLst>
+        </p:spPr>
+        <p:txBody>
+          <a:bodyPr/>
+          <a:lstStyle>
+            <a:lvl1pPr eaLnBrk="0" hangingPunct="0">
+              <a:defRPr sz="2400">
+                <a:solidFill>
+                  <a:schemeClr val="tx1"/>
+                </a:solidFill>
+                <a:latin typeface="Arial" charset="0"/>
+                <a:ea typeface="ＭＳ Ｐゴシック" charset="-128"/>
+              </a:defRPr>
+            </a:lvl1pPr>
+            <a:lvl2pPr marL="742950" indent="-285750" eaLnBrk="0" hangingPunct="0">
+              <a:defRPr sz="2400">
+                <a:solidFill>
+                  <a:schemeClr val="tx1"/>
+                </a:solidFill>
+                <a:latin typeface="Arial" charset="0"/>
+                <a:ea typeface="ＭＳ Ｐゴシック" charset="-128"/>
+              </a:defRPr>
+            </a:lvl2pPr>
+            <a:lvl3pPr marL="1143000" indent="-228600" eaLnBrk="0" hangingPunct="0">
+              <a:defRPr sz="2400">
+                <a:solidFill>
+                  <a:schemeClr val="tx1"/>
+                </a:solidFill>
+                <a:latin typeface="Arial" charset="0"/>
+                <a:ea typeface="ＭＳ Ｐゴシック" charset="-128"/>
+              </a:defRPr>
+            </a:lvl3pPr>
+            <a:lvl4pPr marL="1600200" indent="-228600" eaLnBrk="0" hangingPunct="0">
+              <a:defRPr sz="2400">
+                <a:solidFill>
+                  <a:schemeClr val="tx1"/>
+                </a:solidFill>
+                <a:latin typeface="Arial" charset="0"/>
+                <a:ea typeface="ＭＳ Ｐゴシック" charset="-128"/>
+              </a:defRPr>
+            </a:lvl4pPr>
+            <a:lvl5pPr marL="2057400" indent="-228600" eaLnBrk="0" hangingPunct="0">
+              <a:defRPr sz="2400">
+                <a:solidFill>
+                  <a:schemeClr val="tx1"/>
+                </a:solidFill>
+                <a:latin typeface="Arial" charset="0"/>
+                <a:ea typeface="ＭＳ Ｐゴシック" charset="-128"/>
+              </a:defRPr>
+            </a:lvl5pPr>
+            <a:lvl6pPr marL="2514600" indent="-228600" eaLnBrk="0" fontAlgn="base" hangingPunct="0">
+              <a:spcBef>
+                <a:spcPct val="0"/>
+              </a:spcBef>
+              <a:spcAft>
+                <a:spcPct val="0"/>
+              </a:spcAft>
+              <a:defRPr sz="2400">
+                <a:solidFill>
+                  <a:schemeClr val="tx1"/>
+                </a:solidFill>
+                <a:latin typeface="Arial" charset="0"/>
+                <a:ea typeface="ＭＳ Ｐゴシック" charset="-128"/>
+              </a:defRPr>
+            </a:lvl6pPr>
+            <a:lvl7pPr marL="2971800" indent="-228600" eaLnBrk="0" fontAlgn="base" hangingPunct="0">
+              <a:spcBef>
+                <a:spcPct val="0"/>
+              </a:spcBef>
+              <a:spcAft>
+                <a:spcPct val="0"/>
+              </a:spcAft>
+              <a:defRPr sz="2400">
+                <a:solidFill>
+                  <a:schemeClr val="tx1"/>
+                </a:solidFill>
+                <a:latin typeface="Arial" charset="0"/>
+                <a:ea typeface="ＭＳ Ｐゴシック" charset="-128"/>
+              </a:defRPr>
+            </a:lvl7pPr>
+            <a:lvl8pPr marL="3429000" indent="-228600" eaLnBrk="0" fontAlgn="base" hangingPunct="0">
+              <a:spcBef>
+                <a:spcPct val="0"/>
+              </a:spcBef>
+              <a:spcAft>
+                <a:spcPct val="0"/>
+              </a:spcAft>
+              <a:defRPr sz="2400">
+                <a:solidFill>
+                  <a:schemeClr val="tx1"/>
+                </a:solidFill>
+                <a:latin typeface="Arial" charset="0"/>
+                <a:ea typeface="ＭＳ Ｐゴシック" charset="-128"/>
+              </a:defRPr>
+            </a:lvl8pPr>
+            <a:lvl9pPr marL="3886200" indent="-228600" eaLnBrk="0" fontAlgn="base" hangingPunct="0">
+              <a:spcBef>
+                <a:spcPct val="0"/>
+              </a:spcBef>
+              <a:spcAft>
+                <a:spcPct val="0"/>
+              </a:spcAft>
+              <a:defRPr sz="2400">
+                <a:solidFill>
+                  <a:schemeClr val="tx1"/>
+                </a:solidFill>
+                <a:latin typeface="Arial" charset="0"/>
+                <a:ea typeface="ＭＳ Ｐゴシック" charset="-128"/>
+              </a:defRPr>
+            </a:lvl9pPr>
+          </a:lstStyle>
+          <a:p>
+            <a:pPr eaLnBrk="1" hangingPunct="1"/>
+            <a:r>
+              <a:rPr lang="en-US" altLang="x-none" sz="1200">
+                <a:latin typeface="Garamond" charset="0"/>
+              </a:rPr>
+              <a:t>22 October 2016</a:t>
+            </a:r>
+            <a:endParaRPr lang="it-IT" altLang="x-none" sz="1200">
+              <a:latin typeface="Garamond" charset="0"/>
+            </a:endParaRPr>
+          </a:p>
+        </p:txBody>
+      </p:sp>
+      <p:sp>
+        <p:nvSpPr>
+          <p:cNvPr id="27651" name="Footer Placeholder 4"/>
+          <p:cNvSpPr>
+            <a:spLocks noGrp="1"/>
+          </p:cNvSpPr>
+          <p:nvPr>
+            <p:ph type="ftr" sz="quarter" idx="11"/>
+          </p:nvPr>
+        </p:nvSpPr>
+        <p:spPr>
+          <a:noFill/>
+          <a:ln/>
+          <a:extLst>
+            <a:ext uri="{909E8E84-426E-40DD-AFC4-6F175D3DCCD1}">
+              <a14:hiddenFill xmlns:a14="http://schemas.microsoft.com/office/drawing/2010/main">
+                <a:solidFill>
+                  <a:srgbClr val="FFFFFF"/>
+                </a:solidFill>
+              </a14:hiddenFill>
+            </a:ext>
+            <a:ext uri="{91240B29-F687-4F45-9708-019B960494DF}">
+              <a14:hiddenLine xmlns:a14="http://schemas.microsoft.com/office/drawing/2010/main" w="9525">
+                <a:solidFill>
+                  <a:srgbClr val="000000"/>
+                </a:solidFill>
+                <a:miter lim="800000"/>
+                <a:headEnd/>
+                <a:tailEnd/>
+              </a14:hiddenLine>
+            </a:ext>
+          </a:extLst>
+        </p:spPr>
+        <p:txBody>
+          <a:bodyPr/>
+          <a:lstStyle>
+            <a:lvl1pPr eaLnBrk="0" hangingPunct="0">
+              <a:defRPr sz="2400">
+                <a:solidFill>
+                  <a:schemeClr val="tx1"/>
+                </a:solidFill>
+                <a:latin typeface="Arial" charset="0"/>
+                <a:ea typeface="ＭＳ Ｐゴシック" charset="-128"/>
+              </a:defRPr>
+            </a:lvl1pPr>
+            <a:lvl2pPr marL="742950" indent="-285750" eaLnBrk="0" hangingPunct="0">
+              <a:defRPr sz="2400">
+                <a:solidFill>
+                  <a:schemeClr val="tx1"/>
+                </a:solidFill>
+                <a:latin typeface="Arial" charset="0"/>
+                <a:ea typeface="ＭＳ Ｐゴシック" charset="-128"/>
+              </a:defRPr>
+            </a:lvl2pPr>
+            <a:lvl3pPr marL="1143000" indent="-228600" eaLnBrk="0" hangingPunct="0">
+              <a:defRPr sz="2400">
+                <a:solidFill>
+                  <a:schemeClr val="tx1"/>
+                </a:solidFill>
+                <a:latin typeface="Arial" charset="0"/>
+                <a:ea typeface="ＭＳ Ｐゴシック" charset="-128"/>
+              </a:defRPr>
+            </a:lvl3pPr>
+            <a:lvl4pPr marL="1600200" indent="-228600" eaLnBrk="0" hangingPunct="0">
+              <a:defRPr sz="2400">
+                <a:solidFill>
+                  <a:schemeClr val="tx1"/>
+                </a:solidFill>
+                <a:latin typeface="Arial" charset="0"/>
+                <a:ea typeface="ＭＳ Ｐゴシック" charset="-128"/>
+              </a:defRPr>
+            </a:lvl4pPr>
+            <a:lvl5pPr marL="2057400" indent="-228600" eaLnBrk="0" hangingPunct="0">
+              <a:defRPr sz="2400">
+                <a:solidFill>
+                  <a:schemeClr val="tx1"/>
+                </a:solidFill>
+                <a:latin typeface="Arial" charset="0"/>
+                <a:ea typeface="ＭＳ Ｐゴシック" charset="-128"/>
+              </a:defRPr>
+            </a:lvl5pPr>
+            <a:lvl6pPr marL="2514600" indent="-228600" eaLnBrk="0" fontAlgn="base" hangingPunct="0">
+              <a:spcBef>
+                <a:spcPct val="0"/>
+              </a:spcBef>
+              <a:spcAft>
+                <a:spcPct val="0"/>
+              </a:spcAft>
+              <a:defRPr sz="2400">
+                <a:solidFill>
+                  <a:schemeClr val="tx1"/>
+                </a:solidFill>
+                <a:latin typeface="Arial" charset="0"/>
+                <a:ea typeface="ＭＳ Ｐゴシック" charset="-128"/>
+              </a:defRPr>
+            </a:lvl6pPr>
+            <a:lvl7pPr marL="2971800" indent="-228600" eaLnBrk="0" fontAlgn="base" hangingPunct="0">
+              <a:spcBef>
+                <a:spcPct val="0"/>
+              </a:spcBef>
+              <a:spcAft>
+                <a:spcPct val="0"/>
+              </a:spcAft>
+              <a:defRPr sz="2400">
+                <a:solidFill>
+                  <a:schemeClr val="tx1"/>
+                </a:solidFill>
+                <a:latin typeface="Arial" charset="0"/>
+                <a:ea typeface="ＭＳ Ｐゴシック" charset="-128"/>
+              </a:defRPr>
+            </a:lvl7pPr>
+            <a:lvl8pPr marL="3429000" indent="-228600" eaLnBrk="0" fontAlgn="base" hangingPunct="0">
+              <a:spcBef>
+                <a:spcPct val="0"/>
+              </a:spcBef>
+              <a:spcAft>
+                <a:spcPct val="0"/>
+              </a:spcAft>
+              <a:defRPr sz="2400">
+                <a:solidFill>
+                  <a:schemeClr val="tx1"/>
+                </a:solidFill>
+                <a:latin typeface="Arial" charset="0"/>
+                <a:ea typeface="ＭＳ Ｐゴシック" charset="-128"/>
+              </a:defRPr>
+            </a:lvl8pPr>
+            <a:lvl9pPr marL="3886200" indent="-228600" eaLnBrk="0" fontAlgn="base" hangingPunct="0">
+              <a:spcBef>
+                <a:spcPct val="0"/>
+              </a:spcBef>
+              <a:spcAft>
+                <a:spcPct val="0"/>
+              </a:spcAft>
+              <a:defRPr sz="2400">
+                <a:solidFill>
+                  <a:schemeClr val="tx1"/>
+                </a:solidFill>
+                <a:latin typeface="Arial" charset="0"/>
+                <a:ea typeface="ＭＳ Ｐゴシック" charset="-128"/>
+              </a:defRPr>
+            </a:lvl9pPr>
+          </a:lstStyle>
+          <a:p>
+            <a:pPr eaLnBrk="1" hangingPunct="1"/>
+            <a:r>
+              <a:rPr lang="en-US" altLang="x-none" sz="1200">
+                <a:latin typeface="Garamond" charset="0"/>
+              </a:rPr>
+              <a:t>Vincenzo Innocente</a:t>
+            </a:r>
+            <a:endParaRPr lang="it-IT" altLang="x-none" sz="1200">
+              <a:latin typeface="Garamond" charset="0"/>
+            </a:endParaRPr>
+          </a:p>
+        </p:txBody>
+      </p:sp>
+      <p:sp>
+        <p:nvSpPr>
+          <p:cNvPr id="27652" name="Slide Number Placeholder 5"/>
+          <p:cNvSpPr>
+            <a:spLocks noGrp="1"/>
+          </p:cNvSpPr>
+          <p:nvPr>
+            <p:ph type="sldNum" sz="quarter" idx="12"/>
+          </p:nvPr>
+        </p:nvSpPr>
+        <p:spPr>
+          <a:noFill/>
+          <a:ln/>
+          <a:extLst>
+            <a:ext uri="{909E8E84-426E-40DD-AFC4-6F175D3DCCD1}">
+              <a14:hiddenFill xmlns:a14="http://schemas.microsoft.com/office/drawing/2010/main">
+                <a:solidFill>
+                  <a:srgbClr val="FFFFFF"/>
+                </a:solidFill>
+              </a14:hiddenFill>
+            </a:ext>
+            <a:ext uri="{91240B29-F687-4F45-9708-019B960494DF}">
+              <a14:hiddenLine xmlns:a14="http://schemas.microsoft.com/office/drawing/2010/main" w="9525">
+                <a:solidFill>
+                  <a:srgbClr val="000000"/>
+                </a:solidFill>
+                <a:miter lim="800000"/>
+                <a:headEnd/>
+                <a:tailEnd/>
+              </a14:hiddenLine>
+            </a:ext>
+          </a:extLst>
+        </p:spPr>
+        <p:txBody>
+          <a:bodyPr/>
+          <a:lstStyle>
+            <a:lvl1pPr eaLnBrk="0" hangingPunct="0">
+              <a:defRPr sz="2400">
+                <a:solidFill>
+                  <a:schemeClr val="tx1"/>
+                </a:solidFill>
+                <a:latin typeface="Arial" charset="0"/>
+                <a:ea typeface="ＭＳ Ｐゴシック" charset="-128"/>
+              </a:defRPr>
+            </a:lvl1pPr>
+            <a:lvl2pPr marL="742950" indent="-285750" eaLnBrk="0" hangingPunct="0">
+              <a:defRPr sz="2400">
+                <a:solidFill>
+                  <a:schemeClr val="tx1"/>
+                </a:solidFill>
+                <a:latin typeface="Arial" charset="0"/>
+                <a:ea typeface="ＭＳ Ｐゴシック" charset="-128"/>
+              </a:defRPr>
+            </a:lvl2pPr>
+            <a:lvl3pPr marL="1143000" indent="-228600" eaLnBrk="0" hangingPunct="0">
+              <a:defRPr sz="2400">
+                <a:solidFill>
+                  <a:schemeClr val="tx1"/>
+                </a:solidFill>
+                <a:latin typeface="Arial" charset="0"/>
+                <a:ea typeface="ＭＳ Ｐゴシック" charset="-128"/>
+              </a:defRPr>
+            </a:lvl3pPr>
+            <a:lvl4pPr marL="1600200" indent="-228600" eaLnBrk="0" hangingPunct="0">
+              <a:defRPr sz="2400">
+                <a:solidFill>
+                  <a:schemeClr val="tx1"/>
+                </a:solidFill>
+                <a:latin typeface="Arial" charset="0"/>
+                <a:ea typeface="ＭＳ Ｐゴシック" charset="-128"/>
+              </a:defRPr>
+            </a:lvl4pPr>
+            <a:lvl5pPr marL="2057400" indent="-228600" eaLnBrk="0" hangingPunct="0">
+              <a:defRPr sz="2400">
+                <a:solidFill>
+                  <a:schemeClr val="tx1"/>
+                </a:solidFill>
+                <a:latin typeface="Arial" charset="0"/>
+                <a:ea typeface="ＭＳ Ｐゴシック" charset="-128"/>
+              </a:defRPr>
+            </a:lvl5pPr>
+            <a:lvl6pPr marL="2514600" indent="-228600" eaLnBrk="0" fontAlgn="base" hangingPunct="0">
+              <a:spcBef>
+                <a:spcPct val="0"/>
+              </a:spcBef>
+              <a:spcAft>
+                <a:spcPct val="0"/>
+              </a:spcAft>
+              <a:defRPr sz="2400">
+                <a:solidFill>
+                  <a:schemeClr val="tx1"/>
+                </a:solidFill>
+                <a:latin typeface="Arial" charset="0"/>
+                <a:ea typeface="ＭＳ Ｐゴシック" charset="-128"/>
+              </a:defRPr>
+            </a:lvl6pPr>
+            <a:lvl7pPr marL="2971800" indent="-228600" eaLnBrk="0" fontAlgn="base" hangingPunct="0">
+              <a:spcBef>
+                <a:spcPct val="0"/>
+              </a:spcBef>
+              <a:spcAft>
+                <a:spcPct val="0"/>
+              </a:spcAft>
+              <a:defRPr sz="2400">
+                <a:solidFill>
+                  <a:schemeClr val="tx1"/>
+                </a:solidFill>
+                <a:latin typeface="Arial" charset="0"/>
+                <a:ea typeface="ＭＳ Ｐゴシック" charset="-128"/>
+              </a:defRPr>
+            </a:lvl7pPr>
+            <a:lvl8pPr marL="3429000" indent="-228600" eaLnBrk="0" fontAlgn="base" hangingPunct="0">
+              <a:spcBef>
+                <a:spcPct val="0"/>
+              </a:spcBef>
+              <a:spcAft>
+                <a:spcPct val="0"/>
+              </a:spcAft>
+              <a:defRPr sz="2400">
+                <a:solidFill>
+                  <a:schemeClr val="tx1"/>
+                </a:solidFill>
+                <a:latin typeface="Arial" charset="0"/>
+                <a:ea typeface="ＭＳ Ｐゴシック" charset="-128"/>
+              </a:defRPr>
+            </a:lvl8pPr>
+            <a:lvl9pPr marL="3886200" indent="-228600" eaLnBrk="0" fontAlgn="base" hangingPunct="0">
+              <a:spcBef>
+                <a:spcPct val="0"/>
+              </a:spcBef>
+              <a:spcAft>
+                <a:spcPct val="0"/>
+              </a:spcAft>
+              <a:defRPr sz="2400">
+                <a:solidFill>
+                  <a:schemeClr val="tx1"/>
+                </a:solidFill>
+                <a:latin typeface="Arial" charset="0"/>
+                <a:ea typeface="ＭＳ Ｐゴシック" charset="-128"/>
+              </a:defRPr>
+            </a:lvl9pPr>
+          </a:lstStyle>
+          <a:p>
+            <a:pPr eaLnBrk="1" hangingPunct="1"/>
+            <a:fld id="{2F5B2064-19F4-9B4B-9C86-075C784918A9}" type="slidenum">
+              <a:rPr lang="it-IT" altLang="x-none" sz="1200">
+                <a:latin typeface="Garamond" charset="0"/>
+              </a:rPr>
+              <a:pPr eaLnBrk="1" hangingPunct="1"/>
+              <a:t>7</a:t>
+            </a:fld>
+            <a:endParaRPr lang="it-IT" altLang="x-none" sz="1200">
+              <a:latin typeface="Garamond" charset="0"/>
+            </a:endParaRPr>
+          </a:p>
+        </p:txBody>
+      </p:sp>
+      <p:sp>
+        <p:nvSpPr>
+          <p:cNvPr id="27653" name="TextBox 6"/>
+          <p:cNvSpPr txBox="1">
+            <a:spLocks noChangeArrowheads="1"/>
+          </p:cNvSpPr>
+          <p:nvPr/>
+        </p:nvSpPr>
+        <p:spPr bwMode="auto">
+          <a:xfrm>
+            <a:off x="1703388" y="1196975"/>
+            <a:ext cx="8856662" cy="3785652"/>
+          </a:xfrm>
+          <a:prstGeom prst="rect">
+            <a:avLst/>
+          </a:prstGeom>
+          <a:noFill/>
+          <a:ln>
+            <a:noFill/>
+          </a:ln>
+          <a:extLst>
+            <a:ext uri="{909E8E84-426E-40DD-AFC4-6F175D3DCCD1}">
+              <a14:hiddenFill xmlns:a14="http://schemas.microsoft.com/office/drawing/2010/main">
+                <a:solidFill>
+                  <a:srgbClr val="FFFFFF"/>
+                </a:solidFill>
+              </a14:hiddenFill>
+            </a:ext>
+            <a:ext uri="{91240B29-F687-4F45-9708-019B960494DF}">
+              <a14:hiddenLine xmlns:a14="http://schemas.microsoft.com/office/drawing/2010/main" w="9525">
+                <a:solidFill>
+                  <a:srgbClr val="000000"/>
+                </a:solidFill>
+                <a:miter lim="800000"/>
+                <a:headEnd/>
+                <a:tailEnd/>
+              </a14:hiddenLine>
+            </a:ext>
+          </a:extLst>
+        </p:spPr>
+        <p:txBody>
+          <a:bodyPr>
+            <a:spAutoFit/>
+          </a:bodyPr>
+          <a:lstStyle>
+            <a:lvl1pPr eaLnBrk="0" hangingPunct="0">
+              <a:defRPr sz="2400">
+                <a:solidFill>
+                  <a:schemeClr val="tx1"/>
+                </a:solidFill>
+                <a:latin typeface="Arial" charset="0"/>
+                <a:ea typeface="ＭＳ Ｐゴシック" charset="-128"/>
+              </a:defRPr>
+            </a:lvl1pPr>
+            <a:lvl2pPr marL="742950" indent="-285750" eaLnBrk="0" hangingPunct="0">
+              <a:defRPr sz="2400">
+                <a:solidFill>
+                  <a:schemeClr val="tx1"/>
+                </a:solidFill>
+                <a:latin typeface="Arial" charset="0"/>
+                <a:ea typeface="ＭＳ Ｐゴシック" charset="-128"/>
+              </a:defRPr>
+            </a:lvl2pPr>
+            <a:lvl3pPr marL="1143000" indent="-228600" eaLnBrk="0" hangingPunct="0">
+              <a:defRPr sz="2400">
+                <a:solidFill>
+                  <a:schemeClr val="tx1"/>
+                </a:solidFill>
+                <a:latin typeface="Arial" charset="0"/>
+                <a:ea typeface="ＭＳ Ｐゴシック" charset="-128"/>
+              </a:defRPr>
+            </a:lvl3pPr>
+            <a:lvl4pPr marL="1600200" indent="-228600" eaLnBrk="0" hangingPunct="0">
+              <a:defRPr sz="2400">
+                <a:solidFill>
+                  <a:schemeClr val="tx1"/>
+                </a:solidFill>
+                <a:latin typeface="Arial" charset="0"/>
+                <a:ea typeface="ＭＳ Ｐゴシック" charset="-128"/>
+              </a:defRPr>
+            </a:lvl4pPr>
+            <a:lvl5pPr marL="2057400" indent="-228600" eaLnBrk="0" hangingPunct="0">
+              <a:defRPr sz="2400">
+                <a:solidFill>
+                  <a:schemeClr val="tx1"/>
+                </a:solidFill>
+                <a:latin typeface="Arial" charset="0"/>
+                <a:ea typeface="ＭＳ Ｐゴシック" charset="-128"/>
+              </a:defRPr>
+            </a:lvl5pPr>
+            <a:lvl6pPr marL="2514600" indent="-228600" eaLnBrk="0" fontAlgn="base" hangingPunct="0">
+              <a:spcBef>
+                <a:spcPct val="0"/>
+              </a:spcBef>
+              <a:spcAft>
+                <a:spcPct val="0"/>
+              </a:spcAft>
+              <a:defRPr sz="2400">
+                <a:solidFill>
+                  <a:schemeClr val="tx1"/>
+                </a:solidFill>
+                <a:latin typeface="Arial" charset="0"/>
+                <a:ea typeface="ＭＳ Ｐゴシック" charset="-128"/>
+              </a:defRPr>
+            </a:lvl6pPr>
+            <a:lvl7pPr marL="2971800" indent="-228600" eaLnBrk="0" fontAlgn="base" hangingPunct="0">
+              <a:spcBef>
+                <a:spcPct val="0"/>
+              </a:spcBef>
+              <a:spcAft>
+                <a:spcPct val="0"/>
+              </a:spcAft>
+              <a:defRPr sz="2400">
+                <a:solidFill>
+                  <a:schemeClr val="tx1"/>
+                </a:solidFill>
+                <a:latin typeface="Arial" charset="0"/>
+                <a:ea typeface="ＭＳ Ｐゴシック" charset="-128"/>
+              </a:defRPr>
+            </a:lvl7pPr>
+            <a:lvl8pPr marL="3429000" indent="-228600" eaLnBrk="0" fontAlgn="base" hangingPunct="0">
+              <a:spcBef>
+                <a:spcPct val="0"/>
+              </a:spcBef>
+              <a:spcAft>
+                <a:spcPct val="0"/>
+              </a:spcAft>
+              <a:defRPr sz="2400">
+                <a:solidFill>
+                  <a:schemeClr val="tx1"/>
+                </a:solidFill>
+                <a:latin typeface="Arial" charset="0"/>
+                <a:ea typeface="ＭＳ Ｐゴシック" charset="-128"/>
+              </a:defRPr>
+            </a:lvl8pPr>
+            <a:lvl9pPr marL="3886200" indent="-228600" eaLnBrk="0" fontAlgn="base" hangingPunct="0">
+              <a:spcBef>
+                <a:spcPct val="0"/>
+              </a:spcBef>
+              <a:spcAft>
+                <a:spcPct val="0"/>
+              </a:spcAft>
+              <a:defRPr sz="2400">
+                <a:solidFill>
+                  <a:schemeClr val="tx1"/>
+                </a:solidFill>
+                <a:latin typeface="Arial" charset="0"/>
+                <a:ea typeface="ＭＳ Ｐゴシック" charset="-128"/>
+              </a:defRPr>
+            </a:lvl9pPr>
+          </a:lstStyle>
+          <a:p>
+            <a:pPr eaLnBrk="1" hangingPunct="1"/>
+            <a:r>
+              <a:rPr lang="is-IS" altLang="x-none" sz="1600" dirty="0">
+                <a:latin typeface="Lucida Console" charset="0"/>
+              </a:rPr>
+              <a:t>0.00000000e+00 0x0p+0          00000000000000000000000000000000</a:t>
+            </a:r>
+          </a:p>
+          <a:p>
+            <a:pPr eaLnBrk="1" hangingPunct="1"/>
+            <a:r>
+              <a:rPr lang="cs-CZ" altLang="x-none" sz="1600" dirty="0">
+                <a:latin typeface="Lucida Console" charset="0"/>
+              </a:rPr>
+              <a:t>5.00000000e-01 0x1p-1          00111111000000000000000000000000</a:t>
+            </a:r>
+          </a:p>
+          <a:p>
+            <a:pPr eaLnBrk="1" hangingPunct="1"/>
+            <a:r>
+              <a:rPr lang="cs-CZ" altLang="x-none" sz="1600" dirty="0">
+                <a:latin typeface="Lucida Console" charset="0"/>
+              </a:rPr>
+              <a:t>1.00000000e+00 0x1p+0          00111111100000000000000000000000</a:t>
+            </a:r>
+          </a:p>
+          <a:p>
+            <a:pPr eaLnBrk="1" hangingPunct="1"/>
+            <a:r>
+              <a:rPr lang="cs-CZ" altLang="x-none" sz="1600" dirty="0">
+                <a:latin typeface="Lucida Console" charset="0"/>
+              </a:rPr>
+              <a:t>1.50000000e+00 0x1.8p+0        00111111110000000000000000000000</a:t>
+            </a:r>
+          </a:p>
+          <a:p>
+            <a:pPr eaLnBrk="1" hangingPunct="1"/>
+            <a:r>
+              <a:rPr lang="is-IS" altLang="x-none" sz="1600" dirty="0">
+                <a:latin typeface="Lucida Console" charset="0"/>
+              </a:rPr>
+              <a:t>2.00000000e+00 0x1p+1          01000000000000000000000000000000</a:t>
+            </a:r>
+          </a:p>
+          <a:p>
+            <a:pPr eaLnBrk="1" hangingPunct="1"/>
+            <a:r>
+              <a:rPr lang="is-IS" altLang="x-none" sz="1600" dirty="0">
+                <a:latin typeface="Lucida Console" charset="0"/>
+              </a:rPr>
+              <a:t>2.50000000e+00 0x1.4p+1        01000000001000000000000000000000</a:t>
+            </a:r>
+          </a:p>
+          <a:p>
+            <a:pPr eaLnBrk="1" hangingPunct="1"/>
+            <a:r>
+              <a:rPr lang="is-IS" altLang="x-none" sz="1600" dirty="0">
+                <a:latin typeface="Lucida Console" charset="0"/>
+              </a:rPr>
+              <a:t>3.00000000e+00 0x1.8p+1        01000000010000000000000000000000</a:t>
+            </a:r>
+          </a:p>
+          <a:p>
+            <a:pPr eaLnBrk="1" hangingPunct="1"/>
+            <a:r>
+              <a:rPr lang="is-IS" altLang="x-none" sz="1600" dirty="0">
+                <a:latin typeface="Lucida Console" charset="0"/>
+              </a:rPr>
+              <a:t>8.00000000e+00 0x1p+3          01000001000000000000000000000000</a:t>
+            </a:r>
+          </a:p>
+          <a:p>
+            <a:pPr eaLnBrk="1" hangingPunct="1"/>
+            <a:r>
+              <a:rPr lang="cs-CZ" altLang="x-none" sz="1600" dirty="0">
+                <a:latin typeface="Lucida Console" charset="0"/>
+              </a:rPr>
+              <a:t>3.14159274e+00 0x1.921fb6p+1   01000000010010010000111111011011</a:t>
+            </a:r>
+            <a:endParaRPr lang="is-IS" altLang="x-none" sz="1600" dirty="0">
+              <a:latin typeface="Lucida Console" charset="0"/>
+            </a:endParaRPr>
+          </a:p>
+          <a:p>
+            <a:pPr eaLnBrk="1" hangingPunct="1"/>
+            <a:r>
+              <a:rPr lang="cs-CZ" altLang="x-none" sz="1600" dirty="0">
+                <a:latin typeface="Lucida Console" charset="0"/>
+              </a:rPr>
+              <a:t>1.00000001e-01 0x1.99999ap-4   00111101110011001100110011001101</a:t>
+            </a:r>
+            <a:endParaRPr lang="is-IS" altLang="x-none" sz="1600" dirty="0">
+              <a:latin typeface="Lucida Console" charset="0"/>
+            </a:endParaRPr>
+          </a:p>
+          <a:p>
+            <a:pPr eaLnBrk="1" hangingPunct="1"/>
+            <a:r>
+              <a:rPr lang="cs-CZ" altLang="x-none" sz="1600" dirty="0">
+                <a:latin typeface="Lucida Console" charset="0"/>
+              </a:rPr>
+              <a:t>1.17549435e-38 0x1p-126        00000000100000000000000000000000</a:t>
+            </a:r>
+          </a:p>
+          <a:p>
+            <a:pPr eaLnBrk="1" hangingPunct="1"/>
+            <a:r>
+              <a:rPr lang="cs-CZ" altLang="x-none" sz="1600" dirty="0">
+                <a:latin typeface="Lucida Console" charset="0"/>
+              </a:rPr>
+              <a:t>3.40282347e+38 0x1.fffffep+127 01111111011111111111111111111111</a:t>
+            </a:r>
+          </a:p>
+          <a:p>
+            <a:pPr eaLnBrk="1" hangingPunct="1"/>
+            <a:r>
+              <a:rPr lang="cs-CZ" altLang="x-none" sz="1600" dirty="0" err="1">
+                <a:latin typeface="Lucida Console" charset="0"/>
+              </a:rPr>
+              <a:t>nan</a:t>
+            </a:r>
+            <a:r>
+              <a:rPr lang="cs-CZ" altLang="x-none" sz="1600" dirty="0">
+                <a:latin typeface="Lucida Console" charset="0"/>
+              </a:rPr>
+              <a:t>            </a:t>
+            </a:r>
+            <a:r>
+              <a:rPr lang="cs-CZ" altLang="x-none" sz="1600" dirty="0" err="1">
+                <a:latin typeface="Lucida Console" charset="0"/>
+              </a:rPr>
+              <a:t>nan</a:t>
+            </a:r>
+            <a:r>
+              <a:rPr lang="cs-CZ" altLang="x-none" sz="1600" dirty="0">
+                <a:latin typeface="Lucida Console" charset="0"/>
+              </a:rPr>
+              <a:t>             11111111110000000000000000000000</a:t>
+            </a:r>
+          </a:p>
+          <a:p>
+            <a:pPr eaLnBrk="1" hangingPunct="1"/>
+            <a:r>
+              <a:rPr lang="cs-CZ" altLang="x-none" sz="1600" dirty="0">
+                <a:latin typeface="Lucida Console" charset="0"/>
+              </a:rPr>
+              <a:t>-</a:t>
+            </a:r>
+            <a:r>
+              <a:rPr lang="cs-CZ" altLang="x-none" sz="1600" dirty="0" err="1">
+                <a:latin typeface="Lucida Console" charset="0"/>
+              </a:rPr>
+              <a:t>inf</a:t>
+            </a:r>
+            <a:r>
+              <a:rPr lang="cs-CZ" altLang="x-none" sz="1600" dirty="0">
+                <a:latin typeface="Lucida Console" charset="0"/>
+              </a:rPr>
+              <a:t>           -</a:t>
+            </a:r>
+            <a:r>
+              <a:rPr lang="cs-CZ" altLang="x-none" sz="1600" dirty="0" err="1">
+                <a:latin typeface="Lucida Console" charset="0"/>
+              </a:rPr>
+              <a:t>inf</a:t>
+            </a:r>
+            <a:r>
+              <a:rPr lang="cs-CZ" altLang="x-none" sz="1600" dirty="0">
+                <a:latin typeface="Lucida Console" charset="0"/>
+              </a:rPr>
+              <a:t>            11111111100000000000000000000000</a:t>
+            </a:r>
+          </a:p>
+          <a:p>
+            <a:pPr eaLnBrk="1" hangingPunct="1"/>
+            <a:r>
+              <a:rPr lang="is-IS" altLang="x-none" sz="1600" dirty="0">
+                <a:latin typeface="Lucida Console" charset="0"/>
+              </a:rPr>
+              <a:t>2.93873588e-39 0x1p-128        00000000001000000000000000000000</a:t>
+            </a:r>
+            <a:endParaRPr lang="en-US" altLang="x-none" sz="1600" dirty="0">
+              <a:latin typeface="Lucida Console" charset="0"/>
+            </a:endParaRPr>
+          </a:p>
+        </p:txBody>
+      </p:sp>
+      <p:cxnSp>
+        <p:nvCxnSpPr>
+          <p:cNvPr id="9" name="Straight Connector 8"/>
+          <p:cNvCxnSpPr>
+            <a:cxnSpLocks noChangeShapeType="1"/>
+          </p:cNvCxnSpPr>
+          <p:nvPr/>
+        </p:nvCxnSpPr>
+        <p:spPr bwMode="auto">
+          <a:xfrm>
+            <a:off x="5735638" y="990600"/>
+            <a:ext cx="0" cy="4464050"/>
+          </a:xfrm>
+          <a:prstGeom prst="line">
+            <a:avLst/>
+          </a:prstGeom>
+          <a:noFill/>
+          <a:ln w="25400">
+            <a:solidFill>
+              <a:schemeClr val="accent1"/>
+            </a:solidFill>
+            <a:round/>
+            <a:headEnd/>
+            <a:tailEnd/>
+          </a:ln>
+          <a:effectLst>
+            <a:outerShdw blurRad="40000" dist="20000" dir="5400000" rotWithShape="0">
+              <a:srgbClr val="000000">
+                <a:alpha val="37999"/>
+              </a:srgbClr>
+            </a:outerShdw>
+          </a:effectLst>
+          <a:extLst>
+            <a:ext uri="{909E8E84-426E-40DD-AFC4-6F175D3DCCD1}">
+              <a14:hiddenFill xmlns:a14="http://schemas.microsoft.com/office/drawing/2010/main">
+                <a:noFill/>
+              </a14:hiddenFill>
+            </a:ext>
+          </a:extLst>
+        </p:spPr>
+      </p:cxnSp>
+      <p:cxnSp>
+        <p:nvCxnSpPr>
+          <p:cNvPr id="11" name="Straight Connector 10"/>
+          <p:cNvCxnSpPr>
+            <a:cxnSpLocks noChangeShapeType="1"/>
+          </p:cNvCxnSpPr>
+          <p:nvPr/>
+        </p:nvCxnSpPr>
+        <p:spPr bwMode="auto">
+          <a:xfrm>
+            <a:off x="6672064" y="1053182"/>
+            <a:ext cx="0" cy="4464050"/>
+          </a:xfrm>
+          <a:prstGeom prst="line">
+            <a:avLst/>
+          </a:prstGeom>
+          <a:noFill/>
+          <a:ln w="25400">
+            <a:solidFill>
+              <a:schemeClr val="accent1"/>
+            </a:solidFill>
+            <a:round/>
+            <a:headEnd/>
+            <a:tailEnd/>
+          </a:ln>
+          <a:effectLst>
+            <a:outerShdw blurRad="40000" dist="20000" dir="5400000" rotWithShape="0">
+              <a:srgbClr val="000000">
+                <a:alpha val="37999"/>
+              </a:srgbClr>
+            </a:outerShdw>
+          </a:effectLst>
+          <a:extLst>
+            <a:ext uri="{909E8E84-426E-40DD-AFC4-6F175D3DCCD1}">
+              <a14:hiddenFill xmlns:a14="http://schemas.microsoft.com/office/drawing/2010/main">
+                <a:noFill/>
+              </a14:hiddenFill>
+            </a:ext>
+          </a:extLst>
+        </p:spPr>
+      </p:cxnSp>
+      <p:sp>
+        <p:nvSpPr>
+          <p:cNvPr id="27656" name="TextBox 20"/>
+          <p:cNvSpPr txBox="1">
+            <a:spLocks noChangeArrowheads="1"/>
+          </p:cNvSpPr>
+          <p:nvPr/>
+        </p:nvSpPr>
+        <p:spPr bwMode="auto">
+          <a:xfrm>
+            <a:off x="5447928" y="620714"/>
+            <a:ext cx="3513510" cy="369887"/>
+          </a:xfrm>
+          <a:prstGeom prst="rect">
+            <a:avLst/>
+          </a:prstGeom>
+          <a:noFill/>
+          <a:ln>
+            <a:noFill/>
+          </a:ln>
+          <a:extLst>
+            <a:ext uri="{909E8E84-426E-40DD-AFC4-6F175D3DCCD1}">
+              <a14:hiddenFill xmlns:a14="http://schemas.microsoft.com/office/drawing/2010/main">
+                <a:solidFill>
+                  <a:srgbClr val="FFFFFF"/>
+                </a:solidFill>
+              </a14:hiddenFill>
+            </a:ext>
+            <a:ext uri="{91240B29-F687-4F45-9708-019B960494DF}">
+              <a14:hiddenLine xmlns:a14="http://schemas.microsoft.com/office/drawing/2010/main" w="9525">
+                <a:solidFill>
+                  <a:srgbClr val="000000"/>
+                </a:solidFill>
+                <a:miter lim="800000"/>
+                <a:headEnd/>
+                <a:tailEnd/>
+              </a14:hiddenLine>
+            </a:ext>
+          </a:extLst>
+        </p:spPr>
+        <p:txBody>
+          <a:bodyPr wrap="square">
+            <a:spAutoFit/>
+          </a:bodyPr>
+          <a:lstStyle>
+            <a:lvl1pPr eaLnBrk="0" hangingPunct="0">
+              <a:defRPr sz="2400">
+                <a:solidFill>
+                  <a:schemeClr val="tx1"/>
+                </a:solidFill>
+                <a:latin typeface="Arial" charset="0"/>
+                <a:ea typeface="ＭＳ Ｐゴシック" charset="-128"/>
+              </a:defRPr>
+            </a:lvl1pPr>
+            <a:lvl2pPr marL="742950" indent="-285750" eaLnBrk="0" hangingPunct="0">
+              <a:defRPr sz="2400">
+                <a:solidFill>
+                  <a:schemeClr val="tx1"/>
+                </a:solidFill>
+                <a:latin typeface="Arial" charset="0"/>
+                <a:ea typeface="ＭＳ Ｐゴシック" charset="-128"/>
+              </a:defRPr>
+            </a:lvl2pPr>
+            <a:lvl3pPr marL="1143000" indent="-228600" eaLnBrk="0" hangingPunct="0">
+              <a:defRPr sz="2400">
+                <a:solidFill>
+                  <a:schemeClr val="tx1"/>
+                </a:solidFill>
+                <a:latin typeface="Arial" charset="0"/>
+                <a:ea typeface="ＭＳ Ｐゴシック" charset="-128"/>
+              </a:defRPr>
+            </a:lvl3pPr>
+            <a:lvl4pPr marL="1600200" indent="-228600" eaLnBrk="0" hangingPunct="0">
+              <a:defRPr sz="2400">
+                <a:solidFill>
+                  <a:schemeClr val="tx1"/>
+                </a:solidFill>
+                <a:latin typeface="Arial" charset="0"/>
+                <a:ea typeface="ＭＳ Ｐゴシック" charset="-128"/>
+              </a:defRPr>
+            </a:lvl4pPr>
+            <a:lvl5pPr marL="2057400" indent="-228600" eaLnBrk="0" hangingPunct="0">
+              <a:defRPr sz="2400">
+                <a:solidFill>
+                  <a:schemeClr val="tx1"/>
+                </a:solidFill>
+                <a:latin typeface="Arial" charset="0"/>
+                <a:ea typeface="ＭＳ Ｐゴシック" charset="-128"/>
+              </a:defRPr>
+            </a:lvl5pPr>
+            <a:lvl6pPr marL="2514600" indent="-228600" eaLnBrk="0" fontAlgn="base" hangingPunct="0">
+              <a:spcBef>
+                <a:spcPct val="0"/>
+              </a:spcBef>
+              <a:spcAft>
+                <a:spcPct val="0"/>
+              </a:spcAft>
+              <a:defRPr sz="2400">
+                <a:solidFill>
+                  <a:schemeClr val="tx1"/>
+                </a:solidFill>
+                <a:latin typeface="Arial" charset="0"/>
+                <a:ea typeface="ＭＳ Ｐゴシック" charset="-128"/>
+              </a:defRPr>
+            </a:lvl6pPr>
+            <a:lvl7pPr marL="2971800" indent="-228600" eaLnBrk="0" fontAlgn="base" hangingPunct="0">
+              <a:spcBef>
+                <a:spcPct val="0"/>
+              </a:spcBef>
+              <a:spcAft>
+                <a:spcPct val="0"/>
+              </a:spcAft>
+              <a:defRPr sz="2400">
+                <a:solidFill>
+                  <a:schemeClr val="tx1"/>
+                </a:solidFill>
+                <a:latin typeface="Arial" charset="0"/>
+                <a:ea typeface="ＭＳ Ｐゴシック" charset="-128"/>
+              </a:defRPr>
+            </a:lvl7pPr>
+            <a:lvl8pPr marL="3429000" indent="-228600" eaLnBrk="0" fontAlgn="base" hangingPunct="0">
+              <a:spcBef>
+                <a:spcPct val="0"/>
+              </a:spcBef>
+              <a:spcAft>
+                <a:spcPct val="0"/>
+              </a:spcAft>
+              <a:defRPr sz="2400">
+                <a:solidFill>
+                  <a:schemeClr val="tx1"/>
+                </a:solidFill>
+                <a:latin typeface="Arial" charset="0"/>
+                <a:ea typeface="ＭＳ Ｐゴシック" charset="-128"/>
+              </a:defRPr>
+            </a:lvl8pPr>
+            <a:lvl9pPr marL="3886200" indent="-228600" eaLnBrk="0" fontAlgn="base" hangingPunct="0">
+              <a:spcBef>
+                <a:spcPct val="0"/>
+              </a:spcBef>
+              <a:spcAft>
+                <a:spcPct val="0"/>
+              </a:spcAft>
+              <a:defRPr sz="2400">
+                <a:solidFill>
+                  <a:schemeClr val="tx1"/>
+                </a:solidFill>
+                <a:latin typeface="Arial" charset="0"/>
+                <a:ea typeface="ＭＳ Ｐゴシック" charset="-128"/>
+              </a:defRPr>
+            </a:lvl9pPr>
+          </a:lstStyle>
+          <a:p>
+            <a:pPr eaLnBrk="1" hangingPunct="1"/>
+            <a:r>
+              <a:rPr lang="en-US" altLang="x-none" sz="1800"/>
+              <a:t>sign  exponent        significant</a:t>
+            </a:r>
+          </a:p>
+        </p:txBody>
+      </p:sp>
+    </p:spTree>
+  </p:cSld>
+  <p:clrMapOvr>
+    <a:masterClrMapping/>
+  </p:clrMapOvr>
+</p:sld>
+</file>
+
+<file path=ppt/slides/slide8.xml><?xml version="1.0" encoding="utf-8"?>
+<p:sld xmlns:a="http://schemas.openxmlformats.org/drawingml/2006/main" xmlns:r="http://schemas.openxmlformats.org/officeDocument/2006/relationships" xmlns:p="http://schemas.openxmlformats.org/presentationml/2006/main">
+  <p:cSld>
+    <p:spTree>
+      <p:nvGrpSpPr>
+        <p:cNvPr id="1" name=""/>
+        <p:cNvGrpSpPr/>
+        <p:nvPr/>
+      </p:nvGrpSpPr>
+      <p:grpSpPr>
+        <a:xfrm>
+          <a:off x="0" y="0"/>
+          <a:ext cx="0" cy="0"/>
+          <a:chOff x="0" y="0"/>
+          <a:chExt cx="0" cy="0"/>
+        </a:xfrm>
+      </p:grpSpPr>
+      <p:sp>
+        <p:nvSpPr>
+          <p:cNvPr id="25601" name="Title 1"/>
+          <p:cNvSpPr>
+            <a:spLocks noGrp="1"/>
+          </p:cNvSpPr>
+          <p:nvPr>
+            <p:ph type="title"/>
+          </p:nvPr>
+        </p:nvSpPr>
+        <p:spPr>
+          <a:xfrm>
+            <a:off x="838200" y="365125"/>
+            <a:ext cx="10515600" cy="870551"/>
+          </a:xfrm>
+        </p:spPr>
+        <p:txBody>
+          <a:bodyPr/>
+          <a:lstStyle/>
+          <a:p>
+            <a:r>
+              <a:rPr lang="en-US" altLang="x-none" dirty="0"/>
+              <a:t>C++ interlude</a:t>
+            </a:r>
+          </a:p>
+        </p:txBody>
+      </p:sp>
+      <p:sp>
+        <p:nvSpPr>
+          <p:cNvPr id="25602" name="Date Placeholder 2"/>
+          <p:cNvSpPr>
+            <a:spLocks noGrp="1"/>
+          </p:cNvSpPr>
+          <p:nvPr>
+            <p:ph type="dt" sz="quarter" idx="10"/>
+          </p:nvPr>
+        </p:nvSpPr>
+        <p:spPr>
+          <a:noFill/>
+          <a:ln/>
+          <a:extLst>
+            <a:ext uri="{909E8E84-426E-40DD-AFC4-6F175D3DCCD1}">
+              <a14:hiddenFill xmlns:a14="http://schemas.microsoft.com/office/drawing/2010/main">
+                <a:solidFill>
+                  <a:srgbClr val="FFFFFF"/>
+                </a:solidFill>
+              </a14:hiddenFill>
+            </a:ext>
+            <a:ext uri="{91240B29-F687-4F45-9708-019B960494DF}">
+              <a14:hiddenLine xmlns:a14="http://schemas.microsoft.com/office/drawing/2010/main" w="9525">
+                <a:solidFill>
+                  <a:srgbClr val="000000"/>
+                </a:solidFill>
+                <a:miter lim="800000"/>
+                <a:headEnd/>
+                <a:tailEnd/>
+              </a14:hiddenLine>
+            </a:ext>
+          </a:extLst>
+        </p:spPr>
+        <p:txBody>
+          <a:bodyPr/>
+          <a:lstStyle>
+            <a:lvl1pPr eaLnBrk="0" hangingPunct="0">
+              <a:defRPr sz="2400">
+                <a:solidFill>
+                  <a:schemeClr val="tx1"/>
+                </a:solidFill>
+                <a:latin typeface="Arial" charset="0"/>
+                <a:ea typeface="ＭＳ Ｐゴシック" charset="-128"/>
+              </a:defRPr>
+            </a:lvl1pPr>
+            <a:lvl2pPr marL="742950" indent="-285750" eaLnBrk="0" hangingPunct="0">
+              <a:defRPr sz="2400">
+                <a:solidFill>
+                  <a:schemeClr val="tx1"/>
+                </a:solidFill>
+                <a:latin typeface="Arial" charset="0"/>
+                <a:ea typeface="ＭＳ Ｐゴシック" charset="-128"/>
+              </a:defRPr>
+            </a:lvl2pPr>
+            <a:lvl3pPr marL="1143000" indent="-228600" eaLnBrk="0" hangingPunct="0">
+              <a:defRPr sz="2400">
+                <a:solidFill>
+                  <a:schemeClr val="tx1"/>
+                </a:solidFill>
+                <a:latin typeface="Arial" charset="0"/>
+                <a:ea typeface="ＭＳ Ｐゴシック" charset="-128"/>
+              </a:defRPr>
+            </a:lvl3pPr>
+            <a:lvl4pPr marL="1600200" indent="-228600" eaLnBrk="0" hangingPunct="0">
+              <a:defRPr sz="2400">
+                <a:solidFill>
+                  <a:schemeClr val="tx1"/>
+                </a:solidFill>
+                <a:latin typeface="Arial" charset="0"/>
+                <a:ea typeface="ＭＳ Ｐゴシック" charset="-128"/>
+              </a:defRPr>
+            </a:lvl4pPr>
+            <a:lvl5pPr marL="2057400" indent="-228600" eaLnBrk="0" hangingPunct="0">
+              <a:defRPr sz="2400">
+                <a:solidFill>
+                  <a:schemeClr val="tx1"/>
+                </a:solidFill>
+                <a:latin typeface="Arial" charset="0"/>
+                <a:ea typeface="ＭＳ Ｐゴシック" charset="-128"/>
+              </a:defRPr>
+            </a:lvl5pPr>
+            <a:lvl6pPr marL="2514600" indent="-228600" eaLnBrk="0" fontAlgn="base" hangingPunct="0">
+              <a:spcBef>
+                <a:spcPct val="0"/>
+              </a:spcBef>
+              <a:spcAft>
+                <a:spcPct val="0"/>
+              </a:spcAft>
+              <a:defRPr sz="2400">
+                <a:solidFill>
+                  <a:schemeClr val="tx1"/>
+                </a:solidFill>
+                <a:latin typeface="Arial" charset="0"/>
+                <a:ea typeface="ＭＳ Ｐゴシック" charset="-128"/>
+              </a:defRPr>
+            </a:lvl6pPr>
+            <a:lvl7pPr marL="2971800" indent="-228600" eaLnBrk="0" fontAlgn="base" hangingPunct="0">
+              <a:spcBef>
+                <a:spcPct val="0"/>
+              </a:spcBef>
+              <a:spcAft>
+                <a:spcPct val="0"/>
+              </a:spcAft>
+              <a:defRPr sz="2400">
+                <a:solidFill>
+                  <a:schemeClr val="tx1"/>
+                </a:solidFill>
+                <a:latin typeface="Arial" charset="0"/>
+                <a:ea typeface="ＭＳ Ｐゴシック" charset="-128"/>
+              </a:defRPr>
+            </a:lvl7pPr>
+            <a:lvl8pPr marL="3429000" indent="-228600" eaLnBrk="0" fontAlgn="base" hangingPunct="0">
+              <a:spcBef>
+                <a:spcPct val="0"/>
+              </a:spcBef>
+              <a:spcAft>
+                <a:spcPct val="0"/>
+              </a:spcAft>
+              <a:defRPr sz="2400">
+                <a:solidFill>
+                  <a:schemeClr val="tx1"/>
+                </a:solidFill>
+                <a:latin typeface="Arial" charset="0"/>
+                <a:ea typeface="ＭＳ Ｐゴシック" charset="-128"/>
+              </a:defRPr>
+            </a:lvl8pPr>
+            <a:lvl9pPr marL="3886200" indent="-228600" eaLnBrk="0" fontAlgn="base" hangingPunct="0">
+              <a:spcBef>
+                <a:spcPct val="0"/>
+              </a:spcBef>
+              <a:spcAft>
+                <a:spcPct val="0"/>
+              </a:spcAft>
+              <a:defRPr sz="2400">
+                <a:solidFill>
+                  <a:schemeClr val="tx1"/>
+                </a:solidFill>
+                <a:latin typeface="Arial" charset="0"/>
+                <a:ea typeface="ＭＳ Ｐゴシック" charset="-128"/>
+              </a:defRPr>
+            </a:lvl9pPr>
+          </a:lstStyle>
+          <a:p>
+            <a:pPr eaLnBrk="1" hangingPunct="1"/>
+            <a:r>
+              <a:rPr lang="en-US" altLang="x-none" sz="1200">
+                <a:latin typeface="Garamond" charset="0"/>
+              </a:rPr>
+              <a:t>22 October 2016</a:t>
+            </a:r>
+            <a:endParaRPr lang="it-IT" altLang="x-none" sz="1200">
+              <a:latin typeface="Garamond" charset="0"/>
+            </a:endParaRPr>
+          </a:p>
+        </p:txBody>
+      </p:sp>
+      <p:sp>
+        <p:nvSpPr>
+          <p:cNvPr id="25603" name="Footer Placeholder 3"/>
+          <p:cNvSpPr>
+            <a:spLocks noGrp="1"/>
+          </p:cNvSpPr>
+          <p:nvPr>
+            <p:ph type="ftr" sz="quarter" idx="11"/>
+          </p:nvPr>
+        </p:nvSpPr>
+        <p:spPr>
+          <a:noFill/>
+          <a:ln/>
+          <a:extLst>
+            <a:ext uri="{909E8E84-426E-40DD-AFC4-6F175D3DCCD1}">
+              <a14:hiddenFill xmlns:a14="http://schemas.microsoft.com/office/drawing/2010/main">
+                <a:solidFill>
+                  <a:srgbClr val="FFFFFF"/>
+                </a:solidFill>
+              </a14:hiddenFill>
+            </a:ext>
+            <a:ext uri="{91240B29-F687-4F45-9708-019B960494DF}">
+              <a14:hiddenLine xmlns:a14="http://schemas.microsoft.com/office/drawing/2010/main" w="9525">
+                <a:solidFill>
+                  <a:srgbClr val="000000"/>
+                </a:solidFill>
+                <a:miter lim="800000"/>
+                <a:headEnd/>
+                <a:tailEnd/>
+              </a14:hiddenLine>
+            </a:ext>
+          </a:extLst>
+        </p:spPr>
+        <p:txBody>
+          <a:bodyPr/>
+          <a:lstStyle>
+            <a:lvl1pPr eaLnBrk="0" hangingPunct="0">
+              <a:defRPr sz="2400">
+                <a:solidFill>
+                  <a:schemeClr val="tx1"/>
+                </a:solidFill>
+                <a:latin typeface="Arial" charset="0"/>
+                <a:ea typeface="ＭＳ Ｐゴシック" charset="-128"/>
+              </a:defRPr>
+            </a:lvl1pPr>
+            <a:lvl2pPr marL="742950" indent="-285750" eaLnBrk="0" hangingPunct="0">
+              <a:defRPr sz="2400">
+                <a:solidFill>
+                  <a:schemeClr val="tx1"/>
+                </a:solidFill>
+                <a:latin typeface="Arial" charset="0"/>
+                <a:ea typeface="ＭＳ Ｐゴシック" charset="-128"/>
+              </a:defRPr>
+            </a:lvl2pPr>
+            <a:lvl3pPr marL="1143000" indent="-228600" eaLnBrk="0" hangingPunct="0">
+              <a:defRPr sz="2400">
+                <a:solidFill>
+                  <a:schemeClr val="tx1"/>
+                </a:solidFill>
+                <a:latin typeface="Arial" charset="0"/>
+                <a:ea typeface="ＭＳ Ｐゴシック" charset="-128"/>
+              </a:defRPr>
+            </a:lvl3pPr>
+            <a:lvl4pPr marL="1600200" indent="-228600" eaLnBrk="0" hangingPunct="0">
+              <a:defRPr sz="2400">
+                <a:solidFill>
+                  <a:schemeClr val="tx1"/>
+                </a:solidFill>
+                <a:latin typeface="Arial" charset="0"/>
+                <a:ea typeface="ＭＳ Ｐゴシック" charset="-128"/>
+              </a:defRPr>
+            </a:lvl4pPr>
+            <a:lvl5pPr marL="2057400" indent="-228600" eaLnBrk="0" hangingPunct="0">
+              <a:defRPr sz="2400">
+                <a:solidFill>
+                  <a:schemeClr val="tx1"/>
+                </a:solidFill>
+                <a:latin typeface="Arial" charset="0"/>
+                <a:ea typeface="ＭＳ Ｐゴシック" charset="-128"/>
+              </a:defRPr>
+            </a:lvl5pPr>
+            <a:lvl6pPr marL="2514600" indent="-228600" eaLnBrk="0" fontAlgn="base" hangingPunct="0">
+              <a:spcBef>
+                <a:spcPct val="0"/>
+              </a:spcBef>
+              <a:spcAft>
+                <a:spcPct val="0"/>
+              </a:spcAft>
+              <a:defRPr sz="2400">
+                <a:solidFill>
+                  <a:schemeClr val="tx1"/>
+                </a:solidFill>
+                <a:latin typeface="Arial" charset="0"/>
+                <a:ea typeface="ＭＳ Ｐゴシック" charset="-128"/>
+              </a:defRPr>
+            </a:lvl6pPr>
+            <a:lvl7pPr marL="2971800" indent="-228600" eaLnBrk="0" fontAlgn="base" hangingPunct="0">
+              <a:spcBef>
+                <a:spcPct val="0"/>
+              </a:spcBef>
+              <a:spcAft>
+                <a:spcPct val="0"/>
+              </a:spcAft>
+              <a:defRPr sz="2400">
+                <a:solidFill>
+                  <a:schemeClr val="tx1"/>
+                </a:solidFill>
+                <a:latin typeface="Arial" charset="0"/>
+                <a:ea typeface="ＭＳ Ｐゴシック" charset="-128"/>
+              </a:defRPr>
+            </a:lvl7pPr>
+            <a:lvl8pPr marL="3429000" indent="-228600" eaLnBrk="0" fontAlgn="base" hangingPunct="0">
+              <a:spcBef>
+                <a:spcPct val="0"/>
+              </a:spcBef>
+              <a:spcAft>
+                <a:spcPct val="0"/>
+              </a:spcAft>
+              <a:defRPr sz="2400">
+                <a:solidFill>
+                  <a:schemeClr val="tx1"/>
+                </a:solidFill>
+                <a:latin typeface="Arial" charset="0"/>
+                <a:ea typeface="ＭＳ Ｐゴシック" charset="-128"/>
+              </a:defRPr>
+            </a:lvl8pPr>
+            <a:lvl9pPr marL="3886200" indent="-228600" eaLnBrk="0" fontAlgn="base" hangingPunct="0">
+              <a:spcBef>
+                <a:spcPct val="0"/>
+              </a:spcBef>
+              <a:spcAft>
+                <a:spcPct val="0"/>
+              </a:spcAft>
+              <a:defRPr sz="2400">
+                <a:solidFill>
+                  <a:schemeClr val="tx1"/>
+                </a:solidFill>
+                <a:latin typeface="Arial" charset="0"/>
+                <a:ea typeface="ＭＳ Ｐゴシック" charset="-128"/>
+              </a:defRPr>
+            </a:lvl9pPr>
+          </a:lstStyle>
+          <a:p>
+            <a:pPr eaLnBrk="1" hangingPunct="1"/>
+            <a:r>
+              <a:rPr lang="en-US" altLang="x-none" sz="1200">
+                <a:latin typeface="Garamond" charset="0"/>
+              </a:rPr>
+              <a:t>Vincenzo Innocente</a:t>
+            </a:r>
+            <a:endParaRPr lang="it-IT" altLang="x-none" sz="1200">
+              <a:latin typeface="Garamond" charset="0"/>
+            </a:endParaRPr>
+          </a:p>
+        </p:txBody>
+      </p:sp>
+      <p:sp>
+        <p:nvSpPr>
+          <p:cNvPr id="25604" name="Slide Number Placeholder 4"/>
+          <p:cNvSpPr>
+            <a:spLocks noGrp="1"/>
+          </p:cNvSpPr>
+          <p:nvPr>
+            <p:ph type="sldNum" sz="quarter" idx="12"/>
+          </p:nvPr>
+        </p:nvSpPr>
+        <p:spPr>
+          <a:noFill/>
+          <a:ln/>
+          <a:extLst>
+            <a:ext uri="{909E8E84-426E-40DD-AFC4-6F175D3DCCD1}">
+              <a14:hiddenFill xmlns:a14="http://schemas.microsoft.com/office/drawing/2010/main">
+                <a:solidFill>
+                  <a:srgbClr val="FFFFFF"/>
+                </a:solidFill>
+              </a14:hiddenFill>
+            </a:ext>
+            <a:ext uri="{91240B29-F687-4F45-9708-019B960494DF}">
+              <a14:hiddenLine xmlns:a14="http://schemas.microsoft.com/office/drawing/2010/main" w="9525">
+                <a:solidFill>
+                  <a:srgbClr val="000000"/>
+                </a:solidFill>
+                <a:miter lim="800000"/>
+                <a:headEnd/>
+                <a:tailEnd/>
+              </a14:hiddenLine>
+            </a:ext>
+          </a:extLst>
+        </p:spPr>
+        <p:txBody>
+          <a:bodyPr/>
+          <a:lstStyle>
+            <a:lvl1pPr eaLnBrk="0" hangingPunct="0">
+              <a:defRPr sz="2400">
+                <a:solidFill>
+                  <a:schemeClr val="tx1"/>
+                </a:solidFill>
+                <a:latin typeface="Arial" charset="0"/>
+                <a:ea typeface="ＭＳ Ｐゴシック" charset="-128"/>
+              </a:defRPr>
+            </a:lvl1pPr>
+            <a:lvl2pPr marL="742950" indent="-285750" eaLnBrk="0" hangingPunct="0">
+              <a:defRPr sz="2400">
+                <a:solidFill>
+                  <a:schemeClr val="tx1"/>
+                </a:solidFill>
+                <a:latin typeface="Arial" charset="0"/>
+                <a:ea typeface="ＭＳ Ｐゴシック" charset="-128"/>
+              </a:defRPr>
+            </a:lvl2pPr>
+            <a:lvl3pPr marL="1143000" indent="-228600" eaLnBrk="0" hangingPunct="0">
+              <a:defRPr sz="2400">
+                <a:solidFill>
+                  <a:schemeClr val="tx1"/>
+                </a:solidFill>
+                <a:latin typeface="Arial" charset="0"/>
+                <a:ea typeface="ＭＳ Ｐゴシック" charset="-128"/>
+              </a:defRPr>
+            </a:lvl3pPr>
+            <a:lvl4pPr marL="1600200" indent="-228600" eaLnBrk="0" hangingPunct="0">
+              <a:defRPr sz="2400">
+                <a:solidFill>
+                  <a:schemeClr val="tx1"/>
+                </a:solidFill>
+                <a:latin typeface="Arial" charset="0"/>
+                <a:ea typeface="ＭＳ Ｐゴシック" charset="-128"/>
+              </a:defRPr>
+            </a:lvl4pPr>
+            <a:lvl5pPr marL="2057400" indent="-228600" eaLnBrk="0" hangingPunct="0">
+              <a:defRPr sz="2400">
+                <a:solidFill>
+                  <a:schemeClr val="tx1"/>
+                </a:solidFill>
+                <a:latin typeface="Arial" charset="0"/>
+                <a:ea typeface="ＭＳ Ｐゴシック" charset="-128"/>
+              </a:defRPr>
+            </a:lvl5pPr>
+            <a:lvl6pPr marL="2514600" indent="-228600" eaLnBrk="0" fontAlgn="base" hangingPunct="0">
+              <a:spcBef>
+                <a:spcPct val="0"/>
+              </a:spcBef>
+              <a:spcAft>
+                <a:spcPct val="0"/>
+              </a:spcAft>
+              <a:defRPr sz="2400">
+                <a:solidFill>
+                  <a:schemeClr val="tx1"/>
+                </a:solidFill>
+                <a:latin typeface="Arial" charset="0"/>
+                <a:ea typeface="ＭＳ Ｐゴシック" charset="-128"/>
+              </a:defRPr>
+            </a:lvl6pPr>
+            <a:lvl7pPr marL="2971800" indent="-228600" eaLnBrk="0" fontAlgn="base" hangingPunct="0">
+              <a:spcBef>
+                <a:spcPct val="0"/>
+              </a:spcBef>
+              <a:spcAft>
+                <a:spcPct val="0"/>
+              </a:spcAft>
+              <a:defRPr sz="2400">
+                <a:solidFill>
+                  <a:schemeClr val="tx1"/>
+                </a:solidFill>
+                <a:latin typeface="Arial" charset="0"/>
+                <a:ea typeface="ＭＳ Ｐゴシック" charset="-128"/>
+              </a:defRPr>
+            </a:lvl7pPr>
+            <a:lvl8pPr marL="3429000" indent="-228600" eaLnBrk="0" fontAlgn="base" hangingPunct="0">
+              <a:spcBef>
+                <a:spcPct val="0"/>
+              </a:spcBef>
+              <a:spcAft>
+                <a:spcPct val="0"/>
+              </a:spcAft>
+              <a:defRPr sz="2400">
+                <a:solidFill>
+                  <a:schemeClr val="tx1"/>
+                </a:solidFill>
+                <a:latin typeface="Arial" charset="0"/>
+                <a:ea typeface="ＭＳ Ｐゴシック" charset="-128"/>
+              </a:defRPr>
+            </a:lvl8pPr>
+            <a:lvl9pPr marL="3886200" indent="-228600" eaLnBrk="0" fontAlgn="base" hangingPunct="0">
+              <a:spcBef>
+                <a:spcPct val="0"/>
+              </a:spcBef>
+              <a:spcAft>
+                <a:spcPct val="0"/>
+              </a:spcAft>
+              <a:defRPr sz="2400">
+                <a:solidFill>
+                  <a:schemeClr val="tx1"/>
+                </a:solidFill>
+                <a:latin typeface="Arial" charset="0"/>
+                <a:ea typeface="ＭＳ Ｐゴシック" charset="-128"/>
+              </a:defRPr>
+            </a:lvl9pPr>
+          </a:lstStyle>
+          <a:p>
+            <a:pPr eaLnBrk="1" hangingPunct="1"/>
+            <a:fld id="{502E4000-0355-7D4E-B01D-371C3A18747A}" type="slidenum">
+              <a:rPr lang="it-IT" altLang="x-none" sz="1200">
+                <a:latin typeface="Garamond" charset="0"/>
+              </a:rPr>
+              <a:pPr eaLnBrk="1" hangingPunct="1"/>
+              <a:t>8</a:t>
+            </a:fld>
+            <a:endParaRPr lang="it-IT" altLang="x-none" sz="1200">
+              <a:latin typeface="Garamond" charset="0"/>
+            </a:endParaRPr>
+          </a:p>
+        </p:txBody>
+      </p:sp>
+      <p:sp>
+        <p:nvSpPr>
+          <p:cNvPr id="25605" name="TextBox 5"/>
+          <p:cNvSpPr txBox="1">
+            <a:spLocks noChangeArrowheads="1"/>
+          </p:cNvSpPr>
+          <p:nvPr/>
+        </p:nvSpPr>
+        <p:spPr bwMode="auto">
+          <a:xfrm>
+            <a:off x="1329982" y="1117000"/>
+            <a:ext cx="8497888" cy="5078413"/>
+          </a:xfrm>
+          <a:prstGeom prst="rect">
+            <a:avLst/>
+          </a:prstGeom>
+          <a:solidFill>
+            <a:srgbClr val="FFFF00"/>
+          </a:solidFill>
+          <a:ln>
+            <a:noFill/>
+          </a:ln>
+          <a:extLst>
+            <a:ext uri="{91240B29-F687-4F45-9708-019B960494DF}">
+              <a14:hiddenLine xmlns:a14="http://schemas.microsoft.com/office/drawing/2010/main" w="9525">
+                <a:solidFill>
+                  <a:srgbClr val="000000"/>
+                </a:solidFill>
+                <a:miter lim="800000"/>
+                <a:headEnd/>
+                <a:tailEnd/>
+              </a14:hiddenLine>
+            </a:ext>
+          </a:extLst>
+        </p:spPr>
+        <p:txBody>
+          <a:bodyPr>
+            <a:spAutoFit/>
+          </a:bodyPr>
+          <a:lstStyle>
+            <a:lvl1pPr eaLnBrk="0" hangingPunct="0">
+              <a:defRPr sz="2400">
+                <a:solidFill>
+                  <a:schemeClr val="tx1"/>
+                </a:solidFill>
+                <a:latin typeface="Arial" charset="0"/>
+                <a:ea typeface="ＭＳ Ｐゴシック" charset="-128"/>
+              </a:defRPr>
+            </a:lvl1pPr>
+            <a:lvl2pPr marL="742950" indent="-285750" eaLnBrk="0" hangingPunct="0">
+              <a:defRPr sz="2400">
+                <a:solidFill>
+                  <a:schemeClr val="tx1"/>
+                </a:solidFill>
+                <a:latin typeface="Arial" charset="0"/>
+                <a:ea typeface="ＭＳ Ｐゴシック" charset="-128"/>
+              </a:defRPr>
+            </a:lvl2pPr>
+            <a:lvl3pPr marL="1143000" indent="-228600" eaLnBrk="0" hangingPunct="0">
+              <a:defRPr sz="2400">
+                <a:solidFill>
+                  <a:schemeClr val="tx1"/>
+                </a:solidFill>
+                <a:latin typeface="Arial" charset="0"/>
+                <a:ea typeface="ＭＳ Ｐゴシック" charset="-128"/>
+              </a:defRPr>
+            </a:lvl3pPr>
+            <a:lvl4pPr marL="1600200" indent="-228600" eaLnBrk="0" hangingPunct="0">
+              <a:defRPr sz="2400">
+                <a:solidFill>
+                  <a:schemeClr val="tx1"/>
+                </a:solidFill>
+                <a:latin typeface="Arial" charset="0"/>
+                <a:ea typeface="ＭＳ Ｐゴシック" charset="-128"/>
+              </a:defRPr>
+            </a:lvl4pPr>
+            <a:lvl5pPr marL="2057400" indent="-228600" eaLnBrk="0" hangingPunct="0">
+              <a:defRPr sz="2400">
+                <a:solidFill>
+                  <a:schemeClr val="tx1"/>
+                </a:solidFill>
+                <a:latin typeface="Arial" charset="0"/>
+                <a:ea typeface="ＭＳ Ｐゴシック" charset="-128"/>
+              </a:defRPr>
+            </a:lvl5pPr>
+            <a:lvl6pPr marL="2514600" indent="-228600" eaLnBrk="0" fontAlgn="base" hangingPunct="0">
+              <a:spcBef>
+                <a:spcPct val="0"/>
+              </a:spcBef>
+              <a:spcAft>
+                <a:spcPct val="0"/>
+              </a:spcAft>
+              <a:defRPr sz="2400">
+                <a:solidFill>
+                  <a:schemeClr val="tx1"/>
+                </a:solidFill>
+                <a:latin typeface="Arial" charset="0"/>
+                <a:ea typeface="ＭＳ Ｐゴシック" charset="-128"/>
+              </a:defRPr>
+            </a:lvl6pPr>
+            <a:lvl7pPr marL="2971800" indent="-228600" eaLnBrk="0" fontAlgn="base" hangingPunct="0">
+              <a:spcBef>
+                <a:spcPct val="0"/>
+              </a:spcBef>
+              <a:spcAft>
+                <a:spcPct val="0"/>
+              </a:spcAft>
+              <a:defRPr sz="2400">
+                <a:solidFill>
+                  <a:schemeClr val="tx1"/>
+                </a:solidFill>
+                <a:latin typeface="Arial" charset="0"/>
+                <a:ea typeface="ＭＳ Ｐゴシック" charset="-128"/>
+              </a:defRPr>
+            </a:lvl7pPr>
+            <a:lvl8pPr marL="3429000" indent="-228600" eaLnBrk="0" fontAlgn="base" hangingPunct="0">
+              <a:spcBef>
+                <a:spcPct val="0"/>
+              </a:spcBef>
+              <a:spcAft>
+                <a:spcPct val="0"/>
+              </a:spcAft>
+              <a:defRPr sz="2400">
+                <a:solidFill>
+                  <a:schemeClr val="tx1"/>
+                </a:solidFill>
+                <a:latin typeface="Arial" charset="0"/>
+                <a:ea typeface="ＭＳ Ｐゴシック" charset="-128"/>
+              </a:defRPr>
+            </a:lvl8pPr>
+            <a:lvl9pPr marL="3886200" indent="-228600" eaLnBrk="0" fontAlgn="base" hangingPunct="0">
+              <a:spcBef>
+                <a:spcPct val="0"/>
+              </a:spcBef>
+              <a:spcAft>
+                <a:spcPct val="0"/>
+              </a:spcAft>
+              <a:defRPr sz="2400">
+                <a:solidFill>
+                  <a:schemeClr val="tx1"/>
+                </a:solidFill>
+                <a:latin typeface="Arial" charset="0"/>
+                <a:ea typeface="ＭＳ Ｐゴシック" charset="-128"/>
+              </a:defRPr>
+            </a:lvl9pPr>
+          </a:lstStyle>
+          <a:p>
+            <a:pPr eaLnBrk="1" hangingPunct="1"/>
+            <a:r>
+              <a:rPr lang="en-US" altLang="x-none" sz="1800" dirty="0"/>
+              <a:t>#include&lt;iostream&gt;</a:t>
+            </a:r>
+          </a:p>
+          <a:p>
+            <a:pPr eaLnBrk="1" hangingPunct="1"/>
+            <a:r>
+              <a:rPr lang="en-US" altLang="x-none" sz="1800" dirty="0"/>
+              <a:t>#include&lt;</a:t>
+            </a:r>
+            <a:r>
+              <a:rPr lang="en-US" altLang="x-none" sz="1800" dirty="0" err="1"/>
+              <a:t>iomanip</a:t>
+            </a:r>
+            <a:r>
+              <a:rPr lang="en-US" altLang="x-none" sz="1800" dirty="0"/>
+              <a:t>&gt;</a:t>
+            </a:r>
+          </a:p>
+          <a:p>
+            <a:pPr eaLnBrk="1" hangingPunct="1"/>
+            <a:r>
+              <a:rPr lang="en-US" altLang="x-none" sz="1800" dirty="0"/>
+              <a:t>#include&lt;</a:t>
+            </a:r>
+            <a:r>
+              <a:rPr lang="en-US" altLang="x-none" sz="1800" dirty="0" err="1"/>
+              <a:t>cmath</a:t>
+            </a:r>
+            <a:r>
+              <a:rPr lang="en-US" altLang="x-none" sz="1800" dirty="0"/>
+              <a:t>&gt;</a:t>
+            </a:r>
+          </a:p>
+          <a:p>
+            <a:pPr eaLnBrk="1" hangingPunct="1"/>
+            <a:r>
+              <a:rPr lang="en-US" altLang="x-none" sz="1800" dirty="0"/>
+              <a:t>#include&lt;limits&gt;</a:t>
+            </a:r>
+          </a:p>
+          <a:p>
+            <a:pPr eaLnBrk="1" hangingPunct="1"/>
+            <a:r>
+              <a:rPr lang="en-US" altLang="x-none" sz="1800" dirty="0"/>
+              <a:t>//  std style</a:t>
+            </a:r>
+          </a:p>
+          <a:p>
+            <a:pPr eaLnBrk="1" hangingPunct="1"/>
+            <a:r>
+              <a:rPr lang="en-US" altLang="x-none" sz="1800" dirty="0"/>
+              <a:t>template&lt;</a:t>
+            </a:r>
+            <a:r>
+              <a:rPr lang="en-US" altLang="x-none" sz="1800" dirty="0" err="1"/>
+              <a:t>typename</a:t>
+            </a:r>
+            <a:r>
+              <a:rPr lang="en-US" altLang="x-none" sz="1800" dirty="0"/>
+              <a:t> T&gt;</a:t>
+            </a:r>
+          </a:p>
+          <a:p>
+            <a:pPr eaLnBrk="1" hangingPunct="1"/>
+            <a:r>
+              <a:rPr lang="en-US" altLang="x-none" sz="1800" dirty="0"/>
+              <a:t>void print(T x) {          </a:t>
+            </a:r>
+          </a:p>
+          <a:p>
+            <a:pPr eaLnBrk="1" hangingPunct="1"/>
+            <a:r>
+              <a:rPr lang="en-US" altLang="x-none" sz="1800" dirty="0"/>
+              <a:t> std::</a:t>
+            </a:r>
+            <a:r>
+              <a:rPr lang="en-US" altLang="x-none" sz="1800" dirty="0" err="1"/>
+              <a:t>cout</a:t>
+            </a:r>
+            <a:r>
+              <a:rPr lang="en-US" altLang="x-none" sz="1800" dirty="0"/>
+              <a:t> &lt;&lt; std::</a:t>
+            </a:r>
+            <a:r>
+              <a:rPr lang="en-US" altLang="x-none" sz="1800" dirty="0" err="1"/>
+              <a:t>hexfloat</a:t>
+            </a:r>
+            <a:r>
+              <a:rPr lang="en-US" altLang="x-none" sz="1800" dirty="0"/>
+              <a:t> &lt;&lt; x &lt;&lt;' </a:t>
+            </a:r>
+            <a:r>
+              <a:rPr lang="en-US" altLang="en-US" sz="1800" dirty="0"/>
+              <a:t>’</a:t>
+            </a:r>
+            <a:r>
+              <a:rPr lang="en-US" altLang="x-none" sz="1800" dirty="0"/>
+              <a:t> </a:t>
+            </a:r>
+            <a:r>
+              <a:rPr lang="en-US" altLang="x-none" sz="1800" dirty="0">
+                <a:solidFill>
+                  <a:srgbClr val="FF0000"/>
+                </a:solidFill>
+              </a:rPr>
+              <a:t>// exact binary representation</a:t>
+            </a:r>
+          </a:p>
+          <a:p>
+            <a:pPr eaLnBrk="1" hangingPunct="1"/>
+            <a:r>
+              <a:rPr lang="en-US" altLang="x-none" sz="1800" dirty="0"/>
+              <a:t>                &lt;&lt;  std::scientific &lt;&lt; std::</a:t>
+            </a:r>
+            <a:r>
+              <a:rPr lang="en-US" altLang="x-none" sz="1800" dirty="0" err="1"/>
+              <a:t>setprecision</a:t>
+            </a:r>
+            <a:r>
+              <a:rPr lang="en-US" altLang="x-none" sz="1800" dirty="0"/>
+              <a:t>(8) &lt;&lt; x &lt;&lt; ' </a:t>
+            </a:r>
+            <a:r>
+              <a:rPr lang="en-US" altLang="en-US" sz="1800" dirty="0"/>
+              <a:t>’</a:t>
+            </a:r>
+            <a:r>
+              <a:rPr lang="en-US" altLang="x-none" sz="1800" dirty="0"/>
+              <a:t> </a:t>
+            </a:r>
+            <a:r>
+              <a:rPr lang="en-US" altLang="x-none" sz="1800" dirty="0">
+                <a:solidFill>
+                  <a:srgbClr val="FF0000"/>
+                </a:solidFill>
+              </a:rPr>
+              <a:t>// 8 decimal digits</a:t>
+            </a:r>
+          </a:p>
+          <a:p>
+            <a:pPr eaLnBrk="1" hangingPunct="1"/>
+            <a:r>
+              <a:rPr lang="en-US" altLang="x-none" sz="1800" dirty="0"/>
+              <a:t>                &lt;&lt;  std::</a:t>
+            </a:r>
+            <a:r>
+              <a:rPr lang="en-US" altLang="x-none" sz="1800" dirty="0" err="1"/>
+              <a:t>defaultfloat</a:t>
+            </a:r>
+            <a:r>
+              <a:rPr lang="en-US" altLang="x-none" sz="1800" dirty="0"/>
+              <a:t> &lt;&lt; x &lt;&lt; std::</a:t>
+            </a:r>
+            <a:r>
+              <a:rPr lang="en-US" altLang="x-none" sz="1800" dirty="0" err="1"/>
+              <a:t>endl</a:t>
+            </a:r>
+            <a:r>
+              <a:rPr lang="en-US" altLang="x-none" sz="1800" dirty="0"/>
+              <a:t>;    </a:t>
+            </a:r>
+            <a:r>
+              <a:rPr lang="en-US" altLang="x-none" sz="1800" dirty="0">
+                <a:solidFill>
+                  <a:srgbClr val="FF0000"/>
+                </a:solidFill>
+              </a:rPr>
+              <a:t>// 6 decimal digits for float </a:t>
+            </a:r>
+          </a:p>
+          <a:p>
+            <a:pPr eaLnBrk="1" hangingPunct="1"/>
+            <a:r>
+              <a:rPr lang="en-US" altLang="x-none" sz="1800" dirty="0"/>
+              <a:t>}</a:t>
+            </a:r>
+          </a:p>
+          <a:p>
+            <a:pPr eaLnBrk="1" hangingPunct="1"/>
+            <a:endParaRPr lang="en-US" altLang="x-none" sz="1800" dirty="0"/>
+          </a:p>
+          <a:p>
+            <a:pPr eaLnBrk="1" hangingPunct="1"/>
+            <a:r>
+              <a:rPr lang="en-US" altLang="x-none" sz="1800" dirty="0"/>
+              <a:t>// integer representation</a:t>
+            </a:r>
+          </a:p>
+          <a:p>
+            <a:pPr eaLnBrk="1" hangingPunct="1"/>
+            <a:r>
+              <a:rPr lang="en-US" altLang="x-none" sz="1800" dirty="0"/>
+              <a:t>#include&lt;</a:t>
+            </a:r>
+            <a:r>
+              <a:rPr lang="en-US" altLang="x-none" sz="1800" dirty="0" err="1"/>
+              <a:t>cstring</a:t>
+            </a:r>
+            <a:r>
+              <a:rPr lang="en-US" altLang="x-none" sz="1800" dirty="0"/>
+              <a:t>&gt;</a:t>
+            </a:r>
+          </a:p>
+          <a:p>
+            <a:pPr eaLnBrk="1" hangingPunct="1"/>
+            <a:r>
+              <a:rPr lang="en-US" altLang="x-none" sz="1800" dirty="0"/>
+              <a:t>#include&lt;</a:t>
+            </a:r>
+            <a:r>
+              <a:rPr lang="en-US" altLang="x-none" sz="1800" dirty="0" err="1"/>
+              <a:t>bitset</a:t>
+            </a:r>
+            <a:r>
+              <a:rPr lang="en-US" altLang="x-none" sz="1800" dirty="0"/>
+              <a:t>&gt;</a:t>
+            </a:r>
+          </a:p>
+          <a:p>
+            <a:pPr eaLnBrk="1" hangingPunct="1"/>
+            <a:r>
+              <a:rPr lang="en-US" altLang="x-none" sz="1800" dirty="0"/>
+              <a:t>int f2i(float x) { int </a:t>
+            </a:r>
+            <a:r>
+              <a:rPr lang="en-US" altLang="x-none" sz="1800" dirty="0" err="1"/>
+              <a:t>i</a:t>
+            </a:r>
+            <a:r>
+              <a:rPr lang="en-US" altLang="x-none" sz="1800" dirty="0"/>
+              <a:t>; </a:t>
+            </a:r>
+            <a:r>
+              <a:rPr lang="en-US" altLang="x-none" sz="1800" dirty="0" err="1"/>
+              <a:t>memcpy</a:t>
+            </a:r>
+            <a:r>
+              <a:rPr lang="en-US" altLang="x-none" sz="1800" dirty="0"/>
+              <a:t>(&amp;</a:t>
+            </a:r>
+            <a:r>
+              <a:rPr lang="en-US" altLang="x-none" sz="1800" dirty="0" err="1"/>
+              <a:t>i</a:t>
+            </a:r>
+            <a:r>
+              <a:rPr lang="en-US" altLang="x-none" sz="1800" dirty="0"/>
+              <a:t>,&amp;</a:t>
+            </a:r>
+            <a:r>
+              <a:rPr lang="en-US" altLang="x-none" sz="1800" dirty="0" err="1"/>
+              <a:t>x,sizeof</a:t>
+            </a:r>
+            <a:r>
+              <a:rPr lang="en-US" altLang="x-none" sz="1800" dirty="0"/>
+              <a:t>(int)); return </a:t>
+            </a:r>
+            <a:r>
+              <a:rPr lang="en-US" altLang="x-none" sz="1800" dirty="0" err="1"/>
+              <a:t>i</a:t>
+            </a:r>
+            <a:r>
+              <a:rPr lang="en-US" altLang="x-none" sz="1800" dirty="0"/>
+              <a:t>;} </a:t>
+            </a:r>
+            <a:r>
+              <a:rPr lang="en-US" altLang="x-none" sz="1800" dirty="0">
+                <a:solidFill>
+                  <a:srgbClr val="FF0000"/>
+                </a:solidFill>
+              </a:rPr>
+              <a:t>// compiler will optimize</a:t>
+            </a:r>
+          </a:p>
+          <a:p>
+            <a:pPr eaLnBrk="1" hangingPunct="1"/>
+            <a:r>
+              <a:rPr lang="en-US" altLang="x-none" sz="1800" dirty="0"/>
+              <a:t>//  use </a:t>
+            </a:r>
+            <a:r>
+              <a:rPr lang="en-US" altLang="x-none" sz="1800" dirty="0" err="1"/>
+              <a:t>bitset</a:t>
+            </a:r>
+            <a:r>
+              <a:rPr lang="en-US" altLang="x-none" sz="1800" dirty="0"/>
+              <a:t> to print in binary (bit by bit) </a:t>
+            </a:r>
+          </a:p>
+          <a:p>
+            <a:pPr eaLnBrk="1" hangingPunct="1"/>
+            <a:r>
+              <a:rPr lang="en-US" altLang="x-none" sz="1800" dirty="0"/>
+              <a:t>std::</a:t>
+            </a:r>
+            <a:r>
+              <a:rPr lang="en-US" altLang="x-none" sz="1800" dirty="0" err="1"/>
+              <a:t>cout</a:t>
+            </a:r>
+            <a:r>
+              <a:rPr lang="en-US" altLang="x-none" sz="1800" dirty="0"/>
+              <a:t> &lt;&lt; std::</a:t>
+            </a:r>
+            <a:r>
+              <a:rPr lang="en-US" altLang="x-none" sz="1800" dirty="0" err="1"/>
+              <a:t>bitset</a:t>
+            </a:r>
+            <a:r>
+              <a:rPr lang="en-US" altLang="x-none" sz="1800" dirty="0"/>
+              <a:t>&lt;32&gt;(f2i(x)) &lt;&lt; std::</a:t>
+            </a:r>
+            <a:r>
+              <a:rPr lang="en-US" altLang="x-none" sz="1800" dirty="0" err="1"/>
+              <a:t>endl</a:t>
+            </a:r>
+            <a:r>
+              <a:rPr lang="en-US" altLang="x-none" sz="1800" dirty="0"/>
+              <a:t>; ;   </a:t>
+            </a:r>
+            <a:r>
+              <a:rPr lang="en-US" altLang="x-none" sz="1800" dirty="0">
+                <a:solidFill>
+                  <a:srgbClr val="FF0000"/>
+                </a:solidFill>
+              </a:rPr>
+              <a:t>// bit by bit</a:t>
+            </a:r>
+          </a:p>
+        </p:txBody>
+      </p:sp>
+    </p:spTree>
+  </p:cSld>
+  <p:clrMapOvr>
+    <a:masterClrMapping/>
+  </p:clrMapOvr>
+</p:sld>
+</file>
+
+<file path=ppt/slides/slide9.xml><?xml version="1.0" encoding="utf-8"?>
+<p:sld xmlns:a="http://schemas.openxmlformats.org/drawingml/2006/main" xmlns:r="http://schemas.openxmlformats.org/officeDocument/2006/relationships" xmlns:p="http://schemas.openxmlformats.org/presentationml/2006/main">
+  <p:cSld>
+    <p:spTree>
+      <p:nvGrpSpPr>
+        <p:cNvPr id="1" name=""/>
+        <p:cNvGrpSpPr/>
+        <p:nvPr/>
+      </p:nvGrpSpPr>
+      <p:grpSpPr>
+        <a:xfrm>
+          <a:off x="0" y="0"/>
+          <a:ext cx="0" cy="0"/>
+          <a:chOff x="0" y="0"/>
+          <a:chExt cx="0" cy="0"/>
+        </a:xfrm>
+      </p:grpSpPr>
+      <p:sp>
+        <p:nvSpPr>
+          <p:cNvPr id="26625" name="Title 1"/>
+          <p:cNvSpPr>
+            <a:spLocks noGrp="1"/>
+          </p:cNvSpPr>
+          <p:nvPr>
+            <p:ph type="title"/>
+          </p:nvPr>
+        </p:nvSpPr>
+        <p:spPr/>
+        <p:txBody>
+          <a:bodyPr/>
+          <a:lstStyle/>
+          <a:p>
+            <a:r>
+              <a:rPr lang="en-US" altLang="x-none"/>
+              <a:t>Limits</a:t>
+            </a:r>
+          </a:p>
+        </p:txBody>
+      </p:sp>
+      <p:sp>
+        <p:nvSpPr>
+          <p:cNvPr id="26626" name="Content Placeholder 5"/>
+          <p:cNvSpPr>
+            <a:spLocks noGrp="1"/>
+          </p:cNvSpPr>
+          <p:nvPr>
+            <p:ph idx="1"/>
+          </p:nvPr>
+        </p:nvSpPr>
+        <p:spPr>
+          <a:xfrm>
+            <a:off x="714633" y="1367851"/>
+            <a:ext cx="8229600" cy="1931404"/>
+          </a:xfrm>
+        </p:spPr>
+        <p:txBody>
+          <a:bodyPr/>
+          <a:lstStyle/>
+          <a:p>
+            <a:r>
+              <a:rPr lang="en-US" altLang="x-none" dirty="0"/>
+              <a:t>Everything you want to know about an arithmetic type is in </a:t>
+            </a:r>
+          </a:p>
+          <a:p>
+            <a:pPr lvl="1"/>
+            <a:r>
+              <a:rPr lang="en-US" altLang="x-none" dirty="0" err="1"/>
+              <a:t>std</a:t>
+            </a:r>
+            <a:r>
+              <a:rPr lang="en-US" altLang="x-none" dirty="0"/>
+              <a:t>::</a:t>
+            </a:r>
+            <a:r>
+              <a:rPr lang="en-US" altLang="x-none" dirty="0" err="1"/>
+              <a:t>numeric_limits</a:t>
+            </a:r>
+            <a:r>
+              <a:rPr lang="en-US" altLang="x-none" dirty="0"/>
+              <a:t>&lt;T&gt;  </a:t>
+            </a:r>
+          </a:p>
+          <a:p>
+            <a:pPr lvl="1"/>
+            <a:r>
+              <a:rPr lang="en-US" altLang="x-none" dirty="0"/>
+              <a:t>see </a:t>
+            </a:r>
+            <a:r>
+              <a:rPr lang="en-US" altLang="x-none" sz="2000" dirty="0"/>
+              <a:t>http://</a:t>
+            </a:r>
+            <a:r>
+              <a:rPr lang="en-US" altLang="x-none" sz="2000" dirty="0" err="1"/>
+              <a:t>www.cplusplus.com</a:t>
+            </a:r>
+            <a:r>
+              <a:rPr lang="en-US" altLang="x-none" sz="2000" dirty="0"/>
+              <a:t>/reference/limits/</a:t>
+            </a:r>
+            <a:r>
+              <a:rPr lang="en-US" altLang="x-none" sz="2000" dirty="0" err="1"/>
+              <a:t>numeric_limits</a:t>
+            </a:r>
+            <a:r>
+              <a:rPr lang="en-US" altLang="x-none" sz="2000" dirty="0"/>
+              <a:t>/</a:t>
+            </a:r>
+          </a:p>
+        </p:txBody>
+      </p:sp>
+      <p:sp>
+        <p:nvSpPr>
+          <p:cNvPr id="26627" name="Date Placeholder 2"/>
+          <p:cNvSpPr>
+            <a:spLocks noGrp="1"/>
+          </p:cNvSpPr>
+          <p:nvPr>
+            <p:ph type="dt" sz="quarter" idx="10"/>
+          </p:nvPr>
+        </p:nvSpPr>
+        <p:spPr>
+          <a:noFill/>
+          <a:ln/>
+          <a:extLst>
+            <a:ext uri="{909E8E84-426E-40DD-AFC4-6F175D3DCCD1}">
+              <a14:hiddenFill xmlns:a14="http://schemas.microsoft.com/office/drawing/2010/main">
+                <a:solidFill>
+                  <a:srgbClr val="FFFFFF"/>
+                </a:solidFill>
+              </a14:hiddenFill>
+            </a:ext>
+            <a:ext uri="{91240B29-F687-4F45-9708-019B960494DF}">
+              <a14:hiddenLine xmlns:a14="http://schemas.microsoft.com/office/drawing/2010/main" w="9525">
+                <a:solidFill>
+                  <a:srgbClr val="000000"/>
+                </a:solidFill>
+                <a:miter lim="800000"/>
+                <a:headEnd/>
+                <a:tailEnd/>
+              </a14:hiddenLine>
+            </a:ext>
+          </a:extLst>
+        </p:spPr>
+        <p:txBody>
+          <a:bodyPr/>
+          <a:lstStyle>
+            <a:lvl1pPr eaLnBrk="0" hangingPunct="0">
+              <a:defRPr sz="2400">
+                <a:solidFill>
+                  <a:schemeClr val="tx1"/>
+                </a:solidFill>
+                <a:latin typeface="Arial" charset="0"/>
+                <a:ea typeface="ＭＳ Ｐゴシック" charset="-128"/>
+              </a:defRPr>
+            </a:lvl1pPr>
+            <a:lvl2pPr marL="742950" indent="-285750" eaLnBrk="0" hangingPunct="0">
+              <a:defRPr sz="2400">
+                <a:solidFill>
+                  <a:schemeClr val="tx1"/>
+                </a:solidFill>
+                <a:latin typeface="Arial" charset="0"/>
+                <a:ea typeface="ＭＳ Ｐゴシック" charset="-128"/>
+              </a:defRPr>
+            </a:lvl2pPr>
+            <a:lvl3pPr marL="1143000" indent="-228600" eaLnBrk="0" hangingPunct="0">
+              <a:defRPr sz="2400">
+                <a:solidFill>
+                  <a:schemeClr val="tx1"/>
+                </a:solidFill>
+                <a:latin typeface="Arial" charset="0"/>
+                <a:ea typeface="ＭＳ Ｐゴシック" charset="-128"/>
+              </a:defRPr>
+            </a:lvl3pPr>
+            <a:lvl4pPr marL="1600200" indent="-228600" eaLnBrk="0" hangingPunct="0">
+              <a:defRPr sz="2400">
+                <a:solidFill>
+                  <a:schemeClr val="tx1"/>
+                </a:solidFill>
+                <a:latin typeface="Arial" charset="0"/>
+                <a:ea typeface="ＭＳ Ｐゴシック" charset="-128"/>
+              </a:defRPr>
+            </a:lvl4pPr>
+            <a:lvl5pPr marL="2057400" indent="-228600" eaLnBrk="0" hangingPunct="0">
+              <a:defRPr sz="2400">
+                <a:solidFill>
+                  <a:schemeClr val="tx1"/>
+                </a:solidFill>
+                <a:latin typeface="Arial" charset="0"/>
+                <a:ea typeface="ＭＳ Ｐゴシック" charset="-128"/>
+              </a:defRPr>
+            </a:lvl5pPr>
+            <a:lvl6pPr marL="2514600" indent="-228600" eaLnBrk="0" fontAlgn="base" hangingPunct="0">
+              <a:spcBef>
+                <a:spcPct val="0"/>
+              </a:spcBef>
+              <a:spcAft>
+                <a:spcPct val="0"/>
+              </a:spcAft>
+              <a:defRPr sz="2400">
+                <a:solidFill>
+                  <a:schemeClr val="tx1"/>
+                </a:solidFill>
+                <a:latin typeface="Arial" charset="0"/>
+                <a:ea typeface="ＭＳ Ｐゴシック" charset="-128"/>
+              </a:defRPr>
+            </a:lvl6pPr>
+            <a:lvl7pPr marL="2971800" indent="-228600" eaLnBrk="0" fontAlgn="base" hangingPunct="0">
+              <a:spcBef>
+                <a:spcPct val="0"/>
+              </a:spcBef>
+              <a:spcAft>
+                <a:spcPct val="0"/>
+              </a:spcAft>
+              <a:defRPr sz="2400">
+                <a:solidFill>
+                  <a:schemeClr val="tx1"/>
+                </a:solidFill>
+                <a:latin typeface="Arial" charset="0"/>
+                <a:ea typeface="ＭＳ Ｐゴシック" charset="-128"/>
+              </a:defRPr>
+            </a:lvl7pPr>
+            <a:lvl8pPr marL="3429000" indent="-228600" eaLnBrk="0" fontAlgn="base" hangingPunct="0">
+              <a:spcBef>
+                <a:spcPct val="0"/>
+              </a:spcBef>
+              <a:spcAft>
+                <a:spcPct val="0"/>
+              </a:spcAft>
+              <a:defRPr sz="2400">
+                <a:solidFill>
+                  <a:schemeClr val="tx1"/>
+                </a:solidFill>
+                <a:latin typeface="Arial" charset="0"/>
+                <a:ea typeface="ＭＳ Ｐゴシック" charset="-128"/>
+              </a:defRPr>
+            </a:lvl8pPr>
+            <a:lvl9pPr marL="3886200" indent="-228600" eaLnBrk="0" fontAlgn="base" hangingPunct="0">
+              <a:spcBef>
+                <a:spcPct val="0"/>
+              </a:spcBef>
+              <a:spcAft>
+                <a:spcPct val="0"/>
+              </a:spcAft>
+              <a:defRPr sz="2400">
+                <a:solidFill>
+                  <a:schemeClr val="tx1"/>
+                </a:solidFill>
+                <a:latin typeface="Arial" charset="0"/>
+                <a:ea typeface="ＭＳ Ｐゴシック" charset="-128"/>
+              </a:defRPr>
+            </a:lvl9pPr>
+          </a:lstStyle>
+          <a:p>
+            <a:pPr eaLnBrk="1" hangingPunct="1"/>
+            <a:r>
+              <a:rPr lang="en-US" altLang="x-none" sz="1200">
+                <a:latin typeface="Garamond" charset="0"/>
+              </a:rPr>
+              <a:t>22 October 2016</a:t>
+            </a:r>
+            <a:endParaRPr lang="it-IT" altLang="x-none" sz="1200">
+              <a:latin typeface="Garamond" charset="0"/>
+            </a:endParaRPr>
+          </a:p>
+        </p:txBody>
+      </p:sp>
+      <p:sp>
+        <p:nvSpPr>
+          <p:cNvPr id="26628" name="Footer Placeholder 3"/>
+          <p:cNvSpPr>
+            <a:spLocks noGrp="1"/>
+          </p:cNvSpPr>
+          <p:nvPr>
+            <p:ph type="ftr" sz="quarter" idx="11"/>
+          </p:nvPr>
+        </p:nvSpPr>
+        <p:spPr>
+          <a:noFill/>
+          <a:ln/>
+          <a:extLst>
+            <a:ext uri="{909E8E84-426E-40DD-AFC4-6F175D3DCCD1}">
+              <a14:hiddenFill xmlns:a14="http://schemas.microsoft.com/office/drawing/2010/main">
+                <a:solidFill>
+                  <a:srgbClr val="FFFFFF"/>
+                </a:solidFill>
+              </a14:hiddenFill>
+            </a:ext>
+            <a:ext uri="{91240B29-F687-4F45-9708-019B960494DF}">
+              <a14:hiddenLine xmlns:a14="http://schemas.microsoft.com/office/drawing/2010/main" w="9525">
+                <a:solidFill>
+                  <a:srgbClr val="000000"/>
+                </a:solidFill>
+                <a:miter lim="800000"/>
+                <a:headEnd/>
+                <a:tailEnd/>
+              </a14:hiddenLine>
+            </a:ext>
+          </a:extLst>
+        </p:spPr>
+        <p:txBody>
+          <a:bodyPr/>
+          <a:lstStyle>
+            <a:lvl1pPr eaLnBrk="0" hangingPunct="0">
+              <a:defRPr sz="2400">
+                <a:solidFill>
+                  <a:schemeClr val="tx1"/>
+                </a:solidFill>
+                <a:latin typeface="Arial" charset="0"/>
+                <a:ea typeface="ＭＳ Ｐゴシック" charset="-128"/>
+              </a:defRPr>
+            </a:lvl1pPr>
+            <a:lvl2pPr marL="742950" indent="-285750" eaLnBrk="0" hangingPunct="0">
+              <a:defRPr sz="2400">
+                <a:solidFill>
+                  <a:schemeClr val="tx1"/>
+                </a:solidFill>
+                <a:latin typeface="Arial" charset="0"/>
+                <a:ea typeface="ＭＳ Ｐゴシック" charset="-128"/>
+              </a:defRPr>
+            </a:lvl2pPr>
+            <a:lvl3pPr marL="1143000" indent="-228600" eaLnBrk="0" hangingPunct="0">
+              <a:defRPr sz="2400">
+                <a:solidFill>
+                  <a:schemeClr val="tx1"/>
+                </a:solidFill>
+                <a:latin typeface="Arial" charset="0"/>
+                <a:ea typeface="ＭＳ Ｐゴシック" charset="-128"/>
+              </a:defRPr>
+            </a:lvl3pPr>
+            <a:lvl4pPr marL="1600200" indent="-228600" eaLnBrk="0" hangingPunct="0">
+              <a:defRPr sz="2400">
+                <a:solidFill>
+                  <a:schemeClr val="tx1"/>
+                </a:solidFill>
+                <a:latin typeface="Arial" charset="0"/>
+                <a:ea typeface="ＭＳ Ｐゴシック" charset="-128"/>
+              </a:defRPr>
+            </a:lvl4pPr>
+            <a:lvl5pPr marL="2057400" indent="-228600" eaLnBrk="0" hangingPunct="0">
+              <a:defRPr sz="2400">
+                <a:solidFill>
+                  <a:schemeClr val="tx1"/>
+                </a:solidFill>
+                <a:latin typeface="Arial" charset="0"/>
+                <a:ea typeface="ＭＳ Ｐゴシック" charset="-128"/>
+              </a:defRPr>
+            </a:lvl5pPr>
+            <a:lvl6pPr marL="2514600" indent="-228600" eaLnBrk="0" fontAlgn="base" hangingPunct="0">
+              <a:spcBef>
+                <a:spcPct val="0"/>
+              </a:spcBef>
+              <a:spcAft>
+                <a:spcPct val="0"/>
+              </a:spcAft>
+              <a:defRPr sz="2400">
+                <a:solidFill>
+                  <a:schemeClr val="tx1"/>
+                </a:solidFill>
+                <a:latin typeface="Arial" charset="0"/>
+                <a:ea typeface="ＭＳ Ｐゴシック" charset="-128"/>
+              </a:defRPr>
+            </a:lvl6pPr>
+            <a:lvl7pPr marL="2971800" indent="-228600" eaLnBrk="0" fontAlgn="base" hangingPunct="0">
+              <a:spcBef>
+                <a:spcPct val="0"/>
+              </a:spcBef>
+              <a:spcAft>
+                <a:spcPct val="0"/>
+              </a:spcAft>
+              <a:defRPr sz="2400">
+                <a:solidFill>
+                  <a:schemeClr val="tx1"/>
+                </a:solidFill>
+                <a:latin typeface="Arial" charset="0"/>
+                <a:ea typeface="ＭＳ Ｐゴシック" charset="-128"/>
+              </a:defRPr>
+            </a:lvl7pPr>
+            <a:lvl8pPr marL="3429000" indent="-228600" eaLnBrk="0" fontAlgn="base" hangingPunct="0">
+              <a:spcBef>
+                <a:spcPct val="0"/>
+              </a:spcBef>
+              <a:spcAft>
+                <a:spcPct val="0"/>
+              </a:spcAft>
+              <a:defRPr sz="2400">
+                <a:solidFill>
+                  <a:schemeClr val="tx1"/>
+                </a:solidFill>
+                <a:latin typeface="Arial" charset="0"/>
+                <a:ea typeface="ＭＳ Ｐゴシック" charset="-128"/>
+              </a:defRPr>
+            </a:lvl8pPr>
+            <a:lvl9pPr marL="3886200" indent="-228600" eaLnBrk="0" fontAlgn="base" hangingPunct="0">
+              <a:spcBef>
+                <a:spcPct val="0"/>
+              </a:spcBef>
+              <a:spcAft>
+                <a:spcPct val="0"/>
+              </a:spcAft>
+              <a:defRPr sz="2400">
+                <a:solidFill>
+                  <a:schemeClr val="tx1"/>
+                </a:solidFill>
+                <a:latin typeface="Arial" charset="0"/>
+                <a:ea typeface="ＭＳ Ｐゴシック" charset="-128"/>
+              </a:defRPr>
+            </a:lvl9pPr>
+          </a:lstStyle>
+          <a:p>
+            <a:pPr eaLnBrk="1" hangingPunct="1"/>
+            <a:r>
+              <a:rPr lang="en-US" altLang="x-none" sz="1200">
+                <a:latin typeface="Garamond" charset="0"/>
+              </a:rPr>
+              <a:t>Vincenzo Innocente</a:t>
+            </a:r>
+            <a:endParaRPr lang="it-IT" altLang="x-none" sz="1200">
+              <a:latin typeface="Garamond" charset="0"/>
+            </a:endParaRPr>
+          </a:p>
+        </p:txBody>
+      </p:sp>
+      <p:sp>
+        <p:nvSpPr>
+          <p:cNvPr id="26629" name="Slide Number Placeholder 4"/>
+          <p:cNvSpPr>
+            <a:spLocks noGrp="1"/>
+          </p:cNvSpPr>
+          <p:nvPr>
+            <p:ph type="sldNum" sz="quarter" idx="12"/>
+          </p:nvPr>
+        </p:nvSpPr>
+        <p:spPr>
+          <a:noFill/>
+          <a:ln/>
+          <a:extLst>
+            <a:ext uri="{909E8E84-426E-40DD-AFC4-6F175D3DCCD1}">
+              <a14:hiddenFill xmlns:a14="http://schemas.microsoft.com/office/drawing/2010/main">
+                <a:solidFill>
+                  <a:srgbClr val="FFFFFF"/>
+                </a:solidFill>
+              </a14:hiddenFill>
+            </a:ext>
+            <a:ext uri="{91240B29-F687-4F45-9708-019B960494DF}">
+              <a14:hiddenLine xmlns:a14="http://schemas.microsoft.com/office/drawing/2010/main" w="9525">
+                <a:solidFill>
+                  <a:srgbClr val="000000"/>
+                </a:solidFill>
+                <a:miter lim="800000"/>
+                <a:headEnd/>
+                <a:tailEnd/>
+              </a14:hiddenLine>
+            </a:ext>
+          </a:extLst>
+        </p:spPr>
+        <p:txBody>
+          <a:bodyPr/>
+          <a:lstStyle>
+            <a:lvl1pPr eaLnBrk="0" hangingPunct="0">
+              <a:defRPr sz="2400">
+                <a:solidFill>
+                  <a:schemeClr val="tx1"/>
+                </a:solidFill>
+                <a:latin typeface="Arial" charset="0"/>
+                <a:ea typeface="ＭＳ Ｐゴシック" charset="-128"/>
+              </a:defRPr>
+            </a:lvl1pPr>
+            <a:lvl2pPr marL="742950" indent="-285750" eaLnBrk="0" hangingPunct="0">
+              <a:defRPr sz="2400">
+                <a:solidFill>
+                  <a:schemeClr val="tx1"/>
+                </a:solidFill>
+                <a:latin typeface="Arial" charset="0"/>
+                <a:ea typeface="ＭＳ Ｐゴシック" charset="-128"/>
+              </a:defRPr>
+            </a:lvl2pPr>
+            <a:lvl3pPr marL="1143000" indent="-228600" eaLnBrk="0" hangingPunct="0">
+              <a:defRPr sz="2400">
+                <a:solidFill>
+                  <a:schemeClr val="tx1"/>
+                </a:solidFill>
+                <a:latin typeface="Arial" charset="0"/>
+                <a:ea typeface="ＭＳ Ｐゴシック" charset="-128"/>
+              </a:defRPr>
+            </a:lvl3pPr>
+            <a:lvl4pPr marL="1600200" indent="-228600" eaLnBrk="0" hangingPunct="0">
+              <a:defRPr sz="2400">
+                <a:solidFill>
+                  <a:schemeClr val="tx1"/>
+                </a:solidFill>
+                <a:latin typeface="Arial" charset="0"/>
+                <a:ea typeface="ＭＳ Ｐゴシック" charset="-128"/>
+              </a:defRPr>
+            </a:lvl4pPr>
+            <a:lvl5pPr marL="2057400" indent="-228600" eaLnBrk="0" hangingPunct="0">
+              <a:defRPr sz="2400">
+                <a:solidFill>
+                  <a:schemeClr val="tx1"/>
+                </a:solidFill>
+                <a:latin typeface="Arial" charset="0"/>
+                <a:ea typeface="ＭＳ Ｐゴシック" charset="-128"/>
+              </a:defRPr>
+            </a:lvl5pPr>
+            <a:lvl6pPr marL="2514600" indent="-228600" eaLnBrk="0" fontAlgn="base" hangingPunct="0">
+              <a:spcBef>
+                <a:spcPct val="0"/>
+              </a:spcBef>
+              <a:spcAft>
+                <a:spcPct val="0"/>
+              </a:spcAft>
+              <a:defRPr sz="2400">
+                <a:solidFill>
+                  <a:schemeClr val="tx1"/>
+                </a:solidFill>
+                <a:latin typeface="Arial" charset="0"/>
+                <a:ea typeface="ＭＳ Ｐゴシック" charset="-128"/>
+              </a:defRPr>
+            </a:lvl6pPr>
+            <a:lvl7pPr marL="2971800" indent="-228600" eaLnBrk="0" fontAlgn="base" hangingPunct="0">
+              <a:spcBef>
+                <a:spcPct val="0"/>
+              </a:spcBef>
+              <a:spcAft>
+                <a:spcPct val="0"/>
+              </a:spcAft>
+              <a:defRPr sz="2400">
+                <a:solidFill>
+                  <a:schemeClr val="tx1"/>
+                </a:solidFill>
+                <a:latin typeface="Arial" charset="0"/>
+                <a:ea typeface="ＭＳ Ｐゴシック" charset="-128"/>
+              </a:defRPr>
+            </a:lvl7pPr>
+            <a:lvl8pPr marL="3429000" indent="-228600" eaLnBrk="0" fontAlgn="base" hangingPunct="0">
+              <a:spcBef>
+                <a:spcPct val="0"/>
+              </a:spcBef>
+              <a:spcAft>
+                <a:spcPct val="0"/>
+              </a:spcAft>
+              <a:defRPr sz="2400">
+                <a:solidFill>
+                  <a:schemeClr val="tx1"/>
+                </a:solidFill>
+                <a:latin typeface="Arial" charset="0"/>
+                <a:ea typeface="ＭＳ Ｐゴシック" charset="-128"/>
+              </a:defRPr>
+            </a:lvl8pPr>
+            <a:lvl9pPr marL="3886200" indent="-228600" eaLnBrk="0" fontAlgn="base" hangingPunct="0">
+              <a:spcBef>
+                <a:spcPct val="0"/>
+              </a:spcBef>
+              <a:spcAft>
+                <a:spcPct val="0"/>
+              </a:spcAft>
+              <a:defRPr sz="2400">
+                <a:solidFill>
+                  <a:schemeClr val="tx1"/>
+                </a:solidFill>
+                <a:latin typeface="Arial" charset="0"/>
+                <a:ea typeface="ＭＳ Ｐゴシック" charset="-128"/>
+              </a:defRPr>
+            </a:lvl9pPr>
+          </a:lstStyle>
+          <a:p>
+            <a:pPr eaLnBrk="1" hangingPunct="1"/>
+            <a:fld id="{7A44000F-1B7D-CC46-A072-D0868C9398B7}" type="slidenum">
+              <a:rPr lang="it-IT" altLang="x-none" sz="1200">
+                <a:latin typeface="Garamond" charset="0"/>
+              </a:rPr>
+              <a:pPr eaLnBrk="1" hangingPunct="1"/>
+              <a:t>9</a:t>
+            </a:fld>
+            <a:endParaRPr lang="it-IT" altLang="x-none" sz="1200">
+              <a:latin typeface="Garamond" charset="0"/>
+            </a:endParaRPr>
+          </a:p>
+        </p:txBody>
+      </p:sp>
+      <p:sp>
+        <p:nvSpPr>
+          <p:cNvPr id="26630" name="TextBox 5"/>
+          <p:cNvSpPr txBox="1">
+            <a:spLocks noChangeArrowheads="1"/>
+          </p:cNvSpPr>
+          <p:nvPr/>
+        </p:nvSpPr>
+        <p:spPr bwMode="auto">
+          <a:xfrm>
+            <a:off x="951883" y="3224289"/>
+            <a:ext cx="8713787" cy="3046988"/>
+          </a:xfrm>
+          <a:prstGeom prst="rect">
+            <a:avLst/>
+          </a:prstGeom>
+          <a:solidFill>
+            <a:srgbClr val="FFFF00">
+              <a:alpha val="74117"/>
+            </a:srgbClr>
+          </a:solidFill>
+          <a:ln>
+            <a:noFill/>
+          </a:ln>
+          <a:extLst>
+            <a:ext uri="{91240B29-F687-4F45-9708-019B960494DF}">
+              <a14:hiddenLine xmlns:a14="http://schemas.microsoft.com/office/drawing/2010/main" w="9525">
+                <a:solidFill>
+                  <a:srgbClr val="000000"/>
+                </a:solidFill>
+                <a:miter lim="800000"/>
+                <a:headEnd/>
+                <a:tailEnd/>
+              </a14:hiddenLine>
+            </a:ext>
+          </a:extLst>
+        </p:spPr>
+        <p:txBody>
+          <a:bodyPr>
+            <a:spAutoFit/>
+          </a:bodyPr>
+          <a:lstStyle>
+            <a:lvl1pPr eaLnBrk="0" hangingPunct="0">
+              <a:defRPr sz="2400">
+                <a:solidFill>
+                  <a:schemeClr val="tx1"/>
+                </a:solidFill>
+                <a:latin typeface="Arial" charset="0"/>
+                <a:ea typeface="ＭＳ Ｐゴシック" charset="-128"/>
+              </a:defRPr>
+            </a:lvl1pPr>
+            <a:lvl2pPr marL="742950" indent="-285750" eaLnBrk="0" hangingPunct="0">
+              <a:defRPr sz="2400">
+                <a:solidFill>
+                  <a:schemeClr val="tx1"/>
+                </a:solidFill>
+                <a:latin typeface="Arial" charset="0"/>
+                <a:ea typeface="ＭＳ Ｐゴシック" charset="-128"/>
+              </a:defRPr>
+            </a:lvl2pPr>
+            <a:lvl3pPr marL="1143000" indent="-228600" eaLnBrk="0" hangingPunct="0">
+              <a:defRPr sz="2400">
+                <a:solidFill>
+                  <a:schemeClr val="tx1"/>
+                </a:solidFill>
+                <a:latin typeface="Arial" charset="0"/>
+                <a:ea typeface="ＭＳ Ｐゴシック" charset="-128"/>
+              </a:defRPr>
+            </a:lvl3pPr>
+            <a:lvl4pPr marL="1600200" indent="-228600" eaLnBrk="0" hangingPunct="0">
+              <a:defRPr sz="2400">
+                <a:solidFill>
+                  <a:schemeClr val="tx1"/>
+                </a:solidFill>
+                <a:latin typeface="Arial" charset="0"/>
+                <a:ea typeface="ＭＳ Ｐゴシック" charset="-128"/>
+              </a:defRPr>
+            </a:lvl4pPr>
+            <a:lvl5pPr marL="2057400" indent="-228600" eaLnBrk="0" hangingPunct="0">
+              <a:defRPr sz="2400">
+                <a:solidFill>
+                  <a:schemeClr val="tx1"/>
+                </a:solidFill>
+                <a:latin typeface="Arial" charset="0"/>
+                <a:ea typeface="ＭＳ Ｐゴシック" charset="-128"/>
+              </a:defRPr>
+            </a:lvl5pPr>
+            <a:lvl6pPr marL="2514600" indent="-228600" eaLnBrk="0" fontAlgn="base" hangingPunct="0">
+              <a:spcBef>
+                <a:spcPct val="0"/>
+              </a:spcBef>
+              <a:spcAft>
+                <a:spcPct val="0"/>
+              </a:spcAft>
+              <a:defRPr sz="2400">
+                <a:solidFill>
+                  <a:schemeClr val="tx1"/>
+                </a:solidFill>
+                <a:latin typeface="Arial" charset="0"/>
+                <a:ea typeface="ＭＳ Ｐゴシック" charset="-128"/>
+              </a:defRPr>
+            </a:lvl6pPr>
+            <a:lvl7pPr marL="2971800" indent="-228600" eaLnBrk="0" fontAlgn="base" hangingPunct="0">
+              <a:spcBef>
+                <a:spcPct val="0"/>
+              </a:spcBef>
+              <a:spcAft>
+                <a:spcPct val="0"/>
+              </a:spcAft>
+              <a:defRPr sz="2400">
+                <a:solidFill>
+                  <a:schemeClr val="tx1"/>
+                </a:solidFill>
+                <a:latin typeface="Arial" charset="0"/>
+                <a:ea typeface="ＭＳ Ｐゴシック" charset="-128"/>
+              </a:defRPr>
+            </a:lvl7pPr>
+            <a:lvl8pPr marL="3429000" indent="-228600" eaLnBrk="0" fontAlgn="base" hangingPunct="0">
+              <a:spcBef>
+                <a:spcPct val="0"/>
+              </a:spcBef>
+              <a:spcAft>
+                <a:spcPct val="0"/>
+              </a:spcAft>
+              <a:defRPr sz="2400">
+                <a:solidFill>
+                  <a:schemeClr val="tx1"/>
+                </a:solidFill>
+                <a:latin typeface="Arial" charset="0"/>
+                <a:ea typeface="ＭＳ Ｐゴシック" charset="-128"/>
+              </a:defRPr>
+            </a:lvl8pPr>
+            <a:lvl9pPr marL="3886200" indent="-228600" eaLnBrk="0" fontAlgn="base" hangingPunct="0">
+              <a:spcBef>
+                <a:spcPct val="0"/>
+              </a:spcBef>
+              <a:spcAft>
+                <a:spcPct val="0"/>
+              </a:spcAft>
+              <a:defRPr sz="2400">
+                <a:solidFill>
+                  <a:schemeClr val="tx1"/>
+                </a:solidFill>
+                <a:latin typeface="Arial" charset="0"/>
+                <a:ea typeface="ＭＳ Ｐゴシック" charset="-128"/>
+              </a:defRPr>
+            </a:lvl9pPr>
+          </a:lstStyle>
+          <a:p>
+            <a:r>
+              <a:rPr lang="en-US" altLang="x-none" sz="1600" dirty="0"/>
+              <a:t>#include &lt;</a:t>
+            </a:r>
+            <a:r>
+              <a:rPr lang="en-US" altLang="x-none" sz="1600" dirty="0" err="1"/>
+              <a:t>iostream</a:t>
+            </a:r>
+            <a:r>
+              <a:rPr lang="en-US" altLang="x-none" sz="1600" dirty="0"/>
+              <a:t>&gt;     // </a:t>
+            </a:r>
+            <a:r>
+              <a:rPr lang="en-US" altLang="x-none" sz="1600" dirty="0" err="1"/>
+              <a:t>std</a:t>
+            </a:r>
+            <a:r>
+              <a:rPr lang="en-US" altLang="x-none" sz="1600" dirty="0"/>
+              <a:t>::</a:t>
+            </a:r>
+            <a:r>
+              <a:rPr lang="en-US" altLang="x-none" sz="1600" dirty="0" err="1"/>
+              <a:t>cout</a:t>
+            </a:r>
+            <a:endParaRPr lang="en-US" altLang="x-none" sz="1600" dirty="0"/>
+          </a:p>
+          <a:p>
+            <a:r>
+              <a:rPr lang="en-US" altLang="x-none" sz="1600" dirty="0"/>
+              <a:t>#include &lt;limits&gt;       // </a:t>
+            </a:r>
+            <a:r>
+              <a:rPr lang="en-US" altLang="x-none" sz="1600" dirty="0" err="1"/>
+              <a:t>std</a:t>
+            </a:r>
+            <a:r>
+              <a:rPr lang="en-US" altLang="x-none" sz="1600" dirty="0"/>
+              <a:t>::</a:t>
+            </a:r>
+            <a:r>
+              <a:rPr lang="en-US" altLang="x-none" sz="1600" dirty="0" err="1"/>
+              <a:t>numeric_limits</a:t>
+            </a:r>
+            <a:endParaRPr lang="en-US" altLang="x-none" sz="1600" dirty="0"/>
+          </a:p>
+          <a:p>
+            <a:r>
+              <a:rPr lang="fr-FR" altLang="x-none" sz="1600" dirty="0" err="1"/>
+              <a:t>int</a:t>
+            </a:r>
+            <a:r>
+              <a:rPr lang="fr-FR" altLang="x-none" sz="1600" dirty="0"/>
+              <a:t> main () {</a:t>
+            </a:r>
+          </a:p>
+          <a:p>
+            <a:r>
+              <a:rPr lang="fr-FR" altLang="x-none" sz="1600" dirty="0"/>
+              <a:t>  </a:t>
+            </a:r>
+            <a:r>
+              <a:rPr lang="fr-FR" altLang="x-none" sz="1600" dirty="0" err="1"/>
+              <a:t>std</a:t>
+            </a:r>
+            <a:r>
+              <a:rPr lang="fr-FR" altLang="x-none" sz="1600" dirty="0"/>
+              <a:t>::cout &lt;&lt; </a:t>
+            </a:r>
+            <a:r>
+              <a:rPr lang="fr-FR" altLang="x-none" sz="1600" dirty="0" err="1"/>
+              <a:t>std</a:t>
+            </a:r>
+            <a:r>
+              <a:rPr lang="fr-FR" altLang="x-none" sz="1600" dirty="0"/>
+              <a:t>::</a:t>
+            </a:r>
+            <a:r>
+              <a:rPr lang="fr-FR" altLang="x-none" sz="1600" dirty="0" err="1"/>
+              <a:t>boolalpha</a:t>
+            </a:r>
+            <a:r>
+              <a:rPr lang="fr-FR" altLang="x-none" sz="1600" dirty="0"/>
+              <a:t>;</a:t>
+            </a:r>
+          </a:p>
+          <a:p>
+            <a:r>
+              <a:rPr lang="fr-FR" altLang="x-none" sz="1600" dirty="0"/>
+              <a:t>  </a:t>
+            </a:r>
+            <a:r>
+              <a:rPr lang="fr-FR" altLang="x-none" sz="1600" dirty="0" err="1"/>
+              <a:t>std</a:t>
+            </a:r>
+            <a:r>
+              <a:rPr lang="fr-FR" altLang="x-none" sz="1600" dirty="0"/>
+              <a:t>::cout &lt;&lt; "Minimum value: " &lt;&lt; </a:t>
+            </a:r>
+            <a:r>
+              <a:rPr lang="fr-FR" altLang="x-none" sz="1600" dirty="0" err="1"/>
+              <a:t>std</a:t>
+            </a:r>
+            <a:r>
+              <a:rPr lang="fr-FR" altLang="x-none" sz="1600" dirty="0"/>
+              <a:t>::</a:t>
+            </a:r>
+            <a:r>
+              <a:rPr lang="fr-FR" altLang="x-none" sz="1600" dirty="0" err="1"/>
+              <a:t>numeric_limits</a:t>
+            </a:r>
+            <a:r>
+              <a:rPr lang="fr-FR" altLang="x-none" sz="1600" dirty="0"/>
+              <a:t>&lt;</a:t>
+            </a:r>
+            <a:r>
+              <a:rPr lang="fr-FR" altLang="x-none" sz="1600" dirty="0" err="1"/>
+              <a:t>float</a:t>
+            </a:r>
+            <a:r>
+              <a:rPr lang="fr-FR" altLang="x-none" sz="1600" dirty="0"/>
+              <a:t>&gt;::min() &lt;&lt; '\n';</a:t>
+            </a:r>
+          </a:p>
+          <a:p>
+            <a:r>
+              <a:rPr lang="fr-FR" altLang="x-none" sz="1600" dirty="0"/>
+              <a:t>  </a:t>
+            </a:r>
+            <a:r>
+              <a:rPr lang="fr-FR" altLang="x-none" sz="1600" dirty="0" err="1"/>
+              <a:t>std</a:t>
+            </a:r>
+            <a:r>
+              <a:rPr lang="fr-FR" altLang="x-none" sz="1600" dirty="0"/>
+              <a:t>::cout &lt;&lt; "Maximum value: " &lt;&lt; </a:t>
+            </a:r>
+            <a:r>
+              <a:rPr lang="fr-FR" altLang="x-none" sz="1600" dirty="0" err="1"/>
+              <a:t>std</a:t>
+            </a:r>
+            <a:r>
+              <a:rPr lang="fr-FR" altLang="x-none" sz="1600" dirty="0"/>
+              <a:t>::</a:t>
+            </a:r>
+            <a:r>
+              <a:rPr lang="fr-FR" altLang="x-none" sz="1600" dirty="0" err="1"/>
+              <a:t>numeric_limits</a:t>
+            </a:r>
+            <a:r>
+              <a:rPr lang="fr-FR" altLang="x-none" sz="1600" dirty="0"/>
+              <a:t>&lt;</a:t>
+            </a:r>
+            <a:r>
+              <a:rPr lang="fr-FR" altLang="x-none" sz="1600" dirty="0" err="1"/>
+              <a:t>float</a:t>
+            </a:r>
+            <a:r>
+              <a:rPr lang="fr-FR" altLang="x-none" sz="1600" dirty="0"/>
+              <a:t>&gt;::max() &lt;&lt; '\n';</a:t>
+            </a:r>
+          </a:p>
+          <a:p>
+            <a:r>
+              <a:rPr lang="fr-FR" altLang="x-none" sz="1600" dirty="0"/>
+              <a:t>  </a:t>
+            </a:r>
+            <a:r>
+              <a:rPr lang="fr-FR" altLang="x-none" sz="1600" dirty="0" err="1"/>
+              <a:t>std</a:t>
+            </a:r>
+            <a:r>
+              <a:rPr lang="fr-FR" altLang="x-none" sz="1600" dirty="0"/>
+              <a:t>::cout &lt;&lt; "Is </a:t>
+            </a:r>
+            <a:r>
+              <a:rPr lang="fr-FR" altLang="x-none" sz="1600" dirty="0" err="1"/>
+              <a:t>signed</a:t>
+            </a:r>
+            <a:r>
+              <a:rPr lang="fr-FR" altLang="x-none" sz="1600" dirty="0"/>
+              <a:t>: " &lt;&lt; </a:t>
+            </a:r>
+            <a:r>
+              <a:rPr lang="fr-FR" altLang="x-none" sz="1600" dirty="0" err="1"/>
+              <a:t>std</a:t>
+            </a:r>
+            <a:r>
+              <a:rPr lang="fr-FR" altLang="x-none" sz="1600" dirty="0"/>
+              <a:t>::</a:t>
+            </a:r>
+            <a:r>
+              <a:rPr lang="fr-FR" altLang="x-none" sz="1600" dirty="0" err="1"/>
+              <a:t>numeric_limits</a:t>
+            </a:r>
+            <a:r>
+              <a:rPr lang="fr-FR" altLang="x-none" sz="1600" dirty="0"/>
+              <a:t>&lt;</a:t>
+            </a:r>
+            <a:r>
+              <a:rPr lang="fr-FR" altLang="x-none" sz="1600" dirty="0" err="1"/>
+              <a:t>float</a:t>
+            </a:r>
+            <a:r>
+              <a:rPr lang="fr-FR" altLang="x-none" sz="1600" dirty="0"/>
+              <a:t>&gt;::</a:t>
+            </a:r>
+            <a:r>
+              <a:rPr lang="fr-FR" altLang="x-none" sz="1600" dirty="0" err="1"/>
+              <a:t>is_signed</a:t>
+            </a:r>
+            <a:r>
+              <a:rPr lang="fr-FR" altLang="x-none" sz="1600" dirty="0"/>
+              <a:t> &lt;&lt; '\n';</a:t>
+            </a:r>
+          </a:p>
+          <a:p>
+            <a:r>
+              <a:rPr lang="fr-FR" altLang="x-none" sz="1600" dirty="0"/>
+              <a:t>  </a:t>
+            </a:r>
+            <a:r>
+              <a:rPr lang="fr-FR" altLang="x-none" sz="1600" dirty="0" err="1"/>
+              <a:t>std</a:t>
+            </a:r>
+            <a:r>
+              <a:rPr lang="fr-FR" altLang="x-none" sz="1600" dirty="0"/>
+              <a:t>::cout &lt;&lt; "</a:t>
+            </a:r>
+            <a:r>
+              <a:rPr lang="fr-FR" altLang="x-none" sz="1600" dirty="0" err="1"/>
+              <a:t>significand</a:t>
+            </a:r>
+            <a:r>
+              <a:rPr lang="fr-FR" altLang="x-none" sz="1600" dirty="0"/>
+              <a:t> bits: " &lt;&lt; </a:t>
+            </a:r>
+            <a:r>
+              <a:rPr lang="fr-FR" altLang="x-none" sz="1600" dirty="0" err="1"/>
+              <a:t>std</a:t>
+            </a:r>
+            <a:r>
+              <a:rPr lang="fr-FR" altLang="x-none" sz="1600" dirty="0"/>
+              <a:t>::</a:t>
+            </a:r>
+            <a:r>
+              <a:rPr lang="fr-FR" altLang="x-none" sz="1600" dirty="0" err="1"/>
+              <a:t>numeric_limits</a:t>
+            </a:r>
+            <a:r>
+              <a:rPr lang="fr-FR" altLang="x-none" sz="1600" dirty="0"/>
+              <a:t>&lt;</a:t>
+            </a:r>
+            <a:r>
+              <a:rPr lang="fr-FR" altLang="x-none" sz="1600" dirty="0" err="1"/>
+              <a:t>float</a:t>
+            </a:r>
+            <a:r>
+              <a:rPr lang="fr-FR" altLang="x-none" sz="1600" dirty="0"/>
+              <a:t>&gt;::digits &lt;&lt; '\n';</a:t>
+            </a:r>
+          </a:p>
+          <a:p>
+            <a:r>
+              <a:rPr lang="fr-FR" altLang="x-none" sz="1600" dirty="0"/>
+              <a:t>  </a:t>
+            </a:r>
+            <a:r>
+              <a:rPr lang="fr-FR" altLang="x-none" sz="1600" dirty="0" err="1"/>
+              <a:t>std</a:t>
+            </a:r>
+            <a:r>
+              <a:rPr lang="fr-FR" altLang="x-none" sz="1600" dirty="0"/>
+              <a:t>::cout &lt;&lt; "</a:t>
+            </a:r>
+            <a:r>
+              <a:rPr lang="fr-FR" altLang="x-none" sz="1600" dirty="0" err="1"/>
+              <a:t>precision</a:t>
+            </a:r>
+            <a:r>
+              <a:rPr lang="fr-FR" altLang="x-none" sz="1600" dirty="0"/>
+              <a:t>: " &lt;&lt; </a:t>
+            </a:r>
+            <a:r>
+              <a:rPr lang="fr-FR" altLang="x-none" sz="1600" dirty="0" err="1"/>
+              <a:t>std</a:t>
+            </a:r>
+            <a:r>
+              <a:rPr lang="fr-FR" altLang="x-none" sz="1600" dirty="0"/>
+              <a:t>::</a:t>
+            </a:r>
+            <a:r>
+              <a:rPr lang="fr-FR" altLang="x-none" sz="1600" dirty="0" err="1"/>
+              <a:t>numeric_limits</a:t>
+            </a:r>
+            <a:r>
+              <a:rPr lang="fr-FR" altLang="x-none" sz="1600" dirty="0"/>
+              <a:t>&lt;</a:t>
+            </a:r>
+            <a:r>
+              <a:rPr lang="fr-FR" altLang="x-none" sz="1600" dirty="0" err="1"/>
+              <a:t>float</a:t>
+            </a:r>
+            <a:r>
+              <a:rPr lang="fr-FR" altLang="x-none" sz="1600" dirty="0"/>
+              <a:t>&gt;::epsilon() &lt;&lt; '\n';</a:t>
+            </a:r>
+          </a:p>
+          <a:p>
+            <a:r>
+              <a:rPr lang="fr-FR" altLang="x-none" sz="1600" dirty="0"/>
+              <a:t>  </a:t>
+            </a:r>
+            <a:r>
+              <a:rPr lang="fr-FR" altLang="x-none" sz="1600" dirty="0" err="1"/>
+              <a:t>std</a:t>
+            </a:r>
+            <a:r>
+              <a:rPr lang="fr-FR" altLang="x-none" sz="1600" dirty="0"/>
+              <a:t>::cout &lt;&lt; "has </a:t>
+            </a:r>
+            <a:r>
+              <a:rPr lang="fr-FR" altLang="x-none" sz="1600" dirty="0" err="1"/>
+              <a:t>infinity</a:t>
+            </a:r>
+            <a:r>
+              <a:rPr lang="fr-FR" altLang="x-none" sz="1600" dirty="0"/>
+              <a:t>: " &lt;&lt; </a:t>
+            </a:r>
+            <a:r>
+              <a:rPr lang="fr-FR" altLang="x-none" sz="1600" dirty="0" err="1"/>
+              <a:t>std</a:t>
+            </a:r>
+            <a:r>
+              <a:rPr lang="fr-FR" altLang="x-none" sz="1600" dirty="0"/>
+              <a:t>::</a:t>
+            </a:r>
+            <a:r>
+              <a:rPr lang="fr-FR" altLang="x-none" sz="1600" dirty="0" err="1"/>
+              <a:t>numeric_limits</a:t>
+            </a:r>
+            <a:r>
+              <a:rPr lang="fr-FR" altLang="x-none" sz="1600" dirty="0"/>
+              <a:t>&lt;</a:t>
+            </a:r>
+            <a:r>
+              <a:rPr lang="fr-FR" altLang="x-none" sz="1600" dirty="0" err="1"/>
+              <a:t>float</a:t>
+            </a:r>
+            <a:r>
+              <a:rPr lang="fr-FR" altLang="x-none" sz="1600" dirty="0"/>
+              <a:t>&gt;::</a:t>
+            </a:r>
+            <a:r>
+              <a:rPr lang="fr-FR" altLang="x-none" sz="1600" dirty="0" err="1"/>
+              <a:t>has_infinity</a:t>
+            </a:r>
+            <a:r>
+              <a:rPr lang="fr-FR" altLang="x-none" sz="1600" dirty="0"/>
+              <a:t> &lt;&lt; '\n';</a:t>
+            </a:r>
+          </a:p>
+          <a:p>
+            <a:r>
+              <a:rPr lang="is-IS" altLang="x-none" sz="1600" dirty="0"/>
+              <a:t>  return 0;</a:t>
+            </a:r>
+          </a:p>
+          <a:p>
+            <a:r>
+              <a:rPr lang="is-IS" altLang="x-none" sz="1600" dirty="0"/>
+              <a:t>}</a:t>
+            </a:r>
+            <a:endParaRPr lang="es-ES_tradnl" altLang="x-none" sz="1600" dirty="0"/>
+          </a:p>
+        </p:txBody>
+      </p:sp>
+    </p:spTree>
   </p:cSld>
   <p:clrMapOvr>
     <a:masterClrMapping/>

--- a/Slides/FPforScientist.pptx
+++ b/Slides/FPforScientist.pptx
@@ -16,6 +16,9 @@
     <p:sldId id="394" r:id="rId10"/>
     <p:sldId id="262" r:id="rId11"/>
     <p:sldId id="456" r:id="rId12"/>
+    <p:sldId id="457" r:id="rId13"/>
+    <p:sldId id="458" r:id="rId14"/>
+    <p:sldId id="459" r:id="rId15"/>
   </p:sldIdLst>
   <p:sldSz cx="12192000" cy="6858000"/>
   <p:notesSz cx="6858000" cy="9144000"/>
@@ -3914,15 +3917,7 @@
             </a:r>
             <a:r>
               <a:rPr lang="en-US" dirty="0"/>
-              <a:t>() allows </a:t>
-            </a:r>
-            <a:r>
-              <a:rPr lang="en-US"/>
-              <a:t>to convert </a:t>
-            </a:r>
-            <a:r>
-              <a:rPr lang="en-US" dirty="0"/>
-              <a:t>to/from </a:t>
+              <a:t>() allows to convert to/from </a:t>
             </a:r>
             <a:r>
               <a:rPr lang="en-US" dirty="0" err="1"/>
@@ -3979,6 +3974,493 @@
     <p:extLst>
       <p:ext uri="{BB962C8B-B14F-4D97-AF65-F5344CB8AC3E}">
         <p14:creationId xmlns:p14="http://schemas.microsoft.com/office/powerpoint/2010/main" val="4164329877"/>
+      </p:ext>
+    </p:extLst>
+  </p:cSld>
+  <p:clrMapOvr>
+    <a:masterClrMapping/>
+  </p:clrMapOvr>
+</p:sld>
+</file>
+
+<file path=ppt/slides/slide12.xml><?xml version="1.0" encoding="utf-8"?>
+<p:sld xmlns:a="http://schemas.openxmlformats.org/drawingml/2006/main" xmlns:r="http://schemas.openxmlformats.org/officeDocument/2006/relationships" xmlns:p="http://schemas.openxmlformats.org/presentationml/2006/main">
+  <p:cSld>
+    <p:spTree>
+      <p:nvGrpSpPr>
+        <p:cNvPr id="1" name=""/>
+        <p:cNvGrpSpPr/>
+        <p:nvPr/>
+      </p:nvGrpSpPr>
+      <p:grpSpPr>
+        <a:xfrm>
+          <a:off x="0" y="0"/>
+          <a:ext cx="0" cy="0"/>
+          <a:chOff x="0" y="0"/>
+          <a:chExt cx="0" cy="0"/>
+        </a:xfrm>
+      </p:grpSpPr>
+      <p:sp>
+        <p:nvSpPr>
+          <p:cNvPr id="4" name="Title 3">
+            <a:extLst>
+              <a:ext uri="{FF2B5EF4-FFF2-40B4-BE49-F238E27FC236}">
+                <a16:creationId xmlns:a16="http://schemas.microsoft.com/office/drawing/2014/main" id="{01CA9CE8-5518-5ECA-0924-1A0E2D2AAA8B}"/>
+              </a:ext>
+            </a:extLst>
+          </p:cNvPr>
+          <p:cNvSpPr>
+            <a:spLocks noGrp="1"/>
+          </p:cNvSpPr>
+          <p:nvPr>
+            <p:ph type="title"/>
+          </p:nvPr>
+        </p:nvSpPr>
+        <p:spPr>
+          <a:xfrm>
+            <a:off x="634142" y="2092798"/>
+            <a:ext cx="10515600" cy="1589516"/>
+          </a:xfrm>
+        </p:spPr>
+        <p:txBody>
+          <a:bodyPr>
+            <a:normAutofit/>
+          </a:bodyPr>
+          <a:lstStyle/>
+          <a:p>
+            <a:pPr algn="ctr"/>
+            <a:r>
+              <a:rPr lang="en-US" sz="9600" dirty="0">
+                <a:solidFill>
+                  <a:srgbClr val="FF0000"/>
+                </a:solidFill>
+                <a:highlight>
+                  <a:srgbClr val="FFFF00"/>
+                </a:highlight>
+              </a:rPr>
+              <a:t>EXERCISES</a:t>
+            </a:r>
+          </a:p>
+        </p:txBody>
+      </p:sp>
+      <p:sp>
+        <p:nvSpPr>
+          <p:cNvPr id="5" name="Text Placeholder 4">
+            <a:extLst>
+              <a:ext uri="{FF2B5EF4-FFF2-40B4-BE49-F238E27FC236}">
+                <a16:creationId xmlns:a16="http://schemas.microsoft.com/office/drawing/2014/main" id="{B97E4ED0-7E73-91A2-45E0-6A4AC47AA1D6}"/>
+              </a:ext>
+            </a:extLst>
+          </p:cNvPr>
+          <p:cNvSpPr>
+            <a:spLocks noGrp="1"/>
+          </p:cNvSpPr>
+          <p:nvPr>
+            <p:ph type="body" idx="1"/>
+          </p:nvPr>
+        </p:nvSpPr>
+        <p:spPr>
+          <a:xfrm>
+            <a:off x="838200" y="4033409"/>
+            <a:ext cx="10515600" cy="1500187"/>
+          </a:xfrm>
+        </p:spPr>
+        <p:txBody>
+          <a:bodyPr>
+            <a:normAutofit fontScale="77500" lnSpcReduction="20000"/>
+          </a:bodyPr>
+          <a:lstStyle/>
+          <a:p>
+            <a:r>
+              <a:rPr lang="en-US" dirty="0"/>
+              <a:t>Either in Python or C++</a:t>
+            </a:r>
+          </a:p>
+          <a:p>
+            <a:endParaRPr lang="en-US" dirty="0"/>
+          </a:p>
+          <a:p>
+            <a:r>
+              <a:rPr lang="en-US" dirty="0"/>
+              <a:t>For C++ one can use </a:t>
+            </a:r>
+            <a:r>
+              <a:rPr lang="en-US" dirty="0" err="1"/>
+              <a:t>godbolt</a:t>
+            </a:r>
+            <a:r>
+              <a:rPr lang="en-US" dirty="0"/>
+              <a:t> (</a:t>
+            </a:r>
+            <a:r>
+              <a:rPr lang="en-US" dirty="0">
+                <a:hlinkClick r:id="rId2"/>
+              </a:rPr>
+              <a:t>https://godbolt.org/z/d1e18j3jK</a:t>
+            </a:r>
+            <a:r>
+              <a:rPr lang="en-US" dirty="0"/>
+              <a:t>  ) </a:t>
+            </a:r>
+          </a:p>
+          <a:p>
+            <a:r>
+              <a:rPr lang="en-US" dirty="0"/>
+              <a:t>For Python either a python3 shell on your PC, or a </a:t>
+            </a:r>
+            <a:r>
+              <a:rPr lang="en-US" dirty="0" err="1"/>
+              <a:t>jupyter</a:t>
+            </a:r>
+            <a:r>
+              <a:rPr lang="en-US" dirty="0"/>
+              <a:t> notebook or the browser shell in </a:t>
+            </a:r>
+            <a:r>
+              <a:rPr lang="en-US" dirty="0">
+                <a:hlinkClick r:id="rId3"/>
+              </a:rPr>
+              <a:t>https://numpy.org/</a:t>
+            </a:r>
+            <a:endParaRPr lang="en-US" dirty="0"/>
+          </a:p>
+          <a:p>
+            <a:endParaRPr lang="en-US" dirty="0"/>
+          </a:p>
+        </p:txBody>
+      </p:sp>
+    </p:spTree>
+    <p:extLst>
+      <p:ext uri="{BB962C8B-B14F-4D97-AF65-F5344CB8AC3E}">
+        <p14:creationId xmlns:p14="http://schemas.microsoft.com/office/powerpoint/2010/main" val="2252538730"/>
+      </p:ext>
+    </p:extLst>
+  </p:cSld>
+  <p:clrMapOvr>
+    <a:masterClrMapping/>
+  </p:clrMapOvr>
+</p:sld>
+</file>
+
+<file path=ppt/slides/slide13.xml><?xml version="1.0" encoding="utf-8"?>
+<p:sld xmlns:a="http://schemas.openxmlformats.org/drawingml/2006/main" xmlns:r="http://schemas.openxmlformats.org/officeDocument/2006/relationships" xmlns:p="http://schemas.openxmlformats.org/presentationml/2006/main">
+  <p:cSld>
+    <p:spTree>
+      <p:nvGrpSpPr>
+        <p:cNvPr id="1" name=""/>
+        <p:cNvGrpSpPr/>
+        <p:nvPr/>
+      </p:nvGrpSpPr>
+      <p:grpSpPr>
+        <a:xfrm>
+          <a:off x="0" y="0"/>
+          <a:ext cx="0" cy="0"/>
+          <a:chOff x="0" y="0"/>
+          <a:chExt cx="0" cy="0"/>
+        </a:xfrm>
+      </p:grpSpPr>
+      <p:sp>
+        <p:nvSpPr>
+          <p:cNvPr id="4" name="Title 3">
+            <a:extLst>
+              <a:ext uri="{FF2B5EF4-FFF2-40B4-BE49-F238E27FC236}">
+                <a16:creationId xmlns:a16="http://schemas.microsoft.com/office/drawing/2014/main" id="{DE4F31B8-A7B9-38EC-1040-6B6993B0691E}"/>
+              </a:ext>
+            </a:extLst>
+          </p:cNvPr>
+          <p:cNvSpPr>
+            <a:spLocks noGrp="1"/>
+          </p:cNvSpPr>
+          <p:nvPr>
+            <p:ph type="title"/>
+          </p:nvPr>
+        </p:nvSpPr>
+        <p:spPr/>
+        <p:txBody>
+          <a:bodyPr/>
+          <a:lstStyle/>
+          <a:p>
+            <a:endParaRPr lang="en-US" dirty="0"/>
+          </a:p>
+        </p:txBody>
+      </p:sp>
+      <p:sp>
+        <p:nvSpPr>
+          <p:cNvPr id="5" name="Content Placeholder 4">
+            <a:extLst>
+              <a:ext uri="{FF2B5EF4-FFF2-40B4-BE49-F238E27FC236}">
+                <a16:creationId xmlns:a16="http://schemas.microsoft.com/office/drawing/2014/main" id="{0EB73195-2A5F-D6F4-66AD-545144681786}"/>
+              </a:ext>
+            </a:extLst>
+          </p:cNvPr>
+          <p:cNvSpPr>
+            <a:spLocks noGrp="1"/>
+          </p:cNvSpPr>
+          <p:nvPr>
+            <p:ph idx="1"/>
+          </p:nvPr>
+        </p:nvSpPr>
+        <p:spPr/>
+        <p:txBody>
+          <a:bodyPr/>
+          <a:lstStyle/>
+          <a:p>
+            <a:r>
+              <a:rPr lang="en-US" dirty="0"/>
+              <a:t>Count the number of FP in a </a:t>
+            </a:r>
+            <a:r>
+              <a:rPr lang="en-US" dirty="0" err="1"/>
+              <a:t>binade</a:t>
+            </a:r>
+            <a:endParaRPr lang="en-US" dirty="0"/>
+          </a:p>
+          <a:p>
+            <a:pPr lvl="1"/>
+            <a:r>
+              <a:rPr lang="en-US" dirty="0"/>
+              <a:t>Verify that they are the same for two different </a:t>
+            </a:r>
+            <a:r>
+              <a:rPr lang="en-US" dirty="0" err="1"/>
+              <a:t>binades</a:t>
+            </a:r>
+            <a:endParaRPr lang="en-US" dirty="0"/>
+          </a:p>
+          <a:p>
+            <a:r>
+              <a:rPr lang="en-US" dirty="0"/>
+              <a:t>Compute the ULP for some FPs</a:t>
+            </a:r>
+          </a:p>
+          <a:p>
+            <a:pPr lvl="1"/>
+            <a:r>
+              <a:rPr lang="en-US" dirty="0"/>
+              <a:t>How it depends on the </a:t>
+            </a:r>
+            <a:r>
+              <a:rPr lang="en-US" dirty="0" err="1"/>
+              <a:t>binade</a:t>
+            </a:r>
+            <a:r>
+              <a:rPr lang="en-US" dirty="0"/>
+              <a:t>?</a:t>
+            </a:r>
+          </a:p>
+          <a:p>
+            <a:r>
+              <a:rPr lang="en-US" dirty="0"/>
+              <a:t>Convert some number (0.1, pi, 31.5,  …) between various representations (including decimal)</a:t>
+            </a:r>
+          </a:p>
+          <a:p>
+            <a:pPr lvl="1"/>
+            <a:r>
+              <a:rPr lang="en-US" dirty="0"/>
+              <a:t>See what happens and explain it</a:t>
+            </a:r>
+          </a:p>
+          <a:p>
+            <a:endParaRPr lang="en-US" dirty="0"/>
+          </a:p>
+        </p:txBody>
+      </p:sp>
+    </p:spTree>
+    <p:extLst>
+      <p:ext uri="{BB962C8B-B14F-4D97-AF65-F5344CB8AC3E}">
+        <p14:creationId xmlns:p14="http://schemas.microsoft.com/office/powerpoint/2010/main" val="2941134211"/>
+      </p:ext>
+    </p:extLst>
+  </p:cSld>
+  <p:clrMapOvr>
+    <a:masterClrMapping/>
+  </p:clrMapOvr>
+</p:sld>
+</file>
+
+<file path=ppt/slides/slide14.xml><?xml version="1.0" encoding="utf-8"?>
+<p:sld xmlns:a="http://schemas.openxmlformats.org/drawingml/2006/main" xmlns:r="http://schemas.openxmlformats.org/officeDocument/2006/relationships" xmlns:p="http://schemas.openxmlformats.org/presentationml/2006/main">
+  <p:cSld>
+    <p:spTree>
+      <p:nvGrpSpPr>
+        <p:cNvPr id="1" name=""/>
+        <p:cNvGrpSpPr/>
+        <p:nvPr/>
+      </p:nvGrpSpPr>
+      <p:grpSpPr>
+        <a:xfrm>
+          <a:off x="0" y="0"/>
+          <a:ext cx="0" cy="0"/>
+          <a:chOff x="0" y="0"/>
+          <a:chExt cx="0" cy="0"/>
+        </a:xfrm>
+      </p:grpSpPr>
+      <p:sp>
+        <p:nvSpPr>
+          <p:cNvPr id="2" name="Title 1">
+            <a:extLst>
+              <a:ext uri="{FF2B5EF4-FFF2-40B4-BE49-F238E27FC236}">
+                <a16:creationId xmlns:a16="http://schemas.microsoft.com/office/drawing/2014/main" id="{BD7DF874-3597-BFB0-AECD-EAF9C9471B56}"/>
+              </a:ext>
+            </a:extLst>
+          </p:cNvPr>
+          <p:cNvSpPr>
+            <a:spLocks noGrp="1"/>
+          </p:cNvSpPr>
+          <p:nvPr>
+            <p:ph type="title"/>
+          </p:nvPr>
+        </p:nvSpPr>
+        <p:spPr/>
+        <p:txBody>
+          <a:bodyPr/>
+          <a:lstStyle/>
+          <a:p>
+            <a:r>
+              <a:rPr lang="en-US" dirty="0"/>
+              <a:t>FP Arithmetic</a:t>
+            </a:r>
+          </a:p>
+        </p:txBody>
+      </p:sp>
+      <p:sp>
+        <p:nvSpPr>
+          <p:cNvPr id="3" name="Content Placeholder 2">
+            <a:extLst>
+              <a:ext uri="{FF2B5EF4-FFF2-40B4-BE49-F238E27FC236}">
+                <a16:creationId xmlns:a16="http://schemas.microsoft.com/office/drawing/2014/main" id="{F1B22559-4366-0A66-160C-67AB5C7A6663}"/>
+              </a:ext>
+            </a:extLst>
+          </p:cNvPr>
+          <p:cNvSpPr>
+            <a:spLocks noGrp="1"/>
+          </p:cNvSpPr>
+          <p:nvPr>
+            <p:ph idx="1"/>
+          </p:nvPr>
+        </p:nvSpPr>
+        <p:spPr>
+          <a:xfrm>
+            <a:off x="271849" y="1467279"/>
+            <a:ext cx="11232292" cy="4351338"/>
+          </a:xfrm>
+        </p:spPr>
+        <p:txBody>
+          <a:bodyPr>
+            <a:normAutofit fontScale="92500" lnSpcReduction="10000"/>
+          </a:bodyPr>
+          <a:lstStyle/>
+          <a:p>
+            <a:r>
+              <a:rPr lang="en-US" dirty="0"/>
+              <a:t>There are two basic operations: </a:t>
+            </a:r>
+          </a:p>
+          <a:p>
+            <a:r>
+              <a:rPr lang="en-US" dirty="0"/>
+              <a:t>sum and multiplication</a:t>
+            </a:r>
+          </a:p>
+          <a:p>
+            <a:pPr lvl="1"/>
+            <a:r>
+              <a:rPr lang="en-US" dirty="0" err="1"/>
+              <a:t>a+b</a:t>
+            </a:r>
+            <a:r>
+              <a:rPr lang="en-US" dirty="0"/>
+              <a:t> and </a:t>
+            </a:r>
+            <a:r>
+              <a:rPr lang="en-US" dirty="0" err="1"/>
+              <a:t>a×b</a:t>
+            </a:r>
+            <a:r>
+              <a:rPr lang="en-US" dirty="0"/>
+              <a:t>  symbolize the exact sum and multiplication between a and b</a:t>
+            </a:r>
+          </a:p>
+          <a:p>
+            <a:pPr lvl="1"/>
+            <a:r>
+              <a:rPr lang="en-US" dirty="0" err="1"/>
+              <a:t>a⊕b</a:t>
+            </a:r>
+            <a:r>
+              <a:rPr lang="en-US" dirty="0"/>
+              <a:t> and </a:t>
+            </a:r>
+            <a:r>
+              <a:rPr lang="en-US" dirty="0" err="1"/>
+              <a:t>a⊗b</a:t>
+            </a:r>
+            <a:r>
+              <a:rPr lang="en-US" dirty="0"/>
+              <a:t>  symbolize the rounded sum and multiplication between FPs a and b</a:t>
+            </a:r>
+          </a:p>
+          <a:p>
+            <a:pPr lvl="2"/>
+            <a:r>
+              <a:rPr lang="en-US" dirty="0" err="1"/>
+              <a:t>a+b</a:t>
+            </a:r>
+            <a:r>
+              <a:rPr lang="en-US" dirty="0"/>
+              <a:t> and a*b  are the corresponding operations in code</a:t>
+            </a:r>
+          </a:p>
+          <a:p>
+            <a:r>
+              <a:rPr lang="en-US" dirty="0"/>
+              <a:t>We will use decimal precision 2 for all examples to allow mental arithmetic in a finite time</a:t>
+            </a:r>
+          </a:p>
+          <a:p>
+            <a:pPr lvl="1"/>
+            <a:r>
+              <a:rPr lang="en-US" dirty="0"/>
+              <a:t>42+3.7 = …</a:t>
+            </a:r>
+          </a:p>
+          <a:p>
+            <a:pPr lvl="1"/>
+            <a:r>
+              <a:rPr lang="en-US" dirty="0"/>
+              <a:t>42⊕3.7 = …</a:t>
+            </a:r>
+          </a:p>
+          <a:p>
+            <a:pPr lvl="1"/>
+            <a:r>
+              <a:rPr lang="en-US" dirty="0"/>
+              <a:t>42⊕3.3 = … , 42⊕3.5 = … , 43⊕3.5 = …</a:t>
+            </a:r>
+            <a:br>
+              <a:rPr lang="en-US" dirty="0"/>
+            </a:br>
+            <a:r>
+              <a:rPr lang="en-US" dirty="0"/>
+              <a:t>42⊕3.3⊕3.3 = … , 3.3⊕3.3⊕42 = … </a:t>
+            </a:r>
+          </a:p>
+          <a:p>
+            <a:pPr marL="457200" lvl="1" indent="0">
+              <a:buNone/>
+            </a:pPr>
+            <a:r>
+              <a:rPr lang="en-US" dirty="0"/>
+              <a:t>(use python decimal to verify results)</a:t>
+            </a:r>
+          </a:p>
+        </p:txBody>
+      </p:sp>
+    </p:spTree>
+    <p:extLst>
+      <p:ext uri="{BB962C8B-B14F-4D97-AF65-F5344CB8AC3E}">
+        <p14:creationId xmlns:p14="http://schemas.microsoft.com/office/powerpoint/2010/main" val="2196015800"/>
       </p:ext>
     </p:extLst>
   </p:cSld>

--- a/Slides/FPforScientist.pptx
+++ b/Slides/FPforScientist.pptx
@@ -19,6 +19,7 @@
     <p:sldId id="457" r:id="rId13"/>
     <p:sldId id="458" r:id="rId14"/>
     <p:sldId id="459" r:id="rId15"/>
+    <p:sldId id="460" r:id="rId16"/>
   </p:sldIdLst>
   <p:sldSz cx="12192000" cy="6858000"/>
   <p:notesSz cx="6858000" cy="9144000"/>
@@ -4470,6 +4471,161 @@
 </p:sld>
 </file>
 
+<file path=ppt/slides/slide15.xml><?xml version="1.0" encoding="utf-8"?>
+<p:sld xmlns:a="http://schemas.openxmlformats.org/drawingml/2006/main" xmlns:r="http://schemas.openxmlformats.org/officeDocument/2006/relationships" xmlns:p="http://schemas.openxmlformats.org/presentationml/2006/main">
+  <p:cSld>
+    <p:spTree>
+      <p:nvGrpSpPr>
+        <p:cNvPr id="1" name=""/>
+        <p:cNvGrpSpPr/>
+        <p:nvPr/>
+      </p:nvGrpSpPr>
+      <p:grpSpPr>
+        <a:xfrm>
+          <a:off x="0" y="0"/>
+          <a:ext cx="0" cy="0"/>
+          <a:chOff x="0" y="0"/>
+          <a:chExt cx="0" cy="0"/>
+        </a:xfrm>
+      </p:grpSpPr>
+      <p:sp>
+        <p:nvSpPr>
+          <p:cNvPr id="2" name="Title 1">
+            <a:extLst>
+              <a:ext uri="{FF2B5EF4-FFF2-40B4-BE49-F238E27FC236}">
+                <a16:creationId xmlns:a16="http://schemas.microsoft.com/office/drawing/2014/main" id="{75455E44-1145-B3B5-99CB-164A17DB7EF9}"/>
+              </a:ext>
+            </a:extLst>
+          </p:cNvPr>
+          <p:cNvSpPr>
+            <a:spLocks noGrp="1"/>
+          </p:cNvSpPr>
+          <p:nvPr>
+            <p:ph type="title"/>
+          </p:nvPr>
+        </p:nvSpPr>
+        <p:spPr/>
+        <p:txBody>
+          <a:bodyPr/>
+          <a:lstStyle/>
+          <a:p>
+            <a:r>
+              <a:rPr lang="en-US" dirty="0"/>
+              <a:t>A first theorem</a:t>
+            </a:r>
+          </a:p>
+        </p:txBody>
+      </p:sp>
+      <p:sp>
+        <p:nvSpPr>
+          <p:cNvPr id="3" name="Content Placeholder 2">
+            <a:extLst>
+              <a:ext uri="{FF2B5EF4-FFF2-40B4-BE49-F238E27FC236}">
+                <a16:creationId xmlns:a16="http://schemas.microsoft.com/office/drawing/2014/main" id="{C30A1BBA-EAF2-6BF3-A6DF-55D23C2E2491}"/>
+              </a:ext>
+            </a:extLst>
+          </p:cNvPr>
+          <p:cNvSpPr>
+            <a:spLocks noGrp="1"/>
+          </p:cNvSpPr>
+          <p:nvPr>
+            <p:ph idx="1"/>
+          </p:nvPr>
+        </p:nvSpPr>
+        <p:spPr/>
+        <p:txBody>
+          <a:bodyPr/>
+          <a:lstStyle/>
+          <a:p>
+            <a:r>
+              <a:rPr lang="en-US" dirty="0"/>
+              <a:t>The difference of two number of the same </a:t>
+            </a:r>
+            <a:r>
+              <a:rPr lang="en-US" dirty="0" err="1"/>
+              <a:t>binade</a:t>
+            </a:r>
+            <a:r>
+              <a:rPr lang="en-US" dirty="0"/>
+              <a:t> is precise</a:t>
+            </a:r>
+          </a:p>
+          <a:p>
+            <a:pPr lvl="1"/>
+            <a:r>
+              <a:rPr lang="en-US" dirty="0"/>
+              <a:t>99-11 = 88, 42-37 = 5</a:t>
+            </a:r>
+          </a:p>
+          <a:p>
+            <a:pPr lvl="1"/>
+            <a:r>
+              <a:rPr lang="en-US" dirty="0"/>
+              <a:t>0x1.921fb6p+1 - 0x1.001e72p+1 = 0x1.240288p+0</a:t>
+            </a:r>
+          </a:p>
+          <a:p>
+            <a:endParaRPr lang="en-US" dirty="0"/>
+          </a:p>
+          <a:p>
+            <a:r>
+              <a:rPr lang="en-US" dirty="0"/>
+              <a:t>If a&gt;b&gt;a/2&gt;0 then </a:t>
+            </a:r>
+            <a:r>
+              <a:rPr lang="en-US" dirty="0" err="1"/>
+              <a:t>a⊖b</a:t>
+            </a:r>
+            <a:r>
+              <a:rPr lang="en-US" dirty="0"/>
+              <a:t> = a-b (is precise)</a:t>
+            </a:r>
+          </a:p>
+          <a:p>
+            <a:pPr lvl="1"/>
+            <a:r>
+              <a:rPr lang="en-US" dirty="0"/>
+              <a:t>12-7.4 = 4.6, 18-7.4= 10.6 =&gt; 18⊖7.4 = 11</a:t>
+            </a:r>
+          </a:p>
+          <a:p>
+            <a:pPr lvl="1"/>
+            <a:r>
+              <a:rPr lang="en-US" dirty="0"/>
+              <a:t>0x1.333334p-2 ⊖ 0x1.99999ap-3 = 0x1.99999ap-4 (precise)</a:t>
+            </a:r>
+          </a:p>
+          <a:p>
+            <a:pPr lvl="1"/>
+            <a:r>
+              <a:rPr lang="en-US"/>
+              <a:t>0x1.333334p-2 </a:t>
+            </a:r>
+            <a:r>
+              <a:rPr lang="en-US" dirty="0"/>
+              <a:t>⊖ 0x1.99999ap-4 = 0x1.99999cp-3 (</a:t>
+            </a:r>
+            <a:r>
+              <a:rPr lang="en-US"/>
+              <a:t>not precise)</a:t>
+            </a:r>
+            <a:endParaRPr lang="en-US" dirty="0"/>
+          </a:p>
+        </p:txBody>
+      </p:sp>
+    </p:spTree>
+    <p:extLst>
+      <p:ext uri="{BB962C8B-B14F-4D97-AF65-F5344CB8AC3E}">
+        <p14:creationId xmlns:p14="http://schemas.microsoft.com/office/powerpoint/2010/main" val="4058227503"/>
+      </p:ext>
+    </p:extLst>
+  </p:cSld>
+  <p:clrMapOvr>
+    <a:masterClrMapping/>
+  </p:clrMapOvr>
+</p:sld>
+</file>
+
 <file path=ppt/slides/slide2.xml><?xml version="1.0" encoding="utf-8"?>
 <p:sld xmlns:a="http://schemas.openxmlformats.org/drawingml/2006/main" xmlns:r="http://schemas.openxmlformats.org/officeDocument/2006/relationships" xmlns:p="http://schemas.openxmlformats.org/presentationml/2006/main">
   <p:cSld>

--- a/Slides/FPforScientist.pptx
+++ b/Slides/FPforScientist.pptx
@@ -11,15 +11,19 @@
     <p:sldId id="256" r:id="rId5"/>
     <p:sldId id="260" r:id="rId6"/>
     <p:sldId id="261" r:id="rId7"/>
-    <p:sldId id="455" r:id="rId8"/>
-    <p:sldId id="439" r:id="rId9"/>
-    <p:sldId id="394" r:id="rId10"/>
-    <p:sldId id="262" r:id="rId11"/>
-    <p:sldId id="456" r:id="rId12"/>
-    <p:sldId id="457" r:id="rId13"/>
-    <p:sldId id="458" r:id="rId14"/>
-    <p:sldId id="459" r:id="rId15"/>
-    <p:sldId id="460" r:id="rId16"/>
+    <p:sldId id="461" r:id="rId8"/>
+    <p:sldId id="455" r:id="rId9"/>
+    <p:sldId id="439" r:id="rId10"/>
+    <p:sldId id="394" r:id="rId11"/>
+    <p:sldId id="262" r:id="rId12"/>
+    <p:sldId id="456" r:id="rId13"/>
+    <p:sldId id="457" r:id="rId14"/>
+    <p:sldId id="458" r:id="rId15"/>
+    <p:sldId id="459" r:id="rId16"/>
+    <p:sldId id="460" r:id="rId17"/>
+    <p:sldId id="462" r:id="rId18"/>
+    <p:sldId id="463" r:id="rId19"/>
+    <p:sldId id="464" r:id="rId20"/>
   </p:sldIdLst>
   <p:sldSz cx="12192000" cy="6858000"/>
   <p:notesSz cx="6858000" cy="9144000"/>
@@ -3750,6 +3754,1120 @@
       </p:grpSpPr>
       <p:sp>
         <p:nvSpPr>
+          <p:cNvPr id="26625" name="Title 1"/>
+          <p:cNvSpPr>
+            <a:spLocks noGrp="1"/>
+          </p:cNvSpPr>
+          <p:nvPr>
+            <p:ph type="title"/>
+          </p:nvPr>
+        </p:nvSpPr>
+        <p:spPr/>
+        <p:txBody>
+          <a:bodyPr/>
+          <a:lstStyle/>
+          <a:p>
+            <a:r>
+              <a:rPr lang="en-US" altLang="x-none"/>
+              <a:t>Limits</a:t>
+            </a:r>
+          </a:p>
+        </p:txBody>
+      </p:sp>
+      <p:sp>
+        <p:nvSpPr>
+          <p:cNvPr id="26626" name="Content Placeholder 5"/>
+          <p:cNvSpPr>
+            <a:spLocks noGrp="1"/>
+          </p:cNvSpPr>
+          <p:nvPr>
+            <p:ph idx="1"/>
+          </p:nvPr>
+        </p:nvSpPr>
+        <p:spPr>
+          <a:xfrm>
+            <a:off x="714633" y="1367851"/>
+            <a:ext cx="8229600" cy="1931404"/>
+          </a:xfrm>
+        </p:spPr>
+        <p:txBody>
+          <a:bodyPr/>
+          <a:lstStyle/>
+          <a:p>
+            <a:r>
+              <a:rPr lang="en-US" altLang="x-none" dirty="0"/>
+              <a:t>Everything you want to know about an arithmetic type is in </a:t>
+            </a:r>
+          </a:p>
+          <a:p>
+            <a:pPr lvl="1"/>
+            <a:r>
+              <a:rPr lang="en-US" altLang="x-none" dirty="0" err="1"/>
+              <a:t>std</a:t>
+            </a:r>
+            <a:r>
+              <a:rPr lang="en-US" altLang="x-none" dirty="0"/>
+              <a:t>::</a:t>
+            </a:r>
+            <a:r>
+              <a:rPr lang="en-US" altLang="x-none" dirty="0" err="1"/>
+              <a:t>numeric_limits</a:t>
+            </a:r>
+            <a:r>
+              <a:rPr lang="en-US" altLang="x-none" dirty="0"/>
+              <a:t>&lt;T&gt;  </a:t>
+            </a:r>
+          </a:p>
+          <a:p>
+            <a:pPr lvl="1"/>
+            <a:r>
+              <a:rPr lang="en-US" altLang="x-none" dirty="0"/>
+              <a:t>see </a:t>
+            </a:r>
+            <a:r>
+              <a:rPr lang="en-US" altLang="x-none" sz="2000" dirty="0"/>
+              <a:t>http://</a:t>
+            </a:r>
+            <a:r>
+              <a:rPr lang="en-US" altLang="x-none" sz="2000" dirty="0" err="1"/>
+              <a:t>www.cplusplus.com</a:t>
+            </a:r>
+            <a:r>
+              <a:rPr lang="en-US" altLang="x-none" sz="2000" dirty="0"/>
+              <a:t>/reference/limits/</a:t>
+            </a:r>
+            <a:r>
+              <a:rPr lang="en-US" altLang="x-none" sz="2000" dirty="0" err="1"/>
+              <a:t>numeric_limits</a:t>
+            </a:r>
+            <a:r>
+              <a:rPr lang="en-US" altLang="x-none" sz="2000" dirty="0"/>
+              <a:t>/</a:t>
+            </a:r>
+          </a:p>
+        </p:txBody>
+      </p:sp>
+      <p:sp>
+        <p:nvSpPr>
+          <p:cNvPr id="26627" name="Date Placeholder 2"/>
+          <p:cNvSpPr>
+            <a:spLocks noGrp="1"/>
+          </p:cNvSpPr>
+          <p:nvPr>
+            <p:ph type="dt" sz="quarter" idx="10"/>
+          </p:nvPr>
+        </p:nvSpPr>
+        <p:spPr>
+          <a:noFill/>
+          <a:ln/>
+          <a:extLst>
+            <a:ext uri="{909E8E84-426E-40DD-AFC4-6F175D3DCCD1}">
+              <a14:hiddenFill xmlns:a14="http://schemas.microsoft.com/office/drawing/2010/main">
+                <a:solidFill>
+                  <a:srgbClr val="FFFFFF"/>
+                </a:solidFill>
+              </a14:hiddenFill>
+            </a:ext>
+            <a:ext uri="{91240B29-F687-4F45-9708-019B960494DF}">
+              <a14:hiddenLine xmlns:a14="http://schemas.microsoft.com/office/drawing/2010/main" w="9525">
+                <a:solidFill>
+                  <a:srgbClr val="000000"/>
+                </a:solidFill>
+                <a:miter lim="800000"/>
+                <a:headEnd/>
+                <a:tailEnd/>
+              </a14:hiddenLine>
+            </a:ext>
+          </a:extLst>
+        </p:spPr>
+        <p:txBody>
+          <a:bodyPr/>
+          <a:lstStyle>
+            <a:lvl1pPr eaLnBrk="0" hangingPunct="0">
+              <a:defRPr sz="2400">
+                <a:solidFill>
+                  <a:schemeClr val="tx1"/>
+                </a:solidFill>
+                <a:latin typeface="Arial" charset="0"/>
+                <a:ea typeface="ＭＳ Ｐゴシック" charset="-128"/>
+              </a:defRPr>
+            </a:lvl1pPr>
+            <a:lvl2pPr marL="742950" indent="-285750" eaLnBrk="0" hangingPunct="0">
+              <a:defRPr sz="2400">
+                <a:solidFill>
+                  <a:schemeClr val="tx1"/>
+                </a:solidFill>
+                <a:latin typeface="Arial" charset="0"/>
+                <a:ea typeface="ＭＳ Ｐゴシック" charset="-128"/>
+              </a:defRPr>
+            </a:lvl2pPr>
+            <a:lvl3pPr marL="1143000" indent="-228600" eaLnBrk="0" hangingPunct="0">
+              <a:defRPr sz="2400">
+                <a:solidFill>
+                  <a:schemeClr val="tx1"/>
+                </a:solidFill>
+                <a:latin typeface="Arial" charset="0"/>
+                <a:ea typeface="ＭＳ Ｐゴシック" charset="-128"/>
+              </a:defRPr>
+            </a:lvl3pPr>
+            <a:lvl4pPr marL="1600200" indent="-228600" eaLnBrk="0" hangingPunct="0">
+              <a:defRPr sz="2400">
+                <a:solidFill>
+                  <a:schemeClr val="tx1"/>
+                </a:solidFill>
+                <a:latin typeface="Arial" charset="0"/>
+                <a:ea typeface="ＭＳ Ｐゴシック" charset="-128"/>
+              </a:defRPr>
+            </a:lvl4pPr>
+            <a:lvl5pPr marL="2057400" indent="-228600" eaLnBrk="0" hangingPunct="0">
+              <a:defRPr sz="2400">
+                <a:solidFill>
+                  <a:schemeClr val="tx1"/>
+                </a:solidFill>
+                <a:latin typeface="Arial" charset="0"/>
+                <a:ea typeface="ＭＳ Ｐゴシック" charset="-128"/>
+              </a:defRPr>
+            </a:lvl5pPr>
+            <a:lvl6pPr marL="2514600" indent="-228600" eaLnBrk="0" fontAlgn="base" hangingPunct="0">
+              <a:spcBef>
+                <a:spcPct val="0"/>
+              </a:spcBef>
+              <a:spcAft>
+                <a:spcPct val="0"/>
+              </a:spcAft>
+              <a:defRPr sz="2400">
+                <a:solidFill>
+                  <a:schemeClr val="tx1"/>
+                </a:solidFill>
+                <a:latin typeface="Arial" charset="0"/>
+                <a:ea typeface="ＭＳ Ｐゴシック" charset="-128"/>
+              </a:defRPr>
+            </a:lvl6pPr>
+            <a:lvl7pPr marL="2971800" indent="-228600" eaLnBrk="0" fontAlgn="base" hangingPunct="0">
+              <a:spcBef>
+                <a:spcPct val="0"/>
+              </a:spcBef>
+              <a:spcAft>
+                <a:spcPct val="0"/>
+              </a:spcAft>
+              <a:defRPr sz="2400">
+                <a:solidFill>
+                  <a:schemeClr val="tx1"/>
+                </a:solidFill>
+                <a:latin typeface="Arial" charset="0"/>
+                <a:ea typeface="ＭＳ Ｐゴシック" charset="-128"/>
+              </a:defRPr>
+            </a:lvl7pPr>
+            <a:lvl8pPr marL="3429000" indent="-228600" eaLnBrk="0" fontAlgn="base" hangingPunct="0">
+              <a:spcBef>
+                <a:spcPct val="0"/>
+              </a:spcBef>
+              <a:spcAft>
+                <a:spcPct val="0"/>
+              </a:spcAft>
+              <a:defRPr sz="2400">
+                <a:solidFill>
+                  <a:schemeClr val="tx1"/>
+                </a:solidFill>
+                <a:latin typeface="Arial" charset="0"/>
+                <a:ea typeface="ＭＳ Ｐゴシック" charset="-128"/>
+              </a:defRPr>
+            </a:lvl8pPr>
+            <a:lvl9pPr marL="3886200" indent="-228600" eaLnBrk="0" fontAlgn="base" hangingPunct="0">
+              <a:spcBef>
+                <a:spcPct val="0"/>
+              </a:spcBef>
+              <a:spcAft>
+                <a:spcPct val="0"/>
+              </a:spcAft>
+              <a:defRPr sz="2400">
+                <a:solidFill>
+                  <a:schemeClr val="tx1"/>
+                </a:solidFill>
+                <a:latin typeface="Arial" charset="0"/>
+                <a:ea typeface="ＭＳ Ｐゴシック" charset="-128"/>
+              </a:defRPr>
+            </a:lvl9pPr>
+          </a:lstStyle>
+          <a:p>
+            <a:pPr eaLnBrk="1" hangingPunct="1"/>
+            <a:r>
+              <a:rPr lang="en-US" altLang="x-none" sz="1200">
+                <a:latin typeface="Garamond" charset="0"/>
+              </a:rPr>
+              <a:t>22 October 2016</a:t>
+            </a:r>
+            <a:endParaRPr lang="it-IT" altLang="x-none" sz="1200">
+              <a:latin typeface="Garamond" charset="0"/>
+            </a:endParaRPr>
+          </a:p>
+        </p:txBody>
+      </p:sp>
+      <p:sp>
+        <p:nvSpPr>
+          <p:cNvPr id="26628" name="Footer Placeholder 3"/>
+          <p:cNvSpPr>
+            <a:spLocks noGrp="1"/>
+          </p:cNvSpPr>
+          <p:nvPr>
+            <p:ph type="ftr" sz="quarter" idx="11"/>
+          </p:nvPr>
+        </p:nvSpPr>
+        <p:spPr>
+          <a:noFill/>
+          <a:ln/>
+          <a:extLst>
+            <a:ext uri="{909E8E84-426E-40DD-AFC4-6F175D3DCCD1}">
+              <a14:hiddenFill xmlns:a14="http://schemas.microsoft.com/office/drawing/2010/main">
+                <a:solidFill>
+                  <a:srgbClr val="FFFFFF"/>
+                </a:solidFill>
+              </a14:hiddenFill>
+            </a:ext>
+            <a:ext uri="{91240B29-F687-4F45-9708-019B960494DF}">
+              <a14:hiddenLine xmlns:a14="http://schemas.microsoft.com/office/drawing/2010/main" w="9525">
+                <a:solidFill>
+                  <a:srgbClr val="000000"/>
+                </a:solidFill>
+                <a:miter lim="800000"/>
+                <a:headEnd/>
+                <a:tailEnd/>
+              </a14:hiddenLine>
+            </a:ext>
+          </a:extLst>
+        </p:spPr>
+        <p:txBody>
+          <a:bodyPr/>
+          <a:lstStyle>
+            <a:lvl1pPr eaLnBrk="0" hangingPunct="0">
+              <a:defRPr sz="2400">
+                <a:solidFill>
+                  <a:schemeClr val="tx1"/>
+                </a:solidFill>
+                <a:latin typeface="Arial" charset="0"/>
+                <a:ea typeface="ＭＳ Ｐゴシック" charset="-128"/>
+              </a:defRPr>
+            </a:lvl1pPr>
+            <a:lvl2pPr marL="742950" indent="-285750" eaLnBrk="0" hangingPunct="0">
+              <a:defRPr sz="2400">
+                <a:solidFill>
+                  <a:schemeClr val="tx1"/>
+                </a:solidFill>
+                <a:latin typeface="Arial" charset="0"/>
+                <a:ea typeface="ＭＳ Ｐゴシック" charset="-128"/>
+              </a:defRPr>
+            </a:lvl2pPr>
+            <a:lvl3pPr marL="1143000" indent="-228600" eaLnBrk="0" hangingPunct="0">
+              <a:defRPr sz="2400">
+                <a:solidFill>
+                  <a:schemeClr val="tx1"/>
+                </a:solidFill>
+                <a:latin typeface="Arial" charset="0"/>
+                <a:ea typeface="ＭＳ Ｐゴシック" charset="-128"/>
+              </a:defRPr>
+            </a:lvl3pPr>
+            <a:lvl4pPr marL="1600200" indent="-228600" eaLnBrk="0" hangingPunct="0">
+              <a:defRPr sz="2400">
+                <a:solidFill>
+                  <a:schemeClr val="tx1"/>
+                </a:solidFill>
+                <a:latin typeface="Arial" charset="0"/>
+                <a:ea typeface="ＭＳ Ｐゴシック" charset="-128"/>
+              </a:defRPr>
+            </a:lvl4pPr>
+            <a:lvl5pPr marL="2057400" indent="-228600" eaLnBrk="0" hangingPunct="0">
+              <a:defRPr sz="2400">
+                <a:solidFill>
+                  <a:schemeClr val="tx1"/>
+                </a:solidFill>
+                <a:latin typeface="Arial" charset="0"/>
+                <a:ea typeface="ＭＳ Ｐゴシック" charset="-128"/>
+              </a:defRPr>
+            </a:lvl5pPr>
+            <a:lvl6pPr marL="2514600" indent="-228600" eaLnBrk="0" fontAlgn="base" hangingPunct="0">
+              <a:spcBef>
+                <a:spcPct val="0"/>
+              </a:spcBef>
+              <a:spcAft>
+                <a:spcPct val="0"/>
+              </a:spcAft>
+              <a:defRPr sz="2400">
+                <a:solidFill>
+                  <a:schemeClr val="tx1"/>
+                </a:solidFill>
+                <a:latin typeface="Arial" charset="0"/>
+                <a:ea typeface="ＭＳ Ｐゴシック" charset="-128"/>
+              </a:defRPr>
+            </a:lvl6pPr>
+            <a:lvl7pPr marL="2971800" indent="-228600" eaLnBrk="0" fontAlgn="base" hangingPunct="0">
+              <a:spcBef>
+                <a:spcPct val="0"/>
+              </a:spcBef>
+              <a:spcAft>
+                <a:spcPct val="0"/>
+              </a:spcAft>
+              <a:defRPr sz="2400">
+                <a:solidFill>
+                  <a:schemeClr val="tx1"/>
+                </a:solidFill>
+                <a:latin typeface="Arial" charset="0"/>
+                <a:ea typeface="ＭＳ Ｐゴシック" charset="-128"/>
+              </a:defRPr>
+            </a:lvl7pPr>
+            <a:lvl8pPr marL="3429000" indent="-228600" eaLnBrk="0" fontAlgn="base" hangingPunct="0">
+              <a:spcBef>
+                <a:spcPct val="0"/>
+              </a:spcBef>
+              <a:spcAft>
+                <a:spcPct val="0"/>
+              </a:spcAft>
+              <a:defRPr sz="2400">
+                <a:solidFill>
+                  <a:schemeClr val="tx1"/>
+                </a:solidFill>
+                <a:latin typeface="Arial" charset="0"/>
+                <a:ea typeface="ＭＳ Ｐゴシック" charset="-128"/>
+              </a:defRPr>
+            </a:lvl8pPr>
+            <a:lvl9pPr marL="3886200" indent="-228600" eaLnBrk="0" fontAlgn="base" hangingPunct="0">
+              <a:spcBef>
+                <a:spcPct val="0"/>
+              </a:spcBef>
+              <a:spcAft>
+                <a:spcPct val="0"/>
+              </a:spcAft>
+              <a:defRPr sz="2400">
+                <a:solidFill>
+                  <a:schemeClr val="tx1"/>
+                </a:solidFill>
+                <a:latin typeface="Arial" charset="0"/>
+                <a:ea typeface="ＭＳ Ｐゴシック" charset="-128"/>
+              </a:defRPr>
+            </a:lvl9pPr>
+          </a:lstStyle>
+          <a:p>
+            <a:pPr eaLnBrk="1" hangingPunct="1"/>
+            <a:r>
+              <a:rPr lang="en-US" altLang="x-none" sz="1200">
+                <a:latin typeface="Garamond" charset="0"/>
+              </a:rPr>
+              <a:t>Vincenzo Innocente</a:t>
+            </a:r>
+            <a:endParaRPr lang="it-IT" altLang="x-none" sz="1200">
+              <a:latin typeface="Garamond" charset="0"/>
+            </a:endParaRPr>
+          </a:p>
+        </p:txBody>
+      </p:sp>
+      <p:sp>
+        <p:nvSpPr>
+          <p:cNvPr id="26629" name="Slide Number Placeholder 4"/>
+          <p:cNvSpPr>
+            <a:spLocks noGrp="1"/>
+          </p:cNvSpPr>
+          <p:nvPr>
+            <p:ph type="sldNum" sz="quarter" idx="12"/>
+          </p:nvPr>
+        </p:nvSpPr>
+        <p:spPr>
+          <a:noFill/>
+          <a:ln/>
+          <a:extLst>
+            <a:ext uri="{909E8E84-426E-40DD-AFC4-6F175D3DCCD1}">
+              <a14:hiddenFill xmlns:a14="http://schemas.microsoft.com/office/drawing/2010/main">
+                <a:solidFill>
+                  <a:srgbClr val="FFFFFF"/>
+                </a:solidFill>
+              </a14:hiddenFill>
+            </a:ext>
+            <a:ext uri="{91240B29-F687-4F45-9708-019B960494DF}">
+              <a14:hiddenLine xmlns:a14="http://schemas.microsoft.com/office/drawing/2010/main" w="9525">
+                <a:solidFill>
+                  <a:srgbClr val="000000"/>
+                </a:solidFill>
+                <a:miter lim="800000"/>
+                <a:headEnd/>
+                <a:tailEnd/>
+              </a14:hiddenLine>
+            </a:ext>
+          </a:extLst>
+        </p:spPr>
+        <p:txBody>
+          <a:bodyPr/>
+          <a:lstStyle>
+            <a:lvl1pPr eaLnBrk="0" hangingPunct="0">
+              <a:defRPr sz="2400">
+                <a:solidFill>
+                  <a:schemeClr val="tx1"/>
+                </a:solidFill>
+                <a:latin typeface="Arial" charset="0"/>
+                <a:ea typeface="ＭＳ Ｐゴシック" charset="-128"/>
+              </a:defRPr>
+            </a:lvl1pPr>
+            <a:lvl2pPr marL="742950" indent="-285750" eaLnBrk="0" hangingPunct="0">
+              <a:defRPr sz="2400">
+                <a:solidFill>
+                  <a:schemeClr val="tx1"/>
+                </a:solidFill>
+                <a:latin typeface="Arial" charset="0"/>
+                <a:ea typeface="ＭＳ Ｐゴシック" charset="-128"/>
+              </a:defRPr>
+            </a:lvl2pPr>
+            <a:lvl3pPr marL="1143000" indent="-228600" eaLnBrk="0" hangingPunct="0">
+              <a:defRPr sz="2400">
+                <a:solidFill>
+                  <a:schemeClr val="tx1"/>
+                </a:solidFill>
+                <a:latin typeface="Arial" charset="0"/>
+                <a:ea typeface="ＭＳ Ｐゴシック" charset="-128"/>
+              </a:defRPr>
+            </a:lvl3pPr>
+            <a:lvl4pPr marL="1600200" indent="-228600" eaLnBrk="0" hangingPunct="0">
+              <a:defRPr sz="2400">
+                <a:solidFill>
+                  <a:schemeClr val="tx1"/>
+                </a:solidFill>
+                <a:latin typeface="Arial" charset="0"/>
+                <a:ea typeface="ＭＳ Ｐゴシック" charset="-128"/>
+              </a:defRPr>
+            </a:lvl4pPr>
+            <a:lvl5pPr marL="2057400" indent="-228600" eaLnBrk="0" hangingPunct="0">
+              <a:defRPr sz="2400">
+                <a:solidFill>
+                  <a:schemeClr val="tx1"/>
+                </a:solidFill>
+                <a:latin typeface="Arial" charset="0"/>
+                <a:ea typeface="ＭＳ Ｐゴシック" charset="-128"/>
+              </a:defRPr>
+            </a:lvl5pPr>
+            <a:lvl6pPr marL="2514600" indent="-228600" eaLnBrk="0" fontAlgn="base" hangingPunct="0">
+              <a:spcBef>
+                <a:spcPct val="0"/>
+              </a:spcBef>
+              <a:spcAft>
+                <a:spcPct val="0"/>
+              </a:spcAft>
+              <a:defRPr sz="2400">
+                <a:solidFill>
+                  <a:schemeClr val="tx1"/>
+                </a:solidFill>
+                <a:latin typeface="Arial" charset="0"/>
+                <a:ea typeface="ＭＳ Ｐゴシック" charset="-128"/>
+              </a:defRPr>
+            </a:lvl6pPr>
+            <a:lvl7pPr marL="2971800" indent="-228600" eaLnBrk="0" fontAlgn="base" hangingPunct="0">
+              <a:spcBef>
+                <a:spcPct val="0"/>
+              </a:spcBef>
+              <a:spcAft>
+                <a:spcPct val="0"/>
+              </a:spcAft>
+              <a:defRPr sz="2400">
+                <a:solidFill>
+                  <a:schemeClr val="tx1"/>
+                </a:solidFill>
+                <a:latin typeface="Arial" charset="0"/>
+                <a:ea typeface="ＭＳ Ｐゴシック" charset="-128"/>
+              </a:defRPr>
+            </a:lvl7pPr>
+            <a:lvl8pPr marL="3429000" indent="-228600" eaLnBrk="0" fontAlgn="base" hangingPunct="0">
+              <a:spcBef>
+                <a:spcPct val="0"/>
+              </a:spcBef>
+              <a:spcAft>
+                <a:spcPct val="0"/>
+              </a:spcAft>
+              <a:defRPr sz="2400">
+                <a:solidFill>
+                  <a:schemeClr val="tx1"/>
+                </a:solidFill>
+                <a:latin typeface="Arial" charset="0"/>
+                <a:ea typeface="ＭＳ Ｐゴシック" charset="-128"/>
+              </a:defRPr>
+            </a:lvl8pPr>
+            <a:lvl9pPr marL="3886200" indent="-228600" eaLnBrk="0" fontAlgn="base" hangingPunct="0">
+              <a:spcBef>
+                <a:spcPct val="0"/>
+              </a:spcBef>
+              <a:spcAft>
+                <a:spcPct val="0"/>
+              </a:spcAft>
+              <a:defRPr sz="2400">
+                <a:solidFill>
+                  <a:schemeClr val="tx1"/>
+                </a:solidFill>
+                <a:latin typeface="Arial" charset="0"/>
+                <a:ea typeface="ＭＳ Ｐゴシック" charset="-128"/>
+              </a:defRPr>
+            </a:lvl9pPr>
+          </a:lstStyle>
+          <a:p>
+            <a:pPr eaLnBrk="1" hangingPunct="1"/>
+            <a:fld id="{7A44000F-1B7D-CC46-A072-D0868C9398B7}" type="slidenum">
+              <a:rPr lang="it-IT" altLang="x-none" sz="1200">
+                <a:latin typeface="Garamond" charset="0"/>
+              </a:rPr>
+              <a:pPr eaLnBrk="1" hangingPunct="1"/>
+              <a:t>10</a:t>
+            </a:fld>
+            <a:endParaRPr lang="it-IT" altLang="x-none" sz="1200">
+              <a:latin typeface="Garamond" charset="0"/>
+            </a:endParaRPr>
+          </a:p>
+        </p:txBody>
+      </p:sp>
+      <p:sp>
+        <p:nvSpPr>
+          <p:cNvPr id="26630" name="TextBox 5"/>
+          <p:cNvSpPr txBox="1">
+            <a:spLocks noChangeArrowheads="1"/>
+          </p:cNvSpPr>
+          <p:nvPr/>
+        </p:nvSpPr>
+        <p:spPr bwMode="auto">
+          <a:xfrm>
+            <a:off x="951883" y="3224289"/>
+            <a:ext cx="8713787" cy="3046988"/>
+          </a:xfrm>
+          <a:prstGeom prst="rect">
+            <a:avLst/>
+          </a:prstGeom>
+          <a:solidFill>
+            <a:srgbClr val="FFFF00">
+              <a:alpha val="74117"/>
+            </a:srgbClr>
+          </a:solidFill>
+          <a:ln>
+            <a:noFill/>
+          </a:ln>
+          <a:extLst>
+            <a:ext uri="{91240B29-F687-4F45-9708-019B960494DF}">
+              <a14:hiddenLine xmlns:a14="http://schemas.microsoft.com/office/drawing/2010/main" w="9525">
+                <a:solidFill>
+                  <a:srgbClr val="000000"/>
+                </a:solidFill>
+                <a:miter lim="800000"/>
+                <a:headEnd/>
+                <a:tailEnd/>
+              </a14:hiddenLine>
+            </a:ext>
+          </a:extLst>
+        </p:spPr>
+        <p:txBody>
+          <a:bodyPr>
+            <a:spAutoFit/>
+          </a:bodyPr>
+          <a:lstStyle>
+            <a:lvl1pPr eaLnBrk="0" hangingPunct="0">
+              <a:defRPr sz="2400">
+                <a:solidFill>
+                  <a:schemeClr val="tx1"/>
+                </a:solidFill>
+                <a:latin typeface="Arial" charset="0"/>
+                <a:ea typeface="ＭＳ Ｐゴシック" charset="-128"/>
+              </a:defRPr>
+            </a:lvl1pPr>
+            <a:lvl2pPr marL="742950" indent="-285750" eaLnBrk="0" hangingPunct="0">
+              <a:defRPr sz="2400">
+                <a:solidFill>
+                  <a:schemeClr val="tx1"/>
+                </a:solidFill>
+                <a:latin typeface="Arial" charset="0"/>
+                <a:ea typeface="ＭＳ Ｐゴシック" charset="-128"/>
+              </a:defRPr>
+            </a:lvl2pPr>
+            <a:lvl3pPr marL="1143000" indent="-228600" eaLnBrk="0" hangingPunct="0">
+              <a:defRPr sz="2400">
+                <a:solidFill>
+                  <a:schemeClr val="tx1"/>
+                </a:solidFill>
+                <a:latin typeface="Arial" charset="0"/>
+                <a:ea typeface="ＭＳ Ｐゴシック" charset="-128"/>
+              </a:defRPr>
+            </a:lvl3pPr>
+            <a:lvl4pPr marL="1600200" indent="-228600" eaLnBrk="0" hangingPunct="0">
+              <a:defRPr sz="2400">
+                <a:solidFill>
+                  <a:schemeClr val="tx1"/>
+                </a:solidFill>
+                <a:latin typeface="Arial" charset="0"/>
+                <a:ea typeface="ＭＳ Ｐゴシック" charset="-128"/>
+              </a:defRPr>
+            </a:lvl4pPr>
+            <a:lvl5pPr marL="2057400" indent="-228600" eaLnBrk="0" hangingPunct="0">
+              <a:defRPr sz="2400">
+                <a:solidFill>
+                  <a:schemeClr val="tx1"/>
+                </a:solidFill>
+                <a:latin typeface="Arial" charset="0"/>
+                <a:ea typeface="ＭＳ Ｐゴシック" charset="-128"/>
+              </a:defRPr>
+            </a:lvl5pPr>
+            <a:lvl6pPr marL="2514600" indent="-228600" eaLnBrk="0" fontAlgn="base" hangingPunct="0">
+              <a:spcBef>
+                <a:spcPct val="0"/>
+              </a:spcBef>
+              <a:spcAft>
+                <a:spcPct val="0"/>
+              </a:spcAft>
+              <a:defRPr sz="2400">
+                <a:solidFill>
+                  <a:schemeClr val="tx1"/>
+                </a:solidFill>
+                <a:latin typeface="Arial" charset="0"/>
+                <a:ea typeface="ＭＳ Ｐゴシック" charset="-128"/>
+              </a:defRPr>
+            </a:lvl6pPr>
+            <a:lvl7pPr marL="2971800" indent="-228600" eaLnBrk="0" fontAlgn="base" hangingPunct="0">
+              <a:spcBef>
+                <a:spcPct val="0"/>
+              </a:spcBef>
+              <a:spcAft>
+                <a:spcPct val="0"/>
+              </a:spcAft>
+              <a:defRPr sz="2400">
+                <a:solidFill>
+                  <a:schemeClr val="tx1"/>
+                </a:solidFill>
+                <a:latin typeface="Arial" charset="0"/>
+                <a:ea typeface="ＭＳ Ｐゴシック" charset="-128"/>
+              </a:defRPr>
+            </a:lvl7pPr>
+            <a:lvl8pPr marL="3429000" indent="-228600" eaLnBrk="0" fontAlgn="base" hangingPunct="0">
+              <a:spcBef>
+                <a:spcPct val="0"/>
+              </a:spcBef>
+              <a:spcAft>
+                <a:spcPct val="0"/>
+              </a:spcAft>
+              <a:defRPr sz="2400">
+                <a:solidFill>
+                  <a:schemeClr val="tx1"/>
+                </a:solidFill>
+                <a:latin typeface="Arial" charset="0"/>
+                <a:ea typeface="ＭＳ Ｐゴシック" charset="-128"/>
+              </a:defRPr>
+            </a:lvl8pPr>
+            <a:lvl9pPr marL="3886200" indent="-228600" eaLnBrk="0" fontAlgn="base" hangingPunct="0">
+              <a:spcBef>
+                <a:spcPct val="0"/>
+              </a:spcBef>
+              <a:spcAft>
+                <a:spcPct val="0"/>
+              </a:spcAft>
+              <a:defRPr sz="2400">
+                <a:solidFill>
+                  <a:schemeClr val="tx1"/>
+                </a:solidFill>
+                <a:latin typeface="Arial" charset="0"/>
+                <a:ea typeface="ＭＳ Ｐゴシック" charset="-128"/>
+              </a:defRPr>
+            </a:lvl9pPr>
+          </a:lstStyle>
+          <a:p>
+            <a:r>
+              <a:rPr lang="en-US" altLang="x-none" sz="1600" dirty="0"/>
+              <a:t>#include &lt;</a:t>
+            </a:r>
+            <a:r>
+              <a:rPr lang="en-US" altLang="x-none" sz="1600" dirty="0" err="1"/>
+              <a:t>iostream</a:t>
+            </a:r>
+            <a:r>
+              <a:rPr lang="en-US" altLang="x-none" sz="1600" dirty="0"/>
+              <a:t>&gt;     // </a:t>
+            </a:r>
+            <a:r>
+              <a:rPr lang="en-US" altLang="x-none" sz="1600" dirty="0" err="1"/>
+              <a:t>std</a:t>
+            </a:r>
+            <a:r>
+              <a:rPr lang="en-US" altLang="x-none" sz="1600" dirty="0"/>
+              <a:t>::</a:t>
+            </a:r>
+            <a:r>
+              <a:rPr lang="en-US" altLang="x-none" sz="1600" dirty="0" err="1"/>
+              <a:t>cout</a:t>
+            </a:r>
+            <a:endParaRPr lang="en-US" altLang="x-none" sz="1600" dirty="0"/>
+          </a:p>
+          <a:p>
+            <a:r>
+              <a:rPr lang="en-US" altLang="x-none" sz="1600" dirty="0"/>
+              <a:t>#include &lt;limits&gt;       // </a:t>
+            </a:r>
+            <a:r>
+              <a:rPr lang="en-US" altLang="x-none" sz="1600" dirty="0" err="1"/>
+              <a:t>std</a:t>
+            </a:r>
+            <a:r>
+              <a:rPr lang="en-US" altLang="x-none" sz="1600" dirty="0"/>
+              <a:t>::</a:t>
+            </a:r>
+            <a:r>
+              <a:rPr lang="en-US" altLang="x-none" sz="1600" dirty="0" err="1"/>
+              <a:t>numeric_limits</a:t>
+            </a:r>
+            <a:endParaRPr lang="en-US" altLang="x-none" sz="1600" dirty="0"/>
+          </a:p>
+          <a:p>
+            <a:r>
+              <a:rPr lang="fr-FR" altLang="x-none" sz="1600" dirty="0" err="1"/>
+              <a:t>int</a:t>
+            </a:r>
+            <a:r>
+              <a:rPr lang="fr-FR" altLang="x-none" sz="1600" dirty="0"/>
+              <a:t> main () {</a:t>
+            </a:r>
+          </a:p>
+          <a:p>
+            <a:r>
+              <a:rPr lang="fr-FR" altLang="x-none" sz="1600" dirty="0"/>
+              <a:t>  </a:t>
+            </a:r>
+            <a:r>
+              <a:rPr lang="fr-FR" altLang="x-none" sz="1600" dirty="0" err="1"/>
+              <a:t>std</a:t>
+            </a:r>
+            <a:r>
+              <a:rPr lang="fr-FR" altLang="x-none" sz="1600" dirty="0"/>
+              <a:t>::cout &lt;&lt; </a:t>
+            </a:r>
+            <a:r>
+              <a:rPr lang="fr-FR" altLang="x-none" sz="1600" dirty="0" err="1"/>
+              <a:t>std</a:t>
+            </a:r>
+            <a:r>
+              <a:rPr lang="fr-FR" altLang="x-none" sz="1600" dirty="0"/>
+              <a:t>::</a:t>
+            </a:r>
+            <a:r>
+              <a:rPr lang="fr-FR" altLang="x-none" sz="1600" dirty="0" err="1"/>
+              <a:t>boolalpha</a:t>
+            </a:r>
+            <a:r>
+              <a:rPr lang="fr-FR" altLang="x-none" sz="1600" dirty="0"/>
+              <a:t>;</a:t>
+            </a:r>
+          </a:p>
+          <a:p>
+            <a:r>
+              <a:rPr lang="fr-FR" altLang="x-none" sz="1600" dirty="0"/>
+              <a:t>  </a:t>
+            </a:r>
+            <a:r>
+              <a:rPr lang="fr-FR" altLang="x-none" sz="1600" dirty="0" err="1"/>
+              <a:t>std</a:t>
+            </a:r>
+            <a:r>
+              <a:rPr lang="fr-FR" altLang="x-none" sz="1600" dirty="0"/>
+              <a:t>::cout &lt;&lt; "Minimum value: " &lt;&lt; </a:t>
+            </a:r>
+            <a:r>
+              <a:rPr lang="fr-FR" altLang="x-none" sz="1600" dirty="0" err="1"/>
+              <a:t>std</a:t>
+            </a:r>
+            <a:r>
+              <a:rPr lang="fr-FR" altLang="x-none" sz="1600" dirty="0"/>
+              <a:t>::</a:t>
+            </a:r>
+            <a:r>
+              <a:rPr lang="fr-FR" altLang="x-none" sz="1600" dirty="0" err="1"/>
+              <a:t>numeric_limits</a:t>
+            </a:r>
+            <a:r>
+              <a:rPr lang="fr-FR" altLang="x-none" sz="1600" dirty="0"/>
+              <a:t>&lt;</a:t>
+            </a:r>
+            <a:r>
+              <a:rPr lang="fr-FR" altLang="x-none" sz="1600" dirty="0" err="1"/>
+              <a:t>float</a:t>
+            </a:r>
+            <a:r>
+              <a:rPr lang="fr-FR" altLang="x-none" sz="1600" dirty="0"/>
+              <a:t>&gt;::min() &lt;&lt; '\n';</a:t>
+            </a:r>
+          </a:p>
+          <a:p>
+            <a:r>
+              <a:rPr lang="fr-FR" altLang="x-none" sz="1600" dirty="0"/>
+              <a:t>  </a:t>
+            </a:r>
+            <a:r>
+              <a:rPr lang="fr-FR" altLang="x-none" sz="1600" dirty="0" err="1"/>
+              <a:t>std</a:t>
+            </a:r>
+            <a:r>
+              <a:rPr lang="fr-FR" altLang="x-none" sz="1600" dirty="0"/>
+              <a:t>::cout &lt;&lt; "Maximum value: " &lt;&lt; </a:t>
+            </a:r>
+            <a:r>
+              <a:rPr lang="fr-FR" altLang="x-none" sz="1600" dirty="0" err="1"/>
+              <a:t>std</a:t>
+            </a:r>
+            <a:r>
+              <a:rPr lang="fr-FR" altLang="x-none" sz="1600" dirty="0"/>
+              <a:t>::</a:t>
+            </a:r>
+            <a:r>
+              <a:rPr lang="fr-FR" altLang="x-none" sz="1600" dirty="0" err="1"/>
+              <a:t>numeric_limits</a:t>
+            </a:r>
+            <a:r>
+              <a:rPr lang="fr-FR" altLang="x-none" sz="1600" dirty="0"/>
+              <a:t>&lt;</a:t>
+            </a:r>
+            <a:r>
+              <a:rPr lang="fr-FR" altLang="x-none" sz="1600" dirty="0" err="1"/>
+              <a:t>float</a:t>
+            </a:r>
+            <a:r>
+              <a:rPr lang="fr-FR" altLang="x-none" sz="1600" dirty="0"/>
+              <a:t>&gt;::max() &lt;&lt; '\n';</a:t>
+            </a:r>
+          </a:p>
+          <a:p>
+            <a:r>
+              <a:rPr lang="fr-FR" altLang="x-none" sz="1600" dirty="0"/>
+              <a:t>  </a:t>
+            </a:r>
+            <a:r>
+              <a:rPr lang="fr-FR" altLang="x-none" sz="1600" dirty="0" err="1"/>
+              <a:t>std</a:t>
+            </a:r>
+            <a:r>
+              <a:rPr lang="fr-FR" altLang="x-none" sz="1600" dirty="0"/>
+              <a:t>::cout &lt;&lt; "Is </a:t>
+            </a:r>
+            <a:r>
+              <a:rPr lang="fr-FR" altLang="x-none" sz="1600" dirty="0" err="1"/>
+              <a:t>signed</a:t>
+            </a:r>
+            <a:r>
+              <a:rPr lang="fr-FR" altLang="x-none" sz="1600" dirty="0"/>
+              <a:t>: " &lt;&lt; </a:t>
+            </a:r>
+            <a:r>
+              <a:rPr lang="fr-FR" altLang="x-none" sz="1600" dirty="0" err="1"/>
+              <a:t>std</a:t>
+            </a:r>
+            <a:r>
+              <a:rPr lang="fr-FR" altLang="x-none" sz="1600" dirty="0"/>
+              <a:t>::</a:t>
+            </a:r>
+            <a:r>
+              <a:rPr lang="fr-FR" altLang="x-none" sz="1600" dirty="0" err="1"/>
+              <a:t>numeric_limits</a:t>
+            </a:r>
+            <a:r>
+              <a:rPr lang="fr-FR" altLang="x-none" sz="1600" dirty="0"/>
+              <a:t>&lt;</a:t>
+            </a:r>
+            <a:r>
+              <a:rPr lang="fr-FR" altLang="x-none" sz="1600" dirty="0" err="1"/>
+              <a:t>float</a:t>
+            </a:r>
+            <a:r>
+              <a:rPr lang="fr-FR" altLang="x-none" sz="1600" dirty="0"/>
+              <a:t>&gt;::</a:t>
+            </a:r>
+            <a:r>
+              <a:rPr lang="fr-FR" altLang="x-none" sz="1600" dirty="0" err="1"/>
+              <a:t>is_signed</a:t>
+            </a:r>
+            <a:r>
+              <a:rPr lang="fr-FR" altLang="x-none" sz="1600" dirty="0"/>
+              <a:t> &lt;&lt; '\n';</a:t>
+            </a:r>
+          </a:p>
+          <a:p>
+            <a:r>
+              <a:rPr lang="fr-FR" altLang="x-none" sz="1600" dirty="0"/>
+              <a:t>  </a:t>
+            </a:r>
+            <a:r>
+              <a:rPr lang="fr-FR" altLang="x-none" sz="1600" dirty="0" err="1"/>
+              <a:t>std</a:t>
+            </a:r>
+            <a:r>
+              <a:rPr lang="fr-FR" altLang="x-none" sz="1600" dirty="0"/>
+              <a:t>::cout &lt;&lt; "</a:t>
+            </a:r>
+            <a:r>
+              <a:rPr lang="fr-FR" altLang="x-none" sz="1600" dirty="0" err="1"/>
+              <a:t>significand</a:t>
+            </a:r>
+            <a:r>
+              <a:rPr lang="fr-FR" altLang="x-none" sz="1600" dirty="0"/>
+              <a:t> bits: " &lt;&lt; </a:t>
+            </a:r>
+            <a:r>
+              <a:rPr lang="fr-FR" altLang="x-none" sz="1600" dirty="0" err="1"/>
+              <a:t>std</a:t>
+            </a:r>
+            <a:r>
+              <a:rPr lang="fr-FR" altLang="x-none" sz="1600" dirty="0"/>
+              <a:t>::</a:t>
+            </a:r>
+            <a:r>
+              <a:rPr lang="fr-FR" altLang="x-none" sz="1600" dirty="0" err="1"/>
+              <a:t>numeric_limits</a:t>
+            </a:r>
+            <a:r>
+              <a:rPr lang="fr-FR" altLang="x-none" sz="1600" dirty="0"/>
+              <a:t>&lt;</a:t>
+            </a:r>
+            <a:r>
+              <a:rPr lang="fr-FR" altLang="x-none" sz="1600" dirty="0" err="1"/>
+              <a:t>float</a:t>
+            </a:r>
+            <a:r>
+              <a:rPr lang="fr-FR" altLang="x-none" sz="1600" dirty="0"/>
+              <a:t>&gt;::digits &lt;&lt; '\n';</a:t>
+            </a:r>
+          </a:p>
+          <a:p>
+            <a:r>
+              <a:rPr lang="fr-FR" altLang="x-none" sz="1600" dirty="0"/>
+              <a:t>  </a:t>
+            </a:r>
+            <a:r>
+              <a:rPr lang="fr-FR" altLang="x-none" sz="1600" dirty="0" err="1"/>
+              <a:t>std</a:t>
+            </a:r>
+            <a:r>
+              <a:rPr lang="fr-FR" altLang="x-none" sz="1600" dirty="0"/>
+              <a:t>::cout &lt;&lt; "</a:t>
+            </a:r>
+            <a:r>
+              <a:rPr lang="fr-FR" altLang="x-none" sz="1600" dirty="0" err="1"/>
+              <a:t>precision</a:t>
+            </a:r>
+            <a:r>
+              <a:rPr lang="fr-FR" altLang="x-none" sz="1600" dirty="0"/>
+              <a:t>: " &lt;&lt; </a:t>
+            </a:r>
+            <a:r>
+              <a:rPr lang="fr-FR" altLang="x-none" sz="1600" dirty="0" err="1"/>
+              <a:t>std</a:t>
+            </a:r>
+            <a:r>
+              <a:rPr lang="fr-FR" altLang="x-none" sz="1600" dirty="0"/>
+              <a:t>::</a:t>
+            </a:r>
+            <a:r>
+              <a:rPr lang="fr-FR" altLang="x-none" sz="1600" dirty="0" err="1"/>
+              <a:t>numeric_limits</a:t>
+            </a:r>
+            <a:r>
+              <a:rPr lang="fr-FR" altLang="x-none" sz="1600" dirty="0"/>
+              <a:t>&lt;</a:t>
+            </a:r>
+            <a:r>
+              <a:rPr lang="fr-FR" altLang="x-none" sz="1600" dirty="0" err="1"/>
+              <a:t>float</a:t>
+            </a:r>
+            <a:r>
+              <a:rPr lang="fr-FR" altLang="x-none" sz="1600" dirty="0"/>
+              <a:t>&gt;::epsilon() &lt;&lt; '\n';</a:t>
+            </a:r>
+          </a:p>
+          <a:p>
+            <a:r>
+              <a:rPr lang="fr-FR" altLang="x-none" sz="1600" dirty="0"/>
+              <a:t>  </a:t>
+            </a:r>
+            <a:r>
+              <a:rPr lang="fr-FR" altLang="x-none" sz="1600" dirty="0" err="1"/>
+              <a:t>std</a:t>
+            </a:r>
+            <a:r>
+              <a:rPr lang="fr-FR" altLang="x-none" sz="1600" dirty="0"/>
+              <a:t>::cout &lt;&lt; "has </a:t>
+            </a:r>
+            <a:r>
+              <a:rPr lang="fr-FR" altLang="x-none" sz="1600" dirty="0" err="1"/>
+              <a:t>infinity</a:t>
+            </a:r>
+            <a:r>
+              <a:rPr lang="fr-FR" altLang="x-none" sz="1600" dirty="0"/>
+              <a:t>: " &lt;&lt; </a:t>
+            </a:r>
+            <a:r>
+              <a:rPr lang="fr-FR" altLang="x-none" sz="1600" dirty="0" err="1"/>
+              <a:t>std</a:t>
+            </a:r>
+            <a:r>
+              <a:rPr lang="fr-FR" altLang="x-none" sz="1600" dirty="0"/>
+              <a:t>::</a:t>
+            </a:r>
+            <a:r>
+              <a:rPr lang="fr-FR" altLang="x-none" sz="1600" dirty="0" err="1"/>
+              <a:t>numeric_limits</a:t>
+            </a:r>
+            <a:r>
+              <a:rPr lang="fr-FR" altLang="x-none" sz="1600" dirty="0"/>
+              <a:t>&lt;</a:t>
+            </a:r>
+            <a:r>
+              <a:rPr lang="fr-FR" altLang="x-none" sz="1600" dirty="0" err="1"/>
+              <a:t>float</a:t>
+            </a:r>
+            <a:r>
+              <a:rPr lang="fr-FR" altLang="x-none" sz="1600" dirty="0"/>
+              <a:t>&gt;::</a:t>
+            </a:r>
+            <a:r>
+              <a:rPr lang="fr-FR" altLang="x-none" sz="1600" dirty="0" err="1"/>
+              <a:t>has_infinity</a:t>
+            </a:r>
+            <a:r>
+              <a:rPr lang="fr-FR" altLang="x-none" sz="1600" dirty="0"/>
+              <a:t> &lt;&lt; '\n';</a:t>
+            </a:r>
+          </a:p>
+          <a:p>
+            <a:r>
+              <a:rPr lang="is-IS" altLang="x-none" sz="1600" dirty="0"/>
+              <a:t>  return 0;</a:t>
+            </a:r>
+          </a:p>
+          <a:p>
+            <a:r>
+              <a:rPr lang="is-IS" altLang="x-none" sz="1600" dirty="0"/>
+              <a:t>}</a:t>
+            </a:r>
+            <a:endParaRPr lang="es-ES_tradnl" altLang="x-none" sz="1600" dirty="0"/>
+          </a:p>
+        </p:txBody>
+      </p:sp>
+    </p:spTree>
+  </p:cSld>
+  <p:clrMapOvr>
+    <a:masterClrMapping/>
+  </p:clrMapOvr>
+</p:sld>
+</file>
+
+<file path=ppt/slides/slide11.xml><?xml version="1.0" encoding="utf-8"?>
+<p:sld xmlns:a="http://schemas.openxmlformats.org/drawingml/2006/main" xmlns:r="http://schemas.openxmlformats.org/officeDocument/2006/relationships" xmlns:p="http://schemas.openxmlformats.org/presentationml/2006/main">
+  <p:cSld>
+    <p:spTree>
+      <p:nvGrpSpPr>
+        <p:cNvPr id="1" name=""/>
+        <p:cNvGrpSpPr/>
+        <p:nvPr/>
+      </p:nvGrpSpPr>
+      <p:grpSpPr>
+        <a:xfrm>
+          <a:off x="0" y="0"/>
+          <a:ext cx="0" cy="0"/>
+          <a:chOff x="0" y="0"/>
+          <a:chExt cx="0" cy="0"/>
+        </a:xfrm>
+      </p:grpSpPr>
+      <p:sp>
+        <p:nvSpPr>
           <p:cNvPr id="2" name="Title 1">
             <a:extLst>
               <a:ext uri="{FF2B5EF4-FFF2-40B4-BE49-F238E27FC236}">
@@ -3831,7 +4949,7 @@
 </p:sld>
 </file>
 
-<file path=ppt/slides/slide11.xml><?xml version="1.0" encoding="utf-8"?>
+<file path=ppt/slides/slide12.xml><?xml version="1.0" encoding="utf-8"?>
 <p:sld xmlns:a="http://schemas.openxmlformats.org/drawingml/2006/main" xmlns:r="http://schemas.openxmlformats.org/officeDocument/2006/relationships" xmlns:p="http://schemas.openxmlformats.org/presentationml/2006/main">
   <p:cSld>
     <p:spTree>
@@ -3984,7 +5102,7 @@
 </p:sld>
 </file>
 
-<file path=ppt/slides/slide12.xml><?xml version="1.0" encoding="utf-8"?>
+<file path=ppt/slides/slide13.xml><?xml version="1.0" encoding="utf-8"?>
 <p:sld xmlns:a="http://schemas.openxmlformats.org/drawingml/2006/main" xmlns:r="http://schemas.openxmlformats.org/officeDocument/2006/relationships" xmlns:p="http://schemas.openxmlformats.org/presentationml/2006/main">
   <p:cSld>
     <p:spTree>
@@ -4143,7 +5261,7 @@
 </p:sld>
 </file>
 
-<file path=ppt/slides/slide13.xml><?xml version="1.0" encoding="utf-8"?>
+<file path=ppt/slides/slide14.xml><?xml version="1.0" encoding="utf-8"?>
 <p:sld xmlns:a="http://schemas.openxmlformats.org/drawingml/2006/main" xmlns:r="http://schemas.openxmlformats.org/officeDocument/2006/relationships" xmlns:p="http://schemas.openxmlformats.org/presentationml/2006/main">
   <p:cSld>
     <p:spTree>
@@ -4280,7 +5398,7 @@
 </p:sld>
 </file>
 
-<file path=ppt/slides/slide14.xml><?xml version="1.0" encoding="utf-8"?>
+<file path=ppt/slides/slide15.xml><?xml version="1.0" encoding="utf-8"?>
 <p:sld xmlns:a="http://schemas.openxmlformats.org/drawingml/2006/main" xmlns:r="http://schemas.openxmlformats.org/officeDocument/2006/relationships" xmlns:p="http://schemas.openxmlformats.org/presentationml/2006/main">
   <p:cSld>
     <p:spTree>
@@ -4444,7 +5562,7 @@
             </a:br>
             <a:r>
               <a:rPr lang="en-US" dirty="0"/>
-              <a:t>42⊕3.3⊕3.3 = … , 3.3⊕3.3⊕42 = … </a:t>
+              <a:t>42⊕3.3⊕3.4 = … , 3.4⊕3.3⊕42 = … </a:t>
             </a:r>
           </a:p>
           <a:p>
@@ -4471,7 +5589,7 @@
 </p:sld>
 </file>
 
-<file path=ppt/slides/slide15.xml><?xml version="1.0" encoding="utf-8"?>
+<file path=ppt/slides/slide16.xml><?xml version="1.0" encoding="utf-8"?>
 <p:sld xmlns:a="http://schemas.openxmlformats.org/drawingml/2006/main" xmlns:r="http://schemas.openxmlformats.org/officeDocument/2006/relationships" xmlns:p="http://schemas.openxmlformats.org/presentationml/2006/main">
   <p:cSld>
     <p:spTree>
@@ -4570,7 +5688,7 @@
           <a:p>
             <a:r>
               <a:rPr lang="en-US" dirty="0"/>
-              <a:t>If a&gt;b&gt;a/2&gt;0 then </a:t>
+              <a:t>If 2b&gt;a&gt;b/2&gt;0 then </a:t>
             </a:r>
             <a:r>
               <a:rPr lang="en-US" dirty="0" err="1"/>
@@ -4580,6 +5698,23 @@
               <a:rPr lang="en-US" dirty="0"/>
               <a:t> = a-b (is precise)</a:t>
             </a:r>
+            <a:br>
+              <a:rPr lang="en-US" dirty="0"/>
+            </a:br>
+            <a:r>
+              <a:rPr lang="en-US" dirty="0"/>
+              <a:t>(</a:t>
+            </a:r>
+            <a:r>
+              <a:rPr lang="en-US" dirty="0">
+                <a:hlinkClick r:id="rId2"/>
+              </a:rPr>
+              <a:t>https://en.wikipedia.org/wiki/Sterbenz_lemma</a:t>
+            </a:r>
+            <a:r>
+              <a:rPr lang="en-US" dirty="0"/>
+              <a:t>)</a:t>
+            </a:r>
           </a:p>
           <a:p>
             <a:pPr lvl="1"/>
@@ -4598,18 +5733,9 @@
           <a:p>
             <a:pPr lvl="1"/>
             <a:r>
-              <a:rPr lang="en-US"/>
-              <a:t>0x1.333334p-2 </a:t>
-            </a:r>
-            <a:r>
               <a:rPr lang="en-US" dirty="0"/>
-              <a:t>⊖ 0x1.99999ap-4 = 0x1.99999cp-3 (</a:t>
-            </a:r>
-            <a:r>
-              <a:rPr lang="en-US"/>
-              <a:t>not precise)</a:t>
-            </a:r>
-            <a:endParaRPr lang="en-US" dirty="0"/>
+              <a:t>0x1.333334p-2 ⊖ 0x1.99999ap-4 = 0x1.99999cp-3 (not precise)</a:t>
+            </a:r>
           </a:p>
         </p:txBody>
       </p:sp>
@@ -4617,6 +5743,506 @@
     <p:extLst>
       <p:ext uri="{BB962C8B-B14F-4D97-AF65-F5344CB8AC3E}">
         <p14:creationId xmlns:p14="http://schemas.microsoft.com/office/powerpoint/2010/main" val="4058227503"/>
+      </p:ext>
+    </p:extLst>
+  </p:cSld>
+  <p:clrMapOvr>
+    <a:masterClrMapping/>
+  </p:clrMapOvr>
+</p:sld>
+</file>
+
+<file path=ppt/slides/slide17.xml><?xml version="1.0" encoding="utf-8"?>
+<p:sld xmlns:a="http://schemas.openxmlformats.org/drawingml/2006/main" xmlns:r="http://schemas.openxmlformats.org/officeDocument/2006/relationships" xmlns:p="http://schemas.openxmlformats.org/presentationml/2006/main">
+  <p:cSld>
+    <p:spTree>
+      <p:nvGrpSpPr>
+        <p:cNvPr id="1" name=""/>
+        <p:cNvGrpSpPr/>
+        <p:nvPr/>
+      </p:nvGrpSpPr>
+      <p:grpSpPr>
+        <a:xfrm>
+          <a:off x="0" y="0"/>
+          <a:ext cx="0" cy="0"/>
+          <a:chOff x="0" y="0"/>
+          <a:chExt cx="0" cy="0"/>
+        </a:xfrm>
+      </p:grpSpPr>
+      <p:sp>
+        <p:nvSpPr>
+          <p:cNvPr id="2" name="Title 1">
+            <a:extLst>
+              <a:ext uri="{FF2B5EF4-FFF2-40B4-BE49-F238E27FC236}">
+                <a16:creationId xmlns:a16="http://schemas.microsoft.com/office/drawing/2014/main" id="{F07EE935-6904-8630-3A5E-C062BD088ED9}"/>
+              </a:ext>
+            </a:extLst>
+          </p:cNvPr>
+          <p:cNvSpPr>
+            <a:spLocks noGrp="1"/>
+          </p:cNvSpPr>
+          <p:nvPr>
+            <p:ph type="title"/>
+          </p:nvPr>
+        </p:nvSpPr>
+        <p:spPr/>
+        <p:txBody>
+          <a:bodyPr/>
+          <a:lstStyle/>
+          <a:p>
+            <a:r>
+              <a:rPr lang="en-US" dirty="0"/>
+              <a:t>Augmented Arithmetic</a:t>
+            </a:r>
+          </a:p>
+        </p:txBody>
+      </p:sp>
+      <p:sp>
+        <p:nvSpPr>
+          <p:cNvPr id="3" name="Content Placeholder 2">
+            <a:extLst>
+              <a:ext uri="{FF2B5EF4-FFF2-40B4-BE49-F238E27FC236}">
+                <a16:creationId xmlns:a16="http://schemas.microsoft.com/office/drawing/2014/main" id="{CEA41BE4-A79E-81D3-30F4-1363BA165B97}"/>
+              </a:ext>
+            </a:extLst>
+          </p:cNvPr>
+          <p:cNvSpPr>
+            <a:spLocks noGrp="1"/>
+          </p:cNvSpPr>
+          <p:nvPr>
+            <p:ph idx="1"/>
+          </p:nvPr>
+        </p:nvSpPr>
+        <p:spPr>
+          <a:xfrm>
+            <a:off x="726989" y="1690688"/>
+            <a:ext cx="10515600" cy="4351338"/>
+          </a:xfrm>
+        </p:spPr>
+        <p:txBody>
+          <a:bodyPr>
+            <a:normAutofit fontScale="92500" lnSpcReduction="20000"/>
+          </a:bodyPr>
+          <a:lstStyle/>
+          <a:p>
+            <a:r>
+              <a:rPr lang="en-US" dirty="0"/>
+              <a:t>If a&gt;b&gt;0 : </a:t>
+            </a:r>
+            <a:r>
+              <a:rPr lang="en-US" dirty="0" err="1"/>
+              <a:t>a+b</a:t>
+            </a:r>
+            <a:r>
+              <a:rPr lang="en-US" dirty="0"/>
+              <a:t> &lt; 2a</a:t>
+            </a:r>
+          </a:p>
+          <a:p>
+            <a:endParaRPr lang="en-US" dirty="0"/>
+          </a:p>
+          <a:p>
+            <a:r>
+              <a:rPr lang="en-US" dirty="0"/>
+              <a:t>c = </a:t>
+            </a:r>
+            <a:r>
+              <a:rPr lang="en-US" dirty="0" err="1"/>
+              <a:t>a⊕b</a:t>
+            </a:r>
+            <a:endParaRPr lang="en-US" dirty="0"/>
+          </a:p>
+          <a:p>
+            <a:r>
+              <a:rPr lang="en-US" dirty="0"/>
+              <a:t>t = </a:t>
+            </a:r>
+            <a:r>
+              <a:rPr lang="en-US" dirty="0" err="1"/>
+              <a:t>c⊖a</a:t>
+            </a:r>
+            <a:r>
+              <a:rPr lang="en-US" dirty="0"/>
+              <a:t>  is exact</a:t>
+            </a:r>
+          </a:p>
+          <a:p>
+            <a:r>
+              <a:rPr lang="en-US" dirty="0"/>
+              <a:t>e = </a:t>
+            </a:r>
+            <a:r>
+              <a:rPr lang="en-US" dirty="0" err="1"/>
+              <a:t>b⊖t</a:t>
+            </a:r>
+            <a:r>
+              <a:rPr lang="en-US" dirty="0"/>
+              <a:t>  is exact</a:t>
+            </a:r>
+          </a:p>
+          <a:p>
+            <a:r>
+              <a:rPr lang="en-US" dirty="0" err="1"/>
+              <a:t>a+b</a:t>
+            </a:r>
+            <a:r>
+              <a:rPr lang="en-US" dirty="0"/>
+              <a:t> = </a:t>
+            </a:r>
+            <a:r>
+              <a:rPr lang="en-US" dirty="0" err="1"/>
+              <a:t>c+e</a:t>
+            </a:r>
+            <a:r>
+              <a:rPr lang="en-US" dirty="0"/>
+              <a:t> </a:t>
+            </a:r>
+          </a:p>
+          <a:p>
+            <a:pPr lvl="1"/>
+            <a:r>
+              <a:rPr lang="en-US" dirty="0"/>
+              <a:t>e is the error of </a:t>
+            </a:r>
+            <a:r>
+              <a:rPr lang="en-US" dirty="0" err="1"/>
+              <a:t>a⊕b</a:t>
+            </a:r>
+            <a:endParaRPr lang="en-US" dirty="0"/>
+          </a:p>
+          <a:p>
+            <a:endParaRPr lang="en-US" dirty="0"/>
+          </a:p>
+          <a:p>
+            <a:r>
+              <a:rPr lang="en-US" dirty="0"/>
+              <a:t>This algorithm is known as “</a:t>
+            </a:r>
+            <a:r>
+              <a:rPr lang="en-US" dirty="0" err="1"/>
+              <a:t>fastTwoSum</a:t>
+            </a:r>
+            <a:r>
+              <a:rPr lang="en-US" dirty="0"/>
+              <a:t>” and proposed as </a:t>
+            </a:r>
+            <a:r>
+              <a:rPr lang="en-US" dirty="0" err="1"/>
+              <a:t>AugmentedSum</a:t>
+            </a:r>
+            <a:r>
+              <a:rPr lang="en-US" dirty="0"/>
+              <a:t> in next IEEE754 revision </a:t>
+            </a:r>
+          </a:p>
+          <a:p>
+            <a:r>
+              <a:rPr lang="en-US" dirty="0"/>
+              <a:t>A similar algorithm exists for multiplication as well</a:t>
+            </a:r>
+          </a:p>
+          <a:p>
+            <a:endParaRPr lang="en-US" dirty="0"/>
+          </a:p>
+          <a:p>
+            <a:endParaRPr lang="en-US" dirty="0"/>
+          </a:p>
+        </p:txBody>
+      </p:sp>
+    </p:spTree>
+    <p:extLst>
+      <p:ext uri="{BB962C8B-B14F-4D97-AF65-F5344CB8AC3E}">
+        <p14:creationId xmlns:p14="http://schemas.microsoft.com/office/powerpoint/2010/main" val="2697797781"/>
+      </p:ext>
+    </p:extLst>
+  </p:cSld>
+  <p:clrMapOvr>
+    <a:masterClrMapping/>
+  </p:clrMapOvr>
+</p:sld>
+</file>
+
+<file path=ppt/slides/slide18.xml><?xml version="1.0" encoding="utf-8"?>
+<p:sld xmlns:a="http://schemas.openxmlformats.org/drawingml/2006/main" xmlns:r="http://schemas.openxmlformats.org/officeDocument/2006/relationships" xmlns:p="http://schemas.openxmlformats.org/presentationml/2006/main">
+  <p:cSld>
+    <p:spTree>
+      <p:nvGrpSpPr>
+        <p:cNvPr id="1" name=""/>
+        <p:cNvGrpSpPr/>
+        <p:nvPr/>
+      </p:nvGrpSpPr>
+      <p:grpSpPr>
+        <a:xfrm>
+          <a:off x="0" y="0"/>
+          <a:ext cx="0" cy="0"/>
+          <a:chOff x="0" y="0"/>
+          <a:chExt cx="0" cy="0"/>
+        </a:xfrm>
+      </p:grpSpPr>
+      <p:sp>
+        <p:nvSpPr>
+          <p:cNvPr id="2" name="Title 1">
+            <a:extLst>
+              <a:ext uri="{FF2B5EF4-FFF2-40B4-BE49-F238E27FC236}">
+                <a16:creationId xmlns:a16="http://schemas.microsoft.com/office/drawing/2014/main" id="{C742FB71-B737-C32C-CF86-40936586016E}"/>
+              </a:ext>
+            </a:extLst>
+          </p:cNvPr>
+          <p:cNvSpPr>
+            <a:spLocks noGrp="1"/>
+          </p:cNvSpPr>
+          <p:nvPr>
+            <p:ph type="title"/>
+          </p:nvPr>
+        </p:nvSpPr>
+        <p:spPr/>
+        <p:txBody>
+          <a:bodyPr/>
+          <a:lstStyle/>
+          <a:p>
+            <a:r>
+              <a:rPr lang="en-US" dirty="0"/>
+              <a:t>Example of augmented sum</a:t>
+            </a:r>
+          </a:p>
+        </p:txBody>
+      </p:sp>
+      <p:sp>
+        <p:nvSpPr>
+          <p:cNvPr id="3" name="Content Placeholder 2">
+            <a:extLst>
+              <a:ext uri="{FF2B5EF4-FFF2-40B4-BE49-F238E27FC236}">
+                <a16:creationId xmlns:a16="http://schemas.microsoft.com/office/drawing/2014/main" id="{F8B01E0E-6FCF-CEA0-F220-94CD44A4F94C}"/>
+              </a:ext>
+            </a:extLst>
+          </p:cNvPr>
+          <p:cNvSpPr>
+            <a:spLocks noGrp="1"/>
+          </p:cNvSpPr>
+          <p:nvPr>
+            <p:ph idx="1"/>
+          </p:nvPr>
+        </p:nvSpPr>
+        <p:spPr>
+          <a:xfrm>
+            <a:off x="838200" y="1825625"/>
+            <a:ext cx="10515600" cy="4859380"/>
+          </a:xfrm>
+        </p:spPr>
+        <p:txBody>
+          <a:bodyPr>
+            <a:normAutofit lnSpcReduction="10000"/>
+          </a:bodyPr>
+          <a:lstStyle/>
+          <a:p>
+            <a:r>
+              <a:rPr lang="en-US" dirty="0"/>
+              <a:t>42⊕3.7 = 46</a:t>
+            </a:r>
+          </a:p>
+          <a:p>
+            <a:r>
+              <a:rPr lang="en-US" dirty="0"/>
+              <a:t>46⊖42 = 4</a:t>
+            </a:r>
+          </a:p>
+          <a:p>
+            <a:r>
+              <a:rPr lang="en-US" dirty="0"/>
+              <a:t>3.7⊖4 = -0.3</a:t>
+            </a:r>
+          </a:p>
+          <a:p>
+            <a:r>
+              <a:rPr lang="en-US" dirty="0"/>
+              <a:t>46-0.3 = 42+3.7</a:t>
+            </a:r>
+          </a:p>
+          <a:p>
+            <a:r>
+              <a:rPr lang="en-US" dirty="0"/>
+              <a:t>In short: </a:t>
+            </a:r>
+            <a:r>
+              <a:rPr lang="en-US" dirty="0" err="1"/>
+              <a:t>asum</a:t>
+            </a:r>
+            <a:r>
+              <a:rPr lang="en-US" dirty="0"/>
+              <a:t>(42,3.7) = 46,-0.3</a:t>
+            </a:r>
+          </a:p>
+          <a:p>
+            <a:endParaRPr lang="en-US" dirty="0"/>
+          </a:p>
+          <a:p>
+            <a:r>
+              <a:rPr lang="en-US" dirty="0"/>
+              <a:t>42⊕3.3⊕3.4 = 48 while 42+3.3+3.4 = 48.7</a:t>
+            </a:r>
+          </a:p>
+          <a:p>
+            <a:r>
+              <a:rPr lang="en-US" dirty="0" err="1"/>
+              <a:t>asum</a:t>
+            </a:r>
+            <a:r>
+              <a:rPr lang="en-US" dirty="0"/>
+              <a:t>(42,3.3) = 45,0.3</a:t>
+            </a:r>
+          </a:p>
+          <a:p>
+            <a:r>
+              <a:rPr lang="en-US" dirty="0" err="1"/>
+              <a:t>asum</a:t>
+            </a:r>
+            <a:r>
+              <a:rPr lang="en-US" dirty="0"/>
+              <a:t>(45 ,3.4) = 48,0.4</a:t>
+            </a:r>
+          </a:p>
+          <a:p>
+            <a:r>
+              <a:rPr lang="en-US" dirty="0" err="1"/>
+              <a:t>asum</a:t>
+            </a:r>
+            <a:r>
+              <a:rPr lang="en-US" dirty="0"/>
+              <a:t>(48,0.3+0.4) = 49, -0.3 </a:t>
+            </a:r>
+          </a:p>
+        </p:txBody>
+      </p:sp>
+    </p:spTree>
+    <p:extLst>
+      <p:ext uri="{BB962C8B-B14F-4D97-AF65-F5344CB8AC3E}">
+        <p14:creationId xmlns:p14="http://schemas.microsoft.com/office/powerpoint/2010/main" val="3182472380"/>
+      </p:ext>
+    </p:extLst>
+  </p:cSld>
+  <p:clrMapOvr>
+    <a:masterClrMapping/>
+  </p:clrMapOvr>
+</p:sld>
+</file>
+
+<file path=ppt/slides/slide19.xml><?xml version="1.0" encoding="utf-8"?>
+<p:sld xmlns:a="http://schemas.openxmlformats.org/drawingml/2006/main" xmlns:r="http://schemas.openxmlformats.org/officeDocument/2006/relationships" xmlns:p="http://schemas.openxmlformats.org/presentationml/2006/main">
+  <p:cSld>
+    <p:spTree>
+      <p:nvGrpSpPr>
+        <p:cNvPr id="1" name=""/>
+        <p:cNvGrpSpPr/>
+        <p:nvPr/>
+      </p:nvGrpSpPr>
+      <p:grpSpPr>
+        <a:xfrm>
+          <a:off x="0" y="0"/>
+          <a:ext cx="0" cy="0"/>
+          <a:chOff x="0" y="0"/>
+          <a:chExt cx="0" cy="0"/>
+        </a:xfrm>
+      </p:grpSpPr>
+      <p:sp>
+        <p:nvSpPr>
+          <p:cNvPr id="2" name="Title 1">
+            <a:extLst>
+              <a:ext uri="{FF2B5EF4-FFF2-40B4-BE49-F238E27FC236}">
+                <a16:creationId xmlns:a16="http://schemas.microsoft.com/office/drawing/2014/main" id="{0A4D461D-F652-AAC2-4FC1-FDE365440E42}"/>
+              </a:ext>
+            </a:extLst>
+          </p:cNvPr>
+          <p:cNvSpPr>
+            <a:spLocks noGrp="1"/>
+          </p:cNvSpPr>
+          <p:nvPr>
+            <p:ph type="title"/>
+          </p:nvPr>
+        </p:nvSpPr>
+        <p:spPr/>
+        <p:txBody>
+          <a:bodyPr/>
+          <a:lstStyle/>
+          <a:p>
+            <a:r>
+              <a:rPr lang="en-US"/>
+              <a:t>Catastrophic cancellation</a:t>
+            </a:r>
+          </a:p>
+        </p:txBody>
+      </p:sp>
+      <p:sp>
+        <p:nvSpPr>
+          <p:cNvPr id="3" name="Content Placeholder 2">
+            <a:extLst>
+              <a:ext uri="{FF2B5EF4-FFF2-40B4-BE49-F238E27FC236}">
+                <a16:creationId xmlns:a16="http://schemas.microsoft.com/office/drawing/2014/main" id="{96186B28-45D1-57E1-A9B0-C1CC5697A300}"/>
+              </a:ext>
+            </a:extLst>
+          </p:cNvPr>
+          <p:cNvSpPr>
+            <a:spLocks noGrp="1"/>
+          </p:cNvSpPr>
+          <p:nvPr>
+            <p:ph idx="1"/>
+          </p:nvPr>
+        </p:nvSpPr>
+        <p:spPr/>
+        <p:txBody>
+          <a:bodyPr/>
+          <a:lstStyle/>
+          <a:p>
+            <a:r>
+              <a:rPr lang="en-US" dirty="0"/>
+              <a:t>42⊕3.3⊕ -45 = 0 while 42+3.3-45 = 0.3</a:t>
+            </a:r>
+          </a:p>
+          <a:p>
+            <a:pPr lvl="1"/>
+            <a:r>
+              <a:rPr lang="en-US" dirty="0"/>
+              <a:t>Catastrophic cancellation</a:t>
+            </a:r>
+          </a:p>
+          <a:p>
+            <a:r>
+              <a:rPr lang="en-US" dirty="0" err="1"/>
+              <a:t>asum</a:t>
+            </a:r>
+            <a:r>
+              <a:rPr lang="en-US" dirty="0"/>
+              <a:t>(42,3.3) = 45,0.3</a:t>
+            </a:r>
+          </a:p>
+          <a:p>
+            <a:r>
+              <a:rPr lang="en-US" dirty="0" err="1"/>
+              <a:t>asum</a:t>
+            </a:r>
+            <a:r>
+              <a:rPr lang="en-US" dirty="0"/>
+              <a:t>(45 ,-45) = 0.0,0.0</a:t>
+            </a:r>
+          </a:p>
+          <a:p>
+            <a:r>
+              <a:rPr lang="en-US" dirty="0" err="1"/>
+              <a:t>asum</a:t>
+            </a:r>
+            <a:r>
+              <a:rPr lang="en-US" dirty="0"/>
+              <a:t>(0.0,0.3+0.0) = 0.3, 0.0 </a:t>
+            </a:r>
+          </a:p>
+          <a:p>
+            <a:endParaRPr lang="en-US" dirty="0"/>
+          </a:p>
+        </p:txBody>
+      </p:sp>
+    </p:spTree>
+    <p:extLst>
+      <p:ext uri="{BB962C8B-B14F-4D97-AF65-F5344CB8AC3E}">
+        <p14:creationId xmlns:p14="http://schemas.microsoft.com/office/powerpoint/2010/main" val="3295552409"/>
       </p:ext>
     </p:extLst>
   </p:cSld>
@@ -8315,7 +9941,7 @@
         </p:blipFill>
         <p:spPr>
           <a:xfrm>
-            <a:off x="640491" y="1353561"/>
+            <a:off x="838200" y="1271011"/>
             <a:ext cx="9213326" cy="3323214"/>
           </a:xfrm>
           <a:prstGeom prst="rect">
@@ -8800,6 +10426,5325 @@
       </p:grpSpPr>
       <p:sp>
         <p:nvSpPr>
+          <p:cNvPr id="23553" name="Title 1"/>
+          <p:cNvSpPr>
+            <a:spLocks noGrp="1"/>
+          </p:cNvSpPr>
+          <p:nvPr>
+            <p:ph type="title"/>
+          </p:nvPr>
+        </p:nvSpPr>
+        <p:spPr>
+          <a:xfrm>
+            <a:off x="1981200" y="277814"/>
+            <a:ext cx="8229600" cy="630907"/>
+          </a:xfrm>
+        </p:spPr>
+        <p:txBody>
+          <a:bodyPr>
+            <a:normAutofit fontScale="90000"/>
+          </a:bodyPr>
+          <a:lstStyle/>
+          <a:p>
+            <a:pPr eaLnBrk="1" hangingPunct="1"/>
+            <a:r>
+              <a:rPr lang="en-US" altLang="x-none" dirty="0"/>
+              <a:t>IEEE 754 representation of single precision FP</a:t>
+            </a:r>
+          </a:p>
+        </p:txBody>
+      </p:sp>
+      <p:graphicFrame>
+        <p:nvGraphicFramePr>
+          <p:cNvPr id="9" name="Content Placeholder 8"/>
+          <p:cNvGraphicFramePr>
+            <a:graphicFrameLocks noGrp="1"/>
+          </p:cNvGraphicFramePr>
+          <p:nvPr>
+            <p:ph idx="1"/>
+          </p:nvPr>
+        </p:nvGraphicFramePr>
+        <p:xfrm>
+          <a:off x="1752600" y="3352800"/>
+          <a:ext cx="8610600" cy="3181350"/>
+        </p:xfrm>
+        <a:graphic>
+          <a:graphicData uri="http://schemas.openxmlformats.org/drawingml/2006/table">
+            <a:tbl>
+              <a:tblPr/>
+              <a:tblGrid>
+                <a:gridCol w="2152650">
+                  <a:extLst>
+                    <a:ext uri="{9D8B030D-6E8A-4147-A177-3AD203B41FA5}">
+                      <a16:colId xmlns:a16="http://schemas.microsoft.com/office/drawing/2014/main" val="20000"/>
+                    </a:ext>
+                  </a:extLst>
+                </a:gridCol>
+                <a:gridCol w="1504950">
+                  <a:extLst>
+                    <a:ext uri="{9D8B030D-6E8A-4147-A177-3AD203B41FA5}">
+                      <a16:colId xmlns:a16="http://schemas.microsoft.com/office/drawing/2014/main" val="20001"/>
+                    </a:ext>
+                  </a:extLst>
+                </a:gridCol>
+                <a:gridCol w="2438400">
+                  <a:extLst>
+                    <a:ext uri="{9D8B030D-6E8A-4147-A177-3AD203B41FA5}">
+                      <a16:colId xmlns:a16="http://schemas.microsoft.com/office/drawing/2014/main" val="20002"/>
+                    </a:ext>
+                  </a:extLst>
+                </a:gridCol>
+                <a:gridCol w="2514600">
+                  <a:extLst>
+                    <a:ext uri="{9D8B030D-6E8A-4147-A177-3AD203B41FA5}">
+                      <a16:colId xmlns:a16="http://schemas.microsoft.com/office/drawing/2014/main" val="20003"/>
+                    </a:ext>
+                  </a:extLst>
+                </a:gridCol>
+              </a:tblGrid>
+              <a:tr h="685800">
+                <a:tc>
+                  <a:txBody>
+                    <a:bodyPr/>
+                    <a:lstStyle>
+                      <a:lvl1pPr defTabSz="457200" eaLnBrk="0" hangingPunct="0">
+                        <a:spcBef>
+                          <a:spcPct val="20000"/>
+                        </a:spcBef>
+                        <a:buClr>
+                          <a:schemeClr val="accent1"/>
+                        </a:buClr>
+                        <a:buSzPct val="65000"/>
+                        <a:buFont typeface="Wingdings" charset="2"/>
+                        <a:defRPr sz="2600">
+                          <a:solidFill>
+                            <a:schemeClr val="tx1"/>
+                          </a:solidFill>
+                          <a:latin typeface="Arial" charset="0"/>
+                          <a:ea typeface="ＭＳ Ｐゴシック" charset="-128"/>
+                        </a:defRPr>
+                      </a:lvl1pPr>
+                      <a:lvl2pPr marL="742950" indent="-285750" defTabSz="457200" eaLnBrk="0" hangingPunct="0">
+                        <a:spcBef>
+                          <a:spcPct val="20000"/>
+                        </a:spcBef>
+                        <a:buClr>
+                          <a:schemeClr val="accent2"/>
+                        </a:buClr>
+                        <a:buSzPct val="60000"/>
+                        <a:buFont typeface="Wingdings" charset="2"/>
+                        <a:defRPr sz="2200">
+                          <a:solidFill>
+                            <a:schemeClr val="tx1"/>
+                          </a:solidFill>
+                          <a:latin typeface="Arial" charset="0"/>
+                          <a:ea typeface="ＭＳ Ｐゴシック" charset="-128"/>
+                        </a:defRPr>
+                      </a:lvl2pPr>
+                      <a:lvl3pPr marL="1143000" indent="-228600" defTabSz="457200" eaLnBrk="0" hangingPunct="0">
+                        <a:spcBef>
+                          <a:spcPct val="20000"/>
+                        </a:spcBef>
+                        <a:buClr>
+                          <a:schemeClr val="accent1"/>
+                        </a:buClr>
+                        <a:buSzPct val="65000"/>
+                        <a:buFont typeface="Wingdings" charset="2"/>
+                        <a:defRPr sz="2000">
+                          <a:solidFill>
+                            <a:schemeClr val="tx1"/>
+                          </a:solidFill>
+                          <a:latin typeface="Arial" charset="0"/>
+                          <a:ea typeface="ＭＳ Ｐゴシック" charset="-128"/>
+                        </a:defRPr>
+                      </a:lvl3pPr>
+                      <a:lvl4pPr marL="1600200" indent="-228600" defTabSz="457200" eaLnBrk="0" hangingPunct="0">
+                        <a:spcBef>
+                          <a:spcPct val="20000"/>
+                        </a:spcBef>
+                        <a:buClr>
+                          <a:schemeClr val="accent2"/>
+                        </a:buClr>
+                        <a:buSzPct val="70000"/>
+                        <a:buFont typeface="Wingdings" charset="2"/>
+                        <a:defRPr>
+                          <a:solidFill>
+                            <a:schemeClr val="tx1"/>
+                          </a:solidFill>
+                          <a:latin typeface="Arial" charset="0"/>
+                          <a:ea typeface="ＭＳ Ｐゴシック" charset="-128"/>
+                        </a:defRPr>
+                      </a:lvl4pPr>
+                      <a:lvl5pPr marL="2057400" indent="-228600" defTabSz="457200" eaLnBrk="0" hangingPunct="0">
+                        <a:spcBef>
+                          <a:spcPct val="20000"/>
+                        </a:spcBef>
+                        <a:buClr>
+                          <a:schemeClr val="accent1"/>
+                        </a:buClr>
+                        <a:buSzPct val="75000"/>
+                        <a:buFont typeface="Wingdings" charset="2"/>
+                        <a:defRPr>
+                          <a:solidFill>
+                            <a:schemeClr val="tx1"/>
+                          </a:solidFill>
+                          <a:latin typeface="Arial" charset="0"/>
+                          <a:ea typeface="ＭＳ Ｐゴシック" charset="-128"/>
+                        </a:defRPr>
+                      </a:lvl5pPr>
+                      <a:lvl6pPr marL="2514600" indent="-228600" defTabSz="457200" eaLnBrk="0" fontAlgn="base" hangingPunct="0">
+                        <a:spcBef>
+                          <a:spcPct val="20000"/>
+                        </a:spcBef>
+                        <a:spcAft>
+                          <a:spcPct val="0"/>
+                        </a:spcAft>
+                        <a:buClr>
+                          <a:schemeClr val="accent1"/>
+                        </a:buClr>
+                        <a:buSzPct val="75000"/>
+                        <a:buFont typeface="Wingdings" charset="2"/>
+                        <a:defRPr>
+                          <a:solidFill>
+                            <a:schemeClr val="tx1"/>
+                          </a:solidFill>
+                          <a:latin typeface="Arial" charset="0"/>
+                          <a:ea typeface="ＭＳ Ｐゴシック" charset="-128"/>
+                        </a:defRPr>
+                      </a:lvl6pPr>
+                      <a:lvl7pPr marL="2971800" indent="-228600" defTabSz="457200" eaLnBrk="0" fontAlgn="base" hangingPunct="0">
+                        <a:spcBef>
+                          <a:spcPct val="20000"/>
+                        </a:spcBef>
+                        <a:spcAft>
+                          <a:spcPct val="0"/>
+                        </a:spcAft>
+                        <a:buClr>
+                          <a:schemeClr val="accent1"/>
+                        </a:buClr>
+                        <a:buSzPct val="75000"/>
+                        <a:buFont typeface="Wingdings" charset="2"/>
+                        <a:defRPr>
+                          <a:solidFill>
+                            <a:schemeClr val="tx1"/>
+                          </a:solidFill>
+                          <a:latin typeface="Arial" charset="0"/>
+                          <a:ea typeface="ＭＳ Ｐゴシック" charset="-128"/>
+                        </a:defRPr>
+                      </a:lvl7pPr>
+                      <a:lvl8pPr marL="3429000" indent="-228600" defTabSz="457200" eaLnBrk="0" fontAlgn="base" hangingPunct="0">
+                        <a:spcBef>
+                          <a:spcPct val="20000"/>
+                        </a:spcBef>
+                        <a:spcAft>
+                          <a:spcPct val="0"/>
+                        </a:spcAft>
+                        <a:buClr>
+                          <a:schemeClr val="accent1"/>
+                        </a:buClr>
+                        <a:buSzPct val="75000"/>
+                        <a:buFont typeface="Wingdings" charset="2"/>
+                        <a:defRPr>
+                          <a:solidFill>
+                            <a:schemeClr val="tx1"/>
+                          </a:solidFill>
+                          <a:latin typeface="Arial" charset="0"/>
+                          <a:ea typeface="ＭＳ Ｐゴシック" charset="-128"/>
+                        </a:defRPr>
+                      </a:lvl8pPr>
+                      <a:lvl9pPr marL="3886200" indent="-228600" defTabSz="457200" eaLnBrk="0" fontAlgn="base" hangingPunct="0">
+                        <a:spcBef>
+                          <a:spcPct val="20000"/>
+                        </a:spcBef>
+                        <a:spcAft>
+                          <a:spcPct val="0"/>
+                        </a:spcAft>
+                        <a:buClr>
+                          <a:schemeClr val="accent1"/>
+                        </a:buClr>
+                        <a:buSzPct val="75000"/>
+                        <a:buFont typeface="Wingdings" charset="2"/>
+                        <a:defRPr>
+                          <a:solidFill>
+                            <a:schemeClr val="tx1"/>
+                          </a:solidFill>
+                          <a:latin typeface="Arial" charset="0"/>
+                          <a:ea typeface="ＭＳ Ｐゴシック" charset="-128"/>
+                        </a:defRPr>
+                      </a:lvl9pPr>
+                    </a:lstStyle>
+                    <a:p>
+                      <a:pPr marL="0" marR="0" lvl="0" indent="0" algn="l" defTabSz="457200" rtl="0" eaLnBrk="1" fontAlgn="base" latinLnBrk="0" hangingPunct="1">
+                        <a:lnSpc>
+                          <a:spcPct val="100000"/>
+                        </a:lnSpc>
+                        <a:spcBef>
+                          <a:spcPct val="0"/>
+                        </a:spcBef>
+                        <a:spcAft>
+                          <a:spcPct val="0"/>
+                        </a:spcAft>
+                        <a:buClrTx/>
+                        <a:buSzTx/>
+                        <a:buFontTx/>
+                        <a:buNone/>
+                        <a:tabLst/>
+                      </a:pPr>
+                      <a:r>
+                        <a:rPr kumimoji="0" lang="en-US" altLang="x-none" sz="1800" b="1" i="0" u="none" strike="noStrike" cap="none" normalizeH="0" baseline="0">
+                          <a:ln>
+                            <a:noFill/>
+                          </a:ln>
+                          <a:solidFill>
+                            <a:srgbClr val="FFFFFF"/>
+                          </a:solidFill>
+                          <a:effectLst/>
+                          <a:latin typeface="Arial" charset="0"/>
+                          <a:ea typeface="ＭＳ Ｐゴシック" charset="-128"/>
+                        </a:rPr>
+                        <a:t>Exponent</a:t>
+                      </a:r>
+                    </a:p>
+                  </a:txBody>
+                  <a:tcPr horzOverflow="overflow">
+                    <a:lnL w="12700" cap="flat" cmpd="sng" algn="ctr">
+                      <a:solidFill>
+                        <a:schemeClr val="bg1"/>
+                      </a:solidFill>
+                      <a:prstDash val="solid"/>
+                      <a:round/>
+                      <a:headEnd type="none" w="med" len="med"/>
+                      <a:tailEnd type="none" w="med" len="med"/>
+                    </a:lnL>
+                    <a:lnR w="12700" cap="flat" cmpd="sng" algn="ctr">
+                      <a:solidFill>
+                        <a:schemeClr val="bg1"/>
+                      </a:solidFill>
+                      <a:prstDash val="solid"/>
+                      <a:round/>
+                      <a:headEnd type="none" w="med" len="med"/>
+                      <a:tailEnd type="none" w="med" len="med"/>
+                    </a:lnR>
+                    <a:lnT w="12700" cap="flat" cmpd="sng" algn="ctr">
+                      <a:solidFill>
+                        <a:schemeClr val="bg1"/>
+                      </a:solidFill>
+                      <a:prstDash val="solid"/>
+                      <a:round/>
+                      <a:headEnd type="none" w="med" len="med"/>
+                      <a:tailEnd type="none" w="med" len="med"/>
+                    </a:lnT>
+                    <a:lnB w="38100" cap="flat" cmpd="sng" algn="ctr">
+                      <a:solidFill>
+                        <a:schemeClr val="bg1"/>
+                      </a:solidFill>
+                      <a:prstDash val="solid"/>
+                      <a:round/>
+                      <a:headEnd type="none" w="med" len="med"/>
+                      <a:tailEnd type="none" w="med" len="med"/>
+                    </a:lnB>
+                    <a:lnTlToBr>
+                      <a:noFill/>
+                    </a:lnTlToBr>
+                    <a:lnBlToTr>
+                      <a:noFill/>
+                    </a:lnBlToTr>
+                    <a:solidFill>
+                      <a:schemeClr val="accent1"/>
+                    </a:solidFill>
+                  </a:tcPr>
+                </a:tc>
+                <a:tc>
+                  <a:txBody>
+                    <a:bodyPr/>
+                    <a:lstStyle>
+                      <a:lvl1pPr defTabSz="457200" eaLnBrk="0" hangingPunct="0">
+                        <a:spcBef>
+                          <a:spcPct val="20000"/>
+                        </a:spcBef>
+                        <a:buClr>
+                          <a:schemeClr val="accent1"/>
+                        </a:buClr>
+                        <a:buSzPct val="65000"/>
+                        <a:buFont typeface="Wingdings" charset="2"/>
+                        <a:defRPr sz="2600">
+                          <a:solidFill>
+                            <a:schemeClr val="tx1"/>
+                          </a:solidFill>
+                          <a:latin typeface="Arial" charset="0"/>
+                          <a:ea typeface="ＭＳ Ｐゴシック" charset="-128"/>
+                        </a:defRPr>
+                      </a:lvl1pPr>
+                      <a:lvl2pPr marL="742950" indent="-285750" defTabSz="457200" eaLnBrk="0" hangingPunct="0">
+                        <a:spcBef>
+                          <a:spcPct val="20000"/>
+                        </a:spcBef>
+                        <a:buClr>
+                          <a:schemeClr val="accent2"/>
+                        </a:buClr>
+                        <a:buSzPct val="60000"/>
+                        <a:buFont typeface="Wingdings" charset="2"/>
+                        <a:defRPr sz="2200">
+                          <a:solidFill>
+                            <a:schemeClr val="tx1"/>
+                          </a:solidFill>
+                          <a:latin typeface="Arial" charset="0"/>
+                          <a:ea typeface="ＭＳ Ｐゴシック" charset="-128"/>
+                        </a:defRPr>
+                      </a:lvl2pPr>
+                      <a:lvl3pPr marL="1143000" indent="-228600" defTabSz="457200" eaLnBrk="0" hangingPunct="0">
+                        <a:spcBef>
+                          <a:spcPct val="20000"/>
+                        </a:spcBef>
+                        <a:buClr>
+                          <a:schemeClr val="accent1"/>
+                        </a:buClr>
+                        <a:buSzPct val="65000"/>
+                        <a:buFont typeface="Wingdings" charset="2"/>
+                        <a:defRPr sz="2000">
+                          <a:solidFill>
+                            <a:schemeClr val="tx1"/>
+                          </a:solidFill>
+                          <a:latin typeface="Arial" charset="0"/>
+                          <a:ea typeface="ＭＳ Ｐゴシック" charset="-128"/>
+                        </a:defRPr>
+                      </a:lvl3pPr>
+                      <a:lvl4pPr marL="1600200" indent="-228600" defTabSz="457200" eaLnBrk="0" hangingPunct="0">
+                        <a:spcBef>
+                          <a:spcPct val="20000"/>
+                        </a:spcBef>
+                        <a:buClr>
+                          <a:schemeClr val="accent2"/>
+                        </a:buClr>
+                        <a:buSzPct val="70000"/>
+                        <a:buFont typeface="Wingdings" charset="2"/>
+                        <a:defRPr>
+                          <a:solidFill>
+                            <a:schemeClr val="tx1"/>
+                          </a:solidFill>
+                          <a:latin typeface="Arial" charset="0"/>
+                          <a:ea typeface="ＭＳ Ｐゴシック" charset="-128"/>
+                        </a:defRPr>
+                      </a:lvl4pPr>
+                      <a:lvl5pPr marL="2057400" indent="-228600" defTabSz="457200" eaLnBrk="0" hangingPunct="0">
+                        <a:spcBef>
+                          <a:spcPct val="20000"/>
+                        </a:spcBef>
+                        <a:buClr>
+                          <a:schemeClr val="accent1"/>
+                        </a:buClr>
+                        <a:buSzPct val="75000"/>
+                        <a:buFont typeface="Wingdings" charset="2"/>
+                        <a:defRPr>
+                          <a:solidFill>
+                            <a:schemeClr val="tx1"/>
+                          </a:solidFill>
+                          <a:latin typeface="Arial" charset="0"/>
+                          <a:ea typeface="ＭＳ Ｐゴシック" charset="-128"/>
+                        </a:defRPr>
+                      </a:lvl5pPr>
+                      <a:lvl6pPr marL="2514600" indent="-228600" defTabSz="457200" eaLnBrk="0" fontAlgn="base" hangingPunct="0">
+                        <a:spcBef>
+                          <a:spcPct val="20000"/>
+                        </a:spcBef>
+                        <a:spcAft>
+                          <a:spcPct val="0"/>
+                        </a:spcAft>
+                        <a:buClr>
+                          <a:schemeClr val="accent1"/>
+                        </a:buClr>
+                        <a:buSzPct val="75000"/>
+                        <a:buFont typeface="Wingdings" charset="2"/>
+                        <a:defRPr>
+                          <a:solidFill>
+                            <a:schemeClr val="tx1"/>
+                          </a:solidFill>
+                          <a:latin typeface="Arial" charset="0"/>
+                          <a:ea typeface="ＭＳ Ｐゴシック" charset="-128"/>
+                        </a:defRPr>
+                      </a:lvl6pPr>
+                      <a:lvl7pPr marL="2971800" indent="-228600" defTabSz="457200" eaLnBrk="0" fontAlgn="base" hangingPunct="0">
+                        <a:spcBef>
+                          <a:spcPct val="20000"/>
+                        </a:spcBef>
+                        <a:spcAft>
+                          <a:spcPct val="0"/>
+                        </a:spcAft>
+                        <a:buClr>
+                          <a:schemeClr val="accent1"/>
+                        </a:buClr>
+                        <a:buSzPct val="75000"/>
+                        <a:buFont typeface="Wingdings" charset="2"/>
+                        <a:defRPr>
+                          <a:solidFill>
+                            <a:schemeClr val="tx1"/>
+                          </a:solidFill>
+                          <a:latin typeface="Arial" charset="0"/>
+                          <a:ea typeface="ＭＳ Ｐゴシック" charset="-128"/>
+                        </a:defRPr>
+                      </a:lvl7pPr>
+                      <a:lvl8pPr marL="3429000" indent="-228600" defTabSz="457200" eaLnBrk="0" fontAlgn="base" hangingPunct="0">
+                        <a:spcBef>
+                          <a:spcPct val="20000"/>
+                        </a:spcBef>
+                        <a:spcAft>
+                          <a:spcPct val="0"/>
+                        </a:spcAft>
+                        <a:buClr>
+                          <a:schemeClr val="accent1"/>
+                        </a:buClr>
+                        <a:buSzPct val="75000"/>
+                        <a:buFont typeface="Wingdings" charset="2"/>
+                        <a:defRPr>
+                          <a:solidFill>
+                            <a:schemeClr val="tx1"/>
+                          </a:solidFill>
+                          <a:latin typeface="Arial" charset="0"/>
+                          <a:ea typeface="ＭＳ Ｐゴシック" charset="-128"/>
+                        </a:defRPr>
+                      </a:lvl8pPr>
+                      <a:lvl9pPr marL="3886200" indent="-228600" defTabSz="457200" eaLnBrk="0" fontAlgn="base" hangingPunct="0">
+                        <a:spcBef>
+                          <a:spcPct val="20000"/>
+                        </a:spcBef>
+                        <a:spcAft>
+                          <a:spcPct val="0"/>
+                        </a:spcAft>
+                        <a:buClr>
+                          <a:schemeClr val="accent1"/>
+                        </a:buClr>
+                        <a:buSzPct val="75000"/>
+                        <a:buFont typeface="Wingdings" charset="2"/>
+                        <a:defRPr>
+                          <a:solidFill>
+                            <a:schemeClr val="tx1"/>
+                          </a:solidFill>
+                          <a:latin typeface="Arial" charset="0"/>
+                          <a:ea typeface="ＭＳ Ｐゴシック" charset="-128"/>
+                        </a:defRPr>
+                      </a:lvl9pPr>
+                    </a:lstStyle>
+                    <a:p>
+                      <a:pPr marL="0" marR="0" lvl="0" indent="0" algn="l" defTabSz="457200" rtl="0" eaLnBrk="1" fontAlgn="base" latinLnBrk="0" hangingPunct="1">
+                        <a:lnSpc>
+                          <a:spcPct val="100000"/>
+                        </a:lnSpc>
+                        <a:spcBef>
+                          <a:spcPct val="0"/>
+                        </a:spcBef>
+                        <a:spcAft>
+                          <a:spcPct val="0"/>
+                        </a:spcAft>
+                        <a:buClrTx/>
+                        <a:buSzTx/>
+                        <a:buFontTx/>
+                        <a:buNone/>
+                        <a:tabLst/>
+                      </a:pPr>
+                      <a:r>
+                        <a:rPr kumimoji="0" lang="en-US" altLang="x-none" sz="1800" b="1" i="0" u="none" strike="noStrike" cap="none" normalizeH="0" baseline="0">
+                          <a:ln>
+                            <a:noFill/>
+                          </a:ln>
+                          <a:solidFill>
+                            <a:srgbClr val="FFFFFF"/>
+                          </a:solidFill>
+                          <a:effectLst/>
+                          <a:latin typeface="Arial" charset="0"/>
+                          <a:ea typeface="ＭＳ Ｐゴシック" charset="-128"/>
+                        </a:rPr>
+                        <a:t>significand zero</a:t>
+                      </a:r>
+                    </a:p>
+                  </a:txBody>
+                  <a:tcPr horzOverflow="overflow">
+                    <a:lnL w="12700" cap="flat" cmpd="sng" algn="ctr">
+                      <a:solidFill>
+                        <a:schemeClr val="bg1"/>
+                      </a:solidFill>
+                      <a:prstDash val="solid"/>
+                      <a:round/>
+                      <a:headEnd type="none" w="med" len="med"/>
+                      <a:tailEnd type="none" w="med" len="med"/>
+                    </a:lnL>
+                    <a:lnR w="12700" cap="flat" cmpd="sng" algn="ctr">
+                      <a:solidFill>
+                        <a:schemeClr val="bg1"/>
+                      </a:solidFill>
+                      <a:prstDash val="solid"/>
+                      <a:round/>
+                      <a:headEnd type="none" w="med" len="med"/>
+                      <a:tailEnd type="none" w="med" len="med"/>
+                    </a:lnR>
+                    <a:lnT w="12700" cap="flat" cmpd="sng" algn="ctr">
+                      <a:solidFill>
+                        <a:schemeClr val="bg1"/>
+                      </a:solidFill>
+                      <a:prstDash val="solid"/>
+                      <a:round/>
+                      <a:headEnd type="none" w="med" len="med"/>
+                      <a:tailEnd type="none" w="med" len="med"/>
+                    </a:lnT>
+                    <a:lnB w="38100" cap="flat" cmpd="sng" algn="ctr">
+                      <a:solidFill>
+                        <a:schemeClr val="bg1"/>
+                      </a:solidFill>
+                      <a:prstDash val="solid"/>
+                      <a:round/>
+                      <a:headEnd type="none" w="med" len="med"/>
+                      <a:tailEnd type="none" w="med" len="med"/>
+                    </a:lnB>
+                    <a:lnTlToBr>
+                      <a:noFill/>
+                    </a:lnTlToBr>
+                    <a:lnBlToTr>
+                      <a:noFill/>
+                    </a:lnBlToTr>
+                    <a:solidFill>
+                      <a:schemeClr val="accent1"/>
+                    </a:solidFill>
+                  </a:tcPr>
+                </a:tc>
+                <a:tc>
+                  <a:txBody>
+                    <a:bodyPr/>
+                    <a:lstStyle>
+                      <a:lvl1pPr defTabSz="457200" eaLnBrk="0" hangingPunct="0">
+                        <a:spcBef>
+                          <a:spcPct val="20000"/>
+                        </a:spcBef>
+                        <a:buClr>
+                          <a:schemeClr val="accent1"/>
+                        </a:buClr>
+                        <a:buSzPct val="65000"/>
+                        <a:buFont typeface="Wingdings" charset="2"/>
+                        <a:defRPr sz="2600">
+                          <a:solidFill>
+                            <a:schemeClr val="tx1"/>
+                          </a:solidFill>
+                          <a:latin typeface="Arial" charset="0"/>
+                          <a:ea typeface="ＭＳ Ｐゴシック" charset="-128"/>
+                        </a:defRPr>
+                      </a:lvl1pPr>
+                      <a:lvl2pPr marL="742950" indent="-285750" defTabSz="457200" eaLnBrk="0" hangingPunct="0">
+                        <a:spcBef>
+                          <a:spcPct val="20000"/>
+                        </a:spcBef>
+                        <a:buClr>
+                          <a:schemeClr val="accent2"/>
+                        </a:buClr>
+                        <a:buSzPct val="60000"/>
+                        <a:buFont typeface="Wingdings" charset="2"/>
+                        <a:defRPr sz="2200">
+                          <a:solidFill>
+                            <a:schemeClr val="tx1"/>
+                          </a:solidFill>
+                          <a:latin typeface="Arial" charset="0"/>
+                          <a:ea typeface="ＭＳ Ｐゴシック" charset="-128"/>
+                        </a:defRPr>
+                      </a:lvl2pPr>
+                      <a:lvl3pPr marL="1143000" indent="-228600" defTabSz="457200" eaLnBrk="0" hangingPunct="0">
+                        <a:spcBef>
+                          <a:spcPct val="20000"/>
+                        </a:spcBef>
+                        <a:buClr>
+                          <a:schemeClr val="accent1"/>
+                        </a:buClr>
+                        <a:buSzPct val="65000"/>
+                        <a:buFont typeface="Wingdings" charset="2"/>
+                        <a:defRPr sz="2000">
+                          <a:solidFill>
+                            <a:schemeClr val="tx1"/>
+                          </a:solidFill>
+                          <a:latin typeface="Arial" charset="0"/>
+                          <a:ea typeface="ＭＳ Ｐゴシック" charset="-128"/>
+                        </a:defRPr>
+                      </a:lvl3pPr>
+                      <a:lvl4pPr marL="1600200" indent="-228600" defTabSz="457200" eaLnBrk="0" hangingPunct="0">
+                        <a:spcBef>
+                          <a:spcPct val="20000"/>
+                        </a:spcBef>
+                        <a:buClr>
+                          <a:schemeClr val="accent2"/>
+                        </a:buClr>
+                        <a:buSzPct val="70000"/>
+                        <a:buFont typeface="Wingdings" charset="2"/>
+                        <a:defRPr>
+                          <a:solidFill>
+                            <a:schemeClr val="tx1"/>
+                          </a:solidFill>
+                          <a:latin typeface="Arial" charset="0"/>
+                          <a:ea typeface="ＭＳ Ｐゴシック" charset="-128"/>
+                        </a:defRPr>
+                      </a:lvl4pPr>
+                      <a:lvl5pPr marL="2057400" indent="-228600" defTabSz="457200" eaLnBrk="0" hangingPunct="0">
+                        <a:spcBef>
+                          <a:spcPct val="20000"/>
+                        </a:spcBef>
+                        <a:buClr>
+                          <a:schemeClr val="accent1"/>
+                        </a:buClr>
+                        <a:buSzPct val="75000"/>
+                        <a:buFont typeface="Wingdings" charset="2"/>
+                        <a:defRPr>
+                          <a:solidFill>
+                            <a:schemeClr val="tx1"/>
+                          </a:solidFill>
+                          <a:latin typeface="Arial" charset="0"/>
+                          <a:ea typeface="ＭＳ Ｐゴシック" charset="-128"/>
+                        </a:defRPr>
+                      </a:lvl5pPr>
+                      <a:lvl6pPr marL="2514600" indent="-228600" defTabSz="457200" eaLnBrk="0" fontAlgn="base" hangingPunct="0">
+                        <a:spcBef>
+                          <a:spcPct val="20000"/>
+                        </a:spcBef>
+                        <a:spcAft>
+                          <a:spcPct val="0"/>
+                        </a:spcAft>
+                        <a:buClr>
+                          <a:schemeClr val="accent1"/>
+                        </a:buClr>
+                        <a:buSzPct val="75000"/>
+                        <a:buFont typeface="Wingdings" charset="2"/>
+                        <a:defRPr>
+                          <a:solidFill>
+                            <a:schemeClr val="tx1"/>
+                          </a:solidFill>
+                          <a:latin typeface="Arial" charset="0"/>
+                          <a:ea typeface="ＭＳ Ｐゴシック" charset="-128"/>
+                        </a:defRPr>
+                      </a:lvl6pPr>
+                      <a:lvl7pPr marL="2971800" indent="-228600" defTabSz="457200" eaLnBrk="0" fontAlgn="base" hangingPunct="0">
+                        <a:spcBef>
+                          <a:spcPct val="20000"/>
+                        </a:spcBef>
+                        <a:spcAft>
+                          <a:spcPct val="0"/>
+                        </a:spcAft>
+                        <a:buClr>
+                          <a:schemeClr val="accent1"/>
+                        </a:buClr>
+                        <a:buSzPct val="75000"/>
+                        <a:buFont typeface="Wingdings" charset="2"/>
+                        <a:defRPr>
+                          <a:solidFill>
+                            <a:schemeClr val="tx1"/>
+                          </a:solidFill>
+                          <a:latin typeface="Arial" charset="0"/>
+                          <a:ea typeface="ＭＳ Ｐゴシック" charset="-128"/>
+                        </a:defRPr>
+                      </a:lvl7pPr>
+                      <a:lvl8pPr marL="3429000" indent="-228600" defTabSz="457200" eaLnBrk="0" fontAlgn="base" hangingPunct="0">
+                        <a:spcBef>
+                          <a:spcPct val="20000"/>
+                        </a:spcBef>
+                        <a:spcAft>
+                          <a:spcPct val="0"/>
+                        </a:spcAft>
+                        <a:buClr>
+                          <a:schemeClr val="accent1"/>
+                        </a:buClr>
+                        <a:buSzPct val="75000"/>
+                        <a:buFont typeface="Wingdings" charset="2"/>
+                        <a:defRPr>
+                          <a:solidFill>
+                            <a:schemeClr val="tx1"/>
+                          </a:solidFill>
+                          <a:latin typeface="Arial" charset="0"/>
+                          <a:ea typeface="ＭＳ Ｐゴシック" charset="-128"/>
+                        </a:defRPr>
+                      </a:lvl8pPr>
+                      <a:lvl9pPr marL="3886200" indent="-228600" defTabSz="457200" eaLnBrk="0" fontAlgn="base" hangingPunct="0">
+                        <a:spcBef>
+                          <a:spcPct val="20000"/>
+                        </a:spcBef>
+                        <a:spcAft>
+                          <a:spcPct val="0"/>
+                        </a:spcAft>
+                        <a:buClr>
+                          <a:schemeClr val="accent1"/>
+                        </a:buClr>
+                        <a:buSzPct val="75000"/>
+                        <a:buFont typeface="Wingdings" charset="2"/>
+                        <a:defRPr>
+                          <a:solidFill>
+                            <a:schemeClr val="tx1"/>
+                          </a:solidFill>
+                          <a:latin typeface="Arial" charset="0"/>
+                          <a:ea typeface="ＭＳ Ｐゴシック" charset="-128"/>
+                        </a:defRPr>
+                      </a:lvl9pPr>
+                    </a:lstStyle>
+                    <a:p>
+                      <a:pPr marL="0" marR="0" lvl="0" indent="0" algn="l" defTabSz="457200" rtl="0" eaLnBrk="1" fontAlgn="base" latinLnBrk="0" hangingPunct="1">
+                        <a:lnSpc>
+                          <a:spcPct val="100000"/>
+                        </a:lnSpc>
+                        <a:spcBef>
+                          <a:spcPct val="0"/>
+                        </a:spcBef>
+                        <a:spcAft>
+                          <a:spcPct val="0"/>
+                        </a:spcAft>
+                        <a:buClrTx/>
+                        <a:buSzTx/>
+                        <a:buFontTx/>
+                        <a:buNone/>
+                        <a:tabLst/>
+                      </a:pPr>
+                      <a:r>
+                        <a:rPr kumimoji="0" lang="en-US" altLang="x-none" sz="1800" b="1" i="0" u="none" strike="noStrike" cap="none" normalizeH="0" baseline="0">
+                          <a:ln>
+                            <a:noFill/>
+                          </a:ln>
+                          <a:solidFill>
+                            <a:srgbClr val="FFFFFF"/>
+                          </a:solidFill>
+                          <a:effectLst/>
+                          <a:latin typeface="Arial" charset="0"/>
+                          <a:ea typeface="ＭＳ Ｐゴシック" charset="-128"/>
+                        </a:rPr>
+                        <a:t>significand non-zero</a:t>
+                      </a:r>
+                    </a:p>
+                  </a:txBody>
+                  <a:tcPr horzOverflow="overflow">
+                    <a:lnL w="12700" cap="flat" cmpd="sng" algn="ctr">
+                      <a:solidFill>
+                        <a:schemeClr val="bg1"/>
+                      </a:solidFill>
+                      <a:prstDash val="solid"/>
+                      <a:round/>
+                      <a:headEnd type="none" w="med" len="med"/>
+                      <a:tailEnd type="none" w="med" len="med"/>
+                    </a:lnL>
+                    <a:lnR w="12700" cap="flat" cmpd="sng" algn="ctr">
+                      <a:solidFill>
+                        <a:schemeClr val="bg1"/>
+                      </a:solidFill>
+                      <a:prstDash val="solid"/>
+                      <a:round/>
+                      <a:headEnd type="none" w="med" len="med"/>
+                      <a:tailEnd type="none" w="med" len="med"/>
+                    </a:lnR>
+                    <a:lnT w="12700" cap="flat" cmpd="sng" algn="ctr">
+                      <a:solidFill>
+                        <a:schemeClr val="bg1"/>
+                      </a:solidFill>
+                      <a:prstDash val="solid"/>
+                      <a:round/>
+                      <a:headEnd type="none" w="med" len="med"/>
+                      <a:tailEnd type="none" w="med" len="med"/>
+                    </a:lnT>
+                    <a:lnB w="38100" cap="flat" cmpd="sng" algn="ctr">
+                      <a:solidFill>
+                        <a:schemeClr val="bg1"/>
+                      </a:solidFill>
+                      <a:prstDash val="solid"/>
+                      <a:round/>
+                      <a:headEnd type="none" w="med" len="med"/>
+                      <a:tailEnd type="none" w="med" len="med"/>
+                    </a:lnB>
+                    <a:lnTlToBr>
+                      <a:noFill/>
+                    </a:lnTlToBr>
+                    <a:lnBlToTr>
+                      <a:noFill/>
+                    </a:lnBlToTr>
+                    <a:solidFill>
+                      <a:schemeClr val="accent1"/>
+                    </a:solidFill>
+                  </a:tcPr>
+                </a:tc>
+                <a:tc>
+                  <a:txBody>
+                    <a:bodyPr/>
+                    <a:lstStyle>
+                      <a:lvl1pPr defTabSz="457200" eaLnBrk="0" hangingPunct="0">
+                        <a:spcBef>
+                          <a:spcPct val="20000"/>
+                        </a:spcBef>
+                        <a:buClr>
+                          <a:schemeClr val="accent1"/>
+                        </a:buClr>
+                        <a:buSzPct val="65000"/>
+                        <a:buFont typeface="Wingdings" charset="2"/>
+                        <a:defRPr sz="2600">
+                          <a:solidFill>
+                            <a:schemeClr val="tx1"/>
+                          </a:solidFill>
+                          <a:latin typeface="Arial" charset="0"/>
+                          <a:ea typeface="ＭＳ Ｐゴシック" charset="-128"/>
+                        </a:defRPr>
+                      </a:lvl1pPr>
+                      <a:lvl2pPr marL="742950" indent="-285750" defTabSz="457200" eaLnBrk="0" hangingPunct="0">
+                        <a:spcBef>
+                          <a:spcPct val="20000"/>
+                        </a:spcBef>
+                        <a:buClr>
+                          <a:schemeClr val="accent2"/>
+                        </a:buClr>
+                        <a:buSzPct val="60000"/>
+                        <a:buFont typeface="Wingdings" charset="2"/>
+                        <a:defRPr sz="2200">
+                          <a:solidFill>
+                            <a:schemeClr val="tx1"/>
+                          </a:solidFill>
+                          <a:latin typeface="Arial" charset="0"/>
+                          <a:ea typeface="ＭＳ Ｐゴシック" charset="-128"/>
+                        </a:defRPr>
+                      </a:lvl2pPr>
+                      <a:lvl3pPr marL="1143000" indent="-228600" defTabSz="457200" eaLnBrk="0" hangingPunct="0">
+                        <a:spcBef>
+                          <a:spcPct val="20000"/>
+                        </a:spcBef>
+                        <a:buClr>
+                          <a:schemeClr val="accent1"/>
+                        </a:buClr>
+                        <a:buSzPct val="65000"/>
+                        <a:buFont typeface="Wingdings" charset="2"/>
+                        <a:defRPr sz="2000">
+                          <a:solidFill>
+                            <a:schemeClr val="tx1"/>
+                          </a:solidFill>
+                          <a:latin typeface="Arial" charset="0"/>
+                          <a:ea typeface="ＭＳ Ｐゴシック" charset="-128"/>
+                        </a:defRPr>
+                      </a:lvl3pPr>
+                      <a:lvl4pPr marL="1600200" indent="-228600" defTabSz="457200" eaLnBrk="0" hangingPunct="0">
+                        <a:spcBef>
+                          <a:spcPct val="20000"/>
+                        </a:spcBef>
+                        <a:buClr>
+                          <a:schemeClr val="accent2"/>
+                        </a:buClr>
+                        <a:buSzPct val="70000"/>
+                        <a:buFont typeface="Wingdings" charset="2"/>
+                        <a:defRPr>
+                          <a:solidFill>
+                            <a:schemeClr val="tx1"/>
+                          </a:solidFill>
+                          <a:latin typeface="Arial" charset="0"/>
+                          <a:ea typeface="ＭＳ Ｐゴシック" charset="-128"/>
+                        </a:defRPr>
+                      </a:lvl4pPr>
+                      <a:lvl5pPr marL="2057400" indent="-228600" defTabSz="457200" eaLnBrk="0" hangingPunct="0">
+                        <a:spcBef>
+                          <a:spcPct val="20000"/>
+                        </a:spcBef>
+                        <a:buClr>
+                          <a:schemeClr val="accent1"/>
+                        </a:buClr>
+                        <a:buSzPct val="75000"/>
+                        <a:buFont typeface="Wingdings" charset="2"/>
+                        <a:defRPr>
+                          <a:solidFill>
+                            <a:schemeClr val="tx1"/>
+                          </a:solidFill>
+                          <a:latin typeface="Arial" charset="0"/>
+                          <a:ea typeface="ＭＳ Ｐゴシック" charset="-128"/>
+                        </a:defRPr>
+                      </a:lvl5pPr>
+                      <a:lvl6pPr marL="2514600" indent="-228600" defTabSz="457200" eaLnBrk="0" fontAlgn="base" hangingPunct="0">
+                        <a:spcBef>
+                          <a:spcPct val="20000"/>
+                        </a:spcBef>
+                        <a:spcAft>
+                          <a:spcPct val="0"/>
+                        </a:spcAft>
+                        <a:buClr>
+                          <a:schemeClr val="accent1"/>
+                        </a:buClr>
+                        <a:buSzPct val="75000"/>
+                        <a:buFont typeface="Wingdings" charset="2"/>
+                        <a:defRPr>
+                          <a:solidFill>
+                            <a:schemeClr val="tx1"/>
+                          </a:solidFill>
+                          <a:latin typeface="Arial" charset="0"/>
+                          <a:ea typeface="ＭＳ Ｐゴシック" charset="-128"/>
+                        </a:defRPr>
+                      </a:lvl6pPr>
+                      <a:lvl7pPr marL="2971800" indent="-228600" defTabSz="457200" eaLnBrk="0" fontAlgn="base" hangingPunct="0">
+                        <a:spcBef>
+                          <a:spcPct val="20000"/>
+                        </a:spcBef>
+                        <a:spcAft>
+                          <a:spcPct val="0"/>
+                        </a:spcAft>
+                        <a:buClr>
+                          <a:schemeClr val="accent1"/>
+                        </a:buClr>
+                        <a:buSzPct val="75000"/>
+                        <a:buFont typeface="Wingdings" charset="2"/>
+                        <a:defRPr>
+                          <a:solidFill>
+                            <a:schemeClr val="tx1"/>
+                          </a:solidFill>
+                          <a:latin typeface="Arial" charset="0"/>
+                          <a:ea typeface="ＭＳ Ｐゴシック" charset="-128"/>
+                        </a:defRPr>
+                      </a:lvl7pPr>
+                      <a:lvl8pPr marL="3429000" indent="-228600" defTabSz="457200" eaLnBrk="0" fontAlgn="base" hangingPunct="0">
+                        <a:spcBef>
+                          <a:spcPct val="20000"/>
+                        </a:spcBef>
+                        <a:spcAft>
+                          <a:spcPct val="0"/>
+                        </a:spcAft>
+                        <a:buClr>
+                          <a:schemeClr val="accent1"/>
+                        </a:buClr>
+                        <a:buSzPct val="75000"/>
+                        <a:buFont typeface="Wingdings" charset="2"/>
+                        <a:defRPr>
+                          <a:solidFill>
+                            <a:schemeClr val="tx1"/>
+                          </a:solidFill>
+                          <a:latin typeface="Arial" charset="0"/>
+                          <a:ea typeface="ＭＳ Ｐゴシック" charset="-128"/>
+                        </a:defRPr>
+                      </a:lvl8pPr>
+                      <a:lvl9pPr marL="3886200" indent="-228600" defTabSz="457200" eaLnBrk="0" fontAlgn="base" hangingPunct="0">
+                        <a:spcBef>
+                          <a:spcPct val="20000"/>
+                        </a:spcBef>
+                        <a:spcAft>
+                          <a:spcPct val="0"/>
+                        </a:spcAft>
+                        <a:buClr>
+                          <a:schemeClr val="accent1"/>
+                        </a:buClr>
+                        <a:buSzPct val="75000"/>
+                        <a:buFont typeface="Wingdings" charset="2"/>
+                        <a:defRPr>
+                          <a:solidFill>
+                            <a:schemeClr val="tx1"/>
+                          </a:solidFill>
+                          <a:latin typeface="Arial" charset="0"/>
+                          <a:ea typeface="ＭＳ Ｐゴシック" charset="-128"/>
+                        </a:defRPr>
+                      </a:lvl9pPr>
+                    </a:lstStyle>
+                    <a:p>
+                      <a:pPr marL="0" marR="0" lvl="0" indent="0" algn="l" defTabSz="457200" rtl="0" eaLnBrk="1" fontAlgn="base" latinLnBrk="0" hangingPunct="1">
+                        <a:lnSpc>
+                          <a:spcPct val="100000"/>
+                        </a:lnSpc>
+                        <a:spcBef>
+                          <a:spcPct val="0"/>
+                        </a:spcBef>
+                        <a:spcAft>
+                          <a:spcPct val="0"/>
+                        </a:spcAft>
+                        <a:buClrTx/>
+                        <a:buSzTx/>
+                        <a:buFontTx/>
+                        <a:buNone/>
+                        <a:tabLst/>
+                      </a:pPr>
+                      <a:r>
+                        <a:rPr kumimoji="0" lang="en-US" altLang="x-none" sz="1800" b="1" i="0" u="none" strike="noStrike" cap="none" normalizeH="0" baseline="0">
+                          <a:ln>
+                            <a:noFill/>
+                          </a:ln>
+                          <a:solidFill>
+                            <a:srgbClr val="FFFFFF"/>
+                          </a:solidFill>
+                          <a:effectLst/>
+                          <a:latin typeface="Arial" charset="0"/>
+                          <a:ea typeface="ＭＳ Ｐゴシック" charset="-128"/>
+                        </a:rPr>
+                        <a:t>Equation</a:t>
+                      </a:r>
+                    </a:p>
+                  </a:txBody>
+                  <a:tcPr horzOverflow="overflow">
+                    <a:lnL w="12700" cap="flat" cmpd="sng" algn="ctr">
+                      <a:solidFill>
+                        <a:schemeClr val="bg1"/>
+                      </a:solidFill>
+                      <a:prstDash val="solid"/>
+                      <a:round/>
+                      <a:headEnd type="none" w="med" len="med"/>
+                      <a:tailEnd type="none" w="med" len="med"/>
+                    </a:lnL>
+                    <a:lnR w="12700" cap="flat" cmpd="sng" algn="ctr">
+                      <a:solidFill>
+                        <a:schemeClr val="bg1"/>
+                      </a:solidFill>
+                      <a:prstDash val="solid"/>
+                      <a:round/>
+                      <a:headEnd type="none" w="med" len="med"/>
+                      <a:tailEnd type="none" w="med" len="med"/>
+                    </a:lnR>
+                    <a:lnT w="12700" cap="flat" cmpd="sng" algn="ctr">
+                      <a:solidFill>
+                        <a:schemeClr val="bg1"/>
+                      </a:solidFill>
+                      <a:prstDash val="solid"/>
+                      <a:round/>
+                      <a:headEnd type="none" w="med" len="med"/>
+                      <a:tailEnd type="none" w="med" len="med"/>
+                    </a:lnT>
+                    <a:lnB w="38100" cap="flat" cmpd="sng" algn="ctr">
+                      <a:solidFill>
+                        <a:schemeClr val="bg1"/>
+                      </a:solidFill>
+                      <a:prstDash val="solid"/>
+                      <a:round/>
+                      <a:headEnd type="none" w="med" len="med"/>
+                      <a:tailEnd type="none" w="med" len="med"/>
+                    </a:lnB>
+                    <a:lnTlToBr>
+                      <a:noFill/>
+                    </a:lnTlToBr>
+                    <a:lnBlToTr>
+                      <a:noFill/>
+                    </a:lnBlToTr>
+                    <a:solidFill>
+                      <a:schemeClr val="accent1"/>
+                    </a:solidFill>
+                  </a:tcPr>
+                </a:tc>
+                <a:extLst>
+                  <a:ext uri="{0D108BD9-81ED-4DB2-BD59-A6C34878D82A}">
+                    <a16:rowId xmlns:a16="http://schemas.microsoft.com/office/drawing/2014/main" val="10000"/>
+                  </a:ext>
+                </a:extLst>
+              </a:tr>
+              <a:tr h="914400">
+                <a:tc>
+                  <a:txBody>
+                    <a:bodyPr/>
+                    <a:lstStyle>
+                      <a:lvl1pPr defTabSz="457200" eaLnBrk="0" hangingPunct="0">
+                        <a:spcBef>
+                          <a:spcPct val="20000"/>
+                        </a:spcBef>
+                        <a:buClr>
+                          <a:schemeClr val="accent1"/>
+                        </a:buClr>
+                        <a:buSzPct val="65000"/>
+                        <a:buFont typeface="Wingdings" charset="2"/>
+                        <a:defRPr sz="2600">
+                          <a:solidFill>
+                            <a:schemeClr val="tx1"/>
+                          </a:solidFill>
+                          <a:latin typeface="Arial" charset="0"/>
+                          <a:ea typeface="ＭＳ Ｐゴシック" charset="-128"/>
+                        </a:defRPr>
+                      </a:lvl1pPr>
+                      <a:lvl2pPr marL="742950" indent="-285750" defTabSz="457200" eaLnBrk="0" hangingPunct="0">
+                        <a:spcBef>
+                          <a:spcPct val="20000"/>
+                        </a:spcBef>
+                        <a:buClr>
+                          <a:schemeClr val="accent2"/>
+                        </a:buClr>
+                        <a:buSzPct val="60000"/>
+                        <a:buFont typeface="Wingdings" charset="2"/>
+                        <a:defRPr sz="2200">
+                          <a:solidFill>
+                            <a:schemeClr val="tx1"/>
+                          </a:solidFill>
+                          <a:latin typeface="Arial" charset="0"/>
+                          <a:ea typeface="ＭＳ Ｐゴシック" charset="-128"/>
+                        </a:defRPr>
+                      </a:lvl2pPr>
+                      <a:lvl3pPr marL="1143000" indent="-228600" defTabSz="457200" eaLnBrk="0" hangingPunct="0">
+                        <a:spcBef>
+                          <a:spcPct val="20000"/>
+                        </a:spcBef>
+                        <a:buClr>
+                          <a:schemeClr val="accent1"/>
+                        </a:buClr>
+                        <a:buSzPct val="65000"/>
+                        <a:buFont typeface="Wingdings" charset="2"/>
+                        <a:defRPr sz="2000">
+                          <a:solidFill>
+                            <a:schemeClr val="tx1"/>
+                          </a:solidFill>
+                          <a:latin typeface="Arial" charset="0"/>
+                          <a:ea typeface="ＭＳ Ｐゴシック" charset="-128"/>
+                        </a:defRPr>
+                      </a:lvl3pPr>
+                      <a:lvl4pPr marL="1600200" indent="-228600" defTabSz="457200" eaLnBrk="0" hangingPunct="0">
+                        <a:spcBef>
+                          <a:spcPct val="20000"/>
+                        </a:spcBef>
+                        <a:buClr>
+                          <a:schemeClr val="accent2"/>
+                        </a:buClr>
+                        <a:buSzPct val="70000"/>
+                        <a:buFont typeface="Wingdings" charset="2"/>
+                        <a:defRPr>
+                          <a:solidFill>
+                            <a:schemeClr val="tx1"/>
+                          </a:solidFill>
+                          <a:latin typeface="Arial" charset="0"/>
+                          <a:ea typeface="ＭＳ Ｐゴシック" charset="-128"/>
+                        </a:defRPr>
+                      </a:lvl4pPr>
+                      <a:lvl5pPr marL="2057400" indent="-228600" defTabSz="457200" eaLnBrk="0" hangingPunct="0">
+                        <a:spcBef>
+                          <a:spcPct val="20000"/>
+                        </a:spcBef>
+                        <a:buClr>
+                          <a:schemeClr val="accent1"/>
+                        </a:buClr>
+                        <a:buSzPct val="75000"/>
+                        <a:buFont typeface="Wingdings" charset="2"/>
+                        <a:defRPr>
+                          <a:solidFill>
+                            <a:schemeClr val="tx1"/>
+                          </a:solidFill>
+                          <a:latin typeface="Arial" charset="0"/>
+                          <a:ea typeface="ＭＳ Ｐゴシック" charset="-128"/>
+                        </a:defRPr>
+                      </a:lvl5pPr>
+                      <a:lvl6pPr marL="2514600" indent="-228600" defTabSz="457200" eaLnBrk="0" fontAlgn="base" hangingPunct="0">
+                        <a:spcBef>
+                          <a:spcPct val="20000"/>
+                        </a:spcBef>
+                        <a:spcAft>
+                          <a:spcPct val="0"/>
+                        </a:spcAft>
+                        <a:buClr>
+                          <a:schemeClr val="accent1"/>
+                        </a:buClr>
+                        <a:buSzPct val="75000"/>
+                        <a:buFont typeface="Wingdings" charset="2"/>
+                        <a:defRPr>
+                          <a:solidFill>
+                            <a:schemeClr val="tx1"/>
+                          </a:solidFill>
+                          <a:latin typeface="Arial" charset="0"/>
+                          <a:ea typeface="ＭＳ Ｐゴシック" charset="-128"/>
+                        </a:defRPr>
+                      </a:lvl6pPr>
+                      <a:lvl7pPr marL="2971800" indent="-228600" defTabSz="457200" eaLnBrk="0" fontAlgn="base" hangingPunct="0">
+                        <a:spcBef>
+                          <a:spcPct val="20000"/>
+                        </a:spcBef>
+                        <a:spcAft>
+                          <a:spcPct val="0"/>
+                        </a:spcAft>
+                        <a:buClr>
+                          <a:schemeClr val="accent1"/>
+                        </a:buClr>
+                        <a:buSzPct val="75000"/>
+                        <a:buFont typeface="Wingdings" charset="2"/>
+                        <a:defRPr>
+                          <a:solidFill>
+                            <a:schemeClr val="tx1"/>
+                          </a:solidFill>
+                          <a:latin typeface="Arial" charset="0"/>
+                          <a:ea typeface="ＭＳ Ｐゴシック" charset="-128"/>
+                        </a:defRPr>
+                      </a:lvl7pPr>
+                      <a:lvl8pPr marL="3429000" indent="-228600" defTabSz="457200" eaLnBrk="0" fontAlgn="base" hangingPunct="0">
+                        <a:spcBef>
+                          <a:spcPct val="20000"/>
+                        </a:spcBef>
+                        <a:spcAft>
+                          <a:spcPct val="0"/>
+                        </a:spcAft>
+                        <a:buClr>
+                          <a:schemeClr val="accent1"/>
+                        </a:buClr>
+                        <a:buSzPct val="75000"/>
+                        <a:buFont typeface="Wingdings" charset="2"/>
+                        <a:defRPr>
+                          <a:solidFill>
+                            <a:schemeClr val="tx1"/>
+                          </a:solidFill>
+                          <a:latin typeface="Arial" charset="0"/>
+                          <a:ea typeface="ＭＳ Ｐゴシック" charset="-128"/>
+                        </a:defRPr>
+                      </a:lvl8pPr>
+                      <a:lvl9pPr marL="3886200" indent="-228600" defTabSz="457200" eaLnBrk="0" fontAlgn="base" hangingPunct="0">
+                        <a:spcBef>
+                          <a:spcPct val="20000"/>
+                        </a:spcBef>
+                        <a:spcAft>
+                          <a:spcPct val="0"/>
+                        </a:spcAft>
+                        <a:buClr>
+                          <a:schemeClr val="accent1"/>
+                        </a:buClr>
+                        <a:buSzPct val="75000"/>
+                        <a:buFont typeface="Wingdings" charset="2"/>
+                        <a:defRPr>
+                          <a:solidFill>
+                            <a:schemeClr val="tx1"/>
+                          </a:solidFill>
+                          <a:latin typeface="Arial" charset="0"/>
+                          <a:ea typeface="ＭＳ Ｐゴシック" charset="-128"/>
+                        </a:defRPr>
+                      </a:lvl9pPr>
+                    </a:lstStyle>
+                    <a:p>
+                      <a:pPr marL="0" marR="0" lvl="0" indent="0" algn="l" defTabSz="457200" rtl="0" eaLnBrk="1" fontAlgn="base" latinLnBrk="0" hangingPunct="1">
+                        <a:lnSpc>
+                          <a:spcPct val="100000"/>
+                        </a:lnSpc>
+                        <a:spcBef>
+                          <a:spcPct val="0"/>
+                        </a:spcBef>
+                        <a:spcAft>
+                          <a:spcPct val="0"/>
+                        </a:spcAft>
+                        <a:buClrTx/>
+                        <a:buSzTx/>
+                        <a:buFontTx/>
+                        <a:buNone/>
+                        <a:tabLst/>
+                      </a:pPr>
+                      <a:r>
+                        <a:rPr kumimoji="0" lang="en-US" altLang="x-none" sz="1800" b="0" i="0" u="none" strike="noStrike" cap="none" normalizeH="0" baseline="0">
+                          <a:ln>
+                            <a:noFill/>
+                          </a:ln>
+                          <a:solidFill>
+                            <a:srgbClr val="000000"/>
+                          </a:solidFill>
+                          <a:effectLst/>
+                          <a:latin typeface="Arial" charset="0"/>
+                          <a:ea typeface="ＭＳ Ｐゴシック" charset="-128"/>
+                        </a:rPr>
+                        <a:t>00</a:t>
+                      </a:r>
+                      <a:r>
+                        <a:rPr kumimoji="0" lang="en-US" altLang="x-none" sz="1800" b="0" i="0" u="none" strike="noStrike" cap="none" normalizeH="0" baseline="-25000">
+                          <a:ln>
+                            <a:noFill/>
+                          </a:ln>
+                          <a:solidFill>
+                            <a:srgbClr val="000000"/>
+                          </a:solidFill>
+                          <a:effectLst/>
+                          <a:latin typeface="Arial" charset="0"/>
+                          <a:ea typeface="ＭＳ Ｐゴシック" charset="-128"/>
+                        </a:rPr>
+                        <a:t>H	</a:t>
+                      </a:r>
+                    </a:p>
+                  </a:txBody>
+                  <a:tcPr horzOverflow="overflow">
+                    <a:lnL w="12700" cap="flat" cmpd="sng" algn="ctr">
+                      <a:solidFill>
+                        <a:schemeClr val="bg1"/>
+                      </a:solidFill>
+                      <a:prstDash val="solid"/>
+                      <a:round/>
+                      <a:headEnd type="none" w="med" len="med"/>
+                      <a:tailEnd type="none" w="med" len="med"/>
+                    </a:lnL>
+                    <a:lnR w="12700" cap="flat" cmpd="sng" algn="ctr">
+                      <a:solidFill>
+                        <a:schemeClr val="bg1"/>
+                      </a:solidFill>
+                      <a:prstDash val="solid"/>
+                      <a:round/>
+                      <a:headEnd type="none" w="med" len="med"/>
+                      <a:tailEnd type="none" w="med" len="med"/>
+                    </a:lnR>
+                    <a:lnT w="38100" cap="flat" cmpd="sng" algn="ctr">
+                      <a:solidFill>
+                        <a:schemeClr val="bg1"/>
+                      </a:solidFill>
+                      <a:prstDash val="solid"/>
+                      <a:round/>
+                      <a:headEnd type="none" w="med" len="med"/>
+                      <a:tailEnd type="none" w="med" len="med"/>
+                    </a:lnT>
+                    <a:lnB w="12700" cap="flat" cmpd="sng" algn="ctr">
+                      <a:solidFill>
+                        <a:schemeClr val="bg1"/>
+                      </a:solidFill>
+                      <a:prstDash val="solid"/>
+                      <a:round/>
+                      <a:headEnd type="none" w="med" len="med"/>
+                      <a:tailEnd type="none" w="med" len="med"/>
+                    </a:lnB>
+                    <a:lnTlToBr>
+                      <a:noFill/>
+                    </a:lnTlToBr>
+                    <a:lnBlToTr>
+                      <a:noFill/>
+                    </a:lnBlToTr>
+                    <a:solidFill>
+                      <a:srgbClr val="CBDEDE"/>
+                    </a:solidFill>
+                  </a:tcPr>
+                </a:tc>
+                <a:tc>
+                  <a:txBody>
+                    <a:bodyPr/>
+                    <a:lstStyle>
+                      <a:lvl1pPr defTabSz="457200" eaLnBrk="0" hangingPunct="0">
+                        <a:spcBef>
+                          <a:spcPct val="20000"/>
+                        </a:spcBef>
+                        <a:buClr>
+                          <a:schemeClr val="accent1"/>
+                        </a:buClr>
+                        <a:buSzPct val="65000"/>
+                        <a:buFont typeface="Wingdings" charset="2"/>
+                        <a:defRPr sz="2600">
+                          <a:solidFill>
+                            <a:schemeClr val="tx1"/>
+                          </a:solidFill>
+                          <a:latin typeface="Arial" charset="0"/>
+                          <a:ea typeface="ＭＳ Ｐゴシック" charset="-128"/>
+                        </a:defRPr>
+                      </a:lvl1pPr>
+                      <a:lvl2pPr marL="742950" indent="-285750" defTabSz="457200" eaLnBrk="0" hangingPunct="0">
+                        <a:spcBef>
+                          <a:spcPct val="20000"/>
+                        </a:spcBef>
+                        <a:buClr>
+                          <a:schemeClr val="accent2"/>
+                        </a:buClr>
+                        <a:buSzPct val="60000"/>
+                        <a:buFont typeface="Wingdings" charset="2"/>
+                        <a:defRPr sz="2200">
+                          <a:solidFill>
+                            <a:schemeClr val="tx1"/>
+                          </a:solidFill>
+                          <a:latin typeface="Arial" charset="0"/>
+                          <a:ea typeface="ＭＳ Ｐゴシック" charset="-128"/>
+                        </a:defRPr>
+                      </a:lvl2pPr>
+                      <a:lvl3pPr marL="1143000" indent="-228600" defTabSz="457200" eaLnBrk="0" hangingPunct="0">
+                        <a:spcBef>
+                          <a:spcPct val="20000"/>
+                        </a:spcBef>
+                        <a:buClr>
+                          <a:schemeClr val="accent1"/>
+                        </a:buClr>
+                        <a:buSzPct val="65000"/>
+                        <a:buFont typeface="Wingdings" charset="2"/>
+                        <a:defRPr sz="2000">
+                          <a:solidFill>
+                            <a:schemeClr val="tx1"/>
+                          </a:solidFill>
+                          <a:latin typeface="Arial" charset="0"/>
+                          <a:ea typeface="ＭＳ Ｐゴシック" charset="-128"/>
+                        </a:defRPr>
+                      </a:lvl3pPr>
+                      <a:lvl4pPr marL="1600200" indent="-228600" defTabSz="457200" eaLnBrk="0" hangingPunct="0">
+                        <a:spcBef>
+                          <a:spcPct val="20000"/>
+                        </a:spcBef>
+                        <a:buClr>
+                          <a:schemeClr val="accent2"/>
+                        </a:buClr>
+                        <a:buSzPct val="70000"/>
+                        <a:buFont typeface="Wingdings" charset="2"/>
+                        <a:defRPr>
+                          <a:solidFill>
+                            <a:schemeClr val="tx1"/>
+                          </a:solidFill>
+                          <a:latin typeface="Arial" charset="0"/>
+                          <a:ea typeface="ＭＳ Ｐゴシック" charset="-128"/>
+                        </a:defRPr>
+                      </a:lvl4pPr>
+                      <a:lvl5pPr marL="2057400" indent="-228600" defTabSz="457200" eaLnBrk="0" hangingPunct="0">
+                        <a:spcBef>
+                          <a:spcPct val="20000"/>
+                        </a:spcBef>
+                        <a:buClr>
+                          <a:schemeClr val="accent1"/>
+                        </a:buClr>
+                        <a:buSzPct val="75000"/>
+                        <a:buFont typeface="Wingdings" charset="2"/>
+                        <a:defRPr>
+                          <a:solidFill>
+                            <a:schemeClr val="tx1"/>
+                          </a:solidFill>
+                          <a:latin typeface="Arial" charset="0"/>
+                          <a:ea typeface="ＭＳ Ｐゴシック" charset="-128"/>
+                        </a:defRPr>
+                      </a:lvl5pPr>
+                      <a:lvl6pPr marL="2514600" indent="-228600" defTabSz="457200" eaLnBrk="0" fontAlgn="base" hangingPunct="0">
+                        <a:spcBef>
+                          <a:spcPct val="20000"/>
+                        </a:spcBef>
+                        <a:spcAft>
+                          <a:spcPct val="0"/>
+                        </a:spcAft>
+                        <a:buClr>
+                          <a:schemeClr val="accent1"/>
+                        </a:buClr>
+                        <a:buSzPct val="75000"/>
+                        <a:buFont typeface="Wingdings" charset="2"/>
+                        <a:defRPr>
+                          <a:solidFill>
+                            <a:schemeClr val="tx1"/>
+                          </a:solidFill>
+                          <a:latin typeface="Arial" charset="0"/>
+                          <a:ea typeface="ＭＳ Ｐゴシック" charset="-128"/>
+                        </a:defRPr>
+                      </a:lvl6pPr>
+                      <a:lvl7pPr marL="2971800" indent="-228600" defTabSz="457200" eaLnBrk="0" fontAlgn="base" hangingPunct="0">
+                        <a:spcBef>
+                          <a:spcPct val="20000"/>
+                        </a:spcBef>
+                        <a:spcAft>
+                          <a:spcPct val="0"/>
+                        </a:spcAft>
+                        <a:buClr>
+                          <a:schemeClr val="accent1"/>
+                        </a:buClr>
+                        <a:buSzPct val="75000"/>
+                        <a:buFont typeface="Wingdings" charset="2"/>
+                        <a:defRPr>
+                          <a:solidFill>
+                            <a:schemeClr val="tx1"/>
+                          </a:solidFill>
+                          <a:latin typeface="Arial" charset="0"/>
+                          <a:ea typeface="ＭＳ Ｐゴシック" charset="-128"/>
+                        </a:defRPr>
+                      </a:lvl7pPr>
+                      <a:lvl8pPr marL="3429000" indent="-228600" defTabSz="457200" eaLnBrk="0" fontAlgn="base" hangingPunct="0">
+                        <a:spcBef>
+                          <a:spcPct val="20000"/>
+                        </a:spcBef>
+                        <a:spcAft>
+                          <a:spcPct val="0"/>
+                        </a:spcAft>
+                        <a:buClr>
+                          <a:schemeClr val="accent1"/>
+                        </a:buClr>
+                        <a:buSzPct val="75000"/>
+                        <a:buFont typeface="Wingdings" charset="2"/>
+                        <a:defRPr>
+                          <a:solidFill>
+                            <a:schemeClr val="tx1"/>
+                          </a:solidFill>
+                          <a:latin typeface="Arial" charset="0"/>
+                          <a:ea typeface="ＭＳ Ｐゴシック" charset="-128"/>
+                        </a:defRPr>
+                      </a:lvl8pPr>
+                      <a:lvl9pPr marL="3886200" indent="-228600" defTabSz="457200" eaLnBrk="0" fontAlgn="base" hangingPunct="0">
+                        <a:spcBef>
+                          <a:spcPct val="20000"/>
+                        </a:spcBef>
+                        <a:spcAft>
+                          <a:spcPct val="0"/>
+                        </a:spcAft>
+                        <a:buClr>
+                          <a:schemeClr val="accent1"/>
+                        </a:buClr>
+                        <a:buSzPct val="75000"/>
+                        <a:buFont typeface="Wingdings" charset="2"/>
+                        <a:defRPr>
+                          <a:solidFill>
+                            <a:schemeClr val="tx1"/>
+                          </a:solidFill>
+                          <a:latin typeface="Arial" charset="0"/>
+                          <a:ea typeface="ＭＳ Ｐゴシック" charset="-128"/>
+                        </a:defRPr>
+                      </a:lvl9pPr>
+                    </a:lstStyle>
+                    <a:p>
+                      <a:pPr marL="0" marR="0" lvl="0" indent="0" algn="l" defTabSz="457200" rtl="0" eaLnBrk="1" fontAlgn="base" latinLnBrk="0" hangingPunct="1">
+                        <a:lnSpc>
+                          <a:spcPct val="100000"/>
+                        </a:lnSpc>
+                        <a:spcBef>
+                          <a:spcPct val="0"/>
+                        </a:spcBef>
+                        <a:spcAft>
+                          <a:spcPct val="0"/>
+                        </a:spcAft>
+                        <a:buClrTx/>
+                        <a:buSzTx/>
+                        <a:buFontTx/>
+                        <a:buNone/>
+                        <a:tabLst/>
+                      </a:pPr>
+                      <a:r>
+                        <a:rPr kumimoji="0" lang="en-US" altLang="x-none" sz="1800" b="0" i="0" u="none" strike="noStrike" cap="none" normalizeH="0" baseline="0">
+                          <a:ln>
+                            <a:noFill/>
+                          </a:ln>
+                          <a:solidFill>
+                            <a:srgbClr val="000000"/>
+                          </a:solidFill>
+                          <a:effectLst/>
+                          <a:latin typeface="Arial" charset="0"/>
+                          <a:ea typeface="ＭＳ Ｐゴシック" charset="-128"/>
+                        </a:rPr>
+                        <a:t>zero, −0	</a:t>
+                      </a:r>
+                    </a:p>
+                  </a:txBody>
+                  <a:tcPr horzOverflow="overflow">
+                    <a:lnL w="12700" cap="flat" cmpd="sng" algn="ctr">
+                      <a:solidFill>
+                        <a:schemeClr val="bg1"/>
+                      </a:solidFill>
+                      <a:prstDash val="solid"/>
+                      <a:round/>
+                      <a:headEnd type="none" w="med" len="med"/>
+                      <a:tailEnd type="none" w="med" len="med"/>
+                    </a:lnL>
+                    <a:lnR w="12700" cap="flat" cmpd="sng" algn="ctr">
+                      <a:solidFill>
+                        <a:schemeClr val="bg1"/>
+                      </a:solidFill>
+                      <a:prstDash val="solid"/>
+                      <a:round/>
+                      <a:headEnd type="none" w="med" len="med"/>
+                      <a:tailEnd type="none" w="med" len="med"/>
+                    </a:lnR>
+                    <a:lnT w="38100" cap="flat" cmpd="sng" algn="ctr">
+                      <a:solidFill>
+                        <a:schemeClr val="bg1"/>
+                      </a:solidFill>
+                      <a:prstDash val="solid"/>
+                      <a:round/>
+                      <a:headEnd type="none" w="med" len="med"/>
+                      <a:tailEnd type="none" w="med" len="med"/>
+                    </a:lnT>
+                    <a:lnB w="12700" cap="flat" cmpd="sng" algn="ctr">
+                      <a:solidFill>
+                        <a:schemeClr val="bg1"/>
+                      </a:solidFill>
+                      <a:prstDash val="solid"/>
+                      <a:round/>
+                      <a:headEnd type="none" w="med" len="med"/>
+                      <a:tailEnd type="none" w="med" len="med"/>
+                    </a:lnB>
+                    <a:lnTlToBr>
+                      <a:noFill/>
+                    </a:lnTlToBr>
+                    <a:lnBlToTr>
+                      <a:noFill/>
+                    </a:lnBlToTr>
+                    <a:solidFill>
+                      <a:srgbClr val="CBDEDE"/>
+                    </a:solidFill>
+                  </a:tcPr>
+                </a:tc>
+                <a:tc>
+                  <a:txBody>
+                    <a:bodyPr/>
+                    <a:lstStyle>
+                      <a:lvl1pPr defTabSz="457200" eaLnBrk="0" hangingPunct="0">
+                        <a:spcBef>
+                          <a:spcPct val="20000"/>
+                        </a:spcBef>
+                        <a:buClr>
+                          <a:schemeClr val="accent1"/>
+                        </a:buClr>
+                        <a:buSzPct val="65000"/>
+                        <a:buFont typeface="Wingdings" charset="2"/>
+                        <a:defRPr sz="2600">
+                          <a:solidFill>
+                            <a:schemeClr val="tx1"/>
+                          </a:solidFill>
+                          <a:latin typeface="Arial" charset="0"/>
+                          <a:ea typeface="ＭＳ Ｐゴシック" charset="-128"/>
+                        </a:defRPr>
+                      </a:lvl1pPr>
+                      <a:lvl2pPr marL="742950" indent="-285750" defTabSz="457200" eaLnBrk="0" hangingPunct="0">
+                        <a:spcBef>
+                          <a:spcPct val="20000"/>
+                        </a:spcBef>
+                        <a:buClr>
+                          <a:schemeClr val="accent2"/>
+                        </a:buClr>
+                        <a:buSzPct val="60000"/>
+                        <a:buFont typeface="Wingdings" charset="2"/>
+                        <a:defRPr sz="2200">
+                          <a:solidFill>
+                            <a:schemeClr val="tx1"/>
+                          </a:solidFill>
+                          <a:latin typeface="Arial" charset="0"/>
+                          <a:ea typeface="ＭＳ Ｐゴシック" charset="-128"/>
+                        </a:defRPr>
+                      </a:lvl2pPr>
+                      <a:lvl3pPr marL="1143000" indent="-228600" defTabSz="457200" eaLnBrk="0" hangingPunct="0">
+                        <a:spcBef>
+                          <a:spcPct val="20000"/>
+                        </a:spcBef>
+                        <a:buClr>
+                          <a:schemeClr val="accent1"/>
+                        </a:buClr>
+                        <a:buSzPct val="65000"/>
+                        <a:buFont typeface="Wingdings" charset="2"/>
+                        <a:defRPr sz="2000">
+                          <a:solidFill>
+                            <a:schemeClr val="tx1"/>
+                          </a:solidFill>
+                          <a:latin typeface="Arial" charset="0"/>
+                          <a:ea typeface="ＭＳ Ｐゴシック" charset="-128"/>
+                        </a:defRPr>
+                      </a:lvl3pPr>
+                      <a:lvl4pPr marL="1600200" indent="-228600" defTabSz="457200" eaLnBrk="0" hangingPunct="0">
+                        <a:spcBef>
+                          <a:spcPct val="20000"/>
+                        </a:spcBef>
+                        <a:buClr>
+                          <a:schemeClr val="accent2"/>
+                        </a:buClr>
+                        <a:buSzPct val="70000"/>
+                        <a:buFont typeface="Wingdings" charset="2"/>
+                        <a:defRPr>
+                          <a:solidFill>
+                            <a:schemeClr val="tx1"/>
+                          </a:solidFill>
+                          <a:latin typeface="Arial" charset="0"/>
+                          <a:ea typeface="ＭＳ Ｐゴシック" charset="-128"/>
+                        </a:defRPr>
+                      </a:lvl4pPr>
+                      <a:lvl5pPr marL="2057400" indent="-228600" defTabSz="457200" eaLnBrk="0" hangingPunct="0">
+                        <a:spcBef>
+                          <a:spcPct val="20000"/>
+                        </a:spcBef>
+                        <a:buClr>
+                          <a:schemeClr val="accent1"/>
+                        </a:buClr>
+                        <a:buSzPct val="75000"/>
+                        <a:buFont typeface="Wingdings" charset="2"/>
+                        <a:defRPr>
+                          <a:solidFill>
+                            <a:schemeClr val="tx1"/>
+                          </a:solidFill>
+                          <a:latin typeface="Arial" charset="0"/>
+                          <a:ea typeface="ＭＳ Ｐゴシック" charset="-128"/>
+                        </a:defRPr>
+                      </a:lvl5pPr>
+                      <a:lvl6pPr marL="2514600" indent="-228600" defTabSz="457200" eaLnBrk="0" fontAlgn="base" hangingPunct="0">
+                        <a:spcBef>
+                          <a:spcPct val="20000"/>
+                        </a:spcBef>
+                        <a:spcAft>
+                          <a:spcPct val="0"/>
+                        </a:spcAft>
+                        <a:buClr>
+                          <a:schemeClr val="accent1"/>
+                        </a:buClr>
+                        <a:buSzPct val="75000"/>
+                        <a:buFont typeface="Wingdings" charset="2"/>
+                        <a:defRPr>
+                          <a:solidFill>
+                            <a:schemeClr val="tx1"/>
+                          </a:solidFill>
+                          <a:latin typeface="Arial" charset="0"/>
+                          <a:ea typeface="ＭＳ Ｐゴシック" charset="-128"/>
+                        </a:defRPr>
+                      </a:lvl6pPr>
+                      <a:lvl7pPr marL="2971800" indent="-228600" defTabSz="457200" eaLnBrk="0" fontAlgn="base" hangingPunct="0">
+                        <a:spcBef>
+                          <a:spcPct val="20000"/>
+                        </a:spcBef>
+                        <a:spcAft>
+                          <a:spcPct val="0"/>
+                        </a:spcAft>
+                        <a:buClr>
+                          <a:schemeClr val="accent1"/>
+                        </a:buClr>
+                        <a:buSzPct val="75000"/>
+                        <a:buFont typeface="Wingdings" charset="2"/>
+                        <a:defRPr>
+                          <a:solidFill>
+                            <a:schemeClr val="tx1"/>
+                          </a:solidFill>
+                          <a:latin typeface="Arial" charset="0"/>
+                          <a:ea typeface="ＭＳ Ｐゴシック" charset="-128"/>
+                        </a:defRPr>
+                      </a:lvl7pPr>
+                      <a:lvl8pPr marL="3429000" indent="-228600" defTabSz="457200" eaLnBrk="0" fontAlgn="base" hangingPunct="0">
+                        <a:spcBef>
+                          <a:spcPct val="20000"/>
+                        </a:spcBef>
+                        <a:spcAft>
+                          <a:spcPct val="0"/>
+                        </a:spcAft>
+                        <a:buClr>
+                          <a:schemeClr val="accent1"/>
+                        </a:buClr>
+                        <a:buSzPct val="75000"/>
+                        <a:buFont typeface="Wingdings" charset="2"/>
+                        <a:defRPr>
+                          <a:solidFill>
+                            <a:schemeClr val="tx1"/>
+                          </a:solidFill>
+                          <a:latin typeface="Arial" charset="0"/>
+                          <a:ea typeface="ＭＳ Ｐゴシック" charset="-128"/>
+                        </a:defRPr>
+                      </a:lvl8pPr>
+                      <a:lvl9pPr marL="3886200" indent="-228600" defTabSz="457200" eaLnBrk="0" fontAlgn="base" hangingPunct="0">
+                        <a:spcBef>
+                          <a:spcPct val="20000"/>
+                        </a:spcBef>
+                        <a:spcAft>
+                          <a:spcPct val="0"/>
+                        </a:spcAft>
+                        <a:buClr>
+                          <a:schemeClr val="accent1"/>
+                        </a:buClr>
+                        <a:buSzPct val="75000"/>
+                        <a:buFont typeface="Wingdings" charset="2"/>
+                        <a:defRPr>
+                          <a:solidFill>
+                            <a:schemeClr val="tx1"/>
+                          </a:solidFill>
+                          <a:latin typeface="Arial" charset="0"/>
+                          <a:ea typeface="ＭＳ Ｐゴシック" charset="-128"/>
+                        </a:defRPr>
+                      </a:lvl9pPr>
+                    </a:lstStyle>
+                    <a:p>
+                      <a:pPr marL="0" marR="0" lvl="0" indent="0" algn="l" defTabSz="457200" rtl="0" eaLnBrk="1" fontAlgn="base" latinLnBrk="0" hangingPunct="1">
+                        <a:lnSpc>
+                          <a:spcPct val="100000"/>
+                        </a:lnSpc>
+                        <a:spcBef>
+                          <a:spcPct val="0"/>
+                        </a:spcBef>
+                        <a:spcAft>
+                          <a:spcPct val="0"/>
+                        </a:spcAft>
+                        <a:buClrTx/>
+                        <a:buSzTx/>
+                        <a:buFontTx/>
+                        <a:buNone/>
+                        <a:tabLst/>
+                      </a:pPr>
+                      <a:r>
+                        <a:rPr kumimoji="0" lang="en-US" altLang="x-none" sz="1800" b="0" i="0" u="none" strike="noStrike" cap="none" normalizeH="0" baseline="0">
+                          <a:ln>
+                            <a:noFill/>
+                          </a:ln>
+                          <a:solidFill>
+                            <a:srgbClr val="000000"/>
+                          </a:solidFill>
+                          <a:effectLst/>
+                          <a:latin typeface="Arial" charset="0"/>
+                          <a:ea typeface="ＭＳ Ｐゴシック" charset="-128"/>
+                        </a:rPr>
+                        <a:t>subnormal numbers</a:t>
+                      </a:r>
+                    </a:p>
+                  </a:txBody>
+                  <a:tcPr horzOverflow="overflow">
+                    <a:lnL w="12700" cap="flat" cmpd="sng" algn="ctr">
+                      <a:solidFill>
+                        <a:schemeClr val="bg1"/>
+                      </a:solidFill>
+                      <a:prstDash val="solid"/>
+                      <a:round/>
+                      <a:headEnd type="none" w="med" len="med"/>
+                      <a:tailEnd type="none" w="med" len="med"/>
+                    </a:lnL>
+                    <a:lnR w="12700" cap="flat" cmpd="sng" algn="ctr">
+                      <a:solidFill>
+                        <a:schemeClr val="bg1"/>
+                      </a:solidFill>
+                      <a:prstDash val="solid"/>
+                      <a:round/>
+                      <a:headEnd type="none" w="med" len="med"/>
+                      <a:tailEnd type="none" w="med" len="med"/>
+                    </a:lnR>
+                    <a:lnT w="38100" cap="flat" cmpd="sng" algn="ctr">
+                      <a:solidFill>
+                        <a:schemeClr val="bg1"/>
+                      </a:solidFill>
+                      <a:prstDash val="solid"/>
+                      <a:round/>
+                      <a:headEnd type="none" w="med" len="med"/>
+                      <a:tailEnd type="none" w="med" len="med"/>
+                    </a:lnT>
+                    <a:lnB w="12700" cap="flat" cmpd="sng" algn="ctr">
+                      <a:solidFill>
+                        <a:schemeClr val="bg1"/>
+                      </a:solidFill>
+                      <a:prstDash val="solid"/>
+                      <a:round/>
+                      <a:headEnd type="none" w="med" len="med"/>
+                      <a:tailEnd type="none" w="med" len="med"/>
+                    </a:lnB>
+                    <a:lnTlToBr>
+                      <a:noFill/>
+                    </a:lnTlToBr>
+                    <a:lnBlToTr>
+                      <a:noFill/>
+                    </a:lnBlToTr>
+                    <a:solidFill>
+                      <a:srgbClr val="CBDEDE"/>
+                    </a:solidFill>
+                  </a:tcPr>
+                </a:tc>
+                <a:tc>
+                  <a:txBody>
+                    <a:bodyPr/>
+                    <a:lstStyle>
+                      <a:lvl1pPr defTabSz="457200" eaLnBrk="0" hangingPunct="0">
+                        <a:spcBef>
+                          <a:spcPct val="20000"/>
+                        </a:spcBef>
+                        <a:buClr>
+                          <a:schemeClr val="accent1"/>
+                        </a:buClr>
+                        <a:buSzPct val="65000"/>
+                        <a:buFont typeface="Wingdings" charset="2"/>
+                        <a:defRPr sz="2600">
+                          <a:solidFill>
+                            <a:schemeClr val="tx1"/>
+                          </a:solidFill>
+                          <a:latin typeface="Arial" charset="0"/>
+                          <a:ea typeface="ＭＳ Ｐゴシック" charset="-128"/>
+                        </a:defRPr>
+                      </a:lvl1pPr>
+                      <a:lvl2pPr marL="742950" indent="-285750" defTabSz="457200" eaLnBrk="0" hangingPunct="0">
+                        <a:spcBef>
+                          <a:spcPct val="20000"/>
+                        </a:spcBef>
+                        <a:buClr>
+                          <a:schemeClr val="accent2"/>
+                        </a:buClr>
+                        <a:buSzPct val="60000"/>
+                        <a:buFont typeface="Wingdings" charset="2"/>
+                        <a:defRPr sz="2200">
+                          <a:solidFill>
+                            <a:schemeClr val="tx1"/>
+                          </a:solidFill>
+                          <a:latin typeface="Arial" charset="0"/>
+                          <a:ea typeface="ＭＳ Ｐゴシック" charset="-128"/>
+                        </a:defRPr>
+                      </a:lvl2pPr>
+                      <a:lvl3pPr marL="1143000" indent="-228600" defTabSz="457200" eaLnBrk="0" hangingPunct="0">
+                        <a:spcBef>
+                          <a:spcPct val="20000"/>
+                        </a:spcBef>
+                        <a:buClr>
+                          <a:schemeClr val="accent1"/>
+                        </a:buClr>
+                        <a:buSzPct val="65000"/>
+                        <a:buFont typeface="Wingdings" charset="2"/>
+                        <a:defRPr sz="2000">
+                          <a:solidFill>
+                            <a:schemeClr val="tx1"/>
+                          </a:solidFill>
+                          <a:latin typeface="Arial" charset="0"/>
+                          <a:ea typeface="ＭＳ Ｐゴシック" charset="-128"/>
+                        </a:defRPr>
+                      </a:lvl3pPr>
+                      <a:lvl4pPr marL="1600200" indent="-228600" defTabSz="457200" eaLnBrk="0" hangingPunct="0">
+                        <a:spcBef>
+                          <a:spcPct val="20000"/>
+                        </a:spcBef>
+                        <a:buClr>
+                          <a:schemeClr val="accent2"/>
+                        </a:buClr>
+                        <a:buSzPct val="70000"/>
+                        <a:buFont typeface="Wingdings" charset="2"/>
+                        <a:defRPr>
+                          <a:solidFill>
+                            <a:schemeClr val="tx1"/>
+                          </a:solidFill>
+                          <a:latin typeface="Arial" charset="0"/>
+                          <a:ea typeface="ＭＳ Ｐゴシック" charset="-128"/>
+                        </a:defRPr>
+                      </a:lvl4pPr>
+                      <a:lvl5pPr marL="2057400" indent="-228600" defTabSz="457200" eaLnBrk="0" hangingPunct="0">
+                        <a:spcBef>
+                          <a:spcPct val="20000"/>
+                        </a:spcBef>
+                        <a:buClr>
+                          <a:schemeClr val="accent1"/>
+                        </a:buClr>
+                        <a:buSzPct val="75000"/>
+                        <a:buFont typeface="Wingdings" charset="2"/>
+                        <a:defRPr>
+                          <a:solidFill>
+                            <a:schemeClr val="tx1"/>
+                          </a:solidFill>
+                          <a:latin typeface="Arial" charset="0"/>
+                          <a:ea typeface="ＭＳ Ｐゴシック" charset="-128"/>
+                        </a:defRPr>
+                      </a:lvl5pPr>
+                      <a:lvl6pPr marL="2514600" indent="-228600" defTabSz="457200" eaLnBrk="0" fontAlgn="base" hangingPunct="0">
+                        <a:spcBef>
+                          <a:spcPct val="20000"/>
+                        </a:spcBef>
+                        <a:spcAft>
+                          <a:spcPct val="0"/>
+                        </a:spcAft>
+                        <a:buClr>
+                          <a:schemeClr val="accent1"/>
+                        </a:buClr>
+                        <a:buSzPct val="75000"/>
+                        <a:buFont typeface="Wingdings" charset="2"/>
+                        <a:defRPr>
+                          <a:solidFill>
+                            <a:schemeClr val="tx1"/>
+                          </a:solidFill>
+                          <a:latin typeface="Arial" charset="0"/>
+                          <a:ea typeface="ＭＳ Ｐゴシック" charset="-128"/>
+                        </a:defRPr>
+                      </a:lvl6pPr>
+                      <a:lvl7pPr marL="2971800" indent="-228600" defTabSz="457200" eaLnBrk="0" fontAlgn="base" hangingPunct="0">
+                        <a:spcBef>
+                          <a:spcPct val="20000"/>
+                        </a:spcBef>
+                        <a:spcAft>
+                          <a:spcPct val="0"/>
+                        </a:spcAft>
+                        <a:buClr>
+                          <a:schemeClr val="accent1"/>
+                        </a:buClr>
+                        <a:buSzPct val="75000"/>
+                        <a:buFont typeface="Wingdings" charset="2"/>
+                        <a:defRPr>
+                          <a:solidFill>
+                            <a:schemeClr val="tx1"/>
+                          </a:solidFill>
+                          <a:latin typeface="Arial" charset="0"/>
+                          <a:ea typeface="ＭＳ Ｐゴシック" charset="-128"/>
+                        </a:defRPr>
+                      </a:lvl7pPr>
+                      <a:lvl8pPr marL="3429000" indent="-228600" defTabSz="457200" eaLnBrk="0" fontAlgn="base" hangingPunct="0">
+                        <a:spcBef>
+                          <a:spcPct val="20000"/>
+                        </a:spcBef>
+                        <a:spcAft>
+                          <a:spcPct val="0"/>
+                        </a:spcAft>
+                        <a:buClr>
+                          <a:schemeClr val="accent1"/>
+                        </a:buClr>
+                        <a:buSzPct val="75000"/>
+                        <a:buFont typeface="Wingdings" charset="2"/>
+                        <a:defRPr>
+                          <a:solidFill>
+                            <a:schemeClr val="tx1"/>
+                          </a:solidFill>
+                          <a:latin typeface="Arial" charset="0"/>
+                          <a:ea typeface="ＭＳ Ｐゴシック" charset="-128"/>
+                        </a:defRPr>
+                      </a:lvl8pPr>
+                      <a:lvl9pPr marL="3886200" indent="-228600" defTabSz="457200" eaLnBrk="0" fontAlgn="base" hangingPunct="0">
+                        <a:spcBef>
+                          <a:spcPct val="20000"/>
+                        </a:spcBef>
+                        <a:spcAft>
+                          <a:spcPct val="0"/>
+                        </a:spcAft>
+                        <a:buClr>
+                          <a:schemeClr val="accent1"/>
+                        </a:buClr>
+                        <a:buSzPct val="75000"/>
+                        <a:buFont typeface="Wingdings" charset="2"/>
+                        <a:defRPr>
+                          <a:solidFill>
+                            <a:schemeClr val="tx1"/>
+                          </a:solidFill>
+                          <a:latin typeface="Arial" charset="0"/>
+                          <a:ea typeface="ＭＳ Ｐゴシック" charset="-128"/>
+                        </a:defRPr>
+                      </a:lvl9pPr>
+                    </a:lstStyle>
+                    <a:p>
+                      <a:pPr marL="0" marR="0" lvl="0" indent="0" algn="l" defTabSz="457200" rtl="0" eaLnBrk="1" fontAlgn="base" latinLnBrk="0" hangingPunct="1">
+                        <a:lnSpc>
+                          <a:spcPct val="100000"/>
+                        </a:lnSpc>
+                        <a:spcBef>
+                          <a:spcPct val="0"/>
+                        </a:spcBef>
+                        <a:spcAft>
+                          <a:spcPct val="0"/>
+                        </a:spcAft>
+                        <a:buClrTx/>
+                        <a:buSzTx/>
+                        <a:buFontTx/>
+                        <a:buNone/>
+                        <a:tabLst/>
+                      </a:pPr>
+                      <a:r>
+                        <a:rPr kumimoji="0" lang="en-US" altLang="x-none" sz="1800" b="0" i="0" u="none" strike="noStrike" cap="none" normalizeH="0" baseline="0">
+                          <a:ln>
+                            <a:noFill/>
+                          </a:ln>
+                          <a:solidFill>
+                            <a:srgbClr val="000000"/>
+                          </a:solidFill>
+                          <a:effectLst/>
+                          <a:latin typeface="Arial" charset="0"/>
+                          <a:ea typeface="ＭＳ Ｐゴシック" charset="-128"/>
+                        </a:rPr>
+                        <a:t>(-1)</a:t>
+                      </a:r>
+                      <a:r>
+                        <a:rPr kumimoji="0" lang="en-US" altLang="x-none" sz="1800" b="0" i="0" u="none" strike="noStrike" cap="none" normalizeH="0" baseline="30000">
+                          <a:ln>
+                            <a:noFill/>
+                          </a:ln>
+                          <a:solidFill>
+                            <a:srgbClr val="000000"/>
+                          </a:solidFill>
+                          <a:effectLst/>
+                          <a:latin typeface="Arial" charset="0"/>
+                          <a:ea typeface="ＭＳ Ｐゴシック" charset="-128"/>
+                        </a:rPr>
+                        <a:t>signbits</a:t>
+                      </a:r>
+                      <a:r>
+                        <a:rPr kumimoji="0" lang="en-US" altLang="x-none" sz="1800" b="0" i="0" u="none" strike="noStrike" cap="none" normalizeH="0" baseline="0">
+                          <a:ln>
+                            <a:noFill/>
+                          </a:ln>
+                          <a:solidFill>
+                            <a:srgbClr val="000000"/>
+                          </a:solidFill>
+                          <a:effectLst/>
+                          <a:latin typeface="Arial" charset="0"/>
+                          <a:ea typeface="ＭＳ Ｐゴシック" charset="-128"/>
+                        </a:rPr>
+                        <a:t>×2</a:t>
+                      </a:r>
+                      <a:r>
+                        <a:rPr kumimoji="0" lang="en-US" altLang="x-none" sz="1800" b="0" i="0" u="none" strike="noStrike" cap="none" normalizeH="0" baseline="30000">
+                          <a:ln>
+                            <a:noFill/>
+                          </a:ln>
+                          <a:solidFill>
+                            <a:srgbClr val="000000"/>
+                          </a:solidFill>
+                          <a:effectLst/>
+                          <a:latin typeface="Arial" charset="0"/>
+                          <a:ea typeface="ＭＳ Ｐゴシック" charset="-128"/>
+                        </a:rPr>
+                        <a:t>−126</a:t>
+                      </a:r>
+                      <a:r>
+                        <a:rPr kumimoji="0" lang="en-US" altLang="x-none" sz="1800" b="0" i="0" u="none" strike="noStrike" cap="none" normalizeH="0" baseline="0">
+                          <a:ln>
+                            <a:noFill/>
+                          </a:ln>
+                          <a:solidFill>
+                            <a:srgbClr val="000000"/>
+                          </a:solidFill>
+                          <a:effectLst/>
+                          <a:latin typeface="Arial" charset="0"/>
+                          <a:ea typeface="ＭＳ Ｐゴシック" charset="-128"/>
+                        </a:rPr>
+                        <a:t>× 0.significandbits	</a:t>
+                      </a:r>
+                    </a:p>
+                    <a:p>
+                      <a:pPr marL="0" marR="0" lvl="0" indent="0" algn="l" defTabSz="457200" rtl="0" eaLnBrk="1" fontAlgn="base" latinLnBrk="0" hangingPunct="1">
+                        <a:lnSpc>
+                          <a:spcPct val="100000"/>
+                        </a:lnSpc>
+                        <a:spcBef>
+                          <a:spcPct val="0"/>
+                        </a:spcBef>
+                        <a:spcAft>
+                          <a:spcPct val="0"/>
+                        </a:spcAft>
+                        <a:buClrTx/>
+                        <a:buSzTx/>
+                        <a:buFontTx/>
+                        <a:buNone/>
+                        <a:tabLst/>
+                      </a:pPr>
+                      <a:endParaRPr kumimoji="0" lang="en-US" altLang="x-none" sz="1800" b="0" i="0" u="none" strike="noStrike" cap="none" normalizeH="0" baseline="0">
+                        <a:ln>
+                          <a:noFill/>
+                        </a:ln>
+                        <a:solidFill>
+                          <a:srgbClr val="000000"/>
+                        </a:solidFill>
+                        <a:effectLst/>
+                        <a:latin typeface="Arial" charset="0"/>
+                        <a:ea typeface="ＭＳ Ｐゴシック" charset="-128"/>
+                      </a:endParaRPr>
+                    </a:p>
+                  </a:txBody>
+                  <a:tcPr horzOverflow="overflow">
+                    <a:lnL w="12700" cap="flat" cmpd="sng" algn="ctr">
+                      <a:solidFill>
+                        <a:schemeClr val="bg1"/>
+                      </a:solidFill>
+                      <a:prstDash val="solid"/>
+                      <a:round/>
+                      <a:headEnd type="none" w="med" len="med"/>
+                      <a:tailEnd type="none" w="med" len="med"/>
+                    </a:lnL>
+                    <a:lnR w="12700" cap="flat" cmpd="sng" algn="ctr">
+                      <a:solidFill>
+                        <a:schemeClr val="bg1"/>
+                      </a:solidFill>
+                      <a:prstDash val="solid"/>
+                      <a:round/>
+                      <a:headEnd type="none" w="med" len="med"/>
+                      <a:tailEnd type="none" w="med" len="med"/>
+                    </a:lnR>
+                    <a:lnT w="38100" cap="flat" cmpd="sng" algn="ctr">
+                      <a:solidFill>
+                        <a:schemeClr val="bg1"/>
+                      </a:solidFill>
+                      <a:prstDash val="solid"/>
+                      <a:round/>
+                      <a:headEnd type="none" w="med" len="med"/>
+                      <a:tailEnd type="none" w="med" len="med"/>
+                    </a:lnT>
+                    <a:lnB w="12700" cap="flat" cmpd="sng" algn="ctr">
+                      <a:solidFill>
+                        <a:schemeClr val="bg1"/>
+                      </a:solidFill>
+                      <a:prstDash val="solid"/>
+                      <a:round/>
+                      <a:headEnd type="none" w="med" len="med"/>
+                      <a:tailEnd type="none" w="med" len="med"/>
+                    </a:lnB>
+                    <a:lnTlToBr>
+                      <a:noFill/>
+                    </a:lnTlToBr>
+                    <a:lnBlToTr>
+                      <a:noFill/>
+                    </a:lnBlToTr>
+                    <a:solidFill>
+                      <a:srgbClr val="CBDEDE"/>
+                    </a:solidFill>
+                  </a:tcPr>
+                </a:tc>
+                <a:extLst>
+                  <a:ext uri="{0D108BD9-81ED-4DB2-BD59-A6C34878D82A}">
+                    <a16:rowId xmlns:a16="http://schemas.microsoft.com/office/drawing/2014/main" val="10001"/>
+                  </a:ext>
+                </a:extLst>
+              </a:tr>
+              <a:tr h="914400">
+                <a:tc>
+                  <a:txBody>
+                    <a:bodyPr/>
+                    <a:lstStyle>
+                      <a:lvl1pPr defTabSz="457200" eaLnBrk="0" hangingPunct="0">
+                        <a:spcBef>
+                          <a:spcPct val="20000"/>
+                        </a:spcBef>
+                        <a:buClr>
+                          <a:schemeClr val="accent1"/>
+                        </a:buClr>
+                        <a:buSzPct val="65000"/>
+                        <a:buFont typeface="Wingdings" charset="2"/>
+                        <a:defRPr sz="2600">
+                          <a:solidFill>
+                            <a:schemeClr val="tx1"/>
+                          </a:solidFill>
+                          <a:latin typeface="Arial" charset="0"/>
+                          <a:ea typeface="ＭＳ Ｐゴシック" charset="-128"/>
+                        </a:defRPr>
+                      </a:lvl1pPr>
+                      <a:lvl2pPr marL="742950" indent="-285750" defTabSz="457200" eaLnBrk="0" hangingPunct="0">
+                        <a:spcBef>
+                          <a:spcPct val="20000"/>
+                        </a:spcBef>
+                        <a:buClr>
+                          <a:schemeClr val="accent2"/>
+                        </a:buClr>
+                        <a:buSzPct val="60000"/>
+                        <a:buFont typeface="Wingdings" charset="2"/>
+                        <a:defRPr sz="2200">
+                          <a:solidFill>
+                            <a:schemeClr val="tx1"/>
+                          </a:solidFill>
+                          <a:latin typeface="Arial" charset="0"/>
+                          <a:ea typeface="ＭＳ Ｐゴシック" charset="-128"/>
+                        </a:defRPr>
+                      </a:lvl2pPr>
+                      <a:lvl3pPr marL="1143000" indent="-228600" defTabSz="457200" eaLnBrk="0" hangingPunct="0">
+                        <a:spcBef>
+                          <a:spcPct val="20000"/>
+                        </a:spcBef>
+                        <a:buClr>
+                          <a:schemeClr val="accent1"/>
+                        </a:buClr>
+                        <a:buSzPct val="65000"/>
+                        <a:buFont typeface="Wingdings" charset="2"/>
+                        <a:defRPr sz="2000">
+                          <a:solidFill>
+                            <a:schemeClr val="tx1"/>
+                          </a:solidFill>
+                          <a:latin typeface="Arial" charset="0"/>
+                          <a:ea typeface="ＭＳ Ｐゴシック" charset="-128"/>
+                        </a:defRPr>
+                      </a:lvl3pPr>
+                      <a:lvl4pPr marL="1600200" indent="-228600" defTabSz="457200" eaLnBrk="0" hangingPunct="0">
+                        <a:spcBef>
+                          <a:spcPct val="20000"/>
+                        </a:spcBef>
+                        <a:buClr>
+                          <a:schemeClr val="accent2"/>
+                        </a:buClr>
+                        <a:buSzPct val="70000"/>
+                        <a:buFont typeface="Wingdings" charset="2"/>
+                        <a:defRPr>
+                          <a:solidFill>
+                            <a:schemeClr val="tx1"/>
+                          </a:solidFill>
+                          <a:latin typeface="Arial" charset="0"/>
+                          <a:ea typeface="ＭＳ Ｐゴシック" charset="-128"/>
+                        </a:defRPr>
+                      </a:lvl4pPr>
+                      <a:lvl5pPr marL="2057400" indent="-228600" defTabSz="457200" eaLnBrk="0" hangingPunct="0">
+                        <a:spcBef>
+                          <a:spcPct val="20000"/>
+                        </a:spcBef>
+                        <a:buClr>
+                          <a:schemeClr val="accent1"/>
+                        </a:buClr>
+                        <a:buSzPct val="75000"/>
+                        <a:buFont typeface="Wingdings" charset="2"/>
+                        <a:defRPr>
+                          <a:solidFill>
+                            <a:schemeClr val="tx1"/>
+                          </a:solidFill>
+                          <a:latin typeface="Arial" charset="0"/>
+                          <a:ea typeface="ＭＳ Ｐゴシック" charset="-128"/>
+                        </a:defRPr>
+                      </a:lvl5pPr>
+                      <a:lvl6pPr marL="2514600" indent="-228600" defTabSz="457200" eaLnBrk="0" fontAlgn="base" hangingPunct="0">
+                        <a:spcBef>
+                          <a:spcPct val="20000"/>
+                        </a:spcBef>
+                        <a:spcAft>
+                          <a:spcPct val="0"/>
+                        </a:spcAft>
+                        <a:buClr>
+                          <a:schemeClr val="accent1"/>
+                        </a:buClr>
+                        <a:buSzPct val="75000"/>
+                        <a:buFont typeface="Wingdings" charset="2"/>
+                        <a:defRPr>
+                          <a:solidFill>
+                            <a:schemeClr val="tx1"/>
+                          </a:solidFill>
+                          <a:latin typeface="Arial" charset="0"/>
+                          <a:ea typeface="ＭＳ Ｐゴシック" charset="-128"/>
+                        </a:defRPr>
+                      </a:lvl6pPr>
+                      <a:lvl7pPr marL="2971800" indent="-228600" defTabSz="457200" eaLnBrk="0" fontAlgn="base" hangingPunct="0">
+                        <a:spcBef>
+                          <a:spcPct val="20000"/>
+                        </a:spcBef>
+                        <a:spcAft>
+                          <a:spcPct val="0"/>
+                        </a:spcAft>
+                        <a:buClr>
+                          <a:schemeClr val="accent1"/>
+                        </a:buClr>
+                        <a:buSzPct val="75000"/>
+                        <a:buFont typeface="Wingdings" charset="2"/>
+                        <a:defRPr>
+                          <a:solidFill>
+                            <a:schemeClr val="tx1"/>
+                          </a:solidFill>
+                          <a:latin typeface="Arial" charset="0"/>
+                          <a:ea typeface="ＭＳ Ｐゴシック" charset="-128"/>
+                        </a:defRPr>
+                      </a:lvl7pPr>
+                      <a:lvl8pPr marL="3429000" indent="-228600" defTabSz="457200" eaLnBrk="0" fontAlgn="base" hangingPunct="0">
+                        <a:spcBef>
+                          <a:spcPct val="20000"/>
+                        </a:spcBef>
+                        <a:spcAft>
+                          <a:spcPct val="0"/>
+                        </a:spcAft>
+                        <a:buClr>
+                          <a:schemeClr val="accent1"/>
+                        </a:buClr>
+                        <a:buSzPct val="75000"/>
+                        <a:buFont typeface="Wingdings" charset="2"/>
+                        <a:defRPr>
+                          <a:solidFill>
+                            <a:schemeClr val="tx1"/>
+                          </a:solidFill>
+                          <a:latin typeface="Arial" charset="0"/>
+                          <a:ea typeface="ＭＳ Ｐゴシック" charset="-128"/>
+                        </a:defRPr>
+                      </a:lvl8pPr>
+                      <a:lvl9pPr marL="3886200" indent="-228600" defTabSz="457200" eaLnBrk="0" fontAlgn="base" hangingPunct="0">
+                        <a:spcBef>
+                          <a:spcPct val="20000"/>
+                        </a:spcBef>
+                        <a:spcAft>
+                          <a:spcPct val="0"/>
+                        </a:spcAft>
+                        <a:buClr>
+                          <a:schemeClr val="accent1"/>
+                        </a:buClr>
+                        <a:buSzPct val="75000"/>
+                        <a:buFont typeface="Wingdings" charset="2"/>
+                        <a:defRPr>
+                          <a:solidFill>
+                            <a:schemeClr val="tx1"/>
+                          </a:solidFill>
+                          <a:latin typeface="Arial" charset="0"/>
+                          <a:ea typeface="ＭＳ Ｐゴシック" charset="-128"/>
+                        </a:defRPr>
+                      </a:lvl9pPr>
+                    </a:lstStyle>
+                    <a:p>
+                      <a:pPr marL="0" marR="0" lvl="0" indent="0" algn="l" defTabSz="457200" rtl="0" eaLnBrk="1" fontAlgn="base" latinLnBrk="0" hangingPunct="1">
+                        <a:lnSpc>
+                          <a:spcPct val="100000"/>
+                        </a:lnSpc>
+                        <a:spcBef>
+                          <a:spcPct val="0"/>
+                        </a:spcBef>
+                        <a:spcAft>
+                          <a:spcPct val="0"/>
+                        </a:spcAft>
+                        <a:buClrTx/>
+                        <a:buSzTx/>
+                        <a:buFontTx/>
+                        <a:buNone/>
+                        <a:tabLst/>
+                      </a:pPr>
+                      <a:r>
+                        <a:rPr kumimoji="0" lang="en-US" altLang="x-none" sz="1800" b="0" i="0" u="none" strike="noStrike" cap="none" normalizeH="0" baseline="0">
+                          <a:ln>
+                            <a:noFill/>
+                          </a:ln>
+                          <a:solidFill>
+                            <a:srgbClr val="000000"/>
+                          </a:solidFill>
+                          <a:effectLst/>
+                          <a:latin typeface="Arial" charset="0"/>
+                          <a:ea typeface="ＭＳ Ｐゴシック" charset="-128"/>
+                        </a:rPr>
+                        <a:t>01</a:t>
+                      </a:r>
+                      <a:r>
+                        <a:rPr kumimoji="0" lang="en-US" altLang="x-none" sz="1800" b="0" i="0" u="none" strike="noStrike" cap="none" normalizeH="0" baseline="-25000">
+                          <a:ln>
+                            <a:noFill/>
+                          </a:ln>
+                          <a:solidFill>
+                            <a:srgbClr val="000000"/>
+                          </a:solidFill>
+                          <a:effectLst/>
+                          <a:latin typeface="Arial" charset="0"/>
+                          <a:ea typeface="ＭＳ Ｐゴシック" charset="-128"/>
+                        </a:rPr>
+                        <a:t>H</a:t>
+                      </a:r>
+                      <a:r>
+                        <a:rPr kumimoji="0" lang="en-US" altLang="x-none" sz="1800" b="0" i="0" u="none" strike="noStrike" cap="none" normalizeH="0" baseline="0">
+                          <a:ln>
+                            <a:noFill/>
+                          </a:ln>
+                          <a:solidFill>
+                            <a:srgbClr val="000000"/>
+                          </a:solidFill>
+                          <a:effectLst/>
+                          <a:latin typeface="Arial" charset="0"/>
+                          <a:ea typeface="ＭＳ Ｐゴシック" charset="-128"/>
+                        </a:rPr>
+                        <a:t>, ..., FE</a:t>
+                      </a:r>
+                      <a:r>
+                        <a:rPr kumimoji="0" lang="en-US" altLang="x-none" sz="1800" b="0" i="0" u="none" strike="noStrike" cap="none" normalizeH="0" baseline="-25000">
+                          <a:ln>
+                            <a:noFill/>
+                          </a:ln>
+                          <a:solidFill>
+                            <a:srgbClr val="000000"/>
+                          </a:solidFill>
+                          <a:effectLst/>
+                          <a:latin typeface="Arial" charset="0"/>
+                          <a:ea typeface="ＭＳ Ｐゴシック" charset="-128"/>
+                        </a:rPr>
+                        <a:t>H</a:t>
+                      </a:r>
+                      <a:endParaRPr kumimoji="0" lang="en-US" altLang="x-none" sz="1800" b="0" i="0" u="none" strike="noStrike" cap="none" normalizeH="0" baseline="0">
+                        <a:ln>
+                          <a:noFill/>
+                        </a:ln>
+                        <a:solidFill>
+                          <a:srgbClr val="000000"/>
+                        </a:solidFill>
+                        <a:effectLst/>
+                        <a:latin typeface="Arial" charset="0"/>
+                        <a:ea typeface="ＭＳ Ｐゴシック" charset="-128"/>
+                      </a:endParaRPr>
+                    </a:p>
+                  </a:txBody>
+                  <a:tcPr horzOverflow="overflow">
+                    <a:lnL w="12700" cap="flat" cmpd="sng" algn="ctr">
+                      <a:solidFill>
+                        <a:schemeClr val="bg1"/>
+                      </a:solidFill>
+                      <a:prstDash val="solid"/>
+                      <a:round/>
+                      <a:headEnd type="none" w="med" len="med"/>
+                      <a:tailEnd type="none" w="med" len="med"/>
+                    </a:lnL>
+                    <a:lnR w="12700" cap="flat" cmpd="sng" algn="ctr">
+                      <a:solidFill>
+                        <a:schemeClr val="bg1"/>
+                      </a:solidFill>
+                      <a:prstDash val="solid"/>
+                      <a:round/>
+                      <a:headEnd type="none" w="med" len="med"/>
+                      <a:tailEnd type="none" w="med" len="med"/>
+                    </a:lnR>
+                    <a:lnT w="12700" cap="flat" cmpd="sng" algn="ctr">
+                      <a:solidFill>
+                        <a:schemeClr val="bg1"/>
+                      </a:solidFill>
+                      <a:prstDash val="solid"/>
+                      <a:round/>
+                      <a:headEnd type="none" w="med" len="med"/>
+                      <a:tailEnd type="none" w="med" len="med"/>
+                    </a:lnT>
+                    <a:lnB w="12700" cap="flat" cmpd="sng" algn="ctr">
+                      <a:solidFill>
+                        <a:schemeClr val="bg1"/>
+                      </a:solidFill>
+                      <a:prstDash val="solid"/>
+                      <a:round/>
+                      <a:headEnd type="none" w="med" len="med"/>
+                      <a:tailEnd type="none" w="med" len="med"/>
+                    </a:lnB>
+                    <a:lnTlToBr>
+                      <a:noFill/>
+                    </a:lnTlToBr>
+                    <a:lnBlToTr>
+                      <a:noFill/>
+                    </a:lnBlToTr>
+                    <a:solidFill>
+                      <a:srgbClr val="E7EFEF"/>
+                    </a:solidFill>
+                  </a:tcPr>
+                </a:tc>
+                <a:tc>
+                  <a:txBody>
+                    <a:bodyPr/>
+                    <a:lstStyle>
+                      <a:lvl1pPr defTabSz="457200" eaLnBrk="0" hangingPunct="0">
+                        <a:spcBef>
+                          <a:spcPct val="20000"/>
+                        </a:spcBef>
+                        <a:buClr>
+                          <a:schemeClr val="accent1"/>
+                        </a:buClr>
+                        <a:buSzPct val="65000"/>
+                        <a:buFont typeface="Wingdings" charset="2"/>
+                        <a:defRPr sz="2600">
+                          <a:solidFill>
+                            <a:schemeClr val="tx1"/>
+                          </a:solidFill>
+                          <a:latin typeface="Arial" charset="0"/>
+                          <a:ea typeface="ＭＳ Ｐゴシック" charset="-128"/>
+                        </a:defRPr>
+                      </a:lvl1pPr>
+                      <a:lvl2pPr marL="742950" indent="-285750" defTabSz="457200" eaLnBrk="0" hangingPunct="0">
+                        <a:spcBef>
+                          <a:spcPct val="20000"/>
+                        </a:spcBef>
+                        <a:buClr>
+                          <a:schemeClr val="accent2"/>
+                        </a:buClr>
+                        <a:buSzPct val="60000"/>
+                        <a:buFont typeface="Wingdings" charset="2"/>
+                        <a:defRPr sz="2200">
+                          <a:solidFill>
+                            <a:schemeClr val="tx1"/>
+                          </a:solidFill>
+                          <a:latin typeface="Arial" charset="0"/>
+                          <a:ea typeface="ＭＳ Ｐゴシック" charset="-128"/>
+                        </a:defRPr>
+                      </a:lvl2pPr>
+                      <a:lvl3pPr marL="1143000" indent="-228600" defTabSz="457200" eaLnBrk="0" hangingPunct="0">
+                        <a:spcBef>
+                          <a:spcPct val="20000"/>
+                        </a:spcBef>
+                        <a:buClr>
+                          <a:schemeClr val="accent1"/>
+                        </a:buClr>
+                        <a:buSzPct val="65000"/>
+                        <a:buFont typeface="Wingdings" charset="2"/>
+                        <a:defRPr sz="2000">
+                          <a:solidFill>
+                            <a:schemeClr val="tx1"/>
+                          </a:solidFill>
+                          <a:latin typeface="Arial" charset="0"/>
+                          <a:ea typeface="ＭＳ Ｐゴシック" charset="-128"/>
+                        </a:defRPr>
+                      </a:lvl3pPr>
+                      <a:lvl4pPr marL="1600200" indent="-228600" defTabSz="457200" eaLnBrk="0" hangingPunct="0">
+                        <a:spcBef>
+                          <a:spcPct val="20000"/>
+                        </a:spcBef>
+                        <a:buClr>
+                          <a:schemeClr val="accent2"/>
+                        </a:buClr>
+                        <a:buSzPct val="70000"/>
+                        <a:buFont typeface="Wingdings" charset="2"/>
+                        <a:defRPr>
+                          <a:solidFill>
+                            <a:schemeClr val="tx1"/>
+                          </a:solidFill>
+                          <a:latin typeface="Arial" charset="0"/>
+                          <a:ea typeface="ＭＳ Ｐゴシック" charset="-128"/>
+                        </a:defRPr>
+                      </a:lvl4pPr>
+                      <a:lvl5pPr marL="2057400" indent="-228600" defTabSz="457200" eaLnBrk="0" hangingPunct="0">
+                        <a:spcBef>
+                          <a:spcPct val="20000"/>
+                        </a:spcBef>
+                        <a:buClr>
+                          <a:schemeClr val="accent1"/>
+                        </a:buClr>
+                        <a:buSzPct val="75000"/>
+                        <a:buFont typeface="Wingdings" charset="2"/>
+                        <a:defRPr>
+                          <a:solidFill>
+                            <a:schemeClr val="tx1"/>
+                          </a:solidFill>
+                          <a:latin typeface="Arial" charset="0"/>
+                          <a:ea typeface="ＭＳ Ｐゴシック" charset="-128"/>
+                        </a:defRPr>
+                      </a:lvl5pPr>
+                      <a:lvl6pPr marL="2514600" indent="-228600" defTabSz="457200" eaLnBrk="0" fontAlgn="base" hangingPunct="0">
+                        <a:spcBef>
+                          <a:spcPct val="20000"/>
+                        </a:spcBef>
+                        <a:spcAft>
+                          <a:spcPct val="0"/>
+                        </a:spcAft>
+                        <a:buClr>
+                          <a:schemeClr val="accent1"/>
+                        </a:buClr>
+                        <a:buSzPct val="75000"/>
+                        <a:buFont typeface="Wingdings" charset="2"/>
+                        <a:defRPr>
+                          <a:solidFill>
+                            <a:schemeClr val="tx1"/>
+                          </a:solidFill>
+                          <a:latin typeface="Arial" charset="0"/>
+                          <a:ea typeface="ＭＳ Ｐゴシック" charset="-128"/>
+                        </a:defRPr>
+                      </a:lvl6pPr>
+                      <a:lvl7pPr marL="2971800" indent="-228600" defTabSz="457200" eaLnBrk="0" fontAlgn="base" hangingPunct="0">
+                        <a:spcBef>
+                          <a:spcPct val="20000"/>
+                        </a:spcBef>
+                        <a:spcAft>
+                          <a:spcPct val="0"/>
+                        </a:spcAft>
+                        <a:buClr>
+                          <a:schemeClr val="accent1"/>
+                        </a:buClr>
+                        <a:buSzPct val="75000"/>
+                        <a:buFont typeface="Wingdings" charset="2"/>
+                        <a:defRPr>
+                          <a:solidFill>
+                            <a:schemeClr val="tx1"/>
+                          </a:solidFill>
+                          <a:latin typeface="Arial" charset="0"/>
+                          <a:ea typeface="ＭＳ Ｐゴシック" charset="-128"/>
+                        </a:defRPr>
+                      </a:lvl7pPr>
+                      <a:lvl8pPr marL="3429000" indent="-228600" defTabSz="457200" eaLnBrk="0" fontAlgn="base" hangingPunct="0">
+                        <a:spcBef>
+                          <a:spcPct val="20000"/>
+                        </a:spcBef>
+                        <a:spcAft>
+                          <a:spcPct val="0"/>
+                        </a:spcAft>
+                        <a:buClr>
+                          <a:schemeClr val="accent1"/>
+                        </a:buClr>
+                        <a:buSzPct val="75000"/>
+                        <a:buFont typeface="Wingdings" charset="2"/>
+                        <a:defRPr>
+                          <a:solidFill>
+                            <a:schemeClr val="tx1"/>
+                          </a:solidFill>
+                          <a:latin typeface="Arial" charset="0"/>
+                          <a:ea typeface="ＭＳ Ｐゴシック" charset="-128"/>
+                        </a:defRPr>
+                      </a:lvl8pPr>
+                      <a:lvl9pPr marL="3886200" indent="-228600" defTabSz="457200" eaLnBrk="0" fontAlgn="base" hangingPunct="0">
+                        <a:spcBef>
+                          <a:spcPct val="20000"/>
+                        </a:spcBef>
+                        <a:spcAft>
+                          <a:spcPct val="0"/>
+                        </a:spcAft>
+                        <a:buClr>
+                          <a:schemeClr val="accent1"/>
+                        </a:buClr>
+                        <a:buSzPct val="75000"/>
+                        <a:buFont typeface="Wingdings" charset="2"/>
+                        <a:defRPr>
+                          <a:solidFill>
+                            <a:schemeClr val="tx1"/>
+                          </a:solidFill>
+                          <a:latin typeface="Arial" charset="0"/>
+                          <a:ea typeface="ＭＳ Ｐゴシック" charset="-128"/>
+                        </a:defRPr>
+                      </a:lvl9pPr>
+                    </a:lstStyle>
+                    <a:p>
+                      <a:pPr marL="0" marR="0" lvl="0" indent="0" algn="l" defTabSz="457200" rtl="0" eaLnBrk="1" fontAlgn="base" latinLnBrk="0" hangingPunct="1">
+                        <a:lnSpc>
+                          <a:spcPct val="100000"/>
+                        </a:lnSpc>
+                        <a:spcBef>
+                          <a:spcPct val="0"/>
+                        </a:spcBef>
+                        <a:spcAft>
+                          <a:spcPct val="0"/>
+                        </a:spcAft>
+                        <a:buClrTx/>
+                        <a:buSzTx/>
+                        <a:buFontTx/>
+                        <a:buNone/>
+                        <a:tabLst/>
+                      </a:pPr>
+                      <a:r>
+                        <a:rPr kumimoji="0" lang="en-US" altLang="x-none" sz="1800" b="0" i="0" u="none" strike="noStrike" cap="none" normalizeH="0" baseline="0">
+                          <a:ln>
+                            <a:noFill/>
+                          </a:ln>
+                          <a:solidFill>
+                            <a:srgbClr val="000000"/>
+                          </a:solidFill>
+                          <a:effectLst/>
+                          <a:latin typeface="Arial" charset="0"/>
+                          <a:ea typeface="ＭＳ Ｐゴシック" charset="-128"/>
+                        </a:rPr>
+                        <a:t>normalized value</a:t>
+                      </a:r>
+                    </a:p>
+                  </a:txBody>
+                  <a:tcPr horzOverflow="overflow">
+                    <a:lnL w="12700" cap="flat" cmpd="sng" algn="ctr">
+                      <a:solidFill>
+                        <a:schemeClr val="bg1"/>
+                      </a:solidFill>
+                      <a:prstDash val="solid"/>
+                      <a:round/>
+                      <a:headEnd type="none" w="med" len="med"/>
+                      <a:tailEnd type="none" w="med" len="med"/>
+                    </a:lnL>
+                    <a:lnR w="12700" cap="flat" cmpd="sng" algn="ctr">
+                      <a:solidFill>
+                        <a:schemeClr val="bg1"/>
+                      </a:solidFill>
+                      <a:prstDash val="solid"/>
+                      <a:round/>
+                      <a:headEnd type="none" w="med" len="med"/>
+                      <a:tailEnd type="none" w="med" len="med"/>
+                    </a:lnR>
+                    <a:lnT w="12700" cap="flat" cmpd="sng" algn="ctr">
+                      <a:solidFill>
+                        <a:schemeClr val="bg1"/>
+                      </a:solidFill>
+                      <a:prstDash val="solid"/>
+                      <a:round/>
+                      <a:headEnd type="none" w="med" len="med"/>
+                      <a:tailEnd type="none" w="med" len="med"/>
+                    </a:lnT>
+                    <a:lnB w="12700" cap="flat" cmpd="sng" algn="ctr">
+                      <a:solidFill>
+                        <a:schemeClr val="bg1"/>
+                      </a:solidFill>
+                      <a:prstDash val="solid"/>
+                      <a:round/>
+                      <a:headEnd type="none" w="med" len="med"/>
+                      <a:tailEnd type="none" w="med" len="med"/>
+                    </a:lnB>
+                    <a:lnTlToBr>
+                      <a:noFill/>
+                    </a:lnTlToBr>
+                    <a:lnBlToTr>
+                      <a:noFill/>
+                    </a:lnBlToTr>
+                    <a:solidFill>
+                      <a:srgbClr val="E7EFEF"/>
+                    </a:solidFill>
+                  </a:tcPr>
+                </a:tc>
+                <a:tc>
+                  <a:txBody>
+                    <a:bodyPr/>
+                    <a:lstStyle>
+                      <a:lvl1pPr defTabSz="457200" eaLnBrk="0" hangingPunct="0">
+                        <a:spcBef>
+                          <a:spcPct val="20000"/>
+                        </a:spcBef>
+                        <a:buClr>
+                          <a:schemeClr val="accent1"/>
+                        </a:buClr>
+                        <a:buSzPct val="65000"/>
+                        <a:buFont typeface="Wingdings" charset="2"/>
+                        <a:defRPr sz="2600">
+                          <a:solidFill>
+                            <a:schemeClr val="tx1"/>
+                          </a:solidFill>
+                          <a:latin typeface="Arial" charset="0"/>
+                          <a:ea typeface="ＭＳ Ｐゴシック" charset="-128"/>
+                        </a:defRPr>
+                      </a:lvl1pPr>
+                      <a:lvl2pPr marL="742950" indent="-285750" defTabSz="457200" eaLnBrk="0" hangingPunct="0">
+                        <a:spcBef>
+                          <a:spcPct val="20000"/>
+                        </a:spcBef>
+                        <a:buClr>
+                          <a:schemeClr val="accent2"/>
+                        </a:buClr>
+                        <a:buSzPct val="60000"/>
+                        <a:buFont typeface="Wingdings" charset="2"/>
+                        <a:defRPr sz="2200">
+                          <a:solidFill>
+                            <a:schemeClr val="tx1"/>
+                          </a:solidFill>
+                          <a:latin typeface="Arial" charset="0"/>
+                          <a:ea typeface="ＭＳ Ｐゴシック" charset="-128"/>
+                        </a:defRPr>
+                      </a:lvl2pPr>
+                      <a:lvl3pPr marL="1143000" indent="-228600" defTabSz="457200" eaLnBrk="0" hangingPunct="0">
+                        <a:spcBef>
+                          <a:spcPct val="20000"/>
+                        </a:spcBef>
+                        <a:buClr>
+                          <a:schemeClr val="accent1"/>
+                        </a:buClr>
+                        <a:buSzPct val="65000"/>
+                        <a:buFont typeface="Wingdings" charset="2"/>
+                        <a:defRPr sz="2000">
+                          <a:solidFill>
+                            <a:schemeClr val="tx1"/>
+                          </a:solidFill>
+                          <a:latin typeface="Arial" charset="0"/>
+                          <a:ea typeface="ＭＳ Ｐゴシック" charset="-128"/>
+                        </a:defRPr>
+                      </a:lvl3pPr>
+                      <a:lvl4pPr marL="1600200" indent="-228600" defTabSz="457200" eaLnBrk="0" hangingPunct="0">
+                        <a:spcBef>
+                          <a:spcPct val="20000"/>
+                        </a:spcBef>
+                        <a:buClr>
+                          <a:schemeClr val="accent2"/>
+                        </a:buClr>
+                        <a:buSzPct val="70000"/>
+                        <a:buFont typeface="Wingdings" charset="2"/>
+                        <a:defRPr>
+                          <a:solidFill>
+                            <a:schemeClr val="tx1"/>
+                          </a:solidFill>
+                          <a:latin typeface="Arial" charset="0"/>
+                          <a:ea typeface="ＭＳ Ｐゴシック" charset="-128"/>
+                        </a:defRPr>
+                      </a:lvl4pPr>
+                      <a:lvl5pPr marL="2057400" indent="-228600" defTabSz="457200" eaLnBrk="0" hangingPunct="0">
+                        <a:spcBef>
+                          <a:spcPct val="20000"/>
+                        </a:spcBef>
+                        <a:buClr>
+                          <a:schemeClr val="accent1"/>
+                        </a:buClr>
+                        <a:buSzPct val="75000"/>
+                        <a:buFont typeface="Wingdings" charset="2"/>
+                        <a:defRPr>
+                          <a:solidFill>
+                            <a:schemeClr val="tx1"/>
+                          </a:solidFill>
+                          <a:latin typeface="Arial" charset="0"/>
+                          <a:ea typeface="ＭＳ Ｐゴシック" charset="-128"/>
+                        </a:defRPr>
+                      </a:lvl5pPr>
+                      <a:lvl6pPr marL="2514600" indent="-228600" defTabSz="457200" eaLnBrk="0" fontAlgn="base" hangingPunct="0">
+                        <a:spcBef>
+                          <a:spcPct val="20000"/>
+                        </a:spcBef>
+                        <a:spcAft>
+                          <a:spcPct val="0"/>
+                        </a:spcAft>
+                        <a:buClr>
+                          <a:schemeClr val="accent1"/>
+                        </a:buClr>
+                        <a:buSzPct val="75000"/>
+                        <a:buFont typeface="Wingdings" charset="2"/>
+                        <a:defRPr>
+                          <a:solidFill>
+                            <a:schemeClr val="tx1"/>
+                          </a:solidFill>
+                          <a:latin typeface="Arial" charset="0"/>
+                          <a:ea typeface="ＭＳ Ｐゴシック" charset="-128"/>
+                        </a:defRPr>
+                      </a:lvl6pPr>
+                      <a:lvl7pPr marL="2971800" indent="-228600" defTabSz="457200" eaLnBrk="0" fontAlgn="base" hangingPunct="0">
+                        <a:spcBef>
+                          <a:spcPct val="20000"/>
+                        </a:spcBef>
+                        <a:spcAft>
+                          <a:spcPct val="0"/>
+                        </a:spcAft>
+                        <a:buClr>
+                          <a:schemeClr val="accent1"/>
+                        </a:buClr>
+                        <a:buSzPct val="75000"/>
+                        <a:buFont typeface="Wingdings" charset="2"/>
+                        <a:defRPr>
+                          <a:solidFill>
+                            <a:schemeClr val="tx1"/>
+                          </a:solidFill>
+                          <a:latin typeface="Arial" charset="0"/>
+                          <a:ea typeface="ＭＳ Ｐゴシック" charset="-128"/>
+                        </a:defRPr>
+                      </a:lvl7pPr>
+                      <a:lvl8pPr marL="3429000" indent="-228600" defTabSz="457200" eaLnBrk="0" fontAlgn="base" hangingPunct="0">
+                        <a:spcBef>
+                          <a:spcPct val="20000"/>
+                        </a:spcBef>
+                        <a:spcAft>
+                          <a:spcPct val="0"/>
+                        </a:spcAft>
+                        <a:buClr>
+                          <a:schemeClr val="accent1"/>
+                        </a:buClr>
+                        <a:buSzPct val="75000"/>
+                        <a:buFont typeface="Wingdings" charset="2"/>
+                        <a:defRPr>
+                          <a:solidFill>
+                            <a:schemeClr val="tx1"/>
+                          </a:solidFill>
+                          <a:latin typeface="Arial" charset="0"/>
+                          <a:ea typeface="ＭＳ Ｐゴシック" charset="-128"/>
+                        </a:defRPr>
+                      </a:lvl8pPr>
+                      <a:lvl9pPr marL="3886200" indent="-228600" defTabSz="457200" eaLnBrk="0" fontAlgn="base" hangingPunct="0">
+                        <a:spcBef>
+                          <a:spcPct val="20000"/>
+                        </a:spcBef>
+                        <a:spcAft>
+                          <a:spcPct val="0"/>
+                        </a:spcAft>
+                        <a:buClr>
+                          <a:schemeClr val="accent1"/>
+                        </a:buClr>
+                        <a:buSzPct val="75000"/>
+                        <a:buFont typeface="Wingdings" charset="2"/>
+                        <a:defRPr>
+                          <a:solidFill>
+                            <a:schemeClr val="tx1"/>
+                          </a:solidFill>
+                          <a:latin typeface="Arial" charset="0"/>
+                          <a:ea typeface="ＭＳ Ｐゴシック" charset="-128"/>
+                        </a:defRPr>
+                      </a:lvl9pPr>
+                    </a:lstStyle>
+                    <a:p>
+                      <a:pPr marL="0" marR="0" lvl="0" indent="0" algn="l" defTabSz="457200" rtl="0" eaLnBrk="1" fontAlgn="base" latinLnBrk="0" hangingPunct="1">
+                        <a:lnSpc>
+                          <a:spcPct val="100000"/>
+                        </a:lnSpc>
+                        <a:spcBef>
+                          <a:spcPct val="0"/>
+                        </a:spcBef>
+                        <a:spcAft>
+                          <a:spcPct val="0"/>
+                        </a:spcAft>
+                        <a:buClrTx/>
+                        <a:buSzTx/>
+                        <a:buFontTx/>
+                        <a:buNone/>
+                        <a:tabLst/>
+                      </a:pPr>
+                      <a:r>
+                        <a:rPr kumimoji="0" lang="en-US" altLang="x-none" sz="1800" b="0" i="0" u="none" strike="noStrike" cap="none" normalizeH="0" baseline="0">
+                          <a:ln>
+                            <a:noFill/>
+                          </a:ln>
+                          <a:solidFill>
+                            <a:srgbClr val="000000"/>
+                          </a:solidFill>
+                          <a:effectLst/>
+                          <a:latin typeface="Arial" charset="0"/>
+                          <a:ea typeface="ＭＳ Ｐゴシック" charset="-128"/>
+                        </a:rPr>
+                        <a:t>normalized value</a:t>
+                      </a:r>
+                    </a:p>
+                  </a:txBody>
+                  <a:tcPr horzOverflow="overflow">
+                    <a:lnL w="12700" cap="flat" cmpd="sng" algn="ctr">
+                      <a:solidFill>
+                        <a:schemeClr val="bg1"/>
+                      </a:solidFill>
+                      <a:prstDash val="solid"/>
+                      <a:round/>
+                      <a:headEnd type="none" w="med" len="med"/>
+                      <a:tailEnd type="none" w="med" len="med"/>
+                    </a:lnL>
+                    <a:lnR w="12700" cap="flat" cmpd="sng" algn="ctr">
+                      <a:solidFill>
+                        <a:schemeClr val="bg1"/>
+                      </a:solidFill>
+                      <a:prstDash val="solid"/>
+                      <a:round/>
+                      <a:headEnd type="none" w="med" len="med"/>
+                      <a:tailEnd type="none" w="med" len="med"/>
+                    </a:lnR>
+                    <a:lnT w="12700" cap="flat" cmpd="sng" algn="ctr">
+                      <a:solidFill>
+                        <a:schemeClr val="bg1"/>
+                      </a:solidFill>
+                      <a:prstDash val="solid"/>
+                      <a:round/>
+                      <a:headEnd type="none" w="med" len="med"/>
+                      <a:tailEnd type="none" w="med" len="med"/>
+                    </a:lnT>
+                    <a:lnB w="12700" cap="flat" cmpd="sng" algn="ctr">
+                      <a:solidFill>
+                        <a:schemeClr val="bg1"/>
+                      </a:solidFill>
+                      <a:prstDash val="solid"/>
+                      <a:round/>
+                      <a:headEnd type="none" w="med" len="med"/>
+                      <a:tailEnd type="none" w="med" len="med"/>
+                    </a:lnB>
+                    <a:lnTlToBr>
+                      <a:noFill/>
+                    </a:lnTlToBr>
+                    <a:lnBlToTr>
+                      <a:noFill/>
+                    </a:lnBlToTr>
+                    <a:solidFill>
+                      <a:srgbClr val="E7EFEF"/>
+                    </a:solidFill>
+                  </a:tcPr>
+                </a:tc>
+                <a:tc>
+                  <a:txBody>
+                    <a:bodyPr/>
+                    <a:lstStyle>
+                      <a:lvl1pPr defTabSz="457200" eaLnBrk="0" hangingPunct="0">
+                        <a:spcBef>
+                          <a:spcPct val="20000"/>
+                        </a:spcBef>
+                        <a:buClr>
+                          <a:schemeClr val="accent1"/>
+                        </a:buClr>
+                        <a:buSzPct val="65000"/>
+                        <a:buFont typeface="Wingdings" charset="2"/>
+                        <a:defRPr sz="2600">
+                          <a:solidFill>
+                            <a:schemeClr val="tx1"/>
+                          </a:solidFill>
+                          <a:latin typeface="Arial" charset="0"/>
+                          <a:ea typeface="ＭＳ Ｐゴシック" charset="-128"/>
+                        </a:defRPr>
+                      </a:lvl1pPr>
+                      <a:lvl2pPr marL="742950" indent="-285750" defTabSz="457200" eaLnBrk="0" hangingPunct="0">
+                        <a:spcBef>
+                          <a:spcPct val="20000"/>
+                        </a:spcBef>
+                        <a:buClr>
+                          <a:schemeClr val="accent2"/>
+                        </a:buClr>
+                        <a:buSzPct val="60000"/>
+                        <a:buFont typeface="Wingdings" charset="2"/>
+                        <a:defRPr sz="2200">
+                          <a:solidFill>
+                            <a:schemeClr val="tx1"/>
+                          </a:solidFill>
+                          <a:latin typeface="Arial" charset="0"/>
+                          <a:ea typeface="ＭＳ Ｐゴシック" charset="-128"/>
+                        </a:defRPr>
+                      </a:lvl2pPr>
+                      <a:lvl3pPr marL="1143000" indent="-228600" defTabSz="457200" eaLnBrk="0" hangingPunct="0">
+                        <a:spcBef>
+                          <a:spcPct val="20000"/>
+                        </a:spcBef>
+                        <a:buClr>
+                          <a:schemeClr val="accent1"/>
+                        </a:buClr>
+                        <a:buSzPct val="65000"/>
+                        <a:buFont typeface="Wingdings" charset="2"/>
+                        <a:defRPr sz="2000">
+                          <a:solidFill>
+                            <a:schemeClr val="tx1"/>
+                          </a:solidFill>
+                          <a:latin typeface="Arial" charset="0"/>
+                          <a:ea typeface="ＭＳ Ｐゴシック" charset="-128"/>
+                        </a:defRPr>
+                      </a:lvl3pPr>
+                      <a:lvl4pPr marL="1600200" indent="-228600" defTabSz="457200" eaLnBrk="0" hangingPunct="0">
+                        <a:spcBef>
+                          <a:spcPct val="20000"/>
+                        </a:spcBef>
+                        <a:buClr>
+                          <a:schemeClr val="accent2"/>
+                        </a:buClr>
+                        <a:buSzPct val="70000"/>
+                        <a:buFont typeface="Wingdings" charset="2"/>
+                        <a:defRPr>
+                          <a:solidFill>
+                            <a:schemeClr val="tx1"/>
+                          </a:solidFill>
+                          <a:latin typeface="Arial" charset="0"/>
+                          <a:ea typeface="ＭＳ Ｐゴシック" charset="-128"/>
+                        </a:defRPr>
+                      </a:lvl4pPr>
+                      <a:lvl5pPr marL="2057400" indent="-228600" defTabSz="457200" eaLnBrk="0" hangingPunct="0">
+                        <a:spcBef>
+                          <a:spcPct val="20000"/>
+                        </a:spcBef>
+                        <a:buClr>
+                          <a:schemeClr val="accent1"/>
+                        </a:buClr>
+                        <a:buSzPct val="75000"/>
+                        <a:buFont typeface="Wingdings" charset="2"/>
+                        <a:defRPr>
+                          <a:solidFill>
+                            <a:schemeClr val="tx1"/>
+                          </a:solidFill>
+                          <a:latin typeface="Arial" charset="0"/>
+                          <a:ea typeface="ＭＳ Ｐゴシック" charset="-128"/>
+                        </a:defRPr>
+                      </a:lvl5pPr>
+                      <a:lvl6pPr marL="2514600" indent="-228600" defTabSz="457200" eaLnBrk="0" fontAlgn="base" hangingPunct="0">
+                        <a:spcBef>
+                          <a:spcPct val="20000"/>
+                        </a:spcBef>
+                        <a:spcAft>
+                          <a:spcPct val="0"/>
+                        </a:spcAft>
+                        <a:buClr>
+                          <a:schemeClr val="accent1"/>
+                        </a:buClr>
+                        <a:buSzPct val="75000"/>
+                        <a:buFont typeface="Wingdings" charset="2"/>
+                        <a:defRPr>
+                          <a:solidFill>
+                            <a:schemeClr val="tx1"/>
+                          </a:solidFill>
+                          <a:latin typeface="Arial" charset="0"/>
+                          <a:ea typeface="ＭＳ Ｐゴシック" charset="-128"/>
+                        </a:defRPr>
+                      </a:lvl6pPr>
+                      <a:lvl7pPr marL="2971800" indent="-228600" defTabSz="457200" eaLnBrk="0" fontAlgn="base" hangingPunct="0">
+                        <a:spcBef>
+                          <a:spcPct val="20000"/>
+                        </a:spcBef>
+                        <a:spcAft>
+                          <a:spcPct val="0"/>
+                        </a:spcAft>
+                        <a:buClr>
+                          <a:schemeClr val="accent1"/>
+                        </a:buClr>
+                        <a:buSzPct val="75000"/>
+                        <a:buFont typeface="Wingdings" charset="2"/>
+                        <a:defRPr>
+                          <a:solidFill>
+                            <a:schemeClr val="tx1"/>
+                          </a:solidFill>
+                          <a:latin typeface="Arial" charset="0"/>
+                          <a:ea typeface="ＭＳ Ｐゴシック" charset="-128"/>
+                        </a:defRPr>
+                      </a:lvl7pPr>
+                      <a:lvl8pPr marL="3429000" indent="-228600" defTabSz="457200" eaLnBrk="0" fontAlgn="base" hangingPunct="0">
+                        <a:spcBef>
+                          <a:spcPct val="20000"/>
+                        </a:spcBef>
+                        <a:spcAft>
+                          <a:spcPct val="0"/>
+                        </a:spcAft>
+                        <a:buClr>
+                          <a:schemeClr val="accent1"/>
+                        </a:buClr>
+                        <a:buSzPct val="75000"/>
+                        <a:buFont typeface="Wingdings" charset="2"/>
+                        <a:defRPr>
+                          <a:solidFill>
+                            <a:schemeClr val="tx1"/>
+                          </a:solidFill>
+                          <a:latin typeface="Arial" charset="0"/>
+                          <a:ea typeface="ＭＳ Ｐゴシック" charset="-128"/>
+                        </a:defRPr>
+                      </a:lvl8pPr>
+                      <a:lvl9pPr marL="3886200" indent="-228600" defTabSz="457200" eaLnBrk="0" fontAlgn="base" hangingPunct="0">
+                        <a:spcBef>
+                          <a:spcPct val="20000"/>
+                        </a:spcBef>
+                        <a:spcAft>
+                          <a:spcPct val="0"/>
+                        </a:spcAft>
+                        <a:buClr>
+                          <a:schemeClr val="accent1"/>
+                        </a:buClr>
+                        <a:buSzPct val="75000"/>
+                        <a:buFont typeface="Wingdings" charset="2"/>
+                        <a:defRPr>
+                          <a:solidFill>
+                            <a:schemeClr val="tx1"/>
+                          </a:solidFill>
+                          <a:latin typeface="Arial" charset="0"/>
+                          <a:ea typeface="ＭＳ Ｐゴシック" charset="-128"/>
+                        </a:defRPr>
+                      </a:lvl9pPr>
+                    </a:lstStyle>
+                    <a:p>
+                      <a:pPr marL="0" marR="0" lvl="0" indent="0" algn="l" defTabSz="457200" rtl="0" eaLnBrk="1" fontAlgn="base" latinLnBrk="0" hangingPunct="1">
+                        <a:lnSpc>
+                          <a:spcPct val="100000"/>
+                        </a:lnSpc>
+                        <a:spcBef>
+                          <a:spcPct val="0"/>
+                        </a:spcBef>
+                        <a:spcAft>
+                          <a:spcPct val="0"/>
+                        </a:spcAft>
+                        <a:buClrTx/>
+                        <a:buSzTx/>
+                        <a:buFontTx/>
+                        <a:buNone/>
+                        <a:tabLst/>
+                      </a:pPr>
+                      <a:r>
+                        <a:rPr kumimoji="0" lang="en-US" altLang="x-none" sz="1800" b="0" i="0" u="none" strike="noStrike" cap="none" normalizeH="0" baseline="0">
+                          <a:ln>
+                            <a:noFill/>
+                          </a:ln>
+                          <a:solidFill>
+                            <a:srgbClr val="000000"/>
+                          </a:solidFill>
+                          <a:effectLst/>
+                          <a:latin typeface="Arial" charset="0"/>
+                          <a:ea typeface="ＭＳ Ｐゴシック" charset="-128"/>
+                        </a:rPr>
+                        <a:t>(-1</a:t>
+                      </a:r>
+                      <a:r>
+                        <a:rPr kumimoji="0" lang="en-US" altLang="x-none" sz="1800" b="0" i="0" u="none" strike="noStrike" cap="none" normalizeH="0" baseline="30000">
+                          <a:ln>
+                            <a:noFill/>
+                          </a:ln>
+                          <a:solidFill>
+                            <a:srgbClr val="000000"/>
+                          </a:solidFill>
+                          <a:effectLst/>
+                          <a:latin typeface="Arial" charset="0"/>
+                          <a:ea typeface="ＭＳ Ｐゴシック" charset="-128"/>
+                        </a:rPr>
+                        <a:t>signbits</a:t>
+                      </a:r>
+                      <a:r>
+                        <a:rPr kumimoji="0" lang="en-US" altLang="x-none" sz="1800" b="0" i="0" u="none" strike="noStrike" cap="none" normalizeH="0" baseline="0">
+                          <a:ln>
+                            <a:noFill/>
+                          </a:ln>
+                          <a:solidFill>
+                            <a:srgbClr val="000000"/>
+                          </a:solidFill>
+                          <a:effectLst/>
+                          <a:latin typeface="Arial" charset="0"/>
+                          <a:ea typeface="ＭＳ Ｐゴシック" charset="-128"/>
+                        </a:rPr>
+                        <a:t>×2</a:t>
+                      </a:r>
+                      <a:r>
+                        <a:rPr kumimoji="0" lang="en-US" altLang="x-none" sz="1800" b="0" i="0" u="none" strike="noStrike" cap="none" normalizeH="0" baseline="30000">
+                          <a:ln>
+                            <a:noFill/>
+                          </a:ln>
+                          <a:solidFill>
+                            <a:srgbClr val="000000"/>
+                          </a:solidFill>
+                          <a:effectLst/>
+                          <a:latin typeface="Arial" charset="0"/>
+                          <a:ea typeface="ＭＳ Ｐゴシック" charset="-128"/>
+                        </a:rPr>
+                        <a:t>exponentbits-127</a:t>
+                      </a:r>
+                      <a:r>
+                        <a:rPr kumimoji="0" lang="en-US" altLang="x-none" sz="1800" b="0" i="0" u="none" strike="noStrike" cap="none" normalizeH="0" baseline="0">
+                          <a:ln>
+                            <a:noFill/>
+                          </a:ln>
+                          <a:solidFill>
+                            <a:srgbClr val="000000"/>
+                          </a:solidFill>
+                          <a:effectLst/>
+                          <a:latin typeface="Arial" charset="0"/>
+                          <a:ea typeface="ＭＳ Ｐゴシック" charset="-128"/>
+                        </a:rPr>
+                        <a:t>× 1.significandbits	</a:t>
+                      </a:r>
+                    </a:p>
+                    <a:p>
+                      <a:pPr marL="0" marR="0" lvl="0" indent="0" algn="l" defTabSz="457200" rtl="0" eaLnBrk="1" fontAlgn="base" latinLnBrk="0" hangingPunct="1">
+                        <a:lnSpc>
+                          <a:spcPct val="100000"/>
+                        </a:lnSpc>
+                        <a:spcBef>
+                          <a:spcPct val="0"/>
+                        </a:spcBef>
+                        <a:spcAft>
+                          <a:spcPct val="0"/>
+                        </a:spcAft>
+                        <a:buClrTx/>
+                        <a:buSzTx/>
+                        <a:buFontTx/>
+                        <a:buNone/>
+                        <a:tabLst/>
+                      </a:pPr>
+                      <a:endParaRPr kumimoji="0" lang="en-US" altLang="x-none" sz="1800" b="0" i="0" u="none" strike="noStrike" cap="none" normalizeH="0" baseline="0">
+                        <a:ln>
+                          <a:noFill/>
+                        </a:ln>
+                        <a:solidFill>
+                          <a:srgbClr val="000000"/>
+                        </a:solidFill>
+                        <a:effectLst/>
+                        <a:latin typeface="Arial" charset="0"/>
+                        <a:ea typeface="ＭＳ Ｐゴシック" charset="-128"/>
+                      </a:endParaRPr>
+                    </a:p>
+                  </a:txBody>
+                  <a:tcPr horzOverflow="overflow">
+                    <a:lnL w="12700" cap="flat" cmpd="sng" algn="ctr">
+                      <a:solidFill>
+                        <a:schemeClr val="bg1"/>
+                      </a:solidFill>
+                      <a:prstDash val="solid"/>
+                      <a:round/>
+                      <a:headEnd type="none" w="med" len="med"/>
+                      <a:tailEnd type="none" w="med" len="med"/>
+                    </a:lnL>
+                    <a:lnR w="12700" cap="flat" cmpd="sng" algn="ctr">
+                      <a:solidFill>
+                        <a:schemeClr val="bg1"/>
+                      </a:solidFill>
+                      <a:prstDash val="solid"/>
+                      <a:round/>
+                      <a:headEnd type="none" w="med" len="med"/>
+                      <a:tailEnd type="none" w="med" len="med"/>
+                    </a:lnR>
+                    <a:lnT w="12700" cap="flat" cmpd="sng" algn="ctr">
+                      <a:solidFill>
+                        <a:schemeClr val="bg1"/>
+                      </a:solidFill>
+                      <a:prstDash val="solid"/>
+                      <a:round/>
+                      <a:headEnd type="none" w="med" len="med"/>
+                      <a:tailEnd type="none" w="med" len="med"/>
+                    </a:lnT>
+                    <a:lnB w="12700" cap="flat" cmpd="sng" algn="ctr">
+                      <a:solidFill>
+                        <a:schemeClr val="bg1"/>
+                      </a:solidFill>
+                      <a:prstDash val="solid"/>
+                      <a:round/>
+                      <a:headEnd type="none" w="med" len="med"/>
+                      <a:tailEnd type="none" w="med" len="med"/>
+                    </a:lnB>
+                    <a:lnTlToBr>
+                      <a:noFill/>
+                    </a:lnTlToBr>
+                    <a:lnBlToTr>
+                      <a:noFill/>
+                    </a:lnBlToTr>
+                    <a:solidFill>
+                      <a:srgbClr val="E7EFEF"/>
+                    </a:solidFill>
+                  </a:tcPr>
+                </a:tc>
+                <a:extLst>
+                  <a:ext uri="{0D108BD9-81ED-4DB2-BD59-A6C34878D82A}">
+                    <a16:rowId xmlns:a16="http://schemas.microsoft.com/office/drawing/2014/main" val="10002"/>
+                  </a:ext>
+                </a:extLst>
+              </a:tr>
+              <a:tr h="666750">
+                <a:tc>
+                  <a:txBody>
+                    <a:bodyPr/>
+                    <a:lstStyle>
+                      <a:lvl1pPr defTabSz="457200" eaLnBrk="0" hangingPunct="0">
+                        <a:spcBef>
+                          <a:spcPct val="20000"/>
+                        </a:spcBef>
+                        <a:buClr>
+                          <a:schemeClr val="accent1"/>
+                        </a:buClr>
+                        <a:buSzPct val="65000"/>
+                        <a:buFont typeface="Wingdings" charset="2"/>
+                        <a:defRPr sz="2600">
+                          <a:solidFill>
+                            <a:schemeClr val="tx1"/>
+                          </a:solidFill>
+                          <a:latin typeface="Arial" charset="0"/>
+                          <a:ea typeface="ＭＳ Ｐゴシック" charset="-128"/>
+                        </a:defRPr>
+                      </a:lvl1pPr>
+                      <a:lvl2pPr marL="742950" indent="-285750" defTabSz="457200" eaLnBrk="0" hangingPunct="0">
+                        <a:spcBef>
+                          <a:spcPct val="20000"/>
+                        </a:spcBef>
+                        <a:buClr>
+                          <a:schemeClr val="accent2"/>
+                        </a:buClr>
+                        <a:buSzPct val="60000"/>
+                        <a:buFont typeface="Wingdings" charset="2"/>
+                        <a:defRPr sz="2200">
+                          <a:solidFill>
+                            <a:schemeClr val="tx1"/>
+                          </a:solidFill>
+                          <a:latin typeface="Arial" charset="0"/>
+                          <a:ea typeface="ＭＳ Ｐゴシック" charset="-128"/>
+                        </a:defRPr>
+                      </a:lvl2pPr>
+                      <a:lvl3pPr marL="1143000" indent="-228600" defTabSz="457200" eaLnBrk="0" hangingPunct="0">
+                        <a:spcBef>
+                          <a:spcPct val="20000"/>
+                        </a:spcBef>
+                        <a:buClr>
+                          <a:schemeClr val="accent1"/>
+                        </a:buClr>
+                        <a:buSzPct val="65000"/>
+                        <a:buFont typeface="Wingdings" charset="2"/>
+                        <a:defRPr sz="2000">
+                          <a:solidFill>
+                            <a:schemeClr val="tx1"/>
+                          </a:solidFill>
+                          <a:latin typeface="Arial" charset="0"/>
+                          <a:ea typeface="ＭＳ Ｐゴシック" charset="-128"/>
+                        </a:defRPr>
+                      </a:lvl3pPr>
+                      <a:lvl4pPr marL="1600200" indent="-228600" defTabSz="457200" eaLnBrk="0" hangingPunct="0">
+                        <a:spcBef>
+                          <a:spcPct val="20000"/>
+                        </a:spcBef>
+                        <a:buClr>
+                          <a:schemeClr val="accent2"/>
+                        </a:buClr>
+                        <a:buSzPct val="70000"/>
+                        <a:buFont typeface="Wingdings" charset="2"/>
+                        <a:defRPr>
+                          <a:solidFill>
+                            <a:schemeClr val="tx1"/>
+                          </a:solidFill>
+                          <a:latin typeface="Arial" charset="0"/>
+                          <a:ea typeface="ＭＳ Ｐゴシック" charset="-128"/>
+                        </a:defRPr>
+                      </a:lvl4pPr>
+                      <a:lvl5pPr marL="2057400" indent="-228600" defTabSz="457200" eaLnBrk="0" hangingPunct="0">
+                        <a:spcBef>
+                          <a:spcPct val="20000"/>
+                        </a:spcBef>
+                        <a:buClr>
+                          <a:schemeClr val="accent1"/>
+                        </a:buClr>
+                        <a:buSzPct val="75000"/>
+                        <a:buFont typeface="Wingdings" charset="2"/>
+                        <a:defRPr>
+                          <a:solidFill>
+                            <a:schemeClr val="tx1"/>
+                          </a:solidFill>
+                          <a:latin typeface="Arial" charset="0"/>
+                          <a:ea typeface="ＭＳ Ｐゴシック" charset="-128"/>
+                        </a:defRPr>
+                      </a:lvl5pPr>
+                      <a:lvl6pPr marL="2514600" indent="-228600" defTabSz="457200" eaLnBrk="0" fontAlgn="base" hangingPunct="0">
+                        <a:spcBef>
+                          <a:spcPct val="20000"/>
+                        </a:spcBef>
+                        <a:spcAft>
+                          <a:spcPct val="0"/>
+                        </a:spcAft>
+                        <a:buClr>
+                          <a:schemeClr val="accent1"/>
+                        </a:buClr>
+                        <a:buSzPct val="75000"/>
+                        <a:buFont typeface="Wingdings" charset="2"/>
+                        <a:defRPr>
+                          <a:solidFill>
+                            <a:schemeClr val="tx1"/>
+                          </a:solidFill>
+                          <a:latin typeface="Arial" charset="0"/>
+                          <a:ea typeface="ＭＳ Ｐゴシック" charset="-128"/>
+                        </a:defRPr>
+                      </a:lvl6pPr>
+                      <a:lvl7pPr marL="2971800" indent="-228600" defTabSz="457200" eaLnBrk="0" fontAlgn="base" hangingPunct="0">
+                        <a:spcBef>
+                          <a:spcPct val="20000"/>
+                        </a:spcBef>
+                        <a:spcAft>
+                          <a:spcPct val="0"/>
+                        </a:spcAft>
+                        <a:buClr>
+                          <a:schemeClr val="accent1"/>
+                        </a:buClr>
+                        <a:buSzPct val="75000"/>
+                        <a:buFont typeface="Wingdings" charset="2"/>
+                        <a:defRPr>
+                          <a:solidFill>
+                            <a:schemeClr val="tx1"/>
+                          </a:solidFill>
+                          <a:latin typeface="Arial" charset="0"/>
+                          <a:ea typeface="ＭＳ Ｐゴシック" charset="-128"/>
+                        </a:defRPr>
+                      </a:lvl7pPr>
+                      <a:lvl8pPr marL="3429000" indent="-228600" defTabSz="457200" eaLnBrk="0" fontAlgn="base" hangingPunct="0">
+                        <a:spcBef>
+                          <a:spcPct val="20000"/>
+                        </a:spcBef>
+                        <a:spcAft>
+                          <a:spcPct val="0"/>
+                        </a:spcAft>
+                        <a:buClr>
+                          <a:schemeClr val="accent1"/>
+                        </a:buClr>
+                        <a:buSzPct val="75000"/>
+                        <a:buFont typeface="Wingdings" charset="2"/>
+                        <a:defRPr>
+                          <a:solidFill>
+                            <a:schemeClr val="tx1"/>
+                          </a:solidFill>
+                          <a:latin typeface="Arial" charset="0"/>
+                          <a:ea typeface="ＭＳ Ｐゴシック" charset="-128"/>
+                        </a:defRPr>
+                      </a:lvl8pPr>
+                      <a:lvl9pPr marL="3886200" indent="-228600" defTabSz="457200" eaLnBrk="0" fontAlgn="base" hangingPunct="0">
+                        <a:spcBef>
+                          <a:spcPct val="20000"/>
+                        </a:spcBef>
+                        <a:spcAft>
+                          <a:spcPct val="0"/>
+                        </a:spcAft>
+                        <a:buClr>
+                          <a:schemeClr val="accent1"/>
+                        </a:buClr>
+                        <a:buSzPct val="75000"/>
+                        <a:buFont typeface="Wingdings" charset="2"/>
+                        <a:defRPr>
+                          <a:solidFill>
+                            <a:schemeClr val="tx1"/>
+                          </a:solidFill>
+                          <a:latin typeface="Arial" charset="0"/>
+                          <a:ea typeface="ＭＳ Ｐゴシック" charset="-128"/>
+                        </a:defRPr>
+                      </a:lvl9pPr>
+                    </a:lstStyle>
+                    <a:p>
+                      <a:pPr marL="0" marR="0" lvl="0" indent="0" algn="l" defTabSz="457200" rtl="0" eaLnBrk="1" fontAlgn="base" latinLnBrk="0" hangingPunct="1">
+                        <a:lnSpc>
+                          <a:spcPct val="100000"/>
+                        </a:lnSpc>
+                        <a:spcBef>
+                          <a:spcPct val="0"/>
+                        </a:spcBef>
+                        <a:spcAft>
+                          <a:spcPct val="0"/>
+                        </a:spcAft>
+                        <a:buClrTx/>
+                        <a:buSzTx/>
+                        <a:buFontTx/>
+                        <a:buNone/>
+                        <a:tabLst/>
+                      </a:pPr>
+                      <a:r>
+                        <a:rPr kumimoji="0" lang="en-US" altLang="x-none" sz="1800" b="0" i="0" u="none" strike="noStrike" cap="none" normalizeH="0" baseline="0">
+                          <a:ln>
+                            <a:noFill/>
+                          </a:ln>
+                          <a:solidFill>
+                            <a:srgbClr val="000000"/>
+                          </a:solidFill>
+                          <a:effectLst/>
+                          <a:latin typeface="Arial" charset="0"/>
+                          <a:ea typeface="ＭＳ Ｐゴシック" charset="-128"/>
+                        </a:rPr>
+                        <a:t>FF</a:t>
+                      </a:r>
+                      <a:r>
+                        <a:rPr kumimoji="0" lang="en-US" altLang="x-none" sz="1800" b="0" i="0" u="none" strike="noStrike" cap="none" normalizeH="0" baseline="-25000">
+                          <a:ln>
+                            <a:noFill/>
+                          </a:ln>
+                          <a:solidFill>
+                            <a:srgbClr val="000000"/>
+                          </a:solidFill>
+                          <a:effectLst/>
+                          <a:latin typeface="Arial" charset="0"/>
+                          <a:ea typeface="ＭＳ Ｐゴシック" charset="-128"/>
+                        </a:rPr>
+                        <a:t>H	</a:t>
+                      </a:r>
+                    </a:p>
+                  </a:txBody>
+                  <a:tcPr horzOverflow="overflow">
+                    <a:lnL w="12700" cap="flat" cmpd="sng" algn="ctr">
+                      <a:solidFill>
+                        <a:schemeClr val="bg1"/>
+                      </a:solidFill>
+                      <a:prstDash val="solid"/>
+                      <a:round/>
+                      <a:headEnd type="none" w="med" len="med"/>
+                      <a:tailEnd type="none" w="med" len="med"/>
+                    </a:lnL>
+                    <a:lnR w="12700" cap="flat" cmpd="sng" algn="ctr">
+                      <a:solidFill>
+                        <a:schemeClr val="bg1"/>
+                      </a:solidFill>
+                      <a:prstDash val="solid"/>
+                      <a:round/>
+                      <a:headEnd type="none" w="med" len="med"/>
+                      <a:tailEnd type="none" w="med" len="med"/>
+                    </a:lnR>
+                    <a:lnT w="12700" cap="flat" cmpd="sng" algn="ctr">
+                      <a:solidFill>
+                        <a:schemeClr val="bg1"/>
+                      </a:solidFill>
+                      <a:prstDash val="solid"/>
+                      <a:round/>
+                      <a:headEnd type="none" w="med" len="med"/>
+                      <a:tailEnd type="none" w="med" len="med"/>
+                    </a:lnT>
+                    <a:lnB w="12700" cap="flat" cmpd="sng" algn="ctr">
+                      <a:solidFill>
+                        <a:schemeClr val="bg1"/>
+                      </a:solidFill>
+                      <a:prstDash val="solid"/>
+                      <a:round/>
+                      <a:headEnd type="none" w="med" len="med"/>
+                      <a:tailEnd type="none" w="med" len="med"/>
+                    </a:lnB>
+                    <a:lnTlToBr>
+                      <a:noFill/>
+                    </a:lnTlToBr>
+                    <a:lnBlToTr>
+                      <a:noFill/>
+                    </a:lnBlToTr>
+                    <a:solidFill>
+                      <a:srgbClr val="CBDEDE"/>
+                    </a:solidFill>
+                  </a:tcPr>
+                </a:tc>
+                <a:tc>
+                  <a:txBody>
+                    <a:bodyPr/>
+                    <a:lstStyle>
+                      <a:lvl1pPr defTabSz="457200" eaLnBrk="0" hangingPunct="0">
+                        <a:spcBef>
+                          <a:spcPct val="20000"/>
+                        </a:spcBef>
+                        <a:buClr>
+                          <a:schemeClr val="accent1"/>
+                        </a:buClr>
+                        <a:buSzPct val="65000"/>
+                        <a:buFont typeface="Wingdings" charset="2"/>
+                        <a:defRPr sz="2600">
+                          <a:solidFill>
+                            <a:schemeClr val="tx1"/>
+                          </a:solidFill>
+                          <a:latin typeface="Arial" charset="0"/>
+                          <a:ea typeface="ＭＳ Ｐゴシック" charset="-128"/>
+                        </a:defRPr>
+                      </a:lvl1pPr>
+                      <a:lvl2pPr marL="742950" indent="-285750" defTabSz="457200" eaLnBrk="0" hangingPunct="0">
+                        <a:spcBef>
+                          <a:spcPct val="20000"/>
+                        </a:spcBef>
+                        <a:buClr>
+                          <a:schemeClr val="accent2"/>
+                        </a:buClr>
+                        <a:buSzPct val="60000"/>
+                        <a:buFont typeface="Wingdings" charset="2"/>
+                        <a:defRPr sz="2200">
+                          <a:solidFill>
+                            <a:schemeClr val="tx1"/>
+                          </a:solidFill>
+                          <a:latin typeface="Arial" charset="0"/>
+                          <a:ea typeface="ＭＳ Ｐゴシック" charset="-128"/>
+                        </a:defRPr>
+                      </a:lvl2pPr>
+                      <a:lvl3pPr marL="1143000" indent="-228600" defTabSz="457200" eaLnBrk="0" hangingPunct="0">
+                        <a:spcBef>
+                          <a:spcPct val="20000"/>
+                        </a:spcBef>
+                        <a:buClr>
+                          <a:schemeClr val="accent1"/>
+                        </a:buClr>
+                        <a:buSzPct val="65000"/>
+                        <a:buFont typeface="Wingdings" charset="2"/>
+                        <a:defRPr sz="2000">
+                          <a:solidFill>
+                            <a:schemeClr val="tx1"/>
+                          </a:solidFill>
+                          <a:latin typeface="Arial" charset="0"/>
+                          <a:ea typeface="ＭＳ Ｐゴシック" charset="-128"/>
+                        </a:defRPr>
+                      </a:lvl3pPr>
+                      <a:lvl4pPr marL="1600200" indent="-228600" defTabSz="457200" eaLnBrk="0" hangingPunct="0">
+                        <a:spcBef>
+                          <a:spcPct val="20000"/>
+                        </a:spcBef>
+                        <a:buClr>
+                          <a:schemeClr val="accent2"/>
+                        </a:buClr>
+                        <a:buSzPct val="70000"/>
+                        <a:buFont typeface="Wingdings" charset="2"/>
+                        <a:defRPr>
+                          <a:solidFill>
+                            <a:schemeClr val="tx1"/>
+                          </a:solidFill>
+                          <a:latin typeface="Arial" charset="0"/>
+                          <a:ea typeface="ＭＳ Ｐゴシック" charset="-128"/>
+                        </a:defRPr>
+                      </a:lvl4pPr>
+                      <a:lvl5pPr marL="2057400" indent="-228600" defTabSz="457200" eaLnBrk="0" hangingPunct="0">
+                        <a:spcBef>
+                          <a:spcPct val="20000"/>
+                        </a:spcBef>
+                        <a:buClr>
+                          <a:schemeClr val="accent1"/>
+                        </a:buClr>
+                        <a:buSzPct val="75000"/>
+                        <a:buFont typeface="Wingdings" charset="2"/>
+                        <a:defRPr>
+                          <a:solidFill>
+                            <a:schemeClr val="tx1"/>
+                          </a:solidFill>
+                          <a:latin typeface="Arial" charset="0"/>
+                          <a:ea typeface="ＭＳ Ｐゴシック" charset="-128"/>
+                        </a:defRPr>
+                      </a:lvl5pPr>
+                      <a:lvl6pPr marL="2514600" indent="-228600" defTabSz="457200" eaLnBrk="0" fontAlgn="base" hangingPunct="0">
+                        <a:spcBef>
+                          <a:spcPct val="20000"/>
+                        </a:spcBef>
+                        <a:spcAft>
+                          <a:spcPct val="0"/>
+                        </a:spcAft>
+                        <a:buClr>
+                          <a:schemeClr val="accent1"/>
+                        </a:buClr>
+                        <a:buSzPct val="75000"/>
+                        <a:buFont typeface="Wingdings" charset="2"/>
+                        <a:defRPr>
+                          <a:solidFill>
+                            <a:schemeClr val="tx1"/>
+                          </a:solidFill>
+                          <a:latin typeface="Arial" charset="0"/>
+                          <a:ea typeface="ＭＳ Ｐゴシック" charset="-128"/>
+                        </a:defRPr>
+                      </a:lvl6pPr>
+                      <a:lvl7pPr marL="2971800" indent="-228600" defTabSz="457200" eaLnBrk="0" fontAlgn="base" hangingPunct="0">
+                        <a:spcBef>
+                          <a:spcPct val="20000"/>
+                        </a:spcBef>
+                        <a:spcAft>
+                          <a:spcPct val="0"/>
+                        </a:spcAft>
+                        <a:buClr>
+                          <a:schemeClr val="accent1"/>
+                        </a:buClr>
+                        <a:buSzPct val="75000"/>
+                        <a:buFont typeface="Wingdings" charset="2"/>
+                        <a:defRPr>
+                          <a:solidFill>
+                            <a:schemeClr val="tx1"/>
+                          </a:solidFill>
+                          <a:latin typeface="Arial" charset="0"/>
+                          <a:ea typeface="ＭＳ Ｐゴシック" charset="-128"/>
+                        </a:defRPr>
+                      </a:lvl7pPr>
+                      <a:lvl8pPr marL="3429000" indent="-228600" defTabSz="457200" eaLnBrk="0" fontAlgn="base" hangingPunct="0">
+                        <a:spcBef>
+                          <a:spcPct val="20000"/>
+                        </a:spcBef>
+                        <a:spcAft>
+                          <a:spcPct val="0"/>
+                        </a:spcAft>
+                        <a:buClr>
+                          <a:schemeClr val="accent1"/>
+                        </a:buClr>
+                        <a:buSzPct val="75000"/>
+                        <a:buFont typeface="Wingdings" charset="2"/>
+                        <a:defRPr>
+                          <a:solidFill>
+                            <a:schemeClr val="tx1"/>
+                          </a:solidFill>
+                          <a:latin typeface="Arial" charset="0"/>
+                          <a:ea typeface="ＭＳ Ｐゴシック" charset="-128"/>
+                        </a:defRPr>
+                      </a:lvl8pPr>
+                      <a:lvl9pPr marL="3886200" indent="-228600" defTabSz="457200" eaLnBrk="0" fontAlgn="base" hangingPunct="0">
+                        <a:spcBef>
+                          <a:spcPct val="20000"/>
+                        </a:spcBef>
+                        <a:spcAft>
+                          <a:spcPct val="0"/>
+                        </a:spcAft>
+                        <a:buClr>
+                          <a:schemeClr val="accent1"/>
+                        </a:buClr>
+                        <a:buSzPct val="75000"/>
+                        <a:buFont typeface="Wingdings" charset="2"/>
+                        <a:defRPr>
+                          <a:solidFill>
+                            <a:schemeClr val="tx1"/>
+                          </a:solidFill>
+                          <a:latin typeface="Arial" charset="0"/>
+                          <a:ea typeface="ＭＳ Ｐゴシック" charset="-128"/>
+                        </a:defRPr>
+                      </a:lvl9pPr>
+                    </a:lstStyle>
+                    <a:p>
+                      <a:pPr marL="0" marR="0" lvl="0" indent="0" algn="l" defTabSz="457200" rtl="0" eaLnBrk="1" fontAlgn="base" latinLnBrk="0" hangingPunct="1">
+                        <a:lnSpc>
+                          <a:spcPct val="100000"/>
+                        </a:lnSpc>
+                        <a:spcBef>
+                          <a:spcPct val="0"/>
+                        </a:spcBef>
+                        <a:spcAft>
+                          <a:spcPct val="0"/>
+                        </a:spcAft>
+                        <a:buClrTx/>
+                        <a:buSzTx/>
+                        <a:buFontTx/>
+                        <a:buNone/>
+                        <a:tabLst/>
+                      </a:pPr>
+                      <a:r>
+                        <a:rPr kumimoji="0" lang="en-US" altLang="x-none" sz="1800" b="0" i="0" u="none" strike="noStrike" cap="none" normalizeH="0" baseline="0">
+                          <a:ln>
+                            <a:noFill/>
+                          </a:ln>
+                          <a:solidFill>
+                            <a:srgbClr val="000000"/>
+                          </a:solidFill>
+                          <a:effectLst/>
+                          <a:latin typeface="Arial" charset="0"/>
+                          <a:ea typeface="ＭＳ Ｐゴシック" charset="-128"/>
+                        </a:rPr>
+                        <a:t>±infinity	</a:t>
+                      </a:r>
+                    </a:p>
+                  </a:txBody>
+                  <a:tcPr horzOverflow="overflow">
+                    <a:lnL w="12700" cap="flat" cmpd="sng" algn="ctr">
+                      <a:solidFill>
+                        <a:schemeClr val="bg1"/>
+                      </a:solidFill>
+                      <a:prstDash val="solid"/>
+                      <a:round/>
+                      <a:headEnd type="none" w="med" len="med"/>
+                      <a:tailEnd type="none" w="med" len="med"/>
+                    </a:lnL>
+                    <a:lnR w="12700" cap="flat" cmpd="sng" algn="ctr">
+                      <a:solidFill>
+                        <a:schemeClr val="bg1"/>
+                      </a:solidFill>
+                      <a:prstDash val="solid"/>
+                      <a:round/>
+                      <a:headEnd type="none" w="med" len="med"/>
+                      <a:tailEnd type="none" w="med" len="med"/>
+                    </a:lnR>
+                    <a:lnT w="12700" cap="flat" cmpd="sng" algn="ctr">
+                      <a:solidFill>
+                        <a:schemeClr val="bg1"/>
+                      </a:solidFill>
+                      <a:prstDash val="solid"/>
+                      <a:round/>
+                      <a:headEnd type="none" w="med" len="med"/>
+                      <a:tailEnd type="none" w="med" len="med"/>
+                    </a:lnT>
+                    <a:lnB w="12700" cap="flat" cmpd="sng" algn="ctr">
+                      <a:solidFill>
+                        <a:schemeClr val="bg1"/>
+                      </a:solidFill>
+                      <a:prstDash val="solid"/>
+                      <a:round/>
+                      <a:headEnd type="none" w="med" len="med"/>
+                      <a:tailEnd type="none" w="med" len="med"/>
+                    </a:lnB>
+                    <a:lnTlToBr>
+                      <a:noFill/>
+                    </a:lnTlToBr>
+                    <a:lnBlToTr>
+                      <a:noFill/>
+                    </a:lnBlToTr>
+                    <a:solidFill>
+                      <a:srgbClr val="CBDEDE"/>
+                    </a:solidFill>
+                  </a:tcPr>
+                </a:tc>
+                <a:tc>
+                  <a:txBody>
+                    <a:bodyPr/>
+                    <a:lstStyle>
+                      <a:lvl1pPr defTabSz="457200" eaLnBrk="0" hangingPunct="0">
+                        <a:spcBef>
+                          <a:spcPct val="20000"/>
+                        </a:spcBef>
+                        <a:buClr>
+                          <a:schemeClr val="accent1"/>
+                        </a:buClr>
+                        <a:buSzPct val="65000"/>
+                        <a:buFont typeface="Wingdings" charset="2"/>
+                        <a:defRPr sz="2600">
+                          <a:solidFill>
+                            <a:schemeClr val="tx1"/>
+                          </a:solidFill>
+                          <a:latin typeface="Arial" charset="0"/>
+                          <a:ea typeface="ＭＳ Ｐゴシック" charset="-128"/>
+                        </a:defRPr>
+                      </a:lvl1pPr>
+                      <a:lvl2pPr marL="742950" indent="-285750" defTabSz="457200" eaLnBrk="0" hangingPunct="0">
+                        <a:spcBef>
+                          <a:spcPct val="20000"/>
+                        </a:spcBef>
+                        <a:buClr>
+                          <a:schemeClr val="accent2"/>
+                        </a:buClr>
+                        <a:buSzPct val="60000"/>
+                        <a:buFont typeface="Wingdings" charset="2"/>
+                        <a:defRPr sz="2200">
+                          <a:solidFill>
+                            <a:schemeClr val="tx1"/>
+                          </a:solidFill>
+                          <a:latin typeface="Arial" charset="0"/>
+                          <a:ea typeface="ＭＳ Ｐゴシック" charset="-128"/>
+                        </a:defRPr>
+                      </a:lvl2pPr>
+                      <a:lvl3pPr marL="1143000" indent="-228600" defTabSz="457200" eaLnBrk="0" hangingPunct="0">
+                        <a:spcBef>
+                          <a:spcPct val="20000"/>
+                        </a:spcBef>
+                        <a:buClr>
+                          <a:schemeClr val="accent1"/>
+                        </a:buClr>
+                        <a:buSzPct val="65000"/>
+                        <a:buFont typeface="Wingdings" charset="2"/>
+                        <a:defRPr sz="2000">
+                          <a:solidFill>
+                            <a:schemeClr val="tx1"/>
+                          </a:solidFill>
+                          <a:latin typeface="Arial" charset="0"/>
+                          <a:ea typeface="ＭＳ Ｐゴシック" charset="-128"/>
+                        </a:defRPr>
+                      </a:lvl3pPr>
+                      <a:lvl4pPr marL="1600200" indent="-228600" defTabSz="457200" eaLnBrk="0" hangingPunct="0">
+                        <a:spcBef>
+                          <a:spcPct val="20000"/>
+                        </a:spcBef>
+                        <a:buClr>
+                          <a:schemeClr val="accent2"/>
+                        </a:buClr>
+                        <a:buSzPct val="70000"/>
+                        <a:buFont typeface="Wingdings" charset="2"/>
+                        <a:defRPr>
+                          <a:solidFill>
+                            <a:schemeClr val="tx1"/>
+                          </a:solidFill>
+                          <a:latin typeface="Arial" charset="0"/>
+                          <a:ea typeface="ＭＳ Ｐゴシック" charset="-128"/>
+                        </a:defRPr>
+                      </a:lvl4pPr>
+                      <a:lvl5pPr marL="2057400" indent="-228600" defTabSz="457200" eaLnBrk="0" hangingPunct="0">
+                        <a:spcBef>
+                          <a:spcPct val="20000"/>
+                        </a:spcBef>
+                        <a:buClr>
+                          <a:schemeClr val="accent1"/>
+                        </a:buClr>
+                        <a:buSzPct val="75000"/>
+                        <a:buFont typeface="Wingdings" charset="2"/>
+                        <a:defRPr>
+                          <a:solidFill>
+                            <a:schemeClr val="tx1"/>
+                          </a:solidFill>
+                          <a:latin typeface="Arial" charset="0"/>
+                          <a:ea typeface="ＭＳ Ｐゴシック" charset="-128"/>
+                        </a:defRPr>
+                      </a:lvl5pPr>
+                      <a:lvl6pPr marL="2514600" indent="-228600" defTabSz="457200" eaLnBrk="0" fontAlgn="base" hangingPunct="0">
+                        <a:spcBef>
+                          <a:spcPct val="20000"/>
+                        </a:spcBef>
+                        <a:spcAft>
+                          <a:spcPct val="0"/>
+                        </a:spcAft>
+                        <a:buClr>
+                          <a:schemeClr val="accent1"/>
+                        </a:buClr>
+                        <a:buSzPct val="75000"/>
+                        <a:buFont typeface="Wingdings" charset="2"/>
+                        <a:defRPr>
+                          <a:solidFill>
+                            <a:schemeClr val="tx1"/>
+                          </a:solidFill>
+                          <a:latin typeface="Arial" charset="0"/>
+                          <a:ea typeface="ＭＳ Ｐゴシック" charset="-128"/>
+                        </a:defRPr>
+                      </a:lvl6pPr>
+                      <a:lvl7pPr marL="2971800" indent="-228600" defTabSz="457200" eaLnBrk="0" fontAlgn="base" hangingPunct="0">
+                        <a:spcBef>
+                          <a:spcPct val="20000"/>
+                        </a:spcBef>
+                        <a:spcAft>
+                          <a:spcPct val="0"/>
+                        </a:spcAft>
+                        <a:buClr>
+                          <a:schemeClr val="accent1"/>
+                        </a:buClr>
+                        <a:buSzPct val="75000"/>
+                        <a:buFont typeface="Wingdings" charset="2"/>
+                        <a:defRPr>
+                          <a:solidFill>
+                            <a:schemeClr val="tx1"/>
+                          </a:solidFill>
+                          <a:latin typeface="Arial" charset="0"/>
+                          <a:ea typeface="ＭＳ Ｐゴシック" charset="-128"/>
+                        </a:defRPr>
+                      </a:lvl7pPr>
+                      <a:lvl8pPr marL="3429000" indent="-228600" defTabSz="457200" eaLnBrk="0" fontAlgn="base" hangingPunct="0">
+                        <a:spcBef>
+                          <a:spcPct val="20000"/>
+                        </a:spcBef>
+                        <a:spcAft>
+                          <a:spcPct val="0"/>
+                        </a:spcAft>
+                        <a:buClr>
+                          <a:schemeClr val="accent1"/>
+                        </a:buClr>
+                        <a:buSzPct val="75000"/>
+                        <a:buFont typeface="Wingdings" charset="2"/>
+                        <a:defRPr>
+                          <a:solidFill>
+                            <a:schemeClr val="tx1"/>
+                          </a:solidFill>
+                          <a:latin typeface="Arial" charset="0"/>
+                          <a:ea typeface="ＭＳ Ｐゴシック" charset="-128"/>
+                        </a:defRPr>
+                      </a:lvl8pPr>
+                      <a:lvl9pPr marL="3886200" indent="-228600" defTabSz="457200" eaLnBrk="0" fontAlgn="base" hangingPunct="0">
+                        <a:spcBef>
+                          <a:spcPct val="20000"/>
+                        </a:spcBef>
+                        <a:spcAft>
+                          <a:spcPct val="0"/>
+                        </a:spcAft>
+                        <a:buClr>
+                          <a:schemeClr val="accent1"/>
+                        </a:buClr>
+                        <a:buSzPct val="75000"/>
+                        <a:buFont typeface="Wingdings" charset="2"/>
+                        <a:defRPr>
+                          <a:solidFill>
+                            <a:schemeClr val="tx1"/>
+                          </a:solidFill>
+                          <a:latin typeface="Arial" charset="0"/>
+                          <a:ea typeface="ＭＳ Ｐゴシック" charset="-128"/>
+                        </a:defRPr>
+                      </a:lvl9pPr>
+                    </a:lstStyle>
+                    <a:p>
+                      <a:pPr marL="0" marR="0" lvl="0" indent="0" algn="l" defTabSz="457200" rtl="0" eaLnBrk="1" fontAlgn="base" latinLnBrk="0" hangingPunct="1">
+                        <a:lnSpc>
+                          <a:spcPct val="100000"/>
+                        </a:lnSpc>
+                        <a:spcBef>
+                          <a:spcPct val="0"/>
+                        </a:spcBef>
+                        <a:spcAft>
+                          <a:spcPct val="0"/>
+                        </a:spcAft>
+                        <a:buClrTx/>
+                        <a:buSzTx/>
+                        <a:buFontTx/>
+                        <a:buNone/>
+                        <a:tabLst/>
+                      </a:pPr>
+                      <a:r>
+                        <a:rPr kumimoji="0" lang="en-US" altLang="x-none" sz="1800" b="0" i="0" u="none" strike="noStrike" cap="none" normalizeH="0" baseline="0">
+                          <a:ln>
+                            <a:noFill/>
+                          </a:ln>
+                          <a:solidFill>
+                            <a:srgbClr val="000000"/>
+                          </a:solidFill>
+                          <a:effectLst/>
+                          <a:latin typeface="Arial" charset="0"/>
+                          <a:ea typeface="ＭＳ Ｐゴシック" charset="-128"/>
+                          <a:hlinkClick r:id="rId2"/>
+                        </a:rPr>
+                        <a:t>NaN (quiet,signalling)</a:t>
+                      </a:r>
+                    </a:p>
+                    <a:p>
+                      <a:pPr marL="0" marR="0" lvl="0" indent="0" algn="l" defTabSz="457200" rtl="0" eaLnBrk="1" fontAlgn="base" latinLnBrk="0" hangingPunct="1">
+                        <a:lnSpc>
+                          <a:spcPct val="100000"/>
+                        </a:lnSpc>
+                        <a:spcBef>
+                          <a:spcPct val="0"/>
+                        </a:spcBef>
+                        <a:spcAft>
+                          <a:spcPct val="0"/>
+                        </a:spcAft>
+                        <a:buClrTx/>
+                        <a:buSzTx/>
+                        <a:buFontTx/>
+                        <a:buNone/>
+                        <a:tabLst/>
+                      </a:pPr>
+                      <a:endParaRPr kumimoji="0" lang="en-US" altLang="x-none" sz="1800" b="0" i="0" u="none" strike="noStrike" cap="none" normalizeH="0" baseline="0">
+                        <a:ln>
+                          <a:noFill/>
+                        </a:ln>
+                        <a:solidFill>
+                          <a:srgbClr val="000000"/>
+                        </a:solidFill>
+                        <a:effectLst/>
+                        <a:latin typeface="Arial" charset="0"/>
+                        <a:ea typeface="ＭＳ Ｐゴシック" charset="-128"/>
+                      </a:endParaRPr>
+                    </a:p>
+                  </a:txBody>
+                  <a:tcPr horzOverflow="overflow">
+                    <a:lnL w="12700" cap="flat" cmpd="sng" algn="ctr">
+                      <a:solidFill>
+                        <a:schemeClr val="bg1"/>
+                      </a:solidFill>
+                      <a:prstDash val="solid"/>
+                      <a:round/>
+                      <a:headEnd type="none" w="med" len="med"/>
+                      <a:tailEnd type="none" w="med" len="med"/>
+                    </a:lnL>
+                    <a:lnR w="12700" cap="flat" cmpd="sng" algn="ctr">
+                      <a:solidFill>
+                        <a:schemeClr val="bg1"/>
+                      </a:solidFill>
+                      <a:prstDash val="solid"/>
+                      <a:round/>
+                      <a:headEnd type="none" w="med" len="med"/>
+                      <a:tailEnd type="none" w="med" len="med"/>
+                    </a:lnR>
+                    <a:lnT w="12700" cap="flat" cmpd="sng" algn="ctr">
+                      <a:solidFill>
+                        <a:schemeClr val="bg1"/>
+                      </a:solidFill>
+                      <a:prstDash val="solid"/>
+                      <a:round/>
+                      <a:headEnd type="none" w="med" len="med"/>
+                      <a:tailEnd type="none" w="med" len="med"/>
+                    </a:lnT>
+                    <a:lnB w="12700" cap="flat" cmpd="sng" algn="ctr">
+                      <a:solidFill>
+                        <a:schemeClr val="bg1"/>
+                      </a:solidFill>
+                      <a:prstDash val="solid"/>
+                      <a:round/>
+                      <a:headEnd type="none" w="med" len="med"/>
+                      <a:tailEnd type="none" w="med" len="med"/>
+                    </a:lnB>
+                    <a:lnTlToBr>
+                      <a:noFill/>
+                    </a:lnTlToBr>
+                    <a:lnBlToTr>
+                      <a:noFill/>
+                    </a:lnBlToTr>
+                    <a:solidFill>
+                      <a:srgbClr val="CBDEDE"/>
+                    </a:solidFill>
+                  </a:tcPr>
+                </a:tc>
+                <a:tc>
+                  <a:txBody>
+                    <a:bodyPr/>
+                    <a:lstStyle>
+                      <a:lvl1pPr defTabSz="457200" eaLnBrk="0" hangingPunct="0">
+                        <a:spcBef>
+                          <a:spcPct val="20000"/>
+                        </a:spcBef>
+                        <a:buClr>
+                          <a:schemeClr val="accent1"/>
+                        </a:buClr>
+                        <a:buSzPct val="65000"/>
+                        <a:buFont typeface="Wingdings" charset="2"/>
+                        <a:defRPr sz="2600">
+                          <a:solidFill>
+                            <a:schemeClr val="tx1"/>
+                          </a:solidFill>
+                          <a:latin typeface="Arial" charset="0"/>
+                          <a:ea typeface="ＭＳ Ｐゴシック" charset="-128"/>
+                        </a:defRPr>
+                      </a:lvl1pPr>
+                      <a:lvl2pPr marL="742950" indent="-285750" defTabSz="457200" eaLnBrk="0" hangingPunct="0">
+                        <a:spcBef>
+                          <a:spcPct val="20000"/>
+                        </a:spcBef>
+                        <a:buClr>
+                          <a:schemeClr val="accent2"/>
+                        </a:buClr>
+                        <a:buSzPct val="60000"/>
+                        <a:buFont typeface="Wingdings" charset="2"/>
+                        <a:defRPr sz="2200">
+                          <a:solidFill>
+                            <a:schemeClr val="tx1"/>
+                          </a:solidFill>
+                          <a:latin typeface="Arial" charset="0"/>
+                          <a:ea typeface="ＭＳ Ｐゴシック" charset="-128"/>
+                        </a:defRPr>
+                      </a:lvl2pPr>
+                      <a:lvl3pPr marL="1143000" indent="-228600" defTabSz="457200" eaLnBrk="0" hangingPunct="0">
+                        <a:spcBef>
+                          <a:spcPct val="20000"/>
+                        </a:spcBef>
+                        <a:buClr>
+                          <a:schemeClr val="accent1"/>
+                        </a:buClr>
+                        <a:buSzPct val="65000"/>
+                        <a:buFont typeface="Wingdings" charset="2"/>
+                        <a:defRPr sz="2000">
+                          <a:solidFill>
+                            <a:schemeClr val="tx1"/>
+                          </a:solidFill>
+                          <a:latin typeface="Arial" charset="0"/>
+                          <a:ea typeface="ＭＳ Ｐゴシック" charset="-128"/>
+                        </a:defRPr>
+                      </a:lvl3pPr>
+                      <a:lvl4pPr marL="1600200" indent="-228600" defTabSz="457200" eaLnBrk="0" hangingPunct="0">
+                        <a:spcBef>
+                          <a:spcPct val="20000"/>
+                        </a:spcBef>
+                        <a:buClr>
+                          <a:schemeClr val="accent2"/>
+                        </a:buClr>
+                        <a:buSzPct val="70000"/>
+                        <a:buFont typeface="Wingdings" charset="2"/>
+                        <a:defRPr>
+                          <a:solidFill>
+                            <a:schemeClr val="tx1"/>
+                          </a:solidFill>
+                          <a:latin typeface="Arial" charset="0"/>
+                          <a:ea typeface="ＭＳ Ｐゴシック" charset="-128"/>
+                        </a:defRPr>
+                      </a:lvl4pPr>
+                      <a:lvl5pPr marL="2057400" indent="-228600" defTabSz="457200" eaLnBrk="0" hangingPunct="0">
+                        <a:spcBef>
+                          <a:spcPct val="20000"/>
+                        </a:spcBef>
+                        <a:buClr>
+                          <a:schemeClr val="accent1"/>
+                        </a:buClr>
+                        <a:buSzPct val="75000"/>
+                        <a:buFont typeface="Wingdings" charset="2"/>
+                        <a:defRPr>
+                          <a:solidFill>
+                            <a:schemeClr val="tx1"/>
+                          </a:solidFill>
+                          <a:latin typeface="Arial" charset="0"/>
+                          <a:ea typeface="ＭＳ Ｐゴシック" charset="-128"/>
+                        </a:defRPr>
+                      </a:lvl5pPr>
+                      <a:lvl6pPr marL="2514600" indent="-228600" defTabSz="457200" eaLnBrk="0" fontAlgn="base" hangingPunct="0">
+                        <a:spcBef>
+                          <a:spcPct val="20000"/>
+                        </a:spcBef>
+                        <a:spcAft>
+                          <a:spcPct val="0"/>
+                        </a:spcAft>
+                        <a:buClr>
+                          <a:schemeClr val="accent1"/>
+                        </a:buClr>
+                        <a:buSzPct val="75000"/>
+                        <a:buFont typeface="Wingdings" charset="2"/>
+                        <a:defRPr>
+                          <a:solidFill>
+                            <a:schemeClr val="tx1"/>
+                          </a:solidFill>
+                          <a:latin typeface="Arial" charset="0"/>
+                          <a:ea typeface="ＭＳ Ｐゴシック" charset="-128"/>
+                        </a:defRPr>
+                      </a:lvl6pPr>
+                      <a:lvl7pPr marL="2971800" indent="-228600" defTabSz="457200" eaLnBrk="0" fontAlgn="base" hangingPunct="0">
+                        <a:spcBef>
+                          <a:spcPct val="20000"/>
+                        </a:spcBef>
+                        <a:spcAft>
+                          <a:spcPct val="0"/>
+                        </a:spcAft>
+                        <a:buClr>
+                          <a:schemeClr val="accent1"/>
+                        </a:buClr>
+                        <a:buSzPct val="75000"/>
+                        <a:buFont typeface="Wingdings" charset="2"/>
+                        <a:defRPr>
+                          <a:solidFill>
+                            <a:schemeClr val="tx1"/>
+                          </a:solidFill>
+                          <a:latin typeface="Arial" charset="0"/>
+                          <a:ea typeface="ＭＳ Ｐゴシック" charset="-128"/>
+                        </a:defRPr>
+                      </a:lvl7pPr>
+                      <a:lvl8pPr marL="3429000" indent="-228600" defTabSz="457200" eaLnBrk="0" fontAlgn="base" hangingPunct="0">
+                        <a:spcBef>
+                          <a:spcPct val="20000"/>
+                        </a:spcBef>
+                        <a:spcAft>
+                          <a:spcPct val="0"/>
+                        </a:spcAft>
+                        <a:buClr>
+                          <a:schemeClr val="accent1"/>
+                        </a:buClr>
+                        <a:buSzPct val="75000"/>
+                        <a:buFont typeface="Wingdings" charset="2"/>
+                        <a:defRPr>
+                          <a:solidFill>
+                            <a:schemeClr val="tx1"/>
+                          </a:solidFill>
+                          <a:latin typeface="Arial" charset="0"/>
+                          <a:ea typeface="ＭＳ Ｐゴシック" charset="-128"/>
+                        </a:defRPr>
+                      </a:lvl8pPr>
+                      <a:lvl9pPr marL="3886200" indent="-228600" defTabSz="457200" eaLnBrk="0" fontAlgn="base" hangingPunct="0">
+                        <a:spcBef>
+                          <a:spcPct val="20000"/>
+                        </a:spcBef>
+                        <a:spcAft>
+                          <a:spcPct val="0"/>
+                        </a:spcAft>
+                        <a:buClr>
+                          <a:schemeClr val="accent1"/>
+                        </a:buClr>
+                        <a:buSzPct val="75000"/>
+                        <a:buFont typeface="Wingdings" charset="2"/>
+                        <a:defRPr>
+                          <a:solidFill>
+                            <a:schemeClr val="tx1"/>
+                          </a:solidFill>
+                          <a:latin typeface="Arial" charset="0"/>
+                          <a:ea typeface="ＭＳ Ｐゴシック" charset="-128"/>
+                        </a:defRPr>
+                      </a:lvl9pPr>
+                    </a:lstStyle>
+                    <a:p>
+                      <a:pPr marL="0" marR="0" lvl="0" indent="0" algn="l" defTabSz="457200" rtl="0" eaLnBrk="1" fontAlgn="base" latinLnBrk="0" hangingPunct="1">
+                        <a:lnSpc>
+                          <a:spcPct val="100000"/>
+                        </a:lnSpc>
+                        <a:spcBef>
+                          <a:spcPct val="0"/>
+                        </a:spcBef>
+                        <a:spcAft>
+                          <a:spcPct val="0"/>
+                        </a:spcAft>
+                        <a:buClrTx/>
+                        <a:buSzTx/>
+                        <a:buFontTx/>
+                        <a:buNone/>
+                        <a:tabLst/>
+                      </a:pPr>
+                      <a:endParaRPr kumimoji="0" lang="en-US" altLang="x-none" sz="1800" b="0" i="0" u="none" strike="noStrike" cap="none" normalizeH="0" baseline="0" dirty="0">
+                        <a:ln>
+                          <a:noFill/>
+                        </a:ln>
+                        <a:solidFill>
+                          <a:srgbClr val="000000"/>
+                        </a:solidFill>
+                        <a:effectLst/>
+                        <a:latin typeface="Arial" charset="0"/>
+                        <a:ea typeface="ＭＳ Ｐゴシック" charset="-128"/>
+                      </a:endParaRPr>
+                    </a:p>
+                  </a:txBody>
+                  <a:tcPr horzOverflow="overflow">
+                    <a:lnL w="12700" cap="flat" cmpd="sng" algn="ctr">
+                      <a:solidFill>
+                        <a:schemeClr val="bg1"/>
+                      </a:solidFill>
+                      <a:prstDash val="solid"/>
+                      <a:round/>
+                      <a:headEnd type="none" w="med" len="med"/>
+                      <a:tailEnd type="none" w="med" len="med"/>
+                    </a:lnL>
+                    <a:lnR w="12700" cap="flat" cmpd="sng" algn="ctr">
+                      <a:solidFill>
+                        <a:schemeClr val="bg1"/>
+                      </a:solidFill>
+                      <a:prstDash val="solid"/>
+                      <a:round/>
+                      <a:headEnd type="none" w="med" len="med"/>
+                      <a:tailEnd type="none" w="med" len="med"/>
+                    </a:lnR>
+                    <a:lnT w="12700" cap="flat" cmpd="sng" algn="ctr">
+                      <a:solidFill>
+                        <a:schemeClr val="bg1"/>
+                      </a:solidFill>
+                      <a:prstDash val="solid"/>
+                      <a:round/>
+                      <a:headEnd type="none" w="med" len="med"/>
+                      <a:tailEnd type="none" w="med" len="med"/>
+                    </a:lnT>
+                    <a:lnB w="12700" cap="flat" cmpd="sng" algn="ctr">
+                      <a:solidFill>
+                        <a:schemeClr val="bg1"/>
+                      </a:solidFill>
+                      <a:prstDash val="solid"/>
+                      <a:round/>
+                      <a:headEnd type="none" w="med" len="med"/>
+                      <a:tailEnd type="none" w="med" len="med"/>
+                    </a:lnB>
+                    <a:lnTlToBr>
+                      <a:noFill/>
+                    </a:lnTlToBr>
+                    <a:lnBlToTr>
+                      <a:noFill/>
+                    </a:lnBlToTr>
+                    <a:solidFill>
+                      <a:srgbClr val="CBDEDE"/>
+                    </a:solidFill>
+                  </a:tcPr>
+                </a:tc>
+                <a:extLst>
+                  <a:ext uri="{0D108BD9-81ED-4DB2-BD59-A6C34878D82A}">
+                    <a16:rowId xmlns:a16="http://schemas.microsoft.com/office/drawing/2014/main" val="10003"/>
+                  </a:ext>
+                </a:extLst>
+              </a:tr>
+            </a:tbl>
+          </a:graphicData>
+        </a:graphic>
+      </p:graphicFrame>
+      <p:sp>
+        <p:nvSpPr>
+          <p:cNvPr id="23581" name="Date Placeholder 3"/>
+          <p:cNvSpPr>
+            <a:spLocks noGrp="1"/>
+          </p:cNvSpPr>
+          <p:nvPr>
+            <p:ph type="dt" sz="quarter" idx="10"/>
+          </p:nvPr>
+        </p:nvSpPr>
+        <p:spPr>
+          <a:noFill/>
+          <a:ln/>
+          <a:extLst>
+            <a:ext uri="{909E8E84-426E-40DD-AFC4-6F175D3DCCD1}">
+              <a14:hiddenFill xmlns:a14="http://schemas.microsoft.com/office/drawing/2010/main">
+                <a:solidFill>
+                  <a:srgbClr val="FFFFFF"/>
+                </a:solidFill>
+              </a14:hiddenFill>
+            </a:ext>
+            <a:ext uri="{91240B29-F687-4F45-9708-019B960494DF}">
+              <a14:hiddenLine xmlns:a14="http://schemas.microsoft.com/office/drawing/2010/main" w="9525">
+                <a:solidFill>
+                  <a:srgbClr val="000000"/>
+                </a:solidFill>
+                <a:miter lim="800000"/>
+                <a:headEnd/>
+                <a:tailEnd/>
+              </a14:hiddenLine>
+            </a:ext>
+          </a:extLst>
+        </p:spPr>
+        <p:txBody>
+          <a:bodyPr/>
+          <a:lstStyle>
+            <a:lvl1pPr eaLnBrk="0" hangingPunct="0">
+              <a:defRPr sz="2400">
+                <a:solidFill>
+                  <a:schemeClr val="tx1"/>
+                </a:solidFill>
+                <a:latin typeface="Arial" charset="0"/>
+                <a:ea typeface="ＭＳ Ｐゴシック" charset="-128"/>
+              </a:defRPr>
+            </a:lvl1pPr>
+            <a:lvl2pPr marL="742950" indent="-285750" eaLnBrk="0" hangingPunct="0">
+              <a:defRPr sz="2400">
+                <a:solidFill>
+                  <a:schemeClr val="tx1"/>
+                </a:solidFill>
+                <a:latin typeface="Arial" charset="0"/>
+                <a:ea typeface="ＭＳ Ｐゴシック" charset="-128"/>
+              </a:defRPr>
+            </a:lvl2pPr>
+            <a:lvl3pPr marL="1143000" indent="-228600" eaLnBrk="0" hangingPunct="0">
+              <a:defRPr sz="2400">
+                <a:solidFill>
+                  <a:schemeClr val="tx1"/>
+                </a:solidFill>
+                <a:latin typeface="Arial" charset="0"/>
+                <a:ea typeface="ＭＳ Ｐゴシック" charset="-128"/>
+              </a:defRPr>
+            </a:lvl3pPr>
+            <a:lvl4pPr marL="1600200" indent="-228600" eaLnBrk="0" hangingPunct="0">
+              <a:defRPr sz="2400">
+                <a:solidFill>
+                  <a:schemeClr val="tx1"/>
+                </a:solidFill>
+                <a:latin typeface="Arial" charset="0"/>
+                <a:ea typeface="ＭＳ Ｐゴシック" charset="-128"/>
+              </a:defRPr>
+            </a:lvl4pPr>
+            <a:lvl5pPr marL="2057400" indent="-228600" eaLnBrk="0" hangingPunct="0">
+              <a:defRPr sz="2400">
+                <a:solidFill>
+                  <a:schemeClr val="tx1"/>
+                </a:solidFill>
+                <a:latin typeface="Arial" charset="0"/>
+                <a:ea typeface="ＭＳ Ｐゴシック" charset="-128"/>
+              </a:defRPr>
+            </a:lvl5pPr>
+            <a:lvl6pPr marL="2514600" indent="-228600" eaLnBrk="0" fontAlgn="base" hangingPunct="0">
+              <a:spcBef>
+                <a:spcPct val="0"/>
+              </a:spcBef>
+              <a:spcAft>
+                <a:spcPct val="0"/>
+              </a:spcAft>
+              <a:defRPr sz="2400">
+                <a:solidFill>
+                  <a:schemeClr val="tx1"/>
+                </a:solidFill>
+                <a:latin typeface="Arial" charset="0"/>
+                <a:ea typeface="ＭＳ Ｐゴシック" charset="-128"/>
+              </a:defRPr>
+            </a:lvl6pPr>
+            <a:lvl7pPr marL="2971800" indent="-228600" eaLnBrk="0" fontAlgn="base" hangingPunct="0">
+              <a:spcBef>
+                <a:spcPct val="0"/>
+              </a:spcBef>
+              <a:spcAft>
+                <a:spcPct val="0"/>
+              </a:spcAft>
+              <a:defRPr sz="2400">
+                <a:solidFill>
+                  <a:schemeClr val="tx1"/>
+                </a:solidFill>
+                <a:latin typeface="Arial" charset="0"/>
+                <a:ea typeface="ＭＳ Ｐゴシック" charset="-128"/>
+              </a:defRPr>
+            </a:lvl7pPr>
+            <a:lvl8pPr marL="3429000" indent="-228600" eaLnBrk="0" fontAlgn="base" hangingPunct="0">
+              <a:spcBef>
+                <a:spcPct val="0"/>
+              </a:spcBef>
+              <a:spcAft>
+                <a:spcPct val="0"/>
+              </a:spcAft>
+              <a:defRPr sz="2400">
+                <a:solidFill>
+                  <a:schemeClr val="tx1"/>
+                </a:solidFill>
+                <a:latin typeface="Arial" charset="0"/>
+                <a:ea typeface="ＭＳ Ｐゴシック" charset="-128"/>
+              </a:defRPr>
+            </a:lvl8pPr>
+            <a:lvl9pPr marL="3886200" indent="-228600" eaLnBrk="0" fontAlgn="base" hangingPunct="0">
+              <a:spcBef>
+                <a:spcPct val="0"/>
+              </a:spcBef>
+              <a:spcAft>
+                <a:spcPct val="0"/>
+              </a:spcAft>
+              <a:defRPr sz="2400">
+                <a:solidFill>
+                  <a:schemeClr val="tx1"/>
+                </a:solidFill>
+                <a:latin typeface="Arial" charset="0"/>
+                <a:ea typeface="ＭＳ Ｐゴシック" charset="-128"/>
+              </a:defRPr>
+            </a:lvl9pPr>
+          </a:lstStyle>
+          <a:p>
+            <a:pPr eaLnBrk="1" hangingPunct="1"/>
+            <a:r>
+              <a:rPr lang="en-US" altLang="x-none" sz="1200">
+                <a:latin typeface="Garamond" charset="0"/>
+              </a:rPr>
+              <a:t>22 October 2016</a:t>
+            </a:r>
+            <a:endParaRPr lang="it-IT" altLang="x-none" sz="1200">
+              <a:latin typeface="Garamond" charset="0"/>
+            </a:endParaRPr>
+          </a:p>
+        </p:txBody>
+      </p:sp>
+      <p:sp>
+        <p:nvSpPr>
+          <p:cNvPr id="23582" name="Footer Placeholder 4"/>
+          <p:cNvSpPr>
+            <a:spLocks noGrp="1"/>
+          </p:cNvSpPr>
+          <p:nvPr>
+            <p:ph type="ftr" sz="quarter" idx="11"/>
+          </p:nvPr>
+        </p:nvSpPr>
+        <p:spPr>
+          <a:noFill/>
+          <a:ln/>
+          <a:extLst>
+            <a:ext uri="{909E8E84-426E-40DD-AFC4-6F175D3DCCD1}">
+              <a14:hiddenFill xmlns:a14="http://schemas.microsoft.com/office/drawing/2010/main">
+                <a:solidFill>
+                  <a:srgbClr val="FFFFFF"/>
+                </a:solidFill>
+              </a14:hiddenFill>
+            </a:ext>
+            <a:ext uri="{91240B29-F687-4F45-9708-019B960494DF}">
+              <a14:hiddenLine xmlns:a14="http://schemas.microsoft.com/office/drawing/2010/main" w="9525">
+                <a:solidFill>
+                  <a:srgbClr val="000000"/>
+                </a:solidFill>
+                <a:miter lim="800000"/>
+                <a:headEnd/>
+                <a:tailEnd/>
+              </a14:hiddenLine>
+            </a:ext>
+          </a:extLst>
+        </p:spPr>
+        <p:txBody>
+          <a:bodyPr/>
+          <a:lstStyle>
+            <a:lvl1pPr eaLnBrk="0" hangingPunct="0">
+              <a:defRPr sz="2400">
+                <a:solidFill>
+                  <a:schemeClr val="tx1"/>
+                </a:solidFill>
+                <a:latin typeface="Arial" charset="0"/>
+                <a:ea typeface="ＭＳ Ｐゴシック" charset="-128"/>
+              </a:defRPr>
+            </a:lvl1pPr>
+            <a:lvl2pPr marL="742950" indent="-285750" eaLnBrk="0" hangingPunct="0">
+              <a:defRPr sz="2400">
+                <a:solidFill>
+                  <a:schemeClr val="tx1"/>
+                </a:solidFill>
+                <a:latin typeface="Arial" charset="0"/>
+                <a:ea typeface="ＭＳ Ｐゴシック" charset="-128"/>
+              </a:defRPr>
+            </a:lvl2pPr>
+            <a:lvl3pPr marL="1143000" indent="-228600" eaLnBrk="0" hangingPunct="0">
+              <a:defRPr sz="2400">
+                <a:solidFill>
+                  <a:schemeClr val="tx1"/>
+                </a:solidFill>
+                <a:latin typeface="Arial" charset="0"/>
+                <a:ea typeface="ＭＳ Ｐゴシック" charset="-128"/>
+              </a:defRPr>
+            </a:lvl3pPr>
+            <a:lvl4pPr marL="1600200" indent="-228600" eaLnBrk="0" hangingPunct="0">
+              <a:defRPr sz="2400">
+                <a:solidFill>
+                  <a:schemeClr val="tx1"/>
+                </a:solidFill>
+                <a:latin typeface="Arial" charset="0"/>
+                <a:ea typeface="ＭＳ Ｐゴシック" charset="-128"/>
+              </a:defRPr>
+            </a:lvl4pPr>
+            <a:lvl5pPr marL="2057400" indent="-228600" eaLnBrk="0" hangingPunct="0">
+              <a:defRPr sz="2400">
+                <a:solidFill>
+                  <a:schemeClr val="tx1"/>
+                </a:solidFill>
+                <a:latin typeface="Arial" charset="0"/>
+                <a:ea typeface="ＭＳ Ｐゴシック" charset="-128"/>
+              </a:defRPr>
+            </a:lvl5pPr>
+            <a:lvl6pPr marL="2514600" indent="-228600" eaLnBrk="0" fontAlgn="base" hangingPunct="0">
+              <a:spcBef>
+                <a:spcPct val="0"/>
+              </a:spcBef>
+              <a:spcAft>
+                <a:spcPct val="0"/>
+              </a:spcAft>
+              <a:defRPr sz="2400">
+                <a:solidFill>
+                  <a:schemeClr val="tx1"/>
+                </a:solidFill>
+                <a:latin typeface="Arial" charset="0"/>
+                <a:ea typeface="ＭＳ Ｐゴシック" charset="-128"/>
+              </a:defRPr>
+            </a:lvl6pPr>
+            <a:lvl7pPr marL="2971800" indent="-228600" eaLnBrk="0" fontAlgn="base" hangingPunct="0">
+              <a:spcBef>
+                <a:spcPct val="0"/>
+              </a:spcBef>
+              <a:spcAft>
+                <a:spcPct val="0"/>
+              </a:spcAft>
+              <a:defRPr sz="2400">
+                <a:solidFill>
+                  <a:schemeClr val="tx1"/>
+                </a:solidFill>
+                <a:latin typeface="Arial" charset="0"/>
+                <a:ea typeface="ＭＳ Ｐゴシック" charset="-128"/>
+              </a:defRPr>
+            </a:lvl7pPr>
+            <a:lvl8pPr marL="3429000" indent="-228600" eaLnBrk="0" fontAlgn="base" hangingPunct="0">
+              <a:spcBef>
+                <a:spcPct val="0"/>
+              </a:spcBef>
+              <a:spcAft>
+                <a:spcPct val="0"/>
+              </a:spcAft>
+              <a:defRPr sz="2400">
+                <a:solidFill>
+                  <a:schemeClr val="tx1"/>
+                </a:solidFill>
+                <a:latin typeface="Arial" charset="0"/>
+                <a:ea typeface="ＭＳ Ｐゴシック" charset="-128"/>
+              </a:defRPr>
+            </a:lvl8pPr>
+            <a:lvl9pPr marL="3886200" indent="-228600" eaLnBrk="0" fontAlgn="base" hangingPunct="0">
+              <a:spcBef>
+                <a:spcPct val="0"/>
+              </a:spcBef>
+              <a:spcAft>
+                <a:spcPct val="0"/>
+              </a:spcAft>
+              <a:defRPr sz="2400">
+                <a:solidFill>
+                  <a:schemeClr val="tx1"/>
+                </a:solidFill>
+                <a:latin typeface="Arial" charset="0"/>
+                <a:ea typeface="ＭＳ Ｐゴシック" charset="-128"/>
+              </a:defRPr>
+            </a:lvl9pPr>
+          </a:lstStyle>
+          <a:p>
+            <a:pPr eaLnBrk="1" hangingPunct="1"/>
+            <a:r>
+              <a:rPr lang="en-US" altLang="x-none" sz="1200">
+                <a:latin typeface="Garamond" charset="0"/>
+              </a:rPr>
+              <a:t>Vincenzo Innocente</a:t>
+            </a:r>
+            <a:endParaRPr lang="it-IT" altLang="x-none" sz="1200">
+              <a:latin typeface="Garamond" charset="0"/>
+            </a:endParaRPr>
+          </a:p>
+        </p:txBody>
+      </p:sp>
+      <p:sp>
+        <p:nvSpPr>
+          <p:cNvPr id="23583" name="Slide Number Placeholder 5"/>
+          <p:cNvSpPr>
+            <a:spLocks noGrp="1"/>
+          </p:cNvSpPr>
+          <p:nvPr>
+            <p:ph type="sldNum" sz="quarter" idx="12"/>
+          </p:nvPr>
+        </p:nvSpPr>
+        <p:spPr>
+          <a:noFill/>
+          <a:ln/>
+          <a:extLst>
+            <a:ext uri="{909E8E84-426E-40DD-AFC4-6F175D3DCCD1}">
+              <a14:hiddenFill xmlns:a14="http://schemas.microsoft.com/office/drawing/2010/main">
+                <a:solidFill>
+                  <a:srgbClr val="FFFFFF"/>
+                </a:solidFill>
+              </a14:hiddenFill>
+            </a:ext>
+            <a:ext uri="{91240B29-F687-4F45-9708-019B960494DF}">
+              <a14:hiddenLine xmlns:a14="http://schemas.microsoft.com/office/drawing/2010/main" w="9525">
+                <a:solidFill>
+                  <a:srgbClr val="000000"/>
+                </a:solidFill>
+                <a:miter lim="800000"/>
+                <a:headEnd/>
+                <a:tailEnd/>
+              </a14:hiddenLine>
+            </a:ext>
+          </a:extLst>
+        </p:spPr>
+        <p:txBody>
+          <a:bodyPr/>
+          <a:lstStyle>
+            <a:lvl1pPr eaLnBrk="0" hangingPunct="0">
+              <a:defRPr sz="2400">
+                <a:solidFill>
+                  <a:schemeClr val="tx1"/>
+                </a:solidFill>
+                <a:latin typeface="Arial" charset="0"/>
+                <a:ea typeface="ＭＳ Ｐゴシック" charset="-128"/>
+              </a:defRPr>
+            </a:lvl1pPr>
+            <a:lvl2pPr marL="742950" indent="-285750" eaLnBrk="0" hangingPunct="0">
+              <a:defRPr sz="2400">
+                <a:solidFill>
+                  <a:schemeClr val="tx1"/>
+                </a:solidFill>
+                <a:latin typeface="Arial" charset="0"/>
+                <a:ea typeface="ＭＳ Ｐゴシック" charset="-128"/>
+              </a:defRPr>
+            </a:lvl2pPr>
+            <a:lvl3pPr marL="1143000" indent="-228600" eaLnBrk="0" hangingPunct="0">
+              <a:defRPr sz="2400">
+                <a:solidFill>
+                  <a:schemeClr val="tx1"/>
+                </a:solidFill>
+                <a:latin typeface="Arial" charset="0"/>
+                <a:ea typeface="ＭＳ Ｐゴシック" charset="-128"/>
+              </a:defRPr>
+            </a:lvl3pPr>
+            <a:lvl4pPr marL="1600200" indent="-228600" eaLnBrk="0" hangingPunct="0">
+              <a:defRPr sz="2400">
+                <a:solidFill>
+                  <a:schemeClr val="tx1"/>
+                </a:solidFill>
+                <a:latin typeface="Arial" charset="0"/>
+                <a:ea typeface="ＭＳ Ｐゴシック" charset="-128"/>
+              </a:defRPr>
+            </a:lvl4pPr>
+            <a:lvl5pPr marL="2057400" indent="-228600" eaLnBrk="0" hangingPunct="0">
+              <a:defRPr sz="2400">
+                <a:solidFill>
+                  <a:schemeClr val="tx1"/>
+                </a:solidFill>
+                <a:latin typeface="Arial" charset="0"/>
+                <a:ea typeface="ＭＳ Ｐゴシック" charset="-128"/>
+              </a:defRPr>
+            </a:lvl5pPr>
+            <a:lvl6pPr marL="2514600" indent="-228600" eaLnBrk="0" fontAlgn="base" hangingPunct="0">
+              <a:spcBef>
+                <a:spcPct val="0"/>
+              </a:spcBef>
+              <a:spcAft>
+                <a:spcPct val="0"/>
+              </a:spcAft>
+              <a:defRPr sz="2400">
+                <a:solidFill>
+                  <a:schemeClr val="tx1"/>
+                </a:solidFill>
+                <a:latin typeface="Arial" charset="0"/>
+                <a:ea typeface="ＭＳ Ｐゴシック" charset="-128"/>
+              </a:defRPr>
+            </a:lvl6pPr>
+            <a:lvl7pPr marL="2971800" indent="-228600" eaLnBrk="0" fontAlgn="base" hangingPunct="0">
+              <a:spcBef>
+                <a:spcPct val="0"/>
+              </a:spcBef>
+              <a:spcAft>
+                <a:spcPct val="0"/>
+              </a:spcAft>
+              <a:defRPr sz="2400">
+                <a:solidFill>
+                  <a:schemeClr val="tx1"/>
+                </a:solidFill>
+                <a:latin typeface="Arial" charset="0"/>
+                <a:ea typeface="ＭＳ Ｐゴシック" charset="-128"/>
+              </a:defRPr>
+            </a:lvl7pPr>
+            <a:lvl8pPr marL="3429000" indent="-228600" eaLnBrk="0" fontAlgn="base" hangingPunct="0">
+              <a:spcBef>
+                <a:spcPct val="0"/>
+              </a:spcBef>
+              <a:spcAft>
+                <a:spcPct val="0"/>
+              </a:spcAft>
+              <a:defRPr sz="2400">
+                <a:solidFill>
+                  <a:schemeClr val="tx1"/>
+                </a:solidFill>
+                <a:latin typeface="Arial" charset="0"/>
+                <a:ea typeface="ＭＳ Ｐゴシック" charset="-128"/>
+              </a:defRPr>
+            </a:lvl8pPr>
+            <a:lvl9pPr marL="3886200" indent="-228600" eaLnBrk="0" fontAlgn="base" hangingPunct="0">
+              <a:spcBef>
+                <a:spcPct val="0"/>
+              </a:spcBef>
+              <a:spcAft>
+                <a:spcPct val="0"/>
+              </a:spcAft>
+              <a:defRPr sz="2400">
+                <a:solidFill>
+                  <a:schemeClr val="tx1"/>
+                </a:solidFill>
+                <a:latin typeface="Arial" charset="0"/>
+                <a:ea typeface="ＭＳ Ｐゴシック" charset="-128"/>
+              </a:defRPr>
+            </a:lvl9pPr>
+          </a:lstStyle>
+          <a:p>
+            <a:pPr eaLnBrk="1" hangingPunct="1"/>
+            <a:fld id="{CE4F9FE7-EDA6-7B4F-A207-843BFCE22E1D}" type="slidenum">
+              <a:rPr lang="it-IT" altLang="x-none" sz="1200">
+                <a:latin typeface="Garamond" charset="0"/>
+              </a:rPr>
+              <a:pPr eaLnBrk="1" hangingPunct="1"/>
+              <a:t>7</a:t>
+            </a:fld>
+            <a:endParaRPr lang="it-IT" altLang="x-none" sz="1200">
+              <a:latin typeface="Garamond" charset="0"/>
+            </a:endParaRPr>
+          </a:p>
+        </p:txBody>
+      </p:sp>
+      <p:pic>
+        <p:nvPicPr>
+          <p:cNvPr id="23584" name="Picture 6"/>
+          <p:cNvPicPr>
+            <a:picLocks noChangeAspect="1"/>
+          </p:cNvPicPr>
+          <p:nvPr/>
+        </p:nvPicPr>
+        <p:blipFill>
+          <a:blip r:embed="rId3">
+            <a:extLst>
+              <a:ext uri="{28A0092B-C50C-407E-A947-70E740481C1C}">
+                <a14:useLocalDpi xmlns:a14="http://schemas.microsoft.com/office/drawing/2010/main" val="0"/>
+              </a:ext>
+            </a:extLst>
+          </a:blip>
+          <a:srcRect/>
+          <a:stretch>
+            <a:fillRect/>
+          </a:stretch>
+        </p:blipFill>
+        <p:spPr bwMode="auto">
+          <a:xfrm>
+            <a:off x="1905000" y="1752600"/>
+            <a:ext cx="7493000" cy="977900"/>
+          </a:xfrm>
+          <a:prstGeom prst="rect">
+            <a:avLst/>
+          </a:prstGeom>
+          <a:noFill/>
+          <a:ln>
+            <a:noFill/>
+          </a:ln>
+          <a:extLst>
+            <a:ext uri="{909E8E84-426E-40DD-AFC4-6F175D3DCCD1}">
+              <a14:hiddenFill xmlns:a14="http://schemas.microsoft.com/office/drawing/2010/main">
+                <a:solidFill>
+                  <a:srgbClr val="FFFFFF"/>
+                </a:solidFill>
+              </a14:hiddenFill>
+            </a:ext>
+            <a:ext uri="{91240B29-F687-4F45-9708-019B960494DF}">
+              <a14:hiddenLine xmlns:a14="http://schemas.microsoft.com/office/drawing/2010/main" w="9525">
+                <a:solidFill>
+                  <a:srgbClr val="000000"/>
+                </a:solidFill>
+                <a:miter lim="800000"/>
+                <a:headEnd/>
+                <a:tailEnd/>
+              </a14:hiddenLine>
+            </a:ext>
+          </a:extLst>
+        </p:spPr>
+      </p:pic>
+      <p:pic>
+        <p:nvPicPr>
+          <p:cNvPr id="23585" name="Picture 7"/>
+          <p:cNvPicPr>
+            <a:picLocks noChangeAspect="1"/>
+          </p:cNvPicPr>
+          <p:nvPr/>
+        </p:nvPicPr>
+        <p:blipFill>
+          <a:blip r:embed="rId4">
+            <a:extLst>
+              <a:ext uri="{28A0092B-C50C-407E-A947-70E740481C1C}">
+                <a14:useLocalDpi xmlns:a14="http://schemas.microsoft.com/office/drawing/2010/main" val="0"/>
+              </a:ext>
+            </a:extLst>
+          </a:blip>
+          <a:srcRect/>
+          <a:stretch>
+            <a:fillRect/>
+          </a:stretch>
+        </p:blipFill>
+        <p:spPr bwMode="auto">
+          <a:xfrm>
+            <a:off x="2362200" y="2895600"/>
+            <a:ext cx="3200400" cy="292100"/>
+          </a:xfrm>
+          <a:prstGeom prst="rect">
+            <a:avLst/>
+          </a:prstGeom>
+          <a:noFill/>
+          <a:ln>
+            <a:noFill/>
+          </a:ln>
+          <a:extLst>
+            <a:ext uri="{909E8E84-426E-40DD-AFC4-6F175D3DCCD1}">
+              <a14:hiddenFill xmlns:a14="http://schemas.microsoft.com/office/drawing/2010/main">
+                <a:solidFill>
+                  <a:srgbClr val="FFFFFF"/>
+                </a:solidFill>
+              </a14:hiddenFill>
+            </a:ext>
+            <a:ext uri="{91240B29-F687-4F45-9708-019B960494DF}">
+              <a14:hiddenLine xmlns:a14="http://schemas.microsoft.com/office/drawing/2010/main" w="9525">
+                <a:solidFill>
+                  <a:srgbClr val="000000"/>
+                </a:solidFill>
+                <a:miter lim="800000"/>
+                <a:headEnd/>
+                <a:tailEnd/>
+              </a14:hiddenLine>
+            </a:ext>
+          </a:extLst>
+        </p:spPr>
+      </p:pic>
+      <p:sp>
+        <p:nvSpPr>
+          <p:cNvPr id="11" name="Bent-Up Arrow 10"/>
+          <p:cNvSpPr>
+            <a:spLocks/>
+          </p:cNvSpPr>
+          <p:nvPr/>
+        </p:nvSpPr>
+        <p:spPr bwMode="auto">
+          <a:xfrm flipH="1" flipV="1">
+            <a:off x="3657600" y="1371600"/>
+            <a:ext cx="4038600" cy="533400"/>
+          </a:xfrm>
+          <a:custGeom>
+            <a:avLst/>
+            <a:gdLst>
+              <a:gd name="T0" fmla="*/ 0 w 4038600"/>
+              <a:gd name="T1" fmla="*/ 400050 h 533400"/>
+              <a:gd name="T2" fmla="*/ 3838575 w 4038600"/>
+              <a:gd name="T3" fmla="*/ 400050 h 533400"/>
+              <a:gd name="T4" fmla="*/ 3838575 w 4038600"/>
+              <a:gd name="T5" fmla="*/ 133350 h 533400"/>
+              <a:gd name="T6" fmla="*/ 3771900 w 4038600"/>
+              <a:gd name="T7" fmla="*/ 133350 h 533400"/>
+              <a:gd name="T8" fmla="*/ 3905250 w 4038600"/>
+              <a:gd name="T9" fmla="*/ 0 h 533400"/>
+              <a:gd name="T10" fmla="*/ 4038600 w 4038600"/>
+              <a:gd name="T11" fmla="*/ 133350 h 533400"/>
+              <a:gd name="T12" fmla="*/ 3971925 w 4038600"/>
+              <a:gd name="T13" fmla="*/ 133350 h 533400"/>
+              <a:gd name="T14" fmla="*/ 3971925 w 4038600"/>
+              <a:gd name="T15" fmla="*/ 533400 h 533400"/>
+              <a:gd name="T16" fmla="*/ 0 w 4038600"/>
+              <a:gd name="T17" fmla="*/ 533400 h 533400"/>
+              <a:gd name="T18" fmla="*/ 0 w 4038600"/>
+              <a:gd name="T19" fmla="*/ 400050 h 533400"/>
+              <a:gd name="T20" fmla="*/ 0 60000 65536"/>
+              <a:gd name="T21" fmla="*/ 0 60000 65536"/>
+              <a:gd name="T22" fmla="*/ 0 60000 65536"/>
+              <a:gd name="T23" fmla="*/ 0 60000 65536"/>
+              <a:gd name="T24" fmla="*/ 0 60000 65536"/>
+              <a:gd name="T25" fmla="*/ 0 60000 65536"/>
+              <a:gd name="T26" fmla="*/ 0 60000 65536"/>
+              <a:gd name="T27" fmla="*/ 0 60000 65536"/>
+              <a:gd name="T28" fmla="*/ 0 60000 65536"/>
+              <a:gd name="T29" fmla="*/ 0 60000 65536"/>
+            </a:gdLst>
+            <a:ahLst/>
+            <a:cxnLst>
+              <a:cxn ang="T20">
+                <a:pos x="T0" y="T1"/>
+              </a:cxn>
+              <a:cxn ang="T21">
+                <a:pos x="T2" y="T3"/>
+              </a:cxn>
+              <a:cxn ang="T22">
+                <a:pos x="T4" y="T5"/>
+              </a:cxn>
+              <a:cxn ang="T23">
+                <a:pos x="T6" y="T7"/>
+              </a:cxn>
+              <a:cxn ang="T24">
+                <a:pos x="T8" y="T9"/>
+              </a:cxn>
+              <a:cxn ang="T25">
+                <a:pos x="T10" y="T11"/>
+              </a:cxn>
+              <a:cxn ang="T26">
+                <a:pos x="T12" y="T13"/>
+              </a:cxn>
+              <a:cxn ang="T27">
+                <a:pos x="T14" y="T15"/>
+              </a:cxn>
+              <a:cxn ang="T28">
+                <a:pos x="T16" y="T17"/>
+              </a:cxn>
+              <a:cxn ang="T29">
+                <a:pos x="T18" y="T19"/>
+              </a:cxn>
+            </a:cxnLst>
+            <a:rect l="0" t="0" r="r" b="b"/>
+            <a:pathLst>
+              <a:path w="4038600" h="533400">
+                <a:moveTo>
+                  <a:pt x="0" y="400050"/>
+                </a:moveTo>
+                <a:lnTo>
+                  <a:pt x="3838575" y="400050"/>
+                </a:lnTo>
+                <a:lnTo>
+                  <a:pt x="3838575" y="133350"/>
+                </a:lnTo>
+                <a:lnTo>
+                  <a:pt x="3771900" y="133350"/>
+                </a:lnTo>
+                <a:lnTo>
+                  <a:pt x="3905250" y="0"/>
+                </a:lnTo>
+                <a:lnTo>
+                  <a:pt x="4038600" y="133350"/>
+                </a:lnTo>
+                <a:lnTo>
+                  <a:pt x="3971925" y="133350"/>
+                </a:lnTo>
+                <a:lnTo>
+                  <a:pt x="3971925" y="533400"/>
+                </a:lnTo>
+                <a:lnTo>
+                  <a:pt x="0" y="533400"/>
+                </a:lnTo>
+                <a:lnTo>
+                  <a:pt x="0" y="400050"/>
+                </a:lnTo>
+                <a:close/>
+              </a:path>
+            </a:pathLst>
+          </a:custGeom>
+          <a:gradFill rotWithShape="1">
+            <a:gsLst>
+              <a:gs pos="0">
+                <a:srgbClr val="9DF3F3"/>
+              </a:gs>
+              <a:gs pos="100000">
+                <a:srgbClr val="00B0B0"/>
+              </a:gs>
+            </a:gsLst>
+            <a:lin ang="5400000"/>
+          </a:gradFill>
+          <a:ln w="9525" cap="flat" cmpd="sng">
+            <a:solidFill>
+              <a:srgbClr val="009999"/>
+            </a:solidFill>
+            <a:prstDash val="solid"/>
+            <a:round/>
+            <a:headEnd/>
+            <a:tailEnd/>
+          </a:ln>
+          <a:effectLst>
+            <a:outerShdw blurRad="40000" dist="23000" dir="5400000" rotWithShape="0">
+              <a:srgbClr val="000000">
+                <a:alpha val="34999"/>
+              </a:srgbClr>
+            </a:outerShdw>
+          </a:effectLst>
+        </p:spPr>
+        <p:txBody>
+          <a:bodyPr anchor="ctr"/>
+          <a:lstStyle/>
+          <a:p>
+            <a:endParaRPr lang="en-US"/>
+          </a:p>
+        </p:txBody>
+      </p:sp>
+      <p:sp>
+        <p:nvSpPr>
+          <p:cNvPr id="23587" name="TextBox 11"/>
+          <p:cNvSpPr txBox="1">
+            <a:spLocks noChangeArrowheads="1"/>
+          </p:cNvSpPr>
+          <p:nvPr/>
+        </p:nvSpPr>
+        <p:spPr bwMode="auto">
+          <a:xfrm>
+            <a:off x="7696201" y="1219200"/>
+            <a:ext cx="1095375" cy="369888"/>
+          </a:xfrm>
+          <a:prstGeom prst="rect">
+            <a:avLst/>
+          </a:prstGeom>
+          <a:noFill/>
+          <a:ln>
+            <a:noFill/>
+          </a:ln>
+          <a:extLst>
+            <a:ext uri="{909E8E84-426E-40DD-AFC4-6F175D3DCCD1}">
+              <a14:hiddenFill xmlns:a14="http://schemas.microsoft.com/office/drawing/2010/main">
+                <a:solidFill>
+                  <a:srgbClr val="FFFFFF"/>
+                </a:solidFill>
+              </a14:hiddenFill>
+            </a:ext>
+            <a:ext uri="{91240B29-F687-4F45-9708-019B960494DF}">
+              <a14:hiddenLine xmlns:a14="http://schemas.microsoft.com/office/drawing/2010/main" w="9525">
+                <a:solidFill>
+                  <a:srgbClr val="000000"/>
+                </a:solidFill>
+                <a:miter lim="800000"/>
+                <a:headEnd/>
+                <a:tailEnd/>
+              </a14:hiddenLine>
+            </a:ext>
+          </a:extLst>
+        </p:spPr>
+        <p:txBody>
+          <a:bodyPr wrap="none">
+            <a:spAutoFit/>
+          </a:bodyPr>
+          <a:lstStyle>
+            <a:lvl1pPr eaLnBrk="0" hangingPunct="0">
+              <a:defRPr sz="2400">
+                <a:solidFill>
+                  <a:schemeClr val="tx1"/>
+                </a:solidFill>
+                <a:latin typeface="Arial" charset="0"/>
+                <a:ea typeface="ＭＳ Ｐゴシック" charset="-128"/>
+              </a:defRPr>
+            </a:lvl1pPr>
+            <a:lvl2pPr marL="742950" indent="-285750" eaLnBrk="0" hangingPunct="0">
+              <a:defRPr sz="2400">
+                <a:solidFill>
+                  <a:schemeClr val="tx1"/>
+                </a:solidFill>
+                <a:latin typeface="Arial" charset="0"/>
+                <a:ea typeface="ＭＳ Ｐゴシック" charset="-128"/>
+              </a:defRPr>
+            </a:lvl2pPr>
+            <a:lvl3pPr marL="1143000" indent="-228600" eaLnBrk="0" hangingPunct="0">
+              <a:defRPr sz="2400">
+                <a:solidFill>
+                  <a:schemeClr val="tx1"/>
+                </a:solidFill>
+                <a:latin typeface="Arial" charset="0"/>
+                <a:ea typeface="ＭＳ Ｐゴシック" charset="-128"/>
+              </a:defRPr>
+            </a:lvl3pPr>
+            <a:lvl4pPr marL="1600200" indent="-228600" eaLnBrk="0" hangingPunct="0">
+              <a:defRPr sz="2400">
+                <a:solidFill>
+                  <a:schemeClr val="tx1"/>
+                </a:solidFill>
+                <a:latin typeface="Arial" charset="0"/>
+                <a:ea typeface="ＭＳ Ｐゴシック" charset="-128"/>
+              </a:defRPr>
+            </a:lvl4pPr>
+            <a:lvl5pPr marL="2057400" indent="-228600" eaLnBrk="0" hangingPunct="0">
+              <a:defRPr sz="2400">
+                <a:solidFill>
+                  <a:schemeClr val="tx1"/>
+                </a:solidFill>
+                <a:latin typeface="Arial" charset="0"/>
+                <a:ea typeface="ＭＳ Ｐゴシック" charset="-128"/>
+              </a:defRPr>
+            </a:lvl5pPr>
+            <a:lvl6pPr marL="2514600" indent="-228600" eaLnBrk="0" fontAlgn="base" hangingPunct="0">
+              <a:spcBef>
+                <a:spcPct val="0"/>
+              </a:spcBef>
+              <a:spcAft>
+                <a:spcPct val="0"/>
+              </a:spcAft>
+              <a:defRPr sz="2400">
+                <a:solidFill>
+                  <a:schemeClr val="tx1"/>
+                </a:solidFill>
+                <a:latin typeface="Arial" charset="0"/>
+                <a:ea typeface="ＭＳ Ｐゴシック" charset="-128"/>
+              </a:defRPr>
+            </a:lvl6pPr>
+            <a:lvl7pPr marL="2971800" indent="-228600" eaLnBrk="0" fontAlgn="base" hangingPunct="0">
+              <a:spcBef>
+                <a:spcPct val="0"/>
+              </a:spcBef>
+              <a:spcAft>
+                <a:spcPct val="0"/>
+              </a:spcAft>
+              <a:defRPr sz="2400">
+                <a:solidFill>
+                  <a:schemeClr val="tx1"/>
+                </a:solidFill>
+                <a:latin typeface="Arial" charset="0"/>
+                <a:ea typeface="ＭＳ Ｐゴシック" charset="-128"/>
+              </a:defRPr>
+            </a:lvl7pPr>
+            <a:lvl8pPr marL="3429000" indent="-228600" eaLnBrk="0" fontAlgn="base" hangingPunct="0">
+              <a:spcBef>
+                <a:spcPct val="0"/>
+              </a:spcBef>
+              <a:spcAft>
+                <a:spcPct val="0"/>
+              </a:spcAft>
+              <a:defRPr sz="2400">
+                <a:solidFill>
+                  <a:schemeClr val="tx1"/>
+                </a:solidFill>
+                <a:latin typeface="Arial" charset="0"/>
+                <a:ea typeface="ＭＳ Ｐゴシック" charset="-128"/>
+              </a:defRPr>
+            </a:lvl8pPr>
+            <a:lvl9pPr marL="3886200" indent="-228600" eaLnBrk="0" fontAlgn="base" hangingPunct="0">
+              <a:spcBef>
+                <a:spcPct val="0"/>
+              </a:spcBef>
+              <a:spcAft>
+                <a:spcPct val="0"/>
+              </a:spcAft>
+              <a:defRPr sz="2400">
+                <a:solidFill>
+                  <a:schemeClr val="tx1"/>
+                </a:solidFill>
+                <a:latin typeface="Arial" charset="0"/>
+                <a:ea typeface="ＭＳ Ｐゴシック" charset="-128"/>
+              </a:defRPr>
+            </a:lvl9pPr>
+          </a:lstStyle>
+          <a:p>
+            <a:pPr eaLnBrk="1" hangingPunct="1"/>
+            <a:r>
+              <a:rPr lang="en-US" altLang="x-none" sz="1800"/>
+              <a:t>Implicit 1</a:t>
+            </a:r>
+          </a:p>
+        </p:txBody>
+      </p:sp>
+    </p:spTree>
+  </p:cSld>
+  <p:clrMapOvr>
+    <a:masterClrMapping/>
+  </p:clrMapOvr>
+</p:sld>
+</file>
+
+<file path=ppt/slides/slide8.xml><?xml version="1.0" encoding="utf-8"?>
+<p:sld xmlns:a="http://schemas.openxmlformats.org/drawingml/2006/main" xmlns:r="http://schemas.openxmlformats.org/officeDocument/2006/relationships" xmlns:p="http://schemas.openxmlformats.org/presentationml/2006/main">
+  <p:cSld>
+    <p:spTree>
+      <p:nvGrpSpPr>
+        <p:cNvPr id="1" name=""/>
+        <p:cNvGrpSpPr/>
+        <p:nvPr/>
+      </p:nvGrpSpPr>
+      <p:grpSpPr>
+        <a:xfrm>
+          <a:off x="0" y="0"/>
+          <a:ext cx="0" cy="0"/>
+          <a:chOff x="0" y="0"/>
+          <a:chExt cx="0" cy="0"/>
+        </a:xfrm>
+      </p:grpSpPr>
+      <p:sp>
+        <p:nvSpPr>
           <p:cNvPr id="27649" name="Title 1"/>
           <p:cNvSpPr>
             <a:spLocks noGrp="1"/>
@@ -9286,7 +16231,7 @@
                 <a:latin typeface="Garamond" charset="0"/>
               </a:rPr>
               <a:pPr eaLnBrk="1" hangingPunct="1"/>
-              <a:t>7</a:t>
+              <a:t>8</a:t>
             </a:fld>
             <a:endParaRPr lang="it-IT" altLang="x-none" sz="1200">
               <a:latin typeface="Garamond" charset="0"/>
@@ -9883,7 +16828,7 @@
 </p:sld>
 </file>
 
-<file path=ppt/slides/slide8.xml><?xml version="1.0" encoding="utf-8"?>
+<file path=ppt/slides/slide9.xml><?xml version="1.0" encoding="utf-8"?>
 <p:sld xmlns:a="http://schemas.openxmlformats.org/drawingml/2006/main" xmlns:r="http://schemas.openxmlformats.org/officeDocument/2006/relationships" xmlns:p="http://schemas.openxmlformats.org/presentationml/2006/main">
   <p:cSld>
     <p:spTree>
@@ -10388,7 +17333,7 @@
                 <a:latin typeface="Garamond" charset="0"/>
               </a:rPr>
               <a:pPr eaLnBrk="1" hangingPunct="1"/>
-              <a:t>8</a:t>
+              <a:t>9</a:t>
             </a:fld>
             <a:endParaRPr lang="it-IT" altLang="x-none" sz="1200">
               <a:latin typeface="Garamond" charset="0"/>
@@ -10872,1120 +17817,6 @@
               </a:rPr>
               <a:t>// bit by bit</a:t>
             </a:r>
-          </a:p>
-        </p:txBody>
-      </p:sp>
-    </p:spTree>
-  </p:cSld>
-  <p:clrMapOvr>
-    <a:masterClrMapping/>
-  </p:clrMapOvr>
-</p:sld>
-</file>
-
-<file path=ppt/slides/slide9.xml><?xml version="1.0" encoding="utf-8"?>
-<p:sld xmlns:a="http://schemas.openxmlformats.org/drawingml/2006/main" xmlns:r="http://schemas.openxmlformats.org/officeDocument/2006/relationships" xmlns:p="http://schemas.openxmlformats.org/presentationml/2006/main">
-  <p:cSld>
-    <p:spTree>
-      <p:nvGrpSpPr>
-        <p:cNvPr id="1" name=""/>
-        <p:cNvGrpSpPr/>
-        <p:nvPr/>
-      </p:nvGrpSpPr>
-      <p:grpSpPr>
-        <a:xfrm>
-          <a:off x="0" y="0"/>
-          <a:ext cx="0" cy="0"/>
-          <a:chOff x="0" y="0"/>
-          <a:chExt cx="0" cy="0"/>
-        </a:xfrm>
-      </p:grpSpPr>
-      <p:sp>
-        <p:nvSpPr>
-          <p:cNvPr id="26625" name="Title 1"/>
-          <p:cNvSpPr>
-            <a:spLocks noGrp="1"/>
-          </p:cNvSpPr>
-          <p:nvPr>
-            <p:ph type="title"/>
-          </p:nvPr>
-        </p:nvSpPr>
-        <p:spPr/>
-        <p:txBody>
-          <a:bodyPr/>
-          <a:lstStyle/>
-          <a:p>
-            <a:r>
-              <a:rPr lang="en-US" altLang="x-none"/>
-              <a:t>Limits</a:t>
-            </a:r>
-          </a:p>
-        </p:txBody>
-      </p:sp>
-      <p:sp>
-        <p:nvSpPr>
-          <p:cNvPr id="26626" name="Content Placeholder 5"/>
-          <p:cNvSpPr>
-            <a:spLocks noGrp="1"/>
-          </p:cNvSpPr>
-          <p:nvPr>
-            <p:ph idx="1"/>
-          </p:nvPr>
-        </p:nvSpPr>
-        <p:spPr>
-          <a:xfrm>
-            <a:off x="714633" y="1367851"/>
-            <a:ext cx="8229600" cy="1931404"/>
-          </a:xfrm>
-        </p:spPr>
-        <p:txBody>
-          <a:bodyPr/>
-          <a:lstStyle/>
-          <a:p>
-            <a:r>
-              <a:rPr lang="en-US" altLang="x-none" dirty="0"/>
-              <a:t>Everything you want to know about an arithmetic type is in </a:t>
-            </a:r>
-          </a:p>
-          <a:p>
-            <a:pPr lvl="1"/>
-            <a:r>
-              <a:rPr lang="en-US" altLang="x-none" dirty="0" err="1"/>
-              <a:t>std</a:t>
-            </a:r>
-            <a:r>
-              <a:rPr lang="en-US" altLang="x-none" dirty="0"/>
-              <a:t>::</a:t>
-            </a:r>
-            <a:r>
-              <a:rPr lang="en-US" altLang="x-none" dirty="0" err="1"/>
-              <a:t>numeric_limits</a:t>
-            </a:r>
-            <a:r>
-              <a:rPr lang="en-US" altLang="x-none" dirty="0"/>
-              <a:t>&lt;T&gt;  </a:t>
-            </a:r>
-          </a:p>
-          <a:p>
-            <a:pPr lvl="1"/>
-            <a:r>
-              <a:rPr lang="en-US" altLang="x-none" dirty="0"/>
-              <a:t>see </a:t>
-            </a:r>
-            <a:r>
-              <a:rPr lang="en-US" altLang="x-none" sz="2000" dirty="0"/>
-              <a:t>http://</a:t>
-            </a:r>
-            <a:r>
-              <a:rPr lang="en-US" altLang="x-none" sz="2000" dirty="0" err="1"/>
-              <a:t>www.cplusplus.com</a:t>
-            </a:r>
-            <a:r>
-              <a:rPr lang="en-US" altLang="x-none" sz="2000" dirty="0"/>
-              <a:t>/reference/limits/</a:t>
-            </a:r>
-            <a:r>
-              <a:rPr lang="en-US" altLang="x-none" sz="2000" dirty="0" err="1"/>
-              <a:t>numeric_limits</a:t>
-            </a:r>
-            <a:r>
-              <a:rPr lang="en-US" altLang="x-none" sz="2000" dirty="0"/>
-              <a:t>/</a:t>
-            </a:r>
-          </a:p>
-        </p:txBody>
-      </p:sp>
-      <p:sp>
-        <p:nvSpPr>
-          <p:cNvPr id="26627" name="Date Placeholder 2"/>
-          <p:cNvSpPr>
-            <a:spLocks noGrp="1"/>
-          </p:cNvSpPr>
-          <p:nvPr>
-            <p:ph type="dt" sz="quarter" idx="10"/>
-          </p:nvPr>
-        </p:nvSpPr>
-        <p:spPr>
-          <a:noFill/>
-          <a:ln/>
-          <a:extLst>
-            <a:ext uri="{909E8E84-426E-40DD-AFC4-6F175D3DCCD1}">
-              <a14:hiddenFill xmlns:a14="http://schemas.microsoft.com/office/drawing/2010/main">
-                <a:solidFill>
-                  <a:srgbClr val="FFFFFF"/>
-                </a:solidFill>
-              </a14:hiddenFill>
-            </a:ext>
-            <a:ext uri="{91240B29-F687-4F45-9708-019B960494DF}">
-              <a14:hiddenLine xmlns:a14="http://schemas.microsoft.com/office/drawing/2010/main" w="9525">
-                <a:solidFill>
-                  <a:srgbClr val="000000"/>
-                </a:solidFill>
-                <a:miter lim="800000"/>
-                <a:headEnd/>
-                <a:tailEnd/>
-              </a14:hiddenLine>
-            </a:ext>
-          </a:extLst>
-        </p:spPr>
-        <p:txBody>
-          <a:bodyPr/>
-          <a:lstStyle>
-            <a:lvl1pPr eaLnBrk="0" hangingPunct="0">
-              <a:defRPr sz="2400">
-                <a:solidFill>
-                  <a:schemeClr val="tx1"/>
-                </a:solidFill>
-                <a:latin typeface="Arial" charset="0"/>
-                <a:ea typeface="ＭＳ Ｐゴシック" charset="-128"/>
-              </a:defRPr>
-            </a:lvl1pPr>
-            <a:lvl2pPr marL="742950" indent="-285750" eaLnBrk="0" hangingPunct="0">
-              <a:defRPr sz="2400">
-                <a:solidFill>
-                  <a:schemeClr val="tx1"/>
-                </a:solidFill>
-                <a:latin typeface="Arial" charset="0"/>
-                <a:ea typeface="ＭＳ Ｐゴシック" charset="-128"/>
-              </a:defRPr>
-            </a:lvl2pPr>
-            <a:lvl3pPr marL="1143000" indent="-228600" eaLnBrk="0" hangingPunct="0">
-              <a:defRPr sz="2400">
-                <a:solidFill>
-                  <a:schemeClr val="tx1"/>
-                </a:solidFill>
-                <a:latin typeface="Arial" charset="0"/>
-                <a:ea typeface="ＭＳ Ｐゴシック" charset="-128"/>
-              </a:defRPr>
-            </a:lvl3pPr>
-            <a:lvl4pPr marL="1600200" indent="-228600" eaLnBrk="0" hangingPunct="0">
-              <a:defRPr sz="2400">
-                <a:solidFill>
-                  <a:schemeClr val="tx1"/>
-                </a:solidFill>
-                <a:latin typeface="Arial" charset="0"/>
-                <a:ea typeface="ＭＳ Ｐゴシック" charset="-128"/>
-              </a:defRPr>
-            </a:lvl4pPr>
-            <a:lvl5pPr marL="2057400" indent="-228600" eaLnBrk="0" hangingPunct="0">
-              <a:defRPr sz="2400">
-                <a:solidFill>
-                  <a:schemeClr val="tx1"/>
-                </a:solidFill>
-                <a:latin typeface="Arial" charset="0"/>
-                <a:ea typeface="ＭＳ Ｐゴシック" charset="-128"/>
-              </a:defRPr>
-            </a:lvl5pPr>
-            <a:lvl6pPr marL="2514600" indent="-228600" eaLnBrk="0" fontAlgn="base" hangingPunct="0">
-              <a:spcBef>
-                <a:spcPct val="0"/>
-              </a:spcBef>
-              <a:spcAft>
-                <a:spcPct val="0"/>
-              </a:spcAft>
-              <a:defRPr sz="2400">
-                <a:solidFill>
-                  <a:schemeClr val="tx1"/>
-                </a:solidFill>
-                <a:latin typeface="Arial" charset="0"/>
-                <a:ea typeface="ＭＳ Ｐゴシック" charset="-128"/>
-              </a:defRPr>
-            </a:lvl6pPr>
-            <a:lvl7pPr marL="2971800" indent="-228600" eaLnBrk="0" fontAlgn="base" hangingPunct="0">
-              <a:spcBef>
-                <a:spcPct val="0"/>
-              </a:spcBef>
-              <a:spcAft>
-                <a:spcPct val="0"/>
-              </a:spcAft>
-              <a:defRPr sz="2400">
-                <a:solidFill>
-                  <a:schemeClr val="tx1"/>
-                </a:solidFill>
-                <a:latin typeface="Arial" charset="0"/>
-                <a:ea typeface="ＭＳ Ｐゴシック" charset="-128"/>
-              </a:defRPr>
-            </a:lvl7pPr>
-            <a:lvl8pPr marL="3429000" indent="-228600" eaLnBrk="0" fontAlgn="base" hangingPunct="0">
-              <a:spcBef>
-                <a:spcPct val="0"/>
-              </a:spcBef>
-              <a:spcAft>
-                <a:spcPct val="0"/>
-              </a:spcAft>
-              <a:defRPr sz="2400">
-                <a:solidFill>
-                  <a:schemeClr val="tx1"/>
-                </a:solidFill>
-                <a:latin typeface="Arial" charset="0"/>
-                <a:ea typeface="ＭＳ Ｐゴシック" charset="-128"/>
-              </a:defRPr>
-            </a:lvl8pPr>
-            <a:lvl9pPr marL="3886200" indent="-228600" eaLnBrk="0" fontAlgn="base" hangingPunct="0">
-              <a:spcBef>
-                <a:spcPct val="0"/>
-              </a:spcBef>
-              <a:spcAft>
-                <a:spcPct val="0"/>
-              </a:spcAft>
-              <a:defRPr sz="2400">
-                <a:solidFill>
-                  <a:schemeClr val="tx1"/>
-                </a:solidFill>
-                <a:latin typeface="Arial" charset="0"/>
-                <a:ea typeface="ＭＳ Ｐゴシック" charset="-128"/>
-              </a:defRPr>
-            </a:lvl9pPr>
-          </a:lstStyle>
-          <a:p>
-            <a:pPr eaLnBrk="1" hangingPunct="1"/>
-            <a:r>
-              <a:rPr lang="en-US" altLang="x-none" sz="1200">
-                <a:latin typeface="Garamond" charset="0"/>
-              </a:rPr>
-              <a:t>22 October 2016</a:t>
-            </a:r>
-            <a:endParaRPr lang="it-IT" altLang="x-none" sz="1200">
-              <a:latin typeface="Garamond" charset="0"/>
-            </a:endParaRPr>
-          </a:p>
-        </p:txBody>
-      </p:sp>
-      <p:sp>
-        <p:nvSpPr>
-          <p:cNvPr id="26628" name="Footer Placeholder 3"/>
-          <p:cNvSpPr>
-            <a:spLocks noGrp="1"/>
-          </p:cNvSpPr>
-          <p:nvPr>
-            <p:ph type="ftr" sz="quarter" idx="11"/>
-          </p:nvPr>
-        </p:nvSpPr>
-        <p:spPr>
-          <a:noFill/>
-          <a:ln/>
-          <a:extLst>
-            <a:ext uri="{909E8E84-426E-40DD-AFC4-6F175D3DCCD1}">
-              <a14:hiddenFill xmlns:a14="http://schemas.microsoft.com/office/drawing/2010/main">
-                <a:solidFill>
-                  <a:srgbClr val="FFFFFF"/>
-                </a:solidFill>
-              </a14:hiddenFill>
-            </a:ext>
-            <a:ext uri="{91240B29-F687-4F45-9708-019B960494DF}">
-              <a14:hiddenLine xmlns:a14="http://schemas.microsoft.com/office/drawing/2010/main" w="9525">
-                <a:solidFill>
-                  <a:srgbClr val="000000"/>
-                </a:solidFill>
-                <a:miter lim="800000"/>
-                <a:headEnd/>
-                <a:tailEnd/>
-              </a14:hiddenLine>
-            </a:ext>
-          </a:extLst>
-        </p:spPr>
-        <p:txBody>
-          <a:bodyPr/>
-          <a:lstStyle>
-            <a:lvl1pPr eaLnBrk="0" hangingPunct="0">
-              <a:defRPr sz="2400">
-                <a:solidFill>
-                  <a:schemeClr val="tx1"/>
-                </a:solidFill>
-                <a:latin typeface="Arial" charset="0"/>
-                <a:ea typeface="ＭＳ Ｐゴシック" charset="-128"/>
-              </a:defRPr>
-            </a:lvl1pPr>
-            <a:lvl2pPr marL="742950" indent="-285750" eaLnBrk="0" hangingPunct="0">
-              <a:defRPr sz="2400">
-                <a:solidFill>
-                  <a:schemeClr val="tx1"/>
-                </a:solidFill>
-                <a:latin typeface="Arial" charset="0"/>
-                <a:ea typeface="ＭＳ Ｐゴシック" charset="-128"/>
-              </a:defRPr>
-            </a:lvl2pPr>
-            <a:lvl3pPr marL="1143000" indent="-228600" eaLnBrk="0" hangingPunct="0">
-              <a:defRPr sz="2400">
-                <a:solidFill>
-                  <a:schemeClr val="tx1"/>
-                </a:solidFill>
-                <a:latin typeface="Arial" charset="0"/>
-                <a:ea typeface="ＭＳ Ｐゴシック" charset="-128"/>
-              </a:defRPr>
-            </a:lvl3pPr>
-            <a:lvl4pPr marL="1600200" indent="-228600" eaLnBrk="0" hangingPunct="0">
-              <a:defRPr sz="2400">
-                <a:solidFill>
-                  <a:schemeClr val="tx1"/>
-                </a:solidFill>
-                <a:latin typeface="Arial" charset="0"/>
-                <a:ea typeface="ＭＳ Ｐゴシック" charset="-128"/>
-              </a:defRPr>
-            </a:lvl4pPr>
-            <a:lvl5pPr marL="2057400" indent="-228600" eaLnBrk="0" hangingPunct="0">
-              <a:defRPr sz="2400">
-                <a:solidFill>
-                  <a:schemeClr val="tx1"/>
-                </a:solidFill>
-                <a:latin typeface="Arial" charset="0"/>
-                <a:ea typeface="ＭＳ Ｐゴシック" charset="-128"/>
-              </a:defRPr>
-            </a:lvl5pPr>
-            <a:lvl6pPr marL="2514600" indent="-228600" eaLnBrk="0" fontAlgn="base" hangingPunct="0">
-              <a:spcBef>
-                <a:spcPct val="0"/>
-              </a:spcBef>
-              <a:spcAft>
-                <a:spcPct val="0"/>
-              </a:spcAft>
-              <a:defRPr sz="2400">
-                <a:solidFill>
-                  <a:schemeClr val="tx1"/>
-                </a:solidFill>
-                <a:latin typeface="Arial" charset="0"/>
-                <a:ea typeface="ＭＳ Ｐゴシック" charset="-128"/>
-              </a:defRPr>
-            </a:lvl6pPr>
-            <a:lvl7pPr marL="2971800" indent="-228600" eaLnBrk="0" fontAlgn="base" hangingPunct="0">
-              <a:spcBef>
-                <a:spcPct val="0"/>
-              </a:spcBef>
-              <a:spcAft>
-                <a:spcPct val="0"/>
-              </a:spcAft>
-              <a:defRPr sz="2400">
-                <a:solidFill>
-                  <a:schemeClr val="tx1"/>
-                </a:solidFill>
-                <a:latin typeface="Arial" charset="0"/>
-                <a:ea typeface="ＭＳ Ｐゴシック" charset="-128"/>
-              </a:defRPr>
-            </a:lvl7pPr>
-            <a:lvl8pPr marL="3429000" indent="-228600" eaLnBrk="0" fontAlgn="base" hangingPunct="0">
-              <a:spcBef>
-                <a:spcPct val="0"/>
-              </a:spcBef>
-              <a:spcAft>
-                <a:spcPct val="0"/>
-              </a:spcAft>
-              <a:defRPr sz="2400">
-                <a:solidFill>
-                  <a:schemeClr val="tx1"/>
-                </a:solidFill>
-                <a:latin typeface="Arial" charset="0"/>
-                <a:ea typeface="ＭＳ Ｐゴシック" charset="-128"/>
-              </a:defRPr>
-            </a:lvl8pPr>
-            <a:lvl9pPr marL="3886200" indent="-228600" eaLnBrk="0" fontAlgn="base" hangingPunct="0">
-              <a:spcBef>
-                <a:spcPct val="0"/>
-              </a:spcBef>
-              <a:spcAft>
-                <a:spcPct val="0"/>
-              </a:spcAft>
-              <a:defRPr sz="2400">
-                <a:solidFill>
-                  <a:schemeClr val="tx1"/>
-                </a:solidFill>
-                <a:latin typeface="Arial" charset="0"/>
-                <a:ea typeface="ＭＳ Ｐゴシック" charset="-128"/>
-              </a:defRPr>
-            </a:lvl9pPr>
-          </a:lstStyle>
-          <a:p>
-            <a:pPr eaLnBrk="1" hangingPunct="1"/>
-            <a:r>
-              <a:rPr lang="en-US" altLang="x-none" sz="1200">
-                <a:latin typeface="Garamond" charset="0"/>
-              </a:rPr>
-              <a:t>Vincenzo Innocente</a:t>
-            </a:r>
-            <a:endParaRPr lang="it-IT" altLang="x-none" sz="1200">
-              <a:latin typeface="Garamond" charset="0"/>
-            </a:endParaRPr>
-          </a:p>
-        </p:txBody>
-      </p:sp>
-      <p:sp>
-        <p:nvSpPr>
-          <p:cNvPr id="26629" name="Slide Number Placeholder 4"/>
-          <p:cNvSpPr>
-            <a:spLocks noGrp="1"/>
-          </p:cNvSpPr>
-          <p:nvPr>
-            <p:ph type="sldNum" sz="quarter" idx="12"/>
-          </p:nvPr>
-        </p:nvSpPr>
-        <p:spPr>
-          <a:noFill/>
-          <a:ln/>
-          <a:extLst>
-            <a:ext uri="{909E8E84-426E-40DD-AFC4-6F175D3DCCD1}">
-              <a14:hiddenFill xmlns:a14="http://schemas.microsoft.com/office/drawing/2010/main">
-                <a:solidFill>
-                  <a:srgbClr val="FFFFFF"/>
-                </a:solidFill>
-              </a14:hiddenFill>
-            </a:ext>
-            <a:ext uri="{91240B29-F687-4F45-9708-019B960494DF}">
-              <a14:hiddenLine xmlns:a14="http://schemas.microsoft.com/office/drawing/2010/main" w="9525">
-                <a:solidFill>
-                  <a:srgbClr val="000000"/>
-                </a:solidFill>
-                <a:miter lim="800000"/>
-                <a:headEnd/>
-                <a:tailEnd/>
-              </a14:hiddenLine>
-            </a:ext>
-          </a:extLst>
-        </p:spPr>
-        <p:txBody>
-          <a:bodyPr/>
-          <a:lstStyle>
-            <a:lvl1pPr eaLnBrk="0" hangingPunct="0">
-              <a:defRPr sz="2400">
-                <a:solidFill>
-                  <a:schemeClr val="tx1"/>
-                </a:solidFill>
-                <a:latin typeface="Arial" charset="0"/>
-                <a:ea typeface="ＭＳ Ｐゴシック" charset="-128"/>
-              </a:defRPr>
-            </a:lvl1pPr>
-            <a:lvl2pPr marL="742950" indent="-285750" eaLnBrk="0" hangingPunct="0">
-              <a:defRPr sz="2400">
-                <a:solidFill>
-                  <a:schemeClr val="tx1"/>
-                </a:solidFill>
-                <a:latin typeface="Arial" charset="0"/>
-                <a:ea typeface="ＭＳ Ｐゴシック" charset="-128"/>
-              </a:defRPr>
-            </a:lvl2pPr>
-            <a:lvl3pPr marL="1143000" indent="-228600" eaLnBrk="0" hangingPunct="0">
-              <a:defRPr sz="2400">
-                <a:solidFill>
-                  <a:schemeClr val="tx1"/>
-                </a:solidFill>
-                <a:latin typeface="Arial" charset="0"/>
-                <a:ea typeface="ＭＳ Ｐゴシック" charset="-128"/>
-              </a:defRPr>
-            </a:lvl3pPr>
-            <a:lvl4pPr marL="1600200" indent="-228600" eaLnBrk="0" hangingPunct="0">
-              <a:defRPr sz="2400">
-                <a:solidFill>
-                  <a:schemeClr val="tx1"/>
-                </a:solidFill>
-                <a:latin typeface="Arial" charset="0"/>
-                <a:ea typeface="ＭＳ Ｐゴシック" charset="-128"/>
-              </a:defRPr>
-            </a:lvl4pPr>
-            <a:lvl5pPr marL="2057400" indent="-228600" eaLnBrk="0" hangingPunct="0">
-              <a:defRPr sz="2400">
-                <a:solidFill>
-                  <a:schemeClr val="tx1"/>
-                </a:solidFill>
-                <a:latin typeface="Arial" charset="0"/>
-                <a:ea typeface="ＭＳ Ｐゴシック" charset="-128"/>
-              </a:defRPr>
-            </a:lvl5pPr>
-            <a:lvl6pPr marL="2514600" indent="-228600" eaLnBrk="0" fontAlgn="base" hangingPunct="0">
-              <a:spcBef>
-                <a:spcPct val="0"/>
-              </a:spcBef>
-              <a:spcAft>
-                <a:spcPct val="0"/>
-              </a:spcAft>
-              <a:defRPr sz="2400">
-                <a:solidFill>
-                  <a:schemeClr val="tx1"/>
-                </a:solidFill>
-                <a:latin typeface="Arial" charset="0"/>
-                <a:ea typeface="ＭＳ Ｐゴシック" charset="-128"/>
-              </a:defRPr>
-            </a:lvl6pPr>
-            <a:lvl7pPr marL="2971800" indent="-228600" eaLnBrk="0" fontAlgn="base" hangingPunct="0">
-              <a:spcBef>
-                <a:spcPct val="0"/>
-              </a:spcBef>
-              <a:spcAft>
-                <a:spcPct val="0"/>
-              </a:spcAft>
-              <a:defRPr sz="2400">
-                <a:solidFill>
-                  <a:schemeClr val="tx1"/>
-                </a:solidFill>
-                <a:latin typeface="Arial" charset="0"/>
-                <a:ea typeface="ＭＳ Ｐゴシック" charset="-128"/>
-              </a:defRPr>
-            </a:lvl7pPr>
-            <a:lvl8pPr marL="3429000" indent="-228600" eaLnBrk="0" fontAlgn="base" hangingPunct="0">
-              <a:spcBef>
-                <a:spcPct val="0"/>
-              </a:spcBef>
-              <a:spcAft>
-                <a:spcPct val="0"/>
-              </a:spcAft>
-              <a:defRPr sz="2400">
-                <a:solidFill>
-                  <a:schemeClr val="tx1"/>
-                </a:solidFill>
-                <a:latin typeface="Arial" charset="0"/>
-                <a:ea typeface="ＭＳ Ｐゴシック" charset="-128"/>
-              </a:defRPr>
-            </a:lvl8pPr>
-            <a:lvl9pPr marL="3886200" indent="-228600" eaLnBrk="0" fontAlgn="base" hangingPunct="0">
-              <a:spcBef>
-                <a:spcPct val="0"/>
-              </a:spcBef>
-              <a:spcAft>
-                <a:spcPct val="0"/>
-              </a:spcAft>
-              <a:defRPr sz="2400">
-                <a:solidFill>
-                  <a:schemeClr val="tx1"/>
-                </a:solidFill>
-                <a:latin typeface="Arial" charset="0"/>
-                <a:ea typeface="ＭＳ Ｐゴシック" charset="-128"/>
-              </a:defRPr>
-            </a:lvl9pPr>
-          </a:lstStyle>
-          <a:p>
-            <a:pPr eaLnBrk="1" hangingPunct="1"/>
-            <a:fld id="{7A44000F-1B7D-CC46-A072-D0868C9398B7}" type="slidenum">
-              <a:rPr lang="it-IT" altLang="x-none" sz="1200">
-                <a:latin typeface="Garamond" charset="0"/>
-              </a:rPr>
-              <a:pPr eaLnBrk="1" hangingPunct="1"/>
-              <a:t>9</a:t>
-            </a:fld>
-            <a:endParaRPr lang="it-IT" altLang="x-none" sz="1200">
-              <a:latin typeface="Garamond" charset="0"/>
-            </a:endParaRPr>
-          </a:p>
-        </p:txBody>
-      </p:sp>
-      <p:sp>
-        <p:nvSpPr>
-          <p:cNvPr id="26630" name="TextBox 5"/>
-          <p:cNvSpPr txBox="1">
-            <a:spLocks noChangeArrowheads="1"/>
-          </p:cNvSpPr>
-          <p:nvPr/>
-        </p:nvSpPr>
-        <p:spPr bwMode="auto">
-          <a:xfrm>
-            <a:off x="951883" y="3224289"/>
-            <a:ext cx="8713787" cy="3046988"/>
-          </a:xfrm>
-          <a:prstGeom prst="rect">
-            <a:avLst/>
-          </a:prstGeom>
-          <a:solidFill>
-            <a:srgbClr val="FFFF00">
-              <a:alpha val="74117"/>
-            </a:srgbClr>
-          </a:solidFill>
-          <a:ln>
-            <a:noFill/>
-          </a:ln>
-          <a:extLst>
-            <a:ext uri="{91240B29-F687-4F45-9708-019B960494DF}">
-              <a14:hiddenLine xmlns:a14="http://schemas.microsoft.com/office/drawing/2010/main" w="9525">
-                <a:solidFill>
-                  <a:srgbClr val="000000"/>
-                </a:solidFill>
-                <a:miter lim="800000"/>
-                <a:headEnd/>
-                <a:tailEnd/>
-              </a14:hiddenLine>
-            </a:ext>
-          </a:extLst>
-        </p:spPr>
-        <p:txBody>
-          <a:bodyPr>
-            <a:spAutoFit/>
-          </a:bodyPr>
-          <a:lstStyle>
-            <a:lvl1pPr eaLnBrk="0" hangingPunct="0">
-              <a:defRPr sz="2400">
-                <a:solidFill>
-                  <a:schemeClr val="tx1"/>
-                </a:solidFill>
-                <a:latin typeface="Arial" charset="0"/>
-                <a:ea typeface="ＭＳ Ｐゴシック" charset="-128"/>
-              </a:defRPr>
-            </a:lvl1pPr>
-            <a:lvl2pPr marL="742950" indent="-285750" eaLnBrk="0" hangingPunct="0">
-              <a:defRPr sz="2400">
-                <a:solidFill>
-                  <a:schemeClr val="tx1"/>
-                </a:solidFill>
-                <a:latin typeface="Arial" charset="0"/>
-                <a:ea typeface="ＭＳ Ｐゴシック" charset="-128"/>
-              </a:defRPr>
-            </a:lvl2pPr>
-            <a:lvl3pPr marL="1143000" indent="-228600" eaLnBrk="0" hangingPunct="0">
-              <a:defRPr sz="2400">
-                <a:solidFill>
-                  <a:schemeClr val="tx1"/>
-                </a:solidFill>
-                <a:latin typeface="Arial" charset="0"/>
-                <a:ea typeface="ＭＳ Ｐゴシック" charset="-128"/>
-              </a:defRPr>
-            </a:lvl3pPr>
-            <a:lvl4pPr marL="1600200" indent="-228600" eaLnBrk="0" hangingPunct="0">
-              <a:defRPr sz="2400">
-                <a:solidFill>
-                  <a:schemeClr val="tx1"/>
-                </a:solidFill>
-                <a:latin typeface="Arial" charset="0"/>
-                <a:ea typeface="ＭＳ Ｐゴシック" charset="-128"/>
-              </a:defRPr>
-            </a:lvl4pPr>
-            <a:lvl5pPr marL="2057400" indent="-228600" eaLnBrk="0" hangingPunct="0">
-              <a:defRPr sz="2400">
-                <a:solidFill>
-                  <a:schemeClr val="tx1"/>
-                </a:solidFill>
-                <a:latin typeface="Arial" charset="0"/>
-                <a:ea typeface="ＭＳ Ｐゴシック" charset="-128"/>
-              </a:defRPr>
-            </a:lvl5pPr>
-            <a:lvl6pPr marL="2514600" indent="-228600" eaLnBrk="0" fontAlgn="base" hangingPunct="0">
-              <a:spcBef>
-                <a:spcPct val="0"/>
-              </a:spcBef>
-              <a:spcAft>
-                <a:spcPct val="0"/>
-              </a:spcAft>
-              <a:defRPr sz="2400">
-                <a:solidFill>
-                  <a:schemeClr val="tx1"/>
-                </a:solidFill>
-                <a:latin typeface="Arial" charset="0"/>
-                <a:ea typeface="ＭＳ Ｐゴシック" charset="-128"/>
-              </a:defRPr>
-            </a:lvl6pPr>
-            <a:lvl7pPr marL="2971800" indent="-228600" eaLnBrk="0" fontAlgn="base" hangingPunct="0">
-              <a:spcBef>
-                <a:spcPct val="0"/>
-              </a:spcBef>
-              <a:spcAft>
-                <a:spcPct val="0"/>
-              </a:spcAft>
-              <a:defRPr sz="2400">
-                <a:solidFill>
-                  <a:schemeClr val="tx1"/>
-                </a:solidFill>
-                <a:latin typeface="Arial" charset="0"/>
-                <a:ea typeface="ＭＳ Ｐゴシック" charset="-128"/>
-              </a:defRPr>
-            </a:lvl7pPr>
-            <a:lvl8pPr marL="3429000" indent="-228600" eaLnBrk="0" fontAlgn="base" hangingPunct="0">
-              <a:spcBef>
-                <a:spcPct val="0"/>
-              </a:spcBef>
-              <a:spcAft>
-                <a:spcPct val="0"/>
-              </a:spcAft>
-              <a:defRPr sz="2400">
-                <a:solidFill>
-                  <a:schemeClr val="tx1"/>
-                </a:solidFill>
-                <a:latin typeface="Arial" charset="0"/>
-                <a:ea typeface="ＭＳ Ｐゴシック" charset="-128"/>
-              </a:defRPr>
-            </a:lvl8pPr>
-            <a:lvl9pPr marL="3886200" indent="-228600" eaLnBrk="0" fontAlgn="base" hangingPunct="0">
-              <a:spcBef>
-                <a:spcPct val="0"/>
-              </a:spcBef>
-              <a:spcAft>
-                <a:spcPct val="0"/>
-              </a:spcAft>
-              <a:defRPr sz="2400">
-                <a:solidFill>
-                  <a:schemeClr val="tx1"/>
-                </a:solidFill>
-                <a:latin typeface="Arial" charset="0"/>
-                <a:ea typeface="ＭＳ Ｐゴシック" charset="-128"/>
-              </a:defRPr>
-            </a:lvl9pPr>
-          </a:lstStyle>
-          <a:p>
-            <a:r>
-              <a:rPr lang="en-US" altLang="x-none" sz="1600" dirty="0"/>
-              <a:t>#include &lt;</a:t>
-            </a:r>
-            <a:r>
-              <a:rPr lang="en-US" altLang="x-none" sz="1600" dirty="0" err="1"/>
-              <a:t>iostream</a:t>
-            </a:r>
-            <a:r>
-              <a:rPr lang="en-US" altLang="x-none" sz="1600" dirty="0"/>
-              <a:t>&gt;     // </a:t>
-            </a:r>
-            <a:r>
-              <a:rPr lang="en-US" altLang="x-none" sz="1600" dirty="0" err="1"/>
-              <a:t>std</a:t>
-            </a:r>
-            <a:r>
-              <a:rPr lang="en-US" altLang="x-none" sz="1600" dirty="0"/>
-              <a:t>::</a:t>
-            </a:r>
-            <a:r>
-              <a:rPr lang="en-US" altLang="x-none" sz="1600" dirty="0" err="1"/>
-              <a:t>cout</a:t>
-            </a:r>
-            <a:endParaRPr lang="en-US" altLang="x-none" sz="1600" dirty="0"/>
-          </a:p>
-          <a:p>
-            <a:r>
-              <a:rPr lang="en-US" altLang="x-none" sz="1600" dirty="0"/>
-              <a:t>#include &lt;limits&gt;       // </a:t>
-            </a:r>
-            <a:r>
-              <a:rPr lang="en-US" altLang="x-none" sz="1600" dirty="0" err="1"/>
-              <a:t>std</a:t>
-            </a:r>
-            <a:r>
-              <a:rPr lang="en-US" altLang="x-none" sz="1600" dirty="0"/>
-              <a:t>::</a:t>
-            </a:r>
-            <a:r>
-              <a:rPr lang="en-US" altLang="x-none" sz="1600" dirty="0" err="1"/>
-              <a:t>numeric_limits</a:t>
-            </a:r>
-            <a:endParaRPr lang="en-US" altLang="x-none" sz="1600" dirty="0"/>
-          </a:p>
-          <a:p>
-            <a:r>
-              <a:rPr lang="fr-FR" altLang="x-none" sz="1600" dirty="0" err="1"/>
-              <a:t>int</a:t>
-            </a:r>
-            <a:r>
-              <a:rPr lang="fr-FR" altLang="x-none" sz="1600" dirty="0"/>
-              <a:t> main () {</a:t>
-            </a:r>
-          </a:p>
-          <a:p>
-            <a:r>
-              <a:rPr lang="fr-FR" altLang="x-none" sz="1600" dirty="0"/>
-              <a:t>  </a:t>
-            </a:r>
-            <a:r>
-              <a:rPr lang="fr-FR" altLang="x-none" sz="1600" dirty="0" err="1"/>
-              <a:t>std</a:t>
-            </a:r>
-            <a:r>
-              <a:rPr lang="fr-FR" altLang="x-none" sz="1600" dirty="0"/>
-              <a:t>::cout &lt;&lt; </a:t>
-            </a:r>
-            <a:r>
-              <a:rPr lang="fr-FR" altLang="x-none" sz="1600" dirty="0" err="1"/>
-              <a:t>std</a:t>
-            </a:r>
-            <a:r>
-              <a:rPr lang="fr-FR" altLang="x-none" sz="1600" dirty="0"/>
-              <a:t>::</a:t>
-            </a:r>
-            <a:r>
-              <a:rPr lang="fr-FR" altLang="x-none" sz="1600" dirty="0" err="1"/>
-              <a:t>boolalpha</a:t>
-            </a:r>
-            <a:r>
-              <a:rPr lang="fr-FR" altLang="x-none" sz="1600" dirty="0"/>
-              <a:t>;</a:t>
-            </a:r>
-          </a:p>
-          <a:p>
-            <a:r>
-              <a:rPr lang="fr-FR" altLang="x-none" sz="1600" dirty="0"/>
-              <a:t>  </a:t>
-            </a:r>
-            <a:r>
-              <a:rPr lang="fr-FR" altLang="x-none" sz="1600" dirty="0" err="1"/>
-              <a:t>std</a:t>
-            </a:r>
-            <a:r>
-              <a:rPr lang="fr-FR" altLang="x-none" sz="1600" dirty="0"/>
-              <a:t>::cout &lt;&lt; "Minimum value: " &lt;&lt; </a:t>
-            </a:r>
-            <a:r>
-              <a:rPr lang="fr-FR" altLang="x-none" sz="1600" dirty="0" err="1"/>
-              <a:t>std</a:t>
-            </a:r>
-            <a:r>
-              <a:rPr lang="fr-FR" altLang="x-none" sz="1600" dirty="0"/>
-              <a:t>::</a:t>
-            </a:r>
-            <a:r>
-              <a:rPr lang="fr-FR" altLang="x-none" sz="1600" dirty="0" err="1"/>
-              <a:t>numeric_limits</a:t>
-            </a:r>
-            <a:r>
-              <a:rPr lang="fr-FR" altLang="x-none" sz="1600" dirty="0"/>
-              <a:t>&lt;</a:t>
-            </a:r>
-            <a:r>
-              <a:rPr lang="fr-FR" altLang="x-none" sz="1600" dirty="0" err="1"/>
-              <a:t>float</a:t>
-            </a:r>
-            <a:r>
-              <a:rPr lang="fr-FR" altLang="x-none" sz="1600" dirty="0"/>
-              <a:t>&gt;::min() &lt;&lt; '\n';</a:t>
-            </a:r>
-          </a:p>
-          <a:p>
-            <a:r>
-              <a:rPr lang="fr-FR" altLang="x-none" sz="1600" dirty="0"/>
-              <a:t>  </a:t>
-            </a:r>
-            <a:r>
-              <a:rPr lang="fr-FR" altLang="x-none" sz="1600" dirty="0" err="1"/>
-              <a:t>std</a:t>
-            </a:r>
-            <a:r>
-              <a:rPr lang="fr-FR" altLang="x-none" sz="1600" dirty="0"/>
-              <a:t>::cout &lt;&lt; "Maximum value: " &lt;&lt; </a:t>
-            </a:r>
-            <a:r>
-              <a:rPr lang="fr-FR" altLang="x-none" sz="1600" dirty="0" err="1"/>
-              <a:t>std</a:t>
-            </a:r>
-            <a:r>
-              <a:rPr lang="fr-FR" altLang="x-none" sz="1600" dirty="0"/>
-              <a:t>::</a:t>
-            </a:r>
-            <a:r>
-              <a:rPr lang="fr-FR" altLang="x-none" sz="1600" dirty="0" err="1"/>
-              <a:t>numeric_limits</a:t>
-            </a:r>
-            <a:r>
-              <a:rPr lang="fr-FR" altLang="x-none" sz="1600" dirty="0"/>
-              <a:t>&lt;</a:t>
-            </a:r>
-            <a:r>
-              <a:rPr lang="fr-FR" altLang="x-none" sz="1600" dirty="0" err="1"/>
-              <a:t>float</a:t>
-            </a:r>
-            <a:r>
-              <a:rPr lang="fr-FR" altLang="x-none" sz="1600" dirty="0"/>
-              <a:t>&gt;::max() &lt;&lt; '\n';</a:t>
-            </a:r>
-          </a:p>
-          <a:p>
-            <a:r>
-              <a:rPr lang="fr-FR" altLang="x-none" sz="1600" dirty="0"/>
-              <a:t>  </a:t>
-            </a:r>
-            <a:r>
-              <a:rPr lang="fr-FR" altLang="x-none" sz="1600" dirty="0" err="1"/>
-              <a:t>std</a:t>
-            </a:r>
-            <a:r>
-              <a:rPr lang="fr-FR" altLang="x-none" sz="1600" dirty="0"/>
-              <a:t>::cout &lt;&lt; "Is </a:t>
-            </a:r>
-            <a:r>
-              <a:rPr lang="fr-FR" altLang="x-none" sz="1600" dirty="0" err="1"/>
-              <a:t>signed</a:t>
-            </a:r>
-            <a:r>
-              <a:rPr lang="fr-FR" altLang="x-none" sz="1600" dirty="0"/>
-              <a:t>: " &lt;&lt; </a:t>
-            </a:r>
-            <a:r>
-              <a:rPr lang="fr-FR" altLang="x-none" sz="1600" dirty="0" err="1"/>
-              <a:t>std</a:t>
-            </a:r>
-            <a:r>
-              <a:rPr lang="fr-FR" altLang="x-none" sz="1600" dirty="0"/>
-              <a:t>::</a:t>
-            </a:r>
-            <a:r>
-              <a:rPr lang="fr-FR" altLang="x-none" sz="1600" dirty="0" err="1"/>
-              <a:t>numeric_limits</a:t>
-            </a:r>
-            <a:r>
-              <a:rPr lang="fr-FR" altLang="x-none" sz="1600" dirty="0"/>
-              <a:t>&lt;</a:t>
-            </a:r>
-            <a:r>
-              <a:rPr lang="fr-FR" altLang="x-none" sz="1600" dirty="0" err="1"/>
-              <a:t>float</a:t>
-            </a:r>
-            <a:r>
-              <a:rPr lang="fr-FR" altLang="x-none" sz="1600" dirty="0"/>
-              <a:t>&gt;::</a:t>
-            </a:r>
-            <a:r>
-              <a:rPr lang="fr-FR" altLang="x-none" sz="1600" dirty="0" err="1"/>
-              <a:t>is_signed</a:t>
-            </a:r>
-            <a:r>
-              <a:rPr lang="fr-FR" altLang="x-none" sz="1600" dirty="0"/>
-              <a:t> &lt;&lt; '\n';</a:t>
-            </a:r>
-          </a:p>
-          <a:p>
-            <a:r>
-              <a:rPr lang="fr-FR" altLang="x-none" sz="1600" dirty="0"/>
-              <a:t>  </a:t>
-            </a:r>
-            <a:r>
-              <a:rPr lang="fr-FR" altLang="x-none" sz="1600" dirty="0" err="1"/>
-              <a:t>std</a:t>
-            </a:r>
-            <a:r>
-              <a:rPr lang="fr-FR" altLang="x-none" sz="1600" dirty="0"/>
-              <a:t>::cout &lt;&lt; "</a:t>
-            </a:r>
-            <a:r>
-              <a:rPr lang="fr-FR" altLang="x-none" sz="1600" dirty="0" err="1"/>
-              <a:t>significand</a:t>
-            </a:r>
-            <a:r>
-              <a:rPr lang="fr-FR" altLang="x-none" sz="1600" dirty="0"/>
-              <a:t> bits: " &lt;&lt; </a:t>
-            </a:r>
-            <a:r>
-              <a:rPr lang="fr-FR" altLang="x-none" sz="1600" dirty="0" err="1"/>
-              <a:t>std</a:t>
-            </a:r>
-            <a:r>
-              <a:rPr lang="fr-FR" altLang="x-none" sz="1600" dirty="0"/>
-              <a:t>::</a:t>
-            </a:r>
-            <a:r>
-              <a:rPr lang="fr-FR" altLang="x-none" sz="1600" dirty="0" err="1"/>
-              <a:t>numeric_limits</a:t>
-            </a:r>
-            <a:r>
-              <a:rPr lang="fr-FR" altLang="x-none" sz="1600" dirty="0"/>
-              <a:t>&lt;</a:t>
-            </a:r>
-            <a:r>
-              <a:rPr lang="fr-FR" altLang="x-none" sz="1600" dirty="0" err="1"/>
-              <a:t>float</a:t>
-            </a:r>
-            <a:r>
-              <a:rPr lang="fr-FR" altLang="x-none" sz="1600" dirty="0"/>
-              <a:t>&gt;::digits &lt;&lt; '\n';</a:t>
-            </a:r>
-          </a:p>
-          <a:p>
-            <a:r>
-              <a:rPr lang="fr-FR" altLang="x-none" sz="1600" dirty="0"/>
-              <a:t>  </a:t>
-            </a:r>
-            <a:r>
-              <a:rPr lang="fr-FR" altLang="x-none" sz="1600" dirty="0" err="1"/>
-              <a:t>std</a:t>
-            </a:r>
-            <a:r>
-              <a:rPr lang="fr-FR" altLang="x-none" sz="1600" dirty="0"/>
-              <a:t>::cout &lt;&lt; "</a:t>
-            </a:r>
-            <a:r>
-              <a:rPr lang="fr-FR" altLang="x-none" sz="1600" dirty="0" err="1"/>
-              <a:t>precision</a:t>
-            </a:r>
-            <a:r>
-              <a:rPr lang="fr-FR" altLang="x-none" sz="1600" dirty="0"/>
-              <a:t>: " &lt;&lt; </a:t>
-            </a:r>
-            <a:r>
-              <a:rPr lang="fr-FR" altLang="x-none" sz="1600" dirty="0" err="1"/>
-              <a:t>std</a:t>
-            </a:r>
-            <a:r>
-              <a:rPr lang="fr-FR" altLang="x-none" sz="1600" dirty="0"/>
-              <a:t>::</a:t>
-            </a:r>
-            <a:r>
-              <a:rPr lang="fr-FR" altLang="x-none" sz="1600" dirty="0" err="1"/>
-              <a:t>numeric_limits</a:t>
-            </a:r>
-            <a:r>
-              <a:rPr lang="fr-FR" altLang="x-none" sz="1600" dirty="0"/>
-              <a:t>&lt;</a:t>
-            </a:r>
-            <a:r>
-              <a:rPr lang="fr-FR" altLang="x-none" sz="1600" dirty="0" err="1"/>
-              <a:t>float</a:t>
-            </a:r>
-            <a:r>
-              <a:rPr lang="fr-FR" altLang="x-none" sz="1600" dirty="0"/>
-              <a:t>&gt;::epsilon() &lt;&lt; '\n';</a:t>
-            </a:r>
-          </a:p>
-          <a:p>
-            <a:r>
-              <a:rPr lang="fr-FR" altLang="x-none" sz="1600" dirty="0"/>
-              <a:t>  </a:t>
-            </a:r>
-            <a:r>
-              <a:rPr lang="fr-FR" altLang="x-none" sz="1600" dirty="0" err="1"/>
-              <a:t>std</a:t>
-            </a:r>
-            <a:r>
-              <a:rPr lang="fr-FR" altLang="x-none" sz="1600" dirty="0"/>
-              <a:t>::cout &lt;&lt; "has </a:t>
-            </a:r>
-            <a:r>
-              <a:rPr lang="fr-FR" altLang="x-none" sz="1600" dirty="0" err="1"/>
-              <a:t>infinity</a:t>
-            </a:r>
-            <a:r>
-              <a:rPr lang="fr-FR" altLang="x-none" sz="1600" dirty="0"/>
-              <a:t>: " &lt;&lt; </a:t>
-            </a:r>
-            <a:r>
-              <a:rPr lang="fr-FR" altLang="x-none" sz="1600" dirty="0" err="1"/>
-              <a:t>std</a:t>
-            </a:r>
-            <a:r>
-              <a:rPr lang="fr-FR" altLang="x-none" sz="1600" dirty="0"/>
-              <a:t>::</a:t>
-            </a:r>
-            <a:r>
-              <a:rPr lang="fr-FR" altLang="x-none" sz="1600" dirty="0" err="1"/>
-              <a:t>numeric_limits</a:t>
-            </a:r>
-            <a:r>
-              <a:rPr lang="fr-FR" altLang="x-none" sz="1600" dirty="0"/>
-              <a:t>&lt;</a:t>
-            </a:r>
-            <a:r>
-              <a:rPr lang="fr-FR" altLang="x-none" sz="1600" dirty="0" err="1"/>
-              <a:t>float</a:t>
-            </a:r>
-            <a:r>
-              <a:rPr lang="fr-FR" altLang="x-none" sz="1600" dirty="0"/>
-              <a:t>&gt;::</a:t>
-            </a:r>
-            <a:r>
-              <a:rPr lang="fr-FR" altLang="x-none" sz="1600" dirty="0" err="1"/>
-              <a:t>has_infinity</a:t>
-            </a:r>
-            <a:r>
-              <a:rPr lang="fr-FR" altLang="x-none" sz="1600" dirty="0"/>
-              <a:t> &lt;&lt; '\n';</a:t>
-            </a:r>
-          </a:p>
-          <a:p>
-            <a:r>
-              <a:rPr lang="is-IS" altLang="x-none" sz="1600" dirty="0"/>
-              <a:t>  return 0;</a:t>
-            </a:r>
-          </a:p>
-          <a:p>
-            <a:r>
-              <a:rPr lang="is-IS" altLang="x-none" sz="1600" dirty="0"/>
-              <a:t>}</a:t>
-            </a:r>
-            <a:endParaRPr lang="es-ES_tradnl" altLang="x-none" sz="1600" dirty="0"/>
           </a:p>
         </p:txBody>
       </p:sp>

--- a/Slides/FPforScientist.pptx
+++ b/Slides/FPforScientist.pptx
@@ -24,6 +24,7 @@
     <p:sldId id="462" r:id="rId18"/>
     <p:sldId id="463" r:id="rId19"/>
     <p:sldId id="464" r:id="rId20"/>
+    <p:sldId id="465" r:id="rId21"/>
   </p:sldIdLst>
   <p:sldSz cx="12192000" cy="6858000"/>
   <p:notesSz cx="6858000" cy="9144000"/>
@@ -3547,17 +3548,8 @@
               <a:rPr lang="en-US" sz="3200" dirty="0">
                 <a:latin typeface="Corbel" panose="020B0503020204020204" pitchFamily="34" charset="0"/>
               </a:rPr>
-              <a:t>Vincenzo </a:t>
-            </a:r>
-            <a:r>
-              <a:rPr lang="en-US" sz="3200" dirty="0" err="1">
-                <a:latin typeface="Corbel" panose="020B0503020204020204" pitchFamily="34" charset="0"/>
-              </a:rPr>
-              <a:t>Innocente</a:t>
-            </a:r>
-            <a:endParaRPr lang="en-US" sz="3200" dirty="0">
-              <a:latin typeface="Corbel" panose="020B0503020204020204" pitchFamily="34" charset="0"/>
-            </a:endParaRPr>
+              <a:t>Vincenzo Innocente</a:t>
+            </a:r>
           </a:p>
           <a:p>
             <a:pPr algn="r">
@@ -3714,7 +3706,7 @@
               <a:t>FloatingPoint</a:t>
             </a:r>
             <a:r>
-              <a:rPr lang="en-US" dirty="0">
+              <a:rPr lang="en-US">
                 <a:latin typeface="Corbel" panose="020B0503020204020204" pitchFamily="34" charset="0"/>
               </a:rPr>
               <a:t> Arithmetic for Scientist: Precision, Accuracy, Efficiency </a:t>
@@ -3795,53 +3787,53 @@
           <a:lstStyle/>
           <a:p>
             <a:r>
-              <a:rPr lang="en-US" altLang="x-none" dirty="0"/>
+              <a:rPr lang="en-US" altLang="x-none"/>
               <a:t>Everything you want to know about an arithmetic type is in </a:t>
             </a:r>
           </a:p>
           <a:p>
             <a:pPr lvl="1"/>
             <a:r>
-              <a:rPr lang="en-US" altLang="x-none" dirty="0" err="1"/>
+              <a:rPr lang="en-US" altLang="x-none" err="1"/>
               <a:t>std</a:t>
             </a:r>
             <a:r>
-              <a:rPr lang="en-US" altLang="x-none" dirty="0"/>
+              <a:rPr lang="en-US" altLang="x-none"/>
               <a:t>::</a:t>
             </a:r>
             <a:r>
-              <a:rPr lang="en-US" altLang="x-none" dirty="0" err="1"/>
+              <a:rPr lang="en-US" altLang="x-none" err="1"/>
               <a:t>numeric_limits</a:t>
             </a:r>
             <a:r>
-              <a:rPr lang="en-US" altLang="x-none" dirty="0"/>
+              <a:rPr lang="en-US" altLang="x-none"/>
               <a:t>&lt;T&gt;  </a:t>
             </a:r>
           </a:p>
           <a:p>
             <a:pPr lvl="1"/>
             <a:r>
-              <a:rPr lang="en-US" altLang="x-none" dirty="0"/>
+              <a:rPr lang="en-US" altLang="x-none"/>
               <a:t>see </a:t>
             </a:r>
             <a:r>
-              <a:rPr lang="en-US" altLang="x-none" sz="2000" dirty="0"/>
+              <a:rPr lang="en-US" altLang="x-none" sz="2000"/>
               <a:t>http://</a:t>
             </a:r>
             <a:r>
-              <a:rPr lang="en-US" altLang="x-none" sz="2000" dirty="0" err="1"/>
+              <a:rPr lang="en-US" altLang="x-none" sz="2000" err="1"/>
               <a:t>www.cplusplus.com</a:t>
             </a:r>
             <a:r>
-              <a:rPr lang="en-US" altLang="x-none" sz="2000" dirty="0"/>
+              <a:rPr lang="en-US" altLang="x-none" sz="2000"/>
               <a:t>/reference/limits/</a:t>
             </a:r>
             <a:r>
-              <a:rPr lang="en-US" altLang="x-none" sz="2000" dirty="0" err="1"/>
+              <a:rPr lang="en-US" altLang="x-none" sz="2000" err="1"/>
               <a:t>numeric_limits</a:t>
             </a:r>
             <a:r>
-              <a:rPr lang="en-US" altLang="x-none" sz="2000" dirty="0"/>
+              <a:rPr lang="en-US" altLang="x-none" sz="2000"/>
               <a:t>/</a:t>
             </a:r>
           </a:p>
@@ -4466,378 +4458,378 @@
           </a:lstStyle>
           <a:p>
             <a:r>
-              <a:rPr lang="en-US" altLang="x-none" sz="1600" dirty="0"/>
+              <a:rPr lang="en-US" altLang="x-none" sz="1600"/>
               <a:t>#include &lt;</a:t>
             </a:r>
             <a:r>
-              <a:rPr lang="en-US" altLang="x-none" sz="1600" dirty="0" err="1"/>
+              <a:rPr lang="en-US" altLang="x-none" sz="1600" err="1"/>
               <a:t>iostream</a:t>
             </a:r>
             <a:r>
-              <a:rPr lang="en-US" altLang="x-none" sz="1600" dirty="0"/>
+              <a:rPr lang="en-US" altLang="x-none" sz="1600"/>
               <a:t>&gt;     // </a:t>
             </a:r>
             <a:r>
-              <a:rPr lang="en-US" altLang="x-none" sz="1600" dirty="0" err="1"/>
+              <a:rPr lang="en-US" altLang="x-none" sz="1600" err="1"/>
               <a:t>std</a:t>
             </a:r>
             <a:r>
-              <a:rPr lang="en-US" altLang="x-none" sz="1600" dirty="0"/>
+              <a:rPr lang="en-US" altLang="x-none" sz="1600"/>
               <a:t>::</a:t>
             </a:r>
             <a:r>
-              <a:rPr lang="en-US" altLang="x-none" sz="1600" dirty="0" err="1"/>
+              <a:rPr lang="en-US" altLang="x-none" sz="1600" err="1"/>
               <a:t>cout</a:t>
             </a:r>
-            <a:endParaRPr lang="en-US" altLang="x-none" sz="1600" dirty="0"/>
-          </a:p>
-          <a:p>
-            <a:r>
-              <a:rPr lang="en-US" altLang="x-none" sz="1600" dirty="0"/>
+            <a:endParaRPr lang="en-US" altLang="x-none" sz="1600"/>
+          </a:p>
+          <a:p>
+            <a:r>
+              <a:rPr lang="en-US" altLang="x-none" sz="1600"/>
               <a:t>#include &lt;limits&gt;       // </a:t>
             </a:r>
             <a:r>
-              <a:rPr lang="en-US" altLang="x-none" sz="1600" dirty="0" err="1"/>
+              <a:rPr lang="en-US" altLang="x-none" sz="1600" err="1"/>
               <a:t>std</a:t>
             </a:r>
             <a:r>
-              <a:rPr lang="en-US" altLang="x-none" sz="1600" dirty="0"/>
+              <a:rPr lang="en-US" altLang="x-none" sz="1600"/>
               <a:t>::</a:t>
             </a:r>
             <a:r>
-              <a:rPr lang="en-US" altLang="x-none" sz="1600" dirty="0" err="1"/>
+              <a:rPr lang="en-US" altLang="x-none" sz="1600" err="1"/>
               <a:t>numeric_limits</a:t>
             </a:r>
-            <a:endParaRPr lang="en-US" altLang="x-none" sz="1600" dirty="0"/>
-          </a:p>
-          <a:p>
-            <a:r>
-              <a:rPr lang="fr-FR" altLang="x-none" sz="1600" dirty="0" err="1"/>
+            <a:endParaRPr lang="en-US" altLang="x-none" sz="1600"/>
+          </a:p>
+          <a:p>
+            <a:r>
+              <a:rPr lang="fr-FR" altLang="x-none" sz="1600" err="1"/>
               <a:t>int</a:t>
             </a:r>
             <a:r>
-              <a:rPr lang="fr-FR" altLang="x-none" sz="1600" dirty="0"/>
+              <a:rPr lang="fr-FR" altLang="x-none" sz="1600"/>
               <a:t> main () {</a:t>
             </a:r>
           </a:p>
           <a:p>
             <a:r>
-              <a:rPr lang="fr-FR" altLang="x-none" sz="1600" dirty="0"/>
+              <a:rPr lang="fr-FR" altLang="x-none" sz="1600"/>
               <a:t>  </a:t>
             </a:r>
             <a:r>
-              <a:rPr lang="fr-FR" altLang="x-none" sz="1600" dirty="0" err="1"/>
+              <a:rPr lang="fr-FR" altLang="x-none" sz="1600" err="1"/>
               <a:t>std</a:t>
             </a:r>
             <a:r>
-              <a:rPr lang="fr-FR" altLang="x-none" sz="1600" dirty="0"/>
+              <a:rPr lang="fr-FR" altLang="x-none" sz="1600"/>
               <a:t>::cout &lt;&lt; </a:t>
             </a:r>
             <a:r>
-              <a:rPr lang="fr-FR" altLang="x-none" sz="1600" dirty="0" err="1"/>
+              <a:rPr lang="fr-FR" altLang="x-none" sz="1600" err="1"/>
               <a:t>std</a:t>
             </a:r>
             <a:r>
-              <a:rPr lang="fr-FR" altLang="x-none" sz="1600" dirty="0"/>
+              <a:rPr lang="fr-FR" altLang="x-none" sz="1600"/>
               <a:t>::</a:t>
             </a:r>
             <a:r>
-              <a:rPr lang="fr-FR" altLang="x-none" sz="1600" dirty="0" err="1"/>
+              <a:rPr lang="fr-FR" altLang="x-none" sz="1600" err="1"/>
               <a:t>boolalpha</a:t>
             </a:r>
             <a:r>
-              <a:rPr lang="fr-FR" altLang="x-none" sz="1600" dirty="0"/>
+              <a:rPr lang="fr-FR" altLang="x-none" sz="1600"/>
               <a:t>;</a:t>
             </a:r>
           </a:p>
           <a:p>
             <a:r>
-              <a:rPr lang="fr-FR" altLang="x-none" sz="1600" dirty="0"/>
+              <a:rPr lang="fr-FR" altLang="x-none" sz="1600"/>
               <a:t>  </a:t>
             </a:r>
             <a:r>
-              <a:rPr lang="fr-FR" altLang="x-none" sz="1600" dirty="0" err="1"/>
+              <a:rPr lang="fr-FR" altLang="x-none" sz="1600" err="1"/>
               <a:t>std</a:t>
             </a:r>
             <a:r>
-              <a:rPr lang="fr-FR" altLang="x-none" sz="1600" dirty="0"/>
+              <a:rPr lang="fr-FR" altLang="x-none" sz="1600"/>
               <a:t>::cout &lt;&lt; "Minimum value: " &lt;&lt; </a:t>
             </a:r>
             <a:r>
-              <a:rPr lang="fr-FR" altLang="x-none" sz="1600" dirty="0" err="1"/>
+              <a:rPr lang="fr-FR" altLang="x-none" sz="1600" err="1"/>
               <a:t>std</a:t>
             </a:r>
             <a:r>
-              <a:rPr lang="fr-FR" altLang="x-none" sz="1600" dirty="0"/>
+              <a:rPr lang="fr-FR" altLang="x-none" sz="1600"/>
               <a:t>::</a:t>
             </a:r>
             <a:r>
-              <a:rPr lang="fr-FR" altLang="x-none" sz="1600" dirty="0" err="1"/>
+              <a:rPr lang="fr-FR" altLang="x-none" sz="1600" err="1"/>
               <a:t>numeric_limits</a:t>
             </a:r>
             <a:r>
-              <a:rPr lang="fr-FR" altLang="x-none" sz="1600" dirty="0"/>
+              <a:rPr lang="fr-FR" altLang="x-none" sz="1600"/>
               <a:t>&lt;</a:t>
             </a:r>
             <a:r>
-              <a:rPr lang="fr-FR" altLang="x-none" sz="1600" dirty="0" err="1"/>
+              <a:rPr lang="fr-FR" altLang="x-none" sz="1600" err="1"/>
               <a:t>float</a:t>
             </a:r>
             <a:r>
-              <a:rPr lang="fr-FR" altLang="x-none" sz="1600" dirty="0"/>
+              <a:rPr lang="fr-FR" altLang="x-none" sz="1600"/>
               <a:t>&gt;::min() &lt;&lt; '\n';</a:t>
             </a:r>
           </a:p>
           <a:p>
             <a:r>
-              <a:rPr lang="fr-FR" altLang="x-none" sz="1600" dirty="0"/>
+              <a:rPr lang="fr-FR" altLang="x-none" sz="1600"/>
               <a:t>  </a:t>
             </a:r>
             <a:r>
-              <a:rPr lang="fr-FR" altLang="x-none" sz="1600" dirty="0" err="1"/>
+              <a:rPr lang="fr-FR" altLang="x-none" sz="1600" err="1"/>
               <a:t>std</a:t>
             </a:r>
             <a:r>
-              <a:rPr lang="fr-FR" altLang="x-none" sz="1600" dirty="0"/>
+              <a:rPr lang="fr-FR" altLang="x-none" sz="1600"/>
               <a:t>::cout &lt;&lt; "Maximum value: " &lt;&lt; </a:t>
             </a:r>
             <a:r>
-              <a:rPr lang="fr-FR" altLang="x-none" sz="1600" dirty="0" err="1"/>
+              <a:rPr lang="fr-FR" altLang="x-none" sz="1600" err="1"/>
               <a:t>std</a:t>
             </a:r>
             <a:r>
-              <a:rPr lang="fr-FR" altLang="x-none" sz="1600" dirty="0"/>
+              <a:rPr lang="fr-FR" altLang="x-none" sz="1600"/>
               <a:t>::</a:t>
             </a:r>
             <a:r>
-              <a:rPr lang="fr-FR" altLang="x-none" sz="1600" dirty="0" err="1"/>
+              <a:rPr lang="fr-FR" altLang="x-none" sz="1600" err="1"/>
               <a:t>numeric_limits</a:t>
             </a:r>
             <a:r>
-              <a:rPr lang="fr-FR" altLang="x-none" sz="1600" dirty="0"/>
+              <a:rPr lang="fr-FR" altLang="x-none" sz="1600"/>
               <a:t>&lt;</a:t>
             </a:r>
             <a:r>
-              <a:rPr lang="fr-FR" altLang="x-none" sz="1600" dirty="0" err="1"/>
+              <a:rPr lang="fr-FR" altLang="x-none" sz="1600" err="1"/>
               <a:t>float</a:t>
             </a:r>
             <a:r>
-              <a:rPr lang="fr-FR" altLang="x-none" sz="1600" dirty="0"/>
+              <a:rPr lang="fr-FR" altLang="x-none" sz="1600"/>
               <a:t>&gt;::max() &lt;&lt; '\n';</a:t>
             </a:r>
           </a:p>
           <a:p>
             <a:r>
-              <a:rPr lang="fr-FR" altLang="x-none" sz="1600" dirty="0"/>
+              <a:rPr lang="fr-FR" altLang="x-none" sz="1600"/>
               <a:t>  </a:t>
             </a:r>
             <a:r>
-              <a:rPr lang="fr-FR" altLang="x-none" sz="1600" dirty="0" err="1"/>
+              <a:rPr lang="fr-FR" altLang="x-none" sz="1600" err="1"/>
               <a:t>std</a:t>
             </a:r>
             <a:r>
-              <a:rPr lang="fr-FR" altLang="x-none" sz="1600" dirty="0"/>
+              <a:rPr lang="fr-FR" altLang="x-none" sz="1600"/>
               <a:t>::cout &lt;&lt; "Is </a:t>
             </a:r>
             <a:r>
-              <a:rPr lang="fr-FR" altLang="x-none" sz="1600" dirty="0" err="1"/>
+              <a:rPr lang="fr-FR" altLang="x-none" sz="1600" err="1"/>
               <a:t>signed</a:t>
             </a:r>
             <a:r>
-              <a:rPr lang="fr-FR" altLang="x-none" sz="1600" dirty="0"/>
+              <a:rPr lang="fr-FR" altLang="x-none" sz="1600"/>
               <a:t>: " &lt;&lt; </a:t>
             </a:r>
             <a:r>
-              <a:rPr lang="fr-FR" altLang="x-none" sz="1600" dirty="0" err="1"/>
+              <a:rPr lang="fr-FR" altLang="x-none" sz="1600" err="1"/>
               <a:t>std</a:t>
             </a:r>
             <a:r>
-              <a:rPr lang="fr-FR" altLang="x-none" sz="1600" dirty="0"/>
+              <a:rPr lang="fr-FR" altLang="x-none" sz="1600"/>
               <a:t>::</a:t>
             </a:r>
             <a:r>
-              <a:rPr lang="fr-FR" altLang="x-none" sz="1600" dirty="0" err="1"/>
+              <a:rPr lang="fr-FR" altLang="x-none" sz="1600" err="1"/>
               <a:t>numeric_limits</a:t>
             </a:r>
             <a:r>
-              <a:rPr lang="fr-FR" altLang="x-none" sz="1600" dirty="0"/>
+              <a:rPr lang="fr-FR" altLang="x-none" sz="1600"/>
               <a:t>&lt;</a:t>
             </a:r>
             <a:r>
-              <a:rPr lang="fr-FR" altLang="x-none" sz="1600" dirty="0" err="1"/>
+              <a:rPr lang="fr-FR" altLang="x-none" sz="1600" err="1"/>
               <a:t>float</a:t>
             </a:r>
             <a:r>
-              <a:rPr lang="fr-FR" altLang="x-none" sz="1600" dirty="0"/>
+              <a:rPr lang="fr-FR" altLang="x-none" sz="1600"/>
               <a:t>&gt;::</a:t>
             </a:r>
             <a:r>
-              <a:rPr lang="fr-FR" altLang="x-none" sz="1600" dirty="0" err="1"/>
+              <a:rPr lang="fr-FR" altLang="x-none" sz="1600" err="1"/>
               <a:t>is_signed</a:t>
             </a:r>
             <a:r>
-              <a:rPr lang="fr-FR" altLang="x-none" sz="1600" dirty="0"/>
+              <a:rPr lang="fr-FR" altLang="x-none" sz="1600"/>
               <a:t> &lt;&lt; '\n';</a:t>
             </a:r>
           </a:p>
           <a:p>
             <a:r>
-              <a:rPr lang="fr-FR" altLang="x-none" sz="1600" dirty="0"/>
+              <a:rPr lang="fr-FR" altLang="x-none" sz="1600"/>
               <a:t>  </a:t>
             </a:r>
             <a:r>
-              <a:rPr lang="fr-FR" altLang="x-none" sz="1600" dirty="0" err="1"/>
+              <a:rPr lang="fr-FR" altLang="x-none" sz="1600" err="1"/>
               <a:t>std</a:t>
             </a:r>
             <a:r>
-              <a:rPr lang="fr-FR" altLang="x-none" sz="1600" dirty="0"/>
+              <a:rPr lang="fr-FR" altLang="x-none" sz="1600"/>
               <a:t>::cout &lt;&lt; "</a:t>
             </a:r>
             <a:r>
-              <a:rPr lang="fr-FR" altLang="x-none" sz="1600" dirty="0" err="1"/>
+              <a:rPr lang="fr-FR" altLang="x-none" sz="1600" err="1"/>
               <a:t>significand</a:t>
             </a:r>
             <a:r>
-              <a:rPr lang="fr-FR" altLang="x-none" sz="1600" dirty="0"/>
+              <a:rPr lang="fr-FR" altLang="x-none" sz="1600"/>
               <a:t> bits: " &lt;&lt; </a:t>
             </a:r>
             <a:r>
-              <a:rPr lang="fr-FR" altLang="x-none" sz="1600" dirty="0" err="1"/>
+              <a:rPr lang="fr-FR" altLang="x-none" sz="1600" err="1"/>
               <a:t>std</a:t>
             </a:r>
             <a:r>
-              <a:rPr lang="fr-FR" altLang="x-none" sz="1600" dirty="0"/>
+              <a:rPr lang="fr-FR" altLang="x-none" sz="1600"/>
               <a:t>::</a:t>
             </a:r>
             <a:r>
-              <a:rPr lang="fr-FR" altLang="x-none" sz="1600" dirty="0" err="1"/>
+              <a:rPr lang="fr-FR" altLang="x-none" sz="1600" err="1"/>
               <a:t>numeric_limits</a:t>
             </a:r>
             <a:r>
-              <a:rPr lang="fr-FR" altLang="x-none" sz="1600" dirty="0"/>
+              <a:rPr lang="fr-FR" altLang="x-none" sz="1600"/>
               <a:t>&lt;</a:t>
             </a:r>
             <a:r>
-              <a:rPr lang="fr-FR" altLang="x-none" sz="1600" dirty="0" err="1"/>
+              <a:rPr lang="fr-FR" altLang="x-none" sz="1600" err="1"/>
               <a:t>float</a:t>
             </a:r>
             <a:r>
-              <a:rPr lang="fr-FR" altLang="x-none" sz="1600" dirty="0"/>
+              <a:rPr lang="fr-FR" altLang="x-none" sz="1600"/>
               <a:t>&gt;::digits &lt;&lt; '\n';</a:t>
             </a:r>
           </a:p>
           <a:p>
             <a:r>
-              <a:rPr lang="fr-FR" altLang="x-none" sz="1600" dirty="0"/>
+              <a:rPr lang="fr-FR" altLang="x-none" sz="1600"/>
               <a:t>  </a:t>
             </a:r>
             <a:r>
-              <a:rPr lang="fr-FR" altLang="x-none" sz="1600" dirty="0" err="1"/>
+              <a:rPr lang="fr-FR" altLang="x-none" sz="1600" err="1"/>
               <a:t>std</a:t>
             </a:r>
             <a:r>
-              <a:rPr lang="fr-FR" altLang="x-none" sz="1600" dirty="0"/>
+              <a:rPr lang="fr-FR" altLang="x-none" sz="1600"/>
               <a:t>::cout &lt;&lt; "</a:t>
             </a:r>
             <a:r>
-              <a:rPr lang="fr-FR" altLang="x-none" sz="1600" dirty="0" err="1"/>
+              <a:rPr lang="fr-FR" altLang="x-none" sz="1600" err="1"/>
               <a:t>precision</a:t>
             </a:r>
             <a:r>
-              <a:rPr lang="fr-FR" altLang="x-none" sz="1600" dirty="0"/>
+              <a:rPr lang="fr-FR" altLang="x-none" sz="1600"/>
               <a:t>: " &lt;&lt; </a:t>
             </a:r>
             <a:r>
-              <a:rPr lang="fr-FR" altLang="x-none" sz="1600" dirty="0" err="1"/>
+              <a:rPr lang="fr-FR" altLang="x-none" sz="1600" err="1"/>
               <a:t>std</a:t>
             </a:r>
             <a:r>
-              <a:rPr lang="fr-FR" altLang="x-none" sz="1600" dirty="0"/>
+              <a:rPr lang="fr-FR" altLang="x-none" sz="1600"/>
               <a:t>::</a:t>
             </a:r>
             <a:r>
-              <a:rPr lang="fr-FR" altLang="x-none" sz="1600" dirty="0" err="1"/>
+              <a:rPr lang="fr-FR" altLang="x-none" sz="1600" err="1"/>
               <a:t>numeric_limits</a:t>
             </a:r>
             <a:r>
-              <a:rPr lang="fr-FR" altLang="x-none" sz="1600" dirty="0"/>
+              <a:rPr lang="fr-FR" altLang="x-none" sz="1600"/>
               <a:t>&lt;</a:t>
             </a:r>
             <a:r>
-              <a:rPr lang="fr-FR" altLang="x-none" sz="1600" dirty="0" err="1"/>
+              <a:rPr lang="fr-FR" altLang="x-none" sz="1600" err="1"/>
               <a:t>float</a:t>
             </a:r>
             <a:r>
-              <a:rPr lang="fr-FR" altLang="x-none" sz="1600" dirty="0"/>
+              <a:rPr lang="fr-FR" altLang="x-none" sz="1600"/>
               <a:t>&gt;::epsilon() &lt;&lt; '\n';</a:t>
             </a:r>
           </a:p>
           <a:p>
             <a:r>
-              <a:rPr lang="fr-FR" altLang="x-none" sz="1600" dirty="0"/>
+              <a:rPr lang="fr-FR" altLang="x-none" sz="1600"/>
               <a:t>  </a:t>
             </a:r>
             <a:r>
-              <a:rPr lang="fr-FR" altLang="x-none" sz="1600" dirty="0" err="1"/>
+              <a:rPr lang="fr-FR" altLang="x-none" sz="1600" err="1"/>
               <a:t>std</a:t>
             </a:r>
             <a:r>
-              <a:rPr lang="fr-FR" altLang="x-none" sz="1600" dirty="0"/>
+              <a:rPr lang="fr-FR" altLang="x-none" sz="1600"/>
               <a:t>::cout &lt;&lt; "has </a:t>
             </a:r>
             <a:r>
-              <a:rPr lang="fr-FR" altLang="x-none" sz="1600" dirty="0" err="1"/>
+              <a:rPr lang="fr-FR" altLang="x-none" sz="1600" err="1"/>
               <a:t>infinity</a:t>
             </a:r>
             <a:r>
-              <a:rPr lang="fr-FR" altLang="x-none" sz="1600" dirty="0"/>
+              <a:rPr lang="fr-FR" altLang="x-none" sz="1600"/>
               <a:t>: " &lt;&lt; </a:t>
             </a:r>
             <a:r>
-              <a:rPr lang="fr-FR" altLang="x-none" sz="1600" dirty="0" err="1"/>
+              <a:rPr lang="fr-FR" altLang="x-none" sz="1600" err="1"/>
               <a:t>std</a:t>
             </a:r>
             <a:r>
-              <a:rPr lang="fr-FR" altLang="x-none" sz="1600" dirty="0"/>
+              <a:rPr lang="fr-FR" altLang="x-none" sz="1600"/>
               <a:t>::</a:t>
             </a:r>
             <a:r>
-              <a:rPr lang="fr-FR" altLang="x-none" sz="1600" dirty="0" err="1"/>
+              <a:rPr lang="fr-FR" altLang="x-none" sz="1600" err="1"/>
               <a:t>numeric_limits</a:t>
             </a:r>
             <a:r>
-              <a:rPr lang="fr-FR" altLang="x-none" sz="1600" dirty="0"/>
+              <a:rPr lang="fr-FR" altLang="x-none" sz="1600"/>
               <a:t>&lt;</a:t>
             </a:r>
             <a:r>
-              <a:rPr lang="fr-FR" altLang="x-none" sz="1600" dirty="0" err="1"/>
+              <a:rPr lang="fr-FR" altLang="x-none" sz="1600" err="1"/>
               <a:t>float</a:t>
             </a:r>
             <a:r>
-              <a:rPr lang="fr-FR" altLang="x-none" sz="1600" dirty="0"/>
+              <a:rPr lang="fr-FR" altLang="x-none" sz="1600"/>
               <a:t>&gt;::</a:t>
             </a:r>
             <a:r>
-              <a:rPr lang="fr-FR" altLang="x-none" sz="1600" dirty="0" err="1"/>
+              <a:rPr lang="fr-FR" altLang="x-none" sz="1600" err="1"/>
               <a:t>has_infinity</a:t>
             </a:r>
             <a:r>
-              <a:rPr lang="fr-FR" altLang="x-none" sz="1600" dirty="0"/>
+              <a:rPr lang="fr-FR" altLang="x-none" sz="1600"/>
               <a:t> &lt;&lt; '\n';</a:t>
             </a:r>
           </a:p>
           <a:p>
             <a:r>
-              <a:rPr lang="is-IS" altLang="x-none" sz="1600" dirty="0"/>
+              <a:rPr lang="is-IS" altLang="x-none" sz="1600"/>
               <a:t>  return 0;</a:t>
             </a:r>
           </a:p>
           <a:p>
             <a:r>
-              <a:rPr lang="is-IS" altLang="x-none" sz="1600" dirty="0"/>
+              <a:rPr lang="is-IS" altLang="x-none" sz="1600"/>
               <a:t>}</a:t>
             </a:r>
-            <a:endParaRPr lang="es-ES_tradnl" altLang="x-none" sz="1600" dirty="0"/>
+            <a:endParaRPr lang="es-ES_tradnl" altLang="x-none" sz="1600"/>
           </a:p>
         </p:txBody>
       </p:sp>
@@ -4890,19 +4882,19 @@
           <a:lstStyle/>
           <a:p>
             <a:r>
-              <a:rPr lang="en-US" dirty="0"/>
+              <a:rPr lang="en-US"/>
               <a:t>Fixed width floating-point types (since C++23)</a:t>
             </a:r>
             <a:br>
-              <a:rPr lang="en-US" dirty="0"/>
+              <a:rPr lang="en-US"/>
             </a:br>
             <a:r>
-              <a:rPr lang="en-US" sz="2800" dirty="0">
+              <a:rPr lang="en-US" sz="2800">
                 <a:hlinkClick r:id="rId2"/>
               </a:rPr>
               <a:t>https://en.cppreference.com/w/cpp/types/floating-point.html</a:t>
             </a:r>
-            <a:endParaRPr lang="en-US" dirty="0"/>
+            <a:endParaRPr lang="en-US"/>
           </a:p>
         </p:txBody>
       </p:sp>
@@ -4988,7 +4980,7 @@
           <a:lstStyle/>
           <a:p>
             <a:r>
-              <a:rPr lang="en-US" dirty="0"/>
+              <a:rPr lang="en-US"/>
               <a:t>Python interlude</a:t>
             </a:r>
           </a:p>
@@ -5016,76 +5008,76 @@
           <a:lstStyle/>
           <a:p>
             <a:r>
-              <a:rPr lang="en-US" dirty="0"/>
+              <a:rPr lang="en-US"/>
               <a:t>Python intrinsic “float” is actually double precision</a:t>
             </a:r>
           </a:p>
           <a:p>
             <a:pPr lvl="1"/>
             <a:r>
-              <a:rPr lang="en-US" dirty="0" err="1"/>
+              <a:rPr lang="en-US" err="1"/>
               <a:t>float.hex</a:t>
             </a:r>
             <a:r>
-              <a:rPr lang="en-US" dirty="0"/>
+              <a:rPr lang="en-US"/>
               <a:t>() and </a:t>
             </a:r>
             <a:r>
-              <a:rPr lang="en-US" dirty="0" err="1"/>
+              <a:rPr lang="en-US" err="1"/>
               <a:t>float.fromhex</a:t>
             </a:r>
             <a:r>
-              <a:rPr lang="en-US" dirty="0"/>
+              <a:rPr lang="en-US"/>
               <a:t>() allows to convert to/from </a:t>
             </a:r>
             <a:r>
-              <a:rPr lang="en-US" dirty="0" err="1"/>
+              <a:rPr lang="en-US" err="1"/>
               <a:t>exadecimal</a:t>
             </a:r>
             <a:r>
-              <a:rPr lang="en-US" dirty="0"/>
+              <a:rPr lang="en-US"/>
               <a:t> string</a:t>
             </a:r>
           </a:p>
           <a:p>
             <a:r>
-              <a:rPr lang="en-US" b="1" dirty="0" err="1"/>
+              <a:rPr lang="en-US" b="1" err="1"/>
               <a:t>numpy</a:t>
             </a:r>
             <a:r>
-              <a:rPr lang="en-US" dirty="0"/>
+              <a:rPr lang="en-US"/>
               <a:t> defines float16, float32, float64 (and float128 on x86_64)</a:t>
             </a:r>
           </a:p>
           <a:p>
             <a:pPr lvl="1"/>
             <a:r>
-              <a:rPr lang="en-US" dirty="0">
+              <a:rPr lang="en-US">
                 <a:hlinkClick r:id="rId2"/>
               </a:rPr>
               <a:t>https://numpy.org/doc/2.3/reference/arrays.scalars.html - floating-point-types</a:t>
             </a:r>
-            <a:endParaRPr lang="en-US" dirty="0"/>
-          </a:p>
-          <a:p>
-            <a:r>
-              <a:rPr lang="en-US" b="1" dirty="0"/>
+            <a:endParaRPr lang="en-US"/>
+          </a:p>
+          <a:p>
+            <a:r>
+              <a:rPr lang="en-US" b="1"/>
               <a:t>decimal</a:t>
             </a:r>
             <a:r>
-              <a:rPr lang="en-US" dirty="0"/>
+              <a:rPr lang="en-US"/>
               <a:t> is a module providing FP in base 10</a:t>
             </a:r>
           </a:p>
           <a:p>
             <a:pPr lvl="1"/>
             <a:r>
-              <a:rPr lang="en-US" dirty="0">
+              <a:rPr lang="en-US">
                 <a:hlinkClick r:id="rId3"/>
               </a:rPr>
               <a:t>https://docs.python.org/3/library/decimal.html</a:t>
             </a:r>
-            <a:endParaRPr lang="en-US" dirty="0"/>
+            <a:endParaRPr lang="en-US"/>
           </a:p>
         </p:txBody>
       </p:sp>
@@ -5149,7 +5141,7 @@
           <a:p>
             <a:pPr algn="ctr"/>
             <a:r>
-              <a:rPr lang="en-US" sz="9600" dirty="0">
+              <a:rPr lang="en-US" sz="9600">
                 <a:solidFill>
                   <a:srgbClr val="FF0000"/>
                 </a:solidFill>
@@ -5191,60 +5183,60 @@
           <a:lstStyle/>
           <a:p>
             <a:r>
-              <a:rPr lang="en-US" dirty="0"/>
+              <a:rPr lang="en-US"/>
               <a:t>Either in Python or C++</a:t>
             </a:r>
           </a:p>
           <a:p>
-            <a:endParaRPr lang="en-US" dirty="0"/>
-          </a:p>
-          <a:p>
-            <a:r>
-              <a:rPr lang="en-US" dirty="0"/>
+            <a:endParaRPr lang="en-US"/>
+          </a:p>
+          <a:p>
+            <a:r>
+              <a:rPr lang="en-US"/>
               <a:t>For C++ one can use </a:t>
             </a:r>
             <a:r>
-              <a:rPr lang="en-US" dirty="0" err="1"/>
+              <a:rPr lang="en-US" err="1"/>
               <a:t>godbolt</a:t>
             </a:r>
             <a:r>
-              <a:rPr lang="en-US" dirty="0"/>
+              <a:rPr lang="en-US"/>
               <a:t> (</a:t>
             </a:r>
             <a:r>
-              <a:rPr lang="en-US" dirty="0">
+              <a:rPr lang="en-US">
                 <a:hlinkClick r:id="rId2"/>
               </a:rPr>
               <a:t>https://godbolt.org/z/d1e18j3jK</a:t>
             </a:r>
             <a:r>
-              <a:rPr lang="en-US" dirty="0"/>
+              <a:rPr lang="en-US"/>
               <a:t>  ) </a:t>
             </a:r>
           </a:p>
           <a:p>
             <a:r>
-              <a:rPr lang="en-US" dirty="0"/>
+              <a:rPr lang="en-US"/>
               <a:t>For Python either a python3 shell on your PC, or a </a:t>
             </a:r>
             <a:r>
-              <a:rPr lang="en-US" dirty="0" err="1"/>
+              <a:rPr lang="en-US" err="1"/>
               <a:t>jupyter</a:t>
             </a:r>
             <a:r>
-              <a:rPr lang="en-US" dirty="0"/>
+              <a:rPr lang="en-US"/>
               <a:t> notebook or the browser shell in </a:t>
             </a:r>
             <a:r>
-              <a:rPr lang="en-US" dirty="0">
+              <a:rPr lang="en-US">
                 <a:hlinkClick r:id="rId3"/>
               </a:rPr>
               <a:t>https://numpy.org/</a:t>
             </a:r>
-            <a:endParaRPr lang="en-US" dirty="0"/>
-          </a:p>
-          <a:p>
-            <a:endParaRPr lang="en-US" dirty="0"/>
+            <a:endParaRPr lang="en-US"/>
+          </a:p>
+          <a:p>
+            <a:endParaRPr lang="en-US"/>
           </a:p>
         </p:txBody>
       </p:sp>
@@ -5299,7 +5291,7 @@
           <a:bodyPr/>
           <a:lstStyle/>
           <a:p>
-            <a:endParaRPr lang="en-US" dirty="0"/>
+            <a:endParaRPr lang="en-US"/>
           </a:p>
         </p:txBody>
       </p:sp>
@@ -5325,63 +5317,63 @@
           <a:lstStyle/>
           <a:p>
             <a:r>
-              <a:rPr lang="en-US" dirty="0"/>
+              <a:rPr lang="en-US"/>
               <a:t>Count the number of FP in a </a:t>
             </a:r>
             <a:r>
-              <a:rPr lang="en-US" dirty="0" err="1"/>
+              <a:rPr lang="en-US" err="1"/>
               <a:t>binade</a:t>
             </a:r>
-            <a:endParaRPr lang="en-US" dirty="0"/>
+            <a:endParaRPr lang="en-US"/>
           </a:p>
           <a:p>
             <a:pPr lvl="1"/>
             <a:r>
-              <a:rPr lang="en-US" dirty="0"/>
+              <a:rPr lang="en-US"/>
               <a:t>Verify that they are the same for two different </a:t>
             </a:r>
             <a:r>
-              <a:rPr lang="en-US" dirty="0" err="1"/>
+              <a:rPr lang="en-US" err="1"/>
               <a:t>binades</a:t>
             </a:r>
-            <a:endParaRPr lang="en-US" dirty="0"/>
-          </a:p>
-          <a:p>
-            <a:r>
-              <a:rPr lang="en-US" dirty="0"/>
+            <a:endParaRPr lang="en-US"/>
+          </a:p>
+          <a:p>
+            <a:r>
+              <a:rPr lang="en-US"/>
               <a:t>Compute the ULP for some FPs</a:t>
             </a:r>
           </a:p>
           <a:p>
             <a:pPr lvl="1"/>
             <a:r>
-              <a:rPr lang="en-US" dirty="0"/>
+              <a:rPr lang="en-US"/>
               <a:t>How it depends on the </a:t>
             </a:r>
             <a:r>
-              <a:rPr lang="en-US" dirty="0" err="1"/>
+              <a:rPr lang="en-US" err="1"/>
               <a:t>binade</a:t>
             </a:r>
             <a:r>
-              <a:rPr lang="en-US" dirty="0"/>
+              <a:rPr lang="en-US"/>
               <a:t>?</a:t>
             </a:r>
           </a:p>
           <a:p>
             <a:r>
-              <a:rPr lang="en-US" dirty="0"/>
+              <a:rPr lang="en-US"/>
               <a:t>Convert some number (0.1, pi, 31.5,  …) between various representations (including decimal)</a:t>
             </a:r>
           </a:p>
           <a:p>
             <a:pPr lvl="1"/>
             <a:r>
-              <a:rPr lang="en-US" dirty="0"/>
+              <a:rPr lang="en-US"/>
               <a:t>See what happens and explain it</a:t>
             </a:r>
           </a:p>
           <a:p>
-            <a:endParaRPr lang="en-US" dirty="0"/>
+            <a:endParaRPr lang="en-US"/>
           </a:p>
         </p:txBody>
       </p:sp>
@@ -5437,7 +5429,7 @@
           <a:lstStyle/>
           <a:p>
             <a:r>
-              <a:rPr lang="en-US" dirty="0"/>
+              <a:rPr lang="en-US"/>
               <a:t>FP Arithmetic</a:t>
             </a:r>
           </a:p>
@@ -5472,96 +5464,96 @@
           <a:lstStyle/>
           <a:p>
             <a:r>
-              <a:rPr lang="en-US" dirty="0"/>
+              <a:rPr lang="en-US"/>
               <a:t>There are two basic operations: </a:t>
             </a:r>
           </a:p>
           <a:p>
             <a:r>
-              <a:rPr lang="en-US" dirty="0"/>
+              <a:rPr lang="en-US"/>
               <a:t>sum and multiplication</a:t>
             </a:r>
           </a:p>
           <a:p>
             <a:pPr lvl="1"/>
             <a:r>
-              <a:rPr lang="en-US" dirty="0" err="1"/>
+              <a:rPr lang="en-US" err="1"/>
               <a:t>a+b</a:t>
             </a:r>
             <a:r>
-              <a:rPr lang="en-US" dirty="0"/>
+              <a:rPr lang="en-US"/>
               <a:t> and </a:t>
             </a:r>
             <a:r>
-              <a:rPr lang="en-US" dirty="0" err="1"/>
+              <a:rPr lang="en-US" err="1"/>
               <a:t>a×b</a:t>
             </a:r>
             <a:r>
-              <a:rPr lang="en-US" dirty="0"/>
+              <a:rPr lang="en-US"/>
               <a:t>  symbolize the exact sum and multiplication between a and b</a:t>
             </a:r>
           </a:p>
           <a:p>
             <a:pPr lvl="1"/>
             <a:r>
-              <a:rPr lang="en-US" dirty="0" err="1"/>
+              <a:rPr lang="en-US" err="1"/>
               <a:t>a⊕b</a:t>
             </a:r>
             <a:r>
-              <a:rPr lang="en-US" dirty="0"/>
+              <a:rPr lang="en-US"/>
               <a:t> and </a:t>
             </a:r>
             <a:r>
-              <a:rPr lang="en-US" dirty="0" err="1"/>
+              <a:rPr lang="en-US" err="1"/>
               <a:t>a⊗b</a:t>
             </a:r>
             <a:r>
-              <a:rPr lang="en-US" dirty="0"/>
+              <a:rPr lang="en-US"/>
               <a:t>  symbolize the rounded sum and multiplication between FPs a and b</a:t>
             </a:r>
           </a:p>
           <a:p>
             <a:pPr lvl="2"/>
             <a:r>
-              <a:rPr lang="en-US" dirty="0" err="1"/>
+              <a:rPr lang="en-US" err="1"/>
               <a:t>a+b</a:t>
             </a:r>
             <a:r>
-              <a:rPr lang="en-US" dirty="0"/>
+              <a:rPr lang="en-US"/>
               <a:t> and a*b  are the corresponding operations in code</a:t>
             </a:r>
           </a:p>
           <a:p>
             <a:r>
-              <a:rPr lang="en-US" dirty="0"/>
+              <a:rPr lang="en-US"/>
               <a:t>We will use decimal precision 2 for all examples to allow mental arithmetic in a finite time</a:t>
             </a:r>
           </a:p>
           <a:p>
             <a:pPr lvl="1"/>
             <a:r>
-              <a:rPr lang="en-US" dirty="0"/>
+              <a:rPr lang="en-US"/>
               <a:t>42+3.7 = …</a:t>
             </a:r>
           </a:p>
           <a:p>
             <a:pPr lvl="1"/>
             <a:r>
-              <a:rPr lang="en-US" dirty="0"/>
+              <a:rPr lang="en-US"/>
               <a:t>42⊕3.7 = …</a:t>
             </a:r>
           </a:p>
           <a:p>
             <a:pPr lvl="1"/>
             <a:r>
-              <a:rPr lang="en-US" dirty="0"/>
+              <a:rPr lang="en-US"/>
               <a:t>42⊕3.3 = … , 42⊕3.5 = … , 43⊕3.5 = …</a:t>
             </a:r>
             <a:br>
-              <a:rPr lang="en-US" dirty="0"/>
+              <a:rPr lang="en-US"/>
             </a:br>
             <a:r>
-              <a:rPr lang="en-US" dirty="0"/>
+              <a:rPr lang="en-US"/>
               <a:t>42⊕3.3⊕3.4 = … , 3.4⊕3.3⊕42 = … </a:t>
             </a:r>
           </a:p>
@@ -5570,7 +5562,7 @@
               <a:buNone/>
             </a:pPr>
             <a:r>
-              <a:rPr lang="en-US" dirty="0"/>
+              <a:rPr lang="en-US"/>
               <a:t>(use python decimal to verify results)</a:t>
             </a:r>
           </a:p>
@@ -5628,7 +5620,7 @@
           <a:lstStyle/>
           <a:p>
             <a:r>
-              <a:rPr lang="en-US" dirty="0"/>
+              <a:rPr lang="en-US"/>
               <a:t>A first theorem</a:t>
             </a:r>
           </a:p>
@@ -5656,84 +5648,84 @@
           <a:lstStyle/>
           <a:p>
             <a:r>
-              <a:rPr lang="en-US" dirty="0"/>
+              <a:rPr lang="en-US"/>
               <a:t>The difference of two number of the same </a:t>
             </a:r>
             <a:r>
-              <a:rPr lang="en-US" dirty="0" err="1"/>
+              <a:rPr lang="en-US" err="1"/>
               <a:t>binade</a:t>
             </a:r>
             <a:r>
-              <a:rPr lang="en-US" dirty="0"/>
+              <a:rPr lang="en-US"/>
               <a:t> is precise</a:t>
             </a:r>
           </a:p>
           <a:p>
             <a:pPr lvl="1"/>
             <a:r>
-              <a:rPr lang="en-US" dirty="0"/>
+              <a:rPr lang="en-US"/>
               <a:t>99-11 = 88, 42-37 = 5</a:t>
             </a:r>
           </a:p>
           <a:p>
             <a:pPr lvl="1"/>
             <a:r>
-              <a:rPr lang="en-US" dirty="0"/>
+              <a:rPr lang="en-US"/>
               <a:t>0x1.921fb6p+1 - 0x1.001e72p+1 = 0x1.240288p+0</a:t>
             </a:r>
           </a:p>
           <a:p>
-            <a:endParaRPr lang="en-US" dirty="0"/>
-          </a:p>
-          <a:p>
-            <a:r>
-              <a:rPr lang="en-US" dirty="0"/>
+            <a:endParaRPr lang="en-US"/>
+          </a:p>
+          <a:p>
+            <a:r>
+              <a:rPr lang="en-US"/>
               <a:t>If 2b&gt;a&gt;b/2&gt;0 then </a:t>
             </a:r>
             <a:r>
-              <a:rPr lang="en-US" dirty="0" err="1"/>
+              <a:rPr lang="en-US" err="1"/>
               <a:t>a⊖b</a:t>
             </a:r>
             <a:r>
-              <a:rPr lang="en-US" dirty="0"/>
+              <a:rPr lang="en-US"/>
               <a:t> = a-b (is precise)</a:t>
             </a:r>
             <a:br>
-              <a:rPr lang="en-US" dirty="0"/>
+              <a:rPr lang="en-US"/>
             </a:br>
             <a:r>
-              <a:rPr lang="en-US" dirty="0"/>
+              <a:rPr lang="en-US"/>
               <a:t>(</a:t>
             </a:r>
             <a:r>
-              <a:rPr lang="en-US" dirty="0">
+              <a:rPr lang="en-US">
                 <a:hlinkClick r:id="rId2"/>
               </a:rPr>
               <a:t>https://en.wikipedia.org/wiki/Sterbenz_lemma</a:t>
             </a:r>
             <a:r>
-              <a:rPr lang="en-US" dirty="0"/>
+              <a:rPr lang="en-US"/>
               <a:t>)</a:t>
             </a:r>
           </a:p>
           <a:p>
             <a:pPr lvl="1"/>
             <a:r>
-              <a:rPr lang="en-US" dirty="0"/>
+              <a:rPr lang="en-US"/>
               <a:t>12-7.4 = 4.6, 18-7.4= 10.6 =&gt; 18⊖7.4 = 11</a:t>
             </a:r>
           </a:p>
           <a:p>
             <a:pPr lvl="1"/>
             <a:r>
-              <a:rPr lang="en-US" dirty="0"/>
+              <a:rPr lang="en-US"/>
               <a:t>0x1.333334p-2 ⊖ 0x1.99999ap-3 = 0x1.99999ap-4 (precise)</a:t>
             </a:r>
           </a:p>
           <a:p>
             <a:pPr lvl="1"/>
             <a:r>
-              <a:rPr lang="en-US" dirty="0"/>
+              <a:rPr lang="en-US"/>
               <a:t>0x1.333334p-2 ⊖ 0x1.99999ap-4 = 0x1.99999cp-3 (not precise)</a:t>
             </a:r>
           </a:p>
@@ -5791,7 +5783,7 @@
           <a:lstStyle/>
           <a:p>
             <a:r>
-              <a:rPr lang="en-US" dirty="0"/>
+              <a:rPr lang="en-US"/>
               <a:t>Augmented Arithmetic</a:t>
             </a:r>
           </a:p>
@@ -5826,126 +5818,126 @@
           <a:lstStyle/>
           <a:p>
             <a:r>
-              <a:rPr lang="en-US" dirty="0"/>
+              <a:rPr lang="en-US"/>
               <a:t>If a&gt;b&gt;0 : </a:t>
             </a:r>
             <a:r>
-              <a:rPr lang="en-US" dirty="0" err="1"/>
+              <a:rPr lang="en-US" err="1"/>
               <a:t>a+b</a:t>
             </a:r>
             <a:r>
-              <a:rPr lang="en-US" dirty="0"/>
+              <a:rPr lang="en-US"/>
               <a:t> &lt; 2a</a:t>
             </a:r>
           </a:p>
           <a:p>
-            <a:endParaRPr lang="en-US" dirty="0"/>
-          </a:p>
-          <a:p>
-            <a:r>
-              <a:rPr lang="en-US" dirty="0"/>
+            <a:endParaRPr lang="en-US"/>
+          </a:p>
+          <a:p>
+            <a:r>
+              <a:rPr lang="en-US"/>
               <a:t>c = </a:t>
             </a:r>
             <a:r>
-              <a:rPr lang="en-US" dirty="0" err="1"/>
+              <a:rPr lang="en-US" err="1"/>
               <a:t>a⊕b</a:t>
             </a:r>
-            <a:endParaRPr lang="en-US" dirty="0"/>
-          </a:p>
-          <a:p>
-            <a:r>
-              <a:rPr lang="en-US" dirty="0"/>
+            <a:endParaRPr lang="en-US"/>
+          </a:p>
+          <a:p>
+            <a:r>
+              <a:rPr lang="en-US"/>
               <a:t>t = </a:t>
             </a:r>
             <a:r>
-              <a:rPr lang="en-US" dirty="0" err="1"/>
+              <a:rPr lang="en-US" err="1"/>
               <a:t>c⊖a</a:t>
             </a:r>
             <a:r>
-              <a:rPr lang="en-US" dirty="0"/>
+              <a:rPr lang="en-US"/>
               <a:t>  is exact</a:t>
             </a:r>
           </a:p>
           <a:p>
             <a:r>
-              <a:rPr lang="en-US" dirty="0"/>
+              <a:rPr lang="en-US"/>
               <a:t>e = </a:t>
             </a:r>
             <a:r>
-              <a:rPr lang="en-US" dirty="0" err="1"/>
+              <a:rPr lang="en-US" err="1"/>
               <a:t>b⊖t</a:t>
             </a:r>
             <a:r>
-              <a:rPr lang="en-US" dirty="0"/>
+              <a:rPr lang="en-US"/>
               <a:t>  is exact</a:t>
             </a:r>
           </a:p>
           <a:p>
             <a:r>
-              <a:rPr lang="en-US" dirty="0" err="1"/>
+              <a:rPr lang="en-US" err="1"/>
               <a:t>a+b</a:t>
             </a:r>
             <a:r>
-              <a:rPr lang="en-US" dirty="0"/>
+              <a:rPr lang="en-US"/>
               <a:t> = </a:t>
             </a:r>
             <a:r>
-              <a:rPr lang="en-US" dirty="0" err="1"/>
+              <a:rPr lang="en-US" err="1"/>
               <a:t>c+e</a:t>
             </a:r>
             <a:r>
-              <a:rPr lang="en-US" dirty="0"/>
+              <a:rPr lang="en-US"/>
               <a:t> </a:t>
             </a:r>
           </a:p>
           <a:p>
             <a:pPr lvl="1"/>
             <a:r>
-              <a:rPr lang="en-US" dirty="0"/>
+              <a:rPr lang="en-US"/>
               <a:t>e is the error of </a:t>
             </a:r>
             <a:r>
-              <a:rPr lang="en-US" dirty="0" err="1"/>
+              <a:rPr lang="en-US" err="1"/>
               <a:t>a⊕b</a:t>
             </a:r>
-            <a:endParaRPr lang="en-US" dirty="0"/>
-          </a:p>
-          <a:p>
-            <a:endParaRPr lang="en-US" dirty="0"/>
-          </a:p>
-          <a:p>
-            <a:r>
-              <a:rPr lang="en-US" dirty="0"/>
+            <a:endParaRPr lang="en-US"/>
+          </a:p>
+          <a:p>
+            <a:endParaRPr lang="en-US"/>
+          </a:p>
+          <a:p>
+            <a:r>
+              <a:rPr lang="en-US"/>
               <a:t>This algorithm is known as “</a:t>
             </a:r>
             <a:r>
-              <a:rPr lang="en-US" dirty="0" err="1"/>
+              <a:rPr lang="en-US" err="1"/>
               <a:t>fastTwoSum</a:t>
             </a:r>
             <a:r>
-              <a:rPr lang="en-US" dirty="0"/>
-              <a:t>” and proposed as </a:t>
-            </a:r>
-            <a:r>
-              <a:rPr lang="en-US" dirty="0" err="1"/>
+              <a:rPr lang="en-US"/>
+              <a:t>” and (with small modifications) proposed as </a:t>
+            </a:r>
+            <a:r>
+              <a:rPr lang="en-US" err="1"/>
               <a:t>AugmentedSum</a:t>
             </a:r>
             <a:r>
-              <a:rPr lang="en-US" dirty="0"/>
+              <a:rPr lang="en-US"/>
               <a:t> in next IEEE754 revision </a:t>
             </a:r>
           </a:p>
           <a:p>
             <a:r>
-              <a:rPr lang="en-US" dirty="0"/>
+              <a:rPr lang="en-US"/>
               <a:t>A similar algorithm exists for multiplication as well</a:t>
             </a:r>
           </a:p>
           <a:p>
-            <a:endParaRPr lang="en-US" dirty="0"/>
-          </a:p>
-          <a:p>
-            <a:endParaRPr lang="en-US" dirty="0"/>
+            <a:endParaRPr lang="en-US"/>
+          </a:p>
+          <a:p>
+            <a:endParaRPr lang="en-US"/>
           </a:p>
         </p:txBody>
       </p:sp>
@@ -6001,7 +5993,7 @@
           <a:lstStyle/>
           <a:p>
             <a:r>
-              <a:rPr lang="en-US" dirty="0"/>
+              <a:rPr lang="en-US"/>
               <a:t>Example of augmented sum</a:t>
             </a:r>
           </a:p>
@@ -6036,78 +6028,78 @@
           <a:lstStyle/>
           <a:p>
             <a:r>
-              <a:rPr lang="en-US" dirty="0"/>
+              <a:rPr lang="en-US"/>
               <a:t>42⊕3.7 = 46</a:t>
             </a:r>
           </a:p>
           <a:p>
             <a:r>
-              <a:rPr lang="en-US" dirty="0"/>
+              <a:rPr lang="en-US"/>
               <a:t>46⊖42 = 4</a:t>
             </a:r>
           </a:p>
           <a:p>
             <a:r>
-              <a:rPr lang="en-US" dirty="0"/>
+              <a:rPr lang="en-US"/>
               <a:t>3.7⊖4 = -0.3</a:t>
             </a:r>
           </a:p>
           <a:p>
             <a:r>
-              <a:rPr lang="en-US" dirty="0"/>
+              <a:rPr lang="en-US"/>
               <a:t>46-0.3 = 42+3.7</a:t>
             </a:r>
           </a:p>
           <a:p>
             <a:r>
-              <a:rPr lang="en-US" dirty="0"/>
+              <a:rPr lang="en-US"/>
               <a:t>In short: </a:t>
             </a:r>
             <a:r>
-              <a:rPr lang="en-US" dirty="0" err="1"/>
+              <a:rPr lang="en-US" err="1"/>
               <a:t>asum</a:t>
             </a:r>
             <a:r>
-              <a:rPr lang="en-US" dirty="0"/>
+              <a:rPr lang="en-US"/>
               <a:t>(42,3.7) = 46,-0.3</a:t>
             </a:r>
           </a:p>
           <a:p>
-            <a:endParaRPr lang="en-US" dirty="0"/>
-          </a:p>
-          <a:p>
-            <a:r>
-              <a:rPr lang="en-US" dirty="0"/>
+            <a:endParaRPr lang="en-US"/>
+          </a:p>
+          <a:p>
+            <a:r>
+              <a:rPr lang="en-US"/>
               <a:t>42⊕3.3⊕3.4 = 48 while 42+3.3+3.4 = 48.7</a:t>
             </a:r>
           </a:p>
           <a:p>
             <a:r>
-              <a:rPr lang="en-US" dirty="0" err="1"/>
+              <a:rPr lang="en-US" err="1"/>
               <a:t>asum</a:t>
             </a:r>
             <a:r>
-              <a:rPr lang="en-US" dirty="0"/>
+              <a:rPr lang="en-US"/>
               <a:t>(42,3.3) = 45,0.3</a:t>
             </a:r>
           </a:p>
           <a:p>
             <a:r>
-              <a:rPr lang="en-US" dirty="0" err="1"/>
+              <a:rPr lang="en-US" err="1"/>
               <a:t>asum</a:t>
             </a:r>
             <a:r>
-              <a:rPr lang="en-US" dirty="0"/>
+              <a:rPr lang="en-US"/>
               <a:t>(45 ,3.4) = 48,0.4</a:t>
             </a:r>
           </a:p>
           <a:p>
             <a:r>
-              <a:rPr lang="en-US" dirty="0" err="1"/>
+              <a:rPr lang="en-US" err="1"/>
               <a:t>asum</a:t>
             </a:r>
             <a:r>
-              <a:rPr lang="en-US" dirty="0"/>
+              <a:rPr lang="en-US"/>
               <a:t>(48,0.3+0.4) = 49, -0.3 </a:t>
             </a:r>
           </a:p>
@@ -6165,7 +6157,7 @@
           <a:lstStyle/>
           <a:p>
             <a:r>
-              <a:rPr lang="en-US"/>
+              <a:rPr lang="en-US" dirty="0"/>
               <a:t>Catastrophic cancellation</a:t>
             </a:r>
           </a:p>
@@ -6293,19 +6285,19 @@
           <a:lstStyle/>
           <a:p>
             <a:r>
-              <a:rPr lang="en-US" dirty="0"/>
+              <a:rPr lang="en-US"/>
               <a:t>What’s a Floating Point?</a:t>
             </a:r>
             <a:br>
-              <a:rPr lang="en-US" dirty="0"/>
+              <a:rPr lang="en-US"/>
             </a:br>
             <a:r>
-              <a:rPr lang="en-US" sz="1600" dirty="0">
+              <a:rPr lang="en-US" sz="1600">
                 <a:hlinkClick r:id="rId2"/>
               </a:rPr>
               <a:t>https://en.wikipedia.org/wiki/Floating-point_arithmetic</a:t>
             </a:r>
-            <a:endParaRPr lang="en-US" dirty="0"/>
+            <a:endParaRPr lang="en-US"/>
           </a:p>
         </p:txBody>
       </p:sp>
@@ -6331,26 +6323,26 @@
           <a:lstStyle/>
           <a:p>
             <a:r>
-              <a:rPr lang="en-US" dirty="0"/>
+              <a:rPr lang="en-US"/>
               <a:t>Science is based on Measurements</a:t>
             </a:r>
           </a:p>
           <a:p>
             <a:r>
-              <a:rPr lang="en-US" dirty="0"/>
+              <a:rPr lang="en-US"/>
               <a:t>The result of a Measurement is a Rational Number</a:t>
             </a:r>
           </a:p>
           <a:p>
             <a:r>
-              <a:rPr lang="en-US" dirty="0"/>
+              <a:rPr lang="en-US"/>
               <a:t>“Floating Point” is a way to represent Rational Numbers by a fixed number of digits (precision) multiplied by a “base” with an exponent</a:t>
             </a:r>
           </a:p>
           <a:p>
             <a:pPr lvl="1"/>
             <a:r>
-              <a:rPr lang="en-US" dirty="0"/>
+              <a:rPr lang="en-US"/>
               <a:t>A form of “Scientific Notation”</a:t>
             </a:r>
           </a:p>
@@ -6358,22 +6350,22 @@
             <a:pPr marL="0" indent="0">
               <a:buNone/>
             </a:pPr>
-            <a:endParaRPr lang="en-US" dirty="0"/>
+            <a:endParaRPr lang="en-US"/>
           </a:p>
           <a:p>
             <a:pPr marL="0" indent="0">
               <a:buNone/>
             </a:pPr>
             <a:r>
-              <a:rPr lang="en-US" dirty="0"/>
+              <a:rPr lang="en-US"/>
               <a:t>31ᐧ10</a:t>
             </a:r>
             <a:r>
-              <a:rPr lang="en-US" baseline="30000" dirty="0"/>
+              <a:rPr lang="en-US" baseline="30000"/>
               <a:t>-1</a:t>
             </a:r>
             <a:r>
-              <a:rPr lang="en-US" dirty="0"/>
+              <a:rPr lang="en-US"/>
               <a:t> is a FP in base 10 with “precision” 2   (printed in decimal)</a:t>
             </a:r>
           </a:p>
@@ -6382,34 +6374,34 @@
               <a:buNone/>
             </a:pPr>
             <a:r>
-              <a:rPr lang="cs-CZ" altLang="x-none" dirty="0"/>
+              <a:rPr lang="cs-CZ" altLang="x-none"/>
               <a:t>1.921fb6</a:t>
             </a:r>
             <a:r>
-              <a:rPr lang="en-US" dirty="0" err="1"/>
+              <a:rPr lang="en-US" err="1"/>
               <a:t>ᐧ</a:t>
             </a:r>
             <a:r>
-              <a:rPr lang="cs-CZ" altLang="x-none" dirty="0"/>
+              <a:rPr lang="cs-CZ" altLang="x-none"/>
               <a:t>2</a:t>
             </a:r>
             <a:r>
-              <a:rPr lang="cs-CZ" altLang="x-none" baseline="30000" dirty="0"/>
+              <a:rPr lang="cs-CZ" altLang="x-none" baseline="30000"/>
               <a:t>+1 </a:t>
             </a:r>
             <a:r>
-              <a:rPr lang="en-US" dirty="0"/>
+              <a:rPr lang="en-US"/>
               <a:t>is a FP in base 2 with precision 24   (printed in </a:t>
             </a:r>
             <a:r>
-              <a:rPr lang="en-US" dirty="0" err="1"/>
+              <a:rPr lang="en-US" err="1"/>
               <a:t>exadecimal</a:t>
             </a:r>
             <a:r>
-              <a:rPr lang="en-US" dirty="0"/>
+              <a:rPr lang="en-US"/>
               <a:t>)</a:t>
             </a:r>
-            <a:endParaRPr lang="en-US" baseline="30000" dirty="0"/>
+            <a:endParaRPr lang="en-US" baseline="30000"/>
           </a:p>
         </p:txBody>
       </p:sp>
@@ -6417,6 +6409,375 @@
     <p:extLst>
       <p:ext uri="{BB962C8B-B14F-4D97-AF65-F5344CB8AC3E}">
         <p14:creationId xmlns:p14="http://schemas.microsoft.com/office/powerpoint/2010/main" val="3635151351"/>
+      </p:ext>
+    </p:extLst>
+  </p:cSld>
+  <p:clrMapOvr>
+    <a:masterClrMapping/>
+  </p:clrMapOvr>
+</p:sld>
+</file>
+
+<file path=ppt/slides/slide20.xml><?xml version="1.0" encoding="utf-8"?>
+<p:sld xmlns:a="http://schemas.openxmlformats.org/drawingml/2006/main" xmlns:r="http://schemas.openxmlformats.org/officeDocument/2006/relationships" xmlns:p="http://schemas.openxmlformats.org/presentationml/2006/main">
+  <p:cSld>
+    <p:spTree>
+      <p:nvGrpSpPr>
+        <p:cNvPr id="1" name=""/>
+        <p:cNvGrpSpPr/>
+        <p:nvPr/>
+      </p:nvGrpSpPr>
+      <p:grpSpPr>
+        <a:xfrm>
+          <a:off x="0" y="0"/>
+          <a:ext cx="0" cy="0"/>
+          <a:chOff x="0" y="0"/>
+          <a:chExt cx="0" cy="0"/>
+        </a:xfrm>
+      </p:grpSpPr>
+      <p:sp>
+        <p:nvSpPr>
+          <p:cNvPr id="2" name="Title 1">
+            <a:extLst>
+              <a:ext uri="{FF2B5EF4-FFF2-40B4-BE49-F238E27FC236}">
+                <a16:creationId xmlns:a16="http://schemas.microsoft.com/office/drawing/2014/main" id="{AF14D40A-FA76-6F94-EE86-7C1679F6F84C}"/>
+              </a:ext>
+            </a:extLst>
+          </p:cNvPr>
+          <p:cNvSpPr>
+            <a:spLocks noGrp="1"/>
+          </p:cNvSpPr>
+          <p:nvPr>
+            <p:ph type="title"/>
+          </p:nvPr>
+        </p:nvSpPr>
+        <p:spPr/>
+        <p:txBody>
+          <a:bodyPr/>
+          <a:lstStyle/>
+          <a:p>
+            <a:r>
+              <a:rPr lang="en-US" dirty="0"/>
+              <a:t>Compensating algorithm</a:t>
+            </a:r>
+          </a:p>
+        </p:txBody>
+      </p:sp>
+      <p:sp>
+        <p:nvSpPr>
+          <p:cNvPr id="3" name="Content Placeholder 2">
+            <a:extLst>
+              <a:ext uri="{FF2B5EF4-FFF2-40B4-BE49-F238E27FC236}">
+                <a16:creationId xmlns:a16="http://schemas.microsoft.com/office/drawing/2014/main" id="{57F316F0-F6EA-A0F3-3D5D-CC38A744741C}"/>
+              </a:ext>
+            </a:extLst>
+          </p:cNvPr>
+          <p:cNvSpPr>
+            <a:spLocks noGrp="1"/>
+          </p:cNvSpPr>
+          <p:nvPr>
+            <p:ph idx="1"/>
+          </p:nvPr>
+        </p:nvSpPr>
+        <p:spPr/>
+        <p:txBody>
+          <a:bodyPr/>
+          <a:lstStyle/>
+          <a:p>
+            <a:r>
+              <a:rPr lang="en-US" dirty="0"/>
+              <a:t>Kahan summation</a:t>
+            </a:r>
+          </a:p>
+          <a:p>
+            <a:pPr lvl="1"/>
+            <a:r>
+              <a:rPr lang="en-US" dirty="0">
+                <a:hlinkClick r:id="rId2"/>
+              </a:rPr>
+              <a:t>https://en.wikipedia.org/wiki/Kahan_summation_algorithm</a:t>
+            </a:r>
+            <a:endParaRPr lang="en-US" dirty="0"/>
+          </a:p>
+          <a:p>
+            <a:pPr lvl="1"/>
+            <a:r>
+              <a:rPr lang="en-US" dirty="0"/>
+              <a:t>with excruciating details </a:t>
+            </a:r>
+            <a:r>
+              <a:rPr lang="en-US" dirty="0">
+                <a:hlinkClick r:id="rId3"/>
+              </a:rPr>
+              <a:t>https://arxiv.org/html/2602.19452v1 - LST2</a:t>
+            </a:r>
+            <a:endParaRPr lang="en-US" dirty="0"/>
+          </a:p>
+        </p:txBody>
+      </p:sp>
+      <p:sp>
+        <p:nvSpPr>
+          <p:cNvPr id="4" name="TextBox 3">
+            <a:extLst>
+              <a:ext uri="{FF2B5EF4-FFF2-40B4-BE49-F238E27FC236}">
+                <a16:creationId xmlns:a16="http://schemas.microsoft.com/office/drawing/2014/main" id="{D022782E-2AE8-5E4E-D2AA-20DCC4B0081F}"/>
+              </a:ext>
+            </a:extLst>
+          </p:cNvPr>
+          <p:cNvSpPr txBox="1">
+            <a:spLocks noChangeArrowheads="1"/>
+          </p:cNvSpPr>
+          <p:nvPr/>
+        </p:nvSpPr>
+        <p:spPr bwMode="auto">
+          <a:xfrm>
+            <a:off x="838200" y="3429000"/>
+            <a:ext cx="8763000" cy="3046413"/>
+          </a:xfrm>
+          <a:prstGeom prst="rect">
+            <a:avLst/>
+          </a:prstGeom>
+          <a:gradFill rotWithShape="1">
+            <a:gsLst>
+              <a:gs pos="0">
+                <a:srgbClr val="FFFFDC"/>
+              </a:gs>
+              <a:gs pos="64999">
+                <a:srgbClr val="FFFFAC"/>
+              </a:gs>
+              <a:gs pos="100000">
+                <a:srgbClr val="FFFF88"/>
+              </a:gs>
+            </a:gsLst>
+            <a:lin ang="5400000" scaled="1"/>
+          </a:gradFill>
+          <a:ln w="9525">
+            <a:solidFill>
+              <a:srgbClr val="FADD4D"/>
+            </a:solidFill>
+            <a:miter lim="800000"/>
+            <a:headEnd/>
+            <a:tailEnd/>
+          </a:ln>
+          <a:effectLst>
+            <a:outerShdw blurRad="40000" dist="20000" dir="5400000" rotWithShape="0">
+              <a:srgbClr val="808080">
+                <a:alpha val="37999"/>
+              </a:srgbClr>
+            </a:outerShdw>
+          </a:effectLst>
+        </p:spPr>
+        <p:txBody>
+          <a:bodyPr>
+            <a:spAutoFit/>
+          </a:bodyPr>
+          <a:lstStyle>
+            <a:lvl1pPr eaLnBrk="0" hangingPunct="0">
+              <a:defRPr sz="2400">
+                <a:solidFill>
+                  <a:schemeClr val="tx1"/>
+                </a:solidFill>
+                <a:latin typeface="Arial" panose="020B0604020202020204" pitchFamily="34" charset="0"/>
+                <a:ea typeface="ＭＳ Ｐゴシック" panose="020B0600070205080204" pitchFamily="34" charset="-128"/>
+              </a:defRPr>
+            </a:lvl1pPr>
+            <a:lvl2pPr marL="742950" indent="-285750" eaLnBrk="0" hangingPunct="0">
+              <a:defRPr sz="2400">
+                <a:solidFill>
+                  <a:schemeClr val="tx1"/>
+                </a:solidFill>
+                <a:latin typeface="Arial" panose="020B0604020202020204" pitchFamily="34" charset="0"/>
+                <a:ea typeface="ＭＳ Ｐゴシック" panose="020B0600070205080204" pitchFamily="34" charset="-128"/>
+              </a:defRPr>
+            </a:lvl2pPr>
+            <a:lvl3pPr marL="1143000" indent="-228600" eaLnBrk="0" hangingPunct="0">
+              <a:defRPr sz="2400">
+                <a:solidFill>
+                  <a:schemeClr val="tx1"/>
+                </a:solidFill>
+                <a:latin typeface="Arial" panose="020B0604020202020204" pitchFamily="34" charset="0"/>
+                <a:ea typeface="ＭＳ Ｐゴシック" panose="020B0600070205080204" pitchFamily="34" charset="-128"/>
+              </a:defRPr>
+            </a:lvl3pPr>
+            <a:lvl4pPr marL="1600200" indent="-228600" eaLnBrk="0" hangingPunct="0">
+              <a:defRPr sz="2400">
+                <a:solidFill>
+                  <a:schemeClr val="tx1"/>
+                </a:solidFill>
+                <a:latin typeface="Arial" panose="020B0604020202020204" pitchFamily="34" charset="0"/>
+                <a:ea typeface="ＭＳ Ｐゴシック" panose="020B0600070205080204" pitchFamily="34" charset="-128"/>
+              </a:defRPr>
+            </a:lvl4pPr>
+            <a:lvl5pPr marL="2057400" indent="-228600" eaLnBrk="0" hangingPunct="0">
+              <a:defRPr sz="2400">
+                <a:solidFill>
+                  <a:schemeClr val="tx1"/>
+                </a:solidFill>
+                <a:latin typeface="Arial" panose="020B0604020202020204" pitchFamily="34" charset="0"/>
+                <a:ea typeface="ＭＳ Ｐゴシック" panose="020B0600070205080204" pitchFamily="34" charset="-128"/>
+              </a:defRPr>
+            </a:lvl5pPr>
+            <a:lvl6pPr marL="2514600" indent="-228600" eaLnBrk="0" fontAlgn="base" hangingPunct="0">
+              <a:spcBef>
+                <a:spcPct val="0"/>
+              </a:spcBef>
+              <a:spcAft>
+                <a:spcPct val="0"/>
+              </a:spcAft>
+              <a:defRPr sz="2400">
+                <a:solidFill>
+                  <a:schemeClr val="tx1"/>
+                </a:solidFill>
+                <a:latin typeface="Arial" panose="020B0604020202020204" pitchFamily="34" charset="0"/>
+                <a:ea typeface="ＭＳ Ｐゴシック" panose="020B0600070205080204" pitchFamily="34" charset="-128"/>
+              </a:defRPr>
+            </a:lvl6pPr>
+            <a:lvl7pPr marL="2971800" indent="-228600" eaLnBrk="0" fontAlgn="base" hangingPunct="0">
+              <a:spcBef>
+                <a:spcPct val="0"/>
+              </a:spcBef>
+              <a:spcAft>
+                <a:spcPct val="0"/>
+              </a:spcAft>
+              <a:defRPr sz="2400">
+                <a:solidFill>
+                  <a:schemeClr val="tx1"/>
+                </a:solidFill>
+                <a:latin typeface="Arial" panose="020B0604020202020204" pitchFamily="34" charset="0"/>
+                <a:ea typeface="ＭＳ Ｐゴシック" panose="020B0600070205080204" pitchFamily="34" charset="-128"/>
+              </a:defRPr>
+            </a:lvl7pPr>
+            <a:lvl8pPr marL="3429000" indent="-228600" eaLnBrk="0" fontAlgn="base" hangingPunct="0">
+              <a:spcBef>
+                <a:spcPct val="0"/>
+              </a:spcBef>
+              <a:spcAft>
+                <a:spcPct val="0"/>
+              </a:spcAft>
+              <a:defRPr sz="2400">
+                <a:solidFill>
+                  <a:schemeClr val="tx1"/>
+                </a:solidFill>
+                <a:latin typeface="Arial" panose="020B0604020202020204" pitchFamily="34" charset="0"/>
+                <a:ea typeface="ＭＳ Ｐゴシック" panose="020B0600070205080204" pitchFamily="34" charset="-128"/>
+              </a:defRPr>
+            </a:lvl8pPr>
+            <a:lvl9pPr marL="3886200" indent="-228600" eaLnBrk="0" fontAlgn="base" hangingPunct="0">
+              <a:spcBef>
+                <a:spcPct val="0"/>
+              </a:spcBef>
+              <a:spcAft>
+                <a:spcPct val="0"/>
+              </a:spcAft>
+              <a:defRPr sz="2400">
+                <a:solidFill>
+                  <a:schemeClr val="tx1"/>
+                </a:solidFill>
+                <a:latin typeface="Arial" panose="020B0604020202020204" pitchFamily="34" charset="0"/>
+                <a:ea typeface="ＭＳ Ｐゴシック" panose="020B0600070205080204" pitchFamily="34" charset="-128"/>
+              </a:defRPr>
+            </a:lvl9pPr>
+          </a:lstStyle>
+          <a:p>
+            <a:pPr eaLnBrk="1" hangingPunct="1"/>
+            <a:r>
+              <a:rPr lang="en-US" altLang="en-US" sz="1600" b="1"/>
+              <a:t>T kahanSum(T const * input, size_t n) </a:t>
+            </a:r>
+          </a:p>
+          <a:p>
+            <a:pPr eaLnBrk="1" hangingPunct="1"/>
+            <a:r>
+              <a:rPr lang="en-US" altLang="en-US" sz="1600" b="1"/>
+              <a:t>T sum = input[0];</a:t>
+            </a:r>
+          </a:p>
+          <a:p>
+            <a:pPr eaLnBrk="1" hangingPunct="1"/>
+            <a:r>
+              <a:rPr lang="en-US" altLang="en-US" sz="1600" b="1"/>
+              <a:t>T t = 0.0;          // A running compensation for lost low-order bits. </a:t>
+            </a:r>
+          </a:p>
+          <a:p>
+            <a:pPr eaLnBrk="1" hangingPunct="1"/>
+            <a:r>
+              <a:rPr lang="en-US" altLang="en-US" sz="1600" b="1"/>
+              <a:t>for (size_t i = 1; i!=n; ++i)  {  </a:t>
+            </a:r>
+          </a:p>
+          <a:p>
+            <a:pPr eaLnBrk="1" hangingPunct="1"/>
+            <a:r>
+              <a:rPr lang="en-US" altLang="en-US" sz="1600" b="1"/>
+              <a:t>  y = input[i] – t;       //  so far, so good: </a:t>
+            </a:r>
+            <a:r>
+              <a:rPr lang="en-US" altLang="en-US" sz="1600" b="1" i="1"/>
+              <a:t>t is zero.  </a:t>
+            </a:r>
+          </a:p>
+          <a:p>
+            <a:pPr eaLnBrk="1" hangingPunct="1"/>
+            <a:r>
+              <a:rPr lang="en-US" altLang="en-US" sz="1600" b="1" i="1"/>
+              <a:t>  s = sum + y;         // Alas, sum is big, y small, so low-order digits of y are lost. </a:t>
+            </a:r>
+          </a:p>
+          <a:p>
+            <a:pPr eaLnBrk="1" hangingPunct="1"/>
+            <a:r>
+              <a:rPr lang="en-US" altLang="en-US" sz="1600" b="1" i="1"/>
+              <a:t>  t = (s - sum) – y;   // ( s - sum) recovers the high-order part of y </a:t>
+            </a:r>
+          </a:p>
+          <a:p>
+            <a:pPr eaLnBrk="1" hangingPunct="1"/>
+            <a:r>
+              <a:rPr lang="en-US" altLang="en-US" sz="1600" b="1" i="1"/>
+              <a:t>                               // subtracting y recovers -(low part of y)  </a:t>
+            </a:r>
+          </a:p>
+          <a:p>
+            <a:pPr eaLnBrk="1" hangingPunct="1"/>
+            <a:r>
+              <a:rPr lang="en-US" altLang="en-US" sz="1600" b="1" i="1"/>
+              <a:t> sum = s;             //Algebraically, t should always be zero. </a:t>
+            </a:r>
+          </a:p>
+          <a:p>
+            <a:pPr eaLnBrk="1" hangingPunct="1"/>
+            <a:r>
+              <a:rPr lang="en-US" altLang="en-US" sz="1600" b="1" i="1"/>
+              <a:t>                          // Beware eagerly optimising compilers! </a:t>
+            </a:r>
+          </a:p>
+          <a:p>
+            <a:pPr eaLnBrk="1" hangingPunct="1"/>
+            <a:r>
+              <a:rPr lang="en-US" altLang="en-US" sz="1600" b="1" i="1"/>
+              <a:t> }                      //Next time around, the lost low part will be added to y in a fresh attempt.</a:t>
+            </a:r>
+          </a:p>
+          <a:p>
+            <a:pPr eaLnBrk="1" hangingPunct="1"/>
+            <a:r>
+              <a:rPr lang="en-US" altLang="en-US" sz="1600" b="1" i="1"/>
+              <a:t>return sum;</a:t>
+            </a:r>
+            <a:endParaRPr lang="en-US" altLang="en-US" sz="1600" b="1">
+              <a:solidFill>
+                <a:srgbClr val="000000"/>
+              </a:solidFill>
+              <a:latin typeface="Arial Narrow" panose="020B0604020202020204" pitchFamily="34" charset="0"/>
+            </a:endParaRPr>
+          </a:p>
+        </p:txBody>
+      </p:sp>
+    </p:spTree>
+    <p:extLst>
+      <p:ext uri="{BB962C8B-B14F-4D97-AF65-F5344CB8AC3E}">
+        <p14:creationId xmlns:p14="http://schemas.microsoft.com/office/powerpoint/2010/main" val="1199403217"/>
       </p:ext>
     </p:extLst>
   </p:cSld>
@@ -6465,7 +6826,7 @@
           <a:lstStyle/>
           <a:p>
             <a:r>
-              <a:rPr lang="en-US" dirty="0"/>
+              <a:rPr lang="en-US"/>
               <a:t>Some Trivial properties of FP</a:t>
             </a:r>
           </a:p>
@@ -6493,351 +6854,351 @@
           <a:lstStyle/>
           <a:p>
             <a:r>
-              <a:rPr lang="en-US" dirty="0"/>
+              <a:rPr lang="en-US"/>
               <a:t>Each FP has a previous and a next</a:t>
             </a:r>
           </a:p>
           <a:p>
             <a:pPr lvl="1"/>
             <a:r>
-              <a:rPr lang="en-US" dirty="0"/>
+              <a:rPr lang="en-US"/>
               <a:t>Previous of 31ᐧ10</a:t>
             </a:r>
             <a:r>
-              <a:rPr lang="en-US" baseline="30000" dirty="0"/>
+              <a:rPr lang="en-US" baseline="30000"/>
               <a:t>-1 </a:t>
             </a:r>
             <a:r>
-              <a:rPr lang="en-US" dirty="0"/>
+              <a:rPr lang="en-US"/>
               <a:t>is</a:t>
             </a:r>
             <a:r>
-              <a:rPr lang="en-US" baseline="30000" dirty="0"/>
+              <a:rPr lang="en-US" baseline="30000"/>
               <a:t> </a:t>
             </a:r>
             <a:r>
-              <a:rPr lang="en-US" dirty="0"/>
+              <a:rPr lang="en-US"/>
               <a:t>30ᐧ10</a:t>
             </a:r>
             <a:r>
-              <a:rPr lang="en-US" baseline="30000" dirty="0"/>
+              <a:rPr lang="en-US" baseline="30000"/>
               <a:t>-1</a:t>
             </a:r>
             <a:r>
-              <a:rPr lang="en-US" dirty="0"/>
+              <a:rPr lang="en-US"/>
               <a:t>, next is 32ᐧ10</a:t>
             </a:r>
             <a:r>
-              <a:rPr lang="en-US" baseline="30000" dirty="0"/>
+              <a:rPr lang="en-US" baseline="30000"/>
               <a:t>-1</a:t>
             </a:r>
           </a:p>
           <a:p>
             <a:pPr lvl="1"/>
             <a:r>
-              <a:rPr lang="en-US" dirty="0"/>
+              <a:rPr lang="en-US"/>
               <a:t>Previous of </a:t>
             </a:r>
             <a:r>
-              <a:rPr lang="cs-CZ" altLang="x-none" dirty="0"/>
+              <a:rPr lang="cs-CZ" altLang="x-none"/>
               <a:t>1.921fb6</a:t>
             </a:r>
             <a:r>
-              <a:rPr lang="en-US" dirty="0" err="1"/>
+              <a:rPr lang="en-US" err="1"/>
               <a:t>ᐧ</a:t>
             </a:r>
             <a:r>
-              <a:rPr lang="cs-CZ" altLang="x-none" dirty="0"/>
+              <a:rPr lang="cs-CZ" altLang="x-none"/>
               <a:t>2</a:t>
             </a:r>
             <a:r>
-              <a:rPr lang="cs-CZ" altLang="x-none" baseline="30000" dirty="0"/>
+              <a:rPr lang="cs-CZ" altLang="x-none" baseline="30000"/>
               <a:t>+1  </a:t>
             </a:r>
             <a:r>
-              <a:rPr lang="cs-CZ" altLang="x-none" dirty="0" err="1"/>
+              <a:rPr lang="cs-CZ" altLang="x-none" err="1"/>
               <a:t>is</a:t>
             </a:r>
             <a:r>
-              <a:rPr lang="cs-CZ" altLang="x-none" dirty="0"/>
+              <a:rPr lang="cs-CZ" altLang="x-none"/>
               <a:t> 1.921fb4</a:t>
             </a:r>
             <a:r>
-              <a:rPr lang="en-US" dirty="0" err="1"/>
+              <a:rPr lang="en-US" err="1"/>
               <a:t>ᐧ</a:t>
             </a:r>
             <a:r>
-              <a:rPr lang="cs-CZ" altLang="x-none" dirty="0"/>
+              <a:rPr lang="cs-CZ" altLang="x-none"/>
               <a:t>2</a:t>
             </a:r>
             <a:r>
-              <a:rPr lang="cs-CZ" altLang="x-none" baseline="30000" dirty="0"/>
+              <a:rPr lang="cs-CZ" altLang="x-none" baseline="30000"/>
               <a:t>+1</a:t>
             </a:r>
             <a:r>
-              <a:rPr lang="cs-CZ" altLang="x-none" dirty="0"/>
+              <a:rPr lang="cs-CZ" altLang="x-none"/>
               <a:t>, </a:t>
             </a:r>
             <a:r>
-              <a:rPr lang="cs-CZ" altLang="x-none" dirty="0" err="1"/>
+              <a:rPr lang="cs-CZ" altLang="x-none" err="1"/>
               <a:t>next</a:t>
             </a:r>
             <a:r>
-              <a:rPr lang="cs-CZ" altLang="x-none" dirty="0"/>
+              <a:rPr lang="cs-CZ" altLang="x-none"/>
               <a:t> </a:t>
             </a:r>
             <a:r>
-              <a:rPr lang="cs-CZ" altLang="x-none" dirty="0" err="1"/>
+              <a:rPr lang="cs-CZ" altLang="x-none" err="1"/>
               <a:t>is</a:t>
             </a:r>
             <a:r>
-              <a:rPr lang="cs-CZ" altLang="x-none" dirty="0"/>
+              <a:rPr lang="cs-CZ" altLang="x-none"/>
               <a:t> 1.921fb8</a:t>
             </a:r>
             <a:r>
-              <a:rPr lang="en-US" dirty="0" err="1"/>
+              <a:rPr lang="en-US" err="1"/>
               <a:t>ᐧ</a:t>
             </a:r>
             <a:r>
-              <a:rPr lang="cs-CZ" altLang="x-none" dirty="0"/>
+              <a:rPr lang="cs-CZ" altLang="x-none"/>
               <a:t>2</a:t>
             </a:r>
             <a:r>
-              <a:rPr lang="cs-CZ" altLang="x-none" baseline="30000" dirty="0"/>
+              <a:rPr lang="cs-CZ" altLang="x-none" baseline="30000"/>
               <a:t>+1</a:t>
             </a:r>
             <a:r>
-              <a:rPr lang="cs-CZ" altLang="x-none" dirty="0"/>
+              <a:rPr lang="cs-CZ" altLang="x-none"/>
               <a:t> </a:t>
             </a:r>
           </a:p>
           <a:p>
             <a:pPr lvl="1"/>
             <a:r>
-              <a:rPr lang="cs-CZ" altLang="x-none" dirty="0" err="1"/>
+              <a:rPr lang="cs-CZ" altLang="x-none" err="1"/>
               <a:t>The</a:t>
             </a:r>
             <a:r>
-              <a:rPr lang="cs-CZ" altLang="x-none" dirty="0"/>
+              <a:rPr lang="cs-CZ" altLang="x-none"/>
               <a:t> </a:t>
             </a:r>
             <a:r>
-              <a:rPr lang="cs-CZ" altLang="x-none" dirty="0" err="1"/>
+              <a:rPr lang="cs-CZ" altLang="x-none" err="1"/>
               <a:t>difference</a:t>
             </a:r>
             <a:r>
-              <a:rPr lang="cs-CZ" altLang="x-none" dirty="0"/>
+              <a:rPr lang="cs-CZ" altLang="x-none"/>
               <a:t> </a:t>
             </a:r>
             <a:r>
-              <a:rPr lang="cs-CZ" altLang="x-none" dirty="0" err="1"/>
+              <a:rPr lang="cs-CZ" altLang="x-none" err="1"/>
               <a:t>between</a:t>
             </a:r>
             <a:r>
-              <a:rPr lang="cs-CZ" altLang="x-none" dirty="0"/>
+              <a:rPr lang="cs-CZ" altLang="x-none"/>
               <a:t> </a:t>
             </a:r>
             <a:r>
-              <a:rPr lang="cs-CZ" altLang="x-none" dirty="0" err="1"/>
+              <a:rPr lang="cs-CZ" altLang="x-none" err="1"/>
               <a:t>two</a:t>
             </a:r>
             <a:r>
-              <a:rPr lang="cs-CZ" altLang="x-none" dirty="0"/>
+              <a:rPr lang="cs-CZ" altLang="x-none"/>
               <a:t> </a:t>
             </a:r>
             <a:r>
-              <a:rPr lang="cs-CZ" altLang="x-none" dirty="0" err="1"/>
+              <a:rPr lang="cs-CZ" altLang="x-none" err="1"/>
               <a:t>consecutive</a:t>
             </a:r>
             <a:r>
-              <a:rPr lang="cs-CZ" altLang="x-none" dirty="0"/>
+              <a:rPr lang="cs-CZ" altLang="x-none"/>
               <a:t> FP </a:t>
             </a:r>
             <a:r>
-              <a:rPr lang="cs-CZ" altLang="x-none" dirty="0" err="1"/>
+              <a:rPr lang="cs-CZ" altLang="x-none" err="1"/>
               <a:t>is</a:t>
             </a:r>
             <a:r>
-              <a:rPr lang="cs-CZ" altLang="x-none" dirty="0"/>
+              <a:rPr lang="cs-CZ" altLang="x-none"/>
               <a:t> </a:t>
             </a:r>
             <a:r>
-              <a:rPr lang="cs-CZ" altLang="x-none" dirty="0" err="1"/>
+              <a:rPr lang="cs-CZ" altLang="x-none" err="1"/>
               <a:t>called</a:t>
             </a:r>
             <a:r>
-              <a:rPr lang="cs-CZ" altLang="x-none" dirty="0"/>
+              <a:rPr lang="cs-CZ" altLang="x-none"/>
               <a:t> ULP (unit in last place)</a:t>
             </a:r>
           </a:p>
           <a:p>
             <a:r>
-              <a:rPr lang="cs-CZ" altLang="x-none" dirty="0" err="1"/>
+              <a:rPr lang="cs-CZ" altLang="x-none" err="1"/>
               <a:t>For</a:t>
             </a:r>
             <a:r>
-              <a:rPr lang="cs-CZ" altLang="x-none" dirty="0"/>
+              <a:rPr lang="cs-CZ" altLang="x-none"/>
               <a:t> </a:t>
             </a:r>
             <a:r>
-              <a:rPr lang="cs-CZ" altLang="x-none" dirty="0" err="1"/>
+              <a:rPr lang="cs-CZ" altLang="x-none" err="1"/>
               <a:t>each</a:t>
             </a:r>
             <a:r>
-              <a:rPr lang="cs-CZ" altLang="x-none" dirty="0"/>
+              <a:rPr lang="cs-CZ" altLang="x-none"/>
               <a:t> </a:t>
             </a:r>
             <a:r>
-              <a:rPr lang="cs-CZ" altLang="x-none" dirty="0" err="1"/>
+              <a:rPr lang="cs-CZ" altLang="x-none" err="1"/>
               <a:t>value</a:t>
             </a:r>
             <a:r>
-              <a:rPr lang="cs-CZ" altLang="x-none" dirty="0"/>
+              <a:rPr lang="cs-CZ" altLang="x-none"/>
               <a:t> </a:t>
             </a:r>
             <a:r>
-              <a:rPr lang="cs-CZ" altLang="x-none" dirty="0" err="1"/>
+              <a:rPr lang="cs-CZ" altLang="x-none" err="1"/>
               <a:t>of</a:t>
             </a:r>
             <a:r>
-              <a:rPr lang="cs-CZ" altLang="x-none" dirty="0"/>
+              <a:rPr lang="cs-CZ" altLang="x-none"/>
               <a:t> </a:t>
             </a:r>
             <a:r>
-              <a:rPr lang="cs-CZ" altLang="x-none" dirty="0" err="1"/>
+              <a:rPr lang="cs-CZ" altLang="x-none" err="1"/>
               <a:t>the</a:t>
             </a:r>
             <a:r>
-              <a:rPr lang="cs-CZ" altLang="x-none" dirty="0"/>
+              <a:rPr lang="cs-CZ" altLang="x-none"/>
               <a:t> exponent </a:t>
             </a:r>
             <a:r>
-              <a:rPr lang="cs-CZ" altLang="x-none" dirty="0" err="1"/>
+              <a:rPr lang="cs-CZ" altLang="x-none" err="1"/>
               <a:t>there</a:t>
             </a:r>
             <a:r>
-              <a:rPr lang="cs-CZ" altLang="x-none" dirty="0"/>
+              <a:rPr lang="cs-CZ" altLang="x-none"/>
               <a:t> </a:t>
             </a:r>
             <a:r>
-              <a:rPr lang="cs-CZ" altLang="x-none" dirty="0" err="1"/>
+              <a:rPr lang="cs-CZ" altLang="x-none" err="1"/>
               <a:t>is</a:t>
             </a:r>
             <a:r>
-              <a:rPr lang="cs-CZ" altLang="x-none" dirty="0"/>
+              <a:rPr lang="cs-CZ" altLang="x-none"/>
               <a:t> a </a:t>
             </a:r>
             <a:r>
-              <a:rPr lang="cs-CZ" altLang="x-none" dirty="0" err="1"/>
+              <a:rPr lang="cs-CZ" altLang="x-none" err="1"/>
               <a:t>finite</a:t>
             </a:r>
             <a:r>
-              <a:rPr lang="cs-CZ" altLang="x-none" dirty="0"/>
+              <a:rPr lang="cs-CZ" altLang="x-none"/>
               <a:t> </a:t>
             </a:r>
             <a:r>
-              <a:rPr lang="cs-CZ" altLang="x-none" dirty="0" err="1"/>
+              <a:rPr lang="cs-CZ" altLang="x-none" err="1"/>
               <a:t>number</a:t>
             </a:r>
             <a:r>
-              <a:rPr lang="cs-CZ" altLang="x-none" dirty="0"/>
+              <a:rPr lang="cs-CZ" altLang="x-none"/>
               <a:t> </a:t>
             </a:r>
             <a:r>
-              <a:rPr lang="cs-CZ" altLang="x-none" dirty="0" err="1"/>
+              <a:rPr lang="cs-CZ" altLang="x-none" err="1"/>
               <a:t>of</a:t>
             </a:r>
             <a:r>
-              <a:rPr lang="cs-CZ" altLang="x-none" dirty="0"/>
+              <a:rPr lang="cs-CZ" altLang="x-none"/>
               <a:t> FP</a:t>
             </a:r>
           </a:p>
           <a:p>
             <a:pPr lvl="1"/>
             <a:r>
-              <a:rPr lang="cs-CZ" altLang="x-none" dirty="0"/>
+              <a:rPr lang="cs-CZ" altLang="x-none"/>
               <a:t> 10</a:t>
             </a:r>
             <a:r>
-              <a:rPr lang="cs-CZ" altLang="x-none" baseline="30000" dirty="0"/>
+              <a:rPr lang="cs-CZ" altLang="x-none" baseline="30000"/>
               <a:t> </a:t>
             </a:r>
             <a:r>
-              <a:rPr lang="en-US" dirty="0"/>
+              <a:rPr lang="en-US"/>
               <a:t>ᐧ10</a:t>
             </a:r>
             <a:r>
-              <a:rPr lang="en-US" baseline="30000" dirty="0"/>
+              <a:rPr lang="en-US" baseline="30000"/>
               <a:t>e</a:t>
             </a:r>
             <a:r>
-              <a:rPr lang="en-US" dirty="0"/>
+              <a:rPr lang="en-US"/>
               <a:t> - </a:t>
             </a:r>
             <a:r>
-              <a:rPr lang="cs-CZ" dirty="0"/>
+              <a:rPr lang="cs-CZ"/>
               <a:t>99</a:t>
             </a:r>
             <a:r>
-              <a:rPr lang="cs-CZ" altLang="x-none" baseline="30000" dirty="0"/>
+              <a:rPr lang="cs-CZ" altLang="x-none" baseline="30000"/>
               <a:t> </a:t>
             </a:r>
             <a:r>
-              <a:rPr lang="en-US" dirty="0"/>
+              <a:rPr lang="en-US"/>
               <a:t>ᐧ10</a:t>
             </a:r>
             <a:r>
-              <a:rPr lang="en-US" baseline="30000" dirty="0"/>
+              <a:rPr lang="en-US" baseline="30000"/>
               <a:t>e</a:t>
             </a:r>
             <a:r>
-              <a:rPr lang="en-US" dirty="0"/>
+              <a:rPr lang="en-US"/>
               <a:t> </a:t>
             </a:r>
           </a:p>
           <a:p>
             <a:pPr lvl="1"/>
             <a:r>
-              <a:rPr lang="en-US" dirty="0"/>
+              <a:rPr lang="en-US"/>
               <a:t>1.000000ᐧ</a:t>
             </a:r>
             <a:r>
-              <a:rPr lang="cs-CZ" altLang="x-none" dirty="0"/>
+              <a:rPr lang="cs-CZ" altLang="x-none"/>
               <a:t>2</a:t>
             </a:r>
             <a:r>
-              <a:rPr lang="en-US" baseline="30000" dirty="0"/>
+              <a:rPr lang="en-US" baseline="30000"/>
               <a:t>e </a:t>
             </a:r>
             <a:r>
-              <a:rPr lang="en-US" dirty="0"/>
+              <a:rPr lang="en-US"/>
               <a:t>- 1.ffffffᐧ</a:t>
             </a:r>
             <a:r>
-              <a:rPr lang="cs-CZ" altLang="x-none" dirty="0"/>
+              <a:rPr lang="cs-CZ" altLang="x-none"/>
               <a:t>2</a:t>
             </a:r>
             <a:r>
-              <a:rPr lang="en-US" baseline="30000" dirty="0"/>
+              <a:rPr lang="en-US" baseline="30000"/>
               <a:t>e </a:t>
             </a:r>
             <a:r>
-              <a:rPr lang="en-US" dirty="0"/>
+              <a:rPr lang="en-US"/>
               <a:t> </a:t>
             </a:r>
           </a:p>
           <a:p>
             <a:pPr lvl="1"/>
             <a:r>
-              <a:rPr lang="en-US" dirty="0"/>
+              <a:rPr lang="en-US"/>
               <a:t>(called “</a:t>
             </a:r>
             <a:r>
-              <a:rPr lang="en-US" dirty="0" err="1"/>
+              <a:rPr lang="en-US" err="1"/>
               <a:t>binade</a:t>
             </a:r>
             <a:r>
-              <a:rPr lang="en-US" dirty="0"/>
+              <a:rPr lang="en-US"/>
               <a:t>”)</a:t>
             </a:r>
           </a:p>
@@ -6900,7 +7261,7 @@
           <a:lstStyle/>
           <a:p>
             <a:r>
-              <a:rPr lang="en-US" dirty="0"/>
+              <a:rPr lang="en-US"/>
               <a:t>Precision and Rounding</a:t>
             </a:r>
           </a:p>
@@ -6938,11 +7299,11 @@
               <a:buNone/>
             </a:pPr>
             <a:r>
-              <a:rPr lang="en-US" dirty="0" err="1"/>
+              <a:rPr lang="en-US" err="1"/>
               <a:t>Le’ts</a:t>
             </a:r>
             <a:r>
-              <a:rPr lang="en-US" dirty="0"/>
+              <a:rPr lang="en-US"/>
               <a:t> be the result of a measurement  3.1415 and its accuracy, say, 0.1.</a:t>
             </a:r>
           </a:p>
@@ -6951,7 +7312,7 @@
               <a:buNone/>
             </a:pPr>
             <a:r>
-              <a:rPr lang="en-US" dirty="0"/>
+              <a:rPr lang="en-US"/>
               <a:t>This result needs to be rounded. Default is to round to “nearest”</a:t>
             </a:r>
           </a:p>
@@ -6960,7 +7321,7 @@
               <a:buNone/>
             </a:pPr>
             <a:r>
-              <a:rPr lang="en-US" dirty="0"/>
+              <a:rPr lang="en-US"/>
               <a:t>3.1415 -&gt; 3.1  (3.1515 -&gt; 3.2)</a:t>
             </a:r>
           </a:p>
@@ -6968,38 +7329,38 @@
             <a:pPr marL="0" indent="0">
               <a:buNone/>
             </a:pPr>
-            <a:endParaRPr lang="en-US" dirty="0"/>
+            <a:endParaRPr lang="en-US"/>
           </a:p>
           <a:p>
             <a:pPr marL="0" indent="0">
               <a:buNone/>
             </a:pPr>
             <a:r>
-              <a:rPr lang="en-US" dirty="0"/>
+              <a:rPr lang="en-US"/>
               <a:t>31ᐧ10</a:t>
             </a:r>
             <a:r>
-              <a:rPr lang="en-US" baseline="30000" dirty="0"/>
+              <a:rPr lang="en-US" baseline="30000"/>
               <a:t>-1</a:t>
             </a:r>
             <a:r>
-              <a:rPr lang="en-US" dirty="0"/>
+              <a:rPr lang="en-US"/>
               <a:t> represents all numbers in the interval [30.5ᐧ10</a:t>
             </a:r>
             <a:r>
-              <a:rPr lang="en-US" baseline="30000" dirty="0"/>
+              <a:rPr lang="en-US" baseline="30000"/>
               <a:t>-1</a:t>
             </a:r>
             <a:r>
-              <a:rPr lang="en-US" dirty="0"/>
+              <a:rPr lang="en-US"/>
               <a:t>, 31.5ᐧ10</a:t>
             </a:r>
             <a:r>
-              <a:rPr lang="en-US" baseline="30000" dirty="0"/>
+              <a:rPr lang="en-US" baseline="30000"/>
               <a:t>-1</a:t>
             </a:r>
             <a:r>
-              <a:rPr lang="en-US" dirty="0"/>
+              <a:rPr lang="en-US"/>
               <a:t>]</a:t>
             </a:r>
           </a:p>
@@ -7008,87 +7369,87 @@
               <a:buNone/>
             </a:pPr>
             <a:r>
-              <a:rPr lang="cs-CZ" altLang="x-none" dirty="0"/>
+              <a:rPr lang="cs-CZ" altLang="x-none"/>
               <a:t>1.921fb6</a:t>
             </a:r>
             <a:r>
-              <a:rPr lang="en-US" dirty="0" err="1"/>
+              <a:rPr lang="en-US" err="1"/>
               <a:t>ᐧ</a:t>
             </a:r>
             <a:r>
-              <a:rPr lang="cs-CZ" altLang="x-none" dirty="0"/>
+              <a:rPr lang="cs-CZ" altLang="x-none"/>
               <a:t>2</a:t>
             </a:r>
             <a:r>
-              <a:rPr lang="cs-CZ" altLang="x-none" baseline="30000" dirty="0"/>
+              <a:rPr lang="cs-CZ" altLang="x-none" baseline="30000"/>
               <a:t>+1 </a:t>
             </a:r>
             <a:r>
-              <a:rPr lang="en-US" dirty="0"/>
+              <a:rPr lang="en-US"/>
               <a:t>represents all numbers in the interval [</a:t>
             </a:r>
             <a:r>
-              <a:rPr lang="cs-CZ" altLang="x-none" dirty="0"/>
+              <a:rPr lang="cs-CZ" altLang="x-none"/>
               <a:t>1.921fb5</a:t>
             </a:r>
             <a:r>
-              <a:rPr lang="en-US" dirty="0" err="1"/>
+              <a:rPr lang="en-US" err="1"/>
               <a:t>ᐧ</a:t>
             </a:r>
             <a:r>
-              <a:rPr lang="cs-CZ" altLang="x-none" dirty="0"/>
+              <a:rPr lang="cs-CZ" altLang="x-none"/>
               <a:t>2</a:t>
             </a:r>
             <a:r>
-              <a:rPr lang="cs-CZ" altLang="x-none" baseline="30000" dirty="0"/>
+              <a:rPr lang="cs-CZ" altLang="x-none" baseline="30000"/>
               <a:t>+1</a:t>
             </a:r>
             <a:r>
-              <a:rPr lang="cs-CZ" altLang="x-none" dirty="0"/>
+              <a:rPr lang="cs-CZ" altLang="x-none"/>
               <a:t>,1.921fb7</a:t>
             </a:r>
             <a:r>
-              <a:rPr lang="en-US" dirty="0" err="1"/>
+              <a:rPr lang="en-US" err="1"/>
               <a:t>ᐧ</a:t>
             </a:r>
             <a:r>
-              <a:rPr lang="cs-CZ" altLang="x-none" dirty="0"/>
+              <a:rPr lang="cs-CZ" altLang="x-none"/>
               <a:t>2</a:t>
             </a:r>
             <a:r>
-              <a:rPr lang="cs-CZ" altLang="x-none" baseline="30000" dirty="0"/>
+              <a:rPr lang="cs-CZ" altLang="x-none" baseline="30000"/>
               <a:t>+1</a:t>
             </a:r>
             <a:r>
-              <a:rPr lang="cs-CZ" altLang="x-none" dirty="0"/>
+              <a:rPr lang="cs-CZ" altLang="x-none"/>
               <a:t>]</a:t>
             </a:r>
-            <a:endParaRPr lang="en-US" dirty="0"/>
+            <a:endParaRPr lang="en-US"/>
           </a:p>
           <a:p>
             <a:pPr marL="0" indent="0">
               <a:buNone/>
             </a:pPr>
-            <a:endParaRPr lang="en-US" dirty="0"/>
+            <a:endParaRPr lang="en-US"/>
           </a:p>
           <a:p>
             <a:pPr marL="0" indent="0">
               <a:buNone/>
             </a:pPr>
-            <a:endParaRPr lang="en-US" dirty="0"/>
+            <a:endParaRPr lang="en-US"/>
           </a:p>
           <a:p>
             <a:pPr marL="0" indent="0">
               <a:buNone/>
             </a:pPr>
-            <a:endParaRPr lang="en-US" dirty="0"/>
+            <a:endParaRPr lang="en-US"/>
           </a:p>
           <a:p>
             <a:pPr marL="0" indent="0">
               <a:buNone/>
             </a:pPr>
             <a:r>
-              <a:rPr lang="en-US" dirty="0"/>
+              <a:rPr lang="en-US"/>
               <a:t> </a:t>
             </a:r>
           </a:p>
@@ -8302,22 +8663,22 @@
             <a:p>
               <a:pPr eaLnBrk="1" hangingPunct="1"/>
               <a:r>
-                <a:rPr lang="cs-CZ" altLang="x-none" sz="1800" dirty="0"/>
+                <a:rPr lang="cs-CZ" altLang="x-none" sz="1800"/>
                 <a:t>1.921fb8</a:t>
               </a:r>
               <a:r>
-                <a:rPr lang="en-US" sz="1800" dirty="0" err="1"/>
+                <a:rPr lang="en-US" sz="1800" err="1"/>
                 <a:t>ᐧ</a:t>
               </a:r>
               <a:r>
-                <a:rPr lang="cs-CZ" altLang="x-none" sz="1800" dirty="0"/>
+                <a:rPr lang="cs-CZ" altLang="x-none" sz="1800"/>
                 <a:t>2</a:t>
               </a:r>
               <a:r>
-                <a:rPr lang="cs-CZ" altLang="x-none" sz="1800" baseline="30000" dirty="0"/>
+                <a:rPr lang="cs-CZ" altLang="x-none" sz="1800" baseline="30000"/>
                 <a:t>+1</a:t>
               </a:r>
-              <a:endParaRPr lang="en-US" altLang="x-none" sz="1800" dirty="0"/>
+              <a:endParaRPr lang="en-US" altLang="x-none" sz="1800"/>
             </a:p>
           </p:txBody>
         </p:sp>
@@ -8481,22 +8842,22 @@
             <a:p>
               <a:pPr eaLnBrk="1" hangingPunct="1"/>
               <a:r>
-                <a:rPr lang="cs-CZ" altLang="x-none" sz="1800" dirty="0"/>
+                <a:rPr lang="cs-CZ" altLang="x-none" sz="1800"/>
                 <a:t>1.921fb4</a:t>
               </a:r>
               <a:r>
-                <a:rPr lang="en-US" sz="1800" dirty="0" err="1"/>
+                <a:rPr lang="en-US" sz="1800" err="1"/>
                 <a:t>ᐧ</a:t>
               </a:r>
               <a:r>
-                <a:rPr lang="cs-CZ" altLang="x-none" sz="1800" dirty="0"/>
+                <a:rPr lang="cs-CZ" altLang="x-none" sz="1800"/>
                 <a:t>2</a:t>
               </a:r>
               <a:r>
-                <a:rPr lang="cs-CZ" altLang="x-none" sz="1800" baseline="30000" dirty="0"/>
+                <a:rPr lang="cs-CZ" altLang="x-none" sz="1800" baseline="30000"/>
                 <a:t>+1</a:t>
               </a:r>
-              <a:endParaRPr lang="en-US" altLang="x-none" sz="1800" dirty="0"/>
+              <a:endParaRPr lang="en-US" altLang="x-none" sz="1800"/>
             </a:p>
           </p:txBody>
         </p:sp>
@@ -8754,22 +9115,22 @@
             <a:p>
               <a:pPr eaLnBrk="1" hangingPunct="1"/>
               <a:r>
-                <a:rPr lang="cs-CZ" altLang="x-none" sz="1800" dirty="0"/>
+                <a:rPr lang="cs-CZ" altLang="x-none" sz="1800"/>
                 <a:t>1.921fb5</a:t>
               </a:r>
               <a:r>
-                <a:rPr lang="en-US" sz="1800" dirty="0" err="1"/>
+                <a:rPr lang="en-US" sz="1800" err="1"/>
                 <a:t>ᐧ</a:t>
               </a:r>
               <a:r>
-                <a:rPr lang="cs-CZ" altLang="x-none" sz="1800" dirty="0"/>
+                <a:rPr lang="cs-CZ" altLang="x-none" sz="1800"/>
                 <a:t>2</a:t>
               </a:r>
               <a:r>
-                <a:rPr lang="cs-CZ" altLang="x-none" sz="1800" baseline="30000" dirty="0"/>
+                <a:rPr lang="cs-CZ" altLang="x-none" sz="1800" baseline="30000"/>
                 <a:t>+1</a:t>
               </a:r>
-              <a:endParaRPr lang="en-US" altLang="x-none" sz="1800" dirty="0"/>
+              <a:endParaRPr lang="en-US" altLang="x-none" sz="1800"/>
             </a:p>
           </p:txBody>
         </p:sp>
@@ -8933,26 +9294,26 @@
             <a:p>
               <a:pPr eaLnBrk="1" hangingPunct="1"/>
               <a:r>
-                <a:rPr lang="cs-CZ" altLang="x-none" sz="1800" dirty="0"/>
+                <a:rPr lang="cs-CZ" altLang="x-none" sz="1800"/>
                 <a:t>1.921fb7</a:t>
               </a:r>
               <a:r>
-                <a:rPr lang="en-US" sz="1800" dirty="0" err="1"/>
+                <a:rPr lang="en-US" sz="1800" err="1"/>
                 <a:t>ᐧ</a:t>
               </a:r>
               <a:r>
-                <a:rPr lang="cs-CZ" altLang="x-none" sz="1800" dirty="0"/>
+                <a:rPr lang="cs-CZ" altLang="x-none" sz="1800"/>
                 <a:t>2</a:t>
               </a:r>
               <a:r>
-                <a:rPr lang="cs-CZ" altLang="x-none" sz="1800" baseline="30000" dirty="0"/>
+                <a:rPr lang="cs-CZ" altLang="x-none" sz="1800" baseline="30000"/>
                 <a:t>+1</a:t>
               </a:r>
-              <a:endParaRPr lang="en-US" altLang="x-none" sz="1800" dirty="0"/>
+              <a:endParaRPr lang="en-US" altLang="x-none" sz="1800"/>
             </a:p>
             <a:p>
               <a:pPr eaLnBrk="1" hangingPunct="1"/>
-              <a:endParaRPr lang="en-US" altLang="x-none" sz="1800" dirty="0"/>
+              <a:endParaRPr lang="en-US" altLang="x-none" sz="1800"/>
             </a:p>
           </p:txBody>
         </p:sp>
@@ -9282,7 +9643,7 @@
             <a:p>
               <a:pPr eaLnBrk="1" hangingPunct="1"/>
               <a:r>
-                <a:rPr lang="cs-CZ" altLang="x-none" sz="1800" b="1" dirty="0">
+                <a:rPr lang="cs-CZ" altLang="x-none" sz="1800" b="1">
                   <a:solidFill>
                     <a:srgbClr val="0070C0"/>
                   </a:solidFill>
@@ -9290,7 +9651,7 @@
                 <a:t>1.921fb6</a:t>
               </a:r>
               <a:r>
-                <a:rPr lang="en-US" sz="1800" b="1" dirty="0" err="1">
+                <a:rPr lang="en-US" sz="1800" b="1" err="1">
                   <a:solidFill>
                     <a:srgbClr val="0070C0"/>
                   </a:solidFill>
@@ -9298,7 +9659,7 @@
                 <a:t>ᐧ</a:t>
               </a:r>
               <a:r>
-                <a:rPr lang="cs-CZ" altLang="x-none" sz="1800" b="1" dirty="0">
+                <a:rPr lang="cs-CZ" altLang="x-none" sz="1800" b="1">
                   <a:solidFill>
                     <a:srgbClr val="0070C0"/>
                   </a:solidFill>
@@ -9306,7 +9667,7 @@
                 <a:t>2</a:t>
               </a:r>
               <a:r>
-                <a:rPr lang="cs-CZ" altLang="x-none" sz="1800" b="1" baseline="30000" dirty="0">
+                <a:rPr lang="cs-CZ" altLang="x-none" sz="1800" b="1" baseline="30000">
                   <a:solidFill>
                     <a:srgbClr val="0070C0"/>
                   </a:solidFill>
@@ -9314,7 +9675,7 @@
                 <a:t>+1  (</a:t>
               </a:r>
               <a:r>
-                <a:rPr lang="en-US" altLang="x-none" sz="1800" b="1" dirty="0">
+                <a:rPr lang="en-US" altLang="x-none" sz="1800" b="1">
                   <a:solidFill>
                     <a:srgbClr val="3366FF"/>
                   </a:solidFill>
@@ -9322,7 +9683,7 @@
                 <a:t>0x1.921fb6p+1</a:t>
               </a:r>
               <a:r>
-                <a:rPr lang="en-US" altLang="x-none" sz="1800" b="1" dirty="0">
+                <a:rPr lang="en-US" altLang="x-none" sz="1800" b="1">
                   <a:solidFill>
                     <a:srgbClr val="0070C0"/>
                   </a:solidFill>
@@ -9459,7 +9820,7 @@
               <a:defRPr/>
             </a:pPr>
             <a:r>
-              <a:rPr lang="en-US" b="1" dirty="0">
+              <a:rPr lang="en-US" b="1">
                 <a:ln w="17780" cmpd="sng">
                   <a:solidFill>
                     <a:schemeClr val="accent1">
@@ -9775,7 +10136,7 @@
           <a:lstStyle/>
           <a:p>
             <a:r>
-              <a:rPr lang="en-US" dirty="0"/>
+              <a:rPr lang="en-US"/>
               <a:t>FP on a Computer</a:t>
             </a:r>
           </a:p>
@@ -9808,24 +10169,24 @@
           <a:lstStyle/>
           <a:p>
             <a:r>
-              <a:rPr lang="en-US" dirty="0"/>
+              <a:rPr lang="en-US"/>
               <a:t>FP are well suited to perform arithmetic on a computer</a:t>
             </a:r>
           </a:p>
           <a:p>
             <a:pPr lvl="1"/>
             <a:r>
-              <a:rPr lang="en-US" dirty="0"/>
+              <a:rPr lang="en-US"/>
               <a:t>Since 1985 FP representations and operations are standardized in IEEE754  (</a:t>
             </a:r>
             <a:r>
-              <a:rPr lang="en-US" dirty="0">
+              <a:rPr lang="en-US">
                 <a:hlinkClick r:id="rId2"/>
               </a:rPr>
               <a:t>https://en.wikipedia.org/wiki/IEEE_754</a:t>
             </a:r>
             <a:r>
-              <a:rPr lang="en-US" dirty="0"/>
+              <a:rPr lang="en-US"/>
               <a:t>)</a:t>
             </a:r>
           </a:p>
@@ -9913,7 +10274,7 @@
           <a:lstStyle/>
           <a:p>
             <a:r>
-              <a:rPr lang="en-US" dirty="0"/>
+              <a:rPr lang="en-US"/>
               <a:t>FP binary representations in IEEE754</a:t>
             </a:r>
           </a:p>
@@ -10448,7 +10809,7 @@
           <a:p>
             <a:pPr eaLnBrk="1" hangingPunct="1"/>
             <a:r>
-              <a:rPr lang="en-US" altLang="x-none" dirty="0"/>
+              <a:rPr lang="en-US" altLang="x-none"/>
               <a:t>IEEE 754 representation of single precision FP</a:t>
             </a:r>
           </a:p>
@@ -14757,7 +15118,7 @@
                         <a:buNone/>
                         <a:tabLst/>
                       </a:pPr>
-                      <a:endParaRPr kumimoji="0" lang="en-US" altLang="x-none" sz="1800" b="0" i="0" u="none" strike="noStrike" cap="none" normalizeH="0" baseline="0" dirty="0">
+                      <a:endParaRPr kumimoji="0" lang="en-US" altLang="x-none" sz="1800" b="0" i="0" u="none" strike="noStrike" cap="none" normalizeH="0" baseline="0">
                         <a:ln>
                           <a:noFill/>
                         </a:ln>
@@ -16393,7 +16754,7 @@
           <a:p>
             <a:pPr eaLnBrk="1" hangingPunct="1"/>
             <a:r>
-              <a:rPr lang="is-IS" altLang="x-none" sz="1600" dirty="0">
+              <a:rPr lang="is-IS" altLang="x-none" sz="1600">
                 <a:latin typeface="Lucida Console" charset="0"/>
               </a:rPr>
               <a:t>0.00000000e+00 0x0p+0          00000000000000000000000000000000</a:t>
@@ -16402,7 +16763,7 @@
           <a:p>
             <a:pPr eaLnBrk="1" hangingPunct="1"/>
             <a:r>
-              <a:rPr lang="cs-CZ" altLang="x-none" sz="1600" dirty="0">
+              <a:rPr lang="cs-CZ" altLang="x-none" sz="1600">
                 <a:latin typeface="Lucida Console" charset="0"/>
               </a:rPr>
               <a:t>5.00000000e-01 0x1p-1          00111111000000000000000000000000</a:t>
@@ -16411,7 +16772,7 @@
           <a:p>
             <a:pPr eaLnBrk="1" hangingPunct="1"/>
             <a:r>
-              <a:rPr lang="cs-CZ" altLang="x-none" sz="1600" dirty="0">
+              <a:rPr lang="cs-CZ" altLang="x-none" sz="1600">
                 <a:latin typeface="Lucida Console" charset="0"/>
               </a:rPr>
               <a:t>1.00000000e+00 0x1p+0          00111111100000000000000000000000</a:t>
@@ -16420,7 +16781,7 @@
           <a:p>
             <a:pPr eaLnBrk="1" hangingPunct="1"/>
             <a:r>
-              <a:rPr lang="cs-CZ" altLang="x-none" sz="1600" dirty="0">
+              <a:rPr lang="cs-CZ" altLang="x-none" sz="1600">
                 <a:latin typeface="Lucida Console" charset="0"/>
               </a:rPr>
               <a:t>1.50000000e+00 0x1.8p+0        00111111110000000000000000000000</a:t>
@@ -16429,7 +16790,7 @@
           <a:p>
             <a:pPr eaLnBrk="1" hangingPunct="1"/>
             <a:r>
-              <a:rPr lang="is-IS" altLang="x-none" sz="1600" dirty="0">
+              <a:rPr lang="is-IS" altLang="x-none" sz="1600">
                 <a:latin typeface="Lucida Console" charset="0"/>
               </a:rPr>
               <a:t>2.00000000e+00 0x1p+1          01000000000000000000000000000000</a:t>
@@ -16438,7 +16799,7 @@
           <a:p>
             <a:pPr eaLnBrk="1" hangingPunct="1"/>
             <a:r>
-              <a:rPr lang="is-IS" altLang="x-none" sz="1600" dirty="0">
+              <a:rPr lang="is-IS" altLang="x-none" sz="1600">
                 <a:latin typeface="Lucida Console" charset="0"/>
               </a:rPr>
               <a:t>2.50000000e+00 0x1.4p+1        01000000001000000000000000000000</a:t>
@@ -16447,7 +16808,7 @@
           <a:p>
             <a:pPr eaLnBrk="1" hangingPunct="1"/>
             <a:r>
-              <a:rPr lang="is-IS" altLang="x-none" sz="1600" dirty="0">
+              <a:rPr lang="is-IS" altLang="x-none" sz="1600">
                 <a:latin typeface="Lucida Console" charset="0"/>
               </a:rPr>
               <a:t>3.00000000e+00 0x1.8p+1        01000000010000000000000000000000</a:t>
@@ -16456,7 +16817,7 @@
           <a:p>
             <a:pPr eaLnBrk="1" hangingPunct="1"/>
             <a:r>
-              <a:rPr lang="is-IS" altLang="x-none" sz="1600" dirty="0">
+              <a:rPr lang="is-IS" altLang="x-none" sz="1600">
                 <a:latin typeface="Lucida Console" charset="0"/>
               </a:rPr>
               <a:t>8.00000000e+00 0x1p+3          01000001000000000000000000000000</a:t>
@@ -16465,31 +16826,31 @@
           <a:p>
             <a:pPr eaLnBrk="1" hangingPunct="1"/>
             <a:r>
-              <a:rPr lang="cs-CZ" altLang="x-none" sz="1600" dirty="0">
+              <a:rPr lang="cs-CZ" altLang="x-none" sz="1600">
                 <a:latin typeface="Lucida Console" charset="0"/>
               </a:rPr>
               <a:t>3.14159274e+00 0x1.921fb6p+1   01000000010010010000111111011011</a:t>
             </a:r>
-            <a:endParaRPr lang="is-IS" altLang="x-none" sz="1600" dirty="0">
+            <a:endParaRPr lang="is-IS" altLang="x-none" sz="1600">
               <a:latin typeface="Lucida Console" charset="0"/>
             </a:endParaRPr>
           </a:p>
           <a:p>
             <a:pPr eaLnBrk="1" hangingPunct="1"/>
             <a:r>
-              <a:rPr lang="cs-CZ" altLang="x-none" sz="1600" dirty="0">
+              <a:rPr lang="cs-CZ" altLang="x-none" sz="1600">
                 <a:latin typeface="Lucida Console" charset="0"/>
               </a:rPr>
               <a:t>1.00000001e-01 0x1.99999ap-4   00111101110011001100110011001101</a:t>
             </a:r>
-            <a:endParaRPr lang="is-IS" altLang="x-none" sz="1600" dirty="0">
+            <a:endParaRPr lang="is-IS" altLang="x-none" sz="1600">
               <a:latin typeface="Lucida Console" charset="0"/>
             </a:endParaRPr>
           </a:p>
           <a:p>
             <a:pPr eaLnBrk="1" hangingPunct="1"/>
             <a:r>
-              <a:rPr lang="cs-CZ" altLang="x-none" sz="1600" dirty="0">
+              <a:rPr lang="cs-CZ" altLang="x-none" sz="1600">
                 <a:latin typeface="Lucida Console" charset="0"/>
               </a:rPr>
               <a:t>1.17549435e-38 0x1p-126        00000000100000000000000000000000</a:t>
@@ -16498,7 +16859,7 @@
           <a:p>
             <a:pPr eaLnBrk="1" hangingPunct="1"/>
             <a:r>
-              <a:rPr lang="cs-CZ" altLang="x-none" sz="1600" dirty="0">
+              <a:rPr lang="cs-CZ" altLang="x-none" sz="1600">
                 <a:latin typeface="Lucida Console" charset="0"/>
               </a:rPr>
               <a:t>3.40282347e+38 0x1.fffffep+127 01111111011111111111111111111111</a:t>
@@ -16507,25 +16868,25 @@
           <a:p>
             <a:pPr eaLnBrk="1" hangingPunct="1"/>
             <a:r>
-              <a:rPr lang="cs-CZ" altLang="x-none" sz="1600" dirty="0" err="1">
+              <a:rPr lang="cs-CZ" altLang="x-none" sz="1600" err="1">
                 <a:latin typeface="Lucida Console" charset="0"/>
               </a:rPr>
               <a:t>nan</a:t>
             </a:r>
             <a:r>
-              <a:rPr lang="cs-CZ" altLang="x-none" sz="1600" dirty="0">
+              <a:rPr lang="cs-CZ" altLang="x-none" sz="1600">
                 <a:latin typeface="Lucida Console" charset="0"/>
               </a:rPr>
               <a:t>            </a:t>
             </a:r>
             <a:r>
-              <a:rPr lang="cs-CZ" altLang="x-none" sz="1600" dirty="0" err="1">
+              <a:rPr lang="cs-CZ" altLang="x-none" sz="1600" err="1">
                 <a:latin typeface="Lucida Console" charset="0"/>
               </a:rPr>
               <a:t>nan</a:t>
             </a:r>
             <a:r>
-              <a:rPr lang="cs-CZ" altLang="x-none" sz="1600" dirty="0">
+              <a:rPr lang="cs-CZ" altLang="x-none" sz="1600">
                 <a:latin typeface="Lucida Console" charset="0"/>
               </a:rPr>
               <a:t>             11111111110000000000000000000000</a:t>
@@ -16534,31 +16895,31 @@
           <a:p>
             <a:pPr eaLnBrk="1" hangingPunct="1"/>
             <a:r>
-              <a:rPr lang="cs-CZ" altLang="x-none" sz="1600" dirty="0">
+              <a:rPr lang="cs-CZ" altLang="x-none" sz="1600">
                 <a:latin typeface="Lucida Console" charset="0"/>
               </a:rPr>
               <a:t>-</a:t>
             </a:r>
             <a:r>
-              <a:rPr lang="cs-CZ" altLang="x-none" sz="1600" dirty="0" err="1">
+              <a:rPr lang="cs-CZ" altLang="x-none" sz="1600" err="1">
                 <a:latin typeface="Lucida Console" charset="0"/>
               </a:rPr>
               <a:t>inf</a:t>
             </a:r>
             <a:r>
-              <a:rPr lang="cs-CZ" altLang="x-none" sz="1600" dirty="0">
+              <a:rPr lang="cs-CZ" altLang="x-none" sz="1600">
                 <a:latin typeface="Lucida Console" charset="0"/>
               </a:rPr>
               <a:t>           -</a:t>
             </a:r>
             <a:r>
-              <a:rPr lang="cs-CZ" altLang="x-none" sz="1600" dirty="0" err="1">
+              <a:rPr lang="cs-CZ" altLang="x-none" sz="1600" err="1">
                 <a:latin typeface="Lucida Console" charset="0"/>
               </a:rPr>
               <a:t>inf</a:t>
             </a:r>
             <a:r>
-              <a:rPr lang="cs-CZ" altLang="x-none" sz="1600" dirty="0">
+              <a:rPr lang="cs-CZ" altLang="x-none" sz="1600">
                 <a:latin typeface="Lucida Console" charset="0"/>
               </a:rPr>
               <a:t>            11111111100000000000000000000000</a:t>
@@ -16567,12 +16928,12 @@
           <a:p>
             <a:pPr eaLnBrk="1" hangingPunct="1"/>
             <a:r>
-              <a:rPr lang="is-IS" altLang="x-none" sz="1600" dirty="0">
+              <a:rPr lang="is-IS" altLang="x-none" sz="1600">
                 <a:latin typeface="Lucida Console" charset="0"/>
               </a:rPr>
               <a:t>2.93873588e-39 0x1p-128        00000000001000000000000000000000</a:t>
             </a:r>
-            <a:endParaRPr lang="en-US" altLang="x-none" sz="1600" dirty="0">
+            <a:endParaRPr lang="en-US" altLang="x-none" sz="1600">
               <a:latin typeface="Lucida Console" charset="0"/>
             </a:endParaRPr>
           </a:p>
@@ -16866,7 +17227,7 @@
           <a:lstStyle/>
           <a:p>
             <a:r>
-              <a:rPr lang="en-US" altLang="x-none" dirty="0"/>
+              <a:rPr lang="en-US" altLang="x-none"/>
               <a:t>C++ interlude</a:t>
             </a:r>
           </a:p>
@@ -17490,108 +17851,108 @@
           <a:p>
             <a:pPr eaLnBrk="1" hangingPunct="1"/>
             <a:r>
-              <a:rPr lang="en-US" altLang="x-none" sz="1800" dirty="0"/>
+              <a:rPr lang="en-US" altLang="x-none" sz="1800"/>
               <a:t>#include&lt;iostream&gt;</a:t>
             </a:r>
           </a:p>
           <a:p>
             <a:pPr eaLnBrk="1" hangingPunct="1"/>
             <a:r>
-              <a:rPr lang="en-US" altLang="x-none" sz="1800" dirty="0"/>
+              <a:rPr lang="en-US" altLang="x-none" sz="1800"/>
               <a:t>#include&lt;</a:t>
             </a:r>
             <a:r>
-              <a:rPr lang="en-US" altLang="x-none" sz="1800" dirty="0" err="1"/>
+              <a:rPr lang="en-US" altLang="x-none" sz="1800" err="1"/>
               <a:t>iomanip</a:t>
             </a:r>
             <a:r>
-              <a:rPr lang="en-US" altLang="x-none" sz="1800" dirty="0"/>
+              <a:rPr lang="en-US" altLang="x-none" sz="1800"/>
               <a:t>&gt;</a:t>
             </a:r>
           </a:p>
           <a:p>
             <a:pPr eaLnBrk="1" hangingPunct="1"/>
             <a:r>
-              <a:rPr lang="en-US" altLang="x-none" sz="1800" dirty="0"/>
+              <a:rPr lang="en-US" altLang="x-none" sz="1800"/>
               <a:t>#include&lt;</a:t>
             </a:r>
             <a:r>
-              <a:rPr lang="en-US" altLang="x-none" sz="1800" dirty="0" err="1"/>
+              <a:rPr lang="en-US" altLang="x-none" sz="1800" err="1"/>
               <a:t>cmath</a:t>
             </a:r>
             <a:r>
-              <a:rPr lang="en-US" altLang="x-none" sz="1800" dirty="0"/>
+              <a:rPr lang="en-US" altLang="x-none" sz="1800"/>
               <a:t>&gt;</a:t>
             </a:r>
           </a:p>
           <a:p>
             <a:pPr eaLnBrk="1" hangingPunct="1"/>
             <a:r>
-              <a:rPr lang="en-US" altLang="x-none" sz="1800" dirty="0"/>
+              <a:rPr lang="en-US" altLang="x-none" sz="1800"/>
               <a:t>#include&lt;limits&gt;</a:t>
             </a:r>
           </a:p>
           <a:p>
             <a:pPr eaLnBrk="1" hangingPunct="1"/>
             <a:r>
-              <a:rPr lang="en-US" altLang="x-none" sz="1800" dirty="0"/>
+              <a:rPr lang="en-US" altLang="x-none" sz="1800"/>
               <a:t>//  std style</a:t>
             </a:r>
           </a:p>
           <a:p>
             <a:pPr eaLnBrk="1" hangingPunct="1"/>
             <a:r>
-              <a:rPr lang="en-US" altLang="x-none" sz="1800" dirty="0"/>
+              <a:rPr lang="en-US" altLang="x-none" sz="1800"/>
               <a:t>template&lt;</a:t>
             </a:r>
             <a:r>
-              <a:rPr lang="en-US" altLang="x-none" sz="1800" dirty="0" err="1"/>
+              <a:rPr lang="en-US" altLang="x-none" sz="1800" err="1"/>
               <a:t>typename</a:t>
             </a:r>
             <a:r>
-              <a:rPr lang="en-US" altLang="x-none" sz="1800" dirty="0"/>
+              <a:rPr lang="en-US" altLang="x-none" sz="1800"/>
               <a:t> T&gt;</a:t>
             </a:r>
           </a:p>
           <a:p>
             <a:pPr eaLnBrk="1" hangingPunct="1"/>
             <a:r>
-              <a:rPr lang="en-US" altLang="x-none" sz="1800" dirty="0"/>
+              <a:rPr lang="en-US" altLang="x-none" sz="1800"/>
               <a:t>void print(T x) {          </a:t>
             </a:r>
           </a:p>
           <a:p>
             <a:pPr eaLnBrk="1" hangingPunct="1"/>
             <a:r>
-              <a:rPr lang="en-US" altLang="x-none" sz="1800" dirty="0"/>
+              <a:rPr lang="en-US" altLang="x-none" sz="1800"/>
               <a:t> std::</a:t>
             </a:r>
             <a:r>
-              <a:rPr lang="en-US" altLang="x-none" sz="1800" dirty="0" err="1"/>
+              <a:rPr lang="en-US" altLang="x-none" sz="1800" err="1"/>
               <a:t>cout</a:t>
             </a:r>
             <a:r>
-              <a:rPr lang="en-US" altLang="x-none" sz="1800" dirty="0"/>
+              <a:rPr lang="en-US" altLang="x-none" sz="1800"/>
               <a:t> &lt;&lt; std::</a:t>
             </a:r>
             <a:r>
-              <a:rPr lang="en-US" altLang="x-none" sz="1800" dirty="0" err="1"/>
+              <a:rPr lang="en-US" altLang="x-none" sz="1800" err="1"/>
               <a:t>hexfloat</a:t>
             </a:r>
             <a:r>
-              <a:rPr lang="en-US" altLang="x-none" sz="1800" dirty="0"/>
+              <a:rPr lang="en-US" altLang="x-none" sz="1800"/>
               <a:t> &lt;&lt; x &lt;&lt;' </a:t>
             </a:r>
             <a:r>
-              <a:rPr lang="en-US" altLang="en-US" sz="1800" dirty="0"/>
+              <a:rPr lang="en-US" altLang="en-US" sz="1800"/>
               <a:t>’</a:t>
             </a:r>
             <a:r>
-              <a:rPr lang="en-US" altLang="x-none" sz="1800" dirty="0"/>
+              <a:rPr lang="en-US" altLang="x-none" sz="1800"/>
               <a:t> </a:t>
             </a:r>
             <a:r>
-              <a:rPr lang="en-US" altLang="x-none" sz="1800" dirty="0">
+              <a:rPr lang="en-US" altLang="x-none" sz="1800">
                 <a:solidFill>
                   <a:srgbClr val="FF0000"/>
                 </a:solidFill>
@@ -17602,27 +17963,27 @@
           <a:p>
             <a:pPr eaLnBrk="1" hangingPunct="1"/>
             <a:r>
-              <a:rPr lang="en-US" altLang="x-none" sz="1800" dirty="0"/>
+              <a:rPr lang="en-US" altLang="x-none" sz="1800"/>
               <a:t>                &lt;&lt;  std::scientific &lt;&lt; std::</a:t>
             </a:r>
             <a:r>
-              <a:rPr lang="en-US" altLang="x-none" sz="1800" dirty="0" err="1"/>
+              <a:rPr lang="en-US" altLang="x-none" sz="1800" err="1"/>
               <a:t>setprecision</a:t>
             </a:r>
             <a:r>
-              <a:rPr lang="en-US" altLang="x-none" sz="1800" dirty="0"/>
+              <a:rPr lang="en-US" altLang="x-none" sz="1800"/>
               <a:t>(8) &lt;&lt; x &lt;&lt; ' </a:t>
             </a:r>
             <a:r>
-              <a:rPr lang="en-US" altLang="en-US" sz="1800" dirty="0"/>
+              <a:rPr lang="en-US" altLang="en-US" sz="1800"/>
               <a:t>’</a:t>
             </a:r>
             <a:r>
-              <a:rPr lang="en-US" altLang="x-none" sz="1800" dirty="0"/>
+              <a:rPr lang="en-US" altLang="x-none" sz="1800"/>
               <a:t> </a:t>
             </a:r>
             <a:r>
-              <a:rPr lang="en-US" altLang="x-none" sz="1800" dirty="0">
+              <a:rPr lang="en-US" altLang="x-none" sz="1800">
                 <a:solidFill>
                   <a:srgbClr val="FF0000"/>
                 </a:solidFill>
@@ -17633,27 +17994,27 @@
           <a:p>
             <a:pPr eaLnBrk="1" hangingPunct="1"/>
             <a:r>
-              <a:rPr lang="en-US" altLang="x-none" sz="1800" dirty="0"/>
+              <a:rPr lang="en-US" altLang="x-none" sz="1800"/>
               <a:t>                &lt;&lt;  std::</a:t>
             </a:r>
             <a:r>
-              <a:rPr lang="en-US" altLang="x-none" sz="1800" dirty="0" err="1"/>
+              <a:rPr lang="en-US" altLang="x-none" sz="1800" err="1"/>
               <a:t>defaultfloat</a:t>
             </a:r>
             <a:r>
-              <a:rPr lang="en-US" altLang="x-none" sz="1800" dirty="0"/>
+              <a:rPr lang="en-US" altLang="x-none" sz="1800"/>
               <a:t> &lt;&lt; x &lt;&lt; std::</a:t>
             </a:r>
             <a:r>
-              <a:rPr lang="en-US" altLang="x-none" sz="1800" dirty="0" err="1"/>
+              <a:rPr lang="en-US" altLang="x-none" sz="1800" err="1"/>
               <a:t>endl</a:t>
             </a:r>
             <a:r>
-              <a:rPr lang="en-US" altLang="x-none" sz="1800" dirty="0"/>
+              <a:rPr lang="en-US" altLang="x-none" sz="1800"/>
               <a:t>;    </a:t>
             </a:r>
             <a:r>
-              <a:rPr lang="en-US" altLang="x-none" sz="1800" dirty="0">
+              <a:rPr lang="en-US" altLang="x-none" sz="1800">
                 <a:solidFill>
                   <a:srgbClr val="FF0000"/>
                 </a:solidFill>
@@ -17664,99 +18025,99 @@
           <a:p>
             <a:pPr eaLnBrk="1" hangingPunct="1"/>
             <a:r>
-              <a:rPr lang="en-US" altLang="x-none" sz="1800" dirty="0"/>
+              <a:rPr lang="en-US" altLang="x-none" sz="1800"/>
               <a:t>}</a:t>
             </a:r>
           </a:p>
           <a:p>
             <a:pPr eaLnBrk="1" hangingPunct="1"/>
-            <a:endParaRPr lang="en-US" altLang="x-none" sz="1800" dirty="0"/>
+            <a:endParaRPr lang="en-US" altLang="x-none" sz="1800"/>
           </a:p>
           <a:p>
             <a:pPr eaLnBrk="1" hangingPunct="1"/>
             <a:r>
-              <a:rPr lang="en-US" altLang="x-none" sz="1800" dirty="0"/>
+              <a:rPr lang="en-US" altLang="x-none" sz="1800"/>
               <a:t>// integer representation</a:t>
             </a:r>
           </a:p>
           <a:p>
             <a:pPr eaLnBrk="1" hangingPunct="1"/>
             <a:r>
-              <a:rPr lang="en-US" altLang="x-none" sz="1800" dirty="0"/>
+              <a:rPr lang="en-US" altLang="x-none" sz="1800"/>
               <a:t>#include&lt;</a:t>
             </a:r>
             <a:r>
-              <a:rPr lang="en-US" altLang="x-none" sz="1800" dirty="0" err="1"/>
+              <a:rPr lang="en-US" altLang="x-none" sz="1800" err="1"/>
               <a:t>cstring</a:t>
             </a:r>
             <a:r>
-              <a:rPr lang="en-US" altLang="x-none" sz="1800" dirty="0"/>
+              <a:rPr lang="en-US" altLang="x-none" sz="1800"/>
               <a:t>&gt;</a:t>
             </a:r>
           </a:p>
           <a:p>
             <a:pPr eaLnBrk="1" hangingPunct="1"/>
             <a:r>
-              <a:rPr lang="en-US" altLang="x-none" sz="1800" dirty="0"/>
+              <a:rPr lang="en-US" altLang="x-none" sz="1800"/>
               <a:t>#include&lt;</a:t>
             </a:r>
             <a:r>
-              <a:rPr lang="en-US" altLang="x-none" sz="1800" dirty="0" err="1"/>
+              <a:rPr lang="en-US" altLang="x-none" sz="1800" err="1"/>
               <a:t>bitset</a:t>
             </a:r>
             <a:r>
-              <a:rPr lang="en-US" altLang="x-none" sz="1800" dirty="0"/>
+              <a:rPr lang="en-US" altLang="x-none" sz="1800"/>
               <a:t>&gt;</a:t>
             </a:r>
           </a:p>
           <a:p>
             <a:pPr eaLnBrk="1" hangingPunct="1"/>
             <a:r>
-              <a:rPr lang="en-US" altLang="x-none" sz="1800" dirty="0"/>
+              <a:rPr lang="en-US" altLang="x-none" sz="1800"/>
               <a:t>int f2i(float x) { int </a:t>
             </a:r>
             <a:r>
-              <a:rPr lang="en-US" altLang="x-none" sz="1800" dirty="0" err="1"/>
+              <a:rPr lang="en-US" altLang="x-none" sz="1800" err="1"/>
               <a:t>i</a:t>
             </a:r>
             <a:r>
-              <a:rPr lang="en-US" altLang="x-none" sz="1800" dirty="0"/>
+              <a:rPr lang="en-US" altLang="x-none" sz="1800"/>
               <a:t>; </a:t>
             </a:r>
             <a:r>
-              <a:rPr lang="en-US" altLang="x-none" sz="1800" dirty="0" err="1"/>
+              <a:rPr lang="en-US" altLang="x-none" sz="1800" err="1"/>
               <a:t>memcpy</a:t>
             </a:r>
             <a:r>
-              <a:rPr lang="en-US" altLang="x-none" sz="1800" dirty="0"/>
+              <a:rPr lang="en-US" altLang="x-none" sz="1800"/>
               <a:t>(&amp;</a:t>
             </a:r>
             <a:r>
-              <a:rPr lang="en-US" altLang="x-none" sz="1800" dirty="0" err="1"/>
+              <a:rPr lang="en-US" altLang="x-none" sz="1800" err="1"/>
               <a:t>i</a:t>
             </a:r>
             <a:r>
-              <a:rPr lang="en-US" altLang="x-none" sz="1800" dirty="0"/>
+              <a:rPr lang="en-US" altLang="x-none" sz="1800"/>
               <a:t>,&amp;</a:t>
             </a:r>
             <a:r>
-              <a:rPr lang="en-US" altLang="x-none" sz="1800" dirty="0" err="1"/>
+              <a:rPr lang="en-US" altLang="x-none" sz="1800" err="1"/>
               <a:t>x,sizeof</a:t>
             </a:r>
             <a:r>
-              <a:rPr lang="en-US" altLang="x-none" sz="1800" dirty="0"/>
+              <a:rPr lang="en-US" altLang="x-none" sz="1800"/>
               <a:t>(int)); return </a:t>
             </a:r>
             <a:r>
-              <a:rPr lang="en-US" altLang="x-none" sz="1800" dirty="0" err="1"/>
+              <a:rPr lang="en-US" altLang="x-none" sz="1800" err="1"/>
               <a:t>i</a:t>
             </a:r>
             <a:r>
-              <a:rPr lang="en-US" altLang="x-none" sz="1800" dirty="0"/>
+              <a:rPr lang="en-US" altLang="x-none" sz="1800"/>
               <a:t>;} </a:t>
             </a:r>
             <a:r>
-              <a:rPr lang="en-US" altLang="x-none" sz="1800" dirty="0">
+              <a:rPr lang="en-US" altLang="x-none" sz="1800">
                 <a:solidFill>
                   <a:srgbClr val="FF0000"/>
                 </a:solidFill>
@@ -17767,50 +18128,50 @@
           <a:p>
             <a:pPr eaLnBrk="1" hangingPunct="1"/>
             <a:r>
-              <a:rPr lang="en-US" altLang="x-none" sz="1800" dirty="0"/>
+              <a:rPr lang="en-US" altLang="x-none" sz="1800"/>
               <a:t>//  use </a:t>
             </a:r>
             <a:r>
-              <a:rPr lang="en-US" altLang="x-none" sz="1800" dirty="0" err="1"/>
+              <a:rPr lang="en-US" altLang="x-none" sz="1800" err="1"/>
               <a:t>bitset</a:t>
             </a:r>
             <a:r>
-              <a:rPr lang="en-US" altLang="x-none" sz="1800" dirty="0"/>
+              <a:rPr lang="en-US" altLang="x-none" sz="1800"/>
               <a:t> to print in binary (bit by bit) </a:t>
             </a:r>
           </a:p>
           <a:p>
             <a:pPr eaLnBrk="1" hangingPunct="1"/>
             <a:r>
-              <a:rPr lang="en-US" altLang="x-none" sz="1800" dirty="0"/>
+              <a:rPr lang="en-US" altLang="x-none" sz="1800"/>
               <a:t>std::</a:t>
             </a:r>
             <a:r>
-              <a:rPr lang="en-US" altLang="x-none" sz="1800" dirty="0" err="1"/>
+              <a:rPr lang="en-US" altLang="x-none" sz="1800" err="1"/>
               <a:t>cout</a:t>
             </a:r>
             <a:r>
-              <a:rPr lang="en-US" altLang="x-none" sz="1800" dirty="0"/>
+              <a:rPr lang="en-US" altLang="x-none" sz="1800"/>
               <a:t> &lt;&lt; std::</a:t>
             </a:r>
             <a:r>
-              <a:rPr lang="en-US" altLang="x-none" sz="1800" dirty="0" err="1"/>
+              <a:rPr lang="en-US" altLang="x-none" sz="1800" err="1"/>
               <a:t>bitset</a:t>
             </a:r>
             <a:r>
-              <a:rPr lang="en-US" altLang="x-none" sz="1800" dirty="0"/>
+              <a:rPr lang="en-US" altLang="x-none" sz="1800"/>
               <a:t>&lt;32&gt;(f2i(x)) &lt;&lt; std::</a:t>
             </a:r>
             <a:r>
-              <a:rPr lang="en-US" altLang="x-none" sz="1800" dirty="0" err="1"/>
+              <a:rPr lang="en-US" altLang="x-none" sz="1800" err="1"/>
               <a:t>endl</a:t>
             </a:r>
             <a:r>
-              <a:rPr lang="en-US" altLang="x-none" sz="1800" dirty="0"/>
+              <a:rPr lang="en-US" altLang="x-none" sz="1800"/>
               <a:t>; ;   </a:t>
             </a:r>
             <a:r>
-              <a:rPr lang="en-US" altLang="x-none" sz="1800" dirty="0">
+              <a:rPr lang="en-US" altLang="x-none" sz="1800">
                 <a:solidFill>
                   <a:srgbClr val="FF0000"/>
                 </a:solidFill>

--- a/Slides/FPforScientist.pptx
+++ b/Slides/FPforScientist.pptx
@@ -25,6 +25,9 @@
     <p:sldId id="463" r:id="rId19"/>
     <p:sldId id="464" r:id="rId20"/>
     <p:sldId id="465" r:id="rId21"/>
+    <p:sldId id="466" r:id="rId22"/>
+    <p:sldId id="467" r:id="rId23"/>
+    <p:sldId id="468" r:id="rId24"/>
   </p:sldIdLst>
   <p:sldSz cx="12192000" cy="6858000"/>
   <p:notesSz cx="6858000" cy="9144000"/>
@@ -6458,7 +6461,7 @@
           <a:p>
             <a:r>
               <a:rPr lang="en-US" dirty="0"/>
-              <a:t>Compensating algorithm</a:t>
+              <a:t>Compensating algorithms</a:t>
             </a:r>
           </a:p>
         </p:txBody>
@@ -6479,7 +6482,12 @@
             <p:ph idx="1"/>
           </p:nvPr>
         </p:nvSpPr>
-        <p:spPr/>
+        <p:spPr>
+          <a:xfrm>
+            <a:off x="838200" y="1825625"/>
+            <a:ext cx="10515600" cy="1531266"/>
+          </a:xfrm>
+        </p:spPr>
         <p:txBody>
           <a:bodyPr/>
           <a:lstStyle/>
@@ -6531,8 +6539,8 @@
         </p:nvSpPr>
         <p:spPr bwMode="auto">
           <a:xfrm>
-            <a:off x="838200" y="3429000"/>
-            <a:ext cx="8763000" cy="3046413"/>
+            <a:off x="206098" y="3287851"/>
+            <a:ext cx="3985413" cy="2554545"/>
           </a:xfrm>
           <a:prstGeom prst="rect">
             <a:avLst/>
@@ -6568,7 +6576,7 @@
           </a:effectLst>
         </p:spPr>
         <p:txBody>
-          <a:bodyPr>
+          <a:bodyPr wrap="square">
             <a:spAutoFit/>
           </a:bodyPr>
           <a:lstStyle>
@@ -6681,96 +6689,169 @@
           <a:p>
             <a:pPr eaLnBrk="1" hangingPunct="1"/>
             <a:r>
-              <a:rPr lang="en-US" altLang="en-US" sz="1600" b="1"/>
-              <a:t>T kahanSum(T const * input, size_t n) </a:t>
+              <a:rPr lang="en-US" altLang="en-US" sz="1600" b="1" dirty="0"/>
+              <a:t>T </a:t>
+            </a:r>
+            <a:r>
+              <a:rPr lang="en-US" altLang="en-US" sz="1600" b="1" dirty="0" err="1"/>
+              <a:t>kahanSum</a:t>
+            </a:r>
+            <a:r>
+              <a:rPr lang="en-US" altLang="en-US" sz="1600" b="1" dirty="0"/>
+              <a:t>(T const * input, </a:t>
+            </a:r>
+            <a:r>
+              <a:rPr lang="en-US" altLang="en-US" sz="1600" b="1" dirty="0" err="1"/>
+              <a:t>size_t</a:t>
+            </a:r>
+            <a:r>
+              <a:rPr lang="en-US" altLang="en-US" sz="1600" b="1" dirty="0"/>
+              <a:t> n) { </a:t>
             </a:r>
           </a:p>
           <a:p>
             <a:pPr eaLnBrk="1" hangingPunct="1"/>
             <a:r>
-              <a:rPr lang="en-US" altLang="en-US" sz="1600" b="1"/>
+              <a:rPr lang="en-US" altLang="en-US" sz="1600" b="1" dirty="0"/>
               <a:t>T sum = input[0];</a:t>
             </a:r>
           </a:p>
           <a:p>
             <a:pPr eaLnBrk="1" hangingPunct="1"/>
             <a:r>
-              <a:rPr lang="en-US" altLang="en-US" sz="1600" b="1"/>
-              <a:t>T t = 0.0;          // A running compensation for lost low-order bits. </a:t>
+              <a:rPr lang="en-US" altLang="en-US" sz="1600" b="1" dirty="0"/>
+              <a:t>T t = 0.0;          </a:t>
             </a:r>
           </a:p>
           <a:p>
             <a:pPr eaLnBrk="1" hangingPunct="1"/>
             <a:r>
-              <a:rPr lang="en-US" altLang="en-US" sz="1600" b="1"/>
-              <a:t>for (size_t i = 1; i!=n; ++i)  {  </a:t>
+              <a:rPr lang="en-US" altLang="en-US" sz="1600" b="1" dirty="0"/>
+              <a:t>for (</a:t>
+            </a:r>
+            <a:r>
+              <a:rPr lang="en-US" altLang="en-US" sz="1600" b="1" dirty="0" err="1"/>
+              <a:t>size_t</a:t>
+            </a:r>
+            <a:r>
+              <a:rPr lang="en-US" altLang="en-US" sz="1600" b="1" dirty="0"/>
+              <a:t> </a:t>
+            </a:r>
+            <a:r>
+              <a:rPr lang="en-US" altLang="en-US" sz="1600" b="1" dirty="0" err="1"/>
+              <a:t>i</a:t>
+            </a:r>
+            <a:r>
+              <a:rPr lang="en-US" altLang="en-US" sz="1600" b="1" dirty="0"/>
+              <a:t> = 1; </a:t>
+            </a:r>
+            <a:r>
+              <a:rPr lang="en-US" altLang="en-US" sz="1600" b="1" dirty="0" err="1"/>
+              <a:t>i</a:t>
+            </a:r>
+            <a:r>
+              <a:rPr lang="en-US" altLang="en-US" sz="1600" b="1" dirty="0"/>
+              <a:t>!=n; ++</a:t>
+            </a:r>
+            <a:r>
+              <a:rPr lang="en-US" altLang="en-US" sz="1600" b="1" dirty="0" err="1"/>
+              <a:t>i</a:t>
+            </a:r>
+            <a:r>
+              <a:rPr lang="en-US" altLang="en-US" sz="1600" b="1" dirty="0"/>
+              <a:t>)  {  </a:t>
             </a:r>
           </a:p>
           <a:p>
             <a:pPr eaLnBrk="1" hangingPunct="1"/>
             <a:r>
-              <a:rPr lang="en-US" altLang="en-US" sz="1600" b="1"/>
-              <a:t>  y = input[i] – t;       //  so far, so good: </a:t>
-            </a:r>
-            <a:r>
-              <a:rPr lang="en-US" altLang="en-US" sz="1600" b="1" i="1"/>
-              <a:t>t is zero.  </a:t>
+              <a:rPr lang="en-US" altLang="en-US" sz="1600" b="1" dirty="0"/>
+              <a:t>  y = input[</a:t>
+            </a:r>
+            <a:r>
+              <a:rPr lang="en-US" altLang="en-US" sz="1600" b="1" dirty="0" err="1"/>
+              <a:t>i</a:t>
+            </a:r>
+            <a:r>
+              <a:rPr lang="en-US" altLang="en-US" sz="1600" b="1" dirty="0"/>
+              <a:t>] – t; </a:t>
             </a:r>
           </a:p>
           <a:p>
             <a:pPr eaLnBrk="1" hangingPunct="1"/>
             <a:r>
-              <a:rPr lang="en-US" altLang="en-US" sz="1600" b="1" i="1"/>
-              <a:t>  s = sum + y;         // Alas, sum is big, y small, so low-order digits of y are lost. </a:t>
+              <a:rPr lang="en-US" altLang="en-US" sz="1600" b="1" i="1" dirty="0"/>
+              <a:t>  s = sum + y</a:t>
             </a:r>
           </a:p>
           <a:p>
             <a:pPr eaLnBrk="1" hangingPunct="1"/>
             <a:r>
-              <a:rPr lang="en-US" altLang="en-US" sz="1600" b="1" i="1"/>
-              <a:t>  t = (s - sum) – y;   // ( s - sum) recovers the high-order part of y </a:t>
+              <a:rPr lang="en-US" altLang="en-US" sz="1600" b="1" i="1" dirty="0"/>
+              <a:t>  t = (s - sum) – y;   </a:t>
             </a:r>
           </a:p>
           <a:p>
             <a:pPr eaLnBrk="1" hangingPunct="1"/>
             <a:r>
-              <a:rPr lang="en-US" altLang="en-US" sz="1600" b="1" i="1"/>
-              <a:t>                               // subtracting y recovers -(low part of y)  </a:t>
+              <a:rPr lang="en-US" altLang="en-US" sz="1600" b="1" i="1" dirty="0"/>
+              <a:t>  sum = s;                                    </a:t>
             </a:r>
           </a:p>
           <a:p>
             <a:pPr eaLnBrk="1" hangingPunct="1"/>
             <a:r>
-              <a:rPr lang="en-US" altLang="en-US" sz="1600" b="1" i="1"/>
-              <a:t> sum = s;             //Algebraically, t should always be zero. </a:t>
+              <a:rPr lang="en-US" altLang="en-US" sz="1600" b="1" i="1" dirty="0"/>
+              <a:t>} </a:t>
             </a:r>
           </a:p>
           <a:p>
             <a:pPr eaLnBrk="1" hangingPunct="1"/>
             <a:r>
-              <a:rPr lang="en-US" altLang="en-US" sz="1600" b="1" i="1"/>
-              <a:t>                          // Beware eagerly optimising compilers! </a:t>
-            </a:r>
-          </a:p>
-          <a:p>
-            <a:pPr eaLnBrk="1" hangingPunct="1"/>
-            <a:r>
-              <a:rPr lang="en-US" altLang="en-US" sz="1600" b="1" i="1"/>
-              <a:t> }                      //Next time around, the lost low part will be added to y in a fresh attempt.</a:t>
-            </a:r>
-          </a:p>
-          <a:p>
-            <a:pPr eaLnBrk="1" hangingPunct="1"/>
-            <a:r>
-              <a:rPr lang="en-US" altLang="en-US" sz="1600" b="1" i="1"/>
+              <a:rPr lang="en-US" altLang="en-US" sz="1600" b="1" i="1" dirty="0"/>
               <a:t>return sum;</a:t>
             </a:r>
-            <a:endParaRPr lang="en-US" altLang="en-US" sz="1600" b="1">
+            <a:endParaRPr lang="en-US" altLang="en-US" sz="1600" b="1" dirty="0">
               <a:solidFill>
                 <a:srgbClr val="000000"/>
               </a:solidFill>
               <a:latin typeface="Arial Narrow" panose="020B0604020202020204" pitchFamily="34" charset="0"/>
             </a:endParaRPr>
+          </a:p>
+        </p:txBody>
+      </p:sp>
+      <p:sp>
+        <p:nvSpPr>
+          <p:cNvPr id="5" name="TextBox 4">
+            <a:extLst>
+              <a:ext uri="{FF2B5EF4-FFF2-40B4-BE49-F238E27FC236}">
+                <a16:creationId xmlns:a16="http://schemas.microsoft.com/office/drawing/2014/main" id="{3623E267-73A4-1A4E-36A1-BA2B20C5695B}"/>
+              </a:ext>
+            </a:extLst>
+          </p:cNvPr>
+          <p:cNvSpPr txBox="1"/>
+          <p:nvPr/>
+        </p:nvSpPr>
+        <p:spPr>
+          <a:xfrm>
+            <a:off x="4756108" y="3356891"/>
+            <a:ext cx="4952489" cy="923330"/>
+          </a:xfrm>
+          <a:prstGeom prst="rect">
+            <a:avLst/>
+          </a:prstGeom>
+          <a:noFill/>
+        </p:spPr>
+        <p:txBody>
+          <a:bodyPr wrap="square" rtlCol="0">
+            <a:spAutoFit/>
+          </a:bodyPr>
+          <a:lstStyle/>
+          <a:p>
+            <a:r>
+              <a:rPr lang="en-US" dirty="0"/>
+              <a:t>Improved algorithms exist, mostly handling differently various magnitude ranges (“big”, “medium” and “tiny”) or by (partial) sorting</a:t>
+            </a:r>
           </a:p>
         </p:txBody>
       </p:sp>
@@ -6778,6 +6859,1008 @@
     <p:extLst>
       <p:ext uri="{BB962C8B-B14F-4D97-AF65-F5344CB8AC3E}">
         <p14:creationId xmlns:p14="http://schemas.microsoft.com/office/powerpoint/2010/main" val="1199403217"/>
+      </p:ext>
+    </p:extLst>
+  </p:cSld>
+  <p:clrMapOvr>
+    <a:masterClrMapping/>
+  </p:clrMapOvr>
+</p:sld>
+</file>
+
+<file path=ppt/slides/slide21.xml><?xml version="1.0" encoding="utf-8"?>
+<p:sld xmlns:a="http://schemas.openxmlformats.org/drawingml/2006/main" xmlns:r="http://schemas.openxmlformats.org/officeDocument/2006/relationships" xmlns:p="http://schemas.openxmlformats.org/presentationml/2006/main">
+  <p:cSld>
+    <p:spTree>
+      <p:nvGrpSpPr>
+        <p:cNvPr id="1" name="">
+          <a:extLst>
+            <a:ext uri="{FF2B5EF4-FFF2-40B4-BE49-F238E27FC236}">
+              <a16:creationId xmlns:a16="http://schemas.microsoft.com/office/drawing/2014/main" id="{E9CE9581-E325-5E7E-0859-53684EED8073}"/>
+            </a:ext>
+          </a:extLst>
+        </p:cNvPr>
+        <p:cNvGrpSpPr/>
+        <p:nvPr/>
+      </p:nvGrpSpPr>
+      <p:grpSpPr>
+        <a:xfrm>
+          <a:off x="0" y="0"/>
+          <a:ext cx="0" cy="0"/>
+          <a:chOff x="0" y="0"/>
+          <a:chExt cx="0" cy="0"/>
+        </a:xfrm>
+      </p:grpSpPr>
+      <p:sp>
+        <p:nvSpPr>
+          <p:cNvPr id="4" name="Title 3">
+            <a:extLst>
+              <a:ext uri="{FF2B5EF4-FFF2-40B4-BE49-F238E27FC236}">
+                <a16:creationId xmlns:a16="http://schemas.microsoft.com/office/drawing/2014/main" id="{E9DA1CFB-C459-B481-2D99-2558956DF2B0}"/>
+              </a:ext>
+            </a:extLst>
+          </p:cNvPr>
+          <p:cNvSpPr>
+            <a:spLocks noGrp="1"/>
+          </p:cNvSpPr>
+          <p:nvPr>
+            <p:ph type="title"/>
+          </p:nvPr>
+        </p:nvSpPr>
+        <p:spPr>
+          <a:xfrm>
+            <a:off x="634142" y="2092798"/>
+            <a:ext cx="10515600" cy="1589516"/>
+          </a:xfrm>
+        </p:spPr>
+        <p:txBody>
+          <a:bodyPr>
+            <a:normAutofit/>
+          </a:bodyPr>
+          <a:lstStyle/>
+          <a:p>
+            <a:pPr algn="ctr"/>
+            <a:r>
+              <a:rPr lang="en-US" sz="9600">
+                <a:solidFill>
+                  <a:srgbClr val="FF0000"/>
+                </a:solidFill>
+                <a:highlight>
+                  <a:srgbClr val="FFFF00"/>
+                </a:highlight>
+              </a:rPr>
+              <a:t>EXERCISES</a:t>
+            </a:r>
+          </a:p>
+        </p:txBody>
+      </p:sp>
+      <p:sp>
+        <p:nvSpPr>
+          <p:cNvPr id="5" name="Text Placeholder 4">
+            <a:extLst>
+              <a:ext uri="{FF2B5EF4-FFF2-40B4-BE49-F238E27FC236}">
+                <a16:creationId xmlns:a16="http://schemas.microsoft.com/office/drawing/2014/main" id="{C9F988BC-AA84-EA5B-1D5E-2B46A6087546}"/>
+              </a:ext>
+            </a:extLst>
+          </p:cNvPr>
+          <p:cNvSpPr>
+            <a:spLocks noGrp="1"/>
+          </p:cNvSpPr>
+          <p:nvPr>
+            <p:ph type="body" idx="1"/>
+          </p:nvPr>
+        </p:nvSpPr>
+        <p:spPr>
+          <a:xfrm>
+            <a:off x="838200" y="4033409"/>
+            <a:ext cx="10515600" cy="1500187"/>
+          </a:xfrm>
+        </p:spPr>
+        <p:txBody>
+          <a:bodyPr>
+            <a:normAutofit fontScale="77500" lnSpcReduction="20000"/>
+          </a:bodyPr>
+          <a:lstStyle/>
+          <a:p>
+            <a:r>
+              <a:rPr lang="en-US"/>
+              <a:t>Either in Python or C++</a:t>
+            </a:r>
+          </a:p>
+          <a:p>
+            <a:endParaRPr lang="en-US"/>
+          </a:p>
+          <a:p>
+            <a:r>
+              <a:rPr lang="en-US"/>
+              <a:t>For C++ one can use </a:t>
+            </a:r>
+            <a:r>
+              <a:rPr lang="en-US" err="1"/>
+              <a:t>godbolt</a:t>
+            </a:r>
+            <a:r>
+              <a:rPr lang="en-US"/>
+              <a:t> (</a:t>
+            </a:r>
+            <a:r>
+              <a:rPr lang="en-US">
+                <a:hlinkClick r:id="rId2"/>
+              </a:rPr>
+              <a:t>https://godbolt.org/z/d1e18j3jK</a:t>
+            </a:r>
+            <a:r>
+              <a:rPr lang="en-US"/>
+              <a:t>  ) </a:t>
+            </a:r>
+          </a:p>
+          <a:p>
+            <a:r>
+              <a:rPr lang="en-US"/>
+              <a:t>For Python either a python3 shell on your PC, or a </a:t>
+            </a:r>
+            <a:r>
+              <a:rPr lang="en-US" err="1"/>
+              <a:t>jupyter</a:t>
+            </a:r>
+            <a:r>
+              <a:rPr lang="en-US"/>
+              <a:t> notebook or the browser shell in </a:t>
+            </a:r>
+            <a:r>
+              <a:rPr lang="en-US">
+                <a:hlinkClick r:id="rId3"/>
+              </a:rPr>
+              <a:t>https://numpy.org/</a:t>
+            </a:r>
+            <a:endParaRPr lang="en-US"/>
+          </a:p>
+          <a:p>
+            <a:endParaRPr lang="en-US"/>
+          </a:p>
+        </p:txBody>
+      </p:sp>
+    </p:spTree>
+    <p:extLst>
+      <p:ext uri="{BB962C8B-B14F-4D97-AF65-F5344CB8AC3E}">
+        <p14:creationId xmlns:p14="http://schemas.microsoft.com/office/powerpoint/2010/main" val="2176430983"/>
+      </p:ext>
+    </p:extLst>
+  </p:cSld>
+  <p:clrMapOvr>
+    <a:masterClrMapping/>
+  </p:clrMapOvr>
+</p:sld>
+</file>
+
+<file path=ppt/slides/slide22.xml><?xml version="1.0" encoding="utf-8"?>
+<p:sld xmlns:a="http://schemas.openxmlformats.org/drawingml/2006/main" xmlns:r="http://schemas.openxmlformats.org/officeDocument/2006/relationships" xmlns:p="http://schemas.openxmlformats.org/presentationml/2006/main">
+  <p:cSld>
+    <p:spTree>
+      <p:nvGrpSpPr>
+        <p:cNvPr id="1" name=""/>
+        <p:cNvGrpSpPr/>
+        <p:nvPr/>
+      </p:nvGrpSpPr>
+      <p:grpSpPr>
+        <a:xfrm>
+          <a:off x="0" y="0"/>
+          <a:ext cx="0" cy="0"/>
+          <a:chOff x="0" y="0"/>
+          <a:chExt cx="0" cy="0"/>
+        </a:xfrm>
+      </p:grpSpPr>
+      <p:sp>
+        <p:nvSpPr>
+          <p:cNvPr id="5" name="Content Placeholder 4">
+            <a:extLst>
+              <a:ext uri="{FF2B5EF4-FFF2-40B4-BE49-F238E27FC236}">
+                <a16:creationId xmlns:a16="http://schemas.microsoft.com/office/drawing/2014/main" id="{97EAC43B-26A5-792A-9D83-2D4F75A3F27E}"/>
+              </a:ext>
+            </a:extLst>
+          </p:cNvPr>
+          <p:cNvSpPr>
+            <a:spLocks noGrp="1"/>
+          </p:cNvSpPr>
+          <p:nvPr>
+            <p:ph idx="4294967295"/>
+          </p:nvPr>
+        </p:nvSpPr>
+        <p:spPr>
+          <a:xfrm>
+            <a:off x="530492" y="541337"/>
+            <a:ext cx="10515600" cy="2887663"/>
+          </a:xfrm>
+        </p:spPr>
+        <p:txBody>
+          <a:bodyPr>
+            <a:normAutofit fontScale="92500" lnSpcReduction="10000"/>
+          </a:bodyPr>
+          <a:lstStyle/>
+          <a:p>
+            <a:r>
+              <a:rPr lang="en-US" dirty="0"/>
+              <a:t>Sum T(0.1) 10000 times in binary32, binary64, decimal2, decimal5</a:t>
+            </a:r>
+          </a:p>
+          <a:p>
+            <a:pPr lvl="1"/>
+            <a:r>
+              <a:rPr lang="en-US" dirty="0"/>
+              <a:t>Google for “patriot failure”</a:t>
+            </a:r>
+          </a:p>
+          <a:p>
+            <a:r>
+              <a:rPr lang="en-US" dirty="0"/>
+              <a:t>Sum 10</a:t>
+            </a:r>
+            <a:r>
+              <a:rPr lang="en-US" baseline="30000" dirty="0"/>
+              <a:t>9</a:t>
+            </a:r>
+            <a:r>
+              <a:rPr lang="en-US" dirty="0"/>
+              <a:t> positive random numbers (in range   10</a:t>
+            </a:r>
+            <a:r>
+              <a:rPr lang="en-US" baseline="30000" dirty="0"/>
+              <a:t>-n</a:t>
+            </a:r>
+            <a:r>
+              <a:rPr lang="en-US" dirty="0"/>
+              <a:t>, 10</a:t>
+            </a:r>
+            <a:r>
+              <a:rPr lang="en-US" baseline="30000" dirty="0"/>
+              <a:t>+n</a:t>
+            </a:r>
+            <a:r>
+              <a:rPr lang="en-US" dirty="0"/>
+              <a:t> )</a:t>
+            </a:r>
+          </a:p>
+          <a:p>
+            <a:pPr lvl="1"/>
+            <a:r>
+              <a:rPr lang="en-US" dirty="0"/>
+              <a:t>Typical in </a:t>
+            </a:r>
+            <a:r>
+              <a:rPr lang="en-US" dirty="0" err="1"/>
+              <a:t>unbinned</a:t>
+            </a:r>
+            <a:r>
+              <a:rPr lang="en-US" dirty="0"/>
+              <a:t> log-</a:t>
+            </a:r>
+            <a:r>
+              <a:rPr lang="en-US" dirty="0" err="1"/>
+              <a:t>likehood</a:t>
+            </a:r>
+            <a:endParaRPr lang="en-US" dirty="0"/>
+          </a:p>
+          <a:p>
+            <a:r>
+              <a:rPr lang="en-US" dirty="0"/>
+              <a:t>Compute the average age of all humans on earth</a:t>
+            </a:r>
+          </a:p>
+          <a:p>
+            <a:endParaRPr lang="en-US" dirty="0"/>
+          </a:p>
+          <a:p>
+            <a:r>
+              <a:rPr lang="en-US" dirty="0"/>
+              <a:t>Compute π as the integral of 4/(1+x</a:t>
+            </a:r>
+            <a:r>
+              <a:rPr lang="en-US" baseline="30000" dirty="0"/>
+              <a:t>2</a:t>
+            </a:r>
+            <a:r>
+              <a:rPr lang="en-US" dirty="0"/>
+              <a:t>) between 0 and 1</a:t>
+            </a:r>
+            <a:endParaRPr lang="en-US" baseline="30000" dirty="0"/>
+          </a:p>
+        </p:txBody>
+      </p:sp>
+      <p:pic>
+        <p:nvPicPr>
+          <p:cNvPr id="6" name="Picture 5">
+            <a:extLst>
+              <a:ext uri="{FF2B5EF4-FFF2-40B4-BE49-F238E27FC236}">
+                <a16:creationId xmlns:a16="http://schemas.microsoft.com/office/drawing/2014/main" id="{69D55FF4-1135-3B72-0E12-51A04E264779}"/>
+              </a:ext>
+            </a:extLst>
+          </p:cNvPr>
+          <p:cNvPicPr>
+            <a:picLocks noChangeAspect="1"/>
+          </p:cNvPicPr>
+          <p:nvPr/>
+        </p:nvPicPr>
+        <p:blipFill>
+          <a:blip r:embed="rId2"/>
+          <a:stretch>
+            <a:fillRect/>
+          </a:stretch>
+        </p:blipFill>
+        <p:spPr>
+          <a:xfrm>
+            <a:off x="702087" y="3613194"/>
+            <a:ext cx="4630750" cy="2891830"/>
+          </a:xfrm>
+          <a:prstGeom prst="rect">
+            <a:avLst/>
+          </a:prstGeom>
+        </p:spPr>
+      </p:pic>
+      <p:pic>
+        <p:nvPicPr>
+          <p:cNvPr id="7" name="Picture 6">
+            <a:extLst>
+              <a:ext uri="{FF2B5EF4-FFF2-40B4-BE49-F238E27FC236}">
+                <a16:creationId xmlns:a16="http://schemas.microsoft.com/office/drawing/2014/main" id="{87F7091E-0E56-FB7A-8067-4CBEA073965E}"/>
+              </a:ext>
+            </a:extLst>
+          </p:cNvPr>
+          <p:cNvPicPr>
+            <a:picLocks noChangeAspect="1"/>
+          </p:cNvPicPr>
+          <p:nvPr/>
+        </p:nvPicPr>
+        <p:blipFill>
+          <a:blip r:embed="rId3"/>
+          <a:stretch>
+            <a:fillRect/>
+          </a:stretch>
+        </p:blipFill>
+        <p:spPr>
+          <a:xfrm>
+            <a:off x="6266627" y="3515270"/>
+            <a:ext cx="4203603" cy="3172345"/>
+          </a:xfrm>
+          <a:prstGeom prst="rect">
+            <a:avLst/>
+          </a:prstGeom>
+        </p:spPr>
+      </p:pic>
+    </p:spTree>
+    <p:extLst>
+      <p:ext uri="{BB962C8B-B14F-4D97-AF65-F5344CB8AC3E}">
+        <p14:creationId xmlns:p14="http://schemas.microsoft.com/office/powerpoint/2010/main" val="3956750112"/>
+      </p:ext>
+    </p:extLst>
+  </p:cSld>
+  <p:clrMapOvr>
+    <a:masterClrMapping/>
+  </p:clrMapOvr>
+</p:sld>
+</file>
+
+<file path=ppt/slides/slide23.xml><?xml version="1.0" encoding="utf-8"?>
+<p:sld xmlns:a="http://schemas.openxmlformats.org/drawingml/2006/main" xmlns:r="http://schemas.openxmlformats.org/officeDocument/2006/relationships" xmlns:p="http://schemas.openxmlformats.org/presentationml/2006/main">
+  <p:cSld>
+    <p:spTree>
+      <p:nvGrpSpPr>
+        <p:cNvPr id="1" name=""/>
+        <p:cNvGrpSpPr/>
+        <p:nvPr/>
+      </p:nvGrpSpPr>
+      <p:grpSpPr>
+        <a:xfrm>
+          <a:off x="0" y="0"/>
+          <a:ext cx="0" cy="0"/>
+          <a:chOff x="0" y="0"/>
+          <a:chExt cx="0" cy="0"/>
+        </a:xfrm>
+      </p:grpSpPr>
+      <p:sp>
+        <p:nvSpPr>
+          <p:cNvPr id="2" name="Title 1">
+            <a:extLst>
+              <a:ext uri="{FF2B5EF4-FFF2-40B4-BE49-F238E27FC236}">
+                <a16:creationId xmlns:a16="http://schemas.microsoft.com/office/drawing/2014/main" id="{406E20AA-B625-0B63-9F2F-C72BE2EA535E}"/>
+              </a:ext>
+            </a:extLst>
+          </p:cNvPr>
+          <p:cNvSpPr>
+            <a:spLocks noGrp="1"/>
+          </p:cNvSpPr>
+          <p:nvPr>
+            <p:ph type="title"/>
+          </p:nvPr>
+        </p:nvSpPr>
+        <p:spPr>
+          <a:xfrm>
+            <a:off x="838200" y="0"/>
+            <a:ext cx="10515600" cy="1325563"/>
+          </a:xfrm>
+        </p:spPr>
+        <p:txBody>
+          <a:bodyPr/>
+          <a:lstStyle/>
+          <a:p>
+            <a:r>
+              <a:rPr lang="en-US" dirty="0"/>
+              <a:t>FMA: Fused Multiple Add</a:t>
+            </a:r>
+          </a:p>
+        </p:txBody>
+      </p:sp>
+      <p:sp>
+        <p:nvSpPr>
+          <p:cNvPr id="3" name="Content Placeholder 2">
+            <a:extLst>
+              <a:ext uri="{FF2B5EF4-FFF2-40B4-BE49-F238E27FC236}">
+                <a16:creationId xmlns:a16="http://schemas.microsoft.com/office/drawing/2014/main" id="{622866DD-121A-7352-FBC1-5EB3685E6622}"/>
+              </a:ext>
+            </a:extLst>
+          </p:cNvPr>
+          <p:cNvSpPr>
+            <a:spLocks noGrp="1"/>
+          </p:cNvSpPr>
+          <p:nvPr>
+            <p:ph idx="1"/>
+          </p:nvPr>
+        </p:nvSpPr>
+        <p:spPr>
+          <a:xfrm>
+            <a:off x="838200" y="1310125"/>
+            <a:ext cx="10515600" cy="3550309"/>
+          </a:xfrm>
+        </p:spPr>
+        <p:txBody>
+          <a:bodyPr>
+            <a:normAutofit lnSpcReduction="10000"/>
+          </a:bodyPr>
+          <a:lstStyle/>
+          <a:p>
+            <a:r>
+              <a:rPr lang="en-US" dirty="0"/>
+              <a:t>Also known as MAC (multiply accumulate) instruction on AMD</a:t>
+            </a:r>
+          </a:p>
+          <a:p>
+            <a:r>
+              <a:rPr lang="en-US" dirty="0" err="1"/>
+              <a:t>fma</a:t>
+            </a:r>
+            <a:r>
+              <a:rPr lang="en-US" dirty="0"/>
+              <a:t>(</a:t>
+            </a:r>
+            <a:r>
+              <a:rPr lang="en-US" dirty="0" err="1"/>
+              <a:t>a,b,c</a:t>
+            </a:r>
+            <a:r>
+              <a:rPr lang="en-US" dirty="0"/>
+              <a:t>) computes the correctly rounded result of a*</a:t>
+            </a:r>
+            <a:r>
+              <a:rPr lang="en-US" dirty="0" err="1"/>
+              <a:t>b+c</a:t>
+            </a:r>
+            <a:endParaRPr lang="en-US" dirty="0"/>
+          </a:p>
+          <a:p>
+            <a:pPr lvl="1"/>
+            <a:r>
+              <a:rPr lang="en-US" dirty="0"/>
+              <a:t>It improves speed and precision in many computation such as linear algebra</a:t>
+            </a:r>
+          </a:p>
+          <a:p>
+            <a:pPr lvl="1"/>
+            <a:r>
+              <a:rPr lang="en-US" dirty="0"/>
+              <a:t>No standard on how to “contract” expression (depends on compiler)</a:t>
+            </a:r>
+          </a:p>
+          <a:p>
+            <a:pPr lvl="2"/>
+            <a:r>
+              <a:rPr lang="en-US" dirty="0"/>
+              <a:t>a*</a:t>
+            </a:r>
+            <a:r>
+              <a:rPr lang="en-US" dirty="0" err="1"/>
+              <a:t>b+c</a:t>
+            </a:r>
+            <a:r>
+              <a:rPr lang="en-US" dirty="0"/>
+              <a:t>*d ,  </a:t>
+            </a:r>
+            <a:r>
+              <a:rPr lang="en-US" dirty="0" err="1"/>
+              <a:t>a+b</a:t>
+            </a:r>
+            <a:r>
+              <a:rPr lang="en-US" dirty="0"/>
+              <a:t>*</a:t>
+            </a:r>
+            <a:r>
+              <a:rPr lang="en-US" dirty="0" err="1"/>
+              <a:t>c+d</a:t>
+            </a:r>
+            <a:r>
+              <a:rPr lang="en-US" dirty="0"/>
+              <a:t> , x*=</a:t>
+            </a:r>
+            <a:r>
+              <a:rPr lang="en-US" dirty="0" err="1"/>
+              <a:t>a;x</a:t>
+            </a:r>
+            <a:r>
+              <a:rPr lang="en-US" dirty="0"/>
+              <a:t>+=b ,  </a:t>
+            </a:r>
+            <a:r>
+              <a:rPr lang="en-US" dirty="0" err="1"/>
+              <a:t>etc</a:t>
+            </a:r>
+            <a:endParaRPr lang="en-US" dirty="0"/>
+          </a:p>
+          <a:p>
+            <a:pPr lvl="1"/>
+            <a:r>
+              <a:rPr lang="en-US" dirty="0"/>
+              <a:t>It clearly introduces asymmetries </a:t>
+            </a:r>
+          </a:p>
+          <a:p>
+            <a:pPr lvl="2"/>
+            <a:r>
+              <a:rPr lang="en-US" dirty="0"/>
+              <a:t>for instance  a*</a:t>
+            </a:r>
+            <a:r>
+              <a:rPr lang="en-US" dirty="0" err="1"/>
+              <a:t>b+c</a:t>
+            </a:r>
+            <a:r>
+              <a:rPr lang="en-US" dirty="0"/>
+              <a:t>*d ≠ c*</a:t>
+            </a:r>
+            <a:r>
+              <a:rPr lang="en-US" dirty="0" err="1"/>
+              <a:t>d+a</a:t>
+            </a:r>
+            <a:r>
+              <a:rPr lang="en-US" dirty="0"/>
+              <a:t>*b</a:t>
+            </a:r>
+          </a:p>
+          <a:p>
+            <a:r>
+              <a:rPr lang="en-US" dirty="0"/>
+              <a:t>Kahan comes to the rescue again with his algorithm</a:t>
+            </a:r>
+          </a:p>
+          <a:p>
+            <a:pPr marL="914400" lvl="2" indent="0">
+              <a:buNone/>
+            </a:pPr>
+            <a:r>
+              <a:rPr lang="en-US" dirty="0"/>
+              <a:t> </a:t>
+            </a:r>
+          </a:p>
+        </p:txBody>
+      </p:sp>
+      <p:sp>
+        <p:nvSpPr>
+          <p:cNvPr id="4" name="TextBox 3">
+            <a:extLst>
+              <a:ext uri="{FF2B5EF4-FFF2-40B4-BE49-F238E27FC236}">
+                <a16:creationId xmlns:a16="http://schemas.microsoft.com/office/drawing/2014/main" id="{A77EF3BD-4D64-9993-8C80-6011D1A0EAA1}"/>
+              </a:ext>
+            </a:extLst>
+          </p:cNvPr>
+          <p:cNvSpPr txBox="1">
+            <a:spLocks noChangeArrowheads="1"/>
+          </p:cNvSpPr>
+          <p:nvPr/>
+        </p:nvSpPr>
+        <p:spPr bwMode="auto">
+          <a:xfrm>
+            <a:off x="911843" y="4565174"/>
+            <a:ext cx="6612012" cy="1815882"/>
+          </a:xfrm>
+          <a:prstGeom prst="rect">
+            <a:avLst/>
+          </a:prstGeom>
+          <a:gradFill rotWithShape="1">
+            <a:gsLst>
+              <a:gs pos="0">
+                <a:srgbClr val="FFFFDC"/>
+              </a:gs>
+              <a:gs pos="64999">
+                <a:srgbClr val="FFFFAC"/>
+              </a:gs>
+              <a:gs pos="100000">
+                <a:srgbClr val="FFFF88"/>
+              </a:gs>
+            </a:gsLst>
+            <a:lin ang="5400000" scaled="1"/>
+          </a:gradFill>
+          <a:ln w="9525">
+            <a:solidFill>
+              <a:srgbClr val="FADD4D"/>
+            </a:solidFill>
+            <a:miter lim="800000"/>
+            <a:headEnd/>
+            <a:tailEnd/>
+          </a:ln>
+          <a:effectLst>
+            <a:outerShdw blurRad="40000" dist="20000" dir="5400000" rotWithShape="0">
+              <a:srgbClr val="808080">
+                <a:alpha val="37999"/>
+              </a:srgbClr>
+            </a:outerShdw>
+          </a:effectLst>
+        </p:spPr>
+        <p:txBody>
+          <a:bodyPr wrap="square">
+            <a:spAutoFit/>
+          </a:bodyPr>
+          <a:lstStyle>
+            <a:lvl1pPr eaLnBrk="0" hangingPunct="0">
+              <a:defRPr sz="2400">
+                <a:solidFill>
+                  <a:schemeClr val="tx1"/>
+                </a:solidFill>
+                <a:latin typeface="Arial" panose="020B0604020202020204" pitchFamily="34" charset="0"/>
+                <a:ea typeface="ＭＳ Ｐゴシック" panose="020B0600070205080204" pitchFamily="34" charset="-128"/>
+              </a:defRPr>
+            </a:lvl1pPr>
+            <a:lvl2pPr marL="742950" indent="-285750" eaLnBrk="0" hangingPunct="0">
+              <a:defRPr sz="2400">
+                <a:solidFill>
+                  <a:schemeClr val="tx1"/>
+                </a:solidFill>
+                <a:latin typeface="Arial" panose="020B0604020202020204" pitchFamily="34" charset="0"/>
+                <a:ea typeface="ＭＳ Ｐゴシック" panose="020B0600070205080204" pitchFamily="34" charset="-128"/>
+              </a:defRPr>
+            </a:lvl2pPr>
+            <a:lvl3pPr marL="1143000" indent="-228600" eaLnBrk="0" hangingPunct="0">
+              <a:defRPr sz="2400">
+                <a:solidFill>
+                  <a:schemeClr val="tx1"/>
+                </a:solidFill>
+                <a:latin typeface="Arial" panose="020B0604020202020204" pitchFamily="34" charset="0"/>
+                <a:ea typeface="ＭＳ Ｐゴシック" panose="020B0600070205080204" pitchFamily="34" charset="-128"/>
+              </a:defRPr>
+            </a:lvl3pPr>
+            <a:lvl4pPr marL="1600200" indent="-228600" eaLnBrk="0" hangingPunct="0">
+              <a:defRPr sz="2400">
+                <a:solidFill>
+                  <a:schemeClr val="tx1"/>
+                </a:solidFill>
+                <a:latin typeface="Arial" panose="020B0604020202020204" pitchFamily="34" charset="0"/>
+                <a:ea typeface="ＭＳ Ｐゴシック" panose="020B0600070205080204" pitchFamily="34" charset="-128"/>
+              </a:defRPr>
+            </a:lvl4pPr>
+            <a:lvl5pPr marL="2057400" indent="-228600" eaLnBrk="0" hangingPunct="0">
+              <a:defRPr sz="2400">
+                <a:solidFill>
+                  <a:schemeClr val="tx1"/>
+                </a:solidFill>
+                <a:latin typeface="Arial" panose="020B0604020202020204" pitchFamily="34" charset="0"/>
+                <a:ea typeface="ＭＳ Ｐゴシック" panose="020B0600070205080204" pitchFamily="34" charset="-128"/>
+              </a:defRPr>
+            </a:lvl5pPr>
+            <a:lvl6pPr marL="2514600" indent="-228600" eaLnBrk="0" fontAlgn="base" hangingPunct="0">
+              <a:spcBef>
+                <a:spcPct val="0"/>
+              </a:spcBef>
+              <a:spcAft>
+                <a:spcPct val="0"/>
+              </a:spcAft>
+              <a:defRPr sz="2400">
+                <a:solidFill>
+                  <a:schemeClr val="tx1"/>
+                </a:solidFill>
+                <a:latin typeface="Arial" panose="020B0604020202020204" pitchFamily="34" charset="0"/>
+                <a:ea typeface="ＭＳ Ｐゴシック" panose="020B0600070205080204" pitchFamily="34" charset="-128"/>
+              </a:defRPr>
+            </a:lvl6pPr>
+            <a:lvl7pPr marL="2971800" indent="-228600" eaLnBrk="0" fontAlgn="base" hangingPunct="0">
+              <a:spcBef>
+                <a:spcPct val="0"/>
+              </a:spcBef>
+              <a:spcAft>
+                <a:spcPct val="0"/>
+              </a:spcAft>
+              <a:defRPr sz="2400">
+                <a:solidFill>
+                  <a:schemeClr val="tx1"/>
+                </a:solidFill>
+                <a:latin typeface="Arial" panose="020B0604020202020204" pitchFamily="34" charset="0"/>
+                <a:ea typeface="ＭＳ Ｐゴシック" panose="020B0600070205080204" pitchFamily="34" charset="-128"/>
+              </a:defRPr>
+            </a:lvl7pPr>
+            <a:lvl8pPr marL="3429000" indent="-228600" eaLnBrk="0" fontAlgn="base" hangingPunct="0">
+              <a:spcBef>
+                <a:spcPct val="0"/>
+              </a:spcBef>
+              <a:spcAft>
+                <a:spcPct val="0"/>
+              </a:spcAft>
+              <a:defRPr sz="2400">
+                <a:solidFill>
+                  <a:schemeClr val="tx1"/>
+                </a:solidFill>
+                <a:latin typeface="Arial" panose="020B0604020202020204" pitchFamily="34" charset="0"/>
+                <a:ea typeface="ＭＳ Ｐゴシック" panose="020B0600070205080204" pitchFamily="34" charset="-128"/>
+              </a:defRPr>
+            </a:lvl8pPr>
+            <a:lvl9pPr marL="3886200" indent="-228600" eaLnBrk="0" fontAlgn="base" hangingPunct="0">
+              <a:spcBef>
+                <a:spcPct val="0"/>
+              </a:spcBef>
+              <a:spcAft>
+                <a:spcPct val="0"/>
+              </a:spcAft>
+              <a:defRPr sz="2400">
+                <a:solidFill>
+                  <a:schemeClr val="tx1"/>
+                </a:solidFill>
+                <a:latin typeface="Arial" panose="020B0604020202020204" pitchFamily="34" charset="0"/>
+                <a:ea typeface="ＭＳ Ｐゴシック" panose="020B0600070205080204" pitchFamily="34" charset="-128"/>
+              </a:defRPr>
+            </a:lvl9pPr>
+          </a:lstStyle>
+          <a:p>
+            <a:pPr eaLnBrk="1" hangingPunct="1"/>
+            <a:r>
+              <a:rPr lang="en-US" altLang="en-US" sz="1600" dirty="0">
+                <a:solidFill>
+                  <a:srgbClr val="000000"/>
+                </a:solidFill>
+                <a:latin typeface="Arial Unicode MS" panose="020B0604020202020204" pitchFamily="34" charset="-128"/>
+                <a:ea typeface="Courier 10 Pitch"/>
+              </a:rPr>
+              <a:t>T </a:t>
+            </a:r>
+            <a:r>
+              <a:rPr lang="en-US" altLang="en-US" sz="1600" dirty="0" err="1">
+                <a:solidFill>
+                  <a:srgbClr val="000000"/>
+                </a:solidFill>
+                <a:latin typeface="Arial Unicode MS" panose="020B0604020202020204" pitchFamily="34" charset="-128"/>
+                <a:ea typeface="Courier 10 Pitch"/>
+              </a:rPr>
+              <a:t>kahan_det</a:t>
+            </a:r>
+            <a:r>
+              <a:rPr lang="en-US" altLang="en-US" sz="1600" dirty="0">
+                <a:solidFill>
+                  <a:srgbClr val="000000"/>
+                </a:solidFill>
+                <a:latin typeface="Arial Unicode MS" panose="020B0604020202020204" pitchFamily="34" charset="-128"/>
+                <a:ea typeface="Courier 10 Pitch"/>
+              </a:rPr>
+              <a:t>(T a, T b, T c, T d) { // a*d-b*c</a:t>
+            </a:r>
+          </a:p>
+          <a:p>
+            <a:pPr eaLnBrk="1" hangingPunct="1"/>
+            <a:r>
+              <a:rPr lang="en-US" altLang="en-US" sz="1600" dirty="0">
+                <a:solidFill>
+                  <a:srgbClr val="000000"/>
+                </a:solidFill>
+                <a:latin typeface="Arial Unicode MS" panose="020B0604020202020204" pitchFamily="34" charset="-128"/>
+                <a:ea typeface="Courier 10 Pitch"/>
+              </a:rPr>
+              <a:t>   using std::</a:t>
+            </a:r>
+            <a:r>
+              <a:rPr lang="en-US" altLang="en-US" sz="1600" dirty="0" err="1">
+                <a:solidFill>
+                  <a:srgbClr val="000000"/>
+                </a:solidFill>
+                <a:latin typeface="Arial Unicode MS" panose="020B0604020202020204" pitchFamily="34" charset="-128"/>
+                <a:ea typeface="Courier 10 Pitch"/>
+              </a:rPr>
+              <a:t>fma</a:t>
+            </a:r>
+            <a:r>
+              <a:rPr lang="en-US" altLang="en-US" sz="1600" dirty="0">
+                <a:solidFill>
+                  <a:srgbClr val="000000"/>
+                </a:solidFill>
+                <a:latin typeface="Arial Unicode MS" panose="020B0604020202020204" pitchFamily="34" charset="-128"/>
+                <a:ea typeface="Courier 10 Pitch"/>
+              </a:rPr>
+              <a:t>; </a:t>
+            </a:r>
+          </a:p>
+          <a:p>
+            <a:pPr eaLnBrk="1" hangingPunct="1"/>
+            <a:r>
+              <a:rPr lang="en-US" altLang="en-US" sz="1600" dirty="0">
+                <a:solidFill>
+                  <a:srgbClr val="000000"/>
+                </a:solidFill>
+                <a:latin typeface="Arial Unicode MS" panose="020B0604020202020204" pitchFamily="34" charset="-128"/>
+                <a:ea typeface="Courier 10 Pitch"/>
+              </a:rPr>
+              <a:t>   auto w = b*c; </a:t>
+            </a:r>
+          </a:p>
+          <a:p>
+            <a:pPr eaLnBrk="1" hangingPunct="1"/>
+            <a:r>
+              <a:rPr lang="en-US" altLang="en-US" sz="1600" dirty="0">
+                <a:solidFill>
+                  <a:srgbClr val="000000"/>
+                </a:solidFill>
+                <a:latin typeface="Arial Unicode MS" panose="020B0604020202020204" pitchFamily="34" charset="-128"/>
+                <a:ea typeface="Courier 10 Pitch"/>
+              </a:rPr>
+              <a:t>   auto e = </a:t>
+            </a:r>
+            <a:r>
+              <a:rPr lang="en-US" altLang="en-US" sz="1600" dirty="0" err="1">
+                <a:solidFill>
+                  <a:srgbClr val="000000"/>
+                </a:solidFill>
+                <a:latin typeface="Arial Unicode MS" panose="020B0604020202020204" pitchFamily="34" charset="-128"/>
+                <a:ea typeface="Courier 10 Pitch"/>
+              </a:rPr>
+              <a:t>fma</a:t>
+            </a:r>
+            <a:r>
+              <a:rPr lang="en-US" altLang="en-US" sz="1600" dirty="0">
+                <a:solidFill>
+                  <a:srgbClr val="000000"/>
+                </a:solidFill>
+                <a:latin typeface="Arial Unicode MS" panose="020B0604020202020204" pitchFamily="34" charset="-128"/>
+                <a:ea typeface="Courier 10 Pitch"/>
+              </a:rPr>
+              <a:t>(-b, c, w); // error on w (</a:t>
+            </a:r>
+            <a:r>
+              <a:rPr lang="en-US" altLang="en-US" sz="1600" dirty="0" err="1">
+                <a:solidFill>
+                  <a:srgbClr val="000000"/>
+                </a:solidFill>
+                <a:latin typeface="Arial Unicode MS" panose="020B0604020202020204" pitchFamily="34" charset="-128"/>
+                <a:ea typeface="Courier 10 Pitch"/>
+              </a:rPr>
+              <a:t>w,e</a:t>
+            </a:r>
+            <a:r>
+              <a:rPr lang="en-US" altLang="en-US" sz="1600">
+                <a:solidFill>
+                  <a:srgbClr val="000000"/>
+                </a:solidFill>
+                <a:latin typeface="Arial Unicode MS" panose="020B0604020202020204" pitchFamily="34" charset="-128"/>
+                <a:ea typeface="Courier 10 Pitch"/>
+              </a:rPr>
+              <a:t>) = augmentedMultiply</a:t>
+            </a:r>
+            <a:r>
+              <a:rPr lang="en-US" altLang="en-US" sz="1600" dirty="0">
+                <a:solidFill>
+                  <a:srgbClr val="000000"/>
+                </a:solidFill>
+                <a:latin typeface="Arial Unicode MS" panose="020B0604020202020204" pitchFamily="34" charset="-128"/>
+                <a:ea typeface="Courier 10 Pitch"/>
+              </a:rPr>
+              <a:t>(</a:t>
+            </a:r>
+            <a:r>
+              <a:rPr lang="en-US" altLang="en-US" sz="1600" dirty="0" err="1">
+                <a:solidFill>
+                  <a:srgbClr val="000000"/>
+                </a:solidFill>
+                <a:latin typeface="Arial Unicode MS" panose="020B0604020202020204" pitchFamily="34" charset="-128"/>
+                <a:ea typeface="Courier 10 Pitch"/>
+              </a:rPr>
+              <a:t>b,c</a:t>
+            </a:r>
+            <a:r>
+              <a:rPr lang="en-US" altLang="en-US" sz="1600" dirty="0">
+                <a:solidFill>
+                  <a:srgbClr val="000000"/>
+                </a:solidFill>
+                <a:latin typeface="Arial Unicode MS" panose="020B0604020202020204" pitchFamily="34" charset="-128"/>
+                <a:ea typeface="Courier 10 Pitch"/>
+              </a:rPr>
+              <a:t>)</a:t>
+            </a:r>
+          </a:p>
+          <a:p>
+            <a:pPr eaLnBrk="1" hangingPunct="1"/>
+            <a:r>
+              <a:rPr lang="en-US" altLang="en-US" sz="1600" dirty="0">
+                <a:solidFill>
+                  <a:srgbClr val="000000"/>
+                </a:solidFill>
+                <a:latin typeface="Arial Unicode MS" panose="020B0604020202020204" pitchFamily="34" charset="-128"/>
+                <a:ea typeface="Courier 10 Pitch"/>
+              </a:rPr>
+              <a:t>   auto f = </a:t>
+            </a:r>
+            <a:r>
+              <a:rPr lang="en-US" altLang="en-US" sz="1600" dirty="0" err="1">
+                <a:solidFill>
+                  <a:srgbClr val="000000"/>
+                </a:solidFill>
+                <a:latin typeface="Arial Unicode MS" panose="020B0604020202020204" pitchFamily="34" charset="-128"/>
+                <a:ea typeface="Courier 10 Pitch"/>
+              </a:rPr>
+              <a:t>fma</a:t>
+            </a:r>
+            <a:r>
+              <a:rPr lang="en-US" altLang="en-US" sz="1600" dirty="0">
+                <a:solidFill>
+                  <a:srgbClr val="000000"/>
+                </a:solidFill>
+                <a:latin typeface="Arial Unicode MS" panose="020B0604020202020204" pitchFamily="34" charset="-128"/>
+                <a:ea typeface="Courier 10 Pitch"/>
+              </a:rPr>
+              <a:t>(a, d, -w); </a:t>
+            </a:r>
+          </a:p>
+          <a:p>
+            <a:pPr eaLnBrk="1" hangingPunct="1"/>
+            <a:r>
+              <a:rPr lang="en-US" altLang="en-US" sz="1600" dirty="0">
+                <a:solidFill>
+                  <a:srgbClr val="000000"/>
+                </a:solidFill>
+                <a:latin typeface="Arial Unicode MS" panose="020B0604020202020204" pitchFamily="34" charset="-128"/>
+                <a:ea typeface="Courier 10 Pitch"/>
+              </a:rPr>
+              <a:t>   return (</a:t>
+            </a:r>
+            <a:r>
+              <a:rPr lang="en-US" altLang="en-US" sz="1600" dirty="0" err="1">
+                <a:solidFill>
+                  <a:srgbClr val="000000"/>
+                </a:solidFill>
+                <a:latin typeface="Arial Unicode MS" panose="020B0604020202020204" pitchFamily="34" charset="-128"/>
+                <a:ea typeface="Courier 10 Pitch"/>
+              </a:rPr>
+              <a:t>f+e</a:t>
+            </a:r>
+            <a:r>
+              <a:rPr lang="en-US" altLang="en-US" sz="1600" dirty="0">
+                <a:solidFill>
+                  <a:srgbClr val="000000"/>
+                </a:solidFill>
+                <a:latin typeface="Arial Unicode MS" panose="020B0604020202020204" pitchFamily="34" charset="-128"/>
+                <a:ea typeface="Courier 10 Pitch"/>
+              </a:rPr>
+              <a:t>); </a:t>
+            </a:r>
+          </a:p>
+          <a:p>
+            <a:pPr eaLnBrk="1" hangingPunct="1"/>
+            <a:r>
+              <a:rPr lang="en-US" altLang="en-US" sz="1600" dirty="0">
+                <a:solidFill>
+                  <a:srgbClr val="000000"/>
+                </a:solidFill>
+                <a:latin typeface="Arial Unicode MS" panose="020B0604020202020204" pitchFamily="34" charset="-128"/>
+                <a:ea typeface="Courier 10 Pitch"/>
+              </a:rPr>
+              <a:t>}</a:t>
+            </a:r>
+            <a:endParaRPr lang="en-US" altLang="en-US" sz="3600" dirty="0"/>
+          </a:p>
+        </p:txBody>
+      </p:sp>
+    </p:spTree>
+    <p:extLst>
+      <p:ext uri="{BB962C8B-B14F-4D97-AF65-F5344CB8AC3E}">
+        <p14:creationId xmlns:p14="http://schemas.microsoft.com/office/powerpoint/2010/main" val="3367458698"/>
       </p:ext>
     </p:extLst>
   </p:cSld>

--- a/Slides/FPforScientist.pptx
+++ b/Slides/FPforScientist.pptx
@@ -9,25 +9,27 @@
     <p:sldId id="258" r:id="rId3"/>
     <p:sldId id="259" r:id="rId4"/>
     <p:sldId id="256" r:id="rId5"/>
-    <p:sldId id="260" r:id="rId6"/>
-    <p:sldId id="261" r:id="rId7"/>
-    <p:sldId id="461" r:id="rId8"/>
-    <p:sldId id="455" r:id="rId9"/>
-    <p:sldId id="439" r:id="rId10"/>
-    <p:sldId id="394" r:id="rId11"/>
-    <p:sldId id="262" r:id="rId12"/>
-    <p:sldId id="456" r:id="rId13"/>
-    <p:sldId id="457" r:id="rId14"/>
-    <p:sldId id="458" r:id="rId15"/>
-    <p:sldId id="459" r:id="rId16"/>
-    <p:sldId id="460" r:id="rId17"/>
-    <p:sldId id="462" r:id="rId18"/>
-    <p:sldId id="463" r:id="rId19"/>
-    <p:sldId id="464" r:id="rId20"/>
-    <p:sldId id="465" r:id="rId21"/>
-    <p:sldId id="466" r:id="rId22"/>
-    <p:sldId id="467" r:id="rId23"/>
-    <p:sldId id="468" r:id="rId24"/>
+    <p:sldId id="372" r:id="rId6"/>
+    <p:sldId id="260" r:id="rId7"/>
+    <p:sldId id="261" r:id="rId8"/>
+    <p:sldId id="461" r:id="rId9"/>
+    <p:sldId id="455" r:id="rId10"/>
+    <p:sldId id="439" r:id="rId11"/>
+    <p:sldId id="394" r:id="rId12"/>
+    <p:sldId id="262" r:id="rId13"/>
+    <p:sldId id="456" r:id="rId14"/>
+    <p:sldId id="457" r:id="rId15"/>
+    <p:sldId id="458" r:id="rId16"/>
+    <p:sldId id="459" r:id="rId17"/>
+    <p:sldId id="460" r:id="rId18"/>
+    <p:sldId id="462" r:id="rId19"/>
+    <p:sldId id="463" r:id="rId20"/>
+    <p:sldId id="464" r:id="rId21"/>
+    <p:sldId id="465" r:id="rId22"/>
+    <p:sldId id="466" r:id="rId23"/>
+    <p:sldId id="467" r:id="rId24"/>
+    <p:sldId id="468" r:id="rId25"/>
+    <p:sldId id="441" r:id="rId26"/>
   </p:sldIdLst>
   <p:sldSz cx="12192000" cy="6858000"/>
   <p:notesSz cx="6858000" cy="9144000"/>
@@ -3749,6 +3751,1006 @@
       </p:grpSpPr>
       <p:sp>
         <p:nvSpPr>
+          <p:cNvPr id="25601" name="Title 1"/>
+          <p:cNvSpPr>
+            <a:spLocks noGrp="1"/>
+          </p:cNvSpPr>
+          <p:nvPr>
+            <p:ph type="title"/>
+          </p:nvPr>
+        </p:nvSpPr>
+        <p:spPr>
+          <a:xfrm>
+            <a:off x="838200" y="365125"/>
+            <a:ext cx="10515600" cy="870551"/>
+          </a:xfrm>
+        </p:spPr>
+        <p:txBody>
+          <a:bodyPr/>
+          <a:lstStyle/>
+          <a:p>
+            <a:r>
+              <a:rPr lang="en-US" altLang="x-none"/>
+              <a:t>C++ interlude</a:t>
+            </a:r>
+          </a:p>
+        </p:txBody>
+      </p:sp>
+      <p:sp>
+        <p:nvSpPr>
+          <p:cNvPr id="25602" name="Date Placeholder 2"/>
+          <p:cNvSpPr>
+            <a:spLocks noGrp="1"/>
+          </p:cNvSpPr>
+          <p:nvPr>
+            <p:ph type="dt" sz="quarter" idx="10"/>
+          </p:nvPr>
+        </p:nvSpPr>
+        <p:spPr>
+          <a:noFill/>
+          <a:ln/>
+          <a:extLst>
+            <a:ext uri="{909E8E84-426E-40DD-AFC4-6F175D3DCCD1}">
+              <a14:hiddenFill xmlns:a14="http://schemas.microsoft.com/office/drawing/2010/main">
+                <a:solidFill>
+                  <a:srgbClr val="FFFFFF"/>
+                </a:solidFill>
+              </a14:hiddenFill>
+            </a:ext>
+            <a:ext uri="{91240B29-F687-4F45-9708-019B960494DF}">
+              <a14:hiddenLine xmlns:a14="http://schemas.microsoft.com/office/drawing/2010/main" w="9525">
+                <a:solidFill>
+                  <a:srgbClr val="000000"/>
+                </a:solidFill>
+                <a:miter lim="800000"/>
+                <a:headEnd/>
+                <a:tailEnd/>
+              </a14:hiddenLine>
+            </a:ext>
+          </a:extLst>
+        </p:spPr>
+        <p:txBody>
+          <a:bodyPr/>
+          <a:lstStyle>
+            <a:lvl1pPr eaLnBrk="0" hangingPunct="0">
+              <a:defRPr sz="2400">
+                <a:solidFill>
+                  <a:schemeClr val="tx1"/>
+                </a:solidFill>
+                <a:latin typeface="Arial" charset="0"/>
+                <a:ea typeface="ＭＳ Ｐゴシック" charset="-128"/>
+              </a:defRPr>
+            </a:lvl1pPr>
+            <a:lvl2pPr marL="742950" indent="-285750" eaLnBrk="0" hangingPunct="0">
+              <a:defRPr sz="2400">
+                <a:solidFill>
+                  <a:schemeClr val="tx1"/>
+                </a:solidFill>
+                <a:latin typeface="Arial" charset="0"/>
+                <a:ea typeface="ＭＳ Ｐゴシック" charset="-128"/>
+              </a:defRPr>
+            </a:lvl2pPr>
+            <a:lvl3pPr marL="1143000" indent="-228600" eaLnBrk="0" hangingPunct="0">
+              <a:defRPr sz="2400">
+                <a:solidFill>
+                  <a:schemeClr val="tx1"/>
+                </a:solidFill>
+                <a:latin typeface="Arial" charset="0"/>
+                <a:ea typeface="ＭＳ Ｐゴシック" charset="-128"/>
+              </a:defRPr>
+            </a:lvl3pPr>
+            <a:lvl4pPr marL="1600200" indent="-228600" eaLnBrk="0" hangingPunct="0">
+              <a:defRPr sz="2400">
+                <a:solidFill>
+                  <a:schemeClr val="tx1"/>
+                </a:solidFill>
+                <a:latin typeface="Arial" charset="0"/>
+                <a:ea typeface="ＭＳ Ｐゴシック" charset="-128"/>
+              </a:defRPr>
+            </a:lvl4pPr>
+            <a:lvl5pPr marL="2057400" indent="-228600" eaLnBrk="0" hangingPunct="0">
+              <a:defRPr sz="2400">
+                <a:solidFill>
+                  <a:schemeClr val="tx1"/>
+                </a:solidFill>
+                <a:latin typeface="Arial" charset="0"/>
+                <a:ea typeface="ＭＳ Ｐゴシック" charset="-128"/>
+              </a:defRPr>
+            </a:lvl5pPr>
+            <a:lvl6pPr marL="2514600" indent="-228600" eaLnBrk="0" fontAlgn="base" hangingPunct="0">
+              <a:spcBef>
+                <a:spcPct val="0"/>
+              </a:spcBef>
+              <a:spcAft>
+                <a:spcPct val="0"/>
+              </a:spcAft>
+              <a:defRPr sz="2400">
+                <a:solidFill>
+                  <a:schemeClr val="tx1"/>
+                </a:solidFill>
+                <a:latin typeface="Arial" charset="0"/>
+                <a:ea typeface="ＭＳ Ｐゴシック" charset="-128"/>
+              </a:defRPr>
+            </a:lvl6pPr>
+            <a:lvl7pPr marL="2971800" indent="-228600" eaLnBrk="0" fontAlgn="base" hangingPunct="0">
+              <a:spcBef>
+                <a:spcPct val="0"/>
+              </a:spcBef>
+              <a:spcAft>
+                <a:spcPct val="0"/>
+              </a:spcAft>
+              <a:defRPr sz="2400">
+                <a:solidFill>
+                  <a:schemeClr val="tx1"/>
+                </a:solidFill>
+                <a:latin typeface="Arial" charset="0"/>
+                <a:ea typeface="ＭＳ Ｐゴシック" charset="-128"/>
+              </a:defRPr>
+            </a:lvl7pPr>
+            <a:lvl8pPr marL="3429000" indent="-228600" eaLnBrk="0" fontAlgn="base" hangingPunct="0">
+              <a:spcBef>
+                <a:spcPct val="0"/>
+              </a:spcBef>
+              <a:spcAft>
+                <a:spcPct val="0"/>
+              </a:spcAft>
+              <a:defRPr sz="2400">
+                <a:solidFill>
+                  <a:schemeClr val="tx1"/>
+                </a:solidFill>
+                <a:latin typeface="Arial" charset="0"/>
+                <a:ea typeface="ＭＳ Ｐゴシック" charset="-128"/>
+              </a:defRPr>
+            </a:lvl8pPr>
+            <a:lvl9pPr marL="3886200" indent="-228600" eaLnBrk="0" fontAlgn="base" hangingPunct="0">
+              <a:spcBef>
+                <a:spcPct val="0"/>
+              </a:spcBef>
+              <a:spcAft>
+                <a:spcPct val="0"/>
+              </a:spcAft>
+              <a:defRPr sz="2400">
+                <a:solidFill>
+                  <a:schemeClr val="tx1"/>
+                </a:solidFill>
+                <a:latin typeface="Arial" charset="0"/>
+                <a:ea typeface="ＭＳ Ｐゴシック" charset="-128"/>
+              </a:defRPr>
+            </a:lvl9pPr>
+          </a:lstStyle>
+          <a:p>
+            <a:pPr eaLnBrk="1" hangingPunct="1"/>
+            <a:r>
+              <a:rPr lang="en-US" altLang="x-none" sz="1200">
+                <a:latin typeface="Garamond" charset="0"/>
+              </a:rPr>
+              <a:t>22 October 2016</a:t>
+            </a:r>
+            <a:endParaRPr lang="it-IT" altLang="x-none" sz="1200">
+              <a:latin typeface="Garamond" charset="0"/>
+            </a:endParaRPr>
+          </a:p>
+        </p:txBody>
+      </p:sp>
+      <p:sp>
+        <p:nvSpPr>
+          <p:cNvPr id="25603" name="Footer Placeholder 3"/>
+          <p:cNvSpPr>
+            <a:spLocks noGrp="1"/>
+          </p:cNvSpPr>
+          <p:nvPr>
+            <p:ph type="ftr" sz="quarter" idx="11"/>
+          </p:nvPr>
+        </p:nvSpPr>
+        <p:spPr>
+          <a:noFill/>
+          <a:ln/>
+          <a:extLst>
+            <a:ext uri="{909E8E84-426E-40DD-AFC4-6F175D3DCCD1}">
+              <a14:hiddenFill xmlns:a14="http://schemas.microsoft.com/office/drawing/2010/main">
+                <a:solidFill>
+                  <a:srgbClr val="FFFFFF"/>
+                </a:solidFill>
+              </a14:hiddenFill>
+            </a:ext>
+            <a:ext uri="{91240B29-F687-4F45-9708-019B960494DF}">
+              <a14:hiddenLine xmlns:a14="http://schemas.microsoft.com/office/drawing/2010/main" w="9525">
+                <a:solidFill>
+                  <a:srgbClr val="000000"/>
+                </a:solidFill>
+                <a:miter lim="800000"/>
+                <a:headEnd/>
+                <a:tailEnd/>
+              </a14:hiddenLine>
+            </a:ext>
+          </a:extLst>
+        </p:spPr>
+        <p:txBody>
+          <a:bodyPr/>
+          <a:lstStyle>
+            <a:lvl1pPr eaLnBrk="0" hangingPunct="0">
+              <a:defRPr sz="2400">
+                <a:solidFill>
+                  <a:schemeClr val="tx1"/>
+                </a:solidFill>
+                <a:latin typeface="Arial" charset="0"/>
+                <a:ea typeface="ＭＳ Ｐゴシック" charset="-128"/>
+              </a:defRPr>
+            </a:lvl1pPr>
+            <a:lvl2pPr marL="742950" indent="-285750" eaLnBrk="0" hangingPunct="0">
+              <a:defRPr sz="2400">
+                <a:solidFill>
+                  <a:schemeClr val="tx1"/>
+                </a:solidFill>
+                <a:latin typeface="Arial" charset="0"/>
+                <a:ea typeface="ＭＳ Ｐゴシック" charset="-128"/>
+              </a:defRPr>
+            </a:lvl2pPr>
+            <a:lvl3pPr marL="1143000" indent="-228600" eaLnBrk="0" hangingPunct="0">
+              <a:defRPr sz="2400">
+                <a:solidFill>
+                  <a:schemeClr val="tx1"/>
+                </a:solidFill>
+                <a:latin typeface="Arial" charset="0"/>
+                <a:ea typeface="ＭＳ Ｐゴシック" charset="-128"/>
+              </a:defRPr>
+            </a:lvl3pPr>
+            <a:lvl4pPr marL="1600200" indent="-228600" eaLnBrk="0" hangingPunct="0">
+              <a:defRPr sz="2400">
+                <a:solidFill>
+                  <a:schemeClr val="tx1"/>
+                </a:solidFill>
+                <a:latin typeface="Arial" charset="0"/>
+                <a:ea typeface="ＭＳ Ｐゴシック" charset="-128"/>
+              </a:defRPr>
+            </a:lvl4pPr>
+            <a:lvl5pPr marL="2057400" indent="-228600" eaLnBrk="0" hangingPunct="0">
+              <a:defRPr sz="2400">
+                <a:solidFill>
+                  <a:schemeClr val="tx1"/>
+                </a:solidFill>
+                <a:latin typeface="Arial" charset="0"/>
+                <a:ea typeface="ＭＳ Ｐゴシック" charset="-128"/>
+              </a:defRPr>
+            </a:lvl5pPr>
+            <a:lvl6pPr marL="2514600" indent="-228600" eaLnBrk="0" fontAlgn="base" hangingPunct="0">
+              <a:spcBef>
+                <a:spcPct val="0"/>
+              </a:spcBef>
+              <a:spcAft>
+                <a:spcPct val="0"/>
+              </a:spcAft>
+              <a:defRPr sz="2400">
+                <a:solidFill>
+                  <a:schemeClr val="tx1"/>
+                </a:solidFill>
+                <a:latin typeface="Arial" charset="0"/>
+                <a:ea typeface="ＭＳ Ｐゴシック" charset="-128"/>
+              </a:defRPr>
+            </a:lvl6pPr>
+            <a:lvl7pPr marL="2971800" indent="-228600" eaLnBrk="0" fontAlgn="base" hangingPunct="0">
+              <a:spcBef>
+                <a:spcPct val="0"/>
+              </a:spcBef>
+              <a:spcAft>
+                <a:spcPct val="0"/>
+              </a:spcAft>
+              <a:defRPr sz="2400">
+                <a:solidFill>
+                  <a:schemeClr val="tx1"/>
+                </a:solidFill>
+                <a:latin typeface="Arial" charset="0"/>
+                <a:ea typeface="ＭＳ Ｐゴシック" charset="-128"/>
+              </a:defRPr>
+            </a:lvl7pPr>
+            <a:lvl8pPr marL="3429000" indent="-228600" eaLnBrk="0" fontAlgn="base" hangingPunct="0">
+              <a:spcBef>
+                <a:spcPct val="0"/>
+              </a:spcBef>
+              <a:spcAft>
+                <a:spcPct val="0"/>
+              </a:spcAft>
+              <a:defRPr sz="2400">
+                <a:solidFill>
+                  <a:schemeClr val="tx1"/>
+                </a:solidFill>
+                <a:latin typeface="Arial" charset="0"/>
+                <a:ea typeface="ＭＳ Ｐゴシック" charset="-128"/>
+              </a:defRPr>
+            </a:lvl8pPr>
+            <a:lvl9pPr marL="3886200" indent="-228600" eaLnBrk="0" fontAlgn="base" hangingPunct="0">
+              <a:spcBef>
+                <a:spcPct val="0"/>
+              </a:spcBef>
+              <a:spcAft>
+                <a:spcPct val="0"/>
+              </a:spcAft>
+              <a:defRPr sz="2400">
+                <a:solidFill>
+                  <a:schemeClr val="tx1"/>
+                </a:solidFill>
+                <a:latin typeface="Arial" charset="0"/>
+                <a:ea typeface="ＭＳ Ｐゴシック" charset="-128"/>
+              </a:defRPr>
+            </a:lvl9pPr>
+          </a:lstStyle>
+          <a:p>
+            <a:pPr eaLnBrk="1" hangingPunct="1"/>
+            <a:r>
+              <a:rPr lang="en-US" altLang="x-none" sz="1200">
+                <a:latin typeface="Garamond" charset="0"/>
+              </a:rPr>
+              <a:t>Vincenzo Innocente</a:t>
+            </a:r>
+            <a:endParaRPr lang="it-IT" altLang="x-none" sz="1200">
+              <a:latin typeface="Garamond" charset="0"/>
+            </a:endParaRPr>
+          </a:p>
+        </p:txBody>
+      </p:sp>
+      <p:sp>
+        <p:nvSpPr>
+          <p:cNvPr id="25604" name="Slide Number Placeholder 4"/>
+          <p:cNvSpPr>
+            <a:spLocks noGrp="1"/>
+          </p:cNvSpPr>
+          <p:nvPr>
+            <p:ph type="sldNum" sz="quarter" idx="12"/>
+          </p:nvPr>
+        </p:nvSpPr>
+        <p:spPr>
+          <a:noFill/>
+          <a:ln/>
+          <a:extLst>
+            <a:ext uri="{909E8E84-426E-40DD-AFC4-6F175D3DCCD1}">
+              <a14:hiddenFill xmlns:a14="http://schemas.microsoft.com/office/drawing/2010/main">
+                <a:solidFill>
+                  <a:srgbClr val="FFFFFF"/>
+                </a:solidFill>
+              </a14:hiddenFill>
+            </a:ext>
+            <a:ext uri="{91240B29-F687-4F45-9708-019B960494DF}">
+              <a14:hiddenLine xmlns:a14="http://schemas.microsoft.com/office/drawing/2010/main" w="9525">
+                <a:solidFill>
+                  <a:srgbClr val="000000"/>
+                </a:solidFill>
+                <a:miter lim="800000"/>
+                <a:headEnd/>
+                <a:tailEnd/>
+              </a14:hiddenLine>
+            </a:ext>
+          </a:extLst>
+        </p:spPr>
+        <p:txBody>
+          <a:bodyPr/>
+          <a:lstStyle>
+            <a:lvl1pPr eaLnBrk="0" hangingPunct="0">
+              <a:defRPr sz="2400">
+                <a:solidFill>
+                  <a:schemeClr val="tx1"/>
+                </a:solidFill>
+                <a:latin typeface="Arial" charset="0"/>
+                <a:ea typeface="ＭＳ Ｐゴシック" charset="-128"/>
+              </a:defRPr>
+            </a:lvl1pPr>
+            <a:lvl2pPr marL="742950" indent="-285750" eaLnBrk="0" hangingPunct="0">
+              <a:defRPr sz="2400">
+                <a:solidFill>
+                  <a:schemeClr val="tx1"/>
+                </a:solidFill>
+                <a:latin typeface="Arial" charset="0"/>
+                <a:ea typeface="ＭＳ Ｐゴシック" charset="-128"/>
+              </a:defRPr>
+            </a:lvl2pPr>
+            <a:lvl3pPr marL="1143000" indent="-228600" eaLnBrk="0" hangingPunct="0">
+              <a:defRPr sz="2400">
+                <a:solidFill>
+                  <a:schemeClr val="tx1"/>
+                </a:solidFill>
+                <a:latin typeface="Arial" charset="0"/>
+                <a:ea typeface="ＭＳ Ｐゴシック" charset="-128"/>
+              </a:defRPr>
+            </a:lvl3pPr>
+            <a:lvl4pPr marL="1600200" indent="-228600" eaLnBrk="0" hangingPunct="0">
+              <a:defRPr sz="2400">
+                <a:solidFill>
+                  <a:schemeClr val="tx1"/>
+                </a:solidFill>
+                <a:latin typeface="Arial" charset="0"/>
+                <a:ea typeface="ＭＳ Ｐゴシック" charset="-128"/>
+              </a:defRPr>
+            </a:lvl4pPr>
+            <a:lvl5pPr marL="2057400" indent="-228600" eaLnBrk="0" hangingPunct="0">
+              <a:defRPr sz="2400">
+                <a:solidFill>
+                  <a:schemeClr val="tx1"/>
+                </a:solidFill>
+                <a:latin typeface="Arial" charset="0"/>
+                <a:ea typeface="ＭＳ Ｐゴシック" charset="-128"/>
+              </a:defRPr>
+            </a:lvl5pPr>
+            <a:lvl6pPr marL="2514600" indent="-228600" eaLnBrk="0" fontAlgn="base" hangingPunct="0">
+              <a:spcBef>
+                <a:spcPct val="0"/>
+              </a:spcBef>
+              <a:spcAft>
+                <a:spcPct val="0"/>
+              </a:spcAft>
+              <a:defRPr sz="2400">
+                <a:solidFill>
+                  <a:schemeClr val="tx1"/>
+                </a:solidFill>
+                <a:latin typeface="Arial" charset="0"/>
+                <a:ea typeface="ＭＳ Ｐゴシック" charset="-128"/>
+              </a:defRPr>
+            </a:lvl6pPr>
+            <a:lvl7pPr marL="2971800" indent="-228600" eaLnBrk="0" fontAlgn="base" hangingPunct="0">
+              <a:spcBef>
+                <a:spcPct val="0"/>
+              </a:spcBef>
+              <a:spcAft>
+                <a:spcPct val="0"/>
+              </a:spcAft>
+              <a:defRPr sz="2400">
+                <a:solidFill>
+                  <a:schemeClr val="tx1"/>
+                </a:solidFill>
+                <a:latin typeface="Arial" charset="0"/>
+                <a:ea typeface="ＭＳ Ｐゴシック" charset="-128"/>
+              </a:defRPr>
+            </a:lvl7pPr>
+            <a:lvl8pPr marL="3429000" indent="-228600" eaLnBrk="0" fontAlgn="base" hangingPunct="0">
+              <a:spcBef>
+                <a:spcPct val="0"/>
+              </a:spcBef>
+              <a:spcAft>
+                <a:spcPct val="0"/>
+              </a:spcAft>
+              <a:defRPr sz="2400">
+                <a:solidFill>
+                  <a:schemeClr val="tx1"/>
+                </a:solidFill>
+                <a:latin typeface="Arial" charset="0"/>
+                <a:ea typeface="ＭＳ Ｐゴシック" charset="-128"/>
+              </a:defRPr>
+            </a:lvl8pPr>
+            <a:lvl9pPr marL="3886200" indent="-228600" eaLnBrk="0" fontAlgn="base" hangingPunct="0">
+              <a:spcBef>
+                <a:spcPct val="0"/>
+              </a:spcBef>
+              <a:spcAft>
+                <a:spcPct val="0"/>
+              </a:spcAft>
+              <a:defRPr sz="2400">
+                <a:solidFill>
+                  <a:schemeClr val="tx1"/>
+                </a:solidFill>
+                <a:latin typeface="Arial" charset="0"/>
+                <a:ea typeface="ＭＳ Ｐゴシック" charset="-128"/>
+              </a:defRPr>
+            </a:lvl9pPr>
+          </a:lstStyle>
+          <a:p>
+            <a:pPr eaLnBrk="1" hangingPunct="1"/>
+            <a:fld id="{502E4000-0355-7D4E-B01D-371C3A18747A}" type="slidenum">
+              <a:rPr lang="it-IT" altLang="x-none" sz="1200">
+                <a:latin typeface="Garamond" charset="0"/>
+              </a:rPr>
+              <a:pPr eaLnBrk="1" hangingPunct="1"/>
+              <a:t>10</a:t>
+            </a:fld>
+            <a:endParaRPr lang="it-IT" altLang="x-none" sz="1200">
+              <a:latin typeface="Garamond" charset="0"/>
+            </a:endParaRPr>
+          </a:p>
+        </p:txBody>
+      </p:sp>
+      <p:sp>
+        <p:nvSpPr>
+          <p:cNvPr id="25605" name="TextBox 5"/>
+          <p:cNvSpPr txBox="1">
+            <a:spLocks noChangeArrowheads="1"/>
+          </p:cNvSpPr>
+          <p:nvPr/>
+        </p:nvSpPr>
+        <p:spPr bwMode="auto">
+          <a:xfrm>
+            <a:off x="1329982" y="1117000"/>
+            <a:ext cx="8497888" cy="5078413"/>
+          </a:xfrm>
+          <a:prstGeom prst="rect">
+            <a:avLst/>
+          </a:prstGeom>
+          <a:solidFill>
+            <a:srgbClr val="FFFF00"/>
+          </a:solidFill>
+          <a:ln>
+            <a:noFill/>
+          </a:ln>
+          <a:extLst>
+            <a:ext uri="{91240B29-F687-4F45-9708-019B960494DF}">
+              <a14:hiddenLine xmlns:a14="http://schemas.microsoft.com/office/drawing/2010/main" w="9525">
+                <a:solidFill>
+                  <a:srgbClr val="000000"/>
+                </a:solidFill>
+                <a:miter lim="800000"/>
+                <a:headEnd/>
+                <a:tailEnd/>
+              </a14:hiddenLine>
+            </a:ext>
+          </a:extLst>
+        </p:spPr>
+        <p:txBody>
+          <a:bodyPr>
+            <a:spAutoFit/>
+          </a:bodyPr>
+          <a:lstStyle>
+            <a:lvl1pPr eaLnBrk="0" hangingPunct="0">
+              <a:defRPr sz="2400">
+                <a:solidFill>
+                  <a:schemeClr val="tx1"/>
+                </a:solidFill>
+                <a:latin typeface="Arial" charset="0"/>
+                <a:ea typeface="ＭＳ Ｐゴシック" charset="-128"/>
+              </a:defRPr>
+            </a:lvl1pPr>
+            <a:lvl2pPr marL="742950" indent="-285750" eaLnBrk="0" hangingPunct="0">
+              <a:defRPr sz="2400">
+                <a:solidFill>
+                  <a:schemeClr val="tx1"/>
+                </a:solidFill>
+                <a:latin typeface="Arial" charset="0"/>
+                <a:ea typeface="ＭＳ Ｐゴシック" charset="-128"/>
+              </a:defRPr>
+            </a:lvl2pPr>
+            <a:lvl3pPr marL="1143000" indent="-228600" eaLnBrk="0" hangingPunct="0">
+              <a:defRPr sz="2400">
+                <a:solidFill>
+                  <a:schemeClr val="tx1"/>
+                </a:solidFill>
+                <a:latin typeface="Arial" charset="0"/>
+                <a:ea typeface="ＭＳ Ｐゴシック" charset="-128"/>
+              </a:defRPr>
+            </a:lvl3pPr>
+            <a:lvl4pPr marL="1600200" indent="-228600" eaLnBrk="0" hangingPunct="0">
+              <a:defRPr sz="2400">
+                <a:solidFill>
+                  <a:schemeClr val="tx1"/>
+                </a:solidFill>
+                <a:latin typeface="Arial" charset="0"/>
+                <a:ea typeface="ＭＳ Ｐゴシック" charset="-128"/>
+              </a:defRPr>
+            </a:lvl4pPr>
+            <a:lvl5pPr marL="2057400" indent="-228600" eaLnBrk="0" hangingPunct="0">
+              <a:defRPr sz="2400">
+                <a:solidFill>
+                  <a:schemeClr val="tx1"/>
+                </a:solidFill>
+                <a:latin typeface="Arial" charset="0"/>
+                <a:ea typeface="ＭＳ Ｐゴシック" charset="-128"/>
+              </a:defRPr>
+            </a:lvl5pPr>
+            <a:lvl6pPr marL="2514600" indent="-228600" eaLnBrk="0" fontAlgn="base" hangingPunct="0">
+              <a:spcBef>
+                <a:spcPct val="0"/>
+              </a:spcBef>
+              <a:spcAft>
+                <a:spcPct val="0"/>
+              </a:spcAft>
+              <a:defRPr sz="2400">
+                <a:solidFill>
+                  <a:schemeClr val="tx1"/>
+                </a:solidFill>
+                <a:latin typeface="Arial" charset="0"/>
+                <a:ea typeface="ＭＳ Ｐゴシック" charset="-128"/>
+              </a:defRPr>
+            </a:lvl6pPr>
+            <a:lvl7pPr marL="2971800" indent="-228600" eaLnBrk="0" fontAlgn="base" hangingPunct="0">
+              <a:spcBef>
+                <a:spcPct val="0"/>
+              </a:spcBef>
+              <a:spcAft>
+                <a:spcPct val="0"/>
+              </a:spcAft>
+              <a:defRPr sz="2400">
+                <a:solidFill>
+                  <a:schemeClr val="tx1"/>
+                </a:solidFill>
+                <a:latin typeface="Arial" charset="0"/>
+                <a:ea typeface="ＭＳ Ｐゴシック" charset="-128"/>
+              </a:defRPr>
+            </a:lvl7pPr>
+            <a:lvl8pPr marL="3429000" indent="-228600" eaLnBrk="0" fontAlgn="base" hangingPunct="0">
+              <a:spcBef>
+                <a:spcPct val="0"/>
+              </a:spcBef>
+              <a:spcAft>
+                <a:spcPct val="0"/>
+              </a:spcAft>
+              <a:defRPr sz="2400">
+                <a:solidFill>
+                  <a:schemeClr val="tx1"/>
+                </a:solidFill>
+                <a:latin typeface="Arial" charset="0"/>
+                <a:ea typeface="ＭＳ Ｐゴシック" charset="-128"/>
+              </a:defRPr>
+            </a:lvl8pPr>
+            <a:lvl9pPr marL="3886200" indent="-228600" eaLnBrk="0" fontAlgn="base" hangingPunct="0">
+              <a:spcBef>
+                <a:spcPct val="0"/>
+              </a:spcBef>
+              <a:spcAft>
+                <a:spcPct val="0"/>
+              </a:spcAft>
+              <a:defRPr sz="2400">
+                <a:solidFill>
+                  <a:schemeClr val="tx1"/>
+                </a:solidFill>
+                <a:latin typeface="Arial" charset="0"/>
+                <a:ea typeface="ＭＳ Ｐゴシック" charset="-128"/>
+              </a:defRPr>
+            </a:lvl9pPr>
+          </a:lstStyle>
+          <a:p>
+            <a:pPr eaLnBrk="1" hangingPunct="1"/>
+            <a:r>
+              <a:rPr lang="en-US" altLang="x-none" sz="1800"/>
+              <a:t>#include&lt;iostream&gt;</a:t>
+            </a:r>
+          </a:p>
+          <a:p>
+            <a:pPr eaLnBrk="1" hangingPunct="1"/>
+            <a:r>
+              <a:rPr lang="en-US" altLang="x-none" sz="1800"/>
+              <a:t>#include&lt;</a:t>
+            </a:r>
+            <a:r>
+              <a:rPr lang="en-US" altLang="x-none" sz="1800" err="1"/>
+              <a:t>iomanip</a:t>
+            </a:r>
+            <a:r>
+              <a:rPr lang="en-US" altLang="x-none" sz="1800"/>
+              <a:t>&gt;</a:t>
+            </a:r>
+          </a:p>
+          <a:p>
+            <a:pPr eaLnBrk="1" hangingPunct="1"/>
+            <a:r>
+              <a:rPr lang="en-US" altLang="x-none" sz="1800"/>
+              <a:t>#include&lt;</a:t>
+            </a:r>
+            <a:r>
+              <a:rPr lang="en-US" altLang="x-none" sz="1800" err="1"/>
+              <a:t>cmath</a:t>
+            </a:r>
+            <a:r>
+              <a:rPr lang="en-US" altLang="x-none" sz="1800"/>
+              <a:t>&gt;</a:t>
+            </a:r>
+          </a:p>
+          <a:p>
+            <a:pPr eaLnBrk="1" hangingPunct="1"/>
+            <a:r>
+              <a:rPr lang="en-US" altLang="x-none" sz="1800"/>
+              <a:t>#include&lt;limits&gt;</a:t>
+            </a:r>
+          </a:p>
+          <a:p>
+            <a:pPr eaLnBrk="1" hangingPunct="1"/>
+            <a:r>
+              <a:rPr lang="en-US" altLang="x-none" sz="1800"/>
+              <a:t>//  std style</a:t>
+            </a:r>
+          </a:p>
+          <a:p>
+            <a:pPr eaLnBrk="1" hangingPunct="1"/>
+            <a:r>
+              <a:rPr lang="en-US" altLang="x-none" sz="1800"/>
+              <a:t>template&lt;</a:t>
+            </a:r>
+            <a:r>
+              <a:rPr lang="en-US" altLang="x-none" sz="1800" err="1"/>
+              <a:t>typename</a:t>
+            </a:r>
+            <a:r>
+              <a:rPr lang="en-US" altLang="x-none" sz="1800"/>
+              <a:t> T&gt;</a:t>
+            </a:r>
+          </a:p>
+          <a:p>
+            <a:pPr eaLnBrk="1" hangingPunct="1"/>
+            <a:r>
+              <a:rPr lang="en-US" altLang="x-none" sz="1800"/>
+              <a:t>void print(T x) {          </a:t>
+            </a:r>
+          </a:p>
+          <a:p>
+            <a:pPr eaLnBrk="1" hangingPunct="1"/>
+            <a:r>
+              <a:rPr lang="en-US" altLang="x-none" sz="1800"/>
+              <a:t> std::</a:t>
+            </a:r>
+            <a:r>
+              <a:rPr lang="en-US" altLang="x-none" sz="1800" err="1"/>
+              <a:t>cout</a:t>
+            </a:r>
+            <a:r>
+              <a:rPr lang="en-US" altLang="x-none" sz="1800"/>
+              <a:t> &lt;&lt; std::</a:t>
+            </a:r>
+            <a:r>
+              <a:rPr lang="en-US" altLang="x-none" sz="1800" err="1"/>
+              <a:t>hexfloat</a:t>
+            </a:r>
+            <a:r>
+              <a:rPr lang="en-US" altLang="x-none" sz="1800"/>
+              <a:t> &lt;&lt; x &lt;&lt;' </a:t>
+            </a:r>
+            <a:r>
+              <a:rPr lang="en-US" altLang="en-US" sz="1800"/>
+              <a:t>’</a:t>
+            </a:r>
+            <a:r>
+              <a:rPr lang="en-US" altLang="x-none" sz="1800"/>
+              <a:t> </a:t>
+            </a:r>
+            <a:r>
+              <a:rPr lang="en-US" altLang="x-none" sz="1800">
+                <a:solidFill>
+                  <a:srgbClr val="FF0000"/>
+                </a:solidFill>
+              </a:rPr>
+              <a:t>// exact binary representation</a:t>
+            </a:r>
+          </a:p>
+          <a:p>
+            <a:pPr eaLnBrk="1" hangingPunct="1"/>
+            <a:r>
+              <a:rPr lang="en-US" altLang="x-none" sz="1800"/>
+              <a:t>                &lt;&lt;  std::scientific &lt;&lt; std::</a:t>
+            </a:r>
+            <a:r>
+              <a:rPr lang="en-US" altLang="x-none" sz="1800" err="1"/>
+              <a:t>setprecision</a:t>
+            </a:r>
+            <a:r>
+              <a:rPr lang="en-US" altLang="x-none" sz="1800"/>
+              <a:t>(8) &lt;&lt; x &lt;&lt; ' </a:t>
+            </a:r>
+            <a:r>
+              <a:rPr lang="en-US" altLang="en-US" sz="1800"/>
+              <a:t>’</a:t>
+            </a:r>
+            <a:r>
+              <a:rPr lang="en-US" altLang="x-none" sz="1800"/>
+              <a:t> </a:t>
+            </a:r>
+            <a:r>
+              <a:rPr lang="en-US" altLang="x-none" sz="1800">
+                <a:solidFill>
+                  <a:srgbClr val="FF0000"/>
+                </a:solidFill>
+              </a:rPr>
+              <a:t>// 8 decimal digits</a:t>
+            </a:r>
+          </a:p>
+          <a:p>
+            <a:pPr eaLnBrk="1" hangingPunct="1"/>
+            <a:r>
+              <a:rPr lang="en-US" altLang="x-none" sz="1800"/>
+              <a:t>                &lt;&lt;  std::</a:t>
+            </a:r>
+            <a:r>
+              <a:rPr lang="en-US" altLang="x-none" sz="1800" err="1"/>
+              <a:t>defaultfloat</a:t>
+            </a:r>
+            <a:r>
+              <a:rPr lang="en-US" altLang="x-none" sz="1800"/>
+              <a:t> &lt;&lt; x &lt;&lt; std::</a:t>
+            </a:r>
+            <a:r>
+              <a:rPr lang="en-US" altLang="x-none" sz="1800" err="1"/>
+              <a:t>endl</a:t>
+            </a:r>
+            <a:r>
+              <a:rPr lang="en-US" altLang="x-none" sz="1800"/>
+              <a:t>;    </a:t>
+            </a:r>
+            <a:r>
+              <a:rPr lang="en-US" altLang="x-none" sz="1800">
+                <a:solidFill>
+                  <a:srgbClr val="FF0000"/>
+                </a:solidFill>
+              </a:rPr>
+              <a:t>// 6 decimal digits for float </a:t>
+            </a:r>
+          </a:p>
+          <a:p>
+            <a:pPr eaLnBrk="1" hangingPunct="1"/>
+            <a:r>
+              <a:rPr lang="en-US" altLang="x-none" sz="1800"/>
+              <a:t>}</a:t>
+            </a:r>
+          </a:p>
+          <a:p>
+            <a:pPr eaLnBrk="1" hangingPunct="1"/>
+            <a:endParaRPr lang="en-US" altLang="x-none" sz="1800"/>
+          </a:p>
+          <a:p>
+            <a:pPr eaLnBrk="1" hangingPunct="1"/>
+            <a:r>
+              <a:rPr lang="en-US" altLang="x-none" sz="1800"/>
+              <a:t>// integer representation</a:t>
+            </a:r>
+          </a:p>
+          <a:p>
+            <a:pPr eaLnBrk="1" hangingPunct="1"/>
+            <a:r>
+              <a:rPr lang="en-US" altLang="x-none" sz="1800"/>
+              <a:t>#include&lt;</a:t>
+            </a:r>
+            <a:r>
+              <a:rPr lang="en-US" altLang="x-none" sz="1800" err="1"/>
+              <a:t>cstring</a:t>
+            </a:r>
+            <a:r>
+              <a:rPr lang="en-US" altLang="x-none" sz="1800"/>
+              <a:t>&gt;</a:t>
+            </a:r>
+          </a:p>
+          <a:p>
+            <a:pPr eaLnBrk="1" hangingPunct="1"/>
+            <a:r>
+              <a:rPr lang="en-US" altLang="x-none" sz="1800"/>
+              <a:t>#include&lt;</a:t>
+            </a:r>
+            <a:r>
+              <a:rPr lang="en-US" altLang="x-none" sz="1800" err="1"/>
+              <a:t>bitset</a:t>
+            </a:r>
+            <a:r>
+              <a:rPr lang="en-US" altLang="x-none" sz="1800"/>
+              <a:t>&gt;</a:t>
+            </a:r>
+          </a:p>
+          <a:p>
+            <a:pPr eaLnBrk="1" hangingPunct="1"/>
+            <a:r>
+              <a:rPr lang="en-US" altLang="x-none" sz="1800"/>
+              <a:t>int f2i(float x) { int </a:t>
+            </a:r>
+            <a:r>
+              <a:rPr lang="en-US" altLang="x-none" sz="1800" err="1"/>
+              <a:t>i</a:t>
+            </a:r>
+            <a:r>
+              <a:rPr lang="en-US" altLang="x-none" sz="1800"/>
+              <a:t>; </a:t>
+            </a:r>
+            <a:r>
+              <a:rPr lang="en-US" altLang="x-none" sz="1800" err="1"/>
+              <a:t>memcpy</a:t>
+            </a:r>
+            <a:r>
+              <a:rPr lang="en-US" altLang="x-none" sz="1800"/>
+              <a:t>(&amp;</a:t>
+            </a:r>
+            <a:r>
+              <a:rPr lang="en-US" altLang="x-none" sz="1800" err="1"/>
+              <a:t>i</a:t>
+            </a:r>
+            <a:r>
+              <a:rPr lang="en-US" altLang="x-none" sz="1800"/>
+              <a:t>,&amp;</a:t>
+            </a:r>
+            <a:r>
+              <a:rPr lang="en-US" altLang="x-none" sz="1800" err="1"/>
+              <a:t>x,sizeof</a:t>
+            </a:r>
+            <a:r>
+              <a:rPr lang="en-US" altLang="x-none" sz="1800"/>
+              <a:t>(int)); return </a:t>
+            </a:r>
+            <a:r>
+              <a:rPr lang="en-US" altLang="x-none" sz="1800" err="1"/>
+              <a:t>i</a:t>
+            </a:r>
+            <a:r>
+              <a:rPr lang="en-US" altLang="x-none" sz="1800"/>
+              <a:t>;} </a:t>
+            </a:r>
+            <a:r>
+              <a:rPr lang="en-US" altLang="x-none" sz="1800">
+                <a:solidFill>
+                  <a:srgbClr val="FF0000"/>
+                </a:solidFill>
+              </a:rPr>
+              <a:t>// compiler will optimize</a:t>
+            </a:r>
+          </a:p>
+          <a:p>
+            <a:pPr eaLnBrk="1" hangingPunct="1"/>
+            <a:r>
+              <a:rPr lang="en-US" altLang="x-none" sz="1800"/>
+              <a:t>//  use </a:t>
+            </a:r>
+            <a:r>
+              <a:rPr lang="en-US" altLang="x-none" sz="1800" err="1"/>
+              <a:t>bitset</a:t>
+            </a:r>
+            <a:r>
+              <a:rPr lang="en-US" altLang="x-none" sz="1800"/>
+              <a:t> to print in binary (bit by bit) </a:t>
+            </a:r>
+          </a:p>
+          <a:p>
+            <a:pPr eaLnBrk="1" hangingPunct="1"/>
+            <a:r>
+              <a:rPr lang="en-US" altLang="x-none" sz="1800"/>
+              <a:t>std::</a:t>
+            </a:r>
+            <a:r>
+              <a:rPr lang="en-US" altLang="x-none" sz="1800" err="1"/>
+              <a:t>cout</a:t>
+            </a:r>
+            <a:r>
+              <a:rPr lang="en-US" altLang="x-none" sz="1800"/>
+              <a:t> &lt;&lt; std::</a:t>
+            </a:r>
+            <a:r>
+              <a:rPr lang="en-US" altLang="x-none" sz="1800" err="1"/>
+              <a:t>bitset</a:t>
+            </a:r>
+            <a:r>
+              <a:rPr lang="en-US" altLang="x-none" sz="1800"/>
+              <a:t>&lt;32&gt;(f2i(x)) &lt;&lt; std::</a:t>
+            </a:r>
+            <a:r>
+              <a:rPr lang="en-US" altLang="x-none" sz="1800" err="1"/>
+              <a:t>endl</a:t>
+            </a:r>
+            <a:r>
+              <a:rPr lang="en-US" altLang="x-none" sz="1800"/>
+              <a:t>; ;   </a:t>
+            </a:r>
+            <a:r>
+              <a:rPr lang="en-US" altLang="x-none" sz="1800">
+                <a:solidFill>
+                  <a:srgbClr val="FF0000"/>
+                </a:solidFill>
+              </a:rPr>
+              <a:t>// bit by bit</a:t>
+            </a:r>
+          </a:p>
+        </p:txBody>
+      </p:sp>
+    </p:spTree>
+  </p:cSld>
+  <p:clrMapOvr>
+    <a:masterClrMapping/>
+  </p:clrMapOvr>
+</p:sld>
+</file>
+
+<file path=ppt/slides/slide11.xml><?xml version="1.0" encoding="utf-8"?>
+<p:sld xmlns:a="http://schemas.openxmlformats.org/drawingml/2006/main" xmlns:r="http://schemas.openxmlformats.org/officeDocument/2006/relationships" xmlns:p="http://schemas.openxmlformats.org/presentationml/2006/main">
+  <p:cSld>
+    <p:spTree>
+      <p:nvGrpSpPr>
+        <p:cNvPr id="1" name=""/>
+        <p:cNvGrpSpPr/>
+        <p:nvPr/>
+      </p:nvGrpSpPr>
+      <p:grpSpPr>
+        <a:xfrm>
+          <a:off x="0" y="0"/>
+          <a:ext cx="0" cy="0"/>
+          <a:chOff x="0" y="0"/>
+          <a:chExt cx="0" cy="0"/>
+        </a:xfrm>
+      </p:grpSpPr>
+      <p:sp>
+        <p:nvSpPr>
           <p:cNvPr id="26625" name="Title 1"/>
           <p:cNvSpPr>
             <a:spLocks noGrp="1"/>
@@ -4303,7 +5305,7 @@
                 <a:latin typeface="Garamond" charset="0"/>
               </a:rPr>
               <a:pPr eaLnBrk="1" hangingPunct="1"/>
-              <a:t>10</a:t>
+              <a:t>11</a:t>
             </a:fld>
             <a:endParaRPr lang="it-IT" altLang="x-none" sz="1200">
               <a:latin typeface="Garamond" charset="0"/>
@@ -4844,7 +5846,7 @@
 </p:sld>
 </file>
 
-<file path=ppt/slides/slide11.xml><?xml version="1.0" encoding="utf-8"?>
+<file path=ppt/slides/slide12.xml><?xml version="1.0" encoding="utf-8"?>
 <p:sld xmlns:a="http://schemas.openxmlformats.org/drawingml/2006/main" xmlns:r="http://schemas.openxmlformats.org/officeDocument/2006/relationships" xmlns:p="http://schemas.openxmlformats.org/presentationml/2006/main">
   <p:cSld>
     <p:spTree>
@@ -4944,7 +5946,7 @@
 </p:sld>
 </file>
 
-<file path=ppt/slides/slide12.xml><?xml version="1.0" encoding="utf-8"?>
+<file path=ppt/slides/slide13.xml><?xml version="1.0" encoding="utf-8"?>
 <p:sld xmlns:a="http://schemas.openxmlformats.org/drawingml/2006/main" xmlns:r="http://schemas.openxmlformats.org/officeDocument/2006/relationships" xmlns:p="http://schemas.openxmlformats.org/presentationml/2006/main">
   <p:cSld>
     <p:spTree>
@@ -5097,7 +6099,7 @@
 </p:sld>
 </file>
 
-<file path=ppt/slides/slide13.xml><?xml version="1.0" encoding="utf-8"?>
+<file path=ppt/slides/slide14.xml><?xml version="1.0" encoding="utf-8"?>
 <p:sld xmlns:a="http://schemas.openxmlformats.org/drawingml/2006/main" xmlns:r="http://schemas.openxmlformats.org/officeDocument/2006/relationships" xmlns:p="http://schemas.openxmlformats.org/presentationml/2006/main">
   <p:cSld>
     <p:spTree>
@@ -5256,7 +6258,7 @@
 </p:sld>
 </file>
 
-<file path=ppt/slides/slide14.xml><?xml version="1.0" encoding="utf-8"?>
+<file path=ppt/slides/slide15.xml><?xml version="1.0" encoding="utf-8"?>
 <p:sld xmlns:a="http://schemas.openxmlformats.org/drawingml/2006/main" xmlns:r="http://schemas.openxmlformats.org/officeDocument/2006/relationships" xmlns:p="http://schemas.openxmlformats.org/presentationml/2006/main">
   <p:cSld>
     <p:spTree>
@@ -5393,7 +6395,7 @@
 </p:sld>
 </file>
 
-<file path=ppt/slides/slide15.xml><?xml version="1.0" encoding="utf-8"?>
+<file path=ppt/slides/slide16.xml><?xml version="1.0" encoding="utf-8"?>
 <p:sld xmlns:a="http://schemas.openxmlformats.org/drawingml/2006/main" xmlns:r="http://schemas.openxmlformats.org/officeDocument/2006/relationships" xmlns:p="http://schemas.openxmlformats.org/presentationml/2006/main">
   <p:cSld>
     <p:spTree>
@@ -5584,7 +6586,7 @@
 </p:sld>
 </file>
 
-<file path=ppt/slides/slide16.xml><?xml version="1.0" encoding="utf-8"?>
+<file path=ppt/slides/slide17.xml><?xml version="1.0" encoding="utf-8"?>
 <p:sld xmlns:a="http://schemas.openxmlformats.org/drawingml/2006/main" xmlns:r="http://schemas.openxmlformats.org/officeDocument/2006/relationships" xmlns:p="http://schemas.openxmlformats.org/presentationml/2006/main">
   <p:cSld>
     <p:spTree>
@@ -5747,7 +6749,7 @@
 </p:sld>
 </file>
 
-<file path=ppt/slides/slide17.xml><?xml version="1.0" encoding="utf-8"?>
+<file path=ppt/slides/slide18.xml><?xml version="1.0" encoding="utf-8"?>
 <p:sld xmlns:a="http://schemas.openxmlformats.org/drawingml/2006/main" xmlns:r="http://schemas.openxmlformats.org/officeDocument/2006/relationships" xmlns:p="http://schemas.openxmlformats.org/presentationml/2006/main">
   <p:cSld>
     <p:spTree>
@@ -5957,7 +6959,7 @@
 </p:sld>
 </file>
 
-<file path=ppt/slides/slide18.xml><?xml version="1.0" encoding="utf-8"?>
+<file path=ppt/slides/slide19.xml><?xml version="1.0" encoding="utf-8"?>
 <p:sld xmlns:a="http://schemas.openxmlformats.org/drawingml/2006/main" xmlns:r="http://schemas.openxmlformats.org/officeDocument/2006/relationships" xmlns:p="http://schemas.openxmlformats.org/presentationml/2006/main">
   <p:cSld>
     <p:spTree>
@@ -6112,132 +7114,6 @@
     <p:extLst>
       <p:ext uri="{BB962C8B-B14F-4D97-AF65-F5344CB8AC3E}">
         <p14:creationId xmlns:p14="http://schemas.microsoft.com/office/powerpoint/2010/main" val="3182472380"/>
-      </p:ext>
-    </p:extLst>
-  </p:cSld>
-  <p:clrMapOvr>
-    <a:masterClrMapping/>
-  </p:clrMapOvr>
-</p:sld>
-</file>
-
-<file path=ppt/slides/slide19.xml><?xml version="1.0" encoding="utf-8"?>
-<p:sld xmlns:a="http://schemas.openxmlformats.org/drawingml/2006/main" xmlns:r="http://schemas.openxmlformats.org/officeDocument/2006/relationships" xmlns:p="http://schemas.openxmlformats.org/presentationml/2006/main">
-  <p:cSld>
-    <p:spTree>
-      <p:nvGrpSpPr>
-        <p:cNvPr id="1" name=""/>
-        <p:cNvGrpSpPr/>
-        <p:nvPr/>
-      </p:nvGrpSpPr>
-      <p:grpSpPr>
-        <a:xfrm>
-          <a:off x="0" y="0"/>
-          <a:ext cx="0" cy="0"/>
-          <a:chOff x="0" y="0"/>
-          <a:chExt cx="0" cy="0"/>
-        </a:xfrm>
-      </p:grpSpPr>
-      <p:sp>
-        <p:nvSpPr>
-          <p:cNvPr id="2" name="Title 1">
-            <a:extLst>
-              <a:ext uri="{FF2B5EF4-FFF2-40B4-BE49-F238E27FC236}">
-                <a16:creationId xmlns:a16="http://schemas.microsoft.com/office/drawing/2014/main" id="{0A4D461D-F652-AAC2-4FC1-FDE365440E42}"/>
-              </a:ext>
-            </a:extLst>
-          </p:cNvPr>
-          <p:cNvSpPr>
-            <a:spLocks noGrp="1"/>
-          </p:cNvSpPr>
-          <p:nvPr>
-            <p:ph type="title"/>
-          </p:nvPr>
-        </p:nvSpPr>
-        <p:spPr/>
-        <p:txBody>
-          <a:bodyPr/>
-          <a:lstStyle/>
-          <a:p>
-            <a:r>
-              <a:rPr lang="en-US" dirty="0"/>
-              <a:t>Catastrophic cancellation</a:t>
-            </a:r>
-          </a:p>
-        </p:txBody>
-      </p:sp>
-      <p:sp>
-        <p:nvSpPr>
-          <p:cNvPr id="3" name="Content Placeholder 2">
-            <a:extLst>
-              <a:ext uri="{FF2B5EF4-FFF2-40B4-BE49-F238E27FC236}">
-                <a16:creationId xmlns:a16="http://schemas.microsoft.com/office/drawing/2014/main" id="{96186B28-45D1-57E1-A9B0-C1CC5697A300}"/>
-              </a:ext>
-            </a:extLst>
-          </p:cNvPr>
-          <p:cNvSpPr>
-            <a:spLocks noGrp="1"/>
-          </p:cNvSpPr>
-          <p:nvPr>
-            <p:ph idx="1"/>
-          </p:nvPr>
-        </p:nvSpPr>
-        <p:spPr/>
-        <p:txBody>
-          <a:bodyPr/>
-          <a:lstStyle/>
-          <a:p>
-            <a:r>
-              <a:rPr lang="en-US" dirty="0"/>
-              <a:t>42⊕3.3⊕ -45 = 0 while 42+3.3-45 = 0.3</a:t>
-            </a:r>
-          </a:p>
-          <a:p>
-            <a:pPr lvl="1"/>
-            <a:r>
-              <a:rPr lang="en-US" dirty="0"/>
-              <a:t>Catastrophic cancellation</a:t>
-            </a:r>
-          </a:p>
-          <a:p>
-            <a:r>
-              <a:rPr lang="en-US" dirty="0" err="1"/>
-              <a:t>asum</a:t>
-            </a:r>
-            <a:r>
-              <a:rPr lang="en-US" dirty="0"/>
-              <a:t>(42,3.3) = 45,0.3</a:t>
-            </a:r>
-          </a:p>
-          <a:p>
-            <a:r>
-              <a:rPr lang="en-US" dirty="0" err="1"/>
-              <a:t>asum</a:t>
-            </a:r>
-            <a:r>
-              <a:rPr lang="en-US" dirty="0"/>
-              <a:t>(45 ,-45) = 0.0,0.0</a:t>
-            </a:r>
-          </a:p>
-          <a:p>
-            <a:r>
-              <a:rPr lang="en-US" dirty="0" err="1"/>
-              <a:t>asum</a:t>
-            </a:r>
-            <a:r>
-              <a:rPr lang="en-US" dirty="0"/>
-              <a:t>(0.0,0.3+0.0) = 0.3, 0.0 </a:t>
-            </a:r>
-          </a:p>
-          <a:p>
-            <a:endParaRPr lang="en-US" dirty="0"/>
-          </a:p>
-        </p:txBody>
-      </p:sp>
-    </p:spTree>
-    <p:extLst>
-      <p:ext uri="{BB962C8B-B14F-4D97-AF65-F5344CB8AC3E}">
-        <p14:creationId xmlns:p14="http://schemas.microsoft.com/office/powerpoint/2010/main" val="3295552409"/>
       </p:ext>
     </p:extLst>
   </p:cSld>
@@ -6422,6 +7298,132 @@
 </file>
 
 <file path=ppt/slides/slide20.xml><?xml version="1.0" encoding="utf-8"?>
+<p:sld xmlns:a="http://schemas.openxmlformats.org/drawingml/2006/main" xmlns:r="http://schemas.openxmlformats.org/officeDocument/2006/relationships" xmlns:p="http://schemas.openxmlformats.org/presentationml/2006/main">
+  <p:cSld>
+    <p:spTree>
+      <p:nvGrpSpPr>
+        <p:cNvPr id="1" name=""/>
+        <p:cNvGrpSpPr/>
+        <p:nvPr/>
+      </p:nvGrpSpPr>
+      <p:grpSpPr>
+        <a:xfrm>
+          <a:off x="0" y="0"/>
+          <a:ext cx="0" cy="0"/>
+          <a:chOff x="0" y="0"/>
+          <a:chExt cx="0" cy="0"/>
+        </a:xfrm>
+      </p:grpSpPr>
+      <p:sp>
+        <p:nvSpPr>
+          <p:cNvPr id="2" name="Title 1">
+            <a:extLst>
+              <a:ext uri="{FF2B5EF4-FFF2-40B4-BE49-F238E27FC236}">
+                <a16:creationId xmlns:a16="http://schemas.microsoft.com/office/drawing/2014/main" id="{0A4D461D-F652-AAC2-4FC1-FDE365440E42}"/>
+              </a:ext>
+            </a:extLst>
+          </p:cNvPr>
+          <p:cNvSpPr>
+            <a:spLocks noGrp="1"/>
+          </p:cNvSpPr>
+          <p:nvPr>
+            <p:ph type="title"/>
+          </p:nvPr>
+        </p:nvSpPr>
+        <p:spPr/>
+        <p:txBody>
+          <a:bodyPr/>
+          <a:lstStyle/>
+          <a:p>
+            <a:r>
+              <a:rPr lang="en-US" dirty="0"/>
+              <a:t>Catastrophic cancellation</a:t>
+            </a:r>
+          </a:p>
+        </p:txBody>
+      </p:sp>
+      <p:sp>
+        <p:nvSpPr>
+          <p:cNvPr id="3" name="Content Placeholder 2">
+            <a:extLst>
+              <a:ext uri="{FF2B5EF4-FFF2-40B4-BE49-F238E27FC236}">
+                <a16:creationId xmlns:a16="http://schemas.microsoft.com/office/drawing/2014/main" id="{96186B28-45D1-57E1-A9B0-C1CC5697A300}"/>
+              </a:ext>
+            </a:extLst>
+          </p:cNvPr>
+          <p:cNvSpPr>
+            <a:spLocks noGrp="1"/>
+          </p:cNvSpPr>
+          <p:nvPr>
+            <p:ph idx="1"/>
+          </p:nvPr>
+        </p:nvSpPr>
+        <p:spPr/>
+        <p:txBody>
+          <a:bodyPr/>
+          <a:lstStyle/>
+          <a:p>
+            <a:r>
+              <a:rPr lang="en-US" dirty="0"/>
+              <a:t>42⊕3.3⊕ -45 = 0 while 42+3.3-45 = 0.3</a:t>
+            </a:r>
+          </a:p>
+          <a:p>
+            <a:pPr lvl="1"/>
+            <a:r>
+              <a:rPr lang="en-US" dirty="0"/>
+              <a:t>Catastrophic cancellation</a:t>
+            </a:r>
+          </a:p>
+          <a:p>
+            <a:r>
+              <a:rPr lang="en-US" dirty="0" err="1"/>
+              <a:t>asum</a:t>
+            </a:r>
+            <a:r>
+              <a:rPr lang="en-US" dirty="0"/>
+              <a:t>(42,3.3) = 45,0.3</a:t>
+            </a:r>
+          </a:p>
+          <a:p>
+            <a:r>
+              <a:rPr lang="en-US" dirty="0" err="1"/>
+              <a:t>asum</a:t>
+            </a:r>
+            <a:r>
+              <a:rPr lang="en-US" dirty="0"/>
+              <a:t>(45 ,-45) = 0.0,0.0</a:t>
+            </a:r>
+          </a:p>
+          <a:p>
+            <a:r>
+              <a:rPr lang="en-US" dirty="0" err="1"/>
+              <a:t>asum</a:t>
+            </a:r>
+            <a:r>
+              <a:rPr lang="en-US" dirty="0"/>
+              <a:t>(0.0,0.3+0.0) = 0.3, 0.0 </a:t>
+            </a:r>
+          </a:p>
+          <a:p>
+            <a:endParaRPr lang="en-US" dirty="0"/>
+          </a:p>
+        </p:txBody>
+      </p:sp>
+    </p:spTree>
+    <p:extLst>
+      <p:ext uri="{BB962C8B-B14F-4D97-AF65-F5344CB8AC3E}">
+        <p14:creationId xmlns:p14="http://schemas.microsoft.com/office/powerpoint/2010/main" val="3295552409"/>
+      </p:ext>
+    </p:extLst>
+  </p:cSld>
+  <p:clrMapOvr>
+    <a:masterClrMapping/>
+  </p:clrMapOvr>
+</p:sld>
+</file>
+
+<file path=ppt/slides/slide21.xml><?xml version="1.0" encoding="utf-8"?>
 <p:sld xmlns:a="http://schemas.openxmlformats.org/drawingml/2006/main" xmlns:r="http://schemas.openxmlformats.org/officeDocument/2006/relationships" xmlns:p="http://schemas.openxmlformats.org/presentationml/2006/main">
   <p:cSld>
     <p:spTree>
@@ -6750,8 +7752,12 @@
               <a:t>i</a:t>
             </a:r>
             <a:r>
+              <a:rPr lang="en-US" altLang="en-US" sz="1600" b="1"/>
+              <a:t>&lt;n</a:t>
+            </a:r>
+            <a:r>
               <a:rPr lang="en-US" altLang="en-US" sz="1600" b="1" dirty="0"/>
-              <a:t>!=n; ++</a:t>
+              <a:t>; ++</a:t>
             </a:r>
             <a:r>
               <a:rPr lang="en-US" altLang="en-US" sz="1600" b="1" dirty="0" err="1"/>
@@ -6781,7 +7787,7 @@
             <a:pPr eaLnBrk="1" hangingPunct="1"/>
             <a:r>
               <a:rPr lang="en-US" altLang="en-US" sz="1600" b="1" i="1" dirty="0"/>
-              <a:t>  s = sum + y</a:t>
+              <a:t>  auto s = sum + y</a:t>
             </a:r>
           </a:p>
           <a:p>
@@ -6868,7 +7874,7 @@
 </p:sld>
 </file>
 
-<file path=ppt/slides/slide21.xml><?xml version="1.0" encoding="utf-8"?>
+<file path=ppt/slides/slide22.xml><?xml version="1.0" encoding="utf-8"?>
 <p:sld xmlns:a="http://schemas.openxmlformats.org/drawingml/2006/main" xmlns:r="http://schemas.openxmlformats.org/officeDocument/2006/relationships" xmlns:p="http://schemas.openxmlformats.org/presentationml/2006/main">
   <p:cSld>
     <p:spTree>
@@ -7033,7 +8039,7 @@
 </p:sld>
 </file>
 
-<file path=ppt/slides/slide22.xml><?xml version="1.0" encoding="utf-8"?>
+<file path=ppt/slides/slide23.xml><?xml version="1.0" encoding="utf-8"?>
 <p:sld xmlns:a="http://schemas.openxmlformats.org/drawingml/2006/main" xmlns:r="http://schemas.openxmlformats.org/officeDocument/2006/relationships" xmlns:p="http://schemas.openxmlformats.org/presentationml/2006/main">
   <p:cSld>
     <p:spTree>
@@ -7239,7 +8245,7 @@
 </p:sld>
 </file>
 
-<file path=ppt/slides/slide23.xml><?xml version="1.0" encoding="utf-8"?>
+<file path=ppt/slides/slide24.xml><?xml version="1.0" encoding="utf-8"?>
 <p:sld xmlns:a="http://schemas.openxmlformats.org/drawingml/2006/main" xmlns:r="http://schemas.openxmlformats.org/officeDocument/2006/relationships" xmlns:p="http://schemas.openxmlformats.org/presentationml/2006/main">
   <p:cSld>
     <p:spTree>
@@ -7436,7 +8442,7 @@
           <a:p>
             <a:r>
               <a:rPr lang="en-US" dirty="0"/>
-              <a:t>Kahan comes to the rescue again with his algorithm</a:t>
+              <a:t>Kahan comes to the rescue again with this algorithm</a:t>
             </a:r>
           </a:p>
           <a:p>
@@ -7633,7 +8639,7 @@
                 <a:latin typeface="Arial Unicode MS" panose="020B0604020202020204" pitchFamily="34" charset="-128"/>
                 <a:ea typeface="Courier 10 Pitch"/>
               </a:rPr>
-              <a:t>kahan_det</a:t>
+              <a:t>kahanDet</a:t>
             </a:r>
             <a:r>
               <a:rPr lang="en-US" altLang="en-US" sz="1600" dirty="0">
@@ -7722,7 +8728,7 @@
                 <a:latin typeface="Arial Unicode MS" panose="020B0604020202020204" pitchFamily="34" charset="-128"/>
                 <a:ea typeface="Courier 10 Pitch"/>
               </a:rPr>
-              <a:t>(-b, c, w); // error on w (</a:t>
+              <a:t>(-b, c, w); // error on w (w,-e) = </a:t>
             </a:r>
             <a:r>
               <a:rPr lang="en-US" altLang="en-US" sz="1600" dirty="0" err="1">
@@ -7732,17 +8738,7 @@
                 <a:latin typeface="Arial Unicode MS" panose="020B0604020202020204" pitchFamily="34" charset="-128"/>
                 <a:ea typeface="Courier 10 Pitch"/>
               </a:rPr>
-              <a:t>w,e</a:t>
-            </a:r>
-            <a:r>
-              <a:rPr lang="en-US" altLang="en-US" sz="1600">
-                <a:solidFill>
-                  <a:srgbClr val="000000"/>
-                </a:solidFill>
-                <a:latin typeface="Arial Unicode MS" panose="020B0604020202020204" pitchFamily="34" charset="-128"/>
-                <a:ea typeface="Courier 10 Pitch"/>
-              </a:rPr>
-              <a:t>) = augmentedMultiply</a:t>
+              <a:t>augmentedMultiply</a:t>
             </a:r>
             <a:r>
               <a:rPr lang="en-US" altLang="en-US" sz="1600" dirty="0">
@@ -7863,6 +8859,1203 @@
         <p14:creationId xmlns:p14="http://schemas.microsoft.com/office/powerpoint/2010/main" val="3367458698"/>
       </p:ext>
     </p:extLst>
+  </p:cSld>
+  <p:clrMapOvr>
+    <a:masterClrMapping/>
+  </p:clrMapOvr>
+</p:sld>
+</file>
+
+<file path=ppt/slides/slide25.xml><?xml version="1.0" encoding="utf-8"?>
+<p:sld xmlns:a="http://schemas.openxmlformats.org/drawingml/2006/main" xmlns:r="http://schemas.openxmlformats.org/officeDocument/2006/relationships" xmlns:p="http://schemas.openxmlformats.org/presentationml/2006/main">
+  <p:cSld>
+    <p:spTree>
+      <p:nvGrpSpPr>
+        <p:cNvPr id="1" name=""/>
+        <p:cNvGrpSpPr/>
+        <p:nvPr/>
+      </p:nvGrpSpPr>
+      <p:grpSpPr>
+        <a:xfrm>
+          <a:off x="0" y="0"/>
+          <a:ext cx="0" cy="0"/>
+          <a:chOff x="0" y="0"/>
+          <a:chExt cx="0" cy="0"/>
+        </a:xfrm>
+      </p:grpSpPr>
+      <p:sp>
+        <p:nvSpPr>
+          <p:cNvPr id="32769" name="Title 1"/>
+          <p:cNvSpPr>
+            <a:spLocks noGrp="1"/>
+          </p:cNvSpPr>
+          <p:nvPr>
+            <p:ph type="title"/>
+          </p:nvPr>
+        </p:nvSpPr>
+        <p:spPr>
+          <a:xfrm>
+            <a:off x="234778" y="258763"/>
+            <a:ext cx="11957222" cy="1225550"/>
+          </a:xfrm>
+        </p:spPr>
+        <p:txBody>
+          <a:bodyPr>
+            <a:normAutofit fontScale="90000"/>
+          </a:bodyPr>
+          <a:lstStyle/>
+          <a:p>
+            <a:r>
+              <a:rPr lang="en-US" altLang="x-none" dirty="0"/>
+              <a:t>Classical example of loss of precision due to cancellation</a:t>
+            </a:r>
+          </a:p>
+        </p:txBody>
+      </p:sp>
+      <p:sp>
+        <p:nvSpPr>
+          <p:cNvPr id="32770" name="Date Placeholder 2"/>
+          <p:cNvSpPr>
+            <a:spLocks noGrp="1"/>
+          </p:cNvSpPr>
+          <p:nvPr>
+            <p:ph type="dt" sz="quarter" idx="10"/>
+          </p:nvPr>
+        </p:nvSpPr>
+        <p:spPr>
+          <a:noFill/>
+          <a:ln/>
+          <a:extLst>
+            <a:ext uri="{909E8E84-426E-40DD-AFC4-6F175D3DCCD1}">
+              <a14:hiddenFill xmlns:a14="http://schemas.microsoft.com/office/drawing/2010/main">
+                <a:solidFill>
+                  <a:srgbClr val="FFFFFF"/>
+                </a:solidFill>
+              </a14:hiddenFill>
+            </a:ext>
+            <a:ext uri="{91240B29-F687-4F45-9708-019B960494DF}">
+              <a14:hiddenLine xmlns:a14="http://schemas.microsoft.com/office/drawing/2010/main" w="9525">
+                <a:solidFill>
+                  <a:srgbClr val="000000"/>
+                </a:solidFill>
+                <a:miter lim="800000"/>
+                <a:headEnd/>
+                <a:tailEnd/>
+              </a14:hiddenLine>
+            </a:ext>
+          </a:extLst>
+        </p:spPr>
+        <p:txBody>
+          <a:bodyPr/>
+          <a:lstStyle>
+            <a:lvl1pPr eaLnBrk="0" hangingPunct="0">
+              <a:defRPr sz="2400">
+                <a:solidFill>
+                  <a:schemeClr val="tx1"/>
+                </a:solidFill>
+                <a:latin typeface="Arial" charset="0"/>
+                <a:ea typeface="ＭＳ Ｐゴシック" charset="-128"/>
+              </a:defRPr>
+            </a:lvl1pPr>
+            <a:lvl2pPr marL="742950" indent="-285750" eaLnBrk="0" hangingPunct="0">
+              <a:defRPr sz="2400">
+                <a:solidFill>
+                  <a:schemeClr val="tx1"/>
+                </a:solidFill>
+                <a:latin typeface="Arial" charset="0"/>
+                <a:ea typeface="ＭＳ Ｐゴシック" charset="-128"/>
+              </a:defRPr>
+            </a:lvl2pPr>
+            <a:lvl3pPr marL="1143000" indent="-228600" eaLnBrk="0" hangingPunct="0">
+              <a:defRPr sz="2400">
+                <a:solidFill>
+                  <a:schemeClr val="tx1"/>
+                </a:solidFill>
+                <a:latin typeface="Arial" charset="0"/>
+                <a:ea typeface="ＭＳ Ｐゴシック" charset="-128"/>
+              </a:defRPr>
+            </a:lvl3pPr>
+            <a:lvl4pPr marL="1600200" indent="-228600" eaLnBrk="0" hangingPunct="0">
+              <a:defRPr sz="2400">
+                <a:solidFill>
+                  <a:schemeClr val="tx1"/>
+                </a:solidFill>
+                <a:latin typeface="Arial" charset="0"/>
+                <a:ea typeface="ＭＳ Ｐゴシック" charset="-128"/>
+              </a:defRPr>
+            </a:lvl4pPr>
+            <a:lvl5pPr marL="2057400" indent="-228600" eaLnBrk="0" hangingPunct="0">
+              <a:defRPr sz="2400">
+                <a:solidFill>
+                  <a:schemeClr val="tx1"/>
+                </a:solidFill>
+                <a:latin typeface="Arial" charset="0"/>
+                <a:ea typeface="ＭＳ Ｐゴシック" charset="-128"/>
+              </a:defRPr>
+            </a:lvl5pPr>
+            <a:lvl6pPr marL="2514600" indent="-228600" eaLnBrk="0" fontAlgn="base" hangingPunct="0">
+              <a:spcBef>
+                <a:spcPct val="0"/>
+              </a:spcBef>
+              <a:spcAft>
+                <a:spcPct val="0"/>
+              </a:spcAft>
+              <a:defRPr sz="2400">
+                <a:solidFill>
+                  <a:schemeClr val="tx1"/>
+                </a:solidFill>
+                <a:latin typeface="Arial" charset="0"/>
+                <a:ea typeface="ＭＳ Ｐゴシック" charset="-128"/>
+              </a:defRPr>
+            </a:lvl6pPr>
+            <a:lvl7pPr marL="2971800" indent="-228600" eaLnBrk="0" fontAlgn="base" hangingPunct="0">
+              <a:spcBef>
+                <a:spcPct val="0"/>
+              </a:spcBef>
+              <a:spcAft>
+                <a:spcPct val="0"/>
+              </a:spcAft>
+              <a:defRPr sz="2400">
+                <a:solidFill>
+                  <a:schemeClr val="tx1"/>
+                </a:solidFill>
+                <a:latin typeface="Arial" charset="0"/>
+                <a:ea typeface="ＭＳ Ｐゴシック" charset="-128"/>
+              </a:defRPr>
+            </a:lvl7pPr>
+            <a:lvl8pPr marL="3429000" indent="-228600" eaLnBrk="0" fontAlgn="base" hangingPunct="0">
+              <a:spcBef>
+                <a:spcPct val="0"/>
+              </a:spcBef>
+              <a:spcAft>
+                <a:spcPct val="0"/>
+              </a:spcAft>
+              <a:defRPr sz="2400">
+                <a:solidFill>
+                  <a:schemeClr val="tx1"/>
+                </a:solidFill>
+                <a:latin typeface="Arial" charset="0"/>
+                <a:ea typeface="ＭＳ Ｐゴシック" charset="-128"/>
+              </a:defRPr>
+            </a:lvl8pPr>
+            <a:lvl9pPr marL="3886200" indent="-228600" eaLnBrk="0" fontAlgn="base" hangingPunct="0">
+              <a:spcBef>
+                <a:spcPct val="0"/>
+              </a:spcBef>
+              <a:spcAft>
+                <a:spcPct val="0"/>
+              </a:spcAft>
+              <a:defRPr sz="2400">
+                <a:solidFill>
+                  <a:schemeClr val="tx1"/>
+                </a:solidFill>
+                <a:latin typeface="Arial" charset="0"/>
+                <a:ea typeface="ＭＳ Ｐゴシック" charset="-128"/>
+              </a:defRPr>
+            </a:lvl9pPr>
+          </a:lstStyle>
+          <a:p>
+            <a:pPr eaLnBrk="1" hangingPunct="1"/>
+            <a:r>
+              <a:rPr lang="en-US" altLang="x-none" sz="1200">
+                <a:latin typeface="Garamond" charset="0"/>
+              </a:rPr>
+              <a:t>22 October 2016</a:t>
+            </a:r>
+            <a:endParaRPr lang="it-IT" altLang="x-none" sz="1200">
+              <a:latin typeface="Garamond" charset="0"/>
+            </a:endParaRPr>
+          </a:p>
+        </p:txBody>
+      </p:sp>
+      <p:sp>
+        <p:nvSpPr>
+          <p:cNvPr id="32771" name="Footer Placeholder 3"/>
+          <p:cNvSpPr>
+            <a:spLocks noGrp="1"/>
+          </p:cNvSpPr>
+          <p:nvPr>
+            <p:ph type="ftr" sz="quarter" idx="11"/>
+          </p:nvPr>
+        </p:nvSpPr>
+        <p:spPr>
+          <a:noFill/>
+          <a:ln/>
+          <a:extLst>
+            <a:ext uri="{909E8E84-426E-40DD-AFC4-6F175D3DCCD1}">
+              <a14:hiddenFill xmlns:a14="http://schemas.microsoft.com/office/drawing/2010/main">
+                <a:solidFill>
+                  <a:srgbClr val="FFFFFF"/>
+                </a:solidFill>
+              </a14:hiddenFill>
+            </a:ext>
+            <a:ext uri="{91240B29-F687-4F45-9708-019B960494DF}">
+              <a14:hiddenLine xmlns:a14="http://schemas.microsoft.com/office/drawing/2010/main" w="9525">
+                <a:solidFill>
+                  <a:srgbClr val="000000"/>
+                </a:solidFill>
+                <a:miter lim="800000"/>
+                <a:headEnd/>
+                <a:tailEnd/>
+              </a14:hiddenLine>
+            </a:ext>
+          </a:extLst>
+        </p:spPr>
+        <p:txBody>
+          <a:bodyPr/>
+          <a:lstStyle>
+            <a:lvl1pPr eaLnBrk="0" hangingPunct="0">
+              <a:defRPr sz="2400">
+                <a:solidFill>
+                  <a:schemeClr val="tx1"/>
+                </a:solidFill>
+                <a:latin typeface="Arial" charset="0"/>
+                <a:ea typeface="ＭＳ Ｐゴシック" charset="-128"/>
+              </a:defRPr>
+            </a:lvl1pPr>
+            <a:lvl2pPr marL="742950" indent="-285750" eaLnBrk="0" hangingPunct="0">
+              <a:defRPr sz="2400">
+                <a:solidFill>
+                  <a:schemeClr val="tx1"/>
+                </a:solidFill>
+                <a:latin typeface="Arial" charset="0"/>
+                <a:ea typeface="ＭＳ Ｐゴシック" charset="-128"/>
+              </a:defRPr>
+            </a:lvl2pPr>
+            <a:lvl3pPr marL="1143000" indent="-228600" eaLnBrk="0" hangingPunct="0">
+              <a:defRPr sz="2400">
+                <a:solidFill>
+                  <a:schemeClr val="tx1"/>
+                </a:solidFill>
+                <a:latin typeface="Arial" charset="0"/>
+                <a:ea typeface="ＭＳ Ｐゴシック" charset="-128"/>
+              </a:defRPr>
+            </a:lvl3pPr>
+            <a:lvl4pPr marL="1600200" indent="-228600" eaLnBrk="0" hangingPunct="0">
+              <a:defRPr sz="2400">
+                <a:solidFill>
+                  <a:schemeClr val="tx1"/>
+                </a:solidFill>
+                <a:latin typeface="Arial" charset="0"/>
+                <a:ea typeface="ＭＳ Ｐゴシック" charset="-128"/>
+              </a:defRPr>
+            </a:lvl4pPr>
+            <a:lvl5pPr marL="2057400" indent="-228600" eaLnBrk="0" hangingPunct="0">
+              <a:defRPr sz="2400">
+                <a:solidFill>
+                  <a:schemeClr val="tx1"/>
+                </a:solidFill>
+                <a:latin typeface="Arial" charset="0"/>
+                <a:ea typeface="ＭＳ Ｐゴシック" charset="-128"/>
+              </a:defRPr>
+            </a:lvl5pPr>
+            <a:lvl6pPr marL="2514600" indent="-228600" eaLnBrk="0" fontAlgn="base" hangingPunct="0">
+              <a:spcBef>
+                <a:spcPct val="0"/>
+              </a:spcBef>
+              <a:spcAft>
+                <a:spcPct val="0"/>
+              </a:spcAft>
+              <a:defRPr sz="2400">
+                <a:solidFill>
+                  <a:schemeClr val="tx1"/>
+                </a:solidFill>
+                <a:latin typeface="Arial" charset="0"/>
+                <a:ea typeface="ＭＳ Ｐゴシック" charset="-128"/>
+              </a:defRPr>
+            </a:lvl6pPr>
+            <a:lvl7pPr marL="2971800" indent="-228600" eaLnBrk="0" fontAlgn="base" hangingPunct="0">
+              <a:spcBef>
+                <a:spcPct val="0"/>
+              </a:spcBef>
+              <a:spcAft>
+                <a:spcPct val="0"/>
+              </a:spcAft>
+              <a:defRPr sz="2400">
+                <a:solidFill>
+                  <a:schemeClr val="tx1"/>
+                </a:solidFill>
+                <a:latin typeface="Arial" charset="0"/>
+                <a:ea typeface="ＭＳ Ｐゴシック" charset="-128"/>
+              </a:defRPr>
+            </a:lvl7pPr>
+            <a:lvl8pPr marL="3429000" indent="-228600" eaLnBrk="0" fontAlgn="base" hangingPunct="0">
+              <a:spcBef>
+                <a:spcPct val="0"/>
+              </a:spcBef>
+              <a:spcAft>
+                <a:spcPct val="0"/>
+              </a:spcAft>
+              <a:defRPr sz="2400">
+                <a:solidFill>
+                  <a:schemeClr val="tx1"/>
+                </a:solidFill>
+                <a:latin typeface="Arial" charset="0"/>
+                <a:ea typeface="ＭＳ Ｐゴシック" charset="-128"/>
+              </a:defRPr>
+            </a:lvl8pPr>
+            <a:lvl9pPr marL="3886200" indent="-228600" eaLnBrk="0" fontAlgn="base" hangingPunct="0">
+              <a:spcBef>
+                <a:spcPct val="0"/>
+              </a:spcBef>
+              <a:spcAft>
+                <a:spcPct val="0"/>
+              </a:spcAft>
+              <a:defRPr sz="2400">
+                <a:solidFill>
+                  <a:schemeClr val="tx1"/>
+                </a:solidFill>
+                <a:latin typeface="Arial" charset="0"/>
+                <a:ea typeface="ＭＳ Ｐゴシック" charset="-128"/>
+              </a:defRPr>
+            </a:lvl9pPr>
+          </a:lstStyle>
+          <a:p>
+            <a:pPr eaLnBrk="1" hangingPunct="1"/>
+            <a:r>
+              <a:rPr lang="en-US" altLang="x-none" sz="1200">
+                <a:latin typeface="Garamond" charset="0"/>
+              </a:rPr>
+              <a:t>Vincenzo Innocente</a:t>
+            </a:r>
+            <a:endParaRPr lang="it-IT" altLang="x-none" sz="1200">
+              <a:latin typeface="Garamond" charset="0"/>
+            </a:endParaRPr>
+          </a:p>
+        </p:txBody>
+      </p:sp>
+      <p:sp>
+        <p:nvSpPr>
+          <p:cNvPr id="32772" name="Slide Number Placeholder 4"/>
+          <p:cNvSpPr>
+            <a:spLocks noGrp="1"/>
+          </p:cNvSpPr>
+          <p:nvPr>
+            <p:ph type="sldNum" sz="quarter" idx="12"/>
+          </p:nvPr>
+        </p:nvSpPr>
+        <p:spPr>
+          <a:noFill/>
+          <a:ln/>
+          <a:extLst>
+            <a:ext uri="{909E8E84-426E-40DD-AFC4-6F175D3DCCD1}">
+              <a14:hiddenFill xmlns:a14="http://schemas.microsoft.com/office/drawing/2010/main">
+                <a:solidFill>
+                  <a:srgbClr val="FFFFFF"/>
+                </a:solidFill>
+              </a14:hiddenFill>
+            </a:ext>
+            <a:ext uri="{91240B29-F687-4F45-9708-019B960494DF}">
+              <a14:hiddenLine xmlns:a14="http://schemas.microsoft.com/office/drawing/2010/main" w="9525">
+                <a:solidFill>
+                  <a:srgbClr val="000000"/>
+                </a:solidFill>
+                <a:miter lim="800000"/>
+                <a:headEnd/>
+                <a:tailEnd/>
+              </a14:hiddenLine>
+            </a:ext>
+          </a:extLst>
+        </p:spPr>
+        <p:txBody>
+          <a:bodyPr/>
+          <a:lstStyle>
+            <a:lvl1pPr eaLnBrk="0" hangingPunct="0">
+              <a:defRPr sz="2400">
+                <a:solidFill>
+                  <a:schemeClr val="tx1"/>
+                </a:solidFill>
+                <a:latin typeface="Arial" charset="0"/>
+                <a:ea typeface="ＭＳ Ｐゴシック" charset="-128"/>
+              </a:defRPr>
+            </a:lvl1pPr>
+            <a:lvl2pPr marL="742950" indent="-285750" eaLnBrk="0" hangingPunct="0">
+              <a:defRPr sz="2400">
+                <a:solidFill>
+                  <a:schemeClr val="tx1"/>
+                </a:solidFill>
+                <a:latin typeface="Arial" charset="0"/>
+                <a:ea typeface="ＭＳ Ｐゴシック" charset="-128"/>
+              </a:defRPr>
+            </a:lvl2pPr>
+            <a:lvl3pPr marL="1143000" indent="-228600" eaLnBrk="0" hangingPunct="0">
+              <a:defRPr sz="2400">
+                <a:solidFill>
+                  <a:schemeClr val="tx1"/>
+                </a:solidFill>
+                <a:latin typeface="Arial" charset="0"/>
+                <a:ea typeface="ＭＳ Ｐゴシック" charset="-128"/>
+              </a:defRPr>
+            </a:lvl3pPr>
+            <a:lvl4pPr marL="1600200" indent="-228600" eaLnBrk="0" hangingPunct="0">
+              <a:defRPr sz="2400">
+                <a:solidFill>
+                  <a:schemeClr val="tx1"/>
+                </a:solidFill>
+                <a:latin typeface="Arial" charset="0"/>
+                <a:ea typeface="ＭＳ Ｐゴシック" charset="-128"/>
+              </a:defRPr>
+            </a:lvl4pPr>
+            <a:lvl5pPr marL="2057400" indent="-228600" eaLnBrk="0" hangingPunct="0">
+              <a:defRPr sz="2400">
+                <a:solidFill>
+                  <a:schemeClr val="tx1"/>
+                </a:solidFill>
+                <a:latin typeface="Arial" charset="0"/>
+                <a:ea typeface="ＭＳ Ｐゴシック" charset="-128"/>
+              </a:defRPr>
+            </a:lvl5pPr>
+            <a:lvl6pPr marL="2514600" indent="-228600" eaLnBrk="0" fontAlgn="base" hangingPunct="0">
+              <a:spcBef>
+                <a:spcPct val="0"/>
+              </a:spcBef>
+              <a:spcAft>
+                <a:spcPct val="0"/>
+              </a:spcAft>
+              <a:defRPr sz="2400">
+                <a:solidFill>
+                  <a:schemeClr val="tx1"/>
+                </a:solidFill>
+                <a:latin typeface="Arial" charset="0"/>
+                <a:ea typeface="ＭＳ Ｐゴシック" charset="-128"/>
+              </a:defRPr>
+            </a:lvl6pPr>
+            <a:lvl7pPr marL="2971800" indent="-228600" eaLnBrk="0" fontAlgn="base" hangingPunct="0">
+              <a:spcBef>
+                <a:spcPct val="0"/>
+              </a:spcBef>
+              <a:spcAft>
+                <a:spcPct val="0"/>
+              </a:spcAft>
+              <a:defRPr sz="2400">
+                <a:solidFill>
+                  <a:schemeClr val="tx1"/>
+                </a:solidFill>
+                <a:latin typeface="Arial" charset="0"/>
+                <a:ea typeface="ＭＳ Ｐゴシック" charset="-128"/>
+              </a:defRPr>
+            </a:lvl7pPr>
+            <a:lvl8pPr marL="3429000" indent="-228600" eaLnBrk="0" fontAlgn="base" hangingPunct="0">
+              <a:spcBef>
+                <a:spcPct val="0"/>
+              </a:spcBef>
+              <a:spcAft>
+                <a:spcPct val="0"/>
+              </a:spcAft>
+              <a:defRPr sz="2400">
+                <a:solidFill>
+                  <a:schemeClr val="tx1"/>
+                </a:solidFill>
+                <a:latin typeface="Arial" charset="0"/>
+                <a:ea typeface="ＭＳ Ｐゴシック" charset="-128"/>
+              </a:defRPr>
+            </a:lvl8pPr>
+            <a:lvl9pPr marL="3886200" indent="-228600" eaLnBrk="0" fontAlgn="base" hangingPunct="0">
+              <a:spcBef>
+                <a:spcPct val="0"/>
+              </a:spcBef>
+              <a:spcAft>
+                <a:spcPct val="0"/>
+              </a:spcAft>
+              <a:defRPr sz="2400">
+                <a:solidFill>
+                  <a:schemeClr val="tx1"/>
+                </a:solidFill>
+                <a:latin typeface="Arial" charset="0"/>
+                <a:ea typeface="ＭＳ Ｐゴシック" charset="-128"/>
+              </a:defRPr>
+            </a:lvl9pPr>
+          </a:lstStyle>
+          <a:p>
+            <a:pPr eaLnBrk="1" hangingPunct="1"/>
+            <a:fld id="{5E060A6B-253B-E84D-BDFF-791BD1DD4C11}" type="slidenum">
+              <a:rPr lang="it-IT" altLang="x-none" sz="1200">
+                <a:latin typeface="Garamond" charset="0"/>
+              </a:rPr>
+              <a:pPr eaLnBrk="1" hangingPunct="1"/>
+              <a:t>25</a:t>
+            </a:fld>
+            <a:endParaRPr lang="it-IT" altLang="x-none" sz="1200">
+              <a:latin typeface="Garamond" charset="0"/>
+            </a:endParaRPr>
+          </a:p>
+        </p:txBody>
+      </p:sp>
+      <p:pic>
+        <p:nvPicPr>
+          <p:cNvPr id="32774" name="Picture 8"/>
+          <p:cNvPicPr>
+            <a:picLocks noChangeAspect="1"/>
+          </p:cNvPicPr>
+          <p:nvPr/>
+        </p:nvPicPr>
+        <p:blipFill>
+          <a:blip r:embed="rId2">
+            <a:extLst>
+              <a:ext uri="{28A0092B-C50C-407E-A947-70E740481C1C}">
+                <a14:useLocalDpi xmlns:a14="http://schemas.microsoft.com/office/drawing/2010/main" val="0"/>
+              </a:ext>
+            </a:extLst>
+          </a:blip>
+          <a:srcRect/>
+          <a:stretch>
+            <a:fillRect/>
+          </a:stretch>
+        </p:blipFill>
+        <p:spPr bwMode="auto">
+          <a:xfrm>
+            <a:off x="1774825" y="1484313"/>
+            <a:ext cx="5005388" cy="2665412"/>
+          </a:xfrm>
+          <a:prstGeom prst="rect">
+            <a:avLst/>
+          </a:prstGeom>
+          <a:noFill/>
+          <a:ln>
+            <a:noFill/>
+          </a:ln>
+          <a:extLst>
+            <a:ext uri="{909E8E84-426E-40DD-AFC4-6F175D3DCCD1}">
+              <a14:hiddenFill xmlns:a14="http://schemas.microsoft.com/office/drawing/2010/main">
+                <a:solidFill>
+                  <a:srgbClr val="FFFFFF"/>
+                </a:solidFill>
+              </a14:hiddenFill>
+            </a:ext>
+            <a:ext uri="{91240B29-F687-4F45-9708-019B960494DF}">
+              <a14:hiddenLine xmlns:a14="http://schemas.microsoft.com/office/drawing/2010/main" w="9525">
+                <a:solidFill>
+                  <a:srgbClr val="000000"/>
+                </a:solidFill>
+                <a:miter lim="800000"/>
+                <a:headEnd/>
+                <a:tailEnd/>
+              </a14:hiddenLine>
+            </a:ext>
+          </a:extLst>
+        </p:spPr>
+      </p:pic>
+      <p:pic>
+        <p:nvPicPr>
+          <p:cNvPr id="32775" name="Picture 9"/>
+          <p:cNvPicPr>
+            <a:picLocks noChangeAspect="1"/>
+          </p:cNvPicPr>
+          <p:nvPr/>
+        </p:nvPicPr>
+        <p:blipFill>
+          <a:blip r:embed="rId3">
+            <a:extLst>
+              <a:ext uri="{28A0092B-C50C-407E-A947-70E740481C1C}">
+                <a14:useLocalDpi xmlns:a14="http://schemas.microsoft.com/office/drawing/2010/main" val="0"/>
+              </a:ext>
+            </a:extLst>
+          </a:blip>
+          <a:srcRect/>
+          <a:stretch>
+            <a:fillRect/>
+          </a:stretch>
+        </p:blipFill>
+        <p:spPr bwMode="auto">
+          <a:xfrm>
+            <a:off x="6587655" y="2267125"/>
+            <a:ext cx="4611687" cy="1584325"/>
+          </a:xfrm>
+          <a:prstGeom prst="rect">
+            <a:avLst/>
+          </a:prstGeom>
+          <a:noFill/>
+          <a:ln>
+            <a:noFill/>
+          </a:ln>
+          <a:extLst>
+            <a:ext uri="{909E8E84-426E-40DD-AFC4-6F175D3DCCD1}">
+              <a14:hiddenFill xmlns:a14="http://schemas.microsoft.com/office/drawing/2010/main">
+                <a:solidFill>
+                  <a:srgbClr val="FFFFFF"/>
+                </a:solidFill>
+              </a14:hiddenFill>
+            </a:ext>
+            <a:ext uri="{91240B29-F687-4F45-9708-019B960494DF}">
+              <a14:hiddenLine xmlns:a14="http://schemas.microsoft.com/office/drawing/2010/main" w="9525">
+                <a:solidFill>
+                  <a:srgbClr val="000000"/>
+                </a:solidFill>
+                <a:miter lim="800000"/>
+                <a:headEnd/>
+                <a:tailEnd/>
+              </a14:hiddenLine>
+            </a:ext>
+          </a:extLst>
+        </p:spPr>
+      </p:pic>
+      <p:sp>
+        <p:nvSpPr>
+          <p:cNvPr id="32776" name="TextBox 11"/>
+          <p:cNvSpPr txBox="1">
+            <a:spLocks noChangeArrowheads="1"/>
+          </p:cNvSpPr>
+          <p:nvPr/>
+        </p:nvSpPr>
+        <p:spPr bwMode="auto">
+          <a:xfrm>
+            <a:off x="6715662" y="1921154"/>
+            <a:ext cx="2745303" cy="369332"/>
+          </a:xfrm>
+          <a:prstGeom prst="rect">
+            <a:avLst/>
+          </a:prstGeom>
+          <a:noFill/>
+          <a:ln>
+            <a:noFill/>
+          </a:ln>
+          <a:extLst>
+            <a:ext uri="{909E8E84-426E-40DD-AFC4-6F175D3DCCD1}">
+              <a14:hiddenFill xmlns:a14="http://schemas.microsoft.com/office/drawing/2010/main">
+                <a:solidFill>
+                  <a:srgbClr val="FFFFFF"/>
+                </a:solidFill>
+              </a14:hiddenFill>
+            </a:ext>
+            <a:ext uri="{91240B29-F687-4F45-9708-019B960494DF}">
+              <a14:hiddenLine xmlns:a14="http://schemas.microsoft.com/office/drawing/2010/main" w="9525">
+                <a:solidFill>
+                  <a:srgbClr val="000000"/>
+                </a:solidFill>
+                <a:miter lim="800000"/>
+                <a:headEnd/>
+                <a:tailEnd/>
+              </a14:hiddenLine>
+            </a:ext>
+          </a:extLst>
+        </p:spPr>
+        <p:txBody>
+          <a:bodyPr wrap="none">
+            <a:spAutoFit/>
+          </a:bodyPr>
+          <a:lstStyle>
+            <a:lvl1pPr eaLnBrk="0" hangingPunct="0">
+              <a:defRPr sz="2400">
+                <a:solidFill>
+                  <a:schemeClr val="tx1"/>
+                </a:solidFill>
+                <a:latin typeface="Arial" charset="0"/>
+                <a:ea typeface="ＭＳ Ｐゴシック" charset="-128"/>
+              </a:defRPr>
+            </a:lvl1pPr>
+            <a:lvl2pPr marL="742950" indent="-285750" eaLnBrk="0" hangingPunct="0">
+              <a:defRPr sz="2400">
+                <a:solidFill>
+                  <a:schemeClr val="tx1"/>
+                </a:solidFill>
+                <a:latin typeface="Arial" charset="0"/>
+                <a:ea typeface="ＭＳ Ｐゴシック" charset="-128"/>
+              </a:defRPr>
+            </a:lvl2pPr>
+            <a:lvl3pPr marL="1143000" indent="-228600" eaLnBrk="0" hangingPunct="0">
+              <a:defRPr sz="2400">
+                <a:solidFill>
+                  <a:schemeClr val="tx1"/>
+                </a:solidFill>
+                <a:latin typeface="Arial" charset="0"/>
+                <a:ea typeface="ＭＳ Ｐゴシック" charset="-128"/>
+              </a:defRPr>
+            </a:lvl3pPr>
+            <a:lvl4pPr marL="1600200" indent="-228600" eaLnBrk="0" hangingPunct="0">
+              <a:defRPr sz="2400">
+                <a:solidFill>
+                  <a:schemeClr val="tx1"/>
+                </a:solidFill>
+                <a:latin typeface="Arial" charset="0"/>
+                <a:ea typeface="ＭＳ Ｐゴシック" charset="-128"/>
+              </a:defRPr>
+            </a:lvl4pPr>
+            <a:lvl5pPr marL="2057400" indent="-228600" eaLnBrk="0" hangingPunct="0">
+              <a:defRPr sz="2400">
+                <a:solidFill>
+                  <a:schemeClr val="tx1"/>
+                </a:solidFill>
+                <a:latin typeface="Arial" charset="0"/>
+                <a:ea typeface="ＭＳ Ｐゴシック" charset="-128"/>
+              </a:defRPr>
+            </a:lvl5pPr>
+            <a:lvl6pPr marL="2514600" indent="-228600" eaLnBrk="0" fontAlgn="base" hangingPunct="0">
+              <a:spcBef>
+                <a:spcPct val="0"/>
+              </a:spcBef>
+              <a:spcAft>
+                <a:spcPct val="0"/>
+              </a:spcAft>
+              <a:defRPr sz="2400">
+                <a:solidFill>
+                  <a:schemeClr val="tx1"/>
+                </a:solidFill>
+                <a:latin typeface="Arial" charset="0"/>
+                <a:ea typeface="ＭＳ Ｐゴシック" charset="-128"/>
+              </a:defRPr>
+            </a:lvl6pPr>
+            <a:lvl7pPr marL="2971800" indent="-228600" eaLnBrk="0" fontAlgn="base" hangingPunct="0">
+              <a:spcBef>
+                <a:spcPct val="0"/>
+              </a:spcBef>
+              <a:spcAft>
+                <a:spcPct val="0"/>
+              </a:spcAft>
+              <a:defRPr sz="2400">
+                <a:solidFill>
+                  <a:schemeClr val="tx1"/>
+                </a:solidFill>
+                <a:latin typeface="Arial" charset="0"/>
+                <a:ea typeface="ＭＳ Ｐゴシック" charset="-128"/>
+              </a:defRPr>
+            </a:lvl7pPr>
+            <a:lvl8pPr marL="3429000" indent="-228600" eaLnBrk="0" fontAlgn="base" hangingPunct="0">
+              <a:spcBef>
+                <a:spcPct val="0"/>
+              </a:spcBef>
+              <a:spcAft>
+                <a:spcPct val="0"/>
+              </a:spcAft>
+              <a:defRPr sz="2400">
+                <a:solidFill>
+                  <a:schemeClr val="tx1"/>
+                </a:solidFill>
+                <a:latin typeface="Arial" charset="0"/>
+                <a:ea typeface="ＭＳ Ｐゴシック" charset="-128"/>
+              </a:defRPr>
+            </a:lvl8pPr>
+            <a:lvl9pPr marL="3886200" indent="-228600" eaLnBrk="0" fontAlgn="base" hangingPunct="0">
+              <a:spcBef>
+                <a:spcPct val="0"/>
+              </a:spcBef>
+              <a:spcAft>
+                <a:spcPct val="0"/>
+              </a:spcAft>
+              <a:defRPr sz="2400">
+                <a:solidFill>
+                  <a:schemeClr val="tx1"/>
+                </a:solidFill>
+                <a:latin typeface="Arial" charset="0"/>
+                <a:ea typeface="ＭＳ Ｐゴシック" charset="-128"/>
+              </a:defRPr>
+            </a:lvl9pPr>
+          </a:lstStyle>
+          <a:p>
+            <a:pPr eaLnBrk="1" hangingPunct="1"/>
+            <a:r>
+              <a:rPr lang="en-US" altLang="x-none" sz="1800" dirty="0"/>
+              <a:t>Well know better solution</a:t>
+            </a:r>
+          </a:p>
+        </p:txBody>
+      </p:sp>
+      <p:sp>
+        <p:nvSpPr>
+          <p:cNvPr id="32777" name="TextBox 12"/>
+          <p:cNvSpPr txBox="1">
+            <a:spLocks noChangeArrowheads="1"/>
+          </p:cNvSpPr>
+          <p:nvPr/>
+        </p:nvSpPr>
+        <p:spPr bwMode="auto">
+          <a:xfrm>
+            <a:off x="3575050" y="4797425"/>
+            <a:ext cx="4967288" cy="522288"/>
+          </a:xfrm>
+          <a:prstGeom prst="rect">
+            <a:avLst/>
+          </a:prstGeom>
+          <a:noFill/>
+          <a:ln>
+            <a:noFill/>
+          </a:ln>
+          <a:extLst>
+            <a:ext uri="{909E8E84-426E-40DD-AFC4-6F175D3DCCD1}">
+              <a14:hiddenFill xmlns:a14="http://schemas.microsoft.com/office/drawing/2010/main">
+                <a:solidFill>
+                  <a:srgbClr val="FFFFFF"/>
+                </a:solidFill>
+              </a14:hiddenFill>
+            </a:ext>
+            <a:ext uri="{91240B29-F687-4F45-9708-019B960494DF}">
+              <a14:hiddenLine xmlns:a14="http://schemas.microsoft.com/office/drawing/2010/main" w="9525">
+                <a:solidFill>
+                  <a:srgbClr val="000000"/>
+                </a:solidFill>
+                <a:miter lim="800000"/>
+                <a:headEnd/>
+                <a:tailEnd/>
+              </a14:hiddenLine>
+            </a:ext>
+          </a:extLst>
+        </p:spPr>
+        <p:txBody>
+          <a:bodyPr wrap="none">
+            <a:spAutoFit/>
+          </a:bodyPr>
+          <a:lstStyle>
+            <a:lvl1pPr eaLnBrk="0" hangingPunct="0">
+              <a:defRPr sz="2400">
+                <a:solidFill>
+                  <a:schemeClr val="tx1"/>
+                </a:solidFill>
+                <a:latin typeface="Arial" charset="0"/>
+                <a:ea typeface="ＭＳ Ｐゴシック" charset="-128"/>
+              </a:defRPr>
+            </a:lvl1pPr>
+            <a:lvl2pPr marL="742950" indent="-285750" eaLnBrk="0" hangingPunct="0">
+              <a:defRPr sz="2400">
+                <a:solidFill>
+                  <a:schemeClr val="tx1"/>
+                </a:solidFill>
+                <a:latin typeface="Arial" charset="0"/>
+                <a:ea typeface="ＭＳ Ｐゴシック" charset="-128"/>
+              </a:defRPr>
+            </a:lvl2pPr>
+            <a:lvl3pPr marL="1143000" indent="-228600" eaLnBrk="0" hangingPunct="0">
+              <a:defRPr sz="2400">
+                <a:solidFill>
+                  <a:schemeClr val="tx1"/>
+                </a:solidFill>
+                <a:latin typeface="Arial" charset="0"/>
+                <a:ea typeface="ＭＳ Ｐゴシック" charset="-128"/>
+              </a:defRPr>
+            </a:lvl3pPr>
+            <a:lvl4pPr marL="1600200" indent="-228600" eaLnBrk="0" hangingPunct="0">
+              <a:defRPr sz="2400">
+                <a:solidFill>
+                  <a:schemeClr val="tx1"/>
+                </a:solidFill>
+                <a:latin typeface="Arial" charset="0"/>
+                <a:ea typeface="ＭＳ Ｐゴシック" charset="-128"/>
+              </a:defRPr>
+            </a:lvl4pPr>
+            <a:lvl5pPr marL="2057400" indent="-228600" eaLnBrk="0" hangingPunct="0">
+              <a:defRPr sz="2400">
+                <a:solidFill>
+                  <a:schemeClr val="tx1"/>
+                </a:solidFill>
+                <a:latin typeface="Arial" charset="0"/>
+                <a:ea typeface="ＭＳ Ｐゴシック" charset="-128"/>
+              </a:defRPr>
+            </a:lvl5pPr>
+            <a:lvl6pPr marL="2514600" indent="-228600" eaLnBrk="0" fontAlgn="base" hangingPunct="0">
+              <a:spcBef>
+                <a:spcPct val="0"/>
+              </a:spcBef>
+              <a:spcAft>
+                <a:spcPct val="0"/>
+              </a:spcAft>
+              <a:defRPr sz="2400">
+                <a:solidFill>
+                  <a:schemeClr val="tx1"/>
+                </a:solidFill>
+                <a:latin typeface="Arial" charset="0"/>
+                <a:ea typeface="ＭＳ Ｐゴシック" charset="-128"/>
+              </a:defRPr>
+            </a:lvl6pPr>
+            <a:lvl7pPr marL="2971800" indent="-228600" eaLnBrk="0" fontAlgn="base" hangingPunct="0">
+              <a:spcBef>
+                <a:spcPct val="0"/>
+              </a:spcBef>
+              <a:spcAft>
+                <a:spcPct val="0"/>
+              </a:spcAft>
+              <a:defRPr sz="2400">
+                <a:solidFill>
+                  <a:schemeClr val="tx1"/>
+                </a:solidFill>
+                <a:latin typeface="Arial" charset="0"/>
+                <a:ea typeface="ＭＳ Ｐゴシック" charset="-128"/>
+              </a:defRPr>
+            </a:lvl7pPr>
+            <a:lvl8pPr marL="3429000" indent="-228600" eaLnBrk="0" fontAlgn="base" hangingPunct="0">
+              <a:spcBef>
+                <a:spcPct val="0"/>
+              </a:spcBef>
+              <a:spcAft>
+                <a:spcPct val="0"/>
+              </a:spcAft>
+              <a:defRPr sz="2400">
+                <a:solidFill>
+                  <a:schemeClr val="tx1"/>
+                </a:solidFill>
+                <a:latin typeface="Arial" charset="0"/>
+                <a:ea typeface="ＭＳ Ｐゴシック" charset="-128"/>
+              </a:defRPr>
+            </a:lvl8pPr>
+            <a:lvl9pPr marL="3886200" indent="-228600" eaLnBrk="0" fontAlgn="base" hangingPunct="0">
+              <a:spcBef>
+                <a:spcPct val="0"/>
+              </a:spcBef>
+              <a:spcAft>
+                <a:spcPct val="0"/>
+              </a:spcAft>
+              <a:defRPr sz="2400">
+                <a:solidFill>
+                  <a:schemeClr val="tx1"/>
+                </a:solidFill>
+                <a:latin typeface="Arial" charset="0"/>
+                <a:ea typeface="ＭＳ Ｐゴシック" charset="-128"/>
+              </a:defRPr>
+            </a:lvl9pPr>
+          </a:lstStyle>
+          <a:p>
+            <a:pPr eaLnBrk="1" hangingPunct="1"/>
+            <a:r>
+              <a:rPr lang="en-US" altLang="x-none" sz="2800" b="1">
+                <a:solidFill>
+                  <a:srgbClr val="FF0000"/>
+                </a:solidFill>
+              </a:rPr>
+              <a:t>Two sources of cancellation</a:t>
+            </a:r>
+          </a:p>
+        </p:txBody>
+      </p:sp>
+      <p:cxnSp>
+        <p:nvCxnSpPr>
+          <p:cNvPr id="15" name="Straight Arrow Connector 14"/>
+          <p:cNvCxnSpPr>
+            <a:cxnSpLocks noChangeShapeType="1"/>
+          </p:cNvCxnSpPr>
+          <p:nvPr/>
+        </p:nvCxnSpPr>
+        <p:spPr bwMode="auto">
+          <a:xfrm flipH="1" flipV="1">
+            <a:off x="4727575" y="3500439"/>
+            <a:ext cx="1512888" cy="1368425"/>
+          </a:xfrm>
+          <a:prstGeom prst="straightConnector1">
+            <a:avLst/>
+          </a:prstGeom>
+          <a:noFill/>
+          <a:ln w="38100">
+            <a:solidFill>
+              <a:srgbClr val="FF0000"/>
+            </a:solidFill>
+            <a:round/>
+            <a:headEnd/>
+            <a:tailEnd type="arrow" w="med" len="med"/>
+          </a:ln>
+          <a:effectLst>
+            <a:outerShdw blurRad="40000" dist="20000" dir="5400000" rotWithShape="0">
+              <a:srgbClr val="000000">
+                <a:alpha val="37999"/>
+              </a:srgbClr>
+            </a:outerShdw>
+          </a:effectLst>
+          <a:extLst>
+            <a:ext uri="{909E8E84-426E-40DD-AFC4-6F175D3DCCD1}">
+              <a14:hiddenFill xmlns:a14="http://schemas.microsoft.com/office/drawing/2010/main">
+                <a:noFill/>
+              </a14:hiddenFill>
+            </a:ext>
+          </a:extLst>
+        </p:spPr>
+      </p:cxnSp>
+      <p:cxnSp>
+        <p:nvCxnSpPr>
+          <p:cNvPr id="17" name="Straight Arrow Connector 16"/>
+          <p:cNvCxnSpPr>
+            <a:cxnSpLocks noChangeShapeType="1"/>
+          </p:cNvCxnSpPr>
+          <p:nvPr/>
+        </p:nvCxnSpPr>
+        <p:spPr bwMode="auto">
+          <a:xfrm flipH="1" flipV="1">
+            <a:off x="3792538" y="3500438"/>
+            <a:ext cx="215900" cy="1441450"/>
+          </a:xfrm>
+          <a:prstGeom prst="straightConnector1">
+            <a:avLst/>
+          </a:prstGeom>
+          <a:noFill/>
+          <a:ln w="38100">
+            <a:solidFill>
+              <a:srgbClr val="FF0000"/>
+            </a:solidFill>
+            <a:round/>
+            <a:headEnd/>
+            <a:tailEnd type="arrow" w="med" len="med"/>
+          </a:ln>
+          <a:effectLst>
+            <a:outerShdw blurRad="40000" dist="20000" dir="5400000" rotWithShape="0">
+              <a:srgbClr val="000000">
+                <a:alpha val="37999"/>
+              </a:srgbClr>
+            </a:outerShdw>
+          </a:effectLst>
+          <a:extLst>
+            <a:ext uri="{909E8E84-426E-40DD-AFC4-6F175D3DCCD1}">
+              <a14:hiddenFill xmlns:a14="http://schemas.microsoft.com/office/drawing/2010/main">
+                <a:noFill/>
+              </a14:hiddenFill>
+            </a:ext>
+          </a:extLst>
+        </p:spPr>
+      </p:cxnSp>
+      <p:sp>
+        <p:nvSpPr>
+          <p:cNvPr id="32780" name="TextBox 19"/>
+          <p:cNvSpPr txBox="1">
+            <a:spLocks noChangeArrowheads="1"/>
+          </p:cNvSpPr>
+          <p:nvPr/>
+        </p:nvSpPr>
+        <p:spPr bwMode="auto">
+          <a:xfrm>
+            <a:off x="2424113" y="5661025"/>
+            <a:ext cx="5200650" cy="369888"/>
+          </a:xfrm>
+          <a:prstGeom prst="rect">
+            <a:avLst/>
+          </a:prstGeom>
+          <a:noFill/>
+          <a:ln>
+            <a:noFill/>
+          </a:ln>
+          <a:extLst>
+            <a:ext uri="{909E8E84-426E-40DD-AFC4-6F175D3DCCD1}">
+              <a14:hiddenFill xmlns:a14="http://schemas.microsoft.com/office/drawing/2010/main">
+                <a:solidFill>
+                  <a:srgbClr val="FFFFFF"/>
+                </a:solidFill>
+              </a14:hiddenFill>
+            </a:ext>
+            <a:ext uri="{91240B29-F687-4F45-9708-019B960494DF}">
+              <a14:hiddenLine xmlns:a14="http://schemas.microsoft.com/office/drawing/2010/main" w="9525">
+                <a:solidFill>
+                  <a:srgbClr val="000000"/>
+                </a:solidFill>
+                <a:miter lim="800000"/>
+                <a:headEnd/>
+                <a:tailEnd/>
+              </a14:hiddenLine>
+            </a:ext>
+          </a:extLst>
+        </p:spPr>
+        <p:txBody>
+          <a:bodyPr wrap="none">
+            <a:spAutoFit/>
+          </a:bodyPr>
+          <a:lstStyle>
+            <a:lvl1pPr eaLnBrk="0" hangingPunct="0">
+              <a:defRPr sz="2400">
+                <a:solidFill>
+                  <a:schemeClr val="tx1"/>
+                </a:solidFill>
+                <a:latin typeface="Arial" charset="0"/>
+                <a:ea typeface="ＭＳ Ｐゴシック" charset="-128"/>
+              </a:defRPr>
+            </a:lvl1pPr>
+            <a:lvl2pPr marL="742950" indent="-285750" eaLnBrk="0" hangingPunct="0">
+              <a:defRPr sz="2400">
+                <a:solidFill>
+                  <a:schemeClr val="tx1"/>
+                </a:solidFill>
+                <a:latin typeface="Arial" charset="0"/>
+                <a:ea typeface="ＭＳ Ｐゴシック" charset="-128"/>
+              </a:defRPr>
+            </a:lvl2pPr>
+            <a:lvl3pPr marL="1143000" indent="-228600" eaLnBrk="0" hangingPunct="0">
+              <a:defRPr sz="2400">
+                <a:solidFill>
+                  <a:schemeClr val="tx1"/>
+                </a:solidFill>
+                <a:latin typeface="Arial" charset="0"/>
+                <a:ea typeface="ＭＳ Ｐゴシック" charset="-128"/>
+              </a:defRPr>
+            </a:lvl3pPr>
+            <a:lvl4pPr marL="1600200" indent="-228600" eaLnBrk="0" hangingPunct="0">
+              <a:defRPr sz="2400">
+                <a:solidFill>
+                  <a:schemeClr val="tx1"/>
+                </a:solidFill>
+                <a:latin typeface="Arial" charset="0"/>
+                <a:ea typeface="ＭＳ Ｐゴシック" charset="-128"/>
+              </a:defRPr>
+            </a:lvl4pPr>
+            <a:lvl5pPr marL="2057400" indent="-228600" eaLnBrk="0" hangingPunct="0">
+              <a:defRPr sz="2400">
+                <a:solidFill>
+                  <a:schemeClr val="tx1"/>
+                </a:solidFill>
+                <a:latin typeface="Arial" charset="0"/>
+                <a:ea typeface="ＭＳ Ｐゴシック" charset="-128"/>
+              </a:defRPr>
+            </a:lvl5pPr>
+            <a:lvl6pPr marL="2514600" indent="-228600" eaLnBrk="0" fontAlgn="base" hangingPunct="0">
+              <a:spcBef>
+                <a:spcPct val="0"/>
+              </a:spcBef>
+              <a:spcAft>
+                <a:spcPct val="0"/>
+              </a:spcAft>
+              <a:defRPr sz="2400">
+                <a:solidFill>
+                  <a:schemeClr val="tx1"/>
+                </a:solidFill>
+                <a:latin typeface="Arial" charset="0"/>
+                <a:ea typeface="ＭＳ Ｐゴシック" charset="-128"/>
+              </a:defRPr>
+            </a:lvl6pPr>
+            <a:lvl7pPr marL="2971800" indent="-228600" eaLnBrk="0" fontAlgn="base" hangingPunct="0">
+              <a:spcBef>
+                <a:spcPct val="0"/>
+              </a:spcBef>
+              <a:spcAft>
+                <a:spcPct val="0"/>
+              </a:spcAft>
+              <a:defRPr sz="2400">
+                <a:solidFill>
+                  <a:schemeClr val="tx1"/>
+                </a:solidFill>
+                <a:latin typeface="Arial" charset="0"/>
+                <a:ea typeface="ＭＳ Ｐゴシック" charset="-128"/>
+              </a:defRPr>
+            </a:lvl7pPr>
+            <a:lvl8pPr marL="3429000" indent="-228600" eaLnBrk="0" fontAlgn="base" hangingPunct="0">
+              <a:spcBef>
+                <a:spcPct val="0"/>
+              </a:spcBef>
+              <a:spcAft>
+                <a:spcPct val="0"/>
+              </a:spcAft>
+              <a:defRPr sz="2400">
+                <a:solidFill>
+                  <a:schemeClr val="tx1"/>
+                </a:solidFill>
+                <a:latin typeface="Arial" charset="0"/>
+                <a:ea typeface="ＭＳ Ｐゴシック" charset="-128"/>
+              </a:defRPr>
+            </a:lvl8pPr>
+            <a:lvl9pPr marL="3886200" indent="-228600" eaLnBrk="0" fontAlgn="base" hangingPunct="0">
+              <a:spcBef>
+                <a:spcPct val="0"/>
+              </a:spcBef>
+              <a:spcAft>
+                <a:spcPct val="0"/>
+              </a:spcAft>
+              <a:defRPr sz="2400">
+                <a:solidFill>
+                  <a:schemeClr val="tx1"/>
+                </a:solidFill>
+                <a:latin typeface="Arial" charset="0"/>
+                <a:ea typeface="ＭＳ Ｐゴシック" charset="-128"/>
+              </a:defRPr>
+            </a:lvl9pPr>
+          </a:lstStyle>
+          <a:p>
+            <a:pPr eaLnBrk="1" hangingPunct="1"/>
+            <a:r>
+              <a:rPr lang="en-US" altLang="x-none" sz="1800"/>
+              <a:t>https://en.wikipedia.org/wiki/Loss_of_significance</a:t>
+            </a:r>
+          </a:p>
+        </p:txBody>
+      </p:sp>
+    </p:spTree>
   </p:cSld>
   <p:clrMapOvr>
     <a:masterClrMapping/>
@@ -11194,6 +13387,649 @@
       </p:grpSpPr>
       <p:sp>
         <p:nvSpPr>
+          <p:cNvPr id="30721" name="Title 1"/>
+          <p:cNvSpPr>
+            <a:spLocks noGrp="1"/>
+          </p:cNvSpPr>
+          <p:nvPr>
+            <p:ph type="title"/>
+          </p:nvPr>
+        </p:nvSpPr>
+        <p:spPr>
+          <a:xfrm>
+            <a:off x="1992313" y="188914"/>
+            <a:ext cx="8229600" cy="1139825"/>
+          </a:xfrm>
+        </p:spPr>
+        <p:txBody>
+          <a:bodyPr/>
+          <a:lstStyle/>
+          <a:p>
+            <a:r>
+              <a:rPr lang="en-US" altLang="x-none"/>
+              <a:t>Rounding Algorithms</a:t>
+            </a:r>
+          </a:p>
+        </p:txBody>
+      </p:sp>
+      <p:sp>
+        <p:nvSpPr>
+          <p:cNvPr id="30722" name="Content Placeholder 2"/>
+          <p:cNvSpPr>
+            <a:spLocks noGrp="1"/>
+          </p:cNvSpPr>
+          <p:nvPr>
+            <p:ph idx="1"/>
+          </p:nvPr>
+        </p:nvSpPr>
+        <p:spPr>
+          <a:xfrm>
+            <a:off x="1774825" y="908051"/>
+            <a:ext cx="8713788" cy="5184775"/>
+          </a:xfrm>
+        </p:spPr>
+        <p:txBody>
+          <a:bodyPr/>
+          <a:lstStyle/>
+          <a:p>
+            <a:r>
+              <a:rPr lang="en-US" altLang="x-none" sz="2000" dirty="0"/>
+              <a:t>The standard defines five rounding algorithms.</a:t>
+            </a:r>
+          </a:p>
+          <a:p>
+            <a:pPr lvl="1"/>
+            <a:r>
+              <a:rPr lang="en-US" altLang="x-none" sz="1800" dirty="0"/>
+              <a:t>The first two round to a nearest value; the others are called directed </a:t>
+            </a:r>
+            <a:r>
+              <a:rPr lang="en-US" altLang="x-none" sz="1800" dirty="0" err="1"/>
+              <a:t>roundings</a:t>
+            </a:r>
+            <a:r>
+              <a:rPr lang="en-US" altLang="x-none" sz="1800" dirty="0"/>
+              <a:t>:</a:t>
+            </a:r>
+            <a:endParaRPr lang="en-US" altLang="x-none" sz="2000" dirty="0"/>
+          </a:p>
+          <a:p>
+            <a:r>
+              <a:rPr lang="en-US" altLang="x-none" sz="2000" dirty="0" err="1"/>
+              <a:t>Roundings</a:t>
+            </a:r>
+            <a:r>
+              <a:rPr lang="en-US" altLang="x-none" sz="2000" dirty="0"/>
+              <a:t> to nearest</a:t>
+            </a:r>
+          </a:p>
+          <a:p>
+            <a:pPr lvl="1"/>
+            <a:r>
+              <a:rPr lang="en-US" altLang="x-none" sz="1800" b="1" dirty="0">
+                <a:solidFill>
+                  <a:srgbClr val="FF0000"/>
+                </a:solidFill>
+              </a:rPr>
+              <a:t>Round to nearest, ties to even – rounds to the nearest value;</a:t>
+            </a:r>
+            <a:r>
+              <a:rPr lang="en-US" altLang="x-none" sz="1800" dirty="0"/>
+              <a:t> if the number falls midway it is rounded to the nearest value with an even (zero) least significant bit, which occurs 50% of the time; </a:t>
+            </a:r>
+            <a:r>
+              <a:rPr lang="en-US" altLang="x-none" sz="1800" dirty="0">
+                <a:solidFill>
+                  <a:srgbClr val="FF0000"/>
+                </a:solidFill>
+              </a:rPr>
+              <a:t>this is the default algorithm for binary floating-point </a:t>
+            </a:r>
+            <a:r>
+              <a:rPr lang="en-US" altLang="x-none" sz="1800" dirty="0"/>
+              <a:t>and the recommended default for decimal</a:t>
+            </a:r>
+          </a:p>
+          <a:p>
+            <a:pPr lvl="1"/>
+            <a:r>
+              <a:rPr lang="en-US" altLang="x-none" sz="1800" dirty="0"/>
+              <a:t>Round to nearest, ties away from zero – rounds to the nearest value; if the number falls midway it is rounded to the nearest value above (for positive numbers) or below (for negative numbers)</a:t>
+            </a:r>
+          </a:p>
+          <a:p>
+            <a:r>
+              <a:rPr lang="en-US" altLang="x-none" sz="2000" dirty="0"/>
+              <a:t>Directed </a:t>
+            </a:r>
+            <a:r>
+              <a:rPr lang="en-US" altLang="x-none" sz="2000" dirty="0" err="1"/>
+              <a:t>roundings</a:t>
+            </a:r>
+            <a:endParaRPr lang="en-US" altLang="x-none" sz="2000" dirty="0"/>
+          </a:p>
+          <a:p>
+            <a:pPr lvl="1"/>
+            <a:r>
+              <a:rPr lang="en-US" altLang="x-none" sz="1800" dirty="0"/>
+              <a:t>Round toward 0 – directed rounding towards zero (also known as truncation).</a:t>
+            </a:r>
+          </a:p>
+          <a:p>
+            <a:pPr lvl="1"/>
+            <a:r>
+              <a:rPr lang="en-US" altLang="x-none" sz="1800" dirty="0"/>
+              <a:t>Round toward +∞ – directed rounding towards positive infinity (also known as rounding up or ceiling).</a:t>
+            </a:r>
+          </a:p>
+          <a:p>
+            <a:pPr lvl="1"/>
+            <a:r>
+              <a:rPr lang="en-US" altLang="x-none" sz="1800" dirty="0"/>
+              <a:t>Round toward −∞ – directed rounding towards negative infinity (also known as rounding down or floor).</a:t>
+            </a:r>
+          </a:p>
+          <a:p>
+            <a:endParaRPr lang="en-US" altLang="x-none" sz="2000" dirty="0"/>
+          </a:p>
+        </p:txBody>
+      </p:sp>
+      <p:sp>
+        <p:nvSpPr>
+          <p:cNvPr id="30723" name="Date Placeholder 3"/>
+          <p:cNvSpPr>
+            <a:spLocks noGrp="1"/>
+          </p:cNvSpPr>
+          <p:nvPr>
+            <p:ph type="dt" sz="quarter" idx="10"/>
+          </p:nvPr>
+        </p:nvSpPr>
+        <p:spPr>
+          <a:noFill/>
+          <a:ln/>
+          <a:extLst>
+            <a:ext uri="{909E8E84-426E-40DD-AFC4-6F175D3DCCD1}">
+              <a14:hiddenFill xmlns:a14="http://schemas.microsoft.com/office/drawing/2010/main">
+                <a:solidFill>
+                  <a:srgbClr val="FFFFFF"/>
+                </a:solidFill>
+              </a14:hiddenFill>
+            </a:ext>
+            <a:ext uri="{91240B29-F687-4F45-9708-019B960494DF}">
+              <a14:hiddenLine xmlns:a14="http://schemas.microsoft.com/office/drawing/2010/main" w="9525">
+                <a:solidFill>
+                  <a:srgbClr val="000000"/>
+                </a:solidFill>
+                <a:miter lim="800000"/>
+                <a:headEnd/>
+                <a:tailEnd/>
+              </a14:hiddenLine>
+            </a:ext>
+          </a:extLst>
+        </p:spPr>
+        <p:txBody>
+          <a:bodyPr/>
+          <a:lstStyle>
+            <a:lvl1pPr eaLnBrk="0" hangingPunct="0">
+              <a:defRPr sz="2400">
+                <a:solidFill>
+                  <a:schemeClr val="tx1"/>
+                </a:solidFill>
+                <a:latin typeface="Arial" charset="0"/>
+                <a:ea typeface="ＭＳ Ｐゴシック" charset="-128"/>
+              </a:defRPr>
+            </a:lvl1pPr>
+            <a:lvl2pPr marL="742950" indent="-285750" eaLnBrk="0" hangingPunct="0">
+              <a:defRPr sz="2400">
+                <a:solidFill>
+                  <a:schemeClr val="tx1"/>
+                </a:solidFill>
+                <a:latin typeface="Arial" charset="0"/>
+                <a:ea typeface="ＭＳ Ｐゴシック" charset="-128"/>
+              </a:defRPr>
+            </a:lvl2pPr>
+            <a:lvl3pPr marL="1143000" indent="-228600" eaLnBrk="0" hangingPunct="0">
+              <a:defRPr sz="2400">
+                <a:solidFill>
+                  <a:schemeClr val="tx1"/>
+                </a:solidFill>
+                <a:latin typeface="Arial" charset="0"/>
+                <a:ea typeface="ＭＳ Ｐゴシック" charset="-128"/>
+              </a:defRPr>
+            </a:lvl3pPr>
+            <a:lvl4pPr marL="1600200" indent="-228600" eaLnBrk="0" hangingPunct="0">
+              <a:defRPr sz="2400">
+                <a:solidFill>
+                  <a:schemeClr val="tx1"/>
+                </a:solidFill>
+                <a:latin typeface="Arial" charset="0"/>
+                <a:ea typeface="ＭＳ Ｐゴシック" charset="-128"/>
+              </a:defRPr>
+            </a:lvl4pPr>
+            <a:lvl5pPr marL="2057400" indent="-228600" eaLnBrk="0" hangingPunct="0">
+              <a:defRPr sz="2400">
+                <a:solidFill>
+                  <a:schemeClr val="tx1"/>
+                </a:solidFill>
+                <a:latin typeface="Arial" charset="0"/>
+                <a:ea typeface="ＭＳ Ｐゴシック" charset="-128"/>
+              </a:defRPr>
+            </a:lvl5pPr>
+            <a:lvl6pPr marL="2514600" indent="-228600" eaLnBrk="0" fontAlgn="base" hangingPunct="0">
+              <a:spcBef>
+                <a:spcPct val="0"/>
+              </a:spcBef>
+              <a:spcAft>
+                <a:spcPct val="0"/>
+              </a:spcAft>
+              <a:defRPr sz="2400">
+                <a:solidFill>
+                  <a:schemeClr val="tx1"/>
+                </a:solidFill>
+                <a:latin typeface="Arial" charset="0"/>
+                <a:ea typeface="ＭＳ Ｐゴシック" charset="-128"/>
+              </a:defRPr>
+            </a:lvl6pPr>
+            <a:lvl7pPr marL="2971800" indent="-228600" eaLnBrk="0" fontAlgn="base" hangingPunct="0">
+              <a:spcBef>
+                <a:spcPct val="0"/>
+              </a:spcBef>
+              <a:spcAft>
+                <a:spcPct val="0"/>
+              </a:spcAft>
+              <a:defRPr sz="2400">
+                <a:solidFill>
+                  <a:schemeClr val="tx1"/>
+                </a:solidFill>
+                <a:latin typeface="Arial" charset="0"/>
+                <a:ea typeface="ＭＳ Ｐゴシック" charset="-128"/>
+              </a:defRPr>
+            </a:lvl7pPr>
+            <a:lvl8pPr marL="3429000" indent="-228600" eaLnBrk="0" fontAlgn="base" hangingPunct="0">
+              <a:spcBef>
+                <a:spcPct val="0"/>
+              </a:spcBef>
+              <a:spcAft>
+                <a:spcPct val="0"/>
+              </a:spcAft>
+              <a:defRPr sz="2400">
+                <a:solidFill>
+                  <a:schemeClr val="tx1"/>
+                </a:solidFill>
+                <a:latin typeface="Arial" charset="0"/>
+                <a:ea typeface="ＭＳ Ｐゴシック" charset="-128"/>
+              </a:defRPr>
+            </a:lvl8pPr>
+            <a:lvl9pPr marL="3886200" indent="-228600" eaLnBrk="0" fontAlgn="base" hangingPunct="0">
+              <a:spcBef>
+                <a:spcPct val="0"/>
+              </a:spcBef>
+              <a:spcAft>
+                <a:spcPct val="0"/>
+              </a:spcAft>
+              <a:defRPr sz="2400">
+                <a:solidFill>
+                  <a:schemeClr val="tx1"/>
+                </a:solidFill>
+                <a:latin typeface="Arial" charset="0"/>
+                <a:ea typeface="ＭＳ Ｐゴシック" charset="-128"/>
+              </a:defRPr>
+            </a:lvl9pPr>
+          </a:lstStyle>
+          <a:p>
+            <a:pPr eaLnBrk="1" hangingPunct="1"/>
+            <a:r>
+              <a:rPr lang="en-US" altLang="x-none" sz="1200">
+                <a:latin typeface="Garamond" charset="0"/>
+              </a:rPr>
+              <a:t>22 October 2016</a:t>
+            </a:r>
+            <a:endParaRPr lang="it-IT" altLang="x-none" sz="1200">
+              <a:latin typeface="Garamond" charset="0"/>
+            </a:endParaRPr>
+          </a:p>
+        </p:txBody>
+      </p:sp>
+      <p:sp>
+        <p:nvSpPr>
+          <p:cNvPr id="30724" name="Footer Placeholder 4"/>
+          <p:cNvSpPr>
+            <a:spLocks noGrp="1"/>
+          </p:cNvSpPr>
+          <p:nvPr>
+            <p:ph type="ftr" sz="quarter" idx="11"/>
+          </p:nvPr>
+        </p:nvSpPr>
+        <p:spPr>
+          <a:noFill/>
+          <a:ln/>
+          <a:extLst>
+            <a:ext uri="{909E8E84-426E-40DD-AFC4-6F175D3DCCD1}">
+              <a14:hiddenFill xmlns:a14="http://schemas.microsoft.com/office/drawing/2010/main">
+                <a:solidFill>
+                  <a:srgbClr val="FFFFFF"/>
+                </a:solidFill>
+              </a14:hiddenFill>
+            </a:ext>
+            <a:ext uri="{91240B29-F687-4F45-9708-019B960494DF}">
+              <a14:hiddenLine xmlns:a14="http://schemas.microsoft.com/office/drawing/2010/main" w="9525">
+                <a:solidFill>
+                  <a:srgbClr val="000000"/>
+                </a:solidFill>
+                <a:miter lim="800000"/>
+                <a:headEnd/>
+                <a:tailEnd/>
+              </a14:hiddenLine>
+            </a:ext>
+          </a:extLst>
+        </p:spPr>
+        <p:txBody>
+          <a:bodyPr/>
+          <a:lstStyle>
+            <a:lvl1pPr eaLnBrk="0" hangingPunct="0">
+              <a:defRPr sz="2400">
+                <a:solidFill>
+                  <a:schemeClr val="tx1"/>
+                </a:solidFill>
+                <a:latin typeface="Arial" charset="0"/>
+                <a:ea typeface="ＭＳ Ｐゴシック" charset="-128"/>
+              </a:defRPr>
+            </a:lvl1pPr>
+            <a:lvl2pPr marL="742950" indent="-285750" eaLnBrk="0" hangingPunct="0">
+              <a:defRPr sz="2400">
+                <a:solidFill>
+                  <a:schemeClr val="tx1"/>
+                </a:solidFill>
+                <a:latin typeface="Arial" charset="0"/>
+                <a:ea typeface="ＭＳ Ｐゴシック" charset="-128"/>
+              </a:defRPr>
+            </a:lvl2pPr>
+            <a:lvl3pPr marL="1143000" indent="-228600" eaLnBrk="0" hangingPunct="0">
+              <a:defRPr sz="2400">
+                <a:solidFill>
+                  <a:schemeClr val="tx1"/>
+                </a:solidFill>
+                <a:latin typeface="Arial" charset="0"/>
+                <a:ea typeface="ＭＳ Ｐゴシック" charset="-128"/>
+              </a:defRPr>
+            </a:lvl3pPr>
+            <a:lvl4pPr marL="1600200" indent="-228600" eaLnBrk="0" hangingPunct="0">
+              <a:defRPr sz="2400">
+                <a:solidFill>
+                  <a:schemeClr val="tx1"/>
+                </a:solidFill>
+                <a:latin typeface="Arial" charset="0"/>
+                <a:ea typeface="ＭＳ Ｐゴシック" charset="-128"/>
+              </a:defRPr>
+            </a:lvl4pPr>
+            <a:lvl5pPr marL="2057400" indent="-228600" eaLnBrk="0" hangingPunct="0">
+              <a:defRPr sz="2400">
+                <a:solidFill>
+                  <a:schemeClr val="tx1"/>
+                </a:solidFill>
+                <a:latin typeface="Arial" charset="0"/>
+                <a:ea typeface="ＭＳ Ｐゴシック" charset="-128"/>
+              </a:defRPr>
+            </a:lvl5pPr>
+            <a:lvl6pPr marL="2514600" indent="-228600" eaLnBrk="0" fontAlgn="base" hangingPunct="0">
+              <a:spcBef>
+                <a:spcPct val="0"/>
+              </a:spcBef>
+              <a:spcAft>
+                <a:spcPct val="0"/>
+              </a:spcAft>
+              <a:defRPr sz="2400">
+                <a:solidFill>
+                  <a:schemeClr val="tx1"/>
+                </a:solidFill>
+                <a:latin typeface="Arial" charset="0"/>
+                <a:ea typeface="ＭＳ Ｐゴシック" charset="-128"/>
+              </a:defRPr>
+            </a:lvl6pPr>
+            <a:lvl7pPr marL="2971800" indent="-228600" eaLnBrk="0" fontAlgn="base" hangingPunct="0">
+              <a:spcBef>
+                <a:spcPct val="0"/>
+              </a:spcBef>
+              <a:spcAft>
+                <a:spcPct val="0"/>
+              </a:spcAft>
+              <a:defRPr sz="2400">
+                <a:solidFill>
+                  <a:schemeClr val="tx1"/>
+                </a:solidFill>
+                <a:latin typeface="Arial" charset="0"/>
+                <a:ea typeface="ＭＳ Ｐゴシック" charset="-128"/>
+              </a:defRPr>
+            </a:lvl7pPr>
+            <a:lvl8pPr marL="3429000" indent="-228600" eaLnBrk="0" fontAlgn="base" hangingPunct="0">
+              <a:spcBef>
+                <a:spcPct val="0"/>
+              </a:spcBef>
+              <a:spcAft>
+                <a:spcPct val="0"/>
+              </a:spcAft>
+              <a:defRPr sz="2400">
+                <a:solidFill>
+                  <a:schemeClr val="tx1"/>
+                </a:solidFill>
+                <a:latin typeface="Arial" charset="0"/>
+                <a:ea typeface="ＭＳ Ｐゴシック" charset="-128"/>
+              </a:defRPr>
+            </a:lvl8pPr>
+            <a:lvl9pPr marL="3886200" indent="-228600" eaLnBrk="0" fontAlgn="base" hangingPunct="0">
+              <a:spcBef>
+                <a:spcPct val="0"/>
+              </a:spcBef>
+              <a:spcAft>
+                <a:spcPct val="0"/>
+              </a:spcAft>
+              <a:defRPr sz="2400">
+                <a:solidFill>
+                  <a:schemeClr val="tx1"/>
+                </a:solidFill>
+                <a:latin typeface="Arial" charset="0"/>
+                <a:ea typeface="ＭＳ Ｐゴシック" charset="-128"/>
+              </a:defRPr>
+            </a:lvl9pPr>
+          </a:lstStyle>
+          <a:p>
+            <a:pPr eaLnBrk="1" hangingPunct="1"/>
+            <a:r>
+              <a:rPr lang="en-US" altLang="x-none" sz="1200">
+                <a:latin typeface="Garamond" charset="0"/>
+              </a:rPr>
+              <a:t>Vincenzo Innocente</a:t>
+            </a:r>
+            <a:endParaRPr lang="it-IT" altLang="x-none" sz="1200">
+              <a:latin typeface="Garamond" charset="0"/>
+            </a:endParaRPr>
+          </a:p>
+        </p:txBody>
+      </p:sp>
+      <p:sp>
+        <p:nvSpPr>
+          <p:cNvPr id="30725" name="Slide Number Placeholder 5"/>
+          <p:cNvSpPr>
+            <a:spLocks noGrp="1"/>
+          </p:cNvSpPr>
+          <p:nvPr>
+            <p:ph type="sldNum" sz="quarter" idx="12"/>
+          </p:nvPr>
+        </p:nvSpPr>
+        <p:spPr>
+          <a:noFill/>
+          <a:ln/>
+          <a:extLst>
+            <a:ext uri="{909E8E84-426E-40DD-AFC4-6F175D3DCCD1}">
+              <a14:hiddenFill xmlns:a14="http://schemas.microsoft.com/office/drawing/2010/main">
+                <a:solidFill>
+                  <a:srgbClr val="FFFFFF"/>
+                </a:solidFill>
+              </a14:hiddenFill>
+            </a:ext>
+            <a:ext uri="{91240B29-F687-4F45-9708-019B960494DF}">
+              <a14:hiddenLine xmlns:a14="http://schemas.microsoft.com/office/drawing/2010/main" w="9525">
+                <a:solidFill>
+                  <a:srgbClr val="000000"/>
+                </a:solidFill>
+                <a:miter lim="800000"/>
+                <a:headEnd/>
+                <a:tailEnd/>
+              </a14:hiddenLine>
+            </a:ext>
+          </a:extLst>
+        </p:spPr>
+        <p:txBody>
+          <a:bodyPr/>
+          <a:lstStyle>
+            <a:lvl1pPr eaLnBrk="0" hangingPunct="0">
+              <a:defRPr sz="2400">
+                <a:solidFill>
+                  <a:schemeClr val="tx1"/>
+                </a:solidFill>
+                <a:latin typeface="Arial" charset="0"/>
+                <a:ea typeface="ＭＳ Ｐゴシック" charset="-128"/>
+              </a:defRPr>
+            </a:lvl1pPr>
+            <a:lvl2pPr marL="742950" indent="-285750" eaLnBrk="0" hangingPunct="0">
+              <a:defRPr sz="2400">
+                <a:solidFill>
+                  <a:schemeClr val="tx1"/>
+                </a:solidFill>
+                <a:latin typeface="Arial" charset="0"/>
+                <a:ea typeface="ＭＳ Ｐゴシック" charset="-128"/>
+              </a:defRPr>
+            </a:lvl2pPr>
+            <a:lvl3pPr marL="1143000" indent="-228600" eaLnBrk="0" hangingPunct="0">
+              <a:defRPr sz="2400">
+                <a:solidFill>
+                  <a:schemeClr val="tx1"/>
+                </a:solidFill>
+                <a:latin typeface="Arial" charset="0"/>
+                <a:ea typeface="ＭＳ Ｐゴシック" charset="-128"/>
+              </a:defRPr>
+            </a:lvl3pPr>
+            <a:lvl4pPr marL="1600200" indent="-228600" eaLnBrk="0" hangingPunct="0">
+              <a:defRPr sz="2400">
+                <a:solidFill>
+                  <a:schemeClr val="tx1"/>
+                </a:solidFill>
+                <a:latin typeface="Arial" charset="0"/>
+                <a:ea typeface="ＭＳ Ｐゴシック" charset="-128"/>
+              </a:defRPr>
+            </a:lvl4pPr>
+            <a:lvl5pPr marL="2057400" indent="-228600" eaLnBrk="0" hangingPunct="0">
+              <a:defRPr sz="2400">
+                <a:solidFill>
+                  <a:schemeClr val="tx1"/>
+                </a:solidFill>
+                <a:latin typeface="Arial" charset="0"/>
+                <a:ea typeface="ＭＳ Ｐゴシック" charset="-128"/>
+              </a:defRPr>
+            </a:lvl5pPr>
+            <a:lvl6pPr marL="2514600" indent="-228600" eaLnBrk="0" fontAlgn="base" hangingPunct="0">
+              <a:spcBef>
+                <a:spcPct val="0"/>
+              </a:spcBef>
+              <a:spcAft>
+                <a:spcPct val="0"/>
+              </a:spcAft>
+              <a:defRPr sz="2400">
+                <a:solidFill>
+                  <a:schemeClr val="tx1"/>
+                </a:solidFill>
+                <a:latin typeface="Arial" charset="0"/>
+                <a:ea typeface="ＭＳ Ｐゴシック" charset="-128"/>
+              </a:defRPr>
+            </a:lvl6pPr>
+            <a:lvl7pPr marL="2971800" indent="-228600" eaLnBrk="0" fontAlgn="base" hangingPunct="0">
+              <a:spcBef>
+                <a:spcPct val="0"/>
+              </a:spcBef>
+              <a:spcAft>
+                <a:spcPct val="0"/>
+              </a:spcAft>
+              <a:defRPr sz="2400">
+                <a:solidFill>
+                  <a:schemeClr val="tx1"/>
+                </a:solidFill>
+                <a:latin typeface="Arial" charset="0"/>
+                <a:ea typeface="ＭＳ Ｐゴシック" charset="-128"/>
+              </a:defRPr>
+            </a:lvl7pPr>
+            <a:lvl8pPr marL="3429000" indent="-228600" eaLnBrk="0" fontAlgn="base" hangingPunct="0">
+              <a:spcBef>
+                <a:spcPct val="0"/>
+              </a:spcBef>
+              <a:spcAft>
+                <a:spcPct val="0"/>
+              </a:spcAft>
+              <a:defRPr sz="2400">
+                <a:solidFill>
+                  <a:schemeClr val="tx1"/>
+                </a:solidFill>
+                <a:latin typeface="Arial" charset="0"/>
+                <a:ea typeface="ＭＳ Ｐゴシック" charset="-128"/>
+              </a:defRPr>
+            </a:lvl8pPr>
+            <a:lvl9pPr marL="3886200" indent="-228600" eaLnBrk="0" fontAlgn="base" hangingPunct="0">
+              <a:spcBef>
+                <a:spcPct val="0"/>
+              </a:spcBef>
+              <a:spcAft>
+                <a:spcPct val="0"/>
+              </a:spcAft>
+              <a:defRPr sz="2400">
+                <a:solidFill>
+                  <a:schemeClr val="tx1"/>
+                </a:solidFill>
+                <a:latin typeface="Arial" charset="0"/>
+                <a:ea typeface="ＭＳ Ｐゴシック" charset="-128"/>
+              </a:defRPr>
+            </a:lvl9pPr>
+          </a:lstStyle>
+          <a:p>
+            <a:pPr eaLnBrk="1" hangingPunct="1"/>
+            <a:fld id="{016689D5-6FA2-274B-8EB3-26E90C03259E}" type="slidenum">
+              <a:rPr lang="it-IT" altLang="x-none" sz="1200">
+                <a:latin typeface="Garamond" charset="0"/>
+              </a:rPr>
+              <a:pPr eaLnBrk="1" hangingPunct="1"/>
+              <a:t>5</a:t>
+            </a:fld>
+            <a:endParaRPr lang="it-IT" altLang="x-none" sz="1200">
+              <a:latin typeface="Garamond" charset="0"/>
+            </a:endParaRPr>
+          </a:p>
+        </p:txBody>
+      </p:sp>
+    </p:spTree>
+  </p:cSld>
+  <p:clrMapOvr>
+    <a:masterClrMapping/>
+  </p:clrMapOvr>
+</p:sld>
+</file>
+
+<file path=ppt/slides/slide6.xml><?xml version="1.0" encoding="utf-8"?>
+<p:sld xmlns:a="http://schemas.openxmlformats.org/drawingml/2006/main" xmlns:r="http://schemas.openxmlformats.org/officeDocument/2006/relationships" xmlns:p="http://schemas.openxmlformats.org/presentationml/2006/main">
+  <p:cSld>
+    <p:spTree>
+      <p:nvGrpSpPr>
+        <p:cNvPr id="1" name=""/>
+        <p:cNvGrpSpPr/>
+        <p:nvPr/>
+      </p:nvGrpSpPr>
+      <p:grpSpPr>
+        <a:xfrm>
+          <a:off x="0" y="0"/>
+          <a:ext cx="0" cy="0"/>
+          <a:chOff x="0" y="0"/>
+          <a:chExt cx="0" cy="0"/>
+        </a:xfrm>
+      </p:grpSpPr>
+      <p:sp>
+        <p:nvSpPr>
           <p:cNvPr id="2" name="Title 1">
             <a:extLst>
               <a:ext uri="{FF2B5EF4-FFF2-40B4-BE49-F238E27FC236}">
@@ -11318,7 +14154,7 @@
 </p:sld>
 </file>
 
-<file path=ppt/slides/slide6.xml><?xml version="1.0" encoding="utf-8"?>
+<file path=ppt/slides/slide7.xml><?xml version="1.0" encoding="utf-8"?>
 <p:sld xmlns:a="http://schemas.openxmlformats.org/drawingml/2006/main" xmlns:r="http://schemas.openxmlformats.org/officeDocument/2006/relationships" xmlns:p="http://schemas.openxmlformats.org/presentationml/2006/main">
   <p:cSld>
     <p:spTree>
@@ -11851,7 +14687,7 @@
 </p:sld>
 </file>
 
-<file path=ppt/slides/slide7.xml><?xml version="1.0" encoding="utf-8"?>
+<file path=ppt/slides/slide8.xml><?xml version="1.0" encoding="utf-8"?>
 <p:sld xmlns:a="http://schemas.openxmlformats.org/drawingml/2006/main" xmlns:r="http://schemas.openxmlformats.org/officeDocument/2006/relationships" xmlns:p="http://schemas.openxmlformats.org/presentationml/2006/main">
   <p:cSld>
     <p:spTree>
@@ -16733,7 +19569,7 @@
                 <a:latin typeface="Garamond" charset="0"/>
               </a:rPr>
               <a:pPr eaLnBrk="1" hangingPunct="1"/>
-              <a:t>7</a:t>
+              <a:t>8</a:t>
             </a:fld>
             <a:endParaRPr lang="it-IT" altLang="x-none" sz="1200">
               <a:latin typeface="Garamond" charset="0"/>
@@ -17170,7 +20006,7 @@
 </p:sld>
 </file>
 
-<file path=ppt/slides/slide8.xml><?xml version="1.0" encoding="utf-8"?>
+<file path=ppt/slides/slide9.xml><?xml version="1.0" encoding="utf-8"?>
 <p:sld xmlns:a="http://schemas.openxmlformats.org/drawingml/2006/main" xmlns:r="http://schemas.openxmlformats.org/officeDocument/2006/relationships" xmlns:p="http://schemas.openxmlformats.org/presentationml/2006/main">
   <p:cSld>
     <p:spTree>
@@ -17675,7 +20511,7 @@
                 <a:latin typeface="Garamond" charset="0"/>
               </a:rPr>
               <a:pPr eaLnBrk="1" hangingPunct="1"/>
-              <a:t>8</a:t>
+              <a:t>9</a:t>
             </a:fld>
             <a:endParaRPr lang="it-IT" altLang="x-none" sz="1200">
               <a:latin typeface="Garamond" charset="0"/>
@@ -18260,1006 +21096,6 @@
             <a:r>
               <a:rPr lang="en-US" altLang="x-none" sz="1800"/>
               <a:t>sign  exponent        significant</a:t>
-            </a:r>
-          </a:p>
-        </p:txBody>
-      </p:sp>
-    </p:spTree>
-  </p:cSld>
-  <p:clrMapOvr>
-    <a:masterClrMapping/>
-  </p:clrMapOvr>
-</p:sld>
-</file>
-
-<file path=ppt/slides/slide9.xml><?xml version="1.0" encoding="utf-8"?>
-<p:sld xmlns:a="http://schemas.openxmlformats.org/drawingml/2006/main" xmlns:r="http://schemas.openxmlformats.org/officeDocument/2006/relationships" xmlns:p="http://schemas.openxmlformats.org/presentationml/2006/main">
-  <p:cSld>
-    <p:spTree>
-      <p:nvGrpSpPr>
-        <p:cNvPr id="1" name=""/>
-        <p:cNvGrpSpPr/>
-        <p:nvPr/>
-      </p:nvGrpSpPr>
-      <p:grpSpPr>
-        <a:xfrm>
-          <a:off x="0" y="0"/>
-          <a:ext cx="0" cy="0"/>
-          <a:chOff x="0" y="0"/>
-          <a:chExt cx="0" cy="0"/>
-        </a:xfrm>
-      </p:grpSpPr>
-      <p:sp>
-        <p:nvSpPr>
-          <p:cNvPr id="25601" name="Title 1"/>
-          <p:cNvSpPr>
-            <a:spLocks noGrp="1"/>
-          </p:cNvSpPr>
-          <p:nvPr>
-            <p:ph type="title"/>
-          </p:nvPr>
-        </p:nvSpPr>
-        <p:spPr>
-          <a:xfrm>
-            <a:off x="838200" y="365125"/>
-            <a:ext cx="10515600" cy="870551"/>
-          </a:xfrm>
-        </p:spPr>
-        <p:txBody>
-          <a:bodyPr/>
-          <a:lstStyle/>
-          <a:p>
-            <a:r>
-              <a:rPr lang="en-US" altLang="x-none"/>
-              <a:t>C++ interlude</a:t>
-            </a:r>
-          </a:p>
-        </p:txBody>
-      </p:sp>
-      <p:sp>
-        <p:nvSpPr>
-          <p:cNvPr id="25602" name="Date Placeholder 2"/>
-          <p:cNvSpPr>
-            <a:spLocks noGrp="1"/>
-          </p:cNvSpPr>
-          <p:nvPr>
-            <p:ph type="dt" sz="quarter" idx="10"/>
-          </p:nvPr>
-        </p:nvSpPr>
-        <p:spPr>
-          <a:noFill/>
-          <a:ln/>
-          <a:extLst>
-            <a:ext uri="{909E8E84-426E-40DD-AFC4-6F175D3DCCD1}">
-              <a14:hiddenFill xmlns:a14="http://schemas.microsoft.com/office/drawing/2010/main">
-                <a:solidFill>
-                  <a:srgbClr val="FFFFFF"/>
-                </a:solidFill>
-              </a14:hiddenFill>
-            </a:ext>
-            <a:ext uri="{91240B29-F687-4F45-9708-019B960494DF}">
-              <a14:hiddenLine xmlns:a14="http://schemas.microsoft.com/office/drawing/2010/main" w="9525">
-                <a:solidFill>
-                  <a:srgbClr val="000000"/>
-                </a:solidFill>
-                <a:miter lim="800000"/>
-                <a:headEnd/>
-                <a:tailEnd/>
-              </a14:hiddenLine>
-            </a:ext>
-          </a:extLst>
-        </p:spPr>
-        <p:txBody>
-          <a:bodyPr/>
-          <a:lstStyle>
-            <a:lvl1pPr eaLnBrk="0" hangingPunct="0">
-              <a:defRPr sz="2400">
-                <a:solidFill>
-                  <a:schemeClr val="tx1"/>
-                </a:solidFill>
-                <a:latin typeface="Arial" charset="0"/>
-                <a:ea typeface="ＭＳ Ｐゴシック" charset="-128"/>
-              </a:defRPr>
-            </a:lvl1pPr>
-            <a:lvl2pPr marL="742950" indent="-285750" eaLnBrk="0" hangingPunct="0">
-              <a:defRPr sz="2400">
-                <a:solidFill>
-                  <a:schemeClr val="tx1"/>
-                </a:solidFill>
-                <a:latin typeface="Arial" charset="0"/>
-                <a:ea typeface="ＭＳ Ｐゴシック" charset="-128"/>
-              </a:defRPr>
-            </a:lvl2pPr>
-            <a:lvl3pPr marL="1143000" indent="-228600" eaLnBrk="0" hangingPunct="0">
-              <a:defRPr sz="2400">
-                <a:solidFill>
-                  <a:schemeClr val="tx1"/>
-                </a:solidFill>
-                <a:latin typeface="Arial" charset="0"/>
-                <a:ea typeface="ＭＳ Ｐゴシック" charset="-128"/>
-              </a:defRPr>
-            </a:lvl3pPr>
-            <a:lvl4pPr marL="1600200" indent="-228600" eaLnBrk="0" hangingPunct="0">
-              <a:defRPr sz="2400">
-                <a:solidFill>
-                  <a:schemeClr val="tx1"/>
-                </a:solidFill>
-                <a:latin typeface="Arial" charset="0"/>
-                <a:ea typeface="ＭＳ Ｐゴシック" charset="-128"/>
-              </a:defRPr>
-            </a:lvl4pPr>
-            <a:lvl5pPr marL="2057400" indent="-228600" eaLnBrk="0" hangingPunct="0">
-              <a:defRPr sz="2400">
-                <a:solidFill>
-                  <a:schemeClr val="tx1"/>
-                </a:solidFill>
-                <a:latin typeface="Arial" charset="0"/>
-                <a:ea typeface="ＭＳ Ｐゴシック" charset="-128"/>
-              </a:defRPr>
-            </a:lvl5pPr>
-            <a:lvl6pPr marL="2514600" indent="-228600" eaLnBrk="0" fontAlgn="base" hangingPunct="0">
-              <a:spcBef>
-                <a:spcPct val="0"/>
-              </a:spcBef>
-              <a:spcAft>
-                <a:spcPct val="0"/>
-              </a:spcAft>
-              <a:defRPr sz="2400">
-                <a:solidFill>
-                  <a:schemeClr val="tx1"/>
-                </a:solidFill>
-                <a:latin typeface="Arial" charset="0"/>
-                <a:ea typeface="ＭＳ Ｐゴシック" charset="-128"/>
-              </a:defRPr>
-            </a:lvl6pPr>
-            <a:lvl7pPr marL="2971800" indent="-228600" eaLnBrk="0" fontAlgn="base" hangingPunct="0">
-              <a:spcBef>
-                <a:spcPct val="0"/>
-              </a:spcBef>
-              <a:spcAft>
-                <a:spcPct val="0"/>
-              </a:spcAft>
-              <a:defRPr sz="2400">
-                <a:solidFill>
-                  <a:schemeClr val="tx1"/>
-                </a:solidFill>
-                <a:latin typeface="Arial" charset="0"/>
-                <a:ea typeface="ＭＳ Ｐゴシック" charset="-128"/>
-              </a:defRPr>
-            </a:lvl7pPr>
-            <a:lvl8pPr marL="3429000" indent="-228600" eaLnBrk="0" fontAlgn="base" hangingPunct="0">
-              <a:spcBef>
-                <a:spcPct val="0"/>
-              </a:spcBef>
-              <a:spcAft>
-                <a:spcPct val="0"/>
-              </a:spcAft>
-              <a:defRPr sz="2400">
-                <a:solidFill>
-                  <a:schemeClr val="tx1"/>
-                </a:solidFill>
-                <a:latin typeface="Arial" charset="0"/>
-                <a:ea typeface="ＭＳ Ｐゴシック" charset="-128"/>
-              </a:defRPr>
-            </a:lvl8pPr>
-            <a:lvl9pPr marL="3886200" indent="-228600" eaLnBrk="0" fontAlgn="base" hangingPunct="0">
-              <a:spcBef>
-                <a:spcPct val="0"/>
-              </a:spcBef>
-              <a:spcAft>
-                <a:spcPct val="0"/>
-              </a:spcAft>
-              <a:defRPr sz="2400">
-                <a:solidFill>
-                  <a:schemeClr val="tx1"/>
-                </a:solidFill>
-                <a:latin typeface="Arial" charset="0"/>
-                <a:ea typeface="ＭＳ Ｐゴシック" charset="-128"/>
-              </a:defRPr>
-            </a:lvl9pPr>
-          </a:lstStyle>
-          <a:p>
-            <a:pPr eaLnBrk="1" hangingPunct="1"/>
-            <a:r>
-              <a:rPr lang="en-US" altLang="x-none" sz="1200">
-                <a:latin typeface="Garamond" charset="0"/>
-              </a:rPr>
-              <a:t>22 October 2016</a:t>
-            </a:r>
-            <a:endParaRPr lang="it-IT" altLang="x-none" sz="1200">
-              <a:latin typeface="Garamond" charset="0"/>
-            </a:endParaRPr>
-          </a:p>
-        </p:txBody>
-      </p:sp>
-      <p:sp>
-        <p:nvSpPr>
-          <p:cNvPr id="25603" name="Footer Placeholder 3"/>
-          <p:cNvSpPr>
-            <a:spLocks noGrp="1"/>
-          </p:cNvSpPr>
-          <p:nvPr>
-            <p:ph type="ftr" sz="quarter" idx="11"/>
-          </p:nvPr>
-        </p:nvSpPr>
-        <p:spPr>
-          <a:noFill/>
-          <a:ln/>
-          <a:extLst>
-            <a:ext uri="{909E8E84-426E-40DD-AFC4-6F175D3DCCD1}">
-              <a14:hiddenFill xmlns:a14="http://schemas.microsoft.com/office/drawing/2010/main">
-                <a:solidFill>
-                  <a:srgbClr val="FFFFFF"/>
-                </a:solidFill>
-              </a14:hiddenFill>
-            </a:ext>
-            <a:ext uri="{91240B29-F687-4F45-9708-019B960494DF}">
-              <a14:hiddenLine xmlns:a14="http://schemas.microsoft.com/office/drawing/2010/main" w="9525">
-                <a:solidFill>
-                  <a:srgbClr val="000000"/>
-                </a:solidFill>
-                <a:miter lim="800000"/>
-                <a:headEnd/>
-                <a:tailEnd/>
-              </a14:hiddenLine>
-            </a:ext>
-          </a:extLst>
-        </p:spPr>
-        <p:txBody>
-          <a:bodyPr/>
-          <a:lstStyle>
-            <a:lvl1pPr eaLnBrk="0" hangingPunct="0">
-              <a:defRPr sz="2400">
-                <a:solidFill>
-                  <a:schemeClr val="tx1"/>
-                </a:solidFill>
-                <a:latin typeface="Arial" charset="0"/>
-                <a:ea typeface="ＭＳ Ｐゴシック" charset="-128"/>
-              </a:defRPr>
-            </a:lvl1pPr>
-            <a:lvl2pPr marL="742950" indent="-285750" eaLnBrk="0" hangingPunct="0">
-              <a:defRPr sz="2400">
-                <a:solidFill>
-                  <a:schemeClr val="tx1"/>
-                </a:solidFill>
-                <a:latin typeface="Arial" charset="0"/>
-                <a:ea typeface="ＭＳ Ｐゴシック" charset="-128"/>
-              </a:defRPr>
-            </a:lvl2pPr>
-            <a:lvl3pPr marL="1143000" indent="-228600" eaLnBrk="0" hangingPunct="0">
-              <a:defRPr sz="2400">
-                <a:solidFill>
-                  <a:schemeClr val="tx1"/>
-                </a:solidFill>
-                <a:latin typeface="Arial" charset="0"/>
-                <a:ea typeface="ＭＳ Ｐゴシック" charset="-128"/>
-              </a:defRPr>
-            </a:lvl3pPr>
-            <a:lvl4pPr marL="1600200" indent="-228600" eaLnBrk="0" hangingPunct="0">
-              <a:defRPr sz="2400">
-                <a:solidFill>
-                  <a:schemeClr val="tx1"/>
-                </a:solidFill>
-                <a:latin typeface="Arial" charset="0"/>
-                <a:ea typeface="ＭＳ Ｐゴシック" charset="-128"/>
-              </a:defRPr>
-            </a:lvl4pPr>
-            <a:lvl5pPr marL="2057400" indent="-228600" eaLnBrk="0" hangingPunct="0">
-              <a:defRPr sz="2400">
-                <a:solidFill>
-                  <a:schemeClr val="tx1"/>
-                </a:solidFill>
-                <a:latin typeface="Arial" charset="0"/>
-                <a:ea typeface="ＭＳ Ｐゴシック" charset="-128"/>
-              </a:defRPr>
-            </a:lvl5pPr>
-            <a:lvl6pPr marL="2514600" indent="-228600" eaLnBrk="0" fontAlgn="base" hangingPunct="0">
-              <a:spcBef>
-                <a:spcPct val="0"/>
-              </a:spcBef>
-              <a:spcAft>
-                <a:spcPct val="0"/>
-              </a:spcAft>
-              <a:defRPr sz="2400">
-                <a:solidFill>
-                  <a:schemeClr val="tx1"/>
-                </a:solidFill>
-                <a:latin typeface="Arial" charset="0"/>
-                <a:ea typeface="ＭＳ Ｐゴシック" charset="-128"/>
-              </a:defRPr>
-            </a:lvl6pPr>
-            <a:lvl7pPr marL="2971800" indent="-228600" eaLnBrk="0" fontAlgn="base" hangingPunct="0">
-              <a:spcBef>
-                <a:spcPct val="0"/>
-              </a:spcBef>
-              <a:spcAft>
-                <a:spcPct val="0"/>
-              </a:spcAft>
-              <a:defRPr sz="2400">
-                <a:solidFill>
-                  <a:schemeClr val="tx1"/>
-                </a:solidFill>
-                <a:latin typeface="Arial" charset="0"/>
-                <a:ea typeface="ＭＳ Ｐゴシック" charset="-128"/>
-              </a:defRPr>
-            </a:lvl7pPr>
-            <a:lvl8pPr marL="3429000" indent="-228600" eaLnBrk="0" fontAlgn="base" hangingPunct="0">
-              <a:spcBef>
-                <a:spcPct val="0"/>
-              </a:spcBef>
-              <a:spcAft>
-                <a:spcPct val="0"/>
-              </a:spcAft>
-              <a:defRPr sz="2400">
-                <a:solidFill>
-                  <a:schemeClr val="tx1"/>
-                </a:solidFill>
-                <a:latin typeface="Arial" charset="0"/>
-                <a:ea typeface="ＭＳ Ｐゴシック" charset="-128"/>
-              </a:defRPr>
-            </a:lvl8pPr>
-            <a:lvl9pPr marL="3886200" indent="-228600" eaLnBrk="0" fontAlgn="base" hangingPunct="0">
-              <a:spcBef>
-                <a:spcPct val="0"/>
-              </a:spcBef>
-              <a:spcAft>
-                <a:spcPct val="0"/>
-              </a:spcAft>
-              <a:defRPr sz="2400">
-                <a:solidFill>
-                  <a:schemeClr val="tx1"/>
-                </a:solidFill>
-                <a:latin typeface="Arial" charset="0"/>
-                <a:ea typeface="ＭＳ Ｐゴシック" charset="-128"/>
-              </a:defRPr>
-            </a:lvl9pPr>
-          </a:lstStyle>
-          <a:p>
-            <a:pPr eaLnBrk="1" hangingPunct="1"/>
-            <a:r>
-              <a:rPr lang="en-US" altLang="x-none" sz="1200">
-                <a:latin typeface="Garamond" charset="0"/>
-              </a:rPr>
-              <a:t>Vincenzo Innocente</a:t>
-            </a:r>
-            <a:endParaRPr lang="it-IT" altLang="x-none" sz="1200">
-              <a:latin typeface="Garamond" charset="0"/>
-            </a:endParaRPr>
-          </a:p>
-        </p:txBody>
-      </p:sp>
-      <p:sp>
-        <p:nvSpPr>
-          <p:cNvPr id="25604" name="Slide Number Placeholder 4"/>
-          <p:cNvSpPr>
-            <a:spLocks noGrp="1"/>
-          </p:cNvSpPr>
-          <p:nvPr>
-            <p:ph type="sldNum" sz="quarter" idx="12"/>
-          </p:nvPr>
-        </p:nvSpPr>
-        <p:spPr>
-          <a:noFill/>
-          <a:ln/>
-          <a:extLst>
-            <a:ext uri="{909E8E84-426E-40DD-AFC4-6F175D3DCCD1}">
-              <a14:hiddenFill xmlns:a14="http://schemas.microsoft.com/office/drawing/2010/main">
-                <a:solidFill>
-                  <a:srgbClr val="FFFFFF"/>
-                </a:solidFill>
-              </a14:hiddenFill>
-            </a:ext>
-            <a:ext uri="{91240B29-F687-4F45-9708-019B960494DF}">
-              <a14:hiddenLine xmlns:a14="http://schemas.microsoft.com/office/drawing/2010/main" w="9525">
-                <a:solidFill>
-                  <a:srgbClr val="000000"/>
-                </a:solidFill>
-                <a:miter lim="800000"/>
-                <a:headEnd/>
-                <a:tailEnd/>
-              </a14:hiddenLine>
-            </a:ext>
-          </a:extLst>
-        </p:spPr>
-        <p:txBody>
-          <a:bodyPr/>
-          <a:lstStyle>
-            <a:lvl1pPr eaLnBrk="0" hangingPunct="0">
-              <a:defRPr sz="2400">
-                <a:solidFill>
-                  <a:schemeClr val="tx1"/>
-                </a:solidFill>
-                <a:latin typeface="Arial" charset="0"/>
-                <a:ea typeface="ＭＳ Ｐゴシック" charset="-128"/>
-              </a:defRPr>
-            </a:lvl1pPr>
-            <a:lvl2pPr marL="742950" indent="-285750" eaLnBrk="0" hangingPunct="0">
-              <a:defRPr sz="2400">
-                <a:solidFill>
-                  <a:schemeClr val="tx1"/>
-                </a:solidFill>
-                <a:latin typeface="Arial" charset="0"/>
-                <a:ea typeface="ＭＳ Ｐゴシック" charset="-128"/>
-              </a:defRPr>
-            </a:lvl2pPr>
-            <a:lvl3pPr marL="1143000" indent="-228600" eaLnBrk="0" hangingPunct="0">
-              <a:defRPr sz="2400">
-                <a:solidFill>
-                  <a:schemeClr val="tx1"/>
-                </a:solidFill>
-                <a:latin typeface="Arial" charset="0"/>
-                <a:ea typeface="ＭＳ Ｐゴシック" charset="-128"/>
-              </a:defRPr>
-            </a:lvl3pPr>
-            <a:lvl4pPr marL="1600200" indent="-228600" eaLnBrk="0" hangingPunct="0">
-              <a:defRPr sz="2400">
-                <a:solidFill>
-                  <a:schemeClr val="tx1"/>
-                </a:solidFill>
-                <a:latin typeface="Arial" charset="0"/>
-                <a:ea typeface="ＭＳ Ｐゴシック" charset="-128"/>
-              </a:defRPr>
-            </a:lvl4pPr>
-            <a:lvl5pPr marL="2057400" indent="-228600" eaLnBrk="0" hangingPunct="0">
-              <a:defRPr sz="2400">
-                <a:solidFill>
-                  <a:schemeClr val="tx1"/>
-                </a:solidFill>
-                <a:latin typeface="Arial" charset="0"/>
-                <a:ea typeface="ＭＳ Ｐゴシック" charset="-128"/>
-              </a:defRPr>
-            </a:lvl5pPr>
-            <a:lvl6pPr marL="2514600" indent="-228600" eaLnBrk="0" fontAlgn="base" hangingPunct="0">
-              <a:spcBef>
-                <a:spcPct val="0"/>
-              </a:spcBef>
-              <a:spcAft>
-                <a:spcPct val="0"/>
-              </a:spcAft>
-              <a:defRPr sz="2400">
-                <a:solidFill>
-                  <a:schemeClr val="tx1"/>
-                </a:solidFill>
-                <a:latin typeface="Arial" charset="0"/>
-                <a:ea typeface="ＭＳ Ｐゴシック" charset="-128"/>
-              </a:defRPr>
-            </a:lvl6pPr>
-            <a:lvl7pPr marL="2971800" indent="-228600" eaLnBrk="0" fontAlgn="base" hangingPunct="0">
-              <a:spcBef>
-                <a:spcPct val="0"/>
-              </a:spcBef>
-              <a:spcAft>
-                <a:spcPct val="0"/>
-              </a:spcAft>
-              <a:defRPr sz="2400">
-                <a:solidFill>
-                  <a:schemeClr val="tx1"/>
-                </a:solidFill>
-                <a:latin typeface="Arial" charset="0"/>
-                <a:ea typeface="ＭＳ Ｐゴシック" charset="-128"/>
-              </a:defRPr>
-            </a:lvl7pPr>
-            <a:lvl8pPr marL="3429000" indent="-228600" eaLnBrk="0" fontAlgn="base" hangingPunct="0">
-              <a:spcBef>
-                <a:spcPct val="0"/>
-              </a:spcBef>
-              <a:spcAft>
-                <a:spcPct val="0"/>
-              </a:spcAft>
-              <a:defRPr sz="2400">
-                <a:solidFill>
-                  <a:schemeClr val="tx1"/>
-                </a:solidFill>
-                <a:latin typeface="Arial" charset="0"/>
-                <a:ea typeface="ＭＳ Ｐゴシック" charset="-128"/>
-              </a:defRPr>
-            </a:lvl8pPr>
-            <a:lvl9pPr marL="3886200" indent="-228600" eaLnBrk="0" fontAlgn="base" hangingPunct="0">
-              <a:spcBef>
-                <a:spcPct val="0"/>
-              </a:spcBef>
-              <a:spcAft>
-                <a:spcPct val="0"/>
-              </a:spcAft>
-              <a:defRPr sz="2400">
-                <a:solidFill>
-                  <a:schemeClr val="tx1"/>
-                </a:solidFill>
-                <a:latin typeface="Arial" charset="0"/>
-                <a:ea typeface="ＭＳ Ｐゴシック" charset="-128"/>
-              </a:defRPr>
-            </a:lvl9pPr>
-          </a:lstStyle>
-          <a:p>
-            <a:pPr eaLnBrk="1" hangingPunct="1"/>
-            <a:fld id="{502E4000-0355-7D4E-B01D-371C3A18747A}" type="slidenum">
-              <a:rPr lang="it-IT" altLang="x-none" sz="1200">
-                <a:latin typeface="Garamond" charset="0"/>
-              </a:rPr>
-              <a:pPr eaLnBrk="1" hangingPunct="1"/>
-              <a:t>9</a:t>
-            </a:fld>
-            <a:endParaRPr lang="it-IT" altLang="x-none" sz="1200">
-              <a:latin typeface="Garamond" charset="0"/>
-            </a:endParaRPr>
-          </a:p>
-        </p:txBody>
-      </p:sp>
-      <p:sp>
-        <p:nvSpPr>
-          <p:cNvPr id="25605" name="TextBox 5"/>
-          <p:cNvSpPr txBox="1">
-            <a:spLocks noChangeArrowheads="1"/>
-          </p:cNvSpPr>
-          <p:nvPr/>
-        </p:nvSpPr>
-        <p:spPr bwMode="auto">
-          <a:xfrm>
-            <a:off x="1329982" y="1117000"/>
-            <a:ext cx="8497888" cy="5078413"/>
-          </a:xfrm>
-          <a:prstGeom prst="rect">
-            <a:avLst/>
-          </a:prstGeom>
-          <a:solidFill>
-            <a:srgbClr val="FFFF00"/>
-          </a:solidFill>
-          <a:ln>
-            <a:noFill/>
-          </a:ln>
-          <a:extLst>
-            <a:ext uri="{91240B29-F687-4F45-9708-019B960494DF}">
-              <a14:hiddenLine xmlns:a14="http://schemas.microsoft.com/office/drawing/2010/main" w="9525">
-                <a:solidFill>
-                  <a:srgbClr val="000000"/>
-                </a:solidFill>
-                <a:miter lim="800000"/>
-                <a:headEnd/>
-                <a:tailEnd/>
-              </a14:hiddenLine>
-            </a:ext>
-          </a:extLst>
-        </p:spPr>
-        <p:txBody>
-          <a:bodyPr>
-            <a:spAutoFit/>
-          </a:bodyPr>
-          <a:lstStyle>
-            <a:lvl1pPr eaLnBrk="0" hangingPunct="0">
-              <a:defRPr sz="2400">
-                <a:solidFill>
-                  <a:schemeClr val="tx1"/>
-                </a:solidFill>
-                <a:latin typeface="Arial" charset="0"/>
-                <a:ea typeface="ＭＳ Ｐゴシック" charset="-128"/>
-              </a:defRPr>
-            </a:lvl1pPr>
-            <a:lvl2pPr marL="742950" indent="-285750" eaLnBrk="0" hangingPunct="0">
-              <a:defRPr sz="2400">
-                <a:solidFill>
-                  <a:schemeClr val="tx1"/>
-                </a:solidFill>
-                <a:latin typeface="Arial" charset="0"/>
-                <a:ea typeface="ＭＳ Ｐゴシック" charset="-128"/>
-              </a:defRPr>
-            </a:lvl2pPr>
-            <a:lvl3pPr marL="1143000" indent="-228600" eaLnBrk="0" hangingPunct="0">
-              <a:defRPr sz="2400">
-                <a:solidFill>
-                  <a:schemeClr val="tx1"/>
-                </a:solidFill>
-                <a:latin typeface="Arial" charset="0"/>
-                <a:ea typeface="ＭＳ Ｐゴシック" charset="-128"/>
-              </a:defRPr>
-            </a:lvl3pPr>
-            <a:lvl4pPr marL="1600200" indent="-228600" eaLnBrk="0" hangingPunct="0">
-              <a:defRPr sz="2400">
-                <a:solidFill>
-                  <a:schemeClr val="tx1"/>
-                </a:solidFill>
-                <a:latin typeface="Arial" charset="0"/>
-                <a:ea typeface="ＭＳ Ｐゴシック" charset="-128"/>
-              </a:defRPr>
-            </a:lvl4pPr>
-            <a:lvl5pPr marL="2057400" indent="-228600" eaLnBrk="0" hangingPunct="0">
-              <a:defRPr sz="2400">
-                <a:solidFill>
-                  <a:schemeClr val="tx1"/>
-                </a:solidFill>
-                <a:latin typeface="Arial" charset="0"/>
-                <a:ea typeface="ＭＳ Ｐゴシック" charset="-128"/>
-              </a:defRPr>
-            </a:lvl5pPr>
-            <a:lvl6pPr marL="2514600" indent="-228600" eaLnBrk="0" fontAlgn="base" hangingPunct="0">
-              <a:spcBef>
-                <a:spcPct val="0"/>
-              </a:spcBef>
-              <a:spcAft>
-                <a:spcPct val="0"/>
-              </a:spcAft>
-              <a:defRPr sz="2400">
-                <a:solidFill>
-                  <a:schemeClr val="tx1"/>
-                </a:solidFill>
-                <a:latin typeface="Arial" charset="0"/>
-                <a:ea typeface="ＭＳ Ｐゴシック" charset="-128"/>
-              </a:defRPr>
-            </a:lvl6pPr>
-            <a:lvl7pPr marL="2971800" indent="-228600" eaLnBrk="0" fontAlgn="base" hangingPunct="0">
-              <a:spcBef>
-                <a:spcPct val="0"/>
-              </a:spcBef>
-              <a:spcAft>
-                <a:spcPct val="0"/>
-              </a:spcAft>
-              <a:defRPr sz="2400">
-                <a:solidFill>
-                  <a:schemeClr val="tx1"/>
-                </a:solidFill>
-                <a:latin typeface="Arial" charset="0"/>
-                <a:ea typeface="ＭＳ Ｐゴシック" charset="-128"/>
-              </a:defRPr>
-            </a:lvl7pPr>
-            <a:lvl8pPr marL="3429000" indent="-228600" eaLnBrk="0" fontAlgn="base" hangingPunct="0">
-              <a:spcBef>
-                <a:spcPct val="0"/>
-              </a:spcBef>
-              <a:spcAft>
-                <a:spcPct val="0"/>
-              </a:spcAft>
-              <a:defRPr sz="2400">
-                <a:solidFill>
-                  <a:schemeClr val="tx1"/>
-                </a:solidFill>
-                <a:latin typeface="Arial" charset="0"/>
-                <a:ea typeface="ＭＳ Ｐゴシック" charset="-128"/>
-              </a:defRPr>
-            </a:lvl8pPr>
-            <a:lvl9pPr marL="3886200" indent="-228600" eaLnBrk="0" fontAlgn="base" hangingPunct="0">
-              <a:spcBef>
-                <a:spcPct val="0"/>
-              </a:spcBef>
-              <a:spcAft>
-                <a:spcPct val="0"/>
-              </a:spcAft>
-              <a:defRPr sz="2400">
-                <a:solidFill>
-                  <a:schemeClr val="tx1"/>
-                </a:solidFill>
-                <a:latin typeface="Arial" charset="0"/>
-                <a:ea typeface="ＭＳ Ｐゴシック" charset="-128"/>
-              </a:defRPr>
-            </a:lvl9pPr>
-          </a:lstStyle>
-          <a:p>
-            <a:pPr eaLnBrk="1" hangingPunct="1"/>
-            <a:r>
-              <a:rPr lang="en-US" altLang="x-none" sz="1800"/>
-              <a:t>#include&lt;iostream&gt;</a:t>
-            </a:r>
-          </a:p>
-          <a:p>
-            <a:pPr eaLnBrk="1" hangingPunct="1"/>
-            <a:r>
-              <a:rPr lang="en-US" altLang="x-none" sz="1800"/>
-              <a:t>#include&lt;</a:t>
-            </a:r>
-            <a:r>
-              <a:rPr lang="en-US" altLang="x-none" sz="1800" err="1"/>
-              <a:t>iomanip</a:t>
-            </a:r>
-            <a:r>
-              <a:rPr lang="en-US" altLang="x-none" sz="1800"/>
-              <a:t>&gt;</a:t>
-            </a:r>
-          </a:p>
-          <a:p>
-            <a:pPr eaLnBrk="1" hangingPunct="1"/>
-            <a:r>
-              <a:rPr lang="en-US" altLang="x-none" sz="1800"/>
-              <a:t>#include&lt;</a:t>
-            </a:r>
-            <a:r>
-              <a:rPr lang="en-US" altLang="x-none" sz="1800" err="1"/>
-              <a:t>cmath</a:t>
-            </a:r>
-            <a:r>
-              <a:rPr lang="en-US" altLang="x-none" sz="1800"/>
-              <a:t>&gt;</a:t>
-            </a:r>
-          </a:p>
-          <a:p>
-            <a:pPr eaLnBrk="1" hangingPunct="1"/>
-            <a:r>
-              <a:rPr lang="en-US" altLang="x-none" sz="1800"/>
-              <a:t>#include&lt;limits&gt;</a:t>
-            </a:r>
-          </a:p>
-          <a:p>
-            <a:pPr eaLnBrk="1" hangingPunct="1"/>
-            <a:r>
-              <a:rPr lang="en-US" altLang="x-none" sz="1800"/>
-              <a:t>//  std style</a:t>
-            </a:r>
-          </a:p>
-          <a:p>
-            <a:pPr eaLnBrk="1" hangingPunct="1"/>
-            <a:r>
-              <a:rPr lang="en-US" altLang="x-none" sz="1800"/>
-              <a:t>template&lt;</a:t>
-            </a:r>
-            <a:r>
-              <a:rPr lang="en-US" altLang="x-none" sz="1800" err="1"/>
-              <a:t>typename</a:t>
-            </a:r>
-            <a:r>
-              <a:rPr lang="en-US" altLang="x-none" sz="1800"/>
-              <a:t> T&gt;</a:t>
-            </a:r>
-          </a:p>
-          <a:p>
-            <a:pPr eaLnBrk="1" hangingPunct="1"/>
-            <a:r>
-              <a:rPr lang="en-US" altLang="x-none" sz="1800"/>
-              <a:t>void print(T x) {          </a:t>
-            </a:r>
-          </a:p>
-          <a:p>
-            <a:pPr eaLnBrk="1" hangingPunct="1"/>
-            <a:r>
-              <a:rPr lang="en-US" altLang="x-none" sz="1800"/>
-              <a:t> std::</a:t>
-            </a:r>
-            <a:r>
-              <a:rPr lang="en-US" altLang="x-none" sz="1800" err="1"/>
-              <a:t>cout</a:t>
-            </a:r>
-            <a:r>
-              <a:rPr lang="en-US" altLang="x-none" sz="1800"/>
-              <a:t> &lt;&lt; std::</a:t>
-            </a:r>
-            <a:r>
-              <a:rPr lang="en-US" altLang="x-none" sz="1800" err="1"/>
-              <a:t>hexfloat</a:t>
-            </a:r>
-            <a:r>
-              <a:rPr lang="en-US" altLang="x-none" sz="1800"/>
-              <a:t> &lt;&lt; x &lt;&lt;' </a:t>
-            </a:r>
-            <a:r>
-              <a:rPr lang="en-US" altLang="en-US" sz="1800"/>
-              <a:t>’</a:t>
-            </a:r>
-            <a:r>
-              <a:rPr lang="en-US" altLang="x-none" sz="1800"/>
-              <a:t> </a:t>
-            </a:r>
-            <a:r>
-              <a:rPr lang="en-US" altLang="x-none" sz="1800">
-                <a:solidFill>
-                  <a:srgbClr val="FF0000"/>
-                </a:solidFill>
-              </a:rPr>
-              <a:t>// exact binary representation</a:t>
-            </a:r>
-          </a:p>
-          <a:p>
-            <a:pPr eaLnBrk="1" hangingPunct="1"/>
-            <a:r>
-              <a:rPr lang="en-US" altLang="x-none" sz="1800"/>
-              <a:t>                &lt;&lt;  std::scientific &lt;&lt; std::</a:t>
-            </a:r>
-            <a:r>
-              <a:rPr lang="en-US" altLang="x-none" sz="1800" err="1"/>
-              <a:t>setprecision</a:t>
-            </a:r>
-            <a:r>
-              <a:rPr lang="en-US" altLang="x-none" sz="1800"/>
-              <a:t>(8) &lt;&lt; x &lt;&lt; ' </a:t>
-            </a:r>
-            <a:r>
-              <a:rPr lang="en-US" altLang="en-US" sz="1800"/>
-              <a:t>’</a:t>
-            </a:r>
-            <a:r>
-              <a:rPr lang="en-US" altLang="x-none" sz="1800"/>
-              <a:t> </a:t>
-            </a:r>
-            <a:r>
-              <a:rPr lang="en-US" altLang="x-none" sz="1800">
-                <a:solidFill>
-                  <a:srgbClr val="FF0000"/>
-                </a:solidFill>
-              </a:rPr>
-              <a:t>// 8 decimal digits</a:t>
-            </a:r>
-          </a:p>
-          <a:p>
-            <a:pPr eaLnBrk="1" hangingPunct="1"/>
-            <a:r>
-              <a:rPr lang="en-US" altLang="x-none" sz="1800"/>
-              <a:t>                &lt;&lt;  std::</a:t>
-            </a:r>
-            <a:r>
-              <a:rPr lang="en-US" altLang="x-none" sz="1800" err="1"/>
-              <a:t>defaultfloat</a:t>
-            </a:r>
-            <a:r>
-              <a:rPr lang="en-US" altLang="x-none" sz="1800"/>
-              <a:t> &lt;&lt; x &lt;&lt; std::</a:t>
-            </a:r>
-            <a:r>
-              <a:rPr lang="en-US" altLang="x-none" sz="1800" err="1"/>
-              <a:t>endl</a:t>
-            </a:r>
-            <a:r>
-              <a:rPr lang="en-US" altLang="x-none" sz="1800"/>
-              <a:t>;    </a:t>
-            </a:r>
-            <a:r>
-              <a:rPr lang="en-US" altLang="x-none" sz="1800">
-                <a:solidFill>
-                  <a:srgbClr val="FF0000"/>
-                </a:solidFill>
-              </a:rPr>
-              <a:t>// 6 decimal digits for float </a:t>
-            </a:r>
-          </a:p>
-          <a:p>
-            <a:pPr eaLnBrk="1" hangingPunct="1"/>
-            <a:r>
-              <a:rPr lang="en-US" altLang="x-none" sz="1800"/>
-              <a:t>}</a:t>
-            </a:r>
-          </a:p>
-          <a:p>
-            <a:pPr eaLnBrk="1" hangingPunct="1"/>
-            <a:endParaRPr lang="en-US" altLang="x-none" sz="1800"/>
-          </a:p>
-          <a:p>
-            <a:pPr eaLnBrk="1" hangingPunct="1"/>
-            <a:r>
-              <a:rPr lang="en-US" altLang="x-none" sz="1800"/>
-              <a:t>// integer representation</a:t>
-            </a:r>
-          </a:p>
-          <a:p>
-            <a:pPr eaLnBrk="1" hangingPunct="1"/>
-            <a:r>
-              <a:rPr lang="en-US" altLang="x-none" sz="1800"/>
-              <a:t>#include&lt;</a:t>
-            </a:r>
-            <a:r>
-              <a:rPr lang="en-US" altLang="x-none" sz="1800" err="1"/>
-              <a:t>cstring</a:t>
-            </a:r>
-            <a:r>
-              <a:rPr lang="en-US" altLang="x-none" sz="1800"/>
-              <a:t>&gt;</a:t>
-            </a:r>
-          </a:p>
-          <a:p>
-            <a:pPr eaLnBrk="1" hangingPunct="1"/>
-            <a:r>
-              <a:rPr lang="en-US" altLang="x-none" sz="1800"/>
-              <a:t>#include&lt;</a:t>
-            </a:r>
-            <a:r>
-              <a:rPr lang="en-US" altLang="x-none" sz="1800" err="1"/>
-              <a:t>bitset</a:t>
-            </a:r>
-            <a:r>
-              <a:rPr lang="en-US" altLang="x-none" sz="1800"/>
-              <a:t>&gt;</a:t>
-            </a:r>
-          </a:p>
-          <a:p>
-            <a:pPr eaLnBrk="1" hangingPunct="1"/>
-            <a:r>
-              <a:rPr lang="en-US" altLang="x-none" sz="1800"/>
-              <a:t>int f2i(float x) { int </a:t>
-            </a:r>
-            <a:r>
-              <a:rPr lang="en-US" altLang="x-none" sz="1800" err="1"/>
-              <a:t>i</a:t>
-            </a:r>
-            <a:r>
-              <a:rPr lang="en-US" altLang="x-none" sz="1800"/>
-              <a:t>; </a:t>
-            </a:r>
-            <a:r>
-              <a:rPr lang="en-US" altLang="x-none" sz="1800" err="1"/>
-              <a:t>memcpy</a:t>
-            </a:r>
-            <a:r>
-              <a:rPr lang="en-US" altLang="x-none" sz="1800"/>
-              <a:t>(&amp;</a:t>
-            </a:r>
-            <a:r>
-              <a:rPr lang="en-US" altLang="x-none" sz="1800" err="1"/>
-              <a:t>i</a:t>
-            </a:r>
-            <a:r>
-              <a:rPr lang="en-US" altLang="x-none" sz="1800"/>
-              <a:t>,&amp;</a:t>
-            </a:r>
-            <a:r>
-              <a:rPr lang="en-US" altLang="x-none" sz="1800" err="1"/>
-              <a:t>x,sizeof</a:t>
-            </a:r>
-            <a:r>
-              <a:rPr lang="en-US" altLang="x-none" sz="1800"/>
-              <a:t>(int)); return </a:t>
-            </a:r>
-            <a:r>
-              <a:rPr lang="en-US" altLang="x-none" sz="1800" err="1"/>
-              <a:t>i</a:t>
-            </a:r>
-            <a:r>
-              <a:rPr lang="en-US" altLang="x-none" sz="1800"/>
-              <a:t>;} </a:t>
-            </a:r>
-            <a:r>
-              <a:rPr lang="en-US" altLang="x-none" sz="1800">
-                <a:solidFill>
-                  <a:srgbClr val="FF0000"/>
-                </a:solidFill>
-              </a:rPr>
-              <a:t>// compiler will optimize</a:t>
-            </a:r>
-          </a:p>
-          <a:p>
-            <a:pPr eaLnBrk="1" hangingPunct="1"/>
-            <a:r>
-              <a:rPr lang="en-US" altLang="x-none" sz="1800"/>
-              <a:t>//  use </a:t>
-            </a:r>
-            <a:r>
-              <a:rPr lang="en-US" altLang="x-none" sz="1800" err="1"/>
-              <a:t>bitset</a:t>
-            </a:r>
-            <a:r>
-              <a:rPr lang="en-US" altLang="x-none" sz="1800"/>
-              <a:t> to print in binary (bit by bit) </a:t>
-            </a:r>
-          </a:p>
-          <a:p>
-            <a:pPr eaLnBrk="1" hangingPunct="1"/>
-            <a:r>
-              <a:rPr lang="en-US" altLang="x-none" sz="1800"/>
-              <a:t>std::</a:t>
-            </a:r>
-            <a:r>
-              <a:rPr lang="en-US" altLang="x-none" sz="1800" err="1"/>
-              <a:t>cout</a:t>
-            </a:r>
-            <a:r>
-              <a:rPr lang="en-US" altLang="x-none" sz="1800"/>
-              <a:t> &lt;&lt; std::</a:t>
-            </a:r>
-            <a:r>
-              <a:rPr lang="en-US" altLang="x-none" sz="1800" err="1"/>
-              <a:t>bitset</a:t>
-            </a:r>
-            <a:r>
-              <a:rPr lang="en-US" altLang="x-none" sz="1800"/>
-              <a:t>&lt;32&gt;(f2i(x)) &lt;&lt; std::</a:t>
-            </a:r>
-            <a:r>
-              <a:rPr lang="en-US" altLang="x-none" sz="1800" err="1"/>
-              <a:t>endl</a:t>
-            </a:r>
-            <a:r>
-              <a:rPr lang="en-US" altLang="x-none" sz="1800"/>
-              <a:t>; ;   </a:t>
-            </a:r>
-            <a:r>
-              <a:rPr lang="en-US" altLang="x-none" sz="1800">
-                <a:solidFill>
-                  <a:srgbClr val="FF0000"/>
-                </a:solidFill>
-              </a:rPr>
-              <a:t>// bit by bit</a:t>
             </a:r>
           </a:p>
         </p:txBody>

--- a/Slides/FPforScientist.pptx
+++ b/Slides/FPforScientist.pptx
@@ -4394,108 +4394,108 @@
           <a:p>
             <a:pPr eaLnBrk="1" hangingPunct="1"/>
             <a:r>
-              <a:rPr lang="en-US" altLang="x-none" sz="1800"/>
+              <a:rPr lang="en-US" altLang="x-none" sz="1800" dirty="0"/>
               <a:t>#include&lt;iostream&gt;</a:t>
             </a:r>
           </a:p>
           <a:p>
             <a:pPr eaLnBrk="1" hangingPunct="1"/>
             <a:r>
-              <a:rPr lang="en-US" altLang="x-none" sz="1800"/>
+              <a:rPr lang="en-US" altLang="x-none" sz="1800" dirty="0"/>
               <a:t>#include&lt;</a:t>
             </a:r>
             <a:r>
-              <a:rPr lang="en-US" altLang="x-none" sz="1800" err="1"/>
+              <a:rPr lang="en-US" altLang="x-none" sz="1800" dirty="0" err="1"/>
               <a:t>iomanip</a:t>
             </a:r>
             <a:r>
-              <a:rPr lang="en-US" altLang="x-none" sz="1800"/>
+              <a:rPr lang="en-US" altLang="x-none" sz="1800" dirty="0"/>
               <a:t>&gt;</a:t>
             </a:r>
           </a:p>
           <a:p>
             <a:pPr eaLnBrk="1" hangingPunct="1"/>
             <a:r>
-              <a:rPr lang="en-US" altLang="x-none" sz="1800"/>
+              <a:rPr lang="en-US" altLang="x-none" sz="1800" dirty="0"/>
               <a:t>#include&lt;</a:t>
             </a:r>
             <a:r>
-              <a:rPr lang="en-US" altLang="x-none" sz="1800" err="1"/>
+              <a:rPr lang="en-US" altLang="x-none" sz="1800" dirty="0" err="1"/>
               <a:t>cmath</a:t>
             </a:r>
             <a:r>
-              <a:rPr lang="en-US" altLang="x-none" sz="1800"/>
+              <a:rPr lang="en-US" altLang="x-none" sz="1800" dirty="0"/>
               <a:t>&gt;</a:t>
             </a:r>
           </a:p>
           <a:p>
             <a:pPr eaLnBrk="1" hangingPunct="1"/>
             <a:r>
-              <a:rPr lang="en-US" altLang="x-none" sz="1800"/>
+              <a:rPr lang="en-US" altLang="x-none" sz="1800" dirty="0"/>
               <a:t>#include&lt;limits&gt;</a:t>
             </a:r>
           </a:p>
           <a:p>
             <a:pPr eaLnBrk="1" hangingPunct="1"/>
             <a:r>
-              <a:rPr lang="en-US" altLang="x-none" sz="1800"/>
+              <a:rPr lang="en-US" altLang="x-none" sz="1800" dirty="0"/>
               <a:t>//  std style</a:t>
             </a:r>
           </a:p>
           <a:p>
             <a:pPr eaLnBrk="1" hangingPunct="1"/>
             <a:r>
-              <a:rPr lang="en-US" altLang="x-none" sz="1800"/>
+              <a:rPr lang="en-US" altLang="x-none" sz="1800" dirty="0"/>
               <a:t>template&lt;</a:t>
             </a:r>
             <a:r>
-              <a:rPr lang="en-US" altLang="x-none" sz="1800" err="1"/>
+              <a:rPr lang="en-US" altLang="x-none" sz="1800" dirty="0" err="1"/>
               <a:t>typename</a:t>
             </a:r>
             <a:r>
-              <a:rPr lang="en-US" altLang="x-none" sz="1800"/>
+              <a:rPr lang="en-US" altLang="x-none" sz="1800" dirty="0"/>
               <a:t> T&gt;</a:t>
             </a:r>
           </a:p>
           <a:p>
             <a:pPr eaLnBrk="1" hangingPunct="1"/>
             <a:r>
-              <a:rPr lang="en-US" altLang="x-none" sz="1800"/>
+              <a:rPr lang="en-US" altLang="x-none" sz="1800" dirty="0"/>
               <a:t>void print(T x) {          </a:t>
             </a:r>
           </a:p>
           <a:p>
             <a:pPr eaLnBrk="1" hangingPunct="1"/>
             <a:r>
-              <a:rPr lang="en-US" altLang="x-none" sz="1800"/>
+              <a:rPr lang="en-US" altLang="x-none" sz="1800" dirty="0"/>
               <a:t> std::</a:t>
             </a:r>
             <a:r>
-              <a:rPr lang="en-US" altLang="x-none" sz="1800" err="1"/>
+              <a:rPr lang="en-US" altLang="x-none" sz="1800" dirty="0" err="1"/>
               <a:t>cout</a:t>
             </a:r>
             <a:r>
-              <a:rPr lang="en-US" altLang="x-none" sz="1800"/>
+              <a:rPr lang="en-US" altLang="x-none" sz="1800" dirty="0"/>
               <a:t> &lt;&lt; std::</a:t>
             </a:r>
             <a:r>
-              <a:rPr lang="en-US" altLang="x-none" sz="1800" err="1"/>
+              <a:rPr lang="en-US" altLang="x-none" sz="1800" dirty="0" err="1"/>
               <a:t>hexfloat</a:t>
             </a:r>
             <a:r>
-              <a:rPr lang="en-US" altLang="x-none" sz="1800"/>
+              <a:rPr lang="en-US" altLang="x-none" sz="1800" dirty="0"/>
               <a:t> &lt;&lt; x &lt;&lt;' </a:t>
             </a:r>
             <a:r>
-              <a:rPr lang="en-US" altLang="en-US" sz="1800"/>
+              <a:rPr lang="en-US" altLang="en-US" sz="1800" dirty="0"/>
               <a:t>’</a:t>
             </a:r>
             <a:r>
-              <a:rPr lang="en-US" altLang="x-none" sz="1800"/>
+              <a:rPr lang="en-US" altLang="x-none" sz="1800" dirty="0"/>
               <a:t> </a:t>
             </a:r>
             <a:r>
-              <a:rPr lang="en-US" altLang="x-none" sz="1800">
+              <a:rPr lang="en-US" altLang="x-none" sz="1800" dirty="0">
                 <a:solidFill>
                   <a:srgbClr val="FF0000"/>
                 </a:solidFill>
@@ -4506,27 +4506,27 @@
           <a:p>
             <a:pPr eaLnBrk="1" hangingPunct="1"/>
             <a:r>
-              <a:rPr lang="en-US" altLang="x-none" sz="1800"/>
+              <a:rPr lang="en-US" altLang="x-none" sz="1800" dirty="0"/>
               <a:t>                &lt;&lt;  std::scientific &lt;&lt; std::</a:t>
             </a:r>
             <a:r>
-              <a:rPr lang="en-US" altLang="x-none" sz="1800" err="1"/>
+              <a:rPr lang="en-US" altLang="x-none" sz="1800" dirty="0" err="1"/>
               <a:t>setprecision</a:t>
             </a:r>
             <a:r>
-              <a:rPr lang="en-US" altLang="x-none" sz="1800"/>
+              <a:rPr lang="en-US" altLang="x-none" sz="1800" dirty="0"/>
               <a:t>(8) &lt;&lt; x &lt;&lt; ' </a:t>
             </a:r>
             <a:r>
-              <a:rPr lang="en-US" altLang="en-US" sz="1800"/>
+              <a:rPr lang="en-US" altLang="en-US" sz="1800" dirty="0"/>
               <a:t>’</a:t>
             </a:r>
             <a:r>
-              <a:rPr lang="en-US" altLang="x-none" sz="1800"/>
+              <a:rPr lang="en-US" altLang="x-none" sz="1800" dirty="0"/>
               <a:t> </a:t>
             </a:r>
             <a:r>
-              <a:rPr lang="en-US" altLang="x-none" sz="1800">
+              <a:rPr lang="en-US" altLang="x-none" sz="1800" dirty="0">
                 <a:solidFill>
                   <a:srgbClr val="FF0000"/>
                 </a:solidFill>
@@ -4537,27 +4537,27 @@
           <a:p>
             <a:pPr eaLnBrk="1" hangingPunct="1"/>
             <a:r>
-              <a:rPr lang="en-US" altLang="x-none" sz="1800"/>
+              <a:rPr lang="en-US" altLang="x-none" sz="1800" dirty="0"/>
               <a:t>                &lt;&lt;  std::</a:t>
             </a:r>
             <a:r>
-              <a:rPr lang="en-US" altLang="x-none" sz="1800" err="1"/>
+              <a:rPr lang="en-US" altLang="x-none" sz="1800" dirty="0" err="1"/>
               <a:t>defaultfloat</a:t>
             </a:r>
             <a:r>
-              <a:rPr lang="en-US" altLang="x-none" sz="1800"/>
+              <a:rPr lang="en-US" altLang="x-none" sz="1800" dirty="0"/>
               <a:t> &lt;&lt; x &lt;&lt; std::</a:t>
             </a:r>
             <a:r>
-              <a:rPr lang="en-US" altLang="x-none" sz="1800" err="1"/>
+              <a:rPr lang="en-US" altLang="x-none" sz="1800" dirty="0" err="1"/>
               <a:t>endl</a:t>
             </a:r>
             <a:r>
-              <a:rPr lang="en-US" altLang="x-none" sz="1800"/>
+              <a:rPr lang="en-US" altLang="x-none" sz="1800" dirty="0"/>
               <a:t>;    </a:t>
             </a:r>
             <a:r>
-              <a:rPr lang="en-US" altLang="x-none" sz="1800">
+              <a:rPr lang="en-US" altLang="x-none" sz="1800" dirty="0">
                 <a:solidFill>
                   <a:srgbClr val="FF0000"/>
                 </a:solidFill>
@@ -4568,99 +4568,99 @@
           <a:p>
             <a:pPr eaLnBrk="1" hangingPunct="1"/>
             <a:r>
-              <a:rPr lang="en-US" altLang="x-none" sz="1800"/>
+              <a:rPr lang="en-US" altLang="x-none" sz="1800" dirty="0"/>
               <a:t>}</a:t>
             </a:r>
           </a:p>
           <a:p>
             <a:pPr eaLnBrk="1" hangingPunct="1"/>
-            <a:endParaRPr lang="en-US" altLang="x-none" sz="1800"/>
+            <a:endParaRPr lang="en-US" altLang="x-none" sz="1800" dirty="0"/>
           </a:p>
           <a:p>
             <a:pPr eaLnBrk="1" hangingPunct="1"/>
             <a:r>
-              <a:rPr lang="en-US" altLang="x-none" sz="1800"/>
+              <a:rPr lang="en-US" altLang="x-none" sz="1800" dirty="0"/>
               <a:t>// integer representation</a:t>
             </a:r>
           </a:p>
           <a:p>
             <a:pPr eaLnBrk="1" hangingPunct="1"/>
             <a:r>
-              <a:rPr lang="en-US" altLang="x-none" sz="1800"/>
+              <a:rPr lang="en-US" altLang="x-none" sz="1800" dirty="0"/>
               <a:t>#include&lt;</a:t>
             </a:r>
             <a:r>
-              <a:rPr lang="en-US" altLang="x-none" sz="1800" err="1"/>
+              <a:rPr lang="en-US" altLang="x-none" sz="1800" dirty="0" err="1"/>
               <a:t>cstring</a:t>
             </a:r>
             <a:r>
-              <a:rPr lang="en-US" altLang="x-none" sz="1800"/>
+              <a:rPr lang="en-US" altLang="x-none" sz="1800" dirty="0"/>
               <a:t>&gt;</a:t>
             </a:r>
           </a:p>
           <a:p>
             <a:pPr eaLnBrk="1" hangingPunct="1"/>
             <a:r>
-              <a:rPr lang="en-US" altLang="x-none" sz="1800"/>
+              <a:rPr lang="en-US" altLang="x-none" sz="1800" dirty="0"/>
               <a:t>#include&lt;</a:t>
             </a:r>
             <a:r>
-              <a:rPr lang="en-US" altLang="x-none" sz="1800" err="1"/>
+              <a:rPr lang="en-US" altLang="x-none" sz="1800" dirty="0" err="1"/>
               <a:t>bitset</a:t>
             </a:r>
             <a:r>
-              <a:rPr lang="en-US" altLang="x-none" sz="1800"/>
+              <a:rPr lang="en-US" altLang="x-none" sz="1800" dirty="0"/>
               <a:t>&gt;</a:t>
             </a:r>
           </a:p>
           <a:p>
             <a:pPr eaLnBrk="1" hangingPunct="1"/>
             <a:r>
-              <a:rPr lang="en-US" altLang="x-none" sz="1800"/>
+              <a:rPr lang="en-US" altLang="x-none" sz="1800" dirty="0"/>
               <a:t>int f2i(float x) { int </a:t>
             </a:r>
             <a:r>
-              <a:rPr lang="en-US" altLang="x-none" sz="1800" err="1"/>
+              <a:rPr lang="en-US" altLang="x-none" sz="1800" dirty="0" err="1"/>
               <a:t>i</a:t>
             </a:r>
             <a:r>
-              <a:rPr lang="en-US" altLang="x-none" sz="1800"/>
+              <a:rPr lang="en-US" altLang="x-none" sz="1800" dirty="0"/>
               <a:t>; </a:t>
             </a:r>
             <a:r>
-              <a:rPr lang="en-US" altLang="x-none" sz="1800" err="1"/>
+              <a:rPr lang="en-US" altLang="x-none" sz="1800" dirty="0" err="1"/>
               <a:t>memcpy</a:t>
             </a:r>
             <a:r>
-              <a:rPr lang="en-US" altLang="x-none" sz="1800"/>
+              <a:rPr lang="en-US" altLang="x-none" sz="1800" dirty="0"/>
               <a:t>(&amp;</a:t>
             </a:r>
             <a:r>
-              <a:rPr lang="en-US" altLang="x-none" sz="1800" err="1"/>
+              <a:rPr lang="en-US" altLang="x-none" sz="1800" dirty="0" err="1"/>
               <a:t>i</a:t>
             </a:r>
             <a:r>
-              <a:rPr lang="en-US" altLang="x-none" sz="1800"/>
+              <a:rPr lang="en-US" altLang="x-none" sz="1800" dirty="0"/>
               <a:t>,&amp;</a:t>
             </a:r>
             <a:r>
-              <a:rPr lang="en-US" altLang="x-none" sz="1800" err="1"/>
+              <a:rPr lang="en-US" altLang="x-none" sz="1800" dirty="0" err="1"/>
               <a:t>x,sizeof</a:t>
             </a:r>
             <a:r>
-              <a:rPr lang="en-US" altLang="x-none" sz="1800"/>
+              <a:rPr lang="en-US" altLang="x-none" sz="1800" dirty="0"/>
               <a:t>(int)); return </a:t>
             </a:r>
             <a:r>
-              <a:rPr lang="en-US" altLang="x-none" sz="1800" err="1"/>
+              <a:rPr lang="en-US" altLang="x-none" sz="1800" dirty="0" err="1"/>
               <a:t>i</a:t>
             </a:r>
             <a:r>
-              <a:rPr lang="en-US" altLang="x-none" sz="1800"/>
+              <a:rPr lang="en-US" altLang="x-none" sz="1800" dirty="0"/>
               <a:t>;} </a:t>
             </a:r>
             <a:r>
-              <a:rPr lang="en-US" altLang="x-none" sz="1800">
+              <a:rPr lang="en-US" altLang="x-none" sz="1800" dirty="0">
                 <a:solidFill>
                   <a:srgbClr val="FF0000"/>
                 </a:solidFill>
@@ -4671,50 +4671,50 @@
           <a:p>
             <a:pPr eaLnBrk="1" hangingPunct="1"/>
             <a:r>
-              <a:rPr lang="en-US" altLang="x-none" sz="1800"/>
+              <a:rPr lang="en-US" altLang="x-none" sz="1800" dirty="0"/>
               <a:t>//  use </a:t>
             </a:r>
             <a:r>
-              <a:rPr lang="en-US" altLang="x-none" sz="1800" err="1"/>
+              <a:rPr lang="en-US" altLang="x-none" sz="1800" dirty="0" err="1"/>
               <a:t>bitset</a:t>
             </a:r>
             <a:r>
-              <a:rPr lang="en-US" altLang="x-none" sz="1800"/>
+              <a:rPr lang="en-US" altLang="x-none" sz="1800" dirty="0"/>
               <a:t> to print in binary (bit by bit) </a:t>
             </a:r>
           </a:p>
           <a:p>
             <a:pPr eaLnBrk="1" hangingPunct="1"/>
             <a:r>
-              <a:rPr lang="en-US" altLang="x-none" sz="1800"/>
+              <a:rPr lang="en-US" altLang="x-none" sz="1800" dirty="0"/>
               <a:t>std::</a:t>
             </a:r>
             <a:r>
-              <a:rPr lang="en-US" altLang="x-none" sz="1800" err="1"/>
+              <a:rPr lang="en-US" altLang="x-none" sz="1800" dirty="0" err="1"/>
               <a:t>cout</a:t>
             </a:r>
             <a:r>
-              <a:rPr lang="en-US" altLang="x-none" sz="1800"/>
+              <a:rPr lang="en-US" altLang="x-none" sz="1800" dirty="0"/>
               <a:t> &lt;&lt; std::</a:t>
             </a:r>
             <a:r>
-              <a:rPr lang="en-US" altLang="x-none" sz="1800" err="1"/>
+              <a:rPr lang="en-US" altLang="x-none" sz="1800" dirty="0" err="1"/>
               <a:t>bitset</a:t>
             </a:r>
             <a:r>
-              <a:rPr lang="en-US" altLang="x-none" sz="1800"/>
+              <a:rPr lang="en-US" altLang="x-none" sz="1800" dirty="0"/>
               <a:t>&lt;32&gt;(f2i(x)) &lt;&lt; std::</a:t>
             </a:r>
             <a:r>
-              <a:rPr lang="en-US" altLang="x-none" sz="1800" err="1"/>
+              <a:rPr lang="en-US" altLang="x-none" sz="1800" dirty="0" err="1"/>
               <a:t>endl</a:t>
             </a:r>
             <a:r>
-              <a:rPr lang="en-US" altLang="x-none" sz="1800"/>
+              <a:rPr lang="en-US" altLang="x-none" sz="1800" dirty="0"/>
               <a:t>; ;   </a:t>
             </a:r>
             <a:r>
-              <a:rPr lang="en-US" altLang="x-none" sz="1800">
+              <a:rPr lang="en-US" altLang="x-none" sz="1800" dirty="0">
                 <a:solidFill>
                   <a:srgbClr val="FF0000"/>
                 </a:solidFill>
@@ -7164,19 +7164,19 @@
           <a:lstStyle/>
           <a:p>
             <a:r>
-              <a:rPr lang="en-US"/>
+              <a:rPr lang="en-US" dirty="0"/>
               <a:t>What’s a Floating Point?</a:t>
             </a:r>
             <a:br>
-              <a:rPr lang="en-US"/>
+              <a:rPr lang="en-US" dirty="0"/>
             </a:br>
             <a:r>
-              <a:rPr lang="en-US" sz="1600">
+              <a:rPr lang="en-US" sz="1600" dirty="0">
                 <a:hlinkClick r:id="rId2"/>
               </a:rPr>
               <a:t>https://en.wikipedia.org/wiki/Floating-point_arithmetic</a:t>
             </a:r>
-            <a:endParaRPr lang="en-US"/>
+            <a:endParaRPr lang="en-US" dirty="0"/>
           </a:p>
         </p:txBody>
       </p:sp>
@@ -7202,26 +7202,62 @@
           <a:lstStyle/>
           <a:p>
             <a:r>
+              <a:rPr lang="en-US" dirty="0"/>
+              <a:t>Science is based on Measurements</a:t>
+            </a:r>
+          </a:p>
+          <a:p>
+            <a:r>
+              <a:rPr lang="en-US" dirty="0"/>
+              <a:t>The result of a Measurement is a Rational Number</a:t>
+            </a:r>
+          </a:p>
+          <a:p>
+            <a:pPr lvl="1"/>
+            <a:r>
+              <a:rPr lang="en-US" dirty="0"/>
+              <a:t>M</a:t>
+            </a:r>
+            <a:r>
+              <a:rPr lang="en-US" baseline="-25000" dirty="0"/>
+              <a:t>H</a:t>
+            </a:r>
+            <a:r>
+              <a:rPr lang="en-US" dirty="0"/>
+              <a:t> = 125.04 ± 0.12 </a:t>
+            </a:r>
+            <a:r>
               <a:rPr lang="en-US"/>
-              <a:t>Science is based on Measurements</a:t>
-            </a:r>
-          </a:p>
-          <a:p>
+              <a:t>GeV     =    2.2290ᐧ10</a:t>
+            </a:r>
+            <a:r>
+              <a:rPr lang="en-US" baseline="30000"/>
+              <a:t>-25</a:t>
+            </a:r>
             <a:r>
               <a:rPr lang="en-US"/>
-              <a:t>The result of a Measurement is a Rational Number</a:t>
-            </a:r>
-          </a:p>
-          <a:p>
+              <a:t> ± 2.1ᐧ10</a:t>
+            </a:r>
+            <a:r>
+              <a:rPr lang="en-US" baseline="30000"/>
+              <a:t>-28</a:t>
+            </a:r>
             <a:r>
               <a:rPr lang="en-US"/>
+              <a:t> Kg</a:t>
+            </a:r>
+            <a:endParaRPr lang="en-US" dirty="0"/>
+          </a:p>
+          <a:p>
+            <a:r>
+              <a:rPr lang="en-US" dirty="0"/>
               <a:t>“Floating Point” is a way to represent Rational Numbers by a fixed number of digits (precision) multiplied by a “base” with an exponent</a:t>
             </a:r>
           </a:p>
           <a:p>
             <a:pPr lvl="1"/>
             <a:r>
-              <a:rPr lang="en-US"/>
+              <a:rPr lang="en-US" dirty="0"/>
               <a:t>A form of “Scientific Notation”</a:t>
             </a:r>
           </a:p>
@@ -7229,22 +7265,22 @@
             <a:pPr marL="0" indent="0">
               <a:buNone/>
             </a:pPr>
-            <a:endParaRPr lang="en-US"/>
+            <a:endParaRPr lang="en-US" dirty="0"/>
           </a:p>
           <a:p>
             <a:pPr marL="0" indent="0">
               <a:buNone/>
             </a:pPr>
             <a:r>
-              <a:rPr lang="en-US"/>
+              <a:rPr lang="en-US" dirty="0"/>
               <a:t>31ᐧ10</a:t>
             </a:r>
             <a:r>
-              <a:rPr lang="en-US" baseline="30000"/>
+              <a:rPr lang="en-US" baseline="30000" dirty="0"/>
               <a:t>-1</a:t>
             </a:r>
             <a:r>
-              <a:rPr lang="en-US"/>
+              <a:rPr lang="en-US" dirty="0"/>
               <a:t> is a FP in base 10 with “precision” 2   (printed in decimal)</a:t>
             </a:r>
           </a:p>
@@ -7253,34 +7289,34 @@
               <a:buNone/>
             </a:pPr>
             <a:r>
-              <a:rPr lang="cs-CZ" altLang="x-none"/>
+              <a:rPr lang="cs-CZ" altLang="x-none" dirty="0"/>
               <a:t>1.921fb6</a:t>
             </a:r>
             <a:r>
-              <a:rPr lang="en-US" err="1"/>
+              <a:rPr lang="en-US" dirty="0" err="1"/>
               <a:t>ᐧ</a:t>
             </a:r>
             <a:r>
-              <a:rPr lang="cs-CZ" altLang="x-none"/>
+              <a:rPr lang="cs-CZ" altLang="x-none" dirty="0"/>
               <a:t>2</a:t>
             </a:r>
             <a:r>
-              <a:rPr lang="cs-CZ" altLang="x-none" baseline="30000"/>
+              <a:rPr lang="cs-CZ" altLang="x-none" baseline="30000" dirty="0"/>
               <a:t>+1 </a:t>
             </a:r>
             <a:r>
-              <a:rPr lang="en-US"/>
+              <a:rPr lang="en-US" dirty="0"/>
               <a:t>is a FP in base 2 with precision 24   (printed in </a:t>
             </a:r>
             <a:r>
-              <a:rPr lang="en-US" err="1"/>
+              <a:rPr lang="en-US" dirty="0" err="1"/>
               <a:t>exadecimal</a:t>
             </a:r>
             <a:r>
-              <a:rPr lang="en-US"/>
+              <a:rPr lang="en-US" dirty="0"/>
               <a:t>)</a:t>
             </a:r>
-            <a:endParaRPr lang="en-US" baseline="30000"/>
+            <a:endParaRPr lang="en-US" baseline="30000" dirty="0"/>
           </a:p>
         </p:txBody>
       </p:sp>
@@ -7752,12 +7788,8 @@
               <a:t>i</a:t>
             </a:r>
             <a:r>
-              <a:rPr lang="en-US" altLang="en-US" sz="1600" b="1"/>
-              <a:t>&lt;n</a:t>
-            </a:r>
-            <a:r>
               <a:rPr lang="en-US" altLang="en-US" sz="1600" b="1" dirty="0"/>
-              <a:t>; ++</a:t>
+              <a:t>&lt;n; ++</a:t>
             </a:r>
             <a:r>
               <a:rPr lang="en-US" altLang="en-US" sz="1600" b="1" dirty="0" err="1"/>
@@ -7856,7 +7888,7 @@
           <a:p>
             <a:r>
               <a:rPr lang="en-US" dirty="0"/>
-              <a:t>Improved algorithms exist, mostly handling differently various magnitude ranges (“big”, “medium” and “tiny”) or by (partial) sorting</a:t>
+              <a:t>Improved algorithms exist, differently handling various magnitude ranges (“big”, “medium” and “tiny”) or by (partial) sorting</a:t>
             </a:r>
           </a:p>
         </p:txBody>

--- a/Slides/FPforScientist.pptx
+++ b/Slides/FPforScientist.pptx
@@ -21,15 +21,17 @@
     <p:sldId id="457" r:id="rId15"/>
     <p:sldId id="458" r:id="rId16"/>
     <p:sldId id="459" r:id="rId17"/>
-    <p:sldId id="460" r:id="rId18"/>
-    <p:sldId id="462" r:id="rId19"/>
-    <p:sldId id="463" r:id="rId20"/>
-    <p:sldId id="464" r:id="rId21"/>
-    <p:sldId id="465" r:id="rId22"/>
-    <p:sldId id="466" r:id="rId23"/>
-    <p:sldId id="467" r:id="rId24"/>
-    <p:sldId id="468" r:id="rId25"/>
-    <p:sldId id="441" r:id="rId26"/>
+    <p:sldId id="441" r:id="rId18"/>
+    <p:sldId id="460" r:id="rId19"/>
+    <p:sldId id="462" r:id="rId20"/>
+    <p:sldId id="463" r:id="rId21"/>
+    <p:sldId id="464" r:id="rId22"/>
+    <p:sldId id="465" r:id="rId23"/>
+    <p:sldId id="468" r:id="rId24"/>
+    <p:sldId id="466" r:id="rId25"/>
+    <p:sldId id="467" r:id="rId26"/>
+    <p:sldId id="469" r:id="rId27"/>
+    <p:sldId id="470" r:id="rId28"/>
   </p:sldIdLst>
   <p:sldSz cx="12192000" cy="6858000"/>
   <p:notesSz cx="6858000" cy="9144000"/>
@@ -4247,7 +4249,13 @@
       </p:sp>
       <p:sp>
         <p:nvSpPr>
-          <p:cNvPr id="25605" name="TextBox 5"/>
+          <p:cNvPr id="2" name="TextBox 1">
+            <a:extLst>
+              <a:ext uri="{FF2B5EF4-FFF2-40B4-BE49-F238E27FC236}">
+                <a16:creationId xmlns:a16="http://schemas.microsoft.com/office/drawing/2014/main" id="{DBBF8EE6-D613-F684-C3CF-2FD958AE1F9D}"/>
+              </a:ext>
+            </a:extLst>
+          </p:cNvPr>
           <p:cNvSpPr txBox="1">
             <a:spLocks noChangeArrowheads="1"/>
           </p:cNvSpPr>
@@ -4255,7 +4263,7 @@
         </p:nvSpPr>
         <p:spPr bwMode="auto">
           <a:xfrm>
-            <a:off x="1329982" y="1117000"/>
+            <a:off x="838200" y="1123179"/>
             <a:ext cx="8497888" cy="5078413"/>
           </a:xfrm>
           <a:prstGeom prst="rect">
@@ -6464,102 +6472,109 @@
         </p:spPr>
         <p:txBody>
           <a:bodyPr>
-            <a:normAutofit fontScale="92500" lnSpcReduction="10000"/>
+            <a:normAutofit fontScale="92500" lnSpcReduction="20000"/>
           </a:bodyPr>
           <a:lstStyle/>
           <a:p>
             <a:r>
-              <a:rPr lang="en-US"/>
+              <a:rPr lang="en-US" dirty="0"/>
               <a:t>There are two basic operations: </a:t>
             </a:r>
           </a:p>
           <a:p>
             <a:r>
-              <a:rPr lang="en-US"/>
+              <a:rPr lang="en-US" dirty="0"/>
               <a:t>sum and multiplication</a:t>
             </a:r>
           </a:p>
           <a:p>
             <a:pPr lvl="1"/>
             <a:r>
-              <a:rPr lang="en-US" err="1"/>
+              <a:rPr lang="en-US" dirty="0" err="1"/>
               <a:t>a+b</a:t>
             </a:r>
             <a:r>
-              <a:rPr lang="en-US"/>
+              <a:rPr lang="en-US" dirty="0"/>
               <a:t> and </a:t>
             </a:r>
             <a:r>
-              <a:rPr lang="en-US" err="1"/>
+              <a:rPr lang="en-US" dirty="0" err="1"/>
               <a:t>a×b</a:t>
             </a:r>
             <a:r>
-              <a:rPr lang="en-US"/>
+              <a:rPr lang="en-US" dirty="0"/>
               <a:t>  symbolize the exact sum and multiplication between a and b</a:t>
             </a:r>
           </a:p>
           <a:p>
             <a:pPr lvl="1"/>
             <a:r>
-              <a:rPr lang="en-US" err="1"/>
+              <a:rPr lang="en-US" dirty="0" err="1"/>
               <a:t>a⊕b</a:t>
             </a:r>
             <a:r>
-              <a:rPr lang="en-US"/>
+              <a:rPr lang="en-US" dirty="0"/>
               <a:t> and </a:t>
             </a:r>
             <a:r>
-              <a:rPr lang="en-US" err="1"/>
+              <a:rPr lang="en-US" dirty="0" err="1"/>
               <a:t>a⊗b</a:t>
             </a:r>
             <a:r>
-              <a:rPr lang="en-US"/>
+              <a:rPr lang="en-US" dirty="0"/>
               <a:t>  symbolize the rounded sum and multiplication between FPs a and b</a:t>
             </a:r>
           </a:p>
           <a:p>
             <a:pPr lvl="2"/>
             <a:r>
-              <a:rPr lang="en-US" err="1"/>
+              <a:rPr lang="en-US" dirty="0" err="1"/>
               <a:t>a+b</a:t>
             </a:r>
             <a:r>
-              <a:rPr lang="en-US"/>
+              <a:rPr lang="en-US" dirty="0"/>
               <a:t> and a*b  are the corresponding operations in code</a:t>
             </a:r>
           </a:p>
           <a:p>
             <a:r>
-              <a:rPr lang="en-US"/>
+              <a:rPr lang="en-US" dirty="0"/>
               <a:t>We will use decimal precision 2 for all examples to allow mental arithmetic in a finite time</a:t>
             </a:r>
           </a:p>
           <a:p>
             <a:pPr lvl="1"/>
             <a:r>
-              <a:rPr lang="en-US"/>
+              <a:rPr lang="en-US" dirty="0"/>
               <a:t>42+3.7 = …</a:t>
             </a:r>
           </a:p>
           <a:p>
             <a:pPr lvl="1"/>
             <a:r>
-              <a:rPr lang="en-US"/>
+              <a:rPr lang="en-US" dirty="0"/>
               <a:t>42⊕3.7 = …</a:t>
             </a:r>
           </a:p>
           <a:p>
             <a:pPr lvl="1"/>
             <a:r>
-              <a:rPr lang="en-US"/>
+              <a:rPr lang="en-US" dirty="0"/>
               <a:t>42⊕3.3 = … , 42⊕3.5 = … , 43⊕3.5 = …</a:t>
             </a:r>
             <a:br>
-              <a:rPr lang="en-US"/>
+              <a:rPr lang="en-US" dirty="0"/>
             </a:br>
             <a:r>
-              <a:rPr lang="en-US"/>
+              <a:rPr lang="en-US" dirty="0"/>
               <a:t>42⊕3.3⊕3.4 = … , 3.4⊕3.3⊕42 = … </a:t>
+            </a:r>
+            <a:br>
+              <a:rPr lang="en-US" dirty="0"/>
+            </a:br>
+            <a:r>
+              <a:rPr lang="en-US" dirty="0"/>
+              <a:t>42⊕3.3⊕ -45 = … </a:t>
             </a:r>
           </a:p>
           <a:p>
@@ -6567,7 +6582,7 @@
               <a:buNone/>
             </a:pPr>
             <a:r>
-              <a:rPr lang="en-US"/>
+              <a:rPr lang="en-US" dirty="0"/>
               <a:t>(use python decimal to verify results)</a:t>
             </a:r>
           </a:p>
@@ -6587,2318 +6602,6 @@
 </file>
 
 <file path=ppt/slides/slide17.xml><?xml version="1.0" encoding="utf-8"?>
-<p:sld xmlns:a="http://schemas.openxmlformats.org/drawingml/2006/main" xmlns:r="http://schemas.openxmlformats.org/officeDocument/2006/relationships" xmlns:p="http://schemas.openxmlformats.org/presentationml/2006/main">
-  <p:cSld>
-    <p:spTree>
-      <p:nvGrpSpPr>
-        <p:cNvPr id="1" name=""/>
-        <p:cNvGrpSpPr/>
-        <p:nvPr/>
-      </p:nvGrpSpPr>
-      <p:grpSpPr>
-        <a:xfrm>
-          <a:off x="0" y="0"/>
-          <a:ext cx="0" cy="0"/>
-          <a:chOff x="0" y="0"/>
-          <a:chExt cx="0" cy="0"/>
-        </a:xfrm>
-      </p:grpSpPr>
-      <p:sp>
-        <p:nvSpPr>
-          <p:cNvPr id="2" name="Title 1">
-            <a:extLst>
-              <a:ext uri="{FF2B5EF4-FFF2-40B4-BE49-F238E27FC236}">
-                <a16:creationId xmlns:a16="http://schemas.microsoft.com/office/drawing/2014/main" id="{75455E44-1145-B3B5-99CB-164A17DB7EF9}"/>
-              </a:ext>
-            </a:extLst>
-          </p:cNvPr>
-          <p:cNvSpPr>
-            <a:spLocks noGrp="1"/>
-          </p:cNvSpPr>
-          <p:nvPr>
-            <p:ph type="title"/>
-          </p:nvPr>
-        </p:nvSpPr>
-        <p:spPr/>
-        <p:txBody>
-          <a:bodyPr/>
-          <a:lstStyle/>
-          <a:p>
-            <a:r>
-              <a:rPr lang="en-US"/>
-              <a:t>A first theorem</a:t>
-            </a:r>
-          </a:p>
-        </p:txBody>
-      </p:sp>
-      <p:sp>
-        <p:nvSpPr>
-          <p:cNvPr id="3" name="Content Placeholder 2">
-            <a:extLst>
-              <a:ext uri="{FF2B5EF4-FFF2-40B4-BE49-F238E27FC236}">
-                <a16:creationId xmlns:a16="http://schemas.microsoft.com/office/drawing/2014/main" id="{C30A1BBA-EAF2-6BF3-A6DF-55D23C2E2491}"/>
-              </a:ext>
-            </a:extLst>
-          </p:cNvPr>
-          <p:cNvSpPr>
-            <a:spLocks noGrp="1"/>
-          </p:cNvSpPr>
-          <p:nvPr>
-            <p:ph idx="1"/>
-          </p:nvPr>
-        </p:nvSpPr>
-        <p:spPr/>
-        <p:txBody>
-          <a:bodyPr/>
-          <a:lstStyle/>
-          <a:p>
-            <a:r>
-              <a:rPr lang="en-US"/>
-              <a:t>The difference of two number of the same </a:t>
-            </a:r>
-            <a:r>
-              <a:rPr lang="en-US" err="1"/>
-              <a:t>binade</a:t>
-            </a:r>
-            <a:r>
-              <a:rPr lang="en-US"/>
-              <a:t> is precise</a:t>
-            </a:r>
-          </a:p>
-          <a:p>
-            <a:pPr lvl="1"/>
-            <a:r>
-              <a:rPr lang="en-US"/>
-              <a:t>99-11 = 88, 42-37 = 5</a:t>
-            </a:r>
-          </a:p>
-          <a:p>
-            <a:pPr lvl="1"/>
-            <a:r>
-              <a:rPr lang="en-US"/>
-              <a:t>0x1.921fb6p+1 - 0x1.001e72p+1 = 0x1.240288p+0</a:t>
-            </a:r>
-          </a:p>
-          <a:p>
-            <a:endParaRPr lang="en-US"/>
-          </a:p>
-          <a:p>
-            <a:r>
-              <a:rPr lang="en-US"/>
-              <a:t>If 2b&gt;a&gt;b/2&gt;0 then </a:t>
-            </a:r>
-            <a:r>
-              <a:rPr lang="en-US" err="1"/>
-              <a:t>a⊖b</a:t>
-            </a:r>
-            <a:r>
-              <a:rPr lang="en-US"/>
-              <a:t> = a-b (is precise)</a:t>
-            </a:r>
-            <a:br>
-              <a:rPr lang="en-US"/>
-            </a:br>
-            <a:r>
-              <a:rPr lang="en-US"/>
-              <a:t>(</a:t>
-            </a:r>
-            <a:r>
-              <a:rPr lang="en-US">
-                <a:hlinkClick r:id="rId2"/>
-              </a:rPr>
-              <a:t>https://en.wikipedia.org/wiki/Sterbenz_lemma</a:t>
-            </a:r>
-            <a:r>
-              <a:rPr lang="en-US"/>
-              <a:t>)</a:t>
-            </a:r>
-          </a:p>
-          <a:p>
-            <a:pPr lvl="1"/>
-            <a:r>
-              <a:rPr lang="en-US"/>
-              <a:t>12-7.4 = 4.6, 18-7.4= 10.6 =&gt; 18⊖7.4 = 11</a:t>
-            </a:r>
-          </a:p>
-          <a:p>
-            <a:pPr lvl="1"/>
-            <a:r>
-              <a:rPr lang="en-US"/>
-              <a:t>0x1.333334p-2 ⊖ 0x1.99999ap-3 = 0x1.99999ap-4 (precise)</a:t>
-            </a:r>
-          </a:p>
-          <a:p>
-            <a:pPr lvl="1"/>
-            <a:r>
-              <a:rPr lang="en-US"/>
-              <a:t>0x1.333334p-2 ⊖ 0x1.99999ap-4 = 0x1.99999cp-3 (not precise)</a:t>
-            </a:r>
-          </a:p>
-        </p:txBody>
-      </p:sp>
-    </p:spTree>
-    <p:extLst>
-      <p:ext uri="{BB962C8B-B14F-4D97-AF65-F5344CB8AC3E}">
-        <p14:creationId xmlns:p14="http://schemas.microsoft.com/office/powerpoint/2010/main" val="4058227503"/>
-      </p:ext>
-    </p:extLst>
-  </p:cSld>
-  <p:clrMapOvr>
-    <a:masterClrMapping/>
-  </p:clrMapOvr>
-</p:sld>
-</file>
-
-<file path=ppt/slides/slide18.xml><?xml version="1.0" encoding="utf-8"?>
-<p:sld xmlns:a="http://schemas.openxmlformats.org/drawingml/2006/main" xmlns:r="http://schemas.openxmlformats.org/officeDocument/2006/relationships" xmlns:p="http://schemas.openxmlformats.org/presentationml/2006/main">
-  <p:cSld>
-    <p:spTree>
-      <p:nvGrpSpPr>
-        <p:cNvPr id="1" name=""/>
-        <p:cNvGrpSpPr/>
-        <p:nvPr/>
-      </p:nvGrpSpPr>
-      <p:grpSpPr>
-        <a:xfrm>
-          <a:off x="0" y="0"/>
-          <a:ext cx="0" cy="0"/>
-          <a:chOff x="0" y="0"/>
-          <a:chExt cx="0" cy="0"/>
-        </a:xfrm>
-      </p:grpSpPr>
-      <p:sp>
-        <p:nvSpPr>
-          <p:cNvPr id="2" name="Title 1">
-            <a:extLst>
-              <a:ext uri="{FF2B5EF4-FFF2-40B4-BE49-F238E27FC236}">
-                <a16:creationId xmlns:a16="http://schemas.microsoft.com/office/drawing/2014/main" id="{F07EE935-6904-8630-3A5E-C062BD088ED9}"/>
-              </a:ext>
-            </a:extLst>
-          </p:cNvPr>
-          <p:cNvSpPr>
-            <a:spLocks noGrp="1"/>
-          </p:cNvSpPr>
-          <p:nvPr>
-            <p:ph type="title"/>
-          </p:nvPr>
-        </p:nvSpPr>
-        <p:spPr/>
-        <p:txBody>
-          <a:bodyPr/>
-          <a:lstStyle/>
-          <a:p>
-            <a:r>
-              <a:rPr lang="en-US"/>
-              <a:t>Augmented Arithmetic</a:t>
-            </a:r>
-          </a:p>
-        </p:txBody>
-      </p:sp>
-      <p:sp>
-        <p:nvSpPr>
-          <p:cNvPr id="3" name="Content Placeholder 2">
-            <a:extLst>
-              <a:ext uri="{FF2B5EF4-FFF2-40B4-BE49-F238E27FC236}">
-                <a16:creationId xmlns:a16="http://schemas.microsoft.com/office/drawing/2014/main" id="{CEA41BE4-A79E-81D3-30F4-1363BA165B97}"/>
-              </a:ext>
-            </a:extLst>
-          </p:cNvPr>
-          <p:cNvSpPr>
-            <a:spLocks noGrp="1"/>
-          </p:cNvSpPr>
-          <p:nvPr>
-            <p:ph idx="1"/>
-          </p:nvPr>
-        </p:nvSpPr>
-        <p:spPr>
-          <a:xfrm>
-            <a:off x="726989" y="1690688"/>
-            <a:ext cx="10515600" cy="4351338"/>
-          </a:xfrm>
-        </p:spPr>
-        <p:txBody>
-          <a:bodyPr>
-            <a:normAutofit fontScale="92500" lnSpcReduction="20000"/>
-          </a:bodyPr>
-          <a:lstStyle/>
-          <a:p>
-            <a:r>
-              <a:rPr lang="en-US"/>
-              <a:t>If a&gt;b&gt;0 : </a:t>
-            </a:r>
-            <a:r>
-              <a:rPr lang="en-US" err="1"/>
-              <a:t>a+b</a:t>
-            </a:r>
-            <a:r>
-              <a:rPr lang="en-US"/>
-              <a:t> &lt; 2a</a:t>
-            </a:r>
-          </a:p>
-          <a:p>
-            <a:endParaRPr lang="en-US"/>
-          </a:p>
-          <a:p>
-            <a:r>
-              <a:rPr lang="en-US"/>
-              <a:t>c = </a:t>
-            </a:r>
-            <a:r>
-              <a:rPr lang="en-US" err="1"/>
-              <a:t>a⊕b</a:t>
-            </a:r>
-            <a:endParaRPr lang="en-US"/>
-          </a:p>
-          <a:p>
-            <a:r>
-              <a:rPr lang="en-US"/>
-              <a:t>t = </a:t>
-            </a:r>
-            <a:r>
-              <a:rPr lang="en-US" err="1"/>
-              <a:t>c⊖a</a:t>
-            </a:r>
-            <a:r>
-              <a:rPr lang="en-US"/>
-              <a:t>  is exact</a:t>
-            </a:r>
-          </a:p>
-          <a:p>
-            <a:r>
-              <a:rPr lang="en-US"/>
-              <a:t>e = </a:t>
-            </a:r>
-            <a:r>
-              <a:rPr lang="en-US" err="1"/>
-              <a:t>b⊖t</a:t>
-            </a:r>
-            <a:r>
-              <a:rPr lang="en-US"/>
-              <a:t>  is exact</a:t>
-            </a:r>
-          </a:p>
-          <a:p>
-            <a:r>
-              <a:rPr lang="en-US" err="1"/>
-              <a:t>a+b</a:t>
-            </a:r>
-            <a:r>
-              <a:rPr lang="en-US"/>
-              <a:t> = </a:t>
-            </a:r>
-            <a:r>
-              <a:rPr lang="en-US" err="1"/>
-              <a:t>c+e</a:t>
-            </a:r>
-            <a:r>
-              <a:rPr lang="en-US"/>
-              <a:t> </a:t>
-            </a:r>
-          </a:p>
-          <a:p>
-            <a:pPr lvl="1"/>
-            <a:r>
-              <a:rPr lang="en-US"/>
-              <a:t>e is the error of </a:t>
-            </a:r>
-            <a:r>
-              <a:rPr lang="en-US" err="1"/>
-              <a:t>a⊕b</a:t>
-            </a:r>
-            <a:endParaRPr lang="en-US"/>
-          </a:p>
-          <a:p>
-            <a:endParaRPr lang="en-US"/>
-          </a:p>
-          <a:p>
-            <a:r>
-              <a:rPr lang="en-US"/>
-              <a:t>This algorithm is known as “</a:t>
-            </a:r>
-            <a:r>
-              <a:rPr lang="en-US" err="1"/>
-              <a:t>fastTwoSum</a:t>
-            </a:r>
-            <a:r>
-              <a:rPr lang="en-US"/>
-              <a:t>” and (with small modifications) proposed as </a:t>
-            </a:r>
-            <a:r>
-              <a:rPr lang="en-US" err="1"/>
-              <a:t>AugmentedSum</a:t>
-            </a:r>
-            <a:r>
-              <a:rPr lang="en-US"/>
-              <a:t> in next IEEE754 revision </a:t>
-            </a:r>
-          </a:p>
-          <a:p>
-            <a:r>
-              <a:rPr lang="en-US"/>
-              <a:t>A similar algorithm exists for multiplication as well</a:t>
-            </a:r>
-          </a:p>
-          <a:p>
-            <a:endParaRPr lang="en-US"/>
-          </a:p>
-          <a:p>
-            <a:endParaRPr lang="en-US"/>
-          </a:p>
-        </p:txBody>
-      </p:sp>
-    </p:spTree>
-    <p:extLst>
-      <p:ext uri="{BB962C8B-B14F-4D97-AF65-F5344CB8AC3E}">
-        <p14:creationId xmlns:p14="http://schemas.microsoft.com/office/powerpoint/2010/main" val="2697797781"/>
-      </p:ext>
-    </p:extLst>
-  </p:cSld>
-  <p:clrMapOvr>
-    <a:masterClrMapping/>
-  </p:clrMapOvr>
-</p:sld>
-</file>
-
-<file path=ppt/slides/slide19.xml><?xml version="1.0" encoding="utf-8"?>
-<p:sld xmlns:a="http://schemas.openxmlformats.org/drawingml/2006/main" xmlns:r="http://schemas.openxmlformats.org/officeDocument/2006/relationships" xmlns:p="http://schemas.openxmlformats.org/presentationml/2006/main">
-  <p:cSld>
-    <p:spTree>
-      <p:nvGrpSpPr>
-        <p:cNvPr id="1" name=""/>
-        <p:cNvGrpSpPr/>
-        <p:nvPr/>
-      </p:nvGrpSpPr>
-      <p:grpSpPr>
-        <a:xfrm>
-          <a:off x="0" y="0"/>
-          <a:ext cx="0" cy="0"/>
-          <a:chOff x="0" y="0"/>
-          <a:chExt cx="0" cy="0"/>
-        </a:xfrm>
-      </p:grpSpPr>
-      <p:sp>
-        <p:nvSpPr>
-          <p:cNvPr id="2" name="Title 1">
-            <a:extLst>
-              <a:ext uri="{FF2B5EF4-FFF2-40B4-BE49-F238E27FC236}">
-                <a16:creationId xmlns:a16="http://schemas.microsoft.com/office/drawing/2014/main" id="{C742FB71-B737-C32C-CF86-40936586016E}"/>
-              </a:ext>
-            </a:extLst>
-          </p:cNvPr>
-          <p:cNvSpPr>
-            <a:spLocks noGrp="1"/>
-          </p:cNvSpPr>
-          <p:nvPr>
-            <p:ph type="title"/>
-          </p:nvPr>
-        </p:nvSpPr>
-        <p:spPr/>
-        <p:txBody>
-          <a:bodyPr/>
-          <a:lstStyle/>
-          <a:p>
-            <a:r>
-              <a:rPr lang="en-US"/>
-              <a:t>Example of augmented sum</a:t>
-            </a:r>
-          </a:p>
-        </p:txBody>
-      </p:sp>
-      <p:sp>
-        <p:nvSpPr>
-          <p:cNvPr id="3" name="Content Placeholder 2">
-            <a:extLst>
-              <a:ext uri="{FF2B5EF4-FFF2-40B4-BE49-F238E27FC236}">
-                <a16:creationId xmlns:a16="http://schemas.microsoft.com/office/drawing/2014/main" id="{F8B01E0E-6FCF-CEA0-F220-94CD44A4F94C}"/>
-              </a:ext>
-            </a:extLst>
-          </p:cNvPr>
-          <p:cNvSpPr>
-            <a:spLocks noGrp="1"/>
-          </p:cNvSpPr>
-          <p:nvPr>
-            <p:ph idx="1"/>
-          </p:nvPr>
-        </p:nvSpPr>
-        <p:spPr>
-          <a:xfrm>
-            <a:off x="838200" y="1825625"/>
-            <a:ext cx="10515600" cy="4859380"/>
-          </a:xfrm>
-        </p:spPr>
-        <p:txBody>
-          <a:bodyPr>
-            <a:normAutofit lnSpcReduction="10000"/>
-          </a:bodyPr>
-          <a:lstStyle/>
-          <a:p>
-            <a:r>
-              <a:rPr lang="en-US"/>
-              <a:t>42⊕3.7 = 46</a:t>
-            </a:r>
-          </a:p>
-          <a:p>
-            <a:r>
-              <a:rPr lang="en-US"/>
-              <a:t>46⊖42 = 4</a:t>
-            </a:r>
-          </a:p>
-          <a:p>
-            <a:r>
-              <a:rPr lang="en-US"/>
-              <a:t>3.7⊖4 = -0.3</a:t>
-            </a:r>
-          </a:p>
-          <a:p>
-            <a:r>
-              <a:rPr lang="en-US"/>
-              <a:t>46-0.3 = 42+3.7</a:t>
-            </a:r>
-          </a:p>
-          <a:p>
-            <a:r>
-              <a:rPr lang="en-US"/>
-              <a:t>In short: </a:t>
-            </a:r>
-            <a:r>
-              <a:rPr lang="en-US" err="1"/>
-              <a:t>asum</a:t>
-            </a:r>
-            <a:r>
-              <a:rPr lang="en-US"/>
-              <a:t>(42,3.7) = 46,-0.3</a:t>
-            </a:r>
-          </a:p>
-          <a:p>
-            <a:endParaRPr lang="en-US"/>
-          </a:p>
-          <a:p>
-            <a:r>
-              <a:rPr lang="en-US"/>
-              <a:t>42⊕3.3⊕3.4 = 48 while 42+3.3+3.4 = 48.7</a:t>
-            </a:r>
-          </a:p>
-          <a:p>
-            <a:r>
-              <a:rPr lang="en-US" err="1"/>
-              <a:t>asum</a:t>
-            </a:r>
-            <a:r>
-              <a:rPr lang="en-US"/>
-              <a:t>(42,3.3) = 45,0.3</a:t>
-            </a:r>
-          </a:p>
-          <a:p>
-            <a:r>
-              <a:rPr lang="en-US" err="1"/>
-              <a:t>asum</a:t>
-            </a:r>
-            <a:r>
-              <a:rPr lang="en-US"/>
-              <a:t>(45 ,3.4) = 48,0.4</a:t>
-            </a:r>
-          </a:p>
-          <a:p>
-            <a:r>
-              <a:rPr lang="en-US" err="1"/>
-              <a:t>asum</a:t>
-            </a:r>
-            <a:r>
-              <a:rPr lang="en-US"/>
-              <a:t>(48,0.3+0.4) = 49, -0.3 </a:t>
-            </a:r>
-          </a:p>
-        </p:txBody>
-      </p:sp>
-    </p:spTree>
-    <p:extLst>
-      <p:ext uri="{BB962C8B-B14F-4D97-AF65-F5344CB8AC3E}">
-        <p14:creationId xmlns:p14="http://schemas.microsoft.com/office/powerpoint/2010/main" val="3182472380"/>
-      </p:ext>
-    </p:extLst>
-  </p:cSld>
-  <p:clrMapOvr>
-    <a:masterClrMapping/>
-  </p:clrMapOvr>
-</p:sld>
-</file>
-
-<file path=ppt/slides/slide2.xml><?xml version="1.0" encoding="utf-8"?>
-<p:sld xmlns:a="http://schemas.openxmlformats.org/drawingml/2006/main" xmlns:r="http://schemas.openxmlformats.org/officeDocument/2006/relationships" xmlns:p="http://schemas.openxmlformats.org/presentationml/2006/main">
-  <p:cSld>
-    <p:spTree>
-      <p:nvGrpSpPr>
-        <p:cNvPr id="1" name=""/>
-        <p:cNvGrpSpPr/>
-        <p:nvPr/>
-      </p:nvGrpSpPr>
-      <p:grpSpPr>
-        <a:xfrm>
-          <a:off x="0" y="0"/>
-          <a:ext cx="0" cy="0"/>
-          <a:chOff x="0" y="0"/>
-          <a:chExt cx="0" cy="0"/>
-        </a:xfrm>
-      </p:grpSpPr>
-      <p:sp>
-        <p:nvSpPr>
-          <p:cNvPr id="2" name="Title 1">
-            <a:extLst>
-              <a:ext uri="{FF2B5EF4-FFF2-40B4-BE49-F238E27FC236}">
-                <a16:creationId xmlns:a16="http://schemas.microsoft.com/office/drawing/2014/main" id="{217268F8-85E7-DA38-B02A-4ADDB868CDCA}"/>
-              </a:ext>
-            </a:extLst>
-          </p:cNvPr>
-          <p:cNvSpPr>
-            <a:spLocks noGrp="1"/>
-          </p:cNvSpPr>
-          <p:nvPr>
-            <p:ph type="title"/>
-          </p:nvPr>
-        </p:nvSpPr>
-        <p:spPr/>
-        <p:txBody>
-          <a:bodyPr>
-            <a:normAutofit/>
-          </a:bodyPr>
-          <a:lstStyle/>
-          <a:p>
-            <a:r>
-              <a:rPr lang="en-US" dirty="0"/>
-              <a:t>What’s a Floating Point?</a:t>
-            </a:r>
-            <a:br>
-              <a:rPr lang="en-US" dirty="0"/>
-            </a:br>
-            <a:r>
-              <a:rPr lang="en-US" sz="1600" dirty="0">
-                <a:hlinkClick r:id="rId2"/>
-              </a:rPr>
-              <a:t>https://en.wikipedia.org/wiki/Floating-point_arithmetic</a:t>
-            </a:r>
-            <a:endParaRPr lang="en-US" dirty="0"/>
-          </a:p>
-        </p:txBody>
-      </p:sp>
-      <p:sp>
-        <p:nvSpPr>
-          <p:cNvPr id="3" name="Content Placeholder 2">
-            <a:extLst>
-              <a:ext uri="{FF2B5EF4-FFF2-40B4-BE49-F238E27FC236}">
-                <a16:creationId xmlns:a16="http://schemas.microsoft.com/office/drawing/2014/main" id="{72FFB85D-0262-522C-7650-5A4514746147}"/>
-              </a:ext>
-            </a:extLst>
-          </p:cNvPr>
-          <p:cNvSpPr>
-            <a:spLocks noGrp="1"/>
-          </p:cNvSpPr>
-          <p:nvPr>
-            <p:ph idx="1"/>
-          </p:nvPr>
-        </p:nvSpPr>
-        <p:spPr/>
-        <p:txBody>
-          <a:bodyPr/>
-          <a:lstStyle/>
-          <a:p>
-            <a:r>
-              <a:rPr lang="en-US" dirty="0"/>
-              <a:t>Science is based on Measurements</a:t>
-            </a:r>
-          </a:p>
-          <a:p>
-            <a:r>
-              <a:rPr lang="en-US" dirty="0"/>
-              <a:t>The result of a Measurement is a Rational Number</a:t>
-            </a:r>
-          </a:p>
-          <a:p>
-            <a:pPr lvl="1"/>
-            <a:r>
-              <a:rPr lang="en-US" dirty="0"/>
-              <a:t>M</a:t>
-            </a:r>
-            <a:r>
-              <a:rPr lang="en-US" baseline="-25000" dirty="0"/>
-              <a:t>H</a:t>
-            </a:r>
-            <a:r>
-              <a:rPr lang="en-US" dirty="0"/>
-              <a:t> = 125.04 ± 0.12 </a:t>
-            </a:r>
-            <a:r>
-              <a:rPr lang="en-US"/>
-              <a:t>GeV     =    2.2290ᐧ10</a:t>
-            </a:r>
-            <a:r>
-              <a:rPr lang="en-US" baseline="30000"/>
-              <a:t>-25</a:t>
-            </a:r>
-            <a:r>
-              <a:rPr lang="en-US"/>
-              <a:t> ± 2.1ᐧ10</a:t>
-            </a:r>
-            <a:r>
-              <a:rPr lang="en-US" baseline="30000"/>
-              <a:t>-28</a:t>
-            </a:r>
-            <a:r>
-              <a:rPr lang="en-US"/>
-              <a:t> Kg</a:t>
-            </a:r>
-            <a:endParaRPr lang="en-US" dirty="0"/>
-          </a:p>
-          <a:p>
-            <a:r>
-              <a:rPr lang="en-US" dirty="0"/>
-              <a:t>“Floating Point” is a way to represent Rational Numbers by a fixed number of digits (precision) multiplied by a “base” with an exponent</a:t>
-            </a:r>
-          </a:p>
-          <a:p>
-            <a:pPr lvl="1"/>
-            <a:r>
-              <a:rPr lang="en-US" dirty="0"/>
-              <a:t>A form of “Scientific Notation”</a:t>
-            </a:r>
-          </a:p>
-          <a:p>
-            <a:pPr marL="0" indent="0">
-              <a:buNone/>
-            </a:pPr>
-            <a:endParaRPr lang="en-US" dirty="0"/>
-          </a:p>
-          <a:p>
-            <a:pPr marL="0" indent="0">
-              <a:buNone/>
-            </a:pPr>
-            <a:r>
-              <a:rPr lang="en-US" dirty="0"/>
-              <a:t>31ᐧ10</a:t>
-            </a:r>
-            <a:r>
-              <a:rPr lang="en-US" baseline="30000" dirty="0"/>
-              <a:t>-1</a:t>
-            </a:r>
-            <a:r>
-              <a:rPr lang="en-US" dirty="0"/>
-              <a:t> is a FP in base 10 with “precision” 2   (printed in decimal)</a:t>
-            </a:r>
-          </a:p>
-          <a:p>
-            <a:pPr marL="0" indent="0">
-              <a:buNone/>
-            </a:pPr>
-            <a:r>
-              <a:rPr lang="cs-CZ" altLang="x-none" dirty="0"/>
-              <a:t>1.921fb6</a:t>
-            </a:r>
-            <a:r>
-              <a:rPr lang="en-US" dirty="0" err="1"/>
-              <a:t>ᐧ</a:t>
-            </a:r>
-            <a:r>
-              <a:rPr lang="cs-CZ" altLang="x-none" dirty="0"/>
-              <a:t>2</a:t>
-            </a:r>
-            <a:r>
-              <a:rPr lang="cs-CZ" altLang="x-none" baseline="30000" dirty="0"/>
-              <a:t>+1 </a:t>
-            </a:r>
-            <a:r>
-              <a:rPr lang="en-US" dirty="0"/>
-              <a:t>is a FP in base 2 with precision 24   (printed in </a:t>
-            </a:r>
-            <a:r>
-              <a:rPr lang="en-US" dirty="0" err="1"/>
-              <a:t>exadecimal</a:t>
-            </a:r>
-            <a:r>
-              <a:rPr lang="en-US" dirty="0"/>
-              <a:t>)</a:t>
-            </a:r>
-            <a:endParaRPr lang="en-US" baseline="30000" dirty="0"/>
-          </a:p>
-        </p:txBody>
-      </p:sp>
-    </p:spTree>
-    <p:extLst>
-      <p:ext uri="{BB962C8B-B14F-4D97-AF65-F5344CB8AC3E}">
-        <p14:creationId xmlns:p14="http://schemas.microsoft.com/office/powerpoint/2010/main" val="3635151351"/>
-      </p:ext>
-    </p:extLst>
-  </p:cSld>
-  <p:clrMapOvr>
-    <a:masterClrMapping/>
-  </p:clrMapOvr>
-</p:sld>
-</file>
-
-<file path=ppt/slides/slide20.xml><?xml version="1.0" encoding="utf-8"?>
-<p:sld xmlns:a="http://schemas.openxmlformats.org/drawingml/2006/main" xmlns:r="http://schemas.openxmlformats.org/officeDocument/2006/relationships" xmlns:p="http://schemas.openxmlformats.org/presentationml/2006/main">
-  <p:cSld>
-    <p:spTree>
-      <p:nvGrpSpPr>
-        <p:cNvPr id="1" name=""/>
-        <p:cNvGrpSpPr/>
-        <p:nvPr/>
-      </p:nvGrpSpPr>
-      <p:grpSpPr>
-        <a:xfrm>
-          <a:off x="0" y="0"/>
-          <a:ext cx="0" cy="0"/>
-          <a:chOff x="0" y="0"/>
-          <a:chExt cx="0" cy="0"/>
-        </a:xfrm>
-      </p:grpSpPr>
-      <p:sp>
-        <p:nvSpPr>
-          <p:cNvPr id="2" name="Title 1">
-            <a:extLst>
-              <a:ext uri="{FF2B5EF4-FFF2-40B4-BE49-F238E27FC236}">
-                <a16:creationId xmlns:a16="http://schemas.microsoft.com/office/drawing/2014/main" id="{0A4D461D-F652-AAC2-4FC1-FDE365440E42}"/>
-              </a:ext>
-            </a:extLst>
-          </p:cNvPr>
-          <p:cNvSpPr>
-            <a:spLocks noGrp="1"/>
-          </p:cNvSpPr>
-          <p:nvPr>
-            <p:ph type="title"/>
-          </p:nvPr>
-        </p:nvSpPr>
-        <p:spPr/>
-        <p:txBody>
-          <a:bodyPr/>
-          <a:lstStyle/>
-          <a:p>
-            <a:r>
-              <a:rPr lang="en-US" dirty="0"/>
-              <a:t>Catastrophic cancellation</a:t>
-            </a:r>
-          </a:p>
-        </p:txBody>
-      </p:sp>
-      <p:sp>
-        <p:nvSpPr>
-          <p:cNvPr id="3" name="Content Placeholder 2">
-            <a:extLst>
-              <a:ext uri="{FF2B5EF4-FFF2-40B4-BE49-F238E27FC236}">
-                <a16:creationId xmlns:a16="http://schemas.microsoft.com/office/drawing/2014/main" id="{96186B28-45D1-57E1-A9B0-C1CC5697A300}"/>
-              </a:ext>
-            </a:extLst>
-          </p:cNvPr>
-          <p:cNvSpPr>
-            <a:spLocks noGrp="1"/>
-          </p:cNvSpPr>
-          <p:nvPr>
-            <p:ph idx="1"/>
-          </p:nvPr>
-        </p:nvSpPr>
-        <p:spPr/>
-        <p:txBody>
-          <a:bodyPr/>
-          <a:lstStyle/>
-          <a:p>
-            <a:r>
-              <a:rPr lang="en-US" dirty="0"/>
-              <a:t>42⊕3.3⊕ -45 = 0 while 42+3.3-45 = 0.3</a:t>
-            </a:r>
-          </a:p>
-          <a:p>
-            <a:pPr lvl="1"/>
-            <a:r>
-              <a:rPr lang="en-US" dirty="0"/>
-              <a:t>Catastrophic cancellation</a:t>
-            </a:r>
-          </a:p>
-          <a:p>
-            <a:r>
-              <a:rPr lang="en-US" dirty="0" err="1"/>
-              <a:t>asum</a:t>
-            </a:r>
-            <a:r>
-              <a:rPr lang="en-US" dirty="0"/>
-              <a:t>(42,3.3) = 45,0.3</a:t>
-            </a:r>
-          </a:p>
-          <a:p>
-            <a:r>
-              <a:rPr lang="en-US" dirty="0" err="1"/>
-              <a:t>asum</a:t>
-            </a:r>
-            <a:r>
-              <a:rPr lang="en-US" dirty="0"/>
-              <a:t>(45 ,-45) = 0.0,0.0</a:t>
-            </a:r>
-          </a:p>
-          <a:p>
-            <a:r>
-              <a:rPr lang="en-US" dirty="0" err="1"/>
-              <a:t>asum</a:t>
-            </a:r>
-            <a:r>
-              <a:rPr lang="en-US" dirty="0"/>
-              <a:t>(0.0,0.3+0.0) = 0.3, 0.0 </a:t>
-            </a:r>
-          </a:p>
-          <a:p>
-            <a:endParaRPr lang="en-US" dirty="0"/>
-          </a:p>
-        </p:txBody>
-      </p:sp>
-    </p:spTree>
-    <p:extLst>
-      <p:ext uri="{BB962C8B-B14F-4D97-AF65-F5344CB8AC3E}">
-        <p14:creationId xmlns:p14="http://schemas.microsoft.com/office/powerpoint/2010/main" val="3295552409"/>
-      </p:ext>
-    </p:extLst>
-  </p:cSld>
-  <p:clrMapOvr>
-    <a:masterClrMapping/>
-  </p:clrMapOvr>
-</p:sld>
-</file>
-
-<file path=ppt/slides/slide21.xml><?xml version="1.0" encoding="utf-8"?>
-<p:sld xmlns:a="http://schemas.openxmlformats.org/drawingml/2006/main" xmlns:r="http://schemas.openxmlformats.org/officeDocument/2006/relationships" xmlns:p="http://schemas.openxmlformats.org/presentationml/2006/main">
-  <p:cSld>
-    <p:spTree>
-      <p:nvGrpSpPr>
-        <p:cNvPr id="1" name=""/>
-        <p:cNvGrpSpPr/>
-        <p:nvPr/>
-      </p:nvGrpSpPr>
-      <p:grpSpPr>
-        <a:xfrm>
-          <a:off x="0" y="0"/>
-          <a:ext cx="0" cy="0"/>
-          <a:chOff x="0" y="0"/>
-          <a:chExt cx="0" cy="0"/>
-        </a:xfrm>
-      </p:grpSpPr>
-      <p:sp>
-        <p:nvSpPr>
-          <p:cNvPr id="2" name="Title 1">
-            <a:extLst>
-              <a:ext uri="{FF2B5EF4-FFF2-40B4-BE49-F238E27FC236}">
-                <a16:creationId xmlns:a16="http://schemas.microsoft.com/office/drawing/2014/main" id="{AF14D40A-FA76-6F94-EE86-7C1679F6F84C}"/>
-              </a:ext>
-            </a:extLst>
-          </p:cNvPr>
-          <p:cNvSpPr>
-            <a:spLocks noGrp="1"/>
-          </p:cNvSpPr>
-          <p:nvPr>
-            <p:ph type="title"/>
-          </p:nvPr>
-        </p:nvSpPr>
-        <p:spPr/>
-        <p:txBody>
-          <a:bodyPr/>
-          <a:lstStyle/>
-          <a:p>
-            <a:r>
-              <a:rPr lang="en-US" dirty="0"/>
-              <a:t>Compensating algorithms</a:t>
-            </a:r>
-          </a:p>
-        </p:txBody>
-      </p:sp>
-      <p:sp>
-        <p:nvSpPr>
-          <p:cNvPr id="3" name="Content Placeholder 2">
-            <a:extLst>
-              <a:ext uri="{FF2B5EF4-FFF2-40B4-BE49-F238E27FC236}">
-                <a16:creationId xmlns:a16="http://schemas.microsoft.com/office/drawing/2014/main" id="{57F316F0-F6EA-A0F3-3D5D-CC38A744741C}"/>
-              </a:ext>
-            </a:extLst>
-          </p:cNvPr>
-          <p:cNvSpPr>
-            <a:spLocks noGrp="1"/>
-          </p:cNvSpPr>
-          <p:nvPr>
-            <p:ph idx="1"/>
-          </p:nvPr>
-        </p:nvSpPr>
-        <p:spPr>
-          <a:xfrm>
-            <a:off x="838200" y="1825625"/>
-            <a:ext cx="10515600" cy="1531266"/>
-          </a:xfrm>
-        </p:spPr>
-        <p:txBody>
-          <a:bodyPr/>
-          <a:lstStyle/>
-          <a:p>
-            <a:r>
-              <a:rPr lang="en-US" dirty="0"/>
-              <a:t>Kahan summation</a:t>
-            </a:r>
-          </a:p>
-          <a:p>
-            <a:pPr lvl="1"/>
-            <a:r>
-              <a:rPr lang="en-US" dirty="0">
-                <a:hlinkClick r:id="rId2"/>
-              </a:rPr>
-              <a:t>https://en.wikipedia.org/wiki/Kahan_summation_algorithm</a:t>
-            </a:r>
-            <a:endParaRPr lang="en-US" dirty="0"/>
-          </a:p>
-          <a:p>
-            <a:pPr lvl="1"/>
-            <a:r>
-              <a:rPr lang="en-US" dirty="0"/>
-              <a:t>with excruciating details </a:t>
-            </a:r>
-            <a:r>
-              <a:rPr lang="en-US" dirty="0">
-                <a:hlinkClick r:id="rId3"/>
-              </a:rPr>
-              <a:t>https://arxiv.org/html/2602.19452v1 - LST2</a:t>
-            </a:r>
-            <a:endParaRPr lang="en-US" dirty="0"/>
-          </a:p>
-        </p:txBody>
-      </p:sp>
-      <p:sp>
-        <p:nvSpPr>
-          <p:cNvPr id="4" name="TextBox 3">
-            <a:extLst>
-              <a:ext uri="{FF2B5EF4-FFF2-40B4-BE49-F238E27FC236}">
-                <a16:creationId xmlns:a16="http://schemas.microsoft.com/office/drawing/2014/main" id="{D022782E-2AE8-5E4E-D2AA-20DCC4B0081F}"/>
-              </a:ext>
-            </a:extLst>
-          </p:cNvPr>
-          <p:cNvSpPr txBox="1">
-            <a:spLocks noChangeArrowheads="1"/>
-          </p:cNvSpPr>
-          <p:nvPr/>
-        </p:nvSpPr>
-        <p:spPr bwMode="auto">
-          <a:xfrm>
-            <a:off x="206098" y="3287851"/>
-            <a:ext cx="3985413" cy="2554545"/>
-          </a:xfrm>
-          <a:prstGeom prst="rect">
-            <a:avLst/>
-          </a:prstGeom>
-          <a:gradFill rotWithShape="1">
-            <a:gsLst>
-              <a:gs pos="0">
-                <a:srgbClr val="FFFFDC"/>
-              </a:gs>
-              <a:gs pos="64999">
-                <a:srgbClr val="FFFFAC"/>
-              </a:gs>
-              <a:gs pos="100000">
-                <a:srgbClr val="FFFF88"/>
-              </a:gs>
-            </a:gsLst>
-            <a:lin ang="5400000" scaled="1"/>
-          </a:gradFill>
-          <a:ln w="9525">
-            <a:solidFill>
-              <a:srgbClr val="FADD4D"/>
-            </a:solidFill>
-            <a:miter lim="800000"/>
-            <a:headEnd/>
-            <a:tailEnd/>
-          </a:ln>
-          <a:effectLst>
-            <a:outerShdw blurRad="40000" dist="20000" dir="5400000" rotWithShape="0">
-              <a:srgbClr val="808080">
-                <a:alpha val="37999"/>
-              </a:srgbClr>
-            </a:outerShdw>
-          </a:effectLst>
-        </p:spPr>
-        <p:txBody>
-          <a:bodyPr wrap="square">
-            <a:spAutoFit/>
-          </a:bodyPr>
-          <a:lstStyle>
-            <a:lvl1pPr eaLnBrk="0" hangingPunct="0">
-              <a:defRPr sz="2400">
-                <a:solidFill>
-                  <a:schemeClr val="tx1"/>
-                </a:solidFill>
-                <a:latin typeface="Arial" panose="020B0604020202020204" pitchFamily="34" charset="0"/>
-                <a:ea typeface="ＭＳ Ｐゴシック" panose="020B0600070205080204" pitchFamily="34" charset="-128"/>
-              </a:defRPr>
-            </a:lvl1pPr>
-            <a:lvl2pPr marL="742950" indent="-285750" eaLnBrk="0" hangingPunct="0">
-              <a:defRPr sz="2400">
-                <a:solidFill>
-                  <a:schemeClr val="tx1"/>
-                </a:solidFill>
-                <a:latin typeface="Arial" panose="020B0604020202020204" pitchFamily="34" charset="0"/>
-                <a:ea typeface="ＭＳ Ｐゴシック" panose="020B0600070205080204" pitchFamily="34" charset="-128"/>
-              </a:defRPr>
-            </a:lvl2pPr>
-            <a:lvl3pPr marL="1143000" indent="-228600" eaLnBrk="0" hangingPunct="0">
-              <a:defRPr sz="2400">
-                <a:solidFill>
-                  <a:schemeClr val="tx1"/>
-                </a:solidFill>
-                <a:latin typeface="Arial" panose="020B0604020202020204" pitchFamily="34" charset="0"/>
-                <a:ea typeface="ＭＳ Ｐゴシック" panose="020B0600070205080204" pitchFamily="34" charset="-128"/>
-              </a:defRPr>
-            </a:lvl3pPr>
-            <a:lvl4pPr marL="1600200" indent="-228600" eaLnBrk="0" hangingPunct="0">
-              <a:defRPr sz="2400">
-                <a:solidFill>
-                  <a:schemeClr val="tx1"/>
-                </a:solidFill>
-                <a:latin typeface="Arial" panose="020B0604020202020204" pitchFamily="34" charset="0"/>
-                <a:ea typeface="ＭＳ Ｐゴシック" panose="020B0600070205080204" pitchFamily="34" charset="-128"/>
-              </a:defRPr>
-            </a:lvl4pPr>
-            <a:lvl5pPr marL="2057400" indent="-228600" eaLnBrk="0" hangingPunct="0">
-              <a:defRPr sz="2400">
-                <a:solidFill>
-                  <a:schemeClr val="tx1"/>
-                </a:solidFill>
-                <a:latin typeface="Arial" panose="020B0604020202020204" pitchFamily="34" charset="0"/>
-                <a:ea typeface="ＭＳ Ｐゴシック" panose="020B0600070205080204" pitchFamily="34" charset="-128"/>
-              </a:defRPr>
-            </a:lvl5pPr>
-            <a:lvl6pPr marL="2514600" indent="-228600" eaLnBrk="0" fontAlgn="base" hangingPunct="0">
-              <a:spcBef>
-                <a:spcPct val="0"/>
-              </a:spcBef>
-              <a:spcAft>
-                <a:spcPct val="0"/>
-              </a:spcAft>
-              <a:defRPr sz="2400">
-                <a:solidFill>
-                  <a:schemeClr val="tx1"/>
-                </a:solidFill>
-                <a:latin typeface="Arial" panose="020B0604020202020204" pitchFamily="34" charset="0"/>
-                <a:ea typeface="ＭＳ Ｐゴシック" panose="020B0600070205080204" pitchFamily="34" charset="-128"/>
-              </a:defRPr>
-            </a:lvl6pPr>
-            <a:lvl7pPr marL="2971800" indent="-228600" eaLnBrk="0" fontAlgn="base" hangingPunct="0">
-              <a:spcBef>
-                <a:spcPct val="0"/>
-              </a:spcBef>
-              <a:spcAft>
-                <a:spcPct val="0"/>
-              </a:spcAft>
-              <a:defRPr sz="2400">
-                <a:solidFill>
-                  <a:schemeClr val="tx1"/>
-                </a:solidFill>
-                <a:latin typeface="Arial" panose="020B0604020202020204" pitchFamily="34" charset="0"/>
-                <a:ea typeface="ＭＳ Ｐゴシック" panose="020B0600070205080204" pitchFamily="34" charset="-128"/>
-              </a:defRPr>
-            </a:lvl7pPr>
-            <a:lvl8pPr marL="3429000" indent="-228600" eaLnBrk="0" fontAlgn="base" hangingPunct="0">
-              <a:spcBef>
-                <a:spcPct val="0"/>
-              </a:spcBef>
-              <a:spcAft>
-                <a:spcPct val="0"/>
-              </a:spcAft>
-              <a:defRPr sz="2400">
-                <a:solidFill>
-                  <a:schemeClr val="tx1"/>
-                </a:solidFill>
-                <a:latin typeface="Arial" panose="020B0604020202020204" pitchFamily="34" charset="0"/>
-                <a:ea typeface="ＭＳ Ｐゴシック" panose="020B0600070205080204" pitchFamily="34" charset="-128"/>
-              </a:defRPr>
-            </a:lvl8pPr>
-            <a:lvl9pPr marL="3886200" indent="-228600" eaLnBrk="0" fontAlgn="base" hangingPunct="0">
-              <a:spcBef>
-                <a:spcPct val="0"/>
-              </a:spcBef>
-              <a:spcAft>
-                <a:spcPct val="0"/>
-              </a:spcAft>
-              <a:defRPr sz="2400">
-                <a:solidFill>
-                  <a:schemeClr val="tx1"/>
-                </a:solidFill>
-                <a:latin typeface="Arial" panose="020B0604020202020204" pitchFamily="34" charset="0"/>
-                <a:ea typeface="ＭＳ Ｐゴシック" panose="020B0600070205080204" pitchFamily="34" charset="-128"/>
-              </a:defRPr>
-            </a:lvl9pPr>
-          </a:lstStyle>
-          <a:p>
-            <a:pPr eaLnBrk="1" hangingPunct="1"/>
-            <a:r>
-              <a:rPr lang="en-US" altLang="en-US" sz="1600" b="1" dirty="0"/>
-              <a:t>T </a:t>
-            </a:r>
-            <a:r>
-              <a:rPr lang="en-US" altLang="en-US" sz="1600" b="1" dirty="0" err="1"/>
-              <a:t>kahanSum</a:t>
-            </a:r>
-            <a:r>
-              <a:rPr lang="en-US" altLang="en-US" sz="1600" b="1" dirty="0"/>
-              <a:t>(T const * input, </a:t>
-            </a:r>
-            <a:r>
-              <a:rPr lang="en-US" altLang="en-US" sz="1600" b="1" dirty="0" err="1"/>
-              <a:t>size_t</a:t>
-            </a:r>
-            <a:r>
-              <a:rPr lang="en-US" altLang="en-US" sz="1600" b="1" dirty="0"/>
-              <a:t> n) { </a:t>
-            </a:r>
-          </a:p>
-          <a:p>
-            <a:pPr eaLnBrk="1" hangingPunct="1"/>
-            <a:r>
-              <a:rPr lang="en-US" altLang="en-US" sz="1600" b="1" dirty="0"/>
-              <a:t>T sum = input[0];</a:t>
-            </a:r>
-          </a:p>
-          <a:p>
-            <a:pPr eaLnBrk="1" hangingPunct="1"/>
-            <a:r>
-              <a:rPr lang="en-US" altLang="en-US" sz="1600" b="1" dirty="0"/>
-              <a:t>T t = 0.0;          </a:t>
-            </a:r>
-          </a:p>
-          <a:p>
-            <a:pPr eaLnBrk="1" hangingPunct="1"/>
-            <a:r>
-              <a:rPr lang="en-US" altLang="en-US" sz="1600" b="1" dirty="0"/>
-              <a:t>for (</a:t>
-            </a:r>
-            <a:r>
-              <a:rPr lang="en-US" altLang="en-US" sz="1600" b="1" dirty="0" err="1"/>
-              <a:t>size_t</a:t>
-            </a:r>
-            <a:r>
-              <a:rPr lang="en-US" altLang="en-US" sz="1600" b="1" dirty="0"/>
-              <a:t> </a:t>
-            </a:r>
-            <a:r>
-              <a:rPr lang="en-US" altLang="en-US" sz="1600" b="1" dirty="0" err="1"/>
-              <a:t>i</a:t>
-            </a:r>
-            <a:r>
-              <a:rPr lang="en-US" altLang="en-US" sz="1600" b="1" dirty="0"/>
-              <a:t> = 1; </a:t>
-            </a:r>
-            <a:r>
-              <a:rPr lang="en-US" altLang="en-US" sz="1600" b="1" dirty="0" err="1"/>
-              <a:t>i</a:t>
-            </a:r>
-            <a:r>
-              <a:rPr lang="en-US" altLang="en-US" sz="1600" b="1" dirty="0"/>
-              <a:t>&lt;n; ++</a:t>
-            </a:r>
-            <a:r>
-              <a:rPr lang="en-US" altLang="en-US" sz="1600" b="1" dirty="0" err="1"/>
-              <a:t>i</a:t>
-            </a:r>
-            <a:r>
-              <a:rPr lang="en-US" altLang="en-US" sz="1600" b="1" dirty="0"/>
-              <a:t>)  {  </a:t>
-            </a:r>
-          </a:p>
-          <a:p>
-            <a:pPr eaLnBrk="1" hangingPunct="1"/>
-            <a:r>
-              <a:rPr lang="en-US" altLang="en-US" sz="1600" b="1" dirty="0"/>
-              <a:t>  y = input[</a:t>
-            </a:r>
-            <a:r>
-              <a:rPr lang="en-US" altLang="en-US" sz="1600" b="1" dirty="0" err="1"/>
-              <a:t>i</a:t>
-            </a:r>
-            <a:r>
-              <a:rPr lang="en-US" altLang="en-US" sz="1600" b="1" dirty="0"/>
-              <a:t>] – t; </a:t>
-            </a:r>
-          </a:p>
-          <a:p>
-            <a:pPr eaLnBrk="1" hangingPunct="1"/>
-            <a:r>
-              <a:rPr lang="en-US" altLang="en-US" sz="1600" b="1" i="1" dirty="0"/>
-              <a:t>  auto s = sum + y</a:t>
-            </a:r>
-          </a:p>
-          <a:p>
-            <a:pPr eaLnBrk="1" hangingPunct="1"/>
-            <a:r>
-              <a:rPr lang="en-US" altLang="en-US" sz="1600" b="1" i="1" dirty="0"/>
-              <a:t>  t = (s - sum) – y;   </a:t>
-            </a:r>
-          </a:p>
-          <a:p>
-            <a:pPr eaLnBrk="1" hangingPunct="1"/>
-            <a:r>
-              <a:rPr lang="en-US" altLang="en-US" sz="1600" b="1" i="1" dirty="0"/>
-              <a:t>  sum = s;                                    </a:t>
-            </a:r>
-          </a:p>
-          <a:p>
-            <a:pPr eaLnBrk="1" hangingPunct="1"/>
-            <a:r>
-              <a:rPr lang="en-US" altLang="en-US" sz="1600" b="1" i="1" dirty="0"/>
-              <a:t>} </a:t>
-            </a:r>
-          </a:p>
-          <a:p>
-            <a:pPr eaLnBrk="1" hangingPunct="1"/>
-            <a:r>
-              <a:rPr lang="en-US" altLang="en-US" sz="1600" b="1" i="1" dirty="0"/>
-              <a:t>return sum;</a:t>
-            </a:r>
-            <a:endParaRPr lang="en-US" altLang="en-US" sz="1600" b="1" dirty="0">
-              <a:solidFill>
-                <a:srgbClr val="000000"/>
-              </a:solidFill>
-              <a:latin typeface="Arial Narrow" panose="020B0604020202020204" pitchFamily="34" charset="0"/>
-            </a:endParaRPr>
-          </a:p>
-        </p:txBody>
-      </p:sp>
-      <p:sp>
-        <p:nvSpPr>
-          <p:cNvPr id="5" name="TextBox 4">
-            <a:extLst>
-              <a:ext uri="{FF2B5EF4-FFF2-40B4-BE49-F238E27FC236}">
-                <a16:creationId xmlns:a16="http://schemas.microsoft.com/office/drawing/2014/main" id="{3623E267-73A4-1A4E-36A1-BA2B20C5695B}"/>
-              </a:ext>
-            </a:extLst>
-          </p:cNvPr>
-          <p:cNvSpPr txBox="1"/>
-          <p:nvPr/>
-        </p:nvSpPr>
-        <p:spPr>
-          <a:xfrm>
-            <a:off x="4756108" y="3356891"/>
-            <a:ext cx="4952489" cy="923330"/>
-          </a:xfrm>
-          <a:prstGeom prst="rect">
-            <a:avLst/>
-          </a:prstGeom>
-          <a:noFill/>
-        </p:spPr>
-        <p:txBody>
-          <a:bodyPr wrap="square" rtlCol="0">
-            <a:spAutoFit/>
-          </a:bodyPr>
-          <a:lstStyle/>
-          <a:p>
-            <a:r>
-              <a:rPr lang="en-US" dirty="0"/>
-              <a:t>Improved algorithms exist, differently handling various magnitude ranges (“big”, “medium” and “tiny”) or by (partial) sorting</a:t>
-            </a:r>
-          </a:p>
-        </p:txBody>
-      </p:sp>
-    </p:spTree>
-    <p:extLst>
-      <p:ext uri="{BB962C8B-B14F-4D97-AF65-F5344CB8AC3E}">
-        <p14:creationId xmlns:p14="http://schemas.microsoft.com/office/powerpoint/2010/main" val="1199403217"/>
-      </p:ext>
-    </p:extLst>
-  </p:cSld>
-  <p:clrMapOvr>
-    <a:masterClrMapping/>
-  </p:clrMapOvr>
-</p:sld>
-</file>
-
-<file path=ppt/slides/slide22.xml><?xml version="1.0" encoding="utf-8"?>
-<p:sld xmlns:a="http://schemas.openxmlformats.org/drawingml/2006/main" xmlns:r="http://schemas.openxmlformats.org/officeDocument/2006/relationships" xmlns:p="http://schemas.openxmlformats.org/presentationml/2006/main">
-  <p:cSld>
-    <p:spTree>
-      <p:nvGrpSpPr>
-        <p:cNvPr id="1" name="">
-          <a:extLst>
-            <a:ext uri="{FF2B5EF4-FFF2-40B4-BE49-F238E27FC236}">
-              <a16:creationId xmlns:a16="http://schemas.microsoft.com/office/drawing/2014/main" id="{E9CE9581-E325-5E7E-0859-53684EED8073}"/>
-            </a:ext>
-          </a:extLst>
-        </p:cNvPr>
-        <p:cNvGrpSpPr/>
-        <p:nvPr/>
-      </p:nvGrpSpPr>
-      <p:grpSpPr>
-        <a:xfrm>
-          <a:off x="0" y="0"/>
-          <a:ext cx="0" cy="0"/>
-          <a:chOff x="0" y="0"/>
-          <a:chExt cx="0" cy="0"/>
-        </a:xfrm>
-      </p:grpSpPr>
-      <p:sp>
-        <p:nvSpPr>
-          <p:cNvPr id="4" name="Title 3">
-            <a:extLst>
-              <a:ext uri="{FF2B5EF4-FFF2-40B4-BE49-F238E27FC236}">
-                <a16:creationId xmlns:a16="http://schemas.microsoft.com/office/drawing/2014/main" id="{E9DA1CFB-C459-B481-2D99-2558956DF2B0}"/>
-              </a:ext>
-            </a:extLst>
-          </p:cNvPr>
-          <p:cNvSpPr>
-            <a:spLocks noGrp="1"/>
-          </p:cNvSpPr>
-          <p:nvPr>
-            <p:ph type="title"/>
-          </p:nvPr>
-        </p:nvSpPr>
-        <p:spPr>
-          <a:xfrm>
-            <a:off x="634142" y="2092798"/>
-            <a:ext cx="10515600" cy="1589516"/>
-          </a:xfrm>
-        </p:spPr>
-        <p:txBody>
-          <a:bodyPr>
-            <a:normAutofit/>
-          </a:bodyPr>
-          <a:lstStyle/>
-          <a:p>
-            <a:pPr algn="ctr"/>
-            <a:r>
-              <a:rPr lang="en-US" sz="9600">
-                <a:solidFill>
-                  <a:srgbClr val="FF0000"/>
-                </a:solidFill>
-                <a:highlight>
-                  <a:srgbClr val="FFFF00"/>
-                </a:highlight>
-              </a:rPr>
-              <a:t>EXERCISES</a:t>
-            </a:r>
-          </a:p>
-        </p:txBody>
-      </p:sp>
-      <p:sp>
-        <p:nvSpPr>
-          <p:cNvPr id="5" name="Text Placeholder 4">
-            <a:extLst>
-              <a:ext uri="{FF2B5EF4-FFF2-40B4-BE49-F238E27FC236}">
-                <a16:creationId xmlns:a16="http://schemas.microsoft.com/office/drawing/2014/main" id="{C9F988BC-AA84-EA5B-1D5E-2B46A6087546}"/>
-              </a:ext>
-            </a:extLst>
-          </p:cNvPr>
-          <p:cNvSpPr>
-            <a:spLocks noGrp="1"/>
-          </p:cNvSpPr>
-          <p:nvPr>
-            <p:ph type="body" idx="1"/>
-          </p:nvPr>
-        </p:nvSpPr>
-        <p:spPr>
-          <a:xfrm>
-            <a:off x="838200" y="4033409"/>
-            <a:ext cx="10515600" cy="1500187"/>
-          </a:xfrm>
-        </p:spPr>
-        <p:txBody>
-          <a:bodyPr>
-            <a:normAutofit fontScale="77500" lnSpcReduction="20000"/>
-          </a:bodyPr>
-          <a:lstStyle/>
-          <a:p>
-            <a:r>
-              <a:rPr lang="en-US"/>
-              <a:t>Either in Python or C++</a:t>
-            </a:r>
-          </a:p>
-          <a:p>
-            <a:endParaRPr lang="en-US"/>
-          </a:p>
-          <a:p>
-            <a:r>
-              <a:rPr lang="en-US"/>
-              <a:t>For C++ one can use </a:t>
-            </a:r>
-            <a:r>
-              <a:rPr lang="en-US" err="1"/>
-              <a:t>godbolt</a:t>
-            </a:r>
-            <a:r>
-              <a:rPr lang="en-US"/>
-              <a:t> (</a:t>
-            </a:r>
-            <a:r>
-              <a:rPr lang="en-US">
-                <a:hlinkClick r:id="rId2"/>
-              </a:rPr>
-              <a:t>https://godbolt.org/z/d1e18j3jK</a:t>
-            </a:r>
-            <a:r>
-              <a:rPr lang="en-US"/>
-              <a:t>  ) </a:t>
-            </a:r>
-          </a:p>
-          <a:p>
-            <a:r>
-              <a:rPr lang="en-US"/>
-              <a:t>For Python either a python3 shell on your PC, or a </a:t>
-            </a:r>
-            <a:r>
-              <a:rPr lang="en-US" err="1"/>
-              <a:t>jupyter</a:t>
-            </a:r>
-            <a:r>
-              <a:rPr lang="en-US"/>
-              <a:t> notebook or the browser shell in </a:t>
-            </a:r>
-            <a:r>
-              <a:rPr lang="en-US">
-                <a:hlinkClick r:id="rId3"/>
-              </a:rPr>
-              <a:t>https://numpy.org/</a:t>
-            </a:r>
-            <a:endParaRPr lang="en-US"/>
-          </a:p>
-          <a:p>
-            <a:endParaRPr lang="en-US"/>
-          </a:p>
-        </p:txBody>
-      </p:sp>
-    </p:spTree>
-    <p:extLst>
-      <p:ext uri="{BB962C8B-B14F-4D97-AF65-F5344CB8AC3E}">
-        <p14:creationId xmlns:p14="http://schemas.microsoft.com/office/powerpoint/2010/main" val="2176430983"/>
-      </p:ext>
-    </p:extLst>
-  </p:cSld>
-  <p:clrMapOvr>
-    <a:masterClrMapping/>
-  </p:clrMapOvr>
-</p:sld>
-</file>
-
-<file path=ppt/slides/slide23.xml><?xml version="1.0" encoding="utf-8"?>
-<p:sld xmlns:a="http://schemas.openxmlformats.org/drawingml/2006/main" xmlns:r="http://schemas.openxmlformats.org/officeDocument/2006/relationships" xmlns:p="http://schemas.openxmlformats.org/presentationml/2006/main">
-  <p:cSld>
-    <p:spTree>
-      <p:nvGrpSpPr>
-        <p:cNvPr id="1" name=""/>
-        <p:cNvGrpSpPr/>
-        <p:nvPr/>
-      </p:nvGrpSpPr>
-      <p:grpSpPr>
-        <a:xfrm>
-          <a:off x="0" y="0"/>
-          <a:ext cx="0" cy="0"/>
-          <a:chOff x="0" y="0"/>
-          <a:chExt cx="0" cy="0"/>
-        </a:xfrm>
-      </p:grpSpPr>
-      <p:sp>
-        <p:nvSpPr>
-          <p:cNvPr id="5" name="Content Placeholder 4">
-            <a:extLst>
-              <a:ext uri="{FF2B5EF4-FFF2-40B4-BE49-F238E27FC236}">
-                <a16:creationId xmlns:a16="http://schemas.microsoft.com/office/drawing/2014/main" id="{97EAC43B-26A5-792A-9D83-2D4F75A3F27E}"/>
-              </a:ext>
-            </a:extLst>
-          </p:cNvPr>
-          <p:cNvSpPr>
-            <a:spLocks noGrp="1"/>
-          </p:cNvSpPr>
-          <p:nvPr>
-            <p:ph idx="4294967295"/>
-          </p:nvPr>
-        </p:nvSpPr>
-        <p:spPr>
-          <a:xfrm>
-            <a:off x="530492" y="541337"/>
-            <a:ext cx="10515600" cy="2887663"/>
-          </a:xfrm>
-        </p:spPr>
-        <p:txBody>
-          <a:bodyPr>
-            <a:normAutofit fontScale="92500" lnSpcReduction="10000"/>
-          </a:bodyPr>
-          <a:lstStyle/>
-          <a:p>
-            <a:r>
-              <a:rPr lang="en-US" dirty="0"/>
-              <a:t>Sum T(0.1) 10000 times in binary32, binary64, decimal2, decimal5</a:t>
-            </a:r>
-          </a:p>
-          <a:p>
-            <a:pPr lvl="1"/>
-            <a:r>
-              <a:rPr lang="en-US" dirty="0"/>
-              <a:t>Google for “patriot failure”</a:t>
-            </a:r>
-          </a:p>
-          <a:p>
-            <a:r>
-              <a:rPr lang="en-US" dirty="0"/>
-              <a:t>Sum 10</a:t>
-            </a:r>
-            <a:r>
-              <a:rPr lang="en-US" baseline="30000" dirty="0"/>
-              <a:t>9</a:t>
-            </a:r>
-            <a:r>
-              <a:rPr lang="en-US" dirty="0"/>
-              <a:t> positive random numbers (in range   10</a:t>
-            </a:r>
-            <a:r>
-              <a:rPr lang="en-US" baseline="30000" dirty="0"/>
-              <a:t>-n</a:t>
-            </a:r>
-            <a:r>
-              <a:rPr lang="en-US" dirty="0"/>
-              <a:t>, 10</a:t>
-            </a:r>
-            <a:r>
-              <a:rPr lang="en-US" baseline="30000" dirty="0"/>
-              <a:t>+n</a:t>
-            </a:r>
-            <a:r>
-              <a:rPr lang="en-US" dirty="0"/>
-              <a:t> )</a:t>
-            </a:r>
-          </a:p>
-          <a:p>
-            <a:pPr lvl="1"/>
-            <a:r>
-              <a:rPr lang="en-US" dirty="0"/>
-              <a:t>Typical in </a:t>
-            </a:r>
-            <a:r>
-              <a:rPr lang="en-US" dirty="0" err="1"/>
-              <a:t>unbinned</a:t>
-            </a:r>
-            <a:r>
-              <a:rPr lang="en-US" dirty="0"/>
-              <a:t> log-</a:t>
-            </a:r>
-            <a:r>
-              <a:rPr lang="en-US" dirty="0" err="1"/>
-              <a:t>likehood</a:t>
-            </a:r>
-            <a:endParaRPr lang="en-US" dirty="0"/>
-          </a:p>
-          <a:p>
-            <a:r>
-              <a:rPr lang="en-US" dirty="0"/>
-              <a:t>Compute the average age of all humans on earth</a:t>
-            </a:r>
-          </a:p>
-          <a:p>
-            <a:endParaRPr lang="en-US" dirty="0"/>
-          </a:p>
-          <a:p>
-            <a:r>
-              <a:rPr lang="en-US" dirty="0"/>
-              <a:t>Compute π as the integral of 4/(1+x</a:t>
-            </a:r>
-            <a:r>
-              <a:rPr lang="en-US" baseline="30000" dirty="0"/>
-              <a:t>2</a:t>
-            </a:r>
-            <a:r>
-              <a:rPr lang="en-US" dirty="0"/>
-              <a:t>) between 0 and 1</a:t>
-            </a:r>
-            <a:endParaRPr lang="en-US" baseline="30000" dirty="0"/>
-          </a:p>
-        </p:txBody>
-      </p:sp>
-      <p:pic>
-        <p:nvPicPr>
-          <p:cNvPr id="6" name="Picture 5">
-            <a:extLst>
-              <a:ext uri="{FF2B5EF4-FFF2-40B4-BE49-F238E27FC236}">
-                <a16:creationId xmlns:a16="http://schemas.microsoft.com/office/drawing/2014/main" id="{69D55FF4-1135-3B72-0E12-51A04E264779}"/>
-              </a:ext>
-            </a:extLst>
-          </p:cNvPr>
-          <p:cNvPicPr>
-            <a:picLocks noChangeAspect="1"/>
-          </p:cNvPicPr>
-          <p:nvPr/>
-        </p:nvPicPr>
-        <p:blipFill>
-          <a:blip r:embed="rId2"/>
-          <a:stretch>
-            <a:fillRect/>
-          </a:stretch>
-        </p:blipFill>
-        <p:spPr>
-          <a:xfrm>
-            <a:off x="702087" y="3613194"/>
-            <a:ext cx="4630750" cy="2891830"/>
-          </a:xfrm>
-          <a:prstGeom prst="rect">
-            <a:avLst/>
-          </a:prstGeom>
-        </p:spPr>
-      </p:pic>
-      <p:pic>
-        <p:nvPicPr>
-          <p:cNvPr id="7" name="Picture 6">
-            <a:extLst>
-              <a:ext uri="{FF2B5EF4-FFF2-40B4-BE49-F238E27FC236}">
-                <a16:creationId xmlns:a16="http://schemas.microsoft.com/office/drawing/2014/main" id="{87F7091E-0E56-FB7A-8067-4CBEA073965E}"/>
-              </a:ext>
-            </a:extLst>
-          </p:cNvPr>
-          <p:cNvPicPr>
-            <a:picLocks noChangeAspect="1"/>
-          </p:cNvPicPr>
-          <p:nvPr/>
-        </p:nvPicPr>
-        <p:blipFill>
-          <a:blip r:embed="rId3"/>
-          <a:stretch>
-            <a:fillRect/>
-          </a:stretch>
-        </p:blipFill>
-        <p:spPr>
-          <a:xfrm>
-            <a:off x="6266627" y="3515270"/>
-            <a:ext cx="4203603" cy="3172345"/>
-          </a:xfrm>
-          <a:prstGeom prst="rect">
-            <a:avLst/>
-          </a:prstGeom>
-        </p:spPr>
-      </p:pic>
-    </p:spTree>
-    <p:extLst>
-      <p:ext uri="{BB962C8B-B14F-4D97-AF65-F5344CB8AC3E}">
-        <p14:creationId xmlns:p14="http://schemas.microsoft.com/office/powerpoint/2010/main" val="3956750112"/>
-      </p:ext>
-    </p:extLst>
-  </p:cSld>
-  <p:clrMapOvr>
-    <a:masterClrMapping/>
-  </p:clrMapOvr>
-</p:sld>
-</file>
-
-<file path=ppt/slides/slide24.xml><?xml version="1.0" encoding="utf-8"?>
-<p:sld xmlns:a="http://schemas.openxmlformats.org/drawingml/2006/main" xmlns:r="http://schemas.openxmlformats.org/officeDocument/2006/relationships" xmlns:p="http://schemas.openxmlformats.org/presentationml/2006/main">
-  <p:cSld>
-    <p:spTree>
-      <p:nvGrpSpPr>
-        <p:cNvPr id="1" name=""/>
-        <p:cNvGrpSpPr/>
-        <p:nvPr/>
-      </p:nvGrpSpPr>
-      <p:grpSpPr>
-        <a:xfrm>
-          <a:off x="0" y="0"/>
-          <a:ext cx="0" cy="0"/>
-          <a:chOff x="0" y="0"/>
-          <a:chExt cx="0" cy="0"/>
-        </a:xfrm>
-      </p:grpSpPr>
-      <p:sp>
-        <p:nvSpPr>
-          <p:cNvPr id="2" name="Title 1">
-            <a:extLst>
-              <a:ext uri="{FF2B5EF4-FFF2-40B4-BE49-F238E27FC236}">
-                <a16:creationId xmlns:a16="http://schemas.microsoft.com/office/drawing/2014/main" id="{406E20AA-B625-0B63-9F2F-C72BE2EA535E}"/>
-              </a:ext>
-            </a:extLst>
-          </p:cNvPr>
-          <p:cNvSpPr>
-            <a:spLocks noGrp="1"/>
-          </p:cNvSpPr>
-          <p:nvPr>
-            <p:ph type="title"/>
-          </p:nvPr>
-        </p:nvSpPr>
-        <p:spPr>
-          <a:xfrm>
-            <a:off x="838200" y="0"/>
-            <a:ext cx="10515600" cy="1325563"/>
-          </a:xfrm>
-        </p:spPr>
-        <p:txBody>
-          <a:bodyPr/>
-          <a:lstStyle/>
-          <a:p>
-            <a:r>
-              <a:rPr lang="en-US" dirty="0"/>
-              <a:t>FMA: Fused Multiple Add</a:t>
-            </a:r>
-          </a:p>
-        </p:txBody>
-      </p:sp>
-      <p:sp>
-        <p:nvSpPr>
-          <p:cNvPr id="3" name="Content Placeholder 2">
-            <a:extLst>
-              <a:ext uri="{FF2B5EF4-FFF2-40B4-BE49-F238E27FC236}">
-                <a16:creationId xmlns:a16="http://schemas.microsoft.com/office/drawing/2014/main" id="{622866DD-121A-7352-FBC1-5EB3685E6622}"/>
-              </a:ext>
-            </a:extLst>
-          </p:cNvPr>
-          <p:cNvSpPr>
-            <a:spLocks noGrp="1"/>
-          </p:cNvSpPr>
-          <p:nvPr>
-            <p:ph idx="1"/>
-          </p:nvPr>
-        </p:nvSpPr>
-        <p:spPr>
-          <a:xfrm>
-            <a:off x="838200" y="1310125"/>
-            <a:ext cx="10515600" cy="3550309"/>
-          </a:xfrm>
-        </p:spPr>
-        <p:txBody>
-          <a:bodyPr>
-            <a:normAutofit lnSpcReduction="10000"/>
-          </a:bodyPr>
-          <a:lstStyle/>
-          <a:p>
-            <a:r>
-              <a:rPr lang="en-US" dirty="0"/>
-              <a:t>Also known as MAC (multiply accumulate) instruction on AMD</a:t>
-            </a:r>
-          </a:p>
-          <a:p>
-            <a:r>
-              <a:rPr lang="en-US" dirty="0" err="1"/>
-              <a:t>fma</a:t>
-            </a:r>
-            <a:r>
-              <a:rPr lang="en-US" dirty="0"/>
-              <a:t>(</a:t>
-            </a:r>
-            <a:r>
-              <a:rPr lang="en-US" dirty="0" err="1"/>
-              <a:t>a,b,c</a:t>
-            </a:r>
-            <a:r>
-              <a:rPr lang="en-US" dirty="0"/>
-              <a:t>) computes the correctly rounded result of a*</a:t>
-            </a:r>
-            <a:r>
-              <a:rPr lang="en-US" dirty="0" err="1"/>
-              <a:t>b+c</a:t>
-            </a:r>
-            <a:endParaRPr lang="en-US" dirty="0"/>
-          </a:p>
-          <a:p>
-            <a:pPr lvl="1"/>
-            <a:r>
-              <a:rPr lang="en-US" dirty="0"/>
-              <a:t>It improves speed and precision in many computation such as linear algebra</a:t>
-            </a:r>
-          </a:p>
-          <a:p>
-            <a:pPr lvl="1"/>
-            <a:r>
-              <a:rPr lang="en-US" dirty="0"/>
-              <a:t>No standard on how to “contract” expression (depends on compiler)</a:t>
-            </a:r>
-          </a:p>
-          <a:p>
-            <a:pPr lvl="2"/>
-            <a:r>
-              <a:rPr lang="en-US" dirty="0"/>
-              <a:t>a*</a:t>
-            </a:r>
-            <a:r>
-              <a:rPr lang="en-US" dirty="0" err="1"/>
-              <a:t>b+c</a:t>
-            </a:r>
-            <a:r>
-              <a:rPr lang="en-US" dirty="0"/>
-              <a:t>*d ,  </a:t>
-            </a:r>
-            <a:r>
-              <a:rPr lang="en-US" dirty="0" err="1"/>
-              <a:t>a+b</a:t>
-            </a:r>
-            <a:r>
-              <a:rPr lang="en-US" dirty="0"/>
-              <a:t>*</a:t>
-            </a:r>
-            <a:r>
-              <a:rPr lang="en-US" dirty="0" err="1"/>
-              <a:t>c+d</a:t>
-            </a:r>
-            <a:r>
-              <a:rPr lang="en-US" dirty="0"/>
-              <a:t> , x*=</a:t>
-            </a:r>
-            <a:r>
-              <a:rPr lang="en-US" dirty="0" err="1"/>
-              <a:t>a;x</a:t>
-            </a:r>
-            <a:r>
-              <a:rPr lang="en-US" dirty="0"/>
-              <a:t>+=b ,  </a:t>
-            </a:r>
-            <a:r>
-              <a:rPr lang="en-US" dirty="0" err="1"/>
-              <a:t>etc</a:t>
-            </a:r>
-            <a:endParaRPr lang="en-US" dirty="0"/>
-          </a:p>
-          <a:p>
-            <a:pPr lvl="1"/>
-            <a:r>
-              <a:rPr lang="en-US" dirty="0"/>
-              <a:t>It clearly introduces asymmetries </a:t>
-            </a:r>
-          </a:p>
-          <a:p>
-            <a:pPr lvl="2"/>
-            <a:r>
-              <a:rPr lang="en-US" dirty="0"/>
-              <a:t>for instance  a*</a:t>
-            </a:r>
-            <a:r>
-              <a:rPr lang="en-US" dirty="0" err="1"/>
-              <a:t>b+c</a:t>
-            </a:r>
-            <a:r>
-              <a:rPr lang="en-US" dirty="0"/>
-              <a:t>*d ≠ c*</a:t>
-            </a:r>
-            <a:r>
-              <a:rPr lang="en-US" dirty="0" err="1"/>
-              <a:t>d+a</a:t>
-            </a:r>
-            <a:r>
-              <a:rPr lang="en-US" dirty="0"/>
-              <a:t>*b</a:t>
-            </a:r>
-          </a:p>
-          <a:p>
-            <a:r>
-              <a:rPr lang="en-US" dirty="0"/>
-              <a:t>Kahan comes to the rescue again with this algorithm</a:t>
-            </a:r>
-          </a:p>
-          <a:p>
-            <a:pPr marL="914400" lvl="2" indent="0">
-              <a:buNone/>
-            </a:pPr>
-            <a:r>
-              <a:rPr lang="en-US" dirty="0"/>
-              <a:t> </a:t>
-            </a:r>
-          </a:p>
-        </p:txBody>
-      </p:sp>
-      <p:sp>
-        <p:nvSpPr>
-          <p:cNvPr id="4" name="TextBox 3">
-            <a:extLst>
-              <a:ext uri="{FF2B5EF4-FFF2-40B4-BE49-F238E27FC236}">
-                <a16:creationId xmlns:a16="http://schemas.microsoft.com/office/drawing/2014/main" id="{A77EF3BD-4D64-9993-8C80-6011D1A0EAA1}"/>
-              </a:ext>
-            </a:extLst>
-          </p:cNvPr>
-          <p:cNvSpPr txBox="1">
-            <a:spLocks noChangeArrowheads="1"/>
-          </p:cNvSpPr>
-          <p:nvPr/>
-        </p:nvSpPr>
-        <p:spPr bwMode="auto">
-          <a:xfrm>
-            <a:off x="911843" y="4565174"/>
-            <a:ext cx="6612012" cy="1815882"/>
-          </a:xfrm>
-          <a:prstGeom prst="rect">
-            <a:avLst/>
-          </a:prstGeom>
-          <a:gradFill rotWithShape="1">
-            <a:gsLst>
-              <a:gs pos="0">
-                <a:srgbClr val="FFFFDC"/>
-              </a:gs>
-              <a:gs pos="64999">
-                <a:srgbClr val="FFFFAC"/>
-              </a:gs>
-              <a:gs pos="100000">
-                <a:srgbClr val="FFFF88"/>
-              </a:gs>
-            </a:gsLst>
-            <a:lin ang="5400000" scaled="1"/>
-          </a:gradFill>
-          <a:ln w="9525">
-            <a:solidFill>
-              <a:srgbClr val="FADD4D"/>
-            </a:solidFill>
-            <a:miter lim="800000"/>
-            <a:headEnd/>
-            <a:tailEnd/>
-          </a:ln>
-          <a:effectLst>
-            <a:outerShdw blurRad="40000" dist="20000" dir="5400000" rotWithShape="0">
-              <a:srgbClr val="808080">
-                <a:alpha val="37999"/>
-              </a:srgbClr>
-            </a:outerShdw>
-          </a:effectLst>
-        </p:spPr>
-        <p:txBody>
-          <a:bodyPr wrap="square">
-            <a:spAutoFit/>
-          </a:bodyPr>
-          <a:lstStyle>
-            <a:lvl1pPr eaLnBrk="0" hangingPunct="0">
-              <a:defRPr sz="2400">
-                <a:solidFill>
-                  <a:schemeClr val="tx1"/>
-                </a:solidFill>
-                <a:latin typeface="Arial" panose="020B0604020202020204" pitchFamily="34" charset="0"/>
-                <a:ea typeface="ＭＳ Ｐゴシック" panose="020B0600070205080204" pitchFamily="34" charset="-128"/>
-              </a:defRPr>
-            </a:lvl1pPr>
-            <a:lvl2pPr marL="742950" indent="-285750" eaLnBrk="0" hangingPunct="0">
-              <a:defRPr sz="2400">
-                <a:solidFill>
-                  <a:schemeClr val="tx1"/>
-                </a:solidFill>
-                <a:latin typeface="Arial" panose="020B0604020202020204" pitchFamily="34" charset="0"/>
-                <a:ea typeface="ＭＳ Ｐゴシック" panose="020B0600070205080204" pitchFamily="34" charset="-128"/>
-              </a:defRPr>
-            </a:lvl2pPr>
-            <a:lvl3pPr marL="1143000" indent="-228600" eaLnBrk="0" hangingPunct="0">
-              <a:defRPr sz="2400">
-                <a:solidFill>
-                  <a:schemeClr val="tx1"/>
-                </a:solidFill>
-                <a:latin typeface="Arial" panose="020B0604020202020204" pitchFamily="34" charset="0"/>
-                <a:ea typeface="ＭＳ Ｐゴシック" panose="020B0600070205080204" pitchFamily="34" charset="-128"/>
-              </a:defRPr>
-            </a:lvl3pPr>
-            <a:lvl4pPr marL="1600200" indent="-228600" eaLnBrk="0" hangingPunct="0">
-              <a:defRPr sz="2400">
-                <a:solidFill>
-                  <a:schemeClr val="tx1"/>
-                </a:solidFill>
-                <a:latin typeface="Arial" panose="020B0604020202020204" pitchFamily="34" charset="0"/>
-                <a:ea typeface="ＭＳ Ｐゴシック" panose="020B0600070205080204" pitchFamily="34" charset="-128"/>
-              </a:defRPr>
-            </a:lvl4pPr>
-            <a:lvl5pPr marL="2057400" indent="-228600" eaLnBrk="0" hangingPunct="0">
-              <a:defRPr sz="2400">
-                <a:solidFill>
-                  <a:schemeClr val="tx1"/>
-                </a:solidFill>
-                <a:latin typeface="Arial" panose="020B0604020202020204" pitchFamily="34" charset="0"/>
-                <a:ea typeface="ＭＳ Ｐゴシック" panose="020B0600070205080204" pitchFamily="34" charset="-128"/>
-              </a:defRPr>
-            </a:lvl5pPr>
-            <a:lvl6pPr marL="2514600" indent="-228600" eaLnBrk="0" fontAlgn="base" hangingPunct="0">
-              <a:spcBef>
-                <a:spcPct val="0"/>
-              </a:spcBef>
-              <a:spcAft>
-                <a:spcPct val="0"/>
-              </a:spcAft>
-              <a:defRPr sz="2400">
-                <a:solidFill>
-                  <a:schemeClr val="tx1"/>
-                </a:solidFill>
-                <a:latin typeface="Arial" panose="020B0604020202020204" pitchFamily="34" charset="0"/>
-                <a:ea typeface="ＭＳ Ｐゴシック" panose="020B0600070205080204" pitchFamily="34" charset="-128"/>
-              </a:defRPr>
-            </a:lvl6pPr>
-            <a:lvl7pPr marL="2971800" indent="-228600" eaLnBrk="0" fontAlgn="base" hangingPunct="0">
-              <a:spcBef>
-                <a:spcPct val="0"/>
-              </a:spcBef>
-              <a:spcAft>
-                <a:spcPct val="0"/>
-              </a:spcAft>
-              <a:defRPr sz="2400">
-                <a:solidFill>
-                  <a:schemeClr val="tx1"/>
-                </a:solidFill>
-                <a:latin typeface="Arial" panose="020B0604020202020204" pitchFamily="34" charset="0"/>
-                <a:ea typeface="ＭＳ Ｐゴシック" panose="020B0600070205080204" pitchFamily="34" charset="-128"/>
-              </a:defRPr>
-            </a:lvl7pPr>
-            <a:lvl8pPr marL="3429000" indent="-228600" eaLnBrk="0" fontAlgn="base" hangingPunct="0">
-              <a:spcBef>
-                <a:spcPct val="0"/>
-              </a:spcBef>
-              <a:spcAft>
-                <a:spcPct val="0"/>
-              </a:spcAft>
-              <a:defRPr sz="2400">
-                <a:solidFill>
-                  <a:schemeClr val="tx1"/>
-                </a:solidFill>
-                <a:latin typeface="Arial" panose="020B0604020202020204" pitchFamily="34" charset="0"/>
-                <a:ea typeface="ＭＳ Ｐゴシック" panose="020B0600070205080204" pitchFamily="34" charset="-128"/>
-              </a:defRPr>
-            </a:lvl8pPr>
-            <a:lvl9pPr marL="3886200" indent="-228600" eaLnBrk="0" fontAlgn="base" hangingPunct="0">
-              <a:spcBef>
-                <a:spcPct val="0"/>
-              </a:spcBef>
-              <a:spcAft>
-                <a:spcPct val="0"/>
-              </a:spcAft>
-              <a:defRPr sz="2400">
-                <a:solidFill>
-                  <a:schemeClr val="tx1"/>
-                </a:solidFill>
-                <a:latin typeface="Arial" panose="020B0604020202020204" pitchFamily="34" charset="0"/>
-                <a:ea typeface="ＭＳ Ｐゴシック" panose="020B0600070205080204" pitchFamily="34" charset="-128"/>
-              </a:defRPr>
-            </a:lvl9pPr>
-          </a:lstStyle>
-          <a:p>
-            <a:pPr eaLnBrk="1" hangingPunct="1"/>
-            <a:r>
-              <a:rPr lang="en-US" altLang="en-US" sz="1600" dirty="0">
-                <a:solidFill>
-                  <a:srgbClr val="000000"/>
-                </a:solidFill>
-                <a:latin typeface="Arial Unicode MS" panose="020B0604020202020204" pitchFamily="34" charset="-128"/>
-                <a:ea typeface="Courier 10 Pitch"/>
-              </a:rPr>
-              <a:t>T </a:t>
-            </a:r>
-            <a:r>
-              <a:rPr lang="en-US" altLang="en-US" sz="1600" dirty="0" err="1">
-                <a:solidFill>
-                  <a:srgbClr val="000000"/>
-                </a:solidFill>
-                <a:latin typeface="Arial Unicode MS" panose="020B0604020202020204" pitchFamily="34" charset="-128"/>
-                <a:ea typeface="Courier 10 Pitch"/>
-              </a:rPr>
-              <a:t>kahanDet</a:t>
-            </a:r>
-            <a:r>
-              <a:rPr lang="en-US" altLang="en-US" sz="1600" dirty="0">
-                <a:solidFill>
-                  <a:srgbClr val="000000"/>
-                </a:solidFill>
-                <a:latin typeface="Arial Unicode MS" panose="020B0604020202020204" pitchFamily="34" charset="-128"/>
-                <a:ea typeface="Courier 10 Pitch"/>
-              </a:rPr>
-              <a:t>(T a, T b, T c, T d) { // a*d-b*c</a:t>
-            </a:r>
-          </a:p>
-          <a:p>
-            <a:pPr eaLnBrk="1" hangingPunct="1"/>
-            <a:r>
-              <a:rPr lang="en-US" altLang="en-US" sz="1600" dirty="0">
-                <a:solidFill>
-                  <a:srgbClr val="000000"/>
-                </a:solidFill>
-                <a:latin typeface="Arial Unicode MS" panose="020B0604020202020204" pitchFamily="34" charset="-128"/>
-                <a:ea typeface="Courier 10 Pitch"/>
-              </a:rPr>
-              <a:t>   using std::</a:t>
-            </a:r>
-            <a:r>
-              <a:rPr lang="en-US" altLang="en-US" sz="1600" dirty="0" err="1">
-                <a:solidFill>
-                  <a:srgbClr val="000000"/>
-                </a:solidFill>
-                <a:latin typeface="Arial Unicode MS" panose="020B0604020202020204" pitchFamily="34" charset="-128"/>
-                <a:ea typeface="Courier 10 Pitch"/>
-              </a:rPr>
-              <a:t>fma</a:t>
-            </a:r>
-            <a:r>
-              <a:rPr lang="en-US" altLang="en-US" sz="1600" dirty="0">
-                <a:solidFill>
-                  <a:srgbClr val="000000"/>
-                </a:solidFill>
-                <a:latin typeface="Arial Unicode MS" panose="020B0604020202020204" pitchFamily="34" charset="-128"/>
-                <a:ea typeface="Courier 10 Pitch"/>
-              </a:rPr>
-              <a:t>; </a:t>
-            </a:r>
-          </a:p>
-          <a:p>
-            <a:pPr eaLnBrk="1" hangingPunct="1"/>
-            <a:r>
-              <a:rPr lang="en-US" altLang="en-US" sz="1600" dirty="0">
-                <a:solidFill>
-                  <a:srgbClr val="000000"/>
-                </a:solidFill>
-                <a:latin typeface="Arial Unicode MS" panose="020B0604020202020204" pitchFamily="34" charset="-128"/>
-                <a:ea typeface="Courier 10 Pitch"/>
-              </a:rPr>
-              <a:t>   auto w = b*c; </a:t>
-            </a:r>
-          </a:p>
-          <a:p>
-            <a:pPr eaLnBrk="1" hangingPunct="1"/>
-            <a:r>
-              <a:rPr lang="en-US" altLang="en-US" sz="1600" dirty="0">
-                <a:solidFill>
-                  <a:srgbClr val="000000"/>
-                </a:solidFill>
-                <a:latin typeface="Arial Unicode MS" panose="020B0604020202020204" pitchFamily="34" charset="-128"/>
-                <a:ea typeface="Courier 10 Pitch"/>
-              </a:rPr>
-              <a:t>   auto e = </a:t>
-            </a:r>
-            <a:r>
-              <a:rPr lang="en-US" altLang="en-US" sz="1600" dirty="0" err="1">
-                <a:solidFill>
-                  <a:srgbClr val="000000"/>
-                </a:solidFill>
-                <a:latin typeface="Arial Unicode MS" panose="020B0604020202020204" pitchFamily="34" charset="-128"/>
-                <a:ea typeface="Courier 10 Pitch"/>
-              </a:rPr>
-              <a:t>fma</a:t>
-            </a:r>
-            <a:r>
-              <a:rPr lang="en-US" altLang="en-US" sz="1600" dirty="0">
-                <a:solidFill>
-                  <a:srgbClr val="000000"/>
-                </a:solidFill>
-                <a:latin typeface="Arial Unicode MS" panose="020B0604020202020204" pitchFamily="34" charset="-128"/>
-                <a:ea typeface="Courier 10 Pitch"/>
-              </a:rPr>
-              <a:t>(-b, c, w); // error on w (w,-e) = </a:t>
-            </a:r>
-            <a:r>
-              <a:rPr lang="en-US" altLang="en-US" sz="1600" dirty="0" err="1">
-                <a:solidFill>
-                  <a:srgbClr val="000000"/>
-                </a:solidFill>
-                <a:latin typeface="Arial Unicode MS" panose="020B0604020202020204" pitchFamily="34" charset="-128"/>
-                <a:ea typeface="Courier 10 Pitch"/>
-              </a:rPr>
-              <a:t>augmentedMultiply</a:t>
-            </a:r>
-            <a:r>
-              <a:rPr lang="en-US" altLang="en-US" sz="1600" dirty="0">
-                <a:solidFill>
-                  <a:srgbClr val="000000"/>
-                </a:solidFill>
-                <a:latin typeface="Arial Unicode MS" panose="020B0604020202020204" pitchFamily="34" charset="-128"/>
-                <a:ea typeface="Courier 10 Pitch"/>
-              </a:rPr>
-              <a:t>(</a:t>
-            </a:r>
-            <a:r>
-              <a:rPr lang="en-US" altLang="en-US" sz="1600" dirty="0" err="1">
-                <a:solidFill>
-                  <a:srgbClr val="000000"/>
-                </a:solidFill>
-                <a:latin typeface="Arial Unicode MS" panose="020B0604020202020204" pitchFamily="34" charset="-128"/>
-                <a:ea typeface="Courier 10 Pitch"/>
-              </a:rPr>
-              <a:t>b,c</a:t>
-            </a:r>
-            <a:r>
-              <a:rPr lang="en-US" altLang="en-US" sz="1600" dirty="0">
-                <a:solidFill>
-                  <a:srgbClr val="000000"/>
-                </a:solidFill>
-                <a:latin typeface="Arial Unicode MS" panose="020B0604020202020204" pitchFamily="34" charset="-128"/>
-                <a:ea typeface="Courier 10 Pitch"/>
-              </a:rPr>
-              <a:t>)</a:t>
-            </a:r>
-          </a:p>
-          <a:p>
-            <a:pPr eaLnBrk="1" hangingPunct="1"/>
-            <a:r>
-              <a:rPr lang="en-US" altLang="en-US" sz="1600" dirty="0">
-                <a:solidFill>
-                  <a:srgbClr val="000000"/>
-                </a:solidFill>
-                <a:latin typeface="Arial Unicode MS" panose="020B0604020202020204" pitchFamily="34" charset="-128"/>
-                <a:ea typeface="Courier 10 Pitch"/>
-              </a:rPr>
-              <a:t>   auto f = </a:t>
-            </a:r>
-            <a:r>
-              <a:rPr lang="en-US" altLang="en-US" sz="1600" dirty="0" err="1">
-                <a:solidFill>
-                  <a:srgbClr val="000000"/>
-                </a:solidFill>
-                <a:latin typeface="Arial Unicode MS" panose="020B0604020202020204" pitchFamily="34" charset="-128"/>
-                <a:ea typeface="Courier 10 Pitch"/>
-              </a:rPr>
-              <a:t>fma</a:t>
-            </a:r>
-            <a:r>
-              <a:rPr lang="en-US" altLang="en-US" sz="1600" dirty="0">
-                <a:solidFill>
-                  <a:srgbClr val="000000"/>
-                </a:solidFill>
-                <a:latin typeface="Arial Unicode MS" panose="020B0604020202020204" pitchFamily="34" charset="-128"/>
-                <a:ea typeface="Courier 10 Pitch"/>
-              </a:rPr>
-              <a:t>(a, d, -w); </a:t>
-            </a:r>
-          </a:p>
-          <a:p>
-            <a:pPr eaLnBrk="1" hangingPunct="1"/>
-            <a:r>
-              <a:rPr lang="en-US" altLang="en-US" sz="1600" dirty="0">
-                <a:solidFill>
-                  <a:srgbClr val="000000"/>
-                </a:solidFill>
-                <a:latin typeface="Arial Unicode MS" panose="020B0604020202020204" pitchFamily="34" charset="-128"/>
-                <a:ea typeface="Courier 10 Pitch"/>
-              </a:rPr>
-              <a:t>   return (</a:t>
-            </a:r>
-            <a:r>
-              <a:rPr lang="en-US" altLang="en-US" sz="1600" dirty="0" err="1">
-                <a:solidFill>
-                  <a:srgbClr val="000000"/>
-                </a:solidFill>
-                <a:latin typeface="Arial Unicode MS" panose="020B0604020202020204" pitchFamily="34" charset="-128"/>
-                <a:ea typeface="Courier 10 Pitch"/>
-              </a:rPr>
-              <a:t>f+e</a:t>
-            </a:r>
-            <a:r>
-              <a:rPr lang="en-US" altLang="en-US" sz="1600" dirty="0">
-                <a:solidFill>
-                  <a:srgbClr val="000000"/>
-                </a:solidFill>
-                <a:latin typeface="Arial Unicode MS" panose="020B0604020202020204" pitchFamily="34" charset="-128"/>
-                <a:ea typeface="Courier 10 Pitch"/>
-              </a:rPr>
-              <a:t>); </a:t>
-            </a:r>
-          </a:p>
-          <a:p>
-            <a:pPr eaLnBrk="1" hangingPunct="1"/>
-            <a:r>
-              <a:rPr lang="en-US" altLang="en-US" sz="1600" dirty="0">
-                <a:solidFill>
-                  <a:srgbClr val="000000"/>
-                </a:solidFill>
-                <a:latin typeface="Arial Unicode MS" panose="020B0604020202020204" pitchFamily="34" charset="-128"/>
-                <a:ea typeface="Courier 10 Pitch"/>
-              </a:rPr>
-              <a:t>}</a:t>
-            </a:r>
-            <a:endParaRPr lang="en-US" altLang="en-US" sz="3600" dirty="0"/>
-          </a:p>
-        </p:txBody>
-      </p:sp>
-    </p:spTree>
-    <p:extLst>
-      <p:ext uri="{BB962C8B-B14F-4D97-AF65-F5344CB8AC3E}">
-        <p14:creationId xmlns:p14="http://schemas.microsoft.com/office/powerpoint/2010/main" val="3367458698"/>
-      </p:ext>
-    </p:extLst>
-  </p:cSld>
-  <p:clrMapOvr>
-    <a:masterClrMapping/>
-  </p:clrMapOvr>
-</p:sld>
-</file>
-
-<file path=ppt/slides/slide25.xml><?xml version="1.0" encoding="utf-8"?>
 <p:sld xmlns:a="http://schemas.openxmlformats.org/drawingml/2006/main" xmlns:r="http://schemas.openxmlformats.org/officeDocument/2006/relationships" xmlns:p="http://schemas.openxmlformats.org/presentationml/2006/main">
   <p:cSld>
     <p:spTree>
@@ -9405,7 +7108,7 @@
                 <a:latin typeface="Garamond" charset="0"/>
               </a:rPr>
               <a:pPr eaLnBrk="1" hangingPunct="1"/>
-              <a:t>25</a:t>
+              <a:t>17</a:t>
             </a:fld>
             <a:endParaRPr lang="it-IT" altLang="x-none" sz="1200">
               <a:latin typeface="Garamond" charset="0"/>
@@ -10088,6 +7791,3367 @@
         </p:txBody>
       </p:sp>
     </p:spTree>
+  </p:cSld>
+  <p:clrMapOvr>
+    <a:masterClrMapping/>
+  </p:clrMapOvr>
+</p:sld>
+</file>
+
+<file path=ppt/slides/slide18.xml><?xml version="1.0" encoding="utf-8"?>
+<p:sld xmlns:a="http://schemas.openxmlformats.org/drawingml/2006/main" xmlns:r="http://schemas.openxmlformats.org/officeDocument/2006/relationships" xmlns:p="http://schemas.openxmlformats.org/presentationml/2006/main">
+  <p:cSld>
+    <p:spTree>
+      <p:nvGrpSpPr>
+        <p:cNvPr id="1" name=""/>
+        <p:cNvGrpSpPr/>
+        <p:nvPr/>
+      </p:nvGrpSpPr>
+      <p:grpSpPr>
+        <a:xfrm>
+          <a:off x="0" y="0"/>
+          <a:ext cx="0" cy="0"/>
+          <a:chOff x="0" y="0"/>
+          <a:chExt cx="0" cy="0"/>
+        </a:xfrm>
+      </p:grpSpPr>
+      <p:sp>
+        <p:nvSpPr>
+          <p:cNvPr id="2" name="Title 1">
+            <a:extLst>
+              <a:ext uri="{FF2B5EF4-FFF2-40B4-BE49-F238E27FC236}">
+                <a16:creationId xmlns:a16="http://schemas.microsoft.com/office/drawing/2014/main" id="{75455E44-1145-B3B5-99CB-164A17DB7EF9}"/>
+              </a:ext>
+            </a:extLst>
+          </p:cNvPr>
+          <p:cNvSpPr>
+            <a:spLocks noGrp="1"/>
+          </p:cNvSpPr>
+          <p:nvPr>
+            <p:ph type="title"/>
+          </p:nvPr>
+        </p:nvSpPr>
+        <p:spPr/>
+        <p:txBody>
+          <a:bodyPr/>
+          <a:lstStyle/>
+          <a:p>
+            <a:r>
+              <a:rPr lang="en-US"/>
+              <a:t>A first theorem</a:t>
+            </a:r>
+          </a:p>
+        </p:txBody>
+      </p:sp>
+      <p:sp>
+        <p:nvSpPr>
+          <p:cNvPr id="3" name="Content Placeholder 2">
+            <a:extLst>
+              <a:ext uri="{FF2B5EF4-FFF2-40B4-BE49-F238E27FC236}">
+                <a16:creationId xmlns:a16="http://schemas.microsoft.com/office/drawing/2014/main" id="{C30A1BBA-EAF2-6BF3-A6DF-55D23C2E2491}"/>
+              </a:ext>
+            </a:extLst>
+          </p:cNvPr>
+          <p:cNvSpPr>
+            <a:spLocks noGrp="1"/>
+          </p:cNvSpPr>
+          <p:nvPr>
+            <p:ph idx="1"/>
+          </p:nvPr>
+        </p:nvSpPr>
+        <p:spPr/>
+        <p:txBody>
+          <a:bodyPr/>
+          <a:lstStyle/>
+          <a:p>
+            <a:r>
+              <a:rPr lang="en-US"/>
+              <a:t>The difference of two number of the same </a:t>
+            </a:r>
+            <a:r>
+              <a:rPr lang="en-US" err="1"/>
+              <a:t>binade</a:t>
+            </a:r>
+            <a:r>
+              <a:rPr lang="en-US"/>
+              <a:t> is precise</a:t>
+            </a:r>
+          </a:p>
+          <a:p>
+            <a:pPr lvl="1"/>
+            <a:r>
+              <a:rPr lang="en-US"/>
+              <a:t>99-11 = 88, 42-37 = 5</a:t>
+            </a:r>
+          </a:p>
+          <a:p>
+            <a:pPr lvl="1"/>
+            <a:r>
+              <a:rPr lang="en-US"/>
+              <a:t>0x1.921fb6p+1 - 0x1.001e72p+1 = 0x1.240288p+0</a:t>
+            </a:r>
+          </a:p>
+          <a:p>
+            <a:endParaRPr lang="en-US"/>
+          </a:p>
+          <a:p>
+            <a:r>
+              <a:rPr lang="en-US"/>
+              <a:t>If 2b&gt;a&gt;b/2&gt;0 then </a:t>
+            </a:r>
+            <a:r>
+              <a:rPr lang="en-US" err="1"/>
+              <a:t>a⊖b</a:t>
+            </a:r>
+            <a:r>
+              <a:rPr lang="en-US"/>
+              <a:t> = a-b (is precise)</a:t>
+            </a:r>
+            <a:br>
+              <a:rPr lang="en-US"/>
+            </a:br>
+            <a:r>
+              <a:rPr lang="en-US"/>
+              <a:t>(</a:t>
+            </a:r>
+            <a:r>
+              <a:rPr lang="en-US">
+                <a:hlinkClick r:id="rId2"/>
+              </a:rPr>
+              <a:t>https://en.wikipedia.org/wiki/Sterbenz_lemma</a:t>
+            </a:r>
+            <a:r>
+              <a:rPr lang="en-US"/>
+              <a:t>)</a:t>
+            </a:r>
+          </a:p>
+          <a:p>
+            <a:pPr lvl="1"/>
+            <a:r>
+              <a:rPr lang="en-US"/>
+              <a:t>12-7.4 = 4.6, 18-7.4= 10.6 =&gt; 18⊖7.4 = 11</a:t>
+            </a:r>
+          </a:p>
+          <a:p>
+            <a:pPr lvl="1"/>
+            <a:r>
+              <a:rPr lang="en-US"/>
+              <a:t>0x1.333334p-2 ⊖ 0x1.99999ap-3 = 0x1.99999ap-4 (precise)</a:t>
+            </a:r>
+          </a:p>
+          <a:p>
+            <a:pPr lvl="1"/>
+            <a:r>
+              <a:rPr lang="en-US"/>
+              <a:t>0x1.333334p-2 ⊖ 0x1.99999ap-4 = 0x1.99999cp-3 (not precise)</a:t>
+            </a:r>
+          </a:p>
+        </p:txBody>
+      </p:sp>
+    </p:spTree>
+    <p:extLst>
+      <p:ext uri="{BB962C8B-B14F-4D97-AF65-F5344CB8AC3E}">
+        <p14:creationId xmlns:p14="http://schemas.microsoft.com/office/powerpoint/2010/main" val="4058227503"/>
+      </p:ext>
+    </p:extLst>
+  </p:cSld>
+  <p:clrMapOvr>
+    <a:masterClrMapping/>
+  </p:clrMapOvr>
+</p:sld>
+</file>
+
+<file path=ppt/slides/slide19.xml><?xml version="1.0" encoding="utf-8"?>
+<p:sld xmlns:a="http://schemas.openxmlformats.org/drawingml/2006/main" xmlns:r="http://schemas.openxmlformats.org/officeDocument/2006/relationships" xmlns:p="http://schemas.openxmlformats.org/presentationml/2006/main">
+  <p:cSld>
+    <p:spTree>
+      <p:nvGrpSpPr>
+        <p:cNvPr id="1" name=""/>
+        <p:cNvGrpSpPr/>
+        <p:nvPr/>
+      </p:nvGrpSpPr>
+      <p:grpSpPr>
+        <a:xfrm>
+          <a:off x="0" y="0"/>
+          <a:ext cx="0" cy="0"/>
+          <a:chOff x="0" y="0"/>
+          <a:chExt cx="0" cy="0"/>
+        </a:xfrm>
+      </p:grpSpPr>
+      <p:sp>
+        <p:nvSpPr>
+          <p:cNvPr id="2" name="Title 1">
+            <a:extLst>
+              <a:ext uri="{FF2B5EF4-FFF2-40B4-BE49-F238E27FC236}">
+                <a16:creationId xmlns:a16="http://schemas.microsoft.com/office/drawing/2014/main" id="{F07EE935-6904-8630-3A5E-C062BD088ED9}"/>
+              </a:ext>
+            </a:extLst>
+          </p:cNvPr>
+          <p:cNvSpPr>
+            <a:spLocks noGrp="1"/>
+          </p:cNvSpPr>
+          <p:nvPr>
+            <p:ph type="title"/>
+          </p:nvPr>
+        </p:nvSpPr>
+        <p:spPr/>
+        <p:txBody>
+          <a:bodyPr/>
+          <a:lstStyle/>
+          <a:p>
+            <a:r>
+              <a:rPr lang="en-US"/>
+              <a:t>Augmented Arithmetic</a:t>
+            </a:r>
+          </a:p>
+        </p:txBody>
+      </p:sp>
+      <p:sp>
+        <p:nvSpPr>
+          <p:cNvPr id="3" name="Content Placeholder 2">
+            <a:extLst>
+              <a:ext uri="{FF2B5EF4-FFF2-40B4-BE49-F238E27FC236}">
+                <a16:creationId xmlns:a16="http://schemas.microsoft.com/office/drawing/2014/main" id="{CEA41BE4-A79E-81D3-30F4-1363BA165B97}"/>
+              </a:ext>
+            </a:extLst>
+          </p:cNvPr>
+          <p:cNvSpPr>
+            <a:spLocks noGrp="1"/>
+          </p:cNvSpPr>
+          <p:nvPr>
+            <p:ph idx="1"/>
+          </p:nvPr>
+        </p:nvSpPr>
+        <p:spPr>
+          <a:xfrm>
+            <a:off x="726989" y="1690688"/>
+            <a:ext cx="10515600" cy="4351338"/>
+          </a:xfrm>
+        </p:spPr>
+        <p:txBody>
+          <a:bodyPr>
+            <a:normAutofit fontScale="92500" lnSpcReduction="20000"/>
+          </a:bodyPr>
+          <a:lstStyle/>
+          <a:p>
+            <a:r>
+              <a:rPr lang="en-US"/>
+              <a:t>If a&gt;b&gt;0 : </a:t>
+            </a:r>
+            <a:r>
+              <a:rPr lang="en-US" err="1"/>
+              <a:t>a+b</a:t>
+            </a:r>
+            <a:r>
+              <a:rPr lang="en-US"/>
+              <a:t> &lt; 2a</a:t>
+            </a:r>
+          </a:p>
+          <a:p>
+            <a:endParaRPr lang="en-US"/>
+          </a:p>
+          <a:p>
+            <a:r>
+              <a:rPr lang="en-US"/>
+              <a:t>c = </a:t>
+            </a:r>
+            <a:r>
+              <a:rPr lang="en-US" err="1"/>
+              <a:t>a⊕b</a:t>
+            </a:r>
+            <a:endParaRPr lang="en-US"/>
+          </a:p>
+          <a:p>
+            <a:r>
+              <a:rPr lang="en-US"/>
+              <a:t>t = </a:t>
+            </a:r>
+            <a:r>
+              <a:rPr lang="en-US" err="1"/>
+              <a:t>c⊖a</a:t>
+            </a:r>
+            <a:r>
+              <a:rPr lang="en-US"/>
+              <a:t>  is exact</a:t>
+            </a:r>
+          </a:p>
+          <a:p>
+            <a:r>
+              <a:rPr lang="en-US"/>
+              <a:t>e = </a:t>
+            </a:r>
+            <a:r>
+              <a:rPr lang="en-US" err="1"/>
+              <a:t>b⊖t</a:t>
+            </a:r>
+            <a:r>
+              <a:rPr lang="en-US"/>
+              <a:t>  is exact</a:t>
+            </a:r>
+          </a:p>
+          <a:p>
+            <a:r>
+              <a:rPr lang="en-US" err="1"/>
+              <a:t>a+b</a:t>
+            </a:r>
+            <a:r>
+              <a:rPr lang="en-US"/>
+              <a:t> = </a:t>
+            </a:r>
+            <a:r>
+              <a:rPr lang="en-US" err="1"/>
+              <a:t>c+e</a:t>
+            </a:r>
+            <a:r>
+              <a:rPr lang="en-US"/>
+              <a:t> </a:t>
+            </a:r>
+          </a:p>
+          <a:p>
+            <a:pPr lvl="1"/>
+            <a:r>
+              <a:rPr lang="en-US"/>
+              <a:t>e is the error of </a:t>
+            </a:r>
+            <a:r>
+              <a:rPr lang="en-US" err="1"/>
+              <a:t>a⊕b</a:t>
+            </a:r>
+            <a:endParaRPr lang="en-US"/>
+          </a:p>
+          <a:p>
+            <a:endParaRPr lang="en-US"/>
+          </a:p>
+          <a:p>
+            <a:r>
+              <a:rPr lang="en-US"/>
+              <a:t>This algorithm is known as “</a:t>
+            </a:r>
+            <a:r>
+              <a:rPr lang="en-US" err="1"/>
+              <a:t>fastTwoSum</a:t>
+            </a:r>
+            <a:r>
+              <a:rPr lang="en-US"/>
+              <a:t>” and (with small modifications) proposed as </a:t>
+            </a:r>
+            <a:r>
+              <a:rPr lang="en-US" err="1"/>
+              <a:t>AugmentedSum</a:t>
+            </a:r>
+            <a:r>
+              <a:rPr lang="en-US"/>
+              <a:t> in next IEEE754 revision </a:t>
+            </a:r>
+          </a:p>
+          <a:p>
+            <a:r>
+              <a:rPr lang="en-US"/>
+              <a:t>A similar algorithm exists for multiplication as well</a:t>
+            </a:r>
+          </a:p>
+          <a:p>
+            <a:endParaRPr lang="en-US"/>
+          </a:p>
+          <a:p>
+            <a:endParaRPr lang="en-US"/>
+          </a:p>
+        </p:txBody>
+      </p:sp>
+    </p:spTree>
+    <p:extLst>
+      <p:ext uri="{BB962C8B-B14F-4D97-AF65-F5344CB8AC3E}">
+        <p14:creationId xmlns:p14="http://schemas.microsoft.com/office/powerpoint/2010/main" val="2697797781"/>
+      </p:ext>
+    </p:extLst>
+  </p:cSld>
+  <p:clrMapOvr>
+    <a:masterClrMapping/>
+  </p:clrMapOvr>
+</p:sld>
+</file>
+
+<file path=ppt/slides/slide2.xml><?xml version="1.0" encoding="utf-8"?>
+<p:sld xmlns:a="http://schemas.openxmlformats.org/drawingml/2006/main" xmlns:r="http://schemas.openxmlformats.org/officeDocument/2006/relationships" xmlns:p="http://schemas.openxmlformats.org/presentationml/2006/main">
+  <p:cSld>
+    <p:spTree>
+      <p:nvGrpSpPr>
+        <p:cNvPr id="1" name=""/>
+        <p:cNvGrpSpPr/>
+        <p:nvPr/>
+      </p:nvGrpSpPr>
+      <p:grpSpPr>
+        <a:xfrm>
+          <a:off x="0" y="0"/>
+          <a:ext cx="0" cy="0"/>
+          <a:chOff x="0" y="0"/>
+          <a:chExt cx="0" cy="0"/>
+        </a:xfrm>
+      </p:grpSpPr>
+      <p:sp>
+        <p:nvSpPr>
+          <p:cNvPr id="2" name="Title 1">
+            <a:extLst>
+              <a:ext uri="{FF2B5EF4-FFF2-40B4-BE49-F238E27FC236}">
+                <a16:creationId xmlns:a16="http://schemas.microsoft.com/office/drawing/2014/main" id="{217268F8-85E7-DA38-B02A-4ADDB868CDCA}"/>
+              </a:ext>
+            </a:extLst>
+          </p:cNvPr>
+          <p:cNvSpPr>
+            <a:spLocks noGrp="1"/>
+          </p:cNvSpPr>
+          <p:nvPr>
+            <p:ph type="title"/>
+          </p:nvPr>
+        </p:nvSpPr>
+        <p:spPr/>
+        <p:txBody>
+          <a:bodyPr>
+            <a:normAutofit/>
+          </a:bodyPr>
+          <a:lstStyle/>
+          <a:p>
+            <a:r>
+              <a:rPr lang="en-US" dirty="0"/>
+              <a:t>What’s a Floating Point?</a:t>
+            </a:r>
+            <a:br>
+              <a:rPr lang="en-US" dirty="0"/>
+            </a:br>
+            <a:r>
+              <a:rPr lang="en-US" sz="1600" dirty="0">
+                <a:hlinkClick r:id="rId2"/>
+              </a:rPr>
+              <a:t>https://en.wikipedia.org/wiki/Floating-point_arithmetic</a:t>
+            </a:r>
+            <a:endParaRPr lang="en-US" dirty="0"/>
+          </a:p>
+        </p:txBody>
+      </p:sp>
+      <p:sp>
+        <p:nvSpPr>
+          <p:cNvPr id="3" name="Content Placeholder 2">
+            <a:extLst>
+              <a:ext uri="{FF2B5EF4-FFF2-40B4-BE49-F238E27FC236}">
+                <a16:creationId xmlns:a16="http://schemas.microsoft.com/office/drawing/2014/main" id="{72FFB85D-0262-522C-7650-5A4514746147}"/>
+              </a:ext>
+            </a:extLst>
+          </p:cNvPr>
+          <p:cNvSpPr>
+            <a:spLocks noGrp="1"/>
+          </p:cNvSpPr>
+          <p:nvPr>
+            <p:ph idx="1"/>
+          </p:nvPr>
+        </p:nvSpPr>
+        <p:spPr/>
+        <p:txBody>
+          <a:bodyPr/>
+          <a:lstStyle/>
+          <a:p>
+            <a:r>
+              <a:rPr lang="en-US" dirty="0"/>
+              <a:t>Science is based on Measurements</a:t>
+            </a:r>
+          </a:p>
+          <a:p>
+            <a:r>
+              <a:rPr lang="en-US" dirty="0"/>
+              <a:t>The result of a Measurement is a Rational Number</a:t>
+            </a:r>
+          </a:p>
+          <a:p>
+            <a:pPr lvl="1"/>
+            <a:r>
+              <a:rPr lang="en-US" dirty="0"/>
+              <a:t>M</a:t>
+            </a:r>
+            <a:r>
+              <a:rPr lang="en-US" baseline="-25000" dirty="0"/>
+              <a:t>H</a:t>
+            </a:r>
+            <a:r>
+              <a:rPr lang="en-US" dirty="0"/>
+              <a:t> = 125.04 ± 0.12 GeV     =    2.2290ᐧ10</a:t>
+            </a:r>
+            <a:r>
+              <a:rPr lang="en-US" baseline="30000" dirty="0"/>
+              <a:t>-25</a:t>
+            </a:r>
+            <a:r>
+              <a:rPr lang="en-US" dirty="0"/>
+              <a:t> ± 2.1ᐧ10</a:t>
+            </a:r>
+            <a:r>
+              <a:rPr lang="en-US" baseline="30000" dirty="0"/>
+              <a:t>-28</a:t>
+            </a:r>
+            <a:r>
+              <a:rPr lang="en-US" dirty="0"/>
+              <a:t> Kg</a:t>
+            </a:r>
+          </a:p>
+          <a:p>
+            <a:r>
+              <a:rPr lang="en-US" dirty="0"/>
+              <a:t>“Floating Point” is a way to represent Rational Numbers by a fixed number of digits (precision) multiplied by a “base” with an exponent</a:t>
+            </a:r>
+          </a:p>
+          <a:p>
+            <a:pPr lvl="1"/>
+            <a:r>
+              <a:rPr lang="en-US" dirty="0"/>
+              <a:t>A form of “Scientific Notation”</a:t>
+            </a:r>
+          </a:p>
+          <a:p>
+            <a:pPr marL="0" indent="0">
+              <a:buNone/>
+            </a:pPr>
+            <a:endParaRPr lang="en-US" dirty="0"/>
+          </a:p>
+          <a:p>
+            <a:pPr marL="0" indent="0">
+              <a:buNone/>
+            </a:pPr>
+            <a:r>
+              <a:rPr lang="en-US" dirty="0"/>
+              <a:t>31ᐧ10</a:t>
+            </a:r>
+            <a:r>
+              <a:rPr lang="en-US" baseline="30000" dirty="0"/>
+              <a:t>-1</a:t>
+            </a:r>
+            <a:r>
+              <a:rPr lang="en-US" dirty="0"/>
+              <a:t> is a FP in base 10 with “precision” 2   (printed in decimal)</a:t>
+            </a:r>
+          </a:p>
+          <a:p>
+            <a:pPr marL="0" indent="0">
+              <a:buNone/>
+            </a:pPr>
+            <a:r>
+              <a:rPr lang="cs-CZ" altLang="x-none" dirty="0"/>
+              <a:t>1.921fb6</a:t>
+            </a:r>
+            <a:r>
+              <a:rPr lang="en-US" dirty="0" err="1"/>
+              <a:t>ᐧ</a:t>
+            </a:r>
+            <a:r>
+              <a:rPr lang="cs-CZ" altLang="x-none" dirty="0"/>
+              <a:t>2</a:t>
+            </a:r>
+            <a:r>
+              <a:rPr lang="cs-CZ" altLang="x-none" baseline="30000" dirty="0"/>
+              <a:t>+1 </a:t>
+            </a:r>
+            <a:r>
+              <a:rPr lang="en-US" dirty="0"/>
+              <a:t>is a FP in base 2 with precision 24   (printed in </a:t>
+            </a:r>
+            <a:r>
+              <a:rPr lang="en-US" dirty="0" err="1"/>
+              <a:t>exadecimal</a:t>
+            </a:r>
+            <a:r>
+              <a:rPr lang="en-US" dirty="0"/>
+              <a:t>)</a:t>
+            </a:r>
+            <a:endParaRPr lang="en-US" baseline="30000" dirty="0"/>
+          </a:p>
+        </p:txBody>
+      </p:sp>
+    </p:spTree>
+    <p:extLst>
+      <p:ext uri="{BB962C8B-B14F-4D97-AF65-F5344CB8AC3E}">
+        <p14:creationId xmlns:p14="http://schemas.microsoft.com/office/powerpoint/2010/main" val="3635151351"/>
+      </p:ext>
+    </p:extLst>
+  </p:cSld>
+  <p:clrMapOvr>
+    <a:masterClrMapping/>
+  </p:clrMapOvr>
+</p:sld>
+</file>
+
+<file path=ppt/slides/slide20.xml><?xml version="1.0" encoding="utf-8"?>
+<p:sld xmlns:a="http://schemas.openxmlformats.org/drawingml/2006/main" xmlns:r="http://schemas.openxmlformats.org/officeDocument/2006/relationships" xmlns:p="http://schemas.openxmlformats.org/presentationml/2006/main">
+  <p:cSld>
+    <p:spTree>
+      <p:nvGrpSpPr>
+        <p:cNvPr id="1" name=""/>
+        <p:cNvGrpSpPr/>
+        <p:nvPr/>
+      </p:nvGrpSpPr>
+      <p:grpSpPr>
+        <a:xfrm>
+          <a:off x="0" y="0"/>
+          <a:ext cx="0" cy="0"/>
+          <a:chOff x="0" y="0"/>
+          <a:chExt cx="0" cy="0"/>
+        </a:xfrm>
+      </p:grpSpPr>
+      <p:sp>
+        <p:nvSpPr>
+          <p:cNvPr id="2" name="Title 1">
+            <a:extLst>
+              <a:ext uri="{FF2B5EF4-FFF2-40B4-BE49-F238E27FC236}">
+                <a16:creationId xmlns:a16="http://schemas.microsoft.com/office/drawing/2014/main" id="{C742FB71-B737-C32C-CF86-40936586016E}"/>
+              </a:ext>
+            </a:extLst>
+          </p:cNvPr>
+          <p:cNvSpPr>
+            <a:spLocks noGrp="1"/>
+          </p:cNvSpPr>
+          <p:nvPr>
+            <p:ph type="title"/>
+          </p:nvPr>
+        </p:nvSpPr>
+        <p:spPr/>
+        <p:txBody>
+          <a:bodyPr/>
+          <a:lstStyle/>
+          <a:p>
+            <a:r>
+              <a:rPr lang="en-US"/>
+              <a:t>Example of augmented sum</a:t>
+            </a:r>
+          </a:p>
+        </p:txBody>
+      </p:sp>
+      <p:sp>
+        <p:nvSpPr>
+          <p:cNvPr id="3" name="Content Placeholder 2">
+            <a:extLst>
+              <a:ext uri="{FF2B5EF4-FFF2-40B4-BE49-F238E27FC236}">
+                <a16:creationId xmlns:a16="http://schemas.microsoft.com/office/drawing/2014/main" id="{F8B01E0E-6FCF-CEA0-F220-94CD44A4F94C}"/>
+              </a:ext>
+            </a:extLst>
+          </p:cNvPr>
+          <p:cNvSpPr>
+            <a:spLocks noGrp="1"/>
+          </p:cNvSpPr>
+          <p:nvPr>
+            <p:ph idx="1"/>
+          </p:nvPr>
+        </p:nvSpPr>
+        <p:spPr>
+          <a:xfrm>
+            <a:off x="838200" y="1825625"/>
+            <a:ext cx="10515600" cy="4859380"/>
+          </a:xfrm>
+        </p:spPr>
+        <p:txBody>
+          <a:bodyPr>
+            <a:normAutofit lnSpcReduction="10000"/>
+          </a:bodyPr>
+          <a:lstStyle/>
+          <a:p>
+            <a:r>
+              <a:rPr lang="en-US"/>
+              <a:t>42⊕3.7 = 46</a:t>
+            </a:r>
+          </a:p>
+          <a:p>
+            <a:r>
+              <a:rPr lang="en-US"/>
+              <a:t>46⊖42 = 4</a:t>
+            </a:r>
+          </a:p>
+          <a:p>
+            <a:r>
+              <a:rPr lang="en-US"/>
+              <a:t>3.7⊖4 = -0.3</a:t>
+            </a:r>
+          </a:p>
+          <a:p>
+            <a:r>
+              <a:rPr lang="en-US"/>
+              <a:t>46-0.3 = 42+3.7</a:t>
+            </a:r>
+          </a:p>
+          <a:p>
+            <a:r>
+              <a:rPr lang="en-US"/>
+              <a:t>In short: </a:t>
+            </a:r>
+            <a:r>
+              <a:rPr lang="en-US" err="1"/>
+              <a:t>asum</a:t>
+            </a:r>
+            <a:r>
+              <a:rPr lang="en-US"/>
+              <a:t>(42,3.7) = 46,-0.3</a:t>
+            </a:r>
+          </a:p>
+          <a:p>
+            <a:endParaRPr lang="en-US"/>
+          </a:p>
+          <a:p>
+            <a:r>
+              <a:rPr lang="en-US"/>
+              <a:t>42⊕3.3⊕3.4 = 48 while 42+3.3+3.4 = 48.7</a:t>
+            </a:r>
+          </a:p>
+          <a:p>
+            <a:r>
+              <a:rPr lang="en-US" err="1"/>
+              <a:t>asum</a:t>
+            </a:r>
+            <a:r>
+              <a:rPr lang="en-US"/>
+              <a:t>(42,3.3) = 45,0.3</a:t>
+            </a:r>
+          </a:p>
+          <a:p>
+            <a:r>
+              <a:rPr lang="en-US" err="1"/>
+              <a:t>asum</a:t>
+            </a:r>
+            <a:r>
+              <a:rPr lang="en-US"/>
+              <a:t>(45 ,3.4) = 48,0.4</a:t>
+            </a:r>
+          </a:p>
+          <a:p>
+            <a:r>
+              <a:rPr lang="en-US" err="1"/>
+              <a:t>asum</a:t>
+            </a:r>
+            <a:r>
+              <a:rPr lang="en-US"/>
+              <a:t>(48,0.3+0.4) = 49, -0.3 </a:t>
+            </a:r>
+          </a:p>
+        </p:txBody>
+      </p:sp>
+    </p:spTree>
+    <p:extLst>
+      <p:ext uri="{BB962C8B-B14F-4D97-AF65-F5344CB8AC3E}">
+        <p14:creationId xmlns:p14="http://schemas.microsoft.com/office/powerpoint/2010/main" val="3182472380"/>
+      </p:ext>
+    </p:extLst>
+  </p:cSld>
+  <p:clrMapOvr>
+    <a:masterClrMapping/>
+  </p:clrMapOvr>
+</p:sld>
+</file>
+
+<file path=ppt/slides/slide21.xml><?xml version="1.0" encoding="utf-8"?>
+<p:sld xmlns:a="http://schemas.openxmlformats.org/drawingml/2006/main" xmlns:r="http://schemas.openxmlformats.org/officeDocument/2006/relationships" xmlns:p="http://schemas.openxmlformats.org/presentationml/2006/main">
+  <p:cSld>
+    <p:spTree>
+      <p:nvGrpSpPr>
+        <p:cNvPr id="1" name=""/>
+        <p:cNvGrpSpPr/>
+        <p:nvPr/>
+      </p:nvGrpSpPr>
+      <p:grpSpPr>
+        <a:xfrm>
+          <a:off x="0" y="0"/>
+          <a:ext cx="0" cy="0"/>
+          <a:chOff x="0" y="0"/>
+          <a:chExt cx="0" cy="0"/>
+        </a:xfrm>
+      </p:grpSpPr>
+      <p:sp>
+        <p:nvSpPr>
+          <p:cNvPr id="2" name="Title 1">
+            <a:extLst>
+              <a:ext uri="{FF2B5EF4-FFF2-40B4-BE49-F238E27FC236}">
+                <a16:creationId xmlns:a16="http://schemas.microsoft.com/office/drawing/2014/main" id="{0A4D461D-F652-AAC2-4FC1-FDE365440E42}"/>
+              </a:ext>
+            </a:extLst>
+          </p:cNvPr>
+          <p:cNvSpPr>
+            <a:spLocks noGrp="1"/>
+          </p:cNvSpPr>
+          <p:nvPr>
+            <p:ph type="title"/>
+          </p:nvPr>
+        </p:nvSpPr>
+        <p:spPr/>
+        <p:txBody>
+          <a:bodyPr/>
+          <a:lstStyle/>
+          <a:p>
+            <a:r>
+              <a:rPr lang="en-US" dirty="0"/>
+              <a:t>Catastrophic cancellation</a:t>
+            </a:r>
+          </a:p>
+        </p:txBody>
+      </p:sp>
+      <p:sp>
+        <p:nvSpPr>
+          <p:cNvPr id="3" name="Content Placeholder 2">
+            <a:extLst>
+              <a:ext uri="{FF2B5EF4-FFF2-40B4-BE49-F238E27FC236}">
+                <a16:creationId xmlns:a16="http://schemas.microsoft.com/office/drawing/2014/main" id="{96186B28-45D1-57E1-A9B0-C1CC5697A300}"/>
+              </a:ext>
+            </a:extLst>
+          </p:cNvPr>
+          <p:cNvSpPr>
+            <a:spLocks noGrp="1"/>
+          </p:cNvSpPr>
+          <p:nvPr>
+            <p:ph idx="1"/>
+          </p:nvPr>
+        </p:nvSpPr>
+        <p:spPr/>
+        <p:txBody>
+          <a:bodyPr/>
+          <a:lstStyle/>
+          <a:p>
+            <a:r>
+              <a:rPr lang="en-US" dirty="0"/>
+              <a:t>42⊕3.3⊕ -45 = 0 while 42+3.3-45 = 0.3</a:t>
+            </a:r>
+          </a:p>
+          <a:p>
+            <a:pPr lvl="1"/>
+            <a:r>
+              <a:rPr lang="en-US" dirty="0"/>
+              <a:t>Catastrophic cancellation</a:t>
+            </a:r>
+          </a:p>
+          <a:p>
+            <a:r>
+              <a:rPr lang="en-US" dirty="0" err="1"/>
+              <a:t>asum</a:t>
+            </a:r>
+            <a:r>
+              <a:rPr lang="en-US" dirty="0"/>
+              <a:t>(42,3.3) = 45,0.3</a:t>
+            </a:r>
+          </a:p>
+          <a:p>
+            <a:r>
+              <a:rPr lang="en-US" dirty="0" err="1"/>
+              <a:t>asum</a:t>
+            </a:r>
+            <a:r>
+              <a:rPr lang="en-US" dirty="0"/>
+              <a:t>(45 ,-45) = 0.0,0.0</a:t>
+            </a:r>
+          </a:p>
+          <a:p>
+            <a:r>
+              <a:rPr lang="en-US" dirty="0" err="1"/>
+              <a:t>asum</a:t>
+            </a:r>
+            <a:r>
+              <a:rPr lang="en-US" dirty="0"/>
+              <a:t>(0.0,0.3+0.0) = 0.3, 0.0 </a:t>
+            </a:r>
+          </a:p>
+          <a:p>
+            <a:endParaRPr lang="en-US" dirty="0"/>
+          </a:p>
+        </p:txBody>
+      </p:sp>
+    </p:spTree>
+    <p:extLst>
+      <p:ext uri="{BB962C8B-B14F-4D97-AF65-F5344CB8AC3E}">
+        <p14:creationId xmlns:p14="http://schemas.microsoft.com/office/powerpoint/2010/main" val="3295552409"/>
+      </p:ext>
+    </p:extLst>
+  </p:cSld>
+  <p:clrMapOvr>
+    <a:masterClrMapping/>
+  </p:clrMapOvr>
+</p:sld>
+</file>
+
+<file path=ppt/slides/slide22.xml><?xml version="1.0" encoding="utf-8"?>
+<p:sld xmlns:a="http://schemas.openxmlformats.org/drawingml/2006/main" xmlns:r="http://schemas.openxmlformats.org/officeDocument/2006/relationships" xmlns:p="http://schemas.openxmlformats.org/presentationml/2006/main">
+  <p:cSld>
+    <p:spTree>
+      <p:nvGrpSpPr>
+        <p:cNvPr id="1" name=""/>
+        <p:cNvGrpSpPr/>
+        <p:nvPr/>
+      </p:nvGrpSpPr>
+      <p:grpSpPr>
+        <a:xfrm>
+          <a:off x="0" y="0"/>
+          <a:ext cx="0" cy="0"/>
+          <a:chOff x="0" y="0"/>
+          <a:chExt cx="0" cy="0"/>
+        </a:xfrm>
+      </p:grpSpPr>
+      <p:sp>
+        <p:nvSpPr>
+          <p:cNvPr id="2" name="Title 1">
+            <a:extLst>
+              <a:ext uri="{FF2B5EF4-FFF2-40B4-BE49-F238E27FC236}">
+                <a16:creationId xmlns:a16="http://schemas.microsoft.com/office/drawing/2014/main" id="{AF14D40A-FA76-6F94-EE86-7C1679F6F84C}"/>
+              </a:ext>
+            </a:extLst>
+          </p:cNvPr>
+          <p:cNvSpPr>
+            <a:spLocks noGrp="1"/>
+          </p:cNvSpPr>
+          <p:nvPr>
+            <p:ph type="title"/>
+          </p:nvPr>
+        </p:nvSpPr>
+        <p:spPr/>
+        <p:txBody>
+          <a:bodyPr/>
+          <a:lstStyle/>
+          <a:p>
+            <a:r>
+              <a:rPr lang="en-US" dirty="0"/>
+              <a:t>Compensating algorithms</a:t>
+            </a:r>
+          </a:p>
+        </p:txBody>
+      </p:sp>
+      <p:sp>
+        <p:nvSpPr>
+          <p:cNvPr id="3" name="Content Placeholder 2">
+            <a:extLst>
+              <a:ext uri="{FF2B5EF4-FFF2-40B4-BE49-F238E27FC236}">
+                <a16:creationId xmlns:a16="http://schemas.microsoft.com/office/drawing/2014/main" id="{57F316F0-F6EA-A0F3-3D5D-CC38A744741C}"/>
+              </a:ext>
+            </a:extLst>
+          </p:cNvPr>
+          <p:cNvSpPr>
+            <a:spLocks noGrp="1"/>
+          </p:cNvSpPr>
+          <p:nvPr>
+            <p:ph idx="1"/>
+          </p:nvPr>
+        </p:nvSpPr>
+        <p:spPr>
+          <a:xfrm>
+            <a:off x="838200" y="1825625"/>
+            <a:ext cx="10515600" cy="1531266"/>
+          </a:xfrm>
+        </p:spPr>
+        <p:txBody>
+          <a:bodyPr/>
+          <a:lstStyle/>
+          <a:p>
+            <a:r>
+              <a:rPr lang="en-US" dirty="0"/>
+              <a:t>Kahan summation</a:t>
+            </a:r>
+          </a:p>
+          <a:p>
+            <a:pPr lvl="1"/>
+            <a:r>
+              <a:rPr lang="en-US" dirty="0">
+                <a:hlinkClick r:id="rId2"/>
+              </a:rPr>
+              <a:t>https://en.wikipedia.org/wiki/Kahan_summation_algorithm</a:t>
+            </a:r>
+            <a:endParaRPr lang="en-US" dirty="0"/>
+          </a:p>
+          <a:p>
+            <a:pPr lvl="1"/>
+            <a:r>
+              <a:rPr lang="en-US" dirty="0"/>
+              <a:t>with excruciating details </a:t>
+            </a:r>
+            <a:r>
+              <a:rPr lang="en-US" dirty="0">
+                <a:hlinkClick r:id="rId3"/>
+              </a:rPr>
+              <a:t>https://arxiv.org/html/2602.19452v1 - LST2</a:t>
+            </a:r>
+            <a:endParaRPr lang="en-US" dirty="0"/>
+          </a:p>
+        </p:txBody>
+      </p:sp>
+      <p:sp>
+        <p:nvSpPr>
+          <p:cNvPr id="4" name="TextBox 3">
+            <a:extLst>
+              <a:ext uri="{FF2B5EF4-FFF2-40B4-BE49-F238E27FC236}">
+                <a16:creationId xmlns:a16="http://schemas.microsoft.com/office/drawing/2014/main" id="{D022782E-2AE8-5E4E-D2AA-20DCC4B0081F}"/>
+              </a:ext>
+            </a:extLst>
+          </p:cNvPr>
+          <p:cNvSpPr txBox="1">
+            <a:spLocks noChangeArrowheads="1"/>
+          </p:cNvSpPr>
+          <p:nvPr/>
+        </p:nvSpPr>
+        <p:spPr bwMode="auto">
+          <a:xfrm>
+            <a:off x="206098" y="3287851"/>
+            <a:ext cx="3985413" cy="2554545"/>
+          </a:xfrm>
+          <a:prstGeom prst="rect">
+            <a:avLst/>
+          </a:prstGeom>
+          <a:gradFill rotWithShape="1">
+            <a:gsLst>
+              <a:gs pos="0">
+                <a:srgbClr val="FFFFDC"/>
+              </a:gs>
+              <a:gs pos="64999">
+                <a:srgbClr val="FFFFAC"/>
+              </a:gs>
+              <a:gs pos="100000">
+                <a:srgbClr val="FFFF88"/>
+              </a:gs>
+            </a:gsLst>
+            <a:lin ang="5400000" scaled="1"/>
+          </a:gradFill>
+          <a:ln w="9525">
+            <a:solidFill>
+              <a:srgbClr val="FADD4D"/>
+            </a:solidFill>
+            <a:miter lim="800000"/>
+            <a:headEnd/>
+            <a:tailEnd/>
+          </a:ln>
+          <a:effectLst>
+            <a:outerShdw blurRad="40000" dist="20000" dir="5400000" rotWithShape="0">
+              <a:srgbClr val="808080">
+                <a:alpha val="37999"/>
+              </a:srgbClr>
+            </a:outerShdw>
+          </a:effectLst>
+        </p:spPr>
+        <p:txBody>
+          <a:bodyPr wrap="square">
+            <a:spAutoFit/>
+          </a:bodyPr>
+          <a:lstStyle>
+            <a:lvl1pPr eaLnBrk="0" hangingPunct="0">
+              <a:defRPr sz="2400">
+                <a:solidFill>
+                  <a:schemeClr val="tx1"/>
+                </a:solidFill>
+                <a:latin typeface="Arial" panose="020B0604020202020204" pitchFamily="34" charset="0"/>
+                <a:ea typeface="ＭＳ Ｐゴシック" panose="020B0600070205080204" pitchFamily="34" charset="-128"/>
+              </a:defRPr>
+            </a:lvl1pPr>
+            <a:lvl2pPr marL="742950" indent="-285750" eaLnBrk="0" hangingPunct="0">
+              <a:defRPr sz="2400">
+                <a:solidFill>
+                  <a:schemeClr val="tx1"/>
+                </a:solidFill>
+                <a:latin typeface="Arial" panose="020B0604020202020204" pitchFamily="34" charset="0"/>
+                <a:ea typeface="ＭＳ Ｐゴシック" panose="020B0600070205080204" pitchFamily="34" charset="-128"/>
+              </a:defRPr>
+            </a:lvl2pPr>
+            <a:lvl3pPr marL="1143000" indent="-228600" eaLnBrk="0" hangingPunct="0">
+              <a:defRPr sz="2400">
+                <a:solidFill>
+                  <a:schemeClr val="tx1"/>
+                </a:solidFill>
+                <a:latin typeface="Arial" panose="020B0604020202020204" pitchFamily="34" charset="0"/>
+                <a:ea typeface="ＭＳ Ｐゴシック" panose="020B0600070205080204" pitchFamily="34" charset="-128"/>
+              </a:defRPr>
+            </a:lvl3pPr>
+            <a:lvl4pPr marL="1600200" indent="-228600" eaLnBrk="0" hangingPunct="0">
+              <a:defRPr sz="2400">
+                <a:solidFill>
+                  <a:schemeClr val="tx1"/>
+                </a:solidFill>
+                <a:latin typeface="Arial" panose="020B0604020202020204" pitchFamily="34" charset="0"/>
+                <a:ea typeface="ＭＳ Ｐゴシック" panose="020B0600070205080204" pitchFamily="34" charset="-128"/>
+              </a:defRPr>
+            </a:lvl4pPr>
+            <a:lvl5pPr marL="2057400" indent="-228600" eaLnBrk="0" hangingPunct="0">
+              <a:defRPr sz="2400">
+                <a:solidFill>
+                  <a:schemeClr val="tx1"/>
+                </a:solidFill>
+                <a:latin typeface="Arial" panose="020B0604020202020204" pitchFamily="34" charset="0"/>
+                <a:ea typeface="ＭＳ Ｐゴシック" panose="020B0600070205080204" pitchFamily="34" charset="-128"/>
+              </a:defRPr>
+            </a:lvl5pPr>
+            <a:lvl6pPr marL="2514600" indent="-228600" eaLnBrk="0" fontAlgn="base" hangingPunct="0">
+              <a:spcBef>
+                <a:spcPct val="0"/>
+              </a:spcBef>
+              <a:spcAft>
+                <a:spcPct val="0"/>
+              </a:spcAft>
+              <a:defRPr sz="2400">
+                <a:solidFill>
+                  <a:schemeClr val="tx1"/>
+                </a:solidFill>
+                <a:latin typeface="Arial" panose="020B0604020202020204" pitchFamily="34" charset="0"/>
+                <a:ea typeface="ＭＳ Ｐゴシック" panose="020B0600070205080204" pitchFamily="34" charset="-128"/>
+              </a:defRPr>
+            </a:lvl6pPr>
+            <a:lvl7pPr marL="2971800" indent="-228600" eaLnBrk="0" fontAlgn="base" hangingPunct="0">
+              <a:spcBef>
+                <a:spcPct val="0"/>
+              </a:spcBef>
+              <a:spcAft>
+                <a:spcPct val="0"/>
+              </a:spcAft>
+              <a:defRPr sz="2400">
+                <a:solidFill>
+                  <a:schemeClr val="tx1"/>
+                </a:solidFill>
+                <a:latin typeface="Arial" panose="020B0604020202020204" pitchFamily="34" charset="0"/>
+                <a:ea typeface="ＭＳ Ｐゴシック" panose="020B0600070205080204" pitchFamily="34" charset="-128"/>
+              </a:defRPr>
+            </a:lvl7pPr>
+            <a:lvl8pPr marL="3429000" indent="-228600" eaLnBrk="0" fontAlgn="base" hangingPunct="0">
+              <a:spcBef>
+                <a:spcPct val="0"/>
+              </a:spcBef>
+              <a:spcAft>
+                <a:spcPct val="0"/>
+              </a:spcAft>
+              <a:defRPr sz="2400">
+                <a:solidFill>
+                  <a:schemeClr val="tx1"/>
+                </a:solidFill>
+                <a:latin typeface="Arial" panose="020B0604020202020204" pitchFamily="34" charset="0"/>
+                <a:ea typeface="ＭＳ Ｐゴシック" panose="020B0600070205080204" pitchFamily="34" charset="-128"/>
+              </a:defRPr>
+            </a:lvl8pPr>
+            <a:lvl9pPr marL="3886200" indent="-228600" eaLnBrk="0" fontAlgn="base" hangingPunct="0">
+              <a:spcBef>
+                <a:spcPct val="0"/>
+              </a:spcBef>
+              <a:spcAft>
+                <a:spcPct val="0"/>
+              </a:spcAft>
+              <a:defRPr sz="2400">
+                <a:solidFill>
+                  <a:schemeClr val="tx1"/>
+                </a:solidFill>
+                <a:latin typeface="Arial" panose="020B0604020202020204" pitchFamily="34" charset="0"/>
+                <a:ea typeface="ＭＳ Ｐゴシック" panose="020B0600070205080204" pitchFamily="34" charset="-128"/>
+              </a:defRPr>
+            </a:lvl9pPr>
+          </a:lstStyle>
+          <a:p>
+            <a:pPr eaLnBrk="1" hangingPunct="1"/>
+            <a:r>
+              <a:rPr lang="en-US" altLang="en-US" sz="1600" b="1" dirty="0"/>
+              <a:t>T </a:t>
+            </a:r>
+            <a:r>
+              <a:rPr lang="en-US" altLang="en-US" sz="1600" b="1" dirty="0" err="1"/>
+              <a:t>kahanSum</a:t>
+            </a:r>
+            <a:r>
+              <a:rPr lang="en-US" altLang="en-US" sz="1600" b="1" dirty="0"/>
+              <a:t>(T const * input, </a:t>
+            </a:r>
+            <a:r>
+              <a:rPr lang="en-US" altLang="en-US" sz="1600" b="1" dirty="0" err="1"/>
+              <a:t>size_t</a:t>
+            </a:r>
+            <a:r>
+              <a:rPr lang="en-US" altLang="en-US" sz="1600" b="1" dirty="0"/>
+              <a:t> n) { </a:t>
+            </a:r>
+          </a:p>
+          <a:p>
+            <a:pPr eaLnBrk="1" hangingPunct="1"/>
+            <a:r>
+              <a:rPr lang="en-US" altLang="en-US" sz="1600" b="1" dirty="0"/>
+              <a:t>T sum = input[0];</a:t>
+            </a:r>
+          </a:p>
+          <a:p>
+            <a:pPr eaLnBrk="1" hangingPunct="1"/>
+            <a:r>
+              <a:rPr lang="en-US" altLang="en-US" sz="1600" b="1" dirty="0"/>
+              <a:t>T t = 0.0;          </a:t>
+            </a:r>
+          </a:p>
+          <a:p>
+            <a:pPr eaLnBrk="1" hangingPunct="1"/>
+            <a:r>
+              <a:rPr lang="en-US" altLang="en-US" sz="1600" b="1" dirty="0"/>
+              <a:t>for (</a:t>
+            </a:r>
+            <a:r>
+              <a:rPr lang="en-US" altLang="en-US" sz="1600" b="1" dirty="0" err="1"/>
+              <a:t>size_t</a:t>
+            </a:r>
+            <a:r>
+              <a:rPr lang="en-US" altLang="en-US" sz="1600" b="1" dirty="0"/>
+              <a:t> </a:t>
+            </a:r>
+            <a:r>
+              <a:rPr lang="en-US" altLang="en-US" sz="1600" b="1" dirty="0" err="1"/>
+              <a:t>i</a:t>
+            </a:r>
+            <a:r>
+              <a:rPr lang="en-US" altLang="en-US" sz="1600" b="1" dirty="0"/>
+              <a:t> = 1; </a:t>
+            </a:r>
+            <a:r>
+              <a:rPr lang="en-US" altLang="en-US" sz="1600" b="1" dirty="0" err="1"/>
+              <a:t>i</a:t>
+            </a:r>
+            <a:r>
+              <a:rPr lang="en-US" altLang="en-US" sz="1600" b="1" dirty="0"/>
+              <a:t>&lt;n; ++</a:t>
+            </a:r>
+            <a:r>
+              <a:rPr lang="en-US" altLang="en-US" sz="1600" b="1" dirty="0" err="1"/>
+              <a:t>i</a:t>
+            </a:r>
+            <a:r>
+              <a:rPr lang="en-US" altLang="en-US" sz="1600" b="1" dirty="0"/>
+              <a:t>)  {  </a:t>
+            </a:r>
+          </a:p>
+          <a:p>
+            <a:pPr eaLnBrk="1" hangingPunct="1"/>
+            <a:r>
+              <a:rPr lang="en-US" altLang="en-US" sz="1600" b="1" dirty="0"/>
+              <a:t>  y = input[</a:t>
+            </a:r>
+            <a:r>
+              <a:rPr lang="en-US" altLang="en-US" sz="1600" b="1" dirty="0" err="1"/>
+              <a:t>i</a:t>
+            </a:r>
+            <a:r>
+              <a:rPr lang="en-US" altLang="en-US" sz="1600" b="1" dirty="0"/>
+              <a:t>] – t; </a:t>
+            </a:r>
+          </a:p>
+          <a:p>
+            <a:pPr eaLnBrk="1" hangingPunct="1"/>
+            <a:r>
+              <a:rPr lang="en-US" altLang="en-US" sz="1600" b="1" i="1" dirty="0"/>
+              <a:t>  auto s = sum + y</a:t>
+            </a:r>
+          </a:p>
+          <a:p>
+            <a:pPr eaLnBrk="1" hangingPunct="1"/>
+            <a:r>
+              <a:rPr lang="en-US" altLang="en-US" sz="1600" b="1" i="1" dirty="0"/>
+              <a:t>  t = (s - sum) – y;   </a:t>
+            </a:r>
+          </a:p>
+          <a:p>
+            <a:pPr eaLnBrk="1" hangingPunct="1"/>
+            <a:r>
+              <a:rPr lang="en-US" altLang="en-US" sz="1600" b="1" i="1" dirty="0"/>
+              <a:t>  sum = s;                                    </a:t>
+            </a:r>
+          </a:p>
+          <a:p>
+            <a:pPr eaLnBrk="1" hangingPunct="1"/>
+            <a:r>
+              <a:rPr lang="en-US" altLang="en-US" sz="1600" b="1" i="1" dirty="0"/>
+              <a:t>} </a:t>
+            </a:r>
+          </a:p>
+          <a:p>
+            <a:pPr eaLnBrk="1" hangingPunct="1"/>
+            <a:r>
+              <a:rPr lang="en-US" altLang="en-US" sz="1600" b="1" i="1" dirty="0"/>
+              <a:t>return sum;</a:t>
+            </a:r>
+            <a:endParaRPr lang="en-US" altLang="en-US" sz="1600" b="1" dirty="0">
+              <a:solidFill>
+                <a:srgbClr val="000000"/>
+              </a:solidFill>
+              <a:latin typeface="Arial Narrow" panose="020B0604020202020204" pitchFamily="34" charset="0"/>
+            </a:endParaRPr>
+          </a:p>
+        </p:txBody>
+      </p:sp>
+      <p:sp>
+        <p:nvSpPr>
+          <p:cNvPr id="5" name="TextBox 4">
+            <a:extLst>
+              <a:ext uri="{FF2B5EF4-FFF2-40B4-BE49-F238E27FC236}">
+                <a16:creationId xmlns:a16="http://schemas.microsoft.com/office/drawing/2014/main" id="{3623E267-73A4-1A4E-36A1-BA2B20C5695B}"/>
+              </a:ext>
+            </a:extLst>
+          </p:cNvPr>
+          <p:cNvSpPr txBox="1"/>
+          <p:nvPr/>
+        </p:nvSpPr>
+        <p:spPr>
+          <a:xfrm>
+            <a:off x="4756108" y="3356891"/>
+            <a:ext cx="4952489" cy="923330"/>
+          </a:xfrm>
+          <a:prstGeom prst="rect">
+            <a:avLst/>
+          </a:prstGeom>
+          <a:noFill/>
+        </p:spPr>
+        <p:txBody>
+          <a:bodyPr wrap="square" rtlCol="0">
+            <a:spAutoFit/>
+          </a:bodyPr>
+          <a:lstStyle/>
+          <a:p>
+            <a:r>
+              <a:rPr lang="en-US" dirty="0"/>
+              <a:t>Improved algorithms exist, differently handling various magnitude ranges (“big”, “medium” and “tiny”) or by (partial) sorting</a:t>
+            </a:r>
+          </a:p>
+        </p:txBody>
+      </p:sp>
+    </p:spTree>
+    <p:extLst>
+      <p:ext uri="{BB962C8B-B14F-4D97-AF65-F5344CB8AC3E}">
+        <p14:creationId xmlns:p14="http://schemas.microsoft.com/office/powerpoint/2010/main" val="1199403217"/>
+      </p:ext>
+    </p:extLst>
+  </p:cSld>
+  <p:clrMapOvr>
+    <a:masterClrMapping/>
+  </p:clrMapOvr>
+</p:sld>
+</file>
+
+<file path=ppt/slides/slide23.xml><?xml version="1.0" encoding="utf-8"?>
+<p:sld xmlns:a="http://schemas.openxmlformats.org/drawingml/2006/main" xmlns:r="http://schemas.openxmlformats.org/officeDocument/2006/relationships" xmlns:p="http://schemas.openxmlformats.org/presentationml/2006/main">
+  <p:cSld>
+    <p:spTree>
+      <p:nvGrpSpPr>
+        <p:cNvPr id="1" name=""/>
+        <p:cNvGrpSpPr/>
+        <p:nvPr/>
+      </p:nvGrpSpPr>
+      <p:grpSpPr>
+        <a:xfrm>
+          <a:off x="0" y="0"/>
+          <a:ext cx="0" cy="0"/>
+          <a:chOff x="0" y="0"/>
+          <a:chExt cx="0" cy="0"/>
+        </a:xfrm>
+      </p:grpSpPr>
+      <p:sp>
+        <p:nvSpPr>
+          <p:cNvPr id="2" name="Title 1">
+            <a:extLst>
+              <a:ext uri="{FF2B5EF4-FFF2-40B4-BE49-F238E27FC236}">
+                <a16:creationId xmlns:a16="http://schemas.microsoft.com/office/drawing/2014/main" id="{406E20AA-B625-0B63-9F2F-C72BE2EA535E}"/>
+              </a:ext>
+            </a:extLst>
+          </p:cNvPr>
+          <p:cNvSpPr>
+            <a:spLocks noGrp="1"/>
+          </p:cNvSpPr>
+          <p:nvPr>
+            <p:ph type="title"/>
+          </p:nvPr>
+        </p:nvSpPr>
+        <p:spPr>
+          <a:xfrm>
+            <a:off x="838200" y="0"/>
+            <a:ext cx="10515600" cy="1325563"/>
+          </a:xfrm>
+        </p:spPr>
+        <p:txBody>
+          <a:bodyPr/>
+          <a:lstStyle/>
+          <a:p>
+            <a:r>
+              <a:rPr lang="en-US" dirty="0"/>
+              <a:t>FMA: Fused Multiple Add</a:t>
+            </a:r>
+          </a:p>
+        </p:txBody>
+      </p:sp>
+      <p:sp>
+        <p:nvSpPr>
+          <p:cNvPr id="3" name="Content Placeholder 2">
+            <a:extLst>
+              <a:ext uri="{FF2B5EF4-FFF2-40B4-BE49-F238E27FC236}">
+                <a16:creationId xmlns:a16="http://schemas.microsoft.com/office/drawing/2014/main" id="{622866DD-121A-7352-FBC1-5EB3685E6622}"/>
+              </a:ext>
+            </a:extLst>
+          </p:cNvPr>
+          <p:cNvSpPr>
+            <a:spLocks noGrp="1"/>
+          </p:cNvSpPr>
+          <p:nvPr>
+            <p:ph idx="1"/>
+          </p:nvPr>
+        </p:nvSpPr>
+        <p:spPr>
+          <a:xfrm>
+            <a:off x="838200" y="1310125"/>
+            <a:ext cx="10515600" cy="3550309"/>
+          </a:xfrm>
+        </p:spPr>
+        <p:txBody>
+          <a:bodyPr>
+            <a:normAutofit lnSpcReduction="10000"/>
+          </a:bodyPr>
+          <a:lstStyle/>
+          <a:p>
+            <a:r>
+              <a:rPr lang="en-US" dirty="0"/>
+              <a:t>Also known as MAC (multiply accumulate) instruction on AMD</a:t>
+            </a:r>
+          </a:p>
+          <a:p>
+            <a:r>
+              <a:rPr lang="en-US" dirty="0" err="1"/>
+              <a:t>fma</a:t>
+            </a:r>
+            <a:r>
+              <a:rPr lang="en-US" dirty="0"/>
+              <a:t>(</a:t>
+            </a:r>
+            <a:r>
+              <a:rPr lang="en-US" dirty="0" err="1"/>
+              <a:t>a,b,c</a:t>
+            </a:r>
+            <a:r>
+              <a:rPr lang="en-US" dirty="0"/>
+              <a:t>) computes the correctly rounded result of a*</a:t>
+            </a:r>
+            <a:r>
+              <a:rPr lang="en-US" dirty="0" err="1"/>
+              <a:t>b+c</a:t>
+            </a:r>
+            <a:endParaRPr lang="en-US" dirty="0"/>
+          </a:p>
+          <a:p>
+            <a:pPr lvl="1"/>
+            <a:r>
+              <a:rPr lang="en-US" dirty="0"/>
+              <a:t>It improves speed and precision in many computation such as linear algebra</a:t>
+            </a:r>
+          </a:p>
+          <a:p>
+            <a:pPr lvl="1"/>
+            <a:r>
+              <a:rPr lang="en-US" dirty="0"/>
+              <a:t>No standard on how to “contract” expression (depends on compiler)</a:t>
+            </a:r>
+          </a:p>
+          <a:p>
+            <a:pPr lvl="2"/>
+            <a:r>
+              <a:rPr lang="en-US" dirty="0"/>
+              <a:t>a*</a:t>
+            </a:r>
+            <a:r>
+              <a:rPr lang="en-US" dirty="0" err="1"/>
+              <a:t>b+c</a:t>
+            </a:r>
+            <a:r>
+              <a:rPr lang="en-US" dirty="0"/>
+              <a:t>*d ,  </a:t>
+            </a:r>
+            <a:r>
+              <a:rPr lang="en-US" dirty="0" err="1"/>
+              <a:t>a+b</a:t>
+            </a:r>
+            <a:r>
+              <a:rPr lang="en-US" dirty="0"/>
+              <a:t>*</a:t>
+            </a:r>
+            <a:r>
+              <a:rPr lang="en-US" dirty="0" err="1"/>
+              <a:t>c+d</a:t>
+            </a:r>
+            <a:r>
+              <a:rPr lang="en-US" dirty="0"/>
+              <a:t> , x*=</a:t>
+            </a:r>
+            <a:r>
+              <a:rPr lang="en-US" dirty="0" err="1"/>
+              <a:t>a;x</a:t>
+            </a:r>
+            <a:r>
+              <a:rPr lang="en-US" dirty="0"/>
+              <a:t>+=b ,  </a:t>
+            </a:r>
+            <a:r>
+              <a:rPr lang="en-US" dirty="0" err="1"/>
+              <a:t>etc</a:t>
+            </a:r>
+            <a:endParaRPr lang="en-US" dirty="0"/>
+          </a:p>
+          <a:p>
+            <a:pPr lvl="1"/>
+            <a:r>
+              <a:rPr lang="en-US" dirty="0"/>
+              <a:t>It clearly introduces asymmetries </a:t>
+            </a:r>
+          </a:p>
+          <a:p>
+            <a:pPr lvl="2"/>
+            <a:r>
+              <a:rPr lang="en-US" dirty="0"/>
+              <a:t>for instance  a*</a:t>
+            </a:r>
+            <a:r>
+              <a:rPr lang="en-US" dirty="0" err="1"/>
+              <a:t>b+c</a:t>
+            </a:r>
+            <a:r>
+              <a:rPr lang="en-US" dirty="0"/>
+              <a:t>*d ≠ c*</a:t>
+            </a:r>
+            <a:r>
+              <a:rPr lang="en-US" dirty="0" err="1"/>
+              <a:t>d+a</a:t>
+            </a:r>
+            <a:r>
+              <a:rPr lang="en-US" dirty="0"/>
+              <a:t>*b</a:t>
+            </a:r>
+          </a:p>
+          <a:p>
+            <a:r>
+              <a:rPr lang="en-US" dirty="0"/>
+              <a:t>Kahan comes to the rescue again with this algorithm</a:t>
+            </a:r>
+          </a:p>
+          <a:p>
+            <a:pPr marL="914400" lvl="2" indent="0">
+              <a:buNone/>
+            </a:pPr>
+            <a:r>
+              <a:rPr lang="en-US" dirty="0"/>
+              <a:t> </a:t>
+            </a:r>
+          </a:p>
+        </p:txBody>
+      </p:sp>
+      <p:sp>
+        <p:nvSpPr>
+          <p:cNvPr id="4" name="TextBox 3">
+            <a:extLst>
+              <a:ext uri="{FF2B5EF4-FFF2-40B4-BE49-F238E27FC236}">
+                <a16:creationId xmlns:a16="http://schemas.microsoft.com/office/drawing/2014/main" id="{A77EF3BD-4D64-9993-8C80-6011D1A0EAA1}"/>
+              </a:ext>
+            </a:extLst>
+          </p:cNvPr>
+          <p:cNvSpPr txBox="1">
+            <a:spLocks noChangeArrowheads="1"/>
+          </p:cNvSpPr>
+          <p:nvPr/>
+        </p:nvSpPr>
+        <p:spPr bwMode="auto">
+          <a:xfrm>
+            <a:off x="911843" y="4565174"/>
+            <a:ext cx="6612012" cy="1815882"/>
+          </a:xfrm>
+          <a:prstGeom prst="rect">
+            <a:avLst/>
+          </a:prstGeom>
+          <a:gradFill rotWithShape="1">
+            <a:gsLst>
+              <a:gs pos="0">
+                <a:srgbClr val="FFFFDC"/>
+              </a:gs>
+              <a:gs pos="64999">
+                <a:srgbClr val="FFFFAC"/>
+              </a:gs>
+              <a:gs pos="100000">
+                <a:srgbClr val="FFFF88"/>
+              </a:gs>
+            </a:gsLst>
+            <a:lin ang="5400000" scaled="1"/>
+          </a:gradFill>
+          <a:ln w="9525">
+            <a:solidFill>
+              <a:srgbClr val="FADD4D"/>
+            </a:solidFill>
+            <a:miter lim="800000"/>
+            <a:headEnd/>
+            <a:tailEnd/>
+          </a:ln>
+          <a:effectLst>
+            <a:outerShdw blurRad="40000" dist="20000" dir="5400000" rotWithShape="0">
+              <a:srgbClr val="808080">
+                <a:alpha val="37999"/>
+              </a:srgbClr>
+            </a:outerShdw>
+          </a:effectLst>
+        </p:spPr>
+        <p:txBody>
+          <a:bodyPr wrap="square">
+            <a:spAutoFit/>
+          </a:bodyPr>
+          <a:lstStyle>
+            <a:lvl1pPr eaLnBrk="0" hangingPunct="0">
+              <a:defRPr sz="2400">
+                <a:solidFill>
+                  <a:schemeClr val="tx1"/>
+                </a:solidFill>
+                <a:latin typeface="Arial" panose="020B0604020202020204" pitchFamily="34" charset="0"/>
+                <a:ea typeface="ＭＳ Ｐゴシック" panose="020B0600070205080204" pitchFamily="34" charset="-128"/>
+              </a:defRPr>
+            </a:lvl1pPr>
+            <a:lvl2pPr marL="742950" indent="-285750" eaLnBrk="0" hangingPunct="0">
+              <a:defRPr sz="2400">
+                <a:solidFill>
+                  <a:schemeClr val="tx1"/>
+                </a:solidFill>
+                <a:latin typeface="Arial" panose="020B0604020202020204" pitchFamily="34" charset="0"/>
+                <a:ea typeface="ＭＳ Ｐゴシック" panose="020B0600070205080204" pitchFamily="34" charset="-128"/>
+              </a:defRPr>
+            </a:lvl2pPr>
+            <a:lvl3pPr marL="1143000" indent="-228600" eaLnBrk="0" hangingPunct="0">
+              <a:defRPr sz="2400">
+                <a:solidFill>
+                  <a:schemeClr val="tx1"/>
+                </a:solidFill>
+                <a:latin typeface="Arial" panose="020B0604020202020204" pitchFamily="34" charset="0"/>
+                <a:ea typeface="ＭＳ Ｐゴシック" panose="020B0600070205080204" pitchFamily="34" charset="-128"/>
+              </a:defRPr>
+            </a:lvl3pPr>
+            <a:lvl4pPr marL="1600200" indent="-228600" eaLnBrk="0" hangingPunct="0">
+              <a:defRPr sz="2400">
+                <a:solidFill>
+                  <a:schemeClr val="tx1"/>
+                </a:solidFill>
+                <a:latin typeface="Arial" panose="020B0604020202020204" pitchFamily="34" charset="0"/>
+                <a:ea typeface="ＭＳ Ｐゴシック" panose="020B0600070205080204" pitchFamily="34" charset="-128"/>
+              </a:defRPr>
+            </a:lvl4pPr>
+            <a:lvl5pPr marL="2057400" indent="-228600" eaLnBrk="0" hangingPunct="0">
+              <a:defRPr sz="2400">
+                <a:solidFill>
+                  <a:schemeClr val="tx1"/>
+                </a:solidFill>
+                <a:latin typeface="Arial" panose="020B0604020202020204" pitchFamily="34" charset="0"/>
+                <a:ea typeface="ＭＳ Ｐゴシック" panose="020B0600070205080204" pitchFamily="34" charset="-128"/>
+              </a:defRPr>
+            </a:lvl5pPr>
+            <a:lvl6pPr marL="2514600" indent="-228600" eaLnBrk="0" fontAlgn="base" hangingPunct="0">
+              <a:spcBef>
+                <a:spcPct val="0"/>
+              </a:spcBef>
+              <a:spcAft>
+                <a:spcPct val="0"/>
+              </a:spcAft>
+              <a:defRPr sz="2400">
+                <a:solidFill>
+                  <a:schemeClr val="tx1"/>
+                </a:solidFill>
+                <a:latin typeface="Arial" panose="020B0604020202020204" pitchFamily="34" charset="0"/>
+                <a:ea typeface="ＭＳ Ｐゴシック" panose="020B0600070205080204" pitchFamily="34" charset="-128"/>
+              </a:defRPr>
+            </a:lvl6pPr>
+            <a:lvl7pPr marL="2971800" indent="-228600" eaLnBrk="0" fontAlgn="base" hangingPunct="0">
+              <a:spcBef>
+                <a:spcPct val="0"/>
+              </a:spcBef>
+              <a:spcAft>
+                <a:spcPct val="0"/>
+              </a:spcAft>
+              <a:defRPr sz="2400">
+                <a:solidFill>
+                  <a:schemeClr val="tx1"/>
+                </a:solidFill>
+                <a:latin typeface="Arial" panose="020B0604020202020204" pitchFamily="34" charset="0"/>
+                <a:ea typeface="ＭＳ Ｐゴシック" panose="020B0600070205080204" pitchFamily="34" charset="-128"/>
+              </a:defRPr>
+            </a:lvl7pPr>
+            <a:lvl8pPr marL="3429000" indent="-228600" eaLnBrk="0" fontAlgn="base" hangingPunct="0">
+              <a:spcBef>
+                <a:spcPct val="0"/>
+              </a:spcBef>
+              <a:spcAft>
+                <a:spcPct val="0"/>
+              </a:spcAft>
+              <a:defRPr sz="2400">
+                <a:solidFill>
+                  <a:schemeClr val="tx1"/>
+                </a:solidFill>
+                <a:latin typeface="Arial" panose="020B0604020202020204" pitchFamily="34" charset="0"/>
+                <a:ea typeface="ＭＳ Ｐゴシック" panose="020B0600070205080204" pitchFamily="34" charset="-128"/>
+              </a:defRPr>
+            </a:lvl8pPr>
+            <a:lvl9pPr marL="3886200" indent="-228600" eaLnBrk="0" fontAlgn="base" hangingPunct="0">
+              <a:spcBef>
+                <a:spcPct val="0"/>
+              </a:spcBef>
+              <a:spcAft>
+                <a:spcPct val="0"/>
+              </a:spcAft>
+              <a:defRPr sz="2400">
+                <a:solidFill>
+                  <a:schemeClr val="tx1"/>
+                </a:solidFill>
+                <a:latin typeface="Arial" panose="020B0604020202020204" pitchFamily="34" charset="0"/>
+                <a:ea typeface="ＭＳ Ｐゴシック" panose="020B0600070205080204" pitchFamily="34" charset="-128"/>
+              </a:defRPr>
+            </a:lvl9pPr>
+          </a:lstStyle>
+          <a:p>
+            <a:pPr eaLnBrk="1" hangingPunct="1"/>
+            <a:r>
+              <a:rPr lang="en-US" altLang="en-US" sz="1600" dirty="0">
+                <a:solidFill>
+                  <a:srgbClr val="000000"/>
+                </a:solidFill>
+                <a:latin typeface="Arial Unicode MS" panose="020B0604020202020204" pitchFamily="34" charset="-128"/>
+                <a:ea typeface="Courier 10 Pitch"/>
+              </a:rPr>
+              <a:t>T </a:t>
+            </a:r>
+            <a:r>
+              <a:rPr lang="en-US" altLang="en-US" sz="1600" dirty="0" err="1">
+                <a:solidFill>
+                  <a:srgbClr val="000000"/>
+                </a:solidFill>
+                <a:latin typeface="Arial Unicode MS" panose="020B0604020202020204" pitchFamily="34" charset="-128"/>
+                <a:ea typeface="Courier 10 Pitch"/>
+              </a:rPr>
+              <a:t>kahanDet</a:t>
+            </a:r>
+            <a:r>
+              <a:rPr lang="en-US" altLang="en-US" sz="1600" dirty="0">
+                <a:solidFill>
+                  <a:srgbClr val="000000"/>
+                </a:solidFill>
+                <a:latin typeface="Arial Unicode MS" panose="020B0604020202020204" pitchFamily="34" charset="-128"/>
+                <a:ea typeface="Courier 10 Pitch"/>
+              </a:rPr>
+              <a:t>(T a, T b, T c, T d) { // a*d-b*c</a:t>
+            </a:r>
+          </a:p>
+          <a:p>
+            <a:pPr eaLnBrk="1" hangingPunct="1"/>
+            <a:r>
+              <a:rPr lang="en-US" altLang="en-US" sz="1600" dirty="0">
+                <a:solidFill>
+                  <a:srgbClr val="000000"/>
+                </a:solidFill>
+                <a:latin typeface="Arial Unicode MS" panose="020B0604020202020204" pitchFamily="34" charset="-128"/>
+                <a:ea typeface="Courier 10 Pitch"/>
+              </a:rPr>
+              <a:t>   using std::</a:t>
+            </a:r>
+            <a:r>
+              <a:rPr lang="en-US" altLang="en-US" sz="1600" dirty="0" err="1">
+                <a:solidFill>
+                  <a:srgbClr val="000000"/>
+                </a:solidFill>
+                <a:latin typeface="Arial Unicode MS" panose="020B0604020202020204" pitchFamily="34" charset="-128"/>
+                <a:ea typeface="Courier 10 Pitch"/>
+              </a:rPr>
+              <a:t>fma</a:t>
+            </a:r>
+            <a:r>
+              <a:rPr lang="en-US" altLang="en-US" sz="1600" dirty="0">
+                <a:solidFill>
+                  <a:srgbClr val="000000"/>
+                </a:solidFill>
+                <a:latin typeface="Arial Unicode MS" panose="020B0604020202020204" pitchFamily="34" charset="-128"/>
+                <a:ea typeface="Courier 10 Pitch"/>
+              </a:rPr>
+              <a:t>; </a:t>
+            </a:r>
+          </a:p>
+          <a:p>
+            <a:pPr eaLnBrk="1" hangingPunct="1"/>
+            <a:r>
+              <a:rPr lang="en-US" altLang="en-US" sz="1600" dirty="0">
+                <a:solidFill>
+                  <a:srgbClr val="000000"/>
+                </a:solidFill>
+                <a:latin typeface="Arial Unicode MS" panose="020B0604020202020204" pitchFamily="34" charset="-128"/>
+                <a:ea typeface="Courier 10 Pitch"/>
+              </a:rPr>
+              <a:t>   auto w = b*c; </a:t>
+            </a:r>
+          </a:p>
+          <a:p>
+            <a:pPr eaLnBrk="1" hangingPunct="1"/>
+            <a:r>
+              <a:rPr lang="en-US" altLang="en-US" sz="1600" dirty="0">
+                <a:solidFill>
+                  <a:srgbClr val="000000"/>
+                </a:solidFill>
+                <a:latin typeface="Arial Unicode MS" panose="020B0604020202020204" pitchFamily="34" charset="-128"/>
+                <a:ea typeface="Courier 10 Pitch"/>
+              </a:rPr>
+              <a:t>   auto e = </a:t>
+            </a:r>
+            <a:r>
+              <a:rPr lang="en-US" altLang="en-US" sz="1600" dirty="0" err="1">
+                <a:solidFill>
+                  <a:srgbClr val="000000"/>
+                </a:solidFill>
+                <a:latin typeface="Arial Unicode MS" panose="020B0604020202020204" pitchFamily="34" charset="-128"/>
+                <a:ea typeface="Courier 10 Pitch"/>
+              </a:rPr>
+              <a:t>fma</a:t>
+            </a:r>
+            <a:r>
+              <a:rPr lang="en-US" altLang="en-US" sz="1600" dirty="0">
+                <a:solidFill>
+                  <a:srgbClr val="000000"/>
+                </a:solidFill>
+                <a:latin typeface="Arial Unicode MS" panose="020B0604020202020204" pitchFamily="34" charset="-128"/>
+                <a:ea typeface="Courier 10 Pitch"/>
+              </a:rPr>
+              <a:t>(-b, c, w); // error on w (w,-e) = </a:t>
+            </a:r>
+            <a:r>
+              <a:rPr lang="en-US" altLang="en-US" sz="1600" dirty="0" err="1">
+                <a:solidFill>
+                  <a:srgbClr val="000000"/>
+                </a:solidFill>
+                <a:latin typeface="Arial Unicode MS" panose="020B0604020202020204" pitchFamily="34" charset="-128"/>
+                <a:ea typeface="Courier 10 Pitch"/>
+              </a:rPr>
+              <a:t>augmentedMultiply</a:t>
+            </a:r>
+            <a:r>
+              <a:rPr lang="en-US" altLang="en-US" sz="1600" dirty="0">
+                <a:solidFill>
+                  <a:srgbClr val="000000"/>
+                </a:solidFill>
+                <a:latin typeface="Arial Unicode MS" panose="020B0604020202020204" pitchFamily="34" charset="-128"/>
+                <a:ea typeface="Courier 10 Pitch"/>
+              </a:rPr>
+              <a:t>(</a:t>
+            </a:r>
+            <a:r>
+              <a:rPr lang="en-US" altLang="en-US" sz="1600" dirty="0" err="1">
+                <a:solidFill>
+                  <a:srgbClr val="000000"/>
+                </a:solidFill>
+                <a:latin typeface="Arial Unicode MS" panose="020B0604020202020204" pitchFamily="34" charset="-128"/>
+                <a:ea typeface="Courier 10 Pitch"/>
+              </a:rPr>
+              <a:t>b,c</a:t>
+            </a:r>
+            <a:r>
+              <a:rPr lang="en-US" altLang="en-US" sz="1600" dirty="0">
+                <a:solidFill>
+                  <a:srgbClr val="000000"/>
+                </a:solidFill>
+                <a:latin typeface="Arial Unicode MS" panose="020B0604020202020204" pitchFamily="34" charset="-128"/>
+                <a:ea typeface="Courier 10 Pitch"/>
+              </a:rPr>
+              <a:t>)</a:t>
+            </a:r>
+          </a:p>
+          <a:p>
+            <a:pPr eaLnBrk="1" hangingPunct="1"/>
+            <a:r>
+              <a:rPr lang="en-US" altLang="en-US" sz="1600" dirty="0">
+                <a:solidFill>
+                  <a:srgbClr val="000000"/>
+                </a:solidFill>
+                <a:latin typeface="Arial Unicode MS" panose="020B0604020202020204" pitchFamily="34" charset="-128"/>
+                <a:ea typeface="Courier 10 Pitch"/>
+              </a:rPr>
+              <a:t>   auto f = </a:t>
+            </a:r>
+            <a:r>
+              <a:rPr lang="en-US" altLang="en-US" sz="1600" dirty="0" err="1">
+                <a:solidFill>
+                  <a:srgbClr val="000000"/>
+                </a:solidFill>
+                <a:latin typeface="Arial Unicode MS" panose="020B0604020202020204" pitchFamily="34" charset="-128"/>
+                <a:ea typeface="Courier 10 Pitch"/>
+              </a:rPr>
+              <a:t>fma</a:t>
+            </a:r>
+            <a:r>
+              <a:rPr lang="en-US" altLang="en-US" sz="1600" dirty="0">
+                <a:solidFill>
+                  <a:srgbClr val="000000"/>
+                </a:solidFill>
+                <a:latin typeface="Arial Unicode MS" panose="020B0604020202020204" pitchFamily="34" charset="-128"/>
+                <a:ea typeface="Courier 10 Pitch"/>
+              </a:rPr>
+              <a:t>(a, d, -w); </a:t>
+            </a:r>
+          </a:p>
+          <a:p>
+            <a:pPr eaLnBrk="1" hangingPunct="1"/>
+            <a:r>
+              <a:rPr lang="en-US" altLang="en-US" sz="1600" dirty="0">
+                <a:solidFill>
+                  <a:srgbClr val="000000"/>
+                </a:solidFill>
+                <a:latin typeface="Arial Unicode MS" panose="020B0604020202020204" pitchFamily="34" charset="-128"/>
+                <a:ea typeface="Courier 10 Pitch"/>
+              </a:rPr>
+              <a:t>   return (</a:t>
+            </a:r>
+            <a:r>
+              <a:rPr lang="en-US" altLang="en-US" sz="1600" dirty="0" err="1">
+                <a:solidFill>
+                  <a:srgbClr val="000000"/>
+                </a:solidFill>
+                <a:latin typeface="Arial Unicode MS" panose="020B0604020202020204" pitchFamily="34" charset="-128"/>
+                <a:ea typeface="Courier 10 Pitch"/>
+              </a:rPr>
+              <a:t>f+e</a:t>
+            </a:r>
+            <a:r>
+              <a:rPr lang="en-US" altLang="en-US" sz="1600" dirty="0">
+                <a:solidFill>
+                  <a:srgbClr val="000000"/>
+                </a:solidFill>
+                <a:latin typeface="Arial Unicode MS" panose="020B0604020202020204" pitchFamily="34" charset="-128"/>
+                <a:ea typeface="Courier 10 Pitch"/>
+              </a:rPr>
+              <a:t>); </a:t>
+            </a:r>
+          </a:p>
+          <a:p>
+            <a:pPr eaLnBrk="1" hangingPunct="1"/>
+            <a:r>
+              <a:rPr lang="en-US" altLang="en-US" sz="1600" dirty="0">
+                <a:solidFill>
+                  <a:srgbClr val="000000"/>
+                </a:solidFill>
+                <a:latin typeface="Arial Unicode MS" panose="020B0604020202020204" pitchFamily="34" charset="-128"/>
+                <a:ea typeface="Courier 10 Pitch"/>
+              </a:rPr>
+              <a:t>}</a:t>
+            </a:r>
+            <a:endParaRPr lang="en-US" altLang="en-US" sz="3600" dirty="0"/>
+          </a:p>
+        </p:txBody>
+      </p:sp>
+    </p:spTree>
+    <p:extLst>
+      <p:ext uri="{BB962C8B-B14F-4D97-AF65-F5344CB8AC3E}">
+        <p14:creationId xmlns:p14="http://schemas.microsoft.com/office/powerpoint/2010/main" val="3367458698"/>
+      </p:ext>
+    </p:extLst>
+  </p:cSld>
+  <p:clrMapOvr>
+    <a:masterClrMapping/>
+  </p:clrMapOvr>
+</p:sld>
+</file>
+
+<file path=ppt/slides/slide24.xml><?xml version="1.0" encoding="utf-8"?>
+<p:sld xmlns:a="http://schemas.openxmlformats.org/drawingml/2006/main" xmlns:r="http://schemas.openxmlformats.org/officeDocument/2006/relationships" xmlns:p="http://schemas.openxmlformats.org/presentationml/2006/main">
+  <p:cSld>
+    <p:spTree>
+      <p:nvGrpSpPr>
+        <p:cNvPr id="1" name="">
+          <a:extLst>
+            <a:ext uri="{FF2B5EF4-FFF2-40B4-BE49-F238E27FC236}">
+              <a16:creationId xmlns:a16="http://schemas.microsoft.com/office/drawing/2014/main" id="{E9CE9581-E325-5E7E-0859-53684EED8073}"/>
+            </a:ext>
+          </a:extLst>
+        </p:cNvPr>
+        <p:cNvGrpSpPr/>
+        <p:nvPr/>
+      </p:nvGrpSpPr>
+      <p:grpSpPr>
+        <a:xfrm>
+          <a:off x="0" y="0"/>
+          <a:ext cx="0" cy="0"/>
+          <a:chOff x="0" y="0"/>
+          <a:chExt cx="0" cy="0"/>
+        </a:xfrm>
+      </p:grpSpPr>
+      <p:sp>
+        <p:nvSpPr>
+          <p:cNvPr id="4" name="Title 3">
+            <a:extLst>
+              <a:ext uri="{FF2B5EF4-FFF2-40B4-BE49-F238E27FC236}">
+                <a16:creationId xmlns:a16="http://schemas.microsoft.com/office/drawing/2014/main" id="{E9DA1CFB-C459-B481-2D99-2558956DF2B0}"/>
+              </a:ext>
+            </a:extLst>
+          </p:cNvPr>
+          <p:cNvSpPr>
+            <a:spLocks noGrp="1"/>
+          </p:cNvSpPr>
+          <p:nvPr>
+            <p:ph type="title"/>
+          </p:nvPr>
+        </p:nvSpPr>
+        <p:spPr>
+          <a:xfrm>
+            <a:off x="634142" y="2092798"/>
+            <a:ext cx="10515600" cy="1589516"/>
+          </a:xfrm>
+        </p:spPr>
+        <p:txBody>
+          <a:bodyPr>
+            <a:normAutofit/>
+          </a:bodyPr>
+          <a:lstStyle/>
+          <a:p>
+            <a:pPr algn="ctr"/>
+            <a:r>
+              <a:rPr lang="en-US" sz="9600">
+                <a:solidFill>
+                  <a:srgbClr val="FF0000"/>
+                </a:solidFill>
+                <a:highlight>
+                  <a:srgbClr val="FFFF00"/>
+                </a:highlight>
+              </a:rPr>
+              <a:t>EXERCISES</a:t>
+            </a:r>
+          </a:p>
+        </p:txBody>
+      </p:sp>
+      <p:sp>
+        <p:nvSpPr>
+          <p:cNvPr id="5" name="Text Placeholder 4">
+            <a:extLst>
+              <a:ext uri="{FF2B5EF4-FFF2-40B4-BE49-F238E27FC236}">
+                <a16:creationId xmlns:a16="http://schemas.microsoft.com/office/drawing/2014/main" id="{C9F988BC-AA84-EA5B-1D5E-2B46A6087546}"/>
+              </a:ext>
+            </a:extLst>
+          </p:cNvPr>
+          <p:cNvSpPr>
+            <a:spLocks noGrp="1"/>
+          </p:cNvSpPr>
+          <p:nvPr>
+            <p:ph type="body" idx="1"/>
+          </p:nvPr>
+        </p:nvSpPr>
+        <p:spPr>
+          <a:xfrm>
+            <a:off x="838200" y="4033409"/>
+            <a:ext cx="10515600" cy="1500187"/>
+          </a:xfrm>
+        </p:spPr>
+        <p:txBody>
+          <a:bodyPr>
+            <a:normAutofit fontScale="77500" lnSpcReduction="20000"/>
+          </a:bodyPr>
+          <a:lstStyle/>
+          <a:p>
+            <a:r>
+              <a:rPr lang="en-US"/>
+              <a:t>Either in Python or C++</a:t>
+            </a:r>
+          </a:p>
+          <a:p>
+            <a:endParaRPr lang="en-US"/>
+          </a:p>
+          <a:p>
+            <a:r>
+              <a:rPr lang="en-US"/>
+              <a:t>For C++ one can use </a:t>
+            </a:r>
+            <a:r>
+              <a:rPr lang="en-US" err="1"/>
+              <a:t>godbolt</a:t>
+            </a:r>
+            <a:r>
+              <a:rPr lang="en-US"/>
+              <a:t> (</a:t>
+            </a:r>
+            <a:r>
+              <a:rPr lang="en-US">
+                <a:hlinkClick r:id="rId2"/>
+              </a:rPr>
+              <a:t>https://godbolt.org/z/d1e18j3jK</a:t>
+            </a:r>
+            <a:r>
+              <a:rPr lang="en-US"/>
+              <a:t>  ) </a:t>
+            </a:r>
+          </a:p>
+          <a:p>
+            <a:r>
+              <a:rPr lang="en-US"/>
+              <a:t>For Python either a python3 shell on your PC, or a </a:t>
+            </a:r>
+            <a:r>
+              <a:rPr lang="en-US" err="1"/>
+              <a:t>jupyter</a:t>
+            </a:r>
+            <a:r>
+              <a:rPr lang="en-US"/>
+              <a:t> notebook or the browser shell in </a:t>
+            </a:r>
+            <a:r>
+              <a:rPr lang="en-US">
+                <a:hlinkClick r:id="rId3"/>
+              </a:rPr>
+              <a:t>https://numpy.org/</a:t>
+            </a:r>
+            <a:endParaRPr lang="en-US"/>
+          </a:p>
+          <a:p>
+            <a:endParaRPr lang="en-US"/>
+          </a:p>
+        </p:txBody>
+      </p:sp>
+    </p:spTree>
+    <p:extLst>
+      <p:ext uri="{BB962C8B-B14F-4D97-AF65-F5344CB8AC3E}">
+        <p14:creationId xmlns:p14="http://schemas.microsoft.com/office/powerpoint/2010/main" val="2176430983"/>
+      </p:ext>
+    </p:extLst>
+  </p:cSld>
+  <p:clrMapOvr>
+    <a:masterClrMapping/>
+  </p:clrMapOvr>
+</p:sld>
+</file>
+
+<file path=ppt/slides/slide25.xml><?xml version="1.0" encoding="utf-8"?>
+<p:sld xmlns:a="http://schemas.openxmlformats.org/drawingml/2006/main" xmlns:r="http://schemas.openxmlformats.org/officeDocument/2006/relationships" xmlns:p="http://schemas.openxmlformats.org/presentationml/2006/main">
+  <p:cSld>
+    <p:spTree>
+      <p:nvGrpSpPr>
+        <p:cNvPr id="1" name=""/>
+        <p:cNvGrpSpPr/>
+        <p:nvPr/>
+      </p:nvGrpSpPr>
+      <p:grpSpPr>
+        <a:xfrm>
+          <a:off x="0" y="0"/>
+          <a:ext cx="0" cy="0"/>
+          <a:chOff x="0" y="0"/>
+          <a:chExt cx="0" cy="0"/>
+        </a:xfrm>
+      </p:grpSpPr>
+      <p:sp>
+        <p:nvSpPr>
+          <p:cNvPr id="5" name="Content Placeholder 4">
+            <a:extLst>
+              <a:ext uri="{FF2B5EF4-FFF2-40B4-BE49-F238E27FC236}">
+                <a16:creationId xmlns:a16="http://schemas.microsoft.com/office/drawing/2014/main" id="{97EAC43B-26A5-792A-9D83-2D4F75A3F27E}"/>
+              </a:ext>
+            </a:extLst>
+          </p:cNvPr>
+          <p:cNvSpPr>
+            <a:spLocks noGrp="1"/>
+          </p:cNvSpPr>
+          <p:nvPr>
+            <p:ph idx="4294967295"/>
+          </p:nvPr>
+        </p:nvSpPr>
+        <p:spPr>
+          <a:xfrm>
+            <a:off x="530492" y="541337"/>
+            <a:ext cx="10515600" cy="2887663"/>
+          </a:xfrm>
+        </p:spPr>
+        <p:txBody>
+          <a:bodyPr>
+            <a:normAutofit fontScale="92500" lnSpcReduction="10000"/>
+          </a:bodyPr>
+          <a:lstStyle/>
+          <a:p>
+            <a:r>
+              <a:rPr lang="en-US" dirty="0"/>
+              <a:t>Sum T(0.1) 10000 times in binary32, binary64, decimal2, decimal5</a:t>
+            </a:r>
+          </a:p>
+          <a:p>
+            <a:pPr lvl="1"/>
+            <a:r>
+              <a:rPr lang="en-US" dirty="0"/>
+              <a:t>Google for “patriot failure”</a:t>
+            </a:r>
+          </a:p>
+          <a:p>
+            <a:r>
+              <a:rPr lang="en-US" dirty="0"/>
+              <a:t>Sum 10</a:t>
+            </a:r>
+            <a:r>
+              <a:rPr lang="en-US" baseline="30000" dirty="0"/>
+              <a:t>9</a:t>
+            </a:r>
+            <a:r>
+              <a:rPr lang="en-US" dirty="0"/>
+              <a:t> positive random numbers (in range   10</a:t>
+            </a:r>
+            <a:r>
+              <a:rPr lang="en-US" baseline="30000" dirty="0"/>
+              <a:t>-n</a:t>
+            </a:r>
+            <a:r>
+              <a:rPr lang="en-US" dirty="0"/>
+              <a:t>, 10</a:t>
+            </a:r>
+            <a:r>
+              <a:rPr lang="en-US" baseline="30000" dirty="0"/>
+              <a:t>+n</a:t>
+            </a:r>
+            <a:r>
+              <a:rPr lang="en-US" dirty="0"/>
+              <a:t> )</a:t>
+            </a:r>
+          </a:p>
+          <a:p>
+            <a:pPr lvl="1"/>
+            <a:r>
+              <a:rPr lang="en-US" dirty="0"/>
+              <a:t>Typical in </a:t>
+            </a:r>
+            <a:r>
+              <a:rPr lang="en-US" dirty="0" err="1"/>
+              <a:t>unbinned</a:t>
+            </a:r>
+            <a:r>
+              <a:rPr lang="en-US" dirty="0"/>
+              <a:t> log-</a:t>
+            </a:r>
+            <a:r>
+              <a:rPr lang="en-US" dirty="0" err="1"/>
+              <a:t>likehood</a:t>
+            </a:r>
+            <a:endParaRPr lang="en-US" dirty="0"/>
+          </a:p>
+          <a:p>
+            <a:r>
+              <a:rPr lang="en-US" dirty="0"/>
+              <a:t>Compute the average age of all humans on earth</a:t>
+            </a:r>
+          </a:p>
+          <a:p>
+            <a:endParaRPr lang="en-US" dirty="0"/>
+          </a:p>
+          <a:p>
+            <a:r>
+              <a:rPr lang="en-US" dirty="0"/>
+              <a:t>Compute π as the integral of 4/(1+x</a:t>
+            </a:r>
+            <a:r>
+              <a:rPr lang="en-US" baseline="30000" dirty="0"/>
+              <a:t>2</a:t>
+            </a:r>
+            <a:r>
+              <a:rPr lang="en-US" dirty="0"/>
+              <a:t>) between 0 and 1</a:t>
+            </a:r>
+            <a:endParaRPr lang="en-US" baseline="30000" dirty="0"/>
+          </a:p>
+        </p:txBody>
+      </p:sp>
+      <p:pic>
+        <p:nvPicPr>
+          <p:cNvPr id="6" name="Picture 5">
+            <a:extLst>
+              <a:ext uri="{FF2B5EF4-FFF2-40B4-BE49-F238E27FC236}">
+                <a16:creationId xmlns:a16="http://schemas.microsoft.com/office/drawing/2014/main" id="{69D55FF4-1135-3B72-0E12-51A04E264779}"/>
+              </a:ext>
+            </a:extLst>
+          </p:cNvPr>
+          <p:cNvPicPr>
+            <a:picLocks noChangeAspect="1"/>
+          </p:cNvPicPr>
+          <p:nvPr/>
+        </p:nvPicPr>
+        <p:blipFill>
+          <a:blip r:embed="rId2"/>
+          <a:stretch>
+            <a:fillRect/>
+          </a:stretch>
+        </p:blipFill>
+        <p:spPr>
+          <a:xfrm>
+            <a:off x="702087" y="3613194"/>
+            <a:ext cx="4630750" cy="2891830"/>
+          </a:xfrm>
+          <a:prstGeom prst="rect">
+            <a:avLst/>
+          </a:prstGeom>
+        </p:spPr>
+      </p:pic>
+      <p:pic>
+        <p:nvPicPr>
+          <p:cNvPr id="7" name="Picture 6">
+            <a:extLst>
+              <a:ext uri="{FF2B5EF4-FFF2-40B4-BE49-F238E27FC236}">
+                <a16:creationId xmlns:a16="http://schemas.microsoft.com/office/drawing/2014/main" id="{87F7091E-0E56-FB7A-8067-4CBEA073965E}"/>
+              </a:ext>
+            </a:extLst>
+          </p:cNvPr>
+          <p:cNvPicPr>
+            <a:picLocks noChangeAspect="1"/>
+          </p:cNvPicPr>
+          <p:nvPr/>
+        </p:nvPicPr>
+        <p:blipFill>
+          <a:blip r:embed="rId3"/>
+          <a:stretch>
+            <a:fillRect/>
+          </a:stretch>
+        </p:blipFill>
+        <p:spPr>
+          <a:xfrm>
+            <a:off x="6266627" y="3515270"/>
+            <a:ext cx="4203603" cy="3172345"/>
+          </a:xfrm>
+          <a:prstGeom prst="rect">
+            <a:avLst/>
+          </a:prstGeom>
+        </p:spPr>
+      </p:pic>
+    </p:spTree>
+    <p:extLst>
+      <p:ext uri="{BB962C8B-B14F-4D97-AF65-F5344CB8AC3E}">
+        <p14:creationId xmlns:p14="http://schemas.microsoft.com/office/powerpoint/2010/main" val="3956750112"/>
+      </p:ext>
+    </p:extLst>
+  </p:cSld>
+  <p:clrMapOvr>
+    <a:masterClrMapping/>
+  </p:clrMapOvr>
+</p:sld>
+</file>
+
+<file path=ppt/slides/slide26.xml><?xml version="1.0" encoding="utf-8"?>
+<p:sld xmlns:a="http://schemas.openxmlformats.org/drawingml/2006/main" xmlns:r="http://schemas.openxmlformats.org/officeDocument/2006/relationships" xmlns:p="http://schemas.openxmlformats.org/presentationml/2006/main">
+  <p:cSld>
+    <p:spTree>
+      <p:nvGrpSpPr>
+        <p:cNvPr id="1" name=""/>
+        <p:cNvGrpSpPr/>
+        <p:nvPr/>
+      </p:nvGrpSpPr>
+      <p:grpSpPr>
+        <a:xfrm>
+          <a:off x="0" y="0"/>
+          <a:ext cx="0" cy="0"/>
+          <a:chOff x="0" y="0"/>
+          <a:chExt cx="0" cy="0"/>
+        </a:xfrm>
+      </p:grpSpPr>
+      <p:sp>
+        <p:nvSpPr>
+          <p:cNvPr id="7" name="TextBox 5">
+            <a:extLst>
+              <a:ext uri="{FF2B5EF4-FFF2-40B4-BE49-F238E27FC236}">
+                <a16:creationId xmlns:a16="http://schemas.microsoft.com/office/drawing/2014/main" id="{12C6D14A-6777-8EE3-EC4F-B8691190307B}"/>
+              </a:ext>
+            </a:extLst>
+          </p:cNvPr>
+          <p:cNvSpPr txBox="1">
+            <a:spLocks noChangeArrowheads="1"/>
+          </p:cNvSpPr>
+          <p:nvPr/>
+        </p:nvSpPr>
+        <p:spPr bwMode="auto">
+          <a:xfrm>
+            <a:off x="0" y="517803"/>
+            <a:ext cx="6682946" cy="6340197"/>
+          </a:xfrm>
+          <a:prstGeom prst="rect">
+            <a:avLst/>
+          </a:prstGeom>
+          <a:solidFill>
+            <a:srgbClr val="FFFF00"/>
+          </a:solidFill>
+          <a:ln>
+            <a:noFill/>
+          </a:ln>
+          <a:extLst>
+            <a:ext uri="{91240B29-F687-4F45-9708-019B960494DF}">
+              <a14:hiddenLine xmlns:a14="http://schemas.microsoft.com/office/drawing/2010/main" w="9525">
+                <a:solidFill>
+                  <a:srgbClr val="000000"/>
+                </a:solidFill>
+                <a:miter lim="800000"/>
+                <a:headEnd/>
+                <a:tailEnd/>
+              </a14:hiddenLine>
+            </a:ext>
+          </a:extLst>
+        </p:spPr>
+        <p:txBody>
+          <a:bodyPr wrap="square">
+            <a:spAutoFit/>
+          </a:bodyPr>
+          <a:lstStyle>
+            <a:lvl1pPr eaLnBrk="0" hangingPunct="0">
+              <a:defRPr sz="2400">
+                <a:solidFill>
+                  <a:schemeClr val="tx1"/>
+                </a:solidFill>
+                <a:latin typeface="Arial" charset="0"/>
+                <a:ea typeface="ＭＳ Ｐゴシック" charset="-128"/>
+              </a:defRPr>
+            </a:lvl1pPr>
+            <a:lvl2pPr marL="742950" indent="-285750" eaLnBrk="0" hangingPunct="0">
+              <a:defRPr sz="2400">
+                <a:solidFill>
+                  <a:schemeClr val="tx1"/>
+                </a:solidFill>
+                <a:latin typeface="Arial" charset="0"/>
+                <a:ea typeface="ＭＳ Ｐゴシック" charset="-128"/>
+              </a:defRPr>
+            </a:lvl2pPr>
+            <a:lvl3pPr marL="1143000" indent="-228600" eaLnBrk="0" hangingPunct="0">
+              <a:defRPr sz="2400">
+                <a:solidFill>
+                  <a:schemeClr val="tx1"/>
+                </a:solidFill>
+                <a:latin typeface="Arial" charset="0"/>
+                <a:ea typeface="ＭＳ Ｐゴシック" charset="-128"/>
+              </a:defRPr>
+            </a:lvl3pPr>
+            <a:lvl4pPr marL="1600200" indent="-228600" eaLnBrk="0" hangingPunct="0">
+              <a:defRPr sz="2400">
+                <a:solidFill>
+                  <a:schemeClr val="tx1"/>
+                </a:solidFill>
+                <a:latin typeface="Arial" charset="0"/>
+                <a:ea typeface="ＭＳ Ｐゴシック" charset="-128"/>
+              </a:defRPr>
+            </a:lvl4pPr>
+            <a:lvl5pPr marL="2057400" indent="-228600" eaLnBrk="0" hangingPunct="0">
+              <a:defRPr sz="2400">
+                <a:solidFill>
+                  <a:schemeClr val="tx1"/>
+                </a:solidFill>
+                <a:latin typeface="Arial" charset="0"/>
+                <a:ea typeface="ＭＳ Ｐゴシック" charset="-128"/>
+              </a:defRPr>
+            </a:lvl5pPr>
+            <a:lvl6pPr marL="2514600" indent="-228600" eaLnBrk="0" fontAlgn="base" hangingPunct="0">
+              <a:spcBef>
+                <a:spcPct val="0"/>
+              </a:spcBef>
+              <a:spcAft>
+                <a:spcPct val="0"/>
+              </a:spcAft>
+              <a:defRPr sz="2400">
+                <a:solidFill>
+                  <a:schemeClr val="tx1"/>
+                </a:solidFill>
+                <a:latin typeface="Arial" charset="0"/>
+                <a:ea typeface="ＭＳ Ｐゴシック" charset="-128"/>
+              </a:defRPr>
+            </a:lvl6pPr>
+            <a:lvl7pPr marL="2971800" indent="-228600" eaLnBrk="0" fontAlgn="base" hangingPunct="0">
+              <a:spcBef>
+                <a:spcPct val="0"/>
+              </a:spcBef>
+              <a:spcAft>
+                <a:spcPct val="0"/>
+              </a:spcAft>
+              <a:defRPr sz="2400">
+                <a:solidFill>
+                  <a:schemeClr val="tx1"/>
+                </a:solidFill>
+                <a:latin typeface="Arial" charset="0"/>
+                <a:ea typeface="ＭＳ Ｐゴシック" charset="-128"/>
+              </a:defRPr>
+            </a:lvl7pPr>
+            <a:lvl8pPr marL="3429000" indent="-228600" eaLnBrk="0" fontAlgn="base" hangingPunct="0">
+              <a:spcBef>
+                <a:spcPct val="0"/>
+              </a:spcBef>
+              <a:spcAft>
+                <a:spcPct val="0"/>
+              </a:spcAft>
+              <a:defRPr sz="2400">
+                <a:solidFill>
+                  <a:schemeClr val="tx1"/>
+                </a:solidFill>
+                <a:latin typeface="Arial" charset="0"/>
+                <a:ea typeface="ＭＳ Ｐゴシック" charset="-128"/>
+              </a:defRPr>
+            </a:lvl8pPr>
+            <a:lvl9pPr marL="3886200" indent="-228600" eaLnBrk="0" fontAlgn="base" hangingPunct="0">
+              <a:spcBef>
+                <a:spcPct val="0"/>
+              </a:spcBef>
+              <a:spcAft>
+                <a:spcPct val="0"/>
+              </a:spcAft>
+              <a:defRPr sz="2400">
+                <a:solidFill>
+                  <a:schemeClr val="tx1"/>
+                </a:solidFill>
+                <a:latin typeface="Arial" charset="0"/>
+                <a:ea typeface="ＭＳ Ｐゴシック" charset="-128"/>
+              </a:defRPr>
+            </a:lvl9pPr>
+          </a:lstStyle>
+          <a:p>
+            <a:pPr eaLnBrk="1" hangingPunct="1"/>
+            <a:r>
+              <a:rPr lang="en-US" altLang="x-none" sz="1400" dirty="0"/>
+              <a:t>#include &lt;iostream&gt;</a:t>
+            </a:r>
+          </a:p>
+          <a:p>
+            <a:pPr eaLnBrk="1" hangingPunct="1"/>
+            <a:r>
+              <a:rPr lang="en-US" altLang="x-none" sz="1400" dirty="0"/>
+              <a:t>#include &lt;</a:t>
+            </a:r>
+            <a:r>
+              <a:rPr lang="en-US" altLang="x-none" sz="1400" dirty="0" err="1"/>
+              <a:t>iomanip</a:t>
+            </a:r>
+            <a:r>
+              <a:rPr lang="en-US" altLang="x-none" sz="1400" dirty="0"/>
+              <a:t>&gt;</a:t>
+            </a:r>
+          </a:p>
+          <a:p>
+            <a:pPr eaLnBrk="1" hangingPunct="1"/>
+            <a:r>
+              <a:rPr lang="en-US" altLang="x-none" sz="1400" dirty="0"/>
+              <a:t>#include &lt;random&gt;</a:t>
+            </a:r>
+          </a:p>
+          <a:p>
+            <a:pPr eaLnBrk="1" hangingPunct="1"/>
+            <a:r>
+              <a:rPr lang="en-US" altLang="x-none" sz="1400" dirty="0"/>
+              <a:t>#include &lt;algorithm&gt;</a:t>
+            </a:r>
+          </a:p>
+          <a:p>
+            <a:pPr eaLnBrk="1" hangingPunct="1"/>
+            <a:r>
+              <a:rPr lang="en-US" altLang="x-none" sz="1400" dirty="0"/>
+              <a:t>#include &lt;</a:t>
+            </a:r>
+            <a:r>
+              <a:rPr lang="en-US" altLang="x-none" sz="1400" dirty="0" err="1"/>
+              <a:t>cmath</a:t>
+            </a:r>
+            <a:r>
+              <a:rPr lang="en-US" altLang="x-none" sz="1400" dirty="0"/>
+              <a:t>&gt;</a:t>
+            </a:r>
+          </a:p>
+          <a:p>
+            <a:pPr eaLnBrk="1" hangingPunct="1"/>
+            <a:r>
+              <a:rPr lang="en-US" altLang="x-none" sz="1400" dirty="0"/>
+              <a:t>int main()</a:t>
+            </a:r>
+          </a:p>
+          <a:p>
+            <a:pPr eaLnBrk="1" hangingPunct="1"/>
+            <a:r>
+              <a:rPr lang="en-US" altLang="x-none" sz="1400" dirty="0"/>
+              <a:t>{</a:t>
+            </a:r>
+          </a:p>
+          <a:p>
+            <a:pPr eaLnBrk="1" hangingPunct="1"/>
+            <a:r>
+              <a:rPr lang="en-US" altLang="x-none" sz="1400" dirty="0"/>
+              <a:t>    std::</a:t>
+            </a:r>
+            <a:r>
+              <a:rPr lang="en-US" altLang="x-none" sz="1400" dirty="0" err="1"/>
+              <a:t>random_device</a:t>
+            </a:r>
+            <a:r>
+              <a:rPr lang="en-US" altLang="x-none" sz="1400" dirty="0"/>
+              <a:t> </a:t>
+            </a:r>
+            <a:r>
+              <a:rPr lang="en-US" altLang="x-none" sz="1400" dirty="0" err="1"/>
+              <a:t>rd</a:t>
+            </a:r>
+            <a:r>
+              <a:rPr lang="en-US" altLang="x-none" sz="1400" dirty="0"/>
+              <a:t>;  // to obtain a seed for the random number engine</a:t>
+            </a:r>
+          </a:p>
+          <a:p>
+            <a:pPr eaLnBrk="1" hangingPunct="1"/>
+            <a:r>
+              <a:rPr lang="en-US" altLang="x-none" sz="1400" dirty="0"/>
+              <a:t>    std::mt19937 gen(</a:t>
+            </a:r>
+            <a:r>
+              <a:rPr lang="en-US" altLang="x-none" sz="1400" dirty="0" err="1"/>
+              <a:t>rd</a:t>
+            </a:r>
+            <a:r>
+              <a:rPr lang="en-US" altLang="x-none" sz="1400" dirty="0"/>
+              <a:t>()); // Standard </a:t>
+            </a:r>
+            <a:r>
+              <a:rPr lang="en-US" altLang="x-none" sz="1400" dirty="0" err="1"/>
+              <a:t>mersenne_twister_engine</a:t>
+            </a:r>
+            <a:r>
+              <a:rPr lang="en-US" altLang="x-none" sz="1400" dirty="0"/>
+              <a:t> seeded with </a:t>
+            </a:r>
+            <a:r>
+              <a:rPr lang="en-US" altLang="x-none" sz="1400" dirty="0" err="1"/>
+              <a:t>rd</a:t>
+            </a:r>
+            <a:r>
+              <a:rPr lang="en-US" altLang="x-none" sz="1400" dirty="0"/>
+              <a:t>()</a:t>
+            </a:r>
+          </a:p>
+          <a:p>
+            <a:pPr eaLnBrk="1" hangingPunct="1"/>
+            <a:r>
+              <a:rPr lang="en-US" altLang="x-none" sz="1400" dirty="0"/>
+              <a:t>    std::</a:t>
+            </a:r>
+            <a:r>
+              <a:rPr lang="en-US" altLang="x-none" sz="1400" dirty="0" err="1"/>
+              <a:t>uniform_real_distribution</a:t>
+            </a:r>
+            <a:r>
+              <a:rPr lang="en-US" altLang="x-none" sz="1400" dirty="0"/>
+              <a:t>&lt;float&gt; dis(-1.0, 1.0); </a:t>
+            </a:r>
+          </a:p>
+          <a:p>
+            <a:pPr eaLnBrk="1" hangingPunct="1"/>
+            <a:r>
+              <a:rPr lang="en-US" altLang="x-none" sz="1400" dirty="0"/>
+              <a:t>    </a:t>
+            </a:r>
+            <a:r>
+              <a:rPr lang="en-US" altLang="x-none" sz="1400" dirty="0" err="1"/>
+              <a:t>size_t</a:t>
+            </a:r>
+            <a:r>
+              <a:rPr lang="en-US" altLang="x-none" sz="1400" dirty="0"/>
+              <a:t> N = 40*1000*1000;</a:t>
+            </a:r>
+          </a:p>
+          <a:p>
+            <a:pPr eaLnBrk="1" hangingPunct="1"/>
+            <a:r>
+              <a:rPr lang="en-US" altLang="x-none" sz="1400" dirty="0"/>
+              <a:t>    float * x = new float[N];</a:t>
+            </a:r>
+          </a:p>
+          <a:p>
+            <a:pPr eaLnBrk="1" hangingPunct="1"/>
+            <a:r>
+              <a:rPr lang="en-US" altLang="x-none" sz="1400" dirty="0"/>
+              <a:t>    for (int n = 0; n &lt; N; ++n) {</a:t>
+            </a:r>
+          </a:p>
+          <a:p>
+            <a:pPr eaLnBrk="1" hangingPunct="1"/>
+            <a:r>
+              <a:rPr lang="en-US" altLang="x-none" sz="1400" dirty="0"/>
+              <a:t>        // Use dis to transform the random unsigned int generated by gen into a</a:t>
+            </a:r>
+          </a:p>
+          <a:p>
+            <a:pPr eaLnBrk="1" hangingPunct="1"/>
+            <a:r>
+              <a:rPr lang="en-US" altLang="x-none" sz="1400" dirty="0"/>
+              <a:t>        // float in [-1, 1). Each call to dis(gen) generates a new random float.</a:t>
+            </a:r>
+          </a:p>
+          <a:p>
+            <a:pPr eaLnBrk="1" hangingPunct="1"/>
+            <a:r>
+              <a:rPr lang="en-US" altLang="x-none" sz="1400" dirty="0"/>
+              <a:t>        x[n] = dis(gen);</a:t>
+            </a:r>
+          </a:p>
+          <a:p>
+            <a:pPr eaLnBrk="1" hangingPunct="1"/>
+            <a:r>
+              <a:rPr lang="en-US" altLang="x-none" sz="1400" dirty="0"/>
+              <a:t>    }</a:t>
+            </a:r>
+          </a:p>
+          <a:p>
+            <a:pPr eaLnBrk="1" hangingPunct="1"/>
+            <a:r>
+              <a:rPr lang="en-US" altLang="x-none" sz="1400" dirty="0"/>
+              <a:t>    // sort in absolute value</a:t>
+            </a:r>
+          </a:p>
+          <a:p>
+            <a:pPr eaLnBrk="1" hangingPunct="1"/>
+            <a:r>
+              <a:rPr lang="en-US" altLang="x-none" sz="1400" dirty="0"/>
+              <a:t>    std::sort(</a:t>
+            </a:r>
+            <a:r>
+              <a:rPr lang="en-US" altLang="x-none" sz="1400" dirty="0" err="1"/>
+              <a:t>x,x+N</a:t>
+            </a:r>
+            <a:r>
+              <a:rPr lang="en-US" altLang="x-none" sz="1400" dirty="0"/>
+              <a:t>,[](float a, float b) { return std::abs(a) &lt; std::abs(b);});</a:t>
+            </a:r>
+          </a:p>
+          <a:p>
+            <a:pPr eaLnBrk="1" hangingPunct="1"/>
+            <a:r>
+              <a:rPr lang="en-US" altLang="x-none" sz="1400" dirty="0"/>
+              <a:t>    // print first and last 40</a:t>
+            </a:r>
+          </a:p>
+          <a:p>
+            <a:pPr eaLnBrk="1" hangingPunct="1"/>
+            <a:r>
+              <a:rPr lang="en-US" altLang="x-none" sz="1400" dirty="0"/>
+              <a:t>    for (int </a:t>
+            </a:r>
+            <a:r>
+              <a:rPr lang="en-US" altLang="x-none" sz="1400" dirty="0" err="1"/>
+              <a:t>i</a:t>
+            </a:r>
+            <a:r>
+              <a:rPr lang="en-US" altLang="x-none" sz="1400" dirty="0"/>
+              <a:t>=0; </a:t>
+            </a:r>
+            <a:r>
+              <a:rPr lang="en-US" altLang="x-none" sz="1400" dirty="0" err="1"/>
+              <a:t>i</a:t>
+            </a:r>
+            <a:r>
+              <a:rPr lang="en-US" altLang="x-none" sz="1400" dirty="0"/>
+              <a:t>&lt;40; ++</a:t>
+            </a:r>
+            <a:r>
+              <a:rPr lang="en-US" altLang="x-none" sz="1400" dirty="0" err="1"/>
+              <a:t>i</a:t>
+            </a:r>
+            <a:r>
+              <a:rPr lang="en-US" altLang="x-none" sz="1400" dirty="0"/>
+              <a:t>) std::</a:t>
+            </a:r>
+            <a:r>
+              <a:rPr lang="en-US" altLang="x-none" sz="1400" dirty="0" err="1"/>
+              <a:t>cout</a:t>
+            </a:r>
+            <a:r>
+              <a:rPr lang="en-US" altLang="x-none" sz="1400" dirty="0"/>
+              <a:t> &lt;&lt; x[</a:t>
+            </a:r>
+            <a:r>
+              <a:rPr lang="en-US" altLang="x-none" sz="1400" dirty="0" err="1"/>
+              <a:t>i</a:t>
+            </a:r>
+            <a:r>
+              <a:rPr lang="en-US" altLang="x-none" sz="1400" dirty="0"/>
+              <a:t>] &lt;&lt; ' ‘; std::</a:t>
+            </a:r>
+            <a:r>
+              <a:rPr lang="en-US" altLang="x-none" sz="1400" dirty="0" err="1"/>
+              <a:t>cout</a:t>
+            </a:r>
+            <a:r>
+              <a:rPr lang="en-US" altLang="x-none" sz="1400" dirty="0"/>
+              <a:t> &lt;&lt; '\n';</a:t>
+            </a:r>
+          </a:p>
+          <a:p>
+            <a:pPr eaLnBrk="1" hangingPunct="1"/>
+            <a:r>
+              <a:rPr lang="en-US" altLang="x-none" sz="1400" dirty="0"/>
+              <a:t>    for (int </a:t>
+            </a:r>
+            <a:r>
+              <a:rPr lang="en-US" altLang="x-none" sz="1400" dirty="0" err="1"/>
+              <a:t>i</a:t>
+            </a:r>
+            <a:r>
+              <a:rPr lang="en-US" altLang="x-none" sz="1400" dirty="0"/>
+              <a:t>=0; </a:t>
+            </a:r>
+            <a:r>
+              <a:rPr lang="en-US" altLang="x-none" sz="1400" dirty="0" err="1"/>
+              <a:t>i</a:t>
+            </a:r>
+            <a:r>
+              <a:rPr lang="en-US" altLang="x-none" sz="1400" dirty="0"/>
+              <a:t>&lt;40; ++</a:t>
+            </a:r>
+            <a:r>
+              <a:rPr lang="en-US" altLang="x-none" sz="1400" dirty="0" err="1"/>
+              <a:t>i</a:t>
+            </a:r>
+            <a:r>
+              <a:rPr lang="en-US" altLang="x-none" sz="1400" dirty="0"/>
+              <a:t>) std::</a:t>
+            </a:r>
+            <a:r>
+              <a:rPr lang="en-US" altLang="x-none" sz="1400" dirty="0" err="1"/>
+              <a:t>cout</a:t>
+            </a:r>
+            <a:r>
+              <a:rPr lang="en-US" altLang="x-none" sz="1400" dirty="0"/>
+              <a:t> &lt;&lt; x[N-1-i] &lt;&lt; ' ‘; std::</a:t>
+            </a:r>
+            <a:r>
+              <a:rPr lang="en-US" altLang="x-none" sz="1400" dirty="0" err="1"/>
+              <a:t>cout</a:t>
+            </a:r>
+            <a:r>
+              <a:rPr lang="en-US" altLang="x-none" sz="1400" dirty="0"/>
+              <a:t> &lt;&lt; '\n’; std::</a:t>
+            </a:r>
+            <a:r>
+              <a:rPr lang="en-US" altLang="x-none" sz="1400" dirty="0" err="1"/>
+              <a:t>cout</a:t>
+            </a:r>
+            <a:r>
+              <a:rPr lang="en-US" altLang="x-none" sz="1400" dirty="0"/>
+              <a:t> &lt;&lt; '\n';</a:t>
+            </a:r>
+          </a:p>
+          <a:p>
+            <a:pPr eaLnBrk="1" hangingPunct="1"/>
+            <a:r>
+              <a:rPr lang="en-US" altLang="x-none" sz="1400" dirty="0"/>
+              <a:t>    std::</a:t>
+            </a:r>
+            <a:r>
+              <a:rPr lang="en-US" altLang="x-none" sz="1400" dirty="0" err="1"/>
+              <a:t>cout</a:t>
+            </a:r>
+            <a:r>
+              <a:rPr lang="en-US" altLang="x-none" sz="1400" dirty="0"/>
+              <a:t> &lt;&lt; std::</a:t>
+            </a:r>
+            <a:r>
+              <a:rPr lang="en-US" altLang="x-none" sz="1400" dirty="0" err="1"/>
+              <a:t>hexfloat</a:t>
+            </a:r>
+            <a:r>
+              <a:rPr lang="en-US" altLang="x-none" sz="1400" dirty="0"/>
+              <a:t>;</a:t>
+            </a:r>
+          </a:p>
+          <a:p>
+            <a:pPr eaLnBrk="1" hangingPunct="1"/>
+            <a:r>
+              <a:rPr lang="en-US" altLang="x-none" sz="1400" dirty="0"/>
+              <a:t>    for (int </a:t>
+            </a:r>
+            <a:r>
+              <a:rPr lang="en-US" altLang="x-none" sz="1400" dirty="0" err="1"/>
+              <a:t>i</a:t>
+            </a:r>
+            <a:r>
+              <a:rPr lang="en-US" altLang="x-none" sz="1400" dirty="0"/>
+              <a:t>=0; </a:t>
+            </a:r>
+            <a:r>
+              <a:rPr lang="en-US" altLang="x-none" sz="1400" dirty="0" err="1"/>
+              <a:t>i</a:t>
+            </a:r>
+            <a:r>
+              <a:rPr lang="en-US" altLang="x-none" sz="1400" dirty="0"/>
+              <a:t>&lt;40; ++</a:t>
+            </a:r>
+            <a:r>
+              <a:rPr lang="en-US" altLang="x-none" sz="1400" dirty="0" err="1"/>
+              <a:t>i</a:t>
+            </a:r>
+            <a:r>
+              <a:rPr lang="en-US" altLang="x-none" sz="1400" dirty="0"/>
+              <a:t>) std::</a:t>
+            </a:r>
+            <a:r>
+              <a:rPr lang="en-US" altLang="x-none" sz="1400" dirty="0" err="1"/>
+              <a:t>cout</a:t>
+            </a:r>
+            <a:r>
+              <a:rPr lang="en-US" altLang="x-none" sz="1400" dirty="0"/>
+              <a:t> &lt;&lt; x[</a:t>
+            </a:r>
+            <a:r>
+              <a:rPr lang="en-US" altLang="x-none" sz="1400" dirty="0" err="1"/>
+              <a:t>i</a:t>
+            </a:r>
+            <a:r>
+              <a:rPr lang="en-US" altLang="x-none" sz="1400" dirty="0"/>
+              <a:t>] &lt;&lt; ' ‘; std::</a:t>
+            </a:r>
+            <a:r>
+              <a:rPr lang="en-US" altLang="x-none" sz="1400" dirty="0" err="1"/>
+              <a:t>cout</a:t>
+            </a:r>
+            <a:r>
+              <a:rPr lang="en-US" altLang="x-none" sz="1400" dirty="0"/>
+              <a:t> &lt;&lt; '\n’;</a:t>
+            </a:r>
+          </a:p>
+          <a:p>
+            <a:pPr eaLnBrk="1" hangingPunct="1"/>
+            <a:r>
+              <a:rPr lang="en-US" altLang="x-none" sz="1400" dirty="0"/>
+              <a:t>    for (int </a:t>
+            </a:r>
+            <a:r>
+              <a:rPr lang="en-US" altLang="x-none" sz="1400" dirty="0" err="1"/>
+              <a:t>i</a:t>
+            </a:r>
+            <a:r>
+              <a:rPr lang="en-US" altLang="x-none" sz="1400" dirty="0"/>
+              <a:t>=0; </a:t>
+            </a:r>
+            <a:r>
+              <a:rPr lang="en-US" altLang="x-none" sz="1400" dirty="0" err="1"/>
+              <a:t>i</a:t>
+            </a:r>
+            <a:r>
+              <a:rPr lang="en-US" altLang="x-none" sz="1400" dirty="0"/>
+              <a:t>&lt;40; ++</a:t>
+            </a:r>
+            <a:r>
+              <a:rPr lang="en-US" altLang="x-none" sz="1400" dirty="0" err="1"/>
+              <a:t>i</a:t>
+            </a:r>
+            <a:r>
+              <a:rPr lang="en-US" altLang="x-none" sz="1400" dirty="0"/>
+              <a:t>) std::</a:t>
+            </a:r>
+            <a:r>
+              <a:rPr lang="en-US" altLang="x-none" sz="1400" dirty="0" err="1"/>
+              <a:t>cout</a:t>
+            </a:r>
+            <a:r>
+              <a:rPr lang="en-US" altLang="x-none" sz="1400" dirty="0"/>
+              <a:t> &lt;&lt; x[N-1-i] &lt;&lt; ' ‘; std::</a:t>
+            </a:r>
+            <a:r>
+              <a:rPr lang="en-US" altLang="x-none" sz="1400" dirty="0" err="1"/>
+              <a:t>cout</a:t>
+            </a:r>
+            <a:r>
+              <a:rPr lang="en-US" altLang="x-none" sz="1400" dirty="0"/>
+              <a:t> &lt;&lt; '\n';</a:t>
+            </a:r>
+          </a:p>
+          <a:p>
+            <a:pPr eaLnBrk="1" hangingPunct="1"/>
+            <a:endParaRPr lang="en-US" altLang="x-none" sz="1400" dirty="0"/>
+          </a:p>
+          <a:p>
+            <a:pPr eaLnBrk="1" hangingPunct="1"/>
+            <a:r>
+              <a:rPr lang="en-US" altLang="x-none" sz="1400" dirty="0"/>
+              <a:t>    delete [] x;</a:t>
+            </a:r>
+          </a:p>
+          <a:p>
+            <a:pPr eaLnBrk="1" hangingPunct="1"/>
+            <a:r>
+              <a:rPr lang="en-US" altLang="x-none" sz="1400" dirty="0"/>
+              <a:t>    return 0;</a:t>
+            </a:r>
+          </a:p>
+          <a:p>
+            <a:pPr eaLnBrk="1" hangingPunct="1"/>
+            <a:r>
+              <a:rPr lang="en-US" altLang="x-none" sz="1400" dirty="0"/>
+              <a:t>}</a:t>
+            </a:r>
+          </a:p>
+        </p:txBody>
+      </p:sp>
+      <p:sp>
+        <p:nvSpPr>
+          <p:cNvPr id="8" name="TextBox 5">
+            <a:extLst>
+              <a:ext uri="{FF2B5EF4-FFF2-40B4-BE49-F238E27FC236}">
+                <a16:creationId xmlns:a16="http://schemas.microsoft.com/office/drawing/2014/main" id="{D2F4D33E-677C-6D18-A2E1-B5488259B33C}"/>
+              </a:ext>
+            </a:extLst>
+          </p:cNvPr>
+          <p:cNvSpPr txBox="1">
+            <a:spLocks noChangeArrowheads="1"/>
+          </p:cNvSpPr>
+          <p:nvPr/>
+        </p:nvSpPr>
+        <p:spPr bwMode="auto">
+          <a:xfrm>
+            <a:off x="6682946" y="339429"/>
+            <a:ext cx="5509054" cy="6555641"/>
+          </a:xfrm>
+          <a:prstGeom prst="rect">
+            <a:avLst/>
+          </a:prstGeom>
+          <a:solidFill>
+            <a:schemeClr val="accent6">
+              <a:lumMod val="40000"/>
+              <a:lumOff val="60000"/>
+            </a:schemeClr>
+          </a:solidFill>
+          <a:ln>
+            <a:noFill/>
+          </a:ln>
+        </p:spPr>
+        <p:txBody>
+          <a:bodyPr wrap="square">
+            <a:spAutoFit/>
+          </a:bodyPr>
+          <a:lstStyle>
+            <a:lvl1pPr eaLnBrk="0" hangingPunct="0">
+              <a:defRPr sz="2400">
+                <a:solidFill>
+                  <a:schemeClr val="tx1"/>
+                </a:solidFill>
+                <a:latin typeface="Arial" charset="0"/>
+                <a:ea typeface="ＭＳ Ｐゴシック" charset="-128"/>
+              </a:defRPr>
+            </a:lvl1pPr>
+            <a:lvl2pPr marL="742950" indent="-285750" eaLnBrk="0" hangingPunct="0">
+              <a:defRPr sz="2400">
+                <a:solidFill>
+                  <a:schemeClr val="tx1"/>
+                </a:solidFill>
+                <a:latin typeface="Arial" charset="0"/>
+                <a:ea typeface="ＭＳ Ｐゴシック" charset="-128"/>
+              </a:defRPr>
+            </a:lvl2pPr>
+            <a:lvl3pPr marL="1143000" indent="-228600" eaLnBrk="0" hangingPunct="0">
+              <a:defRPr sz="2400">
+                <a:solidFill>
+                  <a:schemeClr val="tx1"/>
+                </a:solidFill>
+                <a:latin typeface="Arial" charset="0"/>
+                <a:ea typeface="ＭＳ Ｐゴシック" charset="-128"/>
+              </a:defRPr>
+            </a:lvl3pPr>
+            <a:lvl4pPr marL="1600200" indent="-228600" eaLnBrk="0" hangingPunct="0">
+              <a:defRPr sz="2400">
+                <a:solidFill>
+                  <a:schemeClr val="tx1"/>
+                </a:solidFill>
+                <a:latin typeface="Arial" charset="0"/>
+                <a:ea typeface="ＭＳ Ｐゴシック" charset="-128"/>
+              </a:defRPr>
+            </a:lvl4pPr>
+            <a:lvl5pPr marL="2057400" indent="-228600" eaLnBrk="0" hangingPunct="0">
+              <a:defRPr sz="2400">
+                <a:solidFill>
+                  <a:schemeClr val="tx1"/>
+                </a:solidFill>
+                <a:latin typeface="Arial" charset="0"/>
+                <a:ea typeface="ＭＳ Ｐゴシック" charset="-128"/>
+              </a:defRPr>
+            </a:lvl5pPr>
+            <a:lvl6pPr marL="2514600" indent="-228600" eaLnBrk="0" fontAlgn="base" hangingPunct="0">
+              <a:spcBef>
+                <a:spcPct val="0"/>
+              </a:spcBef>
+              <a:spcAft>
+                <a:spcPct val="0"/>
+              </a:spcAft>
+              <a:defRPr sz="2400">
+                <a:solidFill>
+                  <a:schemeClr val="tx1"/>
+                </a:solidFill>
+                <a:latin typeface="Arial" charset="0"/>
+                <a:ea typeface="ＭＳ Ｐゴシック" charset="-128"/>
+              </a:defRPr>
+            </a:lvl6pPr>
+            <a:lvl7pPr marL="2971800" indent="-228600" eaLnBrk="0" fontAlgn="base" hangingPunct="0">
+              <a:spcBef>
+                <a:spcPct val="0"/>
+              </a:spcBef>
+              <a:spcAft>
+                <a:spcPct val="0"/>
+              </a:spcAft>
+              <a:defRPr sz="2400">
+                <a:solidFill>
+                  <a:schemeClr val="tx1"/>
+                </a:solidFill>
+                <a:latin typeface="Arial" charset="0"/>
+                <a:ea typeface="ＭＳ Ｐゴシック" charset="-128"/>
+              </a:defRPr>
+            </a:lvl7pPr>
+            <a:lvl8pPr marL="3429000" indent="-228600" eaLnBrk="0" fontAlgn="base" hangingPunct="0">
+              <a:spcBef>
+                <a:spcPct val="0"/>
+              </a:spcBef>
+              <a:spcAft>
+                <a:spcPct val="0"/>
+              </a:spcAft>
+              <a:defRPr sz="2400">
+                <a:solidFill>
+                  <a:schemeClr val="tx1"/>
+                </a:solidFill>
+                <a:latin typeface="Arial" charset="0"/>
+                <a:ea typeface="ＭＳ Ｐゴシック" charset="-128"/>
+              </a:defRPr>
+            </a:lvl8pPr>
+            <a:lvl9pPr marL="3886200" indent="-228600" eaLnBrk="0" fontAlgn="base" hangingPunct="0">
+              <a:spcBef>
+                <a:spcPct val="0"/>
+              </a:spcBef>
+              <a:spcAft>
+                <a:spcPct val="0"/>
+              </a:spcAft>
+              <a:defRPr sz="2400">
+                <a:solidFill>
+                  <a:schemeClr val="tx1"/>
+                </a:solidFill>
+                <a:latin typeface="Arial" charset="0"/>
+                <a:ea typeface="ＭＳ Ｐゴシック" charset="-128"/>
+              </a:defRPr>
+            </a:lvl9pPr>
+          </a:lstStyle>
+          <a:p>
+            <a:pPr eaLnBrk="1" hangingPunct="1"/>
+            <a:r>
+              <a:rPr lang="en-US" altLang="x-none" sz="1400" dirty="0"/>
+              <a:t>0 -5.96046e-08 1.19209e-07 -1.19209e-07 1.19209e-07 -1.19209e-07 1.19209e-07 1.19209e-07 -1.78814e-07 2.38419e-07 -2.38419e-07 -3.57628e-07 3.57628e-07 3.57628e-07 -4.17233e-07 -4.17233e-07 -4.17233e-07 4.76837e-07 4.76837e-07 4.76837e-07 5.96046e-07 -5.96046e-07 -6.55651e-07 7.15256e-07 -7.15256e-07 -7.7486e-07 8.34465e-07 8.34465e-07 -8.34465e-07 8.34465e-07 -8.9407e-07 -9.53674e-07 -9.53674e-07 -9.53674e-07 9.53674e-07 1.07288e-06 1.07288e-06 1.19209e-06 1.19209e-06 1.19209e-06</a:t>
+            </a:r>
+          </a:p>
+          <a:p>
+            <a:pPr eaLnBrk="1" hangingPunct="1"/>
+            <a:r>
+              <a:rPr lang="en-US" altLang="x-none" sz="1400" dirty="0"/>
+              <a:t>1 -1 1 1 1 -1 1 1 1 1 -1 -1 -1 -1 -1 1 1 0.999999 0.999999 -0.999999 -0.999999 -0.999999 -0.999999 -0.999999 0.999999 0.999999 0.999999 0.999999 -0.999999 -0.999999 -0.999999 0.999999 0.999999 -0.999999 -0.999999 -0.999999 0.999999 0.999999 0.999999 -0.999999</a:t>
+            </a:r>
+          </a:p>
+          <a:p>
+            <a:pPr eaLnBrk="1" hangingPunct="1"/>
+            <a:endParaRPr lang="en-US" altLang="x-none" sz="1400" dirty="0"/>
+          </a:p>
+          <a:p>
+            <a:pPr eaLnBrk="1" hangingPunct="1"/>
+            <a:r>
+              <a:rPr lang="en-US" altLang="x-none" sz="1400" dirty="0"/>
+              <a:t>0x0p+0 -0x1p-24 0x1p-23 -0x1p-23 0x1p-23 -0x1p-23 0x1p-23 0x1p-23 -0x1.8p-23 0x1p-22 -0x1p-22 -0x1.8p-22 0x1.8p-22 0x1.8p-22 -0x1.cp-22 -0x1.cp-22 -0x1.cp-22 0x1p-21 0x1p-21 0x1p-21 0x1.4p-21 -0x1.4p-21 -0x1.6p-21 0x1.8p-21 -0x1.8p-21 -0x1.ap-21 0x1.cp-21 0x1.cp-21 -0x1.cp-21 0x1.cp-21 -0x1.ep-21 -0x1p-20 -0x1p-20 -0x1p-20 0x1p-20 0x1.2p-20 0x1.2p-20 0x1.4p-20 0x1.4p-20 0x1.4p-20</a:t>
+            </a:r>
+          </a:p>
+          <a:p>
+            <a:pPr eaLnBrk="1" hangingPunct="1"/>
+            <a:r>
+              <a:rPr lang="en-US" altLang="x-none" sz="1400" dirty="0"/>
+              <a:t>0x1p+0 -0x1p+0 0x1p+0 0x1p+0 0x1p+0 -0x1.fffffep-1 0x1.fffffcp-1 0x1.fffffcp-1 0x1.fffff8p-1 0x1.fffff4p-1 -0x1.fffff4p-1 -0x1.fffff2p-1 -0x1.fffff2p-1 -0x1.fffffp-1 -0x1.fffffp-1 0x1.fffffp-1 0x1.fffffp-1 0x1.ffffecp-1 0x1.ffffecp-1 -0x1.ffffeap-1 -0x1.ffffeap-1 -0x1.ffffeap-1 -0x1.ffffeap-1 -0x1.ffffeap-1 0x1.ffffe8p-1 0x1.ffffe8p-1 0x1.ffffe8p-1 0x1.ffffe8p-1 -0x1.ffffe6p-1 -0x1.ffffe6p-1 -0x1.ffffe6p-1 0x1.ffffe4p-1 0x1.ffffe4p-1 -0x1.ffffe2p-1 -0x1.ffffe2p-1 -0x1.ffffep-1 0x1.ffffep-1 0x1.ffffep-1 0x1.ffffep-1 -0x1.ffffep-1</a:t>
+            </a:r>
+          </a:p>
+        </p:txBody>
+      </p:sp>
+      <p:sp>
+        <p:nvSpPr>
+          <p:cNvPr id="2" name="Title 1">
+            <a:extLst>
+              <a:ext uri="{FF2B5EF4-FFF2-40B4-BE49-F238E27FC236}">
+                <a16:creationId xmlns:a16="http://schemas.microsoft.com/office/drawing/2014/main" id="{39BAAF5F-A54C-2843-F80E-D8605F16A491}"/>
+              </a:ext>
+            </a:extLst>
+          </p:cNvPr>
+          <p:cNvSpPr>
+            <a:spLocks noGrp="1"/>
+          </p:cNvSpPr>
+          <p:nvPr>
+            <p:ph type="title"/>
+          </p:nvPr>
+        </p:nvSpPr>
+        <p:spPr>
+          <a:xfrm>
+            <a:off x="131013" y="0"/>
+            <a:ext cx="6682946" cy="870551"/>
+          </a:xfrm>
+        </p:spPr>
+        <p:txBody>
+          <a:bodyPr/>
+          <a:lstStyle/>
+          <a:p>
+            <a:r>
+              <a:rPr lang="en-US" dirty="0"/>
+              <a:t>Random Number interlude</a:t>
+            </a:r>
+          </a:p>
+        </p:txBody>
+      </p:sp>
+    </p:spTree>
+    <p:extLst>
+      <p:ext uri="{BB962C8B-B14F-4D97-AF65-F5344CB8AC3E}">
+        <p14:creationId xmlns:p14="http://schemas.microsoft.com/office/powerpoint/2010/main" val="1569605684"/>
+      </p:ext>
+    </p:extLst>
+  </p:cSld>
+  <p:clrMapOvr>
+    <a:masterClrMapping/>
+  </p:clrMapOvr>
+</p:sld>
+</file>
+
+<file path=ppt/slides/slide27.xml><?xml version="1.0" encoding="utf-8"?>
+<p:sld xmlns:a="http://schemas.openxmlformats.org/drawingml/2006/main" xmlns:r="http://schemas.openxmlformats.org/officeDocument/2006/relationships" xmlns:p="http://schemas.openxmlformats.org/presentationml/2006/main">
+  <p:cSld>
+    <p:spTree>
+      <p:nvGrpSpPr>
+        <p:cNvPr id="1" name=""/>
+        <p:cNvGrpSpPr/>
+        <p:nvPr/>
+      </p:nvGrpSpPr>
+      <p:grpSpPr>
+        <a:xfrm>
+          <a:off x="0" y="0"/>
+          <a:ext cx="0" cy="0"/>
+          <a:chOff x="0" y="0"/>
+          <a:chExt cx="0" cy="0"/>
+        </a:xfrm>
+      </p:grpSpPr>
+      <p:sp>
+        <p:nvSpPr>
+          <p:cNvPr id="2" name="Title 1">
+            <a:extLst>
+              <a:ext uri="{FF2B5EF4-FFF2-40B4-BE49-F238E27FC236}">
+                <a16:creationId xmlns:a16="http://schemas.microsoft.com/office/drawing/2014/main" id="{5B8A59C7-A3CA-91DB-D251-2D35BFC1E1B4}"/>
+              </a:ext>
+            </a:extLst>
+          </p:cNvPr>
+          <p:cNvSpPr>
+            <a:spLocks noGrp="1"/>
+          </p:cNvSpPr>
+          <p:nvPr>
+            <p:ph type="title"/>
+          </p:nvPr>
+        </p:nvSpPr>
+        <p:spPr/>
+        <p:txBody>
+          <a:bodyPr/>
+          <a:lstStyle/>
+          <a:p>
+            <a:r>
+              <a:rPr lang="en-US" dirty="0"/>
+              <a:t>Elementary functions</a:t>
+            </a:r>
+          </a:p>
+        </p:txBody>
+      </p:sp>
+      <p:sp>
+        <p:nvSpPr>
+          <p:cNvPr id="3" name="Content Placeholder 2">
+            <a:extLst>
+              <a:ext uri="{FF2B5EF4-FFF2-40B4-BE49-F238E27FC236}">
+                <a16:creationId xmlns:a16="http://schemas.microsoft.com/office/drawing/2014/main" id="{403B0296-7549-07A9-DB46-A197286DFF8A}"/>
+              </a:ext>
+            </a:extLst>
+          </p:cNvPr>
+          <p:cNvSpPr>
+            <a:spLocks noGrp="1"/>
+          </p:cNvSpPr>
+          <p:nvPr>
+            <p:ph idx="1"/>
+          </p:nvPr>
+        </p:nvSpPr>
+        <p:spPr/>
+        <p:txBody>
+          <a:bodyPr>
+            <a:normAutofit fontScale="92500" lnSpcReduction="10000"/>
+          </a:bodyPr>
+          <a:lstStyle/>
+          <a:p>
+            <a:r>
+              <a:rPr lang="en-US" dirty="0"/>
+              <a:t>IEEE754 defines a set of “additional operations” (aka elementary functions) to be implemented</a:t>
+            </a:r>
+          </a:p>
+          <a:p>
+            <a:pPr lvl="1"/>
+            <a:r>
+              <a:rPr lang="en-US" dirty="0"/>
+              <a:t>exp, log, power, trig, hyperbolic and their inverse (arc)</a:t>
+            </a:r>
+          </a:p>
+          <a:p>
+            <a:pPr lvl="1"/>
+            <a:r>
+              <a:rPr lang="en-US" dirty="0"/>
+              <a:t>They are “required” to be correctly rounded</a:t>
+            </a:r>
+          </a:p>
+          <a:p>
+            <a:r>
+              <a:rPr lang="en-US" dirty="0"/>
+              <a:t>C and C++ std define some more special functions</a:t>
+            </a:r>
+          </a:p>
+          <a:p>
+            <a:pPr lvl="1"/>
+            <a:r>
+              <a:rPr lang="en-US" dirty="0">
+                <a:hlinkClick r:id="rId2"/>
+              </a:rPr>
+              <a:t>https://en.cppreference.com/cpp/numeric/math</a:t>
+            </a:r>
+            <a:endParaRPr lang="en-US" dirty="0"/>
+          </a:p>
+          <a:p>
+            <a:pPr lvl="1"/>
+            <a:r>
+              <a:rPr lang="en-US" dirty="0">
+                <a:hlinkClick r:id="rId3"/>
+              </a:rPr>
+              <a:t>https://en.wikipedia.org/wiki/C_mathematical_functions</a:t>
+            </a:r>
+            <a:endParaRPr lang="en-US" dirty="0"/>
+          </a:p>
+          <a:p>
+            <a:r>
+              <a:rPr lang="en-US" dirty="0"/>
+              <a:t>Each vendor and compiler provider has its own implementation</a:t>
+            </a:r>
+          </a:p>
+          <a:p>
+            <a:pPr lvl="1"/>
+            <a:r>
+              <a:rPr lang="en-US" dirty="0"/>
+              <a:t>A comparison of their accuracy is compiled by </a:t>
+            </a:r>
+            <a:r>
+              <a:rPr lang="en-US" dirty="0" err="1"/>
+              <a:t>B.Gladman</a:t>
+            </a:r>
+            <a:endParaRPr lang="en-US" dirty="0"/>
+          </a:p>
+          <a:p>
+            <a:pPr lvl="2"/>
+            <a:r>
+              <a:rPr lang="en-US" dirty="0">
+                <a:hlinkClick r:id="rId4"/>
+              </a:rPr>
+              <a:t>https://members.loria.fr/PZimmermann/papers/accuracy.pdf</a:t>
+            </a:r>
+            <a:endParaRPr lang="en-US" dirty="0"/>
+          </a:p>
+          <a:p>
+            <a:r>
+              <a:rPr lang="en-US" dirty="0"/>
+              <a:t>The most </a:t>
+            </a:r>
+            <a:r>
+              <a:rPr lang="en-US"/>
+              <a:t>accurate implementation </a:t>
+            </a:r>
+            <a:r>
+              <a:rPr lang="en-US" dirty="0"/>
+              <a:t>to date is from the “core-math” project</a:t>
+            </a:r>
+          </a:p>
+          <a:p>
+            <a:pPr lvl="1"/>
+            <a:r>
+              <a:rPr lang="en-US" dirty="0">
+                <a:hlinkClick r:id="rId5"/>
+              </a:rPr>
+              <a:t>https://core-math.gitlabpages.inria.fr/</a:t>
+            </a:r>
+            <a:endParaRPr lang="en-US" dirty="0"/>
+          </a:p>
+        </p:txBody>
+      </p:sp>
+    </p:spTree>
+    <p:extLst>
+      <p:ext uri="{BB962C8B-B14F-4D97-AF65-F5344CB8AC3E}">
+        <p14:creationId xmlns:p14="http://schemas.microsoft.com/office/powerpoint/2010/main" val="2907914989"/>
+      </p:ext>
+    </p:extLst>
   </p:cSld>
   <p:clrMapOvr>
     <a:masterClrMapping/>

--- a/Slides/FPforScientist.pptx
+++ b/Slides/FPforScientist.pptx
@@ -32,6 +32,8 @@
     <p:sldId id="467" r:id="rId26"/>
     <p:sldId id="469" r:id="rId27"/>
     <p:sldId id="470" r:id="rId28"/>
+    <p:sldId id="471" r:id="rId29"/>
+    <p:sldId id="472" r:id="rId30"/>
   </p:sldIdLst>
   <p:sldSz cx="12192000" cy="6858000"/>
   <p:notesSz cx="6858000" cy="9144000"/>
@@ -11043,7 +11045,7 @@
         <p:spPr/>
         <p:txBody>
           <a:bodyPr>
-            <a:normAutofit fontScale="92500" lnSpcReduction="10000"/>
+            <a:normAutofit fontScale="92500" lnSpcReduction="20000"/>
           </a:bodyPr>
           <a:lstStyle/>
           <a:p>
@@ -11056,7 +11058,14 @@
             <a:pPr lvl="1"/>
             <a:r>
               <a:rPr lang="en-US" dirty="0"/>
-              <a:t>exp, log, power, trig, hyperbolic and their inverse (arc)</a:t>
+              <a:t>exp, log, power, </a:t>
+            </a:r>
+          </a:p>
+          <a:p>
+            <a:pPr lvl="1"/>
+            <a:r>
+              <a:rPr lang="en-US" dirty="0"/>
+              <a:t>trig, hyperbolic and their inverse (arc)</a:t>
             </a:r>
           </a:p>
           <a:p>
@@ -11123,15 +11132,7 @@
           <a:p>
             <a:r>
               <a:rPr lang="en-US" dirty="0"/>
-              <a:t>The most </a:t>
-            </a:r>
-            <a:r>
-              <a:rPr lang="en-US"/>
-              <a:t>accurate implementation </a:t>
-            </a:r>
-            <a:r>
-              <a:rPr lang="en-US" dirty="0"/>
-              <a:t>to date is from the “core-math” project</a:t>
+              <a:t>The most accurate implementation to date is from the “core-math” project</a:t>
             </a:r>
           </a:p>
           <a:p>
@@ -11150,6 +11151,314 @@
     <p:extLst>
       <p:ext uri="{BB962C8B-B14F-4D97-AF65-F5344CB8AC3E}">
         <p14:creationId xmlns:p14="http://schemas.microsoft.com/office/powerpoint/2010/main" val="2907914989"/>
+      </p:ext>
+    </p:extLst>
+  </p:cSld>
+  <p:clrMapOvr>
+    <a:masterClrMapping/>
+  </p:clrMapOvr>
+</p:sld>
+</file>
+
+<file path=ppt/slides/slide28.xml><?xml version="1.0" encoding="utf-8"?>
+<p:sld xmlns:a="http://schemas.openxmlformats.org/drawingml/2006/main" xmlns:r="http://schemas.openxmlformats.org/officeDocument/2006/relationships" xmlns:p="http://schemas.openxmlformats.org/presentationml/2006/main">
+  <p:cSld>
+    <p:spTree>
+      <p:nvGrpSpPr>
+        <p:cNvPr id="1" name=""/>
+        <p:cNvGrpSpPr/>
+        <p:nvPr/>
+      </p:nvGrpSpPr>
+      <p:grpSpPr>
+        <a:xfrm>
+          <a:off x="0" y="0"/>
+          <a:ext cx="0" cy="0"/>
+          <a:chOff x="0" y="0"/>
+          <a:chExt cx="0" cy="0"/>
+        </a:xfrm>
+      </p:grpSpPr>
+      <p:sp>
+        <p:nvSpPr>
+          <p:cNvPr id="2" name="Title 1">
+            <a:extLst>
+              <a:ext uri="{FF2B5EF4-FFF2-40B4-BE49-F238E27FC236}">
+                <a16:creationId xmlns:a16="http://schemas.microsoft.com/office/drawing/2014/main" id="{75FA1F9A-4DE0-E93B-B0EA-198097595C5E}"/>
+              </a:ext>
+            </a:extLst>
+          </p:cNvPr>
+          <p:cNvSpPr>
+            <a:spLocks noGrp="1"/>
+          </p:cNvSpPr>
+          <p:nvPr>
+            <p:ph type="title"/>
+          </p:nvPr>
+        </p:nvSpPr>
+        <p:spPr/>
+        <p:txBody>
+          <a:bodyPr/>
+          <a:lstStyle/>
+          <a:p>
+            <a:r>
+              <a:rPr lang="en-US" dirty="0"/>
+              <a:t>Evaluating a function</a:t>
+            </a:r>
+          </a:p>
+        </p:txBody>
+      </p:sp>
+      <p:sp>
+        <p:nvSpPr>
+          <p:cNvPr id="3" name="Content Placeholder 2">
+            <a:extLst>
+              <a:ext uri="{FF2B5EF4-FFF2-40B4-BE49-F238E27FC236}">
+                <a16:creationId xmlns:a16="http://schemas.microsoft.com/office/drawing/2014/main" id="{D47FA385-BE03-A1B4-A776-3419E23CAE78}"/>
+              </a:ext>
+            </a:extLst>
+          </p:cNvPr>
+          <p:cNvSpPr>
+            <a:spLocks noGrp="1"/>
+          </p:cNvSpPr>
+          <p:nvPr>
+            <p:ph idx="1"/>
+          </p:nvPr>
+        </p:nvSpPr>
+        <p:spPr/>
+        <p:txBody>
+          <a:bodyPr/>
+          <a:lstStyle/>
+          <a:p>
+            <a:pPr marL="0" indent="0">
+              <a:buNone/>
+            </a:pPr>
+            <a:r>
+              <a:rPr lang="en-US" dirty="0"/>
+              <a:t>Five steps</a:t>
+            </a:r>
+          </a:p>
+          <a:p>
+            <a:r>
+              <a:rPr lang="en-US" dirty="0"/>
+              <a:t>Handling special values</a:t>
+            </a:r>
+          </a:p>
+          <a:p>
+            <a:r>
+              <a:rPr lang="en-US" dirty="0"/>
+              <a:t>Range Reduction</a:t>
+            </a:r>
+          </a:p>
+          <a:p>
+            <a:r>
+              <a:rPr lang="en-US" dirty="0"/>
+              <a:t>Approximation</a:t>
+            </a:r>
+          </a:p>
+          <a:p>
+            <a:r>
+              <a:rPr lang="en-US" dirty="0"/>
+              <a:t>If required:</a:t>
+            </a:r>
+          </a:p>
+          <a:p>
+            <a:pPr lvl="1"/>
+            <a:r>
+              <a:rPr lang="en-US" dirty="0"/>
+              <a:t>precision test and handling of “Table Maker’s Dilemma”</a:t>
+            </a:r>
+          </a:p>
+          <a:p>
+            <a:r>
+              <a:rPr lang="en-US" dirty="0"/>
+              <a:t>Back to full range</a:t>
+            </a:r>
+          </a:p>
+          <a:p>
+            <a:endParaRPr lang="en-US" dirty="0"/>
+          </a:p>
+        </p:txBody>
+      </p:sp>
+    </p:spTree>
+    <p:extLst>
+      <p:ext uri="{BB962C8B-B14F-4D97-AF65-F5344CB8AC3E}">
+        <p14:creationId xmlns:p14="http://schemas.microsoft.com/office/powerpoint/2010/main" val="177925165"/>
+      </p:ext>
+    </p:extLst>
+  </p:cSld>
+  <p:clrMapOvr>
+    <a:masterClrMapping/>
+  </p:clrMapOvr>
+</p:sld>
+</file>
+
+<file path=ppt/slides/slide29.xml><?xml version="1.0" encoding="utf-8"?>
+<p:sld xmlns:a="http://schemas.openxmlformats.org/drawingml/2006/main" xmlns:r="http://schemas.openxmlformats.org/officeDocument/2006/relationships" xmlns:p="http://schemas.openxmlformats.org/presentationml/2006/main">
+  <p:cSld>
+    <p:spTree>
+      <p:nvGrpSpPr>
+        <p:cNvPr id="1" name=""/>
+        <p:cNvGrpSpPr/>
+        <p:nvPr/>
+      </p:nvGrpSpPr>
+      <p:grpSpPr>
+        <a:xfrm>
+          <a:off x="0" y="0"/>
+          <a:ext cx="0" cy="0"/>
+          <a:chOff x="0" y="0"/>
+          <a:chExt cx="0" cy="0"/>
+        </a:xfrm>
+      </p:grpSpPr>
+      <p:sp>
+        <p:nvSpPr>
+          <p:cNvPr id="2" name="Title 1">
+            <a:extLst>
+              <a:ext uri="{FF2B5EF4-FFF2-40B4-BE49-F238E27FC236}">
+                <a16:creationId xmlns:a16="http://schemas.microsoft.com/office/drawing/2014/main" id="{3605343B-1389-DA64-EB0F-528286A51FFA}"/>
+              </a:ext>
+            </a:extLst>
+          </p:cNvPr>
+          <p:cNvSpPr>
+            <a:spLocks noGrp="1"/>
+          </p:cNvSpPr>
+          <p:nvPr>
+            <p:ph type="title"/>
+          </p:nvPr>
+        </p:nvSpPr>
+        <p:spPr/>
+        <p:txBody>
+          <a:bodyPr/>
+          <a:lstStyle/>
+          <a:p>
+            <a:r>
+              <a:rPr lang="en-US" dirty="0"/>
+              <a:t>Table Maker’s Dilemma</a:t>
+            </a:r>
+          </a:p>
+        </p:txBody>
+      </p:sp>
+      <p:sp>
+        <p:nvSpPr>
+          <p:cNvPr id="3" name="Content Placeholder 2">
+            <a:extLst>
+              <a:ext uri="{FF2B5EF4-FFF2-40B4-BE49-F238E27FC236}">
+                <a16:creationId xmlns:a16="http://schemas.microsoft.com/office/drawing/2014/main" id="{2086B04A-95BD-FA41-2381-3A717B3D5992}"/>
+              </a:ext>
+            </a:extLst>
+          </p:cNvPr>
+          <p:cNvSpPr>
+            <a:spLocks noGrp="1"/>
+          </p:cNvSpPr>
+          <p:nvPr>
+            <p:ph idx="1"/>
+          </p:nvPr>
+        </p:nvSpPr>
+        <p:spPr>
+          <a:xfrm>
+            <a:off x="6613014" y="1027906"/>
+            <a:ext cx="5198673" cy="4351338"/>
+          </a:xfrm>
+        </p:spPr>
+        <p:txBody>
+          <a:bodyPr>
+            <a:normAutofit fontScale="85000" lnSpcReduction="20000"/>
+          </a:bodyPr>
+          <a:lstStyle/>
+          <a:p>
+            <a:pPr marL="0" indent="0">
+              <a:buNone/>
+            </a:pPr>
+            <a:r>
+              <a:rPr lang="en-US" dirty="0"/>
+              <a:t>to guarantee a given precision one needs to evaluate the  error of the approximation “y”</a:t>
+            </a:r>
+          </a:p>
+          <a:p>
+            <a:pPr lvl="1"/>
+            <a:r>
+              <a:rPr lang="en-US" dirty="0"/>
+              <a:t>From first principle</a:t>
+            </a:r>
+          </a:p>
+          <a:p>
+            <a:pPr lvl="1"/>
+            <a:r>
+              <a:rPr lang="en-US" dirty="0"/>
+              <a:t>Or on the fly as seen before</a:t>
+            </a:r>
+          </a:p>
+          <a:p>
+            <a:pPr marL="514350" indent="-514350">
+              <a:buFont typeface="+mj-lt"/>
+              <a:buAutoNum type="arabicPeriod"/>
+            </a:pPr>
+            <a:r>
+              <a:rPr lang="en-US" dirty="0"/>
+              <a:t>The function need to be computed with at least one more digit (the round digit)</a:t>
+            </a:r>
+          </a:p>
+          <a:p>
+            <a:pPr marL="514350" indent="-514350">
+              <a:buFont typeface="+mj-lt"/>
+              <a:buAutoNum type="arabicPeriod"/>
+            </a:pPr>
+            <a:r>
+              <a:rPr lang="en-US" dirty="0"/>
+              <a:t>In Round2Near: if the error interval includes the middle point an even more precise evaluation is required</a:t>
+            </a:r>
+          </a:p>
+          <a:p>
+            <a:pPr lvl="1"/>
+            <a:r>
+              <a:rPr lang="en-US" dirty="0"/>
+              <a:t>the round digit may be followed by a sequel of 0’s or 1’s (or 9’s) and the TMD solution may be </a:t>
+            </a:r>
+            <a:r>
+              <a:rPr lang="en-US"/>
+              <a:t>very expensive</a:t>
+            </a:r>
+            <a:endParaRPr lang="en-US" dirty="0"/>
+          </a:p>
+          <a:p>
+            <a:pPr marL="971550" lvl="1" indent="-514350">
+              <a:buFont typeface="+mj-lt"/>
+              <a:buAutoNum type="arabicPeriod"/>
+            </a:pPr>
+            <a:endParaRPr lang="en-US" dirty="0"/>
+          </a:p>
+        </p:txBody>
+      </p:sp>
+      <p:pic>
+        <p:nvPicPr>
+          <p:cNvPr id="4" name="Picture 3">
+            <a:extLst>
+              <a:ext uri="{FF2B5EF4-FFF2-40B4-BE49-F238E27FC236}">
+                <a16:creationId xmlns:a16="http://schemas.microsoft.com/office/drawing/2014/main" id="{4F2868B6-1862-A422-6CB6-CBFCB24ECA67}"/>
+              </a:ext>
+            </a:extLst>
+          </p:cNvPr>
+          <p:cNvPicPr>
+            <a:picLocks noChangeAspect="1"/>
+          </p:cNvPicPr>
+          <p:nvPr/>
+        </p:nvPicPr>
+        <p:blipFill>
+          <a:blip r:embed="rId2"/>
+          <a:stretch>
+            <a:fillRect/>
+          </a:stretch>
+        </p:blipFill>
+        <p:spPr>
+          <a:xfrm>
+            <a:off x="380313" y="1690688"/>
+            <a:ext cx="6109133" cy="4649230"/>
+          </a:xfrm>
+          <a:prstGeom prst="rect">
+            <a:avLst/>
+          </a:prstGeom>
+        </p:spPr>
+      </p:pic>
+    </p:spTree>
+    <p:extLst>
+      <p:ext uri="{BB962C8B-B14F-4D97-AF65-F5344CB8AC3E}">
+        <p14:creationId xmlns:p14="http://schemas.microsoft.com/office/powerpoint/2010/main" val="2412081414"/>
       </p:ext>
     </p:extLst>
   </p:cSld>

--- a/Slides/FPforScientist.pptx
+++ b/Slides/FPforScientist.pptx
@@ -33,7 +33,9 @@
     <p:sldId id="469" r:id="rId27"/>
     <p:sldId id="470" r:id="rId28"/>
     <p:sldId id="471" r:id="rId29"/>
-    <p:sldId id="472" r:id="rId30"/>
+    <p:sldId id="474" r:id="rId30"/>
+    <p:sldId id="473" r:id="rId31"/>
+    <p:sldId id="472" r:id="rId32"/>
   </p:sldIdLst>
   <p:sldSz cx="12192000" cy="6858000"/>
   <p:notesSz cx="6858000" cy="9144000"/>
@@ -11193,7 +11195,12 @@
             <p:ph type="title"/>
           </p:nvPr>
         </p:nvSpPr>
-        <p:spPr/>
+        <p:spPr>
+          <a:xfrm>
+            <a:off x="838200" y="365125"/>
+            <a:ext cx="10515600" cy="1031189"/>
+          </a:xfrm>
+        </p:spPr>
         <p:txBody>
           <a:bodyPr/>
           <a:lstStyle/>
@@ -11221,7 +11228,12 @@
             <p:ph idx="1"/>
           </p:nvPr>
         </p:nvSpPr>
-        <p:spPr/>
+        <p:spPr>
+          <a:xfrm>
+            <a:off x="838200" y="1529062"/>
+            <a:ext cx="10515600" cy="4847023"/>
+          </a:xfrm>
+        </p:spPr>
         <p:txBody>
           <a:bodyPr/>
           <a:lstStyle/>
@@ -11237,7 +11249,14 @@
           <a:p>
             <a:r>
               <a:rPr lang="en-US" dirty="0"/>
-              <a:t>Handling special values</a:t>
+              <a:t>Handling special values, under/over-flows and invalid</a:t>
+            </a:r>
+          </a:p>
+          <a:p>
+            <a:pPr lvl="1"/>
+            <a:r>
+              <a:rPr lang="en-US" dirty="0"/>
+              <a:t>Standard specify them all!</a:t>
             </a:r>
           </a:p>
           <a:p>
@@ -11311,7 +11330,7 @@
           <p:cNvPr id="2" name="Title 1">
             <a:extLst>
               <a:ext uri="{FF2B5EF4-FFF2-40B4-BE49-F238E27FC236}">
-                <a16:creationId xmlns:a16="http://schemas.microsoft.com/office/drawing/2014/main" id="{3605343B-1389-DA64-EB0F-528286A51FFA}"/>
+                <a16:creationId xmlns:a16="http://schemas.microsoft.com/office/drawing/2014/main" id="{2035A76E-847D-8C9D-A4E2-A1B587BCA2C0}"/>
               </a:ext>
             </a:extLst>
           </p:cNvPr>
@@ -11329,7 +11348,7 @@
           <a:p>
             <a:r>
               <a:rPr lang="en-US" dirty="0"/>
-              <a:t>Table Maker’s Dilemma</a:t>
+              <a:t>Range reduction</a:t>
             </a:r>
           </a:p>
         </p:txBody>
@@ -11339,7 +11358,7 @@
           <p:cNvPr id="3" name="Content Placeholder 2">
             <a:extLst>
               <a:ext uri="{FF2B5EF4-FFF2-40B4-BE49-F238E27FC236}">
-                <a16:creationId xmlns:a16="http://schemas.microsoft.com/office/drawing/2014/main" id="{2086B04A-95BD-FA41-2381-3A717B3D5992}"/>
+                <a16:creationId xmlns:a16="http://schemas.microsoft.com/office/drawing/2014/main" id="{0401C695-E4BD-B119-1B0B-4E90AA85A94B}"/>
               </a:ext>
             </a:extLst>
           </p:cNvPr>
@@ -11352,113 +11371,138 @@
         </p:nvSpPr>
         <p:spPr>
           <a:xfrm>
-            <a:off x="6613014" y="1027906"/>
-            <a:ext cx="5198673" cy="4351338"/>
+            <a:off x="838200" y="1825625"/>
+            <a:ext cx="10826578" cy="4351338"/>
           </a:xfrm>
         </p:spPr>
         <p:txBody>
-          <a:bodyPr>
-            <a:normAutofit fontScale="85000" lnSpcReduction="20000"/>
-          </a:bodyPr>
+          <a:bodyPr/>
           <a:lstStyle/>
           <a:p>
-            <a:pPr marL="0" indent="0">
-              <a:buNone/>
-            </a:pPr>
             <a:r>
               <a:rPr lang="en-US" dirty="0"/>
-              <a:t>to guarantee a given precision one needs to evaluate the  error of the approximation “y”</a:t>
+              <a:t>exp, log, pow</a:t>
             </a:r>
           </a:p>
           <a:p>
             <a:pPr lvl="1"/>
             <a:r>
               <a:rPr lang="en-US" dirty="0"/>
-              <a:t>From first principle</a:t>
+              <a:t>exploit </a:t>
+            </a:r>
+            <a:r>
+              <a:rPr lang="en-US" dirty="0" err="1"/>
+              <a:t>fp</a:t>
+            </a:r>
+            <a:r>
+              <a:rPr lang="en-US" dirty="0"/>
+              <a:t> representation: 1.mᐧ</a:t>
+            </a:r>
+            <a:r>
+              <a:rPr lang="cs-CZ" altLang="x-none" dirty="0"/>
+              <a:t>2</a:t>
+            </a:r>
+            <a:r>
+              <a:rPr lang="en-US" baseline="30000" dirty="0"/>
+              <a:t>e</a:t>
             </a:r>
           </a:p>
           <a:p>
             <a:pPr lvl="1"/>
             <a:r>
               <a:rPr lang="en-US" dirty="0"/>
-              <a:t>Or on the fly as seen before</a:t>
-            </a:r>
-          </a:p>
-          <a:p>
-            <a:pPr marL="514350" indent="-514350">
-              <a:buFont typeface="+mj-lt"/>
-              <a:buAutoNum type="arabicPeriod"/>
-            </a:pPr>
+              <a:t>For exp: compute 2exp(x) in [-log(2)/2;log(2)/2)</a:t>
+            </a:r>
+            <a:endParaRPr lang="en-US" baseline="30000" dirty="0"/>
+          </a:p>
+          <a:p>
+            <a:pPr lvl="1"/>
             <a:r>
               <a:rPr lang="en-US" dirty="0"/>
-              <a:t>The function need to be computed with at least one more digit (the round digit)</a:t>
-            </a:r>
-          </a:p>
-          <a:p>
-            <a:pPr marL="514350" indent="-514350">
-              <a:buFont typeface="+mj-lt"/>
-              <a:buAutoNum type="arabicPeriod"/>
-            </a:pPr>
+              <a:t>For log: compute log(1+x) in [1,2) (actually </a:t>
+            </a:r>
+            <a:r>
+              <a:rPr lang="en-US"/>
+              <a:t>an optimized [y,2y))</a:t>
+            </a:r>
+            <a:endParaRPr lang="en-US" dirty="0"/>
+          </a:p>
+          <a:p>
+            <a:r>
+              <a:rPr lang="en-US" dirty="0" err="1"/>
+              <a:t>sin,cos,tan</a:t>
+            </a:r>
+            <a:endParaRPr lang="en-US" dirty="0"/>
+          </a:p>
+          <a:p>
+            <a:pPr lvl="1"/>
             <a:r>
               <a:rPr lang="en-US" dirty="0"/>
-              <a:t>In Round2Near: if the error interval includes the middle point an even more precise evaluation is required</a:t>
+              <a:t>Reduce to [0, π/4) (trivial for f(π</a:t>
+            </a:r>
+            <a:r>
+              <a:rPr lang="en-US" dirty="0" err="1"/>
+              <a:t>ᐧx</a:t>
+            </a:r>
+            <a:r>
+              <a:rPr lang="en-US" dirty="0"/>
+              <a:t>) known as </a:t>
+            </a:r>
+            <a:r>
+              <a:rPr lang="en-US" dirty="0" err="1"/>
+              <a:t>sinpi,cospi</a:t>
+            </a:r>
+            <a:r>
+              <a:rPr lang="en-US" dirty="0"/>
+              <a:t> </a:t>
+            </a:r>
+            <a:r>
+              <a:rPr lang="en-US" dirty="0" err="1"/>
+              <a:t>etc</a:t>
+            </a:r>
+            <a:r>
+              <a:rPr lang="en-US" dirty="0"/>
+              <a:t>, tricky for sin(x) </a:t>
+            </a:r>
+            <a:r>
+              <a:rPr lang="en-US" dirty="0" err="1"/>
+              <a:t>etc</a:t>
+            </a:r>
+            <a:r>
+              <a:rPr lang="en-US" dirty="0"/>
+              <a:t>)</a:t>
             </a:r>
           </a:p>
           <a:p>
             <a:pPr lvl="1"/>
             <a:r>
               <a:rPr lang="en-US" dirty="0"/>
-              <a:t>the round digit may be followed by a sequel of 0’s or 1’s (or 9’s) and the TMD solution may be </a:t>
-            </a:r>
-            <a:r>
-              <a:rPr lang="en-US"/>
-              <a:t>very expensive</a:t>
-            </a:r>
-            <a:endParaRPr lang="en-US" dirty="0"/>
-          </a:p>
-          <a:p>
-            <a:pPr marL="971550" lvl="1" indent="-514350">
-              <a:buFont typeface="+mj-lt"/>
-              <a:buAutoNum type="arabicPeriod"/>
-            </a:pPr>
-            <a:endParaRPr lang="en-US" dirty="0"/>
+              <a:t>use trig identities to go back</a:t>
+            </a:r>
+          </a:p>
+          <a:p>
+            <a:r>
+              <a:rPr lang="en-US" dirty="0" err="1"/>
+              <a:t>asin,acos,atan</a:t>
+            </a:r>
+            <a:r>
+              <a:rPr lang="en-US" dirty="0"/>
+              <a:t>(2)</a:t>
+            </a:r>
+          </a:p>
+          <a:p>
+            <a:pPr lvl="1"/>
+            <a:r>
+              <a:rPr lang="en-US" dirty="0"/>
+              <a:t>approximate it in “ad-hoc” intervals (make sure continuity at edges)</a:t>
+            </a:r>
           </a:p>
         </p:txBody>
       </p:sp>
-      <p:pic>
-        <p:nvPicPr>
-          <p:cNvPr id="4" name="Picture 3">
-            <a:extLst>
-              <a:ext uri="{FF2B5EF4-FFF2-40B4-BE49-F238E27FC236}">
-                <a16:creationId xmlns:a16="http://schemas.microsoft.com/office/drawing/2014/main" id="{4F2868B6-1862-A422-6CB6-CBFCB24ECA67}"/>
-              </a:ext>
-            </a:extLst>
-          </p:cNvPr>
-          <p:cNvPicPr>
-            <a:picLocks noChangeAspect="1"/>
-          </p:cNvPicPr>
-          <p:nvPr/>
-        </p:nvPicPr>
-        <p:blipFill>
-          <a:blip r:embed="rId2"/>
-          <a:stretch>
-            <a:fillRect/>
-          </a:stretch>
-        </p:blipFill>
-        <p:spPr>
-          <a:xfrm>
-            <a:off x="380313" y="1690688"/>
-            <a:ext cx="6109133" cy="4649230"/>
-          </a:xfrm>
-          <a:prstGeom prst="rect">
-            <a:avLst/>
-          </a:prstGeom>
-        </p:spPr>
-      </p:pic>
     </p:spTree>
     <p:extLst>
       <p:ext uri="{BB962C8B-B14F-4D97-AF65-F5344CB8AC3E}">
-        <p14:creationId xmlns:p14="http://schemas.microsoft.com/office/powerpoint/2010/main" val="2412081414"/>
+        <p14:creationId xmlns:p14="http://schemas.microsoft.com/office/powerpoint/2010/main" val="1854919877"/>
       </p:ext>
     </p:extLst>
   </p:cSld>
@@ -11535,351 +11579,351 @@
           <a:lstStyle/>
           <a:p>
             <a:r>
-              <a:rPr lang="en-US"/>
+              <a:rPr lang="en-US" dirty="0"/>
               <a:t>Each FP has a previous and a next</a:t>
             </a:r>
           </a:p>
           <a:p>
             <a:pPr lvl="1"/>
             <a:r>
-              <a:rPr lang="en-US"/>
+              <a:rPr lang="en-US" dirty="0"/>
               <a:t>Previous of 31ᐧ10</a:t>
             </a:r>
             <a:r>
-              <a:rPr lang="en-US" baseline="30000"/>
+              <a:rPr lang="en-US" baseline="30000" dirty="0"/>
               <a:t>-1 </a:t>
             </a:r>
             <a:r>
-              <a:rPr lang="en-US"/>
+              <a:rPr lang="en-US" dirty="0"/>
               <a:t>is</a:t>
             </a:r>
             <a:r>
-              <a:rPr lang="en-US" baseline="30000"/>
+              <a:rPr lang="en-US" baseline="30000" dirty="0"/>
               <a:t> </a:t>
             </a:r>
             <a:r>
-              <a:rPr lang="en-US"/>
+              <a:rPr lang="en-US" dirty="0"/>
               <a:t>30ᐧ10</a:t>
             </a:r>
             <a:r>
-              <a:rPr lang="en-US" baseline="30000"/>
+              <a:rPr lang="en-US" baseline="30000" dirty="0"/>
               <a:t>-1</a:t>
             </a:r>
             <a:r>
-              <a:rPr lang="en-US"/>
+              <a:rPr lang="en-US" dirty="0"/>
               <a:t>, next is 32ᐧ10</a:t>
             </a:r>
             <a:r>
-              <a:rPr lang="en-US" baseline="30000"/>
+              <a:rPr lang="en-US" baseline="30000" dirty="0"/>
               <a:t>-1</a:t>
             </a:r>
           </a:p>
           <a:p>
             <a:pPr lvl="1"/>
             <a:r>
-              <a:rPr lang="en-US"/>
+              <a:rPr lang="en-US" dirty="0"/>
               <a:t>Previous of </a:t>
             </a:r>
             <a:r>
-              <a:rPr lang="cs-CZ" altLang="x-none"/>
+              <a:rPr lang="cs-CZ" altLang="x-none" dirty="0"/>
               <a:t>1.921fb6</a:t>
             </a:r>
             <a:r>
-              <a:rPr lang="en-US" err="1"/>
+              <a:rPr lang="en-US" dirty="0" err="1"/>
               <a:t>ᐧ</a:t>
             </a:r>
             <a:r>
-              <a:rPr lang="cs-CZ" altLang="x-none"/>
+              <a:rPr lang="cs-CZ" altLang="x-none" dirty="0"/>
               <a:t>2</a:t>
             </a:r>
             <a:r>
-              <a:rPr lang="cs-CZ" altLang="x-none" baseline="30000"/>
+              <a:rPr lang="cs-CZ" altLang="x-none" baseline="30000" dirty="0"/>
               <a:t>+1  </a:t>
             </a:r>
             <a:r>
-              <a:rPr lang="cs-CZ" altLang="x-none" err="1"/>
+              <a:rPr lang="cs-CZ" altLang="x-none" dirty="0" err="1"/>
               <a:t>is</a:t>
             </a:r>
             <a:r>
-              <a:rPr lang="cs-CZ" altLang="x-none"/>
+              <a:rPr lang="cs-CZ" altLang="x-none" dirty="0"/>
               <a:t> 1.921fb4</a:t>
             </a:r>
             <a:r>
-              <a:rPr lang="en-US" err="1"/>
+              <a:rPr lang="en-US" dirty="0" err="1"/>
               <a:t>ᐧ</a:t>
             </a:r>
             <a:r>
-              <a:rPr lang="cs-CZ" altLang="x-none"/>
+              <a:rPr lang="cs-CZ" altLang="x-none" dirty="0"/>
               <a:t>2</a:t>
             </a:r>
             <a:r>
-              <a:rPr lang="cs-CZ" altLang="x-none" baseline="30000"/>
+              <a:rPr lang="cs-CZ" altLang="x-none" baseline="30000" dirty="0"/>
               <a:t>+1</a:t>
             </a:r>
             <a:r>
-              <a:rPr lang="cs-CZ" altLang="x-none"/>
+              <a:rPr lang="cs-CZ" altLang="x-none" dirty="0"/>
               <a:t>, </a:t>
             </a:r>
             <a:r>
-              <a:rPr lang="cs-CZ" altLang="x-none" err="1"/>
+              <a:rPr lang="cs-CZ" altLang="x-none" dirty="0" err="1"/>
               <a:t>next</a:t>
             </a:r>
             <a:r>
-              <a:rPr lang="cs-CZ" altLang="x-none"/>
+              <a:rPr lang="cs-CZ" altLang="x-none" dirty="0"/>
               <a:t> </a:t>
             </a:r>
             <a:r>
-              <a:rPr lang="cs-CZ" altLang="x-none" err="1"/>
+              <a:rPr lang="cs-CZ" altLang="x-none" dirty="0" err="1"/>
               <a:t>is</a:t>
             </a:r>
             <a:r>
-              <a:rPr lang="cs-CZ" altLang="x-none"/>
+              <a:rPr lang="cs-CZ" altLang="x-none" dirty="0"/>
               <a:t> 1.921fb8</a:t>
             </a:r>
             <a:r>
-              <a:rPr lang="en-US" err="1"/>
+              <a:rPr lang="en-US" dirty="0" err="1"/>
               <a:t>ᐧ</a:t>
             </a:r>
             <a:r>
-              <a:rPr lang="cs-CZ" altLang="x-none"/>
+              <a:rPr lang="cs-CZ" altLang="x-none" dirty="0"/>
               <a:t>2</a:t>
             </a:r>
             <a:r>
-              <a:rPr lang="cs-CZ" altLang="x-none" baseline="30000"/>
+              <a:rPr lang="cs-CZ" altLang="x-none" baseline="30000" dirty="0"/>
               <a:t>+1</a:t>
             </a:r>
             <a:r>
-              <a:rPr lang="cs-CZ" altLang="x-none"/>
+              <a:rPr lang="cs-CZ" altLang="x-none" dirty="0"/>
               <a:t> </a:t>
             </a:r>
           </a:p>
           <a:p>
             <a:pPr lvl="1"/>
             <a:r>
-              <a:rPr lang="cs-CZ" altLang="x-none" err="1"/>
+              <a:rPr lang="cs-CZ" altLang="x-none" dirty="0" err="1"/>
               <a:t>The</a:t>
             </a:r>
             <a:r>
-              <a:rPr lang="cs-CZ" altLang="x-none"/>
+              <a:rPr lang="cs-CZ" altLang="x-none" dirty="0"/>
               <a:t> </a:t>
             </a:r>
             <a:r>
-              <a:rPr lang="cs-CZ" altLang="x-none" err="1"/>
+              <a:rPr lang="cs-CZ" altLang="x-none" dirty="0" err="1"/>
               <a:t>difference</a:t>
             </a:r>
             <a:r>
-              <a:rPr lang="cs-CZ" altLang="x-none"/>
+              <a:rPr lang="cs-CZ" altLang="x-none" dirty="0"/>
               <a:t> </a:t>
             </a:r>
             <a:r>
-              <a:rPr lang="cs-CZ" altLang="x-none" err="1"/>
+              <a:rPr lang="cs-CZ" altLang="x-none" dirty="0" err="1"/>
               <a:t>between</a:t>
             </a:r>
             <a:r>
-              <a:rPr lang="cs-CZ" altLang="x-none"/>
+              <a:rPr lang="cs-CZ" altLang="x-none" dirty="0"/>
               <a:t> </a:t>
             </a:r>
             <a:r>
-              <a:rPr lang="cs-CZ" altLang="x-none" err="1"/>
+              <a:rPr lang="cs-CZ" altLang="x-none" dirty="0" err="1"/>
               <a:t>two</a:t>
             </a:r>
             <a:r>
-              <a:rPr lang="cs-CZ" altLang="x-none"/>
+              <a:rPr lang="cs-CZ" altLang="x-none" dirty="0"/>
               <a:t> </a:t>
             </a:r>
             <a:r>
-              <a:rPr lang="cs-CZ" altLang="x-none" err="1"/>
+              <a:rPr lang="cs-CZ" altLang="x-none" dirty="0" err="1"/>
               <a:t>consecutive</a:t>
             </a:r>
             <a:r>
-              <a:rPr lang="cs-CZ" altLang="x-none"/>
+              <a:rPr lang="cs-CZ" altLang="x-none" dirty="0"/>
               <a:t> FP </a:t>
             </a:r>
             <a:r>
-              <a:rPr lang="cs-CZ" altLang="x-none" err="1"/>
+              <a:rPr lang="cs-CZ" altLang="x-none" dirty="0" err="1"/>
               <a:t>is</a:t>
             </a:r>
             <a:r>
-              <a:rPr lang="cs-CZ" altLang="x-none"/>
+              <a:rPr lang="cs-CZ" altLang="x-none" dirty="0"/>
               <a:t> </a:t>
             </a:r>
             <a:r>
-              <a:rPr lang="cs-CZ" altLang="x-none" err="1"/>
+              <a:rPr lang="cs-CZ" altLang="x-none" dirty="0" err="1"/>
               <a:t>called</a:t>
             </a:r>
             <a:r>
-              <a:rPr lang="cs-CZ" altLang="x-none"/>
+              <a:rPr lang="cs-CZ" altLang="x-none" dirty="0"/>
               <a:t> ULP (unit in last place)</a:t>
             </a:r>
           </a:p>
           <a:p>
             <a:r>
-              <a:rPr lang="cs-CZ" altLang="x-none" err="1"/>
+              <a:rPr lang="cs-CZ" altLang="x-none" dirty="0" err="1"/>
               <a:t>For</a:t>
             </a:r>
             <a:r>
-              <a:rPr lang="cs-CZ" altLang="x-none"/>
+              <a:rPr lang="cs-CZ" altLang="x-none" dirty="0"/>
               <a:t> </a:t>
             </a:r>
             <a:r>
-              <a:rPr lang="cs-CZ" altLang="x-none" err="1"/>
+              <a:rPr lang="cs-CZ" altLang="x-none" dirty="0" err="1"/>
               <a:t>each</a:t>
             </a:r>
             <a:r>
-              <a:rPr lang="cs-CZ" altLang="x-none"/>
+              <a:rPr lang="cs-CZ" altLang="x-none" dirty="0"/>
               <a:t> </a:t>
             </a:r>
             <a:r>
-              <a:rPr lang="cs-CZ" altLang="x-none" err="1"/>
+              <a:rPr lang="cs-CZ" altLang="x-none" dirty="0" err="1"/>
               <a:t>value</a:t>
             </a:r>
             <a:r>
-              <a:rPr lang="cs-CZ" altLang="x-none"/>
+              <a:rPr lang="cs-CZ" altLang="x-none" dirty="0"/>
               <a:t> </a:t>
             </a:r>
             <a:r>
-              <a:rPr lang="cs-CZ" altLang="x-none" err="1"/>
+              <a:rPr lang="cs-CZ" altLang="x-none" dirty="0" err="1"/>
               <a:t>of</a:t>
             </a:r>
             <a:r>
-              <a:rPr lang="cs-CZ" altLang="x-none"/>
+              <a:rPr lang="cs-CZ" altLang="x-none" dirty="0"/>
               <a:t> </a:t>
             </a:r>
             <a:r>
-              <a:rPr lang="cs-CZ" altLang="x-none" err="1"/>
+              <a:rPr lang="cs-CZ" altLang="x-none" dirty="0" err="1"/>
               <a:t>the</a:t>
             </a:r>
             <a:r>
-              <a:rPr lang="cs-CZ" altLang="x-none"/>
+              <a:rPr lang="cs-CZ" altLang="x-none" dirty="0"/>
               <a:t> exponent </a:t>
             </a:r>
             <a:r>
-              <a:rPr lang="cs-CZ" altLang="x-none" err="1"/>
+              <a:rPr lang="cs-CZ" altLang="x-none" dirty="0" err="1"/>
               <a:t>there</a:t>
             </a:r>
             <a:r>
-              <a:rPr lang="cs-CZ" altLang="x-none"/>
+              <a:rPr lang="cs-CZ" altLang="x-none" dirty="0"/>
               <a:t> </a:t>
             </a:r>
             <a:r>
-              <a:rPr lang="cs-CZ" altLang="x-none" err="1"/>
+              <a:rPr lang="cs-CZ" altLang="x-none" dirty="0" err="1"/>
               <a:t>is</a:t>
             </a:r>
             <a:r>
-              <a:rPr lang="cs-CZ" altLang="x-none"/>
+              <a:rPr lang="cs-CZ" altLang="x-none" dirty="0"/>
               <a:t> a </a:t>
             </a:r>
             <a:r>
-              <a:rPr lang="cs-CZ" altLang="x-none" err="1"/>
+              <a:rPr lang="cs-CZ" altLang="x-none" dirty="0" err="1"/>
               <a:t>finite</a:t>
             </a:r>
             <a:r>
-              <a:rPr lang="cs-CZ" altLang="x-none"/>
+              <a:rPr lang="cs-CZ" altLang="x-none" dirty="0"/>
               <a:t> </a:t>
             </a:r>
             <a:r>
-              <a:rPr lang="cs-CZ" altLang="x-none" err="1"/>
+              <a:rPr lang="cs-CZ" altLang="x-none" dirty="0" err="1"/>
               <a:t>number</a:t>
             </a:r>
             <a:r>
-              <a:rPr lang="cs-CZ" altLang="x-none"/>
+              <a:rPr lang="cs-CZ" altLang="x-none" dirty="0"/>
               <a:t> </a:t>
             </a:r>
             <a:r>
-              <a:rPr lang="cs-CZ" altLang="x-none" err="1"/>
+              <a:rPr lang="cs-CZ" altLang="x-none" dirty="0" err="1"/>
               <a:t>of</a:t>
             </a:r>
             <a:r>
-              <a:rPr lang="cs-CZ" altLang="x-none"/>
+              <a:rPr lang="cs-CZ" altLang="x-none" dirty="0"/>
               <a:t> FP</a:t>
             </a:r>
           </a:p>
           <a:p>
             <a:pPr lvl="1"/>
             <a:r>
-              <a:rPr lang="cs-CZ" altLang="x-none"/>
+              <a:rPr lang="cs-CZ" altLang="x-none" dirty="0"/>
               <a:t> 10</a:t>
             </a:r>
             <a:r>
-              <a:rPr lang="cs-CZ" altLang="x-none" baseline="30000"/>
+              <a:rPr lang="cs-CZ" altLang="x-none" baseline="30000" dirty="0"/>
               <a:t> </a:t>
             </a:r>
             <a:r>
-              <a:rPr lang="en-US"/>
+              <a:rPr lang="en-US" dirty="0"/>
               <a:t>ᐧ10</a:t>
             </a:r>
             <a:r>
-              <a:rPr lang="en-US" baseline="30000"/>
+              <a:rPr lang="en-US" baseline="30000" dirty="0"/>
               <a:t>e</a:t>
             </a:r>
             <a:r>
-              <a:rPr lang="en-US"/>
+              <a:rPr lang="en-US" dirty="0"/>
               <a:t> - </a:t>
             </a:r>
             <a:r>
-              <a:rPr lang="cs-CZ"/>
+              <a:rPr lang="cs-CZ" dirty="0"/>
               <a:t>99</a:t>
             </a:r>
             <a:r>
-              <a:rPr lang="cs-CZ" altLang="x-none" baseline="30000"/>
+              <a:rPr lang="cs-CZ" altLang="x-none" baseline="30000" dirty="0"/>
               <a:t> </a:t>
             </a:r>
             <a:r>
-              <a:rPr lang="en-US"/>
+              <a:rPr lang="en-US" dirty="0"/>
               <a:t>ᐧ10</a:t>
             </a:r>
             <a:r>
-              <a:rPr lang="en-US" baseline="30000"/>
+              <a:rPr lang="en-US" baseline="30000" dirty="0"/>
               <a:t>e</a:t>
             </a:r>
             <a:r>
-              <a:rPr lang="en-US"/>
+              <a:rPr lang="en-US" dirty="0"/>
               <a:t> </a:t>
             </a:r>
           </a:p>
           <a:p>
             <a:pPr lvl="1"/>
             <a:r>
-              <a:rPr lang="en-US"/>
+              <a:rPr lang="en-US" dirty="0"/>
               <a:t>1.000000ᐧ</a:t>
             </a:r>
             <a:r>
-              <a:rPr lang="cs-CZ" altLang="x-none"/>
+              <a:rPr lang="cs-CZ" altLang="x-none" dirty="0"/>
               <a:t>2</a:t>
             </a:r>
             <a:r>
-              <a:rPr lang="en-US" baseline="30000"/>
+              <a:rPr lang="en-US" baseline="30000" dirty="0"/>
               <a:t>e </a:t>
             </a:r>
             <a:r>
-              <a:rPr lang="en-US"/>
+              <a:rPr lang="en-US" dirty="0"/>
               <a:t>- 1.ffffffᐧ</a:t>
             </a:r>
             <a:r>
-              <a:rPr lang="cs-CZ" altLang="x-none"/>
+              <a:rPr lang="cs-CZ" altLang="x-none" dirty="0"/>
               <a:t>2</a:t>
             </a:r>
             <a:r>
-              <a:rPr lang="en-US" baseline="30000"/>
+              <a:rPr lang="en-US" baseline="30000" dirty="0"/>
               <a:t>e </a:t>
             </a:r>
             <a:r>
-              <a:rPr lang="en-US"/>
+              <a:rPr lang="en-US" dirty="0"/>
               <a:t> </a:t>
             </a:r>
           </a:p>
           <a:p>
             <a:pPr lvl="1"/>
             <a:r>
-              <a:rPr lang="en-US"/>
+              <a:rPr lang="en-US" dirty="0"/>
               <a:t>(called “</a:t>
             </a:r>
             <a:r>
-              <a:rPr lang="en-US" err="1"/>
+              <a:rPr lang="en-US" dirty="0" err="1"/>
               <a:t>binade</a:t>
             </a:r>
             <a:r>
-              <a:rPr lang="en-US"/>
+              <a:rPr lang="en-US" dirty="0"/>
               <a:t>”)</a:t>
             </a:r>
           </a:p>
@@ -11889,6 +11933,334 @@
     <p:extLst>
       <p:ext uri="{BB962C8B-B14F-4D97-AF65-F5344CB8AC3E}">
         <p14:creationId xmlns:p14="http://schemas.microsoft.com/office/powerpoint/2010/main" val="4071479380"/>
+      </p:ext>
+    </p:extLst>
+  </p:cSld>
+  <p:clrMapOvr>
+    <a:masterClrMapping/>
+  </p:clrMapOvr>
+</p:sld>
+</file>
+
+<file path=ppt/slides/slide30.xml><?xml version="1.0" encoding="utf-8"?>
+<p:sld xmlns:a="http://schemas.openxmlformats.org/drawingml/2006/main" xmlns:r="http://schemas.openxmlformats.org/officeDocument/2006/relationships" xmlns:p="http://schemas.openxmlformats.org/presentationml/2006/main">
+  <p:cSld>
+    <p:spTree>
+      <p:nvGrpSpPr>
+        <p:cNvPr id="1" name=""/>
+        <p:cNvGrpSpPr/>
+        <p:nvPr/>
+      </p:nvGrpSpPr>
+      <p:grpSpPr>
+        <a:xfrm>
+          <a:off x="0" y="0"/>
+          <a:ext cx="0" cy="0"/>
+          <a:chOff x="0" y="0"/>
+          <a:chExt cx="0" cy="0"/>
+        </a:xfrm>
+      </p:grpSpPr>
+      <p:sp>
+        <p:nvSpPr>
+          <p:cNvPr id="2" name="Title 1">
+            <a:extLst>
+              <a:ext uri="{FF2B5EF4-FFF2-40B4-BE49-F238E27FC236}">
+                <a16:creationId xmlns:a16="http://schemas.microsoft.com/office/drawing/2014/main" id="{AED3096E-0FB8-D1CA-58AB-3E330A5080D9}"/>
+              </a:ext>
+            </a:extLst>
+          </p:cNvPr>
+          <p:cNvSpPr>
+            <a:spLocks noGrp="1"/>
+          </p:cNvSpPr>
+          <p:nvPr>
+            <p:ph type="title"/>
+          </p:nvPr>
+        </p:nvSpPr>
+        <p:spPr/>
+        <p:txBody>
+          <a:bodyPr/>
+          <a:lstStyle/>
+          <a:p>
+            <a:r>
+              <a:rPr lang="en-US" dirty="0"/>
+              <a:t>Approximation</a:t>
+            </a:r>
+          </a:p>
+        </p:txBody>
+      </p:sp>
+      <p:sp>
+        <p:nvSpPr>
+          <p:cNvPr id="3" name="Content Placeholder 2">
+            <a:extLst>
+              <a:ext uri="{FF2B5EF4-FFF2-40B4-BE49-F238E27FC236}">
+                <a16:creationId xmlns:a16="http://schemas.microsoft.com/office/drawing/2014/main" id="{D08EC86E-C3C4-005B-E8CD-545CAC7EC632}"/>
+              </a:ext>
+            </a:extLst>
+          </p:cNvPr>
+          <p:cNvSpPr>
+            <a:spLocks noGrp="1"/>
+          </p:cNvSpPr>
+          <p:nvPr>
+            <p:ph idx="1"/>
+          </p:nvPr>
+        </p:nvSpPr>
+        <p:spPr/>
+        <p:txBody>
+          <a:bodyPr/>
+          <a:lstStyle/>
+          <a:p>
+            <a:r>
+              <a:rPr lang="en-US" dirty="0"/>
+              <a:t>Since 1964 the reference for function approximation is the </a:t>
+            </a:r>
+            <a:r>
+              <a:rPr lang="en-US" i="1" dirty="0"/>
+              <a:t>Abramowitz and </a:t>
+            </a:r>
+            <a:r>
+              <a:rPr lang="en-US" i="1" dirty="0" err="1"/>
+              <a:t>Stegun</a:t>
+            </a:r>
+            <a:endParaRPr lang="en-US" i="1" dirty="0"/>
+          </a:p>
+          <a:p>
+            <a:pPr lvl="1"/>
+            <a:r>
+              <a:rPr lang="en-US" dirty="0"/>
+              <a:t>Today replaced by the </a:t>
+            </a:r>
+            <a:r>
+              <a:rPr lang="en-US" i="1" dirty="0"/>
+              <a:t>digital library </a:t>
+            </a:r>
+            <a:r>
+              <a:rPr lang="en-US" dirty="0">
+                <a:hlinkClick r:id="rId2"/>
+              </a:rPr>
+              <a:t>https://dlmf.nist.gov/</a:t>
+            </a:r>
+            <a:endParaRPr lang="en-US" dirty="0"/>
+          </a:p>
+          <a:p>
+            <a:r>
+              <a:rPr lang="en-US" dirty="0"/>
+              <a:t>Elementary functions are usually approximated either by  </a:t>
+            </a:r>
+          </a:p>
+          <a:p>
+            <a:pPr lvl="1"/>
+            <a:r>
+              <a:rPr lang="en-US" dirty="0"/>
+              <a:t>a polynomial</a:t>
+            </a:r>
+          </a:p>
+          <a:p>
+            <a:pPr lvl="2"/>
+            <a:r>
+              <a:rPr lang="en-US" dirty="0"/>
+              <a:t>Chebyshev approximation satisfying the ”superior” norm (max in an interval)</a:t>
+            </a:r>
+          </a:p>
+          <a:p>
+            <a:pPr lvl="1"/>
+            <a:r>
+              <a:rPr lang="en-US" dirty="0"/>
+              <a:t>a rational function (ratio of two polynomial)</a:t>
+            </a:r>
+          </a:p>
+          <a:p>
+            <a:pPr lvl="2"/>
+            <a:r>
+              <a:rPr lang="en-US" dirty="0"/>
+              <a:t>Pade’ approximation</a:t>
+            </a:r>
+          </a:p>
+          <a:p>
+            <a:pPr lvl="1"/>
+            <a:r>
+              <a:rPr lang="en-US" dirty="0"/>
+              <a:t>an iterative method such as Newton-Raphson</a:t>
+            </a:r>
+          </a:p>
+        </p:txBody>
+      </p:sp>
+    </p:spTree>
+    <p:extLst>
+      <p:ext uri="{BB962C8B-B14F-4D97-AF65-F5344CB8AC3E}">
+        <p14:creationId xmlns:p14="http://schemas.microsoft.com/office/powerpoint/2010/main" val="1086942570"/>
+      </p:ext>
+    </p:extLst>
+  </p:cSld>
+  <p:clrMapOvr>
+    <a:masterClrMapping/>
+  </p:clrMapOvr>
+</p:sld>
+</file>
+
+<file path=ppt/slides/slide31.xml><?xml version="1.0" encoding="utf-8"?>
+<p:sld xmlns:a="http://schemas.openxmlformats.org/drawingml/2006/main" xmlns:r="http://schemas.openxmlformats.org/officeDocument/2006/relationships" xmlns:p="http://schemas.openxmlformats.org/presentationml/2006/main">
+  <p:cSld>
+    <p:spTree>
+      <p:nvGrpSpPr>
+        <p:cNvPr id="1" name=""/>
+        <p:cNvGrpSpPr/>
+        <p:nvPr/>
+      </p:nvGrpSpPr>
+      <p:grpSpPr>
+        <a:xfrm>
+          <a:off x="0" y="0"/>
+          <a:ext cx="0" cy="0"/>
+          <a:chOff x="0" y="0"/>
+          <a:chExt cx="0" cy="0"/>
+        </a:xfrm>
+      </p:grpSpPr>
+      <p:sp>
+        <p:nvSpPr>
+          <p:cNvPr id="2" name="Title 1">
+            <a:extLst>
+              <a:ext uri="{FF2B5EF4-FFF2-40B4-BE49-F238E27FC236}">
+                <a16:creationId xmlns:a16="http://schemas.microsoft.com/office/drawing/2014/main" id="{3605343B-1389-DA64-EB0F-528286A51FFA}"/>
+              </a:ext>
+            </a:extLst>
+          </p:cNvPr>
+          <p:cNvSpPr>
+            <a:spLocks noGrp="1"/>
+          </p:cNvSpPr>
+          <p:nvPr>
+            <p:ph type="title"/>
+          </p:nvPr>
+        </p:nvSpPr>
+        <p:spPr/>
+        <p:txBody>
+          <a:bodyPr/>
+          <a:lstStyle/>
+          <a:p>
+            <a:r>
+              <a:rPr lang="en-US" dirty="0"/>
+              <a:t>Table Maker’s Dilemma</a:t>
+            </a:r>
+          </a:p>
+        </p:txBody>
+      </p:sp>
+      <p:sp>
+        <p:nvSpPr>
+          <p:cNvPr id="3" name="Content Placeholder 2">
+            <a:extLst>
+              <a:ext uri="{FF2B5EF4-FFF2-40B4-BE49-F238E27FC236}">
+                <a16:creationId xmlns:a16="http://schemas.microsoft.com/office/drawing/2014/main" id="{2086B04A-95BD-FA41-2381-3A717B3D5992}"/>
+              </a:ext>
+            </a:extLst>
+          </p:cNvPr>
+          <p:cNvSpPr>
+            <a:spLocks noGrp="1"/>
+          </p:cNvSpPr>
+          <p:nvPr>
+            <p:ph idx="1"/>
+          </p:nvPr>
+        </p:nvSpPr>
+        <p:spPr>
+          <a:xfrm>
+            <a:off x="6613014" y="1253331"/>
+            <a:ext cx="5198673" cy="4351338"/>
+          </a:xfrm>
+        </p:spPr>
+        <p:txBody>
+          <a:bodyPr>
+            <a:normAutofit fontScale="85000" lnSpcReduction="20000"/>
+          </a:bodyPr>
+          <a:lstStyle/>
+          <a:p>
+            <a:pPr marL="0" indent="0">
+              <a:buNone/>
+            </a:pPr>
+            <a:r>
+              <a:rPr lang="en-US" dirty="0"/>
+              <a:t>to guarantee a given precision one needs to evaluate the  error of the approximation “y = f(x)”</a:t>
+            </a:r>
+          </a:p>
+          <a:p>
+            <a:pPr lvl="1"/>
+            <a:r>
+              <a:rPr lang="en-US" dirty="0"/>
+              <a:t>From first principle</a:t>
+            </a:r>
+          </a:p>
+          <a:p>
+            <a:pPr lvl="1"/>
+            <a:r>
+              <a:rPr lang="en-US" dirty="0"/>
+              <a:t>Or on the fly as seen before</a:t>
+            </a:r>
+          </a:p>
+          <a:p>
+            <a:pPr marL="514350" indent="-514350">
+              <a:buFont typeface="+mj-lt"/>
+              <a:buAutoNum type="arabicPeriod"/>
+            </a:pPr>
+            <a:r>
+              <a:rPr lang="en-US" dirty="0"/>
+              <a:t>The function need to be computed with at least one more digit (the round digit)</a:t>
+            </a:r>
+          </a:p>
+          <a:p>
+            <a:pPr marL="514350" indent="-514350">
+              <a:buFont typeface="+mj-lt"/>
+              <a:buAutoNum type="arabicPeriod"/>
+            </a:pPr>
+            <a:r>
+              <a:rPr lang="en-US" dirty="0"/>
+              <a:t>In Round2Near: if the error interval includes the middle point an even more precise evaluation is required</a:t>
+            </a:r>
+          </a:p>
+          <a:p>
+            <a:pPr lvl="1"/>
+            <a:r>
+              <a:rPr lang="en-US" dirty="0"/>
+              <a:t>the round digit may be followed by a sequel of 0’s or 1’s (or 9’s) and the TMD solution may be very expensive</a:t>
+            </a:r>
+          </a:p>
+          <a:p>
+            <a:pPr marL="971550" lvl="1" indent="-514350">
+              <a:buFont typeface="+mj-lt"/>
+              <a:buAutoNum type="arabicPeriod"/>
+            </a:pPr>
+            <a:endParaRPr lang="en-US" dirty="0"/>
+          </a:p>
+        </p:txBody>
+      </p:sp>
+      <p:pic>
+        <p:nvPicPr>
+          <p:cNvPr id="4" name="Picture 3">
+            <a:extLst>
+              <a:ext uri="{FF2B5EF4-FFF2-40B4-BE49-F238E27FC236}">
+                <a16:creationId xmlns:a16="http://schemas.microsoft.com/office/drawing/2014/main" id="{4F2868B6-1862-A422-6CB6-CBFCB24ECA67}"/>
+              </a:ext>
+            </a:extLst>
+          </p:cNvPr>
+          <p:cNvPicPr>
+            <a:picLocks noChangeAspect="1"/>
+          </p:cNvPicPr>
+          <p:nvPr/>
+        </p:nvPicPr>
+        <p:blipFill>
+          <a:blip r:embed="rId2"/>
+          <a:stretch>
+            <a:fillRect/>
+          </a:stretch>
+        </p:blipFill>
+        <p:spPr>
+          <a:xfrm>
+            <a:off x="380313" y="1690688"/>
+            <a:ext cx="6109133" cy="4649230"/>
+          </a:xfrm>
+          <a:prstGeom prst="rect">
+            <a:avLst/>
+          </a:prstGeom>
+        </p:spPr>
+      </p:pic>
+    </p:spTree>
+    <p:extLst>
+      <p:ext uri="{BB962C8B-B14F-4D97-AF65-F5344CB8AC3E}">
+        <p14:creationId xmlns:p14="http://schemas.microsoft.com/office/powerpoint/2010/main" val="2412081414"/>
       </p:ext>
     </p:extLst>
   </p:cSld>

--- a/Slides/FPforScientist.pptx
+++ b/Slides/FPforScientist.pptx
@@ -35,7 +35,8 @@
     <p:sldId id="471" r:id="rId29"/>
     <p:sldId id="474" r:id="rId30"/>
     <p:sldId id="473" r:id="rId31"/>
-    <p:sldId id="472" r:id="rId32"/>
+    <p:sldId id="475" r:id="rId32"/>
+    <p:sldId id="472" r:id="rId33"/>
   </p:sldIdLst>
   <p:sldSz cx="12192000" cy="6858000"/>
   <p:notesSz cx="6858000" cy="9144000"/>
@@ -11419,11 +11420,50 @@
             <a:pPr lvl="1"/>
             <a:r>
               <a:rPr lang="en-US" dirty="0"/>
-              <a:t>For log: compute log(1+x) in [1,2) (actually </a:t>
-            </a:r>
-            <a:r>
-              <a:rPr lang="en-US"/>
-              <a:t>an optimized [y,2y))</a:t>
+              <a:t>For log: compute log</a:t>
+            </a:r>
+            <a:r>
+              <a:rPr lang="en-US" baseline="-25000" dirty="0"/>
+              <a:t>2</a:t>
+            </a:r>
+            <a:r>
+              <a:rPr lang="en-US" dirty="0"/>
+              <a:t>(x) in [0.75,1.5)</a:t>
+            </a:r>
+          </a:p>
+          <a:p>
+            <a:pPr lvl="1"/>
+            <a:r>
+              <a:rPr lang="en-US" dirty="0"/>
+              <a:t> </a:t>
+            </a:r>
+            <a:r>
+              <a:rPr lang="en-US" dirty="0" err="1"/>
+              <a:t>x</a:t>
+            </a:r>
+            <a:r>
+              <a:rPr lang="en-US" baseline="30000" dirty="0" err="1"/>
+              <a:t>y</a:t>
+            </a:r>
+            <a:r>
+              <a:rPr lang="en-US" baseline="30000" dirty="0"/>
+              <a:t> </a:t>
+            </a:r>
+            <a:r>
+              <a:rPr lang="en-US" dirty="0"/>
+              <a:t>= 2</a:t>
+            </a:r>
+            <a:r>
+              <a:rPr lang="en-US" baseline="30000" dirty="0"/>
+              <a:t>ylog</a:t>
+            </a:r>
+            <a:r>
+              <a:rPr lang="en-US" baseline="-25000" dirty="0"/>
+              <a:t>2</a:t>
+            </a:r>
+            <a:r>
+              <a:rPr lang="en-US" baseline="30000" dirty="0"/>
+              <a:t>(x)</a:t>
             </a:r>
             <a:endParaRPr lang="en-US" dirty="0"/>
           </a:p>
@@ -12003,9 +12043,16 @@
             <p:ph idx="1"/>
           </p:nvPr>
         </p:nvSpPr>
-        <p:spPr/>
+        <p:spPr>
+          <a:xfrm>
+            <a:off x="838200" y="1365357"/>
+            <a:ext cx="10515600" cy="4783830"/>
+          </a:xfrm>
+        </p:spPr>
         <p:txBody>
-          <a:bodyPr/>
+          <a:bodyPr>
+            <a:normAutofit/>
+          </a:bodyPr>
           <a:lstStyle/>
           <a:p>
             <a:r>
@@ -12050,6 +12097,30 @@
             <a:pPr lvl="1"/>
             <a:r>
               <a:rPr lang="en-US" dirty="0"/>
+              <a:t>Shift-and-add algorithms (CORDIC </a:t>
+            </a:r>
+            <a:r>
+              <a:rPr lang="en-US" dirty="0">
+                <a:hlinkClick r:id="rId3"/>
+              </a:rPr>
+              <a:t>https://en.wikipedia.org/wiki/CORDIC</a:t>
+            </a:r>
+            <a:r>
+              <a:rPr lang="en-US" dirty="0"/>
+              <a:t>)</a:t>
+            </a:r>
+          </a:p>
+          <a:p>
+            <a:pPr lvl="2"/>
+            <a:r>
+              <a:rPr lang="en-US" dirty="0"/>
+              <a:t>Today limited to FPGA</a:t>
+            </a:r>
+          </a:p>
+          <a:p>
+            <a:pPr lvl="1"/>
+            <a:r>
+              <a:rPr lang="en-US" dirty="0"/>
               <a:t>a polynomial</a:t>
             </a:r>
           </a:p>
@@ -12080,6 +12151,30 @@
               <a:rPr lang="en-US" dirty="0"/>
               <a:t>an iterative method such as Newton-Raphson</a:t>
             </a:r>
+          </a:p>
+          <a:p>
+            <a:pPr marL="0" indent="0">
+              <a:buNone/>
+            </a:pPr>
+            <a:r>
+              <a:rPr lang="en-US" sz="1800" dirty="0"/>
+              <a:t>See also the short paper by </a:t>
+            </a:r>
+            <a:r>
+              <a:rPr lang="en-US" sz="1800" dirty="0" err="1"/>
+              <a:t>J.M.Muller</a:t>
+            </a:r>
+            <a:r>
+              <a:rPr lang="en-US" sz="1800" dirty="0"/>
+              <a:t> </a:t>
+            </a:r>
+            <a:r>
+              <a:rPr lang="en-US" sz="1800" dirty="0">
+                <a:hlinkClick r:id="rId4"/>
+              </a:rPr>
+              <a:t>https://hal.science/hal-02517784v1/file/approxfunctions.pdf</a:t>
+            </a:r>
+            <a:endParaRPr lang="en-US" sz="1800" dirty="0"/>
           </a:p>
         </p:txBody>
       </p:sp>
@@ -12097,6 +12192,686 @@
 </file>
 
 <file path=ppt/slides/slide31.xml><?xml version="1.0" encoding="utf-8"?>
+<p:sld xmlns:a="http://schemas.openxmlformats.org/drawingml/2006/main" xmlns:r="http://schemas.openxmlformats.org/officeDocument/2006/relationships" xmlns:p="http://schemas.openxmlformats.org/presentationml/2006/main">
+  <p:cSld>
+    <p:spTree>
+      <p:nvGrpSpPr>
+        <p:cNvPr id="1" name=""/>
+        <p:cNvGrpSpPr/>
+        <p:nvPr/>
+      </p:nvGrpSpPr>
+      <p:grpSpPr>
+        <a:xfrm>
+          <a:off x="0" y="0"/>
+          <a:ext cx="0" cy="0"/>
+          <a:chOff x="0" y="0"/>
+          <a:chExt cx="0" cy="0"/>
+        </a:xfrm>
+      </p:grpSpPr>
+      <p:sp>
+        <p:nvSpPr>
+          <p:cNvPr id="2" name="Title 1">
+            <a:extLst>
+              <a:ext uri="{FF2B5EF4-FFF2-40B4-BE49-F238E27FC236}">
+                <a16:creationId xmlns:a16="http://schemas.microsoft.com/office/drawing/2014/main" id="{4867C1BC-635C-B440-306B-771A7D70363C}"/>
+              </a:ext>
+            </a:extLst>
+          </p:cNvPr>
+          <p:cNvSpPr>
+            <a:spLocks noGrp="1"/>
+          </p:cNvSpPr>
+          <p:nvPr>
+            <p:ph type="title"/>
+          </p:nvPr>
+        </p:nvSpPr>
+        <p:spPr/>
+        <p:txBody>
+          <a:bodyPr/>
+          <a:lstStyle/>
+          <a:p>
+            <a:r>
+              <a:rPr lang="en-US" dirty="0"/>
+              <a:t>1/x,</a:t>
+            </a:r>
+            <a:r>
+              <a:rPr lang="en-US" altLang="en-US" dirty="0">
+                <a:ea typeface="ＭＳ Ｐゴシック" panose="020B0600070205080204" pitchFamily="34" charset="-128"/>
+              </a:rPr>
+              <a:t> √</a:t>
+            </a:r>
+            <a:r>
+              <a:rPr lang="en-US" dirty="0"/>
+              <a:t>(x),1/</a:t>
+            </a:r>
+            <a:r>
+              <a:rPr lang="en-US" altLang="en-US" dirty="0">
+                <a:ea typeface="ＭＳ Ｐゴシック" panose="020B0600070205080204" pitchFamily="34" charset="-128"/>
+              </a:rPr>
+              <a:t>√</a:t>
+            </a:r>
+            <a:r>
+              <a:rPr lang="en-US" dirty="0"/>
+              <a:t>(x) aka </a:t>
+            </a:r>
+            <a:r>
+              <a:rPr lang="en-US" dirty="0" err="1"/>
+              <a:t>rcp</a:t>
+            </a:r>
+            <a:r>
+              <a:rPr lang="en-US" dirty="0"/>
+              <a:t>(x),sqrt(x),</a:t>
+            </a:r>
+            <a:r>
+              <a:rPr lang="en-US" dirty="0" err="1"/>
+              <a:t>rsqrt</a:t>
+            </a:r>
+            <a:r>
+              <a:rPr lang="en-US" dirty="0"/>
+              <a:t>(x)</a:t>
+            </a:r>
+          </a:p>
+        </p:txBody>
+      </p:sp>
+      <p:sp>
+        <p:nvSpPr>
+          <p:cNvPr id="3" name="Content Placeholder 2">
+            <a:extLst>
+              <a:ext uri="{FF2B5EF4-FFF2-40B4-BE49-F238E27FC236}">
+                <a16:creationId xmlns:a16="http://schemas.microsoft.com/office/drawing/2014/main" id="{6FB48287-65FB-35C0-3D99-A7760E441E38}"/>
+              </a:ext>
+            </a:extLst>
+          </p:cNvPr>
+          <p:cNvSpPr>
+            <a:spLocks noGrp="1"/>
+          </p:cNvSpPr>
+          <p:nvPr>
+            <p:ph idx="1"/>
+          </p:nvPr>
+        </p:nvSpPr>
+        <p:spPr>
+          <a:xfrm>
+            <a:off x="838200" y="1641518"/>
+            <a:ext cx="10515600" cy="2476350"/>
+          </a:xfrm>
+        </p:spPr>
+        <p:txBody>
+          <a:bodyPr>
+            <a:normAutofit/>
+          </a:bodyPr>
+          <a:lstStyle/>
+          <a:p>
+            <a:r>
+              <a:rPr lang="en-US" dirty="0"/>
+              <a:t>Few fast converging Newton-Raphson iterations</a:t>
+            </a:r>
+          </a:p>
+          <a:p>
+            <a:pPr lvl="1"/>
+            <a:r>
+              <a:rPr lang="en-US" dirty="0"/>
+              <a:t>Starting point is an approximation of  </a:t>
+            </a:r>
+            <a:r>
+              <a:rPr lang="en-US" i="1" dirty="0"/>
+              <a:t>f</a:t>
+            </a:r>
+            <a:r>
+              <a:rPr lang="en-US" dirty="0"/>
+              <a:t>(1.m) </a:t>
+            </a:r>
+          </a:p>
+          <a:p>
+            <a:pPr marL="0" indent="0">
+              <a:buNone/>
+            </a:pPr>
+            <a:endParaRPr lang="en-US" dirty="0"/>
+          </a:p>
+          <a:p>
+            <a:pPr marL="0" indent="0">
+              <a:buNone/>
+            </a:pPr>
+            <a:r>
+              <a:rPr lang="en-US" dirty="0"/>
+              <a:t> </a:t>
+            </a:r>
+          </a:p>
+        </p:txBody>
+      </p:sp>
+      <p:sp>
+        <p:nvSpPr>
+          <p:cNvPr id="5" name="Content Placeholder 2">
+            <a:extLst>
+              <a:ext uri="{FF2B5EF4-FFF2-40B4-BE49-F238E27FC236}">
+                <a16:creationId xmlns:a16="http://schemas.microsoft.com/office/drawing/2014/main" id="{0ECB73D8-E6ED-0730-F110-9A5324BBB611}"/>
+              </a:ext>
+            </a:extLst>
+          </p:cNvPr>
+          <p:cNvSpPr txBox="1">
+            <a:spLocks/>
+          </p:cNvSpPr>
+          <p:nvPr/>
+        </p:nvSpPr>
+        <p:spPr>
+          <a:xfrm>
+            <a:off x="1470814" y="2675694"/>
+            <a:ext cx="8458200" cy="1066800"/>
+          </a:xfrm>
+          <a:prstGeom prst="rect">
+            <a:avLst/>
+          </a:prstGeom>
+        </p:spPr>
+        <p:txBody>
+          <a:bodyPr vert="horz" lIns="91440" tIns="45720" rIns="91440" bIns="45720" rtlCol="0">
+            <a:normAutofit/>
+          </a:bodyPr>
+          <a:lstStyle>
+            <a:lvl1pPr marL="228600" indent="-228600" algn="l" defTabSz="914400" rtl="0" eaLnBrk="1" latinLnBrk="0" hangingPunct="1">
+              <a:lnSpc>
+                <a:spcPct val="90000"/>
+              </a:lnSpc>
+              <a:spcBef>
+                <a:spcPts val="1000"/>
+              </a:spcBef>
+              <a:buFont typeface="Arial" panose="020B0604020202020204" pitchFamily="34" charset="0"/>
+              <a:buChar char="•"/>
+              <a:defRPr sz="2800" kern="1200">
+                <a:solidFill>
+                  <a:schemeClr val="tx1"/>
+                </a:solidFill>
+                <a:latin typeface="+mn-lt"/>
+                <a:ea typeface="+mn-ea"/>
+                <a:cs typeface="+mn-cs"/>
+              </a:defRPr>
+            </a:lvl1pPr>
+            <a:lvl2pPr marL="685800" indent="-228600" algn="l" defTabSz="914400" rtl="0" eaLnBrk="1" latinLnBrk="0" hangingPunct="1">
+              <a:lnSpc>
+                <a:spcPct val="90000"/>
+              </a:lnSpc>
+              <a:spcBef>
+                <a:spcPts val="500"/>
+              </a:spcBef>
+              <a:buFont typeface="Arial" panose="020B0604020202020204" pitchFamily="34" charset="0"/>
+              <a:buChar char="•"/>
+              <a:defRPr sz="2400" kern="1200">
+                <a:solidFill>
+                  <a:schemeClr val="tx1"/>
+                </a:solidFill>
+                <a:latin typeface="+mn-lt"/>
+                <a:ea typeface="+mn-ea"/>
+                <a:cs typeface="+mn-cs"/>
+              </a:defRPr>
+            </a:lvl2pPr>
+            <a:lvl3pPr marL="1143000" indent="-228600" algn="l" defTabSz="914400" rtl="0" eaLnBrk="1" latinLnBrk="0" hangingPunct="1">
+              <a:lnSpc>
+                <a:spcPct val="90000"/>
+              </a:lnSpc>
+              <a:spcBef>
+                <a:spcPts val="500"/>
+              </a:spcBef>
+              <a:buFont typeface="Arial" panose="020B0604020202020204" pitchFamily="34" charset="0"/>
+              <a:buChar char="•"/>
+              <a:defRPr sz="2000" kern="1200">
+                <a:solidFill>
+                  <a:schemeClr val="tx1"/>
+                </a:solidFill>
+                <a:latin typeface="+mn-lt"/>
+                <a:ea typeface="+mn-ea"/>
+                <a:cs typeface="+mn-cs"/>
+              </a:defRPr>
+            </a:lvl3pPr>
+            <a:lvl4pPr marL="1600200" indent="-228600" algn="l" defTabSz="914400" rtl="0" eaLnBrk="1" latinLnBrk="0" hangingPunct="1">
+              <a:lnSpc>
+                <a:spcPct val="90000"/>
+              </a:lnSpc>
+              <a:spcBef>
+                <a:spcPts val="500"/>
+              </a:spcBef>
+              <a:buFont typeface="Arial" panose="020B0604020202020204" pitchFamily="34" charset="0"/>
+              <a:buChar char="•"/>
+              <a:defRPr sz="1800" kern="1200">
+                <a:solidFill>
+                  <a:schemeClr val="tx1"/>
+                </a:solidFill>
+                <a:latin typeface="+mn-lt"/>
+                <a:ea typeface="+mn-ea"/>
+                <a:cs typeface="+mn-cs"/>
+              </a:defRPr>
+            </a:lvl4pPr>
+            <a:lvl5pPr marL="2057400" indent="-228600" algn="l" defTabSz="914400" rtl="0" eaLnBrk="1" latinLnBrk="0" hangingPunct="1">
+              <a:lnSpc>
+                <a:spcPct val="90000"/>
+              </a:lnSpc>
+              <a:spcBef>
+                <a:spcPts val="500"/>
+              </a:spcBef>
+              <a:buFont typeface="Arial" panose="020B0604020202020204" pitchFamily="34" charset="0"/>
+              <a:buChar char="•"/>
+              <a:defRPr sz="1800" kern="1200">
+                <a:solidFill>
+                  <a:schemeClr val="tx1"/>
+                </a:solidFill>
+                <a:latin typeface="+mn-lt"/>
+                <a:ea typeface="+mn-ea"/>
+                <a:cs typeface="+mn-cs"/>
+              </a:defRPr>
+            </a:lvl5pPr>
+            <a:lvl6pPr marL="2514600" indent="-228600" algn="l" defTabSz="914400" rtl="0" eaLnBrk="1" latinLnBrk="0" hangingPunct="1">
+              <a:lnSpc>
+                <a:spcPct val="90000"/>
+              </a:lnSpc>
+              <a:spcBef>
+                <a:spcPts val="500"/>
+              </a:spcBef>
+              <a:buFont typeface="Arial" panose="020B0604020202020204" pitchFamily="34" charset="0"/>
+              <a:buChar char="•"/>
+              <a:defRPr sz="1800" kern="1200">
+                <a:solidFill>
+                  <a:schemeClr val="tx1"/>
+                </a:solidFill>
+                <a:latin typeface="+mn-lt"/>
+                <a:ea typeface="+mn-ea"/>
+                <a:cs typeface="+mn-cs"/>
+              </a:defRPr>
+            </a:lvl6pPr>
+            <a:lvl7pPr marL="2971800" indent="-228600" algn="l" defTabSz="914400" rtl="0" eaLnBrk="1" latinLnBrk="0" hangingPunct="1">
+              <a:lnSpc>
+                <a:spcPct val="90000"/>
+              </a:lnSpc>
+              <a:spcBef>
+                <a:spcPts val="500"/>
+              </a:spcBef>
+              <a:buFont typeface="Arial" panose="020B0604020202020204" pitchFamily="34" charset="0"/>
+              <a:buChar char="•"/>
+              <a:defRPr sz="1800" kern="1200">
+                <a:solidFill>
+                  <a:schemeClr val="tx1"/>
+                </a:solidFill>
+                <a:latin typeface="+mn-lt"/>
+                <a:ea typeface="+mn-ea"/>
+                <a:cs typeface="+mn-cs"/>
+              </a:defRPr>
+            </a:lvl7pPr>
+            <a:lvl8pPr marL="3429000" indent="-228600" algn="l" defTabSz="914400" rtl="0" eaLnBrk="1" latinLnBrk="0" hangingPunct="1">
+              <a:lnSpc>
+                <a:spcPct val="90000"/>
+              </a:lnSpc>
+              <a:spcBef>
+                <a:spcPts val="500"/>
+              </a:spcBef>
+              <a:buFont typeface="Arial" panose="020B0604020202020204" pitchFamily="34" charset="0"/>
+              <a:buChar char="•"/>
+              <a:defRPr sz="1800" kern="1200">
+                <a:solidFill>
+                  <a:schemeClr val="tx1"/>
+                </a:solidFill>
+                <a:latin typeface="+mn-lt"/>
+                <a:ea typeface="+mn-ea"/>
+                <a:cs typeface="+mn-cs"/>
+              </a:defRPr>
+            </a:lvl8pPr>
+            <a:lvl9pPr marL="3886200" indent="-228600" algn="l" defTabSz="914400" rtl="0" eaLnBrk="1" latinLnBrk="0" hangingPunct="1">
+              <a:lnSpc>
+                <a:spcPct val="90000"/>
+              </a:lnSpc>
+              <a:spcBef>
+                <a:spcPts val="500"/>
+              </a:spcBef>
+              <a:buFont typeface="Arial" panose="020B0604020202020204" pitchFamily="34" charset="0"/>
+              <a:buChar char="•"/>
+              <a:defRPr sz="1800" kern="1200">
+                <a:solidFill>
+                  <a:schemeClr val="tx1"/>
+                </a:solidFill>
+                <a:latin typeface="+mn-lt"/>
+                <a:ea typeface="+mn-ea"/>
+                <a:cs typeface="+mn-cs"/>
+              </a:defRPr>
+            </a:lvl9pPr>
+          </a:lstStyle>
+          <a:p>
+            <a:pPr>
+              <a:buFont typeface="Wingdings" pitchFamily="2" charset="2"/>
+              <a:buNone/>
+            </a:pPr>
+            <a:r>
+              <a:rPr lang="en-US" altLang="en-US" dirty="0">
+                <a:ea typeface="ＭＳ Ｐゴシック" panose="020B0600070205080204" pitchFamily="34" charset="-128"/>
+              </a:rPr>
+              <a:t>The major contribution of game industry to SE is the discovery of the “magic” fast 1/√x algorithm </a:t>
+            </a:r>
+            <a:r>
+              <a:rPr lang="en-US" altLang="en-US">
+                <a:ea typeface="ＭＳ Ｐゴシック" panose="020B0600070205080204" pitchFamily="34" charset="-128"/>
+              </a:rPr>
+              <a:t>in quake3</a:t>
+            </a:r>
+            <a:endParaRPr lang="en-US" altLang="en-US" dirty="0">
+              <a:ea typeface="ＭＳ Ｐゴシック" panose="020B0600070205080204" pitchFamily="34" charset="-128"/>
+            </a:endParaRPr>
+          </a:p>
+        </p:txBody>
+      </p:sp>
+      <p:sp>
+        <p:nvSpPr>
+          <p:cNvPr id="7" name="TextBox 6">
+            <a:extLst>
+              <a:ext uri="{FF2B5EF4-FFF2-40B4-BE49-F238E27FC236}">
+                <a16:creationId xmlns:a16="http://schemas.microsoft.com/office/drawing/2014/main" id="{301FB198-5BA2-7463-B22E-2D8A8537B04C}"/>
+              </a:ext>
+            </a:extLst>
+          </p:cNvPr>
+          <p:cNvSpPr txBox="1">
+            <a:spLocks noChangeArrowheads="1"/>
+          </p:cNvSpPr>
+          <p:nvPr/>
+        </p:nvSpPr>
+        <p:spPr bwMode="auto">
+          <a:xfrm>
+            <a:off x="270024" y="3742494"/>
+            <a:ext cx="4648200" cy="2032000"/>
+          </a:xfrm>
+          <a:prstGeom prst="rect">
+            <a:avLst/>
+          </a:prstGeom>
+          <a:solidFill>
+            <a:srgbClr val="FFFF00">
+              <a:alpha val="20000"/>
+            </a:srgbClr>
+          </a:solidFill>
+          <a:ln>
+            <a:noFill/>
+          </a:ln>
+          <a:extLst>
+            <a:ext uri="{91240B29-F687-4F45-9708-019B960494DF}">
+              <a14:hiddenLine xmlns:a14="http://schemas.microsoft.com/office/drawing/2010/main" w="9525">
+                <a:solidFill>
+                  <a:srgbClr val="000000"/>
+                </a:solidFill>
+                <a:miter lim="800000"/>
+                <a:headEnd/>
+                <a:tailEnd/>
+              </a14:hiddenLine>
+            </a:ext>
+          </a:extLst>
+        </p:spPr>
+        <p:txBody>
+          <a:bodyPr>
+            <a:spAutoFit/>
+          </a:bodyPr>
+          <a:lstStyle>
+            <a:lvl1pPr eaLnBrk="0" hangingPunct="0">
+              <a:defRPr sz="2400">
+                <a:solidFill>
+                  <a:schemeClr val="tx1"/>
+                </a:solidFill>
+                <a:latin typeface="Arial" panose="020B0604020202020204" pitchFamily="34" charset="0"/>
+                <a:ea typeface="ＭＳ Ｐゴシック" panose="020B0600070205080204" pitchFamily="34" charset="-128"/>
+              </a:defRPr>
+            </a:lvl1pPr>
+            <a:lvl2pPr marL="742950" indent="-285750" eaLnBrk="0" hangingPunct="0">
+              <a:defRPr sz="2400">
+                <a:solidFill>
+                  <a:schemeClr val="tx1"/>
+                </a:solidFill>
+                <a:latin typeface="Arial" panose="020B0604020202020204" pitchFamily="34" charset="0"/>
+                <a:ea typeface="ＭＳ Ｐゴシック" panose="020B0600070205080204" pitchFamily="34" charset="-128"/>
+              </a:defRPr>
+            </a:lvl2pPr>
+            <a:lvl3pPr marL="1143000" indent="-228600" eaLnBrk="0" hangingPunct="0">
+              <a:defRPr sz="2400">
+                <a:solidFill>
+                  <a:schemeClr val="tx1"/>
+                </a:solidFill>
+                <a:latin typeface="Arial" panose="020B0604020202020204" pitchFamily="34" charset="0"/>
+                <a:ea typeface="ＭＳ Ｐゴシック" panose="020B0600070205080204" pitchFamily="34" charset="-128"/>
+              </a:defRPr>
+            </a:lvl3pPr>
+            <a:lvl4pPr marL="1600200" indent="-228600" eaLnBrk="0" hangingPunct="0">
+              <a:defRPr sz="2400">
+                <a:solidFill>
+                  <a:schemeClr val="tx1"/>
+                </a:solidFill>
+                <a:latin typeface="Arial" panose="020B0604020202020204" pitchFamily="34" charset="0"/>
+                <a:ea typeface="ＭＳ Ｐゴシック" panose="020B0600070205080204" pitchFamily="34" charset="-128"/>
+              </a:defRPr>
+            </a:lvl4pPr>
+            <a:lvl5pPr marL="2057400" indent="-228600" eaLnBrk="0" hangingPunct="0">
+              <a:defRPr sz="2400">
+                <a:solidFill>
+                  <a:schemeClr val="tx1"/>
+                </a:solidFill>
+                <a:latin typeface="Arial" panose="020B0604020202020204" pitchFamily="34" charset="0"/>
+                <a:ea typeface="ＭＳ Ｐゴシック" panose="020B0600070205080204" pitchFamily="34" charset="-128"/>
+              </a:defRPr>
+            </a:lvl5pPr>
+            <a:lvl6pPr marL="2514600" indent="-228600" eaLnBrk="0" fontAlgn="base" hangingPunct="0">
+              <a:spcBef>
+                <a:spcPct val="0"/>
+              </a:spcBef>
+              <a:spcAft>
+                <a:spcPct val="0"/>
+              </a:spcAft>
+              <a:defRPr sz="2400">
+                <a:solidFill>
+                  <a:schemeClr val="tx1"/>
+                </a:solidFill>
+                <a:latin typeface="Arial" panose="020B0604020202020204" pitchFamily="34" charset="0"/>
+                <a:ea typeface="ＭＳ Ｐゴシック" panose="020B0600070205080204" pitchFamily="34" charset="-128"/>
+              </a:defRPr>
+            </a:lvl6pPr>
+            <a:lvl7pPr marL="2971800" indent="-228600" eaLnBrk="0" fontAlgn="base" hangingPunct="0">
+              <a:spcBef>
+                <a:spcPct val="0"/>
+              </a:spcBef>
+              <a:spcAft>
+                <a:spcPct val="0"/>
+              </a:spcAft>
+              <a:defRPr sz="2400">
+                <a:solidFill>
+                  <a:schemeClr val="tx1"/>
+                </a:solidFill>
+                <a:latin typeface="Arial" panose="020B0604020202020204" pitchFamily="34" charset="0"/>
+                <a:ea typeface="ＭＳ Ｐゴシック" panose="020B0600070205080204" pitchFamily="34" charset="-128"/>
+              </a:defRPr>
+            </a:lvl7pPr>
+            <a:lvl8pPr marL="3429000" indent="-228600" eaLnBrk="0" fontAlgn="base" hangingPunct="0">
+              <a:spcBef>
+                <a:spcPct val="0"/>
+              </a:spcBef>
+              <a:spcAft>
+                <a:spcPct val="0"/>
+              </a:spcAft>
+              <a:defRPr sz="2400">
+                <a:solidFill>
+                  <a:schemeClr val="tx1"/>
+                </a:solidFill>
+                <a:latin typeface="Arial" panose="020B0604020202020204" pitchFamily="34" charset="0"/>
+                <a:ea typeface="ＭＳ Ｐゴシック" panose="020B0600070205080204" pitchFamily="34" charset="-128"/>
+              </a:defRPr>
+            </a:lvl8pPr>
+            <a:lvl9pPr marL="3886200" indent="-228600" eaLnBrk="0" fontAlgn="base" hangingPunct="0">
+              <a:spcBef>
+                <a:spcPct val="0"/>
+              </a:spcBef>
+              <a:spcAft>
+                <a:spcPct val="0"/>
+              </a:spcAft>
+              <a:defRPr sz="2400">
+                <a:solidFill>
+                  <a:schemeClr val="tx1"/>
+                </a:solidFill>
+                <a:latin typeface="Arial" panose="020B0604020202020204" pitchFamily="34" charset="0"/>
+                <a:ea typeface="ＭＳ Ｐゴシック" panose="020B0600070205080204" pitchFamily="34" charset="-128"/>
+              </a:defRPr>
+            </a:lvl9pPr>
+          </a:lstStyle>
+          <a:p>
+            <a:pPr eaLnBrk="1" hangingPunct="1"/>
+            <a:r>
+              <a:rPr lang="en-US" altLang="en-US" sz="1800" dirty="0"/>
+              <a:t>float </a:t>
+            </a:r>
+            <a:r>
+              <a:rPr lang="en-US" altLang="en-US" sz="1800" dirty="0" err="1"/>
+              <a:t>rsqrt</a:t>
+            </a:r>
+            <a:r>
+              <a:rPr lang="en-US" altLang="en-US" sz="1800" dirty="0"/>
+              <a:t>(float x){</a:t>
+            </a:r>
+          </a:p>
+          <a:p>
+            <a:pPr eaLnBrk="1" hangingPunct="1"/>
+            <a:r>
+              <a:rPr lang="en-US" altLang="en-US" sz="1800" dirty="0"/>
+              <a:t>  union {float </a:t>
+            </a:r>
+            <a:r>
+              <a:rPr lang="en-US" altLang="en-US" sz="1800" dirty="0" err="1"/>
+              <a:t>f;int</a:t>
+            </a:r>
+            <a:r>
+              <a:rPr lang="en-US" altLang="en-US" sz="1800" dirty="0"/>
+              <a:t> </a:t>
+            </a:r>
+            <a:r>
+              <a:rPr lang="en-US" altLang="en-US" sz="1800" dirty="0" err="1"/>
+              <a:t>i</a:t>
+            </a:r>
+            <a:r>
+              <a:rPr lang="en-US" altLang="en-US" sz="1800" dirty="0"/>
+              <a:t>;} </a:t>
+            </a:r>
+            <a:r>
+              <a:rPr lang="en-US" altLang="en-US" sz="1800" dirty="0" err="1"/>
+              <a:t>tmp</a:t>
+            </a:r>
+            <a:r>
+              <a:rPr lang="en-US" altLang="en-US" sz="1800" dirty="0"/>
+              <a:t>;</a:t>
+            </a:r>
+          </a:p>
+          <a:p>
+            <a:pPr eaLnBrk="1" hangingPunct="1"/>
+            <a:r>
+              <a:rPr lang="en-US" altLang="en-US" sz="1800" dirty="0"/>
+              <a:t>  </a:t>
+            </a:r>
+            <a:r>
+              <a:rPr lang="en-US" altLang="en-US" sz="1800" dirty="0" err="1"/>
+              <a:t>tmp.f</a:t>
+            </a:r>
+            <a:r>
+              <a:rPr lang="en-US" altLang="en-US" sz="1800" dirty="0"/>
+              <a:t> = x;</a:t>
+            </a:r>
+          </a:p>
+          <a:p>
+            <a:pPr eaLnBrk="1" hangingPunct="1"/>
+            <a:r>
+              <a:rPr lang="en-US" altLang="en-US" sz="1800" dirty="0"/>
+              <a:t>  </a:t>
+            </a:r>
+            <a:r>
+              <a:rPr lang="en-US" altLang="en-US" sz="1800" dirty="0" err="1"/>
+              <a:t>tmp.i</a:t>
+            </a:r>
+            <a:r>
+              <a:rPr lang="en-US" altLang="en-US" sz="1800" dirty="0"/>
+              <a:t> = 0x5f3759df - (</a:t>
+            </a:r>
+            <a:r>
+              <a:rPr lang="en-US" altLang="en-US" sz="1800" dirty="0" err="1"/>
+              <a:t>tmp.i</a:t>
+            </a:r>
+            <a:r>
+              <a:rPr lang="en-US" altLang="en-US" sz="1800" dirty="0"/>
+              <a:t> &gt;&gt; 1);</a:t>
+            </a:r>
+          </a:p>
+          <a:p>
+            <a:pPr eaLnBrk="1" hangingPunct="1"/>
+            <a:r>
+              <a:rPr lang="en-US" altLang="en-US" sz="1800" dirty="0"/>
+              <a:t>  float y = </a:t>
+            </a:r>
+            <a:r>
+              <a:rPr lang="en-US" altLang="en-US" sz="1800" dirty="0" err="1"/>
+              <a:t>tmp.f</a:t>
+            </a:r>
+            <a:r>
+              <a:rPr lang="en-US" altLang="en-US" sz="1800" dirty="0"/>
+              <a:t>; // approximate</a:t>
+            </a:r>
+          </a:p>
+          <a:p>
+            <a:pPr eaLnBrk="1" hangingPunct="1"/>
+            <a:r>
+              <a:rPr lang="en-US" altLang="en-US" sz="1800" dirty="0"/>
+              <a:t>  return y * (1.5f - 0.5f * x * y * y); // NR</a:t>
+            </a:r>
+          </a:p>
+          <a:p>
+            <a:pPr eaLnBrk="1" hangingPunct="1"/>
+            <a:r>
+              <a:rPr lang="en-US" altLang="en-US" sz="1800" dirty="0"/>
+              <a:t>}</a:t>
+            </a:r>
+          </a:p>
+        </p:txBody>
+      </p:sp>
+      <p:sp>
+        <p:nvSpPr>
+          <p:cNvPr id="8" name="TextBox 7">
+            <a:extLst>
+              <a:ext uri="{FF2B5EF4-FFF2-40B4-BE49-F238E27FC236}">
+                <a16:creationId xmlns:a16="http://schemas.microsoft.com/office/drawing/2014/main" id="{A2FE26A6-BE0B-DF7E-E51E-058EF259F85F}"/>
+              </a:ext>
+            </a:extLst>
+          </p:cNvPr>
+          <p:cNvSpPr txBox="1"/>
+          <p:nvPr/>
+        </p:nvSpPr>
+        <p:spPr>
+          <a:xfrm>
+            <a:off x="259450" y="5849512"/>
+            <a:ext cx="5440464" cy="369332"/>
+          </a:xfrm>
+          <a:prstGeom prst="rect">
+            <a:avLst/>
+          </a:prstGeom>
+          <a:noFill/>
+        </p:spPr>
+        <p:txBody>
+          <a:bodyPr wrap="none" rtlCol="0">
+            <a:spAutoFit/>
+          </a:bodyPr>
+          <a:lstStyle/>
+          <a:p>
+            <a:r>
+              <a:rPr lang="en-US" dirty="0">
+                <a:hlinkClick r:id="rId2"/>
+              </a:rPr>
+              <a:t>https://en.wikipedia.org/wiki/Fast_inverse_square_root</a:t>
+            </a:r>
+            <a:endParaRPr lang="en-US" dirty="0"/>
+          </a:p>
+        </p:txBody>
+      </p:sp>
+    </p:spTree>
+    <p:extLst>
+      <p:ext uri="{BB962C8B-B14F-4D97-AF65-F5344CB8AC3E}">
+        <p14:creationId xmlns:p14="http://schemas.microsoft.com/office/powerpoint/2010/main" val="3971333510"/>
+      </p:ext>
+    </p:extLst>
+  </p:cSld>
+  <p:clrMapOvr>
+    <a:masterClrMapping/>
+  </p:clrMapOvr>
+</p:sld>
+</file>
+
+<file path=ppt/slides/slide32.xml><?xml version="1.0" encoding="utf-8"?>
 <p:sld xmlns:a="http://schemas.openxmlformats.org/drawingml/2006/main" xmlns:r="http://schemas.openxmlformats.org/officeDocument/2006/relationships" xmlns:p="http://schemas.openxmlformats.org/presentationml/2006/main">
   <p:cSld>
     <p:spTree>

--- a/Slides/FPforScientist.pptx
+++ b/Slides/FPforScientist.pptx
@@ -6258,6 +6258,53 @@
           </a:p>
         </p:txBody>
       </p:sp>
+      <p:pic>
+        <p:nvPicPr>
+          <p:cNvPr id="6" name="Picture 2">
+            <a:extLst>
+              <a:ext uri="{FF2B5EF4-FFF2-40B4-BE49-F238E27FC236}">
+                <a16:creationId xmlns:a16="http://schemas.microsoft.com/office/drawing/2014/main" id="{A397D800-2A5D-8DE1-A99F-EB71EAD3AAEF}"/>
+              </a:ext>
+            </a:extLst>
+          </p:cNvPr>
+          <p:cNvPicPr>
+            <a:picLocks noChangeAspect="1" noChangeArrowheads="1"/>
+          </p:cNvPicPr>
+          <p:nvPr/>
+        </p:nvPicPr>
+        <p:blipFill>
+          <a:blip r:embed="rId4">
+            <a:extLst>
+              <a:ext uri="{28A0092B-C50C-407E-A947-70E740481C1C}">
+                <a14:useLocalDpi xmlns:a14="http://schemas.microsoft.com/office/drawing/2010/main" val="0"/>
+              </a:ext>
+            </a:extLst>
+          </a:blip>
+          <a:srcRect/>
+          <a:stretch>
+            <a:fillRect/>
+          </a:stretch>
+        </p:blipFill>
+        <p:spPr bwMode="auto">
+          <a:xfrm>
+            <a:off x="8684441" y="99724"/>
+            <a:ext cx="3433957" cy="2993280"/>
+          </a:xfrm>
+          <a:prstGeom prst="rect">
+            <a:avLst/>
+          </a:prstGeom>
+          <a:noFill/>
+          <a:extLst>
+            <a:ext uri="{909E8E84-426E-40DD-AFC4-6F175D3DCCD1}">
+              <a14:hiddenFill xmlns:a14="http://schemas.microsoft.com/office/drawing/2010/main">
+                <a:solidFill>
+                  <a:srgbClr val="FFFFFF"/>
+                </a:solidFill>
+              </a14:hiddenFill>
+            </a:ext>
+          </a:extLst>
+        </p:spPr>
+      </p:pic>
     </p:spTree>
     <p:extLst>
       <p:ext uri="{BB962C8B-B14F-4D97-AF65-F5344CB8AC3E}">
@@ -6335,63 +6382,63 @@
           <a:lstStyle/>
           <a:p>
             <a:r>
-              <a:rPr lang="en-US"/>
+              <a:rPr lang="en-US" dirty="0"/>
               <a:t>Count the number of FP in a </a:t>
             </a:r>
             <a:r>
-              <a:rPr lang="en-US" err="1"/>
+              <a:rPr lang="en-US" dirty="0" err="1"/>
               <a:t>binade</a:t>
             </a:r>
-            <a:endParaRPr lang="en-US"/>
+            <a:endParaRPr lang="en-US" dirty="0"/>
           </a:p>
           <a:p>
             <a:pPr lvl="1"/>
             <a:r>
-              <a:rPr lang="en-US"/>
+              <a:rPr lang="en-US" dirty="0"/>
               <a:t>Verify that they are the same for two different </a:t>
             </a:r>
             <a:r>
-              <a:rPr lang="en-US" err="1"/>
+              <a:rPr lang="en-US" dirty="0" err="1"/>
               <a:t>binades</a:t>
             </a:r>
-            <a:endParaRPr lang="en-US"/>
-          </a:p>
-          <a:p>
-            <a:r>
-              <a:rPr lang="en-US"/>
+            <a:endParaRPr lang="en-US" dirty="0"/>
+          </a:p>
+          <a:p>
+            <a:r>
+              <a:rPr lang="en-US" dirty="0"/>
               <a:t>Compute the ULP for some FPs</a:t>
             </a:r>
           </a:p>
           <a:p>
             <a:pPr lvl="1"/>
             <a:r>
-              <a:rPr lang="en-US"/>
+              <a:rPr lang="en-US" dirty="0"/>
               <a:t>How it depends on the </a:t>
             </a:r>
             <a:r>
-              <a:rPr lang="en-US" err="1"/>
+              <a:rPr lang="en-US" dirty="0" err="1"/>
               <a:t>binade</a:t>
             </a:r>
             <a:r>
-              <a:rPr lang="en-US"/>
+              <a:rPr lang="en-US" dirty="0"/>
               <a:t>?</a:t>
             </a:r>
           </a:p>
           <a:p>
             <a:r>
-              <a:rPr lang="en-US"/>
-              <a:t>Convert some number (0.1, pi, 31.5,  …) between various representations (including decimal)</a:t>
+              <a:rPr lang="en-US" dirty="0"/>
+              <a:t>Convert some number (0.1, e, pi, 31.5,  …) between various representations (including decimal)</a:t>
             </a:r>
           </a:p>
           <a:p>
             <a:pPr lvl="1"/>
             <a:r>
-              <a:rPr lang="en-US"/>
+              <a:rPr lang="en-US" dirty="0"/>
               <a:t>See what happens and explain it</a:t>
             </a:r>
           </a:p>
           <a:p>
-            <a:endParaRPr lang="en-US"/>
+            <a:endParaRPr lang="en-US" dirty="0"/>
           </a:p>
         </p:txBody>
       </p:sp>
@@ -8368,6 +8415,53 @@
           </a:p>
         </p:txBody>
       </p:sp>
+      <p:pic>
+        <p:nvPicPr>
+          <p:cNvPr id="4098" name="Picture 2">
+            <a:extLst>
+              <a:ext uri="{FF2B5EF4-FFF2-40B4-BE49-F238E27FC236}">
+                <a16:creationId xmlns:a16="http://schemas.microsoft.com/office/drawing/2014/main" id="{4795F761-D29F-6D3D-0704-2A2B8ED29F74}"/>
+              </a:ext>
+            </a:extLst>
+          </p:cNvPr>
+          <p:cNvPicPr>
+            <a:picLocks noChangeAspect="1" noChangeArrowheads="1"/>
+          </p:cNvPicPr>
+          <p:nvPr/>
+        </p:nvPicPr>
+        <p:blipFill>
+          <a:blip r:embed="rId3">
+            <a:extLst>
+              <a:ext uri="{28A0092B-C50C-407E-A947-70E740481C1C}">
+                <a14:useLocalDpi xmlns:a14="http://schemas.microsoft.com/office/drawing/2010/main" val="0"/>
+              </a:ext>
+            </a:extLst>
+          </a:blip>
+          <a:srcRect/>
+          <a:stretch>
+            <a:fillRect/>
+          </a:stretch>
+        </p:blipFill>
+        <p:spPr bwMode="auto">
+          <a:xfrm>
+            <a:off x="8767071" y="68481"/>
+            <a:ext cx="3376067" cy="3037402"/>
+          </a:xfrm>
+          <a:prstGeom prst="rect">
+            <a:avLst/>
+          </a:prstGeom>
+          <a:noFill/>
+          <a:extLst>
+            <a:ext uri="{909E8E84-426E-40DD-AFC4-6F175D3DCCD1}">
+              <a14:hiddenFill xmlns:a14="http://schemas.microsoft.com/office/drawing/2010/main">
+                <a:solidFill>
+                  <a:srgbClr val="FFFFFF"/>
+                </a:solidFill>
+              </a14:hiddenFill>
+            </a:ext>
+          </a:extLst>
+        </p:spPr>
+      </p:pic>
     </p:spTree>
     <p:extLst>
       <p:ext uri="{BB962C8B-B14F-4D97-AF65-F5344CB8AC3E}">
@@ -9891,6 +9985,53 @@
           </a:p>
         </p:txBody>
       </p:sp>
+      <p:pic>
+        <p:nvPicPr>
+          <p:cNvPr id="6146" name="Picture 2">
+            <a:extLst>
+              <a:ext uri="{FF2B5EF4-FFF2-40B4-BE49-F238E27FC236}">
+                <a16:creationId xmlns:a16="http://schemas.microsoft.com/office/drawing/2014/main" id="{1F68500B-495C-0FA3-7CB7-25F805161600}"/>
+              </a:ext>
+            </a:extLst>
+          </p:cNvPr>
+          <p:cNvPicPr>
+            <a:picLocks noChangeAspect="1" noChangeArrowheads="1"/>
+          </p:cNvPicPr>
+          <p:nvPr/>
+        </p:nvPicPr>
+        <p:blipFill>
+          <a:blip r:embed="rId4">
+            <a:extLst>
+              <a:ext uri="{28A0092B-C50C-407E-A947-70E740481C1C}">
+                <a14:useLocalDpi xmlns:a14="http://schemas.microsoft.com/office/drawing/2010/main" val="0"/>
+              </a:ext>
+            </a:extLst>
+          </a:blip>
+          <a:srcRect/>
+          <a:stretch>
+            <a:fillRect/>
+          </a:stretch>
+        </p:blipFill>
+        <p:spPr bwMode="auto">
+          <a:xfrm>
+            <a:off x="8684441" y="99724"/>
+            <a:ext cx="3433957" cy="2993280"/>
+          </a:xfrm>
+          <a:prstGeom prst="rect">
+            <a:avLst/>
+          </a:prstGeom>
+          <a:noFill/>
+          <a:extLst>
+            <a:ext uri="{909E8E84-426E-40DD-AFC4-6F175D3DCCD1}">
+              <a14:hiddenFill xmlns:a14="http://schemas.microsoft.com/office/drawing/2010/main">
+                <a:solidFill>
+                  <a:srgbClr val="FFFFFF"/>
+                </a:solidFill>
+              </a14:hiddenFill>
+            </a:ext>
+          </a:extLst>
+        </p:spPr>
+      </p:pic>
     </p:spTree>
     <p:extLst>
       <p:ext uri="{BB962C8B-B14F-4D97-AF65-F5344CB8AC3E}">
@@ -10971,6 +11112,53 @@
           </a:p>
         </p:txBody>
       </p:sp>
+      <p:pic>
+        <p:nvPicPr>
+          <p:cNvPr id="5122" name="Picture 2">
+            <a:extLst>
+              <a:ext uri="{FF2B5EF4-FFF2-40B4-BE49-F238E27FC236}">
+                <a16:creationId xmlns:a16="http://schemas.microsoft.com/office/drawing/2014/main" id="{99B69373-28D4-967A-ED33-3BA269A491E6}"/>
+              </a:ext>
+            </a:extLst>
+          </p:cNvPr>
+          <p:cNvPicPr>
+            <a:picLocks noChangeAspect="1" noChangeArrowheads="1"/>
+          </p:cNvPicPr>
+          <p:nvPr/>
+        </p:nvPicPr>
+        <p:blipFill>
+          <a:blip r:embed="rId2">
+            <a:extLst>
+              <a:ext uri="{28A0092B-C50C-407E-A947-70E740481C1C}">
+                <a14:useLocalDpi xmlns:a14="http://schemas.microsoft.com/office/drawing/2010/main" val="0"/>
+              </a:ext>
+            </a:extLst>
+          </a:blip>
+          <a:srcRect/>
+          <a:stretch>
+            <a:fillRect/>
+          </a:stretch>
+        </p:blipFill>
+        <p:spPr bwMode="auto">
+          <a:xfrm>
+            <a:off x="2382518" y="667389"/>
+            <a:ext cx="3713482" cy="1336854"/>
+          </a:xfrm>
+          <a:prstGeom prst="rect">
+            <a:avLst/>
+          </a:prstGeom>
+          <a:noFill/>
+          <a:extLst>
+            <a:ext uri="{909E8E84-426E-40DD-AFC4-6F175D3DCCD1}">
+              <a14:hiddenFill xmlns:a14="http://schemas.microsoft.com/office/drawing/2010/main">
+                <a:solidFill>
+                  <a:srgbClr val="FFFFFF"/>
+                </a:solidFill>
+              </a14:hiddenFill>
+            </a:ext>
+          </a:extLst>
+        </p:spPr>
+      </p:pic>
     </p:spTree>
     <p:extLst>
       <p:ext uri="{BB962C8B-B14F-4D97-AF65-F5344CB8AC3E}">
@@ -11054,14 +11242,14 @@
           <a:p>
             <a:r>
               <a:rPr lang="en-US" dirty="0"/>
-              <a:t>IEEE754 defines a set of “additional operations” (aka elementary functions) to be implemented</a:t>
+              <a:t>IEEE754 defines a set of “additional operations” (aka elementary functions) </a:t>
             </a:r>
           </a:p>
           <a:p>
             <a:pPr lvl="1"/>
             <a:r>
               <a:rPr lang="en-US" dirty="0"/>
-              <a:t>exp, log, power, </a:t>
+              <a:t>exp, log, power of various forms</a:t>
             </a:r>
           </a:p>
           <a:p>
@@ -11107,7 +11295,7 @@
           <a:p>
             <a:r>
               <a:rPr lang="en-US" dirty="0"/>
-              <a:t>Each vendor and compiler provider has its own implementation</a:t>
+              <a:t>Each vendor/compiler provides its own implementation</a:t>
             </a:r>
           </a:p>
           <a:p>
@@ -11231,7 +11419,7 @@
         </p:nvSpPr>
         <p:spPr>
           <a:xfrm>
-            <a:off x="838200" y="1529062"/>
+            <a:off x="733873" y="1105615"/>
             <a:ext cx="10515600" cy="4847023"/>
           </a:xfrm>
         </p:spPr>
@@ -11248,6 +11436,10 @@
             </a:r>
           </a:p>
           <a:p>
+            <a:pPr marL="514350" indent="-514350">
+              <a:buFont typeface="+mj-lt"/>
+              <a:buAutoNum type="arabicPeriod"/>
+            </a:pPr>
             <a:r>
               <a:rPr lang="en-US" dirty="0"/>
               <a:t>Handling special values, under/over-flows and invalid</a:t>
@@ -11261,18 +11453,30 @@
             </a:r>
           </a:p>
           <a:p>
+            <a:pPr marL="514350" indent="-514350">
+              <a:buFont typeface="+mj-lt"/>
+              <a:buAutoNum type="arabicPeriod"/>
+            </a:pPr>
             <a:r>
               <a:rPr lang="en-US" dirty="0"/>
               <a:t>Range Reduction</a:t>
             </a:r>
           </a:p>
           <a:p>
+            <a:pPr marL="514350" indent="-514350">
+              <a:buFont typeface="+mj-lt"/>
+              <a:buAutoNum type="arabicPeriod"/>
+            </a:pPr>
             <a:r>
               <a:rPr lang="en-US" dirty="0"/>
               <a:t>Approximation</a:t>
             </a:r>
           </a:p>
           <a:p>
+            <a:pPr marL="514350" indent="-514350">
+              <a:buFont typeface="+mj-lt"/>
+              <a:buAutoNum type="arabicPeriod"/>
+            </a:pPr>
             <a:r>
               <a:rPr lang="en-US" dirty="0"/>
               <a:t>If required:</a:t>
@@ -11286,6 +11490,10 @@
             </a:r>
           </a:p>
           <a:p>
+            <a:pPr marL="514350" indent="-514350">
+              <a:buFont typeface="+mj-lt"/>
+              <a:buAutoNum type="arabicPeriod"/>
+            </a:pPr>
             <a:r>
               <a:rPr lang="en-US" dirty="0"/>
               <a:t>Back to full range</a:t>
@@ -11372,12 +11580,14 @@
         </p:nvSpPr>
         <p:spPr>
           <a:xfrm>
-            <a:off x="838200" y="1825625"/>
-            <a:ext cx="10826578" cy="4351338"/>
+            <a:off x="435721" y="1825625"/>
+            <a:ext cx="11310330" cy="4351338"/>
           </a:xfrm>
         </p:spPr>
         <p:txBody>
-          <a:bodyPr/>
+          <a:bodyPr>
+            <a:normAutofit/>
+          </a:bodyPr>
           <a:lstStyle/>
           <a:p>
             <a:r>
@@ -11397,46 +11607,83 @@
             </a:r>
             <a:r>
               <a:rPr lang="en-US" dirty="0"/>
-              <a:t> representation: 1.mᐧ</a:t>
+              <a:t> representation: x = 1.mᐧ</a:t>
             </a:r>
             <a:r>
               <a:rPr lang="cs-CZ" altLang="x-none" dirty="0"/>
               <a:t>2</a:t>
             </a:r>
             <a:r>
+              <a:rPr lang="en-US" altLang="x-none" baseline="30000" dirty="0"/>
+              <a:t>n</a:t>
+            </a:r>
+            <a:endParaRPr lang="en-US" baseline="30000" dirty="0"/>
+          </a:p>
+          <a:p>
+            <a:pPr lvl="1"/>
+            <a:r>
+              <a:rPr lang="en-US" dirty="0"/>
+              <a:t>For exp(x):  x = </a:t>
+            </a:r>
+            <a:r>
+              <a:rPr lang="en-US" dirty="0" err="1"/>
+              <a:t>kᐧlog</a:t>
+            </a:r>
+            <a:r>
+              <a:rPr lang="en-US" dirty="0"/>
+              <a:t>(2)+y, with y in [-log(2)/2;log(2)/2). exp(x) = 2</a:t>
+            </a:r>
+            <a:r>
               <a:rPr lang="en-US" baseline="30000" dirty="0"/>
-              <a:t>e</a:t>
-            </a:r>
+              <a:t>k </a:t>
+            </a:r>
+            <a:r>
+              <a:rPr lang="en-US" dirty="0" err="1"/>
+              <a:t>ᐧexp</a:t>
+            </a:r>
+            <a:r>
+              <a:rPr lang="en-US" dirty="0"/>
+              <a:t>(y)</a:t>
+            </a:r>
+            <a:endParaRPr lang="en-US" baseline="30000" dirty="0"/>
           </a:p>
           <a:p>
             <a:pPr lvl="1"/>
             <a:r>
+              <a:rPr lang="en-US"/>
+              <a:t>For log(x):  </a:t>
+            </a:r>
+            <a:r>
               <a:rPr lang="en-US" dirty="0"/>
-              <a:t>For exp: compute 2exp(x) in [-log(2)/2;log(2)/2)</a:t>
-            </a:r>
-            <a:endParaRPr lang="en-US" baseline="30000" dirty="0"/>
+              <a:t>x =  yᐧ2</a:t>
+            </a:r>
+            <a:r>
+              <a:rPr lang="en-US" baseline="30000" dirty="0"/>
+              <a:t>z</a:t>
+            </a:r>
+            <a:r>
+              <a:rPr lang="en-US" dirty="0"/>
+              <a:t>, with  y in [0.75,1.5)</a:t>
+            </a:r>
+            <a:r>
+              <a:rPr lang="en-US" baseline="30000" dirty="0"/>
+              <a:t> </a:t>
+            </a:r>
+            <a:r>
+              <a:rPr lang="en-US" dirty="0"/>
+              <a:t>. log(x) = </a:t>
+            </a:r>
+            <a:r>
+              <a:rPr lang="en-US" dirty="0" err="1"/>
+              <a:t>zᐧlog</a:t>
+            </a:r>
+            <a:r>
+              <a:rPr lang="en-US" dirty="0"/>
+              <a:t>(2)+log(y) </a:t>
+            </a:r>
           </a:p>
           <a:p>
             <a:pPr lvl="1"/>
-            <a:r>
-              <a:rPr lang="en-US" dirty="0"/>
-              <a:t>For log: compute log</a:t>
-            </a:r>
-            <a:r>
-              <a:rPr lang="en-US" baseline="-25000" dirty="0"/>
-              <a:t>2</a:t>
-            </a:r>
-            <a:r>
-              <a:rPr lang="en-US" dirty="0"/>
-              <a:t>(x) in [0.75,1.5)</a:t>
-            </a:r>
-          </a:p>
-          <a:p>
-            <a:pPr lvl="1"/>
-            <a:r>
-              <a:rPr lang="en-US" dirty="0"/>
-              <a:t> </a:t>
-            </a:r>
             <a:r>
               <a:rPr lang="en-US" dirty="0" err="1"/>
               <a:t>x</a:t>
@@ -11451,15 +11698,15 @@
             </a:r>
             <a:r>
               <a:rPr lang="en-US" dirty="0"/>
-              <a:t>= 2</a:t>
-            </a:r>
-            <a:r>
-              <a:rPr lang="en-US" baseline="30000" dirty="0"/>
-              <a:t>ylog</a:t>
-            </a:r>
-            <a:r>
-              <a:rPr lang="en-US" baseline="-25000" dirty="0"/>
-              <a:t>2</a:t>
+              <a:t>= </a:t>
+            </a:r>
+            <a:r>
+              <a:rPr lang="en-US" dirty="0" err="1"/>
+              <a:t>e</a:t>
+            </a:r>
+            <a:r>
+              <a:rPr lang="en-US" baseline="30000" dirty="0" err="1"/>
+              <a:t>yᐧlog</a:t>
             </a:r>
             <a:r>
               <a:rPr lang="en-US" baseline="30000" dirty="0"/>
@@ -12537,17 +12784,8 @@
               <a:rPr lang="en-US" altLang="en-US" dirty="0">
                 <a:ea typeface="ＭＳ Ｐゴシック" panose="020B0600070205080204" pitchFamily="34" charset="-128"/>
               </a:rPr>
-              <a:t>The major contribution of game industry to SE is the discovery of the “magic” fast 1/√x algorithm </a:t>
-            </a:r>
-            <a:r>
-              <a:rPr lang="en-US" altLang="en-US">
-                <a:ea typeface="ＭＳ Ｐゴシック" panose="020B0600070205080204" pitchFamily="34" charset="-128"/>
-              </a:rPr>
-              <a:t>in quake3</a:t>
-            </a:r>
-            <a:endParaRPr lang="en-US" altLang="en-US" dirty="0">
-              <a:ea typeface="ＭＳ Ｐゴシック" panose="020B0600070205080204" pitchFamily="34" charset="-128"/>
-            </a:endParaRPr>
+              <a:t>The major contribution of game industry to SE is the discovery of the “magic” fast 1/√x algorithm in quake3</a:t>
+            </a:r>
           </a:p>
         </p:txBody>
       </p:sp>

--- a/Slides/FPforScientist.pptx
+++ b/Slides/FPforScientist.pptx
@@ -32,11 +32,18 @@
     <p:sldId id="467" r:id="rId26"/>
     <p:sldId id="469" r:id="rId27"/>
     <p:sldId id="470" r:id="rId28"/>
-    <p:sldId id="471" r:id="rId29"/>
-    <p:sldId id="474" r:id="rId30"/>
-    <p:sldId id="473" r:id="rId31"/>
-    <p:sldId id="475" r:id="rId32"/>
-    <p:sldId id="472" r:id="rId33"/>
+    <p:sldId id="480" r:id="rId29"/>
+    <p:sldId id="471" r:id="rId30"/>
+    <p:sldId id="474" r:id="rId31"/>
+    <p:sldId id="473" r:id="rId32"/>
+    <p:sldId id="475" r:id="rId33"/>
+    <p:sldId id="472" r:id="rId34"/>
+    <p:sldId id="476" r:id="rId35"/>
+    <p:sldId id="477" r:id="rId36"/>
+    <p:sldId id="478" r:id="rId37"/>
+    <p:sldId id="479" r:id="rId38"/>
+    <p:sldId id="381" r:id="rId39"/>
+    <p:sldId id="396" r:id="rId40"/>
   </p:sldIdLst>
   <p:sldSz cx="12192000" cy="6858000"/>
   <p:notesSz cx="6858000" cy="9144000"/>
@@ -11373,7 +11380,7 @@
           <p:cNvPr id="2" name="Title 1">
             <a:extLst>
               <a:ext uri="{FF2B5EF4-FFF2-40B4-BE49-F238E27FC236}">
-                <a16:creationId xmlns:a16="http://schemas.microsoft.com/office/drawing/2014/main" id="{75FA1F9A-4DE0-E93B-B0EA-198097595C5E}"/>
+                <a16:creationId xmlns:a16="http://schemas.microsoft.com/office/drawing/2014/main" id="{8EE606DE-C899-6844-8CF7-F5F9A44A8431}"/>
               </a:ext>
             </a:extLst>
           </p:cNvPr>
@@ -11384,19 +11391,14 @@
             <p:ph type="title"/>
           </p:nvPr>
         </p:nvSpPr>
-        <p:spPr>
-          <a:xfrm>
-            <a:off x="838200" y="365125"/>
-            <a:ext cx="10515600" cy="1031189"/>
-          </a:xfrm>
-        </p:spPr>
+        <p:spPr/>
         <p:txBody>
           <a:bodyPr/>
           <a:lstStyle/>
           <a:p>
             <a:r>
               <a:rPr lang="en-US" dirty="0"/>
-              <a:t>Evaluating a function</a:t>
+              <a:t>Library functions</a:t>
             </a:r>
           </a:p>
         </p:txBody>
@@ -11406,7 +11408,7 @@
           <p:cNvPr id="3" name="Content Placeholder 2">
             <a:extLst>
               <a:ext uri="{FF2B5EF4-FFF2-40B4-BE49-F238E27FC236}">
-                <a16:creationId xmlns:a16="http://schemas.microsoft.com/office/drawing/2014/main" id="{D47FA385-BE03-A1B4-A776-3419E23CAE78}"/>
+                <a16:creationId xmlns:a16="http://schemas.microsoft.com/office/drawing/2014/main" id="{DDED6A3A-AEDA-BC4E-82AD-F1AA1D4FE8B1}"/>
               </a:ext>
             </a:extLst>
           </p:cNvPr>
@@ -11419,95 +11421,180 @@
         </p:nvSpPr>
         <p:spPr>
           <a:xfrm>
-            <a:off x="733873" y="1105615"/>
-            <a:ext cx="10515600" cy="4847023"/>
+            <a:off x="838200" y="5685406"/>
+            <a:ext cx="10515600" cy="705215"/>
           </a:xfrm>
         </p:spPr>
         <p:txBody>
           <a:bodyPr/>
           <a:lstStyle/>
           <a:p>
-            <a:pPr marL="0" indent="0">
-              <a:buNone/>
-            </a:pPr>
+            <a:r>
+              <a:rPr lang="en-US" dirty="0">
+                <a:hlinkClick r:id="rId2"/>
+              </a:rPr>
+              <a:t>https://members.loria.fr/PZimmermann/papers/accuracy.pdf</a:t>
+            </a:r>
+            <a:endParaRPr lang="en-US" dirty="0"/>
+          </a:p>
+        </p:txBody>
+      </p:sp>
+      <p:sp>
+        <p:nvSpPr>
+          <p:cNvPr id="4" name="Date Placeholder 3">
+            <a:extLst>
+              <a:ext uri="{FF2B5EF4-FFF2-40B4-BE49-F238E27FC236}">
+                <a16:creationId xmlns:a16="http://schemas.microsoft.com/office/drawing/2014/main" id="{F3540C4C-B678-4041-BD67-6527373CC45F}"/>
+              </a:ext>
+            </a:extLst>
+          </p:cNvPr>
+          <p:cNvSpPr>
+            <a:spLocks noGrp="1"/>
+          </p:cNvSpPr>
+          <p:nvPr>
+            <p:ph type="dt" sz="half" idx="10"/>
+          </p:nvPr>
+        </p:nvSpPr>
+        <p:spPr/>
+        <p:txBody>
+          <a:bodyPr/>
+          <a:lstStyle/>
+          <a:p>
+            <a:fld id="{5B01A2FC-DB09-8144-92F1-5D21AB9A5879}" type="datetime1">
+              <a:rPr lang="en-US" smtClean="0"/>
+              <a:t>4/22/26</a:t>
+            </a:fld>
+            <a:endParaRPr lang="en-US" dirty="0"/>
+          </a:p>
+        </p:txBody>
+      </p:sp>
+      <p:sp>
+        <p:nvSpPr>
+          <p:cNvPr id="5" name="Footer Placeholder 4">
+            <a:extLst>
+              <a:ext uri="{FF2B5EF4-FFF2-40B4-BE49-F238E27FC236}">
+                <a16:creationId xmlns:a16="http://schemas.microsoft.com/office/drawing/2014/main" id="{6727889F-FE40-C740-B271-3670DFF21E98}"/>
+              </a:ext>
+            </a:extLst>
+          </p:cNvPr>
+          <p:cNvSpPr>
+            <a:spLocks noGrp="1"/>
+          </p:cNvSpPr>
+          <p:nvPr>
+            <p:ph type="ftr" sz="quarter" idx="11"/>
+          </p:nvPr>
+        </p:nvSpPr>
+        <p:spPr/>
+        <p:txBody>
+          <a:bodyPr/>
+          <a:lstStyle/>
+          <a:p>
+            <a:r>
+              <a:rPr lang="en-US"/>
+              <a:t>VI HPC in HEP</a:t>
+            </a:r>
+            <a:endParaRPr lang="en-US" dirty="0"/>
+          </a:p>
+        </p:txBody>
+      </p:sp>
+      <p:sp>
+        <p:nvSpPr>
+          <p:cNvPr id="6" name="Slide Number Placeholder 5">
+            <a:extLst>
+              <a:ext uri="{FF2B5EF4-FFF2-40B4-BE49-F238E27FC236}">
+                <a16:creationId xmlns:a16="http://schemas.microsoft.com/office/drawing/2014/main" id="{45729A71-BBC1-574E-86E1-9B53D806AF88}"/>
+              </a:ext>
+            </a:extLst>
+          </p:cNvPr>
+          <p:cNvSpPr>
+            <a:spLocks noGrp="1"/>
+          </p:cNvSpPr>
+          <p:nvPr>
+            <p:ph type="sldNum" sz="quarter" idx="12"/>
+          </p:nvPr>
+        </p:nvSpPr>
+        <p:spPr/>
+        <p:txBody>
+          <a:bodyPr/>
+          <a:lstStyle/>
+          <a:p>
+            <a:fld id="{48DD0D4D-849C-9F43-9E32-2F43D5C86DA0}" type="slidenum">
+              <a:rPr lang="en-US" smtClean="0"/>
+              <a:t>28</a:t>
+            </a:fld>
+            <a:endParaRPr lang="en-US" dirty="0"/>
+          </a:p>
+        </p:txBody>
+      </p:sp>
+      <p:pic>
+        <p:nvPicPr>
+          <p:cNvPr id="7" name="Picture 6">
+            <a:extLst>
+              <a:ext uri="{FF2B5EF4-FFF2-40B4-BE49-F238E27FC236}">
+                <a16:creationId xmlns:a16="http://schemas.microsoft.com/office/drawing/2014/main" id="{479EE449-BB21-A44B-BDA5-58672ED5AEE9}"/>
+              </a:ext>
+            </a:extLst>
+          </p:cNvPr>
+          <p:cNvPicPr>
+            <a:picLocks noChangeAspect="1"/>
+          </p:cNvPicPr>
+          <p:nvPr/>
+        </p:nvPicPr>
+        <p:blipFill>
+          <a:blip r:embed="rId3"/>
+          <a:stretch>
+            <a:fillRect/>
+          </a:stretch>
+        </p:blipFill>
+        <p:spPr>
+          <a:xfrm>
+            <a:off x="1270000" y="1460897"/>
+            <a:ext cx="8712200" cy="3568700"/>
+          </a:xfrm>
+          <a:prstGeom prst="rect">
+            <a:avLst/>
+          </a:prstGeom>
+        </p:spPr>
+      </p:pic>
+      <p:sp>
+        <p:nvSpPr>
+          <p:cNvPr id="8" name="TextBox 7">
+            <a:extLst>
+              <a:ext uri="{FF2B5EF4-FFF2-40B4-BE49-F238E27FC236}">
+                <a16:creationId xmlns:a16="http://schemas.microsoft.com/office/drawing/2014/main" id="{2E2365B0-AD44-A44D-8213-330063DB1A50}"/>
+              </a:ext>
+            </a:extLst>
+          </p:cNvPr>
+          <p:cNvSpPr txBox="1"/>
+          <p:nvPr/>
+        </p:nvSpPr>
+        <p:spPr>
+          <a:xfrm>
+            <a:off x="1270000" y="5316074"/>
+            <a:ext cx="8784777" cy="369332"/>
+          </a:xfrm>
+          <a:prstGeom prst="rect">
+            <a:avLst/>
+          </a:prstGeom>
+          <a:noFill/>
+        </p:spPr>
+        <p:txBody>
+          <a:bodyPr wrap="none" rtlCol="0">
+            <a:spAutoFit/>
+          </a:bodyPr>
+          <a:lstStyle/>
+          <a:p>
             <a:r>
               <a:rPr lang="en-US" dirty="0"/>
-              <a:t>Five steps</a:t>
-            </a:r>
-          </a:p>
-          <a:p>
-            <a:pPr marL="514350" indent="-514350">
-              <a:buFont typeface="+mj-lt"/>
-              <a:buAutoNum type="arabicPeriod"/>
-            </a:pPr>
-            <a:r>
-              <a:rPr lang="en-US" dirty="0"/>
-              <a:t>Handling special values, under/over-flows and invalid</a:t>
-            </a:r>
-          </a:p>
-          <a:p>
-            <a:pPr lvl="1"/>
-            <a:r>
-              <a:rPr lang="en-US" dirty="0"/>
-              <a:t>Standard specify them all!</a:t>
-            </a:r>
-          </a:p>
-          <a:p>
-            <a:pPr marL="514350" indent="-514350">
-              <a:buFont typeface="+mj-lt"/>
-              <a:buAutoNum type="arabicPeriod"/>
-            </a:pPr>
-            <a:r>
-              <a:rPr lang="en-US" dirty="0"/>
-              <a:t>Range Reduction</a:t>
-            </a:r>
-          </a:p>
-          <a:p>
-            <a:pPr marL="514350" indent="-514350">
-              <a:buFont typeface="+mj-lt"/>
-              <a:buAutoNum type="arabicPeriod"/>
-            </a:pPr>
-            <a:r>
-              <a:rPr lang="en-US" dirty="0"/>
-              <a:t>Approximation</a:t>
-            </a:r>
-          </a:p>
-          <a:p>
-            <a:pPr marL="514350" indent="-514350">
-              <a:buFont typeface="+mj-lt"/>
-              <a:buAutoNum type="arabicPeriod"/>
-            </a:pPr>
-            <a:r>
-              <a:rPr lang="en-US" dirty="0"/>
-              <a:t>If required:</a:t>
-            </a:r>
-          </a:p>
-          <a:p>
-            <a:pPr lvl="1"/>
-            <a:r>
-              <a:rPr lang="en-US" dirty="0"/>
-              <a:t>precision test and handling of “Table Maker’s Dilemma”</a:t>
-            </a:r>
-          </a:p>
-          <a:p>
-            <a:pPr marL="514350" indent="-514350">
-              <a:buFont typeface="+mj-lt"/>
-              <a:buAutoNum type="arabicPeriod"/>
-            </a:pPr>
-            <a:r>
-              <a:rPr lang="en-US" dirty="0"/>
-              <a:t>Back to full range</a:t>
-            </a:r>
-          </a:p>
-          <a:p>
-            <a:endParaRPr lang="en-US" dirty="0"/>
+              <a:t>Maximal error (in bits) for single precision functions as implemented in various math library</a:t>
+            </a:r>
           </a:p>
         </p:txBody>
       </p:sp>
     </p:spTree>
     <p:extLst>
       <p:ext uri="{BB962C8B-B14F-4D97-AF65-F5344CB8AC3E}">
-        <p14:creationId xmlns:p14="http://schemas.microsoft.com/office/powerpoint/2010/main" val="177925165"/>
+        <p14:creationId xmlns:p14="http://schemas.microsoft.com/office/powerpoint/2010/main" val="1459706362"/>
       </p:ext>
     </p:extLst>
   </p:cSld>
@@ -11539,7 +11626,7 @@
           <p:cNvPr id="2" name="Title 1">
             <a:extLst>
               <a:ext uri="{FF2B5EF4-FFF2-40B4-BE49-F238E27FC236}">
-                <a16:creationId xmlns:a16="http://schemas.microsoft.com/office/drawing/2014/main" id="{2035A76E-847D-8C9D-A4E2-A1B587BCA2C0}"/>
+                <a16:creationId xmlns:a16="http://schemas.microsoft.com/office/drawing/2014/main" id="{75FA1F9A-4DE0-E93B-B0EA-198097595C5E}"/>
               </a:ext>
             </a:extLst>
           </p:cNvPr>
@@ -11550,14 +11637,19 @@
             <p:ph type="title"/>
           </p:nvPr>
         </p:nvSpPr>
-        <p:spPr/>
+        <p:spPr>
+          <a:xfrm>
+            <a:off x="838200" y="365125"/>
+            <a:ext cx="10515600" cy="1031189"/>
+          </a:xfrm>
+        </p:spPr>
         <p:txBody>
           <a:bodyPr/>
           <a:lstStyle/>
           <a:p>
             <a:r>
               <a:rPr lang="en-US" dirty="0"/>
-              <a:t>Range reduction</a:t>
+              <a:t>Evaluating a function</a:t>
             </a:r>
           </a:p>
         </p:txBody>
@@ -11567,7 +11659,7 @@
           <p:cNvPr id="3" name="Content Placeholder 2">
             <a:extLst>
               <a:ext uri="{FF2B5EF4-FFF2-40B4-BE49-F238E27FC236}">
-                <a16:creationId xmlns:a16="http://schemas.microsoft.com/office/drawing/2014/main" id="{0401C695-E4BD-B119-1B0B-4E90AA85A94B}"/>
+                <a16:creationId xmlns:a16="http://schemas.microsoft.com/office/drawing/2014/main" id="{D47FA385-BE03-A1B4-A776-3419E23CAE78}"/>
               </a:ext>
             </a:extLst>
           </p:cNvPr>
@@ -11580,216 +11672,95 @@
         </p:nvSpPr>
         <p:spPr>
           <a:xfrm>
-            <a:off x="435721" y="1825625"/>
-            <a:ext cx="11310330" cy="4351338"/>
+            <a:off x="733873" y="1105615"/>
+            <a:ext cx="10515600" cy="4847023"/>
           </a:xfrm>
         </p:spPr>
         <p:txBody>
-          <a:bodyPr>
-            <a:normAutofit/>
-          </a:bodyPr>
+          <a:bodyPr/>
           <a:lstStyle/>
           <a:p>
+            <a:pPr marL="0" indent="0">
+              <a:buNone/>
+            </a:pPr>
             <a:r>
               <a:rPr lang="en-US" dirty="0"/>
-              <a:t>exp, log, pow</a:t>
+              <a:t>Five steps</a:t>
+            </a:r>
+          </a:p>
+          <a:p>
+            <a:pPr marL="514350" indent="-514350">
+              <a:buFont typeface="+mj-lt"/>
+              <a:buAutoNum type="arabicPeriod"/>
+            </a:pPr>
+            <a:r>
+              <a:rPr lang="en-US" dirty="0"/>
+              <a:t>Handling special values, under/over-flows and invalid</a:t>
             </a:r>
           </a:p>
           <a:p>
             <a:pPr lvl="1"/>
             <a:r>
               <a:rPr lang="en-US" dirty="0"/>
-              <a:t>exploit </a:t>
-            </a:r>
-            <a:r>
-              <a:rPr lang="en-US" dirty="0" err="1"/>
-              <a:t>fp</a:t>
-            </a:r>
+              <a:t>Standard specify them all!</a:t>
+            </a:r>
+          </a:p>
+          <a:p>
+            <a:pPr marL="514350" indent="-514350">
+              <a:buFont typeface="+mj-lt"/>
+              <a:buAutoNum type="arabicPeriod"/>
+            </a:pPr>
             <a:r>
               <a:rPr lang="en-US" dirty="0"/>
-              <a:t> representation: x = 1.mᐧ</a:t>
-            </a:r>
-            <a:r>
-              <a:rPr lang="cs-CZ" altLang="x-none" dirty="0"/>
-              <a:t>2</a:t>
-            </a:r>
-            <a:r>
-              <a:rPr lang="en-US" altLang="x-none" baseline="30000" dirty="0"/>
-              <a:t>n</a:t>
-            </a:r>
-            <a:endParaRPr lang="en-US" baseline="30000" dirty="0"/>
+              <a:t>Range Reduction</a:t>
+            </a:r>
+          </a:p>
+          <a:p>
+            <a:pPr marL="514350" indent="-514350">
+              <a:buFont typeface="+mj-lt"/>
+              <a:buAutoNum type="arabicPeriod"/>
+            </a:pPr>
+            <a:r>
+              <a:rPr lang="en-US" dirty="0"/>
+              <a:t>Approximation</a:t>
+            </a:r>
+          </a:p>
+          <a:p>
+            <a:pPr marL="514350" indent="-514350">
+              <a:buFont typeface="+mj-lt"/>
+              <a:buAutoNum type="arabicPeriod"/>
+            </a:pPr>
+            <a:r>
+              <a:rPr lang="en-US" dirty="0"/>
+              <a:t>If required:</a:t>
+            </a:r>
           </a:p>
           <a:p>
             <a:pPr lvl="1"/>
             <a:r>
               <a:rPr lang="en-US" dirty="0"/>
-              <a:t>For exp(x):  x = </a:t>
-            </a:r>
-            <a:r>
-              <a:rPr lang="en-US" dirty="0" err="1"/>
-              <a:t>kᐧlog</a:t>
-            </a:r>
+              <a:t>precision test and handling of “Table Maker’s Dilemma”</a:t>
+            </a:r>
+          </a:p>
+          <a:p>
+            <a:pPr marL="514350" indent="-514350">
+              <a:buFont typeface="+mj-lt"/>
+              <a:buAutoNum type="arabicPeriod"/>
+            </a:pPr>
             <a:r>
               <a:rPr lang="en-US" dirty="0"/>
-              <a:t>(2)+y, with y in [-log(2)/2;log(2)/2). exp(x) = 2</a:t>
-            </a:r>
-            <a:r>
-              <a:rPr lang="en-US" baseline="30000" dirty="0"/>
-              <a:t>k </a:t>
-            </a:r>
-            <a:r>
-              <a:rPr lang="en-US" dirty="0" err="1"/>
-              <a:t>ᐧexp</a:t>
-            </a:r>
-            <a:r>
-              <a:rPr lang="en-US" dirty="0"/>
-              <a:t>(y)</a:t>
-            </a:r>
-            <a:endParaRPr lang="en-US" baseline="30000" dirty="0"/>
-          </a:p>
-          <a:p>
-            <a:pPr lvl="1"/>
-            <a:r>
-              <a:rPr lang="en-US"/>
-              <a:t>For log(x):  </a:t>
-            </a:r>
-            <a:r>
-              <a:rPr lang="en-US" dirty="0"/>
-              <a:t>x =  yᐧ2</a:t>
-            </a:r>
-            <a:r>
-              <a:rPr lang="en-US" baseline="30000" dirty="0"/>
-              <a:t>z</a:t>
-            </a:r>
-            <a:r>
-              <a:rPr lang="en-US" dirty="0"/>
-              <a:t>, with  y in [0.75,1.5)</a:t>
-            </a:r>
-            <a:r>
-              <a:rPr lang="en-US" baseline="30000" dirty="0"/>
-              <a:t> </a:t>
-            </a:r>
-            <a:r>
-              <a:rPr lang="en-US" dirty="0"/>
-              <a:t>. log(x) = </a:t>
-            </a:r>
-            <a:r>
-              <a:rPr lang="en-US" dirty="0" err="1"/>
-              <a:t>zᐧlog</a:t>
-            </a:r>
-            <a:r>
-              <a:rPr lang="en-US" dirty="0"/>
-              <a:t>(2)+log(y) </a:t>
-            </a:r>
-          </a:p>
-          <a:p>
-            <a:pPr lvl="1"/>
-            <a:r>
-              <a:rPr lang="en-US" dirty="0" err="1"/>
-              <a:t>x</a:t>
-            </a:r>
-            <a:r>
-              <a:rPr lang="en-US" baseline="30000" dirty="0" err="1"/>
-              <a:t>y</a:t>
-            </a:r>
-            <a:r>
-              <a:rPr lang="en-US" baseline="30000" dirty="0"/>
-              <a:t> </a:t>
-            </a:r>
-            <a:r>
-              <a:rPr lang="en-US" dirty="0"/>
-              <a:t>= </a:t>
-            </a:r>
-            <a:r>
-              <a:rPr lang="en-US" dirty="0" err="1"/>
-              <a:t>e</a:t>
-            </a:r>
-            <a:r>
-              <a:rPr lang="en-US" baseline="30000" dirty="0" err="1"/>
-              <a:t>yᐧlog</a:t>
-            </a:r>
-            <a:r>
-              <a:rPr lang="en-US" baseline="30000" dirty="0"/>
-              <a:t>(x)</a:t>
-            </a:r>
+              <a:t>Back to full range</a:t>
+            </a:r>
+          </a:p>
+          <a:p>
             <a:endParaRPr lang="en-US" dirty="0"/>
-          </a:p>
-          <a:p>
-            <a:r>
-              <a:rPr lang="en-US" dirty="0" err="1"/>
-              <a:t>sin,cos,tan</a:t>
-            </a:r>
-            <a:endParaRPr lang="en-US" dirty="0"/>
-          </a:p>
-          <a:p>
-            <a:pPr lvl="1"/>
-            <a:r>
-              <a:rPr lang="en-US" dirty="0"/>
-              <a:t>Reduce to [0, π/4) (trivial for f(π</a:t>
-            </a:r>
-            <a:r>
-              <a:rPr lang="en-US" dirty="0" err="1"/>
-              <a:t>ᐧx</a:t>
-            </a:r>
-            <a:r>
-              <a:rPr lang="en-US" dirty="0"/>
-              <a:t>) known as </a:t>
-            </a:r>
-            <a:r>
-              <a:rPr lang="en-US" dirty="0" err="1"/>
-              <a:t>sinpi,cospi</a:t>
-            </a:r>
-            <a:r>
-              <a:rPr lang="en-US" dirty="0"/>
-              <a:t> </a:t>
-            </a:r>
-            <a:r>
-              <a:rPr lang="en-US" dirty="0" err="1"/>
-              <a:t>etc</a:t>
-            </a:r>
-            <a:r>
-              <a:rPr lang="en-US" dirty="0"/>
-              <a:t>, tricky for sin(x) </a:t>
-            </a:r>
-            <a:r>
-              <a:rPr lang="en-US" dirty="0" err="1"/>
-              <a:t>etc</a:t>
-            </a:r>
-            <a:r>
-              <a:rPr lang="en-US" dirty="0"/>
-              <a:t>)</a:t>
-            </a:r>
-          </a:p>
-          <a:p>
-            <a:pPr lvl="1"/>
-            <a:r>
-              <a:rPr lang="en-US" dirty="0"/>
-              <a:t>use trig identities to go back</a:t>
-            </a:r>
-          </a:p>
-          <a:p>
-            <a:r>
-              <a:rPr lang="en-US" dirty="0" err="1"/>
-              <a:t>asin,acos,atan</a:t>
-            </a:r>
-            <a:r>
-              <a:rPr lang="en-US" dirty="0"/>
-              <a:t>(2)</a:t>
-            </a:r>
-          </a:p>
-          <a:p>
-            <a:pPr lvl="1"/>
-            <a:r>
-              <a:rPr lang="en-US" dirty="0"/>
-              <a:t>approximate it in “ad-hoc” intervals (make sure continuity at edges)</a:t>
-            </a:r>
           </a:p>
         </p:txBody>
       </p:sp>
     </p:spTree>
     <p:extLst>
       <p:ext uri="{BB962C8B-B14F-4D97-AF65-F5344CB8AC3E}">
-        <p14:creationId xmlns:p14="http://schemas.microsoft.com/office/powerpoint/2010/main" val="1854919877"/>
+        <p14:creationId xmlns:p14="http://schemas.microsoft.com/office/powerpoint/2010/main" val="177925165"/>
       </p:ext>
     </p:extLst>
   </p:cSld>
@@ -12251,6 +12222,284 @@
           <p:cNvPr id="2" name="Title 1">
             <a:extLst>
               <a:ext uri="{FF2B5EF4-FFF2-40B4-BE49-F238E27FC236}">
+                <a16:creationId xmlns:a16="http://schemas.microsoft.com/office/drawing/2014/main" id="{2035A76E-847D-8C9D-A4E2-A1B587BCA2C0}"/>
+              </a:ext>
+            </a:extLst>
+          </p:cNvPr>
+          <p:cNvSpPr>
+            <a:spLocks noGrp="1"/>
+          </p:cNvSpPr>
+          <p:nvPr>
+            <p:ph type="title"/>
+          </p:nvPr>
+        </p:nvSpPr>
+        <p:spPr/>
+        <p:txBody>
+          <a:bodyPr/>
+          <a:lstStyle/>
+          <a:p>
+            <a:r>
+              <a:rPr lang="en-US" dirty="0"/>
+              <a:t>Range reduction</a:t>
+            </a:r>
+          </a:p>
+        </p:txBody>
+      </p:sp>
+      <p:sp>
+        <p:nvSpPr>
+          <p:cNvPr id="3" name="Content Placeholder 2">
+            <a:extLst>
+              <a:ext uri="{FF2B5EF4-FFF2-40B4-BE49-F238E27FC236}">
+                <a16:creationId xmlns:a16="http://schemas.microsoft.com/office/drawing/2014/main" id="{0401C695-E4BD-B119-1B0B-4E90AA85A94B}"/>
+              </a:ext>
+            </a:extLst>
+          </p:cNvPr>
+          <p:cNvSpPr>
+            <a:spLocks noGrp="1"/>
+          </p:cNvSpPr>
+          <p:nvPr>
+            <p:ph idx="1"/>
+          </p:nvPr>
+        </p:nvSpPr>
+        <p:spPr>
+          <a:xfrm>
+            <a:off x="435721" y="1825625"/>
+            <a:ext cx="11310330" cy="4351338"/>
+          </a:xfrm>
+        </p:spPr>
+        <p:txBody>
+          <a:bodyPr>
+            <a:normAutofit/>
+          </a:bodyPr>
+          <a:lstStyle/>
+          <a:p>
+            <a:r>
+              <a:rPr lang="en-US" dirty="0"/>
+              <a:t>exp, log, pow</a:t>
+            </a:r>
+          </a:p>
+          <a:p>
+            <a:pPr lvl="1"/>
+            <a:r>
+              <a:rPr lang="en-US" dirty="0"/>
+              <a:t>exploit </a:t>
+            </a:r>
+            <a:r>
+              <a:rPr lang="en-US" dirty="0" err="1"/>
+              <a:t>fp</a:t>
+            </a:r>
+            <a:r>
+              <a:rPr lang="en-US" dirty="0"/>
+              <a:t> representation: x = 1.mᐧ</a:t>
+            </a:r>
+            <a:r>
+              <a:rPr lang="cs-CZ" altLang="x-none" dirty="0"/>
+              <a:t>2</a:t>
+            </a:r>
+            <a:r>
+              <a:rPr lang="en-US" altLang="x-none" baseline="30000" dirty="0"/>
+              <a:t>n</a:t>
+            </a:r>
+            <a:endParaRPr lang="en-US" baseline="30000" dirty="0"/>
+          </a:p>
+          <a:p>
+            <a:pPr lvl="1"/>
+            <a:r>
+              <a:rPr lang="en-US" dirty="0"/>
+              <a:t>For exp(x):  x = </a:t>
+            </a:r>
+            <a:r>
+              <a:rPr lang="en-US" dirty="0" err="1"/>
+              <a:t>kᐧlog</a:t>
+            </a:r>
+            <a:r>
+              <a:rPr lang="en-US" dirty="0"/>
+              <a:t>(2)+y, with y in [-log(2)/2;log(2)/2). exp(x) = 2</a:t>
+            </a:r>
+            <a:r>
+              <a:rPr lang="en-US" baseline="30000" dirty="0"/>
+              <a:t>k </a:t>
+            </a:r>
+            <a:r>
+              <a:rPr lang="en-US" dirty="0" err="1"/>
+              <a:t>ᐧexp</a:t>
+            </a:r>
+            <a:r>
+              <a:rPr lang="en-US" dirty="0"/>
+              <a:t>(y)</a:t>
+            </a:r>
+            <a:endParaRPr lang="en-US" baseline="30000" dirty="0"/>
+          </a:p>
+          <a:p>
+            <a:pPr lvl="1"/>
+            <a:r>
+              <a:rPr lang="en-US" dirty="0"/>
+              <a:t>For log(x):  x =  yᐧ2</a:t>
+            </a:r>
+            <a:r>
+              <a:rPr lang="en-US" baseline="30000" dirty="0"/>
+              <a:t>z</a:t>
+            </a:r>
+            <a:r>
+              <a:rPr lang="en-US" dirty="0"/>
+              <a:t>, with  y in [0.75,1.5)</a:t>
+            </a:r>
+            <a:r>
+              <a:rPr lang="en-US" baseline="30000" dirty="0"/>
+              <a:t> </a:t>
+            </a:r>
+            <a:r>
+              <a:rPr lang="en-US" dirty="0"/>
+              <a:t>. log(x) = </a:t>
+            </a:r>
+            <a:r>
+              <a:rPr lang="en-US" dirty="0" err="1"/>
+              <a:t>zᐧlog</a:t>
+            </a:r>
+            <a:r>
+              <a:rPr lang="en-US" dirty="0"/>
+              <a:t>(2)+log(y) </a:t>
+            </a:r>
+          </a:p>
+          <a:p>
+            <a:pPr lvl="1"/>
+            <a:r>
+              <a:rPr lang="en-US" dirty="0" err="1"/>
+              <a:t>x</a:t>
+            </a:r>
+            <a:r>
+              <a:rPr lang="en-US" baseline="30000" dirty="0" err="1"/>
+              <a:t>y</a:t>
+            </a:r>
+            <a:r>
+              <a:rPr lang="en-US" baseline="30000" dirty="0"/>
+              <a:t> </a:t>
+            </a:r>
+            <a:r>
+              <a:rPr lang="en-US" dirty="0"/>
+              <a:t>= </a:t>
+            </a:r>
+            <a:r>
+              <a:rPr lang="en-US" dirty="0" err="1"/>
+              <a:t>e</a:t>
+            </a:r>
+            <a:r>
+              <a:rPr lang="en-US" baseline="30000" dirty="0" err="1"/>
+              <a:t>yᐧlog</a:t>
+            </a:r>
+            <a:r>
+              <a:rPr lang="en-US" baseline="30000" dirty="0"/>
+              <a:t>(x)</a:t>
+            </a:r>
+            <a:endParaRPr lang="en-US" dirty="0"/>
+          </a:p>
+          <a:p>
+            <a:r>
+              <a:rPr lang="en-US" dirty="0" err="1"/>
+              <a:t>sin,cos,tan</a:t>
+            </a:r>
+            <a:endParaRPr lang="en-US" dirty="0"/>
+          </a:p>
+          <a:p>
+            <a:pPr lvl="1"/>
+            <a:r>
+              <a:rPr lang="en-US" dirty="0"/>
+              <a:t>Reduce to [0, π/4) (trivial for f(π</a:t>
+            </a:r>
+            <a:r>
+              <a:rPr lang="en-US" dirty="0" err="1"/>
+              <a:t>ᐧx</a:t>
+            </a:r>
+            <a:r>
+              <a:rPr lang="en-US" dirty="0"/>
+              <a:t>) known as </a:t>
+            </a:r>
+            <a:r>
+              <a:rPr lang="en-US" dirty="0" err="1"/>
+              <a:t>sinpi,cospi</a:t>
+            </a:r>
+            <a:r>
+              <a:rPr lang="en-US" dirty="0"/>
+              <a:t> </a:t>
+            </a:r>
+            <a:r>
+              <a:rPr lang="en-US" dirty="0" err="1"/>
+              <a:t>etc</a:t>
+            </a:r>
+            <a:r>
+              <a:rPr lang="en-US" dirty="0"/>
+              <a:t>, tricky for sin(x) </a:t>
+            </a:r>
+            <a:r>
+              <a:rPr lang="en-US" dirty="0" err="1"/>
+              <a:t>etc</a:t>
+            </a:r>
+            <a:r>
+              <a:rPr lang="en-US" dirty="0"/>
+              <a:t>)</a:t>
+            </a:r>
+          </a:p>
+          <a:p>
+            <a:pPr lvl="1"/>
+            <a:r>
+              <a:rPr lang="en-US" dirty="0"/>
+              <a:t>use trig identities to go back</a:t>
+            </a:r>
+          </a:p>
+          <a:p>
+            <a:r>
+              <a:rPr lang="en-US" dirty="0" err="1"/>
+              <a:t>asin,acos,atan</a:t>
+            </a:r>
+            <a:r>
+              <a:rPr lang="en-US" dirty="0"/>
+              <a:t>(2)</a:t>
+            </a:r>
+          </a:p>
+          <a:p>
+            <a:pPr lvl="1"/>
+            <a:r>
+              <a:rPr lang="en-US" dirty="0"/>
+              <a:t>approximate it in “ad-hoc” intervals (make sure continuity at edges)</a:t>
+            </a:r>
+          </a:p>
+        </p:txBody>
+      </p:sp>
+    </p:spTree>
+    <p:extLst>
+      <p:ext uri="{BB962C8B-B14F-4D97-AF65-F5344CB8AC3E}">
+        <p14:creationId xmlns:p14="http://schemas.microsoft.com/office/powerpoint/2010/main" val="1854919877"/>
+      </p:ext>
+    </p:extLst>
+  </p:cSld>
+  <p:clrMapOvr>
+    <a:masterClrMapping/>
+  </p:clrMapOvr>
+</p:sld>
+</file>
+
+<file path=ppt/slides/slide31.xml><?xml version="1.0" encoding="utf-8"?>
+<p:sld xmlns:a="http://schemas.openxmlformats.org/drawingml/2006/main" xmlns:r="http://schemas.openxmlformats.org/officeDocument/2006/relationships" xmlns:p="http://schemas.openxmlformats.org/presentationml/2006/main">
+  <p:cSld>
+    <p:spTree>
+      <p:nvGrpSpPr>
+        <p:cNvPr id="1" name=""/>
+        <p:cNvGrpSpPr/>
+        <p:nvPr/>
+      </p:nvGrpSpPr>
+      <p:grpSpPr>
+        <a:xfrm>
+          <a:off x="0" y="0"/>
+          <a:ext cx="0" cy="0"/>
+          <a:chOff x="0" y="0"/>
+          <a:chExt cx="0" cy="0"/>
+        </a:xfrm>
+      </p:grpSpPr>
+      <p:sp>
+        <p:nvSpPr>
+          <p:cNvPr id="2" name="Title 1">
+            <a:extLst>
+              <a:ext uri="{FF2B5EF4-FFF2-40B4-BE49-F238E27FC236}">
                 <a16:creationId xmlns:a16="http://schemas.microsoft.com/office/drawing/2014/main" id="{AED3096E-0FB8-D1CA-58AB-3E330A5080D9}"/>
               </a:ext>
             </a:extLst>
@@ -12438,7 +12687,7 @@
 </p:sld>
 </file>
 
-<file path=ppt/slides/slide31.xml><?xml version="1.0" encoding="utf-8"?>
+<file path=ppt/slides/slide32.xml><?xml version="1.0" encoding="utf-8"?>
 <p:sld xmlns:a="http://schemas.openxmlformats.org/drawingml/2006/main" xmlns:r="http://schemas.openxmlformats.org/officeDocument/2006/relationships" xmlns:p="http://schemas.openxmlformats.org/presentationml/2006/main">
   <p:cSld>
     <p:spTree>
@@ -13096,6 +13345,380 @@
           </a:p>
         </p:txBody>
       </p:sp>
+      <p:sp>
+        <p:nvSpPr>
+          <p:cNvPr id="11" name="TextBox 10">
+            <a:extLst>
+              <a:ext uri="{FF2B5EF4-FFF2-40B4-BE49-F238E27FC236}">
+                <a16:creationId xmlns:a16="http://schemas.microsoft.com/office/drawing/2014/main" id="{2BCFECC8-000C-5FCD-2219-D383F2794BFB}"/>
+              </a:ext>
+            </a:extLst>
+          </p:cNvPr>
+          <p:cNvSpPr txBox="1"/>
+          <p:nvPr/>
+        </p:nvSpPr>
+        <p:spPr>
+          <a:xfrm>
+            <a:off x="5098901" y="3651974"/>
+            <a:ext cx="6823075" cy="1200150"/>
+          </a:xfrm>
+          <a:prstGeom prst="rect">
+            <a:avLst/>
+          </a:prstGeom>
+          <a:solidFill>
+            <a:schemeClr val="accent1">
+              <a:lumMod val="60000"/>
+              <a:lumOff val="40000"/>
+            </a:schemeClr>
+          </a:solidFill>
+        </p:spPr>
+        <p:txBody>
+          <a:bodyPr wrap="none">
+            <a:spAutoFit/>
+          </a:bodyPr>
+          <a:lstStyle>
+            <a:lvl1pPr eaLnBrk="0" hangingPunct="0">
+              <a:defRPr sz="2400">
+                <a:solidFill>
+                  <a:schemeClr val="tx1"/>
+                </a:solidFill>
+                <a:latin typeface="Arial" charset="0"/>
+                <a:ea typeface="ＭＳ Ｐゴシック" charset="0"/>
+                <a:cs typeface="ＭＳ Ｐゴシック" charset="0"/>
+              </a:defRPr>
+            </a:lvl1pPr>
+            <a:lvl2pPr marL="37931725" indent="-37474525" eaLnBrk="0" hangingPunct="0">
+              <a:defRPr sz="2400">
+                <a:solidFill>
+                  <a:schemeClr val="tx1"/>
+                </a:solidFill>
+                <a:latin typeface="Arial" charset="0"/>
+                <a:ea typeface="ＭＳ Ｐゴシック" charset="0"/>
+              </a:defRPr>
+            </a:lvl2pPr>
+            <a:lvl3pPr eaLnBrk="0" hangingPunct="0">
+              <a:defRPr sz="2400">
+                <a:solidFill>
+                  <a:schemeClr val="tx1"/>
+                </a:solidFill>
+                <a:latin typeface="Arial" charset="0"/>
+                <a:ea typeface="ＭＳ Ｐゴシック" charset="0"/>
+              </a:defRPr>
+            </a:lvl3pPr>
+            <a:lvl4pPr eaLnBrk="0" hangingPunct="0">
+              <a:defRPr sz="2400">
+                <a:solidFill>
+                  <a:schemeClr val="tx1"/>
+                </a:solidFill>
+                <a:latin typeface="Arial" charset="0"/>
+                <a:ea typeface="ＭＳ Ｐゴシック" charset="0"/>
+              </a:defRPr>
+            </a:lvl4pPr>
+            <a:lvl5pPr eaLnBrk="0" hangingPunct="0">
+              <a:defRPr sz="2400">
+                <a:solidFill>
+                  <a:schemeClr val="tx1"/>
+                </a:solidFill>
+                <a:latin typeface="Arial" charset="0"/>
+                <a:ea typeface="ＭＳ Ｐゴシック" charset="0"/>
+              </a:defRPr>
+            </a:lvl5pPr>
+            <a:lvl6pPr marL="457200" eaLnBrk="0" fontAlgn="base" hangingPunct="0">
+              <a:spcBef>
+                <a:spcPct val="0"/>
+              </a:spcBef>
+              <a:spcAft>
+                <a:spcPct val="0"/>
+              </a:spcAft>
+              <a:defRPr sz="2400">
+                <a:solidFill>
+                  <a:schemeClr val="tx1"/>
+                </a:solidFill>
+                <a:latin typeface="Arial" charset="0"/>
+                <a:ea typeface="ＭＳ Ｐゴシック" charset="0"/>
+              </a:defRPr>
+            </a:lvl6pPr>
+            <a:lvl7pPr marL="914400" eaLnBrk="0" fontAlgn="base" hangingPunct="0">
+              <a:spcBef>
+                <a:spcPct val="0"/>
+              </a:spcBef>
+              <a:spcAft>
+                <a:spcPct val="0"/>
+              </a:spcAft>
+              <a:defRPr sz="2400">
+                <a:solidFill>
+                  <a:schemeClr val="tx1"/>
+                </a:solidFill>
+                <a:latin typeface="Arial" charset="0"/>
+                <a:ea typeface="ＭＳ Ｐゴシック" charset="0"/>
+              </a:defRPr>
+            </a:lvl7pPr>
+            <a:lvl8pPr marL="1371600" eaLnBrk="0" fontAlgn="base" hangingPunct="0">
+              <a:spcBef>
+                <a:spcPct val="0"/>
+              </a:spcBef>
+              <a:spcAft>
+                <a:spcPct val="0"/>
+              </a:spcAft>
+              <a:defRPr sz="2400">
+                <a:solidFill>
+                  <a:schemeClr val="tx1"/>
+                </a:solidFill>
+                <a:latin typeface="Arial" charset="0"/>
+                <a:ea typeface="ＭＳ Ｐゴシック" charset="0"/>
+              </a:defRPr>
+            </a:lvl8pPr>
+            <a:lvl9pPr marL="1828800" eaLnBrk="0" fontAlgn="base" hangingPunct="0">
+              <a:spcBef>
+                <a:spcPct val="0"/>
+              </a:spcBef>
+              <a:spcAft>
+                <a:spcPct val="0"/>
+              </a:spcAft>
+              <a:defRPr sz="2400">
+                <a:solidFill>
+                  <a:schemeClr val="tx1"/>
+                </a:solidFill>
+                <a:latin typeface="Arial" charset="0"/>
+                <a:ea typeface="ＭＳ Ｐゴシック" charset="0"/>
+              </a:defRPr>
+            </a:lvl9pPr>
+          </a:lstStyle>
+          <a:p>
+            <a:pPr eaLnBrk="1" hangingPunct="1">
+              <a:defRPr/>
+            </a:pPr>
+            <a:r>
+              <a:rPr lang="en-US" sz="1800" dirty="0"/>
+              <a:t>Real x86_64 code for 1/√x</a:t>
+            </a:r>
+          </a:p>
+          <a:p>
+            <a:pPr eaLnBrk="1" hangingPunct="1">
+              <a:defRPr/>
+            </a:pPr>
+            <a:r>
+              <a:rPr lang="en-US" sz="1800" dirty="0"/>
+              <a:t> _</a:t>
+            </a:r>
+            <a:r>
+              <a:rPr lang="en-US" sz="1800" dirty="0" err="1"/>
+              <a:t>mm_store_ss</a:t>
+            </a:r>
+            <a:r>
+              <a:rPr lang="en-US" sz="1800" dirty="0"/>
+              <a:t>( &amp;y</a:t>
+            </a:r>
+            <a:r>
+              <a:rPr lang="en-US" sz="1800" b="1" dirty="0"/>
+              <a:t>, _</a:t>
+            </a:r>
+            <a:r>
+              <a:rPr lang="en-US" sz="1800" b="1" dirty="0" err="1"/>
+              <a:t>mm_rsqrt_ss</a:t>
+            </a:r>
+            <a:r>
+              <a:rPr lang="en-US" sz="1800" dirty="0"/>
+              <a:t>( _</a:t>
+            </a:r>
+            <a:r>
+              <a:rPr lang="en-US" sz="1800" dirty="0" err="1"/>
+              <a:t>mm_load_ss</a:t>
+            </a:r>
+            <a:r>
+              <a:rPr lang="en-US" sz="1800" dirty="0"/>
+              <a:t>( &amp;x ) ) ); </a:t>
+            </a:r>
+          </a:p>
+          <a:p>
+            <a:pPr eaLnBrk="1" hangingPunct="1">
+              <a:defRPr/>
+            </a:pPr>
+            <a:r>
+              <a:rPr lang="en-US" sz="1800" dirty="0"/>
+              <a:t>return y * (1.5f - 0.5f * x * y * y); // One round of Newton's method</a:t>
+            </a:r>
+          </a:p>
+          <a:p>
+            <a:pPr eaLnBrk="1" hangingPunct="1">
+              <a:defRPr/>
+            </a:pPr>
+            <a:r>
+              <a:rPr lang="en-US" sz="1800" dirty="0"/>
+              <a:t> </a:t>
+            </a:r>
+          </a:p>
+        </p:txBody>
+      </p:sp>
+      <p:sp>
+        <p:nvSpPr>
+          <p:cNvPr id="12" name="TextBox 11">
+            <a:extLst>
+              <a:ext uri="{FF2B5EF4-FFF2-40B4-BE49-F238E27FC236}">
+                <a16:creationId xmlns:a16="http://schemas.microsoft.com/office/drawing/2014/main" id="{A2118DCB-422D-391F-653D-D4278409250C}"/>
+              </a:ext>
+            </a:extLst>
+          </p:cNvPr>
+          <p:cNvSpPr txBox="1"/>
+          <p:nvPr/>
+        </p:nvSpPr>
+        <p:spPr>
+          <a:xfrm>
+            <a:off x="5699914" y="4888078"/>
+            <a:ext cx="6043613" cy="923925"/>
+          </a:xfrm>
+          <a:prstGeom prst="rect">
+            <a:avLst/>
+          </a:prstGeom>
+          <a:solidFill>
+            <a:schemeClr val="accent1">
+              <a:lumMod val="60000"/>
+              <a:lumOff val="40000"/>
+            </a:schemeClr>
+          </a:solidFill>
+        </p:spPr>
+        <p:txBody>
+          <a:bodyPr wrap="none">
+            <a:spAutoFit/>
+          </a:bodyPr>
+          <a:lstStyle>
+            <a:lvl1pPr eaLnBrk="0" hangingPunct="0">
+              <a:defRPr sz="2400">
+                <a:solidFill>
+                  <a:schemeClr val="tx1"/>
+                </a:solidFill>
+                <a:latin typeface="Arial" panose="020B0604020202020204" pitchFamily="34" charset="0"/>
+                <a:ea typeface="ＭＳ Ｐゴシック" panose="020B0600070205080204" pitchFamily="34" charset="-128"/>
+              </a:defRPr>
+            </a:lvl1pPr>
+            <a:lvl2pPr marL="742950" indent="-285750" eaLnBrk="0" hangingPunct="0">
+              <a:defRPr sz="2400">
+                <a:solidFill>
+                  <a:schemeClr val="tx1"/>
+                </a:solidFill>
+                <a:latin typeface="Arial" panose="020B0604020202020204" pitchFamily="34" charset="0"/>
+                <a:ea typeface="ＭＳ Ｐゴシック" panose="020B0600070205080204" pitchFamily="34" charset="-128"/>
+              </a:defRPr>
+            </a:lvl2pPr>
+            <a:lvl3pPr marL="1143000" indent="-228600" eaLnBrk="0" hangingPunct="0">
+              <a:defRPr sz="2400">
+                <a:solidFill>
+                  <a:schemeClr val="tx1"/>
+                </a:solidFill>
+                <a:latin typeface="Arial" panose="020B0604020202020204" pitchFamily="34" charset="0"/>
+                <a:ea typeface="ＭＳ Ｐゴシック" panose="020B0600070205080204" pitchFamily="34" charset="-128"/>
+              </a:defRPr>
+            </a:lvl3pPr>
+            <a:lvl4pPr marL="1600200" indent="-228600" eaLnBrk="0" hangingPunct="0">
+              <a:defRPr sz="2400">
+                <a:solidFill>
+                  <a:schemeClr val="tx1"/>
+                </a:solidFill>
+                <a:latin typeface="Arial" panose="020B0604020202020204" pitchFamily="34" charset="0"/>
+                <a:ea typeface="ＭＳ Ｐゴシック" panose="020B0600070205080204" pitchFamily="34" charset="-128"/>
+              </a:defRPr>
+            </a:lvl4pPr>
+            <a:lvl5pPr marL="2057400" indent="-228600" eaLnBrk="0" hangingPunct="0">
+              <a:defRPr sz="2400">
+                <a:solidFill>
+                  <a:schemeClr val="tx1"/>
+                </a:solidFill>
+                <a:latin typeface="Arial" panose="020B0604020202020204" pitchFamily="34" charset="0"/>
+                <a:ea typeface="ＭＳ Ｐゴシック" panose="020B0600070205080204" pitchFamily="34" charset="-128"/>
+              </a:defRPr>
+            </a:lvl5pPr>
+            <a:lvl6pPr marL="2514600" indent="-228600" eaLnBrk="0" fontAlgn="base" hangingPunct="0">
+              <a:spcBef>
+                <a:spcPct val="0"/>
+              </a:spcBef>
+              <a:spcAft>
+                <a:spcPct val="0"/>
+              </a:spcAft>
+              <a:defRPr sz="2400">
+                <a:solidFill>
+                  <a:schemeClr val="tx1"/>
+                </a:solidFill>
+                <a:latin typeface="Arial" panose="020B0604020202020204" pitchFamily="34" charset="0"/>
+                <a:ea typeface="ＭＳ Ｐゴシック" panose="020B0600070205080204" pitchFamily="34" charset="-128"/>
+              </a:defRPr>
+            </a:lvl6pPr>
+            <a:lvl7pPr marL="2971800" indent="-228600" eaLnBrk="0" fontAlgn="base" hangingPunct="0">
+              <a:spcBef>
+                <a:spcPct val="0"/>
+              </a:spcBef>
+              <a:spcAft>
+                <a:spcPct val="0"/>
+              </a:spcAft>
+              <a:defRPr sz="2400">
+                <a:solidFill>
+                  <a:schemeClr val="tx1"/>
+                </a:solidFill>
+                <a:latin typeface="Arial" panose="020B0604020202020204" pitchFamily="34" charset="0"/>
+                <a:ea typeface="ＭＳ Ｐゴシック" panose="020B0600070205080204" pitchFamily="34" charset="-128"/>
+              </a:defRPr>
+            </a:lvl7pPr>
+            <a:lvl8pPr marL="3429000" indent="-228600" eaLnBrk="0" fontAlgn="base" hangingPunct="0">
+              <a:spcBef>
+                <a:spcPct val="0"/>
+              </a:spcBef>
+              <a:spcAft>
+                <a:spcPct val="0"/>
+              </a:spcAft>
+              <a:defRPr sz="2400">
+                <a:solidFill>
+                  <a:schemeClr val="tx1"/>
+                </a:solidFill>
+                <a:latin typeface="Arial" panose="020B0604020202020204" pitchFamily="34" charset="0"/>
+                <a:ea typeface="ＭＳ Ｐゴシック" panose="020B0600070205080204" pitchFamily="34" charset="-128"/>
+              </a:defRPr>
+            </a:lvl8pPr>
+            <a:lvl9pPr marL="3886200" indent="-228600" eaLnBrk="0" fontAlgn="base" hangingPunct="0">
+              <a:spcBef>
+                <a:spcPct val="0"/>
+              </a:spcBef>
+              <a:spcAft>
+                <a:spcPct val="0"/>
+              </a:spcAft>
+              <a:defRPr sz="2400">
+                <a:solidFill>
+                  <a:schemeClr val="tx1"/>
+                </a:solidFill>
+                <a:latin typeface="Arial" panose="020B0604020202020204" pitchFamily="34" charset="0"/>
+                <a:ea typeface="ＭＳ Ｐゴシック" panose="020B0600070205080204" pitchFamily="34" charset="-128"/>
+              </a:defRPr>
+            </a:lvl9pPr>
+          </a:lstStyle>
+          <a:p>
+            <a:pPr eaLnBrk="1" hangingPunct="1"/>
+            <a:r>
+              <a:rPr lang="en-US" altLang="en-US" sz="1800"/>
+              <a:t>Real x86_64 code for 1/x</a:t>
+            </a:r>
+          </a:p>
+          <a:p>
+            <a:pPr eaLnBrk="1" hangingPunct="1"/>
+            <a:r>
+              <a:rPr lang="en-US" altLang="en-US" sz="1800"/>
+              <a:t>_mm_store_ss( &amp;y,</a:t>
+            </a:r>
+            <a:r>
+              <a:rPr lang="en-US" altLang="en-US" sz="1800" b="1"/>
+              <a:t>_mm_rcp_ss</a:t>
+            </a:r>
+            <a:r>
+              <a:rPr lang="en-US" altLang="en-US" sz="1800"/>
+              <a:t>( _mm_load_ss( &amp;x ) ) );</a:t>
+            </a:r>
+          </a:p>
+          <a:p>
+            <a:pPr eaLnBrk="1" hangingPunct="1"/>
+            <a:r>
+              <a:rPr lang="en-US" altLang="en-US" sz="1800"/>
+              <a:t> return (y+y) – x*y*y; // One round of Newton's method</a:t>
+            </a:r>
+          </a:p>
+        </p:txBody>
+      </p:sp>
     </p:spTree>
     <p:extLst>
       <p:ext uri="{BB962C8B-B14F-4D97-AF65-F5344CB8AC3E}">
@@ -13109,7 +13732,7 @@
 </p:sld>
 </file>
 
-<file path=ppt/slides/slide32.xml><?xml version="1.0" encoding="utf-8"?>
+<file path=ppt/slides/slide33.xml><?xml version="1.0" encoding="utf-8"?>
 <p:sld xmlns:a="http://schemas.openxmlformats.org/drawingml/2006/main" xmlns:r="http://schemas.openxmlformats.org/officeDocument/2006/relationships" xmlns:p="http://schemas.openxmlformats.org/presentationml/2006/main">
   <p:cSld>
     <p:spTree>
@@ -13276,6 +13899,1844 @@
         <p14:creationId xmlns:p14="http://schemas.microsoft.com/office/powerpoint/2010/main" val="2412081414"/>
       </p:ext>
     </p:extLst>
+  </p:cSld>
+  <p:clrMapOvr>
+    <a:masterClrMapping/>
+  </p:clrMapOvr>
+</p:sld>
+</file>
+
+<file path=ppt/slides/slide34.xml><?xml version="1.0" encoding="utf-8"?>
+<p:sld xmlns:a="http://schemas.openxmlformats.org/drawingml/2006/main" xmlns:r="http://schemas.openxmlformats.org/officeDocument/2006/relationships" xmlns:p="http://schemas.openxmlformats.org/presentationml/2006/main">
+  <p:cSld>
+    <p:spTree>
+      <p:nvGrpSpPr>
+        <p:cNvPr id="1" name="">
+          <a:extLst>
+            <a:ext uri="{FF2B5EF4-FFF2-40B4-BE49-F238E27FC236}">
+              <a16:creationId xmlns:a16="http://schemas.microsoft.com/office/drawing/2014/main" id="{E28DE45D-8A1B-77C4-8416-9CFA674E3876}"/>
+            </a:ext>
+          </a:extLst>
+        </p:cNvPr>
+        <p:cNvGrpSpPr/>
+        <p:nvPr/>
+      </p:nvGrpSpPr>
+      <p:grpSpPr>
+        <a:xfrm>
+          <a:off x="0" y="0"/>
+          <a:ext cx="0" cy="0"/>
+          <a:chOff x="0" y="0"/>
+          <a:chExt cx="0" cy="0"/>
+        </a:xfrm>
+      </p:grpSpPr>
+      <p:sp>
+        <p:nvSpPr>
+          <p:cNvPr id="4" name="Title 3">
+            <a:extLst>
+              <a:ext uri="{FF2B5EF4-FFF2-40B4-BE49-F238E27FC236}">
+                <a16:creationId xmlns:a16="http://schemas.microsoft.com/office/drawing/2014/main" id="{8FD803B3-A662-93AE-BFEA-520D2B54EBBA}"/>
+              </a:ext>
+            </a:extLst>
+          </p:cNvPr>
+          <p:cNvSpPr>
+            <a:spLocks noGrp="1"/>
+          </p:cNvSpPr>
+          <p:nvPr>
+            <p:ph type="title"/>
+          </p:nvPr>
+        </p:nvSpPr>
+        <p:spPr>
+          <a:xfrm>
+            <a:off x="634142" y="2092798"/>
+            <a:ext cx="10515600" cy="1589516"/>
+          </a:xfrm>
+        </p:spPr>
+        <p:txBody>
+          <a:bodyPr>
+            <a:normAutofit/>
+          </a:bodyPr>
+          <a:lstStyle/>
+          <a:p>
+            <a:pPr algn="ctr"/>
+            <a:r>
+              <a:rPr lang="en-US" sz="9600">
+                <a:solidFill>
+                  <a:srgbClr val="FF0000"/>
+                </a:solidFill>
+                <a:highlight>
+                  <a:srgbClr val="FFFF00"/>
+                </a:highlight>
+              </a:rPr>
+              <a:t>EXERCISES</a:t>
+            </a:r>
+          </a:p>
+        </p:txBody>
+      </p:sp>
+      <p:sp>
+        <p:nvSpPr>
+          <p:cNvPr id="5" name="Text Placeholder 4">
+            <a:extLst>
+              <a:ext uri="{FF2B5EF4-FFF2-40B4-BE49-F238E27FC236}">
+                <a16:creationId xmlns:a16="http://schemas.microsoft.com/office/drawing/2014/main" id="{1957D02F-13B0-63C1-7316-0EDEA28A3141}"/>
+              </a:ext>
+            </a:extLst>
+          </p:cNvPr>
+          <p:cNvSpPr>
+            <a:spLocks noGrp="1"/>
+          </p:cNvSpPr>
+          <p:nvPr>
+            <p:ph type="body" idx="1"/>
+          </p:nvPr>
+        </p:nvSpPr>
+        <p:spPr>
+          <a:xfrm>
+            <a:off x="838200" y="4033409"/>
+            <a:ext cx="10515600" cy="1500187"/>
+          </a:xfrm>
+        </p:spPr>
+        <p:txBody>
+          <a:bodyPr>
+            <a:normAutofit fontScale="77500" lnSpcReduction="20000"/>
+          </a:bodyPr>
+          <a:lstStyle/>
+          <a:p>
+            <a:r>
+              <a:rPr lang="en-US"/>
+              <a:t>Either in Python or C++</a:t>
+            </a:r>
+          </a:p>
+          <a:p>
+            <a:endParaRPr lang="en-US"/>
+          </a:p>
+          <a:p>
+            <a:r>
+              <a:rPr lang="en-US"/>
+              <a:t>For C++ one can use </a:t>
+            </a:r>
+            <a:r>
+              <a:rPr lang="en-US" err="1"/>
+              <a:t>godbolt</a:t>
+            </a:r>
+            <a:r>
+              <a:rPr lang="en-US"/>
+              <a:t> (</a:t>
+            </a:r>
+            <a:r>
+              <a:rPr lang="en-US">
+                <a:hlinkClick r:id="rId2"/>
+              </a:rPr>
+              <a:t>https://godbolt.org/z/d1e18j3jK</a:t>
+            </a:r>
+            <a:r>
+              <a:rPr lang="en-US"/>
+              <a:t>  ) </a:t>
+            </a:r>
+          </a:p>
+          <a:p>
+            <a:r>
+              <a:rPr lang="en-US"/>
+              <a:t>For Python either a python3 shell on your PC, or a </a:t>
+            </a:r>
+            <a:r>
+              <a:rPr lang="en-US" err="1"/>
+              <a:t>jupyter</a:t>
+            </a:r>
+            <a:r>
+              <a:rPr lang="en-US"/>
+              <a:t> notebook or the browser shell in </a:t>
+            </a:r>
+            <a:r>
+              <a:rPr lang="en-US">
+                <a:hlinkClick r:id="rId3"/>
+              </a:rPr>
+              <a:t>https://numpy.org/</a:t>
+            </a:r>
+            <a:endParaRPr lang="en-US"/>
+          </a:p>
+          <a:p>
+            <a:endParaRPr lang="en-US"/>
+          </a:p>
+        </p:txBody>
+      </p:sp>
+      <p:pic>
+        <p:nvPicPr>
+          <p:cNvPr id="6146" name="Picture 2">
+            <a:extLst>
+              <a:ext uri="{FF2B5EF4-FFF2-40B4-BE49-F238E27FC236}">
+                <a16:creationId xmlns:a16="http://schemas.microsoft.com/office/drawing/2014/main" id="{7E436A6E-4BF4-AE61-7CAC-6EE44526F2C9}"/>
+              </a:ext>
+            </a:extLst>
+          </p:cNvPr>
+          <p:cNvPicPr>
+            <a:picLocks noChangeAspect="1" noChangeArrowheads="1"/>
+          </p:cNvPicPr>
+          <p:nvPr/>
+        </p:nvPicPr>
+        <p:blipFill>
+          <a:blip r:embed="rId4">
+            <a:extLst>
+              <a:ext uri="{28A0092B-C50C-407E-A947-70E740481C1C}">
+                <a14:useLocalDpi xmlns:a14="http://schemas.microsoft.com/office/drawing/2010/main" val="0"/>
+              </a:ext>
+            </a:extLst>
+          </a:blip>
+          <a:srcRect/>
+          <a:stretch>
+            <a:fillRect/>
+          </a:stretch>
+        </p:blipFill>
+        <p:spPr bwMode="auto">
+          <a:xfrm>
+            <a:off x="8684441" y="99724"/>
+            <a:ext cx="3433957" cy="2993280"/>
+          </a:xfrm>
+          <a:prstGeom prst="rect">
+            <a:avLst/>
+          </a:prstGeom>
+          <a:noFill/>
+          <a:extLst>
+            <a:ext uri="{909E8E84-426E-40DD-AFC4-6F175D3DCCD1}">
+              <a14:hiddenFill xmlns:a14="http://schemas.microsoft.com/office/drawing/2010/main">
+                <a:solidFill>
+                  <a:srgbClr val="FFFFFF"/>
+                </a:solidFill>
+              </a14:hiddenFill>
+            </a:ext>
+          </a:extLst>
+        </p:spPr>
+      </p:pic>
+    </p:spTree>
+    <p:extLst>
+      <p:ext uri="{BB962C8B-B14F-4D97-AF65-F5344CB8AC3E}">
+        <p14:creationId xmlns:p14="http://schemas.microsoft.com/office/powerpoint/2010/main" val="1365199765"/>
+      </p:ext>
+    </p:extLst>
+  </p:cSld>
+  <p:clrMapOvr>
+    <a:masterClrMapping/>
+  </p:clrMapOvr>
+</p:sld>
+</file>
+
+<file path=ppt/slides/slide35.xml><?xml version="1.0" encoding="utf-8"?>
+<p:sld xmlns:a="http://schemas.openxmlformats.org/drawingml/2006/main" xmlns:r="http://schemas.openxmlformats.org/officeDocument/2006/relationships" xmlns:p="http://schemas.openxmlformats.org/presentationml/2006/main">
+  <p:cSld>
+    <p:spTree>
+      <p:nvGrpSpPr>
+        <p:cNvPr id="1" name=""/>
+        <p:cNvGrpSpPr/>
+        <p:nvPr/>
+      </p:nvGrpSpPr>
+      <p:grpSpPr>
+        <a:xfrm>
+          <a:off x="0" y="0"/>
+          <a:ext cx="0" cy="0"/>
+          <a:chOff x="0" y="0"/>
+          <a:chExt cx="0" cy="0"/>
+        </a:xfrm>
+      </p:grpSpPr>
+      <p:sp>
+        <p:nvSpPr>
+          <p:cNvPr id="4" name="Title 3">
+            <a:extLst>
+              <a:ext uri="{FF2B5EF4-FFF2-40B4-BE49-F238E27FC236}">
+                <a16:creationId xmlns:a16="http://schemas.microsoft.com/office/drawing/2014/main" id="{963A2906-2B42-271A-75CE-31C7438629E5}"/>
+              </a:ext>
+            </a:extLst>
+          </p:cNvPr>
+          <p:cNvSpPr>
+            <a:spLocks noGrp="1"/>
+          </p:cNvSpPr>
+          <p:nvPr>
+            <p:ph type="title"/>
+          </p:nvPr>
+        </p:nvSpPr>
+        <p:spPr/>
+        <p:txBody>
+          <a:bodyPr/>
+          <a:lstStyle/>
+          <a:p>
+            <a:r>
+              <a:rPr lang="en-US" dirty="0"/>
+              <a:t>Polynomials</a:t>
+            </a:r>
+          </a:p>
+        </p:txBody>
+      </p:sp>
+      <p:sp>
+        <p:nvSpPr>
+          <p:cNvPr id="5" name="Content Placeholder 4">
+            <a:extLst>
+              <a:ext uri="{FF2B5EF4-FFF2-40B4-BE49-F238E27FC236}">
+                <a16:creationId xmlns:a16="http://schemas.microsoft.com/office/drawing/2014/main" id="{07591255-06FB-D5FE-F5F4-3295E62E169D}"/>
+              </a:ext>
+            </a:extLst>
+          </p:cNvPr>
+          <p:cNvSpPr>
+            <a:spLocks noGrp="1"/>
+          </p:cNvSpPr>
+          <p:nvPr>
+            <p:ph idx="1"/>
+          </p:nvPr>
+        </p:nvSpPr>
+        <p:spPr>
+          <a:xfrm>
+            <a:off x="432486" y="1825625"/>
+            <a:ext cx="10921314" cy="4389824"/>
+          </a:xfrm>
+        </p:spPr>
+        <p:txBody>
+          <a:bodyPr/>
+          <a:lstStyle/>
+          <a:p>
+            <a:r>
+              <a:rPr lang="en-US" dirty="0"/>
+              <a:t>Approximate sin(x) in [0, π/4) with </a:t>
+            </a:r>
+            <a:r>
+              <a:rPr lang="en-US" dirty="0" err="1"/>
+              <a:t>polynomomials</a:t>
+            </a:r>
+            <a:r>
+              <a:rPr lang="en-US" dirty="0"/>
+              <a:t> of increasing order</a:t>
+            </a:r>
+          </a:p>
+          <a:p>
+            <a:pPr lvl="1"/>
+            <a:r>
+              <a:rPr lang="en-US" dirty="0"/>
+              <a:t>Taylor</a:t>
+            </a:r>
+          </a:p>
+          <a:p>
+            <a:pPr lvl="1"/>
+            <a:r>
+              <a:rPr lang="en-US" dirty="0"/>
+              <a:t>Chebyshev</a:t>
+            </a:r>
+          </a:p>
+          <a:p>
+            <a:pPr lvl="1"/>
+            <a:r>
+              <a:rPr lang="en-US" dirty="0"/>
+              <a:t>Pade</a:t>
+            </a:r>
+          </a:p>
+          <a:p>
+            <a:r>
+              <a:rPr lang="en-US" dirty="0"/>
+              <a:t>Plot the absolute and relative error w/r/t a high precision result</a:t>
+            </a:r>
+          </a:p>
+          <a:p>
+            <a:endParaRPr lang="en-US" dirty="0"/>
+          </a:p>
+          <a:p>
+            <a:r>
+              <a:rPr lang="en-US" dirty="0"/>
+              <a:t>Use python </a:t>
+            </a:r>
+            <a:r>
+              <a:rPr lang="en-US" dirty="0" err="1"/>
+              <a:t>mpmath</a:t>
+            </a:r>
+            <a:r>
+              <a:rPr lang="en-US" dirty="0"/>
+              <a:t> module </a:t>
+            </a:r>
+            <a:r>
+              <a:rPr lang="en-US" dirty="0">
+                <a:hlinkClick r:id="rId2"/>
+              </a:rPr>
+              <a:t>https://mpmath.readthedocs.io/en/latest/calculus/approximation.html</a:t>
+            </a:r>
+            <a:r>
+              <a:rPr lang="en-US" dirty="0"/>
+              <a:t>  </a:t>
+            </a:r>
+          </a:p>
+          <a:p>
+            <a:r>
+              <a:rPr lang="en-US" dirty="0"/>
+              <a:t>or sage, or </a:t>
+            </a:r>
+            <a:r>
+              <a:rPr lang="en-US" dirty="0" err="1"/>
+              <a:t>mathematica</a:t>
+            </a:r>
+            <a:r>
+              <a:rPr lang="en-US" dirty="0"/>
+              <a:t>…</a:t>
+            </a:r>
+          </a:p>
+        </p:txBody>
+      </p:sp>
+    </p:spTree>
+    <p:extLst>
+      <p:ext uri="{BB962C8B-B14F-4D97-AF65-F5344CB8AC3E}">
+        <p14:creationId xmlns:p14="http://schemas.microsoft.com/office/powerpoint/2010/main" val="2162463676"/>
+      </p:ext>
+    </p:extLst>
+  </p:cSld>
+  <p:clrMapOvr>
+    <a:masterClrMapping/>
+  </p:clrMapOvr>
+</p:sld>
+</file>
+
+<file path=ppt/slides/slide36.xml><?xml version="1.0" encoding="utf-8"?>
+<p:sld xmlns:a="http://schemas.openxmlformats.org/drawingml/2006/main" xmlns:r="http://schemas.openxmlformats.org/officeDocument/2006/relationships" xmlns:p="http://schemas.openxmlformats.org/presentationml/2006/main">
+  <p:cSld>
+    <p:spTree>
+      <p:nvGrpSpPr>
+        <p:cNvPr id="1" name=""/>
+        <p:cNvGrpSpPr/>
+        <p:nvPr/>
+      </p:nvGrpSpPr>
+      <p:grpSpPr>
+        <a:xfrm>
+          <a:off x="0" y="0"/>
+          <a:ext cx="0" cy="0"/>
+          <a:chOff x="0" y="0"/>
+          <a:chExt cx="0" cy="0"/>
+        </a:xfrm>
+      </p:grpSpPr>
+      <p:sp>
+        <p:nvSpPr>
+          <p:cNvPr id="2" name="Title 1">
+            <a:extLst>
+              <a:ext uri="{FF2B5EF4-FFF2-40B4-BE49-F238E27FC236}">
+                <a16:creationId xmlns:a16="http://schemas.microsoft.com/office/drawing/2014/main" id="{DAEC4263-5C9C-37A3-2658-4E5AD8605230}"/>
+              </a:ext>
+            </a:extLst>
+          </p:cNvPr>
+          <p:cNvSpPr>
+            <a:spLocks noGrp="1"/>
+          </p:cNvSpPr>
+          <p:nvPr>
+            <p:ph type="title"/>
+          </p:nvPr>
+        </p:nvSpPr>
+        <p:spPr>
+          <a:xfrm>
+            <a:off x="507694" y="232922"/>
+            <a:ext cx="10515600" cy="1325563"/>
+          </a:xfrm>
+        </p:spPr>
+        <p:txBody>
+          <a:bodyPr/>
+          <a:lstStyle/>
+          <a:p>
+            <a:r>
+              <a:rPr lang="en-US" dirty="0"/>
+              <a:t>TMD in decimal</a:t>
+            </a:r>
+          </a:p>
+        </p:txBody>
+      </p:sp>
+      <p:sp>
+        <p:nvSpPr>
+          <p:cNvPr id="3" name="Content Placeholder 2">
+            <a:extLst>
+              <a:ext uri="{FF2B5EF4-FFF2-40B4-BE49-F238E27FC236}">
+                <a16:creationId xmlns:a16="http://schemas.microsoft.com/office/drawing/2014/main" id="{8572530F-11DB-A49D-AC71-4F92AF696343}"/>
+              </a:ext>
+            </a:extLst>
+          </p:cNvPr>
+          <p:cNvSpPr>
+            <a:spLocks noGrp="1"/>
+          </p:cNvSpPr>
+          <p:nvPr>
+            <p:ph idx="1"/>
+          </p:nvPr>
+        </p:nvSpPr>
+        <p:spPr>
+          <a:xfrm>
+            <a:off x="195649" y="4660135"/>
+            <a:ext cx="11425832" cy="1784732"/>
+          </a:xfrm>
+        </p:spPr>
+        <p:txBody>
+          <a:bodyPr>
+            <a:normAutofit/>
+          </a:bodyPr>
+          <a:lstStyle/>
+          <a:p>
+            <a:pPr marL="0" indent="0">
+              <a:buNone/>
+            </a:pPr>
+            <a:r>
+              <a:rPr lang="en-US" dirty="0"/>
+              <a:t>Use cos(x) approximation in decimal (</a:t>
+            </a:r>
+            <a:r>
+              <a:rPr lang="en-US" dirty="0" err="1"/>
+              <a:t>taylor</a:t>
+            </a:r>
+            <a:r>
+              <a:rPr lang="en-US" dirty="0"/>
+              <a:t>)</a:t>
+            </a:r>
+            <a:br>
+              <a:rPr lang="en-US" dirty="0"/>
+            </a:br>
+            <a:r>
+              <a:rPr lang="en-US" dirty="0"/>
+              <a:t>see </a:t>
+            </a:r>
+            <a:r>
+              <a:rPr lang="en-US" dirty="0">
+                <a:hlinkClick r:id="rId2"/>
+              </a:rPr>
+              <a:t>https://docs.python.org/3/library/decimal.html - recipes</a:t>
+            </a:r>
+            <a:endParaRPr lang="en-US" dirty="0"/>
+          </a:p>
+          <a:p>
+            <a:pPr marL="0" indent="0">
+              <a:buNone/>
+            </a:pPr>
+            <a:r>
+              <a:rPr lang="en-US" dirty="0"/>
+              <a:t>to “solve” TMD above  (mind: direct rounding!) </a:t>
+            </a:r>
+          </a:p>
+          <a:p>
+            <a:pPr marL="0" indent="0">
+              <a:buNone/>
+            </a:pPr>
+            <a:endParaRPr lang="en-US" dirty="0"/>
+          </a:p>
+        </p:txBody>
+      </p:sp>
+      <p:pic>
+        <p:nvPicPr>
+          <p:cNvPr id="4" name="Picture 3">
+            <a:extLst>
+              <a:ext uri="{FF2B5EF4-FFF2-40B4-BE49-F238E27FC236}">
+                <a16:creationId xmlns:a16="http://schemas.microsoft.com/office/drawing/2014/main" id="{679AFE6B-031D-E082-91CB-04D18984334E}"/>
+              </a:ext>
+            </a:extLst>
+          </p:cNvPr>
+          <p:cNvPicPr>
+            <a:picLocks noChangeAspect="1"/>
+          </p:cNvPicPr>
+          <p:nvPr/>
+        </p:nvPicPr>
+        <p:blipFill>
+          <a:blip r:embed="rId3"/>
+          <a:stretch>
+            <a:fillRect/>
+          </a:stretch>
+        </p:blipFill>
+        <p:spPr>
+          <a:xfrm>
+            <a:off x="195649" y="1230151"/>
+            <a:ext cx="7772400" cy="3160078"/>
+          </a:xfrm>
+          <a:prstGeom prst="rect">
+            <a:avLst/>
+          </a:prstGeom>
+        </p:spPr>
+      </p:pic>
+    </p:spTree>
+    <p:extLst>
+      <p:ext uri="{BB962C8B-B14F-4D97-AF65-F5344CB8AC3E}">
+        <p14:creationId xmlns:p14="http://schemas.microsoft.com/office/powerpoint/2010/main" val="4042367704"/>
+      </p:ext>
+    </p:extLst>
+  </p:cSld>
+  <p:clrMapOvr>
+    <a:masterClrMapping/>
+  </p:clrMapOvr>
+</p:sld>
+</file>
+
+<file path=ppt/slides/slide37.xml><?xml version="1.0" encoding="utf-8"?>
+<p:sld xmlns:a="http://schemas.openxmlformats.org/drawingml/2006/main" xmlns:r="http://schemas.openxmlformats.org/officeDocument/2006/relationships" xmlns:p="http://schemas.openxmlformats.org/presentationml/2006/main">
+  <p:cSld>
+    <p:spTree>
+      <p:nvGrpSpPr>
+        <p:cNvPr id="1" name=""/>
+        <p:cNvGrpSpPr/>
+        <p:nvPr/>
+      </p:nvGrpSpPr>
+      <p:grpSpPr>
+        <a:xfrm>
+          <a:off x="0" y="0"/>
+          <a:ext cx="0" cy="0"/>
+          <a:chOff x="0" y="0"/>
+          <a:chExt cx="0" cy="0"/>
+        </a:xfrm>
+      </p:grpSpPr>
+      <p:sp>
+        <p:nvSpPr>
+          <p:cNvPr id="2" name="Title 1">
+            <a:extLst>
+              <a:ext uri="{FF2B5EF4-FFF2-40B4-BE49-F238E27FC236}">
+                <a16:creationId xmlns:a16="http://schemas.microsoft.com/office/drawing/2014/main" id="{59D76CAE-1C6F-71E7-5459-91BEC2C404D6}"/>
+              </a:ext>
+            </a:extLst>
+          </p:cNvPr>
+          <p:cNvSpPr>
+            <a:spLocks noGrp="1"/>
+          </p:cNvSpPr>
+          <p:nvPr>
+            <p:ph type="title"/>
+          </p:nvPr>
+        </p:nvSpPr>
+        <p:spPr/>
+        <p:txBody>
+          <a:bodyPr/>
+          <a:lstStyle/>
+          <a:p>
+            <a:r>
+              <a:rPr lang="en-US" dirty="0" err="1"/>
+              <a:t>rsqrt</a:t>
+            </a:r>
+            <a:endParaRPr lang="en-US" dirty="0"/>
+          </a:p>
+        </p:txBody>
+      </p:sp>
+      <p:sp>
+        <p:nvSpPr>
+          <p:cNvPr id="3" name="Content Placeholder 2">
+            <a:extLst>
+              <a:ext uri="{FF2B5EF4-FFF2-40B4-BE49-F238E27FC236}">
+                <a16:creationId xmlns:a16="http://schemas.microsoft.com/office/drawing/2014/main" id="{6BD50B62-55DA-5A04-7FA2-868807EEBF4D}"/>
+              </a:ext>
+            </a:extLst>
+          </p:cNvPr>
+          <p:cNvSpPr>
+            <a:spLocks noGrp="1"/>
+          </p:cNvSpPr>
+          <p:nvPr>
+            <p:ph idx="1"/>
+          </p:nvPr>
+        </p:nvSpPr>
+        <p:spPr/>
+        <p:txBody>
+          <a:bodyPr/>
+          <a:lstStyle/>
+          <a:p>
+            <a:r>
+              <a:rPr lang="en-US" dirty="0"/>
+              <a:t>Test  </a:t>
+            </a:r>
+            <a:r>
+              <a:rPr lang="en-US" dirty="0" err="1"/>
+              <a:t>rsqrt</a:t>
+            </a:r>
+            <a:r>
+              <a:rPr lang="en-US" dirty="0"/>
+              <a:t> precision in the interval [0.5, 4) </a:t>
+            </a:r>
+          </a:p>
+          <a:p>
+            <a:pPr lvl="1"/>
+            <a:r>
+              <a:rPr lang="en-US" dirty="0"/>
+              <a:t>use “quake magic” and/or x86_64 intrinsics plus multiple NR iterations</a:t>
+            </a:r>
+          </a:p>
+          <a:p>
+            <a:pPr lvl="1"/>
+            <a:r>
+              <a:rPr lang="en-US" dirty="0"/>
+              <a:t>Try to reach faithful (or even correct) rounding using “augmented arithmetic”</a:t>
+            </a:r>
+          </a:p>
+        </p:txBody>
+      </p:sp>
+    </p:spTree>
+    <p:extLst>
+      <p:ext uri="{BB962C8B-B14F-4D97-AF65-F5344CB8AC3E}">
+        <p14:creationId xmlns:p14="http://schemas.microsoft.com/office/powerpoint/2010/main" val="399726270"/>
+      </p:ext>
+    </p:extLst>
+  </p:cSld>
+  <p:clrMapOvr>
+    <a:masterClrMapping/>
+  </p:clrMapOvr>
+</p:sld>
+</file>
+
+<file path=ppt/slides/slide38.xml><?xml version="1.0" encoding="utf-8"?>
+<p:sld xmlns:a="http://schemas.openxmlformats.org/drawingml/2006/main" xmlns:r="http://schemas.openxmlformats.org/officeDocument/2006/relationships" xmlns:p="http://schemas.openxmlformats.org/presentationml/2006/main">
+  <p:cSld>
+    <p:spTree>
+      <p:nvGrpSpPr>
+        <p:cNvPr id="1" name=""/>
+        <p:cNvGrpSpPr/>
+        <p:nvPr/>
+      </p:nvGrpSpPr>
+      <p:grpSpPr>
+        <a:xfrm>
+          <a:off x="0" y="0"/>
+          <a:ext cx="0" cy="0"/>
+          <a:chOff x="0" y="0"/>
+          <a:chExt cx="0" cy="0"/>
+        </a:xfrm>
+      </p:grpSpPr>
+      <p:sp>
+        <p:nvSpPr>
+          <p:cNvPr id="51201" name="Title 1"/>
+          <p:cNvSpPr>
+            <a:spLocks noGrp="1"/>
+          </p:cNvSpPr>
+          <p:nvPr>
+            <p:ph type="title"/>
+          </p:nvPr>
+        </p:nvSpPr>
+        <p:spPr/>
+        <p:txBody>
+          <a:bodyPr/>
+          <a:lstStyle/>
+          <a:p>
+            <a:pPr>
+              <a:defRPr/>
+            </a:pPr>
+            <a:r>
+              <a:rPr lang="en-US" dirty="0">
+                <a:ea typeface="ＭＳ Ｐゴシック" charset="0"/>
+                <a:cs typeface="ＭＳ Ｐゴシック" charset="0"/>
+              </a:rPr>
+              <a:t>Precision, </a:t>
+            </a:r>
+            <a:r>
+              <a:rPr lang="en-US" dirty="0">
+                <a:solidFill>
+                  <a:srgbClr val="FF0000"/>
+                </a:solidFill>
+                <a:ea typeface="ＭＳ Ｐゴシック" charset="0"/>
+                <a:cs typeface="ＭＳ Ｐゴシック" charset="0"/>
+              </a:rPr>
+              <a:t>accuracy,</a:t>
+            </a:r>
+            <a:r>
+              <a:rPr lang="en-US" dirty="0">
+                <a:ea typeface="ＭＳ Ｐゴシック" charset="0"/>
+                <a:cs typeface="ＭＳ Ｐゴシック" charset="0"/>
+              </a:rPr>
+              <a:t> speed</a:t>
+            </a:r>
+          </a:p>
+        </p:txBody>
+      </p:sp>
+      <p:sp>
+        <p:nvSpPr>
+          <p:cNvPr id="40962" name="Text Placeholder 1"/>
+          <p:cNvSpPr>
+            <a:spLocks noGrp="1"/>
+          </p:cNvSpPr>
+          <p:nvPr>
+            <p:ph type="body" idx="1"/>
+          </p:nvPr>
+        </p:nvSpPr>
+        <p:spPr/>
+        <p:txBody>
+          <a:bodyPr/>
+          <a:lstStyle/>
+          <a:p>
+            <a:endParaRPr lang="en-US" altLang="x-none"/>
+          </a:p>
+        </p:txBody>
+      </p:sp>
+      <p:sp>
+        <p:nvSpPr>
+          <p:cNvPr id="40963" name="Date Placeholder 2"/>
+          <p:cNvSpPr>
+            <a:spLocks noGrp="1"/>
+          </p:cNvSpPr>
+          <p:nvPr>
+            <p:ph type="dt" sz="quarter" idx="10"/>
+          </p:nvPr>
+        </p:nvSpPr>
+        <p:spPr>
+          <a:noFill/>
+          <a:ln/>
+          <a:extLst>
+            <a:ext uri="{909E8E84-426E-40DD-AFC4-6F175D3DCCD1}">
+              <a14:hiddenFill xmlns:a14="http://schemas.microsoft.com/office/drawing/2010/main">
+                <a:solidFill>
+                  <a:srgbClr val="FFFFFF"/>
+                </a:solidFill>
+              </a14:hiddenFill>
+            </a:ext>
+            <a:ext uri="{91240B29-F687-4F45-9708-019B960494DF}">
+              <a14:hiddenLine xmlns:a14="http://schemas.microsoft.com/office/drawing/2010/main" w="9525">
+                <a:solidFill>
+                  <a:srgbClr val="000000"/>
+                </a:solidFill>
+                <a:miter lim="800000"/>
+                <a:headEnd/>
+                <a:tailEnd/>
+              </a14:hiddenLine>
+            </a:ext>
+          </a:extLst>
+        </p:spPr>
+        <p:txBody>
+          <a:bodyPr/>
+          <a:lstStyle>
+            <a:lvl1pPr eaLnBrk="0" hangingPunct="0">
+              <a:defRPr sz="2400">
+                <a:solidFill>
+                  <a:schemeClr val="tx1"/>
+                </a:solidFill>
+                <a:latin typeface="Arial" charset="0"/>
+                <a:ea typeface="ＭＳ Ｐゴシック" charset="-128"/>
+              </a:defRPr>
+            </a:lvl1pPr>
+            <a:lvl2pPr marL="742950" indent="-285750" eaLnBrk="0" hangingPunct="0">
+              <a:defRPr sz="2400">
+                <a:solidFill>
+                  <a:schemeClr val="tx1"/>
+                </a:solidFill>
+                <a:latin typeface="Arial" charset="0"/>
+                <a:ea typeface="ＭＳ Ｐゴシック" charset="-128"/>
+              </a:defRPr>
+            </a:lvl2pPr>
+            <a:lvl3pPr marL="1143000" indent="-228600" eaLnBrk="0" hangingPunct="0">
+              <a:defRPr sz="2400">
+                <a:solidFill>
+                  <a:schemeClr val="tx1"/>
+                </a:solidFill>
+                <a:latin typeface="Arial" charset="0"/>
+                <a:ea typeface="ＭＳ Ｐゴシック" charset="-128"/>
+              </a:defRPr>
+            </a:lvl3pPr>
+            <a:lvl4pPr marL="1600200" indent="-228600" eaLnBrk="0" hangingPunct="0">
+              <a:defRPr sz="2400">
+                <a:solidFill>
+                  <a:schemeClr val="tx1"/>
+                </a:solidFill>
+                <a:latin typeface="Arial" charset="0"/>
+                <a:ea typeface="ＭＳ Ｐゴシック" charset="-128"/>
+              </a:defRPr>
+            </a:lvl4pPr>
+            <a:lvl5pPr marL="2057400" indent="-228600" eaLnBrk="0" hangingPunct="0">
+              <a:defRPr sz="2400">
+                <a:solidFill>
+                  <a:schemeClr val="tx1"/>
+                </a:solidFill>
+                <a:latin typeface="Arial" charset="0"/>
+                <a:ea typeface="ＭＳ Ｐゴシック" charset="-128"/>
+              </a:defRPr>
+            </a:lvl5pPr>
+            <a:lvl6pPr marL="2514600" indent="-228600" eaLnBrk="0" fontAlgn="base" hangingPunct="0">
+              <a:spcBef>
+                <a:spcPct val="0"/>
+              </a:spcBef>
+              <a:spcAft>
+                <a:spcPct val="0"/>
+              </a:spcAft>
+              <a:defRPr sz="2400">
+                <a:solidFill>
+                  <a:schemeClr val="tx1"/>
+                </a:solidFill>
+                <a:latin typeface="Arial" charset="0"/>
+                <a:ea typeface="ＭＳ Ｐゴシック" charset="-128"/>
+              </a:defRPr>
+            </a:lvl6pPr>
+            <a:lvl7pPr marL="2971800" indent="-228600" eaLnBrk="0" fontAlgn="base" hangingPunct="0">
+              <a:spcBef>
+                <a:spcPct val="0"/>
+              </a:spcBef>
+              <a:spcAft>
+                <a:spcPct val="0"/>
+              </a:spcAft>
+              <a:defRPr sz="2400">
+                <a:solidFill>
+                  <a:schemeClr val="tx1"/>
+                </a:solidFill>
+                <a:latin typeface="Arial" charset="0"/>
+                <a:ea typeface="ＭＳ Ｐゴシック" charset="-128"/>
+              </a:defRPr>
+            </a:lvl7pPr>
+            <a:lvl8pPr marL="3429000" indent="-228600" eaLnBrk="0" fontAlgn="base" hangingPunct="0">
+              <a:spcBef>
+                <a:spcPct val="0"/>
+              </a:spcBef>
+              <a:spcAft>
+                <a:spcPct val="0"/>
+              </a:spcAft>
+              <a:defRPr sz="2400">
+                <a:solidFill>
+                  <a:schemeClr val="tx1"/>
+                </a:solidFill>
+                <a:latin typeface="Arial" charset="0"/>
+                <a:ea typeface="ＭＳ Ｐゴシック" charset="-128"/>
+              </a:defRPr>
+            </a:lvl8pPr>
+            <a:lvl9pPr marL="3886200" indent="-228600" eaLnBrk="0" fontAlgn="base" hangingPunct="0">
+              <a:spcBef>
+                <a:spcPct val="0"/>
+              </a:spcBef>
+              <a:spcAft>
+                <a:spcPct val="0"/>
+              </a:spcAft>
+              <a:defRPr sz="2400">
+                <a:solidFill>
+                  <a:schemeClr val="tx1"/>
+                </a:solidFill>
+                <a:latin typeface="Arial" charset="0"/>
+                <a:ea typeface="ＭＳ Ｐゴシック" charset="-128"/>
+              </a:defRPr>
+            </a:lvl9pPr>
+          </a:lstStyle>
+          <a:p>
+            <a:pPr eaLnBrk="1" hangingPunct="1"/>
+            <a:r>
+              <a:rPr lang="en-US" altLang="x-none" sz="1200">
+                <a:latin typeface="Garamond" charset="0"/>
+              </a:rPr>
+              <a:t>22 October 2016</a:t>
+            </a:r>
+            <a:endParaRPr lang="it-IT" altLang="x-none" sz="1200">
+              <a:latin typeface="Garamond" charset="0"/>
+            </a:endParaRPr>
+          </a:p>
+        </p:txBody>
+      </p:sp>
+      <p:sp>
+        <p:nvSpPr>
+          <p:cNvPr id="40964" name="Footer Placeholder 3"/>
+          <p:cNvSpPr>
+            <a:spLocks noGrp="1"/>
+          </p:cNvSpPr>
+          <p:nvPr>
+            <p:ph type="ftr" sz="quarter" idx="11"/>
+          </p:nvPr>
+        </p:nvSpPr>
+        <p:spPr>
+          <a:noFill/>
+          <a:ln/>
+          <a:extLst>
+            <a:ext uri="{909E8E84-426E-40DD-AFC4-6F175D3DCCD1}">
+              <a14:hiddenFill xmlns:a14="http://schemas.microsoft.com/office/drawing/2010/main">
+                <a:solidFill>
+                  <a:srgbClr val="FFFFFF"/>
+                </a:solidFill>
+              </a14:hiddenFill>
+            </a:ext>
+            <a:ext uri="{91240B29-F687-4F45-9708-019B960494DF}">
+              <a14:hiddenLine xmlns:a14="http://schemas.microsoft.com/office/drawing/2010/main" w="9525">
+                <a:solidFill>
+                  <a:srgbClr val="000000"/>
+                </a:solidFill>
+                <a:miter lim="800000"/>
+                <a:headEnd/>
+                <a:tailEnd/>
+              </a14:hiddenLine>
+            </a:ext>
+          </a:extLst>
+        </p:spPr>
+        <p:txBody>
+          <a:bodyPr/>
+          <a:lstStyle>
+            <a:lvl1pPr eaLnBrk="0" hangingPunct="0">
+              <a:defRPr sz="2400">
+                <a:solidFill>
+                  <a:schemeClr val="tx1"/>
+                </a:solidFill>
+                <a:latin typeface="Arial" charset="0"/>
+                <a:ea typeface="ＭＳ Ｐゴシック" charset="-128"/>
+              </a:defRPr>
+            </a:lvl1pPr>
+            <a:lvl2pPr marL="742950" indent="-285750" eaLnBrk="0" hangingPunct="0">
+              <a:defRPr sz="2400">
+                <a:solidFill>
+                  <a:schemeClr val="tx1"/>
+                </a:solidFill>
+                <a:latin typeface="Arial" charset="0"/>
+                <a:ea typeface="ＭＳ Ｐゴシック" charset="-128"/>
+              </a:defRPr>
+            </a:lvl2pPr>
+            <a:lvl3pPr marL="1143000" indent="-228600" eaLnBrk="0" hangingPunct="0">
+              <a:defRPr sz="2400">
+                <a:solidFill>
+                  <a:schemeClr val="tx1"/>
+                </a:solidFill>
+                <a:latin typeface="Arial" charset="0"/>
+                <a:ea typeface="ＭＳ Ｐゴシック" charset="-128"/>
+              </a:defRPr>
+            </a:lvl3pPr>
+            <a:lvl4pPr marL="1600200" indent="-228600" eaLnBrk="0" hangingPunct="0">
+              <a:defRPr sz="2400">
+                <a:solidFill>
+                  <a:schemeClr val="tx1"/>
+                </a:solidFill>
+                <a:latin typeface="Arial" charset="0"/>
+                <a:ea typeface="ＭＳ Ｐゴシック" charset="-128"/>
+              </a:defRPr>
+            </a:lvl4pPr>
+            <a:lvl5pPr marL="2057400" indent="-228600" eaLnBrk="0" hangingPunct="0">
+              <a:defRPr sz="2400">
+                <a:solidFill>
+                  <a:schemeClr val="tx1"/>
+                </a:solidFill>
+                <a:latin typeface="Arial" charset="0"/>
+                <a:ea typeface="ＭＳ Ｐゴシック" charset="-128"/>
+              </a:defRPr>
+            </a:lvl5pPr>
+            <a:lvl6pPr marL="2514600" indent="-228600" eaLnBrk="0" fontAlgn="base" hangingPunct="0">
+              <a:spcBef>
+                <a:spcPct val="0"/>
+              </a:spcBef>
+              <a:spcAft>
+                <a:spcPct val="0"/>
+              </a:spcAft>
+              <a:defRPr sz="2400">
+                <a:solidFill>
+                  <a:schemeClr val="tx1"/>
+                </a:solidFill>
+                <a:latin typeface="Arial" charset="0"/>
+                <a:ea typeface="ＭＳ Ｐゴシック" charset="-128"/>
+              </a:defRPr>
+            </a:lvl6pPr>
+            <a:lvl7pPr marL="2971800" indent="-228600" eaLnBrk="0" fontAlgn="base" hangingPunct="0">
+              <a:spcBef>
+                <a:spcPct val="0"/>
+              </a:spcBef>
+              <a:spcAft>
+                <a:spcPct val="0"/>
+              </a:spcAft>
+              <a:defRPr sz="2400">
+                <a:solidFill>
+                  <a:schemeClr val="tx1"/>
+                </a:solidFill>
+                <a:latin typeface="Arial" charset="0"/>
+                <a:ea typeface="ＭＳ Ｐゴシック" charset="-128"/>
+              </a:defRPr>
+            </a:lvl7pPr>
+            <a:lvl8pPr marL="3429000" indent="-228600" eaLnBrk="0" fontAlgn="base" hangingPunct="0">
+              <a:spcBef>
+                <a:spcPct val="0"/>
+              </a:spcBef>
+              <a:spcAft>
+                <a:spcPct val="0"/>
+              </a:spcAft>
+              <a:defRPr sz="2400">
+                <a:solidFill>
+                  <a:schemeClr val="tx1"/>
+                </a:solidFill>
+                <a:latin typeface="Arial" charset="0"/>
+                <a:ea typeface="ＭＳ Ｐゴシック" charset="-128"/>
+              </a:defRPr>
+            </a:lvl8pPr>
+            <a:lvl9pPr marL="3886200" indent="-228600" eaLnBrk="0" fontAlgn="base" hangingPunct="0">
+              <a:spcBef>
+                <a:spcPct val="0"/>
+              </a:spcBef>
+              <a:spcAft>
+                <a:spcPct val="0"/>
+              </a:spcAft>
+              <a:defRPr sz="2400">
+                <a:solidFill>
+                  <a:schemeClr val="tx1"/>
+                </a:solidFill>
+                <a:latin typeface="Arial" charset="0"/>
+                <a:ea typeface="ＭＳ Ｐゴシック" charset="-128"/>
+              </a:defRPr>
+            </a:lvl9pPr>
+          </a:lstStyle>
+          <a:p>
+            <a:pPr eaLnBrk="1" hangingPunct="1"/>
+            <a:r>
+              <a:rPr lang="en-US" altLang="x-none" sz="1200">
+                <a:latin typeface="Garamond" charset="0"/>
+              </a:rPr>
+              <a:t>Vincenzo Innocente</a:t>
+            </a:r>
+            <a:endParaRPr lang="it-IT" altLang="x-none" sz="1200">
+              <a:latin typeface="Garamond" charset="0"/>
+            </a:endParaRPr>
+          </a:p>
+        </p:txBody>
+      </p:sp>
+      <p:sp>
+        <p:nvSpPr>
+          <p:cNvPr id="40965" name="Slide Number Placeholder 4"/>
+          <p:cNvSpPr>
+            <a:spLocks noGrp="1"/>
+          </p:cNvSpPr>
+          <p:nvPr>
+            <p:ph type="sldNum" sz="quarter" idx="12"/>
+          </p:nvPr>
+        </p:nvSpPr>
+        <p:spPr>
+          <a:noFill/>
+          <a:ln/>
+          <a:extLst>
+            <a:ext uri="{909E8E84-426E-40DD-AFC4-6F175D3DCCD1}">
+              <a14:hiddenFill xmlns:a14="http://schemas.microsoft.com/office/drawing/2010/main">
+                <a:solidFill>
+                  <a:srgbClr val="FFFFFF"/>
+                </a:solidFill>
+              </a14:hiddenFill>
+            </a:ext>
+            <a:ext uri="{91240B29-F687-4F45-9708-019B960494DF}">
+              <a14:hiddenLine xmlns:a14="http://schemas.microsoft.com/office/drawing/2010/main" w="9525">
+                <a:solidFill>
+                  <a:srgbClr val="000000"/>
+                </a:solidFill>
+                <a:miter lim="800000"/>
+                <a:headEnd/>
+                <a:tailEnd/>
+              </a14:hiddenLine>
+            </a:ext>
+          </a:extLst>
+        </p:spPr>
+        <p:txBody>
+          <a:bodyPr/>
+          <a:lstStyle>
+            <a:lvl1pPr eaLnBrk="0" hangingPunct="0">
+              <a:defRPr sz="2400">
+                <a:solidFill>
+                  <a:schemeClr val="tx1"/>
+                </a:solidFill>
+                <a:latin typeface="Arial" charset="0"/>
+                <a:ea typeface="ＭＳ Ｐゴシック" charset="-128"/>
+              </a:defRPr>
+            </a:lvl1pPr>
+            <a:lvl2pPr marL="742950" indent="-285750" eaLnBrk="0" hangingPunct="0">
+              <a:defRPr sz="2400">
+                <a:solidFill>
+                  <a:schemeClr val="tx1"/>
+                </a:solidFill>
+                <a:latin typeface="Arial" charset="0"/>
+                <a:ea typeface="ＭＳ Ｐゴシック" charset="-128"/>
+              </a:defRPr>
+            </a:lvl2pPr>
+            <a:lvl3pPr marL="1143000" indent="-228600" eaLnBrk="0" hangingPunct="0">
+              <a:defRPr sz="2400">
+                <a:solidFill>
+                  <a:schemeClr val="tx1"/>
+                </a:solidFill>
+                <a:latin typeface="Arial" charset="0"/>
+                <a:ea typeface="ＭＳ Ｐゴシック" charset="-128"/>
+              </a:defRPr>
+            </a:lvl3pPr>
+            <a:lvl4pPr marL="1600200" indent="-228600" eaLnBrk="0" hangingPunct="0">
+              <a:defRPr sz="2400">
+                <a:solidFill>
+                  <a:schemeClr val="tx1"/>
+                </a:solidFill>
+                <a:latin typeface="Arial" charset="0"/>
+                <a:ea typeface="ＭＳ Ｐゴシック" charset="-128"/>
+              </a:defRPr>
+            </a:lvl4pPr>
+            <a:lvl5pPr marL="2057400" indent="-228600" eaLnBrk="0" hangingPunct="0">
+              <a:defRPr sz="2400">
+                <a:solidFill>
+                  <a:schemeClr val="tx1"/>
+                </a:solidFill>
+                <a:latin typeface="Arial" charset="0"/>
+                <a:ea typeface="ＭＳ Ｐゴシック" charset="-128"/>
+              </a:defRPr>
+            </a:lvl5pPr>
+            <a:lvl6pPr marL="2514600" indent="-228600" eaLnBrk="0" fontAlgn="base" hangingPunct="0">
+              <a:spcBef>
+                <a:spcPct val="0"/>
+              </a:spcBef>
+              <a:spcAft>
+                <a:spcPct val="0"/>
+              </a:spcAft>
+              <a:defRPr sz="2400">
+                <a:solidFill>
+                  <a:schemeClr val="tx1"/>
+                </a:solidFill>
+                <a:latin typeface="Arial" charset="0"/>
+                <a:ea typeface="ＭＳ Ｐゴシック" charset="-128"/>
+              </a:defRPr>
+            </a:lvl6pPr>
+            <a:lvl7pPr marL="2971800" indent="-228600" eaLnBrk="0" fontAlgn="base" hangingPunct="0">
+              <a:spcBef>
+                <a:spcPct val="0"/>
+              </a:spcBef>
+              <a:spcAft>
+                <a:spcPct val="0"/>
+              </a:spcAft>
+              <a:defRPr sz="2400">
+                <a:solidFill>
+                  <a:schemeClr val="tx1"/>
+                </a:solidFill>
+                <a:latin typeface="Arial" charset="0"/>
+                <a:ea typeface="ＭＳ Ｐゴシック" charset="-128"/>
+              </a:defRPr>
+            </a:lvl7pPr>
+            <a:lvl8pPr marL="3429000" indent="-228600" eaLnBrk="0" fontAlgn="base" hangingPunct="0">
+              <a:spcBef>
+                <a:spcPct val="0"/>
+              </a:spcBef>
+              <a:spcAft>
+                <a:spcPct val="0"/>
+              </a:spcAft>
+              <a:defRPr sz="2400">
+                <a:solidFill>
+                  <a:schemeClr val="tx1"/>
+                </a:solidFill>
+                <a:latin typeface="Arial" charset="0"/>
+                <a:ea typeface="ＭＳ Ｐゴシック" charset="-128"/>
+              </a:defRPr>
+            </a:lvl8pPr>
+            <a:lvl9pPr marL="3886200" indent="-228600" eaLnBrk="0" fontAlgn="base" hangingPunct="0">
+              <a:spcBef>
+                <a:spcPct val="0"/>
+              </a:spcBef>
+              <a:spcAft>
+                <a:spcPct val="0"/>
+              </a:spcAft>
+              <a:defRPr sz="2400">
+                <a:solidFill>
+                  <a:schemeClr val="tx1"/>
+                </a:solidFill>
+                <a:latin typeface="Arial" charset="0"/>
+                <a:ea typeface="ＭＳ Ｐゴシック" charset="-128"/>
+              </a:defRPr>
+            </a:lvl9pPr>
+          </a:lstStyle>
+          <a:p>
+            <a:pPr eaLnBrk="1" hangingPunct="1"/>
+            <a:fld id="{E74AEA11-21EC-8340-B6C0-1AF2C04111D7}" type="slidenum">
+              <a:rPr lang="it-IT" altLang="x-none" sz="1200">
+                <a:latin typeface="Garamond" charset="0"/>
+              </a:rPr>
+              <a:pPr eaLnBrk="1" hangingPunct="1"/>
+              <a:t>38</a:t>
+            </a:fld>
+            <a:endParaRPr lang="it-IT" altLang="x-none" sz="1200">
+              <a:latin typeface="Garamond" charset="0"/>
+            </a:endParaRPr>
+          </a:p>
+        </p:txBody>
+      </p:sp>
+    </p:spTree>
+  </p:cSld>
+  <p:clrMapOvr>
+    <a:masterClrMapping/>
+  </p:clrMapOvr>
+</p:sld>
+</file>
+
+<file path=ppt/slides/slide39.xml><?xml version="1.0" encoding="utf-8"?>
+<p:sld xmlns:a="http://schemas.openxmlformats.org/drawingml/2006/main" xmlns:r="http://schemas.openxmlformats.org/officeDocument/2006/relationships" xmlns:p="http://schemas.openxmlformats.org/presentationml/2006/main">
+  <p:cSld>
+    <p:spTree>
+      <p:nvGrpSpPr>
+        <p:cNvPr id="1" name=""/>
+        <p:cNvGrpSpPr/>
+        <p:nvPr/>
+      </p:nvGrpSpPr>
+      <p:grpSpPr>
+        <a:xfrm>
+          <a:off x="0" y="0"/>
+          <a:ext cx="0" cy="0"/>
+          <a:chOff x="0" y="0"/>
+          <a:chExt cx="0" cy="0"/>
+        </a:xfrm>
+      </p:grpSpPr>
+      <p:sp>
+        <p:nvSpPr>
+          <p:cNvPr id="41985" name="Title 6"/>
+          <p:cNvSpPr>
+            <a:spLocks noGrp="1"/>
+          </p:cNvSpPr>
+          <p:nvPr>
+            <p:ph type="title"/>
+          </p:nvPr>
+        </p:nvSpPr>
+        <p:spPr/>
+        <p:txBody>
+          <a:bodyPr/>
+          <a:lstStyle/>
+          <a:p>
+            <a:r>
+              <a:rPr lang="en-US" altLang="x-none" dirty="0"/>
+              <a:t>Definitions </a:t>
+            </a:r>
+          </a:p>
+        </p:txBody>
+      </p:sp>
+      <p:sp>
+        <p:nvSpPr>
+          <p:cNvPr id="41986" name="Content Placeholder 7"/>
+          <p:cNvSpPr>
+            <a:spLocks noGrp="1"/>
+          </p:cNvSpPr>
+          <p:nvPr>
+            <p:ph idx="1"/>
+          </p:nvPr>
+        </p:nvSpPr>
+        <p:spPr>
+          <a:xfrm>
+            <a:off x="575304" y="1371015"/>
+            <a:ext cx="8229600" cy="4895850"/>
+          </a:xfrm>
+        </p:spPr>
+        <p:txBody>
+          <a:bodyPr/>
+          <a:lstStyle/>
+          <a:p>
+            <a:r>
+              <a:rPr lang="en-US" altLang="x-none" dirty="0"/>
+              <a:t>Precision</a:t>
+            </a:r>
+          </a:p>
+          <a:p>
+            <a:pPr lvl="1"/>
+            <a:r>
+              <a:rPr lang="en-US" altLang="x-none" dirty="0"/>
+              <a:t>Numerical precision (in bits)</a:t>
+            </a:r>
+          </a:p>
+          <a:p>
+            <a:pPr lvl="2"/>
+            <a:r>
+              <a:rPr lang="en-US" altLang="x-none" dirty="0"/>
+              <a:t>For an instrument (ruler!) typically “half a tick” </a:t>
+            </a:r>
+          </a:p>
+          <a:p>
+            <a:pPr lvl="1"/>
+            <a:r>
+              <a:rPr lang="en-US" altLang="x-none" dirty="0"/>
+              <a:t>Can be evaluated using a higher </a:t>
+            </a:r>
+            <a:r>
+              <a:rPr lang="en-US" altLang="en-US" dirty="0"/>
+              <a:t>“</a:t>
+            </a:r>
+            <a:r>
+              <a:rPr lang="en-US" altLang="x-none" dirty="0"/>
+              <a:t>precision</a:t>
+            </a:r>
+            <a:r>
+              <a:rPr lang="en-US" altLang="en-US" dirty="0"/>
+              <a:t>”</a:t>
+            </a:r>
+            <a:endParaRPr lang="en-US" altLang="x-none" dirty="0"/>
+          </a:p>
+          <a:p>
+            <a:r>
+              <a:rPr lang="en-US" altLang="x-none" dirty="0"/>
+              <a:t>Accuracy</a:t>
+            </a:r>
+          </a:p>
+          <a:p>
+            <a:pPr lvl="1"/>
+            <a:r>
+              <a:rPr lang="en-US" altLang="x-none" dirty="0"/>
+              <a:t>The error w/r/t the truth</a:t>
+            </a:r>
+          </a:p>
+          <a:p>
+            <a:pPr lvl="1"/>
+            <a:r>
+              <a:rPr lang="en-US" altLang="x-none" dirty="0"/>
+              <a:t>Can be evaluated comparing different algorithms</a:t>
+            </a:r>
+          </a:p>
+          <a:p>
+            <a:pPr lvl="2"/>
+            <a:r>
+              <a:rPr lang="en-US" altLang="x-none" dirty="0"/>
+              <a:t>In science “comparing different experiments”</a:t>
+            </a:r>
+          </a:p>
+          <a:p>
+            <a:r>
+              <a:rPr lang="en-US" altLang="x-none" dirty="0"/>
+              <a:t>Target Accuracy</a:t>
+            </a:r>
+          </a:p>
+          <a:p>
+            <a:pPr lvl="1"/>
+            <a:r>
+              <a:rPr lang="en-US" altLang="x-none" dirty="0"/>
+              <a:t>The acceptable tolerance w/r/t the above</a:t>
+            </a:r>
+          </a:p>
+          <a:p>
+            <a:pPr lvl="1"/>
+            <a:r>
+              <a:rPr lang="en-US" altLang="x-none" dirty="0"/>
+              <a:t>Evaluated, for instance, w/r/t  know error on the truth </a:t>
+            </a:r>
+          </a:p>
+        </p:txBody>
+      </p:sp>
+      <p:sp>
+        <p:nvSpPr>
+          <p:cNvPr id="41987" name="Date Placeholder 3"/>
+          <p:cNvSpPr>
+            <a:spLocks noGrp="1"/>
+          </p:cNvSpPr>
+          <p:nvPr>
+            <p:ph type="dt" sz="quarter" idx="10"/>
+          </p:nvPr>
+        </p:nvSpPr>
+        <p:spPr>
+          <a:noFill/>
+          <a:ln/>
+          <a:extLst>
+            <a:ext uri="{909E8E84-426E-40DD-AFC4-6F175D3DCCD1}">
+              <a14:hiddenFill xmlns:a14="http://schemas.microsoft.com/office/drawing/2010/main">
+                <a:solidFill>
+                  <a:srgbClr val="FFFFFF"/>
+                </a:solidFill>
+              </a14:hiddenFill>
+            </a:ext>
+            <a:ext uri="{91240B29-F687-4F45-9708-019B960494DF}">
+              <a14:hiddenLine xmlns:a14="http://schemas.microsoft.com/office/drawing/2010/main" w="9525">
+                <a:solidFill>
+                  <a:srgbClr val="000000"/>
+                </a:solidFill>
+                <a:miter lim="800000"/>
+                <a:headEnd/>
+                <a:tailEnd/>
+              </a14:hiddenLine>
+            </a:ext>
+          </a:extLst>
+        </p:spPr>
+        <p:txBody>
+          <a:bodyPr/>
+          <a:lstStyle>
+            <a:lvl1pPr eaLnBrk="0" hangingPunct="0">
+              <a:defRPr sz="2400">
+                <a:solidFill>
+                  <a:schemeClr val="tx1"/>
+                </a:solidFill>
+                <a:latin typeface="Arial" charset="0"/>
+                <a:ea typeface="ＭＳ Ｐゴシック" charset="-128"/>
+              </a:defRPr>
+            </a:lvl1pPr>
+            <a:lvl2pPr marL="742950" indent="-285750" eaLnBrk="0" hangingPunct="0">
+              <a:defRPr sz="2400">
+                <a:solidFill>
+                  <a:schemeClr val="tx1"/>
+                </a:solidFill>
+                <a:latin typeface="Arial" charset="0"/>
+                <a:ea typeface="ＭＳ Ｐゴシック" charset="-128"/>
+              </a:defRPr>
+            </a:lvl2pPr>
+            <a:lvl3pPr marL="1143000" indent="-228600" eaLnBrk="0" hangingPunct="0">
+              <a:defRPr sz="2400">
+                <a:solidFill>
+                  <a:schemeClr val="tx1"/>
+                </a:solidFill>
+                <a:latin typeface="Arial" charset="0"/>
+                <a:ea typeface="ＭＳ Ｐゴシック" charset="-128"/>
+              </a:defRPr>
+            </a:lvl3pPr>
+            <a:lvl4pPr marL="1600200" indent="-228600" eaLnBrk="0" hangingPunct="0">
+              <a:defRPr sz="2400">
+                <a:solidFill>
+                  <a:schemeClr val="tx1"/>
+                </a:solidFill>
+                <a:latin typeface="Arial" charset="0"/>
+                <a:ea typeface="ＭＳ Ｐゴシック" charset="-128"/>
+              </a:defRPr>
+            </a:lvl4pPr>
+            <a:lvl5pPr marL="2057400" indent="-228600" eaLnBrk="0" hangingPunct="0">
+              <a:defRPr sz="2400">
+                <a:solidFill>
+                  <a:schemeClr val="tx1"/>
+                </a:solidFill>
+                <a:latin typeface="Arial" charset="0"/>
+                <a:ea typeface="ＭＳ Ｐゴシック" charset="-128"/>
+              </a:defRPr>
+            </a:lvl5pPr>
+            <a:lvl6pPr marL="2514600" indent="-228600" eaLnBrk="0" fontAlgn="base" hangingPunct="0">
+              <a:spcBef>
+                <a:spcPct val="0"/>
+              </a:spcBef>
+              <a:spcAft>
+                <a:spcPct val="0"/>
+              </a:spcAft>
+              <a:defRPr sz="2400">
+                <a:solidFill>
+                  <a:schemeClr val="tx1"/>
+                </a:solidFill>
+                <a:latin typeface="Arial" charset="0"/>
+                <a:ea typeface="ＭＳ Ｐゴシック" charset="-128"/>
+              </a:defRPr>
+            </a:lvl6pPr>
+            <a:lvl7pPr marL="2971800" indent="-228600" eaLnBrk="0" fontAlgn="base" hangingPunct="0">
+              <a:spcBef>
+                <a:spcPct val="0"/>
+              </a:spcBef>
+              <a:spcAft>
+                <a:spcPct val="0"/>
+              </a:spcAft>
+              <a:defRPr sz="2400">
+                <a:solidFill>
+                  <a:schemeClr val="tx1"/>
+                </a:solidFill>
+                <a:latin typeface="Arial" charset="0"/>
+                <a:ea typeface="ＭＳ Ｐゴシック" charset="-128"/>
+              </a:defRPr>
+            </a:lvl7pPr>
+            <a:lvl8pPr marL="3429000" indent="-228600" eaLnBrk="0" fontAlgn="base" hangingPunct="0">
+              <a:spcBef>
+                <a:spcPct val="0"/>
+              </a:spcBef>
+              <a:spcAft>
+                <a:spcPct val="0"/>
+              </a:spcAft>
+              <a:defRPr sz="2400">
+                <a:solidFill>
+                  <a:schemeClr val="tx1"/>
+                </a:solidFill>
+                <a:latin typeface="Arial" charset="0"/>
+                <a:ea typeface="ＭＳ Ｐゴシック" charset="-128"/>
+              </a:defRPr>
+            </a:lvl8pPr>
+            <a:lvl9pPr marL="3886200" indent="-228600" eaLnBrk="0" fontAlgn="base" hangingPunct="0">
+              <a:spcBef>
+                <a:spcPct val="0"/>
+              </a:spcBef>
+              <a:spcAft>
+                <a:spcPct val="0"/>
+              </a:spcAft>
+              <a:defRPr sz="2400">
+                <a:solidFill>
+                  <a:schemeClr val="tx1"/>
+                </a:solidFill>
+                <a:latin typeface="Arial" charset="0"/>
+                <a:ea typeface="ＭＳ Ｐゴシック" charset="-128"/>
+              </a:defRPr>
+            </a:lvl9pPr>
+          </a:lstStyle>
+          <a:p>
+            <a:pPr eaLnBrk="1" hangingPunct="1"/>
+            <a:r>
+              <a:rPr lang="en-US" altLang="x-none" sz="1200">
+                <a:latin typeface="Garamond" charset="0"/>
+              </a:rPr>
+              <a:t>22 October 2016</a:t>
+            </a:r>
+            <a:endParaRPr lang="it-IT" altLang="x-none" sz="1200">
+              <a:latin typeface="Garamond" charset="0"/>
+            </a:endParaRPr>
+          </a:p>
+        </p:txBody>
+      </p:sp>
+      <p:sp>
+        <p:nvSpPr>
+          <p:cNvPr id="41988" name="Footer Placeholder 4"/>
+          <p:cNvSpPr>
+            <a:spLocks noGrp="1"/>
+          </p:cNvSpPr>
+          <p:nvPr>
+            <p:ph type="ftr" sz="quarter" idx="11"/>
+          </p:nvPr>
+        </p:nvSpPr>
+        <p:spPr>
+          <a:noFill/>
+          <a:ln/>
+          <a:extLst>
+            <a:ext uri="{909E8E84-426E-40DD-AFC4-6F175D3DCCD1}">
+              <a14:hiddenFill xmlns:a14="http://schemas.microsoft.com/office/drawing/2010/main">
+                <a:solidFill>
+                  <a:srgbClr val="FFFFFF"/>
+                </a:solidFill>
+              </a14:hiddenFill>
+            </a:ext>
+            <a:ext uri="{91240B29-F687-4F45-9708-019B960494DF}">
+              <a14:hiddenLine xmlns:a14="http://schemas.microsoft.com/office/drawing/2010/main" w="9525">
+                <a:solidFill>
+                  <a:srgbClr val="000000"/>
+                </a:solidFill>
+                <a:miter lim="800000"/>
+                <a:headEnd/>
+                <a:tailEnd/>
+              </a14:hiddenLine>
+            </a:ext>
+          </a:extLst>
+        </p:spPr>
+        <p:txBody>
+          <a:bodyPr/>
+          <a:lstStyle>
+            <a:lvl1pPr eaLnBrk="0" hangingPunct="0">
+              <a:defRPr sz="2400">
+                <a:solidFill>
+                  <a:schemeClr val="tx1"/>
+                </a:solidFill>
+                <a:latin typeface="Arial" charset="0"/>
+                <a:ea typeface="ＭＳ Ｐゴシック" charset="-128"/>
+              </a:defRPr>
+            </a:lvl1pPr>
+            <a:lvl2pPr marL="742950" indent="-285750" eaLnBrk="0" hangingPunct="0">
+              <a:defRPr sz="2400">
+                <a:solidFill>
+                  <a:schemeClr val="tx1"/>
+                </a:solidFill>
+                <a:latin typeface="Arial" charset="0"/>
+                <a:ea typeface="ＭＳ Ｐゴシック" charset="-128"/>
+              </a:defRPr>
+            </a:lvl2pPr>
+            <a:lvl3pPr marL="1143000" indent="-228600" eaLnBrk="0" hangingPunct="0">
+              <a:defRPr sz="2400">
+                <a:solidFill>
+                  <a:schemeClr val="tx1"/>
+                </a:solidFill>
+                <a:latin typeface="Arial" charset="0"/>
+                <a:ea typeface="ＭＳ Ｐゴシック" charset="-128"/>
+              </a:defRPr>
+            </a:lvl3pPr>
+            <a:lvl4pPr marL="1600200" indent="-228600" eaLnBrk="0" hangingPunct="0">
+              <a:defRPr sz="2400">
+                <a:solidFill>
+                  <a:schemeClr val="tx1"/>
+                </a:solidFill>
+                <a:latin typeface="Arial" charset="0"/>
+                <a:ea typeface="ＭＳ Ｐゴシック" charset="-128"/>
+              </a:defRPr>
+            </a:lvl4pPr>
+            <a:lvl5pPr marL="2057400" indent="-228600" eaLnBrk="0" hangingPunct="0">
+              <a:defRPr sz="2400">
+                <a:solidFill>
+                  <a:schemeClr val="tx1"/>
+                </a:solidFill>
+                <a:latin typeface="Arial" charset="0"/>
+                <a:ea typeface="ＭＳ Ｐゴシック" charset="-128"/>
+              </a:defRPr>
+            </a:lvl5pPr>
+            <a:lvl6pPr marL="2514600" indent="-228600" eaLnBrk="0" fontAlgn="base" hangingPunct="0">
+              <a:spcBef>
+                <a:spcPct val="0"/>
+              </a:spcBef>
+              <a:spcAft>
+                <a:spcPct val="0"/>
+              </a:spcAft>
+              <a:defRPr sz="2400">
+                <a:solidFill>
+                  <a:schemeClr val="tx1"/>
+                </a:solidFill>
+                <a:latin typeface="Arial" charset="0"/>
+                <a:ea typeface="ＭＳ Ｐゴシック" charset="-128"/>
+              </a:defRPr>
+            </a:lvl6pPr>
+            <a:lvl7pPr marL="2971800" indent="-228600" eaLnBrk="0" fontAlgn="base" hangingPunct="0">
+              <a:spcBef>
+                <a:spcPct val="0"/>
+              </a:spcBef>
+              <a:spcAft>
+                <a:spcPct val="0"/>
+              </a:spcAft>
+              <a:defRPr sz="2400">
+                <a:solidFill>
+                  <a:schemeClr val="tx1"/>
+                </a:solidFill>
+                <a:latin typeface="Arial" charset="0"/>
+                <a:ea typeface="ＭＳ Ｐゴシック" charset="-128"/>
+              </a:defRPr>
+            </a:lvl7pPr>
+            <a:lvl8pPr marL="3429000" indent="-228600" eaLnBrk="0" fontAlgn="base" hangingPunct="0">
+              <a:spcBef>
+                <a:spcPct val="0"/>
+              </a:spcBef>
+              <a:spcAft>
+                <a:spcPct val="0"/>
+              </a:spcAft>
+              <a:defRPr sz="2400">
+                <a:solidFill>
+                  <a:schemeClr val="tx1"/>
+                </a:solidFill>
+                <a:latin typeface="Arial" charset="0"/>
+                <a:ea typeface="ＭＳ Ｐゴシック" charset="-128"/>
+              </a:defRPr>
+            </a:lvl8pPr>
+            <a:lvl9pPr marL="3886200" indent="-228600" eaLnBrk="0" fontAlgn="base" hangingPunct="0">
+              <a:spcBef>
+                <a:spcPct val="0"/>
+              </a:spcBef>
+              <a:spcAft>
+                <a:spcPct val="0"/>
+              </a:spcAft>
+              <a:defRPr sz="2400">
+                <a:solidFill>
+                  <a:schemeClr val="tx1"/>
+                </a:solidFill>
+                <a:latin typeface="Arial" charset="0"/>
+                <a:ea typeface="ＭＳ Ｐゴシック" charset="-128"/>
+              </a:defRPr>
+            </a:lvl9pPr>
+          </a:lstStyle>
+          <a:p>
+            <a:pPr eaLnBrk="1" hangingPunct="1"/>
+            <a:r>
+              <a:rPr lang="en-US" altLang="x-none" sz="1200">
+                <a:latin typeface="Garamond" charset="0"/>
+              </a:rPr>
+              <a:t>Vincenzo Innocente</a:t>
+            </a:r>
+            <a:endParaRPr lang="it-IT" altLang="x-none" sz="1200">
+              <a:latin typeface="Garamond" charset="0"/>
+            </a:endParaRPr>
+          </a:p>
+        </p:txBody>
+      </p:sp>
+      <p:sp>
+        <p:nvSpPr>
+          <p:cNvPr id="41989" name="Slide Number Placeholder 5"/>
+          <p:cNvSpPr>
+            <a:spLocks noGrp="1"/>
+          </p:cNvSpPr>
+          <p:nvPr>
+            <p:ph type="sldNum" sz="quarter" idx="12"/>
+          </p:nvPr>
+        </p:nvSpPr>
+        <p:spPr>
+          <a:noFill/>
+          <a:ln/>
+          <a:extLst>
+            <a:ext uri="{909E8E84-426E-40DD-AFC4-6F175D3DCCD1}">
+              <a14:hiddenFill xmlns:a14="http://schemas.microsoft.com/office/drawing/2010/main">
+                <a:solidFill>
+                  <a:srgbClr val="FFFFFF"/>
+                </a:solidFill>
+              </a14:hiddenFill>
+            </a:ext>
+            <a:ext uri="{91240B29-F687-4F45-9708-019B960494DF}">
+              <a14:hiddenLine xmlns:a14="http://schemas.microsoft.com/office/drawing/2010/main" w="9525">
+                <a:solidFill>
+                  <a:srgbClr val="000000"/>
+                </a:solidFill>
+                <a:miter lim="800000"/>
+                <a:headEnd/>
+                <a:tailEnd/>
+              </a14:hiddenLine>
+            </a:ext>
+          </a:extLst>
+        </p:spPr>
+        <p:txBody>
+          <a:bodyPr/>
+          <a:lstStyle>
+            <a:lvl1pPr eaLnBrk="0" hangingPunct="0">
+              <a:defRPr sz="2400">
+                <a:solidFill>
+                  <a:schemeClr val="tx1"/>
+                </a:solidFill>
+                <a:latin typeface="Arial" charset="0"/>
+                <a:ea typeface="ＭＳ Ｐゴシック" charset="-128"/>
+              </a:defRPr>
+            </a:lvl1pPr>
+            <a:lvl2pPr marL="742950" indent="-285750" eaLnBrk="0" hangingPunct="0">
+              <a:defRPr sz="2400">
+                <a:solidFill>
+                  <a:schemeClr val="tx1"/>
+                </a:solidFill>
+                <a:latin typeface="Arial" charset="0"/>
+                <a:ea typeface="ＭＳ Ｐゴシック" charset="-128"/>
+              </a:defRPr>
+            </a:lvl2pPr>
+            <a:lvl3pPr marL="1143000" indent="-228600" eaLnBrk="0" hangingPunct="0">
+              <a:defRPr sz="2400">
+                <a:solidFill>
+                  <a:schemeClr val="tx1"/>
+                </a:solidFill>
+                <a:latin typeface="Arial" charset="0"/>
+                <a:ea typeface="ＭＳ Ｐゴシック" charset="-128"/>
+              </a:defRPr>
+            </a:lvl3pPr>
+            <a:lvl4pPr marL="1600200" indent="-228600" eaLnBrk="0" hangingPunct="0">
+              <a:defRPr sz="2400">
+                <a:solidFill>
+                  <a:schemeClr val="tx1"/>
+                </a:solidFill>
+                <a:latin typeface="Arial" charset="0"/>
+                <a:ea typeface="ＭＳ Ｐゴシック" charset="-128"/>
+              </a:defRPr>
+            </a:lvl4pPr>
+            <a:lvl5pPr marL="2057400" indent="-228600" eaLnBrk="0" hangingPunct="0">
+              <a:defRPr sz="2400">
+                <a:solidFill>
+                  <a:schemeClr val="tx1"/>
+                </a:solidFill>
+                <a:latin typeface="Arial" charset="0"/>
+                <a:ea typeface="ＭＳ Ｐゴシック" charset="-128"/>
+              </a:defRPr>
+            </a:lvl5pPr>
+            <a:lvl6pPr marL="2514600" indent="-228600" eaLnBrk="0" fontAlgn="base" hangingPunct="0">
+              <a:spcBef>
+                <a:spcPct val="0"/>
+              </a:spcBef>
+              <a:spcAft>
+                <a:spcPct val="0"/>
+              </a:spcAft>
+              <a:defRPr sz="2400">
+                <a:solidFill>
+                  <a:schemeClr val="tx1"/>
+                </a:solidFill>
+                <a:latin typeface="Arial" charset="0"/>
+                <a:ea typeface="ＭＳ Ｐゴシック" charset="-128"/>
+              </a:defRPr>
+            </a:lvl6pPr>
+            <a:lvl7pPr marL="2971800" indent="-228600" eaLnBrk="0" fontAlgn="base" hangingPunct="0">
+              <a:spcBef>
+                <a:spcPct val="0"/>
+              </a:spcBef>
+              <a:spcAft>
+                <a:spcPct val="0"/>
+              </a:spcAft>
+              <a:defRPr sz="2400">
+                <a:solidFill>
+                  <a:schemeClr val="tx1"/>
+                </a:solidFill>
+                <a:latin typeface="Arial" charset="0"/>
+                <a:ea typeface="ＭＳ Ｐゴシック" charset="-128"/>
+              </a:defRPr>
+            </a:lvl7pPr>
+            <a:lvl8pPr marL="3429000" indent="-228600" eaLnBrk="0" fontAlgn="base" hangingPunct="0">
+              <a:spcBef>
+                <a:spcPct val="0"/>
+              </a:spcBef>
+              <a:spcAft>
+                <a:spcPct val="0"/>
+              </a:spcAft>
+              <a:defRPr sz="2400">
+                <a:solidFill>
+                  <a:schemeClr val="tx1"/>
+                </a:solidFill>
+                <a:latin typeface="Arial" charset="0"/>
+                <a:ea typeface="ＭＳ Ｐゴシック" charset="-128"/>
+              </a:defRPr>
+            </a:lvl8pPr>
+            <a:lvl9pPr marL="3886200" indent="-228600" eaLnBrk="0" fontAlgn="base" hangingPunct="0">
+              <a:spcBef>
+                <a:spcPct val="0"/>
+              </a:spcBef>
+              <a:spcAft>
+                <a:spcPct val="0"/>
+              </a:spcAft>
+              <a:defRPr sz="2400">
+                <a:solidFill>
+                  <a:schemeClr val="tx1"/>
+                </a:solidFill>
+                <a:latin typeface="Arial" charset="0"/>
+                <a:ea typeface="ＭＳ Ｐゴシック" charset="-128"/>
+              </a:defRPr>
+            </a:lvl9pPr>
+          </a:lstStyle>
+          <a:p>
+            <a:pPr eaLnBrk="1" hangingPunct="1"/>
+            <a:fld id="{AEDF44EA-EC42-6D42-8111-94D13066666A}" type="slidenum">
+              <a:rPr lang="it-IT" altLang="x-none" sz="1200">
+                <a:latin typeface="Garamond" charset="0"/>
+              </a:rPr>
+              <a:pPr eaLnBrk="1" hangingPunct="1"/>
+              <a:t>39</a:t>
+            </a:fld>
+            <a:endParaRPr lang="it-IT" altLang="x-none" sz="1200">
+              <a:latin typeface="Garamond" charset="0"/>
+            </a:endParaRPr>
+          </a:p>
+        </p:txBody>
+      </p:sp>
+    </p:spTree>
   </p:cSld>
   <p:clrMapOvr>
     <a:masterClrMapping/>

--- a/Slides/FPforScientist.pptx
+++ b/Slides/FPforScientist.pptx
@@ -31,25 +31,27 @@
     <p:sldId id="466" r:id="rId25"/>
     <p:sldId id="467" r:id="rId26"/>
     <p:sldId id="469" r:id="rId27"/>
-    <p:sldId id="470" r:id="rId28"/>
-    <p:sldId id="480" r:id="rId29"/>
-    <p:sldId id="471" r:id="rId30"/>
-    <p:sldId id="474" r:id="rId31"/>
-    <p:sldId id="473" r:id="rId32"/>
-    <p:sldId id="475" r:id="rId33"/>
-    <p:sldId id="472" r:id="rId34"/>
-    <p:sldId id="476" r:id="rId35"/>
-    <p:sldId id="477" r:id="rId36"/>
-    <p:sldId id="478" r:id="rId37"/>
-    <p:sldId id="479" r:id="rId38"/>
-    <p:sldId id="381" r:id="rId39"/>
-    <p:sldId id="396" r:id="rId40"/>
-    <p:sldId id="444" r:id="rId41"/>
-    <p:sldId id="397" r:id="rId42"/>
-    <p:sldId id="341" r:id="rId43"/>
-    <p:sldId id="413" r:id="rId44"/>
-    <p:sldId id="481" r:id="rId45"/>
-    <p:sldId id="365" r:id="rId46"/>
+    <p:sldId id="482" r:id="rId28"/>
+    <p:sldId id="276" r:id="rId29"/>
+    <p:sldId id="470" r:id="rId30"/>
+    <p:sldId id="480" r:id="rId31"/>
+    <p:sldId id="471" r:id="rId32"/>
+    <p:sldId id="474" r:id="rId33"/>
+    <p:sldId id="473" r:id="rId34"/>
+    <p:sldId id="475" r:id="rId35"/>
+    <p:sldId id="472" r:id="rId36"/>
+    <p:sldId id="476" r:id="rId37"/>
+    <p:sldId id="477" r:id="rId38"/>
+    <p:sldId id="478" r:id="rId39"/>
+    <p:sldId id="479" r:id="rId40"/>
+    <p:sldId id="381" r:id="rId41"/>
+    <p:sldId id="396" r:id="rId42"/>
+    <p:sldId id="444" r:id="rId43"/>
+    <p:sldId id="397" r:id="rId44"/>
+    <p:sldId id="341" r:id="rId45"/>
+    <p:sldId id="413" r:id="rId46"/>
+    <p:sldId id="481" r:id="rId47"/>
+    <p:sldId id="365" r:id="rId48"/>
   </p:sldIdLst>
   <p:sldSz cx="12192000" cy="6858000"/>
   <p:notesSz cx="6858000" cy="9144000"/>
@@ -11207,6 +11209,607 @@
           <p:cNvPr id="2" name="Title 1">
             <a:extLst>
               <a:ext uri="{FF2B5EF4-FFF2-40B4-BE49-F238E27FC236}">
+                <a16:creationId xmlns:a16="http://schemas.microsoft.com/office/drawing/2014/main" id="{C6FA2A27-8BC3-D8E6-E35B-0D725A86A379}"/>
+              </a:ext>
+            </a:extLst>
+          </p:cNvPr>
+          <p:cNvSpPr>
+            <a:spLocks noGrp="1"/>
+          </p:cNvSpPr>
+          <p:nvPr>
+            <p:ph type="title"/>
+          </p:nvPr>
+        </p:nvSpPr>
+        <p:spPr/>
+        <p:txBody>
+          <a:bodyPr>
+            <a:normAutofit/>
+          </a:bodyPr>
+          <a:lstStyle/>
+          <a:p>
+            <a:r>
+              <a:rPr lang="en-US" dirty="0"/>
+              <a:t>Uniform vs canonical</a:t>
+            </a:r>
+            <a:br>
+              <a:rPr lang="en-US" dirty="0"/>
+            </a:br>
+            <a:r>
+              <a:rPr lang="en-US" sz="2200" dirty="0"/>
+              <a:t>(for a detailed discussion see among others</a:t>
+            </a:r>
+            <a:br>
+              <a:rPr lang="en-US" sz="2200" dirty="0"/>
+            </a:br>
+            <a:r>
+              <a:rPr lang="en-US" sz="2200" dirty="0">
+                <a:hlinkClick r:id="rId2"/>
+              </a:rPr>
+              <a:t>https://github.com/DiscreteLogarithm/canonical-random-float/tree/master</a:t>
+            </a:r>
+            <a:r>
+              <a:rPr lang="en-US" sz="2200" dirty="0"/>
+              <a:t>)</a:t>
+            </a:r>
+            <a:endParaRPr lang="en-US" dirty="0"/>
+          </a:p>
+        </p:txBody>
+      </p:sp>
+      <p:sp>
+        <p:nvSpPr>
+          <p:cNvPr id="3" name="Content Placeholder 2">
+            <a:extLst>
+              <a:ext uri="{FF2B5EF4-FFF2-40B4-BE49-F238E27FC236}">
+                <a16:creationId xmlns:a16="http://schemas.microsoft.com/office/drawing/2014/main" id="{388EBA84-CCDB-3151-928F-7A00CCB87DA4}"/>
+              </a:ext>
+            </a:extLst>
+          </p:cNvPr>
+          <p:cNvSpPr>
+            <a:spLocks noGrp="1"/>
+          </p:cNvSpPr>
+          <p:nvPr>
+            <p:ph idx="1"/>
+          </p:nvPr>
+        </p:nvSpPr>
+        <p:spPr>
+          <a:xfrm>
+            <a:off x="838199" y="1825625"/>
+            <a:ext cx="10851037" cy="4667250"/>
+          </a:xfrm>
+        </p:spPr>
+        <p:txBody>
+          <a:bodyPr>
+            <a:normAutofit fontScale="92500" lnSpcReduction="10000"/>
+          </a:bodyPr>
+          <a:lstStyle/>
+          <a:p>
+            <a:pPr marL="0" indent="0">
+              <a:buNone/>
+            </a:pPr>
+            <a:r>
+              <a:rPr lang="en-US" u="sng" dirty="0"/>
+              <a:t>Uniform in range [</a:t>
+            </a:r>
+            <a:r>
+              <a:rPr lang="en-US" u="sng" dirty="0" err="1"/>
+              <a:t>a,b</a:t>
+            </a:r>
+            <a:r>
+              <a:rPr lang="en-US" u="sng" dirty="0"/>
+              <a:t>)</a:t>
+            </a:r>
+          </a:p>
+          <a:p>
+            <a:r>
+              <a:rPr lang="en-US" dirty="0"/>
+              <a:t>Throw 32 coins: interpret as a positive integer N</a:t>
+            </a:r>
+          </a:p>
+          <a:p>
+            <a:r>
+              <a:rPr lang="en-US" dirty="0"/>
+              <a:t>Compute r = float(N)/float(2</a:t>
+            </a:r>
+            <a:r>
+              <a:rPr lang="en-US" baseline="30000" dirty="0"/>
+              <a:t>32</a:t>
+            </a:r>
+            <a:r>
+              <a:rPr lang="en-US" dirty="0"/>
+              <a:t>)*(b-a) –a</a:t>
+            </a:r>
+          </a:p>
+          <a:p>
+            <a:pPr marL="0" indent="0">
+              <a:buNone/>
+            </a:pPr>
+            <a:endParaRPr lang="en-US" baseline="30000" dirty="0"/>
+          </a:p>
+          <a:p>
+            <a:pPr marL="0" indent="0">
+              <a:buNone/>
+            </a:pPr>
+            <a:r>
+              <a:rPr lang="en-US" u="sng" dirty="0"/>
+              <a:t>Canonical</a:t>
+            </a:r>
+          </a:p>
+          <a:p>
+            <a:r>
+              <a:rPr lang="en-US" dirty="0"/>
+              <a:t>Throw 23 coins: set significand of r to them</a:t>
+            </a:r>
+          </a:p>
+          <a:p>
+            <a:r>
+              <a:rPr lang="en-US" dirty="0"/>
+              <a:t>Throw one more coin: if 1 set exponent of r to -1: uniform in [0.5,1)</a:t>
+            </a:r>
+          </a:p>
+          <a:p>
+            <a:pPr lvl="1"/>
+            <a:r>
+              <a:rPr lang="en-US" dirty="0"/>
+              <a:t>If 0 :Throw one more coin: if 1 set exponent of r to -2: uniform in [0.25,0.5)</a:t>
+            </a:r>
+          </a:p>
+          <a:p>
+            <a:pPr lvl="2"/>
+            <a:r>
+              <a:rPr lang="en-US" dirty="0"/>
+              <a:t>If 0:  Throw one more coin: if 1 set exponent of r to -3: uniform in [0.125,0.25)</a:t>
+            </a:r>
+          </a:p>
+          <a:p>
+            <a:pPr lvl="3"/>
+            <a:r>
+              <a:rPr lang="en-US" dirty="0"/>
+              <a:t>If 0:  Throw one more coin: if 1 set exponent of r to -4: uniform in [0.0625,0.125)</a:t>
+            </a:r>
+          </a:p>
+          <a:p>
+            <a:pPr lvl="4"/>
+            <a:r>
+              <a:rPr lang="en-US" dirty="0"/>
+              <a:t>If 0: ….	</a:t>
+            </a:r>
+          </a:p>
+          <a:p>
+            <a:r>
+              <a:rPr lang="en-US" dirty="0"/>
+              <a:t>If symmetric interval around 0 use last coin to choose sign</a:t>
+            </a:r>
+          </a:p>
+          <a:p>
+            <a:pPr lvl="1"/>
+            <a:endParaRPr lang="en-US" dirty="0"/>
+          </a:p>
+        </p:txBody>
+      </p:sp>
+    </p:spTree>
+    <p:extLst>
+      <p:ext uri="{BB962C8B-B14F-4D97-AF65-F5344CB8AC3E}">
+        <p14:creationId xmlns:p14="http://schemas.microsoft.com/office/powerpoint/2010/main" val="3922543829"/>
+      </p:ext>
+    </p:extLst>
+  </p:cSld>
+  <p:clrMapOvr>
+    <a:masterClrMapping/>
+  </p:clrMapOvr>
+</p:sld>
+</file>
+
+<file path=ppt/slides/slide28.xml><?xml version="1.0" encoding="utf-8"?>
+<p:sld xmlns:a="http://schemas.openxmlformats.org/drawingml/2006/main" xmlns:r="http://schemas.openxmlformats.org/officeDocument/2006/relationships" xmlns:p="http://schemas.openxmlformats.org/presentationml/2006/main">
+  <p:cSld>
+    <p:spTree>
+      <p:nvGrpSpPr>
+        <p:cNvPr id="1" name=""/>
+        <p:cNvGrpSpPr/>
+        <p:nvPr/>
+      </p:nvGrpSpPr>
+      <p:grpSpPr>
+        <a:xfrm>
+          <a:off x="0" y="0"/>
+          <a:ext cx="0" cy="0"/>
+          <a:chOff x="0" y="0"/>
+          <a:chExt cx="0" cy="0"/>
+        </a:xfrm>
+      </p:grpSpPr>
+      <p:sp>
+        <p:nvSpPr>
+          <p:cNvPr id="4" name="Title 3">
+            <a:extLst>
+              <a:ext uri="{FF2B5EF4-FFF2-40B4-BE49-F238E27FC236}">
+                <a16:creationId xmlns:a16="http://schemas.microsoft.com/office/drawing/2014/main" id="{A4690117-F887-E4E1-FE6A-411EDB8C6377}"/>
+              </a:ext>
+            </a:extLst>
+          </p:cNvPr>
+          <p:cNvSpPr>
+            <a:spLocks noGrp="1"/>
+          </p:cNvSpPr>
+          <p:nvPr>
+            <p:ph type="title"/>
+          </p:nvPr>
+        </p:nvSpPr>
+        <p:spPr>
+          <a:xfrm>
+            <a:off x="304800" y="349372"/>
+            <a:ext cx="10515600" cy="1515153"/>
+          </a:xfrm>
+        </p:spPr>
+        <p:txBody>
+          <a:bodyPr>
+            <a:normAutofit/>
+          </a:bodyPr>
+          <a:lstStyle/>
+          <a:p>
+            <a:r>
+              <a:rPr lang="en-US" dirty="0"/>
+              <a:t> Gaussian Tail</a:t>
+            </a:r>
+          </a:p>
+        </p:txBody>
+      </p:sp>
+      <p:sp>
+        <p:nvSpPr>
+          <p:cNvPr id="2" name="Content Placeholder 1">
+            <a:extLst>
+              <a:ext uri="{FF2B5EF4-FFF2-40B4-BE49-F238E27FC236}">
+                <a16:creationId xmlns:a16="http://schemas.microsoft.com/office/drawing/2014/main" id="{2DCF096E-5ACB-4EFC-C309-58C23DF222D0}"/>
+              </a:ext>
+            </a:extLst>
+          </p:cNvPr>
+          <p:cNvSpPr>
+            <a:spLocks noGrp="1"/>
+          </p:cNvSpPr>
+          <p:nvPr>
+            <p:ph idx="1"/>
+          </p:nvPr>
+        </p:nvSpPr>
+        <p:spPr>
+          <a:xfrm>
+            <a:off x="3767628" y="497991"/>
+            <a:ext cx="7630275" cy="1325562"/>
+          </a:xfrm>
+        </p:spPr>
+        <p:txBody>
+          <a:bodyPr>
+            <a:normAutofit fontScale="85000" lnSpcReduction="20000"/>
+          </a:bodyPr>
+          <a:lstStyle/>
+          <a:p>
+            <a:r>
+              <a:rPr lang="en-US" dirty="0"/>
+              <a:t>Generated 256*10</a:t>
+            </a:r>
+            <a:r>
+              <a:rPr lang="en-US" baseline="30000" dirty="0"/>
+              <a:t>9 </a:t>
+            </a:r>
+            <a:r>
+              <a:rPr lang="en-US" dirty="0"/>
+              <a:t>Normal distributed using Box-Muller</a:t>
+            </a:r>
+            <a:endParaRPr lang="en-US" baseline="30000" dirty="0"/>
+          </a:p>
+          <a:p>
+            <a:pPr marL="0" indent="0">
+              <a:buNone/>
+            </a:pPr>
+            <a:endParaRPr lang="en-US" baseline="30000" dirty="0"/>
+          </a:p>
+          <a:p>
+            <a:r>
+              <a:rPr lang="en-US" baseline="30000" dirty="0">
+                <a:solidFill>
+                  <a:srgbClr val="FF0000"/>
+                </a:solidFill>
+              </a:rPr>
+              <a:t>Mix: 23 bits for U2, 41 bits for U1 </a:t>
+            </a:r>
+          </a:p>
+          <a:p>
+            <a:r>
+              <a:rPr lang="en-US" baseline="30000" dirty="0">
+                <a:solidFill>
+                  <a:srgbClr val="7030A0"/>
+                </a:solidFill>
+              </a:rPr>
+              <a:t>Lux: all-possible floats for both</a:t>
+            </a:r>
+          </a:p>
+        </p:txBody>
+      </p:sp>
+      <p:pic>
+        <p:nvPicPr>
+          <p:cNvPr id="1026" name="Picture 2">
+            <a:extLst>
+              <a:ext uri="{FF2B5EF4-FFF2-40B4-BE49-F238E27FC236}">
+                <a16:creationId xmlns:a16="http://schemas.microsoft.com/office/drawing/2014/main" id="{A389EE30-8AD0-5E32-BF70-8C3EE90C6716}"/>
+              </a:ext>
+            </a:extLst>
+          </p:cNvPr>
+          <p:cNvPicPr>
+            <a:picLocks noChangeAspect="1" noChangeArrowheads="1"/>
+          </p:cNvPicPr>
+          <p:nvPr/>
+        </p:nvPicPr>
+        <p:blipFill>
+          <a:blip r:embed="rId2">
+            <a:extLst>
+              <a:ext uri="{28A0092B-C50C-407E-A947-70E740481C1C}">
+                <a14:useLocalDpi xmlns:a14="http://schemas.microsoft.com/office/drawing/2010/main" val="0"/>
+              </a:ext>
+            </a:extLst>
+          </a:blip>
+          <a:srcRect/>
+          <a:stretch>
+            <a:fillRect/>
+          </a:stretch>
+        </p:blipFill>
+        <p:spPr bwMode="auto">
+          <a:xfrm>
+            <a:off x="606252" y="1864525"/>
+            <a:ext cx="10502900" cy="4610100"/>
+          </a:xfrm>
+          <a:prstGeom prst="rect">
+            <a:avLst/>
+          </a:prstGeom>
+          <a:noFill/>
+          <a:extLst>
+            <a:ext uri="{909E8E84-426E-40DD-AFC4-6F175D3DCCD1}">
+              <a14:hiddenFill xmlns:a14="http://schemas.microsoft.com/office/drawing/2010/main">
+                <a:solidFill>
+                  <a:srgbClr val="FFFFFF"/>
+                </a:solidFill>
+              </a14:hiddenFill>
+            </a:ext>
+          </a:extLst>
+        </p:spPr>
+      </p:pic>
+      <p:pic>
+        <p:nvPicPr>
+          <p:cNvPr id="3" name="Picture 2">
+            <a:extLst>
+              <a:ext uri="{FF2B5EF4-FFF2-40B4-BE49-F238E27FC236}">
+                <a16:creationId xmlns:a16="http://schemas.microsoft.com/office/drawing/2014/main" id="{91A93714-3098-EE65-A716-4C94B850ED53}"/>
+              </a:ext>
+            </a:extLst>
+          </p:cNvPr>
+          <p:cNvPicPr>
+            <a:picLocks noChangeAspect="1"/>
+          </p:cNvPicPr>
+          <p:nvPr/>
+        </p:nvPicPr>
+        <p:blipFill>
+          <a:blip r:embed="rId3"/>
+          <a:stretch>
+            <a:fillRect/>
+          </a:stretch>
+        </p:blipFill>
+        <p:spPr>
+          <a:xfrm>
+            <a:off x="4981934" y="2770960"/>
+            <a:ext cx="5838466" cy="1620287"/>
+          </a:xfrm>
+          <a:prstGeom prst="rect">
+            <a:avLst/>
+          </a:prstGeom>
+        </p:spPr>
+      </p:pic>
+      <p:sp>
+        <p:nvSpPr>
+          <p:cNvPr id="5" name="TextBox 4">
+            <a:extLst>
+              <a:ext uri="{FF2B5EF4-FFF2-40B4-BE49-F238E27FC236}">
+                <a16:creationId xmlns:a16="http://schemas.microsoft.com/office/drawing/2014/main" id="{B57850CB-9387-7EF8-62D7-531BD0082637}"/>
+              </a:ext>
+            </a:extLst>
+          </p:cNvPr>
+          <p:cNvSpPr txBox="1"/>
+          <p:nvPr/>
+        </p:nvSpPr>
+        <p:spPr>
+          <a:xfrm>
+            <a:off x="5562600" y="2349754"/>
+            <a:ext cx="2861874" cy="461665"/>
+          </a:xfrm>
+          <a:prstGeom prst="rect">
+            <a:avLst/>
+          </a:prstGeom>
+          <a:noFill/>
+        </p:spPr>
+        <p:txBody>
+          <a:bodyPr wrap="none" rtlCol="0">
+            <a:spAutoFit/>
+          </a:bodyPr>
+          <a:lstStyle/>
+          <a:p>
+            <a:r>
+              <a:rPr lang="en-US" sz="2400" dirty="0"/>
+              <a:t>Box-Muller Algorithm</a:t>
+            </a:r>
+          </a:p>
+        </p:txBody>
+      </p:sp>
+      <p:sp>
+        <p:nvSpPr>
+          <p:cNvPr id="7" name="TextBox 6">
+            <a:extLst>
+              <a:ext uri="{FF2B5EF4-FFF2-40B4-BE49-F238E27FC236}">
+                <a16:creationId xmlns:a16="http://schemas.microsoft.com/office/drawing/2014/main" id="{B55A6DC3-61D8-A584-FC6E-3B5A7EC540A4}"/>
+              </a:ext>
+            </a:extLst>
+          </p:cNvPr>
+          <p:cNvSpPr txBox="1"/>
+          <p:nvPr/>
+        </p:nvSpPr>
+        <p:spPr>
+          <a:xfrm>
+            <a:off x="3348370" y="5561930"/>
+            <a:ext cx="2192965" cy="369332"/>
+          </a:xfrm>
+          <a:prstGeom prst="rect">
+            <a:avLst/>
+          </a:prstGeom>
+          <a:noFill/>
+        </p:spPr>
+        <p:txBody>
+          <a:bodyPr wrap="square">
+            <a:spAutoFit/>
+          </a:bodyPr>
+          <a:lstStyle/>
+          <a:p>
+            <a:r>
+              <a:rPr lang="en-US" dirty="0">
+                <a:solidFill>
+                  <a:srgbClr val="00B050"/>
+                </a:solidFill>
+              </a:rPr>
+              <a:t>sqrt(-2log(2</a:t>
+            </a:r>
+            <a:r>
+              <a:rPr lang="en-US" baseline="30000" dirty="0">
+                <a:solidFill>
+                  <a:srgbClr val="00B050"/>
+                </a:solidFill>
+              </a:rPr>
+              <a:t>-32</a:t>
+            </a:r>
+            <a:r>
+              <a:rPr lang="en-US" dirty="0">
+                <a:solidFill>
+                  <a:srgbClr val="00B050"/>
+                </a:solidFill>
+              </a:rPr>
+              <a:t>)) ~ 6.6 </a:t>
+            </a:r>
+          </a:p>
+        </p:txBody>
+      </p:sp>
+      <p:sp>
+        <p:nvSpPr>
+          <p:cNvPr id="8" name="TextBox 7">
+            <a:extLst>
+              <a:ext uri="{FF2B5EF4-FFF2-40B4-BE49-F238E27FC236}">
+                <a16:creationId xmlns:a16="http://schemas.microsoft.com/office/drawing/2014/main" id="{DA106C92-051F-1885-3A01-0D0826C5B579}"/>
+              </a:ext>
+            </a:extLst>
+          </p:cNvPr>
+          <p:cNvSpPr txBox="1"/>
+          <p:nvPr/>
+        </p:nvSpPr>
+        <p:spPr>
+          <a:xfrm>
+            <a:off x="4242391" y="3189767"/>
+            <a:ext cx="212651" cy="574159"/>
+          </a:xfrm>
+          <a:prstGeom prst="rect">
+            <a:avLst/>
+          </a:prstGeom>
+          <a:noFill/>
+        </p:spPr>
+        <p:txBody>
+          <a:bodyPr wrap="square" rtlCol="0">
+            <a:spAutoFit/>
+          </a:bodyPr>
+          <a:lstStyle/>
+          <a:p>
+            <a:endParaRPr lang="en-US" dirty="0"/>
+          </a:p>
+        </p:txBody>
+      </p:sp>
+      <p:sp>
+        <p:nvSpPr>
+          <p:cNvPr id="10" name="TextBox 9">
+            <a:extLst>
+              <a:ext uri="{FF2B5EF4-FFF2-40B4-BE49-F238E27FC236}">
+                <a16:creationId xmlns:a16="http://schemas.microsoft.com/office/drawing/2014/main" id="{C7989CB7-7507-EAB2-FB48-25D5A0CE8A2C}"/>
+              </a:ext>
+            </a:extLst>
+          </p:cNvPr>
+          <p:cNvSpPr txBox="1"/>
+          <p:nvPr/>
+        </p:nvSpPr>
+        <p:spPr>
+          <a:xfrm>
+            <a:off x="1612584" y="4478262"/>
+            <a:ext cx="2346430" cy="369332"/>
+          </a:xfrm>
+          <a:prstGeom prst="rect">
+            <a:avLst/>
+          </a:prstGeom>
+          <a:noFill/>
+        </p:spPr>
+        <p:txBody>
+          <a:bodyPr wrap="square">
+            <a:spAutoFit/>
+          </a:bodyPr>
+          <a:lstStyle/>
+          <a:p>
+            <a:r>
+              <a:rPr lang="en-US" dirty="0">
+                <a:solidFill>
+                  <a:srgbClr val="FFC000"/>
+                </a:solidFill>
+              </a:rPr>
+              <a:t>sqrt(-2log(2</a:t>
+            </a:r>
+            <a:r>
+              <a:rPr lang="en-US" baseline="30000" dirty="0">
+                <a:solidFill>
+                  <a:srgbClr val="FFC000"/>
+                </a:solidFill>
+              </a:rPr>
+              <a:t>-23</a:t>
+            </a:r>
+            <a:r>
+              <a:rPr lang="en-US" dirty="0">
+                <a:solidFill>
+                  <a:srgbClr val="FFC000"/>
+                </a:solidFill>
+              </a:rPr>
+              <a:t>)) ~ 5.6 </a:t>
+            </a:r>
+          </a:p>
+        </p:txBody>
+      </p:sp>
+    </p:spTree>
+    <p:extLst>
+      <p:ext uri="{BB962C8B-B14F-4D97-AF65-F5344CB8AC3E}">
+        <p14:creationId xmlns:p14="http://schemas.microsoft.com/office/powerpoint/2010/main" val="2443064533"/>
+      </p:ext>
+    </p:extLst>
+  </p:cSld>
+  <p:clrMapOvr>
+    <a:masterClrMapping/>
+  </p:clrMapOvr>
+</p:sld>
+</file>
+
+<file path=ppt/slides/slide29.xml><?xml version="1.0" encoding="utf-8"?>
+<p:sld xmlns:a="http://schemas.openxmlformats.org/drawingml/2006/main" xmlns:r="http://schemas.openxmlformats.org/officeDocument/2006/relationships" xmlns:p="http://schemas.openxmlformats.org/presentationml/2006/main">
+  <p:cSld>
+    <p:spTree>
+      <p:nvGrpSpPr>
+        <p:cNvPr id="1" name=""/>
+        <p:cNvGrpSpPr/>
+        <p:nvPr/>
+      </p:nvGrpSpPr>
+      <p:grpSpPr>
+        <a:xfrm>
+          <a:off x="0" y="0"/>
+          <a:ext cx="0" cy="0"/>
+          <a:chOff x="0" y="0"/>
+          <a:chExt cx="0" cy="0"/>
+        </a:xfrm>
+      </p:grpSpPr>
+      <p:sp>
+        <p:nvSpPr>
+          <p:cNvPr id="2" name="Title 1">
+            <a:extLst>
+              <a:ext uri="{FF2B5EF4-FFF2-40B4-BE49-F238E27FC236}">
                 <a16:creationId xmlns:a16="http://schemas.microsoft.com/office/drawing/2014/main" id="{5B8A59C7-A3CA-91DB-D251-2D35BFC1E1B4}"/>
               </a:ext>
             </a:extLst>
@@ -11364,7 +11967,437 @@
 </p:sld>
 </file>
 
-<file path=ppt/slides/slide28.xml><?xml version="1.0" encoding="utf-8"?>
+<file path=ppt/slides/slide3.xml><?xml version="1.0" encoding="utf-8"?>
+<p:sld xmlns:a="http://schemas.openxmlformats.org/drawingml/2006/main" xmlns:r="http://schemas.openxmlformats.org/officeDocument/2006/relationships" xmlns:p="http://schemas.openxmlformats.org/presentationml/2006/main">
+  <p:cSld>
+    <p:spTree>
+      <p:nvGrpSpPr>
+        <p:cNvPr id="1" name=""/>
+        <p:cNvGrpSpPr/>
+        <p:nvPr/>
+      </p:nvGrpSpPr>
+      <p:grpSpPr>
+        <a:xfrm>
+          <a:off x="0" y="0"/>
+          <a:ext cx="0" cy="0"/>
+          <a:chOff x="0" y="0"/>
+          <a:chExt cx="0" cy="0"/>
+        </a:xfrm>
+      </p:grpSpPr>
+      <p:sp>
+        <p:nvSpPr>
+          <p:cNvPr id="2" name="Title 1">
+            <a:extLst>
+              <a:ext uri="{FF2B5EF4-FFF2-40B4-BE49-F238E27FC236}">
+                <a16:creationId xmlns:a16="http://schemas.microsoft.com/office/drawing/2014/main" id="{AD30F8CC-3C21-4921-6714-6705D02DF9EA}"/>
+              </a:ext>
+            </a:extLst>
+          </p:cNvPr>
+          <p:cNvSpPr>
+            <a:spLocks noGrp="1"/>
+          </p:cNvSpPr>
+          <p:nvPr>
+            <p:ph type="title"/>
+          </p:nvPr>
+        </p:nvSpPr>
+        <p:spPr/>
+        <p:txBody>
+          <a:bodyPr/>
+          <a:lstStyle/>
+          <a:p>
+            <a:r>
+              <a:rPr lang="en-US"/>
+              <a:t>Some Trivial properties of FP</a:t>
+            </a:r>
+          </a:p>
+        </p:txBody>
+      </p:sp>
+      <p:sp>
+        <p:nvSpPr>
+          <p:cNvPr id="3" name="Content Placeholder 2">
+            <a:extLst>
+              <a:ext uri="{FF2B5EF4-FFF2-40B4-BE49-F238E27FC236}">
+                <a16:creationId xmlns:a16="http://schemas.microsoft.com/office/drawing/2014/main" id="{B8EFCA01-9C0D-C660-E004-78866BE1C22E}"/>
+              </a:ext>
+            </a:extLst>
+          </p:cNvPr>
+          <p:cNvSpPr>
+            <a:spLocks noGrp="1"/>
+          </p:cNvSpPr>
+          <p:nvPr>
+            <p:ph idx="1"/>
+          </p:nvPr>
+        </p:nvSpPr>
+        <p:spPr/>
+        <p:txBody>
+          <a:bodyPr/>
+          <a:lstStyle/>
+          <a:p>
+            <a:r>
+              <a:rPr lang="en-US" dirty="0"/>
+              <a:t>Each FP has a previous and a next</a:t>
+            </a:r>
+          </a:p>
+          <a:p>
+            <a:pPr lvl="1"/>
+            <a:r>
+              <a:rPr lang="en-US" dirty="0"/>
+              <a:t>Previous of 31ᐧ10</a:t>
+            </a:r>
+            <a:r>
+              <a:rPr lang="en-US" baseline="30000" dirty="0"/>
+              <a:t>-1 </a:t>
+            </a:r>
+            <a:r>
+              <a:rPr lang="en-US" dirty="0"/>
+              <a:t>is</a:t>
+            </a:r>
+            <a:r>
+              <a:rPr lang="en-US" baseline="30000" dirty="0"/>
+              <a:t> </a:t>
+            </a:r>
+            <a:r>
+              <a:rPr lang="en-US" dirty="0"/>
+              <a:t>30ᐧ10</a:t>
+            </a:r>
+            <a:r>
+              <a:rPr lang="en-US" baseline="30000" dirty="0"/>
+              <a:t>-1</a:t>
+            </a:r>
+            <a:r>
+              <a:rPr lang="en-US" dirty="0"/>
+              <a:t>, next is 32ᐧ10</a:t>
+            </a:r>
+            <a:r>
+              <a:rPr lang="en-US" baseline="30000" dirty="0"/>
+              <a:t>-1</a:t>
+            </a:r>
+          </a:p>
+          <a:p>
+            <a:pPr lvl="1"/>
+            <a:r>
+              <a:rPr lang="en-US" dirty="0"/>
+              <a:t>Previous of </a:t>
+            </a:r>
+            <a:r>
+              <a:rPr lang="cs-CZ" altLang="x-none" dirty="0"/>
+              <a:t>1.921fb6</a:t>
+            </a:r>
+            <a:r>
+              <a:rPr lang="en-US" dirty="0" err="1"/>
+              <a:t>ᐧ</a:t>
+            </a:r>
+            <a:r>
+              <a:rPr lang="cs-CZ" altLang="x-none" dirty="0"/>
+              <a:t>2</a:t>
+            </a:r>
+            <a:r>
+              <a:rPr lang="cs-CZ" altLang="x-none" baseline="30000" dirty="0"/>
+              <a:t>+1  </a:t>
+            </a:r>
+            <a:r>
+              <a:rPr lang="cs-CZ" altLang="x-none" dirty="0" err="1"/>
+              <a:t>is</a:t>
+            </a:r>
+            <a:r>
+              <a:rPr lang="cs-CZ" altLang="x-none" dirty="0"/>
+              <a:t> 1.921fb4</a:t>
+            </a:r>
+            <a:r>
+              <a:rPr lang="en-US" dirty="0" err="1"/>
+              <a:t>ᐧ</a:t>
+            </a:r>
+            <a:r>
+              <a:rPr lang="cs-CZ" altLang="x-none" dirty="0"/>
+              <a:t>2</a:t>
+            </a:r>
+            <a:r>
+              <a:rPr lang="cs-CZ" altLang="x-none" baseline="30000" dirty="0"/>
+              <a:t>+1</a:t>
+            </a:r>
+            <a:r>
+              <a:rPr lang="cs-CZ" altLang="x-none" dirty="0"/>
+              <a:t>, </a:t>
+            </a:r>
+            <a:r>
+              <a:rPr lang="cs-CZ" altLang="x-none" dirty="0" err="1"/>
+              <a:t>next</a:t>
+            </a:r>
+            <a:r>
+              <a:rPr lang="cs-CZ" altLang="x-none" dirty="0"/>
+              <a:t> </a:t>
+            </a:r>
+            <a:r>
+              <a:rPr lang="cs-CZ" altLang="x-none" dirty="0" err="1"/>
+              <a:t>is</a:t>
+            </a:r>
+            <a:r>
+              <a:rPr lang="cs-CZ" altLang="x-none" dirty="0"/>
+              <a:t> 1.921fb8</a:t>
+            </a:r>
+            <a:r>
+              <a:rPr lang="en-US" dirty="0" err="1"/>
+              <a:t>ᐧ</a:t>
+            </a:r>
+            <a:r>
+              <a:rPr lang="cs-CZ" altLang="x-none" dirty="0"/>
+              <a:t>2</a:t>
+            </a:r>
+            <a:r>
+              <a:rPr lang="cs-CZ" altLang="x-none" baseline="30000" dirty="0"/>
+              <a:t>+1</a:t>
+            </a:r>
+            <a:r>
+              <a:rPr lang="cs-CZ" altLang="x-none" dirty="0"/>
+              <a:t> </a:t>
+            </a:r>
+          </a:p>
+          <a:p>
+            <a:pPr lvl="1"/>
+            <a:r>
+              <a:rPr lang="cs-CZ" altLang="x-none" dirty="0" err="1"/>
+              <a:t>The</a:t>
+            </a:r>
+            <a:r>
+              <a:rPr lang="cs-CZ" altLang="x-none" dirty="0"/>
+              <a:t> </a:t>
+            </a:r>
+            <a:r>
+              <a:rPr lang="cs-CZ" altLang="x-none" dirty="0" err="1"/>
+              <a:t>difference</a:t>
+            </a:r>
+            <a:r>
+              <a:rPr lang="cs-CZ" altLang="x-none" dirty="0"/>
+              <a:t> </a:t>
+            </a:r>
+            <a:r>
+              <a:rPr lang="cs-CZ" altLang="x-none" dirty="0" err="1"/>
+              <a:t>between</a:t>
+            </a:r>
+            <a:r>
+              <a:rPr lang="cs-CZ" altLang="x-none" dirty="0"/>
+              <a:t> </a:t>
+            </a:r>
+            <a:r>
+              <a:rPr lang="cs-CZ" altLang="x-none" dirty="0" err="1"/>
+              <a:t>two</a:t>
+            </a:r>
+            <a:r>
+              <a:rPr lang="cs-CZ" altLang="x-none" dirty="0"/>
+              <a:t> </a:t>
+            </a:r>
+            <a:r>
+              <a:rPr lang="cs-CZ" altLang="x-none" dirty="0" err="1"/>
+              <a:t>consecutive</a:t>
+            </a:r>
+            <a:r>
+              <a:rPr lang="cs-CZ" altLang="x-none" dirty="0"/>
+              <a:t> FP </a:t>
+            </a:r>
+            <a:r>
+              <a:rPr lang="cs-CZ" altLang="x-none" dirty="0" err="1"/>
+              <a:t>is</a:t>
+            </a:r>
+            <a:r>
+              <a:rPr lang="cs-CZ" altLang="x-none" dirty="0"/>
+              <a:t> </a:t>
+            </a:r>
+            <a:r>
+              <a:rPr lang="cs-CZ" altLang="x-none" dirty="0" err="1"/>
+              <a:t>called</a:t>
+            </a:r>
+            <a:r>
+              <a:rPr lang="cs-CZ" altLang="x-none" dirty="0"/>
+              <a:t> ULP (unit in last place)</a:t>
+            </a:r>
+          </a:p>
+          <a:p>
+            <a:r>
+              <a:rPr lang="cs-CZ" altLang="x-none" dirty="0" err="1"/>
+              <a:t>For</a:t>
+            </a:r>
+            <a:r>
+              <a:rPr lang="cs-CZ" altLang="x-none" dirty="0"/>
+              <a:t> </a:t>
+            </a:r>
+            <a:r>
+              <a:rPr lang="cs-CZ" altLang="x-none" dirty="0" err="1"/>
+              <a:t>each</a:t>
+            </a:r>
+            <a:r>
+              <a:rPr lang="cs-CZ" altLang="x-none" dirty="0"/>
+              <a:t> </a:t>
+            </a:r>
+            <a:r>
+              <a:rPr lang="cs-CZ" altLang="x-none" dirty="0" err="1"/>
+              <a:t>value</a:t>
+            </a:r>
+            <a:r>
+              <a:rPr lang="cs-CZ" altLang="x-none" dirty="0"/>
+              <a:t> </a:t>
+            </a:r>
+            <a:r>
+              <a:rPr lang="cs-CZ" altLang="x-none" dirty="0" err="1"/>
+              <a:t>of</a:t>
+            </a:r>
+            <a:r>
+              <a:rPr lang="cs-CZ" altLang="x-none" dirty="0"/>
+              <a:t> </a:t>
+            </a:r>
+            <a:r>
+              <a:rPr lang="cs-CZ" altLang="x-none" dirty="0" err="1"/>
+              <a:t>the</a:t>
+            </a:r>
+            <a:r>
+              <a:rPr lang="cs-CZ" altLang="x-none" dirty="0"/>
+              <a:t> exponent </a:t>
+            </a:r>
+            <a:r>
+              <a:rPr lang="cs-CZ" altLang="x-none" dirty="0" err="1"/>
+              <a:t>there</a:t>
+            </a:r>
+            <a:r>
+              <a:rPr lang="cs-CZ" altLang="x-none" dirty="0"/>
+              <a:t> </a:t>
+            </a:r>
+            <a:r>
+              <a:rPr lang="cs-CZ" altLang="x-none" dirty="0" err="1"/>
+              <a:t>is</a:t>
+            </a:r>
+            <a:r>
+              <a:rPr lang="cs-CZ" altLang="x-none" dirty="0"/>
+              <a:t> a </a:t>
+            </a:r>
+            <a:r>
+              <a:rPr lang="cs-CZ" altLang="x-none" dirty="0" err="1"/>
+              <a:t>finite</a:t>
+            </a:r>
+            <a:r>
+              <a:rPr lang="cs-CZ" altLang="x-none" dirty="0"/>
+              <a:t> </a:t>
+            </a:r>
+            <a:r>
+              <a:rPr lang="cs-CZ" altLang="x-none" dirty="0" err="1"/>
+              <a:t>number</a:t>
+            </a:r>
+            <a:r>
+              <a:rPr lang="cs-CZ" altLang="x-none" dirty="0"/>
+              <a:t> </a:t>
+            </a:r>
+            <a:r>
+              <a:rPr lang="cs-CZ" altLang="x-none" dirty="0" err="1"/>
+              <a:t>of</a:t>
+            </a:r>
+            <a:r>
+              <a:rPr lang="cs-CZ" altLang="x-none" dirty="0"/>
+              <a:t> FP</a:t>
+            </a:r>
+          </a:p>
+          <a:p>
+            <a:pPr lvl="1"/>
+            <a:r>
+              <a:rPr lang="cs-CZ" altLang="x-none" dirty="0"/>
+              <a:t> 10</a:t>
+            </a:r>
+            <a:r>
+              <a:rPr lang="cs-CZ" altLang="x-none" baseline="30000" dirty="0"/>
+              <a:t> </a:t>
+            </a:r>
+            <a:r>
+              <a:rPr lang="en-US" dirty="0"/>
+              <a:t>ᐧ10</a:t>
+            </a:r>
+            <a:r>
+              <a:rPr lang="en-US" baseline="30000" dirty="0"/>
+              <a:t>e</a:t>
+            </a:r>
+            <a:r>
+              <a:rPr lang="en-US" dirty="0"/>
+              <a:t> - </a:t>
+            </a:r>
+            <a:r>
+              <a:rPr lang="cs-CZ" dirty="0"/>
+              <a:t>99</a:t>
+            </a:r>
+            <a:r>
+              <a:rPr lang="cs-CZ" altLang="x-none" baseline="30000" dirty="0"/>
+              <a:t> </a:t>
+            </a:r>
+            <a:r>
+              <a:rPr lang="en-US" dirty="0"/>
+              <a:t>ᐧ10</a:t>
+            </a:r>
+            <a:r>
+              <a:rPr lang="en-US" baseline="30000" dirty="0"/>
+              <a:t>e</a:t>
+            </a:r>
+            <a:r>
+              <a:rPr lang="en-US" dirty="0"/>
+              <a:t> </a:t>
+            </a:r>
+          </a:p>
+          <a:p>
+            <a:pPr lvl="1"/>
+            <a:r>
+              <a:rPr lang="en-US" dirty="0"/>
+              <a:t>1.000000ᐧ</a:t>
+            </a:r>
+            <a:r>
+              <a:rPr lang="cs-CZ" altLang="x-none" dirty="0"/>
+              <a:t>2</a:t>
+            </a:r>
+            <a:r>
+              <a:rPr lang="en-US" baseline="30000" dirty="0"/>
+              <a:t>e </a:t>
+            </a:r>
+            <a:r>
+              <a:rPr lang="en-US" dirty="0"/>
+              <a:t>- 1.ffffffᐧ</a:t>
+            </a:r>
+            <a:r>
+              <a:rPr lang="cs-CZ" altLang="x-none" dirty="0"/>
+              <a:t>2</a:t>
+            </a:r>
+            <a:r>
+              <a:rPr lang="en-US" baseline="30000" dirty="0"/>
+              <a:t>e </a:t>
+            </a:r>
+            <a:r>
+              <a:rPr lang="en-US" dirty="0"/>
+              <a:t> </a:t>
+            </a:r>
+          </a:p>
+          <a:p>
+            <a:pPr lvl="1"/>
+            <a:r>
+              <a:rPr lang="en-US" dirty="0"/>
+              <a:t>(called “</a:t>
+            </a:r>
+            <a:r>
+              <a:rPr lang="en-US" dirty="0" err="1"/>
+              <a:t>binade</a:t>
+            </a:r>
+            <a:r>
+              <a:rPr lang="en-US" dirty="0"/>
+              <a:t>”)</a:t>
+            </a:r>
+          </a:p>
+        </p:txBody>
+      </p:sp>
+    </p:spTree>
+    <p:extLst>
+      <p:ext uri="{BB962C8B-B14F-4D97-AF65-F5344CB8AC3E}">
+        <p14:creationId xmlns:p14="http://schemas.microsoft.com/office/powerpoint/2010/main" val="4071479380"/>
+      </p:ext>
+    </p:extLst>
+  </p:cSld>
+  <p:clrMapOvr>
+    <a:masterClrMapping/>
+  </p:clrMapOvr>
+</p:sld>
+</file>
+
+<file path=ppt/slides/slide30.xml><?xml version="1.0" encoding="utf-8"?>
 <p:sld xmlns:a="http://schemas.openxmlformats.org/drawingml/2006/main" xmlns:r="http://schemas.openxmlformats.org/officeDocument/2006/relationships" xmlns:p="http://schemas.openxmlformats.org/presentationml/2006/main">
   <p:cSld>
     <p:spTree>
@@ -11526,7 +12559,7 @@
           <a:p>
             <a:fld id="{48DD0D4D-849C-9F43-9E32-2F43D5C86DA0}" type="slidenum">
               <a:rPr lang="en-US" smtClean="0"/>
-              <a:t>28</a:t>
+              <a:t>30</a:t>
             </a:fld>
             <a:endParaRPr lang="en-US" dirty="0"/>
           </a:p>
@@ -11610,7 +12643,7 @@
 </p:sld>
 </file>
 
-<file path=ppt/slides/slide29.xml><?xml version="1.0" encoding="utf-8"?>
+<file path=ppt/slides/slide31.xml><?xml version="1.0" encoding="utf-8"?>
 <p:sld xmlns:a="http://schemas.openxmlformats.org/drawingml/2006/main" xmlns:r="http://schemas.openxmlformats.org/officeDocument/2006/relationships" xmlns:p="http://schemas.openxmlformats.org/presentationml/2006/main">
   <p:cSld>
     <p:spTree>
@@ -11776,437 +12809,7 @@
 </p:sld>
 </file>
 
-<file path=ppt/slides/slide3.xml><?xml version="1.0" encoding="utf-8"?>
-<p:sld xmlns:a="http://schemas.openxmlformats.org/drawingml/2006/main" xmlns:r="http://schemas.openxmlformats.org/officeDocument/2006/relationships" xmlns:p="http://schemas.openxmlformats.org/presentationml/2006/main">
-  <p:cSld>
-    <p:spTree>
-      <p:nvGrpSpPr>
-        <p:cNvPr id="1" name=""/>
-        <p:cNvGrpSpPr/>
-        <p:nvPr/>
-      </p:nvGrpSpPr>
-      <p:grpSpPr>
-        <a:xfrm>
-          <a:off x="0" y="0"/>
-          <a:ext cx="0" cy="0"/>
-          <a:chOff x="0" y="0"/>
-          <a:chExt cx="0" cy="0"/>
-        </a:xfrm>
-      </p:grpSpPr>
-      <p:sp>
-        <p:nvSpPr>
-          <p:cNvPr id="2" name="Title 1">
-            <a:extLst>
-              <a:ext uri="{FF2B5EF4-FFF2-40B4-BE49-F238E27FC236}">
-                <a16:creationId xmlns:a16="http://schemas.microsoft.com/office/drawing/2014/main" id="{AD30F8CC-3C21-4921-6714-6705D02DF9EA}"/>
-              </a:ext>
-            </a:extLst>
-          </p:cNvPr>
-          <p:cNvSpPr>
-            <a:spLocks noGrp="1"/>
-          </p:cNvSpPr>
-          <p:nvPr>
-            <p:ph type="title"/>
-          </p:nvPr>
-        </p:nvSpPr>
-        <p:spPr/>
-        <p:txBody>
-          <a:bodyPr/>
-          <a:lstStyle/>
-          <a:p>
-            <a:r>
-              <a:rPr lang="en-US"/>
-              <a:t>Some Trivial properties of FP</a:t>
-            </a:r>
-          </a:p>
-        </p:txBody>
-      </p:sp>
-      <p:sp>
-        <p:nvSpPr>
-          <p:cNvPr id="3" name="Content Placeholder 2">
-            <a:extLst>
-              <a:ext uri="{FF2B5EF4-FFF2-40B4-BE49-F238E27FC236}">
-                <a16:creationId xmlns:a16="http://schemas.microsoft.com/office/drawing/2014/main" id="{B8EFCA01-9C0D-C660-E004-78866BE1C22E}"/>
-              </a:ext>
-            </a:extLst>
-          </p:cNvPr>
-          <p:cNvSpPr>
-            <a:spLocks noGrp="1"/>
-          </p:cNvSpPr>
-          <p:nvPr>
-            <p:ph idx="1"/>
-          </p:nvPr>
-        </p:nvSpPr>
-        <p:spPr/>
-        <p:txBody>
-          <a:bodyPr/>
-          <a:lstStyle/>
-          <a:p>
-            <a:r>
-              <a:rPr lang="en-US" dirty="0"/>
-              <a:t>Each FP has a previous and a next</a:t>
-            </a:r>
-          </a:p>
-          <a:p>
-            <a:pPr lvl="1"/>
-            <a:r>
-              <a:rPr lang="en-US" dirty="0"/>
-              <a:t>Previous of 31ᐧ10</a:t>
-            </a:r>
-            <a:r>
-              <a:rPr lang="en-US" baseline="30000" dirty="0"/>
-              <a:t>-1 </a:t>
-            </a:r>
-            <a:r>
-              <a:rPr lang="en-US" dirty="0"/>
-              <a:t>is</a:t>
-            </a:r>
-            <a:r>
-              <a:rPr lang="en-US" baseline="30000" dirty="0"/>
-              <a:t> </a:t>
-            </a:r>
-            <a:r>
-              <a:rPr lang="en-US" dirty="0"/>
-              <a:t>30ᐧ10</a:t>
-            </a:r>
-            <a:r>
-              <a:rPr lang="en-US" baseline="30000" dirty="0"/>
-              <a:t>-1</a:t>
-            </a:r>
-            <a:r>
-              <a:rPr lang="en-US" dirty="0"/>
-              <a:t>, next is 32ᐧ10</a:t>
-            </a:r>
-            <a:r>
-              <a:rPr lang="en-US" baseline="30000" dirty="0"/>
-              <a:t>-1</a:t>
-            </a:r>
-          </a:p>
-          <a:p>
-            <a:pPr lvl="1"/>
-            <a:r>
-              <a:rPr lang="en-US" dirty="0"/>
-              <a:t>Previous of </a:t>
-            </a:r>
-            <a:r>
-              <a:rPr lang="cs-CZ" altLang="x-none" dirty="0"/>
-              <a:t>1.921fb6</a:t>
-            </a:r>
-            <a:r>
-              <a:rPr lang="en-US" dirty="0" err="1"/>
-              <a:t>ᐧ</a:t>
-            </a:r>
-            <a:r>
-              <a:rPr lang="cs-CZ" altLang="x-none" dirty="0"/>
-              <a:t>2</a:t>
-            </a:r>
-            <a:r>
-              <a:rPr lang="cs-CZ" altLang="x-none" baseline="30000" dirty="0"/>
-              <a:t>+1  </a:t>
-            </a:r>
-            <a:r>
-              <a:rPr lang="cs-CZ" altLang="x-none" dirty="0" err="1"/>
-              <a:t>is</a:t>
-            </a:r>
-            <a:r>
-              <a:rPr lang="cs-CZ" altLang="x-none" dirty="0"/>
-              <a:t> 1.921fb4</a:t>
-            </a:r>
-            <a:r>
-              <a:rPr lang="en-US" dirty="0" err="1"/>
-              <a:t>ᐧ</a:t>
-            </a:r>
-            <a:r>
-              <a:rPr lang="cs-CZ" altLang="x-none" dirty="0"/>
-              <a:t>2</a:t>
-            </a:r>
-            <a:r>
-              <a:rPr lang="cs-CZ" altLang="x-none" baseline="30000" dirty="0"/>
-              <a:t>+1</a:t>
-            </a:r>
-            <a:r>
-              <a:rPr lang="cs-CZ" altLang="x-none" dirty="0"/>
-              <a:t>, </a:t>
-            </a:r>
-            <a:r>
-              <a:rPr lang="cs-CZ" altLang="x-none" dirty="0" err="1"/>
-              <a:t>next</a:t>
-            </a:r>
-            <a:r>
-              <a:rPr lang="cs-CZ" altLang="x-none" dirty="0"/>
-              <a:t> </a:t>
-            </a:r>
-            <a:r>
-              <a:rPr lang="cs-CZ" altLang="x-none" dirty="0" err="1"/>
-              <a:t>is</a:t>
-            </a:r>
-            <a:r>
-              <a:rPr lang="cs-CZ" altLang="x-none" dirty="0"/>
-              <a:t> 1.921fb8</a:t>
-            </a:r>
-            <a:r>
-              <a:rPr lang="en-US" dirty="0" err="1"/>
-              <a:t>ᐧ</a:t>
-            </a:r>
-            <a:r>
-              <a:rPr lang="cs-CZ" altLang="x-none" dirty="0"/>
-              <a:t>2</a:t>
-            </a:r>
-            <a:r>
-              <a:rPr lang="cs-CZ" altLang="x-none" baseline="30000" dirty="0"/>
-              <a:t>+1</a:t>
-            </a:r>
-            <a:r>
-              <a:rPr lang="cs-CZ" altLang="x-none" dirty="0"/>
-              <a:t> </a:t>
-            </a:r>
-          </a:p>
-          <a:p>
-            <a:pPr lvl="1"/>
-            <a:r>
-              <a:rPr lang="cs-CZ" altLang="x-none" dirty="0" err="1"/>
-              <a:t>The</a:t>
-            </a:r>
-            <a:r>
-              <a:rPr lang="cs-CZ" altLang="x-none" dirty="0"/>
-              <a:t> </a:t>
-            </a:r>
-            <a:r>
-              <a:rPr lang="cs-CZ" altLang="x-none" dirty="0" err="1"/>
-              <a:t>difference</a:t>
-            </a:r>
-            <a:r>
-              <a:rPr lang="cs-CZ" altLang="x-none" dirty="0"/>
-              <a:t> </a:t>
-            </a:r>
-            <a:r>
-              <a:rPr lang="cs-CZ" altLang="x-none" dirty="0" err="1"/>
-              <a:t>between</a:t>
-            </a:r>
-            <a:r>
-              <a:rPr lang="cs-CZ" altLang="x-none" dirty="0"/>
-              <a:t> </a:t>
-            </a:r>
-            <a:r>
-              <a:rPr lang="cs-CZ" altLang="x-none" dirty="0" err="1"/>
-              <a:t>two</a:t>
-            </a:r>
-            <a:r>
-              <a:rPr lang="cs-CZ" altLang="x-none" dirty="0"/>
-              <a:t> </a:t>
-            </a:r>
-            <a:r>
-              <a:rPr lang="cs-CZ" altLang="x-none" dirty="0" err="1"/>
-              <a:t>consecutive</a:t>
-            </a:r>
-            <a:r>
-              <a:rPr lang="cs-CZ" altLang="x-none" dirty="0"/>
-              <a:t> FP </a:t>
-            </a:r>
-            <a:r>
-              <a:rPr lang="cs-CZ" altLang="x-none" dirty="0" err="1"/>
-              <a:t>is</a:t>
-            </a:r>
-            <a:r>
-              <a:rPr lang="cs-CZ" altLang="x-none" dirty="0"/>
-              <a:t> </a:t>
-            </a:r>
-            <a:r>
-              <a:rPr lang="cs-CZ" altLang="x-none" dirty="0" err="1"/>
-              <a:t>called</a:t>
-            </a:r>
-            <a:r>
-              <a:rPr lang="cs-CZ" altLang="x-none" dirty="0"/>
-              <a:t> ULP (unit in last place)</a:t>
-            </a:r>
-          </a:p>
-          <a:p>
-            <a:r>
-              <a:rPr lang="cs-CZ" altLang="x-none" dirty="0" err="1"/>
-              <a:t>For</a:t>
-            </a:r>
-            <a:r>
-              <a:rPr lang="cs-CZ" altLang="x-none" dirty="0"/>
-              <a:t> </a:t>
-            </a:r>
-            <a:r>
-              <a:rPr lang="cs-CZ" altLang="x-none" dirty="0" err="1"/>
-              <a:t>each</a:t>
-            </a:r>
-            <a:r>
-              <a:rPr lang="cs-CZ" altLang="x-none" dirty="0"/>
-              <a:t> </a:t>
-            </a:r>
-            <a:r>
-              <a:rPr lang="cs-CZ" altLang="x-none" dirty="0" err="1"/>
-              <a:t>value</a:t>
-            </a:r>
-            <a:r>
-              <a:rPr lang="cs-CZ" altLang="x-none" dirty="0"/>
-              <a:t> </a:t>
-            </a:r>
-            <a:r>
-              <a:rPr lang="cs-CZ" altLang="x-none" dirty="0" err="1"/>
-              <a:t>of</a:t>
-            </a:r>
-            <a:r>
-              <a:rPr lang="cs-CZ" altLang="x-none" dirty="0"/>
-              <a:t> </a:t>
-            </a:r>
-            <a:r>
-              <a:rPr lang="cs-CZ" altLang="x-none" dirty="0" err="1"/>
-              <a:t>the</a:t>
-            </a:r>
-            <a:r>
-              <a:rPr lang="cs-CZ" altLang="x-none" dirty="0"/>
-              <a:t> exponent </a:t>
-            </a:r>
-            <a:r>
-              <a:rPr lang="cs-CZ" altLang="x-none" dirty="0" err="1"/>
-              <a:t>there</a:t>
-            </a:r>
-            <a:r>
-              <a:rPr lang="cs-CZ" altLang="x-none" dirty="0"/>
-              <a:t> </a:t>
-            </a:r>
-            <a:r>
-              <a:rPr lang="cs-CZ" altLang="x-none" dirty="0" err="1"/>
-              <a:t>is</a:t>
-            </a:r>
-            <a:r>
-              <a:rPr lang="cs-CZ" altLang="x-none" dirty="0"/>
-              <a:t> a </a:t>
-            </a:r>
-            <a:r>
-              <a:rPr lang="cs-CZ" altLang="x-none" dirty="0" err="1"/>
-              <a:t>finite</a:t>
-            </a:r>
-            <a:r>
-              <a:rPr lang="cs-CZ" altLang="x-none" dirty="0"/>
-              <a:t> </a:t>
-            </a:r>
-            <a:r>
-              <a:rPr lang="cs-CZ" altLang="x-none" dirty="0" err="1"/>
-              <a:t>number</a:t>
-            </a:r>
-            <a:r>
-              <a:rPr lang="cs-CZ" altLang="x-none" dirty="0"/>
-              <a:t> </a:t>
-            </a:r>
-            <a:r>
-              <a:rPr lang="cs-CZ" altLang="x-none" dirty="0" err="1"/>
-              <a:t>of</a:t>
-            </a:r>
-            <a:r>
-              <a:rPr lang="cs-CZ" altLang="x-none" dirty="0"/>
-              <a:t> FP</a:t>
-            </a:r>
-          </a:p>
-          <a:p>
-            <a:pPr lvl="1"/>
-            <a:r>
-              <a:rPr lang="cs-CZ" altLang="x-none" dirty="0"/>
-              <a:t> 10</a:t>
-            </a:r>
-            <a:r>
-              <a:rPr lang="cs-CZ" altLang="x-none" baseline="30000" dirty="0"/>
-              <a:t> </a:t>
-            </a:r>
-            <a:r>
-              <a:rPr lang="en-US" dirty="0"/>
-              <a:t>ᐧ10</a:t>
-            </a:r>
-            <a:r>
-              <a:rPr lang="en-US" baseline="30000" dirty="0"/>
-              <a:t>e</a:t>
-            </a:r>
-            <a:r>
-              <a:rPr lang="en-US" dirty="0"/>
-              <a:t> - </a:t>
-            </a:r>
-            <a:r>
-              <a:rPr lang="cs-CZ" dirty="0"/>
-              <a:t>99</a:t>
-            </a:r>
-            <a:r>
-              <a:rPr lang="cs-CZ" altLang="x-none" baseline="30000" dirty="0"/>
-              <a:t> </a:t>
-            </a:r>
-            <a:r>
-              <a:rPr lang="en-US" dirty="0"/>
-              <a:t>ᐧ10</a:t>
-            </a:r>
-            <a:r>
-              <a:rPr lang="en-US" baseline="30000" dirty="0"/>
-              <a:t>e</a:t>
-            </a:r>
-            <a:r>
-              <a:rPr lang="en-US" dirty="0"/>
-              <a:t> </a:t>
-            </a:r>
-          </a:p>
-          <a:p>
-            <a:pPr lvl="1"/>
-            <a:r>
-              <a:rPr lang="en-US" dirty="0"/>
-              <a:t>1.000000ᐧ</a:t>
-            </a:r>
-            <a:r>
-              <a:rPr lang="cs-CZ" altLang="x-none" dirty="0"/>
-              <a:t>2</a:t>
-            </a:r>
-            <a:r>
-              <a:rPr lang="en-US" baseline="30000" dirty="0"/>
-              <a:t>e </a:t>
-            </a:r>
-            <a:r>
-              <a:rPr lang="en-US" dirty="0"/>
-              <a:t>- 1.ffffffᐧ</a:t>
-            </a:r>
-            <a:r>
-              <a:rPr lang="cs-CZ" altLang="x-none" dirty="0"/>
-              <a:t>2</a:t>
-            </a:r>
-            <a:r>
-              <a:rPr lang="en-US" baseline="30000" dirty="0"/>
-              <a:t>e </a:t>
-            </a:r>
-            <a:r>
-              <a:rPr lang="en-US" dirty="0"/>
-              <a:t> </a:t>
-            </a:r>
-          </a:p>
-          <a:p>
-            <a:pPr lvl="1"/>
-            <a:r>
-              <a:rPr lang="en-US" dirty="0"/>
-              <a:t>(called “</a:t>
-            </a:r>
-            <a:r>
-              <a:rPr lang="en-US" dirty="0" err="1"/>
-              <a:t>binade</a:t>
-            </a:r>
-            <a:r>
-              <a:rPr lang="en-US" dirty="0"/>
-              <a:t>”)</a:t>
-            </a:r>
-          </a:p>
-        </p:txBody>
-      </p:sp>
-    </p:spTree>
-    <p:extLst>
-      <p:ext uri="{BB962C8B-B14F-4D97-AF65-F5344CB8AC3E}">
-        <p14:creationId xmlns:p14="http://schemas.microsoft.com/office/powerpoint/2010/main" val="4071479380"/>
-      </p:ext>
-    </p:extLst>
-  </p:cSld>
-  <p:clrMapOvr>
-    <a:masterClrMapping/>
-  </p:clrMapOvr>
-</p:sld>
-</file>
-
-<file path=ppt/slides/slide30.xml><?xml version="1.0" encoding="utf-8"?>
+<file path=ppt/slides/slide32.xml><?xml version="1.0" encoding="utf-8"?>
 <p:sld xmlns:a="http://schemas.openxmlformats.org/drawingml/2006/main" xmlns:r="http://schemas.openxmlformats.org/officeDocument/2006/relationships" xmlns:p="http://schemas.openxmlformats.org/presentationml/2006/main">
   <p:cSld>
     <p:spTree>
@@ -12484,7 +13087,7 @@
 </p:sld>
 </file>
 
-<file path=ppt/slides/slide31.xml><?xml version="1.0" encoding="utf-8"?>
+<file path=ppt/slides/slide33.xml><?xml version="1.0" encoding="utf-8"?>
 <p:sld xmlns:a="http://schemas.openxmlformats.org/drawingml/2006/main" xmlns:r="http://schemas.openxmlformats.org/officeDocument/2006/relationships" xmlns:p="http://schemas.openxmlformats.org/presentationml/2006/main">
   <p:cSld>
     <p:spTree>
@@ -12693,7 +13296,7 @@
 </p:sld>
 </file>
 
-<file path=ppt/slides/slide32.xml><?xml version="1.0" encoding="utf-8"?>
+<file path=ppt/slides/slide34.xml><?xml version="1.0" encoding="utf-8"?>
 <p:sld xmlns:a="http://schemas.openxmlformats.org/drawingml/2006/main" xmlns:r="http://schemas.openxmlformats.org/officeDocument/2006/relationships" xmlns:p="http://schemas.openxmlformats.org/presentationml/2006/main">
   <p:cSld>
     <p:spTree>
@@ -13738,7 +14341,7 @@
 </p:sld>
 </file>
 
-<file path=ppt/slides/slide33.xml><?xml version="1.0" encoding="utf-8"?>
+<file path=ppt/slides/slide35.xml><?xml version="1.0" encoding="utf-8"?>
 <p:sld xmlns:a="http://schemas.openxmlformats.org/drawingml/2006/main" xmlns:r="http://schemas.openxmlformats.org/officeDocument/2006/relationships" xmlns:p="http://schemas.openxmlformats.org/presentationml/2006/main">
   <p:cSld>
     <p:spTree>
@@ -13912,7 +14515,7 @@
 </p:sld>
 </file>
 
-<file path=ppt/slides/slide34.xml><?xml version="1.0" encoding="utf-8"?>
+<file path=ppt/slides/slide36.xml><?xml version="1.0" encoding="utf-8"?>
 <p:sld xmlns:a="http://schemas.openxmlformats.org/drawingml/2006/main" xmlns:r="http://schemas.openxmlformats.org/officeDocument/2006/relationships" xmlns:p="http://schemas.openxmlformats.org/presentationml/2006/main">
   <p:cSld>
     <p:spTree>
@@ -14124,7 +14727,7 @@
 </p:sld>
 </file>
 
-<file path=ppt/slides/slide35.xml><?xml version="1.0" encoding="utf-8"?>
+<file path=ppt/slides/slide37.xml><?xml version="1.0" encoding="utf-8"?>
 <p:sld xmlns:a="http://schemas.openxmlformats.org/drawingml/2006/main" xmlns:r="http://schemas.openxmlformats.org/officeDocument/2006/relationships" xmlns:p="http://schemas.openxmlformats.org/presentationml/2006/main">
   <p:cSld>
     <p:spTree>
@@ -14291,7 +14894,7 @@
 </p:sld>
 </file>
 
-<file path=ppt/slides/slide36.xml><?xml version="1.0" encoding="utf-8"?>
+<file path=ppt/slides/slide38.xml><?xml version="1.0" encoding="utf-8"?>
 <p:sld xmlns:a="http://schemas.openxmlformats.org/drawingml/2006/main" xmlns:r="http://schemas.openxmlformats.org/officeDocument/2006/relationships" xmlns:p="http://schemas.openxmlformats.org/presentationml/2006/main">
   <p:cSld>
     <p:spTree>
@@ -14459,7 +15062,7 @@
 </p:sld>
 </file>
 
-<file path=ppt/slides/slide37.xml><?xml version="1.0" encoding="utf-8"?>
+<file path=ppt/slides/slide39.xml><?xml version="1.0" encoding="utf-8"?>
 <p:sld xmlns:a="http://schemas.openxmlformats.org/drawingml/2006/main" xmlns:r="http://schemas.openxmlformats.org/officeDocument/2006/relationships" xmlns:p="http://schemas.openxmlformats.org/presentationml/2006/main">
   <p:cSld>
     <p:spTree>
@@ -14561,1188 +15164,6 @@
         <p14:creationId xmlns:p14="http://schemas.microsoft.com/office/powerpoint/2010/main" val="399726270"/>
       </p:ext>
     </p:extLst>
-  </p:cSld>
-  <p:clrMapOvr>
-    <a:masterClrMapping/>
-  </p:clrMapOvr>
-</p:sld>
-</file>
-
-<file path=ppt/slides/slide38.xml><?xml version="1.0" encoding="utf-8"?>
-<p:sld xmlns:a="http://schemas.openxmlformats.org/drawingml/2006/main" xmlns:r="http://schemas.openxmlformats.org/officeDocument/2006/relationships" xmlns:p="http://schemas.openxmlformats.org/presentationml/2006/main">
-  <p:cSld>
-    <p:spTree>
-      <p:nvGrpSpPr>
-        <p:cNvPr id="1" name=""/>
-        <p:cNvGrpSpPr/>
-        <p:nvPr/>
-      </p:nvGrpSpPr>
-      <p:grpSpPr>
-        <a:xfrm>
-          <a:off x="0" y="0"/>
-          <a:ext cx="0" cy="0"/>
-          <a:chOff x="0" y="0"/>
-          <a:chExt cx="0" cy="0"/>
-        </a:xfrm>
-      </p:grpSpPr>
-      <p:sp>
-        <p:nvSpPr>
-          <p:cNvPr id="51201" name="Title 1"/>
-          <p:cNvSpPr>
-            <a:spLocks noGrp="1"/>
-          </p:cNvSpPr>
-          <p:nvPr>
-            <p:ph type="title"/>
-          </p:nvPr>
-        </p:nvSpPr>
-        <p:spPr/>
-        <p:txBody>
-          <a:bodyPr/>
-          <a:lstStyle/>
-          <a:p>
-            <a:pPr>
-              <a:defRPr/>
-            </a:pPr>
-            <a:r>
-              <a:rPr lang="en-US" dirty="0">
-                <a:ea typeface="ＭＳ Ｐゴシック" charset="0"/>
-                <a:cs typeface="ＭＳ Ｐゴシック" charset="0"/>
-              </a:rPr>
-              <a:t>Precision, </a:t>
-            </a:r>
-            <a:r>
-              <a:rPr lang="en-US" dirty="0">
-                <a:solidFill>
-                  <a:srgbClr val="FF0000"/>
-                </a:solidFill>
-                <a:ea typeface="ＭＳ Ｐゴシック" charset="0"/>
-                <a:cs typeface="ＭＳ Ｐゴシック" charset="0"/>
-              </a:rPr>
-              <a:t>accuracy,</a:t>
-            </a:r>
-            <a:r>
-              <a:rPr lang="en-US" dirty="0">
-                <a:ea typeface="ＭＳ Ｐゴシック" charset="0"/>
-                <a:cs typeface="ＭＳ Ｐゴシック" charset="0"/>
-              </a:rPr>
-              <a:t> speed</a:t>
-            </a:r>
-          </a:p>
-        </p:txBody>
-      </p:sp>
-      <p:sp>
-        <p:nvSpPr>
-          <p:cNvPr id="40962" name="Text Placeholder 1"/>
-          <p:cNvSpPr>
-            <a:spLocks noGrp="1"/>
-          </p:cNvSpPr>
-          <p:nvPr>
-            <p:ph type="body" idx="1"/>
-          </p:nvPr>
-        </p:nvSpPr>
-        <p:spPr/>
-        <p:txBody>
-          <a:bodyPr/>
-          <a:lstStyle/>
-          <a:p>
-            <a:endParaRPr lang="en-US" altLang="x-none"/>
-          </a:p>
-        </p:txBody>
-      </p:sp>
-      <p:sp>
-        <p:nvSpPr>
-          <p:cNvPr id="40963" name="Date Placeholder 2"/>
-          <p:cNvSpPr>
-            <a:spLocks noGrp="1"/>
-          </p:cNvSpPr>
-          <p:nvPr>
-            <p:ph type="dt" sz="quarter" idx="10"/>
-          </p:nvPr>
-        </p:nvSpPr>
-        <p:spPr>
-          <a:noFill/>
-          <a:ln/>
-          <a:extLst>
-            <a:ext uri="{909E8E84-426E-40DD-AFC4-6F175D3DCCD1}">
-              <a14:hiddenFill xmlns:a14="http://schemas.microsoft.com/office/drawing/2010/main">
-                <a:solidFill>
-                  <a:srgbClr val="FFFFFF"/>
-                </a:solidFill>
-              </a14:hiddenFill>
-            </a:ext>
-            <a:ext uri="{91240B29-F687-4F45-9708-019B960494DF}">
-              <a14:hiddenLine xmlns:a14="http://schemas.microsoft.com/office/drawing/2010/main" w="9525">
-                <a:solidFill>
-                  <a:srgbClr val="000000"/>
-                </a:solidFill>
-                <a:miter lim="800000"/>
-                <a:headEnd/>
-                <a:tailEnd/>
-              </a14:hiddenLine>
-            </a:ext>
-          </a:extLst>
-        </p:spPr>
-        <p:txBody>
-          <a:bodyPr/>
-          <a:lstStyle>
-            <a:lvl1pPr eaLnBrk="0" hangingPunct="0">
-              <a:defRPr sz="2400">
-                <a:solidFill>
-                  <a:schemeClr val="tx1"/>
-                </a:solidFill>
-                <a:latin typeface="Arial" charset="0"/>
-                <a:ea typeface="ＭＳ Ｐゴシック" charset="-128"/>
-              </a:defRPr>
-            </a:lvl1pPr>
-            <a:lvl2pPr marL="742950" indent="-285750" eaLnBrk="0" hangingPunct="0">
-              <a:defRPr sz="2400">
-                <a:solidFill>
-                  <a:schemeClr val="tx1"/>
-                </a:solidFill>
-                <a:latin typeface="Arial" charset="0"/>
-                <a:ea typeface="ＭＳ Ｐゴシック" charset="-128"/>
-              </a:defRPr>
-            </a:lvl2pPr>
-            <a:lvl3pPr marL="1143000" indent="-228600" eaLnBrk="0" hangingPunct="0">
-              <a:defRPr sz="2400">
-                <a:solidFill>
-                  <a:schemeClr val="tx1"/>
-                </a:solidFill>
-                <a:latin typeface="Arial" charset="0"/>
-                <a:ea typeface="ＭＳ Ｐゴシック" charset="-128"/>
-              </a:defRPr>
-            </a:lvl3pPr>
-            <a:lvl4pPr marL="1600200" indent="-228600" eaLnBrk="0" hangingPunct="0">
-              <a:defRPr sz="2400">
-                <a:solidFill>
-                  <a:schemeClr val="tx1"/>
-                </a:solidFill>
-                <a:latin typeface="Arial" charset="0"/>
-                <a:ea typeface="ＭＳ Ｐゴシック" charset="-128"/>
-              </a:defRPr>
-            </a:lvl4pPr>
-            <a:lvl5pPr marL="2057400" indent="-228600" eaLnBrk="0" hangingPunct="0">
-              <a:defRPr sz="2400">
-                <a:solidFill>
-                  <a:schemeClr val="tx1"/>
-                </a:solidFill>
-                <a:latin typeface="Arial" charset="0"/>
-                <a:ea typeface="ＭＳ Ｐゴシック" charset="-128"/>
-              </a:defRPr>
-            </a:lvl5pPr>
-            <a:lvl6pPr marL="2514600" indent="-228600" eaLnBrk="0" fontAlgn="base" hangingPunct="0">
-              <a:spcBef>
-                <a:spcPct val="0"/>
-              </a:spcBef>
-              <a:spcAft>
-                <a:spcPct val="0"/>
-              </a:spcAft>
-              <a:defRPr sz="2400">
-                <a:solidFill>
-                  <a:schemeClr val="tx1"/>
-                </a:solidFill>
-                <a:latin typeface="Arial" charset="0"/>
-                <a:ea typeface="ＭＳ Ｐゴシック" charset="-128"/>
-              </a:defRPr>
-            </a:lvl6pPr>
-            <a:lvl7pPr marL="2971800" indent="-228600" eaLnBrk="0" fontAlgn="base" hangingPunct="0">
-              <a:spcBef>
-                <a:spcPct val="0"/>
-              </a:spcBef>
-              <a:spcAft>
-                <a:spcPct val="0"/>
-              </a:spcAft>
-              <a:defRPr sz="2400">
-                <a:solidFill>
-                  <a:schemeClr val="tx1"/>
-                </a:solidFill>
-                <a:latin typeface="Arial" charset="0"/>
-                <a:ea typeface="ＭＳ Ｐゴシック" charset="-128"/>
-              </a:defRPr>
-            </a:lvl7pPr>
-            <a:lvl8pPr marL="3429000" indent="-228600" eaLnBrk="0" fontAlgn="base" hangingPunct="0">
-              <a:spcBef>
-                <a:spcPct val="0"/>
-              </a:spcBef>
-              <a:spcAft>
-                <a:spcPct val="0"/>
-              </a:spcAft>
-              <a:defRPr sz="2400">
-                <a:solidFill>
-                  <a:schemeClr val="tx1"/>
-                </a:solidFill>
-                <a:latin typeface="Arial" charset="0"/>
-                <a:ea typeface="ＭＳ Ｐゴシック" charset="-128"/>
-              </a:defRPr>
-            </a:lvl8pPr>
-            <a:lvl9pPr marL="3886200" indent="-228600" eaLnBrk="0" fontAlgn="base" hangingPunct="0">
-              <a:spcBef>
-                <a:spcPct val="0"/>
-              </a:spcBef>
-              <a:spcAft>
-                <a:spcPct val="0"/>
-              </a:spcAft>
-              <a:defRPr sz="2400">
-                <a:solidFill>
-                  <a:schemeClr val="tx1"/>
-                </a:solidFill>
-                <a:latin typeface="Arial" charset="0"/>
-                <a:ea typeface="ＭＳ Ｐゴシック" charset="-128"/>
-              </a:defRPr>
-            </a:lvl9pPr>
-          </a:lstStyle>
-          <a:p>
-            <a:pPr eaLnBrk="1" hangingPunct="1"/>
-            <a:r>
-              <a:rPr lang="en-US" altLang="x-none" sz="1200">
-                <a:latin typeface="Garamond" charset="0"/>
-              </a:rPr>
-              <a:t>22 October 2016</a:t>
-            </a:r>
-            <a:endParaRPr lang="it-IT" altLang="x-none" sz="1200">
-              <a:latin typeface="Garamond" charset="0"/>
-            </a:endParaRPr>
-          </a:p>
-        </p:txBody>
-      </p:sp>
-      <p:sp>
-        <p:nvSpPr>
-          <p:cNvPr id="40964" name="Footer Placeholder 3"/>
-          <p:cNvSpPr>
-            <a:spLocks noGrp="1"/>
-          </p:cNvSpPr>
-          <p:nvPr>
-            <p:ph type="ftr" sz="quarter" idx="11"/>
-          </p:nvPr>
-        </p:nvSpPr>
-        <p:spPr>
-          <a:noFill/>
-          <a:ln/>
-          <a:extLst>
-            <a:ext uri="{909E8E84-426E-40DD-AFC4-6F175D3DCCD1}">
-              <a14:hiddenFill xmlns:a14="http://schemas.microsoft.com/office/drawing/2010/main">
-                <a:solidFill>
-                  <a:srgbClr val="FFFFFF"/>
-                </a:solidFill>
-              </a14:hiddenFill>
-            </a:ext>
-            <a:ext uri="{91240B29-F687-4F45-9708-019B960494DF}">
-              <a14:hiddenLine xmlns:a14="http://schemas.microsoft.com/office/drawing/2010/main" w="9525">
-                <a:solidFill>
-                  <a:srgbClr val="000000"/>
-                </a:solidFill>
-                <a:miter lim="800000"/>
-                <a:headEnd/>
-                <a:tailEnd/>
-              </a14:hiddenLine>
-            </a:ext>
-          </a:extLst>
-        </p:spPr>
-        <p:txBody>
-          <a:bodyPr/>
-          <a:lstStyle>
-            <a:lvl1pPr eaLnBrk="0" hangingPunct="0">
-              <a:defRPr sz="2400">
-                <a:solidFill>
-                  <a:schemeClr val="tx1"/>
-                </a:solidFill>
-                <a:latin typeface="Arial" charset="0"/>
-                <a:ea typeface="ＭＳ Ｐゴシック" charset="-128"/>
-              </a:defRPr>
-            </a:lvl1pPr>
-            <a:lvl2pPr marL="742950" indent="-285750" eaLnBrk="0" hangingPunct="0">
-              <a:defRPr sz="2400">
-                <a:solidFill>
-                  <a:schemeClr val="tx1"/>
-                </a:solidFill>
-                <a:latin typeface="Arial" charset="0"/>
-                <a:ea typeface="ＭＳ Ｐゴシック" charset="-128"/>
-              </a:defRPr>
-            </a:lvl2pPr>
-            <a:lvl3pPr marL="1143000" indent="-228600" eaLnBrk="0" hangingPunct="0">
-              <a:defRPr sz="2400">
-                <a:solidFill>
-                  <a:schemeClr val="tx1"/>
-                </a:solidFill>
-                <a:latin typeface="Arial" charset="0"/>
-                <a:ea typeface="ＭＳ Ｐゴシック" charset="-128"/>
-              </a:defRPr>
-            </a:lvl3pPr>
-            <a:lvl4pPr marL="1600200" indent="-228600" eaLnBrk="0" hangingPunct="0">
-              <a:defRPr sz="2400">
-                <a:solidFill>
-                  <a:schemeClr val="tx1"/>
-                </a:solidFill>
-                <a:latin typeface="Arial" charset="0"/>
-                <a:ea typeface="ＭＳ Ｐゴシック" charset="-128"/>
-              </a:defRPr>
-            </a:lvl4pPr>
-            <a:lvl5pPr marL="2057400" indent="-228600" eaLnBrk="0" hangingPunct="0">
-              <a:defRPr sz="2400">
-                <a:solidFill>
-                  <a:schemeClr val="tx1"/>
-                </a:solidFill>
-                <a:latin typeface="Arial" charset="0"/>
-                <a:ea typeface="ＭＳ Ｐゴシック" charset="-128"/>
-              </a:defRPr>
-            </a:lvl5pPr>
-            <a:lvl6pPr marL="2514600" indent="-228600" eaLnBrk="0" fontAlgn="base" hangingPunct="0">
-              <a:spcBef>
-                <a:spcPct val="0"/>
-              </a:spcBef>
-              <a:spcAft>
-                <a:spcPct val="0"/>
-              </a:spcAft>
-              <a:defRPr sz="2400">
-                <a:solidFill>
-                  <a:schemeClr val="tx1"/>
-                </a:solidFill>
-                <a:latin typeface="Arial" charset="0"/>
-                <a:ea typeface="ＭＳ Ｐゴシック" charset="-128"/>
-              </a:defRPr>
-            </a:lvl6pPr>
-            <a:lvl7pPr marL="2971800" indent="-228600" eaLnBrk="0" fontAlgn="base" hangingPunct="0">
-              <a:spcBef>
-                <a:spcPct val="0"/>
-              </a:spcBef>
-              <a:spcAft>
-                <a:spcPct val="0"/>
-              </a:spcAft>
-              <a:defRPr sz="2400">
-                <a:solidFill>
-                  <a:schemeClr val="tx1"/>
-                </a:solidFill>
-                <a:latin typeface="Arial" charset="0"/>
-                <a:ea typeface="ＭＳ Ｐゴシック" charset="-128"/>
-              </a:defRPr>
-            </a:lvl7pPr>
-            <a:lvl8pPr marL="3429000" indent="-228600" eaLnBrk="0" fontAlgn="base" hangingPunct="0">
-              <a:spcBef>
-                <a:spcPct val="0"/>
-              </a:spcBef>
-              <a:spcAft>
-                <a:spcPct val="0"/>
-              </a:spcAft>
-              <a:defRPr sz="2400">
-                <a:solidFill>
-                  <a:schemeClr val="tx1"/>
-                </a:solidFill>
-                <a:latin typeface="Arial" charset="0"/>
-                <a:ea typeface="ＭＳ Ｐゴシック" charset="-128"/>
-              </a:defRPr>
-            </a:lvl8pPr>
-            <a:lvl9pPr marL="3886200" indent="-228600" eaLnBrk="0" fontAlgn="base" hangingPunct="0">
-              <a:spcBef>
-                <a:spcPct val="0"/>
-              </a:spcBef>
-              <a:spcAft>
-                <a:spcPct val="0"/>
-              </a:spcAft>
-              <a:defRPr sz="2400">
-                <a:solidFill>
-                  <a:schemeClr val="tx1"/>
-                </a:solidFill>
-                <a:latin typeface="Arial" charset="0"/>
-                <a:ea typeface="ＭＳ Ｐゴシック" charset="-128"/>
-              </a:defRPr>
-            </a:lvl9pPr>
-          </a:lstStyle>
-          <a:p>
-            <a:pPr eaLnBrk="1" hangingPunct="1"/>
-            <a:r>
-              <a:rPr lang="en-US" altLang="x-none" sz="1200">
-                <a:latin typeface="Garamond" charset="0"/>
-              </a:rPr>
-              <a:t>Vincenzo Innocente</a:t>
-            </a:r>
-            <a:endParaRPr lang="it-IT" altLang="x-none" sz="1200">
-              <a:latin typeface="Garamond" charset="0"/>
-            </a:endParaRPr>
-          </a:p>
-        </p:txBody>
-      </p:sp>
-      <p:sp>
-        <p:nvSpPr>
-          <p:cNvPr id="40965" name="Slide Number Placeholder 4"/>
-          <p:cNvSpPr>
-            <a:spLocks noGrp="1"/>
-          </p:cNvSpPr>
-          <p:nvPr>
-            <p:ph type="sldNum" sz="quarter" idx="12"/>
-          </p:nvPr>
-        </p:nvSpPr>
-        <p:spPr>
-          <a:noFill/>
-          <a:ln/>
-          <a:extLst>
-            <a:ext uri="{909E8E84-426E-40DD-AFC4-6F175D3DCCD1}">
-              <a14:hiddenFill xmlns:a14="http://schemas.microsoft.com/office/drawing/2010/main">
-                <a:solidFill>
-                  <a:srgbClr val="FFFFFF"/>
-                </a:solidFill>
-              </a14:hiddenFill>
-            </a:ext>
-            <a:ext uri="{91240B29-F687-4F45-9708-019B960494DF}">
-              <a14:hiddenLine xmlns:a14="http://schemas.microsoft.com/office/drawing/2010/main" w="9525">
-                <a:solidFill>
-                  <a:srgbClr val="000000"/>
-                </a:solidFill>
-                <a:miter lim="800000"/>
-                <a:headEnd/>
-                <a:tailEnd/>
-              </a14:hiddenLine>
-            </a:ext>
-          </a:extLst>
-        </p:spPr>
-        <p:txBody>
-          <a:bodyPr/>
-          <a:lstStyle>
-            <a:lvl1pPr eaLnBrk="0" hangingPunct="0">
-              <a:defRPr sz="2400">
-                <a:solidFill>
-                  <a:schemeClr val="tx1"/>
-                </a:solidFill>
-                <a:latin typeface="Arial" charset="0"/>
-                <a:ea typeface="ＭＳ Ｐゴシック" charset="-128"/>
-              </a:defRPr>
-            </a:lvl1pPr>
-            <a:lvl2pPr marL="742950" indent="-285750" eaLnBrk="0" hangingPunct="0">
-              <a:defRPr sz="2400">
-                <a:solidFill>
-                  <a:schemeClr val="tx1"/>
-                </a:solidFill>
-                <a:latin typeface="Arial" charset="0"/>
-                <a:ea typeface="ＭＳ Ｐゴシック" charset="-128"/>
-              </a:defRPr>
-            </a:lvl2pPr>
-            <a:lvl3pPr marL="1143000" indent="-228600" eaLnBrk="0" hangingPunct="0">
-              <a:defRPr sz="2400">
-                <a:solidFill>
-                  <a:schemeClr val="tx1"/>
-                </a:solidFill>
-                <a:latin typeface="Arial" charset="0"/>
-                <a:ea typeface="ＭＳ Ｐゴシック" charset="-128"/>
-              </a:defRPr>
-            </a:lvl3pPr>
-            <a:lvl4pPr marL="1600200" indent="-228600" eaLnBrk="0" hangingPunct="0">
-              <a:defRPr sz="2400">
-                <a:solidFill>
-                  <a:schemeClr val="tx1"/>
-                </a:solidFill>
-                <a:latin typeface="Arial" charset="0"/>
-                <a:ea typeface="ＭＳ Ｐゴシック" charset="-128"/>
-              </a:defRPr>
-            </a:lvl4pPr>
-            <a:lvl5pPr marL="2057400" indent="-228600" eaLnBrk="0" hangingPunct="0">
-              <a:defRPr sz="2400">
-                <a:solidFill>
-                  <a:schemeClr val="tx1"/>
-                </a:solidFill>
-                <a:latin typeface="Arial" charset="0"/>
-                <a:ea typeface="ＭＳ Ｐゴシック" charset="-128"/>
-              </a:defRPr>
-            </a:lvl5pPr>
-            <a:lvl6pPr marL="2514600" indent="-228600" eaLnBrk="0" fontAlgn="base" hangingPunct="0">
-              <a:spcBef>
-                <a:spcPct val="0"/>
-              </a:spcBef>
-              <a:spcAft>
-                <a:spcPct val="0"/>
-              </a:spcAft>
-              <a:defRPr sz="2400">
-                <a:solidFill>
-                  <a:schemeClr val="tx1"/>
-                </a:solidFill>
-                <a:latin typeface="Arial" charset="0"/>
-                <a:ea typeface="ＭＳ Ｐゴシック" charset="-128"/>
-              </a:defRPr>
-            </a:lvl6pPr>
-            <a:lvl7pPr marL="2971800" indent="-228600" eaLnBrk="0" fontAlgn="base" hangingPunct="0">
-              <a:spcBef>
-                <a:spcPct val="0"/>
-              </a:spcBef>
-              <a:spcAft>
-                <a:spcPct val="0"/>
-              </a:spcAft>
-              <a:defRPr sz="2400">
-                <a:solidFill>
-                  <a:schemeClr val="tx1"/>
-                </a:solidFill>
-                <a:latin typeface="Arial" charset="0"/>
-                <a:ea typeface="ＭＳ Ｐゴシック" charset="-128"/>
-              </a:defRPr>
-            </a:lvl7pPr>
-            <a:lvl8pPr marL="3429000" indent="-228600" eaLnBrk="0" fontAlgn="base" hangingPunct="0">
-              <a:spcBef>
-                <a:spcPct val="0"/>
-              </a:spcBef>
-              <a:spcAft>
-                <a:spcPct val="0"/>
-              </a:spcAft>
-              <a:defRPr sz="2400">
-                <a:solidFill>
-                  <a:schemeClr val="tx1"/>
-                </a:solidFill>
-                <a:latin typeface="Arial" charset="0"/>
-                <a:ea typeface="ＭＳ Ｐゴシック" charset="-128"/>
-              </a:defRPr>
-            </a:lvl8pPr>
-            <a:lvl9pPr marL="3886200" indent="-228600" eaLnBrk="0" fontAlgn="base" hangingPunct="0">
-              <a:spcBef>
-                <a:spcPct val="0"/>
-              </a:spcBef>
-              <a:spcAft>
-                <a:spcPct val="0"/>
-              </a:spcAft>
-              <a:defRPr sz="2400">
-                <a:solidFill>
-                  <a:schemeClr val="tx1"/>
-                </a:solidFill>
-                <a:latin typeface="Arial" charset="0"/>
-                <a:ea typeface="ＭＳ Ｐゴシック" charset="-128"/>
-              </a:defRPr>
-            </a:lvl9pPr>
-          </a:lstStyle>
-          <a:p>
-            <a:pPr eaLnBrk="1" hangingPunct="1"/>
-            <a:fld id="{E74AEA11-21EC-8340-B6C0-1AF2C04111D7}" type="slidenum">
-              <a:rPr lang="it-IT" altLang="x-none" sz="1200">
-                <a:latin typeface="Garamond" charset="0"/>
-              </a:rPr>
-              <a:pPr eaLnBrk="1" hangingPunct="1"/>
-              <a:t>38</a:t>
-            </a:fld>
-            <a:endParaRPr lang="it-IT" altLang="x-none" sz="1200">
-              <a:latin typeface="Garamond" charset="0"/>
-            </a:endParaRPr>
-          </a:p>
-        </p:txBody>
-      </p:sp>
-    </p:spTree>
-  </p:cSld>
-  <p:clrMapOvr>
-    <a:masterClrMapping/>
-  </p:clrMapOvr>
-</p:sld>
-</file>
-
-<file path=ppt/slides/slide39.xml><?xml version="1.0" encoding="utf-8"?>
-<p:sld xmlns:a="http://schemas.openxmlformats.org/drawingml/2006/main" xmlns:r="http://schemas.openxmlformats.org/officeDocument/2006/relationships" xmlns:p="http://schemas.openxmlformats.org/presentationml/2006/main">
-  <p:cSld>
-    <p:spTree>
-      <p:nvGrpSpPr>
-        <p:cNvPr id="1" name=""/>
-        <p:cNvGrpSpPr/>
-        <p:nvPr/>
-      </p:nvGrpSpPr>
-      <p:grpSpPr>
-        <a:xfrm>
-          <a:off x="0" y="0"/>
-          <a:ext cx="0" cy="0"/>
-          <a:chOff x="0" y="0"/>
-          <a:chExt cx="0" cy="0"/>
-        </a:xfrm>
-      </p:grpSpPr>
-      <p:sp>
-        <p:nvSpPr>
-          <p:cNvPr id="41985" name="Title 6"/>
-          <p:cNvSpPr>
-            <a:spLocks noGrp="1"/>
-          </p:cNvSpPr>
-          <p:nvPr>
-            <p:ph type="title"/>
-          </p:nvPr>
-        </p:nvSpPr>
-        <p:spPr/>
-        <p:txBody>
-          <a:bodyPr/>
-          <a:lstStyle/>
-          <a:p>
-            <a:r>
-              <a:rPr lang="en-US" altLang="x-none" dirty="0"/>
-              <a:t>Definitions </a:t>
-            </a:r>
-          </a:p>
-        </p:txBody>
-      </p:sp>
-      <p:sp>
-        <p:nvSpPr>
-          <p:cNvPr id="41986" name="Content Placeholder 7"/>
-          <p:cNvSpPr>
-            <a:spLocks noGrp="1"/>
-          </p:cNvSpPr>
-          <p:nvPr>
-            <p:ph idx="1"/>
-          </p:nvPr>
-        </p:nvSpPr>
-        <p:spPr>
-          <a:xfrm>
-            <a:off x="575304" y="1371015"/>
-            <a:ext cx="8229600" cy="4895850"/>
-          </a:xfrm>
-        </p:spPr>
-        <p:txBody>
-          <a:bodyPr/>
-          <a:lstStyle/>
-          <a:p>
-            <a:r>
-              <a:rPr lang="en-US" altLang="x-none" dirty="0"/>
-              <a:t>Precision</a:t>
-            </a:r>
-          </a:p>
-          <a:p>
-            <a:pPr lvl="1"/>
-            <a:r>
-              <a:rPr lang="en-US" altLang="x-none" dirty="0"/>
-              <a:t>Numerical precision (in bits)</a:t>
-            </a:r>
-          </a:p>
-          <a:p>
-            <a:pPr lvl="2"/>
-            <a:r>
-              <a:rPr lang="en-US" altLang="x-none" dirty="0"/>
-              <a:t>For an instrument (ruler!) typically “half a tick” </a:t>
-            </a:r>
-          </a:p>
-          <a:p>
-            <a:pPr lvl="1"/>
-            <a:r>
-              <a:rPr lang="en-US" altLang="x-none" dirty="0"/>
-              <a:t>Can be evaluated using a higher </a:t>
-            </a:r>
-            <a:r>
-              <a:rPr lang="en-US" altLang="en-US" dirty="0"/>
-              <a:t>“</a:t>
-            </a:r>
-            <a:r>
-              <a:rPr lang="en-US" altLang="x-none" dirty="0"/>
-              <a:t>precision</a:t>
-            </a:r>
-            <a:r>
-              <a:rPr lang="en-US" altLang="en-US" dirty="0"/>
-              <a:t>”</a:t>
-            </a:r>
-            <a:endParaRPr lang="en-US" altLang="x-none" dirty="0"/>
-          </a:p>
-          <a:p>
-            <a:r>
-              <a:rPr lang="en-US" altLang="x-none" dirty="0"/>
-              <a:t>Accuracy</a:t>
-            </a:r>
-          </a:p>
-          <a:p>
-            <a:pPr lvl="1"/>
-            <a:r>
-              <a:rPr lang="en-US" altLang="x-none" dirty="0"/>
-              <a:t>The error w/r/t the truth</a:t>
-            </a:r>
-          </a:p>
-          <a:p>
-            <a:pPr lvl="1"/>
-            <a:r>
-              <a:rPr lang="en-US" altLang="x-none" dirty="0"/>
-              <a:t>Can be evaluated comparing different algorithms</a:t>
-            </a:r>
-          </a:p>
-          <a:p>
-            <a:pPr lvl="2"/>
-            <a:r>
-              <a:rPr lang="en-US" altLang="x-none" dirty="0"/>
-              <a:t>In science “comparing different experiments”</a:t>
-            </a:r>
-          </a:p>
-          <a:p>
-            <a:r>
-              <a:rPr lang="en-US" altLang="x-none" dirty="0"/>
-              <a:t>Target Accuracy</a:t>
-            </a:r>
-          </a:p>
-          <a:p>
-            <a:pPr lvl="1"/>
-            <a:r>
-              <a:rPr lang="en-US" altLang="x-none" dirty="0"/>
-              <a:t>The acceptable tolerance w/r/t the above</a:t>
-            </a:r>
-          </a:p>
-          <a:p>
-            <a:pPr lvl="1"/>
-            <a:r>
-              <a:rPr lang="en-US" altLang="x-none" dirty="0"/>
-              <a:t>Evaluated, for instance, w/r/t  know error on the truth </a:t>
-            </a:r>
-          </a:p>
-        </p:txBody>
-      </p:sp>
-      <p:sp>
-        <p:nvSpPr>
-          <p:cNvPr id="41987" name="Date Placeholder 3"/>
-          <p:cNvSpPr>
-            <a:spLocks noGrp="1"/>
-          </p:cNvSpPr>
-          <p:nvPr>
-            <p:ph type="dt" sz="quarter" idx="10"/>
-          </p:nvPr>
-        </p:nvSpPr>
-        <p:spPr>
-          <a:noFill/>
-          <a:ln/>
-          <a:extLst>
-            <a:ext uri="{909E8E84-426E-40DD-AFC4-6F175D3DCCD1}">
-              <a14:hiddenFill xmlns:a14="http://schemas.microsoft.com/office/drawing/2010/main">
-                <a:solidFill>
-                  <a:srgbClr val="FFFFFF"/>
-                </a:solidFill>
-              </a14:hiddenFill>
-            </a:ext>
-            <a:ext uri="{91240B29-F687-4F45-9708-019B960494DF}">
-              <a14:hiddenLine xmlns:a14="http://schemas.microsoft.com/office/drawing/2010/main" w="9525">
-                <a:solidFill>
-                  <a:srgbClr val="000000"/>
-                </a:solidFill>
-                <a:miter lim="800000"/>
-                <a:headEnd/>
-                <a:tailEnd/>
-              </a14:hiddenLine>
-            </a:ext>
-          </a:extLst>
-        </p:spPr>
-        <p:txBody>
-          <a:bodyPr/>
-          <a:lstStyle>
-            <a:lvl1pPr eaLnBrk="0" hangingPunct="0">
-              <a:defRPr sz="2400">
-                <a:solidFill>
-                  <a:schemeClr val="tx1"/>
-                </a:solidFill>
-                <a:latin typeface="Arial" charset="0"/>
-                <a:ea typeface="ＭＳ Ｐゴシック" charset="-128"/>
-              </a:defRPr>
-            </a:lvl1pPr>
-            <a:lvl2pPr marL="742950" indent="-285750" eaLnBrk="0" hangingPunct="0">
-              <a:defRPr sz="2400">
-                <a:solidFill>
-                  <a:schemeClr val="tx1"/>
-                </a:solidFill>
-                <a:latin typeface="Arial" charset="0"/>
-                <a:ea typeface="ＭＳ Ｐゴシック" charset="-128"/>
-              </a:defRPr>
-            </a:lvl2pPr>
-            <a:lvl3pPr marL="1143000" indent="-228600" eaLnBrk="0" hangingPunct="0">
-              <a:defRPr sz="2400">
-                <a:solidFill>
-                  <a:schemeClr val="tx1"/>
-                </a:solidFill>
-                <a:latin typeface="Arial" charset="0"/>
-                <a:ea typeface="ＭＳ Ｐゴシック" charset="-128"/>
-              </a:defRPr>
-            </a:lvl3pPr>
-            <a:lvl4pPr marL="1600200" indent="-228600" eaLnBrk="0" hangingPunct="0">
-              <a:defRPr sz="2400">
-                <a:solidFill>
-                  <a:schemeClr val="tx1"/>
-                </a:solidFill>
-                <a:latin typeface="Arial" charset="0"/>
-                <a:ea typeface="ＭＳ Ｐゴシック" charset="-128"/>
-              </a:defRPr>
-            </a:lvl4pPr>
-            <a:lvl5pPr marL="2057400" indent="-228600" eaLnBrk="0" hangingPunct="0">
-              <a:defRPr sz="2400">
-                <a:solidFill>
-                  <a:schemeClr val="tx1"/>
-                </a:solidFill>
-                <a:latin typeface="Arial" charset="0"/>
-                <a:ea typeface="ＭＳ Ｐゴシック" charset="-128"/>
-              </a:defRPr>
-            </a:lvl5pPr>
-            <a:lvl6pPr marL="2514600" indent="-228600" eaLnBrk="0" fontAlgn="base" hangingPunct="0">
-              <a:spcBef>
-                <a:spcPct val="0"/>
-              </a:spcBef>
-              <a:spcAft>
-                <a:spcPct val="0"/>
-              </a:spcAft>
-              <a:defRPr sz="2400">
-                <a:solidFill>
-                  <a:schemeClr val="tx1"/>
-                </a:solidFill>
-                <a:latin typeface="Arial" charset="0"/>
-                <a:ea typeface="ＭＳ Ｐゴシック" charset="-128"/>
-              </a:defRPr>
-            </a:lvl6pPr>
-            <a:lvl7pPr marL="2971800" indent="-228600" eaLnBrk="0" fontAlgn="base" hangingPunct="0">
-              <a:spcBef>
-                <a:spcPct val="0"/>
-              </a:spcBef>
-              <a:spcAft>
-                <a:spcPct val="0"/>
-              </a:spcAft>
-              <a:defRPr sz="2400">
-                <a:solidFill>
-                  <a:schemeClr val="tx1"/>
-                </a:solidFill>
-                <a:latin typeface="Arial" charset="0"/>
-                <a:ea typeface="ＭＳ Ｐゴシック" charset="-128"/>
-              </a:defRPr>
-            </a:lvl7pPr>
-            <a:lvl8pPr marL="3429000" indent="-228600" eaLnBrk="0" fontAlgn="base" hangingPunct="0">
-              <a:spcBef>
-                <a:spcPct val="0"/>
-              </a:spcBef>
-              <a:spcAft>
-                <a:spcPct val="0"/>
-              </a:spcAft>
-              <a:defRPr sz="2400">
-                <a:solidFill>
-                  <a:schemeClr val="tx1"/>
-                </a:solidFill>
-                <a:latin typeface="Arial" charset="0"/>
-                <a:ea typeface="ＭＳ Ｐゴシック" charset="-128"/>
-              </a:defRPr>
-            </a:lvl8pPr>
-            <a:lvl9pPr marL="3886200" indent="-228600" eaLnBrk="0" fontAlgn="base" hangingPunct="0">
-              <a:spcBef>
-                <a:spcPct val="0"/>
-              </a:spcBef>
-              <a:spcAft>
-                <a:spcPct val="0"/>
-              </a:spcAft>
-              <a:defRPr sz="2400">
-                <a:solidFill>
-                  <a:schemeClr val="tx1"/>
-                </a:solidFill>
-                <a:latin typeface="Arial" charset="0"/>
-                <a:ea typeface="ＭＳ Ｐゴシック" charset="-128"/>
-              </a:defRPr>
-            </a:lvl9pPr>
-          </a:lstStyle>
-          <a:p>
-            <a:pPr eaLnBrk="1" hangingPunct="1"/>
-            <a:r>
-              <a:rPr lang="en-US" altLang="x-none" sz="1200">
-                <a:latin typeface="Garamond" charset="0"/>
-              </a:rPr>
-              <a:t>22 October 2016</a:t>
-            </a:r>
-            <a:endParaRPr lang="it-IT" altLang="x-none" sz="1200">
-              <a:latin typeface="Garamond" charset="0"/>
-            </a:endParaRPr>
-          </a:p>
-        </p:txBody>
-      </p:sp>
-      <p:sp>
-        <p:nvSpPr>
-          <p:cNvPr id="41988" name="Footer Placeholder 4"/>
-          <p:cNvSpPr>
-            <a:spLocks noGrp="1"/>
-          </p:cNvSpPr>
-          <p:nvPr>
-            <p:ph type="ftr" sz="quarter" idx="11"/>
-          </p:nvPr>
-        </p:nvSpPr>
-        <p:spPr>
-          <a:noFill/>
-          <a:ln/>
-          <a:extLst>
-            <a:ext uri="{909E8E84-426E-40DD-AFC4-6F175D3DCCD1}">
-              <a14:hiddenFill xmlns:a14="http://schemas.microsoft.com/office/drawing/2010/main">
-                <a:solidFill>
-                  <a:srgbClr val="FFFFFF"/>
-                </a:solidFill>
-              </a14:hiddenFill>
-            </a:ext>
-            <a:ext uri="{91240B29-F687-4F45-9708-019B960494DF}">
-              <a14:hiddenLine xmlns:a14="http://schemas.microsoft.com/office/drawing/2010/main" w="9525">
-                <a:solidFill>
-                  <a:srgbClr val="000000"/>
-                </a:solidFill>
-                <a:miter lim="800000"/>
-                <a:headEnd/>
-                <a:tailEnd/>
-              </a14:hiddenLine>
-            </a:ext>
-          </a:extLst>
-        </p:spPr>
-        <p:txBody>
-          <a:bodyPr/>
-          <a:lstStyle>
-            <a:lvl1pPr eaLnBrk="0" hangingPunct="0">
-              <a:defRPr sz="2400">
-                <a:solidFill>
-                  <a:schemeClr val="tx1"/>
-                </a:solidFill>
-                <a:latin typeface="Arial" charset="0"/>
-                <a:ea typeface="ＭＳ Ｐゴシック" charset="-128"/>
-              </a:defRPr>
-            </a:lvl1pPr>
-            <a:lvl2pPr marL="742950" indent="-285750" eaLnBrk="0" hangingPunct="0">
-              <a:defRPr sz="2400">
-                <a:solidFill>
-                  <a:schemeClr val="tx1"/>
-                </a:solidFill>
-                <a:latin typeface="Arial" charset="0"/>
-                <a:ea typeface="ＭＳ Ｐゴシック" charset="-128"/>
-              </a:defRPr>
-            </a:lvl2pPr>
-            <a:lvl3pPr marL="1143000" indent="-228600" eaLnBrk="0" hangingPunct="0">
-              <a:defRPr sz="2400">
-                <a:solidFill>
-                  <a:schemeClr val="tx1"/>
-                </a:solidFill>
-                <a:latin typeface="Arial" charset="0"/>
-                <a:ea typeface="ＭＳ Ｐゴシック" charset="-128"/>
-              </a:defRPr>
-            </a:lvl3pPr>
-            <a:lvl4pPr marL="1600200" indent="-228600" eaLnBrk="0" hangingPunct="0">
-              <a:defRPr sz="2400">
-                <a:solidFill>
-                  <a:schemeClr val="tx1"/>
-                </a:solidFill>
-                <a:latin typeface="Arial" charset="0"/>
-                <a:ea typeface="ＭＳ Ｐゴシック" charset="-128"/>
-              </a:defRPr>
-            </a:lvl4pPr>
-            <a:lvl5pPr marL="2057400" indent="-228600" eaLnBrk="0" hangingPunct="0">
-              <a:defRPr sz="2400">
-                <a:solidFill>
-                  <a:schemeClr val="tx1"/>
-                </a:solidFill>
-                <a:latin typeface="Arial" charset="0"/>
-                <a:ea typeface="ＭＳ Ｐゴシック" charset="-128"/>
-              </a:defRPr>
-            </a:lvl5pPr>
-            <a:lvl6pPr marL="2514600" indent="-228600" eaLnBrk="0" fontAlgn="base" hangingPunct="0">
-              <a:spcBef>
-                <a:spcPct val="0"/>
-              </a:spcBef>
-              <a:spcAft>
-                <a:spcPct val="0"/>
-              </a:spcAft>
-              <a:defRPr sz="2400">
-                <a:solidFill>
-                  <a:schemeClr val="tx1"/>
-                </a:solidFill>
-                <a:latin typeface="Arial" charset="0"/>
-                <a:ea typeface="ＭＳ Ｐゴシック" charset="-128"/>
-              </a:defRPr>
-            </a:lvl6pPr>
-            <a:lvl7pPr marL="2971800" indent="-228600" eaLnBrk="0" fontAlgn="base" hangingPunct="0">
-              <a:spcBef>
-                <a:spcPct val="0"/>
-              </a:spcBef>
-              <a:spcAft>
-                <a:spcPct val="0"/>
-              </a:spcAft>
-              <a:defRPr sz="2400">
-                <a:solidFill>
-                  <a:schemeClr val="tx1"/>
-                </a:solidFill>
-                <a:latin typeface="Arial" charset="0"/>
-                <a:ea typeface="ＭＳ Ｐゴシック" charset="-128"/>
-              </a:defRPr>
-            </a:lvl7pPr>
-            <a:lvl8pPr marL="3429000" indent="-228600" eaLnBrk="0" fontAlgn="base" hangingPunct="0">
-              <a:spcBef>
-                <a:spcPct val="0"/>
-              </a:spcBef>
-              <a:spcAft>
-                <a:spcPct val="0"/>
-              </a:spcAft>
-              <a:defRPr sz="2400">
-                <a:solidFill>
-                  <a:schemeClr val="tx1"/>
-                </a:solidFill>
-                <a:latin typeface="Arial" charset="0"/>
-                <a:ea typeface="ＭＳ Ｐゴシック" charset="-128"/>
-              </a:defRPr>
-            </a:lvl8pPr>
-            <a:lvl9pPr marL="3886200" indent="-228600" eaLnBrk="0" fontAlgn="base" hangingPunct="0">
-              <a:spcBef>
-                <a:spcPct val="0"/>
-              </a:spcBef>
-              <a:spcAft>
-                <a:spcPct val="0"/>
-              </a:spcAft>
-              <a:defRPr sz="2400">
-                <a:solidFill>
-                  <a:schemeClr val="tx1"/>
-                </a:solidFill>
-                <a:latin typeface="Arial" charset="0"/>
-                <a:ea typeface="ＭＳ Ｐゴシック" charset="-128"/>
-              </a:defRPr>
-            </a:lvl9pPr>
-          </a:lstStyle>
-          <a:p>
-            <a:pPr eaLnBrk="1" hangingPunct="1"/>
-            <a:r>
-              <a:rPr lang="en-US" altLang="x-none" sz="1200">
-                <a:latin typeface="Garamond" charset="0"/>
-              </a:rPr>
-              <a:t>Vincenzo Innocente</a:t>
-            </a:r>
-            <a:endParaRPr lang="it-IT" altLang="x-none" sz="1200">
-              <a:latin typeface="Garamond" charset="0"/>
-            </a:endParaRPr>
-          </a:p>
-        </p:txBody>
-      </p:sp>
-      <p:sp>
-        <p:nvSpPr>
-          <p:cNvPr id="41989" name="Slide Number Placeholder 5"/>
-          <p:cNvSpPr>
-            <a:spLocks noGrp="1"/>
-          </p:cNvSpPr>
-          <p:nvPr>
-            <p:ph type="sldNum" sz="quarter" idx="12"/>
-          </p:nvPr>
-        </p:nvSpPr>
-        <p:spPr>
-          <a:noFill/>
-          <a:ln/>
-          <a:extLst>
-            <a:ext uri="{909E8E84-426E-40DD-AFC4-6F175D3DCCD1}">
-              <a14:hiddenFill xmlns:a14="http://schemas.microsoft.com/office/drawing/2010/main">
-                <a:solidFill>
-                  <a:srgbClr val="FFFFFF"/>
-                </a:solidFill>
-              </a14:hiddenFill>
-            </a:ext>
-            <a:ext uri="{91240B29-F687-4F45-9708-019B960494DF}">
-              <a14:hiddenLine xmlns:a14="http://schemas.microsoft.com/office/drawing/2010/main" w="9525">
-                <a:solidFill>
-                  <a:srgbClr val="000000"/>
-                </a:solidFill>
-                <a:miter lim="800000"/>
-                <a:headEnd/>
-                <a:tailEnd/>
-              </a14:hiddenLine>
-            </a:ext>
-          </a:extLst>
-        </p:spPr>
-        <p:txBody>
-          <a:bodyPr/>
-          <a:lstStyle>
-            <a:lvl1pPr eaLnBrk="0" hangingPunct="0">
-              <a:defRPr sz="2400">
-                <a:solidFill>
-                  <a:schemeClr val="tx1"/>
-                </a:solidFill>
-                <a:latin typeface="Arial" charset="0"/>
-                <a:ea typeface="ＭＳ Ｐゴシック" charset="-128"/>
-              </a:defRPr>
-            </a:lvl1pPr>
-            <a:lvl2pPr marL="742950" indent="-285750" eaLnBrk="0" hangingPunct="0">
-              <a:defRPr sz="2400">
-                <a:solidFill>
-                  <a:schemeClr val="tx1"/>
-                </a:solidFill>
-                <a:latin typeface="Arial" charset="0"/>
-                <a:ea typeface="ＭＳ Ｐゴシック" charset="-128"/>
-              </a:defRPr>
-            </a:lvl2pPr>
-            <a:lvl3pPr marL="1143000" indent="-228600" eaLnBrk="0" hangingPunct="0">
-              <a:defRPr sz="2400">
-                <a:solidFill>
-                  <a:schemeClr val="tx1"/>
-                </a:solidFill>
-                <a:latin typeface="Arial" charset="0"/>
-                <a:ea typeface="ＭＳ Ｐゴシック" charset="-128"/>
-              </a:defRPr>
-            </a:lvl3pPr>
-            <a:lvl4pPr marL="1600200" indent="-228600" eaLnBrk="0" hangingPunct="0">
-              <a:defRPr sz="2400">
-                <a:solidFill>
-                  <a:schemeClr val="tx1"/>
-                </a:solidFill>
-                <a:latin typeface="Arial" charset="0"/>
-                <a:ea typeface="ＭＳ Ｐゴシック" charset="-128"/>
-              </a:defRPr>
-            </a:lvl4pPr>
-            <a:lvl5pPr marL="2057400" indent="-228600" eaLnBrk="0" hangingPunct="0">
-              <a:defRPr sz="2400">
-                <a:solidFill>
-                  <a:schemeClr val="tx1"/>
-                </a:solidFill>
-                <a:latin typeface="Arial" charset="0"/>
-                <a:ea typeface="ＭＳ Ｐゴシック" charset="-128"/>
-              </a:defRPr>
-            </a:lvl5pPr>
-            <a:lvl6pPr marL="2514600" indent="-228600" eaLnBrk="0" fontAlgn="base" hangingPunct="0">
-              <a:spcBef>
-                <a:spcPct val="0"/>
-              </a:spcBef>
-              <a:spcAft>
-                <a:spcPct val="0"/>
-              </a:spcAft>
-              <a:defRPr sz="2400">
-                <a:solidFill>
-                  <a:schemeClr val="tx1"/>
-                </a:solidFill>
-                <a:latin typeface="Arial" charset="0"/>
-                <a:ea typeface="ＭＳ Ｐゴシック" charset="-128"/>
-              </a:defRPr>
-            </a:lvl6pPr>
-            <a:lvl7pPr marL="2971800" indent="-228600" eaLnBrk="0" fontAlgn="base" hangingPunct="0">
-              <a:spcBef>
-                <a:spcPct val="0"/>
-              </a:spcBef>
-              <a:spcAft>
-                <a:spcPct val="0"/>
-              </a:spcAft>
-              <a:defRPr sz="2400">
-                <a:solidFill>
-                  <a:schemeClr val="tx1"/>
-                </a:solidFill>
-                <a:latin typeface="Arial" charset="0"/>
-                <a:ea typeface="ＭＳ Ｐゴシック" charset="-128"/>
-              </a:defRPr>
-            </a:lvl7pPr>
-            <a:lvl8pPr marL="3429000" indent="-228600" eaLnBrk="0" fontAlgn="base" hangingPunct="0">
-              <a:spcBef>
-                <a:spcPct val="0"/>
-              </a:spcBef>
-              <a:spcAft>
-                <a:spcPct val="0"/>
-              </a:spcAft>
-              <a:defRPr sz="2400">
-                <a:solidFill>
-                  <a:schemeClr val="tx1"/>
-                </a:solidFill>
-                <a:latin typeface="Arial" charset="0"/>
-                <a:ea typeface="ＭＳ Ｐゴシック" charset="-128"/>
-              </a:defRPr>
-            </a:lvl8pPr>
-            <a:lvl9pPr marL="3886200" indent="-228600" eaLnBrk="0" fontAlgn="base" hangingPunct="0">
-              <a:spcBef>
-                <a:spcPct val="0"/>
-              </a:spcBef>
-              <a:spcAft>
-                <a:spcPct val="0"/>
-              </a:spcAft>
-              <a:defRPr sz="2400">
-                <a:solidFill>
-                  <a:schemeClr val="tx1"/>
-                </a:solidFill>
-                <a:latin typeface="Arial" charset="0"/>
-                <a:ea typeface="ＭＳ Ｐゴシック" charset="-128"/>
-              </a:defRPr>
-            </a:lvl9pPr>
-          </a:lstStyle>
-          <a:p>
-            <a:pPr eaLnBrk="1" hangingPunct="1"/>
-            <a:fld id="{AEDF44EA-EC42-6D42-8111-94D13066666A}" type="slidenum">
-              <a:rPr lang="it-IT" altLang="x-none" sz="1200">
-                <a:latin typeface="Garamond" charset="0"/>
-              </a:rPr>
-              <a:pPr eaLnBrk="1" hangingPunct="1"/>
-              <a:t>39</a:t>
-            </a:fld>
-            <a:endParaRPr lang="it-IT" altLang="x-none" sz="1200">
-              <a:latin typeface="Garamond" charset="0"/>
-            </a:endParaRPr>
-          </a:p>
-        </p:txBody>
-      </p:sp>
-    </p:spTree>
   </p:cSld>
   <p:clrMapOvr>
     <a:masterClrMapping/>
@@ -18644,6 +18065,1188 @@
       </p:grpSpPr>
       <p:sp>
         <p:nvSpPr>
+          <p:cNvPr id="51201" name="Title 1"/>
+          <p:cNvSpPr>
+            <a:spLocks noGrp="1"/>
+          </p:cNvSpPr>
+          <p:nvPr>
+            <p:ph type="title"/>
+          </p:nvPr>
+        </p:nvSpPr>
+        <p:spPr/>
+        <p:txBody>
+          <a:bodyPr/>
+          <a:lstStyle/>
+          <a:p>
+            <a:pPr>
+              <a:defRPr/>
+            </a:pPr>
+            <a:r>
+              <a:rPr lang="en-US" dirty="0">
+                <a:ea typeface="ＭＳ Ｐゴシック" charset="0"/>
+                <a:cs typeface="ＭＳ Ｐゴシック" charset="0"/>
+              </a:rPr>
+              <a:t>Precision, </a:t>
+            </a:r>
+            <a:r>
+              <a:rPr lang="en-US" dirty="0">
+                <a:solidFill>
+                  <a:srgbClr val="FF0000"/>
+                </a:solidFill>
+                <a:ea typeface="ＭＳ Ｐゴシック" charset="0"/>
+                <a:cs typeface="ＭＳ Ｐゴシック" charset="0"/>
+              </a:rPr>
+              <a:t>accuracy,</a:t>
+            </a:r>
+            <a:r>
+              <a:rPr lang="en-US" dirty="0">
+                <a:ea typeface="ＭＳ Ｐゴシック" charset="0"/>
+                <a:cs typeface="ＭＳ Ｐゴシック" charset="0"/>
+              </a:rPr>
+              <a:t> speed</a:t>
+            </a:r>
+          </a:p>
+        </p:txBody>
+      </p:sp>
+      <p:sp>
+        <p:nvSpPr>
+          <p:cNvPr id="40962" name="Text Placeholder 1"/>
+          <p:cNvSpPr>
+            <a:spLocks noGrp="1"/>
+          </p:cNvSpPr>
+          <p:nvPr>
+            <p:ph type="body" idx="1"/>
+          </p:nvPr>
+        </p:nvSpPr>
+        <p:spPr/>
+        <p:txBody>
+          <a:bodyPr/>
+          <a:lstStyle/>
+          <a:p>
+            <a:endParaRPr lang="en-US" altLang="x-none"/>
+          </a:p>
+        </p:txBody>
+      </p:sp>
+      <p:sp>
+        <p:nvSpPr>
+          <p:cNvPr id="40963" name="Date Placeholder 2"/>
+          <p:cNvSpPr>
+            <a:spLocks noGrp="1"/>
+          </p:cNvSpPr>
+          <p:nvPr>
+            <p:ph type="dt" sz="quarter" idx="10"/>
+          </p:nvPr>
+        </p:nvSpPr>
+        <p:spPr>
+          <a:noFill/>
+          <a:ln/>
+          <a:extLst>
+            <a:ext uri="{909E8E84-426E-40DD-AFC4-6F175D3DCCD1}">
+              <a14:hiddenFill xmlns:a14="http://schemas.microsoft.com/office/drawing/2010/main">
+                <a:solidFill>
+                  <a:srgbClr val="FFFFFF"/>
+                </a:solidFill>
+              </a14:hiddenFill>
+            </a:ext>
+            <a:ext uri="{91240B29-F687-4F45-9708-019B960494DF}">
+              <a14:hiddenLine xmlns:a14="http://schemas.microsoft.com/office/drawing/2010/main" w="9525">
+                <a:solidFill>
+                  <a:srgbClr val="000000"/>
+                </a:solidFill>
+                <a:miter lim="800000"/>
+                <a:headEnd/>
+                <a:tailEnd/>
+              </a14:hiddenLine>
+            </a:ext>
+          </a:extLst>
+        </p:spPr>
+        <p:txBody>
+          <a:bodyPr/>
+          <a:lstStyle>
+            <a:lvl1pPr eaLnBrk="0" hangingPunct="0">
+              <a:defRPr sz="2400">
+                <a:solidFill>
+                  <a:schemeClr val="tx1"/>
+                </a:solidFill>
+                <a:latin typeface="Arial" charset="0"/>
+                <a:ea typeface="ＭＳ Ｐゴシック" charset="-128"/>
+              </a:defRPr>
+            </a:lvl1pPr>
+            <a:lvl2pPr marL="742950" indent="-285750" eaLnBrk="0" hangingPunct="0">
+              <a:defRPr sz="2400">
+                <a:solidFill>
+                  <a:schemeClr val="tx1"/>
+                </a:solidFill>
+                <a:latin typeface="Arial" charset="0"/>
+                <a:ea typeface="ＭＳ Ｐゴシック" charset="-128"/>
+              </a:defRPr>
+            </a:lvl2pPr>
+            <a:lvl3pPr marL="1143000" indent="-228600" eaLnBrk="0" hangingPunct="0">
+              <a:defRPr sz="2400">
+                <a:solidFill>
+                  <a:schemeClr val="tx1"/>
+                </a:solidFill>
+                <a:latin typeface="Arial" charset="0"/>
+                <a:ea typeface="ＭＳ Ｐゴシック" charset="-128"/>
+              </a:defRPr>
+            </a:lvl3pPr>
+            <a:lvl4pPr marL="1600200" indent="-228600" eaLnBrk="0" hangingPunct="0">
+              <a:defRPr sz="2400">
+                <a:solidFill>
+                  <a:schemeClr val="tx1"/>
+                </a:solidFill>
+                <a:latin typeface="Arial" charset="0"/>
+                <a:ea typeface="ＭＳ Ｐゴシック" charset="-128"/>
+              </a:defRPr>
+            </a:lvl4pPr>
+            <a:lvl5pPr marL="2057400" indent="-228600" eaLnBrk="0" hangingPunct="0">
+              <a:defRPr sz="2400">
+                <a:solidFill>
+                  <a:schemeClr val="tx1"/>
+                </a:solidFill>
+                <a:latin typeface="Arial" charset="0"/>
+                <a:ea typeface="ＭＳ Ｐゴシック" charset="-128"/>
+              </a:defRPr>
+            </a:lvl5pPr>
+            <a:lvl6pPr marL="2514600" indent="-228600" eaLnBrk="0" fontAlgn="base" hangingPunct="0">
+              <a:spcBef>
+                <a:spcPct val="0"/>
+              </a:spcBef>
+              <a:spcAft>
+                <a:spcPct val="0"/>
+              </a:spcAft>
+              <a:defRPr sz="2400">
+                <a:solidFill>
+                  <a:schemeClr val="tx1"/>
+                </a:solidFill>
+                <a:latin typeface="Arial" charset="0"/>
+                <a:ea typeface="ＭＳ Ｐゴシック" charset="-128"/>
+              </a:defRPr>
+            </a:lvl6pPr>
+            <a:lvl7pPr marL="2971800" indent="-228600" eaLnBrk="0" fontAlgn="base" hangingPunct="0">
+              <a:spcBef>
+                <a:spcPct val="0"/>
+              </a:spcBef>
+              <a:spcAft>
+                <a:spcPct val="0"/>
+              </a:spcAft>
+              <a:defRPr sz="2400">
+                <a:solidFill>
+                  <a:schemeClr val="tx1"/>
+                </a:solidFill>
+                <a:latin typeface="Arial" charset="0"/>
+                <a:ea typeface="ＭＳ Ｐゴシック" charset="-128"/>
+              </a:defRPr>
+            </a:lvl7pPr>
+            <a:lvl8pPr marL="3429000" indent="-228600" eaLnBrk="0" fontAlgn="base" hangingPunct="0">
+              <a:spcBef>
+                <a:spcPct val="0"/>
+              </a:spcBef>
+              <a:spcAft>
+                <a:spcPct val="0"/>
+              </a:spcAft>
+              <a:defRPr sz="2400">
+                <a:solidFill>
+                  <a:schemeClr val="tx1"/>
+                </a:solidFill>
+                <a:latin typeface="Arial" charset="0"/>
+                <a:ea typeface="ＭＳ Ｐゴシック" charset="-128"/>
+              </a:defRPr>
+            </a:lvl8pPr>
+            <a:lvl9pPr marL="3886200" indent="-228600" eaLnBrk="0" fontAlgn="base" hangingPunct="0">
+              <a:spcBef>
+                <a:spcPct val="0"/>
+              </a:spcBef>
+              <a:spcAft>
+                <a:spcPct val="0"/>
+              </a:spcAft>
+              <a:defRPr sz="2400">
+                <a:solidFill>
+                  <a:schemeClr val="tx1"/>
+                </a:solidFill>
+                <a:latin typeface="Arial" charset="0"/>
+                <a:ea typeface="ＭＳ Ｐゴシック" charset="-128"/>
+              </a:defRPr>
+            </a:lvl9pPr>
+          </a:lstStyle>
+          <a:p>
+            <a:pPr eaLnBrk="1" hangingPunct="1"/>
+            <a:r>
+              <a:rPr lang="en-US" altLang="x-none" sz="1200">
+                <a:latin typeface="Garamond" charset="0"/>
+              </a:rPr>
+              <a:t>22 October 2016</a:t>
+            </a:r>
+            <a:endParaRPr lang="it-IT" altLang="x-none" sz="1200">
+              <a:latin typeface="Garamond" charset="0"/>
+            </a:endParaRPr>
+          </a:p>
+        </p:txBody>
+      </p:sp>
+      <p:sp>
+        <p:nvSpPr>
+          <p:cNvPr id="40964" name="Footer Placeholder 3"/>
+          <p:cNvSpPr>
+            <a:spLocks noGrp="1"/>
+          </p:cNvSpPr>
+          <p:nvPr>
+            <p:ph type="ftr" sz="quarter" idx="11"/>
+          </p:nvPr>
+        </p:nvSpPr>
+        <p:spPr>
+          <a:noFill/>
+          <a:ln/>
+          <a:extLst>
+            <a:ext uri="{909E8E84-426E-40DD-AFC4-6F175D3DCCD1}">
+              <a14:hiddenFill xmlns:a14="http://schemas.microsoft.com/office/drawing/2010/main">
+                <a:solidFill>
+                  <a:srgbClr val="FFFFFF"/>
+                </a:solidFill>
+              </a14:hiddenFill>
+            </a:ext>
+            <a:ext uri="{91240B29-F687-4F45-9708-019B960494DF}">
+              <a14:hiddenLine xmlns:a14="http://schemas.microsoft.com/office/drawing/2010/main" w="9525">
+                <a:solidFill>
+                  <a:srgbClr val="000000"/>
+                </a:solidFill>
+                <a:miter lim="800000"/>
+                <a:headEnd/>
+                <a:tailEnd/>
+              </a14:hiddenLine>
+            </a:ext>
+          </a:extLst>
+        </p:spPr>
+        <p:txBody>
+          <a:bodyPr/>
+          <a:lstStyle>
+            <a:lvl1pPr eaLnBrk="0" hangingPunct="0">
+              <a:defRPr sz="2400">
+                <a:solidFill>
+                  <a:schemeClr val="tx1"/>
+                </a:solidFill>
+                <a:latin typeface="Arial" charset="0"/>
+                <a:ea typeface="ＭＳ Ｐゴシック" charset="-128"/>
+              </a:defRPr>
+            </a:lvl1pPr>
+            <a:lvl2pPr marL="742950" indent="-285750" eaLnBrk="0" hangingPunct="0">
+              <a:defRPr sz="2400">
+                <a:solidFill>
+                  <a:schemeClr val="tx1"/>
+                </a:solidFill>
+                <a:latin typeface="Arial" charset="0"/>
+                <a:ea typeface="ＭＳ Ｐゴシック" charset="-128"/>
+              </a:defRPr>
+            </a:lvl2pPr>
+            <a:lvl3pPr marL="1143000" indent="-228600" eaLnBrk="0" hangingPunct="0">
+              <a:defRPr sz="2400">
+                <a:solidFill>
+                  <a:schemeClr val="tx1"/>
+                </a:solidFill>
+                <a:latin typeface="Arial" charset="0"/>
+                <a:ea typeface="ＭＳ Ｐゴシック" charset="-128"/>
+              </a:defRPr>
+            </a:lvl3pPr>
+            <a:lvl4pPr marL="1600200" indent="-228600" eaLnBrk="0" hangingPunct="0">
+              <a:defRPr sz="2400">
+                <a:solidFill>
+                  <a:schemeClr val="tx1"/>
+                </a:solidFill>
+                <a:latin typeface="Arial" charset="0"/>
+                <a:ea typeface="ＭＳ Ｐゴシック" charset="-128"/>
+              </a:defRPr>
+            </a:lvl4pPr>
+            <a:lvl5pPr marL="2057400" indent="-228600" eaLnBrk="0" hangingPunct="0">
+              <a:defRPr sz="2400">
+                <a:solidFill>
+                  <a:schemeClr val="tx1"/>
+                </a:solidFill>
+                <a:latin typeface="Arial" charset="0"/>
+                <a:ea typeface="ＭＳ Ｐゴシック" charset="-128"/>
+              </a:defRPr>
+            </a:lvl5pPr>
+            <a:lvl6pPr marL="2514600" indent="-228600" eaLnBrk="0" fontAlgn="base" hangingPunct="0">
+              <a:spcBef>
+                <a:spcPct val="0"/>
+              </a:spcBef>
+              <a:spcAft>
+                <a:spcPct val="0"/>
+              </a:spcAft>
+              <a:defRPr sz="2400">
+                <a:solidFill>
+                  <a:schemeClr val="tx1"/>
+                </a:solidFill>
+                <a:latin typeface="Arial" charset="0"/>
+                <a:ea typeface="ＭＳ Ｐゴシック" charset="-128"/>
+              </a:defRPr>
+            </a:lvl6pPr>
+            <a:lvl7pPr marL="2971800" indent="-228600" eaLnBrk="0" fontAlgn="base" hangingPunct="0">
+              <a:spcBef>
+                <a:spcPct val="0"/>
+              </a:spcBef>
+              <a:spcAft>
+                <a:spcPct val="0"/>
+              </a:spcAft>
+              <a:defRPr sz="2400">
+                <a:solidFill>
+                  <a:schemeClr val="tx1"/>
+                </a:solidFill>
+                <a:latin typeface="Arial" charset="0"/>
+                <a:ea typeface="ＭＳ Ｐゴシック" charset="-128"/>
+              </a:defRPr>
+            </a:lvl7pPr>
+            <a:lvl8pPr marL="3429000" indent="-228600" eaLnBrk="0" fontAlgn="base" hangingPunct="0">
+              <a:spcBef>
+                <a:spcPct val="0"/>
+              </a:spcBef>
+              <a:spcAft>
+                <a:spcPct val="0"/>
+              </a:spcAft>
+              <a:defRPr sz="2400">
+                <a:solidFill>
+                  <a:schemeClr val="tx1"/>
+                </a:solidFill>
+                <a:latin typeface="Arial" charset="0"/>
+                <a:ea typeface="ＭＳ Ｐゴシック" charset="-128"/>
+              </a:defRPr>
+            </a:lvl8pPr>
+            <a:lvl9pPr marL="3886200" indent="-228600" eaLnBrk="0" fontAlgn="base" hangingPunct="0">
+              <a:spcBef>
+                <a:spcPct val="0"/>
+              </a:spcBef>
+              <a:spcAft>
+                <a:spcPct val="0"/>
+              </a:spcAft>
+              <a:defRPr sz="2400">
+                <a:solidFill>
+                  <a:schemeClr val="tx1"/>
+                </a:solidFill>
+                <a:latin typeface="Arial" charset="0"/>
+                <a:ea typeface="ＭＳ Ｐゴシック" charset="-128"/>
+              </a:defRPr>
+            </a:lvl9pPr>
+          </a:lstStyle>
+          <a:p>
+            <a:pPr eaLnBrk="1" hangingPunct="1"/>
+            <a:r>
+              <a:rPr lang="en-US" altLang="x-none" sz="1200">
+                <a:latin typeface="Garamond" charset="0"/>
+              </a:rPr>
+              <a:t>Vincenzo Innocente</a:t>
+            </a:r>
+            <a:endParaRPr lang="it-IT" altLang="x-none" sz="1200">
+              <a:latin typeface="Garamond" charset="0"/>
+            </a:endParaRPr>
+          </a:p>
+        </p:txBody>
+      </p:sp>
+      <p:sp>
+        <p:nvSpPr>
+          <p:cNvPr id="40965" name="Slide Number Placeholder 4"/>
+          <p:cNvSpPr>
+            <a:spLocks noGrp="1"/>
+          </p:cNvSpPr>
+          <p:nvPr>
+            <p:ph type="sldNum" sz="quarter" idx="12"/>
+          </p:nvPr>
+        </p:nvSpPr>
+        <p:spPr>
+          <a:noFill/>
+          <a:ln/>
+          <a:extLst>
+            <a:ext uri="{909E8E84-426E-40DD-AFC4-6F175D3DCCD1}">
+              <a14:hiddenFill xmlns:a14="http://schemas.microsoft.com/office/drawing/2010/main">
+                <a:solidFill>
+                  <a:srgbClr val="FFFFFF"/>
+                </a:solidFill>
+              </a14:hiddenFill>
+            </a:ext>
+            <a:ext uri="{91240B29-F687-4F45-9708-019B960494DF}">
+              <a14:hiddenLine xmlns:a14="http://schemas.microsoft.com/office/drawing/2010/main" w="9525">
+                <a:solidFill>
+                  <a:srgbClr val="000000"/>
+                </a:solidFill>
+                <a:miter lim="800000"/>
+                <a:headEnd/>
+                <a:tailEnd/>
+              </a14:hiddenLine>
+            </a:ext>
+          </a:extLst>
+        </p:spPr>
+        <p:txBody>
+          <a:bodyPr/>
+          <a:lstStyle>
+            <a:lvl1pPr eaLnBrk="0" hangingPunct="0">
+              <a:defRPr sz="2400">
+                <a:solidFill>
+                  <a:schemeClr val="tx1"/>
+                </a:solidFill>
+                <a:latin typeface="Arial" charset="0"/>
+                <a:ea typeface="ＭＳ Ｐゴシック" charset="-128"/>
+              </a:defRPr>
+            </a:lvl1pPr>
+            <a:lvl2pPr marL="742950" indent="-285750" eaLnBrk="0" hangingPunct="0">
+              <a:defRPr sz="2400">
+                <a:solidFill>
+                  <a:schemeClr val="tx1"/>
+                </a:solidFill>
+                <a:latin typeface="Arial" charset="0"/>
+                <a:ea typeface="ＭＳ Ｐゴシック" charset="-128"/>
+              </a:defRPr>
+            </a:lvl2pPr>
+            <a:lvl3pPr marL="1143000" indent="-228600" eaLnBrk="0" hangingPunct="0">
+              <a:defRPr sz="2400">
+                <a:solidFill>
+                  <a:schemeClr val="tx1"/>
+                </a:solidFill>
+                <a:latin typeface="Arial" charset="0"/>
+                <a:ea typeface="ＭＳ Ｐゴシック" charset="-128"/>
+              </a:defRPr>
+            </a:lvl3pPr>
+            <a:lvl4pPr marL="1600200" indent="-228600" eaLnBrk="0" hangingPunct="0">
+              <a:defRPr sz="2400">
+                <a:solidFill>
+                  <a:schemeClr val="tx1"/>
+                </a:solidFill>
+                <a:latin typeface="Arial" charset="0"/>
+                <a:ea typeface="ＭＳ Ｐゴシック" charset="-128"/>
+              </a:defRPr>
+            </a:lvl4pPr>
+            <a:lvl5pPr marL="2057400" indent="-228600" eaLnBrk="0" hangingPunct="0">
+              <a:defRPr sz="2400">
+                <a:solidFill>
+                  <a:schemeClr val="tx1"/>
+                </a:solidFill>
+                <a:latin typeface="Arial" charset="0"/>
+                <a:ea typeface="ＭＳ Ｐゴシック" charset="-128"/>
+              </a:defRPr>
+            </a:lvl5pPr>
+            <a:lvl6pPr marL="2514600" indent="-228600" eaLnBrk="0" fontAlgn="base" hangingPunct="0">
+              <a:spcBef>
+                <a:spcPct val="0"/>
+              </a:spcBef>
+              <a:spcAft>
+                <a:spcPct val="0"/>
+              </a:spcAft>
+              <a:defRPr sz="2400">
+                <a:solidFill>
+                  <a:schemeClr val="tx1"/>
+                </a:solidFill>
+                <a:latin typeface="Arial" charset="0"/>
+                <a:ea typeface="ＭＳ Ｐゴシック" charset="-128"/>
+              </a:defRPr>
+            </a:lvl6pPr>
+            <a:lvl7pPr marL="2971800" indent="-228600" eaLnBrk="0" fontAlgn="base" hangingPunct="0">
+              <a:spcBef>
+                <a:spcPct val="0"/>
+              </a:spcBef>
+              <a:spcAft>
+                <a:spcPct val="0"/>
+              </a:spcAft>
+              <a:defRPr sz="2400">
+                <a:solidFill>
+                  <a:schemeClr val="tx1"/>
+                </a:solidFill>
+                <a:latin typeface="Arial" charset="0"/>
+                <a:ea typeface="ＭＳ Ｐゴシック" charset="-128"/>
+              </a:defRPr>
+            </a:lvl7pPr>
+            <a:lvl8pPr marL="3429000" indent="-228600" eaLnBrk="0" fontAlgn="base" hangingPunct="0">
+              <a:spcBef>
+                <a:spcPct val="0"/>
+              </a:spcBef>
+              <a:spcAft>
+                <a:spcPct val="0"/>
+              </a:spcAft>
+              <a:defRPr sz="2400">
+                <a:solidFill>
+                  <a:schemeClr val="tx1"/>
+                </a:solidFill>
+                <a:latin typeface="Arial" charset="0"/>
+                <a:ea typeface="ＭＳ Ｐゴシック" charset="-128"/>
+              </a:defRPr>
+            </a:lvl8pPr>
+            <a:lvl9pPr marL="3886200" indent="-228600" eaLnBrk="0" fontAlgn="base" hangingPunct="0">
+              <a:spcBef>
+                <a:spcPct val="0"/>
+              </a:spcBef>
+              <a:spcAft>
+                <a:spcPct val="0"/>
+              </a:spcAft>
+              <a:defRPr sz="2400">
+                <a:solidFill>
+                  <a:schemeClr val="tx1"/>
+                </a:solidFill>
+                <a:latin typeface="Arial" charset="0"/>
+                <a:ea typeface="ＭＳ Ｐゴシック" charset="-128"/>
+              </a:defRPr>
+            </a:lvl9pPr>
+          </a:lstStyle>
+          <a:p>
+            <a:pPr eaLnBrk="1" hangingPunct="1"/>
+            <a:fld id="{E74AEA11-21EC-8340-B6C0-1AF2C04111D7}" type="slidenum">
+              <a:rPr lang="it-IT" altLang="x-none" sz="1200">
+                <a:latin typeface="Garamond" charset="0"/>
+              </a:rPr>
+              <a:pPr eaLnBrk="1" hangingPunct="1"/>
+              <a:t>40</a:t>
+            </a:fld>
+            <a:endParaRPr lang="it-IT" altLang="x-none" sz="1200">
+              <a:latin typeface="Garamond" charset="0"/>
+            </a:endParaRPr>
+          </a:p>
+        </p:txBody>
+      </p:sp>
+    </p:spTree>
+  </p:cSld>
+  <p:clrMapOvr>
+    <a:masterClrMapping/>
+  </p:clrMapOvr>
+</p:sld>
+</file>
+
+<file path=ppt/slides/slide41.xml><?xml version="1.0" encoding="utf-8"?>
+<p:sld xmlns:a="http://schemas.openxmlformats.org/drawingml/2006/main" xmlns:r="http://schemas.openxmlformats.org/officeDocument/2006/relationships" xmlns:p="http://schemas.openxmlformats.org/presentationml/2006/main">
+  <p:cSld>
+    <p:spTree>
+      <p:nvGrpSpPr>
+        <p:cNvPr id="1" name=""/>
+        <p:cNvGrpSpPr/>
+        <p:nvPr/>
+      </p:nvGrpSpPr>
+      <p:grpSpPr>
+        <a:xfrm>
+          <a:off x="0" y="0"/>
+          <a:ext cx="0" cy="0"/>
+          <a:chOff x="0" y="0"/>
+          <a:chExt cx="0" cy="0"/>
+        </a:xfrm>
+      </p:grpSpPr>
+      <p:sp>
+        <p:nvSpPr>
+          <p:cNvPr id="41985" name="Title 6"/>
+          <p:cNvSpPr>
+            <a:spLocks noGrp="1"/>
+          </p:cNvSpPr>
+          <p:nvPr>
+            <p:ph type="title"/>
+          </p:nvPr>
+        </p:nvSpPr>
+        <p:spPr/>
+        <p:txBody>
+          <a:bodyPr/>
+          <a:lstStyle/>
+          <a:p>
+            <a:r>
+              <a:rPr lang="en-US" altLang="x-none" dirty="0"/>
+              <a:t>Definitions </a:t>
+            </a:r>
+          </a:p>
+        </p:txBody>
+      </p:sp>
+      <p:sp>
+        <p:nvSpPr>
+          <p:cNvPr id="41986" name="Content Placeholder 7"/>
+          <p:cNvSpPr>
+            <a:spLocks noGrp="1"/>
+          </p:cNvSpPr>
+          <p:nvPr>
+            <p:ph idx="1"/>
+          </p:nvPr>
+        </p:nvSpPr>
+        <p:spPr>
+          <a:xfrm>
+            <a:off x="575304" y="1371015"/>
+            <a:ext cx="8229600" cy="4895850"/>
+          </a:xfrm>
+        </p:spPr>
+        <p:txBody>
+          <a:bodyPr/>
+          <a:lstStyle/>
+          <a:p>
+            <a:r>
+              <a:rPr lang="en-US" altLang="x-none" dirty="0"/>
+              <a:t>Precision</a:t>
+            </a:r>
+          </a:p>
+          <a:p>
+            <a:pPr lvl="1"/>
+            <a:r>
+              <a:rPr lang="en-US" altLang="x-none" dirty="0"/>
+              <a:t>Numerical precision (in bits)</a:t>
+            </a:r>
+          </a:p>
+          <a:p>
+            <a:pPr lvl="2"/>
+            <a:r>
+              <a:rPr lang="en-US" altLang="x-none" dirty="0"/>
+              <a:t>For an instrument (ruler!) typically “half a tick” </a:t>
+            </a:r>
+          </a:p>
+          <a:p>
+            <a:pPr lvl="1"/>
+            <a:r>
+              <a:rPr lang="en-US" altLang="x-none" dirty="0"/>
+              <a:t>Can be evaluated using a higher </a:t>
+            </a:r>
+            <a:r>
+              <a:rPr lang="en-US" altLang="en-US" dirty="0"/>
+              <a:t>“</a:t>
+            </a:r>
+            <a:r>
+              <a:rPr lang="en-US" altLang="x-none" dirty="0"/>
+              <a:t>precision</a:t>
+            </a:r>
+            <a:r>
+              <a:rPr lang="en-US" altLang="en-US" dirty="0"/>
+              <a:t>”</a:t>
+            </a:r>
+            <a:endParaRPr lang="en-US" altLang="x-none" dirty="0"/>
+          </a:p>
+          <a:p>
+            <a:r>
+              <a:rPr lang="en-US" altLang="x-none" dirty="0"/>
+              <a:t>Accuracy</a:t>
+            </a:r>
+          </a:p>
+          <a:p>
+            <a:pPr lvl="1"/>
+            <a:r>
+              <a:rPr lang="en-US" altLang="x-none" dirty="0"/>
+              <a:t>The error w/r/t the truth</a:t>
+            </a:r>
+          </a:p>
+          <a:p>
+            <a:pPr lvl="1"/>
+            <a:r>
+              <a:rPr lang="en-US" altLang="x-none" dirty="0"/>
+              <a:t>Can be evaluated comparing different algorithms</a:t>
+            </a:r>
+          </a:p>
+          <a:p>
+            <a:pPr lvl="2"/>
+            <a:r>
+              <a:rPr lang="en-US" altLang="x-none" dirty="0"/>
+              <a:t>In science “comparing different experiments”</a:t>
+            </a:r>
+          </a:p>
+          <a:p>
+            <a:r>
+              <a:rPr lang="en-US" altLang="x-none" dirty="0"/>
+              <a:t>Target Accuracy</a:t>
+            </a:r>
+          </a:p>
+          <a:p>
+            <a:pPr lvl="1"/>
+            <a:r>
+              <a:rPr lang="en-US" altLang="x-none" dirty="0"/>
+              <a:t>The acceptable tolerance w/r/t the above</a:t>
+            </a:r>
+          </a:p>
+          <a:p>
+            <a:pPr lvl="1"/>
+            <a:r>
+              <a:rPr lang="en-US" altLang="x-none" dirty="0"/>
+              <a:t>Evaluated, for instance, w/r/t  know error on the truth </a:t>
+            </a:r>
+          </a:p>
+        </p:txBody>
+      </p:sp>
+      <p:sp>
+        <p:nvSpPr>
+          <p:cNvPr id="41987" name="Date Placeholder 3"/>
+          <p:cNvSpPr>
+            <a:spLocks noGrp="1"/>
+          </p:cNvSpPr>
+          <p:nvPr>
+            <p:ph type="dt" sz="quarter" idx="10"/>
+          </p:nvPr>
+        </p:nvSpPr>
+        <p:spPr>
+          <a:noFill/>
+          <a:ln/>
+          <a:extLst>
+            <a:ext uri="{909E8E84-426E-40DD-AFC4-6F175D3DCCD1}">
+              <a14:hiddenFill xmlns:a14="http://schemas.microsoft.com/office/drawing/2010/main">
+                <a:solidFill>
+                  <a:srgbClr val="FFFFFF"/>
+                </a:solidFill>
+              </a14:hiddenFill>
+            </a:ext>
+            <a:ext uri="{91240B29-F687-4F45-9708-019B960494DF}">
+              <a14:hiddenLine xmlns:a14="http://schemas.microsoft.com/office/drawing/2010/main" w="9525">
+                <a:solidFill>
+                  <a:srgbClr val="000000"/>
+                </a:solidFill>
+                <a:miter lim="800000"/>
+                <a:headEnd/>
+                <a:tailEnd/>
+              </a14:hiddenLine>
+            </a:ext>
+          </a:extLst>
+        </p:spPr>
+        <p:txBody>
+          <a:bodyPr/>
+          <a:lstStyle>
+            <a:lvl1pPr eaLnBrk="0" hangingPunct="0">
+              <a:defRPr sz="2400">
+                <a:solidFill>
+                  <a:schemeClr val="tx1"/>
+                </a:solidFill>
+                <a:latin typeface="Arial" charset="0"/>
+                <a:ea typeface="ＭＳ Ｐゴシック" charset="-128"/>
+              </a:defRPr>
+            </a:lvl1pPr>
+            <a:lvl2pPr marL="742950" indent="-285750" eaLnBrk="0" hangingPunct="0">
+              <a:defRPr sz="2400">
+                <a:solidFill>
+                  <a:schemeClr val="tx1"/>
+                </a:solidFill>
+                <a:latin typeface="Arial" charset="0"/>
+                <a:ea typeface="ＭＳ Ｐゴシック" charset="-128"/>
+              </a:defRPr>
+            </a:lvl2pPr>
+            <a:lvl3pPr marL="1143000" indent="-228600" eaLnBrk="0" hangingPunct="0">
+              <a:defRPr sz="2400">
+                <a:solidFill>
+                  <a:schemeClr val="tx1"/>
+                </a:solidFill>
+                <a:latin typeface="Arial" charset="0"/>
+                <a:ea typeface="ＭＳ Ｐゴシック" charset="-128"/>
+              </a:defRPr>
+            </a:lvl3pPr>
+            <a:lvl4pPr marL="1600200" indent="-228600" eaLnBrk="0" hangingPunct="0">
+              <a:defRPr sz="2400">
+                <a:solidFill>
+                  <a:schemeClr val="tx1"/>
+                </a:solidFill>
+                <a:latin typeface="Arial" charset="0"/>
+                <a:ea typeface="ＭＳ Ｐゴシック" charset="-128"/>
+              </a:defRPr>
+            </a:lvl4pPr>
+            <a:lvl5pPr marL="2057400" indent="-228600" eaLnBrk="0" hangingPunct="0">
+              <a:defRPr sz="2400">
+                <a:solidFill>
+                  <a:schemeClr val="tx1"/>
+                </a:solidFill>
+                <a:latin typeface="Arial" charset="0"/>
+                <a:ea typeface="ＭＳ Ｐゴシック" charset="-128"/>
+              </a:defRPr>
+            </a:lvl5pPr>
+            <a:lvl6pPr marL="2514600" indent="-228600" eaLnBrk="0" fontAlgn="base" hangingPunct="0">
+              <a:spcBef>
+                <a:spcPct val="0"/>
+              </a:spcBef>
+              <a:spcAft>
+                <a:spcPct val="0"/>
+              </a:spcAft>
+              <a:defRPr sz="2400">
+                <a:solidFill>
+                  <a:schemeClr val="tx1"/>
+                </a:solidFill>
+                <a:latin typeface="Arial" charset="0"/>
+                <a:ea typeface="ＭＳ Ｐゴシック" charset="-128"/>
+              </a:defRPr>
+            </a:lvl6pPr>
+            <a:lvl7pPr marL="2971800" indent="-228600" eaLnBrk="0" fontAlgn="base" hangingPunct="0">
+              <a:spcBef>
+                <a:spcPct val="0"/>
+              </a:spcBef>
+              <a:spcAft>
+                <a:spcPct val="0"/>
+              </a:spcAft>
+              <a:defRPr sz="2400">
+                <a:solidFill>
+                  <a:schemeClr val="tx1"/>
+                </a:solidFill>
+                <a:latin typeface="Arial" charset="0"/>
+                <a:ea typeface="ＭＳ Ｐゴシック" charset="-128"/>
+              </a:defRPr>
+            </a:lvl7pPr>
+            <a:lvl8pPr marL="3429000" indent="-228600" eaLnBrk="0" fontAlgn="base" hangingPunct="0">
+              <a:spcBef>
+                <a:spcPct val="0"/>
+              </a:spcBef>
+              <a:spcAft>
+                <a:spcPct val="0"/>
+              </a:spcAft>
+              <a:defRPr sz="2400">
+                <a:solidFill>
+                  <a:schemeClr val="tx1"/>
+                </a:solidFill>
+                <a:latin typeface="Arial" charset="0"/>
+                <a:ea typeface="ＭＳ Ｐゴシック" charset="-128"/>
+              </a:defRPr>
+            </a:lvl8pPr>
+            <a:lvl9pPr marL="3886200" indent="-228600" eaLnBrk="0" fontAlgn="base" hangingPunct="0">
+              <a:spcBef>
+                <a:spcPct val="0"/>
+              </a:spcBef>
+              <a:spcAft>
+                <a:spcPct val="0"/>
+              </a:spcAft>
+              <a:defRPr sz="2400">
+                <a:solidFill>
+                  <a:schemeClr val="tx1"/>
+                </a:solidFill>
+                <a:latin typeface="Arial" charset="0"/>
+                <a:ea typeface="ＭＳ Ｐゴシック" charset="-128"/>
+              </a:defRPr>
+            </a:lvl9pPr>
+          </a:lstStyle>
+          <a:p>
+            <a:pPr eaLnBrk="1" hangingPunct="1"/>
+            <a:r>
+              <a:rPr lang="en-US" altLang="x-none" sz="1200">
+                <a:latin typeface="Garamond" charset="0"/>
+              </a:rPr>
+              <a:t>22 October 2016</a:t>
+            </a:r>
+            <a:endParaRPr lang="it-IT" altLang="x-none" sz="1200">
+              <a:latin typeface="Garamond" charset="0"/>
+            </a:endParaRPr>
+          </a:p>
+        </p:txBody>
+      </p:sp>
+      <p:sp>
+        <p:nvSpPr>
+          <p:cNvPr id="41988" name="Footer Placeholder 4"/>
+          <p:cNvSpPr>
+            <a:spLocks noGrp="1"/>
+          </p:cNvSpPr>
+          <p:nvPr>
+            <p:ph type="ftr" sz="quarter" idx="11"/>
+          </p:nvPr>
+        </p:nvSpPr>
+        <p:spPr>
+          <a:noFill/>
+          <a:ln/>
+          <a:extLst>
+            <a:ext uri="{909E8E84-426E-40DD-AFC4-6F175D3DCCD1}">
+              <a14:hiddenFill xmlns:a14="http://schemas.microsoft.com/office/drawing/2010/main">
+                <a:solidFill>
+                  <a:srgbClr val="FFFFFF"/>
+                </a:solidFill>
+              </a14:hiddenFill>
+            </a:ext>
+            <a:ext uri="{91240B29-F687-4F45-9708-019B960494DF}">
+              <a14:hiddenLine xmlns:a14="http://schemas.microsoft.com/office/drawing/2010/main" w="9525">
+                <a:solidFill>
+                  <a:srgbClr val="000000"/>
+                </a:solidFill>
+                <a:miter lim="800000"/>
+                <a:headEnd/>
+                <a:tailEnd/>
+              </a14:hiddenLine>
+            </a:ext>
+          </a:extLst>
+        </p:spPr>
+        <p:txBody>
+          <a:bodyPr/>
+          <a:lstStyle>
+            <a:lvl1pPr eaLnBrk="0" hangingPunct="0">
+              <a:defRPr sz="2400">
+                <a:solidFill>
+                  <a:schemeClr val="tx1"/>
+                </a:solidFill>
+                <a:latin typeface="Arial" charset="0"/>
+                <a:ea typeface="ＭＳ Ｐゴシック" charset="-128"/>
+              </a:defRPr>
+            </a:lvl1pPr>
+            <a:lvl2pPr marL="742950" indent="-285750" eaLnBrk="0" hangingPunct="0">
+              <a:defRPr sz="2400">
+                <a:solidFill>
+                  <a:schemeClr val="tx1"/>
+                </a:solidFill>
+                <a:latin typeface="Arial" charset="0"/>
+                <a:ea typeface="ＭＳ Ｐゴシック" charset="-128"/>
+              </a:defRPr>
+            </a:lvl2pPr>
+            <a:lvl3pPr marL="1143000" indent="-228600" eaLnBrk="0" hangingPunct="0">
+              <a:defRPr sz="2400">
+                <a:solidFill>
+                  <a:schemeClr val="tx1"/>
+                </a:solidFill>
+                <a:latin typeface="Arial" charset="0"/>
+                <a:ea typeface="ＭＳ Ｐゴシック" charset="-128"/>
+              </a:defRPr>
+            </a:lvl3pPr>
+            <a:lvl4pPr marL="1600200" indent="-228600" eaLnBrk="0" hangingPunct="0">
+              <a:defRPr sz="2400">
+                <a:solidFill>
+                  <a:schemeClr val="tx1"/>
+                </a:solidFill>
+                <a:latin typeface="Arial" charset="0"/>
+                <a:ea typeface="ＭＳ Ｐゴシック" charset="-128"/>
+              </a:defRPr>
+            </a:lvl4pPr>
+            <a:lvl5pPr marL="2057400" indent="-228600" eaLnBrk="0" hangingPunct="0">
+              <a:defRPr sz="2400">
+                <a:solidFill>
+                  <a:schemeClr val="tx1"/>
+                </a:solidFill>
+                <a:latin typeface="Arial" charset="0"/>
+                <a:ea typeface="ＭＳ Ｐゴシック" charset="-128"/>
+              </a:defRPr>
+            </a:lvl5pPr>
+            <a:lvl6pPr marL="2514600" indent="-228600" eaLnBrk="0" fontAlgn="base" hangingPunct="0">
+              <a:spcBef>
+                <a:spcPct val="0"/>
+              </a:spcBef>
+              <a:spcAft>
+                <a:spcPct val="0"/>
+              </a:spcAft>
+              <a:defRPr sz="2400">
+                <a:solidFill>
+                  <a:schemeClr val="tx1"/>
+                </a:solidFill>
+                <a:latin typeface="Arial" charset="0"/>
+                <a:ea typeface="ＭＳ Ｐゴシック" charset="-128"/>
+              </a:defRPr>
+            </a:lvl6pPr>
+            <a:lvl7pPr marL="2971800" indent="-228600" eaLnBrk="0" fontAlgn="base" hangingPunct="0">
+              <a:spcBef>
+                <a:spcPct val="0"/>
+              </a:spcBef>
+              <a:spcAft>
+                <a:spcPct val="0"/>
+              </a:spcAft>
+              <a:defRPr sz="2400">
+                <a:solidFill>
+                  <a:schemeClr val="tx1"/>
+                </a:solidFill>
+                <a:latin typeface="Arial" charset="0"/>
+                <a:ea typeface="ＭＳ Ｐゴシック" charset="-128"/>
+              </a:defRPr>
+            </a:lvl7pPr>
+            <a:lvl8pPr marL="3429000" indent="-228600" eaLnBrk="0" fontAlgn="base" hangingPunct="0">
+              <a:spcBef>
+                <a:spcPct val="0"/>
+              </a:spcBef>
+              <a:spcAft>
+                <a:spcPct val="0"/>
+              </a:spcAft>
+              <a:defRPr sz="2400">
+                <a:solidFill>
+                  <a:schemeClr val="tx1"/>
+                </a:solidFill>
+                <a:latin typeface="Arial" charset="0"/>
+                <a:ea typeface="ＭＳ Ｐゴシック" charset="-128"/>
+              </a:defRPr>
+            </a:lvl8pPr>
+            <a:lvl9pPr marL="3886200" indent="-228600" eaLnBrk="0" fontAlgn="base" hangingPunct="0">
+              <a:spcBef>
+                <a:spcPct val="0"/>
+              </a:spcBef>
+              <a:spcAft>
+                <a:spcPct val="0"/>
+              </a:spcAft>
+              <a:defRPr sz="2400">
+                <a:solidFill>
+                  <a:schemeClr val="tx1"/>
+                </a:solidFill>
+                <a:latin typeface="Arial" charset="0"/>
+                <a:ea typeface="ＭＳ Ｐゴシック" charset="-128"/>
+              </a:defRPr>
+            </a:lvl9pPr>
+          </a:lstStyle>
+          <a:p>
+            <a:pPr eaLnBrk="1" hangingPunct="1"/>
+            <a:r>
+              <a:rPr lang="en-US" altLang="x-none" sz="1200">
+                <a:latin typeface="Garamond" charset="0"/>
+              </a:rPr>
+              <a:t>Vincenzo Innocente</a:t>
+            </a:r>
+            <a:endParaRPr lang="it-IT" altLang="x-none" sz="1200">
+              <a:latin typeface="Garamond" charset="0"/>
+            </a:endParaRPr>
+          </a:p>
+        </p:txBody>
+      </p:sp>
+      <p:sp>
+        <p:nvSpPr>
+          <p:cNvPr id="41989" name="Slide Number Placeholder 5"/>
+          <p:cNvSpPr>
+            <a:spLocks noGrp="1"/>
+          </p:cNvSpPr>
+          <p:nvPr>
+            <p:ph type="sldNum" sz="quarter" idx="12"/>
+          </p:nvPr>
+        </p:nvSpPr>
+        <p:spPr>
+          <a:noFill/>
+          <a:ln/>
+          <a:extLst>
+            <a:ext uri="{909E8E84-426E-40DD-AFC4-6F175D3DCCD1}">
+              <a14:hiddenFill xmlns:a14="http://schemas.microsoft.com/office/drawing/2010/main">
+                <a:solidFill>
+                  <a:srgbClr val="FFFFFF"/>
+                </a:solidFill>
+              </a14:hiddenFill>
+            </a:ext>
+            <a:ext uri="{91240B29-F687-4F45-9708-019B960494DF}">
+              <a14:hiddenLine xmlns:a14="http://schemas.microsoft.com/office/drawing/2010/main" w="9525">
+                <a:solidFill>
+                  <a:srgbClr val="000000"/>
+                </a:solidFill>
+                <a:miter lim="800000"/>
+                <a:headEnd/>
+                <a:tailEnd/>
+              </a14:hiddenLine>
+            </a:ext>
+          </a:extLst>
+        </p:spPr>
+        <p:txBody>
+          <a:bodyPr/>
+          <a:lstStyle>
+            <a:lvl1pPr eaLnBrk="0" hangingPunct="0">
+              <a:defRPr sz="2400">
+                <a:solidFill>
+                  <a:schemeClr val="tx1"/>
+                </a:solidFill>
+                <a:latin typeface="Arial" charset="0"/>
+                <a:ea typeface="ＭＳ Ｐゴシック" charset="-128"/>
+              </a:defRPr>
+            </a:lvl1pPr>
+            <a:lvl2pPr marL="742950" indent="-285750" eaLnBrk="0" hangingPunct="0">
+              <a:defRPr sz="2400">
+                <a:solidFill>
+                  <a:schemeClr val="tx1"/>
+                </a:solidFill>
+                <a:latin typeface="Arial" charset="0"/>
+                <a:ea typeface="ＭＳ Ｐゴシック" charset="-128"/>
+              </a:defRPr>
+            </a:lvl2pPr>
+            <a:lvl3pPr marL="1143000" indent="-228600" eaLnBrk="0" hangingPunct="0">
+              <a:defRPr sz="2400">
+                <a:solidFill>
+                  <a:schemeClr val="tx1"/>
+                </a:solidFill>
+                <a:latin typeface="Arial" charset="0"/>
+                <a:ea typeface="ＭＳ Ｐゴシック" charset="-128"/>
+              </a:defRPr>
+            </a:lvl3pPr>
+            <a:lvl4pPr marL="1600200" indent="-228600" eaLnBrk="0" hangingPunct="0">
+              <a:defRPr sz="2400">
+                <a:solidFill>
+                  <a:schemeClr val="tx1"/>
+                </a:solidFill>
+                <a:latin typeface="Arial" charset="0"/>
+                <a:ea typeface="ＭＳ Ｐゴシック" charset="-128"/>
+              </a:defRPr>
+            </a:lvl4pPr>
+            <a:lvl5pPr marL="2057400" indent="-228600" eaLnBrk="0" hangingPunct="0">
+              <a:defRPr sz="2400">
+                <a:solidFill>
+                  <a:schemeClr val="tx1"/>
+                </a:solidFill>
+                <a:latin typeface="Arial" charset="0"/>
+                <a:ea typeface="ＭＳ Ｐゴシック" charset="-128"/>
+              </a:defRPr>
+            </a:lvl5pPr>
+            <a:lvl6pPr marL="2514600" indent="-228600" eaLnBrk="0" fontAlgn="base" hangingPunct="0">
+              <a:spcBef>
+                <a:spcPct val="0"/>
+              </a:spcBef>
+              <a:spcAft>
+                <a:spcPct val="0"/>
+              </a:spcAft>
+              <a:defRPr sz="2400">
+                <a:solidFill>
+                  <a:schemeClr val="tx1"/>
+                </a:solidFill>
+                <a:latin typeface="Arial" charset="0"/>
+                <a:ea typeface="ＭＳ Ｐゴシック" charset="-128"/>
+              </a:defRPr>
+            </a:lvl6pPr>
+            <a:lvl7pPr marL="2971800" indent="-228600" eaLnBrk="0" fontAlgn="base" hangingPunct="0">
+              <a:spcBef>
+                <a:spcPct val="0"/>
+              </a:spcBef>
+              <a:spcAft>
+                <a:spcPct val="0"/>
+              </a:spcAft>
+              <a:defRPr sz="2400">
+                <a:solidFill>
+                  <a:schemeClr val="tx1"/>
+                </a:solidFill>
+                <a:latin typeface="Arial" charset="0"/>
+                <a:ea typeface="ＭＳ Ｐゴシック" charset="-128"/>
+              </a:defRPr>
+            </a:lvl7pPr>
+            <a:lvl8pPr marL="3429000" indent="-228600" eaLnBrk="0" fontAlgn="base" hangingPunct="0">
+              <a:spcBef>
+                <a:spcPct val="0"/>
+              </a:spcBef>
+              <a:spcAft>
+                <a:spcPct val="0"/>
+              </a:spcAft>
+              <a:defRPr sz="2400">
+                <a:solidFill>
+                  <a:schemeClr val="tx1"/>
+                </a:solidFill>
+                <a:latin typeface="Arial" charset="0"/>
+                <a:ea typeface="ＭＳ Ｐゴシック" charset="-128"/>
+              </a:defRPr>
+            </a:lvl8pPr>
+            <a:lvl9pPr marL="3886200" indent="-228600" eaLnBrk="0" fontAlgn="base" hangingPunct="0">
+              <a:spcBef>
+                <a:spcPct val="0"/>
+              </a:spcBef>
+              <a:spcAft>
+                <a:spcPct val="0"/>
+              </a:spcAft>
+              <a:defRPr sz="2400">
+                <a:solidFill>
+                  <a:schemeClr val="tx1"/>
+                </a:solidFill>
+                <a:latin typeface="Arial" charset="0"/>
+                <a:ea typeface="ＭＳ Ｐゴシック" charset="-128"/>
+              </a:defRPr>
+            </a:lvl9pPr>
+          </a:lstStyle>
+          <a:p>
+            <a:pPr eaLnBrk="1" hangingPunct="1"/>
+            <a:fld id="{AEDF44EA-EC42-6D42-8111-94D13066666A}" type="slidenum">
+              <a:rPr lang="it-IT" altLang="x-none" sz="1200">
+                <a:latin typeface="Garamond" charset="0"/>
+              </a:rPr>
+              <a:pPr eaLnBrk="1" hangingPunct="1"/>
+              <a:t>41</a:t>
+            </a:fld>
+            <a:endParaRPr lang="it-IT" altLang="x-none" sz="1200">
+              <a:latin typeface="Garamond" charset="0"/>
+            </a:endParaRPr>
+          </a:p>
+        </p:txBody>
+      </p:sp>
+    </p:spTree>
+  </p:cSld>
+  <p:clrMapOvr>
+    <a:masterClrMapping/>
+  </p:clrMapOvr>
+</p:sld>
+</file>
+
+<file path=ppt/slides/slide42.xml><?xml version="1.0" encoding="utf-8"?>
+<p:sld xmlns:a="http://schemas.openxmlformats.org/drawingml/2006/main" xmlns:r="http://schemas.openxmlformats.org/officeDocument/2006/relationships" xmlns:p="http://schemas.openxmlformats.org/presentationml/2006/main">
+  <p:cSld>
+    <p:spTree>
+      <p:nvGrpSpPr>
+        <p:cNvPr id="1" name=""/>
+        <p:cNvGrpSpPr/>
+        <p:nvPr/>
+      </p:nvGrpSpPr>
+      <p:grpSpPr>
+        <a:xfrm>
+          <a:off x="0" y="0"/>
+          <a:ext cx="0" cy="0"/>
+          <a:chOff x="0" y="0"/>
+          <a:chExt cx="0" cy="0"/>
+        </a:xfrm>
+      </p:grpSpPr>
+      <p:sp>
+        <p:nvSpPr>
           <p:cNvPr id="49153" name="Title 1"/>
           <p:cNvSpPr>
             <a:spLocks noGrp="1"/>
@@ -19210,7 +19813,7 @@
                 <a:latin typeface="Garamond" charset="0"/>
               </a:rPr>
               <a:pPr eaLnBrk="1" hangingPunct="1"/>
-              <a:t>40</a:t>
+              <a:t>42</a:t>
             </a:fld>
             <a:endParaRPr lang="it-IT" altLang="x-none" sz="1200">
               <a:latin typeface="Garamond" charset="0"/>
@@ -19280,7 +19883,7 @@
 </p:sld>
 </file>
 
-<file path=ppt/slides/slide41.xml><?xml version="1.0" encoding="utf-8"?>
+<file path=ppt/slides/slide43.xml><?xml version="1.0" encoding="utf-8"?>
 <p:sld xmlns:a="http://schemas.openxmlformats.org/drawingml/2006/main" xmlns:r="http://schemas.openxmlformats.org/officeDocument/2006/relationships" xmlns:p="http://schemas.openxmlformats.org/presentationml/2006/main">
   <p:cSld>
     <p:spTree>
@@ -19774,7 +20377,7 @@
                 <a:latin typeface="Garamond" charset="0"/>
               </a:rPr>
               <a:pPr eaLnBrk="1" hangingPunct="1"/>
-              <a:t>41</a:t>
+              <a:t>43</a:t>
             </a:fld>
             <a:endParaRPr lang="en-US" altLang="x-none" sz="1200">
               <a:latin typeface="Garamond" charset="0"/>
@@ -20856,7 +21459,7 @@
 </p:sld>
 </file>
 
-<file path=ppt/slides/slide42.xml><?xml version="1.0" encoding="utf-8"?>
+<file path=ppt/slides/slide44.xml><?xml version="1.0" encoding="utf-8"?>
 <p:sld xmlns:a="http://schemas.openxmlformats.org/drawingml/2006/main" xmlns:r="http://schemas.openxmlformats.org/officeDocument/2006/relationships" xmlns:p="http://schemas.openxmlformats.org/presentationml/2006/main">
   <p:cSld>
     <p:spTree>
@@ -21225,7 +21828,7 @@
                 <a:latin typeface="Garamond" charset="0"/>
               </a:rPr>
               <a:pPr eaLnBrk="1" hangingPunct="1"/>
-              <a:t>42</a:t>
+              <a:t>44</a:t>
             </a:fld>
             <a:endParaRPr lang="it-IT" altLang="x-none" sz="1200">
               <a:latin typeface="Garamond" charset="0"/>
@@ -35252,7 +35855,7 @@
 </p:sld>
 </file>
 
-<file path=ppt/slides/slide43.xml><?xml version="1.0" encoding="utf-8"?>
+<file path=ppt/slides/slide45.xml><?xml version="1.0" encoding="utf-8"?>
 <p:sld xmlns:a="http://schemas.openxmlformats.org/drawingml/2006/main" xmlns:r="http://schemas.openxmlformats.org/officeDocument/2006/relationships" xmlns:p="http://schemas.openxmlformats.org/presentationml/2006/main">
   <p:cSld>
     <p:spTree>
@@ -35392,7 +35995,7 @@
           <a:p>
             <a:fld id="{6206286E-1D7B-9F4C-8CE1-3E0553D8E6DD}" type="slidenum">
               <a:rPr lang="en-US" smtClean="0"/>
-              <a:t>43</a:t>
+              <a:t>45</a:t>
             </a:fld>
             <a:endParaRPr lang="en-US"/>
           </a:p>
@@ -35583,7 +36186,7 @@
 </p:sld>
 </file>
 
-<file path=ppt/slides/slide44.xml><?xml version="1.0" encoding="utf-8"?>
+<file path=ppt/slides/slide46.xml><?xml version="1.0" encoding="utf-8"?>
 <p:sld xmlns:a="http://schemas.openxmlformats.org/drawingml/2006/main" xmlns:r="http://schemas.openxmlformats.org/officeDocument/2006/relationships" xmlns:p="http://schemas.openxmlformats.org/presentationml/2006/main">
   <p:cSld>
     <p:spTree>
@@ -35719,7 +36322,7 @@
 </p:sld>
 </file>
 
-<file path=ppt/slides/slide45.xml><?xml version="1.0" encoding="utf-8"?>
+<file path=ppt/slides/slide47.xml><?xml version="1.0" encoding="utf-8"?>
 <p:sld xmlns:a="http://schemas.openxmlformats.org/drawingml/2006/main" xmlns:r="http://schemas.openxmlformats.org/officeDocument/2006/relationships" xmlns:p="http://schemas.openxmlformats.org/presentationml/2006/main">
   <p:cSld>
     <p:spTree>
@@ -35944,7 +36547,7 @@
                 <a:latin typeface="Garamond" panose="02020404030301010803" pitchFamily="18" charset="0"/>
               </a:rPr>
               <a:pPr algn="l" eaLnBrk="1" hangingPunct="1"/>
-              <a:t>45</a:t>
+              <a:t>47</a:t>
             </a:fld>
             <a:endParaRPr lang="en-US" altLang="en-US" sz="1200">
               <a:latin typeface="Garamond" panose="02020404030301010803" pitchFamily="18" charset="0"/>

--- a/Slides/FPforScientist.pptx
+++ b/Slides/FPforScientist.pptx
@@ -15125,6 +15125,12 @@
               <a:rPr lang="en-US" dirty="0"/>
               <a:t>Try to reach faithful (or even correct) rounding using “augmented arithmetic”</a:t>
             </a:r>
+          </a:p>
+          <a:p>
+            <a:endParaRPr lang="en-US" dirty="0"/>
+          </a:p>
+          <a:p>
+            <a:endParaRPr lang="en-US" dirty="0"/>
           </a:p>
         </p:txBody>
       </p:sp>
@@ -18636,7 +18642,7 @@
         <p:spPr>
           <a:xfrm>
             <a:off x="575304" y="1371015"/>
-            <a:ext cx="8229600" cy="4895850"/>
+            <a:ext cx="10515600" cy="4895850"/>
           </a:xfrm>
         </p:spPr>
         <p:txBody>
@@ -18663,24 +18669,11 @@
             </a:r>
           </a:p>
           <a:p>
-            <a:pPr lvl="1"/>
+            <a:pPr lvl="2"/>
             <a:r>
               <a:rPr lang="en-US" altLang="x-none" dirty="0"/>
-              <a:t>Can be evaluated using a higher </a:t>
-            </a:r>
-            <a:r>
-              <a:rPr lang="en-US" altLang="en-US" dirty="0"/>
-              <a:t>“</a:t>
-            </a:r>
-            <a:r>
-              <a:rPr lang="en-US" altLang="x-none" dirty="0"/>
-              <a:t>precision</a:t>
-            </a:r>
-            <a:r>
-              <a:rPr lang="en-US" altLang="en-US" dirty="0"/>
-              <a:t>”</a:t>
-            </a:r>
-            <a:endParaRPr lang="en-US" altLang="x-none" dirty="0"/>
+              <a:t>Comes from specs</a:t>
+            </a:r>
           </a:p>
           <a:p>
             <a:r>
@@ -18699,7 +18692,7 @@
             <a:pPr lvl="1"/>
             <a:r>
               <a:rPr lang="en-US" altLang="x-none" dirty="0"/>
-              <a:t>Can be evaluated comparing different algorithms</a:t>
+              <a:t>Can be evaluated comparing with a “refence” or a different algorithm</a:t>
             </a:r>
           </a:p>
           <a:p>
@@ -19237,7 +19230,7 @@
         </p:nvSpPr>
         <p:spPr>
           <a:xfrm>
-            <a:off x="838200" y="365126"/>
+            <a:off x="838200" y="179882"/>
             <a:ext cx="10515600" cy="905216"/>
           </a:xfrm>
         </p:spPr>
@@ -19267,6 +19260,18 @@
                 <a:hlinkClick r:id="rId2"/>
               </a:rPr>
               <a:t>https://www.agner.org/optimize/instruction_tables.pdf</a:t>
+            </a:r>
+            <a:r>
+              <a:rPr lang="en-US" altLang="x-none" sz="3100" dirty="0"/>
+              <a:t>  (</a:t>
+            </a:r>
+            <a:r>
+              <a:rPr lang="en-US" altLang="x-none" sz="3100" dirty="0" err="1"/>
+              <a:t>icelake</a:t>
+            </a:r>
+            <a:r>
+              <a:rPr lang="en-US" altLang="x-none" sz="3100" dirty="0"/>
+              <a:t> &amp; zen5)</a:t>
             </a:r>
             <a:endParaRPr lang="en-US" altLang="x-none" dirty="0"/>
           </a:p>
@@ -19594,56 +19599,56 @@
           <p:nvPr>
             <p:extLst>
               <p:ext uri="{D42A27DB-BD31-4B8C-83A1-F6EECF244321}">
-                <p14:modId xmlns:p14="http://schemas.microsoft.com/office/powerpoint/2010/main" val="265464147"/>
+                <p14:modId xmlns:p14="http://schemas.microsoft.com/office/powerpoint/2010/main" val="2740690212"/>
               </p:ext>
             </p:extLst>
           </p:nvPr>
         </p:nvGraphicFramePr>
         <p:xfrm>
-          <a:off x="1574638" y="1462429"/>
-          <a:ext cx="8208911" cy="4904084"/>
+          <a:off x="831757" y="1158949"/>
+          <a:ext cx="8609946" cy="5375977"/>
         </p:xfrm>
         <a:graphic>
           <a:graphicData uri="http://schemas.openxmlformats.org/drawingml/2006/table">
             <a:tbl>
               <a:tblPr/>
               <a:tblGrid>
-                <a:gridCol w="1197314">
+                <a:gridCol w="1891537">
                   <a:extLst>
                     <a:ext uri="{9D8B030D-6E8A-4147-A177-3AD203B41FA5}">
                       <a16:colId xmlns:a16="http://schemas.microsoft.com/office/drawing/2014/main" val="20000"/>
                     </a:ext>
                   </a:extLst>
                 </a:gridCol>
-                <a:gridCol w="1867554">
+                <a:gridCol w="2090244">
                   <a:extLst>
                     <a:ext uri="{9D8B030D-6E8A-4147-A177-3AD203B41FA5}">
                       <a16:colId xmlns:a16="http://schemas.microsoft.com/office/drawing/2014/main" val="20001"/>
                     </a:ext>
                   </a:extLst>
                 </a:gridCol>
-                <a:gridCol w="939521">
+                <a:gridCol w="1107407">
                   <a:extLst>
                     <a:ext uri="{9D8B030D-6E8A-4147-A177-3AD203B41FA5}">
                       <a16:colId xmlns:a16="http://schemas.microsoft.com/office/drawing/2014/main" val="20002"/>
                     </a:ext>
                   </a:extLst>
                 </a:gridCol>
-                <a:gridCol w="1204275">
+                <a:gridCol w="846764">
                   <a:extLst>
                     <a:ext uri="{9D8B030D-6E8A-4147-A177-3AD203B41FA5}">
                       <a16:colId xmlns:a16="http://schemas.microsoft.com/office/drawing/2014/main" val="20003"/>
                     </a:ext>
                   </a:extLst>
                 </a:gridCol>
-                <a:gridCol w="1026766">
+                <a:gridCol w="1392705">
                   <a:extLst>
                     <a:ext uri="{9D8B030D-6E8A-4147-A177-3AD203B41FA5}">
                       <a16:colId xmlns:a16="http://schemas.microsoft.com/office/drawing/2014/main" val="20004"/>
                     </a:ext>
                   </a:extLst>
                 </a:gridCol>
-                <a:gridCol w="1973481">
+                <a:gridCol w="1281289">
                   <a:extLst>
                     <a:ext uri="{9D8B030D-6E8A-4147-A177-3AD203B41FA5}">
                       <a16:colId xmlns:a16="http://schemas.microsoft.com/office/drawing/2014/main" val="20005"/>
@@ -19651,6 +19656,511 @@
                   </a:extLst>
                 </a:gridCol>
               </a:tblGrid>
+              <a:tr h="488690">
+                <a:tc>
+                  <a:txBody>
+                    <a:bodyPr/>
+                    <a:lstStyle/>
+                    <a:p>
+                      <a:pPr marL="0" marR="0" lvl="0" indent="0" algn="l" defTabSz="457200" rtl="0" eaLnBrk="1" fontAlgn="base" latinLnBrk="0" hangingPunct="1">
+                        <a:lnSpc>
+                          <a:spcPct val="100000"/>
+                        </a:lnSpc>
+                        <a:spcBef>
+                          <a:spcPct val="0"/>
+                        </a:spcBef>
+                        <a:spcAft>
+                          <a:spcPct val="0"/>
+                        </a:spcAft>
+                        <a:buClrTx/>
+                        <a:buSzTx/>
+                        <a:buFontTx/>
+                        <a:buNone/>
+                        <a:tabLst/>
+                      </a:pPr>
+                      <a:endParaRPr kumimoji="0" lang="en-US" altLang="x-none" sz="1800" b="1" i="0" u="none" strike="noStrike" cap="none" normalizeH="0" baseline="0" dirty="0">
+                        <a:ln>
+                          <a:noFill/>
+                        </a:ln>
+                        <a:solidFill>
+                          <a:srgbClr val="FFFFFF"/>
+                        </a:solidFill>
+                        <a:effectLst/>
+                        <a:latin typeface="Arial" charset="0"/>
+                        <a:ea typeface="ＭＳ Ｐゴシック" charset="-128"/>
+                      </a:endParaRPr>
+                    </a:p>
+                  </a:txBody>
+                  <a:tcPr marL="91433" marR="91433" marT="45709" marB="45709" horzOverflow="overflow">
+                    <a:lnL w="12700" cap="flat" cmpd="sng" algn="ctr">
+                      <a:solidFill>
+                        <a:schemeClr val="bg1"/>
+                      </a:solidFill>
+                      <a:prstDash val="solid"/>
+                      <a:round/>
+                      <a:headEnd type="none" w="med" len="med"/>
+                      <a:tailEnd type="none" w="med" len="med"/>
+                    </a:lnL>
+                    <a:lnR w="12700" cap="flat" cmpd="sng" algn="ctr">
+                      <a:solidFill>
+                        <a:schemeClr val="bg1"/>
+                      </a:solidFill>
+                      <a:prstDash val="solid"/>
+                      <a:round/>
+                      <a:headEnd type="none" w="med" len="med"/>
+                      <a:tailEnd type="none" w="med" len="med"/>
+                    </a:lnR>
+                    <a:lnT w="38100" cap="flat" cmpd="sng" algn="ctr">
+                      <a:solidFill>
+                        <a:schemeClr val="bg1"/>
+                      </a:solidFill>
+                      <a:prstDash val="solid"/>
+                      <a:round/>
+                      <a:headEnd type="none" w="med" len="med"/>
+                      <a:tailEnd type="none" w="med" len="med"/>
+                    </a:lnT>
+                    <a:lnB w="38100" cap="flat" cmpd="sng" algn="ctr">
+                      <a:solidFill>
+                        <a:schemeClr val="bg1"/>
+                      </a:solidFill>
+                      <a:prstDash val="solid"/>
+                      <a:round/>
+                      <a:headEnd type="none" w="med" len="med"/>
+                      <a:tailEnd type="none" w="med" len="med"/>
+                    </a:lnB>
+                    <a:lnTlToBr>
+                      <a:noFill/>
+                    </a:lnTlToBr>
+                    <a:lnBlToTr>
+                      <a:noFill/>
+                    </a:lnBlToTr>
+                    <a:solidFill>
+                      <a:schemeClr val="accent1"/>
+                    </a:solidFill>
+                  </a:tcPr>
+                </a:tc>
+                <a:tc>
+                  <a:txBody>
+                    <a:bodyPr/>
+                    <a:lstStyle/>
+                    <a:p>
+                      <a:pPr marL="0" marR="0" lvl="0" indent="0" algn="l" defTabSz="457200" rtl="0" eaLnBrk="1" fontAlgn="base" latinLnBrk="0" hangingPunct="1">
+                        <a:lnSpc>
+                          <a:spcPct val="100000"/>
+                        </a:lnSpc>
+                        <a:spcBef>
+                          <a:spcPct val="0"/>
+                        </a:spcBef>
+                        <a:spcAft>
+                          <a:spcPct val="0"/>
+                        </a:spcAft>
+                        <a:buClrTx/>
+                        <a:buSzTx/>
+                        <a:buFontTx/>
+                        <a:buNone/>
+                        <a:tabLst/>
+                      </a:pPr>
+                      <a:endParaRPr kumimoji="0" lang="en-US" altLang="x-none" sz="1800" b="1" i="0" u="none" strike="noStrike" cap="none" normalizeH="0" baseline="0">
+                        <a:ln>
+                          <a:noFill/>
+                        </a:ln>
+                        <a:solidFill>
+                          <a:srgbClr val="FFFFFF"/>
+                        </a:solidFill>
+                        <a:effectLst/>
+                        <a:latin typeface="Arial" charset="0"/>
+                        <a:ea typeface="ＭＳ Ｐゴシック" charset="-128"/>
+                      </a:endParaRPr>
+                    </a:p>
+                  </a:txBody>
+                  <a:tcPr marL="91433" marR="91433" marT="45709" marB="45709" horzOverflow="overflow">
+                    <a:lnL w="12700" cap="flat" cmpd="sng" algn="ctr">
+                      <a:solidFill>
+                        <a:schemeClr val="bg1"/>
+                      </a:solidFill>
+                      <a:prstDash val="solid"/>
+                      <a:round/>
+                      <a:headEnd type="none" w="med" len="med"/>
+                      <a:tailEnd type="none" w="med" len="med"/>
+                    </a:lnL>
+                    <a:lnR w="12700" cap="flat" cmpd="sng" algn="ctr">
+                      <a:solidFill>
+                        <a:schemeClr val="bg1"/>
+                      </a:solidFill>
+                      <a:prstDash val="solid"/>
+                      <a:round/>
+                      <a:headEnd type="none" w="med" len="med"/>
+                      <a:tailEnd type="none" w="med" len="med"/>
+                    </a:lnR>
+                    <a:lnT w="38100" cap="flat" cmpd="sng" algn="ctr">
+                      <a:solidFill>
+                        <a:schemeClr val="bg1"/>
+                      </a:solidFill>
+                      <a:prstDash val="solid"/>
+                      <a:round/>
+                      <a:headEnd type="none" w="med" len="med"/>
+                      <a:tailEnd type="none" w="med" len="med"/>
+                    </a:lnT>
+                    <a:lnB w="38100" cap="flat" cmpd="sng" algn="ctr">
+                      <a:solidFill>
+                        <a:schemeClr val="bg1"/>
+                      </a:solidFill>
+                      <a:prstDash val="solid"/>
+                      <a:round/>
+                      <a:headEnd type="none" w="med" len="med"/>
+                      <a:tailEnd type="none" w="med" len="med"/>
+                    </a:lnB>
+                    <a:lnTlToBr>
+                      <a:noFill/>
+                    </a:lnTlToBr>
+                    <a:lnBlToTr>
+                      <a:noFill/>
+                    </a:lnBlToTr>
+                    <a:solidFill>
+                      <a:schemeClr val="accent1"/>
+                    </a:solidFill>
+                  </a:tcPr>
+                </a:tc>
+                <a:tc gridSpan="2">
+                  <a:txBody>
+                    <a:bodyPr/>
+                    <a:lstStyle/>
+                    <a:p>
+                      <a:pPr marL="0" marR="0" lvl="0" indent="0" algn="l" defTabSz="457200" rtl="0" eaLnBrk="1" fontAlgn="base" latinLnBrk="0" hangingPunct="1">
+                        <a:lnSpc>
+                          <a:spcPct val="100000"/>
+                        </a:lnSpc>
+                        <a:spcBef>
+                          <a:spcPct val="0"/>
+                        </a:spcBef>
+                        <a:spcAft>
+                          <a:spcPct val="0"/>
+                        </a:spcAft>
+                        <a:buClrTx/>
+                        <a:buSzTx/>
+                        <a:buFontTx/>
+                        <a:buNone/>
+                        <a:tabLst/>
+                      </a:pPr>
+                      <a:r>
+                        <a:rPr kumimoji="0" lang="en-US" altLang="x-none" sz="1800" b="1" i="0" u="none" strike="noStrike" cap="none" normalizeH="0" baseline="0" dirty="0">
+                          <a:ln>
+                            <a:noFill/>
+                          </a:ln>
+                          <a:solidFill>
+                            <a:srgbClr val="FFFFFF"/>
+                          </a:solidFill>
+                          <a:effectLst/>
+                          <a:latin typeface="Arial" charset="0"/>
+                          <a:ea typeface="ＭＳ Ｐゴシック" charset="-128"/>
+                        </a:rPr>
+                        <a:t>latency</a:t>
+                      </a:r>
+                    </a:p>
+                  </a:txBody>
+                  <a:tcPr marL="91433" marR="91433" marT="45709" marB="45709" horzOverflow="overflow">
+                    <a:lnL w="12700" cap="flat" cmpd="sng" algn="ctr">
+                      <a:solidFill>
+                        <a:schemeClr val="bg1"/>
+                      </a:solidFill>
+                      <a:prstDash val="solid"/>
+                      <a:round/>
+                      <a:headEnd type="none" w="med" len="med"/>
+                      <a:tailEnd type="none" w="med" len="med"/>
+                    </a:lnL>
+                    <a:lnR w="12700" cap="flat" cmpd="sng" algn="ctr">
+                      <a:solidFill>
+                        <a:schemeClr val="bg1"/>
+                      </a:solidFill>
+                      <a:prstDash val="solid"/>
+                      <a:round/>
+                      <a:headEnd type="none" w="med" len="med"/>
+                      <a:tailEnd type="none" w="med" len="med"/>
+                    </a:lnR>
+                    <a:lnT w="38100" cap="flat" cmpd="sng" algn="ctr">
+                      <a:solidFill>
+                        <a:schemeClr val="bg1"/>
+                      </a:solidFill>
+                      <a:prstDash val="solid"/>
+                      <a:round/>
+                      <a:headEnd type="none" w="med" len="med"/>
+                      <a:tailEnd type="none" w="med" len="med"/>
+                    </a:lnT>
+                    <a:lnB w="38100" cap="flat" cmpd="sng" algn="ctr">
+                      <a:solidFill>
+                        <a:schemeClr val="bg1"/>
+                      </a:solidFill>
+                      <a:prstDash val="solid"/>
+                      <a:round/>
+                      <a:headEnd type="none" w="med" len="med"/>
+                      <a:tailEnd type="none" w="med" len="med"/>
+                    </a:lnB>
+                    <a:lnTlToBr>
+                      <a:noFill/>
+                    </a:lnTlToBr>
+                    <a:lnBlToTr>
+                      <a:noFill/>
+                    </a:lnBlToTr>
+                    <a:solidFill>
+                      <a:schemeClr val="accent1"/>
+                    </a:solidFill>
+                  </a:tcPr>
+                </a:tc>
+                <a:tc hMerge="1">
+                  <a:txBody>
+                    <a:bodyPr/>
+                    <a:lstStyle/>
+                    <a:p>
+                      <a:pPr marL="0" marR="0" lvl="0" indent="0" algn="l" defTabSz="457200" rtl="0" eaLnBrk="1" fontAlgn="base" latinLnBrk="0" hangingPunct="1">
+                        <a:lnSpc>
+                          <a:spcPct val="100000"/>
+                        </a:lnSpc>
+                        <a:spcBef>
+                          <a:spcPct val="0"/>
+                        </a:spcBef>
+                        <a:spcAft>
+                          <a:spcPct val="0"/>
+                        </a:spcAft>
+                        <a:buClrTx/>
+                        <a:buSzTx/>
+                        <a:buFontTx/>
+                        <a:buNone/>
+                        <a:tabLst/>
+                      </a:pPr>
+                      <a:endParaRPr kumimoji="0" lang="en-US" altLang="x-none" sz="1800" b="1" i="0" u="none" strike="noStrike" cap="none" normalizeH="0" baseline="0" dirty="0">
+                        <a:ln>
+                          <a:noFill/>
+                        </a:ln>
+                        <a:solidFill>
+                          <a:srgbClr val="FFFFFF"/>
+                        </a:solidFill>
+                        <a:effectLst/>
+                        <a:latin typeface="Arial" charset="0"/>
+                        <a:ea typeface="ＭＳ Ｐゴシック" charset="-128"/>
+                      </a:endParaRPr>
+                    </a:p>
+                  </a:txBody>
+                  <a:tcPr marL="91433" marR="91433" marT="45709" marB="45709" horzOverflow="overflow">
+                    <a:lnL w="12700" cap="flat" cmpd="sng" algn="ctr">
+                      <a:solidFill>
+                        <a:schemeClr val="bg1"/>
+                      </a:solidFill>
+                      <a:prstDash val="solid"/>
+                      <a:round/>
+                      <a:headEnd type="none" w="med" len="med"/>
+                      <a:tailEnd type="none" w="med" len="med"/>
+                    </a:lnL>
+                    <a:lnR w="12700" cap="flat" cmpd="sng" algn="ctr">
+                      <a:solidFill>
+                        <a:schemeClr val="bg1"/>
+                      </a:solidFill>
+                      <a:prstDash val="solid"/>
+                      <a:round/>
+                      <a:headEnd type="none" w="med" len="med"/>
+                      <a:tailEnd type="none" w="med" len="med"/>
+                    </a:lnR>
+                    <a:lnT w="38100" cap="flat" cmpd="sng" algn="ctr">
+                      <a:solidFill>
+                        <a:schemeClr val="bg1"/>
+                      </a:solidFill>
+                      <a:prstDash val="solid"/>
+                      <a:round/>
+                      <a:headEnd type="none" w="med" len="med"/>
+                      <a:tailEnd type="none" w="med" len="med"/>
+                    </a:lnT>
+                    <a:lnB w="38100" cap="flat" cmpd="sng" algn="ctr">
+                      <a:solidFill>
+                        <a:schemeClr val="bg1"/>
+                      </a:solidFill>
+                      <a:prstDash val="solid"/>
+                      <a:round/>
+                      <a:headEnd type="none" w="med" len="med"/>
+                      <a:tailEnd type="none" w="med" len="med"/>
+                    </a:lnB>
+                    <a:lnTlToBr>
+                      <a:noFill/>
+                    </a:lnTlToBr>
+                    <a:lnBlToTr>
+                      <a:noFill/>
+                    </a:lnBlToTr>
+                    <a:solidFill>
+                      <a:schemeClr val="accent1"/>
+                    </a:solidFill>
+                  </a:tcPr>
+                </a:tc>
+                <a:tc gridSpan="2">
+                  <a:txBody>
+                    <a:bodyPr/>
+                    <a:lstStyle/>
+                    <a:p>
+                      <a:pPr marL="0" marR="0" lvl="0" indent="0" algn="l" defTabSz="457200" rtl="0" eaLnBrk="1" fontAlgn="base" latinLnBrk="0" hangingPunct="1">
+                        <a:lnSpc>
+                          <a:spcPct val="100000"/>
+                        </a:lnSpc>
+                        <a:spcBef>
+                          <a:spcPct val="0"/>
+                        </a:spcBef>
+                        <a:spcAft>
+                          <a:spcPct val="0"/>
+                        </a:spcAft>
+                        <a:buClrTx/>
+                        <a:buSzTx/>
+                        <a:buFontTx/>
+                        <a:buNone/>
+                        <a:tabLst/>
+                      </a:pPr>
+                      <a:r>
+                        <a:rPr kumimoji="0" lang="en-US" altLang="x-none" sz="1800" b="1" i="0" u="none" strike="noStrike" cap="none" normalizeH="0" baseline="0" dirty="0">
+                          <a:ln>
+                            <a:noFill/>
+                          </a:ln>
+                          <a:solidFill>
+                            <a:srgbClr val="FFFFFF"/>
+                          </a:solidFill>
+                          <a:effectLst/>
+                          <a:latin typeface="Arial" charset="0"/>
+                          <a:ea typeface="ＭＳ Ｐゴシック" charset="-128"/>
+                        </a:rPr>
+                        <a:t> inv throughput</a:t>
+                      </a:r>
+                    </a:p>
+                  </a:txBody>
+                  <a:tcPr marL="91433" marR="91433" marT="45709" marB="45709" horzOverflow="overflow">
+                    <a:lnL w="12700" cap="flat" cmpd="sng" algn="ctr">
+                      <a:solidFill>
+                        <a:schemeClr val="bg1"/>
+                      </a:solidFill>
+                      <a:prstDash val="solid"/>
+                      <a:round/>
+                      <a:headEnd type="none" w="med" len="med"/>
+                      <a:tailEnd type="none" w="med" len="med"/>
+                    </a:lnL>
+                    <a:lnR w="12700" cap="flat" cmpd="sng" algn="ctr">
+                      <a:solidFill>
+                        <a:schemeClr val="bg1"/>
+                      </a:solidFill>
+                      <a:prstDash val="solid"/>
+                      <a:round/>
+                      <a:headEnd type="none" w="med" len="med"/>
+                      <a:tailEnd type="none" w="med" len="med"/>
+                    </a:lnR>
+                    <a:lnT w="38100" cap="flat" cmpd="sng" algn="ctr">
+                      <a:solidFill>
+                        <a:schemeClr val="bg1"/>
+                      </a:solidFill>
+                      <a:prstDash val="solid"/>
+                      <a:round/>
+                      <a:headEnd type="none" w="med" len="med"/>
+                      <a:tailEnd type="none" w="med" len="med"/>
+                    </a:lnT>
+                    <a:lnB w="38100" cap="flat" cmpd="sng" algn="ctr">
+                      <a:solidFill>
+                        <a:schemeClr val="bg1"/>
+                      </a:solidFill>
+                      <a:prstDash val="solid"/>
+                      <a:round/>
+                      <a:headEnd type="none" w="med" len="med"/>
+                      <a:tailEnd type="none" w="med" len="med"/>
+                    </a:lnB>
+                    <a:lnTlToBr>
+                      <a:noFill/>
+                    </a:lnTlToBr>
+                    <a:lnBlToTr>
+                      <a:noFill/>
+                    </a:lnBlToTr>
+                    <a:solidFill>
+                      <a:schemeClr val="accent1"/>
+                    </a:solidFill>
+                  </a:tcPr>
+                </a:tc>
+                <a:tc hMerge="1">
+                  <a:txBody>
+                    <a:bodyPr/>
+                    <a:lstStyle/>
+                    <a:p>
+                      <a:pPr marL="0" marR="0" lvl="0" indent="0" algn="l" defTabSz="457200" rtl="0" eaLnBrk="1" fontAlgn="base" latinLnBrk="0" hangingPunct="1">
+                        <a:lnSpc>
+                          <a:spcPct val="100000"/>
+                        </a:lnSpc>
+                        <a:spcBef>
+                          <a:spcPct val="0"/>
+                        </a:spcBef>
+                        <a:spcAft>
+                          <a:spcPct val="0"/>
+                        </a:spcAft>
+                        <a:buClrTx/>
+                        <a:buSzTx/>
+                        <a:buFontTx/>
+                        <a:buNone/>
+                        <a:tabLst/>
+                      </a:pPr>
+                      <a:endParaRPr kumimoji="0" lang="en-US" altLang="x-none" sz="1800" b="1" i="0" u="none" strike="noStrike" cap="none" normalizeH="0" baseline="0" dirty="0">
+                        <a:ln>
+                          <a:noFill/>
+                        </a:ln>
+                        <a:solidFill>
+                          <a:srgbClr val="FF0000"/>
+                        </a:solidFill>
+                        <a:effectLst/>
+                        <a:latin typeface="Arial" charset="0"/>
+                        <a:ea typeface="ＭＳ Ｐゴシック" charset="-128"/>
+                      </a:endParaRPr>
+                    </a:p>
+                  </a:txBody>
+                  <a:tcPr marL="91433" marR="91433" marT="45709" marB="45709" horzOverflow="overflow">
+                    <a:lnL w="12700" cap="flat" cmpd="sng" algn="ctr">
+                      <a:solidFill>
+                        <a:schemeClr val="bg1"/>
+                      </a:solidFill>
+                      <a:prstDash val="solid"/>
+                      <a:round/>
+                      <a:headEnd type="none" w="med" len="med"/>
+                      <a:tailEnd type="none" w="med" len="med"/>
+                    </a:lnL>
+                    <a:lnR w="12700" cap="flat" cmpd="sng" algn="ctr">
+                      <a:solidFill>
+                        <a:schemeClr val="bg1"/>
+                      </a:solidFill>
+                      <a:prstDash val="solid"/>
+                      <a:round/>
+                      <a:headEnd type="none" w="med" len="med"/>
+                      <a:tailEnd type="none" w="med" len="med"/>
+                    </a:lnR>
+                    <a:lnT w="38100" cap="flat" cmpd="sng" algn="ctr">
+                      <a:solidFill>
+                        <a:schemeClr val="bg1"/>
+                      </a:solidFill>
+                      <a:prstDash val="solid"/>
+                      <a:round/>
+                      <a:headEnd type="none" w="med" len="med"/>
+                      <a:tailEnd type="none" w="med" len="med"/>
+                    </a:lnT>
+                    <a:lnB w="38100" cap="flat" cmpd="sng" algn="ctr">
+                      <a:solidFill>
+                        <a:schemeClr val="bg1"/>
+                      </a:solidFill>
+                      <a:prstDash val="solid"/>
+                      <a:round/>
+                      <a:headEnd type="none" w="med" len="med"/>
+                      <a:tailEnd type="none" w="med" len="med"/>
+                    </a:lnB>
+                    <a:lnTlToBr>
+                      <a:noFill/>
+                    </a:lnTlToBr>
+                    <a:lnBlToTr>
+                      <a:noFill/>
+                    </a:lnBlToTr>
+                    <a:solidFill>
+                      <a:schemeClr val="accent1"/>
+                    </a:solidFill>
+                  </a:tcPr>
+                </a:tc>
+                <a:extLst>
+                  <a:ext uri="{0D108BD9-81ED-4DB2-BD59-A6C34878D82A}">
+                    <a16:rowId xmlns:a16="http://schemas.microsoft.com/office/drawing/2014/main" val="3332315224"/>
+                  </a:ext>
+                </a:extLst>
+              </a:tr>
               <a:tr h="450850">
                 <a:tc>
                   <a:txBody>
@@ -19874,7 +20384,7 @@
                       <a:headEnd type="none" w="med" len="med"/>
                       <a:tailEnd type="none" w="med" len="med"/>
                     </a:lnR>
-                    <a:lnT w="12700" cap="flat" cmpd="sng" algn="ctr">
+                    <a:lnT w="38100" cap="flat" cmpd="sng" algn="ctr">
                       <a:solidFill>
                         <a:schemeClr val="bg1"/>
                       </a:solidFill>
@@ -20125,7 +20635,7 @@
                       <a:headEnd type="none" w="med" len="med"/>
                       <a:tailEnd type="none" w="med" len="med"/>
                     </a:lnR>
-                    <a:lnT w="12700" cap="flat" cmpd="sng" algn="ctr">
+                    <a:lnT w="38100" cap="flat" cmpd="sng" algn="ctr">
                       <a:solidFill>
                         <a:schemeClr val="bg1"/>
                       </a:solidFill>
@@ -20342,7 +20852,7 @@
                         <a:tabLst/>
                       </a:pPr>
                       <a:r>
-                        <a:rPr kumimoji="0" lang="en-US" altLang="x-none" sz="1800" b="1" i="0" u="none" strike="noStrike" cap="none" normalizeH="0" baseline="0">
+                        <a:rPr kumimoji="0" lang="en-US" altLang="x-none" sz="1800" b="1" i="0" u="none" strike="noStrike" cap="none" normalizeH="0" baseline="0" dirty="0">
                           <a:ln>
                             <a:noFill/>
                           </a:ln>
@@ -20353,7 +20863,7 @@
                           <a:latin typeface="Arial" charset="0"/>
                           <a:ea typeface="ＭＳ Ｐゴシック" charset="-128"/>
                         </a:rPr>
-                        <a:t>sse s</a:t>
+                        <a:t>s</a:t>
                       </a:r>
                     </a:p>
                   </a:txBody>
@@ -20376,7 +20886,7 @@
                       <a:headEnd type="none" w="med" len="med"/>
                       <a:tailEnd type="none" w="med" len="med"/>
                     </a:lnR>
-                    <a:lnT w="12700" cap="flat" cmpd="sng" algn="ctr">
+                    <a:lnT w="38100" cap="flat" cmpd="sng" algn="ctr">
                       <a:solidFill>
                         <a:schemeClr val="bg1"/>
                       </a:solidFill>
@@ -20593,7 +21103,7 @@
                         <a:tabLst/>
                       </a:pPr>
                       <a:r>
-                        <a:rPr kumimoji="0" lang="en-US" altLang="x-none" sz="1800" b="1" i="0" u="none" strike="noStrike" cap="none" normalizeH="0" baseline="0">
+                        <a:rPr kumimoji="0" lang="en-US" altLang="x-none" sz="1800" b="1" i="0" u="none" strike="noStrike" cap="none" normalizeH="0" baseline="0" dirty="0">
                           <a:ln>
                             <a:noFill/>
                           </a:ln>
@@ -20604,7 +21114,7 @@
                           <a:latin typeface="Arial" charset="0"/>
                           <a:ea typeface="ＭＳ Ｐゴシック" charset="-128"/>
                         </a:rPr>
-                        <a:t>sse d</a:t>
+                        <a:t>d</a:t>
                       </a:r>
                     </a:p>
                   </a:txBody>
@@ -20627,7 +21137,7 @@
                       <a:headEnd type="none" w="med" len="med"/>
                       <a:tailEnd type="none" w="med" len="med"/>
                     </a:lnR>
-                    <a:lnT w="12700" cap="flat" cmpd="sng" algn="ctr">
+                    <a:lnT w="38100" cap="flat" cmpd="sng" algn="ctr">
                       <a:solidFill>
                         <a:schemeClr val="bg1"/>
                       </a:solidFill>
@@ -20844,7 +21354,7 @@
                         <a:tabLst/>
                       </a:pPr>
                       <a:r>
-                        <a:rPr kumimoji="0" lang="en-US" altLang="x-none" sz="1800" b="1" i="0" u="none" strike="noStrike" cap="none" normalizeH="0" baseline="0">
+                        <a:rPr kumimoji="0" lang="en-US" altLang="x-none" sz="1800" b="1" i="0" u="none" strike="noStrike" cap="none" normalizeH="0" baseline="0" dirty="0">
                           <a:ln>
                             <a:noFill/>
                           </a:ln>
@@ -20855,7 +21365,7 @@
                           <a:latin typeface="Arial" charset="0"/>
                           <a:ea typeface="ＭＳ Ｐゴシック" charset="-128"/>
                         </a:rPr>
-                        <a:t>avx s</a:t>
+                        <a:t>s</a:t>
                       </a:r>
                     </a:p>
                   </a:txBody>
@@ -20878,7 +21388,7 @@
                       <a:headEnd type="none" w="med" len="med"/>
                       <a:tailEnd type="none" w="med" len="med"/>
                     </a:lnR>
-                    <a:lnT w="12700" cap="flat" cmpd="sng" algn="ctr">
+                    <a:lnT w="38100" cap="flat" cmpd="sng" algn="ctr">
                       <a:solidFill>
                         <a:schemeClr val="bg1"/>
                       </a:solidFill>
@@ -21095,20 +21605,6 @@
                         <a:tabLst/>
                       </a:pPr>
                       <a:r>
-                        <a:rPr kumimoji="0" lang="en-US" altLang="x-none" sz="1800" b="1" i="0" u="none" strike="noStrike" cap="none" normalizeH="0" baseline="0" dirty="0" err="1">
-                          <a:ln>
-                            <a:noFill/>
-                          </a:ln>
-                          <a:solidFill>
-                            <a:srgbClr val="FFFFFF"/>
-                          </a:solidFill>
-                          <a:effectLst/>
-                          <a:latin typeface="Arial" charset="0"/>
-                          <a:ea typeface="ＭＳ Ｐゴシック" charset="-128"/>
-                        </a:rPr>
-                        <a:t>avx</a:t>
-                      </a:r>
-                      <a:r>
                         <a:rPr kumimoji="0" lang="en-US" altLang="x-none" sz="1800" b="1" i="0" u="none" strike="noStrike" cap="none" normalizeH="0" baseline="0" dirty="0">
                           <a:ln>
                             <a:noFill/>
@@ -21120,50 +21616,19 @@
                           <a:latin typeface="Arial" charset="0"/>
                           <a:ea typeface="ＭＳ Ｐゴシック" charset="-128"/>
                         </a:rPr>
-                        <a:t> d </a:t>
+                        <a:t>d </a:t>
                       </a:r>
-                      <a:r>
-                        <a:rPr kumimoji="0" lang="en-US" altLang="x-none" sz="1800" b="1" i="0" u="none" strike="noStrike" cap="none" normalizeH="0" baseline="0" dirty="0">
-                          <a:ln>
-                            <a:noFill/>
-                          </a:ln>
-                          <a:solidFill>
-                            <a:srgbClr val="FF0000"/>
-                          </a:solidFill>
-                          <a:effectLst/>
-                          <a:latin typeface="Arial" charset="0"/>
-                          <a:ea typeface="ＭＳ Ｐゴシック" charset="-128"/>
-                        </a:rPr>
-                        <a:t>(FMA </a:t>
-                      </a:r>
-                      <a:r>
-                        <a:rPr kumimoji="0" lang="en-US" altLang="x-none" sz="1800" b="1" i="0" u="none" strike="noStrike" cap="none" normalizeH="0" baseline="0" dirty="0" err="1">
-                          <a:ln>
-                            <a:noFill/>
-                          </a:ln>
-                          <a:solidFill>
-                            <a:srgbClr val="FF0000"/>
-                          </a:solidFill>
-                          <a:effectLst/>
-                          <a:latin typeface="Arial" charset="0"/>
-                          <a:ea typeface="ＭＳ Ｐゴシック" charset="-128"/>
-                        </a:rPr>
-                        <a:t>s&amp;d</a:t>
-                      </a:r>
-                      <a:r>
-                        <a:rPr kumimoji="0" lang="en-US" altLang="x-none" sz="1800" b="1" i="0" u="none" strike="noStrike" cap="none" normalizeH="0" baseline="0" dirty="0">
-                          <a:ln>
-                            <a:noFill/>
-                          </a:ln>
-                          <a:solidFill>
-                            <a:srgbClr val="FF0000"/>
-                          </a:solidFill>
-                          <a:effectLst/>
-                          <a:latin typeface="Arial" charset="0"/>
-                          <a:ea typeface="ＭＳ Ｐゴシック" charset="-128"/>
-                        </a:rPr>
-                        <a:t>)</a:t>
-                      </a:r>
+                      <a:endParaRPr kumimoji="0" lang="en-US" altLang="x-none" sz="1800" b="1" i="0" u="none" strike="noStrike" cap="none" normalizeH="0" baseline="0" dirty="0">
+                        <a:ln>
+                          <a:noFill/>
+                        </a:ln>
+                        <a:solidFill>
+                          <a:srgbClr val="FF0000"/>
+                        </a:solidFill>
+                        <a:effectLst/>
+                        <a:latin typeface="Arial" charset="0"/>
+                        <a:ea typeface="ＭＳ Ｐゴシック" charset="-128"/>
+                      </a:endParaRPr>
                     </a:p>
                   </a:txBody>
                   <a:tcPr marL="91433" marR="91433" marT="45709" marB="45709" horzOverflow="overflow">
@@ -21185,7 +21650,7 @@
                       <a:headEnd type="none" w="med" len="med"/>
                       <a:tailEnd type="none" w="med" len="med"/>
                     </a:lnR>
-                    <a:lnT w="12700" cap="flat" cmpd="sng" algn="ctr">
+                    <a:lnT w="38100" cap="flat" cmpd="sng" algn="ctr">
                       <a:solidFill>
                         <a:schemeClr val="bg1"/>
                       </a:solidFill>
@@ -22413,7 +22878,7 @@
                         <a:tabLst/>
                       </a:pPr>
                       <a:r>
-                        <a:rPr kumimoji="0" lang="en-US" altLang="x-none" sz="1800" b="0" i="0" u="none" strike="noStrike" cap="none" normalizeH="0" baseline="0">
+                        <a:rPr kumimoji="0" lang="en-US" altLang="x-none" sz="1800" b="0" i="0" u="none" strike="noStrike" cap="none" normalizeH="0" baseline="0" dirty="0">
                           <a:ln>
                             <a:noFill/>
                           </a:ln>
@@ -22424,7 +22889,7 @@
                           <a:latin typeface="Arial" charset="0"/>
                           <a:ea typeface="ＭＳ Ｐゴシック" charset="-128"/>
                         </a:rPr>
-                        <a:t>3</a:t>
+                        <a:t>0.5</a:t>
                       </a:r>
                     </a:p>
                   </a:txBody>
@@ -22675,22 +23140,19 @@
                           <a:latin typeface="Arial" charset="0"/>
                           <a:ea typeface="ＭＳ Ｐゴシック" charset="-128"/>
                         </a:rPr>
-                        <a:t>3                </a:t>
+                        <a:t>0.5          </a:t>
                       </a:r>
-                      <a:r>
-                        <a:rPr kumimoji="0" lang="en-US" altLang="x-none" sz="1800" b="0" i="0" u="none" strike="noStrike" cap="none" normalizeH="0" baseline="0" dirty="0">
-                          <a:ln>
-                            <a:noFill/>
-                          </a:ln>
-                          <a:solidFill>
-                            <a:srgbClr val="0070C0"/>
-                          </a:solidFill>
-                          <a:effectLst/>
-                          <a:latin typeface="Arial" charset="0"/>
-                          <a:ea typeface="ＭＳ Ｐゴシック" charset="-128"/>
-                        </a:rPr>
-                        <a:t>4</a:t>
-                      </a:r>
+                      <a:endParaRPr kumimoji="0" lang="en-US" altLang="x-none" sz="1800" b="0" i="0" u="none" strike="noStrike" cap="none" normalizeH="0" baseline="0" dirty="0">
+                        <a:ln>
+                          <a:noFill/>
+                        </a:ln>
+                        <a:solidFill>
+                          <a:srgbClr val="0070C0"/>
+                        </a:solidFill>
+                        <a:effectLst/>
+                        <a:latin typeface="Arial" charset="0"/>
+                        <a:ea typeface="ＭＳ Ｐゴシック" charset="-128"/>
+                      </a:endParaRPr>
                     </a:p>
                   </a:txBody>
                   <a:tcPr marL="91433" marR="91433" marT="45709" marB="45709" horzOverflow="overflow">
@@ -22936,7 +23398,7 @@
                         <a:tabLst/>
                       </a:pPr>
                       <a:r>
-                        <a:rPr kumimoji="0" lang="en-US" altLang="x-none" sz="1800" b="1" i="0" u="none" strike="noStrike" cap="none" normalizeH="0" baseline="0">
+                        <a:rPr kumimoji="0" lang="en-US" altLang="x-none" sz="1800" b="1" i="0" u="none" strike="noStrike" cap="none" normalizeH="0" baseline="0" dirty="0">
                           <a:ln>
                             <a:noFill/>
                           </a:ln>
@@ -22968,7 +23430,7 @@
                         <a:tabLst/>
                       </a:pPr>
                       <a:r>
-                        <a:rPr kumimoji="0" lang="en-US" altLang="x-none" sz="1800" b="1" i="0" u="none" strike="noStrike" cap="none" normalizeH="0" baseline="0">
+                        <a:rPr kumimoji="0" lang="en-US" altLang="x-none" sz="1800" b="1" i="0" u="none" strike="noStrike" cap="none" normalizeH="0" baseline="0" dirty="0">
                           <a:ln>
                             <a:noFill/>
                           </a:ln>
@@ -23972,7 +24434,7 @@
                         <a:tabLst/>
                       </a:pPr>
                       <a:r>
-                        <a:rPr kumimoji="0" lang="en-US" altLang="x-none" sz="1800" b="0" i="0" u="none" strike="noStrike" cap="none" normalizeH="0" baseline="0">
+                        <a:rPr kumimoji="0" lang="en-US" altLang="x-none" sz="1800" b="0" i="0" u="none" strike="noStrike" cap="none" normalizeH="0" baseline="0" dirty="0">
                           <a:ln>
                             <a:noFill/>
                           </a:ln>
@@ -23983,7 +24445,7 @@
                           <a:latin typeface="Arial" charset="0"/>
                           <a:ea typeface="ＭＳ Ｐゴシック" charset="-128"/>
                         </a:rPr>
-                        <a:t>2,3</a:t>
+                        <a:t>0.5-1</a:t>
                       </a:r>
                     </a:p>
                   </a:txBody>
@@ -24223,7 +24685,7 @@
                         <a:tabLst/>
                       </a:pPr>
                       <a:r>
-                        <a:rPr kumimoji="0" lang="en-US" altLang="x-none" sz="1800" b="0" i="0" u="none" strike="noStrike" cap="none" normalizeH="0" baseline="0">
+                        <a:rPr kumimoji="0" lang="en-US" altLang="x-none" sz="1800" b="0" i="0" u="none" strike="noStrike" cap="none" normalizeH="0" baseline="0" dirty="0">
                           <a:ln>
                             <a:noFill/>
                           </a:ln>
@@ -24234,7 +24696,7 @@
                           <a:latin typeface="Arial" charset="0"/>
                           <a:ea typeface="ＭＳ Ｐゴシック" charset="-128"/>
                         </a:rPr>
-                        <a:t>2,3</a:t>
+                        <a:t>0.5-1</a:t>
                       </a:r>
                     </a:p>
                   </a:txBody>
@@ -24292,7 +24754,7 @@
                   </a:ext>
                 </a:extLst>
               </a:tr>
-              <a:tr h="779463">
+              <a:tr h="456389">
                 <a:tc>
                   <a:txBody>
                     <a:bodyPr/>
@@ -24481,7 +24943,7 @@
                         <a:tabLst/>
                       </a:pPr>
                       <a:r>
-                        <a:rPr kumimoji="0" lang="en-US" altLang="x-none" sz="1800" b="1" i="0" u="none" strike="noStrike" cap="none" normalizeH="0" baseline="0">
+                        <a:rPr kumimoji="0" lang="en-US" altLang="x-none" sz="1800" b="1" i="0" u="none" strike="noStrike" cap="none" normalizeH="0" baseline="0" dirty="0">
                           <a:ln>
                             <a:noFill/>
                           </a:ln>
@@ -24492,28 +24954,10 @@
                           <a:latin typeface="Arial" charset="0"/>
                           <a:ea typeface="ＭＳ Ｐゴシック" charset="-128"/>
                         </a:rPr>
-                        <a:t>f=d</a:t>
+                        <a:t>f=d  d=f ,</a:t>
                       </a:r>
-                    </a:p>
-                    <a:p>
-                      <a:pPr marL="0" marR="0" lvl="0" indent="0" algn="l" defTabSz="457200" rtl="0" eaLnBrk="1" fontAlgn="base" latinLnBrk="0" hangingPunct="1">
-                        <a:lnSpc>
-                          <a:spcPct val="100000"/>
-                        </a:lnSpc>
-                        <a:spcBef>
-                          <a:spcPct val="0"/>
-                        </a:spcBef>
-                        <a:spcAft>
-                          <a:spcPct val="0"/>
-                        </a:spcAft>
-                        <a:buClrTx/>
-                        <a:buSzTx/>
-                        <a:buFontTx/>
-                        <a:buNone/>
-                        <a:tabLst/>
-                      </a:pPr>
                       <a:r>
-                        <a:rPr kumimoji="0" lang="en-US" altLang="x-none" sz="1800" b="1" i="0" u="none" strike="noStrike" cap="none" normalizeH="0" baseline="0">
+                        <a:rPr kumimoji="0" lang="en-US" altLang="x-none" sz="1800" b="1" i="0" u="none" strike="noStrike" cap="none" normalizeH="0" baseline="0" dirty="0" err="1">
                           <a:ln>
                             <a:noFill/>
                           </a:ln>
@@ -24524,8 +24968,47 @@
                           <a:latin typeface="Arial" charset="0"/>
                           <a:ea typeface="ＭＳ Ｐゴシック" charset="-128"/>
                         </a:rPr>
-                        <a:t>d=f</a:t>
+                        <a:t>i</a:t>
                       </a:r>
+                      <a:r>
+                        <a:rPr kumimoji="0" lang="en-US" altLang="x-none" sz="1800" b="1" i="0" u="none" strike="noStrike" cap="none" normalizeH="0" baseline="0" dirty="0">
+                          <a:ln>
+                            <a:noFill/>
+                          </a:ln>
+                          <a:solidFill>
+                            <a:srgbClr val="FFFFFF"/>
+                          </a:solidFill>
+                          <a:effectLst/>
+                          <a:latin typeface="Arial" charset="0"/>
+                          <a:ea typeface="ＭＳ Ｐゴシック" charset="-128"/>
+                        </a:rPr>
+                        <a:t>=f, f=</a:t>
+                      </a:r>
+                      <a:r>
+                        <a:rPr kumimoji="0" lang="en-US" altLang="x-none" sz="1800" b="1" i="0" u="none" strike="noStrike" cap="none" normalizeH="0" baseline="0" dirty="0" err="1">
+                          <a:ln>
+                            <a:noFill/>
+                          </a:ln>
+                          <a:solidFill>
+                            <a:srgbClr val="FFFFFF"/>
+                          </a:solidFill>
+                          <a:effectLst/>
+                          <a:latin typeface="Arial" charset="0"/>
+                          <a:ea typeface="ＭＳ Ｐゴシック" charset="-128"/>
+                        </a:rPr>
+                        <a:t>i</a:t>
+                      </a:r>
+                      <a:endParaRPr kumimoji="0" lang="en-US" altLang="x-none" sz="1800" b="1" i="0" u="none" strike="noStrike" cap="none" normalizeH="0" baseline="0" dirty="0">
+                        <a:ln>
+                          <a:noFill/>
+                        </a:ln>
+                        <a:solidFill>
+                          <a:srgbClr val="FFFFFF"/>
+                        </a:solidFill>
+                        <a:effectLst/>
+                        <a:latin typeface="Arial" charset="0"/>
+                        <a:ea typeface="ＭＳ Ｐゴシック" charset="-128"/>
+                      </a:endParaRPr>
                     </a:p>
                   </a:txBody>
                   <a:tcPr marL="91433" marR="91433" marT="45709" marB="45709" horzOverflow="overflow">
@@ -25015,7 +25498,7 @@
                         <a:tabLst/>
                       </a:pPr>
                       <a:r>
-                        <a:rPr kumimoji="0" lang="en-US" altLang="x-none" sz="1800" b="0" i="0" u="none" strike="noStrike" cap="none" normalizeH="0" baseline="0">
+                        <a:rPr kumimoji="0" lang="en-US" altLang="x-none" sz="1800" b="0" i="0" u="none" strike="noStrike" cap="none" normalizeH="0" baseline="0" dirty="0">
                           <a:ln>
                             <a:noFill/>
                           </a:ln>
@@ -25026,7 +25509,7 @@
                           <a:latin typeface="Arial" charset="0"/>
                           <a:ea typeface="ＭＳ Ｐゴシック" charset="-128"/>
                         </a:rPr>
-                        <a:t>3</a:t>
+                        <a:t>3-7</a:t>
                       </a:r>
                     </a:p>
                   </a:txBody>
@@ -25266,7 +25749,7 @@
                         <a:tabLst/>
                       </a:pPr>
                       <a:r>
-                        <a:rPr kumimoji="0" lang="en-US" altLang="x-none" sz="1800" b="0" i="0" u="none" strike="noStrike" cap="none" normalizeH="0" baseline="0">
+                        <a:rPr kumimoji="0" lang="en-US" altLang="x-none" sz="1800" b="0" i="0" u="none" strike="noStrike" cap="none" normalizeH="0" baseline="0" dirty="0">
                           <a:ln>
                             <a:noFill/>
                           </a:ln>
@@ -25277,7 +25760,7 @@
                           <a:latin typeface="Arial" charset="0"/>
                           <a:ea typeface="ＭＳ Ｐゴシック" charset="-128"/>
                         </a:rPr>
-                        <a:t>3</a:t>
+                        <a:t>3-7</a:t>
                       </a:r>
                     </a:p>
                   </a:txBody>
@@ -25517,7 +26000,7 @@
                         <a:tabLst/>
                       </a:pPr>
                       <a:r>
-                        <a:rPr kumimoji="0" lang="en-US" altLang="x-none" sz="1800" b="0" i="0" u="none" strike="noStrike" cap="none" normalizeH="0" baseline="0">
+                        <a:rPr kumimoji="0" lang="en-US" altLang="x-none" sz="1800" b="0" i="0" u="none" strike="noStrike" cap="none" normalizeH="0" baseline="0" dirty="0">
                           <a:ln>
                             <a:noFill/>
                           </a:ln>
@@ -25528,7 +26011,7 @@
                           <a:latin typeface="Arial" charset="0"/>
                           <a:ea typeface="ＭＳ Ｐゴシック" charset="-128"/>
                         </a:rPr>
-                        <a:t>4</a:t>
+                        <a:t>0.5-1</a:t>
                       </a:r>
                     </a:p>
                   </a:txBody>
@@ -25768,7 +26251,7 @@
                         <a:tabLst/>
                       </a:pPr>
                       <a:r>
-                        <a:rPr kumimoji="0" lang="en-US" altLang="x-none" sz="1800" b="0" i="0" u="none" strike="noStrike" cap="none" normalizeH="0" baseline="0">
+                        <a:rPr kumimoji="0" lang="en-US" altLang="x-none" sz="1800" b="0" i="0" u="none" strike="noStrike" cap="none" normalizeH="0" baseline="0" dirty="0">
                           <a:ln>
                             <a:noFill/>
                           </a:ln>
@@ -25779,7 +26262,7 @@
                           <a:latin typeface="Arial" charset="0"/>
                           <a:ea typeface="ＭＳ Ｐゴシック" charset="-128"/>
                         </a:rPr>
-                        <a:t>4</a:t>
+                        <a:t>0.5-1</a:t>
                       </a:r>
                     </a:p>
                   </a:txBody>
@@ -26026,7 +26509,7 @@
                         <a:tabLst/>
                       </a:pPr>
                       <a:r>
-                        <a:rPr kumimoji="0" lang="en-US" altLang="x-none" sz="1800" b="1" i="0" u="none" strike="noStrike" cap="none" normalizeH="0" baseline="0">
+                        <a:rPr kumimoji="0" lang="en-US" altLang="x-none" sz="1800" b="1" i="0" u="none" strike="noStrike" cap="none" normalizeH="0" baseline="0" dirty="0">
                           <a:ln>
                             <a:noFill/>
                           </a:ln>
@@ -26528,7 +27011,7 @@
                         <a:tabLst/>
                       </a:pPr>
                       <a:r>
-                        <a:rPr kumimoji="0" lang="en-US" altLang="x-none" sz="1800" b="0" i="0" u="none" strike="noStrike" cap="none" normalizeH="0" baseline="0">
+                        <a:rPr kumimoji="0" lang="en-US" altLang="x-none" sz="1800" b="0" i="0" u="none" strike="noStrike" cap="none" normalizeH="0" baseline="0" dirty="0">
                           <a:ln>
                             <a:noFill/>
                           </a:ln>
@@ -26539,7 +27022,7 @@
                           <a:latin typeface="Arial" charset="0"/>
                           <a:ea typeface="ＭＳ Ｐゴシック" charset="-128"/>
                         </a:rPr>
-                        <a:t>1</a:t>
+                        <a:t>1-2</a:t>
                       </a:r>
                     </a:p>
                   </a:txBody>
@@ -26779,7 +27262,7 @@
                         <a:tabLst/>
                       </a:pPr>
                       <a:r>
-                        <a:rPr kumimoji="0" lang="en-US" altLang="x-none" sz="1800" b="0" i="0" u="none" strike="noStrike" cap="none" normalizeH="0" baseline="0">
+                        <a:rPr kumimoji="0" lang="en-US" altLang="x-none" sz="1800" b="0" i="0" u="none" strike="noStrike" cap="none" normalizeH="0" baseline="0" dirty="0">
                           <a:ln>
                             <a:noFill/>
                           </a:ln>
@@ -26790,7 +27273,7 @@
                           <a:latin typeface="Arial" charset="0"/>
                           <a:ea typeface="ＭＳ Ｐゴシック" charset="-128"/>
                         </a:rPr>
-                        <a:t>1</a:t>
+                        <a:t>1-2</a:t>
                       </a:r>
                     </a:p>
                   </a:txBody>
@@ -27030,7 +27513,7 @@
                         <a:tabLst/>
                       </a:pPr>
                       <a:r>
-                        <a:rPr kumimoji="0" lang="en-US" altLang="x-none" sz="1800" b="0" i="0" u="none" strike="noStrike" cap="none" normalizeH="0" baseline="0">
+                        <a:rPr kumimoji="0" lang="en-US" altLang="x-none" sz="1800" b="0" i="0" u="none" strike="noStrike" cap="none" normalizeH="0" baseline="0" dirty="0">
                           <a:ln>
                             <a:noFill/>
                           </a:ln>
@@ -27041,7 +27524,7 @@
                           <a:latin typeface="Arial" charset="0"/>
                           <a:ea typeface="ＭＳ Ｐゴシック" charset="-128"/>
                         </a:rPr>
-                        <a:t>1</a:t>
+                        <a:t>0.25-0.5</a:t>
                       </a:r>
                     </a:p>
                   </a:txBody>
@@ -27281,7 +27764,7 @@
                         <a:tabLst/>
                       </a:pPr>
                       <a:r>
-                        <a:rPr kumimoji="0" lang="en-US" altLang="x-none" sz="1800" b="0" i="0" u="none" strike="noStrike" cap="none" normalizeH="0" baseline="0">
+                        <a:rPr kumimoji="0" lang="en-US" altLang="x-none" sz="1800" b="0" i="0" u="none" strike="noStrike" cap="none" normalizeH="0" baseline="0" dirty="0">
                           <a:ln>
                             <a:noFill/>
                           </a:ln>
@@ -27292,7 +27775,7 @@
                           <a:latin typeface="Arial" charset="0"/>
                           <a:ea typeface="ＭＳ Ｐゴシック" charset="-128"/>
                         </a:rPr>
-                        <a:t>1</a:t>
+                        <a:t>0.25-0.5</a:t>
                       </a:r>
                     </a:p>
                   </a:txBody>
@@ -27790,7 +28273,7 @@
                         <a:tabLst/>
                       </a:pPr>
                       <a:r>
-                        <a:rPr kumimoji="0" lang="en-US" altLang="x-none" sz="1800" b="0" i="0" u="none" strike="noStrike" cap="none" normalizeH="0" baseline="0">
+                        <a:rPr kumimoji="0" lang="en-US" altLang="x-none" sz="1800" b="0" i="0" u="none" strike="noStrike" cap="none" normalizeH="0" baseline="0" dirty="0">
                           <a:ln>
                             <a:noFill/>
                           </a:ln>
@@ -28543,7 +29026,7 @@
                         <a:tabLst/>
                       </a:pPr>
                       <a:r>
-                        <a:rPr kumimoji="0" lang="en-US" altLang="x-none" sz="1800" b="0" i="0" u="none" strike="noStrike" cap="none" normalizeH="0" baseline="0">
+                        <a:rPr kumimoji="0" lang="en-US" altLang="x-none" sz="1800" b="0" i="0" u="none" strike="noStrike" cap="none" normalizeH="0" baseline="0" dirty="0">
                           <a:ln>
                             <a:noFill/>
                           </a:ln>
@@ -28554,7 +29037,7 @@
                           <a:latin typeface="Arial" charset="0"/>
                           <a:ea typeface="ＭＳ Ｐゴシック" charset="-128"/>
                         </a:rPr>
-                        <a:t>5</a:t>
+                        <a:t>0.5</a:t>
                       </a:r>
                     </a:p>
                   </a:txBody>
@@ -28805,22 +29288,19 @@
                           <a:latin typeface="Arial" charset="0"/>
                           <a:ea typeface="ＭＳ Ｐゴシック" charset="-128"/>
                         </a:rPr>
-                        <a:t>5                </a:t>
+                        <a:t>0.5              </a:t>
                       </a:r>
-                      <a:r>
-                        <a:rPr kumimoji="0" lang="en-US" altLang="x-none" sz="1800" b="0" i="0" u="none" strike="noStrike" cap="none" normalizeH="0" baseline="0" dirty="0">
-                          <a:ln>
-                            <a:noFill/>
-                          </a:ln>
-                          <a:solidFill>
-                            <a:srgbClr val="0070C0"/>
-                          </a:solidFill>
-                          <a:effectLst/>
-                          <a:latin typeface="Arial" charset="0"/>
-                          <a:ea typeface="ＭＳ Ｐゴシック" charset="-128"/>
-                        </a:rPr>
-                        <a:t>4</a:t>
-                      </a:r>
+                      <a:endParaRPr kumimoji="0" lang="en-US" altLang="x-none" sz="1800" b="0" i="0" u="none" strike="noStrike" cap="none" normalizeH="0" baseline="0" dirty="0">
+                        <a:ln>
+                          <a:noFill/>
+                        </a:ln>
+                        <a:solidFill>
+                          <a:srgbClr val="0070C0"/>
+                        </a:solidFill>
+                        <a:effectLst/>
+                        <a:latin typeface="Arial" charset="0"/>
+                        <a:ea typeface="ＭＳ Ｐゴシック" charset="-128"/>
+                      </a:endParaRPr>
                     </a:p>
                   </a:txBody>
                   <a:tcPr marL="91433" marR="91433" marT="45709" marB="45709" horzOverflow="overflow">
@@ -28881,173 +29361,7 @@
                 <a:tc>
                   <a:txBody>
                     <a:bodyPr/>
-                    <a:lstStyle>
-                      <a:lvl1pPr defTabSz="457200" eaLnBrk="0" hangingPunct="0">
-                        <a:spcBef>
-                          <a:spcPct val="20000"/>
-                        </a:spcBef>
-                        <a:buClr>
-                          <a:schemeClr val="accent1"/>
-                        </a:buClr>
-                        <a:buSzPct val="65000"/>
-                        <a:buFont typeface="Wingdings" charset="2"/>
-                        <a:defRPr sz="2600">
-                          <a:solidFill>
-                            <a:schemeClr val="tx1"/>
-                          </a:solidFill>
-                          <a:latin typeface="Arial" charset="0"/>
-                          <a:ea typeface="ＭＳ Ｐゴシック" charset="-128"/>
-                        </a:defRPr>
-                      </a:lvl1pPr>
-                      <a:lvl2pPr marL="742950" indent="-285750" defTabSz="457200" eaLnBrk="0" hangingPunct="0">
-                        <a:spcBef>
-                          <a:spcPct val="20000"/>
-                        </a:spcBef>
-                        <a:buClr>
-                          <a:schemeClr val="accent2"/>
-                        </a:buClr>
-                        <a:buSzPct val="60000"/>
-                        <a:buFont typeface="Wingdings" charset="2"/>
-                        <a:defRPr sz="2200">
-                          <a:solidFill>
-                            <a:schemeClr val="tx1"/>
-                          </a:solidFill>
-                          <a:latin typeface="Arial" charset="0"/>
-                          <a:ea typeface="ＭＳ Ｐゴシック" charset="-128"/>
-                        </a:defRPr>
-                      </a:lvl2pPr>
-                      <a:lvl3pPr marL="1143000" indent="-228600" defTabSz="457200" eaLnBrk="0" hangingPunct="0">
-                        <a:spcBef>
-                          <a:spcPct val="20000"/>
-                        </a:spcBef>
-                        <a:buClr>
-                          <a:schemeClr val="accent1"/>
-                        </a:buClr>
-                        <a:buSzPct val="65000"/>
-                        <a:buFont typeface="Wingdings" charset="2"/>
-                        <a:defRPr sz="2000">
-                          <a:solidFill>
-                            <a:schemeClr val="tx1"/>
-                          </a:solidFill>
-                          <a:latin typeface="Arial" charset="0"/>
-                          <a:ea typeface="ＭＳ Ｐゴシック" charset="-128"/>
-                        </a:defRPr>
-                      </a:lvl3pPr>
-                      <a:lvl4pPr marL="1600200" indent="-228600" defTabSz="457200" eaLnBrk="0" hangingPunct="0">
-                        <a:spcBef>
-                          <a:spcPct val="20000"/>
-                        </a:spcBef>
-                        <a:buClr>
-                          <a:schemeClr val="accent2"/>
-                        </a:buClr>
-                        <a:buSzPct val="70000"/>
-                        <a:buFont typeface="Wingdings" charset="2"/>
-                        <a:defRPr>
-                          <a:solidFill>
-                            <a:schemeClr val="tx1"/>
-                          </a:solidFill>
-                          <a:latin typeface="Arial" charset="0"/>
-                          <a:ea typeface="ＭＳ Ｐゴシック" charset="-128"/>
-                        </a:defRPr>
-                      </a:lvl4pPr>
-                      <a:lvl5pPr marL="2057400" indent="-228600" defTabSz="457200" eaLnBrk="0" hangingPunct="0">
-                        <a:spcBef>
-                          <a:spcPct val="20000"/>
-                        </a:spcBef>
-                        <a:buClr>
-                          <a:schemeClr val="accent1"/>
-                        </a:buClr>
-                        <a:buSzPct val="75000"/>
-                        <a:buFont typeface="Wingdings" charset="2"/>
-                        <a:defRPr>
-                          <a:solidFill>
-                            <a:schemeClr val="tx1"/>
-                          </a:solidFill>
-                          <a:latin typeface="Arial" charset="0"/>
-                          <a:ea typeface="ＭＳ Ｐゴシック" charset="-128"/>
-                        </a:defRPr>
-                      </a:lvl5pPr>
-                      <a:lvl6pPr marL="2514600" indent="-228600" defTabSz="457200" eaLnBrk="0" fontAlgn="base" hangingPunct="0">
-                        <a:spcBef>
-                          <a:spcPct val="20000"/>
-                        </a:spcBef>
-                        <a:spcAft>
-                          <a:spcPct val="0"/>
-                        </a:spcAft>
-                        <a:buClr>
-                          <a:schemeClr val="accent1"/>
-                        </a:buClr>
-                        <a:buSzPct val="75000"/>
-                        <a:buFont typeface="Wingdings" charset="2"/>
-                        <a:defRPr>
-                          <a:solidFill>
-                            <a:schemeClr val="tx1"/>
-                          </a:solidFill>
-                          <a:latin typeface="Arial" charset="0"/>
-                          <a:ea typeface="ＭＳ Ｐゴシック" charset="-128"/>
-                        </a:defRPr>
-                      </a:lvl6pPr>
-                      <a:lvl7pPr marL="2971800" indent="-228600" defTabSz="457200" eaLnBrk="0" fontAlgn="base" hangingPunct="0">
-                        <a:spcBef>
-                          <a:spcPct val="20000"/>
-                        </a:spcBef>
-                        <a:spcAft>
-                          <a:spcPct val="0"/>
-                        </a:spcAft>
-                        <a:buClr>
-                          <a:schemeClr val="accent1"/>
-                        </a:buClr>
-                        <a:buSzPct val="75000"/>
-                        <a:buFont typeface="Wingdings" charset="2"/>
-                        <a:defRPr>
-                          <a:solidFill>
-                            <a:schemeClr val="tx1"/>
-                          </a:solidFill>
-                          <a:latin typeface="Arial" charset="0"/>
-                          <a:ea typeface="ＭＳ Ｐゴシック" charset="-128"/>
-                        </a:defRPr>
-                      </a:lvl7pPr>
-                      <a:lvl8pPr marL="3429000" indent="-228600" defTabSz="457200" eaLnBrk="0" fontAlgn="base" hangingPunct="0">
-                        <a:spcBef>
-                          <a:spcPct val="20000"/>
-                        </a:spcBef>
-                        <a:spcAft>
-                          <a:spcPct val="0"/>
-                        </a:spcAft>
-                        <a:buClr>
-                          <a:schemeClr val="accent1"/>
-                        </a:buClr>
-                        <a:buSzPct val="75000"/>
-                        <a:buFont typeface="Wingdings" charset="2"/>
-                        <a:defRPr>
-                          <a:solidFill>
-                            <a:schemeClr val="tx1"/>
-                          </a:solidFill>
-                          <a:latin typeface="Arial" charset="0"/>
-                          <a:ea typeface="ＭＳ Ｐゴシック" charset="-128"/>
-                        </a:defRPr>
-                      </a:lvl8pPr>
-                      <a:lvl9pPr marL="3886200" indent="-228600" defTabSz="457200" eaLnBrk="0" fontAlgn="base" hangingPunct="0">
-                        <a:spcBef>
-                          <a:spcPct val="20000"/>
-                        </a:spcBef>
-                        <a:spcAft>
-                          <a:spcPct val="0"/>
-                        </a:spcAft>
-                        <a:buClr>
-                          <a:schemeClr val="accent1"/>
-                        </a:buClr>
-                        <a:buSzPct val="75000"/>
-                        <a:buFont typeface="Wingdings" charset="2"/>
-                        <a:defRPr>
-                          <a:solidFill>
-                            <a:schemeClr val="tx1"/>
-                          </a:solidFill>
-                          <a:latin typeface="Arial" charset="0"/>
-                          <a:ea typeface="ＭＳ Ｐゴシック" charset="-128"/>
-                        </a:defRPr>
-                      </a:lvl9pPr>
-                    </a:lstStyle>
+                    <a:lstStyle/>
                     <a:p>
                       <a:pPr marL="0" marR="0" lvl="0" indent="0" algn="l" defTabSz="457200" rtl="0" eaLnBrk="1" fontAlgn="base" latinLnBrk="0" hangingPunct="1">
                         <a:lnSpc>
@@ -29066,7 +29380,715 @@
                         <a:tabLst/>
                       </a:pPr>
                       <a:r>
-                        <a:rPr kumimoji="0" lang="en-US" altLang="x-none" sz="1800" b="1" i="0" u="none" strike="noStrike" cap="none" normalizeH="0" baseline="0">
+                        <a:rPr kumimoji="0" lang="en-US" altLang="x-none" sz="1800" b="1" i="0" u="none" strike="noStrike" cap="none" normalizeH="0" baseline="0" dirty="0">
+                          <a:ln>
+                            <a:noFill/>
+                          </a:ln>
+                          <a:solidFill>
+                            <a:srgbClr val="FFFFFF"/>
+                          </a:solidFill>
+                          <a:effectLst/>
+                          <a:latin typeface="Arial" charset="0"/>
+                          <a:ea typeface="ＭＳ Ｐゴシック" charset="-128"/>
+                        </a:rPr>
+                        <a:t>a*</a:t>
+                      </a:r>
+                      <a:r>
+                        <a:rPr kumimoji="0" lang="en-US" altLang="x-none" sz="1800" b="1" i="0" u="none" strike="noStrike" cap="none" normalizeH="0" baseline="0" dirty="0" err="1">
+                          <a:ln>
+                            <a:noFill/>
+                          </a:ln>
+                          <a:solidFill>
+                            <a:srgbClr val="FFFFFF"/>
+                          </a:solidFill>
+                          <a:effectLst/>
+                          <a:latin typeface="Arial" charset="0"/>
+                          <a:ea typeface="ＭＳ Ｐゴシック" charset="-128"/>
+                        </a:rPr>
+                        <a:t>b+c</a:t>
+                      </a:r>
+                      <a:endParaRPr kumimoji="0" lang="en-US" altLang="x-none" sz="1800" b="1" i="0" u="none" strike="noStrike" cap="none" normalizeH="0" baseline="0" dirty="0">
+                        <a:ln>
+                          <a:noFill/>
+                        </a:ln>
+                        <a:solidFill>
+                          <a:srgbClr val="FFFFFF"/>
+                        </a:solidFill>
+                        <a:effectLst/>
+                        <a:latin typeface="Arial" charset="0"/>
+                        <a:ea typeface="ＭＳ Ｐゴシック" charset="-128"/>
+                      </a:endParaRPr>
+                    </a:p>
+                  </a:txBody>
+                  <a:tcPr marL="91433" marR="91433" marT="45709" marB="45709" horzOverflow="overflow">
+                    <a:lnL w="12700" cap="flat" cmpd="sng" algn="ctr">
+                      <a:solidFill>
+                        <a:schemeClr val="bg1"/>
+                      </a:solidFill>
+                      <a:prstDash val="solid"/>
+                      <a:round/>
+                      <a:headEnd type="none" w="med" len="med"/>
+                      <a:tailEnd type="none" w="med" len="med"/>
+                    </a:lnL>
+                    <a:lnR w="12700" cap="flat" cmpd="sng" algn="ctr">
+                      <a:solidFill>
+                        <a:schemeClr val="bg1"/>
+                      </a:solidFill>
+                      <a:prstDash val="solid"/>
+                      <a:round/>
+                      <a:headEnd type="none" w="med" len="med"/>
+                      <a:tailEnd type="none" w="med" len="med"/>
+                    </a:lnR>
+                    <a:lnT w="12700" cap="flat" cmpd="sng" algn="ctr">
+                      <a:solidFill>
+                        <a:schemeClr val="bg1"/>
+                      </a:solidFill>
+                      <a:prstDash val="solid"/>
+                      <a:round/>
+                      <a:headEnd type="none" w="med" len="med"/>
+                      <a:tailEnd type="none" w="med" len="med"/>
+                    </a:lnT>
+                    <a:lnB w="12700" cap="flat" cmpd="sng" algn="ctr">
+                      <a:solidFill>
+                        <a:schemeClr val="bg1"/>
+                      </a:solidFill>
+                      <a:prstDash val="solid"/>
+                      <a:round/>
+                      <a:headEnd type="none" w="med" len="med"/>
+                      <a:tailEnd type="none" w="med" len="med"/>
+                    </a:lnB>
+                    <a:lnTlToBr>
+                      <a:noFill/>
+                    </a:lnTlToBr>
+                    <a:lnBlToTr>
+                      <a:noFill/>
+                    </a:lnBlToTr>
+                    <a:solidFill>
+                      <a:schemeClr val="accent1"/>
+                    </a:solidFill>
+                  </a:tcPr>
+                </a:tc>
+                <a:tc>
+                  <a:txBody>
+                    <a:bodyPr/>
+                    <a:lstStyle/>
+                    <a:p>
+                      <a:pPr marL="0" marR="0" lvl="0" indent="0" algn="l" defTabSz="457200" rtl="0" eaLnBrk="1" fontAlgn="base" latinLnBrk="0" hangingPunct="1">
+                        <a:lnSpc>
+                          <a:spcPct val="100000"/>
+                        </a:lnSpc>
+                        <a:spcBef>
+                          <a:spcPct val="0"/>
+                        </a:spcBef>
+                        <a:spcAft>
+                          <a:spcPct val="0"/>
+                        </a:spcAft>
+                        <a:buClrTx/>
+                        <a:buSzTx/>
+                        <a:buFontTx/>
+                        <a:buNone/>
+                        <a:tabLst/>
+                      </a:pPr>
+                      <a:r>
+                        <a:rPr kumimoji="0" lang="en-US" altLang="x-none" sz="1800" b="0" i="0" u="none" strike="noStrike" cap="none" normalizeH="0" baseline="0" dirty="0">
+                          <a:ln>
+                            <a:noFill/>
+                          </a:ln>
+                          <a:solidFill>
+                            <a:srgbClr val="000000"/>
+                          </a:solidFill>
+                          <a:effectLst/>
+                          <a:latin typeface="Arial" charset="0"/>
+                          <a:ea typeface="ＭＳ Ｐゴシック" charset="-128"/>
+                        </a:rPr>
+                        <a:t>FMA</a:t>
+                      </a:r>
+                    </a:p>
+                  </a:txBody>
+                  <a:tcPr marL="91433" marR="91433" marT="45709" marB="45709" horzOverflow="overflow">
+                    <a:lnL w="12700" cap="flat" cmpd="sng" algn="ctr">
+                      <a:solidFill>
+                        <a:schemeClr val="bg1"/>
+                      </a:solidFill>
+                      <a:prstDash val="solid"/>
+                      <a:round/>
+                      <a:headEnd type="none" w="med" len="med"/>
+                      <a:tailEnd type="none" w="med" len="med"/>
+                    </a:lnL>
+                    <a:lnR w="12700" cap="flat" cmpd="sng" algn="ctr">
+                      <a:solidFill>
+                        <a:schemeClr val="bg1"/>
+                      </a:solidFill>
+                      <a:prstDash val="solid"/>
+                      <a:round/>
+                      <a:headEnd type="none" w="med" len="med"/>
+                      <a:tailEnd type="none" w="med" len="med"/>
+                    </a:lnR>
+                    <a:lnT w="12700" cap="flat" cmpd="sng" algn="ctr">
+                      <a:solidFill>
+                        <a:schemeClr val="bg1"/>
+                      </a:solidFill>
+                      <a:prstDash val="solid"/>
+                      <a:round/>
+                      <a:headEnd type="none" w="med" len="med"/>
+                      <a:tailEnd type="none" w="med" len="med"/>
+                    </a:lnT>
+                    <a:lnB w="12700" cap="flat" cmpd="sng" algn="ctr">
+                      <a:solidFill>
+                        <a:schemeClr val="bg1"/>
+                      </a:solidFill>
+                      <a:prstDash val="solid"/>
+                      <a:round/>
+                      <a:headEnd type="none" w="med" len="med"/>
+                      <a:tailEnd type="none" w="med" len="med"/>
+                    </a:lnB>
+                    <a:lnTlToBr>
+                      <a:noFill/>
+                    </a:lnTlToBr>
+                    <a:lnBlToTr>
+                      <a:noFill/>
+                    </a:lnBlToTr>
+                    <a:solidFill>
+                      <a:srgbClr val="CBDEDE"/>
+                    </a:solidFill>
+                  </a:tcPr>
+                </a:tc>
+                <a:tc>
+                  <a:txBody>
+                    <a:bodyPr/>
+                    <a:lstStyle/>
+                    <a:p>
+                      <a:pPr marL="0" marR="0" lvl="0" indent="0" algn="l" defTabSz="457200" rtl="0" eaLnBrk="1" fontAlgn="base" latinLnBrk="0" hangingPunct="1">
+                        <a:lnSpc>
+                          <a:spcPct val="100000"/>
+                        </a:lnSpc>
+                        <a:spcBef>
+                          <a:spcPct val="0"/>
+                        </a:spcBef>
+                        <a:spcAft>
+                          <a:spcPct val="0"/>
+                        </a:spcAft>
+                        <a:buClrTx/>
+                        <a:buSzTx/>
+                        <a:buFontTx/>
+                        <a:buNone/>
+                        <a:tabLst/>
+                      </a:pPr>
+                      <a:r>
+                        <a:rPr kumimoji="0" lang="en-US" altLang="x-none" sz="1800" b="0" i="0" u="none" strike="noStrike" cap="none" normalizeH="0" baseline="0" dirty="0">
+                          <a:ln>
+                            <a:noFill/>
+                          </a:ln>
+                          <a:solidFill>
+                            <a:srgbClr val="000000"/>
+                          </a:solidFill>
+                          <a:effectLst/>
+                          <a:latin typeface="Arial" charset="0"/>
+                          <a:ea typeface="ＭＳ Ｐゴシック" charset="-128"/>
+                        </a:rPr>
+                        <a:t>4</a:t>
+                      </a:r>
+                    </a:p>
+                  </a:txBody>
+                  <a:tcPr marL="91433" marR="91433" marT="45709" marB="45709" horzOverflow="overflow">
+                    <a:lnL w="12700" cap="flat" cmpd="sng" algn="ctr">
+                      <a:solidFill>
+                        <a:schemeClr val="bg1"/>
+                      </a:solidFill>
+                      <a:prstDash val="solid"/>
+                      <a:round/>
+                      <a:headEnd type="none" w="med" len="med"/>
+                      <a:tailEnd type="none" w="med" len="med"/>
+                    </a:lnL>
+                    <a:lnR w="12700" cap="flat" cmpd="sng" algn="ctr">
+                      <a:solidFill>
+                        <a:schemeClr val="bg1"/>
+                      </a:solidFill>
+                      <a:prstDash val="solid"/>
+                      <a:round/>
+                      <a:headEnd type="none" w="med" len="med"/>
+                      <a:tailEnd type="none" w="med" len="med"/>
+                    </a:lnR>
+                    <a:lnT w="12700" cap="flat" cmpd="sng" algn="ctr">
+                      <a:solidFill>
+                        <a:schemeClr val="bg1"/>
+                      </a:solidFill>
+                      <a:prstDash val="solid"/>
+                      <a:round/>
+                      <a:headEnd type="none" w="med" len="med"/>
+                      <a:tailEnd type="none" w="med" len="med"/>
+                    </a:lnT>
+                    <a:lnB w="12700" cap="flat" cmpd="sng" algn="ctr">
+                      <a:solidFill>
+                        <a:schemeClr val="bg1"/>
+                      </a:solidFill>
+                      <a:prstDash val="solid"/>
+                      <a:round/>
+                      <a:headEnd type="none" w="med" len="med"/>
+                      <a:tailEnd type="none" w="med" len="med"/>
+                    </a:lnB>
+                    <a:lnTlToBr>
+                      <a:noFill/>
+                    </a:lnTlToBr>
+                    <a:lnBlToTr>
+                      <a:noFill/>
+                    </a:lnBlToTr>
+                    <a:solidFill>
+                      <a:srgbClr val="CBDEDE"/>
+                    </a:solidFill>
+                  </a:tcPr>
+                </a:tc>
+                <a:tc>
+                  <a:txBody>
+                    <a:bodyPr/>
+                    <a:lstStyle/>
+                    <a:p>
+                      <a:pPr marL="0" marR="0" lvl="0" indent="0" algn="l" defTabSz="457200" rtl="0" eaLnBrk="1" fontAlgn="base" latinLnBrk="0" hangingPunct="1">
+                        <a:lnSpc>
+                          <a:spcPct val="100000"/>
+                        </a:lnSpc>
+                        <a:spcBef>
+                          <a:spcPct val="0"/>
+                        </a:spcBef>
+                        <a:spcAft>
+                          <a:spcPct val="0"/>
+                        </a:spcAft>
+                        <a:buClrTx/>
+                        <a:buSzTx/>
+                        <a:buFontTx/>
+                        <a:buNone/>
+                        <a:tabLst/>
+                      </a:pPr>
+                      <a:r>
+                        <a:rPr kumimoji="0" lang="en-US" altLang="x-none" sz="1800" b="0" i="0" u="none" strike="noStrike" cap="none" normalizeH="0" baseline="0" dirty="0">
+                          <a:ln>
+                            <a:noFill/>
+                          </a:ln>
+                          <a:solidFill>
+                            <a:srgbClr val="000000"/>
+                          </a:solidFill>
+                          <a:effectLst/>
+                          <a:latin typeface="Arial" charset="0"/>
+                          <a:ea typeface="ＭＳ Ｐゴシック" charset="-128"/>
+                        </a:rPr>
+                        <a:t>4</a:t>
+                      </a:r>
+                    </a:p>
+                  </a:txBody>
+                  <a:tcPr marL="91433" marR="91433" marT="45709" marB="45709" horzOverflow="overflow">
+                    <a:lnL w="12700" cap="flat" cmpd="sng" algn="ctr">
+                      <a:solidFill>
+                        <a:schemeClr val="bg1"/>
+                      </a:solidFill>
+                      <a:prstDash val="solid"/>
+                      <a:round/>
+                      <a:headEnd type="none" w="med" len="med"/>
+                      <a:tailEnd type="none" w="med" len="med"/>
+                    </a:lnL>
+                    <a:lnR w="12700" cap="flat" cmpd="sng" algn="ctr">
+                      <a:solidFill>
+                        <a:schemeClr val="bg1"/>
+                      </a:solidFill>
+                      <a:prstDash val="solid"/>
+                      <a:round/>
+                      <a:headEnd type="none" w="med" len="med"/>
+                      <a:tailEnd type="none" w="med" len="med"/>
+                    </a:lnR>
+                    <a:lnT w="12700" cap="flat" cmpd="sng" algn="ctr">
+                      <a:solidFill>
+                        <a:schemeClr val="bg1"/>
+                      </a:solidFill>
+                      <a:prstDash val="solid"/>
+                      <a:round/>
+                      <a:headEnd type="none" w="med" len="med"/>
+                      <a:tailEnd type="none" w="med" len="med"/>
+                    </a:lnT>
+                    <a:lnB w="12700" cap="flat" cmpd="sng" algn="ctr">
+                      <a:solidFill>
+                        <a:schemeClr val="bg1"/>
+                      </a:solidFill>
+                      <a:prstDash val="solid"/>
+                      <a:round/>
+                      <a:headEnd type="none" w="med" len="med"/>
+                      <a:tailEnd type="none" w="med" len="med"/>
+                    </a:lnB>
+                    <a:lnTlToBr>
+                      <a:noFill/>
+                    </a:lnTlToBr>
+                    <a:lnBlToTr>
+                      <a:noFill/>
+                    </a:lnBlToTr>
+                    <a:solidFill>
+                      <a:srgbClr val="CBDEDE"/>
+                    </a:solidFill>
+                  </a:tcPr>
+                </a:tc>
+                <a:tc>
+                  <a:txBody>
+                    <a:bodyPr/>
+                    <a:lstStyle/>
+                    <a:p>
+                      <a:pPr marL="0" marR="0" lvl="0" indent="0" algn="l" defTabSz="457200" rtl="0" eaLnBrk="1" fontAlgn="base" latinLnBrk="0" hangingPunct="1">
+                        <a:lnSpc>
+                          <a:spcPct val="100000"/>
+                        </a:lnSpc>
+                        <a:spcBef>
+                          <a:spcPct val="0"/>
+                        </a:spcBef>
+                        <a:spcAft>
+                          <a:spcPct val="0"/>
+                        </a:spcAft>
+                        <a:buClrTx/>
+                        <a:buSzTx/>
+                        <a:buFontTx/>
+                        <a:buNone/>
+                        <a:tabLst/>
+                      </a:pPr>
+                      <a:r>
+                        <a:rPr kumimoji="0" lang="en-US" altLang="x-none" sz="1800" b="0" i="0" u="none" strike="noStrike" cap="none" normalizeH="0" baseline="0" dirty="0">
+                          <a:ln>
+                            <a:noFill/>
+                          </a:ln>
+                          <a:solidFill>
+                            <a:srgbClr val="000000"/>
+                          </a:solidFill>
+                          <a:effectLst/>
+                          <a:latin typeface="Arial" charset="0"/>
+                          <a:ea typeface="ＭＳ Ｐゴシック" charset="-128"/>
+                        </a:rPr>
+                        <a:t>0.5</a:t>
+                      </a:r>
+                    </a:p>
+                  </a:txBody>
+                  <a:tcPr marL="91433" marR="91433" marT="45709" marB="45709" horzOverflow="overflow">
+                    <a:lnL w="12700" cap="flat" cmpd="sng" algn="ctr">
+                      <a:solidFill>
+                        <a:schemeClr val="bg1"/>
+                      </a:solidFill>
+                      <a:prstDash val="solid"/>
+                      <a:round/>
+                      <a:headEnd type="none" w="med" len="med"/>
+                      <a:tailEnd type="none" w="med" len="med"/>
+                    </a:lnL>
+                    <a:lnR w="12700" cap="flat" cmpd="sng" algn="ctr">
+                      <a:solidFill>
+                        <a:schemeClr val="bg1"/>
+                      </a:solidFill>
+                      <a:prstDash val="solid"/>
+                      <a:round/>
+                      <a:headEnd type="none" w="med" len="med"/>
+                      <a:tailEnd type="none" w="med" len="med"/>
+                    </a:lnR>
+                    <a:lnT w="12700" cap="flat" cmpd="sng" algn="ctr">
+                      <a:solidFill>
+                        <a:schemeClr val="bg1"/>
+                      </a:solidFill>
+                      <a:prstDash val="solid"/>
+                      <a:round/>
+                      <a:headEnd type="none" w="med" len="med"/>
+                      <a:tailEnd type="none" w="med" len="med"/>
+                    </a:lnT>
+                    <a:lnB w="12700" cap="flat" cmpd="sng" algn="ctr">
+                      <a:solidFill>
+                        <a:schemeClr val="bg1"/>
+                      </a:solidFill>
+                      <a:prstDash val="solid"/>
+                      <a:round/>
+                      <a:headEnd type="none" w="med" len="med"/>
+                      <a:tailEnd type="none" w="med" len="med"/>
+                    </a:lnB>
+                    <a:lnTlToBr>
+                      <a:noFill/>
+                    </a:lnTlToBr>
+                    <a:lnBlToTr>
+                      <a:noFill/>
+                    </a:lnBlToTr>
+                    <a:solidFill>
+                      <a:srgbClr val="CBDEDE"/>
+                    </a:solidFill>
+                  </a:tcPr>
+                </a:tc>
+                <a:tc>
+                  <a:txBody>
+                    <a:bodyPr/>
+                    <a:lstStyle/>
+                    <a:p>
+                      <a:pPr marL="0" marR="0" lvl="0" indent="0" algn="l" defTabSz="457200" rtl="0" eaLnBrk="1" fontAlgn="base" latinLnBrk="0" hangingPunct="1">
+                        <a:lnSpc>
+                          <a:spcPct val="100000"/>
+                        </a:lnSpc>
+                        <a:spcBef>
+                          <a:spcPct val="0"/>
+                        </a:spcBef>
+                        <a:spcAft>
+                          <a:spcPct val="0"/>
+                        </a:spcAft>
+                        <a:buClrTx/>
+                        <a:buSzTx/>
+                        <a:buFontTx/>
+                        <a:buNone/>
+                        <a:tabLst/>
+                      </a:pPr>
+                      <a:r>
+                        <a:rPr kumimoji="0" lang="en-US" altLang="x-none" sz="1800" b="0" i="0" u="none" strike="noStrike" cap="none" normalizeH="0" baseline="0" dirty="0">
+                          <a:ln>
+                            <a:noFill/>
+                          </a:ln>
+                          <a:solidFill>
+                            <a:srgbClr val="002060"/>
+                          </a:solidFill>
+                          <a:effectLst/>
+                          <a:latin typeface="Arial" charset="0"/>
+                          <a:ea typeface="ＭＳ Ｐゴシック" charset="-128"/>
+                        </a:rPr>
+                        <a:t>0.5</a:t>
+                      </a:r>
+                    </a:p>
+                  </a:txBody>
+                  <a:tcPr marL="91433" marR="91433" marT="45709" marB="45709" horzOverflow="overflow">
+                    <a:lnL w="12700" cap="flat" cmpd="sng" algn="ctr">
+                      <a:solidFill>
+                        <a:schemeClr val="bg1"/>
+                      </a:solidFill>
+                      <a:prstDash val="solid"/>
+                      <a:round/>
+                      <a:headEnd type="none" w="med" len="med"/>
+                      <a:tailEnd type="none" w="med" len="med"/>
+                    </a:lnL>
+                    <a:lnR w="12700" cap="flat" cmpd="sng" algn="ctr">
+                      <a:solidFill>
+                        <a:schemeClr val="bg1"/>
+                      </a:solidFill>
+                      <a:prstDash val="solid"/>
+                      <a:round/>
+                      <a:headEnd type="none" w="med" len="med"/>
+                      <a:tailEnd type="none" w="med" len="med"/>
+                    </a:lnR>
+                    <a:lnT w="12700" cap="flat" cmpd="sng" algn="ctr">
+                      <a:solidFill>
+                        <a:schemeClr val="bg1"/>
+                      </a:solidFill>
+                      <a:prstDash val="solid"/>
+                      <a:round/>
+                      <a:headEnd type="none" w="med" len="med"/>
+                      <a:tailEnd type="none" w="med" len="med"/>
+                    </a:lnT>
+                    <a:lnB w="12700" cap="flat" cmpd="sng" algn="ctr">
+                      <a:solidFill>
+                        <a:schemeClr val="bg1"/>
+                      </a:solidFill>
+                      <a:prstDash val="solid"/>
+                      <a:round/>
+                      <a:headEnd type="none" w="med" len="med"/>
+                      <a:tailEnd type="none" w="med" len="med"/>
+                    </a:lnB>
+                    <a:lnTlToBr>
+                      <a:noFill/>
+                    </a:lnTlToBr>
+                    <a:lnBlToTr>
+                      <a:noFill/>
+                    </a:lnBlToTr>
+                    <a:solidFill>
+                      <a:srgbClr val="CBDEDE"/>
+                    </a:solidFill>
+                  </a:tcPr>
+                </a:tc>
+                <a:extLst>
+                  <a:ext uri="{0D108BD9-81ED-4DB2-BD59-A6C34878D82A}">
+                    <a16:rowId xmlns:a16="http://schemas.microsoft.com/office/drawing/2014/main" val="3124232465"/>
+                  </a:ext>
+                </a:extLst>
+              </a:tr>
+              <a:tr h="450850">
+                <a:tc>
+                  <a:txBody>
+                    <a:bodyPr/>
+                    <a:lstStyle>
+                      <a:lvl1pPr defTabSz="457200" eaLnBrk="0" hangingPunct="0">
+                        <a:spcBef>
+                          <a:spcPct val="20000"/>
+                        </a:spcBef>
+                        <a:buClr>
+                          <a:schemeClr val="accent1"/>
+                        </a:buClr>
+                        <a:buSzPct val="65000"/>
+                        <a:buFont typeface="Wingdings" charset="2"/>
+                        <a:defRPr sz="2600">
+                          <a:solidFill>
+                            <a:schemeClr val="tx1"/>
+                          </a:solidFill>
+                          <a:latin typeface="Arial" charset="0"/>
+                          <a:ea typeface="ＭＳ Ｐゴシック" charset="-128"/>
+                        </a:defRPr>
+                      </a:lvl1pPr>
+                      <a:lvl2pPr marL="742950" indent="-285750" defTabSz="457200" eaLnBrk="0" hangingPunct="0">
+                        <a:spcBef>
+                          <a:spcPct val="20000"/>
+                        </a:spcBef>
+                        <a:buClr>
+                          <a:schemeClr val="accent2"/>
+                        </a:buClr>
+                        <a:buSzPct val="60000"/>
+                        <a:buFont typeface="Wingdings" charset="2"/>
+                        <a:defRPr sz="2200">
+                          <a:solidFill>
+                            <a:schemeClr val="tx1"/>
+                          </a:solidFill>
+                          <a:latin typeface="Arial" charset="0"/>
+                          <a:ea typeface="ＭＳ Ｐゴシック" charset="-128"/>
+                        </a:defRPr>
+                      </a:lvl2pPr>
+                      <a:lvl3pPr marL="1143000" indent="-228600" defTabSz="457200" eaLnBrk="0" hangingPunct="0">
+                        <a:spcBef>
+                          <a:spcPct val="20000"/>
+                        </a:spcBef>
+                        <a:buClr>
+                          <a:schemeClr val="accent1"/>
+                        </a:buClr>
+                        <a:buSzPct val="65000"/>
+                        <a:buFont typeface="Wingdings" charset="2"/>
+                        <a:defRPr sz="2000">
+                          <a:solidFill>
+                            <a:schemeClr val="tx1"/>
+                          </a:solidFill>
+                          <a:latin typeface="Arial" charset="0"/>
+                          <a:ea typeface="ＭＳ Ｐゴシック" charset="-128"/>
+                        </a:defRPr>
+                      </a:lvl3pPr>
+                      <a:lvl4pPr marL="1600200" indent="-228600" defTabSz="457200" eaLnBrk="0" hangingPunct="0">
+                        <a:spcBef>
+                          <a:spcPct val="20000"/>
+                        </a:spcBef>
+                        <a:buClr>
+                          <a:schemeClr val="accent2"/>
+                        </a:buClr>
+                        <a:buSzPct val="70000"/>
+                        <a:buFont typeface="Wingdings" charset="2"/>
+                        <a:defRPr>
+                          <a:solidFill>
+                            <a:schemeClr val="tx1"/>
+                          </a:solidFill>
+                          <a:latin typeface="Arial" charset="0"/>
+                          <a:ea typeface="ＭＳ Ｐゴシック" charset="-128"/>
+                        </a:defRPr>
+                      </a:lvl4pPr>
+                      <a:lvl5pPr marL="2057400" indent="-228600" defTabSz="457200" eaLnBrk="0" hangingPunct="0">
+                        <a:spcBef>
+                          <a:spcPct val="20000"/>
+                        </a:spcBef>
+                        <a:buClr>
+                          <a:schemeClr val="accent1"/>
+                        </a:buClr>
+                        <a:buSzPct val="75000"/>
+                        <a:buFont typeface="Wingdings" charset="2"/>
+                        <a:defRPr>
+                          <a:solidFill>
+                            <a:schemeClr val="tx1"/>
+                          </a:solidFill>
+                          <a:latin typeface="Arial" charset="0"/>
+                          <a:ea typeface="ＭＳ Ｐゴシック" charset="-128"/>
+                        </a:defRPr>
+                      </a:lvl5pPr>
+                      <a:lvl6pPr marL="2514600" indent="-228600" defTabSz="457200" eaLnBrk="0" fontAlgn="base" hangingPunct="0">
+                        <a:spcBef>
+                          <a:spcPct val="20000"/>
+                        </a:spcBef>
+                        <a:spcAft>
+                          <a:spcPct val="0"/>
+                        </a:spcAft>
+                        <a:buClr>
+                          <a:schemeClr val="accent1"/>
+                        </a:buClr>
+                        <a:buSzPct val="75000"/>
+                        <a:buFont typeface="Wingdings" charset="2"/>
+                        <a:defRPr>
+                          <a:solidFill>
+                            <a:schemeClr val="tx1"/>
+                          </a:solidFill>
+                          <a:latin typeface="Arial" charset="0"/>
+                          <a:ea typeface="ＭＳ Ｐゴシック" charset="-128"/>
+                        </a:defRPr>
+                      </a:lvl6pPr>
+                      <a:lvl7pPr marL="2971800" indent="-228600" defTabSz="457200" eaLnBrk="0" fontAlgn="base" hangingPunct="0">
+                        <a:spcBef>
+                          <a:spcPct val="20000"/>
+                        </a:spcBef>
+                        <a:spcAft>
+                          <a:spcPct val="0"/>
+                        </a:spcAft>
+                        <a:buClr>
+                          <a:schemeClr val="accent1"/>
+                        </a:buClr>
+                        <a:buSzPct val="75000"/>
+                        <a:buFont typeface="Wingdings" charset="2"/>
+                        <a:defRPr>
+                          <a:solidFill>
+                            <a:schemeClr val="tx1"/>
+                          </a:solidFill>
+                          <a:latin typeface="Arial" charset="0"/>
+                          <a:ea typeface="ＭＳ Ｐゴシック" charset="-128"/>
+                        </a:defRPr>
+                      </a:lvl7pPr>
+                      <a:lvl8pPr marL="3429000" indent="-228600" defTabSz="457200" eaLnBrk="0" fontAlgn="base" hangingPunct="0">
+                        <a:spcBef>
+                          <a:spcPct val="20000"/>
+                        </a:spcBef>
+                        <a:spcAft>
+                          <a:spcPct val="0"/>
+                        </a:spcAft>
+                        <a:buClr>
+                          <a:schemeClr val="accent1"/>
+                        </a:buClr>
+                        <a:buSzPct val="75000"/>
+                        <a:buFont typeface="Wingdings" charset="2"/>
+                        <a:defRPr>
+                          <a:solidFill>
+                            <a:schemeClr val="tx1"/>
+                          </a:solidFill>
+                          <a:latin typeface="Arial" charset="0"/>
+                          <a:ea typeface="ＭＳ Ｐゴシック" charset="-128"/>
+                        </a:defRPr>
+                      </a:lvl8pPr>
+                      <a:lvl9pPr marL="3886200" indent="-228600" defTabSz="457200" eaLnBrk="0" fontAlgn="base" hangingPunct="0">
+                        <a:spcBef>
+                          <a:spcPct val="20000"/>
+                        </a:spcBef>
+                        <a:spcAft>
+                          <a:spcPct val="0"/>
+                        </a:spcAft>
+                        <a:buClr>
+                          <a:schemeClr val="accent1"/>
+                        </a:buClr>
+                        <a:buSzPct val="75000"/>
+                        <a:buFont typeface="Wingdings" charset="2"/>
+                        <a:defRPr>
+                          <a:solidFill>
+                            <a:schemeClr val="tx1"/>
+                          </a:solidFill>
+                          <a:latin typeface="Arial" charset="0"/>
+                          <a:ea typeface="ＭＳ Ｐゴシック" charset="-128"/>
+                        </a:defRPr>
+                      </a:lvl9pPr>
+                    </a:lstStyle>
+                    <a:p>
+                      <a:pPr marL="0" marR="0" lvl="0" indent="0" algn="l" defTabSz="457200" rtl="0" eaLnBrk="1" fontAlgn="base" latinLnBrk="0" hangingPunct="1">
+                        <a:lnSpc>
+                          <a:spcPct val="100000"/>
+                        </a:lnSpc>
+                        <a:spcBef>
+                          <a:spcPct val="0"/>
+                        </a:spcBef>
+                        <a:spcAft>
+                          <a:spcPct val="0"/>
+                        </a:spcAft>
+                        <a:buClrTx/>
+                        <a:buSzTx/>
+                        <a:buFontTx/>
+                        <a:buNone/>
+                        <a:tabLst/>
+                      </a:pPr>
+                      <a:r>
+                        <a:rPr kumimoji="0" lang="en-US" altLang="x-none" sz="1800" b="1" i="0" u="none" strike="noStrike" cap="none" normalizeH="0" baseline="0" dirty="0">
                           <a:ln>
                             <a:noFill/>
                           </a:ln>
@@ -29568,7 +30590,7 @@
                         <a:tabLst/>
                       </a:pPr>
                       <a:r>
-                        <a:rPr kumimoji="0" lang="en-US" altLang="x-none" sz="1800" b="1" i="0" u="none" strike="noStrike" cap="none" normalizeH="0" baseline="0">
+                        <a:rPr kumimoji="0" lang="en-US" altLang="x-none" sz="1800" b="1" i="0" u="none" strike="noStrike" cap="none" normalizeH="0" baseline="0" dirty="0">
                           <a:ln>
                             <a:noFill/>
                           </a:ln>
@@ -29579,7 +30601,7 @@
                           <a:latin typeface="Arial" charset="0"/>
                           <a:ea typeface="ＭＳ Ｐゴシック" charset="-128"/>
                         </a:rPr>
-                        <a:t>10-14</a:t>
+                        <a:t>11-20</a:t>
                       </a:r>
                     </a:p>
                   </a:txBody>
@@ -29819,7 +30841,7 @@
                         <a:tabLst/>
                       </a:pPr>
                       <a:r>
-                        <a:rPr kumimoji="0" lang="en-US" altLang="x-none" sz="1800" b="1" i="0" u="none" strike="noStrike" cap="none" normalizeH="0" baseline="0">
+                        <a:rPr kumimoji="0" lang="en-US" altLang="x-none" sz="1800" b="1" i="0" u="none" strike="noStrike" cap="none" normalizeH="0" baseline="0" dirty="0">
                           <a:ln>
                             <a:noFill/>
                           </a:ln>
@@ -29830,7 +30852,7 @@
                           <a:latin typeface="Arial" charset="0"/>
                           <a:ea typeface="ＭＳ Ｐゴシック" charset="-128"/>
                         </a:rPr>
-                        <a:t>10-22</a:t>
+                        <a:t>13-29</a:t>
                       </a:r>
                     </a:p>
                   </a:txBody>
@@ -30070,7 +31092,7 @@
                         <a:tabLst/>
                       </a:pPr>
                       <a:r>
-                        <a:rPr kumimoji="0" lang="en-US" altLang="x-none" sz="1800" b="1" i="0" u="none" strike="noStrike" cap="none" normalizeH="0" baseline="0">
+                        <a:rPr kumimoji="0" lang="en-US" altLang="x-none" sz="1800" b="1" i="0" u="none" strike="noStrike" cap="none" normalizeH="0" baseline="0" dirty="0">
                           <a:ln>
                             <a:noFill/>
                           </a:ln>
@@ -30081,7 +31103,7 @@
                           <a:latin typeface="Arial" charset="0"/>
                           <a:ea typeface="ＭＳ Ｐゴシック" charset="-128"/>
                         </a:rPr>
-                        <a:t>21-29</a:t>
+                        <a:t>3-12</a:t>
                       </a:r>
                     </a:p>
                   </a:txBody>
@@ -30321,7 +31343,7 @@
                         <a:tabLst/>
                       </a:pPr>
                       <a:r>
-                        <a:rPr kumimoji="0" lang="en-US" altLang="x-none" sz="1800" b="1" i="0" u="none" strike="noStrike" cap="none" normalizeH="0" baseline="0">
+                        <a:rPr kumimoji="0" lang="en-US" altLang="x-none" sz="1800" b="1" i="0" u="none" strike="noStrike" cap="none" normalizeH="0" baseline="0" dirty="0">
                           <a:ln>
                             <a:noFill/>
                           </a:ln>
@@ -30332,7 +31354,7 @@
                           <a:latin typeface="Arial" charset="0"/>
                           <a:ea typeface="ＭＳ Ｐゴシック" charset="-128"/>
                         </a:rPr>
-                        <a:t>21-45</a:t>
+                        <a:t>4-24</a:t>
                       </a:r>
                     </a:p>
                   </a:txBody>
@@ -30390,7 +31412,7 @@
                   </a:ext>
                 </a:extLst>
               </a:tr>
-              <a:tr h="639763">
+              <a:tr h="495485">
                 <a:tc>
                   <a:txBody>
                     <a:bodyPr/>
@@ -30579,7 +31601,7 @@
                         <a:tabLst/>
                       </a:pPr>
                       <a:r>
-                        <a:rPr kumimoji="0" lang="en-US" altLang="x-none" sz="1800" b="1" i="0" u="none" strike="noStrike" cap="none" normalizeH="0" baseline="0">
+                        <a:rPr kumimoji="0" lang="en-US" altLang="x-none" sz="1800" b="1" i="0" u="none" strike="noStrike" cap="none" normalizeH="0" baseline="0" dirty="0">
                           <a:ln>
                             <a:noFill/>
                           </a:ln>
@@ -30830,7 +31852,7 @@
                         <a:tabLst/>
                       </a:pPr>
                       <a:r>
-                        <a:rPr kumimoji="0" lang="en-US" altLang="x-none" sz="1800" b="0" i="0" u="none" strike="noStrike" cap="none" normalizeH="0" baseline="0">
+                        <a:rPr kumimoji="0" lang="en-US" altLang="x-none" sz="1800" b="0" i="0" u="none" strike="noStrike" cap="none" normalizeH="0" baseline="0" dirty="0">
                           <a:ln>
                             <a:noFill/>
                           </a:ln>
@@ -31081,7 +32103,7 @@
                         <a:tabLst/>
                       </a:pPr>
                       <a:r>
-                        <a:rPr kumimoji="0" lang="en-US" altLang="x-none" sz="1800" b="0" i="0" u="none" strike="noStrike" cap="none" normalizeH="0" baseline="0">
+                        <a:rPr kumimoji="0" lang="en-US" altLang="x-none" sz="1800" b="0" i="0" u="none" strike="noStrike" cap="none" normalizeH="0" baseline="0" dirty="0">
                           <a:ln>
                             <a:noFill/>
                           </a:ln>
@@ -31092,7 +32114,7 @@
                           <a:latin typeface="Arial" charset="0"/>
                           <a:ea typeface="ＭＳ Ｐゴシック" charset="-128"/>
                         </a:rPr>
-                        <a:t>5</a:t>
+                        <a:t>4-5</a:t>
                       </a:r>
                     </a:p>
                   </a:txBody>
@@ -31331,7 +32353,7 @@
                         <a:buNone/>
                         <a:tabLst/>
                       </a:pPr>
-                      <a:endParaRPr kumimoji="0" lang="en-US" altLang="x-none" sz="1800" b="0" i="0" u="none" strike="noStrike" cap="none" normalizeH="0" baseline="0">
+                      <a:endParaRPr kumimoji="0" lang="en-US" altLang="x-none" sz="1800" b="0" i="0" u="none" strike="noStrike" cap="none" normalizeH="0" baseline="0" dirty="0">
                         <a:ln>
                           <a:noFill/>
                         </a:ln>
@@ -31580,7 +32602,7 @@
                         <a:tabLst/>
                       </a:pPr>
                       <a:r>
-                        <a:rPr kumimoji="0" lang="en-US" altLang="x-none" sz="1800" b="0" i="0" u="none" strike="noStrike" cap="none" normalizeH="0" baseline="0">
+                        <a:rPr kumimoji="0" lang="en-US" altLang="x-none" sz="1800" b="0" i="0" u="none" strike="noStrike" cap="none" normalizeH="0" baseline="0" dirty="0">
                           <a:ln>
                             <a:noFill/>
                           </a:ln>
@@ -31591,7 +32613,7 @@
                           <a:latin typeface="Arial" charset="0"/>
                           <a:ea typeface="ＭＳ Ｐゴシック" charset="-128"/>
                         </a:rPr>
-                        <a:t>7</a:t>
+                        <a:t>0.5-1</a:t>
                       </a:r>
                     </a:p>
                   </a:txBody>
@@ -31830,7 +32852,7 @@
                         <a:buNone/>
                         <a:tabLst/>
                       </a:pPr>
-                      <a:endParaRPr kumimoji="0" lang="en-US" altLang="x-none" sz="1800" b="0" i="0" u="none" strike="noStrike" cap="none" normalizeH="0" baseline="0">
+                      <a:endParaRPr kumimoji="0" lang="en-US" altLang="x-none" sz="1800" b="0" i="0" u="none" strike="noStrike" cap="none" normalizeH="0" baseline="0" dirty="0">
                         <a:ln>
                           <a:noFill/>
                         </a:ln>
@@ -32086,7 +33108,7 @@
                         <a:tabLst/>
                       </a:pPr>
                       <a:r>
-                        <a:rPr kumimoji="0" lang="en-US" altLang="x-none" sz="1800" b="1" i="0" u="none" strike="noStrike" cap="none" normalizeH="0" baseline="0">
+                        <a:rPr kumimoji="0" lang="en-US" altLang="x-none" sz="1800" b="1" i="0" u="none" strike="noStrike" cap="none" normalizeH="0" baseline="0" dirty="0">
                           <a:ln>
                             <a:noFill/>
                           </a:ln>
@@ -32588,7 +33610,7 @@
                         <a:tabLst/>
                       </a:pPr>
                       <a:r>
-                        <a:rPr kumimoji="0" lang="en-US" altLang="x-none" sz="1800" b="0" i="0" u="none" strike="noStrike" cap="none" normalizeH="0" baseline="0">
+                        <a:rPr kumimoji="0" lang="en-US" altLang="x-none" sz="1800" b="0" i="0" u="none" strike="noStrike" cap="none" normalizeH="0" baseline="0" dirty="0">
                           <a:ln>
                             <a:noFill/>
                           </a:ln>
@@ -32839,7 +33861,7 @@
                         <a:tabLst/>
                       </a:pPr>
                       <a:r>
-                        <a:rPr kumimoji="0" lang="en-US" altLang="x-none" sz="1800" b="0" i="0" u="none" strike="noStrike" cap="none" normalizeH="0" baseline="0">
+                        <a:rPr kumimoji="0" lang="en-US" altLang="x-none" sz="1800" b="0" i="0" u="none" strike="noStrike" cap="none" normalizeH="0" baseline="0" dirty="0">
                           <a:ln>
                             <a:noFill/>
                           </a:ln>
@@ -33090,7 +34112,7 @@
                         <a:tabLst/>
                       </a:pPr>
                       <a:r>
-                        <a:rPr kumimoji="0" lang="en-US" altLang="x-none" sz="1800" b="0" i="0" u="none" strike="noStrike" cap="none" normalizeH="0" baseline="0">
+                        <a:rPr kumimoji="0" lang="en-US" altLang="x-none" sz="1800" b="0" i="0" u="none" strike="noStrike" cap="none" normalizeH="0" baseline="0" dirty="0">
                           <a:ln>
                             <a:noFill/>
                           </a:ln>
@@ -33101,7 +34123,7 @@
                           <a:latin typeface="Arial" charset="0"/>
                           <a:ea typeface="ＭＳ Ｐゴシック" charset="-128"/>
                         </a:rPr>
-                        <a:t>1,4,….</a:t>
+                        <a:t>0.25,1,….</a:t>
                       </a:r>
                     </a:p>
                   </a:txBody>
@@ -33341,7 +34363,7 @@
                         <a:tabLst/>
                       </a:pPr>
                       <a:r>
-                        <a:rPr kumimoji="0" lang="en-US" altLang="x-none" sz="1800" b="0" i="0" u="none" strike="noStrike" cap="none" normalizeH="0" baseline="0" dirty="0">
+                        <a:rPr kumimoji="0" lang="en-US" altLang="x-none" sz="1800" b="0" i="0" u="none" strike="noStrike" cap="none" normalizeH="0" baseline="0">
                           <a:ln>
                             <a:noFill/>
                           </a:ln>
@@ -33352,8 +34374,19 @@
                           <a:latin typeface="Arial" charset="0"/>
                           <a:ea typeface="ＭＳ Ｐゴシック" charset="-128"/>
                         </a:rPr>
-                        <a:t>1,4,…</a:t>
+                        <a:t>0.25,1,…</a:t>
                       </a:r>
+                      <a:endParaRPr kumimoji="0" lang="en-US" altLang="x-none" sz="1800" b="0" i="0" u="none" strike="noStrike" cap="none" normalizeH="0" baseline="0" dirty="0">
+                        <a:ln>
+                          <a:noFill/>
+                        </a:ln>
+                        <a:solidFill>
+                          <a:srgbClr val="000000"/>
+                        </a:solidFill>
+                        <a:effectLst/>
+                        <a:latin typeface="Arial" charset="0"/>
+                        <a:ea typeface="ＭＳ Ｐゴシック" charset="-128"/>
+                      </a:endParaRPr>
                     </a:p>
                   </a:txBody>
                   <a:tcPr marL="91433" marR="91433" marT="45709" marB="45709" horzOverflow="overflow">
@@ -33424,7 +34457,7 @@
         </p:nvSpPr>
         <p:spPr bwMode="auto">
           <a:xfrm>
-            <a:off x="8477036" y="5780450"/>
+            <a:off x="9441703" y="6032500"/>
             <a:ext cx="1763713" cy="647700"/>
           </a:xfrm>
           <a:prstGeom prst="rect">
@@ -33592,6 +34625,176 @@
                 </a:solidFill>
               </a:rPr>
               <a:t>350 from main memory </a:t>
+            </a:r>
+          </a:p>
+        </p:txBody>
+      </p:sp>
+      <p:sp>
+        <p:nvSpPr>
+          <p:cNvPr id="2" name="TextBox 1">
+            <a:extLst>
+              <a:ext uri="{FF2B5EF4-FFF2-40B4-BE49-F238E27FC236}">
+                <a16:creationId xmlns:a16="http://schemas.microsoft.com/office/drawing/2014/main" id="{B85B03D6-E391-FBB4-E70E-AF7A8A4F1A1F}"/>
+              </a:ext>
+            </a:extLst>
+          </p:cNvPr>
+          <p:cNvSpPr txBox="1">
+            <a:spLocks noChangeArrowheads="1"/>
+          </p:cNvSpPr>
+          <p:nvPr/>
+        </p:nvSpPr>
+        <p:spPr bwMode="auto">
+          <a:xfrm>
+            <a:off x="9441703" y="5067353"/>
+            <a:ext cx="2485601" cy="646331"/>
+          </a:xfrm>
+          <a:prstGeom prst="rect">
+            <a:avLst/>
+          </a:prstGeom>
+          <a:noFill/>
+          <a:ln>
+            <a:noFill/>
+          </a:ln>
+          <a:extLst>
+            <a:ext uri="{909E8E84-426E-40DD-AFC4-6F175D3DCCD1}">
+              <a14:hiddenFill xmlns:a14="http://schemas.microsoft.com/office/drawing/2010/main">
+                <a:solidFill>
+                  <a:srgbClr val="FFFFFF"/>
+                </a:solidFill>
+              </a14:hiddenFill>
+            </a:ext>
+            <a:ext uri="{91240B29-F687-4F45-9708-019B960494DF}">
+              <a14:hiddenLine xmlns:a14="http://schemas.microsoft.com/office/drawing/2010/main" w="9525">
+                <a:solidFill>
+                  <a:srgbClr val="000000"/>
+                </a:solidFill>
+                <a:miter lim="800000"/>
+                <a:headEnd/>
+                <a:tailEnd/>
+              </a14:hiddenLine>
+            </a:ext>
+          </a:extLst>
+        </p:spPr>
+        <p:txBody>
+          <a:bodyPr wrap="square">
+            <a:spAutoFit/>
+          </a:bodyPr>
+          <a:lstStyle>
+            <a:lvl1pPr eaLnBrk="0" hangingPunct="0">
+              <a:defRPr sz="2400">
+                <a:solidFill>
+                  <a:schemeClr val="tx1"/>
+                </a:solidFill>
+                <a:latin typeface="Arial" charset="0"/>
+                <a:ea typeface="ＭＳ Ｐゴシック" charset="-128"/>
+              </a:defRPr>
+            </a:lvl1pPr>
+            <a:lvl2pPr marL="742950" indent="-285750" eaLnBrk="0" hangingPunct="0">
+              <a:defRPr sz="2400">
+                <a:solidFill>
+                  <a:schemeClr val="tx1"/>
+                </a:solidFill>
+                <a:latin typeface="Arial" charset="0"/>
+                <a:ea typeface="ＭＳ Ｐゴシック" charset="-128"/>
+              </a:defRPr>
+            </a:lvl2pPr>
+            <a:lvl3pPr marL="1143000" indent="-228600" eaLnBrk="0" hangingPunct="0">
+              <a:defRPr sz="2400">
+                <a:solidFill>
+                  <a:schemeClr val="tx1"/>
+                </a:solidFill>
+                <a:latin typeface="Arial" charset="0"/>
+                <a:ea typeface="ＭＳ Ｐゴシック" charset="-128"/>
+              </a:defRPr>
+            </a:lvl3pPr>
+            <a:lvl4pPr marL="1600200" indent="-228600" eaLnBrk="0" hangingPunct="0">
+              <a:defRPr sz="2400">
+                <a:solidFill>
+                  <a:schemeClr val="tx1"/>
+                </a:solidFill>
+                <a:latin typeface="Arial" charset="0"/>
+                <a:ea typeface="ＭＳ Ｐゴシック" charset="-128"/>
+              </a:defRPr>
+            </a:lvl4pPr>
+            <a:lvl5pPr marL="2057400" indent="-228600" eaLnBrk="0" hangingPunct="0">
+              <a:defRPr sz="2400">
+                <a:solidFill>
+                  <a:schemeClr val="tx1"/>
+                </a:solidFill>
+                <a:latin typeface="Arial" charset="0"/>
+                <a:ea typeface="ＭＳ Ｐゴシック" charset="-128"/>
+              </a:defRPr>
+            </a:lvl5pPr>
+            <a:lvl6pPr marL="2514600" indent="-228600" eaLnBrk="0" fontAlgn="base" hangingPunct="0">
+              <a:spcBef>
+                <a:spcPct val="0"/>
+              </a:spcBef>
+              <a:spcAft>
+                <a:spcPct val="0"/>
+              </a:spcAft>
+              <a:defRPr sz="2400">
+                <a:solidFill>
+                  <a:schemeClr val="tx1"/>
+                </a:solidFill>
+                <a:latin typeface="Arial" charset="0"/>
+                <a:ea typeface="ＭＳ Ｐゴシック" charset="-128"/>
+              </a:defRPr>
+            </a:lvl6pPr>
+            <a:lvl7pPr marL="2971800" indent="-228600" eaLnBrk="0" fontAlgn="base" hangingPunct="0">
+              <a:spcBef>
+                <a:spcPct val="0"/>
+              </a:spcBef>
+              <a:spcAft>
+                <a:spcPct val="0"/>
+              </a:spcAft>
+              <a:defRPr sz="2400">
+                <a:solidFill>
+                  <a:schemeClr val="tx1"/>
+                </a:solidFill>
+                <a:latin typeface="Arial" charset="0"/>
+                <a:ea typeface="ＭＳ Ｐゴシック" charset="-128"/>
+              </a:defRPr>
+            </a:lvl7pPr>
+            <a:lvl8pPr marL="3429000" indent="-228600" eaLnBrk="0" fontAlgn="base" hangingPunct="0">
+              <a:spcBef>
+                <a:spcPct val="0"/>
+              </a:spcBef>
+              <a:spcAft>
+                <a:spcPct val="0"/>
+              </a:spcAft>
+              <a:defRPr sz="2400">
+                <a:solidFill>
+                  <a:schemeClr val="tx1"/>
+                </a:solidFill>
+                <a:latin typeface="Arial" charset="0"/>
+                <a:ea typeface="ＭＳ Ｐゴシック" charset="-128"/>
+              </a:defRPr>
+            </a:lvl8pPr>
+            <a:lvl9pPr marL="3886200" indent="-228600" eaLnBrk="0" fontAlgn="base" hangingPunct="0">
+              <a:spcBef>
+                <a:spcPct val="0"/>
+              </a:spcBef>
+              <a:spcAft>
+                <a:spcPct val="0"/>
+              </a:spcAft>
+              <a:defRPr sz="2400">
+                <a:solidFill>
+                  <a:schemeClr val="tx1"/>
+                </a:solidFill>
+                <a:latin typeface="Arial" charset="0"/>
+                <a:ea typeface="ＭＳ Ｐゴシック" charset="-128"/>
+              </a:defRPr>
+            </a:lvl9pPr>
+          </a:lstStyle>
+          <a:p>
+            <a:pPr eaLnBrk="1" hangingPunct="1"/>
+            <a:r>
+              <a:rPr lang="en-US" altLang="x-none" sz="1800" b="1" dirty="0">
+                <a:solidFill>
+                  <a:srgbClr val="FF0000"/>
+                </a:solidFill>
+              </a:rPr>
+              <a:t>(does not vectorize on intel?)</a:t>
             </a:r>
           </a:p>
         </p:txBody>

--- a/Slides/FPforScientist.pptx
+++ b/Slides/FPforScientist.pptx
@@ -19599,21 +19599,21 @@
           <p:nvPr>
             <p:extLst>
               <p:ext uri="{D42A27DB-BD31-4B8C-83A1-F6EECF244321}">
-                <p14:modId xmlns:p14="http://schemas.microsoft.com/office/powerpoint/2010/main" val="2740690212"/>
+                <p14:modId xmlns:p14="http://schemas.microsoft.com/office/powerpoint/2010/main" val="1481242870"/>
               </p:ext>
             </p:extLst>
           </p:nvPr>
         </p:nvGraphicFramePr>
         <p:xfrm>
           <a:off x="831757" y="1158949"/>
-          <a:ext cx="8609946" cy="5375977"/>
+          <a:ext cx="8755475" cy="5375977"/>
         </p:xfrm>
         <a:graphic>
           <a:graphicData uri="http://schemas.openxmlformats.org/drawingml/2006/table">
             <a:tbl>
               <a:tblPr/>
               <a:tblGrid>
-                <a:gridCol w="1891537">
+                <a:gridCol w="2037066">
                   <a:extLst>
                     <a:ext uri="{9D8B030D-6E8A-4147-A177-3AD203B41FA5}">
                       <a16:colId xmlns:a16="http://schemas.microsoft.com/office/drawing/2014/main" val="20000"/>
@@ -22376,7 +22376,7 @@
                         <a:tabLst/>
                       </a:pPr>
                       <a:r>
-                        <a:rPr kumimoji="0" lang="en-US" altLang="x-none" sz="1800" b="0" i="0" u="none" strike="noStrike" cap="none" normalizeH="0" baseline="0">
+                        <a:rPr kumimoji="0" lang="en-US" altLang="x-none" sz="1800" b="0" i="0" u="none" strike="noStrike" cap="none" normalizeH="0" baseline="0" dirty="0">
                           <a:ln>
                             <a:noFill/>
                           </a:ln>
@@ -22387,7 +22387,21 @@
                           <a:latin typeface="Arial" charset="0"/>
                           <a:ea typeface="ＭＳ Ｐゴシック" charset="-128"/>
                         </a:rPr>
-                        <a:t>3</a:t>
+                        <a:t>3-</a:t>
+                      </a:r>
+                      <a:r>
+                        <a:rPr kumimoji="0" lang="en-US" altLang="x-none" sz="1800" b="0" i="0" u="none" strike="noStrike" cap="none" normalizeH="0" baseline="0" dirty="0">
+                          <a:ln>
+                            <a:noFill/>
+                          </a:ln>
+                          <a:solidFill>
+                            <a:srgbClr val="00B050"/>
+                          </a:solidFill>
+                          <a:effectLst/>
+                          <a:latin typeface="Arial" charset="0"/>
+                          <a:ea typeface="ＭＳ Ｐゴシック" charset="-128"/>
+                        </a:rPr>
+                        <a:t>4</a:t>
                       </a:r>
                     </a:p>
                   </a:txBody>
@@ -22627,7 +22641,7 @@
                         <a:tabLst/>
                       </a:pPr>
                       <a:r>
-                        <a:rPr kumimoji="0" lang="en-US" altLang="x-none" sz="1800" b="0" i="0" u="none" strike="noStrike" cap="none" normalizeH="0" baseline="0">
+                        <a:rPr kumimoji="0" lang="en-US" altLang="x-none" sz="1800" b="0" i="0" u="none" strike="noStrike" cap="none" normalizeH="0" baseline="0" dirty="0">
                           <a:ln>
                             <a:noFill/>
                           </a:ln>
@@ -22638,7 +22652,21 @@
                           <a:latin typeface="Arial" charset="0"/>
                           <a:ea typeface="ＭＳ Ｐゴシック" charset="-128"/>
                         </a:rPr>
-                        <a:t>3</a:t>
+                        <a:t>3-</a:t>
+                      </a:r>
+                      <a:r>
+                        <a:rPr kumimoji="0" lang="en-US" altLang="x-none" sz="1800" b="0" i="0" u="none" strike="noStrike" cap="none" normalizeH="0" baseline="0" dirty="0">
+                          <a:ln>
+                            <a:noFill/>
+                          </a:ln>
+                          <a:solidFill>
+                            <a:srgbClr val="00B050"/>
+                          </a:solidFill>
+                          <a:effectLst/>
+                          <a:latin typeface="Arial" charset="0"/>
+                          <a:ea typeface="ＭＳ Ｐゴシック" charset="-128"/>
+                        </a:rPr>
+                        <a:t>4</a:t>
                       </a:r>
                     </a:p>
                   </a:txBody>
@@ -28524,7 +28552,7 @@
                         <a:tabLst/>
                       </a:pPr>
                       <a:r>
-                        <a:rPr kumimoji="0" lang="en-US" altLang="x-none" sz="1800" b="0" i="0" u="none" strike="noStrike" cap="none" normalizeH="0" baseline="0">
+                        <a:rPr kumimoji="0" lang="en-US" altLang="x-none" sz="1800" b="0" i="0" u="none" strike="noStrike" cap="none" normalizeH="0" baseline="0" dirty="0">
                           <a:ln>
                             <a:noFill/>
                           </a:ln>
@@ -28535,7 +28563,21 @@
                           <a:latin typeface="Arial" charset="0"/>
                           <a:ea typeface="ＭＳ Ｐゴシック" charset="-128"/>
                         </a:rPr>
-                        <a:t>5</a:t>
+                        <a:t>5-</a:t>
+                      </a:r>
+                      <a:r>
+                        <a:rPr kumimoji="0" lang="en-US" altLang="x-none" sz="1800" b="0" i="0" u="none" strike="noStrike" cap="none" normalizeH="0" baseline="0" dirty="0">
+                          <a:ln>
+                            <a:noFill/>
+                          </a:ln>
+                          <a:solidFill>
+                            <a:srgbClr val="00B050"/>
+                          </a:solidFill>
+                          <a:effectLst/>
+                          <a:latin typeface="Arial" charset="0"/>
+                          <a:ea typeface="ＭＳ Ｐゴシック" charset="-128"/>
+                        </a:rPr>
+                        <a:t>4</a:t>
                       </a:r>
                     </a:p>
                   </a:txBody>
@@ -28775,7 +28817,7 @@
                         <a:tabLst/>
                       </a:pPr>
                       <a:r>
-                        <a:rPr kumimoji="0" lang="en-US" altLang="x-none" sz="1800" b="0" i="0" u="none" strike="noStrike" cap="none" normalizeH="0" baseline="0">
+                        <a:rPr kumimoji="0" lang="en-US" altLang="x-none" sz="1800" b="0" i="0" u="none" strike="noStrike" cap="none" normalizeH="0" baseline="0" dirty="0">
                           <a:ln>
                             <a:noFill/>
                           </a:ln>
@@ -28786,7 +28828,21 @@
                           <a:latin typeface="Arial" charset="0"/>
                           <a:ea typeface="ＭＳ Ｐゴシック" charset="-128"/>
                         </a:rPr>
-                        <a:t>5</a:t>
+                        <a:t>5-</a:t>
+                      </a:r>
+                      <a:r>
+                        <a:rPr kumimoji="0" lang="en-US" altLang="x-none" sz="1800" b="0" i="0" u="none" strike="noStrike" cap="none" normalizeH="0" baseline="0" dirty="0">
+                          <a:ln>
+                            <a:noFill/>
+                          </a:ln>
+                          <a:solidFill>
+                            <a:srgbClr val="00B050"/>
+                          </a:solidFill>
+                          <a:effectLst/>
+                          <a:latin typeface="Arial" charset="0"/>
+                          <a:ea typeface="ＭＳ Ｐゴシック" charset="-128"/>
+                        </a:rPr>
+                        <a:t>4</a:t>
                       </a:r>
                     </a:p>
                   </a:txBody>
@@ -29385,7 +29441,7 @@
                             <a:noFill/>
                           </a:ln>
                           <a:solidFill>
-                            <a:srgbClr val="FFFFFF"/>
+                            <a:srgbClr val="00B050"/>
                           </a:solidFill>
                           <a:effectLst/>
                           <a:latin typeface="Arial" charset="0"/>
@@ -29399,7 +29455,7 @@
                             <a:noFill/>
                           </a:ln>
                           <a:solidFill>
-                            <a:srgbClr val="FFFFFF"/>
+                            <a:srgbClr val="00B050"/>
                           </a:solidFill>
                           <a:effectLst/>
                           <a:latin typeface="Arial" charset="0"/>
@@ -29412,7 +29468,7 @@
                           <a:noFill/>
                         </a:ln>
                         <a:solidFill>
-                          <a:srgbClr val="FFFFFF"/>
+                          <a:srgbClr val="00B050"/>
                         </a:solidFill>
                         <a:effectLst/>
                         <a:latin typeface="Arial" charset="0"/>
@@ -29495,7 +29551,7 @@
                             <a:noFill/>
                           </a:ln>
                           <a:solidFill>
-                            <a:srgbClr val="000000"/>
+                            <a:srgbClr val="00B050"/>
                           </a:solidFill>
                           <a:effectLst/>
                           <a:latin typeface="Arial" charset="0"/>
@@ -29580,7 +29636,7 @@
                             <a:noFill/>
                           </a:ln>
                           <a:solidFill>
-                            <a:srgbClr val="000000"/>
+                            <a:srgbClr val="00B050"/>
                           </a:solidFill>
                           <a:effectLst/>
                           <a:latin typeface="Arial" charset="0"/>
@@ -29665,7 +29721,7 @@
                             <a:noFill/>
                           </a:ln>
                           <a:solidFill>
-                            <a:srgbClr val="000000"/>
+                            <a:srgbClr val="00B050"/>
                           </a:solidFill>
                           <a:effectLst/>
                           <a:latin typeface="Arial" charset="0"/>
@@ -29750,7 +29806,7 @@
                             <a:noFill/>
                           </a:ln>
                           <a:solidFill>
-                            <a:srgbClr val="000000"/>
+                            <a:srgbClr val="00B050"/>
                           </a:solidFill>
                           <a:effectLst/>
                           <a:latin typeface="Arial" charset="0"/>
@@ -29835,7 +29891,7 @@
                             <a:noFill/>
                           </a:ln>
                           <a:solidFill>
-                            <a:srgbClr val="002060"/>
+                            <a:srgbClr val="00B050"/>
                           </a:solidFill>
                           <a:effectLst/>
                           <a:latin typeface="Arial" charset="0"/>
@@ -34363,7 +34419,7 @@
                         <a:tabLst/>
                       </a:pPr>
                       <a:r>
-                        <a:rPr kumimoji="0" lang="en-US" altLang="x-none" sz="1800" b="0" i="0" u="none" strike="noStrike" cap="none" normalizeH="0" baseline="0">
+                        <a:rPr kumimoji="0" lang="en-US" altLang="x-none" sz="1800" b="0" i="0" u="none" strike="noStrike" cap="none" normalizeH="0" baseline="0" dirty="0">
                           <a:ln>
                             <a:noFill/>
                           </a:ln>
@@ -34376,17 +34432,6 @@
                         </a:rPr>
                         <a:t>0.25,1,…</a:t>
                       </a:r>
-                      <a:endParaRPr kumimoji="0" lang="en-US" altLang="x-none" sz="1800" b="0" i="0" u="none" strike="noStrike" cap="none" normalizeH="0" baseline="0" dirty="0">
-                        <a:ln>
-                          <a:noFill/>
-                        </a:ln>
-                        <a:solidFill>
-                          <a:srgbClr val="000000"/>
-                        </a:solidFill>
-                        <a:effectLst/>
-                        <a:latin typeface="Arial" charset="0"/>
-                        <a:ea typeface="ＭＳ Ｐゴシック" charset="-128"/>
-                      </a:endParaRPr>
                     </a:p>
                   </a:txBody>
                   <a:tcPr marL="91433" marR="91433" marT="45709" marB="45709" horzOverflow="overflow">

--- a/Slides/FPforScientist.pptx
+++ b/Slides/FPforScientist.pptx
@@ -12977,7 +12977,18 @@
               <a:rPr lang="en-US" dirty="0" err="1"/>
               <a:t>sin,cos,tan</a:t>
             </a:r>
-            <a:endParaRPr lang="en-US" dirty="0"/>
+            <a:r>
+              <a:rPr lang="en-US" dirty="0"/>
+              <a:t> ,</a:t>
+            </a:r>
+            <a:r>
+              <a:rPr lang="en-US" dirty="0" err="1"/>
+              <a:t>atan</a:t>
+            </a:r>
+            <a:r>
+              <a:rPr lang="en-US" dirty="0"/>
+              <a:t>(2)</a:t>
+            </a:r>
           </a:p>
           <a:p>
             <a:pPr lvl="1"/>
@@ -13028,11 +13039,11 @@
           <a:p>
             <a:r>
               <a:rPr lang="en-US" dirty="0" err="1"/>
-              <a:t>asin,acos,atan</a:t>
+              <a:t>asin,acos</a:t>
             </a:r>
             <a:r>
               <a:rPr lang="en-US" dirty="0"/>
-              <a:t>(2)</a:t>
+              <a:t>, hyperbolic</a:t>
             </a:r>
           </a:p>
           <a:p>
@@ -13172,7 +13183,7 @@
             <a:pPr lvl="1"/>
             <a:r>
               <a:rPr lang="en-US" dirty="0"/>
-              <a:t>Shift-and-add algorithms (CORDIC </a:t>
+              <a:t>shift-and-add algorithms (CORDIC </a:t>
             </a:r>
             <a:r>
               <a:rPr lang="en-US" dirty="0">
@@ -13210,8 +13221,13 @@
             <a:pPr lvl="1"/>
             <a:r>
               <a:rPr lang="en-US" dirty="0"/>
-              <a:t>a rational function (ratio of two polynomial)</a:t>
-            </a:r>
+              <a:t>a rational function (ratio of </a:t>
+            </a:r>
+            <a:r>
+              <a:rPr lang="en-US"/>
+              <a:t>two polynomials)</a:t>
+            </a:r>
+            <a:endParaRPr lang="en-US" dirty="0"/>
           </a:p>
           <a:p>
             <a:pPr lvl="2"/>
@@ -19599,14 +19615,14 @@
           <p:nvPr>
             <p:extLst>
               <p:ext uri="{D42A27DB-BD31-4B8C-83A1-F6EECF244321}">
-                <p14:modId xmlns:p14="http://schemas.microsoft.com/office/powerpoint/2010/main" val="1481242870"/>
+                <p14:modId xmlns:p14="http://schemas.microsoft.com/office/powerpoint/2010/main" val="2841675639"/>
               </p:ext>
             </p:extLst>
           </p:nvPr>
         </p:nvGraphicFramePr>
         <p:xfrm>
-          <a:off x="831757" y="1158949"/>
-          <a:ext cx="8755475" cy="5375977"/>
+          <a:off x="192040" y="1258208"/>
+          <a:ext cx="8755475" cy="5045556"/>
         </p:xfrm>
         <a:graphic>
           <a:graphicData uri="http://schemas.openxmlformats.org/drawingml/2006/table">
@@ -23237,7 +23253,7 @@
                   </a:ext>
                 </a:extLst>
               </a:tr>
-              <a:tr h="779463">
+              <a:tr h="449042">
                 <a:tc>
                   <a:txBody>
                     <a:bodyPr/>
@@ -23437,39 +23453,7 @@
                           <a:latin typeface="Arial" charset="0"/>
                           <a:ea typeface="ＭＳ Ｐゴシック" charset="-128"/>
                         </a:rPr>
-                        <a:t>==</a:t>
-                      </a:r>
-                    </a:p>
-                    <a:p>
-                      <a:pPr marL="0" marR="0" lvl="0" indent="0" algn="l" defTabSz="457200" rtl="0" eaLnBrk="1" fontAlgn="base" latinLnBrk="0" hangingPunct="1">
-                        <a:lnSpc>
-                          <a:spcPct val="100000"/>
-                        </a:lnSpc>
-                        <a:spcBef>
-                          <a:spcPct val="0"/>
-                        </a:spcBef>
-                        <a:spcAft>
-                          <a:spcPct val="0"/>
-                        </a:spcAft>
-                        <a:buClrTx/>
-                        <a:buSzTx/>
-                        <a:buFontTx/>
-                        <a:buNone/>
-                        <a:tabLst/>
-                      </a:pPr>
-                      <a:r>
-                        <a:rPr kumimoji="0" lang="en-US" altLang="x-none" sz="1800" b="1" i="0" u="none" strike="noStrike" cap="none" normalizeH="0" baseline="0" dirty="0">
-                          <a:ln>
-                            <a:noFill/>
-                          </a:ln>
-                          <a:solidFill>
-                            <a:srgbClr val="FFFFFF"/>
-                          </a:solidFill>
-                          <a:effectLst/>
-                          <a:latin typeface="Arial" charset="0"/>
-                          <a:ea typeface="ＭＳ Ｐゴシック" charset="-128"/>
-                        </a:rPr>
-                        <a:t>&lt; &gt;</a:t>
+                        <a:t>==, &lt;, &gt;</a:t>
                       </a:r>
                     </a:p>
                   </a:txBody>
@@ -24982,7 +24966,7 @@
                           <a:latin typeface="Arial" charset="0"/>
                           <a:ea typeface="ＭＳ Ｐゴシック" charset="-128"/>
                         </a:rPr>
-                        <a:t>f=d  d=f ,</a:t>
+                        <a:t>f=d,  d=f ,</a:t>
                       </a:r>
                       <a:r>
                         <a:rPr kumimoji="0" lang="en-US" altLang="x-none" sz="1800" b="1" i="0" u="none" strike="noStrike" cap="none" normalizeH="0" baseline="0" dirty="0" err="1">
@@ -26788,7 +26772,7 @@
                         <a:tabLst/>
                       </a:pPr>
                       <a:r>
-                        <a:rPr kumimoji="0" lang="en-US" altLang="x-none" sz="1800" b="0" i="0" u="none" strike="noStrike" cap="none" normalizeH="0" baseline="0">
+                        <a:rPr kumimoji="0" lang="en-US" altLang="x-none" sz="1800" b="0" i="0" u="none" strike="noStrike" cap="none" normalizeH="0" baseline="0" dirty="0">
                           <a:ln>
                             <a:noFill/>
                           </a:ln>
@@ -26799,7 +26783,7 @@
                           <a:latin typeface="Arial" charset="0"/>
                           <a:ea typeface="ＭＳ Ｐゴシック" charset="-128"/>
                         </a:rPr>
-                        <a:t>AND,OR</a:t>
+                        <a:t>AND, OR</a:t>
                       </a:r>
                     </a:p>
                   </a:txBody>
@@ -33415,7 +33399,7 @@
                         <a:tabLst/>
                       </a:pPr>
                       <a:r>
-                        <a:rPr kumimoji="0" lang="en-US" altLang="x-none" sz="1800" b="0" i="0" u="none" strike="noStrike" cap="none" normalizeH="0" baseline="0">
+                        <a:rPr kumimoji="0" lang="en-US" altLang="x-none" sz="1800" b="0" i="0" u="none" strike="noStrike" cap="none" normalizeH="0" baseline="0" dirty="0">
                           <a:ln>
                             <a:noFill/>
                           </a:ln>
@@ -34502,7 +34486,7 @@
         </p:nvSpPr>
         <p:spPr bwMode="auto">
           <a:xfrm>
-            <a:off x="9441703" y="6032500"/>
+            <a:off x="8719922" y="5891212"/>
             <a:ext cx="1763713" cy="647700"/>
           </a:xfrm>
           <a:prstGeom prst="rect">
@@ -34690,8 +34674,8 @@
         </p:nvSpPr>
         <p:spPr bwMode="auto">
           <a:xfrm>
-            <a:off x="9441703" y="5067353"/>
-            <a:ext cx="2485601" cy="646331"/>
+            <a:off x="8432778" y="4857420"/>
+            <a:ext cx="2338003" cy="646331"/>
           </a:xfrm>
           <a:prstGeom prst="rect">
             <a:avLst/>
@@ -34840,6 +34824,176 @@
                 </a:solidFill>
               </a:rPr>
               <a:t>(does not vectorize on intel?)</a:t>
+            </a:r>
+          </a:p>
+        </p:txBody>
+      </p:sp>
+      <p:sp>
+        <p:nvSpPr>
+          <p:cNvPr id="3" name="TextBox 1">
+            <a:extLst>
+              <a:ext uri="{FF2B5EF4-FFF2-40B4-BE49-F238E27FC236}">
+                <a16:creationId xmlns:a16="http://schemas.microsoft.com/office/drawing/2014/main" id="{05D9CBA9-35AA-C16A-CDEF-B6A2DEBE0554}"/>
+              </a:ext>
+            </a:extLst>
+          </p:cNvPr>
+          <p:cNvSpPr txBox="1">
+            <a:spLocks noChangeArrowheads="1"/>
+          </p:cNvSpPr>
+          <p:nvPr/>
+        </p:nvSpPr>
+        <p:spPr bwMode="auto">
+          <a:xfrm>
+            <a:off x="8325285" y="2598327"/>
+            <a:ext cx="2078356" cy="369332"/>
+          </a:xfrm>
+          <a:prstGeom prst="rect">
+            <a:avLst/>
+          </a:prstGeom>
+          <a:noFill/>
+          <a:ln>
+            <a:noFill/>
+          </a:ln>
+          <a:extLst>
+            <a:ext uri="{909E8E84-426E-40DD-AFC4-6F175D3DCCD1}">
+              <a14:hiddenFill xmlns:a14="http://schemas.microsoft.com/office/drawing/2010/main">
+                <a:solidFill>
+                  <a:srgbClr val="FFFFFF"/>
+                </a:solidFill>
+              </a14:hiddenFill>
+            </a:ext>
+            <a:ext uri="{91240B29-F687-4F45-9708-019B960494DF}">
+              <a14:hiddenLine xmlns:a14="http://schemas.microsoft.com/office/drawing/2010/main" w="9525">
+                <a:solidFill>
+                  <a:srgbClr val="000000"/>
+                </a:solidFill>
+                <a:miter lim="800000"/>
+                <a:headEnd/>
+                <a:tailEnd/>
+              </a14:hiddenLine>
+            </a:ext>
+          </a:extLst>
+        </p:spPr>
+        <p:txBody>
+          <a:bodyPr wrap="square">
+            <a:spAutoFit/>
+          </a:bodyPr>
+          <a:lstStyle>
+            <a:lvl1pPr eaLnBrk="0" hangingPunct="0">
+              <a:defRPr sz="2400">
+                <a:solidFill>
+                  <a:schemeClr val="tx1"/>
+                </a:solidFill>
+                <a:latin typeface="Arial" charset="0"/>
+                <a:ea typeface="ＭＳ Ｐゴシック" charset="-128"/>
+              </a:defRPr>
+            </a:lvl1pPr>
+            <a:lvl2pPr marL="742950" indent="-285750" eaLnBrk="0" hangingPunct="0">
+              <a:defRPr sz="2400">
+                <a:solidFill>
+                  <a:schemeClr val="tx1"/>
+                </a:solidFill>
+                <a:latin typeface="Arial" charset="0"/>
+                <a:ea typeface="ＭＳ Ｐゴシック" charset="-128"/>
+              </a:defRPr>
+            </a:lvl2pPr>
+            <a:lvl3pPr marL="1143000" indent="-228600" eaLnBrk="0" hangingPunct="0">
+              <a:defRPr sz="2400">
+                <a:solidFill>
+                  <a:schemeClr val="tx1"/>
+                </a:solidFill>
+                <a:latin typeface="Arial" charset="0"/>
+                <a:ea typeface="ＭＳ Ｐゴシック" charset="-128"/>
+              </a:defRPr>
+            </a:lvl3pPr>
+            <a:lvl4pPr marL="1600200" indent="-228600" eaLnBrk="0" hangingPunct="0">
+              <a:defRPr sz="2400">
+                <a:solidFill>
+                  <a:schemeClr val="tx1"/>
+                </a:solidFill>
+                <a:latin typeface="Arial" charset="0"/>
+                <a:ea typeface="ＭＳ Ｐゴシック" charset="-128"/>
+              </a:defRPr>
+            </a:lvl4pPr>
+            <a:lvl5pPr marL="2057400" indent="-228600" eaLnBrk="0" hangingPunct="0">
+              <a:defRPr sz="2400">
+                <a:solidFill>
+                  <a:schemeClr val="tx1"/>
+                </a:solidFill>
+                <a:latin typeface="Arial" charset="0"/>
+                <a:ea typeface="ＭＳ Ｐゴシック" charset="-128"/>
+              </a:defRPr>
+            </a:lvl5pPr>
+            <a:lvl6pPr marL="2514600" indent="-228600" eaLnBrk="0" fontAlgn="base" hangingPunct="0">
+              <a:spcBef>
+                <a:spcPct val="0"/>
+              </a:spcBef>
+              <a:spcAft>
+                <a:spcPct val="0"/>
+              </a:spcAft>
+              <a:defRPr sz="2400">
+                <a:solidFill>
+                  <a:schemeClr val="tx1"/>
+                </a:solidFill>
+                <a:latin typeface="Arial" charset="0"/>
+                <a:ea typeface="ＭＳ Ｐゴシック" charset="-128"/>
+              </a:defRPr>
+            </a:lvl6pPr>
+            <a:lvl7pPr marL="2971800" indent="-228600" eaLnBrk="0" fontAlgn="base" hangingPunct="0">
+              <a:spcBef>
+                <a:spcPct val="0"/>
+              </a:spcBef>
+              <a:spcAft>
+                <a:spcPct val="0"/>
+              </a:spcAft>
+              <a:defRPr sz="2400">
+                <a:solidFill>
+                  <a:schemeClr val="tx1"/>
+                </a:solidFill>
+                <a:latin typeface="Arial" charset="0"/>
+                <a:ea typeface="ＭＳ Ｐゴシック" charset="-128"/>
+              </a:defRPr>
+            </a:lvl7pPr>
+            <a:lvl8pPr marL="3429000" indent="-228600" eaLnBrk="0" fontAlgn="base" hangingPunct="0">
+              <a:spcBef>
+                <a:spcPct val="0"/>
+              </a:spcBef>
+              <a:spcAft>
+                <a:spcPct val="0"/>
+              </a:spcAft>
+              <a:defRPr sz="2400">
+                <a:solidFill>
+                  <a:schemeClr val="tx1"/>
+                </a:solidFill>
+                <a:latin typeface="Arial" charset="0"/>
+                <a:ea typeface="ＭＳ Ｐゴシック" charset="-128"/>
+              </a:defRPr>
+            </a:lvl8pPr>
+            <a:lvl9pPr marL="3886200" indent="-228600" eaLnBrk="0" fontAlgn="base" hangingPunct="0">
+              <a:spcBef>
+                <a:spcPct val="0"/>
+              </a:spcBef>
+              <a:spcAft>
+                <a:spcPct val="0"/>
+              </a:spcAft>
+              <a:defRPr sz="2400">
+                <a:solidFill>
+                  <a:schemeClr val="tx1"/>
+                </a:solidFill>
+                <a:latin typeface="Arial" charset="0"/>
+                <a:ea typeface="ＭＳ Ｐゴシック" charset="-128"/>
+              </a:defRPr>
+            </a:lvl9pPr>
+          </a:lstStyle>
+          <a:p>
+            <a:pPr eaLnBrk="1" hangingPunct="1"/>
+            <a:r>
+              <a:rPr lang="en-US" altLang="x-none" sz="1800" b="1" dirty="0">
+                <a:solidFill>
+                  <a:srgbClr val="FF0000"/>
+                </a:solidFill>
+              </a:rPr>
+              <a:t> + jump overhead</a:t>
             </a:r>
           </a:p>
         </p:txBody>

--- a/Slides/FPforScientist.pptx
+++ b/Slides/FPforScientist.pptx
@@ -52,8 +52,10 @@
     <p:sldId id="444" r:id="rId46"/>
     <p:sldId id="397" r:id="rId47"/>
     <p:sldId id="265" r:id="rId48"/>
-    <p:sldId id="365" r:id="rId49"/>
-    <p:sldId id="393" r:id="rId50"/>
+    <p:sldId id="483" r:id="rId49"/>
+    <p:sldId id="484" r:id="rId50"/>
+    <p:sldId id="365" r:id="rId51"/>
+    <p:sldId id="393" r:id="rId52"/>
   </p:sldIdLst>
   <p:sldSz cx="12192000" cy="6858000"/>
   <p:notesSz cx="6858000" cy="9144000"/>
@@ -13221,13 +13223,8 @@
             <a:pPr lvl="1"/>
             <a:r>
               <a:rPr lang="en-US" dirty="0"/>
-              <a:t>a rational function (ratio of </a:t>
-            </a:r>
-            <a:r>
-              <a:rPr lang="en-US"/>
-              <a:t>two polynomials)</a:t>
-            </a:r>
-            <a:endParaRPr lang="en-US" dirty="0"/>
+              <a:t>a rational function (ratio of two polynomials)</a:t>
+            </a:r>
           </a:p>
           <a:p>
             <a:pPr lvl="2"/>
@@ -34844,8 +34841,8 @@
         </p:nvSpPr>
         <p:spPr bwMode="auto">
           <a:xfrm>
-            <a:off x="8325285" y="2598327"/>
-            <a:ext cx="2078356" cy="369332"/>
+            <a:off x="8325284" y="2598327"/>
+            <a:ext cx="2338003" cy="369332"/>
           </a:xfrm>
           <a:prstGeom prst="rect">
             <a:avLst/>
@@ -34993,7 +34990,7 @@
                   <a:srgbClr val="FF0000"/>
                 </a:solidFill>
               </a:rPr>
-              <a:t> + jump overhead</a:t>
+              <a:t> + jump “overhead”</a:t>
             </a:r>
           </a:p>
         </p:txBody>
@@ -38106,6 +38103,1506 @@
       </p:grpSpPr>
       <p:sp>
         <p:nvSpPr>
+          <p:cNvPr id="2" name="Title 1">
+            <a:extLst>
+              <a:ext uri="{FF2B5EF4-FFF2-40B4-BE49-F238E27FC236}">
+                <a16:creationId xmlns:a16="http://schemas.microsoft.com/office/drawing/2014/main" id="{C9194E89-0E34-D19A-1A80-75A97E6E14C0}"/>
+              </a:ext>
+            </a:extLst>
+          </p:cNvPr>
+          <p:cNvSpPr>
+            <a:spLocks noGrp="1"/>
+          </p:cNvSpPr>
+          <p:nvPr>
+            <p:ph type="title"/>
+          </p:nvPr>
+        </p:nvSpPr>
+        <p:spPr/>
+        <p:txBody>
+          <a:bodyPr/>
+          <a:lstStyle/>
+          <a:p>
+            <a:r>
+              <a:rPr lang="en-US" dirty="0"/>
+              <a:t>What precision is good enough?</a:t>
+            </a:r>
+          </a:p>
+        </p:txBody>
+      </p:sp>
+      <p:graphicFrame>
+        <p:nvGraphicFramePr>
+          <p:cNvPr id="3" name="Table 2">
+            <a:extLst>
+              <a:ext uri="{FF2B5EF4-FFF2-40B4-BE49-F238E27FC236}">
+                <a16:creationId xmlns:a16="http://schemas.microsoft.com/office/drawing/2014/main" id="{511851CF-B761-8255-2E25-6301649ADC04}"/>
+              </a:ext>
+            </a:extLst>
+          </p:cNvPr>
+          <p:cNvGraphicFramePr>
+            <a:graphicFrameLocks noGrp="1"/>
+          </p:cNvGraphicFramePr>
+          <p:nvPr>
+            <p:extLst>
+              <p:ext uri="{D42A27DB-BD31-4B8C-83A1-F6EECF244321}">
+                <p14:modId xmlns:p14="http://schemas.microsoft.com/office/powerpoint/2010/main" val="2357999747"/>
+              </p:ext>
+            </p:extLst>
+          </p:nvPr>
+        </p:nvGraphicFramePr>
+        <p:xfrm>
+          <a:off x="341424" y="1690688"/>
+          <a:ext cx="5754576" cy="3606800"/>
+        </p:xfrm>
+        <a:graphic>
+          <a:graphicData uri="http://schemas.openxmlformats.org/drawingml/2006/table">
+            <a:tbl>
+              <a:tblPr firstRow="1" bandRow="1">
+                <a:tableStyleId>{5C22544A-7EE6-4342-B048-85BDC9FD1C3A}</a:tableStyleId>
+              </a:tblPr>
+              <a:tblGrid>
+                <a:gridCol w="796921">
+                  <a:extLst>
+                    <a:ext uri="{9D8B030D-6E8A-4147-A177-3AD203B41FA5}">
+                      <a16:colId xmlns:a16="http://schemas.microsoft.com/office/drawing/2014/main" val="2100930270"/>
+                    </a:ext>
+                  </a:extLst>
+                </a:gridCol>
+                <a:gridCol w="1090461">
+                  <a:extLst>
+                    <a:ext uri="{9D8B030D-6E8A-4147-A177-3AD203B41FA5}">
+                      <a16:colId xmlns:a16="http://schemas.microsoft.com/office/drawing/2014/main" val="2668942958"/>
+                    </a:ext>
+                  </a:extLst>
+                </a:gridCol>
+                <a:gridCol w="965514">
+                  <a:extLst>
+                    <a:ext uri="{9D8B030D-6E8A-4147-A177-3AD203B41FA5}">
+                      <a16:colId xmlns:a16="http://schemas.microsoft.com/office/drawing/2014/main" val="419510664"/>
+                    </a:ext>
+                  </a:extLst>
+                </a:gridCol>
+                <a:gridCol w="2901680">
+                  <a:extLst>
+                    <a:ext uri="{9D8B030D-6E8A-4147-A177-3AD203B41FA5}">
+                      <a16:colId xmlns:a16="http://schemas.microsoft.com/office/drawing/2014/main" val="3116060630"/>
+                    </a:ext>
+                  </a:extLst>
+                </a:gridCol>
+              </a:tblGrid>
+              <a:tr h="370840">
+                <a:tc>
+                  <a:txBody>
+                    <a:bodyPr/>
+                    <a:lstStyle/>
+                    <a:p>
+                      <a:r>
+                        <a:rPr lang="en-US" dirty="0"/>
+                        <a:t>bits</a:t>
+                      </a:r>
+                    </a:p>
+                  </a:txBody>
+                  <a:tcPr/>
+                </a:tc>
+                <a:tc>
+                  <a:txBody>
+                    <a:bodyPr/>
+                    <a:lstStyle/>
+                    <a:p>
+                      <a:r>
+                        <a:rPr lang="en-US" dirty="0"/>
+                        <a:t>decimal</a:t>
+                      </a:r>
+                    </a:p>
+                  </a:txBody>
+                  <a:tcPr/>
+                </a:tc>
+                <a:tc>
+                  <a:txBody>
+                    <a:bodyPr/>
+                    <a:lstStyle/>
+                    <a:p>
+                      <a:r>
+                        <a:rPr lang="en-US" dirty="0"/>
+                        <a:t>relative error</a:t>
+                      </a:r>
+                    </a:p>
+                  </a:txBody>
+                  <a:tcPr/>
+                </a:tc>
+                <a:tc>
+                  <a:txBody>
+                    <a:bodyPr/>
+                    <a:lstStyle/>
+                    <a:p>
+                      <a:endParaRPr lang="en-US"/>
+                    </a:p>
+                  </a:txBody>
+                  <a:tcPr/>
+                </a:tc>
+                <a:extLst>
+                  <a:ext uri="{0D108BD9-81ED-4DB2-BD59-A6C34878D82A}">
+                    <a16:rowId xmlns:a16="http://schemas.microsoft.com/office/drawing/2014/main" val="4257764900"/>
+                  </a:ext>
+                </a:extLst>
+              </a:tr>
+              <a:tr h="370840">
+                <a:tc>
+                  <a:txBody>
+                    <a:bodyPr/>
+                    <a:lstStyle/>
+                    <a:p>
+                      <a:r>
+                        <a:rPr lang="en-US" dirty="0"/>
+                        <a:t>8</a:t>
+                      </a:r>
+                    </a:p>
+                  </a:txBody>
+                  <a:tcPr/>
+                </a:tc>
+                <a:tc>
+                  <a:txBody>
+                    <a:bodyPr/>
+                    <a:lstStyle/>
+                    <a:p>
+                      <a:r>
+                        <a:rPr lang="en-US" dirty="0"/>
+                        <a:t>2.3</a:t>
+                      </a:r>
+                    </a:p>
+                  </a:txBody>
+                  <a:tcPr/>
+                </a:tc>
+                <a:tc>
+                  <a:txBody>
+                    <a:bodyPr/>
+                    <a:lstStyle/>
+                    <a:p>
+                      <a:r>
+                        <a:rPr lang="en-US" dirty="0"/>
+                        <a:t>3.9E-3</a:t>
+                      </a:r>
+                    </a:p>
+                  </a:txBody>
+                  <a:tcPr/>
+                </a:tc>
+                <a:tc>
+                  <a:txBody>
+                    <a:bodyPr/>
+                    <a:lstStyle/>
+                    <a:p>
+                      <a:r>
+                        <a:rPr lang="en-US" dirty="0"/>
+                        <a:t>uint8 ( byte)</a:t>
+                      </a:r>
+                    </a:p>
+                  </a:txBody>
+                  <a:tcPr/>
+                </a:tc>
+                <a:extLst>
+                  <a:ext uri="{0D108BD9-81ED-4DB2-BD59-A6C34878D82A}">
+                    <a16:rowId xmlns:a16="http://schemas.microsoft.com/office/drawing/2014/main" val="90958392"/>
+                  </a:ext>
+                </a:extLst>
+              </a:tr>
+              <a:tr h="370840">
+                <a:tc>
+                  <a:txBody>
+                    <a:bodyPr/>
+                    <a:lstStyle/>
+                    <a:p>
+                      <a:r>
+                        <a:rPr lang="en-US" dirty="0"/>
+                        <a:t>12</a:t>
+                      </a:r>
+                    </a:p>
+                  </a:txBody>
+                  <a:tcPr/>
+                </a:tc>
+                <a:tc>
+                  <a:txBody>
+                    <a:bodyPr/>
+                    <a:lstStyle/>
+                    <a:p>
+                      <a:r>
+                        <a:rPr lang="en-US" dirty="0"/>
+                        <a:t>3.3</a:t>
+                      </a:r>
+                    </a:p>
+                  </a:txBody>
+                  <a:tcPr/>
+                </a:tc>
+                <a:tc>
+                  <a:txBody>
+                    <a:bodyPr/>
+                    <a:lstStyle/>
+                    <a:p>
+                      <a:r>
+                        <a:rPr lang="en-US" dirty="0"/>
+                        <a:t>5.0E-4</a:t>
+                      </a:r>
+                    </a:p>
+                  </a:txBody>
+                  <a:tcPr/>
+                </a:tc>
+                <a:tc>
+                  <a:txBody>
+                    <a:bodyPr/>
+                    <a:lstStyle/>
+                    <a:p>
+                      <a:r>
+                        <a:rPr lang="en-US" dirty="0"/>
+                        <a:t>float16  (half)</a:t>
+                      </a:r>
+                    </a:p>
+                  </a:txBody>
+                  <a:tcPr/>
+                </a:tc>
+                <a:extLst>
+                  <a:ext uri="{0D108BD9-81ED-4DB2-BD59-A6C34878D82A}">
+                    <a16:rowId xmlns:a16="http://schemas.microsoft.com/office/drawing/2014/main" val="1566456209"/>
+                  </a:ext>
+                </a:extLst>
+              </a:tr>
+              <a:tr h="370840">
+                <a:tc>
+                  <a:txBody>
+                    <a:bodyPr/>
+                    <a:lstStyle/>
+                    <a:p>
+                      <a:r>
+                        <a:rPr lang="en-US" dirty="0"/>
+                        <a:t>16</a:t>
+                      </a:r>
+                    </a:p>
+                  </a:txBody>
+                  <a:tcPr/>
+                </a:tc>
+                <a:tc>
+                  <a:txBody>
+                    <a:bodyPr/>
+                    <a:lstStyle/>
+                    <a:p>
+                      <a:r>
+                        <a:rPr lang="en-US" dirty="0"/>
+                        <a:t>4.8</a:t>
+                      </a:r>
+                    </a:p>
+                  </a:txBody>
+                  <a:tcPr/>
+                </a:tc>
+                <a:tc>
+                  <a:txBody>
+                    <a:bodyPr/>
+                    <a:lstStyle/>
+                    <a:p>
+                      <a:pPr marL="0" marR="0" lvl="0" indent="0" algn="l" defTabSz="914400" rtl="0" eaLnBrk="1" fontAlgn="auto" latinLnBrk="0" hangingPunct="1">
+                        <a:lnSpc>
+                          <a:spcPct val="100000"/>
+                        </a:lnSpc>
+                        <a:spcBef>
+                          <a:spcPts val="0"/>
+                        </a:spcBef>
+                        <a:spcAft>
+                          <a:spcPts val="0"/>
+                        </a:spcAft>
+                        <a:buClrTx/>
+                        <a:buSzTx/>
+                        <a:buFontTx/>
+                        <a:buNone/>
+                        <a:tabLst/>
+                        <a:defRPr/>
+                      </a:pPr>
+                      <a:r>
+                        <a:rPr lang="en-US" dirty="0"/>
+                        <a:t>1.5E-5</a:t>
+                      </a:r>
+                    </a:p>
+                  </a:txBody>
+                  <a:tcPr/>
+                </a:tc>
+                <a:tc>
+                  <a:txBody>
+                    <a:bodyPr/>
+                    <a:lstStyle/>
+                    <a:p>
+                      <a:r>
+                        <a:rPr lang="en-US" dirty="0"/>
+                        <a:t>uint16  (short)</a:t>
+                      </a:r>
+                    </a:p>
+                  </a:txBody>
+                  <a:tcPr/>
+                </a:tc>
+                <a:extLst>
+                  <a:ext uri="{0D108BD9-81ED-4DB2-BD59-A6C34878D82A}">
+                    <a16:rowId xmlns:a16="http://schemas.microsoft.com/office/drawing/2014/main" val="2044809981"/>
+                  </a:ext>
+                </a:extLst>
+              </a:tr>
+              <a:tr h="370840">
+                <a:tc>
+                  <a:txBody>
+                    <a:bodyPr/>
+                    <a:lstStyle/>
+                    <a:p>
+                      <a:r>
+                        <a:rPr lang="en-US" dirty="0"/>
+                        <a:t>24</a:t>
+                      </a:r>
+                    </a:p>
+                  </a:txBody>
+                  <a:tcPr/>
+                </a:tc>
+                <a:tc>
+                  <a:txBody>
+                    <a:bodyPr/>
+                    <a:lstStyle/>
+                    <a:p>
+                      <a:r>
+                        <a:rPr lang="en-US" baseline="0" dirty="0"/>
+                        <a:t>7.2</a:t>
+                      </a:r>
+                    </a:p>
+                  </a:txBody>
+                  <a:tcPr/>
+                </a:tc>
+                <a:tc>
+                  <a:txBody>
+                    <a:bodyPr/>
+                    <a:lstStyle/>
+                    <a:p>
+                      <a:pPr marL="0" marR="0" lvl="0" indent="0" algn="l" defTabSz="914400" rtl="0" eaLnBrk="1" fontAlgn="auto" latinLnBrk="0" hangingPunct="1">
+                        <a:lnSpc>
+                          <a:spcPct val="100000"/>
+                        </a:lnSpc>
+                        <a:spcBef>
+                          <a:spcPts val="0"/>
+                        </a:spcBef>
+                        <a:spcAft>
+                          <a:spcPts val="0"/>
+                        </a:spcAft>
+                        <a:buClrTx/>
+                        <a:buSzTx/>
+                        <a:buFontTx/>
+                        <a:buNone/>
+                        <a:tabLst/>
+                        <a:defRPr/>
+                      </a:pPr>
+                      <a:r>
+                        <a:rPr lang="en-US" dirty="0"/>
+                        <a:t>1.2E-7</a:t>
+                      </a:r>
+                      <a:endParaRPr lang="en-US" baseline="30000" dirty="0"/>
+                    </a:p>
+                  </a:txBody>
+                  <a:tcPr/>
+                </a:tc>
+                <a:tc>
+                  <a:txBody>
+                    <a:bodyPr/>
+                    <a:lstStyle/>
+                    <a:p>
+                      <a:r>
+                        <a:rPr lang="en-US" dirty="0"/>
+                        <a:t>float32  (float)</a:t>
+                      </a:r>
+                    </a:p>
+                  </a:txBody>
+                  <a:tcPr/>
+                </a:tc>
+                <a:extLst>
+                  <a:ext uri="{0D108BD9-81ED-4DB2-BD59-A6C34878D82A}">
+                    <a16:rowId xmlns:a16="http://schemas.microsoft.com/office/drawing/2014/main" val="3361379638"/>
+                  </a:ext>
+                </a:extLst>
+              </a:tr>
+              <a:tr h="370840">
+                <a:tc>
+                  <a:txBody>
+                    <a:bodyPr/>
+                    <a:lstStyle/>
+                    <a:p>
+                      <a:r>
+                        <a:rPr lang="en-US" dirty="0"/>
+                        <a:t>32</a:t>
+                      </a:r>
+                    </a:p>
+                  </a:txBody>
+                  <a:tcPr/>
+                </a:tc>
+                <a:tc>
+                  <a:txBody>
+                    <a:bodyPr/>
+                    <a:lstStyle/>
+                    <a:p>
+                      <a:r>
+                        <a:rPr lang="en-US" dirty="0"/>
+                        <a:t>9.5</a:t>
+                      </a:r>
+                    </a:p>
+                  </a:txBody>
+                  <a:tcPr/>
+                </a:tc>
+                <a:tc>
+                  <a:txBody>
+                    <a:bodyPr/>
+                    <a:lstStyle/>
+                    <a:p>
+                      <a:pPr marL="0" marR="0" lvl="0" indent="0" algn="l" defTabSz="914400" rtl="0" eaLnBrk="1" fontAlgn="auto" latinLnBrk="0" hangingPunct="1">
+                        <a:lnSpc>
+                          <a:spcPct val="100000"/>
+                        </a:lnSpc>
+                        <a:spcBef>
+                          <a:spcPts val="0"/>
+                        </a:spcBef>
+                        <a:spcAft>
+                          <a:spcPts val="0"/>
+                        </a:spcAft>
+                        <a:buClrTx/>
+                        <a:buSzTx/>
+                        <a:buFontTx/>
+                        <a:buNone/>
+                        <a:tabLst/>
+                        <a:defRPr/>
+                      </a:pPr>
+                      <a:r>
+                        <a:rPr lang="en-US" dirty="0"/>
+                        <a:t>2.3E-10</a:t>
+                      </a:r>
+                    </a:p>
+                  </a:txBody>
+                  <a:tcPr/>
+                </a:tc>
+                <a:tc>
+                  <a:txBody>
+                    <a:bodyPr/>
+                    <a:lstStyle/>
+                    <a:p>
+                      <a:r>
+                        <a:rPr lang="en-US" dirty="0"/>
+                        <a:t>uint32  (int)</a:t>
+                      </a:r>
+                    </a:p>
+                  </a:txBody>
+                  <a:tcPr/>
+                </a:tc>
+                <a:extLst>
+                  <a:ext uri="{0D108BD9-81ED-4DB2-BD59-A6C34878D82A}">
+                    <a16:rowId xmlns:a16="http://schemas.microsoft.com/office/drawing/2014/main" val="1279893559"/>
+                  </a:ext>
+                </a:extLst>
+              </a:tr>
+              <a:tr h="370840">
+                <a:tc>
+                  <a:txBody>
+                    <a:bodyPr/>
+                    <a:lstStyle/>
+                    <a:p>
+                      <a:r>
+                        <a:rPr lang="en-US"/>
+                        <a:t>53</a:t>
+                      </a:r>
+                      <a:endParaRPr lang="en-US" dirty="0"/>
+                    </a:p>
+                  </a:txBody>
+                  <a:tcPr/>
+                </a:tc>
+                <a:tc>
+                  <a:txBody>
+                    <a:bodyPr/>
+                    <a:lstStyle/>
+                    <a:p>
+                      <a:pPr marL="0" marR="0" lvl="0" indent="0" algn="l" defTabSz="914400" rtl="0" eaLnBrk="1" fontAlgn="auto" latinLnBrk="0" hangingPunct="1">
+                        <a:lnSpc>
+                          <a:spcPct val="100000"/>
+                        </a:lnSpc>
+                        <a:spcBef>
+                          <a:spcPts val="0"/>
+                        </a:spcBef>
+                        <a:spcAft>
+                          <a:spcPts val="0"/>
+                        </a:spcAft>
+                        <a:buClrTx/>
+                        <a:buSzTx/>
+                        <a:buFontTx/>
+                        <a:buNone/>
+                        <a:tabLst/>
+                        <a:defRPr/>
+                      </a:pPr>
+                      <a:r>
+                        <a:rPr lang="en-US" baseline="0" dirty="0"/>
+                        <a:t>16</a:t>
+                      </a:r>
+                    </a:p>
+                  </a:txBody>
+                  <a:tcPr/>
+                </a:tc>
+                <a:tc>
+                  <a:txBody>
+                    <a:bodyPr/>
+                    <a:lstStyle/>
+                    <a:p>
+                      <a:pPr marL="0" marR="0" lvl="0" indent="0" algn="l" defTabSz="914400" rtl="0" eaLnBrk="1" fontAlgn="auto" latinLnBrk="0" hangingPunct="1">
+                        <a:lnSpc>
+                          <a:spcPct val="100000"/>
+                        </a:lnSpc>
+                        <a:spcBef>
+                          <a:spcPts val="0"/>
+                        </a:spcBef>
+                        <a:spcAft>
+                          <a:spcPts val="0"/>
+                        </a:spcAft>
+                        <a:buClrTx/>
+                        <a:buSzTx/>
+                        <a:buFontTx/>
+                        <a:buNone/>
+                        <a:tabLst/>
+                        <a:defRPr/>
+                      </a:pPr>
+                      <a:r>
+                        <a:rPr lang="en-US" dirty="0"/>
+                        <a:t>1.1E-16</a:t>
+                      </a:r>
+                      <a:endParaRPr lang="en-US" baseline="30000" dirty="0"/>
+                    </a:p>
+                  </a:txBody>
+                  <a:tcPr/>
+                </a:tc>
+                <a:tc>
+                  <a:txBody>
+                    <a:bodyPr/>
+                    <a:lstStyle/>
+                    <a:p>
+                      <a:r>
+                        <a:rPr lang="en-US" dirty="0"/>
+                        <a:t>float64 (double)</a:t>
+                      </a:r>
+                    </a:p>
+                  </a:txBody>
+                  <a:tcPr/>
+                </a:tc>
+                <a:extLst>
+                  <a:ext uri="{0D108BD9-81ED-4DB2-BD59-A6C34878D82A}">
+                    <a16:rowId xmlns:a16="http://schemas.microsoft.com/office/drawing/2014/main" val="2791597364"/>
+                  </a:ext>
+                </a:extLst>
+              </a:tr>
+              <a:tr h="370840">
+                <a:tc>
+                  <a:txBody>
+                    <a:bodyPr/>
+                    <a:lstStyle/>
+                    <a:p>
+                      <a:r>
+                        <a:rPr lang="en-US" dirty="0"/>
+                        <a:t>64</a:t>
+                      </a:r>
+                    </a:p>
+                  </a:txBody>
+                  <a:tcPr/>
+                </a:tc>
+                <a:tc>
+                  <a:txBody>
+                    <a:bodyPr/>
+                    <a:lstStyle/>
+                    <a:p>
+                      <a:r>
+                        <a:rPr lang="en-US" dirty="0"/>
+                        <a:t>19</a:t>
+                      </a:r>
+                    </a:p>
+                  </a:txBody>
+                  <a:tcPr/>
+                </a:tc>
+                <a:tc>
+                  <a:txBody>
+                    <a:bodyPr/>
+                    <a:lstStyle/>
+                    <a:p>
+                      <a:r>
+                        <a:rPr lang="en-US" dirty="0"/>
+                        <a:t>5.4E-20</a:t>
+                      </a:r>
+                    </a:p>
+                  </a:txBody>
+                  <a:tcPr/>
+                </a:tc>
+                <a:tc>
+                  <a:txBody>
+                    <a:bodyPr/>
+                    <a:lstStyle/>
+                    <a:p>
+                      <a:r>
+                        <a:rPr lang="en-US" dirty="0"/>
+                        <a:t>uint64   (long long)</a:t>
+                      </a:r>
+                    </a:p>
+                  </a:txBody>
+                  <a:tcPr/>
+                </a:tc>
+                <a:extLst>
+                  <a:ext uri="{0D108BD9-81ED-4DB2-BD59-A6C34878D82A}">
+                    <a16:rowId xmlns:a16="http://schemas.microsoft.com/office/drawing/2014/main" val="1170169869"/>
+                  </a:ext>
+                </a:extLst>
+              </a:tr>
+              <a:tr h="370840">
+                <a:tc>
+                  <a:txBody>
+                    <a:bodyPr/>
+                    <a:lstStyle/>
+                    <a:p>
+                      <a:r>
+                        <a:rPr lang="en-US" dirty="0"/>
+                        <a:t>113</a:t>
+                      </a:r>
+                    </a:p>
+                  </a:txBody>
+                  <a:tcPr/>
+                </a:tc>
+                <a:tc>
+                  <a:txBody>
+                    <a:bodyPr/>
+                    <a:lstStyle/>
+                    <a:p>
+                      <a:r>
+                        <a:rPr lang="en-US" dirty="0"/>
+                        <a:t>34</a:t>
+                      </a:r>
+                    </a:p>
+                  </a:txBody>
+                  <a:tcPr/>
+                </a:tc>
+                <a:tc>
+                  <a:txBody>
+                    <a:bodyPr/>
+                    <a:lstStyle/>
+                    <a:p>
+                      <a:r>
+                        <a:rPr lang="en-US" dirty="0"/>
+                        <a:t>1.9E-34</a:t>
+                      </a:r>
+                    </a:p>
+                  </a:txBody>
+                  <a:tcPr/>
+                </a:tc>
+                <a:tc>
+                  <a:txBody>
+                    <a:bodyPr/>
+                    <a:lstStyle/>
+                    <a:p>
+                      <a:r>
+                        <a:rPr lang="en-US" dirty="0"/>
+                        <a:t>float128 (quad)</a:t>
+                      </a:r>
+                    </a:p>
+                  </a:txBody>
+                  <a:tcPr/>
+                </a:tc>
+                <a:extLst>
+                  <a:ext uri="{0D108BD9-81ED-4DB2-BD59-A6C34878D82A}">
+                    <a16:rowId xmlns:a16="http://schemas.microsoft.com/office/drawing/2014/main" val="3319632819"/>
+                  </a:ext>
+                </a:extLst>
+              </a:tr>
+            </a:tbl>
+          </a:graphicData>
+        </a:graphic>
+      </p:graphicFrame>
+    </p:spTree>
+    <p:extLst>
+      <p:ext uri="{BB962C8B-B14F-4D97-AF65-F5344CB8AC3E}">
+        <p14:creationId xmlns:p14="http://schemas.microsoft.com/office/powerpoint/2010/main" val="4105454119"/>
+      </p:ext>
+    </p:extLst>
+  </p:cSld>
+  <p:clrMapOvr>
+    <a:masterClrMapping/>
+  </p:clrMapOvr>
+</p:sld>
+</file>
+
+<file path=ppt/slides/slide49.xml><?xml version="1.0" encoding="utf-8"?>
+<p:sld xmlns:a="http://schemas.openxmlformats.org/drawingml/2006/main" xmlns:r="http://schemas.openxmlformats.org/officeDocument/2006/relationships" xmlns:p="http://schemas.openxmlformats.org/presentationml/2006/main">
+  <p:cSld>
+    <p:spTree>
+      <p:nvGrpSpPr>
+        <p:cNvPr id="1" name=""/>
+        <p:cNvGrpSpPr/>
+        <p:nvPr/>
+      </p:nvGrpSpPr>
+      <p:grpSpPr>
+        <a:xfrm>
+          <a:off x="0" y="0"/>
+          <a:ext cx="0" cy="0"/>
+          <a:chOff x="0" y="0"/>
+          <a:chExt cx="0" cy="0"/>
+        </a:xfrm>
+      </p:grpSpPr>
+      <p:sp>
+        <p:nvSpPr>
+          <p:cNvPr id="5" name="Title 4">
+            <a:extLst>
+              <a:ext uri="{FF2B5EF4-FFF2-40B4-BE49-F238E27FC236}">
+                <a16:creationId xmlns:a16="http://schemas.microsoft.com/office/drawing/2014/main" id="{913FDDA4-89B5-877D-93D4-1990C58F6428}"/>
+              </a:ext>
+            </a:extLst>
+          </p:cNvPr>
+          <p:cNvSpPr>
+            <a:spLocks noGrp="1"/>
+          </p:cNvSpPr>
+          <p:nvPr>
+            <p:ph type="title"/>
+          </p:nvPr>
+        </p:nvSpPr>
+        <p:spPr/>
+        <p:txBody>
+          <a:bodyPr/>
+          <a:lstStyle/>
+          <a:p>
+            <a:r>
+              <a:rPr lang="en-US" dirty="0" err="1"/>
+              <a:t>Anedocts</a:t>
+            </a:r>
+            <a:endParaRPr lang="en-US" dirty="0"/>
+          </a:p>
+        </p:txBody>
+      </p:sp>
+      <p:sp>
+        <p:nvSpPr>
+          <p:cNvPr id="6" name="Text Placeholder 5">
+            <a:extLst>
+              <a:ext uri="{FF2B5EF4-FFF2-40B4-BE49-F238E27FC236}">
+                <a16:creationId xmlns:a16="http://schemas.microsoft.com/office/drawing/2014/main" id="{9F1F237B-8A95-38B2-933F-ABFB35AAB7FB}"/>
+              </a:ext>
+            </a:extLst>
+          </p:cNvPr>
+          <p:cNvSpPr>
+            <a:spLocks noGrp="1"/>
+          </p:cNvSpPr>
+          <p:nvPr>
+            <p:ph type="body" idx="1"/>
+          </p:nvPr>
+        </p:nvSpPr>
+        <p:spPr/>
+        <p:txBody>
+          <a:bodyPr/>
+          <a:lstStyle/>
+          <a:p>
+            <a:endParaRPr lang="en-US"/>
+          </a:p>
+        </p:txBody>
+      </p:sp>
+    </p:spTree>
+    <p:extLst>
+      <p:ext uri="{BB962C8B-B14F-4D97-AF65-F5344CB8AC3E}">
+        <p14:creationId xmlns:p14="http://schemas.microsoft.com/office/powerpoint/2010/main" val="772502209"/>
+      </p:ext>
+    </p:extLst>
+  </p:cSld>
+  <p:clrMapOvr>
+    <a:masterClrMapping/>
+  </p:clrMapOvr>
+</p:sld>
+</file>
+
+<file path=ppt/slides/slide5.xml><?xml version="1.0" encoding="utf-8"?>
+<p:sld xmlns:a="http://schemas.openxmlformats.org/drawingml/2006/main" xmlns:r="http://schemas.openxmlformats.org/officeDocument/2006/relationships" xmlns:p="http://schemas.openxmlformats.org/presentationml/2006/main">
+  <p:cSld>
+    <p:spTree>
+      <p:nvGrpSpPr>
+        <p:cNvPr id="1" name=""/>
+        <p:cNvGrpSpPr/>
+        <p:nvPr/>
+      </p:nvGrpSpPr>
+      <p:grpSpPr>
+        <a:xfrm>
+          <a:off x="0" y="0"/>
+          <a:ext cx="0" cy="0"/>
+          <a:chOff x="0" y="0"/>
+          <a:chExt cx="0" cy="0"/>
+        </a:xfrm>
+      </p:grpSpPr>
+      <p:sp>
+        <p:nvSpPr>
+          <p:cNvPr id="30721" name="Title 1"/>
+          <p:cNvSpPr>
+            <a:spLocks noGrp="1"/>
+          </p:cNvSpPr>
+          <p:nvPr>
+            <p:ph type="title"/>
+          </p:nvPr>
+        </p:nvSpPr>
+        <p:spPr>
+          <a:xfrm>
+            <a:off x="1992313" y="188915"/>
+            <a:ext cx="8229600" cy="842444"/>
+          </a:xfrm>
+        </p:spPr>
+        <p:txBody>
+          <a:bodyPr/>
+          <a:lstStyle/>
+          <a:p>
+            <a:r>
+              <a:rPr lang="en-US" altLang="x-none" dirty="0"/>
+              <a:t>Rounding Algorithms</a:t>
+            </a:r>
+          </a:p>
+        </p:txBody>
+      </p:sp>
+      <p:sp>
+        <p:nvSpPr>
+          <p:cNvPr id="30722" name="Content Placeholder 2"/>
+          <p:cNvSpPr>
+            <a:spLocks noGrp="1"/>
+          </p:cNvSpPr>
+          <p:nvPr>
+            <p:ph idx="1"/>
+          </p:nvPr>
+        </p:nvSpPr>
+        <p:spPr>
+          <a:xfrm>
+            <a:off x="754098" y="836612"/>
+            <a:ext cx="10599701" cy="5160151"/>
+          </a:xfrm>
+        </p:spPr>
+        <p:txBody>
+          <a:bodyPr>
+            <a:normAutofit/>
+          </a:bodyPr>
+          <a:lstStyle/>
+          <a:p>
+            <a:r>
+              <a:rPr lang="en-US" altLang="x-none" sz="2000" dirty="0"/>
+              <a:t>The standard defines five rounding algorithms.</a:t>
+            </a:r>
+          </a:p>
+          <a:p>
+            <a:pPr lvl="1"/>
+            <a:r>
+              <a:rPr lang="en-US" altLang="x-none" sz="1800" dirty="0"/>
+              <a:t>The first two round to a nearest value; the others are called directed </a:t>
+            </a:r>
+            <a:r>
+              <a:rPr lang="en-US" altLang="x-none" sz="1800" dirty="0" err="1"/>
+              <a:t>roundings</a:t>
+            </a:r>
+            <a:r>
+              <a:rPr lang="en-US" altLang="x-none" sz="1800" dirty="0"/>
+              <a:t>:</a:t>
+            </a:r>
+            <a:endParaRPr lang="en-US" altLang="x-none" sz="2000" dirty="0"/>
+          </a:p>
+          <a:p>
+            <a:r>
+              <a:rPr lang="en-US" altLang="x-none" sz="2000" dirty="0" err="1"/>
+              <a:t>Roundings</a:t>
+            </a:r>
+            <a:r>
+              <a:rPr lang="en-US" altLang="x-none" sz="2000" dirty="0"/>
+              <a:t> to nearest</a:t>
+            </a:r>
+          </a:p>
+          <a:p>
+            <a:pPr lvl="1"/>
+            <a:r>
+              <a:rPr lang="en-US" altLang="x-none" sz="1800" b="1" dirty="0">
+                <a:solidFill>
+                  <a:srgbClr val="FF0000"/>
+                </a:solidFill>
+              </a:rPr>
+              <a:t>Round to nearest, ties to even – rounds to the nearest value;</a:t>
+            </a:r>
+            <a:r>
+              <a:rPr lang="en-US" altLang="x-none" sz="1800" dirty="0"/>
+              <a:t> if the number falls midway it is rounded to the nearest value with an even (zero) least significant bit, which occurs 50% of the time; </a:t>
+            </a:r>
+            <a:r>
+              <a:rPr lang="en-US" altLang="x-none" sz="1800" dirty="0">
+                <a:solidFill>
+                  <a:srgbClr val="FF0000"/>
+                </a:solidFill>
+              </a:rPr>
+              <a:t>this is the default algorithm for binary floating-point </a:t>
+            </a:r>
+            <a:r>
+              <a:rPr lang="en-US" altLang="x-none" sz="1800" dirty="0"/>
+              <a:t>and the recommended default for decimal</a:t>
+            </a:r>
+          </a:p>
+          <a:p>
+            <a:pPr lvl="1"/>
+            <a:r>
+              <a:rPr lang="en-US" altLang="x-none" sz="1800" dirty="0"/>
+              <a:t>Round to nearest, ties away from zero – rounds to the nearest value; if the number falls midway it is rounded to the nearest value above (for positive numbers) or below (for negative numbers)</a:t>
+            </a:r>
+          </a:p>
+          <a:p>
+            <a:r>
+              <a:rPr lang="en-US" altLang="x-none" sz="2000" dirty="0"/>
+              <a:t>Directed </a:t>
+            </a:r>
+            <a:r>
+              <a:rPr lang="en-US" altLang="x-none" sz="2000" dirty="0" err="1"/>
+              <a:t>roundings</a:t>
+            </a:r>
+            <a:endParaRPr lang="en-US" altLang="x-none" sz="2000" dirty="0"/>
+          </a:p>
+          <a:p>
+            <a:pPr lvl="1"/>
+            <a:r>
+              <a:rPr lang="en-US" altLang="x-none" sz="1800" dirty="0"/>
+              <a:t>Round toward 0 – directed rounding towards zero (also known as truncation).</a:t>
+            </a:r>
+          </a:p>
+          <a:p>
+            <a:pPr lvl="1"/>
+            <a:r>
+              <a:rPr lang="en-US" altLang="x-none" sz="1800" dirty="0"/>
+              <a:t>Round toward +∞ – directed rounding towards positive infinity (also known as rounding up or ceiling).</a:t>
+            </a:r>
+          </a:p>
+          <a:p>
+            <a:pPr lvl="1"/>
+            <a:r>
+              <a:rPr lang="en-US" altLang="x-none" sz="1800" dirty="0"/>
+              <a:t>Round toward −∞ – directed rounding towards negative infinity (also known as rounding down or floor).</a:t>
+            </a:r>
+          </a:p>
+          <a:p>
+            <a:r>
+              <a:rPr lang="en-US" altLang="x-none" sz="2200" dirty="0"/>
+              <a:t>A ”function” is </a:t>
+            </a:r>
+            <a:r>
+              <a:rPr lang="en-US" altLang="x-none" sz="2200" b="1" dirty="0">
+                <a:solidFill>
+                  <a:srgbClr val="FF0000"/>
+                </a:solidFill>
+              </a:rPr>
+              <a:t>correctly rounded </a:t>
+            </a:r>
+            <a:r>
+              <a:rPr lang="en-US" altLang="x-none" sz="2200" dirty="0"/>
+              <a:t>if the result corresponds to the rounded true value</a:t>
+            </a:r>
+          </a:p>
+          <a:p>
+            <a:r>
+              <a:rPr lang="en-US" altLang="x-none" sz="2200" dirty="0"/>
+              <a:t>A “function” is </a:t>
+            </a:r>
+            <a:r>
+              <a:rPr lang="en-US" altLang="x-none" sz="2200" b="1" dirty="0">
+                <a:solidFill>
+                  <a:srgbClr val="FF0000"/>
+                </a:solidFill>
+              </a:rPr>
+              <a:t>faithfully rounded </a:t>
+            </a:r>
+            <a:r>
+              <a:rPr lang="en-US" altLang="x-none" sz="2200" dirty="0"/>
+              <a:t>if the result corresponds to one of the two FP closest to the true value</a:t>
+            </a:r>
+          </a:p>
+        </p:txBody>
+      </p:sp>
+      <p:sp>
+        <p:nvSpPr>
+          <p:cNvPr id="30723" name="Date Placeholder 3"/>
+          <p:cNvSpPr>
+            <a:spLocks noGrp="1"/>
+          </p:cNvSpPr>
+          <p:nvPr>
+            <p:ph type="dt" sz="quarter" idx="10"/>
+          </p:nvPr>
+        </p:nvSpPr>
+        <p:spPr>
+          <a:noFill/>
+          <a:ln/>
+          <a:extLst>
+            <a:ext uri="{909E8E84-426E-40DD-AFC4-6F175D3DCCD1}">
+              <a14:hiddenFill xmlns:a14="http://schemas.microsoft.com/office/drawing/2010/main">
+                <a:solidFill>
+                  <a:srgbClr val="FFFFFF"/>
+                </a:solidFill>
+              </a14:hiddenFill>
+            </a:ext>
+            <a:ext uri="{91240B29-F687-4F45-9708-019B960494DF}">
+              <a14:hiddenLine xmlns:a14="http://schemas.microsoft.com/office/drawing/2010/main" w="9525">
+                <a:solidFill>
+                  <a:srgbClr val="000000"/>
+                </a:solidFill>
+                <a:miter lim="800000"/>
+                <a:headEnd/>
+                <a:tailEnd/>
+              </a14:hiddenLine>
+            </a:ext>
+          </a:extLst>
+        </p:spPr>
+        <p:txBody>
+          <a:bodyPr/>
+          <a:lstStyle>
+            <a:lvl1pPr eaLnBrk="0" hangingPunct="0">
+              <a:defRPr sz="2400">
+                <a:solidFill>
+                  <a:schemeClr val="tx1"/>
+                </a:solidFill>
+                <a:latin typeface="Arial" charset="0"/>
+                <a:ea typeface="ＭＳ Ｐゴシック" charset="-128"/>
+              </a:defRPr>
+            </a:lvl1pPr>
+            <a:lvl2pPr marL="742950" indent="-285750" eaLnBrk="0" hangingPunct="0">
+              <a:defRPr sz="2400">
+                <a:solidFill>
+                  <a:schemeClr val="tx1"/>
+                </a:solidFill>
+                <a:latin typeface="Arial" charset="0"/>
+                <a:ea typeface="ＭＳ Ｐゴシック" charset="-128"/>
+              </a:defRPr>
+            </a:lvl2pPr>
+            <a:lvl3pPr marL="1143000" indent="-228600" eaLnBrk="0" hangingPunct="0">
+              <a:defRPr sz="2400">
+                <a:solidFill>
+                  <a:schemeClr val="tx1"/>
+                </a:solidFill>
+                <a:latin typeface="Arial" charset="0"/>
+                <a:ea typeface="ＭＳ Ｐゴシック" charset="-128"/>
+              </a:defRPr>
+            </a:lvl3pPr>
+            <a:lvl4pPr marL="1600200" indent="-228600" eaLnBrk="0" hangingPunct="0">
+              <a:defRPr sz="2400">
+                <a:solidFill>
+                  <a:schemeClr val="tx1"/>
+                </a:solidFill>
+                <a:latin typeface="Arial" charset="0"/>
+                <a:ea typeface="ＭＳ Ｐゴシック" charset="-128"/>
+              </a:defRPr>
+            </a:lvl4pPr>
+            <a:lvl5pPr marL="2057400" indent="-228600" eaLnBrk="0" hangingPunct="0">
+              <a:defRPr sz="2400">
+                <a:solidFill>
+                  <a:schemeClr val="tx1"/>
+                </a:solidFill>
+                <a:latin typeface="Arial" charset="0"/>
+                <a:ea typeface="ＭＳ Ｐゴシック" charset="-128"/>
+              </a:defRPr>
+            </a:lvl5pPr>
+            <a:lvl6pPr marL="2514600" indent="-228600" eaLnBrk="0" fontAlgn="base" hangingPunct="0">
+              <a:spcBef>
+                <a:spcPct val="0"/>
+              </a:spcBef>
+              <a:spcAft>
+                <a:spcPct val="0"/>
+              </a:spcAft>
+              <a:defRPr sz="2400">
+                <a:solidFill>
+                  <a:schemeClr val="tx1"/>
+                </a:solidFill>
+                <a:latin typeface="Arial" charset="0"/>
+                <a:ea typeface="ＭＳ Ｐゴシック" charset="-128"/>
+              </a:defRPr>
+            </a:lvl6pPr>
+            <a:lvl7pPr marL="2971800" indent="-228600" eaLnBrk="0" fontAlgn="base" hangingPunct="0">
+              <a:spcBef>
+                <a:spcPct val="0"/>
+              </a:spcBef>
+              <a:spcAft>
+                <a:spcPct val="0"/>
+              </a:spcAft>
+              <a:defRPr sz="2400">
+                <a:solidFill>
+                  <a:schemeClr val="tx1"/>
+                </a:solidFill>
+                <a:latin typeface="Arial" charset="0"/>
+                <a:ea typeface="ＭＳ Ｐゴシック" charset="-128"/>
+              </a:defRPr>
+            </a:lvl7pPr>
+            <a:lvl8pPr marL="3429000" indent="-228600" eaLnBrk="0" fontAlgn="base" hangingPunct="0">
+              <a:spcBef>
+                <a:spcPct val="0"/>
+              </a:spcBef>
+              <a:spcAft>
+                <a:spcPct val="0"/>
+              </a:spcAft>
+              <a:defRPr sz="2400">
+                <a:solidFill>
+                  <a:schemeClr val="tx1"/>
+                </a:solidFill>
+                <a:latin typeface="Arial" charset="0"/>
+                <a:ea typeface="ＭＳ Ｐゴシック" charset="-128"/>
+              </a:defRPr>
+            </a:lvl8pPr>
+            <a:lvl9pPr marL="3886200" indent="-228600" eaLnBrk="0" fontAlgn="base" hangingPunct="0">
+              <a:spcBef>
+                <a:spcPct val="0"/>
+              </a:spcBef>
+              <a:spcAft>
+                <a:spcPct val="0"/>
+              </a:spcAft>
+              <a:defRPr sz="2400">
+                <a:solidFill>
+                  <a:schemeClr val="tx1"/>
+                </a:solidFill>
+                <a:latin typeface="Arial" charset="0"/>
+                <a:ea typeface="ＭＳ Ｐゴシック" charset="-128"/>
+              </a:defRPr>
+            </a:lvl9pPr>
+          </a:lstStyle>
+          <a:p>
+            <a:pPr eaLnBrk="1" hangingPunct="1"/>
+            <a:r>
+              <a:rPr lang="en-US" altLang="x-none" sz="1200">
+                <a:latin typeface="Garamond" charset="0"/>
+              </a:rPr>
+              <a:t>22 October 2016</a:t>
+            </a:r>
+            <a:endParaRPr lang="it-IT" altLang="x-none" sz="1200">
+              <a:latin typeface="Garamond" charset="0"/>
+            </a:endParaRPr>
+          </a:p>
+        </p:txBody>
+      </p:sp>
+      <p:sp>
+        <p:nvSpPr>
+          <p:cNvPr id="30724" name="Footer Placeholder 4"/>
+          <p:cNvSpPr>
+            <a:spLocks noGrp="1"/>
+          </p:cNvSpPr>
+          <p:nvPr>
+            <p:ph type="ftr" sz="quarter" idx="11"/>
+          </p:nvPr>
+        </p:nvSpPr>
+        <p:spPr>
+          <a:noFill/>
+          <a:ln/>
+          <a:extLst>
+            <a:ext uri="{909E8E84-426E-40DD-AFC4-6F175D3DCCD1}">
+              <a14:hiddenFill xmlns:a14="http://schemas.microsoft.com/office/drawing/2010/main">
+                <a:solidFill>
+                  <a:srgbClr val="FFFFFF"/>
+                </a:solidFill>
+              </a14:hiddenFill>
+            </a:ext>
+            <a:ext uri="{91240B29-F687-4F45-9708-019B960494DF}">
+              <a14:hiddenLine xmlns:a14="http://schemas.microsoft.com/office/drawing/2010/main" w="9525">
+                <a:solidFill>
+                  <a:srgbClr val="000000"/>
+                </a:solidFill>
+                <a:miter lim="800000"/>
+                <a:headEnd/>
+                <a:tailEnd/>
+              </a14:hiddenLine>
+            </a:ext>
+          </a:extLst>
+        </p:spPr>
+        <p:txBody>
+          <a:bodyPr/>
+          <a:lstStyle>
+            <a:lvl1pPr eaLnBrk="0" hangingPunct="0">
+              <a:defRPr sz="2400">
+                <a:solidFill>
+                  <a:schemeClr val="tx1"/>
+                </a:solidFill>
+                <a:latin typeface="Arial" charset="0"/>
+                <a:ea typeface="ＭＳ Ｐゴシック" charset="-128"/>
+              </a:defRPr>
+            </a:lvl1pPr>
+            <a:lvl2pPr marL="742950" indent="-285750" eaLnBrk="0" hangingPunct="0">
+              <a:defRPr sz="2400">
+                <a:solidFill>
+                  <a:schemeClr val="tx1"/>
+                </a:solidFill>
+                <a:latin typeface="Arial" charset="0"/>
+                <a:ea typeface="ＭＳ Ｐゴシック" charset="-128"/>
+              </a:defRPr>
+            </a:lvl2pPr>
+            <a:lvl3pPr marL="1143000" indent="-228600" eaLnBrk="0" hangingPunct="0">
+              <a:defRPr sz="2400">
+                <a:solidFill>
+                  <a:schemeClr val="tx1"/>
+                </a:solidFill>
+                <a:latin typeface="Arial" charset="0"/>
+                <a:ea typeface="ＭＳ Ｐゴシック" charset="-128"/>
+              </a:defRPr>
+            </a:lvl3pPr>
+            <a:lvl4pPr marL="1600200" indent="-228600" eaLnBrk="0" hangingPunct="0">
+              <a:defRPr sz="2400">
+                <a:solidFill>
+                  <a:schemeClr val="tx1"/>
+                </a:solidFill>
+                <a:latin typeface="Arial" charset="0"/>
+                <a:ea typeface="ＭＳ Ｐゴシック" charset="-128"/>
+              </a:defRPr>
+            </a:lvl4pPr>
+            <a:lvl5pPr marL="2057400" indent="-228600" eaLnBrk="0" hangingPunct="0">
+              <a:defRPr sz="2400">
+                <a:solidFill>
+                  <a:schemeClr val="tx1"/>
+                </a:solidFill>
+                <a:latin typeface="Arial" charset="0"/>
+                <a:ea typeface="ＭＳ Ｐゴシック" charset="-128"/>
+              </a:defRPr>
+            </a:lvl5pPr>
+            <a:lvl6pPr marL="2514600" indent="-228600" eaLnBrk="0" fontAlgn="base" hangingPunct="0">
+              <a:spcBef>
+                <a:spcPct val="0"/>
+              </a:spcBef>
+              <a:spcAft>
+                <a:spcPct val="0"/>
+              </a:spcAft>
+              <a:defRPr sz="2400">
+                <a:solidFill>
+                  <a:schemeClr val="tx1"/>
+                </a:solidFill>
+                <a:latin typeface="Arial" charset="0"/>
+                <a:ea typeface="ＭＳ Ｐゴシック" charset="-128"/>
+              </a:defRPr>
+            </a:lvl6pPr>
+            <a:lvl7pPr marL="2971800" indent="-228600" eaLnBrk="0" fontAlgn="base" hangingPunct="0">
+              <a:spcBef>
+                <a:spcPct val="0"/>
+              </a:spcBef>
+              <a:spcAft>
+                <a:spcPct val="0"/>
+              </a:spcAft>
+              <a:defRPr sz="2400">
+                <a:solidFill>
+                  <a:schemeClr val="tx1"/>
+                </a:solidFill>
+                <a:latin typeface="Arial" charset="0"/>
+                <a:ea typeface="ＭＳ Ｐゴシック" charset="-128"/>
+              </a:defRPr>
+            </a:lvl7pPr>
+            <a:lvl8pPr marL="3429000" indent="-228600" eaLnBrk="0" fontAlgn="base" hangingPunct="0">
+              <a:spcBef>
+                <a:spcPct val="0"/>
+              </a:spcBef>
+              <a:spcAft>
+                <a:spcPct val="0"/>
+              </a:spcAft>
+              <a:defRPr sz="2400">
+                <a:solidFill>
+                  <a:schemeClr val="tx1"/>
+                </a:solidFill>
+                <a:latin typeface="Arial" charset="0"/>
+                <a:ea typeface="ＭＳ Ｐゴシック" charset="-128"/>
+              </a:defRPr>
+            </a:lvl8pPr>
+            <a:lvl9pPr marL="3886200" indent="-228600" eaLnBrk="0" fontAlgn="base" hangingPunct="0">
+              <a:spcBef>
+                <a:spcPct val="0"/>
+              </a:spcBef>
+              <a:spcAft>
+                <a:spcPct val="0"/>
+              </a:spcAft>
+              <a:defRPr sz="2400">
+                <a:solidFill>
+                  <a:schemeClr val="tx1"/>
+                </a:solidFill>
+                <a:latin typeface="Arial" charset="0"/>
+                <a:ea typeface="ＭＳ Ｐゴシック" charset="-128"/>
+              </a:defRPr>
+            </a:lvl9pPr>
+          </a:lstStyle>
+          <a:p>
+            <a:pPr eaLnBrk="1" hangingPunct="1"/>
+            <a:r>
+              <a:rPr lang="en-US" altLang="x-none" sz="1200">
+                <a:latin typeface="Garamond" charset="0"/>
+              </a:rPr>
+              <a:t>Vincenzo Innocente</a:t>
+            </a:r>
+            <a:endParaRPr lang="it-IT" altLang="x-none" sz="1200">
+              <a:latin typeface="Garamond" charset="0"/>
+            </a:endParaRPr>
+          </a:p>
+        </p:txBody>
+      </p:sp>
+      <p:sp>
+        <p:nvSpPr>
+          <p:cNvPr id="30725" name="Slide Number Placeholder 5"/>
+          <p:cNvSpPr>
+            <a:spLocks noGrp="1"/>
+          </p:cNvSpPr>
+          <p:nvPr>
+            <p:ph type="sldNum" sz="quarter" idx="12"/>
+          </p:nvPr>
+        </p:nvSpPr>
+        <p:spPr>
+          <a:noFill/>
+          <a:ln/>
+          <a:extLst>
+            <a:ext uri="{909E8E84-426E-40DD-AFC4-6F175D3DCCD1}">
+              <a14:hiddenFill xmlns:a14="http://schemas.microsoft.com/office/drawing/2010/main">
+                <a:solidFill>
+                  <a:srgbClr val="FFFFFF"/>
+                </a:solidFill>
+              </a14:hiddenFill>
+            </a:ext>
+            <a:ext uri="{91240B29-F687-4F45-9708-019B960494DF}">
+              <a14:hiddenLine xmlns:a14="http://schemas.microsoft.com/office/drawing/2010/main" w="9525">
+                <a:solidFill>
+                  <a:srgbClr val="000000"/>
+                </a:solidFill>
+                <a:miter lim="800000"/>
+                <a:headEnd/>
+                <a:tailEnd/>
+              </a14:hiddenLine>
+            </a:ext>
+          </a:extLst>
+        </p:spPr>
+        <p:txBody>
+          <a:bodyPr/>
+          <a:lstStyle>
+            <a:lvl1pPr eaLnBrk="0" hangingPunct="0">
+              <a:defRPr sz="2400">
+                <a:solidFill>
+                  <a:schemeClr val="tx1"/>
+                </a:solidFill>
+                <a:latin typeface="Arial" charset="0"/>
+                <a:ea typeface="ＭＳ Ｐゴシック" charset="-128"/>
+              </a:defRPr>
+            </a:lvl1pPr>
+            <a:lvl2pPr marL="742950" indent="-285750" eaLnBrk="0" hangingPunct="0">
+              <a:defRPr sz="2400">
+                <a:solidFill>
+                  <a:schemeClr val="tx1"/>
+                </a:solidFill>
+                <a:latin typeface="Arial" charset="0"/>
+                <a:ea typeface="ＭＳ Ｐゴシック" charset="-128"/>
+              </a:defRPr>
+            </a:lvl2pPr>
+            <a:lvl3pPr marL="1143000" indent="-228600" eaLnBrk="0" hangingPunct="0">
+              <a:defRPr sz="2400">
+                <a:solidFill>
+                  <a:schemeClr val="tx1"/>
+                </a:solidFill>
+                <a:latin typeface="Arial" charset="0"/>
+                <a:ea typeface="ＭＳ Ｐゴシック" charset="-128"/>
+              </a:defRPr>
+            </a:lvl3pPr>
+            <a:lvl4pPr marL="1600200" indent="-228600" eaLnBrk="0" hangingPunct="0">
+              <a:defRPr sz="2400">
+                <a:solidFill>
+                  <a:schemeClr val="tx1"/>
+                </a:solidFill>
+                <a:latin typeface="Arial" charset="0"/>
+                <a:ea typeface="ＭＳ Ｐゴシック" charset="-128"/>
+              </a:defRPr>
+            </a:lvl4pPr>
+            <a:lvl5pPr marL="2057400" indent="-228600" eaLnBrk="0" hangingPunct="0">
+              <a:defRPr sz="2400">
+                <a:solidFill>
+                  <a:schemeClr val="tx1"/>
+                </a:solidFill>
+                <a:latin typeface="Arial" charset="0"/>
+                <a:ea typeface="ＭＳ Ｐゴシック" charset="-128"/>
+              </a:defRPr>
+            </a:lvl5pPr>
+            <a:lvl6pPr marL="2514600" indent="-228600" eaLnBrk="0" fontAlgn="base" hangingPunct="0">
+              <a:spcBef>
+                <a:spcPct val="0"/>
+              </a:spcBef>
+              <a:spcAft>
+                <a:spcPct val="0"/>
+              </a:spcAft>
+              <a:defRPr sz="2400">
+                <a:solidFill>
+                  <a:schemeClr val="tx1"/>
+                </a:solidFill>
+                <a:latin typeface="Arial" charset="0"/>
+                <a:ea typeface="ＭＳ Ｐゴシック" charset="-128"/>
+              </a:defRPr>
+            </a:lvl6pPr>
+            <a:lvl7pPr marL="2971800" indent="-228600" eaLnBrk="0" fontAlgn="base" hangingPunct="0">
+              <a:spcBef>
+                <a:spcPct val="0"/>
+              </a:spcBef>
+              <a:spcAft>
+                <a:spcPct val="0"/>
+              </a:spcAft>
+              <a:defRPr sz="2400">
+                <a:solidFill>
+                  <a:schemeClr val="tx1"/>
+                </a:solidFill>
+                <a:latin typeface="Arial" charset="0"/>
+                <a:ea typeface="ＭＳ Ｐゴシック" charset="-128"/>
+              </a:defRPr>
+            </a:lvl7pPr>
+            <a:lvl8pPr marL="3429000" indent="-228600" eaLnBrk="0" fontAlgn="base" hangingPunct="0">
+              <a:spcBef>
+                <a:spcPct val="0"/>
+              </a:spcBef>
+              <a:spcAft>
+                <a:spcPct val="0"/>
+              </a:spcAft>
+              <a:defRPr sz="2400">
+                <a:solidFill>
+                  <a:schemeClr val="tx1"/>
+                </a:solidFill>
+                <a:latin typeface="Arial" charset="0"/>
+                <a:ea typeface="ＭＳ Ｐゴシック" charset="-128"/>
+              </a:defRPr>
+            </a:lvl8pPr>
+            <a:lvl9pPr marL="3886200" indent="-228600" eaLnBrk="0" fontAlgn="base" hangingPunct="0">
+              <a:spcBef>
+                <a:spcPct val="0"/>
+              </a:spcBef>
+              <a:spcAft>
+                <a:spcPct val="0"/>
+              </a:spcAft>
+              <a:defRPr sz="2400">
+                <a:solidFill>
+                  <a:schemeClr val="tx1"/>
+                </a:solidFill>
+                <a:latin typeface="Arial" charset="0"/>
+                <a:ea typeface="ＭＳ Ｐゴシック" charset="-128"/>
+              </a:defRPr>
+            </a:lvl9pPr>
+          </a:lstStyle>
+          <a:p>
+            <a:pPr eaLnBrk="1" hangingPunct="1"/>
+            <a:fld id="{016689D5-6FA2-274B-8EB3-26E90C03259E}" type="slidenum">
+              <a:rPr lang="it-IT" altLang="x-none" sz="1200">
+                <a:latin typeface="Garamond" charset="0"/>
+              </a:rPr>
+              <a:pPr eaLnBrk="1" hangingPunct="1"/>
+              <a:t>5</a:t>
+            </a:fld>
+            <a:endParaRPr lang="it-IT" altLang="x-none" sz="1200">
+              <a:latin typeface="Garamond" charset="0"/>
+            </a:endParaRPr>
+          </a:p>
+        </p:txBody>
+      </p:sp>
+    </p:spTree>
+  </p:cSld>
+  <p:clrMapOvr>
+    <a:masterClrMapping/>
+  </p:clrMapOvr>
+</p:sld>
+</file>
+
+<file path=ppt/slides/slide50.xml><?xml version="1.0" encoding="utf-8"?>
+<p:sld xmlns:a="http://schemas.openxmlformats.org/drawingml/2006/main" xmlns:r="http://schemas.openxmlformats.org/officeDocument/2006/relationships" xmlns:p="http://schemas.openxmlformats.org/presentationml/2006/main">
+  <p:cSld>
+    <p:spTree>
+      <p:nvGrpSpPr>
+        <p:cNvPr id="1" name=""/>
+        <p:cNvGrpSpPr/>
+        <p:nvPr/>
+      </p:nvGrpSpPr>
+      <p:grpSpPr>
+        <a:xfrm>
+          <a:off x="0" y="0"/>
+          <a:ext cx="0" cy="0"/>
+          <a:chOff x="0" y="0"/>
+          <a:chExt cx="0" cy="0"/>
+        </a:xfrm>
+      </p:grpSpPr>
+      <p:sp>
+        <p:nvSpPr>
           <p:cNvPr id="44033" name="Title 1">
             <a:extLst>
               <a:ext uri="{FF2B5EF4-FFF2-40B4-BE49-F238E27FC236}">
@@ -38312,7 +39809,7 @@
                 <a:latin typeface="Garamond" panose="02020404030301010803" pitchFamily="18" charset="0"/>
               </a:rPr>
               <a:pPr algn="l" eaLnBrk="1" hangingPunct="1"/>
-              <a:t>48</a:t>
+              <a:t>50</a:t>
             </a:fld>
             <a:endParaRPr lang="en-US" altLang="en-US" sz="1200">
               <a:latin typeface="Garamond" panose="02020404030301010803" pitchFamily="18" charset="0"/>
@@ -39376,7 +40873,7 @@
 </p:sld>
 </file>
 
-<file path=ppt/slides/slide49.xml><?xml version="1.0" encoding="utf-8"?>
+<file path=ppt/slides/slide51.xml><?xml version="1.0" encoding="utf-8"?>
 <p:sld xmlns:a="http://schemas.openxmlformats.org/drawingml/2006/main" xmlns:r="http://schemas.openxmlformats.org/officeDocument/2006/relationships" xmlns:p="http://schemas.openxmlformats.org/presentationml/2006/main">
   <p:cSld>
     <p:spTree>
@@ -39720,7 +41217,7 @@
                 <a:latin typeface="Garamond" charset="0"/>
               </a:rPr>
               <a:pPr eaLnBrk="1" hangingPunct="1"/>
-              <a:t>49</a:t>
+              <a:t>51</a:t>
             </a:fld>
             <a:endParaRPr lang="it-IT" altLang="x-none" sz="1200">
               <a:latin typeface="Garamond" charset="0"/>
@@ -39738,7 +41235,7 @@
         </p:nvSpPr>
         <p:spPr bwMode="auto">
           <a:xfrm>
-            <a:off x="1797051" y="1196975"/>
+            <a:off x="1159097" y="1222377"/>
             <a:ext cx="8259763" cy="2584450"/>
           </a:xfrm>
           <a:prstGeom prst="rect">
@@ -39879,63 +41376,143 @@
           <a:p>
             <a:pPr eaLnBrk="1" hangingPunct="1"/>
             <a:r>
-              <a:rPr lang="en-US" altLang="x-none" sz="1800"/>
-              <a:t>inline float pt2(float x, float y) {return x*x+y*y;}</a:t>
+              <a:rPr lang="en-US" altLang="x-none" sz="1800" dirty="0"/>
+              <a:t>inline float pt2(float x, float y) {return x*</a:t>
+            </a:r>
+            <a:r>
+              <a:rPr lang="en-US" altLang="x-none" sz="1800" dirty="0" err="1"/>
+              <a:t>x+y</a:t>
+            </a:r>
+            <a:r>
+              <a:rPr lang="en-US" altLang="x-none" sz="1800" dirty="0"/>
+              <a:t>*y;}</a:t>
             </a:r>
           </a:p>
           <a:p>
             <a:pPr eaLnBrk="1" hangingPunct="1"/>
             <a:r>
-              <a:rPr lang="en-US" altLang="x-none" sz="1800"/>
-              <a:t>inline float pt(float x, float y) {return std::sqrt(pt2(x,y));}</a:t>
+              <a:rPr lang="en-US" altLang="x-none" sz="1800" dirty="0"/>
+              <a:t>inline float pt(float x, float y) {return std::sqrt(pt2(</a:t>
+            </a:r>
+            <a:r>
+              <a:rPr lang="en-US" altLang="x-none" sz="1800" dirty="0" err="1"/>
+              <a:t>x,y</a:t>
+            </a:r>
+            <a:r>
+              <a:rPr lang="en-US" altLang="x-none" sz="1800" dirty="0"/>
+              <a:t>));}</a:t>
             </a:r>
           </a:p>
           <a:p>
             <a:pPr eaLnBrk="1" hangingPunct="1"/>
             <a:r>
-              <a:rPr lang="en-US" altLang="x-none" sz="1800"/>
-              <a:t>inline float phi(float x, float y) {return std::atan2(y,x);}</a:t>
+              <a:rPr lang="en-US" altLang="x-none" sz="1800" dirty="0"/>
+              <a:t>inline float phi(float x, float y) {return std::atan2(</a:t>
+            </a:r>
+            <a:r>
+              <a:rPr lang="en-US" altLang="x-none" sz="1800" dirty="0" err="1"/>
+              <a:t>y,x</a:t>
+            </a:r>
+            <a:r>
+              <a:rPr lang="en-US" altLang="x-none" sz="1800" dirty="0"/>
+              <a:t>);}</a:t>
             </a:r>
           </a:p>
           <a:p>
             <a:pPr eaLnBrk="1" hangingPunct="1"/>
             <a:r>
-              <a:rPr lang="en-US" altLang="x-none" sz="1800"/>
-              <a:t>inline eta(float x, float y, float z) { float t(z/pt(x,y)); return ::asinhf(t);} </a:t>
+              <a:rPr lang="en-US" altLang="x-none" sz="1800" dirty="0"/>
+              <a:t>inline eta(float x, float y, float z) { float t(z/pt(</a:t>
+            </a:r>
+            <a:r>
+              <a:rPr lang="en-US" altLang="x-none" sz="1800" dirty="0" err="1"/>
+              <a:t>x,y</a:t>
+            </a:r>
+            <a:r>
+              <a:rPr lang="en-US" altLang="x-none" sz="1800" dirty="0"/>
+              <a:t>)); return ::</a:t>
+            </a:r>
+            <a:r>
+              <a:rPr lang="en-US" altLang="x-none" sz="1800" dirty="0" err="1"/>
+              <a:t>asinhf</a:t>
+            </a:r>
+            <a:r>
+              <a:rPr lang="en-US" altLang="x-none" sz="1800" dirty="0"/>
+              <a:t>(t);} </a:t>
             </a:r>
           </a:p>
           <a:p>
             <a:pPr eaLnBrk="1" hangingPunct="1"/>
             <a:r>
-              <a:rPr lang="en-US" altLang="x-none" sz="1800"/>
+              <a:rPr lang="en-US" altLang="x-none" sz="1800" dirty="0"/>
               <a:t>inline float dot(float x1, float y1, float x2, float y2) {return x1*x2+y1*y2;}</a:t>
             </a:r>
           </a:p>
           <a:p>
             <a:pPr eaLnBrk="1" hangingPunct="1"/>
             <a:r>
-              <a:rPr lang="en-US" altLang="x-none" sz="1800"/>
-              <a:t>Inline float dphi(float p1,float p2) {</a:t>
+              <a:rPr lang="en-US" altLang="x-none" sz="1800" dirty="0"/>
+              <a:t>Inline float </a:t>
+            </a:r>
+            <a:r>
+              <a:rPr lang="en-US" altLang="x-none" sz="1800" dirty="0" err="1"/>
+              <a:t>dphi</a:t>
+            </a:r>
+            <a:r>
+              <a:rPr lang="en-US" altLang="x-none" sz="1800" dirty="0"/>
+              <a:t>(float p1,float p2) {</a:t>
             </a:r>
           </a:p>
           <a:p>
             <a:pPr eaLnBrk="1" hangingPunct="1"/>
             <a:r>
-              <a:rPr lang="en-US" altLang="x-none" sz="1800"/>
-              <a:t>    auto dp=std::abs(p1-p2); if (dp&gt;float(M_PI)) dp-=float(2*M_PI);</a:t>
+              <a:rPr lang="en-US" altLang="x-none" sz="1800" dirty="0"/>
+              <a:t>    auto </a:t>
+            </a:r>
+            <a:r>
+              <a:rPr lang="en-US" altLang="x-none" sz="1800" dirty="0" err="1"/>
+              <a:t>dp</a:t>
+            </a:r>
+            <a:r>
+              <a:rPr lang="en-US" altLang="x-none" sz="1800" dirty="0"/>
+              <a:t>=std::abs(p1-p2); if (</a:t>
+            </a:r>
+            <a:r>
+              <a:rPr lang="en-US" altLang="x-none" sz="1800" dirty="0" err="1"/>
+              <a:t>dp</a:t>
+            </a:r>
+            <a:r>
+              <a:rPr lang="en-US" altLang="x-none" sz="1800" dirty="0"/>
+              <a:t>&gt;float(M_PI)) </a:t>
+            </a:r>
+            <a:r>
+              <a:rPr lang="en-US" altLang="x-none" sz="1800" dirty="0" err="1"/>
+              <a:t>dp</a:t>
+            </a:r>
+            <a:r>
+              <a:rPr lang="en-US" altLang="x-none" sz="1800" dirty="0"/>
+              <a:t>-=float(2*M_PI);</a:t>
             </a:r>
           </a:p>
           <a:p>
             <a:pPr eaLnBrk="1" hangingPunct="1"/>
             <a:r>
-              <a:rPr lang="en-US" altLang="x-none" sz="1800"/>
-              <a:t>    return std::abs(dp);</a:t>
+              <a:rPr lang="en-US" altLang="x-none" sz="1800" dirty="0"/>
+              <a:t>    return std::abs(</a:t>
+            </a:r>
+            <a:r>
+              <a:rPr lang="en-US" altLang="x-none" sz="1800" dirty="0" err="1"/>
+              <a:t>dp</a:t>
+            </a:r>
+            <a:r>
+              <a:rPr lang="en-US" altLang="x-none" sz="1800" dirty="0"/>
+              <a:t>);</a:t>
             </a:r>
           </a:p>
           <a:p>
             <a:pPr eaLnBrk="1" hangingPunct="1"/>
             <a:r>
-              <a:rPr lang="en-US" altLang="x-none" sz="1800"/>
+              <a:rPr lang="en-US" altLang="x-none" sz="1800" dirty="0"/>
               <a:t>}; </a:t>
             </a:r>
           </a:p>
@@ -39951,7 +41528,7 @@
         </p:nvSpPr>
         <p:spPr bwMode="auto">
           <a:xfrm>
-            <a:off x="1992314" y="3933826"/>
+            <a:off x="1159097" y="4031458"/>
             <a:ext cx="8258175" cy="1476375"/>
           </a:xfrm>
           <a:prstGeom prst="rect">
@@ -40274,649 +41851,6 @@
               <a:rPr lang="en-US" altLang="x-none" sz="1800"/>
               <a:t>Exercise in ptcut.cpp</a:t>
             </a:r>
-          </a:p>
-        </p:txBody>
-      </p:sp>
-    </p:spTree>
-  </p:cSld>
-  <p:clrMapOvr>
-    <a:masterClrMapping/>
-  </p:clrMapOvr>
-</p:sld>
-</file>
-
-<file path=ppt/slides/slide5.xml><?xml version="1.0" encoding="utf-8"?>
-<p:sld xmlns:a="http://schemas.openxmlformats.org/drawingml/2006/main" xmlns:r="http://schemas.openxmlformats.org/officeDocument/2006/relationships" xmlns:p="http://schemas.openxmlformats.org/presentationml/2006/main">
-  <p:cSld>
-    <p:spTree>
-      <p:nvGrpSpPr>
-        <p:cNvPr id="1" name=""/>
-        <p:cNvGrpSpPr/>
-        <p:nvPr/>
-      </p:nvGrpSpPr>
-      <p:grpSpPr>
-        <a:xfrm>
-          <a:off x="0" y="0"/>
-          <a:ext cx="0" cy="0"/>
-          <a:chOff x="0" y="0"/>
-          <a:chExt cx="0" cy="0"/>
-        </a:xfrm>
-      </p:grpSpPr>
-      <p:sp>
-        <p:nvSpPr>
-          <p:cNvPr id="30721" name="Title 1"/>
-          <p:cNvSpPr>
-            <a:spLocks noGrp="1"/>
-          </p:cNvSpPr>
-          <p:nvPr>
-            <p:ph type="title"/>
-          </p:nvPr>
-        </p:nvSpPr>
-        <p:spPr>
-          <a:xfrm>
-            <a:off x="1992313" y="188914"/>
-            <a:ext cx="8229600" cy="1139825"/>
-          </a:xfrm>
-        </p:spPr>
-        <p:txBody>
-          <a:bodyPr/>
-          <a:lstStyle/>
-          <a:p>
-            <a:r>
-              <a:rPr lang="en-US" altLang="x-none"/>
-              <a:t>Rounding Algorithms</a:t>
-            </a:r>
-          </a:p>
-        </p:txBody>
-      </p:sp>
-      <p:sp>
-        <p:nvSpPr>
-          <p:cNvPr id="30722" name="Content Placeholder 2"/>
-          <p:cNvSpPr>
-            <a:spLocks noGrp="1"/>
-          </p:cNvSpPr>
-          <p:nvPr>
-            <p:ph idx="1"/>
-          </p:nvPr>
-        </p:nvSpPr>
-        <p:spPr>
-          <a:xfrm>
-            <a:off x="1774825" y="908051"/>
-            <a:ext cx="8713788" cy="5184775"/>
-          </a:xfrm>
-        </p:spPr>
-        <p:txBody>
-          <a:bodyPr/>
-          <a:lstStyle/>
-          <a:p>
-            <a:r>
-              <a:rPr lang="en-US" altLang="x-none" sz="2000" dirty="0"/>
-              <a:t>The standard defines five rounding algorithms.</a:t>
-            </a:r>
-          </a:p>
-          <a:p>
-            <a:pPr lvl="1"/>
-            <a:r>
-              <a:rPr lang="en-US" altLang="x-none" sz="1800" dirty="0"/>
-              <a:t>The first two round to a nearest value; the others are called directed </a:t>
-            </a:r>
-            <a:r>
-              <a:rPr lang="en-US" altLang="x-none" sz="1800" dirty="0" err="1"/>
-              <a:t>roundings</a:t>
-            </a:r>
-            <a:r>
-              <a:rPr lang="en-US" altLang="x-none" sz="1800" dirty="0"/>
-              <a:t>:</a:t>
-            </a:r>
-            <a:endParaRPr lang="en-US" altLang="x-none" sz="2000" dirty="0"/>
-          </a:p>
-          <a:p>
-            <a:r>
-              <a:rPr lang="en-US" altLang="x-none" sz="2000" dirty="0" err="1"/>
-              <a:t>Roundings</a:t>
-            </a:r>
-            <a:r>
-              <a:rPr lang="en-US" altLang="x-none" sz="2000" dirty="0"/>
-              <a:t> to nearest</a:t>
-            </a:r>
-          </a:p>
-          <a:p>
-            <a:pPr lvl="1"/>
-            <a:r>
-              <a:rPr lang="en-US" altLang="x-none" sz="1800" b="1" dirty="0">
-                <a:solidFill>
-                  <a:srgbClr val="FF0000"/>
-                </a:solidFill>
-              </a:rPr>
-              <a:t>Round to nearest, ties to even – rounds to the nearest value;</a:t>
-            </a:r>
-            <a:r>
-              <a:rPr lang="en-US" altLang="x-none" sz="1800" dirty="0"/>
-              <a:t> if the number falls midway it is rounded to the nearest value with an even (zero) least significant bit, which occurs 50% of the time; </a:t>
-            </a:r>
-            <a:r>
-              <a:rPr lang="en-US" altLang="x-none" sz="1800" dirty="0">
-                <a:solidFill>
-                  <a:srgbClr val="FF0000"/>
-                </a:solidFill>
-              </a:rPr>
-              <a:t>this is the default algorithm for binary floating-point </a:t>
-            </a:r>
-            <a:r>
-              <a:rPr lang="en-US" altLang="x-none" sz="1800" dirty="0"/>
-              <a:t>and the recommended default for decimal</a:t>
-            </a:r>
-          </a:p>
-          <a:p>
-            <a:pPr lvl="1"/>
-            <a:r>
-              <a:rPr lang="en-US" altLang="x-none" sz="1800" dirty="0"/>
-              <a:t>Round to nearest, ties away from zero – rounds to the nearest value; if the number falls midway it is rounded to the nearest value above (for positive numbers) or below (for negative numbers)</a:t>
-            </a:r>
-          </a:p>
-          <a:p>
-            <a:r>
-              <a:rPr lang="en-US" altLang="x-none" sz="2000" dirty="0"/>
-              <a:t>Directed </a:t>
-            </a:r>
-            <a:r>
-              <a:rPr lang="en-US" altLang="x-none" sz="2000" dirty="0" err="1"/>
-              <a:t>roundings</a:t>
-            </a:r>
-            <a:endParaRPr lang="en-US" altLang="x-none" sz="2000" dirty="0"/>
-          </a:p>
-          <a:p>
-            <a:pPr lvl="1"/>
-            <a:r>
-              <a:rPr lang="en-US" altLang="x-none" sz="1800" dirty="0"/>
-              <a:t>Round toward 0 – directed rounding towards zero (also known as truncation).</a:t>
-            </a:r>
-          </a:p>
-          <a:p>
-            <a:pPr lvl="1"/>
-            <a:r>
-              <a:rPr lang="en-US" altLang="x-none" sz="1800" dirty="0"/>
-              <a:t>Round toward +∞ – directed rounding towards positive infinity (also known as rounding up or ceiling).</a:t>
-            </a:r>
-          </a:p>
-          <a:p>
-            <a:pPr lvl="1"/>
-            <a:r>
-              <a:rPr lang="en-US" altLang="x-none" sz="1800" dirty="0"/>
-              <a:t>Round toward −∞ – directed rounding towards negative infinity (also known as rounding down or floor).</a:t>
-            </a:r>
-          </a:p>
-          <a:p>
-            <a:endParaRPr lang="en-US" altLang="x-none" sz="2000" dirty="0"/>
-          </a:p>
-        </p:txBody>
-      </p:sp>
-      <p:sp>
-        <p:nvSpPr>
-          <p:cNvPr id="30723" name="Date Placeholder 3"/>
-          <p:cNvSpPr>
-            <a:spLocks noGrp="1"/>
-          </p:cNvSpPr>
-          <p:nvPr>
-            <p:ph type="dt" sz="quarter" idx="10"/>
-          </p:nvPr>
-        </p:nvSpPr>
-        <p:spPr>
-          <a:noFill/>
-          <a:ln/>
-          <a:extLst>
-            <a:ext uri="{909E8E84-426E-40DD-AFC4-6F175D3DCCD1}">
-              <a14:hiddenFill xmlns:a14="http://schemas.microsoft.com/office/drawing/2010/main">
-                <a:solidFill>
-                  <a:srgbClr val="FFFFFF"/>
-                </a:solidFill>
-              </a14:hiddenFill>
-            </a:ext>
-            <a:ext uri="{91240B29-F687-4F45-9708-019B960494DF}">
-              <a14:hiddenLine xmlns:a14="http://schemas.microsoft.com/office/drawing/2010/main" w="9525">
-                <a:solidFill>
-                  <a:srgbClr val="000000"/>
-                </a:solidFill>
-                <a:miter lim="800000"/>
-                <a:headEnd/>
-                <a:tailEnd/>
-              </a14:hiddenLine>
-            </a:ext>
-          </a:extLst>
-        </p:spPr>
-        <p:txBody>
-          <a:bodyPr/>
-          <a:lstStyle>
-            <a:lvl1pPr eaLnBrk="0" hangingPunct="0">
-              <a:defRPr sz="2400">
-                <a:solidFill>
-                  <a:schemeClr val="tx1"/>
-                </a:solidFill>
-                <a:latin typeface="Arial" charset="0"/>
-                <a:ea typeface="ＭＳ Ｐゴシック" charset="-128"/>
-              </a:defRPr>
-            </a:lvl1pPr>
-            <a:lvl2pPr marL="742950" indent="-285750" eaLnBrk="0" hangingPunct="0">
-              <a:defRPr sz="2400">
-                <a:solidFill>
-                  <a:schemeClr val="tx1"/>
-                </a:solidFill>
-                <a:latin typeface="Arial" charset="0"/>
-                <a:ea typeface="ＭＳ Ｐゴシック" charset="-128"/>
-              </a:defRPr>
-            </a:lvl2pPr>
-            <a:lvl3pPr marL="1143000" indent="-228600" eaLnBrk="0" hangingPunct="0">
-              <a:defRPr sz="2400">
-                <a:solidFill>
-                  <a:schemeClr val="tx1"/>
-                </a:solidFill>
-                <a:latin typeface="Arial" charset="0"/>
-                <a:ea typeface="ＭＳ Ｐゴシック" charset="-128"/>
-              </a:defRPr>
-            </a:lvl3pPr>
-            <a:lvl4pPr marL="1600200" indent="-228600" eaLnBrk="0" hangingPunct="0">
-              <a:defRPr sz="2400">
-                <a:solidFill>
-                  <a:schemeClr val="tx1"/>
-                </a:solidFill>
-                <a:latin typeface="Arial" charset="0"/>
-                <a:ea typeface="ＭＳ Ｐゴシック" charset="-128"/>
-              </a:defRPr>
-            </a:lvl4pPr>
-            <a:lvl5pPr marL="2057400" indent="-228600" eaLnBrk="0" hangingPunct="0">
-              <a:defRPr sz="2400">
-                <a:solidFill>
-                  <a:schemeClr val="tx1"/>
-                </a:solidFill>
-                <a:latin typeface="Arial" charset="0"/>
-                <a:ea typeface="ＭＳ Ｐゴシック" charset="-128"/>
-              </a:defRPr>
-            </a:lvl5pPr>
-            <a:lvl6pPr marL="2514600" indent="-228600" eaLnBrk="0" fontAlgn="base" hangingPunct="0">
-              <a:spcBef>
-                <a:spcPct val="0"/>
-              </a:spcBef>
-              <a:spcAft>
-                <a:spcPct val="0"/>
-              </a:spcAft>
-              <a:defRPr sz="2400">
-                <a:solidFill>
-                  <a:schemeClr val="tx1"/>
-                </a:solidFill>
-                <a:latin typeface="Arial" charset="0"/>
-                <a:ea typeface="ＭＳ Ｐゴシック" charset="-128"/>
-              </a:defRPr>
-            </a:lvl6pPr>
-            <a:lvl7pPr marL="2971800" indent="-228600" eaLnBrk="0" fontAlgn="base" hangingPunct="0">
-              <a:spcBef>
-                <a:spcPct val="0"/>
-              </a:spcBef>
-              <a:spcAft>
-                <a:spcPct val="0"/>
-              </a:spcAft>
-              <a:defRPr sz="2400">
-                <a:solidFill>
-                  <a:schemeClr val="tx1"/>
-                </a:solidFill>
-                <a:latin typeface="Arial" charset="0"/>
-                <a:ea typeface="ＭＳ Ｐゴシック" charset="-128"/>
-              </a:defRPr>
-            </a:lvl7pPr>
-            <a:lvl8pPr marL="3429000" indent="-228600" eaLnBrk="0" fontAlgn="base" hangingPunct="0">
-              <a:spcBef>
-                <a:spcPct val="0"/>
-              </a:spcBef>
-              <a:spcAft>
-                <a:spcPct val="0"/>
-              </a:spcAft>
-              <a:defRPr sz="2400">
-                <a:solidFill>
-                  <a:schemeClr val="tx1"/>
-                </a:solidFill>
-                <a:latin typeface="Arial" charset="0"/>
-                <a:ea typeface="ＭＳ Ｐゴシック" charset="-128"/>
-              </a:defRPr>
-            </a:lvl8pPr>
-            <a:lvl9pPr marL="3886200" indent="-228600" eaLnBrk="0" fontAlgn="base" hangingPunct="0">
-              <a:spcBef>
-                <a:spcPct val="0"/>
-              </a:spcBef>
-              <a:spcAft>
-                <a:spcPct val="0"/>
-              </a:spcAft>
-              <a:defRPr sz="2400">
-                <a:solidFill>
-                  <a:schemeClr val="tx1"/>
-                </a:solidFill>
-                <a:latin typeface="Arial" charset="0"/>
-                <a:ea typeface="ＭＳ Ｐゴシック" charset="-128"/>
-              </a:defRPr>
-            </a:lvl9pPr>
-          </a:lstStyle>
-          <a:p>
-            <a:pPr eaLnBrk="1" hangingPunct="1"/>
-            <a:r>
-              <a:rPr lang="en-US" altLang="x-none" sz="1200">
-                <a:latin typeface="Garamond" charset="0"/>
-              </a:rPr>
-              <a:t>22 October 2016</a:t>
-            </a:r>
-            <a:endParaRPr lang="it-IT" altLang="x-none" sz="1200">
-              <a:latin typeface="Garamond" charset="0"/>
-            </a:endParaRPr>
-          </a:p>
-        </p:txBody>
-      </p:sp>
-      <p:sp>
-        <p:nvSpPr>
-          <p:cNvPr id="30724" name="Footer Placeholder 4"/>
-          <p:cNvSpPr>
-            <a:spLocks noGrp="1"/>
-          </p:cNvSpPr>
-          <p:nvPr>
-            <p:ph type="ftr" sz="quarter" idx="11"/>
-          </p:nvPr>
-        </p:nvSpPr>
-        <p:spPr>
-          <a:noFill/>
-          <a:ln/>
-          <a:extLst>
-            <a:ext uri="{909E8E84-426E-40DD-AFC4-6F175D3DCCD1}">
-              <a14:hiddenFill xmlns:a14="http://schemas.microsoft.com/office/drawing/2010/main">
-                <a:solidFill>
-                  <a:srgbClr val="FFFFFF"/>
-                </a:solidFill>
-              </a14:hiddenFill>
-            </a:ext>
-            <a:ext uri="{91240B29-F687-4F45-9708-019B960494DF}">
-              <a14:hiddenLine xmlns:a14="http://schemas.microsoft.com/office/drawing/2010/main" w="9525">
-                <a:solidFill>
-                  <a:srgbClr val="000000"/>
-                </a:solidFill>
-                <a:miter lim="800000"/>
-                <a:headEnd/>
-                <a:tailEnd/>
-              </a14:hiddenLine>
-            </a:ext>
-          </a:extLst>
-        </p:spPr>
-        <p:txBody>
-          <a:bodyPr/>
-          <a:lstStyle>
-            <a:lvl1pPr eaLnBrk="0" hangingPunct="0">
-              <a:defRPr sz="2400">
-                <a:solidFill>
-                  <a:schemeClr val="tx1"/>
-                </a:solidFill>
-                <a:latin typeface="Arial" charset="0"/>
-                <a:ea typeface="ＭＳ Ｐゴシック" charset="-128"/>
-              </a:defRPr>
-            </a:lvl1pPr>
-            <a:lvl2pPr marL="742950" indent="-285750" eaLnBrk="0" hangingPunct="0">
-              <a:defRPr sz="2400">
-                <a:solidFill>
-                  <a:schemeClr val="tx1"/>
-                </a:solidFill>
-                <a:latin typeface="Arial" charset="0"/>
-                <a:ea typeface="ＭＳ Ｐゴシック" charset="-128"/>
-              </a:defRPr>
-            </a:lvl2pPr>
-            <a:lvl3pPr marL="1143000" indent="-228600" eaLnBrk="0" hangingPunct="0">
-              <a:defRPr sz="2400">
-                <a:solidFill>
-                  <a:schemeClr val="tx1"/>
-                </a:solidFill>
-                <a:latin typeface="Arial" charset="0"/>
-                <a:ea typeface="ＭＳ Ｐゴシック" charset="-128"/>
-              </a:defRPr>
-            </a:lvl3pPr>
-            <a:lvl4pPr marL="1600200" indent="-228600" eaLnBrk="0" hangingPunct="0">
-              <a:defRPr sz="2400">
-                <a:solidFill>
-                  <a:schemeClr val="tx1"/>
-                </a:solidFill>
-                <a:latin typeface="Arial" charset="0"/>
-                <a:ea typeface="ＭＳ Ｐゴシック" charset="-128"/>
-              </a:defRPr>
-            </a:lvl4pPr>
-            <a:lvl5pPr marL="2057400" indent="-228600" eaLnBrk="0" hangingPunct="0">
-              <a:defRPr sz="2400">
-                <a:solidFill>
-                  <a:schemeClr val="tx1"/>
-                </a:solidFill>
-                <a:latin typeface="Arial" charset="0"/>
-                <a:ea typeface="ＭＳ Ｐゴシック" charset="-128"/>
-              </a:defRPr>
-            </a:lvl5pPr>
-            <a:lvl6pPr marL="2514600" indent="-228600" eaLnBrk="0" fontAlgn="base" hangingPunct="0">
-              <a:spcBef>
-                <a:spcPct val="0"/>
-              </a:spcBef>
-              <a:spcAft>
-                <a:spcPct val="0"/>
-              </a:spcAft>
-              <a:defRPr sz="2400">
-                <a:solidFill>
-                  <a:schemeClr val="tx1"/>
-                </a:solidFill>
-                <a:latin typeface="Arial" charset="0"/>
-                <a:ea typeface="ＭＳ Ｐゴシック" charset="-128"/>
-              </a:defRPr>
-            </a:lvl6pPr>
-            <a:lvl7pPr marL="2971800" indent="-228600" eaLnBrk="0" fontAlgn="base" hangingPunct="0">
-              <a:spcBef>
-                <a:spcPct val="0"/>
-              </a:spcBef>
-              <a:spcAft>
-                <a:spcPct val="0"/>
-              </a:spcAft>
-              <a:defRPr sz="2400">
-                <a:solidFill>
-                  <a:schemeClr val="tx1"/>
-                </a:solidFill>
-                <a:latin typeface="Arial" charset="0"/>
-                <a:ea typeface="ＭＳ Ｐゴシック" charset="-128"/>
-              </a:defRPr>
-            </a:lvl7pPr>
-            <a:lvl8pPr marL="3429000" indent="-228600" eaLnBrk="0" fontAlgn="base" hangingPunct="0">
-              <a:spcBef>
-                <a:spcPct val="0"/>
-              </a:spcBef>
-              <a:spcAft>
-                <a:spcPct val="0"/>
-              </a:spcAft>
-              <a:defRPr sz="2400">
-                <a:solidFill>
-                  <a:schemeClr val="tx1"/>
-                </a:solidFill>
-                <a:latin typeface="Arial" charset="0"/>
-                <a:ea typeface="ＭＳ Ｐゴシック" charset="-128"/>
-              </a:defRPr>
-            </a:lvl8pPr>
-            <a:lvl9pPr marL="3886200" indent="-228600" eaLnBrk="0" fontAlgn="base" hangingPunct="0">
-              <a:spcBef>
-                <a:spcPct val="0"/>
-              </a:spcBef>
-              <a:spcAft>
-                <a:spcPct val="0"/>
-              </a:spcAft>
-              <a:defRPr sz="2400">
-                <a:solidFill>
-                  <a:schemeClr val="tx1"/>
-                </a:solidFill>
-                <a:latin typeface="Arial" charset="0"/>
-                <a:ea typeface="ＭＳ Ｐゴシック" charset="-128"/>
-              </a:defRPr>
-            </a:lvl9pPr>
-          </a:lstStyle>
-          <a:p>
-            <a:pPr eaLnBrk="1" hangingPunct="1"/>
-            <a:r>
-              <a:rPr lang="en-US" altLang="x-none" sz="1200">
-                <a:latin typeface="Garamond" charset="0"/>
-              </a:rPr>
-              <a:t>Vincenzo Innocente</a:t>
-            </a:r>
-            <a:endParaRPr lang="it-IT" altLang="x-none" sz="1200">
-              <a:latin typeface="Garamond" charset="0"/>
-            </a:endParaRPr>
-          </a:p>
-        </p:txBody>
-      </p:sp>
-      <p:sp>
-        <p:nvSpPr>
-          <p:cNvPr id="30725" name="Slide Number Placeholder 5"/>
-          <p:cNvSpPr>
-            <a:spLocks noGrp="1"/>
-          </p:cNvSpPr>
-          <p:nvPr>
-            <p:ph type="sldNum" sz="quarter" idx="12"/>
-          </p:nvPr>
-        </p:nvSpPr>
-        <p:spPr>
-          <a:noFill/>
-          <a:ln/>
-          <a:extLst>
-            <a:ext uri="{909E8E84-426E-40DD-AFC4-6F175D3DCCD1}">
-              <a14:hiddenFill xmlns:a14="http://schemas.microsoft.com/office/drawing/2010/main">
-                <a:solidFill>
-                  <a:srgbClr val="FFFFFF"/>
-                </a:solidFill>
-              </a14:hiddenFill>
-            </a:ext>
-            <a:ext uri="{91240B29-F687-4F45-9708-019B960494DF}">
-              <a14:hiddenLine xmlns:a14="http://schemas.microsoft.com/office/drawing/2010/main" w="9525">
-                <a:solidFill>
-                  <a:srgbClr val="000000"/>
-                </a:solidFill>
-                <a:miter lim="800000"/>
-                <a:headEnd/>
-                <a:tailEnd/>
-              </a14:hiddenLine>
-            </a:ext>
-          </a:extLst>
-        </p:spPr>
-        <p:txBody>
-          <a:bodyPr/>
-          <a:lstStyle>
-            <a:lvl1pPr eaLnBrk="0" hangingPunct="0">
-              <a:defRPr sz="2400">
-                <a:solidFill>
-                  <a:schemeClr val="tx1"/>
-                </a:solidFill>
-                <a:latin typeface="Arial" charset="0"/>
-                <a:ea typeface="ＭＳ Ｐゴシック" charset="-128"/>
-              </a:defRPr>
-            </a:lvl1pPr>
-            <a:lvl2pPr marL="742950" indent="-285750" eaLnBrk="0" hangingPunct="0">
-              <a:defRPr sz="2400">
-                <a:solidFill>
-                  <a:schemeClr val="tx1"/>
-                </a:solidFill>
-                <a:latin typeface="Arial" charset="0"/>
-                <a:ea typeface="ＭＳ Ｐゴシック" charset="-128"/>
-              </a:defRPr>
-            </a:lvl2pPr>
-            <a:lvl3pPr marL="1143000" indent="-228600" eaLnBrk="0" hangingPunct="0">
-              <a:defRPr sz="2400">
-                <a:solidFill>
-                  <a:schemeClr val="tx1"/>
-                </a:solidFill>
-                <a:latin typeface="Arial" charset="0"/>
-                <a:ea typeface="ＭＳ Ｐゴシック" charset="-128"/>
-              </a:defRPr>
-            </a:lvl3pPr>
-            <a:lvl4pPr marL="1600200" indent="-228600" eaLnBrk="0" hangingPunct="0">
-              <a:defRPr sz="2400">
-                <a:solidFill>
-                  <a:schemeClr val="tx1"/>
-                </a:solidFill>
-                <a:latin typeface="Arial" charset="0"/>
-                <a:ea typeface="ＭＳ Ｐゴシック" charset="-128"/>
-              </a:defRPr>
-            </a:lvl4pPr>
-            <a:lvl5pPr marL="2057400" indent="-228600" eaLnBrk="0" hangingPunct="0">
-              <a:defRPr sz="2400">
-                <a:solidFill>
-                  <a:schemeClr val="tx1"/>
-                </a:solidFill>
-                <a:latin typeface="Arial" charset="0"/>
-                <a:ea typeface="ＭＳ Ｐゴシック" charset="-128"/>
-              </a:defRPr>
-            </a:lvl5pPr>
-            <a:lvl6pPr marL="2514600" indent="-228600" eaLnBrk="0" fontAlgn="base" hangingPunct="0">
-              <a:spcBef>
-                <a:spcPct val="0"/>
-              </a:spcBef>
-              <a:spcAft>
-                <a:spcPct val="0"/>
-              </a:spcAft>
-              <a:defRPr sz="2400">
-                <a:solidFill>
-                  <a:schemeClr val="tx1"/>
-                </a:solidFill>
-                <a:latin typeface="Arial" charset="0"/>
-                <a:ea typeface="ＭＳ Ｐゴシック" charset="-128"/>
-              </a:defRPr>
-            </a:lvl6pPr>
-            <a:lvl7pPr marL="2971800" indent="-228600" eaLnBrk="0" fontAlgn="base" hangingPunct="0">
-              <a:spcBef>
-                <a:spcPct val="0"/>
-              </a:spcBef>
-              <a:spcAft>
-                <a:spcPct val="0"/>
-              </a:spcAft>
-              <a:defRPr sz="2400">
-                <a:solidFill>
-                  <a:schemeClr val="tx1"/>
-                </a:solidFill>
-                <a:latin typeface="Arial" charset="0"/>
-                <a:ea typeface="ＭＳ Ｐゴシック" charset="-128"/>
-              </a:defRPr>
-            </a:lvl7pPr>
-            <a:lvl8pPr marL="3429000" indent="-228600" eaLnBrk="0" fontAlgn="base" hangingPunct="0">
-              <a:spcBef>
-                <a:spcPct val="0"/>
-              </a:spcBef>
-              <a:spcAft>
-                <a:spcPct val="0"/>
-              </a:spcAft>
-              <a:defRPr sz="2400">
-                <a:solidFill>
-                  <a:schemeClr val="tx1"/>
-                </a:solidFill>
-                <a:latin typeface="Arial" charset="0"/>
-                <a:ea typeface="ＭＳ Ｐゴシック" charset="-128"/>
-              </a:defRPr>
-            </a:lvl8pPr>
-            <a:lvl9pPr marL="3886200" indent="-228600" eaLnBrk="0" fontAlgn="base" hangingPunct="0">
-              <a:spcBef>
-                <a:spcPct val="0"/>
-              </a:spcBef>
-              <a:spcAft>
-                <a:spcPct val="0"/>
-              </a:spcAft>
-              <a:defRPr sz="2400">
-                <a:solidFill>
-                  <a:schemeClr val="tx1"/>
-                </a:solidFill>
-                <a:latin typeface="Arial" charset="0"/>
-                <a:ea typeface="ＭＳ Ｐゴシック" charset="-128"/>
-              </a:defRPr>
-            </a:lvl9pPr>
-          </a:lstStyle>
-          <a:p>
-            <a:pPr eaLnBrk="1" hangingPunct="1"/>
-            <a:fld id="{016689D5-6FA2-274B-8EB3-26E90C03259E}" type="slidenum">
-              <a:rPr lang="it-IT" altLang="x-none" sz="1200">
-                <a:latin typeface="Garamond" charset="0"/>
-              </a:rPr>
-              <a:pPr eaLnBrk="1" hangingPunct="1"/>
-              <a:t>5</a:t>
-            </a:fld>
-            <a:endParaRPr lang="it-IT" altLang="x-none" sz="1200">
-              <a:latin typeface="Garamond" charset="0"/>
-            </a:endParaRPr>
           </a:p>
         </p:txBody>
       </p:sp>

--- a/Slides/FPforScientist.pptx
+++ b/Slides/FPforScientist.pptx
@@ -53,9 +53,12 @@
     <p:sldId id="397" r:id="rId47"/>
     <p:sldId id="265" r:id="rId48"/>
     <p:sldId id="483" r:id="rId49"/>
-    <p:sldId id="484" r:id="rId50"/>
-    <p:sldId id="365" r:id="rId51"/>
-    <p:sldId id="393" r:id="rId52"/>
+    <p:sldId id="485" r:id="rId50"/>
+    <p:sldId id="486" r:id="rId51"/>
+    <p:sldId id="487" r:id="rId52"/>
+    <p:sldId id="484" r:id="rId53"/>
+    <p:sldId id="365" r:id="rId54"/>
+    <p:sldId id="393" r:id="rId55"/>
   </p:sldIdLst>
   <p:sldSz cx="12192000" cy="6858000"/>
   <p:notesSz cx="6858000" cy="9144000"/>
@@ -38599,10 +38602,9 @@
                     <a:lstStyle/>
                     <a:p>
                       <a:r>
-                        <a:rPr lang="en-US"/>
+                        <a:rPr lang="en-US" dirty="0"/>
                         <a:t>53</a:t>
                       </a:r>
-                      <a:endParaRPr lang="en-US" dirty="0"/>
                     </a:p>
                   </a:txBody>
                   <a:tcPr/>
@@ -38841,10 +38843,10 @@
       </p:grpSpPr>
       <p:sp>
         <p:nvSpPr>
-          <p:cNvPr id="5" name="Title 4">
+          <p:cNvPr id="2" name="Title 1">
             <a:extLst>
               <a:ext uri="{FF2B5EF4-FFF2-40B4-BE49-F238E27FC236}">
-                <a16:creationId xmlns:a16="http://schemas.microsoft.com/office/drawing/2014/main" id="{913FDDA4-89B5-877D-93D4-1990C58F6428}"/>
+                <a16:creationId xmlns:a16="http://schemas.microsoft.com/office/drawing/2014/main" id="{70E05F96-FA60-9B0C-1DB9-F8EEDD322DD9}"/>
               </a:ext>
             </a:extLst>
           </p:cNvPr>
@@ -38855,48 +38857,212 @@
             <p:ph type="title"/>
           </p:nvPr>
         </p:nvSpPr>
-        <p:spPr/>
+        <p:spPr>
+          <a:xfrm>
+            <a:off x="838200" y="141730"/>
+            <a:ext cx="10515600" cy="1325563"/>
+          </a:xfrm>
+        </p:spPr>
         <p:txBody>
-          <a:bodyPr/>
+          <a:bodyPr>
+            <a:normAutofit/>
+          </a:bodyPr>
           <a:lstStyle/>
           <a:p>
             <a:r>
-              <a:rPr lang="en-US" dirty="0" err="1"/>
-              <a:t>Anedocts</a:t>
+              <a:rPr lang="en-US" dirty="0"/>
+              <a:t>Example: CMS tracker</a:t>
+            </a:r>
+            <a:br>
+              <a:rPr lang="en-US" dirty="0"/>
+            </a:br>
+            <a:r>
+              <a:rPr lang="en-US" sz="3100" dirty="0">
+                <a:hlinkClick r:id="rId2"/>
+              </a:rPr>
+              <a:t>https://cms-tklayout.web.cern.ch/cmssw/OT806_IT742/info.html</a:t>
             </a:r>
             <a:endParaRPr lang="en-US" dirty="0"/>
           </a:p>
         </p:txBody>
       </p:sp>
-      <p:sp>
-        <p:nvSpPr>
-          <p:cNvPr id="6" name="Text Placeholder 5">
+      <p:pic>
+        <p:nvPicPr>
+          <p:cNvPr id="11266" name="Picture 2">
             <a:extLst>
               <a:ext uri="{FF2B5EF4-FFF2-40B4-BE49-F238E27FC236}">
-                <a16:creationId xmlns:a16="http://schemas.microsoft.com/office/drawing/2014/main" id="{9F1F237B-8A95-38B2-933F-ABFB35AAB7FB}"/>
+                <a16:creationId xmlns:a16="http://schemas.microsoft.com/office/drawing/2014/main" id="{120FDB2D-A0A4-C240-D275-1539E67F544B}"/>
               </a:ext>
             </a:extLst>
           </p:cNvPr>
-          <p:cNvSpPr>
-            <a:spLocks noGrp="1"/>
-          </p:cNvSpPr>
-          <p:nvPr>
-            <p:ph type="body" idx="1"/>
-          </p:nvPr>
+          <p:cNvPicPr>
+            <a:picLocks noChangeAspect="1" noChangeArrowheads="1"/>
+          </p:cNvPicPr>
+          <p:nvPr/>
+        </p:nvPicPr>
+        <p:blipFill>
+          <a:blip r:embed="rId3">
+            <a:extLst>
+              <a:ext uri="{28A0092B-C50C-407E-A947-70E740481C1C}">
+                <a14:useLocalDpi xmlns:a14="http://schemas.microsoft.com/office/drawing/2010/main" val="0"/>
+              </a:ext>
+            </a:extLst>
+          </a:blip>
+          <a:srcRect/>
+          <a:stretch>
+            <a:fillRect/>
+          </a:stretch>
+        </p:blipFill>
+        <p:spPr bwMode="auto">
+          <a:xfrm>
+            <a:off x="3476846" y="1775749"/>
+            <a:ext cx="7396717" cy="2465573"/>
+          </a:xfrm>
+          <a:prstGeom prst="rect">
+            <a:avLst/>
+          </a:prstGeom>
+          <a:noFill/>
+          <a:extLst>
+            <a:ext uri="{909E8E84-426E-40DD-AFC4-6F175D3DCCD1}">
+              <a14:hiddenFill xmlns:a14="http://schemas.microsoft.com/office/drawing/2010/main">
+                <a:solidFill>
+                  <a:srgbClr val="FFFFFF"/>
+                </a:solidFill>
+              </a14:hiddenFill>
+            </a:ext>
+          </a:extLst>
+        </p:spPr>
+      </p:pic>
+      <p:pic>
+        <p:nvPicPr>
+          <p:cNvPr id="11268" name="Picture 4">
+            <a:extLst>
+              <a:ext uri="{FF2B5EF4-FFF2-40B4-BE49-F238E27FC236}">
+                <a16:creationId xmlns:a16="http://schemas.microsoft.com/office/drawing/2014/main" id="{18AFFAC5-1116-4C6B-D799-E44512644139}"/>
+              </a:ext>
+            </a:extLst>
+          </p:cNvPr>
+          <p:cNvPicPr>
+            <a:picLocks noChangeAspect="1" noChangeArrowheads="1"/>
+          </p:cNvPicPr>
+          <p:nvPr/>
+        </p:nvPicPr>
+        <p:blipFill>
+          <a:blip r:embed="rId4">
+            <a:extLst>
+              <a:ext uri="{28A0092B-C50C-407E-A947-70E740481C1C}">
+                <a14:useLocalDpi xmlns:a14="http://schemas.microsoft.com/office/drawing/2010/main" val="0"/>
+              </a:ext>
+            </a:extLst>
+          </a:blip>
+          <a:srcRect/>
+          <a:stretch>
+            <a:fillRect/>
+          </a:stretch>
+        </p:blipFill>
+        <p:spPr bwMode="auto">
+          <a:xfrm>
+            <a:off x="838201" y="1552354"/>
+            <a:ext cx="2775098" cy="2775098"/>
+          </a:xfrm>
+          <a:prstGeom prst="rect">
+            <a:avLst/>
+          </a:prstGeom>
+          <a:noFill/>
+          <a:extLst>
+            <a:ext uri="{909E8E84-426E-40DD-AFC4-6F175D3DCCD1}">
+              <a14:hiddenFill xmlns:a14="http://schemas.microsoft.com/office/drawing/2010/main">
+                <a:solidFill>
+                  <a:srgbClr val="FFFFFF"/>
+                </a:solidFill>
+              </a14:hiddenFill>
+            </a:ext>
+          </a:extLst>
+        </p:spPr>
+      </p:pic>
+      <p:sp>
+        <p:nvSpPr>
+          <p:cNvPr id="3" name="TextBox 2">
+            <a:extLst>
+              <a:ext uri="{FF2B5EF4-FFF2-40B4-BE49-F238E27FC236}">
+                <a16:creationId xmlns:a16="http://schemas.microsoft.com/office/drawing/2014/main" id="{AA2F28B3-807A-F852-A8FD-7F09A1F98605}"/>
+              </a:ext>
+            </a:extLst>
+          </p:cNvPr>
+          <p:cNvSpPr txBox="1"/>
+          <p:nvPr/>
         </p:nvSpPr>
-        <p:spPr/>
+        <p:spPr>
+          <a:xfrm>
+            <a:off x="340240" y="4326383"/>
+            <a:ext cx="4954773" cy="923330"/>
+          </a:xfrm>
+          <a:prstGeom prst="rect">
+            <a:avLst/>
+          </a:prstGeom>
+          <a:noFill/>
+        </p:spPr>
         <p:txBody>
-          <a:bodyPr/>
+          <a:bodyPr wrap="square" rtlCol="0">
+            <a:spAutoFit/>
+          </a:bodyPr>
           <a:lstStyle/>
           <a:p>
-            <a:endParaRPr lang="en-US"/>
+            <a:r>
+              <a:rPr lang="en-US" dirty="0"/>
+              <a:t>Spatial resolution: (alignment error to be added)</a:t>
+            </a:r>
+          </a:p>
+          <a:p>
+            <a:r>
+              <a:rPr lang="en-US" dirty="0"/>
+              <a:t>IT:   σ</a:t>
+            </a:r>
+            <a:r>
+              <a:rPr lang="en-US" baseline="-25000" dirty="0"/>
+              <a:t>x</a:t>
+            </a:r>
+            <a:r>
+              <a:rPr lang="en-US" dirty="0"/>
+              <a:t>~3μ σ</a:t>
+            </a:r>
+            <a:r>
+              <a:rPr lang="en-US" baseline="-25000" dirty="0"/>
+              <a:t>z</a:t>
+            </a:r>
+            <a:r>
+              <a:rPr lang="en-US" dirty="0"/>
+              <a:t>~10μ  at r&lt;15cm |z|&lt;20cm</a:t>
+            </a:r>
+          </a:p>
+          <a:p>
+            <a:r>
+              <a:rPr lang="en-US" dirty="0"/>
+              <a:t>OT: σ</a:t>
+            </a:r>
+            <a:r>
+              <a:rPr lang="en-US" baseline="-25000" dirty="0"/>
+              <a:t>x</a:t>
+            </a:r>
+            <a:r>
+              <a:rPr lang="en-US" dirty="0"/>
+              <a:t>~20μ σ</a:t>
+            </a:r>
+            <a:r>
+              <a:rPr lang="en-US" baseline="-25000" dirty="0"/>
+              <a:t>z</a:t>
+            </a:r>
+            <a:r>
+              <a:rPr lang="en-US" dirty="0"/>
+              <a:t>~425μ  at r&lt;120cm |z|&lt;130cm</a:t>
+            </a:r>
           </a:p>
         </p:txBody>
       </p:sp>
     </p:spTree>
     <p:extLst>
       <p:ext uri="{BB962C8B-B14F-4D97-AF65-F5344CB8AC3E}">
-        <p14:creationId xmlns:p14="http://schemas.microsoft.com/office/powerpoint/2010/main" val="772502209"/>
+        <p14:creationId xmlns:p14="http://schemas.microsoft.com/office/powerpoint/2010/main" val="2395580207"/>
       </p:ext>
     </p:extLst>
   </p:cSld>
@@ -39603,6 +39769,544 @@
       </p:grpSpPr>
       <p:sp>
         <p:nvSpPr>
+          <p:cNvPr id="2" name="Title 1">
+            <a:extLst>
+              <a:ext uri="{FF2B5EF4-FFF2-40B4-BE49-F238E27FC236}">
+                <a16:creationId xmlns:a16="http://schemas.microsoft.com/office/drawing/2014/main" id="{06E6581C-82E0-8D16-FA39-E76292CC7C98}"/>
+              </a:ext>
+            </a:extLst>
+          </p:cNvPr>
+          <p:cNvSpPr>
+            <a:spLocks noGrp="1"/>
+          </p:cNvSpPr>
+          <p:nvPr>
+            <p:ph type="title"/>
+          </p:nvPr>
+        </p:nvSpPr>
+        <p:spPr/>
+        <p:txBody>
+          <a:bodyPr/>
+          <a:lstStyle/>
+          <a:p>
+            <a:r>
+              <a:rPr lang="en-US" dirty="0"/>
+              <a:t>Track resolution </a:t>
+            </a:r>
+          </a:p>
+        </p:txBody>
+      </p:sp>
+      <p:pic>
+        <p:nvPicPr>
+          <p:cNvPr id="3" name="Picture 2">
+            <a:extLst>
+              <a:ext uri="{FF2B5EF4-FFF2-40B4-BE49-F238E27FC236}">
+                <a16:creationId xmlns:a16="http://schemas.microsoft.com/office/drawing/2014/main" id="{E9C3916E-4368-4D92-4FE0-0A2A1BD5D8B8}"/>
+              </a:ext>
+            </a:extLst>
+          </p:cNvPr>
+          <p:cNvPicPr>
+            <a:picLocks noChangeAspect="1"/>
+          </p:cNvPicPr>
+          <p:nvPr/>
+        </p:nvPicPr>
+        <p:blipFill>
+          <a:blip r:embed="rId2"/>
+          <a:stretch>
+            <a:fillRect/>
+          </a:stretch>
+        </p:blipFill>
+        <p:spPr>
+          <a:xfrm>
+            <a:off x="6922977" y="137266"/>
+            <a:ext cx="5384800" cy="1993900"/>
+          </a:xfrm>
+          <a:prstGeom prst="rect">
+            <a:avLst/>
+          </a:prstGeom>
+        </p:spPr>
+      </p:pic>
+      <p:pic>
+        <p:nvPicPr>
+          <p:cNvPr id="12290" name="Picture 2">
+            <a:extLst>
+              <a:ext uri="{FF2B5EF4-FFF2-40B4-BE49-F238E27FC236}">
+                <a16:creationId xmlns:a16="http://schemas.microsoft.com/office/drawing/2014/main" id="{1AC6E908-414B-B976-A5C5-E78C1039299C}"/>
+              </a:ext>
+            </a:extLst>
+          </p:cNvPr>
+          <p:cNvPicPr>
+            <a:picLocks noChangeAspect="1" noChangeArrowheads="1"/>
+          </p:cNvPicPr>
+          <p:nvPr/>
+        </p:nvPicPr>
+        <p:blipFill>
+          <a:blip r:embed="rId3">
+            <a:extLst>
+              <a:ext uri="{28A0092B-C50C-407E-A947-70E740481C1C}">
+                <a14:useLocalDpi xmlns:a14="http://schemas.microsoft.com/office/drawing/2010/main" val="0"/>
+              </a:ext>
+            </a:extLst>
+          </a:blip>
+          <a:srcRect/>
+          <a:stretch>
+            <a:fillRect/>
+          </a:stretch>
+        </p:blipFill>
+        <p:spPr bwMode="auto">
+          <a:xfrm>
+            <a:off x="6369" y="1918547"/>
+            <a:ext cx="4325343" cy="2883562"/>
+          </a:xfrm>
+          <a:prstGeom prst="rect">
+            <a:avLst/>
+          </a:prstGeom>
+          <a:noFill/>
+          <a:extLst>
+            <a:ext uri="{909E8E84-426E-40DD-AFC4-6F175D3DCCD1}">
+              <a14:hiddenFill xmlns:a14="http://schemas.microsoft.com/office/drawing/2010/main">
+                <a:solidFill>
+                  <a:srgbClr val="FFFFFF"/>
+                </a:solidFill>
+              </a14:hiddenFill>
+            </a:ext>
+          </a:extLst>
+        </p:spPr>
+      </p:pic>
+      <p:pic>
+        <p:nvPicPr>
+          <p:cNvPr id="12294" name="Picture 6">
+            <a:extLst>
+              <a:ext uri="{FF2B5EF4-FFF2-40B4-BE49-F238E27FC236}">
+                <a16:creationId xmlns:a16="http://schemas.microsoft.com/office/drawing/2014/main" id="{9CF9420D-CFC5-F39E-7FA4-6D6BD06D0FF2}"/>
+              </a:ext>
+            </a:extLst>
+          </p:cNvPr>
+          <p:cNvPicPr>
+            <a:picLocks noChangeAspect="1" noChangeArrowheads="1"/>
+          </p:cNvPicPr>
+          <p:nvPr/>
+        </p:nvPicPr>
+        <p:blipFill>
+          <a:blip r:embed="rId4">
+            <a:extLst>
+              <a:ext uri="{28A0092B-C50C-407E-A947-70E740481C1C}">
+                <a14:useLocalDpi xmlns:a14="http://schemas.microsoft.com/office/drawing/2010/main" val="0"/>
+              </a:ext>
+            </a:extLst>
+          </a:blip>
+          <a:srcRect/>
+          <a:stretch>
+            <a:fillRect/>
+          </a:stretch>
+        </p:blipFill>
+        <p:spPr bwMode="auto">
+          <a:xfrm>
+            <a:off x="3945695" y="1965878"/>
+            <a:ext cx="4325343" cy="2883562"/>
+          </a:xfrm>
+          <a:prstGeom prst="rect">
+            <a:avLst/>
+          </a:prstGeom>
+          <a:noFill/>
+          <a:extLst>
+            <a:ext uri="{909E8E84-426E-40DD-AFC4-6F175D3DCCD1}">
+              <a14:hiddenFill xmlns:a14="http://schemas.microsoft.com/office/drawing/2010/main">
+                <a:solidFill>
+                  <a:srgbClr val="FFFFFF"/>
+                </a:solidFill>
+              </a14:hiddenFill>
+            </a:ext>
+          </a:extLst>
+        </p:spPr>
+      </p:pic>
+      <p:pic>
+        <p:nvPicPr>
+          <p:cNvPr id="12296" name="Picture 8">
+            <a:extLst>
+              <a:ext uri="{FF2B5EF4-FFF2-40B4-BE49-F238E27FC236}">
+                <a16:creationId xmlns:a16="http://schemas.microsoft.com/office/drawing/2014/main" id="{8E06164F-8C16-E128-B842-56109EC9F224}"/>
+              </a:ext>
+            </a:extLst>
+          </p:cNvPr>
+          <p:cNvPicPr>
+            <a:picLocks noChangeAspect="1" noChangeArrowheads="1"/>
+          </p:cNvPicPr>
+          <p:nvPr/>
+        </p:nvPicPr>
+        <p:blipFill>
+          <a:blip r:embed="rId5">
+            <a:extLst>
+              <a:ext uri="{28A0092B-C50C-407E-A947-70E740481C1C}">
+                <a14:useLocalDpi xmlns:a14="http://schemas.microsoft.com/office/drawing/2010/main" val="0"/>
+              </a:ext>
+            </a:extLst>
+          </a:blip>
+          <a:srcRect/>
+          <a:stretch>
+            <a:fillRect/>
+          </a:stretch>
+        </p:blipFill>
+        <p:spPr bwMode="auto">
+          <a:xfrm>
+            <a:off x="7860289" y="2066758"/>
+            <a:ext cx="4447488" cy="2964992"/>
+          </a:xfrm>
+          <a:prstGeom prst="rect">
+            <a:avLst/>
+          </a:prstGeom>
+          <a:noFill/>
+          <a:extLst>
+            <a:ext uri="{909E8E84-426E-40DD-AFC4-6F175D3DCCD1}">
+              <a14:hiddenFill xmlns:a14="http://schemas.microsoft.com/office/drawing/2010/main">
+                <a:solidFill>
+                  <a:srgbClr val="FFFFFF"/>
+                </a:solidFill>
+              </a14:hiddenFill>
+            </a:ext>
+          </a:extLst>
+        </p:spPr>
+      </p:pic>
+      <p:sp>
+        <p:nvSpPr>
+          <p:cNvPr id="4" name="TextBox 3">
+            <a:extLst>
+              <a:ext uri="{FF2B5EF4-FFF2-40B4-BE49-F238E27FC236}">
+                <a16:creationId xmlns:a16="http://schemas.microsoft.com/office/drawing/2014/main" id="{0CC684E8-33F7-FE45-48F9-262528C600AF}"/>
+              </a:ext>
+            </a:extLst>
+          </p:cNvPr>
+          <p:cNvSpPr txBox="1"/>
+          <p:nvPr/>
+        </p:nvSpPr>
+        <p:spPr>
+          <a:xfrm>
+            <a:off x="868326" y="2277509"/>
+            <a:ext cx="1217000" cy="923330"/>
+          </a:xfrm>
+          <a:prstGeom prst="rect">
+            <a:avLst/>
+          </a:prstGeom>
+          <a:noFill/>
+        </p:spPr>
+        <p:txBody>
+          <a:bodyPr wrap="none" rtlCol="0">
+            <a:spAutoFit/>
+          </a:bodyPr>
+          <a:lstStyle/>
+          <a:p>
+            <a:pPr marL="285750" indent="-285750">
+              <a:buFontTx/>
+              <a:buChar char="-"/>
+            </a:pPr>
+            <a:r>
+              <a:rPr lang="en-US" dirty="0"/>
+              <a:t>1Gev</a:t>
+            </a:r>
+          </a:p>
+          <a:p>
+            <a:pPr marL="285750" indent="-285750">
+              <a:buFontTx/>
+              <a:buChar char="-"/>
+            </a:pPr>
+            <a:r>
+              <a:rPr lang="en-US" dirty="0">
+                <a:solidFill>
+                  <a:srgbClr val="0070C0"/>
+                </a:solidFill>
+              </a:rPr>
+              <a:t>10GeV</a:t>
+            </a:r>
+          </a:p>
+          <a:p>
+            <a:pPr marL="285750" indent="-285750">
+              <a:buFontTx/>
+              <a:buChar char="-"/>
+            </a:pPr>
+            <a:r>
+              <a:rPr lang="en-US" dirty="0">
+                <a:solidFill>
+                  <a:srgbClr val="FF0000"/>
+                </a:solidFill>
+              </a:rPr>
+              <a:t>100GeV</a:t>
+            </a:r>
+          </a:p>
+        </p:txBody>
+      </p:sp>
+    </p:spTree>
+    <p:extLst>
+      <p:ext uri="{BB962C8B-B14F-4D97-AF65-F5344CB8AC3E}">
+        <p14:creationId xmlns:p14="http://schemas.microsoft.com/office/powerpoint/2010/main" val="317313784"/>
+      </p:ext>
+    </p:extLst>
+  </p:cSld>
+  <p:clrMapOvr>
+    <a:masterClrMapping/>
+  </p:clrMapOvr>
+</p:sld>
+</file>
+
+<file path=ppt/slides/slide51.xml><?xml version="1.0" encoding="utf-8"?>
+<p:sld xmlns:a="http://schemas.openxmlformats.org/drawingml/2006/main" xmlns:r="http://schemas.openxmlformats.org/officeDocument/2006/relationships" xmlns:p="http://schemas.openxmlformats.org/presentationml/2006/main">
+  <p:cSld>
+    <p:spTree>
+      <p:nvGrpSpPr>
+        <p:cNvPr id="1" name=""/>
+        <p:cNvGrpSpPr/>
+        <p:nvPr/>
+      </p:nvGrpSpPr>
+      <p:grpSpPr>
+        <a:xfrm>
+          <a:off x="0" y="0"/>
+          <a:ext cx="0" cy="0"/>
+          <a:chOff x="0" y="0"/>
+          <a:chExt cx="0" cy="0"/>
+        </a:xfrm>
+      </p:grpSpPr>
+      <p:sp>
+        <p:nvSpPr>
+          <p:cNvPr id="2" name="Title 1">
+            <a:extLst>
+              <a:ext uri="{FF2B5EF4-FFF2-40B4-BE49-F238E27FC236}">
+                <a16:creationId xmlns:a16="http://schemas.microsoft.com/office/drawing/2014/main" id="{55EFFB8E-82F8-EF95-7B40-FF6E1C138600}"/>
+              </a:ext>
+            </a:extLst>
+          </p:cNvPr>
+          <p:cNvSpPr>
+            <a:spLocks noGrp="1"/>
+          </p:cNvSpPr>
+          <p:nvPr>
+            <p:ph type="title"/>
+          </p:nvPr>
+        </p:nvSpPr>
+        <p:spPr/>
+        <p:txBody>
+          <a:bodyPr/>
+          <a:lstStyle/>
+          <a:p>
+            <a:r>
+              <a:rPr lang="en-US" dirty="0"/>
+              <a:t>Example: CMS Electromagnetic </a:t>
+            </a:r>
+            <a:r>
+              <a:rPr lang="en-US" dirty="0" err="1"/>
+              <a:t>Calorimiter</a:t>
+            </a:r>
+            <a:endParaRPr lang="en-US" dirty="0"/>
+          </a:p>
+        </p:txBody>
+      </p:sp>
+      <p:pic>
+        <p:nvPicPr>
+          <p:cNvPr id="3" name="Picture 2">
+            <a:extLst>
+              <a:ext uri="{FF2B5EF4-FFF2-40B4-BE49-F238E27FC236}">
+                <a16:creationId xmlns:a16="http://schemas.microsoft.com/office/drawing/2014/main" id="{C6F9D161-A33C-BFA5-F0C8-F49A9386BB34}"/>
+              </a:ext>
+            </a:extLst>
+          </p:cNvPr>
+          <p:cNvPicPr>
+            <a:picLocks noChangeAspect="1"/>
+          </p:cNvPicPr>
+          <p:nvPr/>
+        </p:nvPicPr>
+        <p:blipFill>
+          <a:blip r:embed="rId2"/>
+          <a:stretch>
+            <a:fillRect/>
+          </a:stretch>
+        </p:blipFill>
+        <p:spPr>
+          <a:xfrm>
+            <a:off x="496776" y="1733546"/>
+            <a:ext cx="4447363" cy="3113154"/>
+          </a:xfrm>
+          <a:prstGeom prst="rect">
+            <a:avLst/>
+          </a:prstGeom>
+        </p:spPr>
+      </p:pic>
+      <p:sp>
+        <p:nvSpPr>
+          <p:cNvPr id="4" name="TextBox 3">
+            <a:extLst>
+              <a:ext uri="{FF2B5EF4-FFF2-40B4-BE49-F238E27FC236}">
+                <a16:creationId xmlns:a16="http://schemas.microsoft.com/office/drawing/2014/main" id="{316047C5-E321-4DA3-3868-82E182D2678C}"/>
+              </a:ext>
+            </a:extLst>
+          </p:cNvPr>
+          <p:cNvSpPr txBox="1"/>
+          <p:nvPr/>
+        </p:nvSpPr>
+        <p:spPr>
+          <a:xfrm>
+            <a:off x="1484382" y="1349330"/>
+            <a:ext cx="1873462" cy="369332"/>
+          </a:xfrm>
+          <a:prstGeom prst="rect">
+            <a:avLst/>
+          </a:prstGeom>
+          <a:noFill/>
+        </p:spPr>
+        <p:txBody>
+          <a:bodyPr wrap="none" rtlCol="0">
+            <a:spAutoFit/>
+          </a:bodyPr>
+          <a:lstStyle/>
+          <a:p>
+            <a:r>
+              <a:rPr lang="en-US" dirty="0"/>
+              <a:t>Energy Resolution</a:t>
+            </a:r>
+          </a:p>
+        </p:txBody>
+      </p:sp>
+      <p:pic>
+        <p:nvPicPr>
+          <p:cNvPr id="5" name="Picture 4">
+            <a:extLst>
+              <a:ext uri="{FF2B5EF4-FFF2-40B4-BE49-F238E27FC236}">
+                <a16:creationId xmlns:a16="http://schemas.microsoft.com/office/drawing/2014/main" id="{D10E29F5-31E7-42E9-7BC5-937783976417}"/>
+              </a:ext>
+            </a:extLst>
+          </p:cNvPr>
+          <p:cNvPicPr>
+            <a:picLocks noChangeAspect="1"/>
+          </p:cNvPicPr>
+          <p:nvPr/>
+        </p:nvPicPr>
+        <p:blipFill>
+          <a:blip r:embed="rId3"/>
+          <a:stretch>
+            <a:fillRect/>
+          </a:stretch>
+        </p:blipFill>
+        <p:spPr>
+          <a:xfrm>
+            <a:off x="5196239" y="1420511"/>
+            <a:ext cx="3382435" cy="3469047"/>
+          </a:xfrm>
+          <a:prstGeom prst="rect">
+            <a:avLst/>
+          </a:prstGeom>
+        </p:spPr>
+      </p:pic>
+    </p:spTree>
+    <p:extLst>
+      <p:ext uri="{BB962C8B-B14F-4D97-AF65-F5344CB8AC3E}">
+        <p14:creationId xmlns:p14="http://schemas.microsoft.com/office/powerpoint/2010/main" val="1090804787"/>
+      </p:ext>
+    </p:extLst>
+  </p:cSld>
+  <p:clrMapOvr>
+    <a:masterClrMapping/>
+  </p:clrMapOvr>
+</p:sld>
+</file>
+
+<file path=ppt/slides/slide52.xml><?xml version="1.0" encoding="utf-8"?>
+<p:sld xmlns:a="http://schemas.openxmlformats.org/drawingml/2006/main" xmlns:r="http://schemas.openxmlformats.org/officeDocument/2006/relationships" xmlns:p="http://schemas.openxmlformats.org/presentationml/2006/main">
+  <p:cSld>
+    <p:spTree>
+      <p:nvGrpSpPr>
+        <p:cNvPr id="1" name=""/>
+        <p:cNvGrpSpPr/>
+        <p:nvPr/>
+      </p:nvGrpSpPr>
+      <p:grpSpPr>
+        <a:xfrm>
+          <a:off x="0" y="0"/>
+          <a:ext cx="0" cy="0"/>
+          <a:chOff x="0" y="0"/>
+          <a:chExt cx="0" cy="0"/>
+        </a:xfrm>
+      </p:grpSpPr>
+      <p:sp>
+        <p:nvSpPr>
+          <p:cNvPr id="5" name="Title 4">
+            <a:extLst>
+              <a:ext uri="{FF2B5EF4-FFF2-40B4-BE49-F238E27FC236}">
+                <a16:creationId xmlns:a16="http://schemas.microsoft.com/office/drawing/2014/main" id="{913FDDA4-89B5-877D-93D4-1990C58F6428}"/>
+              </a:ext>
+            </a:extLst>
+          </p:cNvPr>
+          <p:cNvSpPr>
+            <a:spLocks noGrp="1"/>
+          </p:cNvSpPr>
+          <p:nvPr>
+            <p:ph type="title"/>
+          </p:nvPr>
+        </p:nvSpPr>
+        <p:spPr/>
+        <p:txBody>
+          <a:bodyPr/>
+          <a:lstStyle/>
+          <a:p>
+            <a:r>
+              <a:rPr lang="en-US" dirty="0" err="1"/>
+              <a:t>Anedocts</a:t>
+            </a:r>
+            <a:endParaRPr lang="en-US" dirty="0"/>
+          </a:p>
+        </p:txBody>
+      </p:sp>
+      <p:sp>
+        <p:nvSpPr>
+          <p:cNvPr id="6" name="Text Placeholder 5">
+            <a:extLst>
+              <a:ext uri="{FF2B5EF4-FFF2-40B4-BE49-F238E27FC236}">
+                <a16:creationId xmlns:a16="http://schemas.microsoft.com/office/drawing/2014/main" id="{9F1F237B-8A95-38B2-933F-ABFB35AAB7FB}"/>
+              </a:ext>
+            </a:extLst>
+          </p:cNvPr>
+          <p:cNvSpPr>
+            <a:spLocks noGrp="1"/>
+          </p:cNvSpPr>
+          <p:nvPr>
+            <p:ph type="body" idx="1"/>
+          </p:nvPr>
+        </p:nvSpPr>
+        <p:spPr/>
+        <p:txBody>
+          <a:bodyPr/>
+          <a:lstStyle/>
+          <a:p>
+            <a:endParaRPr lang="en-US"/>
+          </a:p>
+        </p:txBody>
+      </p:sp>
+    </p:spTree>
+    <p:extLst>
+      <p:ext uri="{BB962C8B-B14F-4D97-AF65-F5344CB8AC3E}">
+        <p14:creationId xmlns:p14="http://schemas.microsoft.com/office/powerpoint/2010/main" val="772502209"/>
+      </p:ext>
+    </p:extLst>
+  </p:cSld>
+  <p:clrMapOvr>
+    <a:masterClrMapping/>
+  </p:clrMapOvr>
+</p:sld>
+</file>
+
+<file path=ppt/slides/slide53.xml><?xml version="1.0" encoding="utf-8"?>
+<p:sld xmlns:a="http://schemas.openxmlformats.org/drawingml/2006/main" xmlns:r="http://schemas.openxmlformats.org/officeDocument/2006/relationships" xmlns:p="http://schemas.openxmlformats.org/presentationml/2006/main">
+  <p:cSld>
+    <p:spTree>
+      <p:nvGrpSpPr>
+        <p:cNvPr id="1" name=""/>
+        <p:cNvGrpSpPr/>
+        <p:nvPr/>
+      </p:nvGrpSpPr>
+      <p:grpSpPr>
+        <a:xfrm>
+          <a:off x="0" y="0"/>
+          <a:ext cx="0" cy="0"/>
+          <a:chOff x="0" y="0"/>
+          <a:chExt cx="0" cy="0"/>
+        </a:xfrm>
+      </p:grpSpPr>
+      <p:sp>
+        <p:nvSpPr>
           <p:cNvPr id="44033" name="Title 1">
             <a:extLst>
               <a:ext uri="{FF2B5EF4-FFF2-40B4-BE49-F238E27FC236}">
@@ -39809,7 +40513,7 @@
                 <a:latin typeface="Garamond" panose="02020404030301010803" pitchFamily="18" charset="0"/>
               </a:rPr>
               <a:pPr algn="l" eaLnBrk="1" hangingPunct="1"/>
-              <a:t>50</a:t>
+              <a:t>53</a:t>
             </a:fld>
             <a:endParaRPr lang="en-US" altLang="en-US" sz="1200">
               <a:latin typeface="Garamond" panose="02020404030301010803" pitchFamily="18" charset="0"/>
@@ -40873,7 +41577,7 @@
 </p:sld>
 </file>
 
-<file path=ppt/slides/slide51.xml><?xml version="1.0" encoding="utf-8"?>
+<file path=ppt/slides/slide54.xml><?xml version="1.0" encoding="utf-8"?>
 <p:sld xmlns:a="http://schemas.openxmlformats.org/drawingml/2006/main" xmlns:r="http://schemas.openxmlformats.org/officeDocument/2006/relationships" xmlns:p="http://schemas.openxmlformats.org/presentationml/2006/main">
   <p:cSld>
     <p:spTree>
@@ -41217,7 +41921,7 @@
                 <a:latin typeface="Garamond" charset="0"/>
               </a:rPr>
               <a:pPr eaLnBrk="1" hangingPunct="1"/>
-              <a:t>51</a:t>
+              <a:t>54</a:t>
             </a:fld>
             <a:endParaRPr lang="it-IT" altLang="x-none" sz="1200">
               <a:latin typeface="Garamond" charset="0"/>
